--- a/assets/presentations/pmday-2026/ai-changes-both-sides.pptx
+++ b/assets/presentations/pmday-2026/ai-changes-both-sides.pptx
@@ -2,26 +2,26 @@
 <file path=ppt/presentation.xml><?xml version="1.0" encoding="utf-8"?>
 <p:presentation xmlns:p="http://schemas.openxmlformats.org/presentationml/2006/main">
   <p:sldMasterIdLst>
-    <p:sldMasterId xmlns:r="http://schemas.openxmlformats.org/officeDocument/2006/relationships" id="2147483648" r:id="R13d3acdc081349a5"/>
+    <p:sldMasterId xmlns:r="http://schemas.openxmlformats.org/officeDocument/2006/relationships" id="2147483648" r:id="R496859c4ee9349fe"/>
   </p:sldMasterIdLst>
   <p:notesMasterIdLst>
-    <p:notesMasterId xmlns:r="http://schemas.openxmlformats.org/officeDocument/2006/relationships" r:id="Rc1db91f7aa154e54"/>
+    <p:notesMasterId xmlns:r="http://schemas.openxmlformats.org/officeDocument/2006/relationships" r:id="R4fd85a1b130b447e"/>
   </p:notesMasterIdLst>
   <p:sldIdLst>
-    <p:sldId xmlns:r="http://schemas.openxmlformats.org/officeDocument/2006/relationships" id="256" r:id="R512bc902ff3d42e8"/>
-    <p:sldId xmlns:r="http://schemas.openxmlformats.org/officeDocument/2006/relationships" id="257" r:id="R69cbabfd669d4e8d"/>
-    <p:sldId xmlns:r="http://schemas.openxmlformats.org/officeDocument/2006/relationships" id="258" r:id="R85730ce7dc8a481f"/>
-    <p:sldId xmlns:r="http://schemas.openxmlformats.org/officeDocument/2006/relationships" id="259" r:id="R3872f71e753d4641"/>
-    <p:sldId xmlns:r="http://schemas.openxmlformats.org/officeDocument/2006/relationships" id="260" r:id="R3f362c153c944439"/>
-    <p:sldId xmlns:r="http://schemas.openxmlformats.org/officeDocument/2006/relationships" id="261" r:id="R8a364162bdcb4f24"/>
-    <p:sldId xmlns:r="http://schemas.openxmlformats.org/officeDocument/2006/relationships" id="262" r:id="Rf9881ed047ed4d6f"/>
-    <p:sldId xmlns:r="http://schemas.openxmlformats.org/officeDocument/2006/relationships" id="263" r:id="R1481d37a4433414a"/>
-    <p:sldId xmlns:r="http://schemas.openxmlformats.org/officeDocument/2006/relationships" id="264" r:id="R924fbf86fa2c4114"/>
-    <p:sldId xmlns:r="http://schemas.openxmlformats.org/officeDocument/2006/relationships" id="265" r:id="Rc301f59229e74694"/>
-    <p:sldId xmlns:r="http://schemas.openxmlformats.org/officeDocument/2006/relationships" id="266" r:id="Rf7d3068af0ec4533"/>
-    <p:sldId xmlns:r="http://schemas.openxmlformats.org/officeDocument/2006/relationships" id="267" r:id="R31dda0ff5bdd42e4"/>
-    <p:sldId xmlns:r="http://schemas.openxmlformats.org/officeDocument/2006/relationships" id="268" r:id="R89caa9f6bf314158"/>
-    <p:sldId xmlns:r="http://schemas.openxmlformats.org/officeDocument/2006/relationships" id="269" r:id="R281c5dc58a7c446f"/>
+    <p:sldId xmlns:r="http://schemas.openxmlformats.org/officeDocument/2006/relationships" id="256" r:id="R923e49171e1f443a"/>
+    <p:sldId xmlns:r="http://schemas.openxmlformats.org/officeDocument/2006/relationships" id="257" r:id="R4f038306c50a40da"/>
+    <p:sldId xmlns:r="http://schemas.openxmlformats.org/officeDocument/2006/relationships" id="258" r:id="R8b6de5764a514144"/>
+    <p:sldId xmlns:r="http://schemas.openxmlformats.org/officeDocument/2006/relationships" id="259" r:id="Ra30b16ef4ad842e8"/>
+    <p:sldId xmlns:r="http://schemas.openxmlformats.org/officeDocument/2006/relationships" id="260" r:id="Re351c7f145bb4f75"/>
+    <p:sldId xmlns:r="http://schemas.openxmlformats.org/officeDocument/2006/relationships" id="261" r:id="R4c5ac09d4a644a05"/>
+    <p:sldId xmlns:r="http://schemas.openxmlformats.org/officeDocument/2006/relationships" id="262" r:id="Rd9b556b607184f73"/>
+    <p:sldId xmlns:r="http://schemas.openxmlformats.org/officeDocument/2006/relationships" id="263" r:id="Ra9ceabe160174484"/>
+    <p:sldId xmlns:r="http://schemas.openxmlformats.org/officeDocument/2006/relationships" id="264" r:id="R0a1efa79f01542d3"/>
+    <p:sldId xmlns:r="http://schemas.openxmlformats.org/officeDocument/2006/relationships" id="265" r:id="R10d6ead121e24b33"/>
+    <p:sldId xmlns:r="http://schemas.openxmlformats.org/officeDocument/2006/relationships" id="266" r:id="R9551b9a659c34ed3"/>
+    <p:sldId xmlns:r="http://schemas.openxmlformats.org/officeDocument/2006/relationships" id="267" r:id="Rdb09cdb168fc4cba"/>
+    <p:sldId xmlns:r="http://schemas.openxmlformats.org/officeDocument/2006/relationships" id="268" r:id="R5eb35372120f4cbe"/>
+    <p:sldId xmlns:r="http://schemas.openxmlformats.org/officeDocument/2006/relationships" id="269" r:id="R85906c0d26d54b48"/>
   </p:sldIdLst>
   <p:sldSz cx="12192000" cy="6858000"/>
   <p:notesSz cx="6858000" cy="9144000"/>
@@ -1568,7 +1568,7 @@
   </p:cSld>
   <p:clrMap bg1="lt1" tx1="dk1" bg2="lt2" tx2="dk2" accent1="accent1" accent2="accent2" accent3="accent3" accent4="accent4" accent5="accent5" accent6="accent6" hlink="hlink" folHlink="folHlink"/>
   <p:sldLayoutIdLst>
-    <p:sldLayoutId xmlns:r="http://schemas.openxmlformats.org/officeDocument/2006/relationships" id="2147483649" r:id="R6abffc809b6d4aa6"/>
+    <p:sldLayoutId xmlns:r="http://schemas.openxmlformats.org/officeDocument/2006/relationships" id="2147483649" r:id="Rf2544e11b0534def"/>
   </p:sldLayoutIdLst>
   <p:txStyles>
     <p:titleStyle>
@@ -2119,7 +2119,7 @@
           <p:cNvPr id="12" name="">
             <a:extLst xmlns:a="http://schemas.openxmlformats.org/drawingml/2006/main">
               <a:ext uri="{FF2B5EF4-FFF2-40B4-BE49-F238E27FC236}">
-                <a16:creationId xmlns:a16="http://schemas.microsoft.com/office/drawing/2014/main" id="{F2D1B201-1ADC-437D-B6A6-FAFB860A0BF1}"/>
+                <a16:creationId xmlns:a16="http://schemas.microsoft.com/office/drawing/2014/main" id="{FA839367-A863-4325-AB59-210851452075}"/>
               </a:ext>
             </a:extLst>
           </p:cNvPr>
@@ -2176,7 +2176,7 @@
           <p:cNvPr id="2" name="">
             <a:extLst xmlns:a="http://schemas.openxmlformats.org/drawingml/2006/main">
               <a:ext uri="{FF2B5EF4-FFF2-40B4-BE49-F238E27FC236}">
-                <a16:creationId xmlns:a16="http://schemas.microsoft.com/office/drawing/2014/main" id="{D6F640BA-16BD-433E-9C27-7252EDD3894F}"/>
+                <a16:creationId xmlns:a16="http://schemas.microsoft.com/office/drawing/2014/main" id="{1FD86F25-7CCF-4F05-993E-C30C13759B56}"/>
               </a:ext>
             </a:extLst>
           </p:cNvPr>
@@ -2256,7 +2256,7 @@
           <p:cNvPr id="3" name="">
             <a:extLst xmlns:a="http://schemas.openxmlformats.org/drawingml/2006/main">
               <a:ext uri="{FF2B5EF4-FFF2-40B4-BE49-F238E27FC236}">
-                <a16:creationId xmlns:a16="http://schemas.microsoft.com/office/drawing/2014/main" id="{E03ECDC9-3BD8-4554-BEE3-3A7B43931CC1}"/>
+                <a16:creationId xmlns:a16="http://schemas.microsoft.com/office/drawing/2014/main" id="{1E80951D-73B8-44D9-8374-FD8020810D16}"/>
               </a:ext>
             </a:extLst>
           </p:cNvPr>
@@ -2313,7 +2313,7 @@
           <p:cNvPr id="4" name="">
             <a:extLst xmlns:a="http://schemas.openxmlformats.org/drawingml/2006/main">
               <a:ext uri="{FF2B5EF4-FFF2-40B4-BE49-F238E27FC236}">
-                <a16:creationId xmlns:a16="http://schemas.microsoft.com/office/drawing/2014/main" id="{4A7E5DF4-1D1C-4B62-AFDD-D0E6AB570093}"/>
+                <a16:creationId xmlns:a16="http://schemas.microsoft.com/office/drawing/2014/main" id="{D9BEF086-59F9-4A54-B843-3703CCCD23D6}"/>
               </a:ext>
             </a:extLst>
           </p:cNvPr>
@@ -2370,7 +2370,7 @@
           <p:cNvPr id="5" name="">
             <a:extLst xmlns:a="http://schemas.openxmlformats.org/drawingml/2006/main">
               <a:ext uri="{FF2B5EF4-FFF2-40B4-BE49-F238E27FC236}">
-                <a16:creationId xmlns:a16="http://schemas.microsoft.com/office/drawing/2014/main" id="{00793873-32B4-4EFF-BD8D-8C0FB96279F4}"/>
+                <a16:creationId xmlns:a16="http://schemas.microsoft.com/office/drawing/2014/main" id="{E281890C-5A25-4548-9F91-FB7043ABE5D9}"/>
               </a:ext>
             </a:extLst>
           </p:cNvPr>
@@ -2400,7 +2400,7 @@
           <p:cNvPr id="6" name="">
             <a:extLst xmlns:a="http://schemas.openxmlformats.org/drawingml/2006/main">
               <a:ext uri="{FF2B5EF4-FFF2-40B4-BE49-F238E27FC236}">
-                <a16:creationId xmlns:a16="http://schemas.microsoft.com/office/drawing/2014/main" id="{E069C8FE-ABA0-47AC-8A49-6E49E55D5B74}"/>
+                <a16:creationId xmlns:a16="http://schemas.microsoft.com/office/drawing/2014/main" id="{5BA8FF3B-F9A1-4D77-9097-6533A6759C60}"/>
               </a:ext>
             </a:extLst>
           </p:cNvPr>
@@ -2457,7 +2457,7 @@
           <p:cNvPr id="7" name="">
             <a:extLst xmlns:a="http://schemas.openxmlformats.org/drawingml/2006/main">
               <a:ext uri="{FF2B5EF4-FFF2-40B4-BE49-F238E27FC236}">
-                <a16:creationId xmlns:a16="http://schemas.microsoft.com/office/drawing/2014/main" id="{9B2D9C08-F244-4D77-BD7B-F864371FCE61}"/>
+                <a16:creationId xmlns:a16="http://schemas.microsoft.com/office/drawing/2014/main" id="{D69A97FF-41F7-4475-A798-7C5FC0A754EE}"/>
               </a:ext>
             </a:extLst>
           </p:cNvPr>
@@ -2514,7 +2514,7 @@
           <p:cNvPr id="8" name="">
             <a:extLst xmlns:a="http://schemas.openxmlformats.org/drawingml/2006/main">
               <a:ext uri="{FF2B5EF4-FFF2-40B4-BE49-F238E27FC236}">
-                <a16:creationId xmlns:a16="http://schemas.microsoft.com/office/drawing/2014/main" id="{8AB0D5C8-4486-444E-B47D-A7790F021F28}"/>
+                <a16:creationId xmlns:a16="http://schemas.microsoft.com/office/drawing/2014/main" id="{7B46CDF5-DFE3-476A-97D5-2E485F3085CF}"/>
               </a:ext>
             </a:extLst>
           </p:cNvPr>
@@ -2544,7 +2544,7 @@
           <p:cNvPr id="9" name="">
             <a:extLst xmlns:a="http://schemas.openxmlformats.org/drawingml/2006/main">
               <a:ext uri="{FF2B5EF4-FFF2-40B4-BE49-F238E27FC236}">
-                <a16:creationId xmlns:a16="http://schemas.microsoft.com/office/drawing/2014/main" id="{F83B51C3-887C-4FFA-97D6-3DEDB47020EE}"/>
+                <a16:creationId xmlns:a16="http://schemas.microsoft.com/office/drawing/2014/main" id="{D262E0B4-D6DE-4F98-8730-ABA331309AC3}"/>
               </a:ext>
             </a:extLst>
           </p:cNvPr>
@@ -2601,7 +2601,7 @@
           <p:cNvPr id="10" name="">
             <a:extLst xmlns:a="http://schemas.openxmlformats.org/drawingml/2006/main">
               <a:ext uri="{FF2B5EF4-FFF2-40B4-BE49-F238E27FC236}">
-                <a16:creationId xmlns:a16="http://schemas.microsoft.com/office/drawing/2014/main" id="{5D3B0FC3-E4ED-4C50-9ABF-95857E0EBF94}"/>
+                <a16:creationId xmlns:a16="http://schemas.microsoft.com/office/drawing/2014/main" id="{267A3BDC-2D1C-4160-9E3E-552EF6EF7141}"/>
               </a:ext>
             </a:extLst>
           </p:cNvPr>
@@ -2658,7 +2658,7 @@
           <p:cNvPr id="11" name="">
             <a:extLst xmlns:a="http://schemas.openxmlformats.org/drawingml/2006/main">
               <a:ext uri="{FF2B5EF4-FFF2-40B4-BE49-F238E27FC236}">
-                <a16:creationId xmlns:a16="http://schemas.microsoft.com/office/drawing/2014/main" id="{97E2EA93-706A-4F8B-ADAC-3FC0B604F204}"/>
+                <a16:creationId xmlns:a16="http://schemas.microsoft.com/office/drawing/2014/main" id="{0C2290EE-208B-482A-A4A1-EB2CD2831FFB}"/>
               </a:ext>
             </a:extLst>
           </p:cNvPr>
@@ -2713,7 +2713,7 @@
     </p:spTree>
     <p:extLst>
       <p:ext uri="{BB962C8B-B14F-4D97-AF65-F5344CB8AC3E}">
-        <p14:creationId xmlns:p14="http://schemas.microsoft.com/office/powerpoint/2010/main" val="1346493126"/>
+        <p14:creationId xmlns:p14="http://schemas.microsoft.com/office/powerpoint/2010/main" val="954493836"/>
       </p:ext>
     </p:extLst>
   </p:cSld>
@@ -2744,7 +2744,7 @@
           <p:cNvPr id="25" name="">
             <a:extLst xmlns:a="http://schemas.openxmlformats.org/drawingml/2006/main">
               <a:ext uri="{FF2B5EF4-FFF2-40B4-BE49-F238E27FC236}">
-                <a16:creationId xmlns:a16="http://schemas.microsoft.com/office/drawing/2014/main" id="{4598A0A5-B11C-44A6-A40C-4D34B72D6851}"/>
+                <a16:creationId xmlns:a16="http://schemas.microsoft.com/office/drawing/2014/main" id="{EDF28E19-5BBC-48ED-9D7B-5944CA686DD1}"/>
               </a:ext>
             </a:extLst>
           </p:cNvPr>
@@ -2801,7 +2801,7 @@
           <p:cNvPr id="2" name="">
             <a:extLst xmlns:a="http://schemas.openxmlformats.org/drawingml/2006/main">
               <a:ext uri="{FF2B5EF4-FFF2-40B4-BE49-F238E27FC236}">
-                <a16:creationId xmlns:a16="http://schemas.microsoft.com/office/drawing/2014/main" id="{04448320-D88D-4E43-A99B-7A57B689C21E}"/>
+                <a16:creationId xmlns:a16="http://schemas.microsoft.com/office/drawing/2014/main" id="{02C80F99-6B7B-4F6E-BEDE-8CCE082CC200}"/>
               </a:ext>
             </a:extLst>
           </p:cNvPr>
@@ -2832,7 +2832,7 @@
           <p:cNvPr id="3" name="">
             <a:extLst xmlns:a="http://schemas.openxmlformats.org/drawingml/2006/main">
               <a:ext uri="{FF2B5EF4-FFF2-40B4-BE49-F238E27FC236}">
-                <a16:creationId xmlns:a16="http://schemas.microsoft.com/office/drawing/2014/main" id="{2A1441BF-1ACA-4F7A-B5CB-9CDBAE37E915}"/>
+                <a16:creationId xmlns:a16="http://schemas.microsoft.com/office/drawing/2014/main" id="{B14AC92B-6101-433F-A4FD-3B53C1403C64}"/>
               </a:ext>
             </a:extLst>
           </p:cNvPr>
@@ -2889,7 +2889,7 @@
           <p:cNvPr id="4" name="">
             <a:extLst xmlns:a="http://schemas.openxmlformats.org/drawingml/2006/main">
               <a:ext uri="{FF2B5EF4-FFF2-40B4-BE49-F238E27FC236}">
-                <a16:creationId xmlns:a16="http://schemas.microsoft.com/office/drawing/2014/main" id="{1F67CF40-EB60-4993-9253-FFCFEE6BD996}"/>
+                <a16:creationId xmlns:a16="http://schemas.microsoft.com/office/drawing/2014/main" id="{8261A1C1-EBEC-493A-B11E-BF6A1425B1FF}"/>
               </a:ext>
             </a:extLst>
           </p:cNvPr>
@@ -2946,7 +2946,7 @@
           <p:cNvPr id="5" name="">
             <a:extLst xmlns:a="http://schemas.openxmlformats.org/drawingml/2006/main">
               <a:ext uri="{FF2B5EF4-FFF2-40B4-BE49-F238E27FC236}">
-                <a16:creationId xmlns:a16="http://schemas.microsoft.com/office/drawing/2014/main" id="{31AED75B-AB6C-446E-94AC-C8CE3A3E8991}"/>
+                <a16:creationId xmlns:a16="http://schemas.microsoft.com/office/drawing/2014/main" id="{1403D3E1-107B-46F3-8158-FCD659265FCF}"/>
               </a:ext>
             </a:extLst>
           </p:cNvPr>
@@ -2979,7 +2979,7 @@
           <p:cNvPr id="6" name="">
             <a:extLst xmlns:a="http://schemas.openxmlformats.org/drawingml/2006/main">
               <a:ext uri="{FF2B5EF4-FFF2-40B4-BE49-F238E27FC236}">
-                <a16:creationId xmlns:a16="http://schemas.microsoft.com/office/drawing/2014/main" id="{12BE143F-C936-4C82-95DA-C63211B80EBA}"/>
+                <a16:creationId xmlns:a16="http://schemas.microsoft.com/office/drawing/2014/main" id="{7DB485AA-8735-4E68-8DBD-9E9178474115}"/>
               </a:ext>
             </a:extLst>
           </p:cNvPr>
@@ -3036,7 +3036,7 @@
           <p:cNvPr id="7" name="">
             <a:extLst xmlns:a="http://schemas.openxmlformats.org/drawingml/2006/main">
               <a:ext uri="{FF2B5EF4-FFF2-40B4-BE49-F238E27FC236}">
-                <a16:creationId xmlns:a16="http://schemas.microsoft.com/office/drawing/2014/main" id="{C8AD6278-16BC-4341-BC26-75BA0FDF29C4}"/>
+                <a16:creationId xmlns:a16="http://schemas.microsoft.com/office/drawing/2014/main" id="{2BC2B5CA-9C52-4193-99A4-CEFAF7C48E42}"/>
               </a:ext>
             </a:extLst>
           </p:cNvPr>
@@ -3069,7 +3069,7 @@
           <p:cNvPr id="8" name="">
             <a:extLst xmlns:a="http://schemas.openxmlformats.org/drawingml/2006/main">
               <a:ext uri="{FF2B5EF4-FFF2-40B4-BE49-F238E27FC236}">
-                <a16:creationId xmlns:a16="http://schemas.microsoft.com/office/drawing/2014/main" id="{E6EA7050-0B36-46F9-9F0C-38CE02EE3026}"/>
+                <a16:creationId xmlns:a16="http://schemas.microsoft.com/office/drawing/2014/main" id="{FCC90027-FBEB-4C21-B6D3-7C83A067C919}"/>
               </a:ext>
             </a:extLst>
           </p:cNvPr>
@@ -3126,7 +3126,7 @@
           <p:cNvPr id="9" name="">
             <a:extLst xmlns:a="http://schemas.openxmlformats.org/drawingml/2006/main">
               <a:ext uri="{FF2B5EF4-FFF2-40B4-BE49-F238E27FC236}">
-                <a16:creationId xmlns:a16="http://schemas.microsoft.com/office/drawing/2014/main" id="{FDA341BD-224C-44EF-BDF3-50F1573B358F}"/>
+                <a16:creationId xmlns:a16="http://schemas.microsoft.com/office/drawing/2014/main" id="{EC5AA601-24C8-4257-828B-510C5AC9DA74}"/>
               </a:ext>
             </a:extLst>
           </p:cNvPr>
@@ -3159,7 +3159,7 @@
           <p:cNvPr id="10" name="">
             <a:extLst xmlns:a="http://schemas.openxmlformats.org/drawingml/2006/main">
               <a:ext uri="{FF2B5EF4-FFF2-40B4-BE49-F238E27FC236}">
-                <a16:creationId xmlns:a16="http://schemas.microsoft.com/office/drawing/2014/main" id="{B21C555D-ABDE-44E5-ACB6-CD5DCC3EA286}"/>
+                <a16:creationId xmlns:a16="http://schemas.microsoft.com/office/drawing/2014/main" id="{CE956828-1370-4194-AC6C-A331FA1BCEF2}"/>
               </a:ext>
             </a:extLst>
           </p:cNvPr>
@@ -3216,7 +3216,7 @@
           <p:cNvPr id="11" name="">
             <a:extLst xmlns:a="http://schemas.openxmlformats.org/drawingml/2006/main">
               <a:ext uri="{FF2B5EF4-FFF2-40B4-BE49-F238E27FC236}">
-                <a16:creationId xmlns:a16="http://schemas.microsoft.com/office/drawing/2014/main" id="{BB74F944-AEA2-484E-B82C-76C208FC368C}"/>
+                <a16:creationId xmlns:a16="http://schemas.microsoft.com/office/drawing/2014/main" id="{0F681FE4-60B5-4669-A9FD-F1A1865E7D99}"/>
               </a:ext>
             </a:extLst>
           </p:cNvPr>
@@ -3249,7 +3249,7 @@
           <p:cNvPr id="12" name="">
             <a:extLst xmlns:a="http://schemas.openxmlformats.org/drawingml/2006/main">
               <a:ext uri="{FF2B5EF4-FFF2-40B4-BE49-F238E27FC236}">
-                <a16:creationId xmlns:a16="http://schemas.microsoft.com/office/drawing/2014/main" id="{7553B584-86E0-44CE-88D0-59F670A4F7DB}"/>
+                <a16:creationId xmlns:a16="http://schemas.microsoft.com/office/drawing/2014/main" id="{021AADA4-24CB-4BDB-A3C4-B89EB45589B7}"/>
               </a:ext>
             </a:extLst>
           </p:cNvPr>
@@ -3306,7 +3306,7 @@
           <p:cNvPr id="13" name="">
             <a:extLst xmlns:a="http://schemas.openxmlformats.org/drawingml/2006/main">
               <a:ext uri="{FF2B5EF4-FFF2-40B4-BE49-F238E27FC236}">
-                <a16:creationId xmlns:a16="http://schemas.microsoft.com/office/drawing/2014/main" id="{73BEBDE0-98E5-44E9-B16F-16BFC4514D51}"/>
+                <a16:creationId xmlns:a16="http://schemas.microsoft.com/office/drawing/2014/main" id="{5DE25C60-5243-4D9A-BDDF-41CBE64AD695}"/>
               </a:ext>
             </a:extLst>
           </p:cNvPr>
@@ -3339,7 +3339,7 @@
           <p:cNvPr id="14" name="">
             <a:extLst xmlns:a="http://schemas.openxmlformats.org/drawingml/2006/main">
               <a:ext uri="{FF2B5EF4-FFF2-40B4-BE49-F238E27FC236}">
-                <a16:creationId xmlns:a16="http://schemas.microsoft.com/office/drawing/2014/main" id="{1B21F93E-19ED-4845-99A5-F608D865A0A7}"/>
+                <a16:creationId xmlns:a16="http://schemas.microsoft.com/office/drawing/2014/main" id="{101137C5-31C5-40A4-986E-18CC799601CD}"/>
               </a:ext>
             </a:extLst>
           </p:cNvPr>
@@ -3500,7 +3500,7 @@
           <p:cNvPr id="19" name="">
             <a:extLst xmlns:a="http://schemas.openxmlformats.org/drawingml/2006/main">
               <a:ext uri="{FF2B5EF4-FFF2-40B4-BE49-F238E27FC236}">
-                <a16:creationId xmlns:a16="http://schemas.microsoft.com/office/drawing/2014/main" id="{1B06C00E-5432-4F36-8D07-918363ACA54B}"/>
+                <a16:creationId xmlns:a16="http://schemas.microsoft.com/office/drawing/2014/main" id="{D3937689-7EC9-4BA5-A44D-C581D06A2142}"/>
               </a:ext>
             </a:extLst>
           </p:cNvPr>
@@ -3557,7 +3557,7 @@
           <p:cNvPr id="20" name="">
             <a:extLst xmlns:a="http://schemas.openxmlformats.org/drawingml/2006/main">
               <a:ext uri="{FF2B5EF4-FFF2-40B4-BE49-F238E27FC236}">
-                <a16:creationId xmlns:a16="http://schemas.microsoft.com/office/drawing/2014/main" id="{C7817D22-4286-46FA-B5C2-25FD595D5C9B}"/>
+                <a16:creationId xmlns:a16="http://schemas.microsoft.com/office/drawing/2014/main" id="{46E5DCEF-8AC4-4620-916C-DD6B48B460B2}"/>
               </a:ext>
             </a:extLst>
           </p:cNvPr>
@@ -3614,7 +3614,7 @@
           <p:cNvPr id="21" name="">
             <a:extLst xmlns:a="http://schemas.openxmlformats.org/drawingml/2006/main">
               <a:ext uri="{FF2B5EF4-FFF2-40B4-BE49-F238E27FC236}">
-                <a16:creationId xmlns:a16="http://schemas.microsoft.com/office/drawing/2014/main" id="{26E93C63-04B1-49A5-8D32-D9AF1B37A22B}"/>
+                <a16:creationId xmlns:a16="http://schemas.microsoft.com/office/drawing/2014/main" id="{EFD802AB-01CA-4AF3-8C0B-3AAA378A2661}"/>
               </a:ext>
             </a:extLst>
           </p:cNvPr>
@@ -3671,7 +3671,7 @@
           <p:cNvPr id="22" name="">
             <a:extLst xmlns:a="http://schemas.openxmlformats.org/drawingml/2006/main">
               <a:ext uri="{FF2B5EF4-FFF2-40B4-BE49-F238E27FC236}">
-                <a16:creationId xmlns:a16="http://schemas.microsoft.com/office/drawing/2014/main" id="{80C47845-8058-4702-8C08-D913D80180B6}"/>
+                <a16:creationId xmlns:a16="http://schemas.microsoft.com/office/drawing/2014/main" id="{8A2A8DF9-7E7C-4741-BDAC-0D7FA65D04F2}"/>
               </a:ext>
             </a:extLst>
           </p:cNvPr>
@@ -3728,7 +3728,7 @@
           <p:cNvPr id="23" name="">
             <a:extLst xmlns:a="http://schemas.openxmlformats.org/drawingml/2006/main">
               <a:ext uri="{FF2B5EF4-FFF2-40B4-BE49-F238E27FC236}">
-                <a16:creationId xmlns:a16="http://schemas.microsoft.com/office/drawing/2014/main" id="{A1899528-C814-4F7C-8993-6B5947F140E6}"/>
+                <a16:creationId xmlns:a16="http://schemas.microsoft.com/office/drawing/2014/main" id="{452315B9-36DE-47E5-9693-62CD1DFE0EB9}"/>
               </a:ext>
             </a:extLst>
           </p:cNvPr>
@@ -3759,7 +3759,7 @@
           <p:cNvPr id="24" name="">
             <a:extLst xmlns:a="http://schemas.openxmlformats.org/drawingml/2006/main">
               <a:ext uri="{FF2B5EF4-FFF2-40B4-BE49-F238E27FC236}">
-                <a16:creationId xmlns:a16="http://schemas.microsoft.com/office/drawing/2014/main" id="{AEC3899C-565F-4806-B5D4-0CEF51D24D74}"/>
+                <a16:creationId xmlns:a16="http://schemas.microsoft.com/office/drawing/2014/main" id="{88F4B0C4-6643-41EA-9AF0-9B8746A89E2B}"/>
               </a:ext>
             </a:extLst>
           </p:cNvPr>
@@ -3814,7 +3814,7 @@
     </p:spTree>
     <p:extLst>
       <p:ext uri="{BB962C8B-B14F-4D97-AF65-F5344CB8AC3E}">
-        <p14:creationId xmlns:p14="http://schemas.microsoft.com/office/powerpoint/2010/main" val="680930229"/>
+        <p14:creationId xmlns:p14="http://schemas.microsoft.com/office/powerpoint/2010/main" val="1177299668"/>
       </p:ext>
     </p:extLst>
   </p:cSld>
@@ -3845,7 +3845,7 @@
           <p:cNvPr id="8" name="">
             <a:extLst xmlns:a="http://schemas.openxmlformats.org/drawingml/2006/main">
               <a:ext uri="{FF2B5EF4-FFF2-40B4-BE49-F238E27FC236}">
-                <a16:creationId xmlns:a16="http://schemas.microsoft.com/office/drawing/2014/main" id="{003A2F0A-65AC-4690-AC30-E262BD38A1B4}"/>
+                <a16:creationId xmlns:a16="http://schemas.microsoft.com/office/drawing/2014/main" id="{0A207C99-91D7-44E5-B4CB-96CB5F76598F}"/>
               </a:ext>
             </a:extLst>
           </p:cNvPr>
@@ -3902,7 +3902,7 @@
           <p:cNvPr id="2" name="">
             <a:extLst xmlns:a="http://schemas.openxmlformats.org/drawingml/2006/main">
               <a:ext uri="{FF2B5EF4-FFF2-40B4-BE49-F238E27FC236}">
-                <a16:creationId xmlns:a16="http://schemas.microsoft.com/office/drawing/2014/main" id="{7B4B6390-CFA8-4763-B8C0-331E72644D6F}"/>
+                <a16:creationId xmlns:a16="http://schemas.microsoft.com/office/drawing/2014/main" id="{6C0A7241-BC08-4410-82AC-EE977A821887}"/>
               </a:ext>
             </a:extLst>
           </p:cNvPr>
@@ -3933,7 +3933,7 @@
           <p:cNvPr id="3" name="">
             <a:extLst xmlns:a="http://schemas.openxmlformats.org/drawingml/2006/main">
               <a:ext uri="{FF2B5EF4-FFF2-40B4-BE49-F238E27FC236}">
-                <a16:creationId xmlns:a16="http://schemas.microsoft.com/office/drawing/2014/main" id="{CBEC3859-004C-4164-A145-BD7435D466EC}"/>
+                <a16:creationId xmlns:a16="http://schemas.microsoft.com/office/drawing/2014/main" id="{692BB619-4C0E-43DA-8DCD-BDA1D4633B85}"/>
               </a:ext>
             </a:extLst>
           </p:cNvPr>
@@ -4333,7 +4333,7 @@
           <p:cNvPr id="5" name="">
             <a:extLst xmlns:a="http://schemas.openxmlformats.org/drawingml/2006/main">
               <a:ext uri="{FF2B5EF4-FFF2-40B4-BE49-F238E27FC236}">
-                <a16:creationId xmlns:a16="http://schemas.microsoft.com/office/drawing/2014/main" id="{5AE62637-B381-42B9-B062-211638C25795}"/>
+                <a16:creationId xmlns:a16="http://schemas.microsoft.com/office/drawing/2014/main" id="{958610E5-AC90-4674-8C81-618B9CB7C18C}"/>
               </a:ext>
             </a:extLst>
           </p:cNvPr>
@@ -4390,7 +4390,7 @@
           <p:cNvPr id="6" name="">
             <a:extLst xmlns:a="http://schemas.openxmlformats.org/drawingml/2006/main">
               <a:ext uri="{FF2B5EF4-FFF2-40B4-BE49-F238E27FC236}">
-                <a16:creationId xmlns:a16="http://schemas.microsoft.com/office/drawing/2014/main" id="{D22A76CB-3D9B-47FF-9071-477273A86668}"/>
+                <a16:creationId xmlns:a16="http://schemas.microsoft.com/office/drawing/2014/main" id="{D7EFFEBB-E0BC-4E14-8A10-AA0D432F5A9C}"/>
               </a:ext>
             </a:extLst>
           </p:cNvPr>
@@ -4421,7 +4421,7 @@
           <p:cNvPr id="7" name="">
             <a:extLst xmlns:a="http://schemas.openxmlformats.org/drawingml/2006/main">
               <a:ext uri="{FF2B5EF4-FFF2-40B4-BE49-F238E27FC236}">
-                <a16:creationId xmlns:a16="http://schemas.microsoft.com/office/drawing/2014/main" id="{3C0B7077-2A65-47CD-97E7-5DF8A78DFEA1}"/>
+                <a16:creationId xmlns:a16="http://schemas.microsoft.com/office/drawing/2014/main" id="{08FF74D7-CBC1-47B8-89AE-054FF0343799}"/>
               </a:ext>
             </a:extLst>
           </p:cNvPr>
@@ -4476,7 +4476,7 @@
     </p:spTree>
     <p:extLst>
       <p:ext uri="{BB962C8B-B14F-4D97-AF65-F5344CB8AC3E}">
-        <p14:creationId xmlns:p14="http://schemas.microsoft.com/office/powerpoint/2010/main" val="1912073586"/>
+        <p14:creationId xmlns:p14="http://schemas.microsoft.com/office/powerpoint/2010/main" val="1152151155"/>
       </p:ext>
     </p:extLst>
   </p:cSld>
@@ -4507,7 +4507,7 @@
           <p:cNvPr id="32" name="">
             <a:extLst xmlns:a="http://schemas.openxmlformats.org/drawingml/2006/main">
               <a:ext uri="{FF2B5EF4-FFF2-40B4-BE49-F238E27FC236}">
-                <a16:creationId xmlns:a16="http://schemas.microsoft.com/office/drawing/2014/main" id="{2366DA4D-0A65-4601-BCC0-1C08792D7AFB}"/>
+                <a16:creationId xmlns:a16="http://schemas.microsoft.com/office/drawing/2014/main" id="{378B86C4-B917-4814-80A1-63F646AC3E93}"/>
               </a:ext>
             </a:extLst>
           </p:cNvPr>
@@ -4564,7 +4564,7 @@
           <p:cNvPr id="2" name="">
             <a:extLst xmlns:a="http://schemas.openxmlformats.org/drawingml/2006/main">
               <a:ext uri="{FF2B5EF4-FFF2-40B4-BE49-F238E27FC236}">
-                <a16:creationId xmlns:a16="http://schemas.microsoft.com/office/drawing/2014/main" id="{9F6DCCF3-9CAC-41E1-9E8A-E6D8041B2EDC}"/>
+                <a16:creationId xmlns:a16="http://schemas.microsoft.com/office/drawing/2014/main" id="{49241266-98A8-4E68-9787-D48CB9C9A4BD}"/>
               </a:ext>
             </a:extLst>
           </p:cNvPr>
@@ -4595,7 +4595,7 @@
           <p:cNvPr id="3" name="">
             <a:extLst xmlns:a="http://schemas.openxmlformats.org/drawingml/2006/main">
               <a:ext uri="{FF2B5EF4-FFF2-40B4-BE49-F238E27FC236}">
-                <a16:creationId xmlns:a16="http://schemas.microsoft.com/office/drawing/2014/main" id="{496206CC-8029-4C9B-A39A-52D9777F8027}"/>
+                <a16:creationId xmlns:a16="http://schemas.microsoft.com/office/drawing/2014/main" id="{88C7CF71-BEA6-4905-A08A-63A0D341F519}"/>
               </a:ext>
             </a:extLst>
           </p:cNvPr>
@@ -4652,7 +4652,7 @@
           <p:cNvPr id="4" name="">
             <a:extLst xmlns:a="http://schemas.openxmlformats.org/drawingml/2006/main">
               <a:ext uri="{FF2B5EF4-FFF2-40B4-BE49-F238E27FC236}">
-                <a16:creationId xmlns:a16="http://schemas.microsoft.com/office/drawing/2014/main" id="{C068A27C-6AC5-4472-907D-F973F6D52B0D}"/>
+                <a16:creationId xmlns:a16="http://schemas.microsoft.com/office/drawing/2014/main" id="{4D3905FE-5713-4E8B-8CD6-5AE56239F2F2}"/>
               </a:ext>
             </a:extLst>
           </p:cNvPr>
@@ -4685,7 +4685,7 @@
           <p:cNvPr id="5" name="">
             <a:extLst xmlns:a="http://schemas.openxmlformats.org/drawingml/2006/main">
               <a:ext uri="{FF2B5EF4-FFF2-40B4-BE49-F238E27FC236}">
-                <a16:creationId xmlns:a16="http://schemas.microsoft.com/office/drawing/2014/main" id="{178042C9-FC1E-499D-8BDC-EA1BE62640D4}"/>
+                <a16:creationId xmlns:a16="http://schemas.microsoft.com/office/drawing/2014/main" id="{6A63C8AE-D190-42A3-A808-0F3933F00FCC}"/>
               </a:ext>
             </a:extLst>
           </p:cNvPr>
@@ -4742,7 +4742,7 @@
           <p:cNvPr id="6" name="">
             <a:extLst xmlns:a="http://schemas.openxmlformats.org/drawingml/2006/main">
               <a:ext uri="{FF2B5EF4-FFF2-40B4-BE49-F238E27FC236}">
-                <a16:creationId xmlns:a16="http://schemas.microsoft.com/office/drawing/2014/main" id="{89494FED-BA86-4F99-9FB7-895F7B6B952B}"/>
+                <a16:creationId xmlns:a16="http://schemas.microsoft.com/office/drawing/2014/main" id="{84F5D3A7-92C9-47AB-8FEF-9358AFAF55F2}"/>
               </a:ext>
             </a:extLst>
           </p:cNvPr>
@@ -4775,7 +4775,7 @@
           <p:cNvPr id="7" name="">
             <a:extLst xmlns:a="http://schemas.openxmlformats.org/drawingml/2006/main">
               <a:ext uri="{FF2B5EF4-FFF2-40B4-BE49-F238E27FC236}">
-                <a16:creationId xmlns:a16="http://schemas.microsoft.com/office/drawing/2014/main" id="{6890FBDD-D559-4302-8B05-6D31B45C3B1F}"/>
+                <a16:creationId xmlns:a16="http://schemas.microsoft.com/office/drawing/2014/main" id="{45307267-E16C-448B-BA92-A923E175EC13}"/>
               </a:ext>
             </a:extLst>
           </p:cNvPr>
@@ -4832,7 +4832,7 @@
           <p:cNvPr id="8" name="">
             <a:extLst xmlns:a="http://schemas.openxmlformats.org/drawingml/2006/main">
               <a:ext uri="{FF2B5EF4-FFF2-40B4-BE49-F238E27FC236}">
-                <a16:creationId xmlns:a16="http://schemas.microsoft.com/office/drawing/2014/main" id="{B7984546-C221-49C1-A906-8203C2428D77}"/>
+                <a16:creationId xmlns:a16="http://schemas.microsoft.com/office/drawing/2014/main" id="{2DAFC8A9-0D88-4A0A-AA2B-9CFA7651FE4B}"/>
               </a:ext>
             </a:extLst>
           </p:cNvPr>
@@ -4865,7 +4865,7 @@
           <p:cNvPr id="9" name="">
             <a:extLst xmlns:a="http://schemas.openxmlformats.org/drawingml/2006/main">
               <a:ext uri="{FF2B5EF4-FFF2-40B4-BE49-F238E27FC236}">
-                <a16:creationId xmlns:a16="http://schemas.microsoft.com/office/drawing/2014/main" id="{A49F9DFA-95C6-4B17-96BD-08E3C46497A9}"/>
+                <a16:creationId xmlns:a16="http://schemas.microsoft.com/office/drawing/2014/main" id="{021C4F41-C31D-41BE-9A46-C6F57419623E}"/>
               </a:ext>
             </a:extLst>
           </p:cNvPr>
@@ -4922,7 +4922,7 @@
           <p:cNvPr id="10" name="">
             <a:extLst xmlns:a="http://schemas.openxmlformats.org/drawingml/2006/main">
               <a:ext uri="{FF2B5EF4-FFF2-40B4-BE49-F238E27FC236}">
-                <a16:creationId xmlns:a16="http://schemas.microsoft.com/office/drawing/2014/main" id="{978D3C10-06DA-4288-A058-A0F692EDDE0C}"/>
+                <a16:creationId xmlns:a16="http://schemas.microsoft.com/office/drawing/2014/main" id="{A6285A73-1F7C-436C-B1C4-36DA0BCECD3A}"/>
               </a:ext>
             </a:extLst>
           </p:cNvPr>
@@ -4955,7 +4955,7 @@
           <p:cNvPr id="11" name="">
             <a:extLst xmlns:a="http://schemas.openxmlformats.org/drawingml/2006/main">
               <a:ext uri="{FF2B5EF4-FFF2-40B4-BE49-F238E27FC236}">
-                <a16:creationId xmlns:a16="http://schemas.microsoft.com/office/drawing/2014/main" id="{4CAAC1D8-3E1C-4398-AE80-C81C0748D334}"/>
+                <a16:creationId xmlns:a16="http://schemas.microsoft.com/office/drawing/2014/main" id="{B85D8584-B35A-4768-BCBA-AAD9934D9F5D}"/>
               </a:ext>
             </a:extLst>
           </p:cNvPr>
@@ -5012,7 +5012,7 @@
           <p:cNvPr id="12" name="">
             <a:extLst xmlns:a="http://schemas.openxmlformats.org/drawingml/2006/main">
               <a:ext uri="{FF2B5EF4-FFF2-40B4-BE49-F238E27FC236}">
-                <a16:creationId xmlns:a16="http://schemas.microsoft.com/office/drawing/2014/main" id="{7D6AFE3E-2494-4619-ACDB-5357DCBD6A8D}"/>
+                <a16:creationId xmlns:a16="http://schemas.microsoft.com/office/drawing/2014/main" id="{124B8EC7-17EE-413D-BF28-E44795E697C0}"/>
               </a:ext>
             </a:extLst>
           </p:cNvPr>
@@ -5045,7 +5045,7 @@
           <p:cNvPr id="13" name="">
             <a:extLst xmlns:a="http://schemas.openxmlformats.org/drawingml/2006/main">
               <a:ext uri="{FF2B5EF4-FFF2-40B4-BE49-F238E27FC236}">
-                <a16:creationId xmlns:a16="http://schemas.microsoft.com/office/drawing/2014/main" id="{2F9B878D-FB87-4B83-8F4F-F57B7C5D1092}"/>
+                <a16:creationId xmlns:a16="http://schemas.microsoft.com/office/drawing/2014/main" id="{5017CBE9-DF80-4D44-AFBE-F70AB313C33D}"/>
               </a:ext>
             </a:extLst>
           </p:cNvPr>
@@ -5206,7 +5206,7 @@
           <p:cNvPr id="18" name="">
             <a:extLst xmlns:a="http://schemas.openxmlformats.org/drawingml/2006/main">
               <a:ext uri="{FF2B5EF4-FFF2-40B4-BE49-F238E27FC236}">
-                <a16:creationId xmlns:a16="http://schemas.microsoft.com/office/drawing/2014/main" id="{7A9E7BFE-776A-4D96-858F-B8A4AF8675DB}"/>
+                <a16:creationId xmlns:a16="http://schemas.microsoft.com/office/drawing/2014/main" id="{4C6F3D6C-BE55-4358-AF2B-EAFF5881AAA2}"/>
               </a:ext>
             </a:extLst>
           </p:cNvPr>
@@ -5239,7 +5239,7 @@
           <p:cNvPr id="19" name="">
             <a:extLst xmlns:a="http://schemas.openxmlformats.org/drawingml/2006/main">
               <a:ext uri="{FF2B5EF4-FFF2-40B4-BE49-F238E27FC236}">
-                <a16:creationId xmlns:a16="http://schemas.microsoft.com/office/drawing/2014/main" id="{66023EFD-DDBE-40A5-89F2-63161BE287AA}"/>
+                <a16:creationId xmlns:a16="http://schemas.microsoft.com/office/drawing/2014/main" id="{1FAC484C-F247-46D0-A68D-DBD5F8BB0F85}"/>
               </a:ext>
             </a:extLst>
           </p:cNvPr>
@@ -5296,7 +5296,7 @@
           <p:cNvPr id="20" name="">
             <a:extLst xmlns:a="http://schemas.openxmlformats.org/drawingml/2006/main">
               <a:ext uri="{FF2B5EF4-FFF2-40B4-BE49-F238E27FC236}">
-                <a16:creationId xmlns:a16="http://schemas.microsoft.com/office/drawing/2014/main" id="{7F31F24C-2B55-4387-B9E9-47034078E56A}"/>
+                <a16:creationId xmlns:a16="http://schemas.microsoft.com/office/drawing/2014/main" id="{8F7CDE89-4BCB-4169-87AD-833F4C22A620}"/>
               </a:ext>
             </a:extLst>
           </p:cNvPr>
@@ -5329,7 +5329,7 @@
           <p:cNvPr id="21" name="">
             <a:extLst xmlns:a="http://schemas.openxmlformats.org/drawingml/2006/main">
               <a:ext uri="{FF2B5EF4-FFF2-40B4-BE49-F238E27FC236}">
-                <a16:creationId xmlns:a16="http://schemas.microsoft.com/office/drawing/2014/main" id="{C03FAE3D-CD1B-46C0-933F-59769CE04852}"/>
+                <a16:creationId xmlns:a16="http://schemas.microsoft.com/office/drawing/2014/main" id="{F0E52DF2-3231-4AC8-9224-C6BC9B27B6CD}"/>
               </a:ext>
             </a:extLst>
           </p:cNvPr>
@@ -5386,7 +5386,7 @@
           <p:cNvPr id="22" name="">
             <a:extLst xmlns:a="http://schemas.openxmlformats.org/drawingml/2006/main">
               <a:ext uri="{FF2B5EF4-FFF2-40B4-BE49-F238E27FC236}">
-                <a16:creationId xmlns:a16="http://schemas.microsoft.com/office/drawing/2014/main" id="{8C089089-B523-4F47-957E-A6ADCE5EBD97}"/>
+                <a16:creationId xmlns:a16="http://schemas.microsoft.com/office/drawing/2014/main" id="{D07003CB-47AF-4B7C-8C43-1AC3BD1426EE}"/>
               </a:ext>
             </a:extLst>
           </p:cNvPr>
@@ -5419,7 +5419,7 @@
           <p:cNvPr id="23" name="">
             <a:extLst xmlns:a="http://schemas.openxmlformats.org/drawingml/2006/main">
               <a:ext uri="{FF2B5EF4-FFF2-40B4-BE49-F238E27FC236}">
-                <a16:creationId xmlns:a16="http://schemas.microsoft.com/office/drawing/2014/main" id="{02619AA8-9E04-494F-9C2C-4375A2894CFA}"/>
+                <a16:creationId xmlns:a16="http://schemas.microsoft.com/office/drawing/2014/main" id="{EE3744E8-5FFA-4FAE-A8D7-20C3DB9C7E9F}"/>
               </a:ext>
             </a:extLst>
           </p:cNvPr>
@@ -5583,7 +5583,7 @@
           <p:cNvPr id="28" name="">
             <a:extLst xmlns:a="http://schemas.openxmlformats.org/drawingml/2006/main">
               <a:ext uri="{FF2B5EF4-FFF2-40B4-BE49-F238E27FC236}">
-                <a16:creationId xmlns:a16="http://schemas.microsoft.com/office/drawing/2014/main" id="{07F0A63F-BB1D-42E0-8A1A-BA7DFC827DBD}"/>
+                <a16:creationId xmlns:a16="http://schemas.microsoft.com/office/drawing/2014/main" id="{ADE7DD24-BEFA-4B5A-BF3B-53FBEF73FB63}"/>
               </a:ext>
             </a:extLst>
           </p:cNvPr>
@@ -5640,7 +5640,7 @@
           <p:cNvPr id="29" name="">
             <a:extLst xmlns:a="http://schemas.openxmlformats.org/drawingml/2006/main">
               <a:ext uri="{FF2B5EF4-FFF2-40B4-BE49-F238E27FC236}">
-                <a16:creationId xmlns:a16="http://schemas.microsoft.com/office/drawing/2014/main" id="{93B2AEFF-6AFD-4326-BEEC-A39B71B23650}"/>
+                <a16:creationId xmlns:a16="http://schemas.microsoft.com/office/drawing/2014/main" id="{07C15867-BC4E-4A9B-A386-81B9A83CD5C1}"/>
               </a:ext>
             </a:extLst>
           </p:cNvPr>
@@ -5697,7 +5697,7 @@
           <p:cNvPr id="30" name="">
             <a:extLst xmlns:a="http://schemas.openxmlformats.org/drawingml/2006/main">
               <a:ext uri="{FF2B5EF4-FFF2-40B4-BE49-F238E27FC236}">
-                <a16:creationId xmlns:a16="http://schemas.microsoft.com/office/drawing/2014/main" id="{4198630A-6132-4F99-814A-A496065279FE}"/>
+                <a16:creationId xmlns:a16="http://schemas.microsoft.com/office/drawing/2014/main" id="{12E1DA32-0436-4134-8FD4-486A434485C8}"/>
               </a:ext>
             </a:extLst>
           </p:cNvPr>
@@ -5728,7 +5728,7 @@
           <p:cNvPr id="31" name="">
             <a:extLst xmlns:a="http://schemas.openxmlformats.org/drawingml/2006/main">
               <a:ext uri="{FF2B5EF4-FFF2-40B4-BE49-F238E27FC236}">
-                <a16:creationId xmlns:a16="http://schemas.microsoft.com/office/drawing/2014/main" id="{0F1B4427-07A0-4798-883D-2BC885E8A778}"/>
+                <a16:creationId xmlns:a16="http://schemas.microsoft.com/office/drawing/2014/main" id="{D11F4671-AA7F-492B-9E81-1BC3046780D3}"/>
               </a:ext>
             </a:extLst>
           </p:cNvPr>
@@ -5783,7 +5783,7 @@
     </p:spTree>
     <p:extLst>
       <p:ext uri="{BB962C8B-B14F-4D97-AF65-F5344CB8AC3E}">
-        <p14:creationId xmlns:p14="http://schemas.microsoft.com/office/powerpoint/2010/main" val="1282361897"/>
+        <p14:creationId xmlns:p14="http://schemas.microsoft.com/office/powerpoint/2010/main" val="490854975"/>
       </p:ext>
     </p:extLst>
   </p:cSld>
@@ -5814,7 +5814,7 @@
           <p:cNvPr id="7" name="">
             <a:extLst xmlns:a="http://schemas.openxmlformats.org/drawingml/2006/main">
               <a:ext uri="{FF2B5EF4-FFF2-40B4-BE49-F238E27FC236}">
-                <a16:creationId xmlns:a16="http://schemas.microsoft.com/office/drawing/2014/main" id="{31F9D716-EC61-444E-85C9-D0A0783BBFBC}"/>
+                <a16:creationId xmlns:a16="http://schemas.microsoft.com/office/drawing/2014/main" id="{608EC4F2-1ACD-4917-8204-2FD16CA65AD4}"/>
               </a:ext>
             </a:extLst>
           </p:cNvPr>
@@ -5871,7 +5871,7 @@
           <p:cNvPr id="2" name="">
             <a:extLst xmlns:a="http://schemas.openxmlformats.org/drawingml/2006/main">
               <a:ext uri="{FF2B5EF4-FFF2-40B4-BE49-F238E27FC236}">
-                <a16:creationId xmlns:a16="http://schemas.microsoft.com/office/drawing/2014/main" id="{B5B029CF-CBC1-4C17-993C-68EDEC72B0EB}"/>
+                <a16:creationId xmlns:a16="http://schemas.microsoft.com/office/drawing/2014/main" id="{95DEC756-EE8B-4DF3-B900-6B3F60AB1B3F}"/>
               </a:ext>
             </a:extLst>
           </p:cNvPr>
@@ -5902,7 +5902,7 @@
           <p:cNvPr id="3" name="">
             <a:extLst xmlns:a="http://schemas.openxmlformats.org/drawingml/2006/main">
               <a:ext uri="{FF2B5EF4-FFF2-40B4-BE49-F238E27FC236}">
-                <a16:creationId xmlns:a16="http://schemas.microsoft.com/office/drawing/2014/main" id="{9A415200-AF5A-4E63-BBA6-C033D4CFEB4D}"/>
+                <a16:creationId xmlns:a16="http://schemas.microsoft.com/office/drawing/2014/main" id="{91A596EB-B5F6-486E-BA5D-77A64F38F7F5}"/>
               </a:ext>
             </a:extLst>
           </p:cNvPr>
@@ -6382,7 +6382,7 @@
           <p:cNvPr id="5" name="">
             <a:extLst xmlns:a="http://schemas.openxmlformats.org/drawingml/2006/main">
               <a:ext uri="{FF2B5EF4-FFF2-40B4-BE49-F238E27FC236}">
-                <a16:creationId xmlns:a16="http://schemas.microsoft.com/office/drawing/2014/main" id="{CC56726E-37ED-400C-B3CD-20EAFAB24B93}"/>
+                <a16:creationId xmlns:a16="http://schemas.microsoft.com/office/drawing/2014/main" id="{1D692A83-6049-4FCC-9882-B85AA11431E3}"/>
               </a:ext>
             </a:extLst>
           </p:cNvPr>
@@ -6413,7 +6413,7 @@
           <p:cNvPr id="6" name="">
             <a:extLst xmlns:a="http://schemas.openxmlformats.org/drawingml/2006/main">
               <a:ext uri="{FF2B5EF4-FFF2-40B4-BE49-F238E27FC236}">
-                <a16:creationId xmlns:a16="http://schemas.microsoft.com/office/drawing/2014/main" id="{303E08BE-F5A9-4CAD-8901-28CDCEABAD31}"/>
+                <a16:creationId xmlns:a16="http://schemas.microsoft.com/office/drawing/2014/main" id="{8BDF9B82-DE3E-45E1-8B31-F14C67DA36D5}"/>
               </a:ext>
             </a:extLst>
           </p:cNvPr>
@@ -6468,7 +6468,7 @@
     </p:spTree>
     <p:extLst>
       <p:ext uri="{BB962C8B-B14F-4D97-AF65-F5344CB8AC3E}">
-        <p14:creationId xmlns:p14="http://schemas.microsoft.com/office/powerpoint/2010/main" val="78445682"/>
+        <p14:creationId xmlns:p14="http://schemas.microsoft.com/office/powerpoint/2010/main" val="2102884936"/>
       </p:ext>
     </p:extLst>
   </p:cSld>
@@ -6499,7 +6499,7 @@
           <p:cNvPr id="21" name="">
             <a:extLst xmlns:a="http://schemas.openxmlformats.org/drawingml/2006/main">
               <a:ext uri="{FF2B5EF4-FFF2-40B4-BE49-F238E27FC236}">
-                <a16:creationId xmlns:a16="http://schemas.microsoft.com/office/drawing/2014/main" id="{192E401D-B2DD-4844-9403-F1C6B13509CB}"/>
+                <a16:creationId xmlns:a16="http://schemas.microsoft.com/office/drawing/2014/main" id="{31844766-2A49-4F14-93FD-12A31A189D92}"/>
               </a:ext>
             </a:extLst>
           </p:cNvPr>
@@ -6579,7 +6579,7 @@
           <p:cNvPr id="2" name="">
             <a:extLst xmlns:a="http://schemas.openxmlformats.org/drawingml/2006/main">
               <a:ext uri="{FF2B5EF4-FFF2-40B4-BE49-F238E27FC236}">
-                <a16:creationId xmlns:a16="http://schemas.microsoft.com/office/drawing/2014/main" id="{1803A223-D3E3-41EA-B700-12EA1AC229AF}"/>
+                <a16:creationId xmlns:a16="http://schemas.microsoft.com/office/drawing/2014/main" id="{54FF341D-935A-4783-AE09-7F6AD2BB1F2D}"/>
               </a:ext>
             </a:extLst>
           </p:cNvPr>
@@ -6610,7 +6610,7 @@
           <p:cNvPr id="3" name="">
             <a:extLst xmlns:a="http://schemas.openxmlformats.org/drawingml/2006/main">
               <a:ext uri="{FF2B5EF4-FFF2-40B4-BE49-F238E27FC236}">
-                <a16:creationId xmlns:a16="http://schemas.microsoft.com/office/drawing/2014/main" id="{AD784B5C-9A9E-47DF-AB15-D351F0488C65}"/>
+                <a16:creationId xmlns:a16="http://schemas.microsoft.com/office/drawing/2014/main" id="{74EA614A-3B6C-4333-864C-CA34A015BABF}"/>
               </a:ext>
             </a:extLst>
           </p:cNvPr>
@@ -6667,7 +6667,7 @@
           <p:cNvPr id="4" name="">
             <a:extLst xmlns:a="http://schemas.openxmlformats.org/drawingml/2006/main">
               <a:ext uri="{FF2B5EF4-FFF2-40B4-BE49-F238E27FC236}">
-                <a16:creationId xmlns:a16="http://schemas.microsoft.com/office/drawing/2014/main" id="{E456A417-6E25-48ED-801C-D844EE03A255}"/>
+                <a16:creationId xmlns:a16="http://schemas.microsoft.com/office/drawing/2014/main" id="{D92CDE5B-F546-4715-B090-575F8AA469DE}"/>
               </a:ext>
             </a:extLst>
           </p:cNvPr>
@@ -6724,7 +6724,7 @@
           <p:cNvPr id="5" name="">
             <a:extLst xmlns:a="http://schemas.openxmlformats.org/drawingml/2006/main">
               <a:ext uri="{FF2B5EF4-FFF2-40B4-BE49-F238E27FC236}">
-                <a16:creationId xmlns:a16="http://schemas.microsoft.com/office/drawing/2014/main" id="{21BEB784-F110-48D9-BF2D-8C8C657FAC28}"/>
+                <a16:creationId xmlns:a16="http://schemas.microsoft.com/office/drawing/2014/main" id="{59944AC9-5692-48EA-948F-4086DC33B291}"/>
               </a:ext>
             </a:extLst>
           </p:cNvPr>
@@ -6781,7 +6781,7 @@
           <p:cNvPr id="6" name="">
             <a:extLst xmlns:a="http://schemas.openxmlformats.org/drawingml/2006/main">
               <a:ext uri="{FF2B5EF4-FFF2-40B4-BE49-F238E27FC236}">
-                <a16:creationId xmlns:a16="http://schemas.microsoft.com/office/drawing/2014/main" id="{BD73DFC1-E59E-4A5A-B471-129AE5AE7C43}"/>
+                <a16:creationId xmlns:a16="http://schemas.microsoft.com/office/drawing/2014/main" id="{AC947633-5F7E-4B37-9199-9868DCD0BE5C}"/>
               </a:ext>
             </a:extLst>
           </p:cNvPr>
@@ -6812,7 +6812,7 @@
           <p:cNvPr id="7" name="">
             <a:extLst xmlns:a="http://schemas.openxmlformats.org/drawingml/2006/main">
               <a:ext uri="{FF2B5EF4-FFF2-40B4-BE49-F238E27FC236}">
-                <a16:creationId xmlns:a16="http://schemas.microsoft.com/office/drawing/2014/main" id="{E9EDD04B-1E6C-493C-B1A1-CCE39D9DB229}"/>
+                <a16:creationId xmlns:a16="http://schemas.microsoft.com/office/drawing/2014/main" id="{9AB2019C-30ED-4DDD-8ADE-A8A008533D71}"/>
               </a:ext>
             </a:extLst>
           </p:cNvPr>
@@ -6869,7 +6869,7 @@
           <p:cNvPr id="8" name="">
             <a:extLst xmlns:a="http://schemas.openxmlformats.org/drawingml/2006/main">
               <a:ext uri="{FF2B5EF4-FFF2-40B4-BE49-F238E27FC236}">
-                <a16:creationId xmlns:a16="http://schemas.microsoft.com/office/drawing/2014/main" id="{13FF19B5-904F-45AD-A932-E9CA0E8EFC05}"/>
+                <a16:creationId xmlns:a16="http://schemas.microsoft.com/office/drawing/2014/main" id="{96E63868-1B1F-435E-BE62-95547CE464AD}"/>
               </a:ext>
             </a:extLst>
           </p:cNvPr>
@@ -6926,7 +6926,7 @@
           <p:cNvPr id="9" name="">
             <a:extLst xmlns:a="http://schemas.openxmlformats.org/drawingml/2006/main">
               <a:ext uri="{FF2B5EF4-FFF2-40B4-BE49-F238E27FC236}">
-                <a16:creationId xmlns:a16="http://schemas.microsoft.com/office/drawing/2014/main" id="{6455B920-7511-4725-9523-0E5DAA2F03BA}"/>
+                <a16:creationId xmlns:a16="http://schemas.microsoft.com/office/drawing/2014/main" id="{1BF819B4-00BA-4C00-A218-470B68902534}"/>
               </a:ext>
             </a:extLst>
           </p:cNvPr>
@@ -6983,7 +6983,7 @@
           <p:cNvPr id="10" name="">
             <a:extLst xmlns:a="http://schemas.openxmlformats.org/drawingml/2006/main">
               <a:ext uri="{FF2B5EF4-FFF2-40B4-BE49-F238E27FC236}">
-                <a16:creationId xmlns:a16="http://schemas.microsoft.com/office/drawing/2014/main" id="{2127118A-8461-4FA8-8B0A-B86F67DBE300}"/>
+                <a16:creationId xmlns:a16="http://schemas.microsoft.com/office/drawing/2014/main" id="{EC10001C-E131-4D8D-AEA1-7339352F1AE3}"/>
               </a:ext>
             </a:extLst>
           </p:cNvPr>
@@ -7040,7 +7040,7 @@
           <p:cNvPr id="11" name="">
             <a:extLst xmlns:a="http://schemas.openxmlformats.org/drawingml/2006/main">
               <a:ext uri="{FF2B5EF4-FFF2-40B4-BE49-F238E27FC236}">
-                <a16:creationId xmlns:a16="http://schemas.microsoft.com/office/drawing/2014/main" id="{B71E8DD4-6169-4AEC-9BE2-F83F869FD5F3}"/>
+                <a16:creationId xmlns:a16="http://schemas.microsoft.com/office/drawing/2014/main" id="{9F982464-3C27-421B-AD8A-2D703997F212}"/>
               </a:ext>
             </a:extLst>
           </p:cNvPr>
@@ -7097,7 +7097,7 @@
           <p:cNvPr id="12" name="">
             <a:extLst xmlns:a="http://schemas.openxmlformats.org/drawingml/2006/main">
               <a:ext uri="{FF2B5EF4-FFF2-40B4-BE49-F238E27FC236}">
-                <a16:creationId xmlns:a16="http://schemas.microsoft.com/office/drawing/2014/main" id="{64846A1F-CB8E-43FD-B430-1162FEA4178E}"/>
+                <a16:creationId xmlns:a16="http://schemas.microsoft.com/office/drawing/2014/main" id="{51C1F780-5173-4416-B7D2-AB51ED3EDD8C}"/>
               </a:ext>
             </a:extLst>
           </p:cNvPr>
@@ -7154,7 +7154,7 @@
           <p:cNvPr id="13" name="">
             <a:extLst xmlns:a="http://schemas.openxmlformats.org/drawingml/2006/main">
               <a:ext uri="{FF2B5EF4-FFF2-40B4-BE49-F238E27FC236}">
-                <a16:creationId xmlns:a16="http://schemas.microsoft.com/office/drawing/2014/main" id="{A3284BDA-8F6B-4B3E-9F3C-C41D26C0921D}"/>
+                <a16:creationId xmlns:a16="http://schemas.microsoft.com/office/drawing/2014/main" id="{8E3FDD2C-168A-4F00-8EAD-0677F17254DD}"/>
               </a:ext>
             </a:extLst>
           </p:cNvPr>
@@ -7185,7 +7185,7 @@
           <p:cNvPr id="14" name="">
             <a:extLst xmlns:a="http://schemas.openxmlformats.org/drawingml/2006/main">
               <a:ext uri="{FF2B5EF4-FFF2-40B4-BE49-F238E27FC236}">
-                <a16:creationId xmlns:a16="http://schemas.microsoft.com/office/drawing/2014/main" id="{0E34433D-7271-4985-9DCF-C7EBBCBCEF58}"/>
+                <a16:creationId xmlns:a16="http://schemas.microsoft.com/office/drawing/2014/main" id="{48CF000C-328F-4282-8253-1FACCA9F082F}"/>
               </a:ext>
             </a:extLst>
           </p:cNvPr>
@@ -7242,7 +7242,7 @@
           <p:cNvPr id="15" name="">
             <a:extLst xmlns:a="http://schemas.openxmlformats.org/drawingml/2006/main">
               <a:ext uri="{FF2B5EF4-FFF2-40B4-BE49-F238E27FC236}">
-                <a16:creationId xmlns:a16="http://schemas.microsoft.com/office/drawing/2014/main" id="{7C3085DB-1BF7-44F2-A446-08260235615D}"/>
+                <a16:creationId xmlns:a16="http://schemas.microsoft.com/office/drawing/2014/main" id="{F236F49D-929D-419E-B0E1-F5893FEF813A}"/>
               </a:ext>
             </a:extLst>
           </p:cNvPr>
@@ -7299,7 +7299,7 @@
           <p:cNvPr id="16" name="">
             <a:extLst xmlns:a="http://schemas.openxmlformats.org/drawingml/2006/main">
               <a:ext uri="{FF2B5EF4-FFF2-40B4-BE49-F238E27FC236}">
-                <a16:creationId xmlns:a16="http://schemas.microsoft.com/office/drawing/2014/main" id="{BCF6E13A-3FF5-41FE-B2D4-163DC1F284CE}"/>
+                <a16:creationId xmlns:a16="http://schemas.microsoft.com/office/drawing/2014/main" id="{95AA632F-A412-4726-B13B-9B3078A185F1}"/>
               </a:ext>
             </a:extLst>
           </p:cNvPr>
@@ -7356,7 +7356,7 @@
           <p:cNvPr id="17" name="">
             <a:extLst xmlns:a="http://schemas.openxmlformats.org/drawingml/2006/main">
               <a:ext uri="{FF2B5EF4-FFF2-40B4-BE49-F238E27FC236}">
-                <a16:creationId xmlns:a16="http://schemas.microsoft.com/office/drawing/2014/main" id="{AE3F7E92-0379-40B4-B5C9-2FCF447C355E}"/>
+                <a16:creationId xmlns:a16="http://schemas.microsoft.com/office/drawing/2014/main" id="{1B203E18-71E7-4E8D-90A5-68B04957C04D}"/>
               </a:ext>
             </a:extLst>
           </p:cNvPr>
@@ -7413,7 +7413,7 @@
           <p:cNvPr id="18" name="">
             <a:extLst xmlns:a="http://schemas.openxmlformats.org/drawingml/2006/main">
               <a:ext uri="{FF2B5EF4-FFF2-40B4-BE49-F238E27FC236}">
-                <a16:creationId xmlns:a16="http://schemas.microsoft.com/office/drawing/2014/main" id="{D78BA5E0-172B-47A2-90CD-F87181D1E682}"/>
+                <a16:creationId xmlns:a16="http://schemas.microsoft.com/office/drawing/2014/main" id="{A38A500A-06B3-48F9-8741-E8C3FB0DC74C}"/>
               </a:ext>
             </a:extLst>
           </p:cNvPr>
@@ -7470,7 +7470,7 @@
           <p:cNvPr id="19" name="">
             <a:extLst xmlns:a="http://schemas.openxmlformats.org/drawingml/2006/main">
               <a:ext uri="{FF2B5EF4-FFF2-40B4-BE49-F238E27FC236}">
-                <a16:creationId xmlns:a16="http://schemas.microsoft.com/office/drawing/2014/main" id="{4D669CB0-7884-4245-B972-CABEB818E009}"/>
+                <a16:creationId xmlns:a16="http://schemas.microsoft.com/office/drawing/2014/main" id="{5CE3149F-E972-460D-AF44-5599291FE57A}"/>
               </a:ext>
             </a:extLst>
           </p:cNvPr>
@@ -7501,7 +7501,7 @@
           <p:cNvPr id="20" name="">
             <a:extLst xmlns:a="http://schemas.openxmlformats.org/drawingml/2006/main">
               <a:ext uri="{FF2B5EF4-FFF2-40B4-BE49-F238E27FC236}">
-                <a16:creationId xmlns:a16="http://schemas.microsoft.com/office/drawing/2014/main" id="{F3111E13-2D35-4551-A56E-F26E9C53EA94}"/>
+                <a16:creationId xmlns:a16="http://schemas.microsoft.com/office/drawing/2014/main" id="{0E9D99FE-D71F-47A4-94D8-198AE32B6A73}"/>
               </a:ext>
             </a:extLst>
           </p:cNvPr>
@@ -7556,7 +7556,7 @@
     </p:spTree>
     <p:extLst>
       <p:ext uri="{BB962C8B-B14F-4D97-AF65-F5344CB8AC3E}">
-        <p14:creationId xmlns:p14="http://schemas.microsoft.com/office/powerpoint/2010/main" val="1520862756"/>
+        <p14:creationId xmlns:p14="http://schemas.microsoft.com/office/powerpoint/2010/main" val="922229421"/>
       </p:ext>
     </p:extLst>
   </p:cSld>
@@ -7587,7 +7587,7 @@
           <p:cNvPr id="19" name="">
             <a:extLst xmlns:a="http://schemas.openxmlformats.org/drawingml/2006/main">
               <a:ext uri="{FF2B5EF4-FFF2-40B4-BE49-F238E27FC236}">
-                <a16:creationId xmlns:a16="http://schemas.microsoft.com/office/drawing/2014/main" id="{C5F9A673-4253-455A-BDCB-EB7183FD389B}"/>
+                <a16:creationId xmlns:a16="http://schemas.microsoft.com/office/drawing/2014/main" id="{48A6DB59-F77C-42B2-8C0A-05E1E054D33C}"/>
               </a:ext>
             </a:extLst>
           </p:cNvPr>
@@ -7644,7 +7644,7 @@
           <p:cNvPr id="2" name="">
             <a:extLst xmlns:a="http://schemas.openxmlformats.org/drawingml/2006/main">
               <a:ext uri="{FF2B5EF4-FFF2-40B4-BE49-F238E27FC236}">
-                <a16:creationId xmlns:a16="http://schemas.microsoft.com/office/drawing/2014/main" id="{CCD3867C-2E98-412F-9F2B-A130AAC1A524}"/>
+                <a16:creationId xmlns:a16="http://schemas.microsoft.com/office/drawing/2014/main" id="{0A0675DE-D521-4897-877D-AD3A8F8E1696}"/>
               </a:ext>
             </a:extLst>
           </p:cNvPr>
@@ -7675,7 +7675,7 @@
           <p:cNvPr id="3" name="">
             <a:extLst xmlns:a="http://schemas.openxmlformats.org/drawingml/2006/main">
               <a:ext uri="{FF2B5EF4-FFF2-40B4-BE49-F238E27FC236}">
-                <a16:creationId xmlns:a16="http://schemas.microsoft.com/office/drawing/2014/main" id="{982E618B-52EE-4D81-A332-5A9436759014}"/>
+                <a16:creationId xmlns:a16="http://schemas.microsoft.com/office/drawing/2014/main" id="{5952E6FB-46FD-44CB-BC82-91693B036635}"/>
               </a:ext>
             </a:extLst>
           </p:cNvPr>
@@ -7732,7 +7732,7 @@
           <p:cNvPr id="4" name="">
             <a:extLst xmlns:a="http://schemas.openxmlformats.org/drawingml/2006/main">
               <a:ext uri="{FF2B5EF4-FFF2-40B4-BE49-F238E27FC236}">
-                <a16:creationId xmlns:a16="http://schemas.microsoft.com/office/drawing/2014/main" id="{8A4DF935-1132-49CA-BF23-99C2FFD05531}"/>
+                <a16:creationId xmlns:a16="http://schemas.microsoft.com/office/drawing/2014/main" id="{C91B51B9-F38A-4C50-AC67-961E970816EB}"/>
               </a:ext>
             </a:extLst>
           </p:cNvPr>
@@ -7789,7 +7789,7 @@
           <p:cNvPr id="5" name="">
             <a:extLst xmlns:a="http://schemas.openxmlformats.org/drawingml/2006/main">
               <a:ext uri="{FF2B5EF4-FFF2-40B4-BE49-F238E27FC236}">
-                <a16:creationId xmlns:a16="http://schemas.microsoft.com/office/drawing/2014/main" id="{0E09D044-97E2-4C03-A187-F181AAE1EB96}"/>
+                <a16:creationId xmlns:a16="http://schemas.microsoft.com/office/drawing/2014/main" id="{70DDAE52-E122-4BA0-804E-633E68C52A40}"/>
               </a:ext>
             </a:extLst>
           </p:cNvPr>
@@ -7820,7 +7820,7 @@
           <p:cNvPr id="6" name="">
             <a:extLst xmlns:a="http://schemas.openxmlformats.org/drawingml/2006/main">
               <a:ext uri="{FF2B5EF4-FFF2-40B4-BE49-F238E27FC236}">
-                <a16:creationId xmlns:a16="http://schemas.microsoft.com/office/drawing/2014/main" id="{C61D72EE-51EA-4708-90E9-AA0DDFB140FF}"/>
+                <a16:creationId xmlns:a16="http://schemas.microsoft.com/office/drawing/2014/main" id="{F1C15E5D-A4FE-4651-AB01-BF0A2FCFC8B3}"/>
               </a:ext>
             </a:extLst>
           </p:cNvPr>
@@ -7877,7 +7877,7 @@
           <p:cNvPr id="7" name="">
             <a:extLst xmlns:a="http://schemas.openxmlformats.org/drawingml/2006/main">
               <a:ext uri="{FF2B5EF4-FFF2-40B4-BE49-F238E27FC236}">
-                <a16:creationId xmlns:a16="http://schemas.microsoft.com/office/drawing/2014/main" id="{BA2AA542-15BA-406C-95AE-92CB806BC5C4}"/>
+                <a16:creationId xmlns:a16="http://schemas.microsoft.com/office/drawing/2014/main" id="{523C6ECA-0F66-448A-ADC1-1E07DEFC3636}"/>
               </a:ext>
             </a:extLst>
           </p:cNvPr>
@@ -7957,7 +7957,7 @@
           <p:cNvPr id="8" name="">
             <a:extLst xmlns:a="http://schemas.openxmlformats.org/drawingml/2006/main">
               <a:ext uri="{FF2B5EF4-FFF2-40B4-BE49-F238E27FC236}">
-                <a16:creationId xmlns:a16="http://schemas.microsoft.com/office/drawing/2014/main" id="{04512CC0-E45F-4625-905E-34FFDB78BEDD}"/>
+                <a16:creationId xmlns:a16="http://schemas.microsoft.com/office/drawing/2014/main" id="{F6098386-32F2-49C5-B874-83A3D9C822C3}"/>
               </a:ext>
             </a:extLst>
           </p:cNvPr>
@@ -8014,7 +8014,7 @@
           <p:cNvPr id="9" name="">
             <a:extLst xmlns:a="http://schemas.openxmlformats.org/drawingml/2006/main">
               <a:ext uri="{FF2B5EF4-FFF2-40B4-BE49-F238E27FC236}">
-                <a16:creationId xmlns:a16="http://schemas.microsoft.com/office/drawing/2014/main" id="{03D1C664-FC29-476C-B2B5-5D07D53BB64A}"/>
+                <a16:creationId xmlns:a16="http://schemas.microsoft.com/office/drawing/2014/main" id="{A838B9F7-C3EB-41D1-A18C-817D4A2C6433}"/>
               </a:ext>
             </a:extLst>
           </p:cNvPr>
@@ -8045,7 +8045,7 @@
           <p:cNvPr id="10" name="">
             <a:extLst xmlns:a="http://schemas.openxmlformats.org/drawingml/2006/main">
               <a:ext uri="{FF2B5EF4-FFF2-40B4-BE49-F238E27FC236}">
-                <a16:creationId xmlns:a16="http://schemas.microsoft.com/office/drawing/2014/main" id="{DEB46D3F-34E4-43E1-9006-AC879BC3F91A}"/>
+                <a16:creationId xmlns:a16="http://schemas.microsoft.com/office/drawing/2014/main" id="{4DF1297F-0B13-4A8E-91A6-BCFC99BE618E}"/>
               </a:ext>
             </a:extLst>
           </p:cNvPr>
@@ -8102,7 +8102,7 @@
           <p:cNvPr id="11" name="">
             <a:extLst xmlns:a="http://schemas.openxmlformats.org/drawingml/2006/main">
               <a:ext uri="{FF2B5EF4-FFF2-40B4-BE49-F238E27FC236}">
-                <a16:creationId xmlns:a16="http://schemas.microsoft.com/office/drawing/2014/main" id="{F6A0CB60-B96D-4469-BD7B-566159D4DBF5}"/>
+                <a16:creationId xmlns:a16="http://schemas.microsoft.com/office/drawing/2014/main" id="{9F98E7B7-C9D0-42F2-8C02-592C12FFD931}"/>
               </a:ext>
             </a:extLst>
           </p:cNvPr>
@@ -8182,7 +8182,7 @@
           <p:cNvPr id="12" name="">
             <a:extLst xmlns:a="http://schemas.openxmlformats.org/drawingml/2006/main">
               <a:ext uri="{FF2B5EF4-FFF2-40B4-BE49-F238E27FC236}">
-                <a16:creationId xmlns:a16="http://schemas.microsoft.com/office/drawing/2014/main" id="{9EE5F2A4-FC91-4A70-A1D7-D067408EFAC0}"/>
+                <a16:creationId xmlns:a16="http://schemas.microsoft.com/office/drawing/2014/main" id="{F280967F-063E-4B51-8BF5-45271995F90C}"/>
               </a:ext>
             </a:extLst>
           </p:cNvPr>
@@ -8239,7 +8239,7 @@
           <p:cNvPr id="13" name="">
             <a:extLst xmlns:a="http://schemas.openxmlformats.org/drawingml/2006/main">
               <a:ext uri="{FF2B5EF4-FFF2-40B4-BE49-F238E27FC236}">
-                <a16:creationId xmlns:a16="http://schemas.microsoft.com/office/drawing/2014/main" id="{C468B971-C876-42C1-8590-1F2412583BE7}"/>
+                <a16:creationId xmlns:a16="http://schemas.microsoft.com/office/drawing/2014/main" id="{27C1D283-B333-4A67-A16A-88618F0E739D}"/>
               </a:ext>
             </a:extLst>
           </p:cNvPr>
@@ -8270,7 +8270,7 @@
           <p:cNvPr id="14" name="">
             <a:extLst xmlns:a="http://schemas.openxmlformats.org/drawingml/2006/main">
               <a:ext uri="{FF2B5EF4-FFF2-40B4-BE49-F238E27FC236}">
-                <a16:creationId xmlns:a16="http://schemas.microsoft.com/office/drawing/2014/main" id="{1A4598BF-BF75-43E7-9535-E739498CB6FF}"/>
+                <a16:creationId xmlns:a16="http://schemas.microsoft.com/office/drawing/2014/main" id="{11BC5A3B-7A97-48B4-A21C-D140B3EA3FC6}"/>
               </a:ext>
             </a:extLst>
           </p:cNvPr>
@@ -8327,7 +8327,7 @@
           <p:cNvPr id="15" name="">
             <a:extLst xmlns:a="http://schemas.openxmlformats.org/drawingml/2006/main">
               <a:ext uri="{FF2B5EF4-FFF2-40B4-BE49-F238E27FC236}">
-                <a16:creationId xmlns:a16="http://schemas.microsoft.com/office/drawing/2014/main" id="{9EAAB9D9-357F-4D21-909C-6C152877B3BA}"/>
+                <a16:creationId xmlns:a16="http://schemas.microsoft.com/office/drawing/2014/main" id="{C8FDE2A5-698D-47B8-AD87-9F6B583F658A}"/>
               </a:ext>
             </a:extLst>
           </p:cNvPr>
@@ -8407,7 +8407,7 @@
           <p:cNvPr id="16" name="">
             <a:extLst xmlns:a="http://schemas.openxmlformats.org/drawingml/2006/main">
               <a:ext uri="{FF2B5EF4-FFF2-40B4-BE49-F238E27FC236}">
-                <a16:creationId xmlns:a16="http://schemas.microsoft.com/office/drawing/2014/main" id="{D3C9CAF7-68F7-4801-A15E-C405E0B33A48}"/>
+                <a16:creationId xmlns:a16="http://schemas.microsoft.com/office/drawing/2014/main" id="{DBFBFC44-51DD-4BBA-86A9-13C3317D8F74}"/>
               </a:ext>
             </a:extLst>
           </p:cNvPr>
@@ -8464,7 +8464,7 @@
           <p:cNvPr id="17" name="">
             <a:extLst xmlns:a="http://schemas.openxmlformats.org/drawingml/2006/main">
               <a:ext uri="{FF2B5EF4-FFF2-40B4-BE49-F238E27FC236}">
-                <a16:creationId xmlns:a16="http://schemas.microsoft.com/office/drawing/2014/main" id="{DF88957D-939A-4A36-8C56-847414E4CF0C}"/>
+                <a16:creationId xmlns:a16="http://schemas.microsoft.com/office/drawing/2014/main" id="{31022745-19E2-4DF8-9907-493C0EDA165C}"/>
               </a:ext>
             </a:extLst>
           </p:cNvPr>
@@ -8495,7 +8495,7 @@
           <p:cNvPr id="18" name="">
             <a:extLst xmlns:a="http://schemas.openxmlformats.org/drawingml/2006/main">
               <a:ext uri="{FF2B5EF4-FFF2-40B4-BE49-F238E27FC236}">
-                <a16:creationId xmlns:a16="http://schemas.microsoft.com/office/drawing/2014/main" id="{CD236F92-9F27-46C2-B2E4-A55C454373F1}"/>
+                <a16:creationId xmlns:a16="http://schemas.microsoft.com/office/drawing/2014/main" id="{89E68167-DB16-4CF0-B188-84DC532B94B6}"/>
               </a:ext>
             </a:extLst>
           </p:cNvPr>
@@ -8550,7 +8550,7 @@
     </p:spTree>
     <p:extLst>
       <p:ext uri="{BB962C8B-B14F-4D97-AF65-F5344CB8AC3E}">
-        <p14:creationId xmlns:p14="http://schemas.microsoft.com/office/powerpoint/2010/main" val="363480729"/>
+        <p14:creationId xmlns:p14="http://schemas.microsoft.com/office/powerpoint/2010/main" val="1116355971"/>
       </p:ext>
     </p:extLst>
   </p:cSld>
@@ -8581,7 +8581,7 @@
           <p:cNvPr id="35" name="">
             <a:extLst xmlns:a="http://schemas.openxmlformats.org/drawingml/2006/main">
               <a:ext uri="{FF2B5EF4-FFF2-40B4-BE49-F238E27FC236}">
-                <a16:creationId xmlns:a16="http://schemas.microsoft.com/office/drawing/2014/main" id="{69352FEA-FC77-4EE9-AF95-7EF275DCCC53}"/>
+                <a16:creationId xmlns:a16="http://schemas.microsoft.com/office/drawing/2014/main" id="{E1B726A9-5FD1-4A71-BACB-95C1E602A9B2}"/>
               </a:ext>
             </a:extLst>
           </p:cNvPr>
@@ -8638,7 +8638,7 @@
           <p:cNvPr id="2" name="">
             <a:extLst xmlns:a="http://schemas.openxmlformats.org/drawingml/2006/main">
               <a:ext uri="{FF2B5EF4-FFF2-40B4-BE49-F238E27FC236}">
-                <a16:creationId xmlns:a16="http://schemas.microsoft.com/office/drawing/2014/main" id="{DBBA6DAF-F916-4511-A515-B68A7456E141}"/>
+                <a16:creationId xmlns:a16="http://schemas.microsoft.com/office/drawing/2014/main" id="{E170F26A-F0D1-48D4-8A9B-D56F14CEA778}"/>
               </a:ext>
             </a:extLst>
           </p:cNvPr>
@@ -8669,7 +8669,7 @@
           <p:cNvPr id="3" name="">
             <a:extLst xmlns:a="http://schemas.openxmlformats.org/drawingml/2006/main">
               <a:ext uri="{FF2B5EF4-FFF2-40B4-BE49-F238E27FC236}">
-                <a16:creationId xmlns:a16="http://schemas.microsoft.com/office/drawing/2014/main" id="{5BB678AC-295F-406D-9B42-64A4528BF317}"/>
+                <a16:creationId xmlns:a16="http://schemas.microsoft.com/office/drawing/2014/main" id="{EA88A481-3388-405E-B44A-0D2979338325}"/>
               </a:ext>
             </a:extLst>
           </p:cNvPr>
@@ -8726,7 +8726,7 @@
           <p:cNvPr id="4" name="">
             <a:extLst xmlns:a="http://schemas.openxmlformats.org/drawingml/2006/main">
               <a:ext uri="{FF2B5EF4-FFF2-40B4-BE49-F238E27FC236}">
-                <a16:creationId xmlns:a16="http://schemas.microsoft.com/office/drawing/2014/main" id="{C63BF1ED-8D29-4480-9324-04C6299231E0}"/>
+                <a16:creationId xmlns:a16="http://schemas.microsoft.com/office/drawing/2014/main" id="{C64138BA-F77A-478E-BAEE-033AC19B0400}"/>
               </a:ext>
             </a:extLst>
           </p:cNvPr>
@@ -8759,7 +8759,7 @@
           <p:cNvPr id="5" name="">
             <a:extLst xmlns:a="http://schemas.openxmlformats.org/drawingml/2006/main">
               <a:ext uri="{FF2B5EF4-FFF2-40B4-BE49-F238E27FC236}">
-                <a16:creationId xmlns:a16="http://schemas.microsoft.com/office/drawing/2014/main" id="{75552113-9F53-4274-A83F-16CF5BDF811D}"/>
+                <a16:creationId xmlns:a16="http://schemas.microsoft.com/office/drawing/2014/main" id="{9887522F-E0B0-4A96-832F-9316A6EBC59C}"/>
               </a:ext>
             </a:extLst>
           </p:cNvPr>
@@ -8816,7 +8816,7 @@
           <p:cNvPr id="6" name="">
             <a:extLst xmlns:a="http://schemas.openxmlformats.org/drawingml/2006/main">
               <a:ext uri="{FF2B5EF4-FFF2-40B4-BE49-F238E27FC236}">
-                <a16:creationId xmlns:a16="http://schemas.microsoft.com/office/drawing/2014/main" id="{64F96272-56B9-4014-8FD3-046C5C69316F}"/>
+                <a16:creationId xmlns:a16="http://schemas.microsoft.com/office/drawing/2014/main" id="{F9EC576A-3109-45DA-914C-7A45AD3160FC}"/>
               </a:ext>
             </a:extLst>
           </p:cNvPr>
@@ -8849,7 +8849,7 @@
           <p:cNvPr id="7" name="">
             <a:extLst xmlns:a="http://schemas.openxmlformats.org/drawingml/2006/main">
               <a:ext uri="{FF2B5EF4-FFF2-40B4-BE49-F238E27FC236}">
-                <a16:creationId xmlns:a16="http://schemas.microsoft.com/office/drawing/2014/main" id="{106D2023-6C5E-49E1-B6ED-795502FC7939}"/>
+                <a16:creationId xmlns:a16="http://schemas.microsoft.com/office/drawing/2014/main" id="{BC3FBA16-314F-4E89-BE9D-8BE98F08F0F2}"/>
               </a:ext>
             </a:extLst>
           </p:cNvPr>
@@ -8906,7 +8906,7 @@
           <p:cNvPr id="8" name="">
             <a:extLst xmlns:a="http://schemas.openxmlformats.org/drawingml/2006/main">
               <a:ext uri="{FF2B5EF4-FFF2-40B4-BE49-F238E27FC236}">
-                <a16:creationId xmlns:a16="http://schemas.microsoft.com/office/drawing/2014/main" id="{E39B738C-3513-4E64-8A48-008B87072D64}"/>
+                <a16:creationId xmlns:a16="http://schemas.microsoft.com/office/drawing/2014/main" id="{9AC98739-B03D-4F91-BA9C-D02725AA25ED}"/>
               </a:ext>
             </a:extLst>
           </p:cNvPr>
@@ -8939,7 +8939,7 @@
           <p:cNvPr id="9" name="">
             <a:extLst xmlns:a="http://schemas.openxmlformats.org/drawingml/2006/main">
               <a:ext uri="{FF2B5EF4-FFF2-40B4-BE49-F238E27FC236}">
-                <a16:creationId xmlns:a16="http://schemas.microsoft.com/office/drawing/2014/main" id="{430E7A16-4996-4BD1-9AF8-A5142EFF63E2}"/>
+                <a16:creationId xmlns:a16="http://schemas.microsoft.com/office/drawing/2014/main" id="{F12B762E-2262-44B7-B7AB-C9739F6E708E}"/>
               </a:ext>
             </a:extLst>
           </p:cNvPr>
@@ -8996,7 +8996,7 @@
           <p:cNvPr id="10" name="">
             <a:extLst xmlns:a="http://schemas.openxmlformats.org/drawingml/2006/main">
               <a:ext uri="{FF2B5EF4-FFF2-40B4-BE49-F238E27FC236}">
-                <a16:creationId xmlns:a16="http://schemas.microsoft.com/office/drawing/2014/main" id="{E6E9DEFC-8472-47EC-BFB0-59AD62CBF822}"/>
+                <a16:creationId xmlns:a16="http://schemas.microsoft.com/office/drawing/2014/main" id="{C0B59863-CDD1-4BB7-A52C-3376CA481308}"/>
               </a:ext>
             </a:extLst>
           </p:cNvPr>
@@ -9029,7 +9029,7 @@
           <p:cNvPr id="11" name="">
             <a:extLst xmlns:a="http://schemas.openxmlformats.org/drawingml/2006/main">
               <a:ext uri="{FF2B5EF4-FFF2-40B4-BE49-F238E27FC236}">
-                <a16:creationId xmlns:a16="http://schemas.microsoft.com/office/drawing/2014/main" id="{086DD73A-658A-4A51-988F-894716513E9D}"/>
+                <a16:creationId xmlns:a16="http://schemas.microsoft.com/office/drawing/2014/main" id="{A31D3222-FD12-4C40-91DD-5D05031E06E8}"/>
               </a:ext>
             </a:extLst>
           </p:cNvPr>
@@ -9086,7 +9086,7 @@
           <p:cNvPr id="12" name="">
             <a:extLst xmlns:a="http://schemas.openxmlformats.org/drawingml/2006/main">
               <a:ext uri="{FF2B5EF4-FFF2-40B4-BE49-F238E27FC236}">
-                <a16:creationId xmlns:a16="http://schemas.microsoft.com/office/drawing/2014/main" id="{7C91CADB-0819-4913-8B30-B1B500129A39}"/>
+                <a16:creationId xmlns:a16="http://schemas.microsoft.com/office/drawing/2014/main" id="{813F41B8-D04A-4711-BB7B-E79B018CA751}"/>
               </a:ext>
             </a:extLst>
           </p:cNvPr>
@@ -9119,7 +9119,7 @@
           <p:cNvPr id="13" name="">
             <a:extLst xmlns:a="http://schemas.openxmlformats.org/drawingml/2006/main">
               <a:ext uri="{FF2B5EF4-FFF2-40B4-BE49-F238E27FC236}">
-                <a16:creationId xmlns:a16="http://schemas.microsoft.com/office/drawing/2014/main" id="{F71DF474-8742-42C6-8474-D69D42F3C45B}"/>
+                <a16:creationId xmlns:a16="http://schemas.microsoft.com/office/drawing/2014/main" id="{EFE800E6-B53D-4123-AAE9-614270BEE3A2}"/>
               </a:ext>
             </a:extLst>
           </p:cNvPr>
@@ -9176,7 +9176,7 @@
           <p:cNvPr id="14" name="">
             <a:extLst xmlns:a="http://schemas.openxmlformats.org/drawingml/2006/main">
               <a:ext uri="{FF2B5EF4-FFF2-40B4-BE49-F238E27FC236}">
-                <a16:creationId xmlns:a16="http://schemas.microsoft.com/office/drawing/2014/main" id="{3C54140C-CE85-49B5-82A2-E7B83710DEFB}"/>
+                <a16:creationId xmlns:a16="http://schemas.microsoft.com/office/drawing/2014/main" id="{15B2D5D3-2B1E-40C2-A3C0-A4839DC97253}"/>
               </a:ext>
             </a:extLst>
           </p:cNvPr>
@@ -9209,7 +9209,7 @@
           <p:cNvPr id="15" name="">
             <a:extLst xmlns:a="http://schemas.openxmlformats.org/drawingml/2006/main">
               <a:ext uri="{FF2B5EF4-FFF2-40B4-BE49-F238E27FC236}">
-                <a16:creationId xmlns:a16="http://schemas.microsoft.com/office/drawing/2014/main" id="{509A6C16-2DF4-49E0-8273-433032E79366}"/>
+                <a16:creationId xmlns:a16="http://schemas.microsoft.com/office/drawing/2014/main" id="{14340E6A-7834-4C90-B3E9-00D01469FB8D}"/>
               </a:ext>
             </a:extLst>
           </p:cNvPr>
@@ -9266,7 +9266,7 @@
           <p:cNvPr id="16" name="">
             <a:extLst xmlns:a="http://schemas.openxmlformats.org/drawingml/2006/main">
               <a:ext uri="{FF2B5EF4-FFF2-40B4-BE49-F238E27FC236}">
-                <a16:creationId xmlns:a16="http://schemas.microsoft.com/office/drawing/2014/main" id="{508561C4-A31C-4D4E-99D6-3FB093C4874E}"/>
+                <a16:creationId xmlns:a16="http://schemas.microsoft.com/office/drawing/2014/main" id="{420C5769-8030-4A37-8A21-8669CC1324BE}"/>
               </a:ext>
             </a:extLst>
           </p:cNvPr>
@@ -9299,7 +9299,7 @@
           <p:cNvPr id="17" name="">
             <a:extLst xmlns:a="http://schemas.openxmlformats.org/drawingml/2006/main">
               <a:ext uri="{FF2B5EF4-FFF2-40B4-BE49-F238E27FC236}">
-                <a16:creationId xmlns:a16="http://schemas.microsoft.com/office/drawing/2014/main" id="{DDC1D5E4-B2AE-497C-9B8D-4D54C9177316}"/>
+                <a16:creationId xmlns:a16="http://schemas.microsoft.com/office/drawing/2014/main" id="{F0452E88-4F91-44E9-AFA9-829F0DAD37DC}"/>
               </a:ext>
             </a:extLst>
           </p:cNvPr>
@@ -9356,7 +9356,7 @@
           <p:cNvPr id="18" name="">
             <a:extLst xmlns:a="http://schemas.openxmlformats.org/drawingml/2006/main">
               <a:ext uri="{FF2B5EF4-FFF2-40B4-BE49-F238E27FC236}">
-                <a16:creationId xmlns:a16="http://schemas.microsoft.com/office/drawing/2014/main" id="{5085CE94-DF86-447B-BFDE-B2D12121EAFE}"/>
+                <a16:creationId xmlns:a16="http://schemas.microsoft.com/office/drawing/2014/main" id="{DCD744FA-1410-465D-9823-86FABF89087F}"/>
               </a:ext>
             </a:extLst>
           </p:cNvPr>
@@ -9389,7 +9389,7 @@
           <p:cNvPr id="19" name="">
             <a:extLst xmlns:a="http://schemas.openxmlformats.org/drawingml/2006/main">
               <a:ext uri="{FF2B5EF4-FFF2-40B4-BE49-F238E27FC236}">
-                <a16:creationId xmlns:a16="http://schemas.microsoft.com/office/drawing/2014/main" id="{ACDF89C7-51D7-4BF2-8D75-31405F4574DA}"/>
+                <a16:creationId xmlns:a16="http://schemas.microsoft.com/office/drawing/2014/main" id="{7ACB06A9-14AB-499A-BF02-C24AD021EF66}"/>
               </a:ext>
             </a:extLst>
           </p:cNvPr>
@@ -9628,7 +9628,7 @@
           <p:cNvPr id="27" name="">
             <a:extLst xmlns:a="http://schemas.openxmlformats.org/drawingml/2006/main">
               <a:ext uri="{FF2B5EF4-FFF2-40B4-BE49-F238E27FC236}">
-                <a16:creationId xmlns:a16="http://schemas.microsoft.com/office/drawing/2014/main" id="{2B67B224-76CE-40F0-B490-152D7CF5F044}"/>
+                <a16:creationId xmlns:a16="http://schemas.microsoft.com/office/drawing/2014/main" id="{4B291C75-3615-446E-8699-69B40CA8FCBC}"/>
               </a:ext>
             </a:extLst>
           </p:cNvPr>
@@ -9685,7 +9685,7 @@
           <p:cNvPr id="28" name="">
             <a:extLst xmlns:a="http://schemas.openxmlformats.org/drawingml/2006/main">
               <a:ext uri="{FF2B5EF4-FFF2-40B4-BE49-F238E27FC236}">
-                <a16:creationId xmlns:a16="http://schemas.microsoft.com/office/drawing/2014/main" id="{39CCF84E-35FD-4E1B-8E38-072AD22697C4}"/>
+                <a16:creationId xmlns:a16="http://schemas.microsoft.com/office/drawing/2014/main" id="{EEE26A74-3834-4428-BD37-7242A515297D}"/>
               </a:ext>
             </a:extLst>
           </p:cNvPr>
@@ -9742,7 +9742,7 @@
           <p:cNvPr id="29" name="">
             <a:extLst xmlns:a="http://schemas.openxmlformats.org/drawingml/2006/main">
               <a:ext uri="{FF2B5EF4-FFF2-40B4-BE49-F238E27FC236}">
-                <a16:creationId xmlns:a16="http://schemas.microsoft.com/office/drawing/2014/main" id="{D8A1DB16-A566-47C4-A20B-C2E488018F59}"/>
+                <a16:creationId xmlns:a16="http://schemas.microsoft.com/office/drawing/2014/main" id="{8B2069AA-8E99-4DF1-A929-567552E769A4}"/>
               </a:ext>
             </a:extLst>
           </p:cNvPr>
@@ -9799,7 +9799,7 @@
           <p:cNvPr id="30" name="">
             <a:extLst xmlns:a="http://schemas.openxmlformats.org/drawingml/2006/main">
               <a:ext uri="{FF2B5EF4-FFF2-40B4-BE49-F238E27FC236}">
-                <a16:creationId xmlns:a16="http://schemas.microsoft.com/office/drawing/2014/main" id="{09D7D2BA-E4B5-4285-ACC4-2FFB5C27468D}"/>
+                <a16:creationId xmlns:a16="http://schemas.microsoft.com/office/drawing/2014/main" id="{13680318-A6BE-433C-8CB0-7CC83100C771}"/>
               </a:ext>
             </a:extLst>
           </p:cNvPr>
@@ -9856,7 +9856,7 @@
           <p:cNvPr id="31" name="">
             <a:extLst xmlns:a="http://schemas.openxmlformats.org/drawingml/2006/main">
               <a:ext uri="{FF2B5EF4-FFF2-40B4-BE49-F238E27FC236}">
-                <a16:creationId xmlns:a16="http://schemas.microsoft.com/office/drawing/2014/main" id="{D8879384-4878-4871-920C-9B7155BAA9B0}"/>
+                <a16:creationId xmlns:a16="http://schemas.microsoft.com/office/drawing/2014/main" id="{0789981C-5FDB-4CCB-9A72-1E35243195CC}"/>
               </a:ext>
             </a:extLst>
           </p:cNvPr>
@@ -9913,7 +9913,7 @@
           <p:cNvPr id="32" name="">
             <a:extLst xmlns:a="http://schemas.openxmlformats.org/drawingml/2006/main">
               <a:ext uri="{FF2B5EF4-FFF2-40B4-BE49-F238E27FC236}">
-                <a16:creationId xmlns:a16="http://schemas.microsoft.com/office/drawing/2014/main" id="{00E4C570-E1FA-4D99-B0D3-611299887E1D}"/>
+                <a16:creationId xmlns:a16="http://schemas.microsoft.com/office/drawing/2014/main" id="{669650C0-D7DA-404B-BD69-B5C59F2B51EA}"/>
               </a:ext>
             </a:extLst>
           </p:cNvPr>
@@ -9970,7 +9970,7 @@
           <p:cNvPr id="33" name="">
             <a:extLst xmlns:a="http://schemas.openxmlformats.org/drawingml/2006/main">
               <a:ext uri="{FF2B5EF4-FFF2-40B4-BE49-F238E27FC236}">
-                <a16:creationId xmlns:a16="http://schemas.microsoft.com/office/drawing/2014/main" id="{169D6491-55D0-4086-89B9-6B763DAA2BFB}"/>
+                <a16:creationId xmlns:a16="http://schemas.microsoft.com/office/drawing/2014/main" id="{2FAD8A52-3C9E-451E-BCEE-58A8C392DAFA}"/>
               </a:ext>
             </a:extLst>
           </p:cNvPr>
@@ -10001,7 +10001,7 @@
           <p:cNvPr id="34" name="">
             <a:extLst xmlns:a="http://schemas.openxmlformats.org/drawingml/2006/main">
               <a:ext uri="{FF2B5EF4-FFF2-40B4-BE49-F238E27FC236}">
-                <a16:creationId xmlns:a16="http://schemas.microsoft.com/office/drawing/2014/main" id="{DB624A75-37A9-4D66-8BE5-19005A30EC40}"/>
+                <a16:creationId xmlns:a16="http://schemas.microsoft.com/office/drawing/2014/main" id="{EA3BD866-6762-4FB1-9381-238A931986E0}"/>
               </a:ext>
             </a:extLst>
           </p:cNvPr>
@@ -10056,7 +10056,7 @@
     </p:spTree>
     <p:extLst>
       <p:ext uri="{BB962C8B-B14F-4D97-AF65-F5344CB8AC3E}">
-        <p14:creationId xmlns:p14="http://schemas.microsoft.com/office/powerpoint/2010/main" val="497608112"/>
+        <p14:creationId xmlns:p14="http://schemas.microsoft.com/office/powerpoint/2010/main" val="1150965629"/>
       </p:ext>
     </p:extLst>
   </p:cSld>
@@ -10087,7 +10087,7 @@
           <p:cNvPr id="40" name="">
             <a:extLst xmlns:a="http://schemas.openxmlformats.org/drawingml/2006/main">
               <a:ext uri="{FF2B5EF4-FFF2-40B4-BE49-F238E27FC236}">
-                <a16:creationId xmlns:a16="http://schemas.microsoft.com/office/drawing/2014/main" id="{AB1CF91A-91D1-46A6-941F-A5E3B8613523}"/>
+                <a16:creationId xmlns:a16="http://schemas.microsoft.com/office/drawing/2014/main" id="{306CA492-F75E-44AA-BB9B-DE3CED8B9E56}"/>
               </a:ext>
             </a:extLst>
           </p:cNvPr>
@@ -10144,7 +10144,7 @@
           <p:cNvPr id="2" name="">
             <a:extLst xmlns:a="http://schemas.openxmlformats.org/drawingml/2006/main">
               <a:ext uri="{FF2B5EF4-FFF2-40B4-BE49-F238E27FC236}">
-                <a16:creationId xmlns:a16="http://schemas.microsoft.com/office/drawing/2014/main" id="{617E10F5-2E15-4D0E-A808-4DE02BE2053E}"/>
+                <a16:creationId xmlns:a16="http://schemas.microsoft.com/office/drawing/2014/main" id="{E21ACA5A-D16D-41A1-B94C-CCD500175498}"/>
               </a:ext>
             </a:extLst>
           </p:cNvPr>
@@ -10175,7 +10175,7 @@
           <p:cNvPr id="3" name="">
             <a:extLst xmlns:a="http://schemas.openxmlformats.org/drawingml/2006/main">
               <a:ext uri="{FF2B5EF4-FFF2-40B4-BE49-F238E27FC236}">
-                <a16:creationId xmlns:a16="http://schemas.microsoft.com/office/drawing/2014/main" id="{2D5EAE41-DD24-45A8-8F8E-62987CB44F87}"/>
+                <a16:creationId xmlns:a16="http://schemas.microsoft.com/office/drawing/2014/main" id="{5118D90C-3C73-4FF0-887C-F327E8B756B0}"/>
               </a:ext>
             </a:extLst>
           </p:cNvPr>
@@ -10232,7 +10232,7 @@
           <p:cNvPr id="4" name="">
             <a:extLst xmlns:a="http://schemas.openxmlformats.org/drawingml/2006/main">
               <a:ext uri="{FF2B5EF4-FFF2-40B4-BE49-F238E27FC236}">
-                <a16:creationId xmlns:a16="http://schemas.microsoft.com/office/drawing/2014/main" id="{45E1EC1A-204C-49C6-9712-06017AEF7518}"/>
+                <a16:creationId xmlns:a16="http://schemas.microsoft.com/office/drawing/2014/main" id="{9B1537B1-57B2-47F0-AFE1-0DA15966D006}"/>
               </a:ext>
             </a:extLst>
           </p:cNvPr>
@@ -10265,7 +10265,7 @@
           <p:cNvPr id="5" name="">
             <a:extLst xmlns:a="http://schemas.openxmlformats.org/drawingml/2006/main">
               <a:ext uri="{FF2B5EF4-FFF2-40B4-BE49-F238E27FC236}">
-                <a16:creationId xmlns:a16="http://schemas.microsoft.com/office/drawing/2014/main" id="{E002F664-81BF-4843-AF60-0761381AE2EC}"/>
+                <a16:creationId xmlns:a16="http://schemas.microsoft.com/office/drawing/2014/main" id="{6EBC6D43-912A-489D-90A1-255DF6CAA551}"/>
               </a:ext>
             </a:extLst>
           </p:cNvPr>
@@ -10322,7 +10322,7 @@
           <p:cNvPr id="6" name="">
             <a:extLst xmlns:a="http://schemas.openxmlformats.org/drawingml/2006/main">
               <a:ext uri="{FF2B5EF4-FFF2-40B4-BE49-F238E27FC236}">
-                <a16:creationId xmlns:a16="http://schemas.microsoft.com/office/drawing/2014/main" id="{9674DAF3-0F48-4F87-9ECB-94374AAC0304}"/>
+                <a16:creationId xmlns:a16="http://schemas.microsoft.com/office/drawing/2014/main" id="{ECED1936-6E98-43AC-B765-450083C5D96C}"/>
               </a:ext>
             </a:extLst>
           </p:cNvPr>
@@ -10379,7 +10379,7 @@
           <p:cNvPr id="7" name="">
             <a:extLst xmlns:a="http://schemas.openxmlformats.org/drawingml/2006/main">
               <a:ext uri="{FF2B5EF4-FFF2-40B4-BE49-F238E27FC236}">
-                <a16:creationId xmlns:a16="http://schemas.microsoft.com/office/drawing/2014/main" id="{DCCD93BA-D3BA-468A-917B-2ADE490723D7}"/>
+                <a16:creationId xmlns:a16="http://schemas.microsoft.com/office/drawing/2014/main" id="{18D541EA-E259-4490-B385-1126A6E2897C}"/>
               </a:ext>
             </a:extLst>
           </p:cNvPr>
@@ -10436,7 +10436,7 @@
           <p:cNvPr id="8" name="">
             <a:extLst xmlns:a="http://schemas.openxmlformats.org/drawingml/2006/main">
               <a:ext uri="{FF2B5EF4-FFF2-40B4-BE49-F238E27FC236}">
-                <a16:creationId xmlns:a16="http://schemas.microsoft.com/office/drawing/2014/main" id="{66E14073-89A1-4B02-B9CA-A1EF1F6A54D3}"/>
+                <a16:creationId xmlns:a16="http://schemas.microsoft.com/office/drawing/2014/main" id="{799313F0-D678-4B90-80CF-6D635D9B8530}"/>
               </a:ext>
             </a:extLst>
           </p:cNvPr>
@@ -10467,7 +10467,7 @@
           <p:cNvPr id="9" name="">
             <a:extLst xmlns:a="http://schemas.openxmlformats.org/drawingml/2006/main">
               <a:ext uri="{FF2B5EF4-FFF2-40B4-BE49-F238E27FC236}">
-                <a16:creationId xmlns:a16="http://schemas.microsoft.com/office/drawing/2014/main" id="{678F5A5A-6F44-4EDF-81BC-A62C98733708}"/>
+                <a16:creationId xmlns:a16="http://schemas.microsoft.com/office/drawing/2014/main" id="{98BB36D1-229A-417D-B3A8-92CBA364229B}"/>
               </a:ext>
             </a:extLst>
           </p:cNvPr>
@@ -10524,7 +10524,7 @@
           <p:cNvPr id="10" name="">
             <a:extLst xmlns:a="http://schemas.openxmlformats.org/drawingml/2006/main">
               <a:ext uri="{FF2B5EF4-FFF2-40B4-BE49-F238E27FC236}">
-                <a16:creationId xmlns:a16="http://schemas.microsoft.com/office/drawing/2014/main" id="{9E806D86-FF6E-4B7B-9429-5C5D84787B5A}"/>
+                <a16:creationId xmlns:a16="http://schemas.microsoft.com/office/drawing/2014/main" id="{C1284336-C9B1-4367-8DD2-D6B4779D1E8E}"/>
               </a:ext>
             </a:extLst>
           </p:cNvPr>
@@ -10581,7 +10581,7 @@
           <p:cNvPr id="11" name="">
             <a:extLst xmlns:a="http://schemas.openxmlformats.org/drawingml/2006/main">
               <a:ext uri="{FF2B5EF4-FFF2-40B4-BE49-F238E27FC236}">
-                <a16:creationId xmlns:a16="http://schemas.microsoft.com/office/drawing/2014/main" id="{A1525433-5F47-4005-ADE2-7FA3258DE819}"/>
+                <a16:creationId xmlns:a16="http://schemas.microsoft.com/office/drawing/2014/main" id="{6E598E1E-295B-42E9-87F1-352CE6F3DBF0}"/>
               </a:ext>
             </a:extLst>
           </p:cNvPr>
@@ -10612,7 +10612,7 @@
           <p:cNvPr id="12" name="">
             <a:extLst xmlns:a="http://schemas.openxmlformats.org/drawingml/2006/main">
               <a:ext uri="{FF2B5EF4-FFF2-40B4-BE49-F238E27FC236}">
-                <a16:creationId xmlns:a16="http://schemas.microsoft.com/office/drawing/2014/main" id="{BA184412-86AE-497B-B72C-4A794850CE57}"/>
+                <a16:creationId xmlns:a16="http://schemas.microsoft.com/office/drawing/2014/main" id="{00387AFE-8A48-41B6-AFC4-15BCC4043B97}"/>
               </a:ext>
             </a:extLst>
           </p:cNvPr>
@@ -10669,7 +10669,7 @@
           <p:cNvPr id="13" name="">
             <a:extLst xmlns:a="http://schemas.openxmlformats.org/drawingml/2006/main">
               <a:ext uri="{FF2B5EF4-FFF2-40B4-BE49-F238E27FC236}">
-                <a16:creationId xmlns:a16="http://schemas.microsoft.com/office/drawing/2014/main" id="{74E6ECDB-ED5F-44AC-B112-EA3D965584D5}"/>
+                <a16:creationId xmlns:a16="http://schemas.microsoft.com/office/drawing/2014/main" id="{1BC88615-55F0-4C8B-B69B-F22724EEE6CE}"/>
               </a:ext>
             </a:extLst>
           </p:cNvPr>
@@ -10726,7 +10726,7 @@
           <p:cNvPr id="14" name="">
             <a:extLst xmlns:a="http://schemas.openxmlformats.org/drawingml/2006/main">
               <a:ext uri="{FF2B5EF4-FFF2-40B4-BE49-F238E27FC236}">
-                <a16:creationId xmlns:a16="http://schemas.microsoft.com/office/drawing/2014/main" id="{D0533D85-BC51-4849-8F3D-A82180EB894E}"/>
+                <a16:creationId xmlns:a16="http://schemas.microsoft.com/office/drawing/2014/main" id="{3DE64480-C0E1-45FB-B56F-D6D8021DD1E8}"/>
               </a:ext>
             </a:extLst>
           </p:cNvPr>
@@ -10783,7 +10783,7 @@
           <p:cNvPr id="15" name="">
             <a:extLst xmlns:a="http://schemas.openxmlformats.org/drawingml/2006/main">
               <a:ext uri="{FF2B5EF4-FFF2-40B4-BE49-F238E27FC236}">
-                <a16:creationId xmlns:a16="http://schemas.microsoft.com/office/drawing/2014/main" id="{42DD3693-1A1E-4B2E-A419-38B4939357D7}"/>
+                <a16:creationId xmlns:a16="http://schemas.microsoft.com/office/drawing/2014/main" id="{64EBDB1D-628C-4732-A150-88568E066ABB}"/>
               </a:ext>
             </a:extLst>
           </p:cNvPr>
@@ -10863,7 +10863,7 @@
           <p:cNvPr id="16" name="">
             <a:extLst xmlns:a="http://schemas.openxmlformats.org/drawingml/2006/main">
               <a:ext uri="{FF2B5EF4-FFF2-40B4-BE49-F238E27FC236}">
-                <a16:creationId xmlns:a16="http://schemas.microsoft.com/office/drawing/2014/main" id="{39EB0D17-0CF8-4405-8A2B-A1B3DAF7DE29}"/>
+                <a16:creationId xmlns:a16="http://schemas.microsoft.com/office/drawing/2014/main" id="{A7D7B3D9-797A-4C56-80AE-1F9A611C053A}"/>
               </a:ext>
             </a:extLst>
           </p:cNvPr>
@@ -10894,7 +10894,7 @@
           <p:cNvPr id="17" name="">
             <a:extLst xmlns:a="http://schemas.openxmlformats.org/drawingml/2006/main">
               <a:ext uri="{FF2B5EF4-FFF2-40B4-BE49-F238E27FC236}">
-                <a16:creationId xmlns:a16="http://schemas.microsoft.com/office/drawing/2014/main" id="{B0766A06-B6F2-42C4-A09B-8BB90179E807}"/>
+                <a16:creationId xmlns:a16="http://schemas.microsoft.com/office/drawing/2014/main" id="{54EF9AE1-0282-4BEA-989E-F7ED42045038}"/>
               </a:ext>
             </a:extLst>
           </p:cNvPr>
@@ -10974,7 +10974,7 @@
           <p:cNvPr id="18" name="">
             <a:extLst xmlns:a="http://schemas.openxmlformats.org/drawingml/2006/main">
               <a:ext uri="{FF2B5EF4-FFF2-40B4-BE49-F238E27FC236}">
-                <a16:creationId xmlns:a16="http://schemas.microsoft.com/office/drawing/2014/main" id="{663E9065-A2DE-4059-A24B-18CC447B002C}"/>
+                <a16:creationId xmlns:a16="http://schemas.microsoft.com/office/drawing/2014/main" id="{31B9340B-191E-4C5B-A993-C052A8FF5BB6}"/>
               </a:ext>
             </a:extLst>
           </p:cNvPr>
@@ -11007,7 +11007,7 @@
           <p:cNvPr id="19" name="">
             <a:extLst xmlns:a="http://schemas.openxmlformats.org/drawingml/2006/main">
               <a:ext uri="{FF2B5EF4-FFF2-40B4-BE49-F238E27FC236}">
-                <a16:creationId xmlns:a16="http://schemas.microsoft.com/office/drawing/2014/main" id="{EF8F2146-FB28-45B4-A6BE-EC9432A8E35C}"/>
+                <a16:creationId xmlns:a16="http://schemas.microsoft.com/office/drawing/2014/main" id="{147320DC-62BA-4E3B-9F82-2F94D7467B12}"/>
               </a:ext>
             </a:extLst>
           </p:cNvPr>
@@ -11064,7 +11064,7 @@
           <p:cNvPr id="20" name="">
             <a:extLst xmlns:a="http://schemas.openxmlformats.org/drawingml/2006/main">
               <a:ext uri="{FF2B5EF4-FFF2-40B4-BE49-F238E27FC236}">
-                <a16:creationId xmlns:a16="http://schemas.microsoft.com/office/drawing/2014/main" id="{B07ADC32-2AF0-4314-B096-72B14243A68D}"/>
+                <a16:creationId xmlns:a16="http://schemas.microsoft.com/office/drawing/2014/main" id="{5219698C-AC53-4644-AE13-D62A5782EAE7}"/>
               </a:ext>
             </a:extLst>
           </p:cNvPr>
@@ -11121,7 +11121,7 @@
           <p:cNvPr id="21" name="">
             <a:extLst xmlns:a="http://schemas.openxmlformats.org/drawingml/2006/main">
               <a:ext uri="{FF2B5EF4-FFF2-40B4-BE49-F238E27FC236}">
-                <a16:creationId xmlns:a16="http://schemas.microsoft.com/office/drawing/2014/main" id="{015CCAF8-3BDC-4E68-90AF-A314E713268B}"/>
+                <a16:creationId xmlns:a16="http://schemas.microsoft.com/office/drawing/2014/main" id="{48D951AB-65CB-4A16-8A6A-724111067A94}"/>
               </a:ext>
             </a:extLst>
           </p:cNvPr>
@@ -11178,7 +11178,7 @@
           <p:cNvPr id="22" name="">
             <a:extLst xmlns:a="http://schemas.openxmlformats.org/drawingml/2006/main">
               <a:ext uri="{FF2B5EF4-FFF2-40B4-BE49-F238E27FC236}">
-                <a16:creationId xmlns:a16="http://schemas.microsoft.com/office/drawing/2014/main" id="{2552B065-8047-464A-AFC9-9190E60E279D}"/>
+                <a16:creationId xmlns:a16="http://schemas.microsoft.com/office/drawing/2014/main" id="{FF0BD951-CD88-475B-8DD2-DC71230479CE}"/>
               </a:ext>
             </a:extLst>
           </p:cNvPr>
@@ -11211,7 +11211,7 @@
           <p:cNvPr id="23" name="">
             <a:extLst xmlns:a="http://schemas.openxmlformats.org/drawingml/2006/main">
               <a:ext uri="{FF2B5EF4-FFF2-40B4-BE49-F238E27FC236}">
-                <a16:creationId xmlns:a16="http://schemas.microsoft.com/office/drawing/2014/main" id="{574243A2-A334-48F5-96B8-D762673963A9}"/>
+                <a16:creationId xmlns:a16="http://schemas.microsoft.com/office/drawing/2014/main" id="{91B0CB2B-650B-4451-B69A-13BEF9D73B9C}"/>
               </a:ext>
             </a:extLst>
           </p:cNvPr>
@@ -11268,7 +11268,7 @@
           <p:cNvPr id="24" name="">
             <a:extLst xmlns:a="http://schemas.openxmlformats.org/drawingml/2006/main">
               <a:ext uri="{FF2B5EF4-FFF2-40B4-BE49-F238E27FC236}">
-                <a16:creationId xmlns:a16="http://schemas.microsoft.com/office/drawing/2014/main" id="{46AF68FE-B0E1-414D-984E-0665C2A2578F}"/>
+                <a16:creationId xmlns:a16="http://schemas.microsoft.com/office/drawing/2014/main" id="{791F75F7-2C15-4DAB-93ED-7C0368104BE9}"/>
               </a:ext>
             </a:extLst>
           </p:cNvPr>
@@ -11325,7 +11325,7 @@
           <p:cNvPr id="25" name="">
             <a:extLst xmlns:a="http://schemas.openxmlformats.org/drawingml/2006/main">
               <a:ext uri="{FF2B5EF4-FFF2-40B4-BE49-F238E27FC236}">
-                <a16:creationId xmlns:a16="http://schemas.microsoft.com/office/drawing/2014/main" id="{505061FE-538E-449E-8B2A-16158508D54C}"/>
+                <a16:creationId xmlns:a16="http://schemas.microsoft.com/office/drawing/2014/main" id="{4ED7482C-D978-4C19-812E-9F684C5249F9}"/>
               </a:ext>
             </a:extLst>
           </p:cNvPr>
@@ -11382,7 +11382,7 @@
           <p:cNvPr id="26" name="">
             <a:extLst xmlns:a="http://schemas.openxmlformats.org/drawingml/2006/main">
               <a:ext uri="{FF2B5EF4-FFF2-40B4-BE49-F238E27FC236}">
-                <a16:creationId xmlns:a16="http://schemas.microsoft.com/office/drawing/2014/main" id="{1C280DA1-CFB2-4880-967B-8BC77E935A4A}"/>
+                <a16:creationId xmlns:a16="http://schemas.microsoft.com/office/drawing/2014/main" id="{705DE4AC-66F5-4251-B1EA-B8AA3F66E0EF}"/>
               </a:ext>
             </a:extLst>
           </p:cNvPr>
@@ -11415,7 +11415,7 @@
           <p:cNvPr id="27" name="">
             <a:extLst xmlns:a="http://schemas.openxmlformats.org/drawingml/2006/main">
               <a:ext uri="{FF2B5EF4-FFF2-40B4-BE49-F238E27FC236}">
-                <a16:creationId xmlns:a16="http://schemas.microsoft.com/office/drawing/2014/main" id="{B92B8CEB-04CD-4FEC-898F-6CCCFDC56E75}"/>
+                <a16:creationId xmlns:a16="http://schemas.microsoft.com/office/drawing/2014/main" id="{BF1CD846-C9CD-4CE6-8543-A6B220F5DACE}"/>
               </a:ext>
             </a:extLst>
           </p:cNvPr>
@@ -11472,7 +11472,7 @@
           <p:cNvPr id="28" name="">
             <a:extLst xmlns:a="http://schemas.openxmlformats.org/drawingml/2006/main">
               <a:ext uri="{FF2B5EF4-FFF2-40B4-BE49-F238E27FC236}">
-                <a16:creationId xmlns:a16="http://schemas.microsoft.com/office/drawing/2014/main" id="{325E85DB-A43A-4CF6-B059-C05DD2B0BB3D}"/>
+                <a16:creationId xmlns:a16="http://schemas.microsoft.com/office/drawing/2014/main" id="{0F253525-28CD-4116-B369-16A32E2934B9}"/>
               </a:ext>
             </a:extLst>
           </p:cNvPr>
@@ -11529,7 +11529,7 @@
           <p:cNvPr id="29" name="">
             <a:extLst xmlns:a="http://schemas.openxmlformats.org/drawingml/2006/main">
               <a:ext uri="{FF2B5EF4-FFF2-40B4-BE49-F238E27FC236}">
-                <a16:creationId xmlns:a16="http://schemas.microsoft.com/office/drawing/2014/main" id="{C915679E-BE62-4F48-B834-4DE87704C8E7}"/>
+                <a16:creationId xmlns:a16="http://schemas.microsoft.com/office/drawing/2014/main" id="{DF732AC1-D1C3-42DD-A10C-D30F7972FA8D}"/>
               </a:ext>
             </a:extLst>
           </p:cNvPr>
@@ -11586,7 +11586,7 @@
           <p:cNvPr id="30" name="">
             <a:extLst xmlns:a="http://schemas.openxmlformats.org/drawingml/2006/main">
               <a:ext uri="{FF2B5EF4-FFF2-40B4-BE49-F238E27FC236}">
-                <a16:creationId xmlns:a16="http://schemas.microsoft.com/office/drawing/2014/main" id="{2199B04F-898D-45E1-9242-5474C564EA7D}"/>
+                <a16:creationId xmlns:a16="http://schemas.microsoft.com/office/drawing/2014/main" id="{018D4C8C-5F1D-4E7B-846D-B75C3BA04DDE}"/>
               </a:ext>
             </a:extLst>
           </p:cNvPr>
@@ -11619,7 +11619,7 @@
           <p:cNvPr id="31" name="">
             <a:extLst xmlns:a="http://schemas.openxmlformats.org/drawingml/2006/main">
               <a:ext uri="{FF2B5EF4-FFF2-40B4-BE49-F238E27FC236}">
-                <a16:creationId xmlns:a16="http://schemas.microsoft.com/office/drawing/2014/main" id="{27EA5C69-AC03-4369-8235-1D7C8076AD8D}"/>
+                <a16:creationId xmlns:a16="http://schemas.microsoft.com/office/drawing/2014/main" id="{9A3A349D-958D-447B-B290-88498CDC4705}"/>
               </a:ext>
             </a:extLst>
           </p:cNvPr>
@@ -11676,7 +11676,7 @@
           <p:cNvPr id="32" name="">
             <a:extLst xmlns:a="http://schemas.openxmlformats.org/drawingml/2006/main">
               <a:ext uri="{FF2B5EF4-FFF2-40B4-BE49-F238E27FC236}">
-                <a16:creationId xmlns:a16="http://schemas.microsoft.com/office/drawing/2014/main" id="{5C77F472-4195-45F7-B569-109CDD96A281}"/>
+                <a16:creationId xmlns:a16="http://schemas.microsoft.com/office/drawing/2014/main" id="{F58CEB16-58AA-4F07-98B7-AA4F6A4829A1}"/>
               </a:ext>
             </a:extLst>
           </p:cNvPr>
@@ -11733,7 +11733,7 @@
           <p:cNvPr id="33" name="">
             <a:extLst xmlns:a="http://schemas.openxmlformats.org/drawingml/2006/main">
               <a:ext uri="{FF2B5EF4-FFF2-40B4-BE49-F238E27FC236}">
-                <a16:creationId xmlns:a16="http://schemas.microsoft.com/office/drawing/2014/main" id="{0CE1DDC5-C5BB-45DB-9475-4E21F72A4AB1}"/>
+                <a16:creationId xmlns:a16="http://schemas.microsoft.com/office/drawing/2014/main" id="{C555F85E-C9F0-4F8F-8086-E1F3C1CDEC42}"/>
               </a:ext>
             </a:extLst>
           </p:cNvPr>
@@ -11813,7 +11813,7 @@
           <p:cNvPr id="34" name="">
             <a:extLst xmlns:a="http://schemas.openxmlformats.org/drawingml/2006/main">
               <a:ext uri="{FF2B5EF4-FFF2-40B4-BE49-F238E27FC236}">
-                <a16:creationId xmlns:a16="http://schemas.microsoft.com/office/drawing/2014/main" id="{D6C55E66-0584-4D5A-AA43-AD4CA0980B97}"/>
+                <a16:creationId xmlns:a16="http://schemas.microsoft.com/office/drawing/2014/main" id="{15E479F5-237B-457A-9F17-EA23231FACFC}"/>
               </a:ext>
             </a:extLst>
           </p:cNvPr>
@@ -11870,7 +11870,7 @@
           <p:cNvPr id="35" name="">
             <a:extLst xmlns:a="http://schemas.openxmlformats.org/drawingml/2006/main">
               <a:ext uri="{FF2B5EF4-FFF2-40B4-BE49-F238E27FC236}">
-                <a16:creationId xmlns:a16="http://schemas.microsoft.com/office/drawing/2014/main" id="{4DAE7B18-1A85-424F-8A0D-9BE47B400EF5}"/>
+                <a16:creationId xmlns:a16="http://schemas.microsoft.com/office/drawing/2014/main" id="{40E8AA75-664E-49EA-9AA7-E666A2546EA7}"/>
               </a:ext>
             </a:extLst>
           </p:cNvPr>
@@ -11927,7 +11927,7 @@
           <p:cNvPr id="36" name="">
             <a:extLst xmlns:a="http://schemas.openxmlformats.org/drawingml/2006/main">
               <a:ext uri="{FF2B5EF4-FFF2-40B4-BE49-F238E27FC236}">
-                <a16:creationId xmlns:a16="http://schemas.microsoft.com/office/drawing/2014/main" id="{8A9CCC68-74FA-48F5-AA47-10EE65FF3069}"/>
+                <a16:creationId xmlns:a16="http://schemas.microsoft.com/office/drawing/2014/main" id="{74AC1F57-BD1F-494C-B1E9-21927CE93B99}"/>
               </a:ext>
             </a:extLst>
           </p:cNvPr>
@@ -11984,7 +11984,7 @@
           <p:cNvPr id="37" name="">
             <a:extLst xmlns:a="http://schemas.openxmlformats.org/drawingml/2006/main">
               <a:ext uri="{FF2B5EF4-FFF2-40B4-BE49-F238E27FC236}">
-                <a16:creationId xmlns:a16="http://schemas.microsoft.com/office/drawing/2014/main" id="{176BC27C-BB86-472E-8EE5-6C17245D70D5}"/>
+                <a16:creationId xmlns:a16="http://schemas.microsoft.com/office/drawing/2014/main" id="{0DFC88DE-912B-47C1-9BAF-4ADC93534F2A}"/>
               </a:ext>
             </a:extLst>
           </p:cNvPr>
@@ -12041,7 +12041,7 @@
           <p:cNvPr id="38" name="">
             <a:extLst xmlns:a="http://schemas.openxmlformats.org/drawingml/2006/main">
               <a:ext uri="{FF2B5EF4-FFF2-40B4-BE49-F238E27FC236}">
-                <a16:creationId xmlns:a16="http://schemas.microsoft.com/office/drawing/2014/main" id="{37353EFA-4131-4173-A146-FF33C474AFF2}"/>
+                <a16:creationId xmlns:a16="http://schemas.microsoft.com/office/drawing/2014/main" id="{74709EC7-5596-41BC-BDEC-E280662F8F5D}"/>
               </a:ext>
             </a:extLst>
           </p:cNvPr>
@@ -12098,7 +12098,7 @@
           <p:cNvPr id="39" name="">
             <a:extLst xmlns:a="http://schemas.openxmlformats.org/drawingml/2006/main">
               <a:ext uri="{FF2B5EF4-FFF2-40B4-BE49-F238E27FC236}">
-                <a16:creationId xmlns:a16="http://schemas.microsoft.com/office/drawing/2014/main" id="{03F5A46B-C323-4DF9-AF91-3D420CD81BE6}"/>
+                <a16:creationId xmlns:a16="http://schemas.microsoft.com/office/drawing/2014/main" id="{3335C7AC-C601-46A4-91F0-B5376CC46914}"/>
               </a:ext>
             </a:extLst>
           </p:cNvPr>
@@ -12153,7 +12153,7 @@
     </p:spTree>
     <p:extLst>
       <p:ext uri="{BB962C8B-B14F-4D97-AF65-F5344CB8AC3E}">
-        <p14:creationId xmlns:p14="http://schemas.microsoft.com/office/powerpoint/2010/main" val="569034835"/>
+        <p14:creationId xmlns:p14="http://schemas.microsoft.com/office/powerpoint/2010/main" val="341373732"/>
       </p:ext>
     </p:extLst>
   </p:cSld>
@@ -12184,7 +12184,7 @@
           <p:cNvPr id="23" name="">
             <a:extLst xmlns:a="http://schemas.openxmlformats.org/drawingml/2006/main">
               <a:ext uri="{FF2B5EF4-FFF2-40B4-BE49-F238E27FC236}">
-                <a16:creationId xmlns:a16="http://schemas.microsoft.com/office/drawing/2014/main" id="{4EF06D9C-568B-44E7-96C3-F133C8C20802}"/>
+                <a16:creationId xmlns:a16="http://schemas.microsoft.com/office/drawing/2014/main" id="{67BF8B59-6E0F-40F0-9A96-22D44EFB1223}"/>
               </a:ext>
             </a:extLst>
           </p:cNvPr>
@@ -12241,7 +12241,7 @@
           <p:cNvPr id="2" name="">
             <a:extLst xmlns:a="http://schemas.openxmlformats.org/drawingml/2006/main">
               <a:ext uri="{FF2B5EF4-FFF2-40B4-BE49-F238E27FC236}">
-                <a16:creationId xmlns:a16="http://schemas.microsoft.com/office/drawing/2014/main" id="{8F1279A4-3E3F-494F-B292-89E46695C0B9}"/>
+                <a16:creationId xmlns:a16="http://schemas.microsoft.com/office/drawing/2014/main" id="{7076F486-CF88-4E76-BC7F-DA21110C67F9}"/>
               </a:ext>
             </a:extLst>
           </p:cNvPr>
@@ -12272,7 +12272,7 @@
           <p:cNvPr id="3" name="">
             <a:extLst xmlns:a="http://schemas.openxmlformats.org/drawingml/2006/main">
               <a:ext uri="{FF2B5EF4-FFF2-40B4-BE49-F238E27FC236}">
-                <a16:creationId xmlns:a16="http://schemas.microsoft.com/office/drawing/2014/main" id="{A862D4BA-BD8E-4C19-8158-F5AB1196D3CA}"/>
+                <a16:creationId xmlns:a16="http://schemas.microsoft.com/office/drawing/2014/main" id="{C802B9E3-7B6C-47AD-8D17-AE956E85252E}"/>
               </a:ext>
             </a:extLst>
           </p:cNvPr>
@@ -12329,7 +12329,7 @@
           <p:cNvPr id="4" name="">
             <a:extLst xmlns:a="http://schemas.openxmlformats.org/drawingml/2006/main">
               <a:ext uri="{FF2B5EF4-FFF2-40B4-BE49-F238E27FC236}">
-                <a16:creationId xmlns:a16="http://schemas.microsoft.com/office/drawing/2014/main" id="{A789EE4F-2588-4750-A1F6-F6C1DCCB6BEB}"/>
+                <a16:creationId xmlns:a16="http://schemas.microsoft.com/office/drawing/2014/main" id="{1C204B36-40FF-4256-B2D3-E09ED4D51A2D}"/>
               </a:ext>
             </a:extLst>
           </p:cNvPr>
@@ -12360,7 +12360,7 @@
           <p:cNvPr id="5" name="">
             <a:extLst xmlns:a="http://schemas.openxmlformats.org/drawingml/2006/main">
               <a:ext uri="{FF2B5EF4-FFF2-40B4-BE49-F238E27FC236}">
-                <a16:creationId xmlns:a16="http://schemas.microsoft.com/office/drawing/2014/main" id="{7A36594C-C9B9-422E-A9B6-C74763AD40AA}"/>
+                <a16:creationId xmlns:a16="http://schemas.microsoft.com/office/drawing/2014/main" id="{6615961D-AC62-4F72-A0E5-94440CCD2183}"/>
               </a:ext>
             </a:extLst>
           </p:cNvPr>
@@ -12391,7 +12391,7 @@
           <p:cNvPr id="6" name="">
             <a:extLst xmlns:a="http://schemas.openxmlformats.org/drawingml/2006/main">
               <a:ext uri="{FF2B5EF4-FFF2-40B4-BE49-F238E27FC236}">
-                <a16:creationId xmlns:a16="http://schemas.microsoft.com/office/drawing/2014/main" id="{7106FF02-07B2-48A0-8298-173667F63233}"/>
+                <a16:creationId xmlns:a16="http://schemas.microsoft.com/office/drawing/2014/main" id="{D0B9A2D3-A829-4A5B-8643-D22DF59EC873}"/>
               </a:ext>
             </a:extLst>
           </p:cNvPr>
@@ -12422,7 +12422,7 @@
           <p:cNvPr id="7" name="">
             <a:extLst xmlns:a="http://schemas.openxmlformats.org/drawingml/2006/main">
               <a:ext uri="{FF2B5EF4-FFF2-40B4-BE49-F238E27FC236}">
-                <a16:creationId xmlns:a16="http://schemas.microsoft.com/office/drawing/2014/main" id="{7F9174E4-BF3F-47B7-B741-2C447E7966F1}"/>
+                <a16:creationId xmlns:a16="http://schemas.microsoft.com/office/drawing/2014/main" id="{21E1B065-6082-4737-B5B4-4FA55B1DA655}"/>
               </a:ext>
             </a:extLst>
           </p:cNvPr>
@@ -12453,7 +12453,7 @@
           <p:cNvPr id="8" name="">
             <a:extLst xmlns:a="http://schemas.openxmlformats.org/drawingml/2006/main">
               <a:ext uri="{FF2B5EF4-FFF2-40B4-BE49-F238E27FC236}">
-                <a16:creationId xmlns:a16="http://schemas.microsoft.com/office/drawing/2014/main" id="{1E84A55B-5AB4-4C99-A1FF-21BD1CBBC590}"/>
+                <a16:creationId xmlns:a16="http://schemas.microsoft.com/office/drawing/2014/main" id="{05171195-4027-4A5C-9AA2-5454BFC4EBF4}"/>
               </a:ext>
             </a:extLst>
           </p:cNvPr>
@@ -12484,7 +12484,7 @@
           <p:cNvPr id="9" name="">
             <a:extLst xmlns:a="http://schemas.openxmlformats.org/drawingml/2006/main">
               <a:ext uri="{FF2B5EF4-FFF2-40B4-BE49-F238E27FC236}">
-                <a16:creationId xmlns:a16="http://schemas.microsoft.com/office/drawing/2014/main" id="{2478BE43-781C-4449-9029-D1CC31640322}"/>
+                <a16:creationId xmlns:a16="http://schemas.microsoft.com/office/drawing/2014/main" id="{B6432490-D512-48D1-A70E-DF83A365ED11}"/>
               </a:ext>
             </a:extLst>
           </p:cNvPr>
@@ -12515,7 +12515,7 @@
           <p:cNvPr id="10" name="">
             <a:extLst xmlns:a="http://schemas.openxmlformats.org/drawingml/2006/main">
               <a:ext uri="{FF2B5EF4-FFF2-40B4-BE49-F238E27FC236}">
-                <a16:creationId xmlns:a16="http://schemas.microsoft.com/office/drawing/2014/main" id="{2D91D91D-107C-407D-8CD5-047BF2FD4747}"/>
+                <a16:creationId xmlns:a16="http://schemas.microsoft.com/office/drawing/2014/main" id="{4C2302C1-55C7-49FE-9046-FD265B429BCB}"/>
               </a:ext>
             </a:extLst>
           </p:cNvPr>
@@ -12546,7 +12546,7 @@
           <p:cNvPr id="11" name="">
             <a:extLst xmlns:a="http://schemas.openxmlformats.org/drawingml/2006/main">
               <a:ext uri="{FF2B5EF4-FFF2-40B4-BE49-F238E27FC236}">
-                <a16:creationId xmlns:a16="http://schemas.microsoft.com/office/drawing/2014/main" id="{1FA5D183-EC05-4C8D-B164-5D4848818BE5}"/>
+                <a16:creationId xmlns:a16="http://schemas.microsoft.com/office/drawing/2014/main" id="{34108906-6D10-4FA5-8571-CE8B86715B73}"/>
               </a:ext>
             </a:extLst>
           </p:cNvPr>
@@ -12577,7 +12577,7 @@
           <p:cNvPr id="12" name="">
             <a:extLst xmlns:a="http://schemas.openxmlformats.org/drawingml/2006/main">
               <a:ext uri="{FF2B5EF4-FFF2-40B4-BE49-F238E27FC236}">
-                <a16:creationId xmlns:a16="http://schemas.microsoft.com/office/drawing/2014/main" id="{ADD827AB-7881-4A95-BD77-B6EA284A178F}"/>
+                <a16:creationId xmlns:a16="http://schemas.microsoft.com/office/drawing/2014/main" id="{8BEA07AE-B353-4E49-A35D-9186CFB0E1CD}"/>
               </a:ext>
             </a:extLst>
           </p:cNvPr>
@@ -12608,7 +12608,7 @@
           <p:cNvPr id="13" name="">
             <a:extLst xmlns:a="http://schemas.openxmlformats.org/drawingml/2006/main">
               <a:ext uri="{FF2B5EF4-FFF2-40B4-BE49-F238E27FC236}">
-                <a16:creationId xmlns:a16="http://schemas.microsoft.com/office/drawing/2014/main" id="{BD23DE0C-56BC-43DD-BCF6-02CCEE11F2CE}"/>
+                <a16:creationId xmlns:a16="http://schemas.microsoft.com/office/drawing/2014/main" id="{B32806E6-83B1-45F4-B481-0D3EB243EDC6}"/>
               </a:ext>
             </a:extLst>
           </p:cNvPr>
@@ -12639,7 +12639,7 @@
           <p:cNvPr id="14" name="">
             <a:extLst xmlns:a="http://schemas.openxmlformats.org/drawingml/2006/main">
               <a:ext uri="{FF2B5EF4-FFF2-40B4-BE49-F238E27FC236}">
-                <a16:creationId xmlns:a16="http://schemas.microsoft.com/office/drawing/2014/main" id="{261B5B29-D17F-446A-8FFF-7A2A83B81371}"/>
+                <a16:creationId xmlns:a16="http://schemas.microsoft.com/office/drawing/2014/main" id="{7EBEFD30-E9E9-4DC0-97F1-839E7C65C9E1}"/>
               </a:ext>
             </a:extLst>
           </p:cNvPr>
@@ -12696,7 +12696,7 @@
           <p:cNvPr id="15" name="">
             <a:extLst xmlns:a="http://schemas.openxmlformats.org/drawingml/2006/main">
               <a:ext uri="{FF2B5EF4-FFF2-40B4-BE49-F238E27FC236}">
-                <a16:creationId xmlns:a16="http://schemas.microsoft.com/office/drawing/2014/main" id="{A25C5FE4-B000-4308-902F-7C33E9C38379}"/>
+                <a16:creationId xmlns:a16="http://schemas.microsoft.com/office/drawing/2014/main" id="{FF7437F7-EDE0-4591-B867-0431DA2055FF}"/>
               </a:ext>
             </a:extLst>
           </p:cNvPr>
@@ -12753,7 +12753,7 @@
           <p:cNvPr id="16" name="">
             <a:extLst xmlns:a="http://schemas.openxmlformats.org/drawingml/2006/main">
               <a:ext uri="{FF2B5EF4-FFF2-40B4-BE49-F238E27FC236}">
-                <a16:creationId xmlns:a16="http://schemas.microsoft.com/office/drawing/2014/main" id="{D4EF5233-977F-4A32-9BB1-223774B12ED7}"/>
+                <a16:creationId xmlns:a16="http://schemas.microsoft.com/office/drawing/2014/main" id="{DE0DF600-CC58-4FDB-AE8D-E652EF322B4D}"/>
               </a:ext>
             </a:extLst>
           </p:cNvPr>
@@ -12833,7 +12833,7 @@
           <p:cNvPr id="17" name="">
             <a:extLst xmlns:a="http://schemas.openxmlformats.org/drawingml/2006/main">
               <a:ext uri="{FF2B5EF4-FFF2-40B4-BE49-F238E27FC236}">
-                <a16:creationId xmlns:a16="http://schemas.microsoft.com/office/drawing/2014/main" id="{EE1157E7-3563-45CD-AC05-48DF24C8DC88}"/>
+                <a16:creationId xmlns:a16="http://schemas.microsoft.com/office/drawing/2014/main" id="{06225251-C23C-400A-9134-3F7DE17B706E}"/>
               </a:ext>
             </a:extLst>
           </p:cNvPr>
@@ -12890,7 +12890,7 @@
           <p:cNvPr id="18" name="">
             <a:extLst xmlns:a="http://schemas.openxmlformats.org/drawingml/2006/main">
               <a:ext uri="{FF2B5EF4-FFF2-40B4-BE49-F238E27FC236}">
-                <a16:creationId xmlns:a16="http://schemas.microsoft.com/office/drawing/2014/main" id="{DC3EE533-8E53-48D8-8507-CC8180D3DC0B}"/>
+                <a16:creationId xmlns:a16="http://schemas.microsoft.com/office/drawing/2014/main" id="{027C465C-4798-4BDE-BF20-D5693E29A2A1}"/>
               </a:ext>
             </a:extLst>
           </p:cNvPr>
@@ -12947,7 +12947,7 @@
           <p:cNvPr id="19" name="">
             <a:extLst xmlns:a="http://schemas.openxmlformats.org/drawingml/2006/main">
               <a:ext uri="{FF2B5EF4-FFF2-40B4-BE49-F238E27FC236}">
-                <a16:creationId xmlns:a16="http://schemas.microsoft.com/office/drawing/2014/main" id="{3D7AEA8B-85D7-4F58-9DCF-86A7D93C85BB}"/>
+                <a16:creationId xmlns:a16="http://schemas.microsoft.com/office/drawing/2014/main" id="{2E9966DF-5BD7-4B5F-953F-677B51B7BD20}"/>
               </a:ext>
             </a:extLst>
           </p:cNvPr>
@@ -13004,7 +13004,7 @@
           <p:cNvPr id="20" name="">
             <a:extLst xmlns:a="http://schemas.openxmlformats.org/drawingml/2006/main">
               <a:ext uri="{FF2B5EF4-FFF2-40B4-BE49-F238E27FC236}">
-                <a16:creationId xmlns:a16="http://schemas.microsoft.com/office/drawing/2014/main" id="{BBE7F6BF-2BBC-4D7B-9F47-15F9BBC3969A}"/>
+                <a16:creationId xmlns:a16="http://schemas.microsoft.com/office/drawing/2014/main" id="{0956C147-A6CC-4DF2-9790-D105B58DF671}"/>
               </a:ext>
             </a:extLst>
           </p:cNvPr>
@@ -13061,7 +13061,7 @@
           <p:cNvPr id="21" name="">
             <a:extLst xmlns:a="http://schemas.openxmlformats.org/drawingml/2006/main">
               <a:ext uri="{FF2B5EF4-FFF2-40B4-BE49-F238E27FC236}">
-                <a16:creationId xmlns:a16="http://schemas.microsoft.com/office/drawing/2014/main" id="{81DE26F8-DFF6-4A1A-8315-875ABB437EDC}"/>
+                <a16:creationId xmlns:a16="http://schemas.microsoft.com/office/drawing/2014/main" id="{DA3B45B3-E7EA-4005-9868-52C0F04F040A}"/>
               </a:ext>
             </a:extLst>
           </p:cNvPr>
@@ -13092,7 +13092,7 @@
           <p:cNvPr id="22" name="">
             <a:extLst xmlns:a="http://schemas.openxmlformats.org/drawingml/2006/main">
               <a:ext uri="{FF2B5EF4-FFF2-40B4-BE49-F238E27FC236}">
-                <a16:creationId xmlns:a16="http://schemas.microsoft.com/office/drawing/2014/main" id="{AE8C47EC-AD33-4A12-9BF9-0E64E0F7F3FB}"/>
+                <a16:creationId xmlns:a16="http://schemas.microsoft.com/office/drawing/2014/main" id="{30857A5D-9FDB-405F-B706-71567E5B9062}"/>
               </a:ext>
             </a:extLst>
           </p:cNvPr>
@@ -13147,7 +13147,7 @@
     </p:spTree>
     <p:extLst>
       <p:ext uri="{BB962C8B-B14F-4D97-AF65-F5344CB8AC3E}">
-        <p14:creationId xmlns:p14="http://schemas.microsoft.com/office/powerpoint/2010/main" val="722455598"/>
+        <p14:creationId xmlns:p14="http://schemas.microsoft.com/office/powerpoint/2010/main" val="308255621"/>
       </p:ext>
     </p:extLst>
   </p:cSld>
@@ -13178,7 +13178,7 @@
           <p:cNvPr id="20" name="">
             <a:extLst xmlns:a="http://schemas.openxmlformats.org/drawingml/2006/main">
               <a:ext uri="{FF2B5EF4-FFF2-40B4-BE49-F238E27FC236}">
-                <a16:creationId xmlns:a16="http://schemas.microsoft.com/office/drawing/2014/main" id="{7F104A93-625C-4C31-9C89-230BF02598CC}"/>
+                <a16:creationId xmlns:a16="http://schemas.microsoft.com/office/drawing/2014/main" id="{B59197EA-6680-43EA-A76D-2011EB6391D5}"/>
               </a:ext>
             </a:extLst>
           </p:cNvPr>
@@ -13235,7 +13235,7 @@
           <p:cNvPr id="2" name="">
             <a:extLst xmlns:a="http://schemas.openxmlformats.org/drawingml/2006/main">
               <a:ext uri="{FF2B5EF4-FFF2-40B4-BE49-F238E27FC236}">
-                <a16:creationId xmlns:a16="http://schemas.microsoft.com/office/drawing/2014/main" id="{12E59810-C4EF-487D-8039-0DC88D3C8E24}"/>
+                <a16:creationId xmlns:a16="http://schemas.microsoft.com/office/drawing/2014/main" id="{DB2D57A7-4122-4A1D-AF18-37FC713AC887}"/>
               </a:ext>
             </a:extLst>
           </p:cNvPr>
@@ -13266,7 +13266,7 @@
           <p:cNvPr id="3" name="">
             <a:extLst xmlns:a="http://schemas.openxmlformats.org/drawingml/2006/main">
               <a:ext uri="{FF2B5EF4-FFF2-40B4-BE49-F238E27FC236}">
-                <a16:creationId xmlns:a16="http://schemas.microsoft.com/office/drawing/2014/main" id="{0A453008-D39A-401A-B2B7-7B3F27795423}"/>
+                <a16:creationId xmlns:a16="http://schemas.microsoft.com/office/drawing/2014/main" id="{88DE52B3-FBD5-4156-9514-344686A508AE}"/>
               </a:ext>
             </a:extLst>
           </p:cNvPr>
@@ -13323,7 +13323,7 @@
           <p:cNvPr id="4" name="">
             <a:extLst xmlns:a="http://schemas.openxmlformats.org/drawingml/2006/main">
               <a:ext uri="{FF2B5EF4-FFF2-40B4-BE49-F238E27FC236}">
-                <a16:creationId xmlns:a16="http://schemas.microsoft.com/office/drawing/2014/main" id="{42D2B376-6B2D-4BD2-8039-24D8972839C6}"/>
+                <a16:creationId xmlns:a16="http://schemas.microsoft.com/office/drawing/2014/main" id="{3C2EC4C7-CA0A-48A8-B7F6-6DD17191FD9F}"/>
               </a:ext>
             </a:extLst>
           </p:cNvPr>
@@ -13380,7 +13380,7 @@
           <p:cNvPr id="5" name="">
             <a:extLst xmlns:a="http://schemas.openxmlformats.org/drawingml/2006/main">
               <a:ext uri="{FF2B5EF4-FFF2-40B4-BE49-F238E27FC236}">
-                <a16:creationId xmlns:a16="http://schemas.microsoft.com/office/drawing/2014/main" id="{AFB9A089-F27A-47ED-9397-AB7E1641266C}"/>
+                <a16:creationId xmlns:a16="http://schemas.microsoft.com/office/drawing/2014/main" id="{CF382E93-2DE0-452C-95FF-31D85371FA19}"/>
               </a:ext>
             </a:extLst>
           </p:cNvPr>
@@ -13437,7 +13437,7 @@
           <p:cNvPr id="6" name="">
             <a:extLst xmlns:a="http://schemas.openxmlformats.org/drawingml/2006/main">
               <a:ext uri="{FF2B5EF4-FFF2-40B4-BE49-F238E27FC236}">
-                <a16:creationId xmlns:a16="http://schemas.microsoft.com/office/drawing/2014/main" id="{5C2AB771-F4FE-4846-A0A9-B1F160BBAED7}"/>
+                <a16:creationId xmlns:a16="http://schemas.microsoft.com/office/drawing/2014/main" id="{E707532C-AC4C-4AEE-9041-AC12A56B3C8C}"/>
               </a:ext>
             </a:extLst>
           </p:cNvPr>
@@ -13494,7 +13494,7 @@
           <p:cNvPr id="7" name="">
             <a:extLst xmlns:a="http://schemas.openxmlformats.org/drawingml/2006/main">
               <a:ext uri="{FF2B5EF4-FFF2-40B4-BE49-F238E27FC236}">
-                <a16:creationId xmlns:a16="http://schemas.microsoft.com/office/drawing/2014/main" id="{239F99C1-5A99-4D0F-89F9-D421B017ED86}"/>
+                <a16:creationId xmlns:a16="http://schemas.microsoft.com/office/drawing/2014/main" id="{CF738EED-66A0-4F79-91EA-C7CF8D42438D}"/>
               </a:ext>
             </a:extLst>
           </p:cNvPr>
@@ -13527,7 +13527,7 @@
           <p:cNvPr id="8" name="">
             <a:extLst xmlns:a="http://schemas.openxmlformats.org/drawingml/2006/main">
               <a:ext uri="{FF2B5EF4-FFF2-40B4-BE49-F238E27FC236}">
-                <a16:creationId xmlns:a16="http://schemas.microsoft.com/office/drawing/2014/main" id="{53B64194-C980-402D-9976-C92204118BCC}"/>
+                <a16:creationId xmlns:a16="http://schemas.microsoft.com/office/drawing/2014/main" id="{E2BB7D33-2B72-467B-9D2A-5DAAC1C806BD}"/>
               </a:ext>
             </a:extLst>
           </p:cNvPr>
@@ -13584,7 +13584,7 @@
           <p:cNvPr id="9" name="">
             <a:extLst xmlns:a="http://schemas.openxmlformats.org/drawingml/2006/main">
               <a:ext uri="{FF2B5EF4-FFF2-40B4-BE49-F238E27FC236}">
-                <a16:creationId xmlns:a16="http://schemas.microsoft.com/office/drawing/2014/main" id="{EDD0B152-76FA-4006-8C50-C88BE7CB6882}"/>
+                <a16:creationId xmlns:a16="http://schemas.microsoft.com/office/drawing/2014/main" id="{D3F154AC-0CE1-41A1-8AD7-44AE76C64929}"/>
               </a:ext>
             </a:extLst>
           </p:cNvPr>
@@ -13617,7 +13617,7 @@
           <p:cNvPr id="10" name="">
             <a:extLst xmlns:a="http://schemas.openxmlformats.org/drawingml/2006/main">
               <a:ext uri="{FF2B5EF4-FFF2-40B4-BE49-F238E27FC236}">
-                <a16:creationId xmlns:a16="http://schemas.microsoft.com/office/drawing/2014/main" id="{B2ECA8BC-BA9E-4545-8CBE-3678055DB3AD}"/>
+                <a16:creationId xmlns:a16="http://schemas.microsoft.com/office/drawing/2014/main" id="{23A81BB3-74A3-4B5E-99B2-195479D2C936}"/>
               </a:ext>
             </a:extLst>
           </p:cNvPr>
@@ -13700,7 +13700,7 @@
           <p:cNvPr id="12" name="">
             <a:extLst xmlns:a="http://schemas.openxmlformats.org/drawingml/2006/main">
               <a:ext uri="{FF2B5EF4-FFF2-40B4-BE49-F238E27FC236}">
-                <a16:creationId xmlns:a16="http://schemas.microsoft.com/office/drawing/2014/main" id="{93EFE890-08CF-4A44-A1E1-FE03A00F1241}"/>
+                <a16:creationId xmlns:a16="http://schemas.microsoft.com/office/drawing/2014/main" id="{E8F086DC-08F4-4121-9AEE-B4F9CDC012A9}"/>
               </a:ext>
             </a:extLst>
           </p:cNvPr>
@@ -13780,7 +13780,7 @@
           <p:cNvPr id="13" name="">
             <a:extLst xmlns:a="http://schemas.openxmlformats.org/drawingml/2006/main">
               <a:ext uri="{FF2B5EF4-FFF2-40B4-BE49-F238E27FC236}">
-                <a16:creationId xmlns:a16="http://schemas.microsoft.com/office/drawing/2014/main" id="{D74E9226-7F37-4E8C-9B9F-0E10D178CE7D}"/>
+                <a16:creationId xmlns:a16="http://schemas.microsoft.com/office/drawing/2014/main" id="{C4E45B17-2387-4AB7-AA2B-BC5208A47CC5}"/>
               </a:ext>
             </a:extLst>
           </p:cNvPr>
@@ -13837,7 +13837,7 @@
           <p:cNvPr id="14" name="">
             <a:extLst xmlns:a="http://schemas.openxmlformats.org/drawingml/2006/main">
               <a:ext uri="{FF2B5EF4-FFF2-40B4-BE49-F238E27FC236}">
-                <a16:creationId xmlns:a16="http://schemas.microsoft.com/office/drawing/2014/main" id="{5DCD1BDD-5777-4199-86DD-EA0ED6C95640}"/>
+                <a16:creationId xmlns:a16="http://schemas.microsoft.com/office/drawing/2014/main" id="{FDA5FF34-9775-46DB-9917-AA7B384F7679}"/>
               </a:ext>
             </a:extLst>
           </p:cNvPr>
@@ -13894,7 +13894,7 @@
           <p:cNvPr id="15" name="">
             <a:extLst xmlns:a="http://schemas.openxmlformats.org/drawingml/2006/main">
               <a:ext uri="{FF2B5EF4-FFF2-40B4-BE49-F238E27FC236}">
-                <a16:creationId xmlns:a16="http://schemas.microsoft.com/office/drawing/2014/main" id="{93767B1D-B609-49EC-8F6E-E1ED318647C1}"/>
+                <a16:creationId xmlns:a16="http://schemas.microsoft.com/office/drawing/2014/main" id="{1A0A9802-9959-4BA0-809B-1313A5B81F19}"/>
               </a:ext>
             </a:extLst>
           </p:cNvPr>
@@ -13951,7 +13951,7 @@
           <p:cNvPr id="16" name="">
             <a:extLst xmlns:a="http://schemas.openxmlformats.org/drawingml/2006/main">
               <a:ext uri="{FF2B5EF4-FFF2-40B4-BE49-F238E27FC236}">
-                <a16:creationId xmlns:a16="http://schemas.microsoft.com/office/drawing/2014/main" id="{A8151A32-1CD3-4ED3-9EAF-51B6BC75821F}"/>
+                <a16:creationId xmlns:a16="http://schemas.microsoft.com/office/drawing/2014/main" id="{F986E9B5-9DB9-46C6-8605-4ADC727121FF}"/>
               </a:ext>
             </a:extLst>
           </p:cNvPr>
@@ -14008,7 +14008,7 @@
           <p:cNvPr id="17" name="">
             <a:extLst xmlns:a="http://schemas.openxmlformats.org/drawingml/2006/main">
               <a:ext uri="{FF2B5EF4-FFF2-40B4-BE49-F238E27FC236}">
-                <a16:creationId xmlns:a16="http://schemas.microsoft.com/office/drawing/2014/main" id="{78C8459F-2E1B-42AD-85F1-EAB56C4BB2E1}"/>
+                <a16:creationId xmlns:a16="http://schemas.microsoft.com/office/drawing/2014/main" id="{24224078-8138-4FE8-8E8D-0A6647623E41}"/>
               </a:ext>
             </a:extLst>
           </p:cNvPr>
@@ -14065,7 +14065,7 @@
           <p:cNvPr id="18" name="">
             <a:extLst xmlns:a="http://schemas.openxmlformats.org/drawingml/2006/main">
               <a:ext uri="{FF2B5EF4-FFF2-40B4-BE49-F238E27FC236}">
-                <a16:creationId xmlns:a16="http://schemas.microsoft.com/office/drawing/2014/main" id="{CD9618CA-60B9-4531-93D0-F33B5C9F1950}"/>
+                <a16:creationId xmlns:a16="http://schemas.microsoft.com/office/drawing/2014/main" id="{D44FAD2F-405A-44E1-857D-9674308B7ABE}"/>
               </a:ext>
             </a:extLst>
           </p:cNvPr>
@@ -14096,7 +14096,7 @@
           <p:cNvPr id="19" name="">
             <a:extLst xmlns:a="http://schemas.openxmlformats.org/drawingml/2006/main">
               <a:ext uri="{FF2B5EF4-FFF2-40B4-BE49-F238E27FC236}">
-                <a16:creationId xmlns:a16="http://schemas.microsoft.com/office/drawing/2014/main" id="{87B74B1F-7C59-4125-A3CC-34596996456E}"/>
+                <a16:creationId xmlns:a16="http://schemas.microsoft.com/office/drawing/2014/main" id="{F484E58C-BF18-4C2C-9CEA-490F246CFBF7}"/>
               </a:ext>
             </a:extLst>
           </p:cNvPr>
@@ -14151,7 +14151,7 @@
     </p:spTree>
     <p:extLst>
       <p:ext uri="{BB962C8B-B14F-4D97-AF65-F5344CB8AC3E}">
-        <p14:creationId xmlns:p14="http://schemas.microsoft.com/office/powerpoint/2010/main" val="663390554"/>
+        <p14:creationId xmlns:p14="http://schemas.microsoft.com/office/powerpoint/2010/main" val="30907407"/>
       </p:ext>
     </p:extLst>
   </p:cSld>
@@ -14182,7 +14182,7 @@
           <p:cNvPr id="22" name="">
             <a:extLst xmlns:a="http://schemas.openxmlformats.org/drawingml/2006/main">
               <a:ext uri="{FF2B5EF4-FFF2-40B4-BE49-F238E27FC236}">
-                <a16:creationId xmlns:a16="http://schemas.microsoft.com/office/drawing/2014/main" id="{2F257AAC-4C4F-4078-80D1-84A976E463B8}"/>
+                <a16:creationId xmlns:a16="http://schemas.microsoft.com/office/drawing/2014/main" id="{2F0A1A73-8F63-464F-B3E3-A85D2CF8CB3C}"/>
               </a:ext>
             </a:extLst>
           </p:cNvPr>
@@ -14262,7 +14262,7 @@
           <p:cNvPr id="2" name="">
             <a:extLst xmlns:a="http://schemas.openxmlformats.org/drawingml/2006/main">
               <a:ext uri="{FF2B5EF4-FFF2-40B4-BE49-F238E27FC236}">
-                <a16:creationId xmlns:a16="http://schemas.microsoft.com/office/drawing/2014/main" id="{5A64F980-4DBF-422C-A32D-5B9860DFC335}"/>
+                <a16:creationId xmlns:a16="http://schemas.microsoft.com/office/drawing/2014/main" id="{DCE48C41-5F63-4BB8-9C41-7D891A4F3F4E}"/>
               </a:ext>
             </a:extLst>
           </p:cNvPr>
@@ -14293,7 +14293,7 @@
           <p:cNvPr id="3" name="">
             <a:extLst xmlns:a="http://schemas.openxmlformats.org/drawingml/2006/main">
               <a:ext uri="{FF2B5EF4-FFF2-40B4-BE49-F238E27FC236}">
-                <a16:creationId xmlns:a16="http://schemas.microsoft.com/office/drawing/2014/main" id="{EA373210-7498-46D4-BA3E-43870463835E}"/>
+                <a16:creationId xmlns:a16="http://schemas.microsoft.com/office/drawing/2014/main" id="{003E1E73-D188-4EB5-BCAB-6FD6D9F5593D}"/>
               </a:ext>
             </a:extLst>
           </p:cNvPr>
@@ -14350,7 +14350,7 @@
           <p:cNvPr id="4" name="">
             <a:extLst xmlns:a="http://schemas.openxmlformats.org/drawingml/2006/main">
               <a:ext uri="{FF2B5EF4-FFF2-40B4-BE49-F238E27FC236}">
-                <a16:creationId xmlns:a16="http://schemas.microsoft.com/office/drawing/2014/main" id="{CB9C7B64-D61F-4803-95F3-74C4956D44F9}"/>
+                <a16:creationId xmlns:a16="http://schemas.microsoft.com/office/drawing/2014/main" id="{E395B5FF-537A-423C-BF5C-C20E846C31EF}"/>
               </a:ext>
             </a:extLst>
           </p:cNvPr>
@@ -14407,7 +14407,7 @@
           <p:cNvPr id="5" name="">
             <a:extLst xmlns:a="http://schemas.openxmlformats.org/drawingml/2006/main">
               <a:ext uri="{FF2B5EF4-FFF2-40B4-BE49-F238E27FC236}">
-                <a16:creationId xmlns:a16="http://schemas.microsoft.com/office/drawing/2014/main" id="{2A6BA014-36C5-4A82-A22E-00A8B39E4478}"/>
+                <a16:creationId xmlns:a16="http://schemas.microsoft.com/office/drawing/2014/main" id="{078BD4F1-C96A-4414-B865-B0D9B74E5501}"/>
               </a:ext>
             </a:extLst>
           </p:cNvPr>
@@ -14438,7 +14438,7 @@
           <p:cNvPr id="6" name="">
             <a:extLst xmlns:a="http://schemas.openxmlformats.org/drawingml/2006/main">
               <a:ext uri="{FF2B5EF4-FFF2-40B4-BE49-F238E27FC236}">
-                <a16:creationId xmlns:a16="http://schemas.microsoft.com/office/drawing/2014/main" id="{253F69FE-6511-4BEB-B53F-C030D345FE1B}"/>
+                <a16:creationId xmlns:a16="http://schemas.microsoft.com/office/drawing/2014/main" id="{17795297-06E7-472B-92C7-412682A2395E}"/>
               </a:ext>
             </a:extLst>
           </p:cNvPr>
@@ -14495,7 +14495,7 @@
           <p:cNvPr id="7" name="">
             <a:extLst xmlns:a="http://schemas.openxmlformats.org/drawingml/2006/main">
               <a:ext uri="{FF2B5EF4-FFF2-40B4-BE49-F238E27FC236}">
-                <a16:creationId xmlns:a16="http://schemas.microsoft.com/office/drawing/2014/main" id="{DA010A8C-9581-4F08-B678-793E1557FA6C}"/>
+                <a16:creationId xmlns:a16="http://schemas.microsoft.com/office/drawing/2014/main" id="{3F71D555-651F-41F8-8F38-97BE560C8653}"/>
               </a:ext>
             </a:extLst>
           </p:cNvPr>
@@ -14552,7 +14552,7 @@
           <p:cNvPr id="8" name="">
             <a:extLst xmlns:a="http://schemas.openxmlformats.org/drawingml/2006/main">
               <a:ext uri="{FF2B5EF4-FFF2-40B4-BE49-F238E27FC236}">
-                <a16:creationId xmlns:a16="http://schemas.microsoft.com/office/drawing/2014/main" id="{8CFEE917-DAEC-4624-AB4C-E8AB5D90B4E5}"/>
+                <a16:creationId xmlns:a16="http://schemas.microsoft.com/office/drawing/2014/main" id="{BA54902E-0214-47B0-B801-356B36440B7B}"/>
               </a:ext>
             </a:extLst>
           </p:cNvPr>
@@ -14609,7 +14609,7 @@
           <p:cNvPr id="9" name="">
             <a:extLst xmlns:a="http://schemas.openxmlformats.org/drawingml/2006/main">
               <a:ext uri="{FF2B5EF4-FFF2-40B4-BE49-F238E27FC236}">
-                <a16:creationId xmlns:a16="http://schemas.microsoft.com/office/drawing/2014/main" id="{86F6E18E-8AA2-484F-8ABF-337EB8DB31EB}"/>
+                <a16:creationId xmlns:a16="http://schemas.microsoft.com/office/drawing/2014/main" id="{EF00C471-7DAE-44DD-ACC8-C37DC18C5A11}"/>
               </a:ext>
             </a:extLst>
           </p:cNvPr>
@@ -14666,7 +14666,7 @@
           <p:cNvPr id="10" name="">
             <a:extLst xmlns:a="http://schemas.openxmlformats.org/drawingml/2006/main">
               <a:ext uri="{FF2B5EF4-FFF2-40B4-BE49-F238E27FC236}">
-                <a16:creationId xmlns:a16="http://schemas.microsoft.com/office/drawing/2014/main" id="{4D663C15-359E-479D-BFAC-9B3544F384DE}"/>
+                <a16:creationId xmlns:a16="http://schemas.microsoft.com/office/drawing/2014/main" id="{186A86FC-4868-46C3-BDCD-7446A16EE909}"/>
               </a:ext>
             </a:extLst>
           </p:cNvPr>
@@ -14723,7 +14723,7 @@
           <p:cNvPr id="11" name="">
             <a:extLst xmlns:a="http://schemas.openxmlformats.org/drawingml/2006/main">
               <a:ext uri="{FF2B5EF4-FFF2-40B4-BE49-F238E27FC236}">
-                <a16:creationId xmlns:a16="http://schemas.microsoft.com/office/drawing/2014/main" id="{D9FA42C2-6493-4D6D-958E-59CB76EDC318}"/>
+                <a16:creationId xmlns:a16="http://schemas.microsoft.com/office/drawing/2014/main" id="{DE63346C-FDAC-4C5E-8D22-06101EB5A982}"/>
               </a:ext>
             </a:extLst>
           </p:cNvPr>
@@ -14754,7 +14754,7 @@
           <p:cNvPr id="12" name="">
             <a:extLst xmlns:a="http://schemas.openxmlformats.org/drawingml/2006/main">
               <a:ext uri="{FF2B5EF4-FFF2-40B4-BE49-F238E27FC236}">
-                <a16:creationId xmlns:a16="http://schemas.microsoft.com/office/drawing/2014/main" id="{EA04E271-DB3E-4087-A8F0-C2385D2F9EDC}"/>
+                <a16:creationId xmlns:a16="http://schemas.microsoft.com/office/drawing/2014/main" id="{17562353-A2ED-4DE3-91D4-7E9B25A28A0F}"/>
               </a:ext>
             </a:extLst>
           </p:cNvPr>
@@ -14811,7 +14811,7 @@
           <p:cNvPr id="13" name="">
             <a:extLst xmlns:a="http://schemas.openxmlformats.org/drawingml/2006/main">
               <a:ext uri="{FF2B5EF4-FFF2-40B4-BE49-F238E27FC236}">
-                <a16:creationId xmlns:a16="http://schemas.microsoft.com/office/drawing/2014/main" id="{8108E90E-C1B1-47A2-839E-40CC75F35D01}"/>
+                <a16:creationId xmlns:a16="http://schemas.microsoft.com/office/drawing/2014/main" id="{57A4309A-5239-438A-9D2A-DB55C2CF47B8}"/>
               </a:ext>
             </a:extLst>
           </p:cNvPr>
@@ -14868,7 +14868,7 @@
           <p:cNvPr id="14" name="">
             <a:extLst xmlns:a="http://schemas.openxmlformats.org/drawingml/2006/main">
               <a:ext uri="{FF2B5EF4-FFF2-40B4-BE49-F238E27FC236}">
-                <a16:creationId xmlns:a16="http://schemas.microsoft.com/office/drawing/2014/main" id="{696C8A1E-E42E-4A3C-9F04-887A7DC9C87F}"/>
+                <a16:creationId xmlns:a16="http://schemas.microsoft.com/office/drawing/2014/main" id="{2CDD511D-6111-4292-AFA1-BE12A52EDA4B}"/>
               </a:ext>
             </a:extLst>
           </p:cNvPr>
@@ -14925,7 +14925,7 @@
           <p:cNvPr id="15" name="">
             <a:extLst xmlns:a="http://schemas.openxmlformats.org/drawingml/2006/main">
               <a:ext uri="{FF2B5EF4-FFF2-40B4-BE49-F238E27FC236}">
-                <a16:creationId xmlns:a16="http://schemas.microsoft.com/office/drawing/2014/main" id="{6A21E45C-62CA-4F41-94C4-F4F9E7E620A4}"/>
+                <a16:creationId xmlns:a16="http://schemas.microsoft.com/office/drawing/2014/main" id="{E03D89B6-71DB-439D-92D5-63E0BB93F399}"/>
               </a:ext>
             </a:extLst>
           </p:cNvPr>
@@ -14982,7 +14982,7 @@
           <p:cNvPr id="16" name="">
             <a:extLst xmlns:a="http://schemas.openxmlformats.org/drawingml/2006/main">
               <a:ext uri="{FF2B5EF4-FFF2-40B4-BE49-F238E27FC236}">
-                <a16:creationId xmlns:a16="http://schemas.microsoft.com/office/drawing/2014/main" id="{34ECA3EA-56AA-44ED-8285-D0930684FD9B}"/>
+                <a16:creationId xmlns:a16="http://schemas.microsoft.com/office/drawing/2014/main" id="{FA3B1398-CED0-43D2-A4FD-A1AB93F3E576}"/>
               </a:ext>
             </a:extLst>
           </p:cNvPr>
@@ -15039,7 +15039,7 @@
           <p:cNvPr id="17" name="">
             <a:extLst xmlns:a="http://schemas.openxmlformats.org/drawingml/2006/main">
               <a:ext uri="{FF2B5EF4-FFF2-40B4-BE49-F238E27FC236}">
-                <a16:creationId xmlns:a16="http://schemas.microsoft.com/office/drawing/2014/main" id="{46E999B9-2ADF-4D57-9DEB-72A719D13D8C}"/>
+                <a16:creationId xmlns:a16="http://schemas.microsoft.com/office/drawing/2014/main" id="{2C1FE53D-B528-4893-93A3-8938BFC62045}"/>
               </a:ext>
             </a:extLst>
           </p:cNvPr>
@@ -15070,7 +15070,7 @@
           <p:cNvPr id="18" name="">
             <a:extLst xmlns:a="http://schemas.openxmlformats.org/drawingml/2006/main">
               <a:ext uri="{FF2B5EF4-FFF2-40B4-BE49-F238E27FC236}">
-                <a16:creationId xmlns:a16="http://schemas.microsoft.com/office/drawing/2014/main" id="{D92DDFD3-7F9C-4D68-97BA-45156CFFABD8}"/>
+                <a16:creationId xmlns:a16="http://schemas.microsoft.com/office/drawing/2014/main" id="{A3FA4DF7-13F0-4599-9F6A-62F92DA24AD1}"/>
               </a:ext>
             </a:extLst>
           </p:cNvPr>
@@ -15127,7 +15127,7 @@
           <p:cNvPr id="19" name="">
             <a:extLst xmlns:a="http://schemas.openxmlformats.org/drawingml/2006/main">
               <a:ext uri="{FF2B5EF4-FFF2-40B4-BE49-F238E27FC236}">
-                <a16:creationId xmlns:a16="http://schemas.microsoft.com/office/drawing/2014/main" id="{3EE36A48-42FB-460D-891C-7711CE96D21C}"/>
+                <a16:creationId xmlns:a16="http://schemas.microsoft.com/office/drawing/2014/main" id="{E9CC9FD9-3DDB-450A-9E95-F76B65750CFF}"/>
               </a:ext>
             </a:extLst>
           </p:cNvPr>
@@ -15158,7 +15158,7 @@
           <p:cNvPr id="20" name="">
             <a:extLst xmlns:a="http://schemas.openxmlformats.org/drawingml/2006/main">
               <a:ext uri="{FF2B5EF4-FFF2-40B4-BE49-F238E27FC236}">
-                <a16:creationId xmlns:a16="http://schemas.microsoft.com/office/drawing/2014/main" id="{7A3AA268-144D-420E-87D5-298B5539E092}"/>
+                <a16:creationId xmlns:a16="http://schemas.microsoft.com/office/drawing/2014/main" id="{2DB31188-7112-4A1A-8ADA-8A30C0B0209F}"/>
               </a:ext>
             </a:extLst>
           </p:cNvPr>
@@ -15215,7 +15215,7 @@
           <p:cNvPr id="21" name="">
             <a:extLst xmlns:a="http://schemas.openxmlformats.org/drawingml/2006/main">
               <a:ext uri="{FF2B5EF4-FFF2-40B4-BE49-F238E27FC236}">
-                <a16:creationId xmlns:a16="http://schemas.microsoft.com/office/drawing/2014/main" id="{374802F4-4B7A-4B7B-9C51-D89DA3C053F9}"/>
+                <a16:creationId xmlns:a16="http://schemas.microsoft.com/office/drawing/2014/main" id="{0C701978-DCF4-4725-BFB5-A1325B2E118C}"/>
               </a:ext>
             </a:extLst>
           </p:cNvPr>
@@ -15270,7 +15270,7 @@
     </p:spTree>
     <p:extLst>
       <p:ext uri="{BB962C8B-B14F-4D97-AF65-F5344CB8AC3E}">
-        <p14:creationId xmlns:p14="http://schemas.microsoft.com/office/powerpoint/2010/main" val="1005439598"/>
+        <p14:creationId xmlns:p14="http://schemas.microsoft.com/office/powerpoint/2010/main" val="565923428"/>
       </p:ext>
     </p:extLst>
   </p:cSld>
@@ -15301,7 +15301,7 @@
           <p:cNvPr id="13" name="">
             <a:extLst xmlns:a="http://schemas.openxmlformats.org/drawingml/2006/main">
               <a:ext uri="{FF2B5EF4-FFF2-40B4-BE49-F238E27FC236}">
-                <a16:creationId xmlns:a16="http://schemas.microsoft.com/office/drawing/2014/main" id="{A168239A-FBB7-44D2-88C3-6724874B5836}"/>
+                <a16:creationId xmlns:a16="http://schemas.microsoft.com/office/drawing/2014/main" id="{C16AA865-FE26-49A8-B72B-335B52F415D8}"/>
               </a:ext>
             </a:extLst>
           </p:cNvPr>
@@ -15358,7 +15358,7 @@
           <p:cNvPr id="2" name="">
             <a:extLst xmlns:a="http://schemas.openxmlformats.org/drawingml/2006/main">
               <a:ext uri="{FF2B5EF4-FFF2-40B4-BE49-F238E27FC236}">
-                <a16:creationId xmlns:a16="http://schemas.microsoft.com/office/drawing/2014/main" id="{E4FBABC3-22DF-4946-B279-7323490AF57B}"/>
+                <a16:creationId xmlns:a16="http://schemas.microsoft.com/office/drawing/2014/main" id="{79A49568-D7B3-448C-9FF8-18162A96926E}"/>
               </a:ext>
             </a:extLst>
           </p:cNvPr>
@@ -15389,7 +15389,7 @@
           <p:cNvPr id="3" name="">
             <a:extLst xmlns:a="http://schemas.openxmlformats.org/drawingml/2006/main">
               <a:ext uri="{FF2B5EF4-FFF2-40B4-BE49-F238E27FC236}">
-                <a16:creationId xmlns:a16="http://schemas.microsoft.com/office/drawing/2014/main" id="{5E831531-51D7-45C7-A691-E21A30637383}"/>
+                <a16:creationId xmlns:a16="http://schemas.microsoft.com/office/drawing/2014/main" id="{95AF1DBA-329C-4D84-ACB1-85ADEF3AAD38}"/>
               </a:ext>
             </a:extLst>
           </p:cNvPr>
@@ -15446,7 +15446,7 @@
           <p:cNvPr id="4" name="">
             <a:extLst xmlns:a="http://schemas.openxmlformats.org/drawingml/2006/main">
               <a:ext uri="{FF2B5EF4-FFF2-40B4-BE49-F238E27FC236}">
-                <a16:creationId xmlns:a16="http://schemas.microsoft.com/office/drawing/2014/main" id="{85F7C6CE-579D-4D08-B449-DED66F2490B6}"/>
+                <a16:creationId xmlns:a16="http://schemas.microsoft.com/office/drawing/2014/main" id="{99CEC481-3A9F-43D3-BD0C-BF7A8087704E}"/>
               </a:ext>
             </a:extLst>
           </p:cNvPr>
@@ -15503,7 +15503,7 @@
           <p:cNvPr id="5" name="">
             <a:extLst xmlns:a="http://schemas.openxmlformats.org/drawingml/2006/main">
               <a:ext uri="{FF2B5EF4-FFF2-40B4-BE49-F238E27FC236}">
-                <a16:creationId xmlns:a16="http://schemas.microsoft.com/office/drawing/2014/main" id="{2DBA1ED8-AD9D-4167-BEF0-14226731F9DB}"/>
+                <a16:creationId xmlns:a16="http://schemas.microsoft.com/office/drawing/2014/main" id="{557FA0E0-8351-474B-AB94-237B0C2923B6}"/>
               </a:ext>
             </a:extLst>
           </p:cNvPr>
@@ -15560,7 +15560,7 @@
           <p:cNvPr id="6" name="">
             <a:extLst xmlns:a="http://schemas.openxmlformats.org/drawingml/2006/main">
               <a:ext uri="{FF2B5EF4-FFF2-40B4-BE49-F238E27FC236}">
-                <a16:creationId xmlns:a16="http://schemas.microsoft.com/office/drawing/2014/main" id="{A525777B-1C1A-4E2E-A4EF-7869FF79E0DE}"/>
+                <a16:creationId xmlns:a16="http://schemas.microsoft.com/office/drawing/2014/main" id="{637917FB-7DF1-4B32-BE79-590D2DC58BB6}"/>
               </a:ext>
             </a:extLst>
           </p:cNvPr>
@@ -15617,7 +15617,7 @@
           <p:cNvPr id="7" name="">
             <a:extLst xmlns:a="http://schemas.openxmlformats.org/drawingml/2006/main">
               <a:ext uri="{FF2B5EF4-FFF2-40B4-BE49-F238E27FC236}">
-                <a16:creationId xmlns:a16="http://schemas.microsoft.com/office/drawing/2014/main" id="{AB12A076-E81A-412B-91C6-6ED8EA920F72}"/>
+                <a16:creationId xmlns:a16="http://schemas.microsoft.com/office/drawing/2014/main" id="{07F6EF4E-F5FB-457C-B7E1-E6631FA5D49A}"/>
               </a:ext>
             </a:extLst>
           </p:cNvPr>
@@ -15674,7 +15674,7 @@
           <p:cNvPr id="8" name="">
             <a:extLst xmlns:a="http://schemas.openxmlformats.org/drawingml/2006/main">
               <a:ext uri="{FF2B5EF4-FFF2-40B4-BE49-F238E27FC236}">
-                <a16:creationId xmlns:a16="http://schemas.microsoft.com/office/drawing/2014/main" id="{E696B824-3DC4-42B5-8466-6F4EFA66D5BB}"/>
+                <a16:creationId xmlns:a16="http://schemas.microsoft.com/office/drawing/2014/main" id="{7CAD02FB-6233-4C6F-9EEA-54C774A3E3F0}"/>
               </a:ext>
             </a:extLst>
           </p:cNvPr>
@@ -15731,7 +15731,7 @@
           <p:cNvPr id="9" name="">
             <a:extLst xmlns:a="http://schemas.openxmlformats.org/drawingml/2006/main">
               <a:ext uri="{FF2B5EF4-FFF2-40B4-BE49-F238E27FC236}">
-                <a16:creationId xmlns:a16="http://schemas.microsoft.com/office/drawing/2014/main" id="{A5A347DB-85F5-44BD-87C5-9190E3DFC5B5}"/>
+                <a16:creationId xmlns:a16="http://schemas.microsoft.com/office/drawing/2014/main" id="{A5F8153D-63D4-46FD-93E3-24E758432A97}"/>
               </a:ext>
             </a:extLst>
           </p:cNvPr>
@@ -15788,7 +15788,7 @@
           <p:cNvPr id="10" name="">
             <a:extLst xmlns:a="http://schemas.openxmlformats.org/drawingml/2006/main">
               <a:ext uri="{FF2B5EF4-FFF2-40B4-BE49-F238E27FC236}">
-                <a16:creationId xmlns:a16="http://schemas.microsoft.com/office/drawing/2014/main" id="{D449B3E5-9BDD-46D5-A125-17A7C87E2EC4}"/>
+                <a16:creationId xmlns:a16="http://schemas.microsoft.com/office/drawing/2014/main" id="{4E0B87B9-2D56-405C-B95B-E809B64EC058}"/>
               </a:ext>
             </a:extLst>
           </p:cNvPr>
@@ -15845,7 +15845,7 @@
           <p:cNvPr id="11" name="">
             <a:extLst xmlns:a="http://schemas.openxmlformats.org/drawingml/2006/main">
               <a:ext uri="{FF2B5EF4-FFF2-40B4-BE49-F238E27FC236}">
-                <a16:creationId xmlns:a16="http://schemas.microsoft.com/office/drawing/2014/main" id="{F1767C01-E6D7-4D88-99F0-30BFADB489BE}"/>
+                <a16:creationId xmlns:a16="http://schemas.microsoft.com/office/drawing/2014/main" id="{C0B1B467-51DF-4036-8591-2F4C58062268}"/>
               </a:ext>
             </a:extLst>
           </p:cNvPr>
@@ -15876,7 +15876,7 @@
           <p:cNvPr id="12" name="">
             <a:extLst xmlns:a="http://schemas.openxmlformats.org/drawingml/2006/main">
               <a:ext uri="{FF2B5EF4-FFF2-40B4-BE49-F238E27FC236}">
-                <a16:creationId xmlns:a16="http://schemas.microsoft.com/office/drawing/2014/main" id="{EA482165-6E4C-4CD4-A727-EC288256F827}"/>
+                <a16:creationId xmlns:a16="http://schemas.microsoft.com/office/drawing/2014/main" id="{00796DD5-B26C-4D16-BF4D-1A0C5DFE1AF6}"/>
               </a:ext>
             </a:extLst>
           </p:cNvPr>
@@ -15931,7 +15931,7 @@
     </p:spTree>
     <p:extLst>
       <p:ext uri="{BB962C8B-B14F-4D97-AF65-F5344CB8AC3E}">
-        <p14:creationId xmlns:p14="http://schemas.microsoft.com/office/powerpoint/2010/main" val="324925214"/>
+        <p14:creationId xmlns:p14="http://schemas.microsoft.com/office/powerpoint/2010/main" val="336562536"/>
       </p:ext>
     </p:extLst>
   </p:cSld>
@@ -15962,7 +15962,7 @@
           <p:cNvPr id="19" name="">
             <a:extLst xmlns:a="http://schemas.openxmlformats.org/drawingml/2006/main">
               <a:ext uri="{FF2B5EF4-FFF2-40B4-BE49-F238E27FC236}">
-                <a16:creationId xmlns:a16="http://schemas.microsoft.com/office/drawing/2014/main" id="{4A1738E0-E14B-4FB8-B75A-05D1B68D7B92}"/>
+                <a16:creationId xmlns:a16="http://schemas.microsoft.com/office/drawing/2014/main" id="{7CDACA27-66E1-4A67-A637-530859728115}"/>
               </a:ext>
             </a:extLst>
           </p:cNvPr>
@@ -16019,7 +16019,7 @@
           <p:cNvPr id="2" name="">
             <a:extLst xmlns:a="http://schemas.openxmlformats.org/drawingml/2006/main">
               <a:ext uri="{FF2B5EF4-FFF2-40B4-BE49-F238E27FC236}">
-                <a16:creationId xmlns:a16="http://schemas.microsoft.com/office/drawing/2014/main" id="{5A1FADC6-AA83-43BC-8B8D-8BCF35CC5DB7}"/>
+                <a16:creationId xmlns:a16="http://schemas.microsoft.com/office/drawing/2014/main" id="{886426A5-FE12-4847-AEE0-55A432CC8B86}"/>
               </a:ext>
             </a:extLst>
           </p:cNvPr>
@@ -16050,7 +16050,7 @@
           <p:cNvPr id="3" name="">
             <a:extLst xmlns:a="http://schemas.openxmlformats.org/drawingml/2006/main">
               <a:ext uri="{FF2B5EF4-FFF2-40B4-BE49-F238E27FC236}">
-                <a16:creationId xmlns:a16="http://schemas.microsoft.com/office/drawing/2014/main" id="{593907EF-DB4D-4AAF-8449-E10AB8EC35EE}"/>
+                <a16:creationId xmlns:a16="http://schemas.microsoft.com/office/drawing/2014/main" id="{9B747D2D-3FE7-43F3-9311-F7AF86318579}"/>
               </a:ext>
             </a:extLst>
           </p:cNvPr>
@@ -16107,7 +16107,7 @@
           <p:cNvPr id="4" name="">
             <a:extLst xmlns:a="http://schemas.openxmlformats.org/drawingml/2006/main">
               <a:ext uri="{FF2B5EF4-FFF2-40B4-BE49-F238E27FC236}">
-                <a16:creationId xmlns:a16="http://schemas.microsoft.com/office/drawing/2014/main" id="{75F68F7C-EAF8-4324-BF83-6A4C6B09E4BD}"/>
+                <a16:creationId xmlns:a16="http://schemas.microsoft.com/office/drawing/2014/main" id="{99C59E01-291B-4BC8-A430-C0760D3530E8}"/>
               </a:ext>
             </a:extLst>
           </p:cNvPr>
@@ -16164,7 +16164,7 @@
           <p:cNvPr id="5" name="">
             <a:extLst xmlns:a="http://schemas.openxmlformats.org/drawingml/2006/main">
               <a:ext uri="{FF2B5EF4-FFF2-40B4-BE49-F238E27FC236}">
-                <a16:creationId xmlns:a16="http://schemas.microsoft.com/office/drawing/2014/main" id="{C05A9DD0-FB49-471A-9327-6441A18ADF96}"/>
+                <a16:creationId xmlns:a16="http://schemas.microsoft.com/office/drawing/2014/main" id="{1AC8D3F1-0D13-483C-B7DB-40A18531CFFD}"/>
               </a:ext>
             </a:extLst>
           </p:cNvPr>
@@ -16244,7 +16244,7 @@
           <p:cNvPr id="6" name="">
             <a:extLst xmlns:a="http://schemas.openxmlformats.org/drawingml/2006/main">
               <a:ext uri="{FF2B5EF4-FFF2-40B4-BE49-F238E27FC236}">
-                <a16:creationId xmlns:a16="http://schemas.microsoft.com/office/drawing/2014/main" id="{C9C9B4A6-EBF2-4A30-A2AB-E0C19725C5D2}"/>
+                <a16:creationId xmlns:a16="http://schemas.microsoft.com/office/drawing/2014/main" id="{50AB536F-865E-4510-B79C-C1C249145BC7}"/>
               </a:ext>
             </a:extLst>
           </p:cNvPr>
@@ -16301,7 +16301,7 @@
           <p:cNvPr id="7" name="">
             <a:extLst xmlns:a="http://schemas.openxmlformats.org/drawingml/2006/main">
               <a:ext uri="{FF2B5EF4-FFF2-40B4-BE49-F238E27FC236}">
-                <a16:creationId xmlns:a16="http://schemas.microsoft.com/office/drawing/2014/main" id="{BD1F67E3-658E-4DC8-8D99-AAE009E8E735}"/>
+                <a16:creationId xmlns:a16="http://schemas.microsoft.com/office/drawing/2014/main" id="{601E79B8-6045-4B77-8247-4859EDD34FA0}"/>
               </a:ext>
             </a:extLst>
           </p:cNvPr>
@@ -16334,7 +16334,7 @@
           <p:cNvPr id="8" name="">
             <a:extLst xmlns:a="http://schemas.openxmlformats.org/drawingml/2006/main">
               <a:ext uri="{FF2B5EF4-FFF2-40B4-BE49-F238E27FC236}">
-                <a16:creationId xmlns:a16="http://schemas.microsoft.com/office/drawing/2014/main" id="{979C9A65-526B-4CAF-BFE2-7A233980986D}"/>
+                <a16:creationId xmlns:a16="http://schemas.microsoft.com/office/drawing/2014/main" id="{448BDF74-425E-4811-9039-7551CF87BC24}"/>
               </a:ext>
             </a:extLst>
           </p:cNvPr>
@@ -16391,7 +16391,7 @@
           <p:cNvPr id="9" name="">
             <a:extLst xmlns:a="http://schemas.openxmlformats.org/drawingml/2006/main">
               <a:ext uri="{FF2B5EF4-FFF2-40B4-BE49-F238E27FC236}">
-                <a16:creationId xmlns:a16="http://schemas.microsoft.com/office/drawing/2014/main" id="{63E3C72D-1B56-49F1-BDF7-322DC9259A4F}"/>
+                <a16:creationId xmlns:a16="http://schemas.microsoft.com/office/drawing/2014/main" id="{CEB17CAB-0885-4E9B-B880-3514D9C72F03}"/>
               </a:ext>
             </a:extLst>
           </p:cNvPr>
@@ -16424,7 +16424,7 @@
           <p:cNvPr id="10" name="">
             <a:extLst xmlns:a="http://schemas.openxmlformats.org/drawingml/2006/main">
               <a:ext uri="{FF2B5EF4-FFF2-40B4-BE49-F238E27FC236}">
-                <a16:creationId xmlns:a16="http://schemas.microsoft.com/office/drawing/2014/main" id="{E207C711-BDD2-475F-882C-0C96DD79D45A}"/>
+                <a16:creationId xmlns:a16="http://schemas.microsoft.com/office/drawing/2014/main" id="{CC0916F4-F7AC-46A9-8083-854ED65C5E77}"/>
               </a:ext>
             </a:extLst>
           </p:cNvPr>
@@ -16481,7 +16481,7 @@
           <p:cNvPr id="11" name="">
             <a:extLst xmlns:a="http://schemas.openxmlformats.org/drawingml/2006/main">
               <a:ext uri="{FF2B5EF4-FFF2-40B4-BE49-F238E27FC236}">
-                <a16:creationId xmlns:a16="http://schemas.microsoft.com/office/drawing/2014/main" id="{91CDD937-C026-40B5-9BF4-5B151074058E}"/>
+                <a16:creationId xmlns:a16="http://schemas.microsoft.com/office/drawing/2014/main" id="{F1F289B5-40F4-4F63-A5D4-524D36DDB47C}"/>
               </a:ext>
             </a:extLst>
           </p:cNvPr>
@@ -16538,7 +16538,7 @@
           <p:cNvPr id="12" name="">
             <a:extLst xmlns:a="http://schemas.openxmlformats.org/drawingml/2006/main">
               <a:ext uri="{FF2B5EF4-FFF2-40B4-BE49-F238E27FC236}">
-                <a16:creationId xmlns:a16="http://schemas.microsoft.com/office/drawing/2014/main" id="{4D78CA56-DE20-405C-A0A9-1B7782146B00}"/>
+                <a16:creationId xmlns:a16="http://schemas.microsoft.com/office/drawing/2014/main" id="{88BF7AE6-AD11-419B-AB24-F782845C6859}"/>
               </a:ext>
             </a:extLst>
           </p:cNvPr>
@@ -16595,7 +16595,7 @@
           <p:cNvPr id="13" name="">
             <a:extLst xmlns:a="http://schemas.openxmlformats.org/drawingml/2006/main">
               <a:ext uri="{FF2B5EF4-FFF2-40B4-BE49-F238E27FC236}">
-                <a16:creationId xmlns:a16="http://schemas.microsoft.com/office/drawing/2014/main" id="{96F9E7CB-FC32-4D6D-B32C-A31ACEBCB944}"/>
+                <a16:creationId xmlns:a16="http://schemas.microsoft.com/office/drawing/2014/main" id="{AD2D733C-F37C-4440-93DC-25F778B23E0B}"/>
               </a:ext>
             </a:extLst>
           </p:cNvPr>
@@ -16652,7 +16652,7 @@
           <p:cNvPr id="14" name="">
             <a:extLst xmlns:a="http://schemas.openxmlformats.org/drawingml/2006/main">
               <a:ext uri="{FF2B5EF4-FFF2-40B4-BE49-F238E27FC236}">
-                <a16:creationId xmlns:a16="http://schemas.microsoft.com/office/drawing/2014/main" id="{C600F18C-5413-4D0A-AB2A-4913AD82E4D5}"/>
+                <a16:creationId xmlns:a16="http://schemas.microsoft.com/office/drawing/2014/main" id="{61785CB9-D768-4E73-B234-C4CF20C2705B}"/>
               </a:ext>
             </a:extLst>
           </p:cNvPr>
@@ -16709,7 +16709,7 @@
           <p:cNvPr id="15" name="">
             <a:extLst xmlns:a="http://schemas.openxmlformats.org/drawingml/2006/main">
               <a:ext uri="{FF2B5EF4-FFF2-40B4-BE49-F238E27FC236}">
-                <a16:creationId xmlns:a16="http://schemas.microsoft.com/office/drawing/2014/main" id="{0F8AADCF-C678-4CAB-8E19-DE68E29DA600}"/>
+                <a16:creationId xmlns:a16="http://schemas.microsoft.com/office/drawing/2014/main" id="{841CB9AB-23A9-4872-8D36-52C2D2ED6DDD}"/>
               </a:ext>
             </a:extLst>
           </p:cNvPr>
@@ -16742,7 +16742,7 @@
           <p:cNvPr id="16" name="">
             <a:extLst xmlns:a="http://schemas.openxmlformats.org/drawingml/2006/main">
               <a:ext uri="{FF2B5EF4-FFF2-40B4-BE49-F238E27FC236}">
-                <a16:creationId xmlns:a16="http://schemas.microsoft.com/office/drawing/2014/main" id="{30F0B595-669A-499D-9296-4B651AA92F8D}"/>
+                <a16:creationId xmlns:a16="http://schemas.microsoft.com/office/drawing/2014/main" id="{A6F26962-1400-462A-8D22-BBD6CBC9E0F7}"/>
               </a:ext>
             </a:extLst>
           </p:cNvPr>
@@ -16799,7 +16799,7 @@
           <p:cNvPr id="17" name="">
             <a:extLst xmlns:a="http://schemas.openxmlformats.org/drawingml/2006/main">
               <a:ext uri="{FF2B5EF4-FFF2-40B4-BE49-F238E27FC236}">
-                <a16:creationId xmlns:a16="http://schemas.microsoft.com/office/drawing/2014/main" id="{EAACB131-1DF2-477A-8A83-D1AF63CCCDA4}"/>
+                <a16:creationId xmlns:a16="http://schemas.microsoft.com/office/drawing/2014/main" id="{B3AA26D8-3EE8-4631-8A8E-59ADAC60D7AA}"/>
               </a:ext>
             </a:extLst>
           </p:cNvPr>
@@ -16830,7 +16830,7 @@
           <p:cNvPr id="18" name="">
             <a:extLst xmlns:a="http://schemas.openxmlformats.org/drawingml/2006/main">
               <a:ext uri="{FF2B5EF4-FFF2-40B4-BE49-F238E27FC236}">
-                <a16:creationId xmlns:a16="http://schemas.microsoft.com/office/drawing/2014/main" id="{6FA92429-3CCE-4BED-86D5-FE583D217684}"/>
+                <a16:creationId xmlns:a16="http://schemas.microsoft.com/office/drawing/2014/main" id="{5EAA6A83-5D50-4858-8E92-1D63D060FA0B}"/>
               </a:ext>
             </a:extLst>
           </p:cNvPr>
@@ -16885,7 +16885,7 @@
     </p:spTree>
     <p:extLst>
       <p:ext uri="{BB962C8B-B14F-4D97-AF65-F5344CB8AC3E}">
-        <p14:creationId xmlns:p14="http://schemas.microsoft.com/office/powerpoint/2010/main" val="1626156943"/>
+        <p14:creationId xmlns:p14="http://schemas.microsoft.com/office/powerpoint/2010/main" val="951931673"/>
       </p:ext>
     </p:extLst>
   </p:cSld>

--- a/assets/presentations/pmday-2026/ai-changes-both-sides.pptx
+++ b/assets/presentations/pmday-2026/ai-changes-both-sides.pptx
@@ -2,26 +2,26 @@
 <file path=ppt/presentation.xml><?xml version="1.0" encoding="utf-8"?>
 <p:presentation xmlns:p="http://schemas.openxmlformats.org/presentationml/2006/main">
   <p:sldMasterIdLst>
-    <p:sldMasterId xmlns:r="http://schemas.openxmlformats.org/officeDocument/2006/relationships" id="2147483648" r:id="R496859c4ee9349fe"/>
+    <p:sldMasterId xmlns:r="http://schemas.openxmlformats.org/officeDocument/2006/relationships" id="2147483648" r:id="Rcdbafba5644e45cd"/>
   </p:sldMasterIdLst>
   <p:notesMasterIdLst>
-    <p:notesMasterId xmlns:r="http://schemas.openxmlformats.org/officeDocument/2006/relationships" r:id="R4fd85a1b130b447e"/>
+    <p:notesMasterId xmlns:r="http://schemas.openxmlformats.org/officeDocument/2006/relationships" r:id="Rfb0ffc1bd50b45ce"/>
   </p:notesMasterIdLst>
   <p:sldIdLst>
-    <p:sldId xmlns:r="http://schemas.openxmlformats.org/officeDocument/2006/relationships" id="256" r:id="R923e49171e1f443a"/>
-    <p:sldId xmlns:r="http://schemas.openxmlformats.org/officeDocument/2006/relationships" id="257" r:id="R4f038306c50a40da"/>
-    <p:sldId xmlns:r="http://schemas.openxmlformats.org/officeDocument/2006/relationships" id="258" r:id="R8b6de5764a514144"/>
-    <p:sldId xmlns:r="http://schemas.openxmlformats.org/officeDocument/2006/relationships" id="259" r:id="Ra30b16ef4ad842e8"/>
-    <p:sldId xmlns:r="http://schemas.openxmlformats.org/officeDocument/2006/relationships" id="260" r:id="Re351c7f145bb4f75"/>
-    <p:sldId xmlns:r="http://schemas.openxmlformats.org/officeDocument/2006/relationships" id="261" r:id="R4c5ac09d4a644a05"/>
-    <p:sldId xmlns:r="http://schemas.openxmlformats.org/officeDocument/2006/relationships" id="262" r:id="Rd9b556b607184f73"/>
-    <p:sldId xmlns:r="http://schemas.openxmlformats.org/officeDocument/2006/relationships" id="263" r:id="Ra9ceabe160174484"/>
-    <p:sldId xmlns:r="http://schemas.openxmlformats.org/officeDocument/2006/relationships" id="264" r:id="R0a1efa79f01542d3"/>
-    <p:sldId xmlns:r="http://schemas.openxmlformats.org/officeDocument/2006/relationships" id="265" r:id="R10d6ead121e24b33"/>
-    <p:sldId xmlns:r="http://schemas.openxmlformats.org/officeDocument/2006/relationships" id="266" r:id="R9551b9a659c34ed3"/>
-    <p:sldId xmlns:r="http://schemas.openxmlformats.org/officeDocument/2006/relationships" id="267" r:id="Rdb09cdb168fc4cba"/>
-    <p:sldId xmlns:r="http://schemas.openxmlformats.org/officeDocument/2006/relationships" id="268" r:id="R5eb35372120f4cbe"/>
-    <p:sldId xmlns:r="http://schemas.openxmlformats.org/officeDocument/2006/relationships" id="269" r:id="R85906c0d26d54b48"/>
+    <p:sldId xmlns:r="http://schemas.openxmlformats.org/officeDocument/2006/relationships" id="256" r:id="R0a38689979564b62"/>
+    <p:sldId xmlns:r="http://schemas.openxmlformats.org/officeDocument/2006/relationships" id="257" r:id="R76e5721705444e80"/>
+    <p:sldId xmlns:r="http://schemas.openxmlformats.org/officeDocument/2006/relationships" id="258" r:id="R055daf68fb19460c"/>
+    <p:sldId xmlns:r="http://schemas.openxmlformats.org/officeDocument/2006/relationships" id="259" r:id="R30c22ba127f6444f"/>
+    <p:sldId xmlns:r="http://schemas.openxmlformats.org/officeDocument/2006/relationships" id="260" r:id="Rf3460f5e17d547fc"/>
+    <p:sldId xmlns:r="http://schemas.openxmlformats.org/officeDocument/2006/relationships" id="261" r:id="Rc57d2a2d3330422d"/>
+    <p:sldId xmlns:r="http://schemas.openxmlformats.org/officeDocument/2006/relationships" id="262" r:id="R0c64a2ca02bf4f0c"/>
+    <p:sldId xmlns:r="http://schemas.openxmlformats.org/officeDocument/2006/relationships" id="263" r:id="R8f3fab679094461b"/>
+    <p:sldId xmlns:r="http://schemas.openxmlformats.org/officeDocument/2006/relationships" id="264" r:id="Rad3d1b52d13d4487"/>
+    <p:sldId xmlns:r="http://schemas.openxmlformats.org/officeDocument/2006/relationships" id="265" r:id="Rd57b6a20190b4c80"/>
+    <p:sldId xmlns:r="http://schemas.openxmlformats.org/officeDocument/2006/relationships" id="266" r:id="R44e2bc0553834196"/>
+    <p:sldId xmlns:r="http://schemas.openxmlformats.org/officeDocument/2006/relationships" id="267" r:id="Rb0e5f8610f854ca1"/>
+    <p:sldId xmlns:r="http://schemas.openxmlformats.org/officeDocument/2006/relationships" id="268" r:id="R7e226f4ab3a041b4"/>
+    <p:sldId xmlns:r="http://schemas.openxmlformats.org/officeDocument/2006/relationships" id="269" r:id="R73b79dc836c041c2"/>
   </p:sldIdLst>
   <p:sldSz cx="12192000" cy="6858000"/>
   <p:notesSz cx="6858000" cy="9144000"/>
@@ -458,6 +458,11 @@
               <a:t>Відділити AI для розробки від Model Judgment усередині продукту. Перше змінює виробництво software, друге — поведінку системи. Не починати з реклами UA чи anti-AI тези.</a:t>
             </a:r>
           </a:p>
+          <a:p xmlns:a="http://schemas.openxmlformats.org/drawingml/2006/main">
+            <a:r>
+              <a:t>Ілюстрація — концептуальна метафора двох ролей AI, не схема архітектури. AI-generated illustration, OpenAI imagegen, 21 September 2026. Джерело та prompt: artwork/PROVENANCE.md.</a:t>
+            </a:r>
+          </a:p>
         </p:txBody>
       </p:sp>
       <p:sp>
@@ -975,7 +980,42 @@
           <a:lstStyle xmlns:a="http://schemas.openxmlformats.org/drawingml/2006/main"/>
           <a:p xmlns:a="http://schemas.openxmlformats.org/drawingml/2006/main">
             <a:r>
-              <a:t>Навчальний приклад, не виміряні дані: writing capacity 20 змін/тиждень, review 10, integration 8. Зростання writing до 100 не змінює незмінну потужність integration. AI може прискорювати інші етапи; ефект треба перевіряти, а не припускати.</a:t>
+              <a:t>Theory of Constraints (Goldratt): оптимізуємо потік через реальне обмеження системи. Якщо coding не bottleneck, його прискорення саме по собі не збільшує пропускну здатність delivery. Якщо був bottleneck, після зміни обмеження може переміститися. AI може змінювати Intent і Design так само, як Review, Test, Integration, Deploy та Operate; знак і величину ефекту треба вимірювати.</a:t>
+            </a:r>
+          </a:p>
+          <a:p xmlns:a="http://schemas.openxmlformats.org/drawingml/2006/main">
+            <a:r>
+              <a:t>Навчальний приклад, не дослідження: 100 зіставних змін надходять за тиждень, лише 8 інтегруються. За незмінної потужності та push без WIP limits/відкидання роботи загальний backlog зростає на 100 − 8 = 92 зміни за тиждень. Integration позначено як умовний bottleneck, не універсальний bottleneck команд.</a:t>
+            </a:r>
+          </a:p>
+          <a:p xmlns:a="http://schemas.openxmlformats.org/drawingml/2006/main">
+            <a:r>
+              <a:t>Це не твердження, що будь-яка оптимізація не-bottleneck автоматично погіршує систему: економія витрат або вільна потужність теж можуть бути корисні. Черга виникає, коли реально збільшується надходження понад вихід. Rework, більші batches, затриманий feedback і тиск на review можуть погіршити якість; це механізм ризику, а не математично неминучий ефект. Джерела й межі: evidence/toc-wip.md.</a:t>
+            </a:r>
+          </a:p>
+          <a:p xmlns:a="http://schemas.openxmlformats.org/drawingml/2006/main">
+            <a:r>
+              <a:t/>
+            </a:r>
+          </a:p>
+          <a:p xmlns:a="http://schemas.openxmlformats.org/drawingml/2006/main">
+            <a:r>
+              <a:t>Sources:</a:t>
+            </a:r>
+          </a:p>
+          <a:p xmlns:a="http://schemas.openxmlformats.org/drawingml/2006/main">
+            <a:r>
+              <a:t>https://dora.dev/capabilities/wip-limits/</a:t>
+            </a:r>
+          </a:p>
+          <a:p xmlns:a="http://schemas.openxmlformats.org/drawingml/2006/main">
+            <a:r>
+              <a:t>https://dora.dev/capabilities/working-in-small-batches/</a:t>
+            </a:r>
+          </a:p>
+          <a:p xmlns:a="http://schemas.openxmlformats.org/drawingml/2006/main">
+            <a:r>
+              <a:t>https://www.nber.org/papers/w35275</a:t>
             </a:r>
           </a:p>
         </p:txBody>
@@ -1060,7 +1100,7 @@
           </a:p>
           <a:p xmlns:a="http://schemas.openxmlformats.org/drawingml/2006/main">
             <a:r>
-              <a:t>DORA 2025: позитивні associations AI adoption із throughput і product performance, негативні — зі stability; не підставляти коефіцієнти 2024 року.</a:t>
+              <a:t>DORA 2025: в офіційній інфографіці понад 80% респондентів повідомляють про підвищення продуктивності, 59% — про позитивний вплив на якість коду. Це частки респондентів, а не +80% швидкості чи +59% якості. Майже 5 000 респондентів. Авторське резюме окремо описує позитивну association adoption із delivery throughput і негативну зі stability. Delivery stability не тотожна code quality. Перевіреного числового коефіцієнта stability у доступному матеріалі немає; не приписуємо відсоток падіння та не переносимо coefficients 2024. Повний звіт за формою не отримано; інфографіку завантажено в evidence/originals/dora-2025-infographic.pdf. Деталі: evidence/dora-2025.md.</a:t>
             </a:r>
           </a:p>
           <a:p xmlns:a="http://schemas.openxmlformats.org/drawingml/2006/main">
@@ -1070,7 +1110,7 @@
           </a:p>
           <a:p xmlns:a="http://schemas.openxmlformats.org/drawingml/2006/main">
             <a:r>
-              <a:t>GitClear 2026: refactoring share 13→3.8%, duplication приблизно +81%; observational proxies.</a:t>
+              <a:t>GitClear 2026: частка moved code у changed lines 13% (2023) → 3.8% (YTD 2026), не кількість refactoring tasks і не весь reuse. Частота duplicated blocks приблизно +81% за цей період. Copy/paste share 9.4% (2022) → 15.7% (H1 2026), інший baseline. У звіті 2025 на даних 2020–24 окремо описані зростання short-term churn, більше клонів і падіння moved-code share; числового churn effect із публічної сторінки не виводимо. Не змішувати churn, duplication та refactoring. Текст і графік 2026 суперечать щодо абсолютної одиниці duplication, тому залишаємо тільки відносні +81%. Це observational proxies, не причинний ефект AI. Деталі: evidence/gitclear.md.</a:t>
             </a:r>
           </a:p>
           <a:p xmlns:a="http://schemas.openxmlformats.org/drawingml/2006/main">
@@ -1121,6 +1161,16 @@
           <a:p xmlns:a="http://schemas.openxmlformats.org/drawingml/2006/main">
             <a:r>
               <a:t>https://arxiv.org/html/2601.13597v2</a:t>
+            </a:r>
+          </a:p>
+          <a:p xmlns:a="http://schemas.openxmlformats.org/drawingml/2006/main">
+            <a:r>
+              <a:t>https://dora.dev/research/2025/2025-DORA-Report-Infographic.pdf</a:t>
+            </a:r>
+          </a:p>
+          <a:p xmlns:a="http://schemas.openxmlformats.org/drawingml/2006/main">
+            <a:r>
+              <a:t>https://www.gitclear.com/ai_assistant_code_quality_2025_research</a:t>
             </a:r>
           </a:p>
         </p:txBody>
@@ -1568,7 +1618,7 @@
   </p:cSld>
   <p:clrMap bg1="lt1" tx1="dk1" bg2="lt2" tx2="dk2" accent1="accent1" accent2="accent2" accent3="accent3" accent4="accent4" accent5="accent5" accent6="accent6" hlink="hlink" folHlink="folHlink"/>
   <p:sldLayoutIdLst>
-    <p:sldLayoutId xmlns:r="http://schemas.openxmlformats.org/officeDocument/2006/relationships" id="2147483649" r:id="Rf2544e11b0534def"/>
+    <p:sldLayoutId xmlns:r="http://schemas.openxmlformats.org/officeDocument/2006/relationships" id="2147483649" r:id="Raba046d41c0c4214"/>
   </p:sldLayoutIdLst>
   <p:txStyles>
     <p:titleStyle>
@@ -2119,7 +2169,7 @@
           <p:cNvPr id="12" name="">
             <a:extLst xmlns:a="http://schemas.openxmlformats.org/drawingml/2006/main">
               <a:ext uri="{FF2B5EF4-FFF2-40B4-BE49-F238E27FC236}">
-                <a16:creationId xmlns:a16="http://schemas.microsoft.com/office/drawing/2014/main" id="{FA839367-A863-4325-AB59-210851452075}"/>
+                <a16:creationId xmlns:a16="http://schemas.microsoft.com/office/drawing/2014/main" id="{19E1AC51-DE67-49B7-9C7C-7B1C86FA8B56}"/>
               </a:ext>
             </a:extLst>
           </p:cNvPr>
@@ -2176,18 +2226,18 @@
           <p:cNvPr id="2" name="">
             <a:extLst xmlns:a="http://schemas.openxmlformats.org/drawingml/2006/main">
               <a:ext uri="{FF2B5EF4-FFF2-40B4-BE49-F238E27FC236}">
-                <a16:creationId xmlns:a16="http://schemas.microsoft.com/office/drawing/2014/main" id="{1FD86F25-7CCF-4F05-993E-C30C13759B56}"/>
-              </a:ext>
-            </a:extLst>
-          </p:cNvPr>
-          <p:cNvSpPr>
-            <a:spLocks xmlns:a="http://schemas.openxmlformats.org/drawingml/2006/main" noGrp="1"/>
-          </p:cNvSpPr>
-          <p:nvPr/>
-        </p:nvSpPr>
-        <p:spPr>
-          <a:xfrm xmlns:a="http://schemas.openxmlformats.org/drawingml/2006/main">
-            <a:off x="609600" y="609600"/>
+                <a16:creationId xmlns:a16="http://schemas.microsoft.com/office/drawing/2014/main" id="{8EDE3CB1-AAF3-4FA5-BEAA-87EE11A5B5DF}"/>
+              </a:ext>
+            </a:extLst>
+          </p:cNvPr>
+          <p:cNvSpPr>
+            <a:spLocks xmlns:a="http://schemas.openxmlformats.org/drawingml/2006/main" noGrp="1"/>
+          </p:cNvSpPr>
+          <p:nvPr/>
+        </p:nvSpPr>
+        <p:spPr>
+          <a:xfrm xmlns:a="http://schemas.openxmlformats.org/drawingml/2006/main">
+            <a:off x="609600" y="476250"/>
             <a:ext cx="10572750" cy="1371600"/>
           </a:xfrm>
           <a:prstGeom xmlns:a="http://schemas.openxmlformats.org/drawingml/2006/main" prst="rect">
@@ -2205,17 +2255,17 @@
           <a:lstStyle xmlns:a="http://schemas.openxmlformats.org/drawingml/2006/main"/>
           <a:p xmlns:a="http://schemas.openxmlformats.org/drawingml/2006/main">
             <a:pPr algn="l">
-              <a:defRPr sz="4050" b="1">
-                <a:solidFill>
-                  <a:srgbClr val="F4F7FA"/>
-                </a:solidFill>
-                <a:latin typeface="DejaVu Sans"/>
-                <a:ea typeface="DejaVu Sans"/>
-                <a:cs typeface="DejaVu Sans"/>
-              </a:defRPr>
-            </a:pPr>
-            <a:r>
-              <a:rPr sz="4050" b="1">
+              <a:defRPr sz="3750" b="1">
+                <a:solidFill>
+                  <a:srgbClr val="F4F7FA"/>
+                </a:solidFill>
+                <a:latin typeface="DejaVu Sans"/>
+                <a:ea typeface="DejaVu Sans"/>
+                <a:cs typeface="DejaVu Sans"/>
+              </a:defRPr>
+            </a:pPr>
+            <a:r>
+              <a:rPr sz="3750" b="1">
                 <a:solidFill>
                   <a:srgbClr val="F4F7FA"/>
                 </a:solidFill>
@@ -2228,17 +2278,17 @@
           </a:p>
           <a:p xmlns:a="http://schemas.openxmlformats.org/drawingml/2006/main">
             <a:pPr algn="l">
-              <a:defRPr sz="4050" b="1">
-                <a:solidFill>
-                  <a:srgbClr val="F4F7FA"/>
-                </a:solidFill>
-                <a:latin typeface="DejaVu Sans"/>
-                <a:ea typeface="DejaVu Sans"/>
-                <a:cs typeface="DejaVu Sans"/>
-              </a:defRPr>
-            </a:pPr>
-            <a:r>
-              <a:rPr sz="4050" b="1">
+              <a:defRPr sz="3750" b="1">
+                <a:solidFill>
+                  <a:srgbClr val="F4F7FA"/>
+                </a:solidFill>
+                <a:latin typeface="DejaVu Sans"/>
+                <a:ea typeface="DejaVu Sans"/>
+                <a:cs typeface="DejaVu Sans"/>
+              </a:defRPr>
+            </a:pPr>
+            <a:r>
+              <a:rPr sz="3750" b="1">
                 <a:solidFill>
                   <a:srgbClr val="F4F7FA"/>
                 </a:solidFill>
@@ -2256,18 +2306,18 @@
           <p:cNvPr id="3" name="">
             <a:extLst xmlns:a="http://schemas.openxmlformats.org/drawingml/2006/main">
               <a:ext uri="{FF2B5EF4-FFF2-40B4-BE49-F238E27FC236}">
-                <a16:creationId xmlns:a16="http://schemas.microsoft.com/office/drawing/2014/main" id="{1E80951D-73B8-44D9-8374-FD8020810D16}"/>
-              </a:ext>
-            </a:extLst>
-          </p:cNvPr>
-          <p:cNvSpPr>
-            <a:spLocks xmlns:a="http://schemas.openxmlformats.org/drawingml/2006/main" noGrp="1"/>
-          </p:cNvSpPr>
-          <p:nvPr/>
-        </p:nvSpPr>
-        <p:spPr>
-          <a:xfrm xmlns:a="http://schemas.openxmlformats.org/drawingml/2006/main">
-            <a:off x="609600" y="2247900"/>
+                <a16:creationId xmlns:a16="http://schemas.microsoft.com/office/drawing/2014/main" id="{5A59E287-AE2F-49F2-918A-CCB836F7BF6F}"/>
+              </a:ext>
+            </a:extLst>
+          </p:cNvPr>
+          <p:cNvSpPr>
+            <a:spLocks xmlns:a="http://schemas.openxmlformats.org/drawingml/2006/main" noGrp="1"/>
+          </p:cNvSpPr>
+          <p:nvPr/>
+        </p:nvSpPr>
+        <p:spPr>
+          <a:xfrm xmlns:a="http://schemas.openxmlformats.org/drawingml/2006/main">
+            <a:off x="609600" y="2085975"/>
             <a:ext cx="10572750" cy="457200"/>
           </a:xfrm>
           <a:prstGeom xmlns:a="http://schemas.openxmlformats.org/drawingml/2006/main" prst="rect">
@@ -2285,7 +2335,7 @@
           <a:lstStyle xmlns:a="http://schemas.openxmlformats.org/drawingml/2006/main"/>
           <a:p xmlns:a="http://schemas.openxmlformats.org/drawingml/2006/main">
             <a:pPr algn="l">
-              <a:defRPr sz="2250" b="0">
+              <a:defRPr sz="2100" b="0">
                 <a:solidFill>
                   <a:srgbClr val="ADB8C5"/>
                 </a:solidFill>
@@ -2295,7 +2345,7 @@
               </a:defRPr>
             </a:pPr>
             <a:r>
-              <a:rPr sz="2250" b="0">
+              <a:rPr sz="2100" b="0">
                 <a:solidFill>
                   <a:srgbClr val="ADB8C5"/>
                 </a:solidFill>
@@ -2308,24 +2358,46 @@
           </a:p>
         </p:txBody>
       </p:sp>
-      <p:sp>
-        <p:nvSpPr>
-          <p:cNvPr id="4" name="">
-            <a:extLst xmlns:a="http://schemas.openxmlformats.org/drawingml/2006/main">
-              <a:ext uri="{FF2B5EF4-FFF2-40B4-BE49-F238E27FC236}">
-                <a16:creationId xmlns:a16="http://schemas.microsoft.com/office/drawing/2014/main" id="{D9BEF086-59F9-4A54-B843-3703CCCD23D6}"/>
-              </a:ext>
-            </a:extLst>
-          </p:cNvPr>
-          <p:cNvSpPr>
-            <a:spLocks xmlns:a="http://schemas.openxmlformats.org/drawingml/2006/main" noGrp="1"/>
-          </p:cNvSpPr>
-          <p:nvPr/>
-        </p:nvSpPr>
-        <p:spPr>
-          <a:xfrm xmlns:a="http://schemas.openxmlformats.org/drawingml/2006/main">
-            <a:off x="609600" y="3333750"/>
-            <a:ext cx="3238500" cy="381000"/>
+      <p:pic>
+        <p:nvPicPr>
+          <p:cNvPr id="15" name=""/>
+          <p:cNvPicPr>
+            <a:picLocks xmlns:a="http://schemas.openxmlformats.org/drawingml/2006/main" noChangeAspect="1"/>
+          </p:cNvPicPr>
+          <p:nvPr/>
+        </p:nvPicPr>
+        <p:blipFill>
+          <a:blip xmlns:r="http://schemas.openxmlformats.org/officeDocument/2006/relationships" xmlns:a="http://schemas.openxmlformats.org/drawingml/2006/main" r:embed="Rd9638afbb49348f0"/>
+          <a:stretch xmlns:a="http://schemas.openxmlformats.org/drawingml/2006/main"/>
+        </p:blipFill>
+        <p:spPr>
+          <a:xfrm xmlns:a="http://schemas.openxmlformats.org/drawingml/2006/main">
+            <a:off x="5695950" y="2600325"/>
+            <a:ext cx="5886450" cy="3924300"/>
+          </a:xfrm>
+          <a:prstGeom xmlns:a="http://schemas.openxmlformats.org/drawingml/2006/main" prst="rect">
+            <a:avLst/>
+          </a:prstGeom>
+        </p:spPr>
+      </p:pic>
+      <p:sp>
+        <p:nvSpPr>
+          <p:cNvPr id="5" name="">
+            <a:extLst xmlns:a="http://schemas.openxmlformats.org/drawingml/2006/main">
+              <a:ext uri="{FF2B5EF4-FFF2-40B4-BE49-F238E27FC236}">
+                <a16:creationId xmlns:a16="http://schemas.microsoft.com/office/drawing/2014/main" id="{F36537E1-7A8E-4444-BF77-9B3760FECB45}"/>
+              </a:ext>
+            </a:extLst>
+          </p:cNvPr>
+          <p:cNvSpPr>
+            <a:spLocks xmlns:a="http://schemas.openxmlformats.org/drawingml/2006/main" noGrp="1"/>
+          </p:cNvSpPr>
+          <p:nvPr/>
+        </p:nvSpPr>
+        <p:spPr>
+          <a:xfrm xmlns:a="http://schemas.openxmlformats.org/drawingml/2006/main">
+            <a:off x="609600" y="3086100"/>
+            <a:ext cx="4857750" cy="323850"/>
           </a:xfrm>
           <a:prstGeom xmlns:a="http://schemas.openxmlformats.org/drawingml/2006/main" prst="rect">
             <a:avLst/>
@@ -2342,7 +2414,7 @@
           <a:lstStyle xmlns:a="http://schemas.openxmlformats.org/drawingml/2006/main"/>
           <a:p xmlns:a="http://schemas.openxmlformats.org/drawingml/2006/main">
             <a:pPr algn="l">
-              <a:defRPr sz="1950" b="1">
+              <a:defRPr sz="1725" b="1">
                 <a:solidFill>
                   <a:srgbClr val="28C7F7"/>
                 </a:solidFill>
@@ -2352,7 +2424,7 @@
               </a:defRPr>
             </a:pPr>
             <a:r>
-              <a:rPr sz="1950" b="1">
+              <a:rPr sz="1725" b="1">
                 <a:solidFill>
                   <a:srgbClr val="28C7F7"/>
                 </a:solidFill>
@@ -2367,52 +2439,22 @@
       </p:sp>
       <p:sp>
         <p:nvSpPr>
-          <p:cNvPr id="5" name="">
-            <a:extLst xmlns:a="http://schemas.openxmlformats.org/drawingml/2006/main">
-              <a:ext uri="{FF2B5EF4-FFF2-40B4-BE49-F238E27FC236}">
-                <a16:creationId xmlns:a16="http://schemas.microsoft.com/office/drawing/2014/main" id="{E281890C-5A25-4548-9F91-FB7043ABE5D9}"/>
-              </a:ext>
-            </a:extLst>
-          </p:cNvPr>
-          <p:cNvSpPr>
-            <a:spLocks xmlns:a="http://schemas.openxmlformats.org/drawingml/2006/main" noGrp="1"/>
-          </p:cNvSpPr>
-          <p:nvPr/>
-        </p:nvSpPr>
-        <p:spPr>
-          <a:xfrm xmlns:a="http://schemas.openxmlformats.org/drawingml/2006/main">
-            <a:off x="3886200" y="3429000"/>
-            <a:ext cx="914400" cy="190500"/>
-          </a:xfrm>
-          <a:prstGeom xmlns:a="http://schemas.openxmlformats.org/drawingml/2006/main" prst="rightArrow">
-            <a:avLst/>
-          </a:prstGeom>
-          <a:solidFill xmlns:a="http://schemas.openxmlformats.org/drawingml/2006/main">
-            <a:srgbClr val="28C7F7"/>
-          </a:solidFill>
-          <a:ln xmlns:a="http://schemas.openxmlformats.org/drawingml/2006/main" w="0">
-            <a:noFill/>
-          </a:ln>
-        </p:spPr>
-      </p:sp>
-      <p:sp>
-        <p:nvSpPr>
           <p:cNvPr id="6" name="">
             <a:extLst xmlns:a="http://schemas.openxmlformats.org/drawingml/2006/main">
               <a:ext uri="{FF2B5EF4-FFF2-40B4-BE49-F238E27FC236}">
-                <a16:creationId xmlns:a16="http://schemas.microsoft.com/office/drawing/2014/main" id="{5BA8FF3B-F9A1-4D77-9097-6533A6759C60}"/>
-              </a:ext>
-            </a:extLst>
-          </p:cNvPr>
-          <p:cNvSpPr>
-            <a:spLocks xmlns:a="http://schemas.openxmlformats.org/drawingml/2006/main" noGrp="1"/>
-          </p:cNvSpPr>
-          <p:nvPr/>
-        </p:nvSpPr>
-        <p:spPr>
-          <a:xfrm xmlns:a="http://schemas.openxmlformats.org/drawingml/2006/main">
-            <a:off x="5181600" y="3295650"/>
-            <a:ext cx="6286500" cy="533400"/>
+                <a16:creationId xmlns:a16="http://schemas.microsoft.com/office/drawing/2014/main" id="{C1A9180D-F059-4BB7-93EC-1FD758B4CB23}"/>
+              </a:ext>
+            </a:extLst>
+          </p:cNvPr>
+          <p:cNvSpPr>
+            <a:spLocks xmlns:a="http://schemas.openxmlformats.org/drawingml/2006/main" noGrp="1"/>
+          </p:cNvSpPr>
+          <p:nvPr/>
+        </p:nvSpPr>
+        <p:spPr>
+          <a:xfrm xmlns:a="http://schemas.openxmlformats.org/drawingml/2006/main">
+            <a:off x="609600" y="3448050"/>
+            <a:ext cx="4857750" cy="419100"/>
           </a:xfrm>
           <a:prstGeom xmlns:a="http://schemas.openxmlformats.org/drawingml/2006/main" prst="rect">
             <a:avLst/>
@@ -2429,17 +2471,17 @@
           <a:lstStyle xmlns:a="http://schemas.openxmlformats.org/drawingml/2006/main"/>
           <a:p xmlns:a="http://schemas.openxmlformats.org/drawingml/2006/main">
             <a:pPr algn="l">
-              <a:defRPr sz="2550" b="1">
-                <a:solidFill>
-                  <a:srgbClr val="F4F7FA"/>
-                </a:solidFill>
-                <a:latin typeface="DejaVu Sans"/>
-                <a:ea typeface="DejaVu Sans"/>
-                <a:cs typeface="DejaVu Sans"/>
-              </a:defRPr>
-            </a:pPr>
-            <a:r>
-              <a:rPr sz="2550" b="1">
+              <a:defRPr sz="2325" b="1">
+                <a:solidFill>
+                  <a:srgbClr val="F4F7FA"/>
+                </a:solidFill>
+                <a:latin typeface="DejaVu Sans"/>
+                <a:ea typeface="DejaVu Sans"/>
+                <a:cs typeface="DejaVu Sans"/>
+              </a:defRPr>
+            </a:pPr>
+            <a:r>
+              <a:rPr sz="2325" b="1">
                 <a:solidFill>
                   <a:srgbClr val="F4F7FA"/>
                 </a:solidFill>
@@ -2457,19 +2499,19 @@
           <p:cNvPr id="7" name="">
             <a:extLst xmlns:a="http://schemas.openxmlformats.org/drawingml/2006/main">
               <a:ext uri="{FF2B5EF4-FFF2-40B4-BE49-F238E27FC236}">
-                <a16:creationId xmlns:a16="http://schemas.microsoft.com/office/drawing/2014/main" id="{D69A97FF-41F7-4475-A798-7C5FC0A754EE}"/>
-              </a:ext>
-            </a:extLst>
-          </p:cNvPr>
-          <p:cNvSpPr>
-            <a:spLocks xmlns:a="http://schemas.openxmlformats.org/drawingml/2006/main" noGrp="1"/>
-          </p:cNvSpPr>
-          <p:nvPr/>
-        </p:nvSpPr>
-        <p:spPr>
-          <a:xfrm xmlns:a="http://schemas.openxmlformats.org/drawingml/2006/main">
-            <a:off x="609600" y="4419600"/>
-            <a:ext cx="3238500" cy="381000"/>
+                <a16:creationId xmlns:a16="http://schemas.microsoft.com/office/drawing/2014/main" id="{6FB983E5-CC02-424E-B8D4-408641369329}"/>
+              </a:ext>
+            </a:extLst>
+          </p:cNvPr>
+          <p:cNvSpPr>
+            <a:spLocks xmlns:a="http://schemas.openxmlformats.org/drawingml/2006/main" noGrp="1"/>
+          </p:cNvSpPr>
+          <p:nvPr/>
+        </p:nvSpPr>
+        <p:spPr>
+          <a:xfrm xmlns:a="http://schemas.openxmlformats.org/drawingml/2006/main">
+            <a:off x="609600" y="3886200"/>
+            <a:ext cx="4714875" cy="523875"/>
           </a:xfrm>
           <a:prstGeom xmlns:a="http://schemas.openxmlformats.org/drawingml/2006/main" prst="rect">
             <a:avLst/>
@@ -2486,7 +2528,87 @@
           <a:lstStyle xmlns:a="http://schemas.openxmlformats.org/drawingml/2006/main"/>
           <a:p xmlns:a="http://schemas.openxmlformats.org/drawingml/2006/main">
             <a:pPr algn="l">
-              <a:defRPr sz="1950" b="1">
+              <a:defRPr sz="1800" b="0">
+                <a:solidFill>
+                  <a:srgbClr val="ADB8C5"/>
+                </a:solidFill>
+                <a:latin typeface="DejaVu Sans"/>
+                <a:ea typeface="DejaVu Sans"/>
+                <a:cs typeface="DejaVu Sans"/>
+              </a:defRPr>
+            </a:pPr>
+            <a:r>
+              <a:rPr sz="1800" b="0">
+                <a:solidFill>
+                  <a:srgbClr val="ADB8C5"/>
+                </a:solidFill>
+                <a:latin typeface="DejaVu Sans"/>
+                <a:ea typeface="DejaVu Sans"/>
+                <a:cs typeface="DejaVu Sans"/>
+              </a:rPr>
+              <a:t>More work can be generated.</a:t>
+            </a:r>
+          </a:p>
+          <a:p xmlns:a="http://schemas.openxmlformats.org/drawingml/2006/main">
+            <a:pPr algn="l">
+              <a:defRPr sz="1800" b="0">
+                <a:solidFill>
+                  <a:srgbClr val="ADB8C5"/>
+                </a:solidFill>
+                <a:latin typeface="DejaVu Sans"/>
+                <a:ea typeface="DejaVu Sans"/>
+                <a:cs typeface="DejaVu Sans"/>
+              </a:defRPr>
+            </a:pPr>
+            <a:r>
+              <a:rPr sz="1800" b="0">
+                <a:solidFill>
+                  <a:srgbClr val="ADB8C5"/>
+                </a:solidFill>
+                <a:latin typeface="DejaVu Sans"/>
+                <a:ea typeface="DejaVu Sans"/>
+                <a:cs typeface="DejaVu Sans"/>
+              </a:rPr>
+              <a:t>The whole pipeline still matters.</a:t>
+            </a:r>
+          </a:p>
+        </p:txBody>
+      </p:sp>
+      <p:sp>
+        <p:nvSpPr>
+          <p:cNvPr id="8" name="">
+            <a:extLst xmlns:a="http://schemas.openxmlformats.org/drawingml/2006/main">
+              <a:ext uri="{FF2B5EF4-FFF2-40B4-BE49-F238E27FC236}">
+                <a16:creationId xmlns:a16="http://schemas.microsoft.com/office/drawing/2014/main" id="{DF9170B5-1099-4B22-986E-6CCF6B7CC846}"/>
+              </a:ext>
+            </a:extLst>
+          </p:cNvPr>
+          <p:cNvSpPr>
+            <a:spLocks xmlns:a="http://schemas.openxmlformats.org/drawingml/2006/main" noGrp="1"/>
+          </p:cNvSpPr>
+          <p:nvPr/>
+        </p:nvSpPr>
+        <p:spPr>
+          <a:xfrm xmlns:a="http://schemas.openxmlformats.org/drawingml/2006/main">
+            <a:off x="609600" y="4610100"/>
+            <a:ext cx="4857750" cy="323850"/>
+          </a:xfrm>
+          <a:prstGeom xmlns:a="http://schemas.openxmlformats.org/drawingml/2006/main" prst="rect">
+            <a:avLst/>
+          </a:prstGeom>
+          <a:noFill xmlns:a="http://schemas.openxmlformats.org/drawingml/2006/main"/>
+          <a:ln xmlns:a="http://schemas.openxmlformats.org/drawingml/2006/main" w="0">
+            <a:noFill/>
+          </a:ln>
+        </p:spPr>
+        <p:txBody>
+          <a:bodyPr xmlns:a="http://schemas.openxmlformats.org/drawingml/2006/main" wrap="square" lIns="0" tIns="0" rIns="0" bIns="0" anchor="ctr">
+            <a:noAutofit/>
+          </a:bodyPr>
+          <a:lstStyle xmlns:a="http://schemas.openxmlformats.org/drawingml/2006/main"/>
+          <a:p xmlns:a="http://schemas.openxmlformats.org/drawingml/2006/main">
+            <a:pPr algn="l">
+              <a:defRPr sz="1725" b="1">
                 <a:solidFill>
                   <a:srgbClr val="F5B61C"/>
                 </a:solidFill>
@@ -2496,7 +2618,7 @@
               </a:defRPr>
             </a:pPr>
             <a:r>
-              <a:rPr sz="1950" b="1">
+              <a:rPr sz="1725" b="1">
                 <a:solidFill>
                   <a:srgbClr val="F5B61C"/>
                 </a:solidFill>
@@ -2511,52 +2633,22 @@
       </p:sp>
       <p:sp>
         <p:nvSpPr>
-          <p:cNvPr id="8" name="">
-            <a:extLst xmlns:a="http://schemas.openxmlformats.org/drawingml/2006/main">
-              <a:ext uri="{FF2B5EF4-FFF2-40B4-BE49-F238E27FC236}">
-                <a16:creationId xmlns:a16="http://schemas.microsoft.com/office/drawing/2014/main" id="{7B46CDF5-DFE3-476A-97D5-2E485F3085CF}"/>
-              </a:ext>
-            </a:extLst>
-          </p:cNvPr>
-          <p:cNvSpPr>
-            <a:spLocks xmlns:a="http://schemas.openxmlformats.org/drawingml/2006/main" noGrp="1"/>
-          </p:cNvSpPr>
-          <p:nvPr/>
-        </p:nvSpPr>
-        <p:spPr>
-          <a:xfrm xmlns:a="http://schemas.openxmlformats.org/drawingml/2006/main">
-            <a:off x="3886200" y="4514850"/>
-            <a:ext cx="914400" cy="190500"/>
-          </a:xfrm>
-          <a:prstGeom xmlns:a="http://schemas.openxmlformats.org/drawingml/2006/main" prst="rightArrow">
-            <a:avLst/>
-          </a:prstGeom>
-          <a:solidFill xmlns:a="http://schemas.openxmlformats.org/drawingml/2006/main">
-            <a:srgbClr val="F5B61C"/>
-          </a:solidFill>
-          <a:ln xmlns:a="http://schemas.openxmlformats.org/drawingml/2006/main" w="0">
-            <a:noFill/>
-          </a:ln>
-        </p:spPr>
-      </p:sp>
-      <p:sp>
-        <p:nvSpPr>
           <p:cNvPr id="9" name="">
             <a:extLst xmlns:a="http://schemas.openxmlformats.org/drawingml/2006/main">
               <a:ext uri="{FF2B5EF4-FFF2-40B4-BE49-F238E27FC236}">
-                <a16:creationId xmlns:a16="http://schemas.microsoft.com/office/drawing/2014/main" id="{D262E0B4-D6DE-4F98-8730-ABA331309AC3}"/>
-              </a:ext>
-            </a:extLst>
-          </p:cNvPr>
-          <p:cNvSpPr>
-            <a:spLocks xmlns:a="http://schemas.openxmlformats.org/drawingml/2006/main" noGrp="1"/>
-          </p:cNvSpPr>
-          <p:nvPr/>
-        </p:nvSpPr>
-        <p:spPr>
-          <a:xfrm xmlns:a="http://schemas.openxmlformats.org/drawingml/2006/main">
-            <a:off x="5181600" y="4381500"/>
-            <a:ext cx="6286500" cy="533400"/>
+                <a16:creationId xmlns:a16="http://schemas.microsoft.com/office/drawing/2014/main" id="{65F79937-6C0B-4585-8793-418162231076}"/>
+              </a:ext>
+            </a:extLst>
+          </p:cNvPr>
+          <p:cNvSpPr>
+            <a:spLocks xmlns:a="http://schemas.openxmlformats.org/drawingml/2006/main" noGrp="1"/>
+          </p:cNvSpPr>
+          <p:nvPr/>
+        </p:nvSpPr>
+        <p:spPr>
+          <a:xfrm xmlns:a="http://schemas.openxmlformats.org/drawingml/2006/main">
+            <a:off x="609600" y="4972050"/>
+            <a:ext cx="4857750" cy="419100"/>
           </a:xfrm>
           <a:prstGeom xmlns:a="http://schemas.openxmlformats.org/drawingml/2006/main" prst="rect">
             <a:avLst/>
@@ -2573,17 +2665,17 @@
           <a:lstStyle xmlns:a="http://schemas.openxmlformats.org/drawingml/2006/main"/>
           <a:p xmlns:a="http://schemas.openxmlformats.org/drawingml/2006/main">
             <a:pPr algn="l">
-              <a:defRPr sz="2550" b="1">
-                <a:solidFill>
-                  <a:srgbClr val="F4F7FA"/>
-                </a:solidFill>
-                <a:latin typeface="DejaVu Sans"/>
-                <a:ea typeface="DejaVu Sans"/>
-                <a:cs typeface="DejaVu Sans"/>
-              </a:defRPr>
-            </a:pPr>
-            <a:r>
-              <a:rPr sz="2550" b="1">
+              <a:defRPr sz="2325" b="1">
+                <a:solidFill>
+                  <a:srgbClr val="F4F7FA"/>
+                </a:solidFill>
+                <a:latin typeface="DejaVu Sans"/>
+                <a:ea typeface="DejaVu Sans"/>
+                <a:cs typeface="DejaVu Sans"/>
+              </a:defRPr>
+            </a:pPr>
+            <a:r>
+              <a:rPr sz="2325" b="1">
                 <a:solidFill>
                   <a:srgbClr val="F4F7FA"/>
                 </a:solidFill>
@@ -2601,19 +2693,19 @@
           <p:cNvPr id="10" name="">
             <a:extLst xmlns:a="http://schemas.openxmlformats.org/drawingml/2006/main">
               <a:ext uri="{FF2B5EF4-FFF2-40B4-BE49-F238E27FC236}">
-                <a16:creationId xmlns:a16="http://schemas.microsoft.com/office/drawing/2014/main" id="{267A3BDC-2D1C-4160-9E3E-552EF6EF7141}"/>
-              </a:ext>
-            </a:extLst>
-          </p:cNvPr>
-          <p:cNvSpPr>
-            <a:spLocks xmlns:a="http://schemas.openxmlformats.org/drawingml/2006/main" noGrp="1"/>
-          </p:cNvSpPr>
-          <p:nvPr/>
-        </p:nvSpPr>
-        <p:spPr>
-          <a:xfrm xmlns:a="http://schemas.openxmlformats.org/drawingml/2006/main">
-            <a:off x="609600" y="5667375"/>
-            <a:ext cx="10477500" cy="381000"/>
+                <a16:creationId xmlns:a16="http://schemas.microsoft.com/office/drawing/2014/main" id="{B0E1CEF0-77B4-4DC9-B74B-CFB8884849B5}"/>
+              </a:ext>
+            </a:extLst>
+          </p:cNvPr>
+          <p:cNvSpPr>
+            <a:spLocks xmlns:a="http://schemas.openxmlformats.org/drawingml/2006/main" noGrp="1"/>
+          </p:cNvSpPr>
+          <p:nvPr/>
+        </p:nvSpPr>
+        <p:spPr>
+          <a:xfrm xmlns:a="http://schemas.openxmlformats.org/drawingml/2006/main">
+            <a:off x="609600" y="5410200"/>
+            <a:ext cx="4714875" cy="523875"/>
           </a:xfrm>
           <a:prstGeom xmlns:a="http://schemas.openxmlformats.org/drawingml/2006/main" prst="rect">
             <a:avLst/>
@@ -2630,7 +2722,7 @@
           <a:lstStyle xmlns:a="http://schemas.openxmlformats.org/drawingml/2006/main"/>
           <a:p xmlns:a="http://schemas.openxmlformats.org/drawingml/2006/main">
             <a:pPr algn="l">
-              <a:defRPr sz="2025" b="0">
+              <a:defRPr sz="1800" b="0">
                 <a:solidFill>
                   <a:srgbClr val="ADB8C5"/>
                 </a:solidFill>
@@ -2640,7 +2732,7 @@
               </a:defRPr>
             </a:pPr>
             <a:r>
-              <a:rPr sz="2025" b="0">
+              <a:rPr sz="1800" b="0">
                 <a:solidFill>
                   <a:srgbClr val="ADB8C5"/>
                 </a:solidFill>
@@ -2648,7 +2740,30 @@
                 <a:ea typeface="DejaVu Sans"/>
                 <a:cs typeface="DejaVu Sans"/>
               </a:rPr>
-              <a:t>They are related. They are not the same.</a:t>
+              <a:t>The product delegates judgment.</a:t>
+            </a:r>
+          </a:p>
+          <a:p xmlns:a="http://schemas.openxmlformats.org/drawingml/2006/main">
+            <a:pPr algn="l">
+              <a:defRPr sz="1800" b="0">
+                <a:solidFill>
+                  <a:srgbClr val="ADB8C5"/>
+                </a:solidFill>
+                <a:latin typeface="DejaVu Sans"/>
+                <a:ea typeface="DejaVu Sans"/>
+                <a:cs typeface="DejaVu Sans"/>
+              </a:defRPr>
+            </a:pPr>
+            <a:r>
+              <a:rPr sz="1800" b="0">
+                <a:solidFill>
+                  <a:srgbClr val="ADB8C5"/>
+                </a:solidFill>
+                <a:latin typeface="DejaVu Sans"/>
+                <a:ea typeface="DejaVu Sans"/>
+                <a:cs typeface="DejaVu Sans"/>
+              </a:rPr>
+              <a:t>Its boundaries still matter.</a:t>
             </a:r>
           </a:p>
         </p:txBody>
@@ -2658,7 +2773,7 @@
           <p:cNvPr id="11" name="">
             <a:extLst xmlns:a="http://schemas.openxmlformats.org/drawingml/2006/main">
               <a:ext uri="{FF2B5EF4-FFF2-40B4-BE49-F238E27FC236}">
-                <a16:creationId xmlns:a16="http://schemas.microsoft.com/office/drawing/2014/main" id="{0C2290EE-208B-482A-A4A1-EB2CD2831FFB}"/>
+                <a16:creationId xmlns:a16="http://schemas.microsoft.com/office/drawing/2014/main" id="{A031B51C-BE59-478F-9EF2-01A17BBF1460}"/>
               </a:ext>
             </a:extLst>
           </p:cNvPr>
@@ -2713,7 +2828,7 @@
     </p:spTree>
     <p:extLst>
       <p:ext uri="{BB962C8B-B14F-4D97-AF65-F5344CB8AC3E}">
-        <p14:creationId xmlns:p14="http://schemas.microsoft.com/office/powerpoint/2010/main" val="954493836"/>
+        <p14:creationId xmlns:p14="http://schemas.microsoft.com/office/powerpoint/2010/main" val="214947695"/>
       </p:ext>
     </p:extLst>
   </p:cSld>
@@ -2744,7 +2859,7 @@
           <p:cNvPr id="25" name="">
             <a:extLst xmlns:a="http://schemas.openxmlformats.org/drawingml/2006/main">
               <a:ext uri="{FF2B5EF4-FFF2-40B4-BE49-F238E27FC236}">
-                <a16:creationId xmlns:a16="http://schemas.microsoft.com/office/drawing/2014/main" id="{EDF28E19-5BBC-48ED-9D7B-5944CA686DD1}"/>
+                <a16:creationId xmlns:a16="http://schemas.microsoft.com/office/drawing/2014/main" id="{C893D971-A53E-4141-84B6-E0CE2571B24E}"/>
               </a:ext>
             </a:extLst>
           </p:cNvPr>
@@ -2801,7 +2916,7 @@
           <p:cNvPr id="2" name="">
             <a:extLst xmlns:a="http://schemas.openxmlformats.org/drawingml/2006/main">
               <a:ext uri="{FF2B5EF4-FFF2-40B4-BE49-F238E27FC236}">
-                <a16:creationId xmlns:a16="http://schemas.microsoft.com/office/drawing/2014/main" id="{02C80F99-6B7B-4F6E-BEDE-8CCE082CC200}"/>
+                <a16:creationId xmlns:a16="http://schemas.microsoft.com/office/drawing/2014/main" id="{6C92BCD1-65DC-4DC7-8C38-DE421737D49A}"/>
               </a:ext>
             </a:extLst>
           </p:cNvPr>
@@ -2832,7 +2947,7 @@
           <p:cNvPr id="3" name="">
             <a:extLst xmlns:a="http://schemas.openxmlformats.org/drawingml/2006/main">
               <a:ext uri="{FF2B5EF4-FFF2-40B4-BE49-F238E27FC236}">
-                <a16:creationId xmlns:a16="http://schemas.microsoft.com/office/drawing/2014/main" id="{B14AC92B-6101-433F-A4FD-3B53C1403C64}"/>
+                <a16:creationId xmlns:a16="http://schemas.microsoft.com/office/drawing/2014/main" id="{D33718E7-F45E-466E-99DC-E72C6D56A9F2}"/>
               </a:ext>
             </a:extLst>
           </p:cNvPr>
@@ -2889,7 +3004,7 @@
           <p:cNvPr id="4" name="">
             <a:extLst xmlns:a="http://schemas.openxmlformats.org/drawingml/2006/main">
               <a:ext uri="{FF2B5EF4-FFF2-40B4-BE49-F238E27FC236}">
-                <a16:creationId xmlns:a16="http://schemas.microsoft.com/office/drawing/2014/main" id="{8261A1C1-EBEC-493A-B11E-BF6A1425B1FF}"/>
+                <a16:creationId xmlns:a16="http://schemas.microsoft.com/office/drawing/2014/main" id="{F02B9379-916D-4D2E-9A2B-F0CDB8AFB8F0}"/>
               </a:ext>
             </a:extLst>
           </p:cNvPr>
@@ -2946,7 +3061,7 @@
           <p:cNvPr id="5" name="">
             <a:extLst xmlns:a="http://schemas.openxmlformats.org/drawingml/2006/main">
               <a:ext uri="{FF2B5EF4-FFF2-40B4-BE49-F238E27FC236}">
-                <a16:creationId xmlns:a16="http://schemas.microsoft.com/office/drawing/2014/main" id="{1403D3E1-107B-46F3-8158-FCD659265FCF}"/>
+                <a16:creationId xmlns:a16="http://schemas.microsoft.com/office/drawing/2014/main" id="{3F686445-583D-4944-96D5-83FB0807255D}"/>
               </a:ext>
             </a:extLst>
           </p:cNvPr>
@@ -2979,7 +3094,7 @@
           <p:cNvPr id="6" name="">
             <a:extLst xmlns:a="http://schemas.openxmlformats.org/drawingml/2006/main">
               <a:ext uri="{FF2B5EF4-FFF2-40B4-BE49-F238E27FC236}">
-                <a16:creationId xmlns:a16="http://schemas.microsoft.com/office/drawing/2014/main" id="{7DB485AA-8735-4E68-8DBD-9E9178474115}"/>
+                <a16:creationId xmlns:a16="http://schemas.microsoft.com/office/drawing/2014/main" id="{16F857D6-7696-4D2B-B3F5-1B3CFBC5E996}"/>
               </a:ext>
             </a:extLst>
           </p:cNvPr>
@@ -3036,7 +3151,7 @@
           <p:cNvPr id="7" name="">
             <a:extLst xmlns:a="http://schemas.openxmlformats.org/drawingml/2006/main">
               <a:ext uri="{FF2B5EF4-FFF2-40B4-BE49-F238E27FC236}">
-                <a16:creationId xmlns:a16="http://schemas.microsoft.com/office/drawing/2014/main" id="{2BC2B5CA-9C52-4193-99A4-CEFAF7C48E42}"/>
+                <a16:creationId xmlns:a16="http://schemas.microsoft.com/office/drawing/2014/main" id="{FFA815D4-E608-4BF6-BC33-D12D82D17518}"/>
               </a:ext>
             </a:extLst>
           </p:cNvPr>
@@ -3069,7 +3184,7 @@
           <p:cNvPr id="8" name="">
             <a:extLst xmlns:a="http://schemas.openxmlformats.org/drawingml/2006/main">
               <a:ext uri="{FF2B5EF4-FFF2-40B4-BE49-F238E27FC236}">
-                <a16:creationId xmlns:a16="http://schemas.microsoft.com/office/drawing/2014/main" id="{FCC90027-FBEB-4C21-B6D3-7C83A067C919}"/>
+                <a16:creationId xmlns:a16="http://schemas.microsoft.com/office/drawing/2014/main" id="{4ABD31C5-711B-47B1-839A-9231FEE0078E}"/>
               </a:ext>
             </a:extLst>
           </p:cNvPr>
@@ -3126,7 +3241,7 @@
           <p:cNvPr id="9" name="">
             <a:extLst xmlns:a="http://schemas.openxmlformats.org/drawingml/2006/main">
               <a:ext uri="{FF2B5EF4-FFF2-40B4-BE49-F238E27FC236}">
-                <a16:creationId xmlns:a16="http://schemas.microsoft.com/office/drawing/2014/main" id="{EC5AA601-24C8-4257-828B-510C5AC9DA74}"/>
+                <a16:creationId xmlns:a16="http://schemas.microsoft.com/office/drawing/2014/main" id="{67917495-7677-46BF-B413-661F21832F2C}"/>
               </a:ext>
             </a:extLst>
           </p:cNvPr>
@@ -3159,7 +3274,7 @@
           <p:cNvPr id="10" name="">
             <a:extLst xmlns:a="http://schemas.openxmlformats.org/drawingml/2006/main">
               <a:ext uri="{FF2B5EF4-FFF2-40B4-BE49-F238E27FC236}">
-                <a16:creationId xmlns:a16="http://schemas.microsoft.com/office/drawing/2014/main" id="{CE956828-1370-4194-AC6C-A331FA1BCEF2}"/>
+                <a16:creationId xmlns:a16="http://schemas.microsoft.com/office/drawing/2014/main" id="{483925AB-C886-41E1-8AB6-B119F0A4E59A}"/>
               </a:ext>
             </a:extLst>
           </p:cNvPr>
@@ -3216,7 +3331,7 @@
           <p:cNvPr id="11" name="">
             <a:extLst xmlns:a="http://schemas.openxmlformats.org/drawingml/2006/main">
               <a:ext uri="{FF2B5EF4-FFF2-40B4-BE49-F238E27FC236}">
-                <a16:creationId xmlns:a16="http://schemas.microsoft.com/office/drawing/2014/main" id="{0F681FE4-60B5-4669-A9FD-F1A1865E7D99}"/>
+                <a16:creationId xmlns:a16="http://schemas.microsoft.com/office/drawing/2014/main" id="{D2771BDA-C0E1-4095-B336-277B10ABDA64}"/>
               </a:ext>
             </a:extLst>
           </p:cNvPr>
@@ -3249,7 +3364,7 @@
           <p:cNvPr id="12" name="">
             <a:extLst xmlns:a="http://schemas.openxmlformats.org/drawingml/2006/main">
               <a:ext uri="{FF2B5EF4-FFF2-40B4-BE49-F238E27FC236}">
-                <a16:creationId xmlns:a16="http://schemas.microsoft.com/office/drawing/2014/main" id="{021AADA4-24CB-4BDB-A3C4-B89EB45589B7}"/>
+                <a16:creationId xmlns:a16="http://schemas.microsoft.com/office/drawing/2014/main" id="{745F553E-F3EA-4D61-94D6-B75EA85FB48C}"/>
               </a:ext>
             </a:extLst>
           </p:cNvPr>
@@ -3306,7 +3421,7 @@
           <p:cNvPr id="13" name="">
             <a:extLst xmlns:a="http://schemas.openxmlformats.org/drawingml/2006/main">
               <a:ext uri="{FF2B5EF4-FFF2-40B4-BE49-F238E27FC236}">
-                <a16:creationId xmlns:a16="http://schemas.microsoft.com/office/drawing/2014/main" id="{5DE25C60-5243-4D9A-BDDF-41CBE64AD695}"/>
+                <a16:creationId xmlns:a16="http://schemas.microsoft.com/office/drawing/2014/main" id="{33C1D130-B631-4F4B-BE99-260883993B35}"/>
               </a:ext>
             </a:extLst>
           </p:cNvPr>
@@ -3339,7 +3454,7 @@
           <p:cNvPr id="14" name="">
             <a:extLst xmlns:a="http://schemas.openxmlformats.org/drawingml/2006/main">
               <a:ext uri="{FF2B5EF4-FFF2-40B4-BE49-F238E27FC236}">
-                <a16:creationId xmlns:a16="http://schemas.microsoft.com/office/drawing/2014/main" id="{101137C5-31C5-40A4-986E-18CC799601CD}"/>
+                <a16:creationId xmlns:a16="http://schemas.microsoft.com/office/drawing/2014/main" id="{1833CE61-3368-4BC2-98A2-C2C14CDCEA67}"/>
               </a:ext>
             </a:extLst>
           </p:cNvPr>
@@ -3500,7 +3615,7 @@
           <p:cNvPr id="19" name="">
             <a:extLst xmlns:a="http://schemas.openxmlformats.org/drawingml/2006/main">
               <a:ext uri="{FF2B5EF4-FFF2-40B4-BE49-F238E27FC236}">
-                <a16:creationId xmlns:a16="http://schemas.microsoft.com/office/drawing/2014/main" id="{D3937689-7EC9-4BA5-A44D-C581D06A2142}"/>
+                <a16:creationId xmlns:a16="http://schemas.microsoft.com/office/drawing/2014/main" id="{876BAF17-6CB8-48FE-92CA-77FC9D028CF8}"/>
               </a:ext>
             </a:extLst>
           </p:cNvPr>
@@ -3557,7 +3672,7 @@
           <p:cNvPr id="20" name="">
             <a:extLst xmlns:a="http://schemas.openxmlformats.org/drawingml/2006/main">
               <a:ext uri="{FF2B5EF4-FFF2-40B4-BE49-F238E27FC236}">
-                <a16:creationId xmlns:a16="http://schemas.microsoft.com/office/drawing/2014/main" id="{46E5DCEF-8AC4-4620-916C-DD6B48B460B2}"/>
+                <a16:creationId xmlns:a16="http://schemas.microsoft.com/office/drawing/2014/main" id="{B91B6170-ABE5-441F-80B8-E22F512B3478}"/>
               </a:ext>
             </a:extLst>
           </p:cNvPr>
@@ -3614,7 +3729,7 @@
           <p:cNvPr id="21" name="">
             <a:extLst xmlns:a="http://schemas.openxmlformats.org/drawingml/2006/main">
               <a:ext uri="{FF2B5EF4-FFF2-40B4-BE49-F238E27FC236}">
-                <a16:creationId xmlns:a16="http://schemas.microsoft.com/office/drawing/2014/main" id="{EFD802AB-01CA-4AF3-8C0B-3AAA378A2661}"/>
+                <a16:creationId xmlns:a16="http://schemas.microsoft.com/office/drawing/2014/main" id="{556EFBA7-4AA7-446D-BDDB-A7D431021B1B}"/>
               </a:ext>
             </a:extLst>
           </p:cNvPr>
@@ -3671,7 +3786,7 @@
           <p:cNvPr id="22" name="">
             <a:extLst xmlns:a="http://schemas.openxmlformats.org/drawingml/2006/main">
               <a:ext uri="{FF2B5EF4-FFF2-40B4-BE49-F238E27FC236}">
-                <a16:creationId xmlns:a16="http://schemas.microsoft.com/office/drawing/2014/main" id="{8A2A8DF9-7E7C-4741-BDAC-0D7FA65D04F2}"/>
+                <a16:creationId xmlns:a16="http://schemas.microsoft.com/office/drawing/2014/main" id="{260ED1DE-2D74-4F30-AA31-56B55988FFE1}"/>
               </a:ext>
             </a:extLst>
           </p:cNvPr>
@@ -3728,7 +3843,7 @@
           <p:cNvPr id="23" name="">
             <a:extLst xmlns:a="http://schemas.openxmlformats.org/drawingml/2006/main">
               <a:ext uri="{FF2B5EF4-FFF2-40B4-BE49-F238E27FC236}">
-                <a16:creationId xmlns:a16="http://schemas.microsoft.com/office/drawing/2014/main" id="{452315B9-36DE-47E5-9693-62CD1DFE0EB9}"/>
+                <a16:creationId xmlns:a16="http://schemas.microsoft.com/office/drawing/2014/main" id="{8593417D-2DB0-4049-8A1B-4194DB2CDA8D}"/>
               </a:ext>
             </a:extLst>
           </p:cNvPr>
@@ -3759,7 +3874,7 @@
           <p:cNvPr id="24" name="">
             <a:extLst xmlns:a="http://schemas.openxmlformats.org/drawingml/2006/main">
               <a:ext uri="{FF2B5EF4-FFF2-40B4-BE49-F238E27FC236}">
-                <a16:creationId xmlns:a16="http://schemas.microsoft.com/office/drawing/2014/main" id="{88F4B0C4-6643-41EA-9AF0-9B8746A89E2B}"/>
+                <a16:creationId xmlns:a16="http://schemas.microsoft.com/office/drawing/2014/main" id="{155A4FA6-4CE8-4F04-9B8A-A80B90C00919}"/>
               </a:ext>
             </a:extLst>
           </p:cNvPr>
@@ -3814,7 +3929,7 @@
     </p:spTree>
     <p:extLst>
       <p:ext uri="{BB962C8B-B14F-4D97-AF65-F5344CB8AC3E}">
-        <p14:creationId xmlns:p14="http://schemas.microsoft.com/office/powerpoint/2010/main" val="1177299668"/>
+        <p14:creationId xmlns:p14="http://schemas.microsoft.com/office/powerpoint/2010/main" val="652231063"/>
       </p:ext>
     </p:extLst>
   </p:cSld>
@@ -3845,7 +3960,7 @@
           <p:cNvPr id="8" name="">
             <a:extLst xmlns:a="http://schemas.openxmlformats.org/drawingml/2006/main">
               <a:ext uri="{FF2B5EF4-FFF2-40B4-BE49-F238E27FC236}">
-                <a16:creationId xmlns:a16="http://schemas.microsoft.com/office/drawing/2014/main" id="{0A207C99-91D7-44E5-B4CB-96CB5F76598F}"/>
+                <a16:creationId xmlns:a16="http://schemas.microsoft.com/office/drawing/2014/main" id="{4AACD222-44BF-41E4-A255-E1CF3E888B7B}"/>
               </a:ext>
             </a:extLst>
           </p:cNvPr>
@@ -3902,7 +4017,7 @@
           <p:cNvPr id="2" name="">
             <a:extLst xmlns:a="http://schemas.openxmlformats.org/drawingml/2006/main">
               <a:ext uri="{FF2B5EF4-FFF2-40B4-BE49-F238E27FC236}">
-                <a16:creationId xmlns:a16="http://schemas.microsoft.com/office/drawing/2014/main" id="{6C0A7241-BC08-4410-82AC-EE977A821887}"/>
+                <a16:creationId xmlns:a16="http://schemas.microsoft.com/office/drawing/2014/main" id="{FB175541-8A6A-4A85-BD25-9DFA2D9B29E4}"/>
               </a:ext>
             </a:extLst>
           </p:cNvPr>
@@ -3933,7 +4048,7 @@
           <p:cNvPr id="3" name="">
             <a:extLst xmlns:a="http://schemas.openxmlformats.org/drawingml/2006/main">
               <a:ext uri="{FF2B5EF4-FFF2-40B4-BE49-F238E27FC236}">
-                <a16:creationId xmlns:a16="http://schemas.microsoft.com/office/drawing/2014/main" id="{692BB619-4C0E-43DA-8DCD-BDA1D4633B85}"/>
+                <a16:creationId xmlns:a16="http://schemas.microsoft.com/office/drawing/2014/main" id="{CEE8C850-7B86-4E7A-862E-A3A812F459CE}"/>
               </a:ext>
             </a:extLst>
           </p:cNvPr>
@@ -4333,7 +4448,7 @@
           <p:cNvPr id="5" name="">
             <a:extLst xmlns:a="http://schemas.openxmlformats.org/drawingml/2006/main">
               <a:ext uri="{FF2B5EF4-FFF2-40B4-BE49-F238E27FC236}">
-                <a16:creationId xmlns:a16="http://schemas.microsoft.com/office/drawing/2014/main" id="{958610E5-AC90-4674-8C81-618B9CB7C18C}"/>
+                <a16:creationId xmlns:a16="http://schemas.microsoft.com/office/drawing/2014/main" id="{97075E90-CD5C-4A19-872E-D32245258232}"/>
               </a:ext>
             </a:extLst>
           </p:cNvPr>
@@ -4390,7 +4505,7 @@
           <p:cNvPr id="6" name="">
             <a:extLst xmlns:a="http://schemas.openxmlformats.org/drawingml/2006/main">
               <a:ext uri="{FF2B5EF4-FFF2-40B4-BE49-F238E27FC236}">
-                <a16:creationId xmlns:a16="http://schemas.microsoft.com/office/drawing/2014/main" id="{D7EFFEBB-E0BC-4E14-8A10-AA0D432F5A9C}"/>
+                <a16:creationId xmlns:a16="http://schemas.microsoft.com/office/drawing/2014/main" id="{7D4A05E5-4EF3-4DDA-B60C-16759CD38A3B}"/>
               </a:ext>
             </a:extLst>
           </p:cNvPr>
@@ -4421,7 +4536,7 @@
           <p:cNvPr id="7" name="">
             <a:extLst xmlns:a="http://schemas.openxmlformats.org/drawingml/2006/main">
               <a:ext uri="{FF2B5EF4-FFF2-40B4-BE49-F238E27FC236}">
-                <a16:creationId xmlns:a16="http://schemas.microsoft.com/office/drawing/2014/main" id="{08FF74D7-CBC1-47B8-89AE-054FF0343799}"/>
+                <a16:creationId xmlns:a16="http://schemas.microsoft.com/office/drawing/2014/main" id="{01527FB1-1879-43B5-9534-E8120D6D8D2E}"/>
               </a:ext>
             </a:extLst>
           </p:cNvPr>
@@ -4476,7 +4591,7 @@
     </p:spTree>
     <p:extLst>
       <p:ext uri="{BB962C8B-B14F-4D97-AF65-F5344CB8AC3E}">
-        <p14:creationId xmlns:p14="http://schemas.microsoft.com/office/powerpoint/2010/main" val="1152151155"/>
+        <p14:creationId xmlns:p14="http://schemas.microsoft.com/office/powerpoint/2010/main" val="1511914749"/>
       </p:ext>
     </p:extLst>
   </p:cSld>
@@ -4507,7 +4622,7 @@
           <p:cNvPr id="32" name="">
             <a:extLst xmlns:a="http://schemas.openxmlformats.org/drawingml/2006/main">
               <a:ext uri="{FF2B5EF4-FFF2-40B4-BE49-F238E27FC236}">
-                <a16:creationId xmlns:a16="http://schemas.microsoft.com/office/drawing/2014/main" id="{378B86C4-B917-4814-80A1-63F646AC3E93}"/>
+                <a16:creationId xmlns:a16="http://schemas.microsoft.com/office/drawing/2014/main" id="{C2B2A95A-6CC7-4DB3-B0DA-07E3D8C35AE2}"/>
               </a:ext>
             </a:extLst>
           </p:cNvPr>
@@ -4564,7 +4679,7 @@
           <p:cNvPr id="2" name="">
             <a:extLst xmlns:a="http://schemas.openxmlformats.org/drawingml/2006/main">
               <a:ext uri="{FF2B5EF4-FFF2-40B4-BE49-F238E27FC236}">
-                <a16:creationId xmlns:a16="http://schemas.microsoft.com/office/drawing/2014/main" id="{49241266-98A8-4E68-9787-D48CB9C9A4BD}"/>
+                <a16:creationId xmlns:a16="http://schemas.microsoft.com/office/drawing/2014/main" id="{D0BC7885-CD95-471A-943B-7DAF63E3044B}"/>
               </a:ext>
             </a:extLst>
           </p:cNvPr>
@@ -4595,7 +4710,7 @@
           <p:cNvPr id="3" name="">
             <a:extLst xmlns:a="http://schemas.openxmlformats.org/drawingml/2006/main">
               <a:ext uri="{FF2B5EF4-FFF2-40B4-BE49-F238E27FC236}">
-                <a16:creationId xmlns:a16="http://schemas.microsoft.com/office/drawing/2014/main" id="{88C7CF71-BEA6-4905-A08A-63A0D341F519}"/>
+                <a16:creationId xmlns:a16="http://schemas.microsoft.com/office/drawing/2014/main" id="{4582FF9E-8F8D-4A97-B86E-B25839D82FF5}"/>
               </a:ext>
             </a:extLst>
           </p:cNvPr>
@@ -4652,7 +4767,7 @@
           <p:cNvPr id="4" name="">
             <a:extLst xmlns:a="http://schemas.openxmlformats.org/drawingml/2006/main">
               <a:ext uri="{FF2B5EF4-FFF2-40B4-BE49-F238E27FC236}">
-                <a16:creationId xmlns:a16="http://schemas.microsoft.com/office/drawing/2014/main" id="{4D3905FE-5713-4E8B-8CD6-5AE56239F2F2}"/>
+                <a16:creationId xmlns:a16="http://schemas.microsoft.com/office/drawing/2014/main" id="{23699433-7198-425D-9E42-BF6EC225E64B}"/>
               </a:ext>
             </a:extLst>
           </p:cNvPr>
@@ -4685,7 +4800,7 @@
           <p:cNvPr id="5" name="">
             <a:extLst xmlns:a="http://schemas.openxmlformats.org/drawingml/2006/main">
               <a:ext uri="{FF2B5EF4-FFF2-40B4-BE49-F238E27FC236}">
-                <a16:creationId xmlns:a16="http://schemas.microsoft.com/office/drawing/2014/main" id="{6A63C8AE-D190-42A3-A808-0F3933F00FCC}"/>
+                <a16:creationId xmlns:a16="http://schemas.microsoft.com/office/drawing/2014/main" id="{BF891FDC-89FD-46B7-A4DC-0D891DDEED48}"/>
               </a:ext>
             </a:extLst>
           </p:cNvPr>
@@ -4742,7 +4857,7 @@
           <p:cNvPr id="6" name="">
             <a:extLst xmlns:a="http://schemas.openxmlformats.org/drawingml/2006/main">
               <a:ext uri="{FF2B5EF4-FFF2-40B4-BE49-F238E27FC236}">
-                <a16:creationId xmlns:a16="http://schemas.microsoft.com/office/drawing/2014/main" id="{84F5D3A7-92C9-47AB-8FEF-9358AFAF55F2}"/>
+                <a16:creationId xmlns:a16="http://schemas.microsoft.com/office/drawing/2014/main" id="{05372F77-A3FB-4790-B6A2-810783D116F0}"/>
               </a:ext>
             </a:extLst>
           </p:cNvPr>
@@ -4775,7 +4890,7 @@
           <p:cNvPr id="7" name="">
             <a:extLst xmlns:a="http://schemas.openxmlformats.org/drawingml/2006/main">
               <a:ext uri="{FF2B5EF4-FFF2-40B4-BE49-F238E27FC236}">
-                <a16:creationId xmlns:a16="http://schemas.microsoft.com/office/drawing/2014/main" id="{45307267-E16C-448B-BA92-A923E175EC13}"/>
+                <a16:creationId xmlns:a16="http://schemas.microsoft.com/office/drawing/2014/main" id="{1B516460-F449-45D1-ACFB-F94691EEA9F9}"/>
               </a:ext>
             </a:extLst>
           </p:cNvPr>
@@ -4832,7 +4947,7 @@
           <p:cNvPr id="8" name="">
             <a:extLst xmlns:a="http://schemas.openxmlformats.org/drawingml/2006/main">
               <a:ext uri="{FF2B5EF4-FFF2-40B4-BE49-F238E27FC236}">
-                <a16:creationId xmlns:a16="http://schemas.microsoft.com/office/drawing/2014/main" id="{2DAFC8A9-0D88-4A0A-AA2B-9CFA7651FE4B}"/>
+                <a16:creationId xmlns:a16="http://schemas.microsoft.com/office/drawing/2014/main" id="{15DC08E9-9CFF-4318-8198-663EB6018CC2}"/>
               </a:ext>
             </a:extLst>
           </p:cNvPr>
@@ -4865,7 +4980,7 @@
           <p:cNvPr id="9" name="">
             <a:extLst xmlns:a="http://schemas.openxmlformats.org/drawingml/2006/main">
               <a:ext uri="{FF2B5EF4-FFF2-40B4-BE49-F238E27FC236}">
-                <a16:creationId xmlns:a16="http://schemas.microsoft.com/office/drawing/2014/main" id="{021C4F41-C31D-41BE-9A46-C6F57419623E}"/>
+                <a16:creationId xmlns:a16="http://schemas.microsoft.com/office/drawing/2014/main" id="{4D9B67FC-D6A5-4D75-AD2B-D50532FBEDAA}"/>
               </a:ext>
             </a:extLst>
           </p:cNvPr>
@@ -4922,7 +5037,7 @@
           <p:cNvPr id="10" name="">
             <a:extLst xmlns:a="http://schemas.openxmlformats.org/drawingml/2006/main">
               <a:ext uri="{FF2B5EF4-FFF2-40B4-BE49-F238E27FC236}">
-                <a16:creationId xmlns:a16="http://schemas.microsoft.com/office/drawing/2014/main" id="{A6285A73-1F7C-436C-B1C4-36DA0BCECD3A}"/>
+                <a16:creationId xmlns:a16="http://schemas.microsoft.com/office/drawing/2014/main" id="{0041C3E4-34FC-4E1C-B885-DAB59448B180}"/>
               </a:ext>
             </a:extLst>
           </p:cNvPr>
@@ -4955,7 +5070,7 @@
           <p:cNvPr id="11" name="">
             <a:extLst xmlns:a="http://schemas.openxmlformats.org/drawingml/2006/main">
               <a:ext uri="{FF2B5EF4-FFF2-40B4-BE49-F238E27FC236}">
-                <a16:creationId xmlns:a16="http://schemas.microsoft.com/office/drawing/2014/main" id="{B85D8584-B35A-4768-BCBA-AAD9934D9F5D}"/>
+                <a16:creationId xmlns:a16="http://schemas.microsoft.com/office/drawing/2014/main" id="{0B2B5F5E-E79F-43E1-8202-A8ED8B79FC7A}"/>
               </a:ext>
             </a:extLst>
           </p:cNvPr>
@@ -5012,7 +5127,7 @@
           <p:cNvPr id="12" name="">
             <a:extLst xmlns:a="http://schemas.openxmlformats.org/drawingml/2006/main">
               <a:ext uri="{FF2B5EF4-FFF2-40B4-BE49-F238E27FC236}">
-                <a16:creationId xmlns:a16="http://schemas.microsoft.com/office/drawing/2014/main" id="{124B8EC7-17EE-413D-BF28-E44795E697C0}"/>
+                <a16:creationId xmlns:a16="http://schemas.microsoft.com/office/drawing/2014/main" id="{A7D8131C-0F6B-448D-AC5D-74F4A5E398CF}"/>
               </a:ext>
             </a:extLst>
           </p:cNvPr>
@@ -5045,7 +5160,7 @@
           <p:cNvPr id="13" name="">
             <a:extLst xmlns:a="http://schemas.openxmlformats.org/drawingml/2006/main">
               <a:ext uri="{FF2B5EF4-FFF2-40B4-BE49-F238E27FC236}">
-                <a16:creationId xmlns:a16="http://schemas.microsoft.com/office/drawing/2014/main" id="{5017CBE9-DF80-4D44-AFBE-F70AB313C33D}"/>
+                <a16:creationId xmlns:a16="http://schemas.microsoft.com/office/drawing/2014/main" id="{1E9382CB-1C03-4E3C-9A2D-58F130C81A83}"/>
               </a:ext>
             </a:extLst>
           </p:cNvPr>
@@ -5206,7 +5321,7 @@
           <p:cNvPr id="18" name="">
             <a:extLst xmlns:a="http://schemas.openxmlformats.org/drawingml/2006/main">
               <a:ext uri="{FF2B5EF4-FFF2-40B4-BE49-F238E27FC236}">
-                <a16:creationId xmlns:a16="http://schemas.microsoft.com/office/drawing/2014/main" id="{4C6F3D6C-BE55-4358-AF2B-EAFF5881AAA2}"/>
+                <a16:creationId xmlns:a16="http://schemas.microsoft.com/office/drawing/2014/main" id="{85768F8B-8FFB-4868-A6BE-6C5E62BEB07E}"/>
               </a:ext>
             </a:extLst>
           </p:cNvPr>
@@ -5239,7 +5354,7 @@
           <p:cNvPr id="19" name="">
             <a:extLst xmlns:a="http://schemas.openxmlformats.org/drawingml/2006/main">
               <a:ext uri="{FF2B5EF4-FFF2-40B4-BE49-F238E27FC236}">
-                <a16:creationId xmlns:a16="http://schemas.microsoft.com/office/drawing/2014/main" id="{1FAC484C-F247-46D0-A68D-DBD5F8BB0F85}"/>
+                <a16:creationId xmlns:a16="http://schemas.microsoft.com/office/drawing/2014/main" id="{3BDFBF6D-10B3-4D39-AA1F-58C88AE69684}"/>
               </a:ext>
             </a:extLst>
           </p:cNvPr>
@@ -5296,7 +5411,7 @@
           <p:cNvPr id="20" name="">
             <a:extLst xmlns:a="http://schemas.openxmlformats.org/drawingml/2006/main">
               <a:ext uri="{FF2B5EF4-FFF2-40B4-BE49-F238E27FC236}">
-                <a16:creationId xmlns:a16="http://schemas.microsoft.com/office/drawing/2014/main" id="{8F7CDE89-4BCB-4169-87AD-833F4C22A620}"/>
+                <a16:creationId xmlns:a16="http://schemas.microsoft.com/office/drawing/2014/main" id="{DE3137DD-2275-4E34-9FC6-667623751A6A}"/>
               </a:ext>
             </a:extLst>
           </p:cNvPr>
@@ -5329,7 +5444,7 @@
           <p:cNvPr id="21" name="">
             <a:extLst xmlns:a="http://schemas.openxmlformats.org/drawingml/2006/main">
               <a:ext uri="{FF2B5EF4-FFF2-40B4-BE49-F238E27FC236}">
-                <a16:creationId xmlns:a16="http://schemas.microsoft.com/office/drawing/2014/main" id="{F0E52DF2-3231-4AC8-9224-C6BC9B27B6CD}"/>
+                <a16:creationId xmlns:a16="http://schemas.microsoft.com/office/drawing/2014/main" id="{D73699D8-DA0E-4768-A111-683DBB85EAF6}"/>
               </a:ext>
             </a:extLst>
           </p:cNvPr>
@@ -5386,7 +5501,7 @@
           <p:cNvPr id="22" name="">
             <a:extLst xmlns:a="http://schemas.openxmlformats.org/drawingml/2006/main">
               <a:ext uri="{FF2B5EF4-FFF2-40B4-BE49-F238E27FC236}">
-                <a16:creationId xmlns:a16="http://schemas.microsoft.com/office/drawing/2014/main" id="{D07003CB-47AF-4B7C-8C43-1AC3BD1426EE}"/>
+                <a16:creationId xmlns:a16="http://schemas.microsoft.com/office/drawing/2014/main" id="{2BD9188C-B1C1-440C-86CD-F85B620EA962}"/>
               </a:ext>
             </a:extLst>
           </p:cNvPr>
@@ -5419,7 +5534,7 @@
           <p:cNvPr id="23" name="">
             <a:extLst xmlns:a="http://schemas.openxmlformats.org/drawingml/2006/main">
               <a:ext uri="{FF2B5EF4-FFF2-40B4-BE49-F238E27FC236}">
-                <a16:creationId xmlns:a16="http://schemas.microsoft.com/office/drawing/2014/main" id="{EE3744E8-5FFA-4FAE-A8D7-20C3DB9C7E9F}"/>
+                <a16:creationId xmlns:a16="http://schemas.microsoft.com/office/drawing/2014/main" id="{DEAB9027-1B4A-404F-9BDE-6F946CF5D714}"/>
               </a:ext>
             </a:extLst>
           </p:cNvPr>
@@ -5583,7 +5698,7 @@
           <p:cNvPr id="28" name="">
             <a:extLst xmlns:a="http://schemas.openxmlformats.org/drawingml/2006/main">
               <a:ext uri="{FF2B5EF4-FFF2-40B4-BE49-F238E27FC236}">
-                <a16:creationId xmlns:a16="http://schemas.microsoft.com/office/drawing/2014/main" id="{ADE7DD24-BEFA-4B5A-BF3B-53FBEF73FB63}"/>
+                <a16:creationId xmlns:a16="http://schemas.microsoft.com/office/drawing/2014/main" id="{691F22AE-3BCC-4614-9F92-34B86872D086}"/>
               </a:ext>
             </a:extLst>
           </p:cNvPr>
@@ -5640,7 +5755,7 @@
           <p:cNvPr id="29" name="">
             <a:extLst xmlns:a="http://schemas.openxmlformats.org/drawingml/2006/main">
               <a:ext uri="{FF2B5EF4-FFF2-40B4-BE49-F238E27FC236}">
-                <a16:creationId xmlns:a16="http://schemas.microsoft.com/office/drawing/2014/main" id="{07C15867-BC4E-4A9B-A386-81B9A83CD5C1}"/>
+                <a16:creationId xmlns:a16="http://schemas.microsoft.com/office/drawing/2014/main" id="{D658DAF9-5E2E-481C-BF80-3CD2A133D117}"/>
               </a:ext>
             </a:extLst>
           </p:cNvPr>
@@ -5697,7 +5812,7 @@
           <p:cNvPr id="30" name="">
             <a:extLst xmlns:a="http://schemas.openxmlformats.org/drawingml/2006/main">
               <a:ext uri="{FF2B5EF4-FFF2-40B4-BE49-F238E27FC236}">
-                <a16:creationId xmlns:a16="http://schemas.microsoft.com/office/drawing/2014/main" id="{12E1DA32-0436-4134-8FD4-486A434485C8}"/>
+                <a16:creationId xmlns:a16="http://schemas.microsoft.com/office/drawing/2014/main" id="{4E7A0F12-362C-4749-8902-D855895885D0}"/>
               </a:ext>
             </a:extLst>
           </p:cNvPr>
@@ -5728,7 +5843,7 @@
           <p:cNvPr id="31" name="">
             <a:extLst xmlns:a="http://schemas.openxmlformats.org/drawingml/2006/main">
               <a:ext uri="{FF2B5EF4-FFF2-40B4-BE49-F238E27FC236}">
-                <a16:creationId xmlns:a16="http://schemas.microsoft.com/office/drawing/2014/main" id="{D11F4671-AA7F-492B-9E81-1BC3046780D3}"/>
+                <a16:creationId xmlns:a16="http://schemas.microsoft.com/office/drawing/2014/main" id="{EB63F333-04B0-4C7C-901F-B2D9FAED8464}"/>
               </a:ext>
             </a:extLst>
           </p:cNvPr>
@@ -5783,7 +5898,7 @@
     </p:spTree>
     <p:extLst>
       <p:ext uri="{BB962C8B-B14F-4D97-AF65-F5344CB8AC3E}">
-        <p14:creationId xmlns:p14="http://schemas.microsoft.com/office/powerpoint/2010/main" val="490854975"/>
+        <p14:creationId xmlns:p14="http://schemas.microsoft.com/office/powerpoint/2010/main" val="2114468356"/>
       </p:ext>
     </p:extLst>
   </p:cSld>
@@ -5814,7 +5929,7 @@
           <p:cNvPr id="7" name="">
             <a:extLst xmlns:a="http://schemas.openxmlformats.org/drawingml/2006/main">
               <a:ext uri="{FF2B5EF4-FFF2-40B4-BE49-F238E27FC236}">
-                <a16:creationId xmlns:a16="http://schemas.microsoft.com/office/drawing/2014/main" id="{608EC4F2-1ACD-4917-8204-2FD16CA65AD4}"/>
+                <a16:creationId xmlns:a16="http://schemas.microsoft.com/office/drawing/2014/main" id="{D656E6A7-FB5D-40DE-9C28-D857409DA1FD}"/>
               </a:ext>
             </a:extLst>
           </p:cNvPr>
@@ -5871,7 +5986,7 @@
           <p:cNvPr id="2" name="">
             <a:extLst xmlns:a="http://schemas.openxmlformats.org/drawingml/2006/main">
               <a:ext uri="{FF2B5EF4-FFF2-40B4-BE49-F238E27FC236}">
-                <a16:creationId xmlns:a16="http://schemas.microsoft.com/office/drawing/2014/main" id="{95DEC756-EE8B-4DF3-B900-6B3F60AB1B3F}"/>
+                <a16:creationId xmlns:a16="http://schemas.microsoft.com/office/drawing/2014/main" id="{E68EB636-D3D0-4991-9042-2D9A57B9844E}"/>
               </a:ext>
             </a:extLst>
           </p:cNvPr>
@@ -5902,7 +6017,7 @@
           <p:cNvPr id="3" name="">
             <a:extLst xmlns:a="http://schemas.openxmlformats.org/drawingml/2006/main">
               <a:ext uri="{FF2B5EF4-FFF2-40B4-BE49-F238E27FC236}">
-                <a16:creationId xmlns:a16="http://schemas.microsoft.com/office/drawing/2014/main" id="{91A596EB-B5F6-486E-BA5D-77A64F38F7F5}"/>
+                <a16:creationId xmlns:a16="http://schemas.microsoft.com/office/drawing/2014/main" id="{D9A81F3E-8FE2-4AE3-BC29-41BE654D4FFC}"/>
               </a:ext>
             </a:extLst>
           </p:cNvPr>
@@ -6382,7 +6497,7 @@
           <p:cNvPr id="5" name="">
             <a:extLst xmlns:a="http://schemas.openxmlformats.org/drawingml/2006/main">
               <a:ext uri="{FF2B5EF4-FFF2-40B4-BE49-F238E27FC236}">
-                <a16:creationId xmlns:a16="http://schemas.microsoft.com/office/drawing/2014/main" id="{1D692A83-6049-4FCC-9882-B85AA11431E3}"/>
+                <a16:creationId xmlns:a16="http://schemas.microsoft.com/office/drawing/2014/main" id="{1D6C0ECB-EE28-44F8-8F87-95AA06CA9CB5}"/>
               </a:ext>
             </a:extLst>
           </p:cNvPr>
@@ -6413,7 +6528,7 @@
           <p:cNvPr id="6" name="">
             <a:extLst xmlns:a="http://schemas.openxmlformats.org/drawingml/2006/main">
               <a:ext uri="{FF2B5EF4-FFF2-40B4-BE49-F238E27FC236}">
-                <a16:creationId xmlns:a16="http://schemas.microsoft.com/office/drawing/2014/main" id="{8BDF9B82-DE3E-45E1-8B31-F14C67DA36D5}"/>
+                <a16:creationId xmlns:a16="http://schemas.microsoft.com/office/drawing/2014/main" id="{39D18973-6430-4A40-899E-73C2440D53E3}"/>
               </a:ext>
             </a:extLst>
           </p:cNvPr>
@@ -6468,7 +6583,7 @@
     </p:spTree>
     <p:extLst>
       <p:ext uri="{BB962C8B-B14F-4D97-AF65-F5344CB8AC3E}">
-        <p14:creationId xmlns:p14="http://schemas.microsoft.com/office/powerpoint/2010/main" val="2102884936"/>
+        <p14:creationId xmlns:p14="http://schemas.microsoft.com/office/powerpoint/2010/main" val="1858130324"/>
       </p:ext>
     </p:extLst>
   </p:cSld>
@@ -6499,7 +6614,7 @@
           <p:cNvPr id="21" name="">
             <a:extLst xmlns:a="http://schemas.openxmlformats.org/drawingml/2006/main">
               <a:ext uri="{FF2B5EF4-FFF2-40B4-BE49-F238E27FC236}">
-                <a16:creationId xmlns:a16="http://schemas.microsoft.com/office/drawing/2014/main" id="{31844766-2A49-4F14-93FD-12A31A189D92}"/>
+                <a16:creationId xmlns:a16="http://schemas.microsoft.com/office/drawing/2014/main" id="{9F99FC64-732E-45D9-A6C3-BEB65084EAFD}"/>
               </a:ext>
             </a:extLst>
           </p:cNvPr>
@@ -6579,7 +6694,7 @@
           <p:cNvPr id="2" name="">
             <a:extLst xmlns:a="http://schemas.openxmlformats.org/drawingml/2006/main">
               <a:ext uri="{FF2B5EF4-FFF2-40B4-BE49-F238E27FC236}">
-                <a16:creationId xmlns:a16="http://schemas.microsoft.com/office/drawing/2014/main" id="{54FF341D-935A-4783-AE09-7F6AD2BB1F2D}"/>
+                <a16:creationId xmlns:a16="http://schemas.microsoft.com/office/drawing/2014/main" id="{E195211B-C403-4DB1-BAB5-8C8F941C1F10}"/>
               </a:ext>
             </a:extLst>
           </p:cNvPr>
@@ -6610,7 +6725,7 @@
           <p:cNvPr id="3" name="">
             <a:extLst xmlns:a="http://schemas.openxmlformats.org/drawingml/2006/main">
               <a:ext uri="{FF2B5EF4-FFF2-40B4-BE49-F238E27FC236}">
-                <a16:creationId xmlns:a16="http://schemas.microsoft.com/office/drawing/2014/main" id="{74EA614A-3B6C-4333-864C-CA34A015BABF}"/>
+                <a16:creationId xmlns:a16="http://schemas.microsoft.com/office/drawing/2014/main" id="{024F8481-D19F-41C3-9F8B-406978376892}"/>
               </a:ext>
             </a:extLst>
           </p:cNvPr>
@@ -6667,7 +6782,7 @@
           <p:cNvPr id="4" name="">
             <a:extLst xmlns:a="http://schemas.openxmlformats.org/drawingml/2006/main">
               <a:ext uri="{FF2B5EF4-FFF2-40B4-BE49-F238E27FC236}">
-                <a16:creationId xmlns:a16="http://schemas.microsoft.com/office/drawing/2014/main" id="{D92CDE5B-F546-4715-B090-575F8AA469DE}"/>
+                <a16:creationId xmlns:a16="http://schemas.microsoft.com/office/drawing/2014/main" id="{FC26E807-78AD-4B3F-943E-1D918B3D1C95}"/>
               </a:ext>
             </a:extLst>
           </p:cNvPr>
@@ -6724,7 +6839,7 @@
           <p:cNvPr id="5" name="">
             <a:extLst xmlns:a="http://schemas.openxmlformats.org/drawingml/2006/main">
               <a:ext uri="{FF2B5EF4-FFF2-40B4-BE49-F238E27FC236}">
-                <a16:creationId xmlns:a16="http://schemas.microsoft.com/office/drawing/2014/main" id="{59944AC9-5692-48EA-948F-4086DC33B291}"/>
+                <a16:creationId xmlns:a16="http://schemas.microsoft.com/office/drawing/2014/main" id="{3C7E6323-5AB6-47DB-9A80-DD543931EB42}"/>
               </a:ext>
             </a:extLst>
           </p:cNvPr>
@@ -6781,7 +6896,7 @@
           <p:cNvPr id="6" name="">
             <a:extLst xmlns:a="http://schemas.openxmlformats.org/drawingml/2006/main">
               <a:ext uri="{FF2B5EF4-FFF2-40B4-BE49-F238E27FC236}">
-                <a16:creationId xmlns:a16="http://schemas.microsoft.com/office/drawing/2014/main" id="{AC947633-5F7E-4B37-9199-9868DCD0BE5C}"/>
+                <a16:creationId xmlns:a16="http://schemas.microsoft.com/office/drawing/2014/main" id="{363C8D38-C22E-4B9C-85A8-4C41EED3E2BD}"/>
               </a:ext>
             </a:extLst>
           </p:cNvPr>
@@ -6812,7 +6927,7 @@
           <p:cNvPr id="7" name="">
             <a:extLst xmlns:a="http://schemas.openxmlformats.org/drawingml/2006/main">
               <a:ext uri="{FF2B5EF4-FFF2-40B4-BE49-F238E27FC236}">
-                <a16:creationId xmlns:a16="http://schemas.microsoft.com/office/drawing/2014/main" id="{9AB2019C-30ED-4DDD-8ADE-A8A008533D71}"/>
+                <a16:creationId xmlns:a16="http://schemas.microsoft.com/office/drawing/2014/main" id="{099995E7-798A-4057-963C-BF8A91C507FE}"/>
               </a:ext>
             </a:extLst>
           </p:cNvPr>
@@ -6869,7 +6984,7 @@
           <p:cNvPr id="8" name="">
             <a:extLst xmlns:a="http://schemas.openxmlformats.org/drawingml/2006/main">
               <a:ext uri="{FF2B5EF4-FFF2-40B4-BE49-F238E27FC236}">
-                <a16:creationId xmlns:a16="http://schemas.microsoft.com/office/drawing/2014/main" id="{96E63868-1B1F-435E-BE62-95547CE464AD}"/>
+                <a16:creationId xmlns:a16="http://schemas.microsoft.com/office/drawing/2014/main" id="{B495F9B9-E27B-48F6-A239-8F14E5B1452E}"/>
               </a:ext>
             </a:extLst>
           </p:cNvPr>
@@ -6926,7 +7041,7 @@
           <p:cNvPr id="9" name="">
             <a:extLst xmlns:a="http://schemas.openxmlformats.org/drawingml/2006/main">
               <a:ext uri="{FF2B5EF4-FFF2-40B4-BE49-F238E27FC236}">
-                <a16:creationId xmlns:a16="http://schemas.microsoft.com/office/drawing/2014/main" id="{1BF819B4-00BA-4C00-A218-470B68902534}"/>
+                <a16:creationId xmlns:a16="http://schemas.microsoft.com/office/drawing/2014/main" id="{63865055-6D47-4CF5-BD32-2853DF45F60D}"/>
               </a:ext>
             </a:extLst>
           </p:cNvPr>
@@ -6983,7 +7098,7 @@
           <p:cNvPr id="10" name="">
             <a:extLst xmlns:a="http://schemas.openxmlformats.org/drawingml/2006/main">
               <a:ext uri="{FF2B5EF4-FFF2-40B4-BE49-F238E27FC236}">
-                <a16:creationId xmlns:a16="http://schemas.microsoft.com/office/drawing/2014/main" id="{EC10001C-E131-4D8D-AEA1-7339352F1AE3}"/>
+                <a16:creationId xmlns:a16="http://schemas.microsoft.com/office/drawing/2014/main" id="{6B4C3125-6212-4F95-8373-1DD3F9E6163D}"/>
               </a:ext>
             </a:extLst>
           </p:cNvPr>
@@ -7040,7 +7155,7 @@
           <p:cNvPr id="11" name="">
             <a:extLst xmlns:a="http://schemas.openxmlformats.org/drawingml/2006/main">
               <a:ext uri="{FF2B5EF4-FFF2-40B4-BE49-F238E27FC236}">
-                <a16:creationId xmlns:a16="http://schemas.microsoft.com/office/drawing/2014/main" id="{9F982464-3C27-421B-AD8A-2D703997F212}"/>
+                <a16:creationId xmlns:a16="http://schemas.microsoft.com/office/drawing/2014/main" id="{B40A1718-9117-4D1C-8CE7-AB34181A992F}"/>
               </a:ext>
             </a:extLst>
           </p:cNvPr>
@@ -7097,7 +7212,7 @@
           <p:cNvPr id="12" name="">
             <a:extLst xmlns:a="http://schemas.openxmlformats.org/drawingml/2006/main">
               <a:ext uri="{FF2B5EF4-FFF2-40B4-BE49-F238E27FC236}">
-                <a16:creationId xmlns:a16="http://schemas.microsoft.com/office/drawing/2014/main" id="{51C1F780-5173-4416-B7D2-AB51ED3EDD8C}"/>
+                <a16:creationId xmlns:a16="http://schemas.microsoft.com/office/drawing/2014/main" id="{E6C989C8-59A7-4ACE-AB68-404C5953B038}"/>
               </a:ext>
             </a:extLst>
           </p:cNvPr>
@@ -7154,7 +7269,7 @@
           <p:cNvPr id="13" name="">
             <a:extLst xmlns:a="http://schemas.openxmlformats.org/drawingml/2006/main">
               <a:ext uri="{FF2B5EF4-FFF2-40B4-BE49-F238E27FC236}">
-                <a16:creationId xmlns:a16="http://schemas.microsoft.com/office/drawing/2014/main" id="{8E3FDD2C-168A-4F00-8EAD-0677F17254DD}"/>
+                <a16:creationId xmlns:a16="http://schemas.microsoft.com/office/drawing/2014/main" id="{5129A23F-7D06-4580-9700-E6E2B2B7A346}"/>
               </a:ext>
             </a:extLst>
           </p:cNvPr>
@@ -7185,7 +7300,7 @@
           <p:cNvPr id="14" name="">
             <a:extLst xmlns:a="http://schemas.openxmlformats.org/drawingml/2006/main">
               <a:ext uri="{FF2B5EF4-FFF2-40B4-BE49-F238E27FC236}">
-                <a16:creationId xmlns:a16="http://schemas.microsoft.com/office/drawing/2014/main" id="{48CF000C-328F-4282-8253-1FACCA9F082F}"/>
+                <a16:creationId xmlns:a16="http://schemas.microsoft.com/office/drawing/2014/main" id="{88C939FC-A510-4495-A672-0B9741560360}"/>
               </a:ext>
             </a:extLst>
           </p:cNvPr>
@@ -7242,7 +7357,7 @@
           <p:cNvPr id="15" name="">
             <a:extLst xmlns:a="http://schemas.openxmlformats.org/drawingml/2006/main">
               <a:ext uri="{FF2B5EF4-FFF2-40B4-BE49-F238E27FC236}">
-                <a16:creationId xmlns:a16="http://schemas.microsoft.com/office/drawing/2014/main" id="{F236F49D-929D-419E-B0E1-F5893FEF813A}"/>
+                <a16:creationId xmlns:a16="http://schemas.microsoft.com/office/drawing/2014/main" id="{089F9D9F-DC50-45F4-A33C-335D6F3E2C57}"/>
               </a:ext>
             </a:extLst>
           </p:cNvPr>
@@ -7299,7 +7414,7 @@
           <p:cNvPr id="16" name="">
             <a:extLst xmlns:a="http://schemas.openxmlformats.org/drawingml/2006/main">
               <a:ext uri="{FF2B5EF4-FFF2-40B4-BE49-F238E27FC236}">
-                <a16:creationId xmlns:a16="http://schemas.microsoft.com/office/drawing/2014/main" id="{95AA632F-A412-4726-B13B-9B3078A185F1}"/>
+                <a16:creationId xmlns:a16="http://schemas.microsoft.com/office/drawing/2014/main" id="{702CABAC-E9AD-493D-A65C-7B80C6B69579}"/>
               </a:ext>
             </a:extLst>
           </p:cNvPr>
@@ -7356,7 +7471,7 @@
           <p:cNvPr id="17" name="">
             <a:extLst xmlns:a="http://schemas.openxmlformats.org/drawingml/2006/main">
               <a:ext uri="{FF2B5EF4-FFF2-40B4-BE49-F238E27FC236}">
-                <a16:creationId xmlns:a16="http://schemas.microsoft.com/office/drawing/2014/main" id="{1B203E18-71E7-4E8D-90A5-68B04957C04D}"/>
+                <a16:creationId xmlns:a16="http://schemas.microsoft.com/office/drawing/2014/main" id="{07E345A0-0E1A-4438-8D61-BE0F7317B4F3}"/>
               </a:ext>
             </a:extLst>
           </p:cNvPr>
@@ -7413,7 +7528,7 @@
           <p:cNvPr id="18" name="">
             <a:extLst xmlns:a="http://schemas.openxmlformats.org/drawingml/2006/main">
               <a:ext uri="{FF2B5EF4-FFF2-40B4-BE49-F238E27FC236}">
-                <a16:creationId xmlns:a16="http://schemas.microsoft.com/office/drawing/2014/main" id="{A38A500A-06B3-48F9-8741-E8C3FB0DC74C}"/>
+                <a16:creationId xmlns:a16="http://schemas.microsoft.com/office/drawing/2014/main" id="{924B7E30-BB95-4E4D-A0FD-046B62A8B74C}"/>
               </a:ext>
             </a:extLst>
           </p:cNvPr>
@@ -7470,7 +7585,7 @@
           <p:cNvPr id="19" name="">
             <a:extLst xmlns:a="http://schemas.openxmlformats.org/drawingml/2006/main">
               <a:ext uri="{FF2B5EF4-FFF2-40B4-BE49-F238E27FC236}">
-                <a16:creationId xmlns:a16="http://schemas.microsoft.com/office/drawing/2014/main" id="{5CE3149F-E972-460D-AF44-5599291FE57A}"/>
+                <a16:creationId xmlns:a16="http://schemas.microsoft.com/office/drawing/2014/main" id="{6EB7D9D3-6138-4A1D-9A1B-C54ED53C85D0}"/>
               </a:ext>
             </a:extLst>
           </p:cNvPr>
@@ -7501,7 +7616,7 @@
           <p:cNvPr id="20" name="">
             <a:extLst xmlns:a="http://schemas.openxmlformats.org/drawingml/2006/main">
               <a:ext uri="{FF2B5EF4-FFF2-40B4-BE49-F238E27FC236}">
-                <a16:creationId xmlns:a16="http://schemas.microsoft.com/office/drawing/2014/main" id="{0E9D99FE-D71F-47A4-94D8-198AE32B6A73}"/>
+                <a16:creationId xmlns:a16="http://schemas.microsoft.com/office/drawing/2014/main" id="{894C0192-67F0-4160-AD61-9A80D2D55CA2}"/>
               </a:ext>
             </a:extLst>
           </p:cNvPr>
@@ -7556,7 +7671,7 @@
     </p:spTree>
     <p:extLst>
       <p:ext uri="{BB962C8B-B14F-4D97-AF65-F5344CB8AC3E}">
-        <p14:creationId xmlns:p14="http://schemas.microsoft.com/office/powerpoint/2010/main" val="922229421"/>
+        <p14:creationId xmlns:p14="http://schemas.microsoft.com/office/powerpoint/2010/main" val="837213761"/>
       </p:ext>
     </p:extLst>
   </p:cSld>
@@ -7584,10 +7699,10 @@
       </p:grpSpPr>
       <p:sp>
         <p:nvSpPr>
-          <p:cNvPr id="19" name="">
-            <a:extLst xmlns:a="http://schemas.openxmlformats.org/drawingml/2006/main">
-              <a:ext uri="{FF2B5EF4-FFF2-40B4-BE49-F238E27FC236}">
-                <a16:creationId xmlns:a16="http://schemas.microsoft.com/office/drawing/2014/main" id="{48A6DB59-F77C-42B2-8C0A-05E1E054D33C}"/>
+          <p:cNvPr id="21" name="">
+            <a:extLst xmlns:a="http://schemas.openxmlformats.org/drawingml/2006/main">
+              <a:ext uri="{FF2B5EF4-FFF2-40B4-BE49-F238E27FC236}">
+                <a16:creationId xmlns:a16="http://schemas.microsoft.com/office/drawing/2014/main" id="{B0B01F98-74A6-4503-BC05-27EFD0855A25}"/>
               </a:ext>
             </a:extLst>
           </p:cNvPr>
@@ -7644,7 +7759,7 @@
           <p:cNvPr id="2" name="">
             <a:extLst xmlns:a="http://schemas.openxmlformats.org/drawingml/2006/main">
               <a:ext uri="{FF2B5EF4-FFF2-40B4-BE49-F238E27FC236}">
-                <a16:creationId xmlns:a16="http://schemas.microsoft.com/office/drawing/2014/main" id="{0A0675DE-D521-4897-877D-AD3A8F8E1696}"/>
+                <a16:creationId xmlns:a16="http://schemas.microsoft.com/office/drawing/2014/main" id="{1D984AAC-853F-4008-94FB-81E1AA5B0B7F}"/>
               </a:ext>
             </a:extLst>
           </p:cNvPr>
@@ -7675,7 +7790,7 @@
           <p:cNvPr id="3" name="">
             <a:extLst xmlns:a="http://schemas.openxmlformats.org/drawingml/2006/main">
               <a:ext uri="{FF2B5EF4-FFF2-40B4-BE49-F238E27FC236}">
-                <a16:creationId xmlns:a16="http://schemas.microsoft.com/office/drawing/2014/main" id="{5952E6FB-46FD-44CB-BC82-91693B036635}"/>
+                <a16:creationId xmlns:a16="http://schemas.microsoft.com/office/drawing/2014/main" id="{42EFEDD7-4F93-4A58-A6A6-12704E80F13C}"/>
               </a:ext>
             </a:extLst>
           </p:cNvPr>
@@ -7732,82 +7847,27 @@
           <p:cNvPr id="4" name="">
             <a:extLst xmlns:a="http://schemas.openxmlformats.org/drawingml/2006/main">
               <a:ext uri="{FF2B5EF4-FFF2-40B4-BE49-F238E27FC236}">
-                <a16:creationId xmlns:a16="http://schemas.microsoft.com/office/drawing/2014/main" id="{C91B51B9-F38A-4C50-AC67-961E970816EB}"/>
-              </a:ext>
-            </a:extLst>
-          </p:cNvPr>
-          <p:cNvSpPr>
-            <a:spLocks xmlns:a="http://schemas.openxmlformats.org/drawingml/2006/main" noGrp="1"/>
-          </p:cNvSpPr>
-          <p:nvPr/>
-        </p:nvSpPr>
-        <p:spPr>
-          <a:xfrm xmlns:a="http://schemas.openxmlformats.org/drawingml/2006/main">
-            <a:off x="609600" y="2114550"/>
-            <a:ext cx="762000" cy="342900"/>
-          </a:xfrm>
-          <a:prstGeom xmlns:a="http://schemas.openxmlformats.org/drawingml/2006/main" prst="rect">
-            <a:avLst/>
-          </a:prstGeom>
-          <a:noFill xmlns:a="http://schemas.openxmlformats.org/drawingml/2006/main"/>
-          <a:ln xmlns:a="http://schemas.openxmlformats.org/drawingml/2006/main" w="0">
-            <a:noFill/>
-          </a:ln>
-        </p:spPr>
-        <p:txBody>
-          <a:bodyPr xmlns:a="http://schemas.openxmlformats.org/drawingml/2006/main" wrap="square" lIns="0" tIns="0" rIns="0" bIns="0" anchor="ctr">
-            <a:noAutofit/>
-          </a:bodyPr>
-          <a:lstStyle xmlns:a="http://schemas.openxmlformats.org/drawingml/2006/main"/>
-          <a:p xmlns:a="http://schemas.openxmlformats.org/drawingml/2006/main">
-            <a:pPr algn="l">
-              <a:defRPr sz="1800" b="0">
-                <a:solidFill>
-                  <a:srgbClr val="28C7F7"/>
-                </a:solidFill>
-                <a:latin typeface="DejaVu Sans"/>
-                <a:ea typeface="DejaVu Sans"/>
-                <a:cs typeface="DejaVu Sans"/>
-              </a:defRPr>
-            </a:pPr>
-            <a:r>
-              <a:rPr sz="1800" b="0">
-                <a:solidFill>
-                  <a:srgbClr val="28C7F7"/>
-                </a:solidFill>
-                <a:latin typeface="DejaVu Sans"/>
-                <a:ea typeface="DejaVu Sans"/>
-                <a:cs typeface="DejaVu Sans"/>
-              </a:rPr>
-              <a:t>01</a:t>
-            </a:r>
-          </a:p>
-        </p:txBody>
-      </p:sp>
-      <p:sp>
-        <p:nvSpPr>
-          <p:cNvPr id="5" name="">
-            <a:extLst xmlns:a="http://schemas.openxmlformats.org/drawingml/2006/main">
-              <a:ext uri="{FF2B5EF4-FFF2-40B4-BE49-F238E27FC236}">
-                <a16:creationId xmlns:a16="http://schemas.microsoft.com/office/drawing/2014/main" id="{70DDAE52-E122-4BA0-804E-633E68C52A40}"/>
-              </a:ext>
-            </a:extLst>
-          </p:cNvPr>
-          <p:cNvSpPr>
-            <a:spLocks xmlns:a="http://schemas.openxmlformats.org/drawingml/2006/main" noGrp="1"/>
-          </p:cNvSpPr>
-          <p:nvPr/>
-        </p:nvSpPr>
-        <p:spPr>
-          <a:xfrm xmlns:a="http://schemas.openxmlformats.org/drawingml/2006/main" flipH="0" flipV="0">
-            <a:off x="609600" y="2667000"/>
-            <a:ext cx="3333750" cy="0"/>
-          </a:xfrm>
-          <a:prstGeom xmlns:a="http://schemas.openxmlformats.org/drawingml/2006/main" prst="line">
-            <a:avLst/>
-          </a:prstGeom>
-          <a:noFill xmlns:a="http://schemas.openxmlformats.org/drawingml/2006/main"/>
-          <a:ln xmlns:a="http://schemas.openxmlformats.org/drawingml/2006/main" w="28575">
+                <a16:creationId xmlns:a16="http://schemas.microsoft.com/office/drawing/2014/main" id="{79499144-CC2E-4138-A21F-B3F9B33BB2C4}"/>
+              </a:ext>
+            </a:extLst>
+          </p:cNvPr>
+          <p:cNvSpPr>
+            <a:spLocks xmlns:a="http://schemas.openxmlformats.org/drawingml/2006/main" noGrp="1"/>
+          </p:cNvSpPr>
+          <p:nvPr/>
+        </p:nvSpPr>
+        <p:spPr>
+          <a:xfrm xmlns:a="http://schemas.openxmlformats.org/drawingml/2006/main">
+            <a:off x="609600" y="2200275"/>
+            <a:ext cx="3162300" cy="2333625"/>
+          </a:xfrm>
+          <a:prstGeom xmlns:a="http://schemas.openxmlformats.org/drawingml/2006/main" prst="rect">
+            <a:avLst/>
+          </a:prstGeom>
+          <a:solidFill xmlns:a="http://schemas.openxmlformats.org/drawingml/2006/main">
+            <a:srgbClr val="141C26"/>
+          </a:solidFill>
+          <a:ln xmlns:a="http://schemas.openxmlformats.org/drawingml/2006/main" w="14288">
             <a:solidFill>
               <a:srgbClr val="28C7F7"/>
             </a:solidFill>
@@ -7817,22 +7877,79 @@
       </p:sp>
       <p:sp>
         <p:nvSpPr>
+          <p:cNvPr id="5" name="">
+            <a:extLst xmlns:a="http://schemas.openxmlformats.org/drawingml/2006/main">
+              <a:ext uri="{FF2B5EF4-FFF2-40B4-BE49-F238E27FC236}">
+                <a16:creationId xmlns:a16="http://schemas.microsoft.com/office/drawing/2014/main" id="{EBFC2056-35CF-4E57-9FDF-70CD47E1E0C5}"/>
+              </a:ext>
+            </a:extLst>
+          </p:cNvPr>
+          <p:cNvSpPr>
+            <a:spLocks xmlns:a="http://schemas.openxmlformats.org/drawingml/2006/main" noGrp="1"/>
+          </p:cNvSpPr>
+          <p:nvPr/>
+        </p:nvSpPr>
+        <p:spPr>
+          <a:xfrm xmlns:a="http://schemas.openxmlformats.org/drawingml/2006/main">
+            <a:off x="838200" y="2371725"/>
+            <a:ext cx="2705100" cy="457200"/>
+          </a:xfrm>
+          <a:prstGeom xmlns:a="http://schemas.openxmlformats.org/drawingml/2006/main" prst="rect">
+            <a:avLst/>
+          </a:prstGeom>
+          <a:noFill xmlns:a="http://schemas.openxmlformats.org/drawingml/2006/main"/>
+          <a:ln xmlns:a="http://schemas.openxmlformats.org/drawingml/2006/main" w="0">
+            <a:noFill/>
+          </a:ln>
+        </p:spPr>
+        <p:txBody>
+          <a:bodyPr xmlns:a="http://schemas.openxmlformats.org/drawingml/2006/main" wrap="square" lIns="0" tIns="0" rIns="0" bIns="0" anchor="ctr">
+            <a:noAutofit/>
+          </a:bodyPr>
+          <a:lstStyle xmlns:a="http://schemas.openxmlformats.org/drawingml/2006/main"/>
+          <a:p xmlns:a="http://schemas.openxmlformats.org/drawingml/2006/main">
+            <a:pPr algn="l">
+              <a:defRPr sz="2325" b="1">
+                <a:solidFill>
+                  <a:srgbClr val="F4F7FA"/>
+                </a:solidFill>
+                <a:latin typeface="DejaVu Sans"/>
+                <a:ea typeface="DejaVu Sans"/>
+                <a:cs typeface="DejaVu Sans"/>
+              </a:defRPr>
+            </a:pPr>
+            <a:r>
+              <a:rPr sz="2325" b="1">
+                <a:solidFill>
+                  <a:srgbClr val="F4F7FA"/>
+                </a:solidFill>
+                <a:latin typeface="DejaVu Sans"/>
+                <a:ea typeface="DejaVu Sans"/>
+                <a:cs typeface="DejaVu Sans"/>
+              </a:rPr>
+              <a:t>Writing</a:t>
+            </a:r>
+          </a:p>
+        </p:txBody>
+      </p:sp>
+      <p:sp>
+        <p:nvSpPr>
           <p:cNvPr id="6" name="">
             <a:extLst xmlns:a="http://schemas.openxmlformats.org/drawingml/2006/main">
               <a:ext uri="{FF2B5EF4-FFF2-40B4-BE49-F238E27FC236}">
-                <a16:creationId xmlns:a16="http://schemas.microsoft.com/office/drawing/2014/main" id="{F1C15E5D-A4FE-4651-AB01-BF0A2FCFC8B3}"/>
-              </a:ext>
-            </a:extLst>
-          </p:cNvPr>
-          <p:cNvSpPr>
-            <a:spLocks xmlns:a="http://schemas.openxmlformats.org/drawingml/2006/main" noGrp="1"/>
-          </p:cNvSpPr>
-          <p:nvPr/>
-        </p:nvSpPr>
-        <p:spPr>
-          <a:xfrm xmlns:a="http://schemas.openxmlformats.org/drawingml/2006/main">
-            <a:off x="609600" y="2952750"/>
-            <a:ext cx="3333750" cy="495300"/>
+                <a16:creationId xmlns:a16="http://schemas.microsoft.com/office/drawing/2014/main" id="{48A91D4B-E7DD-4BD0-A77E-051F58FAA85D}"/>
+              </a:ext>
+            </a:extLst>
+          </p:cNvPr>
+          <p:cNvSpPr>
+            <a:spLocks xmlns:a="http://schemas.openxmlformats.org/drawingml/2006/main" noGrp="1"/>
+          </p:cNvSpPr>
+          <p:nvPr/>
+        </p:nvSpPr>
+        <p:spPr>
+          <a:xfrm xmlns:a="http://schemas.openxmlformats.org/drawingml/2006/main">
+            <a:off x="838200" y="2981325"/>
+            <a:ext cx="2705100" cy="647700"/>
           </a:xfrm>
           <a:prstGeom xmlns:a="http://schemas.openxmlformats.org/drawingml/2006/main" prst="rect">
             <a:avLst/>
@@ -7849,25 +7966,48 @@
           <a:lstStyle xmlns:a="http://schemas.openxmlformats.org/drawingml/2006/main"/>
           <a:p xmlns:a="http://schemas.openxmlformats.org/drawingml/2006/main">
             <a:pPr algn="l">
-              <a:defRPr sz="2550" b="1">
-                <a:solidFill>
-                  <a:srgbClr val="F4F7FA"/>
-                </a:solidFill>
-                <a:latin typeface="DejaVu Sans"/>
-                <a:ea typeface="DejaVu Sans"/>
-                <a:cs typeface="DejaVu Sans"/>
-              </a:defRPr>
-            </a:pPr>
-            <a:r>
-              <a:rPr sz="2550" b="1">
-                <a:solidFill>
-                  <a:srgbClr val="F4F7FA"/>
-                </a:solidFill>
-                <a:latin typeface="DejaVu Sans"/>
-                <a:ea typeface="DejaVu Sans"/>
-                <a:cs typeface="DejaVu Sans"/>
-              </a:rPr>
-              <a:t>Writing</a:t>
+              <a:defRPr sz="2025" b="1">
+                <a:solidFill>
+                  <a:srgbClr val="28C7F7"/>
+                </a:solidFill>
+                <a:latin typeface="DejaVu Sans"/>
+                <a:ea typeface="DejaVu Sans"/>
+                <a:cs typeface="DejaVu Sans"/>
+              </a:defRPr>
+            </a:pPr>
+            <a:r>
+              <a:rPr sz="2025" b="1">
+                <a:solidFill>
+                  <a:srgbClr val="28C7F7"/>
+                </a:solidFill>
+                <a:latin typeface="DejaVu Sans"/>
+                <a:ea typeface="DejaVu Sans"/>
+                <a:cs typeface="DejaVu Sans"/>
+              </a:rPr>
+              <a:t>Externalized</a:t>
+            </a:r>
+          </a:p>
+          <a:p xmlns:a="http://schemas.openxmlformats.org/drawingml/2006/main">
+            <a:pPr algn="l">
+              <a:defRPr sz="2025" b="1">
+                <a:solidFill>
+                  <a:srgbClr val="28C7F7"/>
+                </a:solidFill>
+                <a:latin typeface="DejaVu Sans"/>
+                <a:ea typeface="DejaVu Sans"/>
+                <a:cs typeface="DejaVu Sans"/>
+              </a:defRPr>
+            </a:pPr>
+            <a:r>
+              <a:rPr sz="2025" b="1">
+                <a:solidFill>
+                  <a:srgbClr val="28C7F7"/>
+                </a:solidFill>
+                <a:latin typeface="DejaVu Sans"/>
+                <a:ea typeface="DejaVu Sans"/>
+                <a:cs typeface="DejaVu Sans"/>
+              </a:rPr>
+              <a:t>Memory</a:t>
             </a:r>
           </a:p>
         </p:txBody>
@@ -7877,19 +8017,19 @@
           <p:cNvPr id="7" name="">
             <a:extLst xmlns:a="http://schemas.openxmlformats.org/drawingml/2006/main">
               <a:ext uri="{FF2B5EF4-FFF2-40B4-BE49-F238E27FC236}">
-                <a16:creationId xmlns:a16="http://schemas.microsoft.com/office/drawing/2014/main" id="{523C6ECA-0F66-448A-ADC1-1E07DEFC3636}"/>
-              </a:ext>
-            </a:extLst>
-          </p:cNvPr>
-          <p:cNvSpPr>
-            <a:spLocks xmlns:a="http://schemas.openxmlformats.org/drawingml/2006/main" noGrp="1"/>
-          </p:cNvSpPr>
-          <p:nvPr/>
-        </p:nvSpPr>
-        <p:spPr>
-          <a:xfrm xmlns:a="http://schemas.openxmlformats.org/drawingml/2006/main">
-            <a:off x="609600" y="3657600"/>
-            <a:ext cx="3333750" cy="857250"/>
+                <a16:creationId xmlns:a16="http://schemas.microsoft.com/office/drawing/2014/main" id="{3AF98120-55DA-4A51-B3F0-EB3B1466E43B}"/>
+              </a:ext>
+            </a:extLst>
+          </p:cNvPr>
+          <p:cNvSpPr>
+            <a:spLocks xmlns:a="http://schemas.openxmlformats.org/drawingml/2006/main" noGrp="1"/>
+          </p:cNvSpPr>
+          <p:nvPr/>
+        </p:nvSpPr>
+        <p:spPr>
+          <a:xfrm xmlns:a="http://schemas.openxmlformats.org/drawingml/2006/main">
+            <a:off x="838200" y="3762375"/>
+            <a:ext cx="2705100" cy="571500"/>
           </a:xfrm>
           <a:prstGeom xmlns:a="http://schemas.openxmlformats.org/drawingml/2006/main" prst="rect">
             <a:avLst/>
@@ -7906,48 +8046,25 @@
           <a:lstStyle xmlns:a="http://schemas.openxmlformats.org/drawingml/2006/main"/>
           <a:p xmlns:a="http://schemas.openxmlformats.org/drawingml/2006/main">
             <a:pPr algn="l">
-              <a:defRPr sz="2175" b="0">
-                <a:solidFill>
-                  <a:srgbClr val="28C7F7"/>
-                </a:solidFill>
-                <a:latin typeface="DejaVu Sans"/>
-                <a:ea typeface="DejaVu Sans"/>
-                <a:cs typeface="DejaVu Sans"/>
-              </a:defRPr>
-            </a:pPr>
-            <a:r>
-              <a:rPr sz="2175" b="0">
-                <a:solidFill>
-                  <a:srgbClr val="28C7F7"/>
-                </a:solidFill>
-                <a:latin typeface="DejaVu Sans"/>
-                <a:ea typeface="DejaVu Sans"/>
-                <a:cs typeface="DejaVu Sans"/>
-              </a:rPr>
-              <a:t>Externalized</a:t>
-            </a:r>
-          </a:p>
-          <a:p xmlns:a="http://schemas.openxmlformats.org/drawingml/2006/main">
-            <a:pPr algn="l">
-              <a:defRPr sz="2175" b="0">
-                <a:solidFill>
-                  <a:srgbClr val="28C7F7"/>
-                </a:solidFill>
-                <a:latin typeface="DejaVu Sans"/>
-                <a:ea typeface="DejaVu Sans"/>
-                <a:cs typeface="DejaVu Sans"/>
-              </a:defRPr>
-            </a:pPr>
-            <a:r>
-              <a:rPr sz="2175" b="0">
-                <a:solidFill>
-                  <a:srgbClr val="28C7F7"/>
-                </a:solidFill>
-                <a:latin typeface="DejaVu Sans"/>
-                <a:ea typeface="DejaVu Sans"/>
-                <a:cs typeface="DejaVu Sans"/>
-              </a:rPr>
-              <a:t>Memory</a:t>
+              <a:defRPr sz="1725" b="0">
+                <a:solidFill>
+                  <a:srgbClr val="ADB8C5"/>
+                </a:solidFill>
+                <a:latin typeface="DejaVu Sans"/>
+                <a:ea typeface="DejaVu Sans"/>
+                <a:cs typeface="DejaVu Sans"/>
+              </a:defRPr>
+            </a:pPr>
+            <a:r>
+              <a:rPr sz="1725" b="0">
+                <a:solidFill>
+                  <a:srgbClr val="ADB8C5"/>
+                </a:solidFill>
+                <a:latin typeface="DejaVu Sans"/>
+                <a:ea typeface="DejaVu Sans"/>
+                <a:cs typeface="DejaVu Sans"/>
+              </a:rPr>
+              <a:t>Records we can retrieve</a:t>
             </a:r>
           </a:p>
         </p:txBody>
@@ -7957,82 +8074,27 @@
           <p:cNvPr id="8" name="">
             <a:extLst xmlns:a="http://schemas.openxmlformats.org/drawingml/2006/main">
               <a:ext uri="{FF2B5EF4-FFF2-40B4-BE49-F238E27FC236}">
-                <a16:creationId xmlns:a16="http://schemas.microsoft.com/office/drawing/2014/main" id="{F6098386-32F2-49C5-B874-83A3D9C822C3}"/>
-              </a:ext>
-            </a:extLst>
-          </p:cNvPr>
-          <p:cNvSpPr>
-            <a:spLocks xmlns:a="http://schemas.openxmlformats.org/drawingml/2006/main" noGrp="1"/>
-          </p:cNvSpPr>
-          <p:nvPr/>
-        </p:nvSpPr>
-        <p:spPr>
-          <a:xfrm xmlns:a="http://schemas.openxmlformats.org/drawingml/2006/main">
-            <a:off x="4419600" y="2114550"/>
-            <a:ext cx="762000" cy="342900"/>
-          </a:xfrm>
-          <a:prstGeom xmlns:a="http://schemas.openxmlformats.org/drawingml/2006/main" prst="rect">
-            <a:avLst/>
-          </a:prstGeom>
-          <a:noFill xmlns:a="http://schemas.openxmlformats.org/drawingml/2006/main"/>
-          <a:ln xmlns:a="http://schemas.openxmlformats.org/drawingml/2006/main" w="0">
-            <a:noFill/>
-          </a:ln>
-        </p:spPr>
-        <p:txBody>
-          <a:bodyPr xmlns:a="http://schemas.openxmlformats.org/drawingml/2006/main" wrap="square" lIns="0" tIns="0" rIns="0" bIns="0" anchor="ctr">
-            <a:noAutofit/>
-          </a:bodyPr>
-          <a:lstStyle xmlns:a="http://schemas.openxmlformats.org/drawingml/2006/main"/>
-          <a:p xmlns:a="http://schemas.openxmlformats.org/drawingml/2006/main">
-            <a:pPr algn="l">
-              <a:defRPr sz="1800" b="0">
-                <a:solidFill>
-                  <a:srgbClr val="28C7F7"/>
-                </a:solidFill>
-                <a:latin typeface="DejaVu Sans"/>
-                <a:ea typeface="DejaVu Sans"/>
-                <a:cs typeface="DejaVu Sans"/>
-              </a:defRPr>
-            </a:pPr>
-            <a:r>
-              <a:rPr sz="1800" b="0">
-                <a:solidFill>
-                  <a:srgbClr val="28C7F7"/>
-                </a:solidFill>
-                <a:latin typeface="DejaVu Sans"/>
-                <a:ea typeface="DejaVu Sans"/>
-                <a:cs typeface="DejaVu Sans"/>
-              </a:rPr>
-              <a:t>02</a:t>
-            </a:r>
-          </a:p>
-        </p:txBody>
-      </p:sp>
-      <p:sp>
-        <p:nvSpPr>
-          <p:cNvPr id="9" name="">
-            <a:extLst xmlns:a="http://schemas.openxmlformats.org/drawingml/2006/main">
-              <a:ext uri="{FF2B5EF4-FFF2-40B4-BE49-F238E27FC236}">
-                <a16:creationId xmlns:a16="http://schemas.microsoft.com/office/drawing/2014/main" id="{A838B9F7-C3EB-41D1-A18C-817D4A2C6433}"/>
-              </a:ext>
-            </a:extLst>
-          </p:cNvPr>
-          <p:cNvSpPr>
-            <a:spLocks xmlns:a="http://schemas.openxmlformats.org/drawingml/2006/main" noGrp="1"/>
-          </p:cNvSpPr>
-          <p:nvPr/>
-        </p:nvSpPr>
-        <p:spPr>
-          <a:xfrm xmlns:a="http://schemas.openxmlformats.org/drawingml/2006/main" flipH="0" flipV="0">
-            <a:off x="4419600" y="2667000"/>
-            <a:ext cx="3333750" cy="0"/>
-          </a:xfrm>
-          <a:prstGeom xmlns:a="http://schemas.openxmlformats.org/drawingml/2006/main" prst="line">
-            <a:avLst/>
-          </a:prstGeom>
-          <a:noFill xmlns:a="http://schemas.openxmlformats.org/drawingml/2006/main"/>
-          <a:ln xmlns:a="http://schemas.openxmlformats.org/drawingml/2006/main" w="28575">
+                <a16:creationId xmlns:a16="http://schemas.microsoft.com/office/drawing/2014/main" id="{04C50067-6E77-45C3-8431-C9B1463716E4}"/>
+              </a:ext>
+            </a:extLst>
+          </p:cNvPr>
+          <p:cNvSpPr>
+            <a:spLocks xmlns:a="http://schemas.openxmlformats.org/drawingml/2006/main" noGrp="1"/>
+          </p:cNvSpPr>
+          <p:nvPr/>
+        </p:nvSpPr>
+        <p:spPr>
+          <a:xfrm xmlns:a="http://schemas.openxmlformats.org/drawingml/2006/main">
+            <a:off x="4514850" y="2200275"/>
+            <a:ext cx="3162300" cy="2333625"/>
+          </a:xfrm>
+          <a:prstGeom xmlns:a="http://schemas.openxmlformats.org/drawingml/2006/main" prst="rect">
+            <a:avLst/>
+          </a:prstGeom>
+          <a:solidFill xmlns:a="http://schemas.openxmlformats.org/drawingml/2006/main">
+            <a:srgbClr val="141C26"/>
+          </a:solidFill>
+          <a:ln xmlns:a="http://schemas.openxmlformats.org/drawingml/2006/main" w="14288">
             <a:solidFill>
               <a:srgbClr val="28C7F7"/>
             </a:solidFill>
@@ -8042,22 +8104,79 @@
       </p:sp>
       <p:sp>
         <p:nvSpPr>
+          <p:cNvPr id="9" name="">
+            <a:extLst xmlns:a="http://schemas.openxmlformats.org/drawingml/2006/main">
+              <a:ext uri="{FF2B5EF4-FFF2-40B4-BE49-F238E27FC236}">
+                <a16:creationId xmlns:a16="http://schemas.microsoft.com/office/drawing/2014/main" id="{40945584-1810-41C8-8755-0EABC130DD9E}"/>
+              </a:ext>
+            </a:extLst>
+          </p:cNvPr>
+          <p:cNvSpPr>
+            <a:spLocks xmlns:a="http://schemas.openxmlformats.org/drawingml/2006/main" noGrp="1"/>
+          </p:cNvSpPr>
+          <p:nvPr/>
+        </p:nvSpPr>
+        <p:spPr>
+          <a:xfrm xmlns:a="http://schemas.openxmlformats.org/drawingml/2006/main">
+            <a:off x="4743450" y="2371725"/>
+            <a:ext cx="2705100" cy="457200"/>
+          </a:xfrm>
+          <a:prstGeom xmlns:a="http://schemas.openxmlformats.org/drawingml/2006/main" prst="rect">
+            <a:avLst/>
+          </a:prstGeom>
+          <a:noFill xmlns:a="http://schemas.openxmlformats.org/drawingml/2006/main"/>
+          <a:ln xmlns:a="http://schemas.openxmlformats.org/drawingml/2006/main" w="0">
+            <a:noFill/>
+          </a:ln>
+        </p:spPr>
+        <p:txBody>
+          <a:bodyPr xmlns:a="http://schemas.openxmlformats.org/drawingml/2006/main" wrap="square" lIns="0" tIns="0" rIns="0" bIns="0" anchor="ctr">
+            <a:noAutofit/>
+          </a:bodyPr>
+          <a:lstStyle xmlns:a="http://schemas.openxmlformats.org/drawingml/2006/main"/>
+          <a:p xmlns:a="http://schemas.openxmlformats.org/drawingml/2006/main">
+            <a:pPr algn="l">
+              <a:defRPr sz="2325" b="1">
+                <a:solidFill>
+                  <a:srgbClr val="F4F7FA"/>
+                </a:solidFill>
+                <a:latin typeface="DejaVu Sans"/>
+                <a:ea typeface="DejaVu Sans"/>
+                <a:cs typeface="DejaVu Sans"/>
+              </a:defRPr>
+            </a:pPr>
+            <a:r>
+              <a:rPr sz="2325" b="1">
+                <a:solidFill>
+                  <a:srgbClr val="F4F7FA"/>
+                </a:solidFill>
+                <a:latin typeface="DejaVu Sans"/>
+                <a:ea typeface="DejaVu Sans"/>
+                <a:cs typeface="DejaVu Sans"/>
+              </a:rPr>
+              <a:t>Computers</a:t>
+            </a:r>
+          </a:p>
+        </p:txBody>
+      </p:sp>
+      <p:sp>
+        <p:nvSpPr>
           <p:cNvPr id="10" name="">
             <a:extLst xmlns:a="http://schemas.openxmlformats.org/drawingml/2006/main">
               <a:ext uri="{FF2B5EF4-FFF2-40B4-BE49-F238E27FC236}">
-                <a16:creationId xmlns:a16="http://schemas.microsoft.com/office/drawing/2014/main" id="{4DF1297F-0B13-4A8E-91A6-BCFC99BE618E}"/>
-              </a:ext>
-            </a:extLst>
-          </p:cNvPr>
-          <p:cNvSpPr>
-            <a:spLocks xmlns:a="http://schemas.openxmlformats.org/drawingml/2006/main" noGrp="1"/>
-          </p:cNvSpPr>
-          <p:nvPr/>
-        </p:nvSpPr>
-        <p:spPr>
-          <a:xfrm xmlns:a="http://schemas.openxmlformats.org/drawingml/2006/main">
-            <a:off x="4419600" y="2952750"/>
-            <a:ext cx="3333750" cy="495300"/>
+                <a16:creationId xmlns:a16="http://schemas.microsoft.com/office/drawing/2014/main" id="{AED0F21B-ECC1-41B4-A3B1-F1867CC36EBB}"/>
+              </a:ext>
+            </a:extLst>
+          </p:cNvPr>
+          <p:cNvSpPr>
+            <a:spLocks xmlns:a="http://schemas.openxmlformats.org/drawingml/2006/main" noGrp="1"/>
+          </p:cNvSpPr>
+          <p:nvPr/>
+        </p:nvSpPr>
+        <p:spPr>
+          <a:xfrm xmlns:a="http://schemas.openxmlformats.org/drawingml/2006/main">
+            <a:off x="4743450" y="2981325"/>
+            <a:ext cx="2705100" cy="647700"/>
           </a:xfrm>
           <a:prstGeom xmlns:a="http://schemas.openxmlformats.org/drawingml/2006/main" prst="rect">
             <a:avLst/>
@@ -8074,25 +8193,48 @@
           <a:lstStyle xmlns:a="http://schemas.openxmlformats.org/drawingml/2006/main"/>
           <a:p xmlns:a="http://schemas.openxmlformats.org/drawingml/2006/main">
             <a:pPr algn="l">
-              <a:defRPr sz="2550" b="1">
-                <a:solidFill>
-                  <a:srgbClr val="F4F7FA"/>
-                </a:solidFill>
-                <a:latin typeface="DejaVu Sans"/>
-                <a:ea typeface="DejaVu Sans"/>
-                <a:cs typeface="DejaVu Sans"/>
-              </a:defRPr>
-            </a:pPr>
-            <a:r>
-              <a:rPr sz="2550" b="1">
-                <a:solidFill>
-                  <a:srgbClr val="F4F7FA"/>
-                </a:solidFill>
-                <a:latin typeface="DejaVu Sans"/>
-                <a:ea typeface="DejaVu Sans"/>
-                <a:cs typeface="DejaVu Sans"/>
-              </a:rPr>
-              <a:t>Computers</a:t>
+              <a:defRPr sz="2025" b="1">
+                <a:solidFill>
+                  <a:srgbClr val="28C7F7"/>
+                </a:solidFill>
+                <a:latin typeface="DejaVu Sans"/>
+                <a:ea typeface="DejaVu Sans"/>
+                <a:cs typeface="DejaVu Sans"/>
+              </a:defRPr>
+            </a:pPr>
+            <a:r>
+              <a:rPr sz="2025" b="1">
+                <a:solidFill>
+                  <a:srgbClr val="28C7F7"/>
+                </a:solidFill>
+                <a:latin typeface="DejaVu Sans"/>
+                <a:ea typeface="DejaVu Sans"/>
+                <a:cs typeface="DejaVu Sans"/>
+              </a:rPr>
+              <a:t>Externalized</a:t>
+            </a:r>
+          </a:p>
+          <a:p xmlns:a="http://schemas.openxmlformats.org/drawingml/2006/main">
+            <a:pPr algn="l">
+              <a:defRPr sz="2025" b="1">
+                <a:solidFill>
+                  <a:srgbClr val="28C7F7"/>
+                </a:solidFill>
+                <a:latin typeface="DejaVu Sans"/>
+                <a:ea typeface="DejaVu Sans"/>
+                <a:cs typeface="DejaVu Sans"/>
+              </a:defRPr>
+            </a:pPr>
+            <a:r>
+              <a:rPr sz="2025" b="1">
+                <a:solidFill>
+                  <a:srgbClr val="28C7F7"/>
+                </a:solidFill>
+                <a:latin typeface="DejaVu Sans"/>
+                <a:ea typeface="DejaVu Sans"/>
+                <a:cs typeface="DejaVu Sans"/>
+              </a:rPr>
+              <a:t>Calculation</a:t>
             </a:r>
           </a:p>
         </p:txBody>
@@ -8102,19 +8244,19 @@
           <p:cNvPr id="11" name="">
             <a:extLst xmlns:a="http://schemas.openxmlformats.org/drawingml/2006/main">
               <a:ext uri="{FF2B5EF4-FFF2-40B4-BE49-F238E27FC236}">
-                <a16:creationId xmlns:a16="http://schemas.microsoft.com/office/drawing/2014/main" id="{9F98E7B7-C9D0-42F2-8C02-592C12FFD931}"/>
-              </a:ext>
-            </a:extLst>
-          </p:cNvPr>
-          <p:cNvSpPr>
-            <a:spLocks xmlns:a="http://schemas.openxmlformats.org/drawingml/2006/main" noGrp="1"/>
-          </p:cNvSpPr>
-          <p:nvPr/>
-        </p:nvSpPr>
-        <p:spPr>
-          <a:xfrm xmlns:a="http://schemas.openxmlformats.org/drawingml/2006/main">
-            <a:off x="4419600" y="3657600"/>
-            <a:ext cx="3333750" cy="857250"/>
+                <a16:creationId xmlns:a16="http://schemas.microsoft.com/office/drawing/2014/main" id="{8656462C-398B-4D05-AD8F-DCE619963491}"/>
+              </a:ext>
+            </a:extLst>
+          </p:cNvPr>
+          <p:cNvSpPr>
+            <a:spLocks xmlns:a="http://schemas.openxmlformats.org/drawingml/2006/main" noGrp="1"/>
+          </p:cNvSpPr>
+          <p:nvPr/>
+        </p:nvSpPr>
+        <p:spPr>
+          <a:xfrm xmlns:a="http://schemas.openxmlformats.org/drawingml/2006/main">
+            <a:off x="4743450" y="3762375"/>
+            <a:ext cx="2705100" cy="571500"/>
           </a:xfrm>
           <a:prstGeom xmlns:a="http://schemas.openxmlformats.org/drawingml/2006/main" prst="rect">
             <a:avLst/>
@@ -8131,48 +8273,25 @@
           <a:lstStyle xmlns:a="http://schemas.openxmlformats.org/drawingml/2006/main"/>
           <a:p xmlns:a="http://schemas.openxmlformats.org/drawingml/2006/main">
             <a:pPr algn="l">
-              <a:defRPr sz="2175" b="0">
-                <a:solidFill>
-                  <a:srgbClr val="28C7F7"/>
-                </a:solidFill>
-                <a:latin typeface="DejaVu Sans"/>
-                <a:ea typeface="DejaVu Sans"/>
-                <a:cs typeface="DejaVu Sans"/>
-              </a:defRPr>
-            </a:pPr>
-            <a:r>
-              <a:rPr sz="2175" b="0">
-                <a:solidFill>
-                  <a:srgbClr val="28C7F7"/>
-                </a:solidFill>
-                <a:latin typeface="DejaVu Sans"/>
-                <a:ea typeface="DejaVu Sans"/>
-                <a:cs typeface="DejaVu Sans"/>
-              </a:rPr>
-              <a:t>Externalized</a:t>
-            </a:r>
-          </a:p>
-          <a:p xmlns:a="http://schemas.openxmlformats.org/drawingml/2006/main">
-            <a:pPr algn="l">
-              <a:defRPr sz="2175" b="0">
-                <a:solidFill>
-                  <a:srgbClr val="28C7F7"/>
-                </a:solidFill>
-                <a:latin typeface="DejaVu Sans"/>
-                <a:ea typeface="DejaVu Sans"/>
-                <a:cs typeface="DejaVu Sans"/>
-              </a:defRPr>
-            </a:pPr>
-            <a:r>
-              <a:rPr sz="2175" b="0">
-                <a:solidFill>
-                  <a:srgbClr val="28C7F7"/>
-                </a:solidFill>
-                <a:latin typeface="DejaVu Sans"/>
-                <a:ea typeface="DejaVu Sans"/>
-                <a:cs typeface="DejaVu Sans"/>
-              </a:rPr>
-              <a:t>Calculation</a:t>
+              <a:defRPr sz="1725" b="0">
+                <a:solidFill>
+                  <a:srgbClr val="ADB8C5"/>
+                </a:solidFill>
+                <a:latin typeface="DejaVu Sans"/>
+                <a:ea typeface="DejaVu Sans"/>
+                <a:cs typeface="DejaVu Sans"/>
+              </a:defRPr>
+            </a:pPr>
+            <a:r>
+              <a:rPr sz="1725" b="0">
+                <a:solidFill>
+                  <a:srgbClr val="ADB8C5"/>
+                </a:solidFill>
+                <a:latin typeface="DejaVu Sans"/>
+                <a:ea typeface="DejaVu Sans"/>
+                <a:cs typeface="DejaVu Sans"/>
+              </a:rPr>
+              <a:t>Rules we explicitly encode</a:t>
             </a:r>
           </a:p>
         </p:txBody>
@@ -8182,82 +8301,27 @@
           <p:cNvPr id="12" name="">
             <a:extLst xmlns:a="http://schemas.openxmlformats.org/drawingml/2006/main">
               <a:ext uri="{FF2B5EF4-FFF2-40B4-BE49-F238E27FC236}">
-                <a16:creationId xmlns:a16="http://schemas.microsoft.com/office/drawing/2014/main" id="{F280967F-063E-4B51-8BF5-45271995F90C}"/>
-              </a:ext>
-            </a:extLst>
-          </p:cNvPr>
-          <p:cNvSpPr>
-            <a:spLocks xmlns:a="http://schemas.openxmlformats.org/drawingml/2006/main" noGrp="1"/>
-          </p:cNvSpPr>
-          <p:nvPr/>
-        </p:nvSpPr>
-        <p:spPr>
-          <a:xfrm xmlns:a="http://schemas.openxmlformats.org/drawingml/2006/main">
-            <a:off x="8229600" y="2114550"/>
-            <a:ext cx="762000" cy="342900"/>
-          </a:xfrm>
-          <a:prstGeom xmlns:a="http://schemas.openxmlformats.org/drawingml/2006/main" prst="rect">
-            <a:avLst/>
-          </a:prstGeom>
-          <a:noFill xmlns:a="http://schemas.openxmlformats.org/drawingml/2006/main"/>
-          <a:ln xmlns:a="http://schemas.openxmlformats.org/drawingml/2006/main" w="0">
-            <a:noFill/>
-          </a:ln>
-        </p:spPr>
-        <p:txBody>
-          <a:bodyPr xmlns:a="http://schemas.openxmlformats.org/drawingml/2006/main" wrap="square" lIns="0" tIns="0" rIns="0" bIns="0" anchor="ctr">
-            <a:noAutofit/>
-          </a:bodyPr>
-          <a:lstStyle xmlns:a="http://schemas.openxmlformats.org/drawingml/2006/main"/>
-          <a:p xmlns:a="http://schemas.openxmlformats.org/drawingml/2006/main">
-            <a:pPr algn="l">
-              <a:defRPr sz="1800" b="0">
-                <a:solidFill>
-                  <a:srgbClr val="F5B61C"/>
-                </a:solidFill>
-                <a:latin typeface="DejaVu Sans"/>
-                <a:ea typeface="DejaVu Sans"/>
-                <a:cs typeface="DejaVu Sans"/>
-              </a:defRPr>
-            </a:pPr>
-            <a:r>
-              <a:rPr sz="1800" b="0">
-                <a:solidFill>
-                  <a:srgbClr val="F5B61C"/>
-                </a:solidFill>
-                <a:latin typeface="DejaVu Sans"/>
-                <a:ea typeface="DejaVu Sans"/>
-                <a:cs typeface="DejaVu Sans"/>
-              </a:rPr>
-              <a:t>03</a:t>
-            </a:r>
-          </a:p>
-        </p:txBody>
-      </p:sp>
-      <p:sp>
-        <p:nvSpPr>
-          <p:cNvPr id="13" name="">
-            <a:extLst xmlns:a="http://schemas.openxmlformats.org/drawingml/2006/main">
-              <a:ext uri="{FF2B5EF4-FFF2-40B4-BE49-F238E27FC236}">
-                <a16:creationId xmlns:a16="http://schemas.microsoft.com/office/drawing/2014/main" id="{27C1D283-B333-4A67-A16A-88618F0E739D}"/>
-              </a:ext>
-            </a:extLst>
-          </p:cNvPr>
-          <p:cNvSpPr>
-            <a:spLocks xmlns:a="http://schemas.openxmlformats.org/drawingml/2006/main" noGrp="1"/>
-          </p:cNvSpPr>
-          <p:nvPr/>
-        </p:nvSpPr>
-        <p:spPr>
-          <a:xfrm xmlns:a="http://schemas.openxmlformats.org/drawingml/2006/main" flipH="0" flipV="0">
-            <a:off x="8229600" y="2667000"/>
-            <a:ext cx="3333750" cy="0"/>
-          </a:xfrm>
-          <a:prstGeom xmlns:a="http://schemas.openxmlformats.org/drawingml/2006/main" prst="line">
-            <a:avLst/>
-          </a:prstGeom>
-          <a:noFill xmlns:a="http://schemas.openxmlformats.org/drawingml/2006/main"/>
-          <a:ln xmlns:a="http://schemas.openxmlformats.org/drawingml/2006/main" w="28575">
+                <a16:creationId xmlns:a16="http://schemas.microsoft.com/office/drawing/2014/main" id="{53EEA161-5CA7-40CD-BDD3-662CE4B90D3A}"/>
+              </a:ext>
+            </a:extLst>
+          </p:cNvPr>
+          <p:cNvSpPr>
+            <a:spLocks xmlns:a="http://schemas.openxmlformats.org/drawingml/2006/main" noGrp="1"/>
+          </p:cNvSpPr>
+          <p:nvPr/>
+        </p:nvSpPr>
+        <p:spPr>
+          <a:xfrm xmlns:a="http://schemas.openxmlformats.org/drawingml/2006/main">
+            <a:off x="8420100" y="2200275"/>
+            <a:ext cx="3162300" cy="2333625"/>
+          </a:xfrm>
+          <a:prstGeom xmlns:a="http://schemas.openxmlformats.org/drawingml/2006/main" prst="rect">
+            <a:avLst/>
+          </a:prstGeom>
+          <a:solidFill xmlns:a="http://schemas.openxmlformats.org/drawingml/2006/main">
+            <a:srgbClr val="141C26"/>
+          </a:solidFill>
+          <a:ln xmlns:a="http://schemas.openxmlformats.org/drawingml/2006/main" w="14288">
             <a:solidFill>
               <a:srgbClr val="F5B61C"/>
             </a:solidFill>
@@ -8267,22 +8331,79 @@
       </p:sp>
       <p:sp>
         <p:nvSpPr>
+          <p:cNvPr id="13" name="">
+            <a:extLst xmlns:a="http://schemas.openxmlformats.org/drawingml/2006/main">
+              <a:ext uri="{FF2B5EF4-FFF2-40B4-BE49-F238E27FC236}">
+                <a16:creationId xmlns:a16="http://schemas.microsoft.com/office/drawing/2014/main" id="{EBC9F598-5F74-4448-8AEB-0F69570C7E1B}"/>
+              </a:ext>
+            </a:extLst>
+          </p:cNvPr>
+          <p:cNvSpPr>
+            <a:spLocks xmlns:a="http://schemas.openxmlformats.org/drawingml/2006/main" noGrp="1"/>
+          </p:cNvSpPr>
+          <p:nvPr/>
+        </p:nvSpPr>
+        <p:spPr>
+          <a:xfrm xmlns:a="http://schemas.openxmlformats.org/drawingml/2006/main">
+            <a:off x="8648700" y="2371725"/>
+            <a:ext cx="2705100" cy="457200"/>
+          </a:xfrm>
+          <a:prstGeom xmlns:a="http://schemas.openxmlformats.org/drawingml/2006/main" prst="rect">
+            <a:avLst/>
+          </a:prstGeom>
+          <a:noFill xmlns:a="http://schemas.openxmlformats.org/drawingml/2006/main"/>
+          <a:ln xmlns:a="http://schemas.openxmlformats.org/drawingml/2006/main" w="0">
+            <a:noFill/>
+          </a:ln>
+        </p:spPr>
+        <p:txBody>
+          <a:bodyPr xmlns:a="http://schemas.openxmlformats.org/drawingml/2006/main" wrap="square" lIns="0" tIns="0" rIns="0" bIns="0" anchor="ctr">
+            <a:noAutofit/>
+          </a:bodyPr>
+          <a:lstStyle xmlns:a="http://schemas.openxmlformats.org/drawingml/2006/main"/>
+          <a:p xmlns:a="http://schemas.openxmlformats.org/drawingml/2006/main">
+            <a:pPr algn="l">
+              <a:defRPr sz="2325" b="1">
+                <a:solidFill>
+                  <a:srgbClr val="F4F7FA"/>
+                </a:solidFill>
+                <a:latin typeface="DejaVu Sans"/>
+                <a:ea typeface="DejaVu Sans"/>
+                <a:cs typeface="DejaVu Sans"/>
+              </a:defRPr>
+            </a:pPr>
+            <a:r>
+              <a:rPr sz="2325" b="1">
+                <a:solidFill>
+                  <a:srgbClr val="F4F7FA"/>
+                </a:solidFill>
+                <a:latin typeface="DejaVu Sans"/>
+                <a:ea typeface="DejaVu Sans"/>
+                <a:cs typeface="DejaVu Sans"/>
+              </a:rPr>
+              <a:t>Large Models</a:t>
+            </a:r>
+          </a:p>
+        </p:txBody>
+      </p:sp>
+      <p:sp>
+        <p:nvSpPr>
           <p:cNvPr id="14" name="">
             <a:extLst xmlns:a="http://schemas.openxmlformats.org/drawingml/2006/main">
               <a:ext uri="{FF2B5EF4-FFF2-40B4-BE49-F238E27FC236}">
-                <a16:creationId xmlns:a16="http://schemas.microsoft.com/office/drawing/2014/main" id="{11BC5A3B-7A97-48B4-A21C-D140B3EA3FC6}"/>
-              </a:ext>
-            </a:extLst>
-          </p:cNvPr>
-          <p:cNvSpPr>
-            <a:spLocks xmlns:a="http://schemas.openxmlformats.org/drawingml/2006/main" noGrp="1"/>
-          </p:cNvSpPr>
-          <p:nvPr/>
-        </p:nvSpPr>
-        <p:spPr>
-          <a:xfrm xmlns:a="http://schemas.openxmlformats.org/drawingml/2006/main">
-            <a:off x="8229600" y="2952750"/>
-            <a:ext cx="3333750" cy="495300"/>
+                <a16:creationId xmlns:a16="http://schemas.microsoft.com/office/drawing/2014/main" id="{DF8DA8FD-EE3C-4FB4-996B-EA52C5167D4E}"/>
+              </a:ext>
+            </a:extLst>
+          </p:cNvPr>
+          <p:cNvSpPr>
+            <a:spLocks xmlns:a="http://schemas.openxmlformats.org/drawingml/2006/main" noGrp="1"/>
+          </p:cNvSpPr>
+          <p:nvPr/>
+        </p:nvSpPr>
+        <p:spPr>
+          <a:xfrm xmlns:a="http://schemas.openxmlformats.org/drawingml/2006/main">
+            <a:off x="8648700" y="2981325"/>
+            <a:ext cx="2705100" cy="647700"/>
           </a:xfrm>
           <a:prstGeom xmlns:a="http://schemas.openxmlformats.org/drawingml/2006/main" prst="rect">
             <a:avLst/>
@@ -8299,25 +8420,48 @@
           <a:lstStyle xmlns:a="http://schemas.openxmlformats.org/drawingml/2006/main"/>
           <a:p xmlns:a="http://schemas.openxmlformats.org/drawingml/2006/main">
             <a:pPr algn="l">
-              <a:defRPr sz="2550" b="1">
-                <a:solidFill>
-                  <a:srgbClr val="F4F7FA"/>
-                </a:solidFill>
-                <a:latin typeface="DejaVu Sans"/>
-                <a:ea typeface="DejaVu Sans"/>
-                <a:cs typeface="DejaVu Sans"/>
-              </a:defRPr>
-            </a:pPr>
-            <a:r>
-              <a:rPr sz="2550" b="1">
-                <a:solidFill>
-                  <a:srgbClr val="F4F7FA"/>
-                </a:solidFill>
-                <a:latin typeface="DejaVu Sans"/>
-                <a:ea typeface="DejaVu Sans"/>
-                <a:cs typeface="DejaVu Sans"/>
-              </a:rPr>
-              <a:t>Large Models</a:t>
+              <a:defRPr sz="2025" b="1">
+                <a:solidFill>
+                  <a:srgbClr val="F5B61C"/>
+                </a:solidFill>
+                <a:latin typeface="DejaVu Sans"/>
+                <a:ea typeface="DejaVu Sans"/>
+                <a:cs typeface="DejaVu Sans"/>
+              </a:defRPr>
+            </a:pPr>
+            <a:r>
+              <a:rPr sz="2025" b="1">
+                <a:solidFill>
+                  <a:srgbClr val="F5B61C"/>
+                </a:solidFill>
+                <a:latin typeface="DejaVu Sans"/>
+                <a:ea typeface="DejaVu Sans"/>
+                <a:cs typeface="DejaVu Sans"/>
+              </a:rPr>
+              <a:t>Externalized</a:t>
+            </a:r>
+          </a:p>
+          <a:p xmlns:a="http://schemas.openxmlformats.org/drawingml/2006/main">
+            <a:pPr algn="l">
+              <a:defRPr sz="2025" b="1">
+                <a:solidFill>
+                  <a:srgbClr val="F5B61C"/>
+                </a:solidFill>
+                <a:latin typeface="DejaVu Sans"/>
+                <a:ea typeface="DejaVu Sans"/>
+                <a:cs typeface="DejaVu Sans"/>
+              </a:defRPr>
+            </a:pPr>
+            <a:r>
+              <a:rPr sz="2025" b="1">
+                <a:solidFill>
+                  <a:srgbClr val="F5B61C"/>
+                </a:solidFill>
+                <a:latin typeface="DejaVu Sans"/>
+                <a:ea typeface="DejaVu Sans"/>
+                <a:cs typeface="DejaVu Sans"/>
+              </a:rPr>
+              <a:t>Cognition</a:t>
             </a:r>
           </a:p>
         </p:txBody>
@@ -8327,99 +8471,19 @@
           <p:cNvPr id="15" name="">
             <a:extLst xmlns:a="http://schemas.openxmlformats.org/drawingml/2006/main">
               <a:ext uri="{FF2B5EF4-FFF2-40B4-BE49-F238E27FC236}">
-                <a16:creationId xmlns:a16="http://schemas.microsoft.com/office/drawing/2014/main" id="{C8FDE2A5-698D-47B8-AD87-9F6B583F658A}"/>
-              </a:ext>
-            </a:extLst>
-          </p:cNvPr>
-          <p:cNvSpPr>
-            <a:spLocks xmlns:a="http://schemas.openxmlformats.org/drawingml/2006/main" noGrp="1"/>
-          </p:cNvSpPr>
-          <p:nvPr/>
-        </p:nvSpPr>
-        <p:spPr>
-          <a:xfrm xmlns:a="http://schemas.openxmlformats.org/drawingml/2006/main">
-            <a:off x="8229600" y="3657600"/>
-            <a:ext cx="3333750" cy="857250"/>
-          </a:xfrm>
-          <a:prstGeom xmlns:a="http://schemas.openxmlformats.org/drawingml/2006/main" prst="rect">
-            <a:avLst/>
-          </a:prstGeom>
-          <a:noFill xmlns:a="http://schemas.openxmlformats.org/drawingml/2006/main"/>
-          <a:ln xmlns:a="http://schemas.openxmlformats.org/drawingml/2006/main" w="0">
-            <a:noFill/>
-          </a:ln>
-        </p:spPr>
-        <p:txBody>
-          <a:bodyPr xmlns:a="http://schemas.openxmlformats.org/drawingml/2006/main" wrap="square" lIns="0" tIns="0" rIns="0" bIns="0" anchor="ctr">
-            <a:noAutofit/>
-          </a:bodyPr>
-          <a:lstStyle xmlns:a="http://schemas.openxmlformats.org/drawingml/2006/main"/>
-          <a:p xmlns:a="http://schemas.openxmlformats.org/drawingml/2006/main">
-            <a:pPr algn="l">
-              <a:defRPr sz="2175" b="0">
-                <a:solidFill>
-                  <a:srgbClr val="F5B61C"/>
-                </a:solidFill>
-                <a:latin typeface="DejaVu Sans"/>
-                <a:ea typeface="DejaVu Sans"/>
-                <a:cs typeface="DejaVu Sans"/>
-              </a:defRPr>
-            </a:pPr>
-            <a:r>
-              <a:rPr sz="2175" b="0">
-                <a:solidFill>
-                  <a:srgbClr val="F5B61C"/>
-                </a:solidFill>
-                <a:latin typeface="DejaVu Sans"/>
-                <a:ea typeface="DejaVu Sans"/>
-                <a:cs typeface="DejaVu Sans"/>
-              </a:rPr>
-              <a:t>Externalized</a:t>
-            </a:r>
-          </a:p>
-          <a:p xmlns:a="http://schemas.openxmlformats.org/drawingml/2006/main">
-            <a:pPr algn="l">
-              <a:defRPr sz="2175" b="0">
-                <a:solidFill>
-                  <a:srgbClr val="F5B61C"/>
-                </a:solidFill>
-                <a:latin typeface="DejaVu Sans"/>
-                <a:ea typeface="DejaVu Sans"/>
-                <a:cs typeface="DejaVu Sans"/>
-              </a:defRPr>
-            </a:pPr>
-            <a:r>
-              <a:rPr sz="2175" b="0">
-                <a:solidFill>
-                  <a:srgbClr val="F5B61C"/>
-                </a:solidFill>
-                <a:latin typeface="DejaVu Sans"/>
-                <a:ea typeface="DejaVu Sans"/>
-                <a:cs typeface="DejaVu Sans"/>
-              </a:rPr>
-              <a:t>Cognition</a:t>
-            </a:r>
-          </a:p>
-        </p:txBody>
-      </p:sp>
-      <p:sp>
-        <p:nvSpPr>
-          <p:cNvPr id="16" name="">
-            <a:extLst xmlns:a="http://schemas.openxmlformats.org/drawingml/2006/main">
-              <a:ext uri="{FF2B5EF4-FFF2-40B4-BE49-F238E27FC236}">
-                <a16:creationId xmlns:a16="http://schemas.microsoft.com/office/drawing/2014/main" id="{DBFBFC44-51DD-4BBA-86A9-13C3317D8F74}"/>
-              </a:ext>
-            </a:extLst>
-          </p:cNvPr>
-          <p:cNvSpPr>
-            <a:spLocks xmlns:a="http://schemas.openxmlformats.org/drawingml/2006/main" noGrp="1"/>
-          </p:cNvSpPr>
-          <p:nvPr/>
-        </p:nvSpPr>
-        <p:spPr>
-          <a:xfrm xmlns:a="http://schemas.openxmlformats.org/drawingml/2006/main">
-            <a:off x="609600" y="5124450"/>
-            <a:ext cx="10668000" cy="457200"/>
+                <a16:creationId xmlns:a16="http://schemas.microsoft.com/office/drawing/2014/main" id="{5998AE99-23AC-4519-8892-4B06426A77D9}"/>
+              </a:ext>
+            </a:extLst>
+          </p:cNvPr>
+          <p:cNvSpPr>
+            <a:spLocks xmlns:a="http://schemas.openxmlformats.org/drawingml/2006/main" noGrp="1"/>
+          </p:cNvSpPr>
+          <p:nvPr/>
+        </p:nvSpPr>
+        <p:spPr>
+          <a:xfrm xmlns:a="http://schemas.openxmlformats.org/drawingml/2006/main">
+            <a:off x="8648700" y="3762375"/>
+            <a:ext cx="2705100" cy="571500"/>
           </a:xfrm>
           <a:prstGeom xmlns:a="http://schemas.openxmlformats.org/drawingml/2006/main" prst="rect">
             <a:avLst/>
@@ -8454,6 +8518,138 @@
                 <a:ea typeface="DejaVu Sans"/>
                 <a:cs typeface="DejaVu Sans"/>
               </a:rPr>
+              <a:t>Judgment shaped</a:t>
+            </a:r>
+          </a:p>
+          <a:p xmlns:a="http://schemas.openxmlformats.org/drawingml/2006/main">
+            <a:pPr algn="l">
+              <a:defRPr sz="1725" b="0">
+                <a:solidFill>
+                  <a:srgbClr val="ADB8C5"/>
+                </a:solidFill>
+                <a:latin typeface="DejaVu Sans"/>
+                <a:ea typeface="DejaVu Sans"/>
+                <a:cs typeface="DejaVu Sans"/>
+              </a:defRPr>
+            </a:pPr>
+            <a:r>
+              <a:rPr sz="1725" b="0">
+                <a:solidFill>
+                  <a:srgbClr val="ADB8C5"/>
+                </a:solidFill>
+                <a:latin typeface="DejaVu Sans"/>
+                <a:ea typeface="DejaVu Sans"/>
+                <a:cs typeface="DejaVu Sans"/>
+              </a:rPr>
+              <a:t>by context</a:t>
+            </a:r>
+          </a:p>
+        </p:txBody>
+      </p:sp>
+      <p:cxnSp>
+        <p:nvCxnSpPr>
+          <p:cNvPr id="36" name=""/>
+          <p:cNvCxnSpPr>
+            <a:stCxn xmlns:a="http://schemas.openxmlformats.org/drawingml/2006/main" id="4" idx="3"/>
+            <a:endCxn xmlns:a="http://schemas.openxmlformats.org/drawingml/2006/main" id="8" idx="1"/>
+          </p:cNvCxnSpPr>
+          <p:nvPr/>
+        </p:nvCxnSpPr>
+        <p:spPr>
+          <a:xfrm xmlns:a="http://schemas.openxmlformats.org/drawingml/2006/main">
+            <a:off x="3771900" y="3367088"/>
+            <a:ext cx="742950" cy="0"/>
+          </a:xfrm>
+          <a:prstGeom xmlns:a="http://schemas.openxmlformats.org/drawingml/2006/main" prst="straightConnector1">
+            <a:avLst/>
+          </a:prstGeom>
+          <a:ln xmlns:a="http://schemas.openxmlformats.org/drawingml/2006/main" w="21908">
+            <a:solidFill>
+              <a:srgbClr val="28C7F7"/>
+            </a:solidFill>
+            <a:prstDash val="solid"/>
+            <a:tailEnd type="triangle" w="med" len="med"/>
+          </a:ln>
+        </p:spPr>
+      </p:cxnSp>
+      <p:cxnSp>
+        <p:nvCxnSpPr>
+          <p:cNvPr id="37" name=""/>
+          <p:cNvCxnSpPr>
+            <a:stCxn xmlns:a="http://schemas.openxmlformats.org/drawingml/2006/main" id="8" idx="3"/>
+            <a:endCxn xmlns:a="http://schemas.openxmlformats.org/drawingml/2006/main" id="12" idx="1"/>
+          </p:cNvCxnSpPr>
+          <p:nvPr/>
+        </p:nvCxnSpPr>
+        <p:spPr>
+          <a:xfrm xmlns:a="http://schemas.openxmlformats.org/drawingml/2006/main">
+            <a:off x="7677150" y="3367088"/>
+            <a:ext cx="742950" cy="0"/>
+          </a:xfrm>
+          <a:prstGeom xmlns:a="http://schemas.openxmlformats.org/drawingml/2006/main" prst="straightConnector1">
+            <a:avLst/>
+          </a:prstGeom>
+          <a:ln xmlns:a="http://schemas.openxmlformats.org/drawingml/2006/main" w="21908">
+            <a:solidFill>
+              <a:srgbClr val="F5B61C"/>
+            </a:solidFill>
+            <a:prstDash val="solid"/>
+            <a:tailEnd type="triangle" w="med" len="med"/>
+          </a:ln>
+        </p:spPr>
+      </p:cxnSp>
+      <p:sp>
+        <p:nvSpPr>
+          <p:cNvPr id="18" name="">
+            <a:extLst xmlns:a="http://schemas.openxmlformats.org/drawingml/2006/main">
+              <a:ext uri="{FF2B5EF4-FFF2-40B4-BE49-F238E27FC236}">
+                <a16:creationId xmlns:a16="http://schemas.microsoft.com/office/drawing/2014/main" id="{6129C45D-F282-4A02-95B0-DFABAEE45999}"/>
+              </a:ext>
+            </a:extLst>
+          </p:cNvPr>
+          <p:cNvSpPr>
+            <a:spLocks xmlns:a="http://schemas.openxmlformats.org/drawingml/2006/main" noGrp="1"/>
+          </p:cNvSpPr>
+          <p:nvPr/>
+        </p:nvSpPr>
+        <p:spPr>
+          <a:xfrm xmlns:a="http://schemas.openxmlformats.org/drawingml/2006/main">
+            <a:off x="609600" y="4972050"/>
+            <a:ext cx="10668000" cy="457200"/>
+          </a:xfrm>
+          <a:prstGeom xmlns:a="http://schemas.openxmlformats.org/drawingml/2006/main" prst="rect">
+            <a:avLst/>
+          </a:prstGeom>
+          <a:noFill xmlns:a="http://schemas.openxmlformats.org/drawingml/2006/main"/>
+          <a:ln xmlns:a="http://schemas.openxmlformats.org/drawingml/2006/main" w="0">
+            <a:noFill/>
+          </a:ln>
+        </p:spPr>
+        <p:txBody>
+          <a:bodyPr xmlns:a="http://schemas.openxmlformats.org/drawingml/2006/main" wrap="square" lIns="0" tIns="0" rIns="0" bIns="0" anchor="ctr">
+            <a:noAutofit/>
+          </a:bodyPr>
+          <a:lstStyle xmlns:a="http://schemas.openxmlformats.org/drawingml/2006/main"/>
+          <a:p xmlns:a="http://schemas.openxmlformats.org/drawingml/2006/main">
+            <a:pPr algn="l">
+              <a:defRPr sz="1650" b="0">
+                <a:solidFill>
+                  <a:srgbClr val="ADB8C5"/>
+                </a:solidFill>
+                <a:latin typeface="DejaVu Sans"/>
+                <a:ea typeface="DejaVu Sans"/>
+                <a:cs typeface="DejaVu Sans"/>
+              </a:defRPr>
+            </a:pPr>
+            <a:r>
+              <a:rPr sz="1650" b="0">
+                <a:solidFill>
+                  <a:srgbClr val="ADB8C5"/>
+                </a:solidFill>
+                <a:latin typeface="DejaVu Sans"/>
+                <a:ea typeface="DejaVu Sans"/>
+                <a:cs typeface="DejaVu Sans"/>
+              </a:rPr>
               <a:t>No assumption of will, consciousness or human-like understanding is required.</a:t>
             </a:r>
           </a:p>
@@ -8461,10 +8657,10 @@
       </p:sp>
       <p:sp>
         <p:nvSpPr>
-          <p:cNvPr id="17" name="">
-            <a:extLst xmlns:a="http://schemas.openxmlformats.org/drawingml/2006/main">
-              <a:ext uri="{FF2B5EF4-FFF2-40B4-BE49-F238E27FC236}">
-                <a16:creationId xmlns:a16="http://schemas.microsoft.com/office/drawing/2014/main" id="{31022745-19E2-4DF8-9907-493C0EDA165C}"/>
+          <p:cNvPr id="19" name="">
+            <a:extLst xmlns:a="http://schemas.openxmlformats.org/drawingml/2006/main">
+              <a:ext uri="{FF2B5EF4-FFF2-40B4-BE49-F238E27FC236}">
+                <a16:creationId xmlns:a16="http://schemas.microsoft.com/office/drawing/2014/main" id="{12E68C0A-8FCA-4E75-808D-1D2F2D9827D1}"/>
               </a:ext>
             </a:extLst>
           </p:cNvPr>
@@ -8492,10 +8688,10 @@
       </p:sp>
       <p:sp>
         <p:nvSpPr>
-          <p:cNvPr id="18" name="">
-            <a:extLst xmlns:a="http://schemas.openxmlformats.org/drawingml/2006/main">
-              <a:ext uri="{FF2B5EF4-FFF2-40B4-BE49-F238E27FC236}">
-                <a16:creationId xmlns:a16="http://schemas.microsoft.com/office/drawing/2014/main" id="{89E68167-DB16-4CF0-B188-84DC532B94B6}"/>
+          <p:cNvPr id="20" name="">
+            <a:extLst xmlns:a="http://schemas.openxmlformats.org/drawingml/2006/main">
+              <a:ext uri="{FF2B5EF4-FFF2-40B4-BE49-F238E27FC236}">
+                <a16:creationId xmlns:a16="http://schemas.microsoft.com/office/drawing/2014/main" id="{16787830-EA4E-44E8-926B-D484B1B0A12D}"/>
               </a:ext>
             </a:extLst>
           </p:cNvPr>
@@ -8550,7 +8746,7 @@
     </p:spTree>
     <p:extLst>
       <p:ext uri="{BB962C8B-B14F-4D97-AF65-F5344CB8AC3E}">
-        <p14:creationId xmlns:p14="http://schemas.microsoft.com/office/powerpoint/2010/main" val="1116355971"/>
+        <p14:creationId xmlns:p14="http://schemas.microsoft.com/office/powerpoint/2010/main" val="115839764"/>
       </p:ext>
     </p:extLst>
   </p:cSld>
@@ -8578,10 +8774,10 @@
       </p:grpSpPr>
       <p:sp>
         <p:nvSpPr>
-          <p:cNvPr id="35" name="">
-            <a:extLst xmlns:a="http://schemas.openxmlformats.org/drawingml/2006/main">
-              <a:ext uri="{FF2B5EF4-FFF2-40B4-BE49-F238E27FC236}">
-                <a16:creationId xmlns:a16="http://schemas.microsoft.com/office/drawing/2014/main" id="{E1B726A9-5FD1-4A71-BACB-95C1E602A9B2}"/>
+          <p:cNvPr id="44" name="">
+            <a:extLst xmlns:a="http://schemas.openxmlformats.org/drawingml/2006/main">
+              <a:ext uri="{FF2B5EF4-FFF2-40B4-BE49-F238E27FC236}">
+                <a16:creationId xmlns:a16="http://schemas.microsoft.com/office/drawing/2014/main" id="{A083C99F-4462-4A2E-A30D-8178962B0286}"/>
               </a:ext>
             </a:extLst>
           </p:cNvPr>
@@ -8638,7 +8834,7 @@
           <p:cNvPr id="2" name="">
             <a:extLst xmlns:a="http://schemas.openxmlformats.org/drawingml/2006/main">
               <a:ext uri="{FF2B5EF4-FFF2-40B4-BE49-F238E27FC236}">
-                <a16:creationId xmlns:a16="http://schemas.microsoft.com/office/drawing/2014/main" id="{E170F26A-F0D1-48D4-8A9B-D56F14CEA778}"/>
+                <a16:creationId xmlns:a16="http://schemas.microsoft.com/office/drawing/2014/main" id="{307A19E1-C9E6-4DF4-886D-FEC006B1722D}"/>
               </a:ext>
             </a:extLst>
           </p:cNvPr>
@@ -8669,7 +8865,7 @@
           <p:cNvPr id="3" name="">
             <a:extLst xmlns:a="http://schemas.openxmlformats.org/drawingml/2006/main">
               <a:ext uri="{FF2B5EF4-FFF2-40B4-BE49-F238E27FC236}">
-                <a16:creationId xmlns:a16="http://schemas.microsoft.com/office/drawing/2014/main" id="{EA88A481-3388-405E-B44A-0D2979338325}"/>
+                <a16:creationId xmlns:a16="http://schemas.microsoft.com/office/drawing/2014/main" id="{807569C0-4816-42CD-90FF-655457C376CD}"/>
               </a:ext>
             </a:extLst>
           </p:cNvPr>
@@ -8726,19 +8922,76 @@
           <p:cNvPr id="4" name="">
             <a:extLst xmlns:a="http://schemas.openxmlformats.org/drawingml/2006/main">
               <a:ext uri="{FF2B5EF4-FFF2-40B4-BE49-F238E27FC236}">
-                <a16:creationId xmlns:a16="http://schemas.microsoft.com/office/drawing/2014/main" id="{C64138BA-F77A-478E-BAEE-033AC19B0400}"/>
-              </a:ext>
-            </a:extLst>
-          </p:cNvPr>
-          <p:cNvSpPr>
-            <a:spLocks xmlns:a="http://schemas.openxmlformats.org/drawingml/2006/main" noGrp="1"/>
-          </p:cNvSpPr>
-          <p:nvPr/>
-        </p:nvSpPr>
-        <p:spPr>
-          <a:xfrm xmlns:a="http://schemas.openxmlformats.org/drawingml/2006/main">
-            <a:off x="609600" y="2905125"/>
-            <a:ext cx="1238250" cy="819150"/>
+                <a16:creationId xmlns:a16="http://schemas.microsoft.com/office/drawing/2014/main" id="{BF2E07A3-BB32-4E15-AB14-D3B27979B852}"/>
+              </a:ext>
+            </a:extLst>
+          </p:cNvPr>
+          <p:cNvSpPr>
+            <a:spLocks xmlns:a="http://schemas.openxmlformats.org/drawingml/2006/main" noGrp="1"/>
+          </p:cNvSpPr>
+          <p:nvPr/>
+        </p:nvSpPr>
+        <p:spPr>
+          <a:xfrm xmlns:a="http://schemas.openxmlformats.org/drawingml/2006/main">
+            <a:off x="609600" y="1743075"/>
+            <a:ext cx="10972800" cy="342900"/>
+          </a:xfrm>
+          <a:prstGeom xmlns:a="http://schemas.openxmlformats.org/drawingml/2006/main" prst="rect">
+            <a:avLst/>
+          </a:prstGeom>
+          <a:noFill xmlns:a="http://schemas.openxmlformats.org/drawingml/2006/main"/>
+          <a:ln xmlns:a="http://schemas.openxmlformats.org/drawingml/2006/main" w="0">
+            <a:noFill/>
+          </a:ln>
+        </p:spPr>
+        <p:txBody>
+          <a:bodyPr xmlns:a="http://schemas.openxmlformats.org/drawingml/2006/main" wrap="square" lIns="0" tIns="0" rIns="0" bIns="0" anchor="ctr">
+            <a:noAutofit/>
+          </a:bodyPr>
+          <a:lstStyle xmlns:a="http://schemas.openxmlformats.org/drawingml/2006/main"/>
+          <a:p xmlns:a="http://schemas.openxmlformats.org/drawingml/2006/main">
+            <a:pPr algn="l">
+              <a:defRPr sz="1725" b="0">
+                <a:solidFill>
+                  <a:srgbClr val="ADB8C5"/>
+                </a:solidFill>
+                <a:latin typeface="DejaVu Sans"/>
+                <a:ea typeface="DejaVu Sans"/>
+                <a:cs typeface="DejaVu Sans"/>
+              </a:defRPr>
+            </a:pPr>
+            <a:r>
+              <a:rPr sz="1725" b="0">
+                <a:solidFill>
+                  <a:srgbClr val="ADB8C5"/>
+                </a:solidFill>
+                <a:latin typeface="DejaVu Sans"/>
+                <a:ea typeface="DejaVu Sans"/>
+                <a:cs typeface="DejaVu Sans"/>
+              </a:rPr>
+              <a:t>AI can affect every stage. The net effect must be measured.</a:t>
+            </a:r>
+          </a:p>
+        </p:txBody>
+      </p:sp>
+      <p:sp>
+        <p:nvSpPr>
+          <p:cNvPr id="5" name="">
+            <a:extLst xmlns:a="http://schemas.openxmlformats.org/drawingml/2006/main">
+              <a:ext uri="{FF2B5EF4-FFF2-40B4-BE49-F238E27FC236}">
+                <a16:creationId xmlns:a16="http://schemas.microsoft.com/office/drawing/2014/main" id="{484D3E30-7BD1-4CB3-941C-A1F17C7F4CAA}"/>
+              </a:ext>
+            </a:extLst>
+          </p:cNvPr>
+          <p:cNvSpPr>
+            <a:spLocks xmlns:a="http://schemas.openxmlformats.org/drawingml/2006/main" noGrp="1"/>
+          </p:cNvSpPr>
+          <p:nvPr/>
+        </p:nvSpPr>
+        <p:spPr>
+          <a:xfrm xmlns:a="http://schemas.openxmlformats.org/drawingml/2006/main">
+            <a:off x="609600" y="2571750"/>
+            <a:ext cx="1238250" cy="781050"/>
           </a:xfrm>
           <a:prstGeom xmlns:a="http://schemas.openxmlformats.org/drawingml/2006/main" prst="rect">
             <a:avLst/>
@@ -8756,22 +9009,22 @@
       </p:sp>
       <p:sp>
         <p:nvSpPr>
-          <p:cNvPr id="5" name="">
-            <a:extLst xmlns:a="http://schemas.openxmlformats.org/drawingml/2006/main">
-              <a:ext uri="{FF2B5EF4-FFF2-40B4-BE49-F238E27FC236}">
-                <a16:creationId xmlns:a16="http://schemas.microsoft.com/office/drawing/2014/main" id="{9887522F-E0B0-4A96-832F-9316A6EBC59C}"/>
-              </a:ext>
-            </a:extLst>
-          </p:cNvPr>
-          <p:cNvSpPr>
-            <a:spLocks xmlns:a="http://schemas.openxmlformats.org/drawingml/2006/main" noGrp="1"/>
-          </p:cNvSpPr>
-          <p:nvPr/>
-        </p:nvSpPr>
-        <p:spPr>
-          <a:xfrm xmlns:a="http://schemas.openxmlformats.org/drawingml/2006/main">
-            <a:off x="723900" y="2981325"/>
-            <a:ext cx="1009650" cy="666750"/>
+          <p:cNvPr id="6" name="">
+            <a:extLst xmlns:a="http://schemas.openxmlformats.org/drawingml/2006/main">
+              <a:ext uri="{FF2B5EF4-FFF2-40B4-BE49-F238E27FC236}">
+                <a16:creationId xmlns:a16="http://schemas.microsoft.com/office/drawing/2014/main" id="{7FB5A154-68B2-4664-B6C1-2272E80ADF84}"/>
+              </a:ext>
+            </a:extLst>
+          </p:cNvPr>
+          <p:cNvSpPr>
+            <a:spLocks xmlns:a="http://schemas.openxmlformats.org/drawingml/2006/main" noGrp="1"/>
+          </p:cNvSpPr>
+          <p:nvPr/>
+        </p:nvSpPr>
+        <p:spPr>
+          <a:xfrm xmlns:a="http://schemas.openxmlformats.org/drawingml/2006/main">
+            <a:off x="723900" y="2647950"/>
+            <a:ext cx="1009650" cy="628650"/>
           </a:xfrm>
           <a:prstGeom xmlns:a="http://schemas.openxmlformats.org/drawingml/2006/main" prst="rect">
             <a:avLst/>
@@ -8813,22 +9066,22 @@
       </p:sp>
       <p:sp>
         <p:nvSpPr>
-          <p:cNvPr id="6" name="">
-            <a:extLst xmlns:a="http://schemas.openxmlformats.org/drawingml/2006/main">
-              <a:ext uri="{FF2B5EF4-FFF2-40B4-BE49-F238E27FC236}">
-                <a16:creationId xmlns:a16="http://schemas.microsoft.com/office/drawing/2014/main" id="{F9EC576A-3109-45DA-914C-7A45AD3160FC}"/>
-              </a:ext>
-            </a:extLst>
-          </p:cNvPr>
-          <p:cNvSpPr>
-            <a:spLocks xmlns:a="http://schemas.openxmlformats.org/drawingml/2006/main" noGrp="1"/>
-          </p:cNvSpPr>
-          <p:nvPr/>
-        </p:nvSpPr>
-        <p:spPr>
-          <a:xfrm xmlns:a="http://schemas.openxmlformats.org/drawingml/2006/main">
-            <a:off x="1990725" y="2905125"/>
-            <a:ext cx="1238250" cy="819150"/>
+          <p:cNvPr id="7" name="">
+            <a:extLst xmlns:a="http://schemas.openxmlformats.org/drawingml/2006/main">
+              <a:ext uri="{FF2B5EF4-FFF2-40B4-BE49-F238E27FC236}">
+                <a16:creationId xmlns:a16="http://schemas.microsoft.com/office/drawing/2014/main" id="{D772C0FE-8C84-4394-9D13-6250BAF1255C}"/>
+              </a:ext>
+            </a:extLst>
+          </p:cNvPr>
+          <p:cNvSpPr>
+            <a:spLocks xmlns:a="http://schemas.openxmlformats.org/drawingml/2006/main" noGrp="1"/>
+          </p:cNvSpPr>
+          <p:nvPr/>
+        </p:nvSpPr>
+        <p:spPr>
+          <a:xfrm xmlns:a="http://schemas.openxmlformats.org/drawingml/2006/main">
+            <a:off x="1990725" y="2571750"/>
+            <a:ext cx="1238250" cy="781050"/>
           </a:xfrm>
           <a:prstGeom xmlns:a="http://schemas.openxmlformats.org/drawingml/2006/main" prst="rect">
             <a:avLst/>
@@ -8846,22 +9099,22 @@
       </p:sp>
       <p:sp>
         <p:nvSpPr>
-          <p:cNvPr id="7" name="">
-            <a:extLst xmlns:a="http://schemas.openxmlformats.org/drawingml/2006/main">
-              <a:ext uri="{FF2B5EF4-FFF2-40B4-BE49-F238E27FC236}">
-                <a16:creationId xmlns:a16="http://schemas.microsoft.com/office/drawing/2014/main" id="{BC3FBA16-314F-4E89-BE9D-8BE98F08F0F2}"/>
-              </a:ext>
-            </a:extLst>
-          </p:cNvPr>
-          <p:cNvSpPr>
-            <a:spLocks xmlns:a="http://schemas.openxmlformats.org/drawingml/2006/main" noGrp="1"/>
-          </p:cNvSpPr>
-          <p:nvPr/>
-        </p:nvSpPr>
-        <p:spPr>
-          <a:xfrm xmlns:a="http://schemas.openxmlformats.org/drawingml/2006/main">
-            <a:off x="2105025" y="2981325"/>
-            <a:ext cx="1009650" cy="666750"/>
+          <p:cNvPr id="8" name="">
+            <a:extLst xmlns:a="http://schemas.openxmlformats.org/drawingml/2006/main">
+              <a:ext uri="{FF2B5EF4-FFF2-40B4-BE49-F238E27FC236}">
+                <a16:creationId xmlns:a16="http://schemas.microsoft.com/office/drawing/2014/main" id="{C75BF592-C9CD-409C-A0A5-172420C5B40C}"/>
+              </a:ext>
+            </a:extLst>
+          </p:cNvPr>
+          <p:cNvSpPr>
+            <a:spLocks xmlns:a="http://schemas.openxmlformats.org/drawingml/2006/main" noGrp="1"/>
+          </p:cNvSpPr>
+          <p:nvPr/>
+        </p:nvSpPr>
+        <p:spPr>
+          <a:xfrm xmlns:a="http://schemas.openxmlformats.org/drawingml/2006/main">
+            <a:off x="2105025" y="2647950"/>
+            <a:ext cx="1009650" cy="628650"/>
           </a:xfrm>
           <a:prstGeom xmlns:a="http://schemas.openxmlformats.org/drawingml/2006/main" prst="rect">
             <a:avLst/>
@@ -8903,22 +9156,22 @@
       </p:sp>
       <p:sp>
         <p:nvSpPr>
-          <p:cNvPr id="8" name="">
-            <a:extLst xmlns:a="http://schemas.openxmlformats.org/drawingml/2006/main">
-              <a:ext uri="{FF2B5EF4-FFF2-40B4-BE49-F238E27FC236}">
-                <a16:creationId xmlns:a16="http://schemas.microsoft.com/office/drawing/2014/main" id="{9AC98739-B03D-4F91-BA9C-D02725AA25ED}"/>
-              </a:ext>
-            </a:extLst>
-          </p:cNvPr>
-          <p:cNvSpPr>
-            <a:spLocks xmlns:a="http://schemas.openxmlformats.org/drawingml/2006/main" noGrp="1"/>
-          </p:cNvSpPr>
-          <p:nvPr/>
-        </p:nvSpPr>
-        <p:spPr>
-          <a:xfrm xmlns:a="http://schemas.openxmlformats.org/drawingml/2006/main">
-            <a:off x="3371850" y="2905125"/>
-            <a:ext cx="1238250" cy="819150"/>
+          <p:cNvPr id="9" name="">
+            <a:extLst xmlns:a="http://schemas.openxmlformats.org/drawingml/2006/main">
+              <a:ext uri="{FF2B5EF4-FFF2-40B4-BE49-F238E27FC236}">
+                <a16:creationId xmlns:a16="http://schemas.microsoft.com/office/drawing/2014/main" id="{0A403837-31FE-4124-ACC8-BEC158FBC99F}"/>
+              </a:ext>
+            </a:extLst>
+          </p:cNvPr>
+          <p:cNvSpPr>
+            <a:spLocks xmlns:a="http://schemas.openxmlformats.org/drawingml/2006/main" noGrp="1"/>
+          </p:cNvSpPr>
+          <p:nvPr/>
+        </p:nvSpPr>
+        <p:spPr>
+          <a:xfrm xmlns:a="http://schemas.openxmlformats.org/drawingml/2006/main">
+            <a:off x="3371850" y="2571750"/>
+            <a:ext cx="1238250" cy="781050"/>
           </a:xfrm>
           <a:prstGeom xmlns:a="http://schemas.openxmlformats.org/drawingml/2006/main" prst="rect">
             <a:avLst/>
@@ -8936,22 +9189,22 @@
       </p:sp>
       <p:sp>
         <p:nvSpPr>
-          <p:cNvPr id="9" name="">
-            <a:extLst xmlns:a="http://schemas.openxmlformats.org/drawingml/2006/main">
-              <a:ext uri="{FF2B5EF4-FFF2-40B4-BE49-F238E27FC236}">
-                <a16:creationId xmlns:a16="http://schemas.microsoft.com/office/drawing/2014/main" id="{F12B762E-2262-44B7-B7AB-C9739F6E708E}"/>
-              </a:ext>
-            </a:extLst>
-          </p:cNvPr>
-          <p:cNvSpPr>
-            <a:spLocks xmlns:a="http://schemas.openxmlformats.org/drawingml/2006/main" noGrp="1"/>
-          </p:cNvSpPr>
-          <p:nvPr/>
-        </p:nvSpPr>
-        <p:spPr>
-          <a:xfrm xmlns:a="http://schemas.openxmlformats.org/drawingml/2006/main">
-            <a:off x="3486150" y="2981325"/>
-            <a:ext cx="1009650" cy="666750"/>
+          <p:cNvPr id="10" name="">
+            <a:extLst xmlns:a="http://schemas.openxmlformats.org/drawingml/2006/main">
+              <a:ext uri="{FF2B5EF4-FFF2-40B4-BE49-F238E27FC236}">
+                <a16:creationId xmlns:a16="http://schemas.microsoft.com/office/drawing/2014/main" id="{4BF1A2D6-8462-497F-AC31-1368CDD0D4A3}"/>
+              </a:ext>
+            </a:extLst>
+          </p:cNvPr>
+          <p:cNvSpPr>
+            <a:spLocks xmlns:a="http://schemas.openxmlformats.org/drawingml/2006/main" noGrp="1"/>
+          </p:cNvSpPr>
+          <p:nvPr/>
+        </p:nvSpPr>
+        <p:spPr>
+          <a:xfrm xmlns:a="http://schemas.openxmlformats.org/drawingml/2006/main">
+            <a:off x="3486150" y="2647950"/>
+            <a:ext cx="1009650" cy="628650"/>
           </a:xfrm>
           <a:prstGeom xmlns:a="http://schemas.openxmlformats.org/drawingml/2006/main" prst="rect">
             <a:avLst/>
@@ -8993,22 +9246,22 @@
       </p:sp>
       <p:sp>
         <p:nvSpPr>
-          <p:cNvPr id="10" name="">
-            <a:extLst xmlns:a="http://schemas.openxmlformats.org/drawingml/2006/main">
-              <a:ext uri="{FF2B5EF4-FFF2-40B4-BE49-F238E27FC236}">
-                <a16:creationId xmlns:a16="http://schemas.microsoft.com/office/drawing/2014/main" id="{C0B59863-CDD1-4BB7-A52C-3376CA481308}"/>
-              </a:ext>
-            </a:extLst>
-          </p:cNvPr>
-          <p:cNvSpPr>
-            <a:spLocks xmlns:a="http://schemas.openxmlformats.org/drawingml/2006/main" noGrp="1"/>
-          </p:cNvSpPr>
-          <p:nvPr/>
-        </p:nvSpPr>
-        <p:spPr>
-          <a:xfrm xmlns:a="http://schemas.openxmlformats.org/drawingml/2006/main">
-            <a:off x="4752975" y="2905125"/>
-            <a:ext cx="1238250" cy="819150"/>
+          <p:cNvPr id="11" name="">
+            <a:extLst xmlns:a="http://schemas.openxmlformats.org/drawingml/2006/main">
+              <a:ext uri="{FF2B5EF4-FFF2-40B4-BE49-F238E27FC236}">
+                <a16:creationId xmlns:a16="http://schemas.microsoft.com/office/drawing/2014/main" id="{CE79B1F6-68D7-403F-84E0-67FF82F7AD47}"/>
+              </a:ext>
+            </a:extLst>
+          </p:cNvPr>
+          <p:cNvSpPr>
+            <a:spLocks xmlns:a="http://schemas.openxmlformats.org/drawingml/2006/main" noGrp="1"/>
+          </p:cNvSpPr>
+          <p:nvPr/>
+        </p:nvSpPr>
+        <p:spPr>
+          <a:xfrm xmlns:a="http://schemas.openxmlformats.org/drawingml/2006/main">
+            <a:off x="4752975" y="2571750"/>
+            <a:ext cx="1238250" cy="781050"/>
           </a:xfrm>
           <a:prstGeom xmlns:a="http://schemas.openxmlformats.org/drawingml/2006/main" prst="rect">
             <a:avLst/>
@@ -9026,22 +9279,22 @@
       </p:sp>
       <p:sp>
         <p:nvSpPr>
-          <p:cNvPr id="11" name="">
-            <a:extLst xmlns:a="http://schemas.openxmlformats.org/drawingml/2006/main">
-              <a:ext uri="{FF2B5EF4-FFF2-40B4-BE49-F238E27FC236}">
-                <a16:creationId xmlns:a16="http://schemas.microsoft.com/office/drawing/2014/main" id="{A31D3222-FD12-4C40-91DD-5D05031E06E8}"/>
-              </a:ext>
-            </a:extLst>
-          </p:cNvPr>
-          <p:cNvSpPr>
-            <a:spLocks xmlns:a="http://schemas.openxmlformats.org/drawingml/2006/main" noGrp="1"/>
-          </p:cNvSpPr>
-          <p:nvPr/>
-        </p:nvSpPr>
-        <p:spPr>
-          <a:xfrm xmlns:a="http://schemas.openxmlformats.org/drawingml/2006/main">
-            <a:off x="4867275" y="2981325"/>
-            <a:ext cx="1009650" cy="666750"/>
+          <p:cNvPr id="12" name="">
+            <a:extLst xmlns:a="http://schemas.openxmlformats.org/drawingml/2006/main">
+              <a:ext uri="{FF2B5EF4-FFF2-40B4-BE49-F238E27FC236}">
+                <a16:creationId xmlns:a16="http://schemas.microsoft.com/office/drawing/2014/main" id="{750AB427-32AE-44B0-9FCC-5FB082DB96BA}"/>
+              </a:ext>
+            </a:extLst>
+          </p:cNvPr>
+          <p:cNvSpPr>
+            <a:spLocks xmlns:a="http://schemas.openxmlformats.org/drawingml/2006/main" noGrp="1"/>
+          </p:cNvSpPr>
+          <p:nvPr/>
+        </p:nvSpPr>
+        <p:spPr>
+          <a:xfrm xmlns:a="http://schemas.openxmlformats.org/drawingml/2006/main">
+            <a:off x="4867275" y="2647950"/>
+            <a:ext cx="1009650" cy="628650"/>
           </a:xfrm>
           <a:prstGeom xmlns:a="http://schemas.openxmlformats.org/drawingml/2006/main" prst="rect">
             <a:avLst/>
@@ -9083,22 +9336,22 @@
       </p:sp>
       <p:sp>
         <p:nvSpPr>
-          <p:cNvPr id="12" name="">
-            <a:extLst xmlns:a="http://schemas.openxmlformats.org/drawingml/2006/main">
-              <a:ext uri="{FF2B5EF4-FFF2-40B4-BE49-F238E27FC236}">
-                <a16:creationId xmlns:a16="http://schemas.microsoft.com/office/drawing/2014/main" id="{813F41B8-D04A-4711-BB7B-E79B018CA751}"/>
-              </a:ext>
-            </a:extLst>
-          </p:cNvPr>
-          <p:cNvSpPr>
-            <a:spLocks xmlns:a="http://schemas.openxmlformats.org/drawingml/2006/main" noGrp="1"/>
-          </p:cNvSpPr>
-          <p:nvPr/>
-        </p:nvSpPr>
-        <p:spPr>
-          <a:xfrm xmlns:a="http://schemas.openxmlformats.org/drawingml/2006/main">
-            <a:off x="6134100" y="2905125"/>
-            <a:ext cx="1238250" cy="819150"/>
+          <p:cNvPr id="13" name="">
+            <a:extLst xmlns:a="http://schemas.openxmlformats.org/drawingml/2006/main">
+              <a:ext uri="{FF2B5EF4-FFF2-40B4-BE49-F238E27FC236}">
+                <a16:creationId xmlns:a16="http://schemas.microsoft.com/office/drawing/2014/main" id="{65629171-5DA8-47E1-AA67-A3CF343AB207}"/>
+              </a:ext>
+            </a:extLst>
+          </p:cNvPr>
+          <p:cNvSpPr>
+            <a:spLocks xmlns:a="http://schemas.openxmlformats.org/drawingml/2006/main" noGrp="1"/>
+          </p:cNvSpPr>
+          <p:nvPr/>
+        </p:nvSpPr>
+        <p:spPr>
+          <a:xfrm xmlns:a="http://schemas.openxmlformats.org/drawingml/2006/main">
+            <a:off x="6134100" y="2571750"/>
+            <a:ext cx="1238250" cy="781050"/>
           </a:xfrm>
           <a:prstGeom xmlns:a="http://schemas.openxmlformats.org/drawingml/2006/main" prst="rect">
             <a:avLst/>
@@ -9116,22 +9369,22 @@
       </p:sp>
       <p:sp>
         <p:nvSpPr>
-          <p:cNvPr id="13" name="">
-            <a:extLst xmlns:a="http://schemas.openxmlformats.org/drawingml/2006/main">
-              <a:ext uri="{FF2B5EF4-FFF2-40B4-BE49-F238E27FC236}">
-                <a16:creationId xmlns:a16="http://schemas.microsoft.com/office/drawing/2014/main" id="{EFE800E6-B53D-4123-AAE9-614270BEE3A2}"/>
-              </a:ext>
-            </a:extLst>
-          </p:cNvPr>
-          <p:cNvSpPr>
-            <a:spLocks xmlns:a="http://schemas.openxmlformats.org/drawingml/2006/main" noGrp="1"/>
-          </p:cNvSpPr>
-          <p:nvPr/>
-        </p:nvSpPr>
-        <p:spPr>
-          <a:xfrm xmlns:a="http://schemas.openxmlformats.org/drawingml/2006/main">
-            <a:off x="6248400" y="2981325"/>
-            <a:ext cx="1009650" cy="666750"/>
+          <p:cNvPr id="14" name="">
+            <a:extLst xmlns:a="http://schemas.openxmlformats.org/drawingml/2006/main">
+              <a:ext uri="{FF2B5EF4-FFF2-40B4-BE49-F238E27FC236}">
+                <a16:creationId xmlns:a16="http://schemas.microsoft.com/office/drawing/2014/main" id="{44E2B108-DA0C-4113-B579-0231BD6C8C1B}"/>
+              </a:ext>
+            </a:extLst>
+          </p:cNvPr>
+          <p:cNvSpPr>
+            <a:spLocks xmlns:a="http://schemas.openxmlformats.org/drawingml/2006/main" noGrp="1"/>
+          </p:cNvSpPr>
+          <p:nvPr/>
+        </p:nvSpPr>
+        <p:spPr>
+          <a:xfrm xmlns:a="http://schemas.openxmlformats.org/drawingml/2006/main">
+            <a:off x="6248400" y="2647950"/>
+            <a:ext cx="1009650" cy="628650"/>
           </a:xfrm>
           <a:prstGeom xmlns:a="http://schemas.openxmlformats.org/drawingml/2006/main" prst="rect">
             <a:avLst/>
@@ -9173,22 +9426,112 @@
       </p:sp>
       <p:sp>
         <p:nvSpPr>
-          <p:cNvPr id="14" name="">
-            <a:extLst xmlns:a="http://schemas.openxmlformats.org/drawingml/2006/main">
-              <a:ext uri="{FF2B5EF4-FFF2-40B4-BE49-F238E27FC236}">
-                <a16:creationId xmlns:a16="http://schemas.microsoft.com/office/drawing/2014/main" id="{15B2D5D3-2B1E-40C2-A3C0-A4839DC97253}"/>
-              </a:ext>
-            </a:extLst>
-          </p:cNvPr>
-          <p:cNvSpPr>
-            <a:spLocks xmlns:a="http://schemas.openxmlformats.org/drawingml/2006/main" noGrp="1"/>
-          </p:cNvSpPr>
-          <p:nvPr/>
-        </p:nvSpPr>
-        <p:spPr>
-          <a:xfrm xmlns:a="http://schemas.openxmlformats.org/drawingml/2006/main">
-            <a:off x="7515225" y="2905125"/>
-            <a:ext cx="1238250" cy="819150"/>
+          <p:cNvPr id="15" name="">
+            <a:extLst xmlns:a="http://schemas.openxmlformats.org/drawingml/2006/main">
+              <a:ext uri="{FF2B5EF4-FFF2-40B4-BE49-F238E27FC236}">
+                <a16:creationId xmlns:a16="http://schemas.microsoft.com/office/drawing/2014/main" id="{DF7B84D0-9941-45E3-A347-4C4DFD58162C}"/>
+              </a:ext>
+            </a:extLst>
+          </p:cNvPr>
+          <p:cNvSpPr>
+            <a:spLocks xmlns:a="http://schemas.openxmlformats.org/drawingml/2006/main" noGrp="1"/>
+          </p:cNvSpPr>
+          <p:nvPr/>
+        </p:nvSpPr>
+        <p:spPr>
+          <a:xfrm xmlns:a="http://schemas.openxmlformats.org/drawingml/2006/main">
+            <a:off x="7515225" y="2571750"/>
+            <a:ext cx="1238250" cy="781050"/>
+          </a:xfrm>
+          <a:prstGeom xmlns:a="http://schemas.openxmlformats.org/drawingml/2006/main" prst="rect">
+            <a:avLst/>
+          </a:prstGeom>
+          <a:solidFill xmlns:a="http://schemas.openxmlformats.org/drawingml/2006/main">
+            <a:srgbClr val="141C26"/>
+          </a:solidFill>
+          <a:ln xmlns:a="http://schemas.openxmlformats.org/drawingml/2006/main" w="14288">
+            <a:solidFill>
+              <a:srgbClr val="F5B61C"/>
+            </a:solidFill>
+            <a:prstDash val="solid"/>
+          </a:ln>
+        </p:spPr>
+      </p:sp>
+      <p:sp>
+        <p:nvSpPr>
+          <p:cNvPr id="16" name="">
+            <a:extLst xmlns:a="http://schemas.openxmlformats.org/drawingml/2006/main">
+              <a:ext uri="{FF2B5EF4-FFF2-40B4-BE49-F238E27FC236}">
+                <a16:creationId xmlns:a16="http://schemas.microsoft.com/office/drawing/2014/main" id="{6849740C-EE17-4226-9D5D-DE11B9F2DF32}"/>
+              </a:ext>
+            </a:extLst>
+          </p:cNvPr>
+          <p:cNvSpPr>
+            <a:spLocks xmlns:a="http://schemas.openxmlformats.org/drawingml/2006/main" noGrp="1"/>
+          </p:cNvSpPr>
+          <p:nvPr/>
+        </p:nvSpPr>
+        <p:spPr>
+          <a:xfrm xmlns:a="http://schemas.openxmlformats.org/drawingml/2006/main">
+            <a:off x="7629525" y="2647950"/>
+            <a:ext cx="1009650" cy="628650"/>
+          </a:xfrm>
+          <a:prstGeom xmlns:a="http://schemas.openxmlformats.org/drawingml/2006/main" prst="rect">
+            <a:avLst/>
+          </a:prstGeom>
+          <a:noFill xmlns:a="http://schemas.openxmlformats.org/drawingml/2006/main"/>
+          <a:ln xmlns:a="http://schemas.openxmlformats.org/drawingml/2006/main" w="0">
+            <a:noFill/>
+          </a:ln>
+        </p:spPr>
+        <p:txBody>
+          <a:bodyPr xmlns:a="http://schemas.openxmlformats.org/drawingml/2006/main" wrap="square" lIns="0" tIns="0" rIns="0" bIns="0" anchor="ctr">
+            <a:noAutofit/>
+          </a:bodyPr>
+          <a:lstStyle xmlns:a="http://schemas.openxmlformats.org/drawingml/2006/main"/>
+          <a:p xmlns:a="http://schemas.openxmlformats.org/drawingml/2006/main">
+            <a:pPr algn="ctr">
+              <a:defRPr sz="1425" b="1">
+                <a:solidFill>
+                  <a:srgbClr val="F4F7FA"/>
+                </a:solidFill>
+                <a:latin typeface="DejaVu Sans"/>
+                <a:ea typeface="DejaVu Sans"/>
+                <a:cs typeface="DejaVu Sans"/>
+              </a:defRPr>
+            </a:pPr>
+            <a:r>
+              <a:rPr sz="1425" b="1">
+                <a:solidFill>
+                  <a:srgbClr val="F4F7FA"/>
+                </a:solidFill>
+                <a:latin typeface="DejaVu Sans"/>
+                <a:ea typeface="DejaVu Sans"/>
+                <a:cs typeface="DejaVu Sans"/>
+              </a:rPr>
+              <a:t>Integrate</a:t>
+            </a:r>
+          </a:p>
+        </p:txBody>
+      </p:sp>
+      <p:sp>
+        <p:nvSpPr>
+          <p:cNvPr id="17" name="">
+            <a:extLst xmlns:a="http://schemas.openxmlformats.org/drawingml/2006/main">
+              <a:ext uri="{FF2B5EF4-FFF2-40B4-BE49-F238E27FC236}">
+                <a16:creationId xmlns:a16="http://schemas.microsoft.com/office/drawing/2014/main" id="{09898B43-E597-4899-A4B2-6FAD9C43E43D}"/>
+              </a:ext>
+            </a:extLst>
+          </p:cNvPr>
+          <p:cNvSpPr>
+            <a:spLocks xmlns:a="http://schemas.openxmlformats.org/drawingml/2006/main" noGrp="1"/>
+          </p:cNvSpPr>
+          <p:nvPr/>
+        </p:nvSpPr>
+        <p:spPr>
+          <a:xfrm xmlns:a="http://schemas.openxmlformats.org/drawingml/2006/main">
+            <a:off x="8896350" y="2571750"/>
+            <a:ext cx="1238250" cy="781050"/>
           </a:xfrm>
           <a:prstGeom xmlns:a="http://schemas.openxmlformats.org/drawingml/2006/main" prst="rect">
             <a:avLst/>
@@ -9206,22 +9549,22 @@
       </p:sp>
       <p:sp>
         <p:nvSpPr>
-          <p:cNvPr id="15" name="">
-            <a:extLst xmlns:a="http://schemas.openxmlformats.org/drawingml/2006/main">
-              <a:ext uri="{FF2B5EF4-FFF2-40B4-BE49-F238E27FC236}">
-                <a16:creationId xmlns:a16="http://schemas.microsoft.com/office/drawing/2014/main" id="{14340E6A-7834-4C90-B3E9-00D01469FB8D}"/>
-              </a:ext>
-            </a:extLst>
-          </p:cNvPr>
-          <p:cNvSpPr>
-            <a:spLocks xmlns:a="http://schemas.openxmlformats.org/drawingml/2006/main" noGrp="1"/>
-          </p:cNvSpPr>
-          <p:nvPr/>
-        </p:nvSpPr>
-        <p:spPr>
-          <a:xfrm xmlns:a="http://schemas.openxmlformats.org/drawingml/2006/main">
-            <a:off x="7629525" y="2981325"/>
-            <a:ext cx="1009650" cy="666750"/>
+          <p:cNvPr id="18" name="">
+            <a:extLst xmlns:a="http://schemas.openxmlformats.org/drawingml/2006/main">
+              <a:ext uri="{FF2B5EF4-FFF2-40B4-BE49-F238E27FC236}">
+                <a16:creationId xmlns:a16="http://schemas.microsoft.com/office/drawing/2014/main" id="{3913D50F-6BB5-4240-983B-41984E4FAED2}"/>
+              </a:ext>
+            </a:extLst>
+          </p:cNvPr>
+          <p:cNvSpPr>
+            <a:spLocks xmlns:a="http://schemas.openxmlformats.org/drawingml/2006/main" noGrp="1"/>
+          </p:cNvSpPr>
+          <p:nvPr/>
+        </p:nvSpPr>
+        <p:spPr>
+          <a:xfrm xmlns:a="http://schemas.openxmlformats.org/drawingml/2006/main">
+            <a:off x="9010650" y="2647950"/>
+            <a:ext cx="1009650" cy="628650"/>
           </a:xfrm>
           <a:prstGeom xmlns:a="http://schemas.openxmlformats.org/drawingml/2006/main" prst="rect">
             <a:avLst/>
@@ -9238,47 +9581,47 @@
           <a:lstStyle xmlns:a="http://schemas.openxmlformats.org/drawingml/2006/main"/>
           <a:p xmlns:a="http://schemas.openxmlformats.org/drawingml/2006/main">
             <a:pPr algn="ctr">
-              <a:defRPr sz="1425" b="1">
-                <a:solidFill>
-                  <a:srgbClr val="F4F7FA"/>
-                </a:solidFill>
-                <a:latin typeface="DejaVu Sans"/>
-                <a:ea typeface="DejaVu Sans"/>
-                <a:cs typeface="DejaVu Sans"/>
-              </a:defRPr>
-            </a:pPr>
-            <a:r>
-              <a:rPr sz="1425" b="1">
-                <a:solidFill>
-                  <a:srgbClr val="F4F7FA"/>
-                </a:solidFill>
-                <a:latin typeface="DejaVu Sans"/>
-                <a:ea typeface="DejaVu Sans"/>
-                <a:cs typeface="DejaVu Sans"/>
-              </a:rPr>
-              <a:t>Integrate</a:t>
-            </a:r>
-          </a:p>
-        </p:txBody>
-      </p:sp>
-      <p:sp>
-        <p:nvSpPr>
-          <p:cNvPr id="16" name="">
-            <a:extLst xmlns:a="http://schemas.openxmlformats.org/drawingml/2006/main">
-              <a:ext uri="{FF2B5EF4-FFF2-40B4-BE49-F238E27FC236}">
-                <a16:creationId xmlns:a16="http://schemas.microsoft.com/office/drawing/2014/main" id="{420C5769-8030-4A37-8A21-8669CC1324BE}"/>
-              </a:ext>
-            </a:extLst>
-          </p:cNvPr>
-          <p:cNvSpPr>
-            <a:spLocks xmlns:a="http://schemas.openxmlformats.org/drawingml/2006/main" noGrp="1"/>
-          </p:cNvSpPr>
-          <p:nvPr/>
-        </p:nvSpPr>
-        <p:spPr>
-          <a:xfrm xmlns:a="http://schemas.openxmlformats.org/drawingml/2006/main">
-            <a:off x="8896350" y="2905125"/>
-            <a:ext cx="1238250" cy="819150"/>
+              <a:defRPr sz="1575" b="1">
+                <a:solidFill>
+                  <a:srgbClr val="F4F7FA"/>
+                </a:solidFill>
+                <a:latin typeface="DejaVu Sans"/>
+                <a:ea typeface="DejaVu Sans"/>
+                <a:cs typeface="DejaVu Sans"/>
+              </a:defRPr>
+            </a:pPr>
+            <a:r>
+              <a:rPr sz="1575" b="1">
+                <a:solidFill>
+                  <a:srgbClr val="F4F7FA"/>
+                </a:solidFill>
+                <a:latin typeface="DejaVu Sans"/>
+                <a:ea typeface="DejaVu Sans"/>
+                <a:cs typeface="DejaVu Sans"/>
+              </a:rPr>
+              <a:t>Deploy</a:t>
+            </a:r>
+          </a:p>
+        </p:txBody>
+      </p:sp>
+      <p:sp>
+        <p:nvSpPr>
+          <p:cNvPr id="19" name="">
+            <a:extLst xmlns:a="http://schemas.openxmlformats.org/drawingml/2006/main">
+              <a:ext uri="{FF2B5EF4-FFF2-40B4-BE49-F238E27FC236}">
+                <a16:creationId xmlns:a16="http://schemas.microsoft.com/office/drawing/2014/main" id="{13837FA6-5270-4929-A7B2-42360CBDC23F}"/>
+              </a:ext>
+            </a:extLst>
+          </p:cNvPr>
+          <p:cNvSpPr>
+            <a:spLocks xmlns:a="http://schemas.openxmlformats.org/drawingml/2006/main" noGrp="1"/>
+          </p:cNvSpPr>
+          <p:nvPr/>
+        </p:nvSpPr>
+        <p:spPr>
+          <a:xfrm xmlns:a="http://schemas.openxmlformats.org/drawingml/2006/main">
+            <a:off x="10277475" y="2571750"/>
+            <a:ext cx="1238250" cy="781050"/>
           </a:xfrm>
           <a:prstGeom xmlns:a="http://schemas.openxmlformats.org/drawingml/2006/main" prst="rect">
             <a:avLst/>
@@ -9296,22 +9639,22 @@
       </p:sp>
       <p:sp>
         <p:nvSpPr>
-          <p:cNvPr id="17" name="">
-            <a:extLst xmlns:a="http://schemas.openxmlformats.org/drawingml/2006/main">
-              <a:ext uri="{FF2B5EF4-FFF2-40B4-BE49-F238E27FC236}">
-                <a16:creationId xmlns:a16="http://schemas.microsoft.com/office/drawing/2014/main" id="{F0452E88-4F91-44E9-AFA9-829F0DAD37DC}"/>
-              </a:ext>
-            </a:extLst>
-          </p:cNvPr>
-          <p:cNvSpPr>
-            <a:spLocks xmlns:a="http://schemas.openxmlformats.org/drawingml/2006/main" noGrp="1"/>
-          </p:cNvSpPr>
-          <p:nvPr/>
-        </p:nvSpPr>
-        <p:spPr>
-          <a:xfrm xmlns:a="http://schemas.openxmlformats.org/drawingml/2006/main">
-            <a:off x="9010650" y="2981325"/>
-            <a:ext cx="1009650" cy="666750"/>
+          <p:cNvPr id="20" name="">
+            <a:extLst xmlns:a="http://schemas.openxmlformats.org/drawingml/2006/main">
+              <a:ext uri="{FF2B5EF4-FFF2-40B4-BE49-F238E27FC236}">
+                <a16:creationId xmlns:a16="http://schemas.microsoft.com/office/drawing/2014/main" id="{D0517CA3-D2B0-484D-845D-3F9C86CA03B0}"/>
+              </a:ext>
+            </a:extLst>
+          </p:cNvPr>
+          <p:cNvSpPr>
+            <a:spLocks xmlns:a="http://schemas.openxmlformats.org/drawingml/2006/main" noGrp="1"/>
+          </p:cNvSpPr>
+          <p:nvPr/>
+        </p:nvSpPr>
+        <p:spPr>
+          <a:xfrm xmlns:a="http://schemas.openxmlformats.org/drawingml/2006/main">
+            <a:off x="10391775" y="2647950"/>
+            <a:ext cx="1009650" cy="628650"/>
           </a:xfrm>
           <a:prstGeom xmlns:a="http://schemas.openxmlformats.org/drawingml/2006/main" prst="rect">
             <a:avLst/>
@@ -9346,96 +9689,6 @@
                 <a:ea typeface="DejaVu Sans"/>
                 <a:cs typeface="DejaVu Sans"/>
               </a:rPr>
-              <a:t>Deploy</a:t>
-            </a:r>
-          </a:p>
-        </p:txBody>
-      </p:sp>
-      <p:sp>
-        <p:nvSpPr>
-          <p:cNvPr id="18" name="">
-            <a:extLst xmlns:a="http://schemas.openxmlformats.org/drawingml/2006/main">
-              <a:ext uri="{FF2B5EF4-FFF2-40B4-BE49-F238E27FC236}">
-                <a16:creationId xmlns:a16="http://schemas.microsoft.com/office/drawing/2014/main" id="{DCD744FA-1410-465D-9823-86FABF89087F}"/>
-              </a:ext>
-            </a:extLst>
-          </p:cNvPr>
-          <p:cNvSpPr>
-            <a:spLocks xmlns:a="http://schemas.openxmlformats.org/drawingml/2006/main" noGrp="1"/>
-          </p:cNvSpPr>
-          <p:nvPr/>
-        </p:nvSpPr>
-        <p:spPr>
-          <a:xfrm xmlns:a="http://schemas.openxmlformats.org/drawingml/2006/main">
-            <a:off x="10277475" y="2905125"/>
-            <a:ext cx="1238250" cy="819150"/>
-          </a:xfrm>
-          <a:prstGeom xmlns:a="http://schemas.openxmlformats.org/drawingml/2006/main" prst="rect">
-            <a:avLst/>
-          </a:prstGeom>
-          <a:solidFill xmlns:a="http://schemas.openxmlformats.org/drawingml/2006/main">
-            <a:srgbClr val="141C26"/>
-          </a:solidFill>
-          <a:ln xmlns:a="http://schemas.openxmlformats.org/drawingml/2006/main" w="14288">
-            <a:solidFill>
-              <a:srgbClr val="344454"/>
-            </a:solidFill>
-            <a:prstDash val="solid"/>
-          </a:ln>
-        </p:spPr>
-      </p:sp>
-      <p:sp>
-        <p:nvSpPr>
-          <p:cNvPr id="19" name="">
-            <a:extLst xmlns:a="http://schemas.openxmlformats.org/drawingml/2006/main">
-              <a:ext uri="{FF2B5EF4-FFF2-40B4-BE49-F238E27FC236}">
-                <a16:creationId xmlns:a16="http://schemas.microsoft.com/office/drawing/2014/main" id="{7ACB06A9-14AB-499A-BF02-C24AD021EF66}"/>
-              </a:ext>
-            </a:extLst>
-          </p:cNvPr>
-          <p:cNvSpPr>
-            <a:spLocks xmlns:a="http://schemas.openxmlformats.org/drawingml/2006/main" noGrp="1"/>
-          </p:cNvSpPr>
-          <p:nvPr/>
-        </p:nvSpPr>
-        <p:spPr>
-          <a:xfrm xmlns:a="http://schemas.openxmlformats.org/drawingml/2006/main">
-            <a:off x="10391775" y="2981325"/>
-            <a:ext cx="1009650" cy="666750"/>
-          </a:xfrm>
-          <a:prstGeom xmlns:a="http://schemas.openxmlformats.org/drawingml/2006/main" prst="rect">
-            <a:avLst/>
-          </a:prstGeom>
-          <a:noFill xmlns:a="http://schemas.openxmlformats.org/drawingml/2006/main"/>
-          <a:ln xmlns:a="http://schemas.openxmlformats.org/drawingml/2006/main" w="0">
-            <a:noFill/>
-          </a:ln>
-        </p:spPr>
-        <p:txBody>
-          <a:bodyPr xmlns:a="http://schemas.openxmlformats.org/drawingml/2006/main" wrap="square" lIns="0" tIns="0" rIns="0" bIns="0" anchor="ctr">
-            <a:noAutofit/>
-          </a:bodyPr>
-          <a:lstStyle xmlns:a="http://schemas.openxmlformats.org/drawingml/2006/main"/>
-          <a:p xmlns:a="http://schemas.openxmlformats.org/drawingml/2006/main">
-            <a:pPr algn="ctr">
-              <a:defRPr sz="1575" b="1">
-                <a:solidFill>
-                  <a:srgbClr val="F4F7FA"/>
-                </a:solidFill>
-                <a:latin typeface="DejaVu Sans"/>
-                <a:ea typeface="DejaVu Sans"/>
-                <a:cs typeface="DejaVu Sans"/>
-              </a:defRPr>
-            </a:pPr>
-            <a:r>
-              <a:rPr sz="1575" b="1">
-                <a:solidFill>
-                  <a:srgbClr val="F4F7FA"/>
-                </a:solidFill>
-                <a:latin typeface="DejaVu Sans"/>
-                <a:ea typeface="DejaVu Sans"/>
-                <a:cs typeface="DejaVu Sans"/>
-              </a:rPr>
               <a:t>Operate</a:t>
             </a:r>
           </a:p>
@@ -9443,16 +9696,16 @@
       </p:sp>
       <p:cxnSp>
         <p:nvCxnSpPr>
-          <p:cNvPr id="54" name=""/>
+          <p:cNvPr id="64" name=""/>
           <p:cNvCxnSpPr>
-            <a:stCxn xmlns:a="http://schemas.openxmlformats.org/drawingml/2006/main" id="4" idx="3"/>
-            <a:endCxn xmlns:a="http://schemas.openxmlformats.org/drawingml/2006/main" id="6" idx="1"/>
+            <a:stCxn xmlns:a="http://schemas.openxmlformats.org/drawingml/2006/main" id="5" idx="3"/>
+            <a:endCxn xmlns:a="http://schemas.openxmlformats.org/drawingml/2006/main" id="7" idx="1"/>
           </p:cNvCxnSpPr>
           <p:nvPr/>
         </p:nvCxnSpPr>
         <p:spPr>
           <a:xfrm xmlns:a="http://schemas.openxmlformats.org/drawingml/2006/main">
-            <a:off x="1847850" y="3314700"/>
+            <a:off x="1847850" y="2962275"/>
             <a:ext cx="142875" cy="0"/>
           </a:xfrm>
           <a:prstGeom xmlns:a="http://schemas.openxmlformats.org/drawingml/2006/main" prst="straightConnector1">
@@ -9469,16 +9722,16 @@
       </p:cxnSp>
       <p:cxnSp>
         <p:nvCxnSpPr>
-          <p:cNvPr id="55" name=""/>
+          <p:cNvPr id="65" name=""/>
           <p:cNvCxnSpPr>
-            <a:stCxn xmlns:a="http://schemas.openxmlformats.org/drawingml/2006/main" id="6" idx="3"/>
-            <a:endCxn xmlns:a="http://schemas.openxmlformats.org/drawingml/2006/main" id="8" idx="1"/>
+            <a:stCxn xmlns:a="http://schemas.openxmlformats.org/drawingml/2006/main" id="7" idx="3"/>
+            <a:endCxn xmlns:a="http://schemas.openxmlformats.org/drawingml/2006/main" id="9" idx="1"/>
           </p:cNvCxnSpPr>
           <p:nvPr/>
         </p:nvCxnSpPr>
         <p:spPr>
           <a:xfrm xmlns:a="http://schemas.openxmlformats.org/drawingml/2006/main">
-            <a:off x="3228975" y="3314700"/>
+            <a:off x="3228975" y="2962275"/>
             <a:ext cx="142875" cy="0"/>
           </a:xfrm>
           <a:prstGeom xmlns:a="http://schemas.openxmlformats.org/drawingml/2006/main" prst="straightConnector1">
@@ -9495,16 +9748,16 @@
       </p:cxnSp>
       <p:cxnSp>
         <p:nvCxnSpPr>
-          <p:cNvPr id="56" name=""/>
+          <p:cNvPr id="66" name=""/>
           <p:cNvCxnSpPr>
-            <a:stCxn xmlns:a="http://schemas.openxmlformats.org/drawingml/2006/main" id="8" idx="3"/>
-            <a:endCxn xmlns:a="http://schemas.openxmlformats.org/drawingml/2006/main" id="10" idx="1"/>
+            <a:stCxn xmlns:a="http://schemas.openxmlformats.org/drawingml/2006/main" id="9" idx="3"/>
+            <a:endCxn xmlns:a="http://schemas.openxmlformats.org/drawingml/2006/main" id="11" idx="1"/>
           </p:cNvCxnSpPr>
           <p:nvPr/>
         </p:nvCxnSpPr>
         <p:spPr>
           <a:xfrm xmlns:a="http://schemas.openxmlformats.org/drawingml/2006/main">
-            <a:off x="4610100" y="3314700"/>
+            <a:off x="4610100" y="2962275"/>
             <a:ext cx="142875" cy="0"/>
           </a:xfrm>
           <a:prstGeom xmlns:a="http://schemas.openxmlformats.org/drawingml/2006/main" prst="straightConnector1">
@@ -9521,16 +9774,16 @@
       </p:cxnSp>
       <p:cxnSp>
         <p:nvCxnSpPr>
-          <p:cNvPr id="57" name=""/>
+          <p:cNvPr id="67" name=""/>
           <p:cNvCxnSpPr>
-            <a:stCxn xmlns:a="http://schemas.openxmlformats.org/drawingml/2006/main" id="10" idx="3"/>
-            <a:endCxn xmlns:a="http://schemas.openxmlformats.org/drawingml/2006/main" id="12" idx="1"/>
+            <a:stCxn xmlns:a="http://schemas.openxmlformats.org/drawingml/2006/main" id="11" idx="3"/>
+            <a:endCxn xmlns:a="http://schemas.openxmlformats.org/drawingml/2006/main" id="13" idx="1"/>
           </p:cNvCxnSpPr>
           <p:nvPr/>
         </p:nvCxnSpPr>
         <p:spPr>
           <a:xfrm xmlns:a="http://schemas.openxmlformats.org/drawingml/2006/main">
-            <a:off x="5991225" y="3314700"/>
+            <a:off x="5991225" y="2962275"/>
             <a:ext cx="142875" cy="0"/>
           </a:xfrm>
           <a:prstGeom xmlns:a="http://schemas.openxmlformats.org/drawingml/2006/main" prst="straightConnector1">
@@ -9547,16 +9800,16 @@
       </p:cxnSp>
       <p:cxnSp>
         <p:nvCxnSpPr>
-          <p:cNvPr id="58" name=""/>
+          <p:cNvPr id="68" name=""/>
           <p:cNvCxnSpPr>
-            <a:stCxn xmlns:a="http://schemas.openxmlformats.org/drawingml/2006/main" id="12" idx="3"/>
-            <a:endCxn xmlns:a="http://schemas.openxmlformats.org/drawingml/2006/main" id="14" idx="1"/>
+            <a:stCxn xmlns:a="http://schemas.openxmlformats.org/drawingml/2006/main" id="13" idx="3"/>
+            <a:endCxn xmlns:a="http://schemas.openxmlformats.org/drawingml/2006/main" id="15" idx="1"/>
           </p:cNvCxnSpPr>
           <p:nvPr/>
         </p:nvCxnSpPr>
         <p:spPr>
           <a:xfrm xmlns:a="http://schemas.openxmlformats.org/drawingml/2006/main">
-            <a:off x="7372350" y="3314700"/>
+            <a:off x="7372350" y="2962275"/>
             <a:ext cx="142875" cy="0"/>
           </a:xfrm>
           <a:prstGeom xmlns:a="http://schemas.openxmlformats.org/drawingml/2006/main" prst="straightConnector1">
@@ -9573,16 +9826,16 @@
       </p:cxnSp>
       <p:cxnSp>
         <p:nvCxnSpPr>
-          <p:cNvPr id="59" name=""/>
+          <p:cNvPr id="69" name=""/>
           <p:cNvCxnSpPr>
-            <a:stCxn xmlns:a="http://schemas.openxmlformats.org/drawingml/2006/main" id="14" idx="3"/>
-            <a:endCxn xmlns:a="http://schemas.openxmlformats.org/drawingml/2006/main" id="16" idx="1"/>
+            <a:stCxn xmlns:a="http://schemas.openxmlformats.org/drawingml/2006/main" id="15" idx="3"/>
+            <a:endCxn xmlns:a="http://schemas.openxmlformats.org/drawingml/2006/main" id="17" idx="1"/>
           </p:cNvCxnSpPr>
           <p:nvPr/>
         </p:nvCxnSpPr>
         <p:spPr>
           <a:xfrm xmlns:a="http://schemas.openxmlformats.org/drawingml/2006/main">
-            <a:off x="8753475" y="3314700"/>
+            <a:off x="8753475" y="2962275"/>
             <a:ext cx="142875" cy="0"/>
           </a:xfrm>
           <a:prstGeom xmlns:a="http://schemas.openxmlformats.org/drawingml/2006/main" prst="straightConnector1">
@@ -9599,16 +9852,16 @@
       </p:cxnSp>
       <p:cxnSp>
         <p:nvCxnSpPr>
-          <p:cNvPr id="60" name=""/>
+          <p:cNvPr id="70" name=""/>
           <p:cNvCxnSpPr>
-            <a:stCxn xmlns:a="http://schemas.openxmlformats.org/drawingml/2006/main" id="16" idx="3"/>
-            <a:endCxn xmlns:a="http://schemas.openxmlformats.org/drawingml/2006/main" id="18" idx="1"/>
+            <a:stCxn xmlns:a="http://schemas.openxmlformats.org/drawingml/2006/main" id="17" idx="3"/>
+            <a:endCxn xmlns:a="http://schemas.openxmlformats.org/drawingml/2006/main" id="19" idx="1"/>
           </p:cNvCxnSpPr>
           <p:nvPr/>
         </p:nvCxnSpPr>
         <p:spPr>
           <a:xfrm xmlns:a="http://schemas.openxmlformats.org/drawingml/2006/main">
-            <a:off x="10134600" y="3314700"/>
+            <a:off x="10134600" y="2962275"/>
             <a:ext cx="142875" cy="0"/>
           </a:xfrm>
           <a:prstGeom xmlns:a="http://schemas.openxmlformats.org/drawingml/2006/main" prst="straightConnector1">
@@ -9625,22 +9878,22 @@
       </p:cxnSp>
       <p:sp>
         <p:nvSpPr>
-          <p:cNvPr id="27" name="">
-            <a:extLst xmlns:a="http://schemas.openxmlformats.org/drawingml/2006/main">
-              <a:ext uri="{FF2B5EF4-FFF2-40B4-BE49-F238E27FC236}">
-                <a16:creationId xmlns:a16="http://schemas.microsoft.com/office/drawing/2014/main" id="{4B291C75-3615-446E-8699-69B40CA8FCBC}"/>
-              </a:ext>
-            </a:extLst>
-          </p:cNvPr>
-          <p:cNvSpPr>
-            <a:spLocks xmlns:a="http://schemas.openxmlformats.org/drawingml/2006/main" noGrp="1"/>
-          </p:cNvSpPr>
-          <p:nvPr/>
-        </p:nvSpPr>
-        <p:spPr>
-          <a:xfrm xmlns:a="http://schemas.openxmlformats.org/drawingml/2006/main">
-            <a:off x="3371850" y="2114550"/>
-            <a:ext cx="1238250" cy="476250"/>
+          <p:cNvPr id="28" name="">
+            <a:extLst xmlns:a="http://schemas.openxmlformats.org/drawingml/2006/main">
+              <a:ext uri="{FF2B5EF4-FFF2-40B4-BE49-F238E27FC236}">
+                <a16:creationId xmlns:a16="http://schemas.microsoft.com/office/drawing/2014/main" id="{B3518A78-C7B4-4442-B1E2-165C7174F85C}"/>
+              </a:ext>
+            </a:extLst>
+          </p:cNvPr>
+          <p:cNvSpPr>
+            <a:spLocks xmlns:a="http://schemas.openxmlformats.org/drawingml/2006/main" noGrp="1"/>
+          </p:cNvSpPr>
+          <p:nvPr/>
+        </p:nvSpPr>
+        <p:spPr>
+          <a:xfrm xmlns:a="http://schemas.openxmlformats.org/drawingml/2006/main">
+            <a:off x="609600" y="2143125"/>
+            <a:ext cx="1238250" cy="304800"/>
           </a:xfrm>
           <a:prstGeom xmlns:a="http://schemas.openxmlformats.org/drawingml/2006/main" prst="rect">
             <a:avLst/>
@@ -9657,7 +9910,406 @@
           <a:lstStyle xmlns:a="http://schemas.openxmlformats.org/drawingml/2006/main"/>
           <a:p xmlns:a="http://schemas.openxmlformats.org/drawingml/2006/main">
             <a:pPr algn="ctr">
-              <a:defRPr sz="3000" b="1">
+              <a:defRPr sz="1875" b="1">
+                <a:solidFill>
+                  <a:srgbClr val="F5B61C"/>
+                </a:solidFill>
+                <a:latin typeface="DejaVu Sans"/>
+                <a:ea typeface="DejaVu Sans"/>
+                <a:cs typeface="DejaVu Sans"/>
+              </a:defRPr>
+            </a:pPr>
+            <a:r>
+              <a:rPr sz="1875" b="1">
+                <a:solidFill>
+                  <a:srgbClr val="F5B61C"/>
+                </a:solidFill>
+                <a:latin typeface="DejaVu Sans"/>
+                <a:ea typeface="DejaVu Sans"/>
+                <a:cs typeface="DejaVu Sans"/>
+              </a:rPr>
+              <a:t>?</a:t>
+            </a:r>
+          </a:p>
+        </p:txBody>
+      </p:sp>
+      <p:sp>
+        <p:nvSpPr>
+          <p:cNvPr id="29" name="">
+            <a:extLst xmlns:a="http://schemas.openxmlformats.org/drawingml/2006/main">
+              <a:ext uri="{FF2B5EF4-FFF2-40B4-BE49-F238E27FC236}">
+                <a16:creationId xmlns:a16="http://schemas.microsoft.com/office/drawing/2014/main" id="{FA6B14D6-F970-464C-A366-D4E67480BD09}"/>
+              </a:ext>
+            </a:extLst>
+          </p:cNvPr>
+          <p:cNvSpPr>
+            <a:spLocks xmlns:a="http://schemas.openxmlformats.org/drawingml/2006/main" noGrp="1"/>
+          </p:cNvSpPr>
+          <p:nvPr/>
+        </p:nvSpPr>
+        <p:spPr>
+          <a:xfrm xmlns:a="http://schemas.openxmlformats.org/drawingml/2006/main">
+            <a:off x="1990725" y="2143125"/>
+            <a:ext cx="1238250" cy="304800"/>
+          </a:xfrm>
+          <a:prstGeom xmlns:a="http://schemas.openxmlformats.org/drawingml/2006/main" prst="rect">
+            <a:avLst/>
+          </a:prstGeom>
+          <a:noFill xmlns:a="http://schemas.openxmlformats.org/drawingml/2006/main"/>
+          <a:ln xmlns:a="http://schemas.openxmlformats.org/drawingml/2006/main" w="0">
+            <a:noFill/>
+          </a:ln>
+        </p:spPr>
+        <p:txBody>
+          <a:bodyPr xmlns:a="http://schemas.openxmlformats.org/drawingml/2006/main" wrap="square" lIns="0" tIns="0" rIns="0" bIns="0" anchor="ctr">
+            <a:noAutofit/>
+          </a:bodyPr>
+          <a:lstStyle xmlns:a="http://schemas.openxmlformats.org/drawingml/2006/main"/>
+          <a:p xmlns:a="http://schemas.openxmlformats.org/drawingml/2006/main">
+            <a:pPr algn="ctr">
+              <a:defRPr sz="1875" b="1">
+                <a:solidFill>
+                  <a:srgbClr val="F5B61C"/>
+                </a:solidFill>
+                <a:latin typeface="DejaVu Sans"/>
+                <a:ea typeface="DejaVu Sans"/>
+                <a:cs typeface="DejaVu Sans"/>
+              </a:defRPr>
+            </a:pPr>
+            <a:r>
+              <a:rPr sz="1875" b="1">
+                <a:solidFill>
+                  <a:srgbClr val="F5B61C"/>
+                </a:solidFill>
+                <a:latin typeface="DejaVu Sans"/>
+                <a:ea typeface="DejaVu Sans"/>
+                <a:cs typeface="DejaVu Sans"/>
+              </a:rPr>
+              <a:t>?</a:t>
+            </a:r>
+          </a:p>
+        </p:txBody>
+      </p:sp>
+      <p:sp>
+        <p:nvSpPr>
+          <p:cNvPr id="30" name="">
+            <a:extLst xmlns:a="http://schemas.openxmlformats.org/drawingml/2006/main">
+              <a:ext uri="{FF2B5EF4-FFF2-40B4-BE49-F238E27FC236}">
+                <a16:creationId xmlns:a16="http://schemas.microsoft.com/office/drawing/2014/main" id="{D6D5C201-5591-40D1-9833-0C5937363B4D}"/>
+              </a:ext>
+            </a:extLst>
+          </p:cNvPr>
+          <p:cNvSpPr>
+            <a:spLocks xmlns:a="http://schemas.openxmlformats.org/drawingml/2006/main" noGrp="1"/>
+          </p:cNvSpPr>
+          <p:nvPr/>
+        </p:nvSpPr>
+        <p:spPr>
+          <a:xfrm xmlns:a="http://schemas.openxmlformats.org/drawingml/2006/main">
+            <a:off x="4752975" y="2143125"/>
+            <a:ext cx="1238250" cy="304800"/>
+          </a:xfrm>
+          <a:prstGeom xmlns:a="http://schemas.openxmlformats.org/drawingml/2006/main" prst="rect">
+            <a:avLst/>
+          </a:prstGeom>
+          <a:noFill xmlns:a="http://schemas.openxmlformats.org/drawingml/2006/main"/>
+          <a:ln xmlns:a="http://schemas.openxmlformats.org/drawingml/2006/main" w="0">
+            <a:noFill/>
+          </a:ln>
+        </p:spPr>
+        <p:txBody>
+          <a:bodyPr xmlns:a="http://schemas.openxmlformats.org/drawingml/2006/main" wrap="square" lIns="0" tIns="0" rIns="0" bIns="0" anchor="ctr">
+            <a:noAutofit/>
+          </a:bodyPr>
+          <a:lstStyle xmlns:a="http://schemas.openxmlformats.org/drawingml/2006/main"/>
+          <a:p xmlns:a="http://schemas.openxmlformats.org/drawingml/2006/main">
+            <a:pPr algn="ctr">
+              <a:defRPr sz="1875" b="1">
+                <a:solidFill>
+                  <a:srgbClr val="F5B61C"/>
+                </a:solidFill>
+                <a:latin typeface="DejaVu Sans"/>
+                <a:ea typeface="DejaVu Sans"/>
+                <a:cs typeface="DejaVu Sans"/>
+              </a:defRPr>
+            </a:pPr>
+            <a:r>
+              <a:rPr sz="1875" b="1">
+                <a:solidFill>
+                  <a:srgbClr val="F5B61C"/>
+                </a:solidFill>
+                <a:latin typeface="DejaVu Sans"/>
+                <a:ea typeface="DejaVu Sans"/>
+                <a:cs typeface="DejaVu Sans"/>
+              </a:rPr>
+              <a:t>?</a:t>
+            </a:r>
+          </a:p>
+        </p:txBody>
+      </p:sp>
+      <p:sp>
+        <p:nvSpPr>
+          <p:cNvPr id="31" name="">
+            <a:extLst xmlns:a="http://schemas.openxmlformats.org/drawingml/2006/main">
+              <a:ext uri="{FF2B5EF4-FFF2-40B4-BE49-F238E27FC236}">
+                <a16:creationId xmlns:a16="http://schemas.microsoft.com/office/drawing/2014/main" id="{E5BBF0CA-4D24-4AAF-A57F-376AF593924A}"/>
+              </a:ext>
+            </a:extLst>
+          </p:cNvPr>
+          <p:cNvSpPr>
+            <a:spLocks xmlns:a="http://schemas.openxmlformats.org/drawingml/2006/main" noGrp="1"/>
+          </p:cNvSpPr>
+          <p:nvPr/>
+        </p:nvSpPr>
+        <p:spPr>
+          <a:xfrm xmlns:a="http://schemas.openxmlformats.org/drawingml/2006/main">
+            <a:off x="6134100" y="2143125"/>
+            <a:ext cx="1238250" cy="304800"/>
+          </a:xfrm>
+          <a:prstGeom xmlns:a="http://schemas.openxmlformats.org/drawingml/2006/main" prst="rect">
+            <a:avLst/>
+          </a:prstGeom>
+          <a:noFill xmlns:a="http://schemas.openxmlformats.org/drawingml/2006/main"/>
+          <a:ln xmlns:a="http://schemas.openxmlformats.org/drawingml/2006/main" w="0">
+            <a:noFill/>
+          </a:ln>
+        </p:spPr>
+        <p:txBody>
+          <a:bodyPr xmlns:a="http://schemas.openxmlformats.org/drawingml/2006/main" wrap="square" lIns="0" tIns="0" rIns="0" bIns="0" anchor="ctr">
+            <a:noAutofit/>
+          </a:bodyPr>
+          <a:lstStyle xmlns:a="http://schemas.openxmlformats.org/drawingml/2006/main"/>
+          <a:p xmlns:a="http://schemas.openxmlformats.org/drawingml/2006/main">
+            <a:pPr algn="ctr">
+              <a:defRPr sz="1875" b="1">
+                <a:solidFill>
+                  <a:srgbClr val="F5B61C"/>
+                </a:solidFill>
+                <a:latin typeface="DejaVu Sans"/>
+                <a:ea typeface="DejaVu Sans"/>
+                <a:cs typeface="DejaVu Sans"/>
+              </a:defRPr>
+            </a:pPr>
+            <a:r>
+              <a:rPr sz="1875" b="1">
+                <a:solidFill>
+                  <a:srgbClr val="F5B61C"/>
+                </a:solidFill>
+                <a:latin typeface="DejaVu Sans"/>
+                <a:ea typeface="DejaVu Sans"/>
+                <a:cs typeface="DejaVu Sans"/>
+              </a:rPr>
+              <a:t>?</a:t>
+            </a:r>
+          </a:p>
+        </p:txBody>
+      </p:sp>
+      <p:sp>
+        <p:nvSpPr>
+          <p:cNvPr id="32" name="">
+            <a:extLst xmlns:a="http://schemas.openxmlformats.org/drawingml/2006/main">
+              <a:ext uri="{FF2B5EF4-FFF2-40B4-BE49-F238E27FC236}">
+                <a16:creationId xmlns:a16="http://schemas.microsoft.com/office/drawing/2014/main" id="{B6C46C04-BEFA-4843-8751-CA47D18C569C}"/>
+              </a:ext>
+            </a:extLst>
+          </p:cNvPr>
+          <p:cNvSpPr>
+            <a:spLocks xmlns:a="http://schemas.openxmlformats.org/drawingml/2006/main" noGrp="1"/>
+          </p:cNvSpPr>
+          <p:nvPr/>
+        </p:nvSpPr>
+        <p:spPr>
+          <a:xfrm xmlns:a="http://schemas.openxmlformats.org/drawingml/2006/main">
+            <a:off x="7515225" y="2143125"/>
+            <a:ext cx="1238250" cy="304800"/>
+          </a:xfrm>
+          <a:prstGeom xmlns:a="http://schemas.openxmlformats.org/drawingml/2006/main" prst="rect">
+            <a:avLst/>
+          </a:prstGeom>
+          <a:noFill xmlns:a="http://schemas.openxmlformats.org/drawingml/2006/main"/>
+          <a:ln xmlns:a="http://schemas.openxmlformats.org/drawingml/2006/main" w="0">
+            <a:noFill/>
+          </a:ln>
+        </p:spPr>
+        <p:txBody>
+          <a:bodyPr xmlns:a="http://schemas.openxmlformats.org/drawingml/2006/main" wrap="square" lIns="0" tIns="0" rIns="0" bIns="0" anchor="ctr">
+            <a:noAutofit/>
+          </a:bodyPr>
+          <a:lstStyle xmlns:a="http://schemas.openxmlformats.org/drawingml/2006/main"/>
+          <a:p xmlns:a="http://schemas.openxmlformats.org/drawingml/2006/main">
+            <a:pPr algn="ctr">
+              <a:defRPr sz="1875" b="1">
+                <a:solidFill>
+                  <a:srgbClr val="F5B61C"/>
+                </a:solidFill>
+                <a:latin typeface="DejaVu Sans"/>
+                <a:ea typeface="DejaVu Sans"/>
+                <a:cs typeface="DejaVu Sans"/>
+              </a:defRPr>
+            </a:pPr>
+            <a:r>
+              <a:rPr sz="1875" b="1">
+                <a:solidFill>
+                  <a:srgbClr val="F5B61C"/>
+                </a:solidFill>
+                <a:latin typeface="DejaVu Sans"/>
+                <a:ea typeface="DejaVu Sans"/>
+                <a:cs typeface="DejaVu Sans"/>
+              </a:rPr>
+              <a:t>?</a:t>
+            </a:r>
+          </a:p>
+        </p:txBody>
+      </p:sp>
+      <p:sp>
+        <p:nvSpPr>
+          <p:cNvPr id="33" name="">
+            <a:extLst xmlns:a="http://schemas.openxmlformats.org/drawingml/2006/main">
+              <a:ext uri="{FF2B5EF4-FFF2-40B4-BE49-F238E27FC236}">
+                <a16:creationId xmlns:a16="http://schemas.microsoft.com/office/drawing/2014/main" id="{89C91AAE-4103-415A-B63C-9F65848EEF99}"/>
+              </a:ext>
+            </a:extLst>
+          </p:cNvPr>
+          <p:cNvSpPr>
+            <a:spLocks xmlns:a="http://schemas.openxmlformats.org/drawingml/2006/main" noGrp="1"/>
+          </p:cNvSpPr>
+          <p:nvPr/>
+        </p:nvSpPr>
+        <p:spPr>
+          <a:xfrm xmlns:a="http://schemas.openxmlformats.org/drawingml/2006/main">
+            <a:off x="8896350" y="2143125"/>
+            <a:ext cx="1238250" cy="304800"/>
+          </a:xfrm>
+          <a:prstGeom xmlns:a="http://schemas.openxmlformats.org/drawingml/2006/main" prst="rect">
+            <a:avLst/>
+          </a:prstGeom>
+          <a:noFill xmlns:a="http://schemas.openxmlformats.org/drawingml/2006/main"/>
+          <a:ln xmlns:a="http://schemas.openxmlformats.org/drawingml/2006/main" w="0">
+            <a:noFill/>
+          </a:ln>
+        </p:spPr>
+        <p:txBody>
+          <a:bodyPr xmlns:a="http://schemas.openxmlformats.org/drawingml/2006/main" wrap="square" lIns="0" tIns="0" rIns="0" bIns="0" anchor="ctr">
+            <a:noAutofit/>
+          </a:bodyPr>
+          <a:lstStyle xmlns:a="http://schemas.openxmlformats.org/drawingml/2006/main"/>
+          <a:p xmlns:a="http://schemas.openxmlformats.org/drawingml/2006/main">
+            <a:pPr algn="ctr">
+              <a:defRPr sz="1875" b="1">
+                <a:solidFill>
+                  <a:srgbClr val="F5B61C"/>
+                </a:solidFill>
+                <a:latin typeface="DejaVu Sans"/>
+                <a:ea typeface="DejaVu Sans"/>
+                <a:cs typeface="DejaVu Sans"/>
+              </a:defRPr>
+            </a:pPr>
+            <a:r>
+              <a:rPr sz="1875" b="1">
+                <a:solidFill>
+                  <a:srgbClr val="F5B61C"/>
+                </a:solidFill>
+                <a:latin typeface="DejaVu Sans"/>
+                <a:ea typeface="DejaVu Sans"/>
+                <a:cs typeface="DejaVu Sans"/>
+              </a:rPr>
+              <a:t>?</a:t>
+            </a:r>
+          </a:p>
+        </p:txBody>
+      </p:sp>
+      <p:sp>
+        <p:nvSpPr>
+          <p:cNvPr id="34" name="">
+            <a:extLst xmlns:a="http://schemas.openxmlformats.org/drawingml/2006/main">
+              <a:ext uri="{FF2B5EF4-FFF2-40B4-BE49-F238E27FC236}">
+                <a16:creationId xmlns:a16="http://schemas.microsoft.com/office/drawing/2014/main" id="{DA1E79AE-367B-4054-91B9-76D1519141C2}"/>
+              </a:ext>
+            </a:extLst>
+          </p:cNvPr>
+          <p:cNvSpPr>
+            <a:spLocks xmlns:a="http://schemas.openxmlformats.org/drawingml/2006/main" noGrp="1"/>
+          </p:cNvSpPr>
+          <p:nvPr/>
+        </p:nvSpPr>
+        <p:spPr>
+          <a:xfrm xmlns:a="http://schemas.openxmlformats.org/drawingml/2006/main">
+            <a:off x="10277475" y="2143125"/>
+            <a:ext cx="1238250" cy="304800"/>
+          </a:xfrm>
+          <a:prstGeom xmlns:a="http://schemas.openxmlformats.org/drawingml/2006/main" prst="rect">
+            <a:avLst/>
+          </a:prstGeom>
+          <a:noFill xmlns:a="http://schemas.openxmlformats.org/drawingml/2006/main"/>
+          <a:ln xmlns:a="http://schemas.openxmlformats.org/drawingml/2006/main" w="0">
+            <a:noFill/>
+          </a:ln>
+        </p:spPr>
+        <p:txBody>
+          <a:bodyPr xmlns:a="http://schemas.openxmlformats.org/drawingml/2006/main" wrap="square" lIns="0" tIns="0" rIns="0" bIns="0" anchor="ctr">
+            <a:noAutofit/>
+          </a:bodyPr>
+          <a:lstStyle xmlns:a="http://schemas.openxmlformats.org/drawingml/2006/main"/>
+          <a:p xmlns:a="http://schemas.openxmlformats.org/drawingml/2006/main">
+            <a:pPr algn="ctr">
+              <a:defRPr sz="1875" b="1">
+                <a:solidFill>
+                  <a:srgbClr val="F5B61C"/>
+                </a:solidFill>
+                <a:latin typeface="DejaVu Sans"/>
+                <a:ea typeface="DejaVu Sans"/>
+                <a:cs typeface="DejaVu Sans"/>
+              </a:defRPr>
+            </a:pPr>
+            <a:r>
+              <a:rPr sz="1875" b="1">
+                <a:solidFill>
+                  <a:srgbClr val="F5B61C"/>
+                </a:solidFill>
+                <a:latin typeface="DejaVu Sans"/>
+                <a:ea typeface="DejaVu Sans"/>
+                <a:cs typeface="DejaVu Sans"/>
+              </a:rPr>
+              <a:t>?</a:t>
+            </a:r>
+          </a:p>
+        </p:txBody>
+      </p:sp>
+      <p:sp>
+        <p:nvSpPr>
+          <p:cNvPr id="35" name="">
+            <a:extLst xmlns:a="http://schemas.openxmlformats.org/drawingml/2006/main">
+              <a:ext uri="{FF2B5EF4-FFF2-40B4-BE49-F238E27FC236}">
+                <a16:creationId xmlns:a16="http://schemas.microsoft.com/office/drawing/2014/main" id="{FDDDB5B5-9E5F-4C65-A6CC-407E9DD64D0D}"/>
+              </a:ext>
+            </a:extLst>
+          </p:cNvPr>
+          <p:cNvSpPr>
+            <a:spLocks xmlns:a="http://schemas.openxmlformats.org/drawingml/2006/main" noGrp="1"/>
+          </p:cNvSpPr>
+          <p:nvPr/>
+        </p:nvSpPr>
+        <p:spPr>
+          <a:xfrm xmlns:a="http://schemas.openxmlformats.org/drawingml/2006/main">
+            <a:off x="3238500" y="3409950"/>
+            <a:ext cx="1504950" cy="514350"/>
+          </a:xfrm>
+          <a:prstGeom xmlns:a="http://schemas.openxmlformats.org/drawingml/2006/main" prst="rect">
+            <a:avLst/>
+          </a:prstGeom>
+          <a:noFill xmlns:a="http://schemas.openxmlformats.org/drawingml/2006/main"/>
+          <a:ln xmlns:a="http://schemas.openxmlformats.org/drawingml/2006/main" w="0">
+            <a:noFill/>
+          </a:ln>
+        </p:spPr>
+        <p:txBody>
+          <a:bodyPr xmlns:a="http://schemas.openxmlformats.org/drawingml/2006/main" wrap="square" lIns="0" tIns="0" rIns="0" bIns="0" anchor="ctr">
+            <a:noAutofit/>
+          </a:bodyPr>
+          <a:lstStyle xmlns:a="http://schemas.openxmlformats.org/drawingml/2006/main"/>
+          <a:p xmlns:a="http://schemas.openxmlformats.org/drawingml/2006/main">
+            <a:pPr algn="ctr">
+              <a:defRPr sz="1575" b="1">
                 <a:solidFill>
                   <a:srgbClr val="28C7F7"/>
                 </a:solidFill>
@@ -9667,7 +10319,7 @@
               </a:defRPr>
             </a:pPr>
             <a:r>
-              <a:rPr sz="3000" b="1">
+              <a:rPr sz="1575" b="1">
                 <a:solidFill>
                   <a:srgbClr val="28C7F7"/>
                 </a:solidFill>
@@ -9675,46 +10327,69 @@
                 <a:ea typeface="DejaVu Sans"/>
                 <a:cs typeface="DejaVu Sans"/>
               </a:rPr>
-              <a:t>↑↑↑</a:t>
-            </a:r>
-          </a:p>
-        </p:txBody>
-      </p:sp>
-      <p:sp>
-        <p:nvSpPr>
-          <p:cNvPr id="28" name="">
-            <a:extLst xmlns:a="http://schemas.openxmlformats.org/drawingml/2006/main">
-              <a:ext uri="{FF2B5EF4-FFF2-40B4-BE49-F238E27FC236}">
-                <a16:creationId xmlns:a16="http://schemas.microsoft.com/office/drawing/2014/main" id="{EEE26A74-3834-4428-BD37-7242A515297D}"/>
-              </a:ext>
-            </a:extLst>
-          </p:cNvPr>
-          <p:cNvSpPr>
-            <a:spLocks xmlns:a="http://schemas.openxmlformats.org/drawingml/2006/main" noGrp="1"/>
-          </p:cNvSpPr>
-          <p:nvPr/>
-        </p:nvSpPr>
-        <p:spPr>
-          <a:xfrm xmlns:a="http://schemas.openxmlformats.org/drawingml/2006/main">
-            <a:off x="4752975" y="2143125"/>
-            <a:ext cx="1238250" cy="419100"/>
-          </a:xfrm>
-          <a:prstGeom xmlns:a="http://schemas.openxmlformats.org/drawingml/2006/main" prst="rect">
-            <a:avLst/>
-          </a:prstGeom>
-          <a:noFill xmlns:a="http://schemas.openxmlformats.org/drawingml/2006/main"/>
-          <a:ln xmlns:a="http://schemas.openxmlformats.org/drawingml/2006/main" w="0">
-            <a:noFill/>
-          </a:ln>
-        </p:spPr>
-        <p:txBody>
-          <a:bodyPr xmlns:a="http://schemas.openxmlformats.org/drawingml/2006/main" wrap="square" lIns="0" tIns="0" rIns="0" bIns="0" anchor="ctr">
-            <a:noAutofit/>
-          </a:bodyPr>
-          <a:lstStyle xmlns:a="http://schemas.openxmlformats.org/drawingml/2006/main"/>
+              <a:t>100 changes</a:t>
+            </a:r>
+          </a:p>
           <a:p xmlns:a="http://schemas.openxmlformats.org/drawingml/2006/main">
             <a:pPr algn="ctr">
-              <a:defRPr sz="2250" b="1">
+              <a:defRPr sz="1575" b="1">
+                <a:solidFill>
+                  <a:srgbClr val="28C7F7"/>
+                </a:solidFill>
+                <a:latin typeface="DejaVu Sans"/>
+                <a:ea typeface="DejaVu Sans"/>
+                <a:cs typeface="DejaVu Sans"/>
+              </a:defRPr>
+            </a:pPr>
+            <a:r>
+              <a:rPr sz="1575" b="1">
+                <a:solidFill>
+                  <a:srgbClr val="28C7F7"/>
+                </a:solidFill>
+                <a:latin typeface="DejaVu Sans"/>
+                <a:ea typeface="DejaVu Sans"/>
+                <a:cs typeface="DejaVu Sans"/>
+              </a:rPr>
+              <a:t>per week</a:t>
+            </a:r>
+          </a:p>
+        </p:txBody>
+      </p:sp>
+      <p:sp>
+        <p:nvSpPr>
+          <p:cNvPr id="36" name="">
+            <a:extLst xmlns:a="http://schemas.openxmlformats.org/drawingml/2006/main">
+              <a:ext uri="{FF2B5EF4-FFF2-40B4-BE49-F238E27FC236}">
+                <a16:creationId xmlns:a16="http://schemas.microsoft.com/office/drawing/2014/main" id="{1053BA94-8125-4C3D-9DB4-EFFB478EE76C}"/>
+              </a:ext>
+            </a:extLst>
+          </p:cNvPr>
+          <p:cNvSpPr>
+            <a:spLocks xmlns:a="http://schemas.openxmlformats.org/drawingml/2006/main" noGrp="1"/>
+          </p:cNvSpPr>
+          <p:nvPr/>
+        </p:nvSpPr>
+        <p:spPr>
+          <a:xfrm xmlns:a="http://schemas.openxmlformats.org/drawingml/2006/main">
+            <a:off x="7381875" y="3409950"/>
+            <a:ext cx="1504950" cy="514350"/>
+          </a:xfrm>
+          <a:prstGeom xmlns:a="http://schemas.openxmlformats.org/drawingml/2006/main" prst="rect">
+            <a:avLst/>
+          </a:prstGeom>
+          <a:noFill xmlns:a="http://schemas.openxmlformats.org/drawingml/2006/main"/>
+          <a:ln xmlns:a="http://schemas.openxmlformats.org/drawingml/2006/main" w="0">
+            <a:noFill/>
+          </a:ln>
+        </p:spPr>
+        <p:txBody>
+          <a:bodyPr xmlns:a="http://schemas.openxmlformats.org/drawingml/2006/main" wrap="square" lIns="0" tIns="0" rIns="0" bIns="0" anchor="ctr">
+            <a:noAutofit/>
+          </a:bodyPr>
+          <a:lstStyle xmlns:a="http://schemas.openxmlformats.org/drawingml/2006/main"/>
+          <a:p xmlns:a="http://schemas.openxmlformats.org/drawingml/2006/main">
+            <a:pPr algn="ctr">
+              <a:defRPr sz="1575" b="1">
                 <a:solidFill>
                   <a:srgbClr val="F5B61C"/>
                 </a:solidFill>
@@ -9724,7 +10399,7 @@
               </a:defRPr>
             </a:pPr>
             <a:r>
-              <a:rPr sz="2250" b="1">
+              <a:rPr sz="1575" b="1">
                 <a:solidFill>
                   <a:srgbClr val="F5B61C"/>
                 </a:solidFill>
@@ -9732,46 +10407,12 @@
                 <a:ea typeface="DejaVu Sans"/>
                 <a:cs typeface="DejaVu Sans"/>
               </a:rPr>
-              <a:t>?</a:t>
-            </a:r>
-          </a:p>
-        </p:txBody>
-      </p:sp>
-      <p:sp>
-        <p:nvSpPr>
-          <p:cNvPr id="29" name="">
-            <a:extLst xmlns:a="http://schemas.openxmlformats.org/drawingml/2006/main">
-              <a:ext uri="{FF2B5EF4-FFF2-40B4-BE49-F238E27FC236}">
-                <a16:creationId xmlns:a16="http://schemas.microsoft.com/office/drawing/2014/main" id="{8B2069AA-8E99-4DF1-A929-567552E769A4}"/>
-              </a:ext>
-            </a:extLst>
-          </p:cNvPr>
-          <p:cNvSpPr>
-            <a:spLocks xmlns:a="http://schemas.openxmlformats.org/drawingml/2006/main" noGrp="1"/>
-          </p:cNvSpPr>
-          <p:nvPr/>
-        </p:nvSpPr>
-        <p:spPr>
-          <a:xfrm xmlns:a="http://schemas.openxmlformats.org/drawingml/2006/main">
-            <a:off x="6134100" y="2143125"/>
-            <a:ext cx="1238250" cy="419100"/>
-          </a:xfrm>
-          <a:prstGeom xmlns:a="http://schemas.openxmlformats.org/drawingml/2006/main" prst="rect">
-            <a:avLst/>
-          </a:prstGeom>
-          <a:noFill xmlns:a="http://schemas.openxmlformats.org/drawingml/2006/main"/>
-          <a:ln xmlns:a="http://schemas.openxmlformats.org/drawingml/2006/main" w="0">
-            <a:noFill/>
-          </a:ln>
-        </p:spPr>
-        <p:txBody>
-          <a:bodyPr xmlns:a="http://schemas.openxmlformats.org/drawingml/2006/main" wrap="square" lIns="0" tIns="0" rIns="0" bIns="0" anchor="ctr">
-            <a:noAutofit/>
-          </a:bodyPr>
-          <a:lstStyle xmlns:a="http://schemas.openxmlformats.org/drawingml/2006/main"/>
+              <a:t>8 changes</a:t>
+            </a:r>
+          </a:p>
           <a:p xmlns:a="http://schemas.openxmlformats.org/drawingml/2006/main">
             <a:pPr algn="ctr">
-              <a:defRPr sz="2250" b="1">
+              <a:defRPr sz="1575" b="1">
                 <a:solidFill>
                   <a:srgbClr val="F5B61C"/>
                 </a:solidFill>
@@ -9781,7 +10422,7 @@
               </a:defRPr>
             </a:pPr>
             <a:r>
-              <a:rPr sz="2250" b="1">
+              <a:rPr sz="1575" b="1">
                 <a:solidFill>
                   <a:srgbClr val="F5B61C"/>
                 </a:solidFill>
@@ -9789,143 +10430,29 @@
                 <a:ea typeface="DejaVu Sans"/>
                 <a:cs typeface="DejaVu Sans"/>
               </a:rPr>
-              <a:t>?</a:t>
-            </a:r>
-          </a:p>
-        </p:txBody>
-      </p:sp>
-      <p:sp>
-        <p:nvSpPr>
-          <p:cNvPr id="30" name="">
-            <a:extLst xmlns:a="http://schemas.openxmlformats.org/drawingml/2006/main">
-              <a:ext uri="{FF2B5EF4-FFF2-40B4-BE49-F238E27FC236}">
-                <a16:creationId xmlns:a16="http://schemas.microsoft.com/office/drawing/2014/main" id="{13680318-A6BE-433C-8CB0-7CC83100C771}"/>
-              </a:ext>
-            </a:extLst>
-          </p:cNvPr>
-          <p:cNvSpPr>
-            <a:spLocks xmlns:a="http://schemas.openxmlformats.org/drawingml/2006/main" noGrp="1"/>
-          </p:cNvSpPr>
-          <p:nvPr/>
-        </p:nvSpPr>
-        <p:spPr>
-          <a:xfrm xmlns:a="http://schemas.openxmlformats.org/drawingml/2006/main">
-            <a:off x="7515225" y="2143125"/>
-            <a:ext cx="1238250" cy="419100"/>
-          </a:xfrm>
-          <a:prstGeom xmlns:a="http://schemas.openxmlformats.org/drawingml/2006/main" prst="rect">
-            <a:avLst/>
-          </a:prstGeom>
-          <a:noFill xmlns:a="http://schemas.openxmlformats.org/drawingml/2006/main"/>
-          <a:ln xmlns:a="http://schemas.openxmlformats.org/drawingml/2006/main" w="0">
-            <a:noFill/>
-          </a:ln>
-        </p:spPr>
-        <p:txBody>
-          <a:bodyPr xmlns:a="http://schemas.openxmlformats.org/drawingml/2006/main" wrap="square" lIns="0" tIns="0" rIns="0" bIns="0" anchor="ctr">
-            <a:noAutofit/>
-          </a:bodyPr>
-          <a:lstStyle xmlns:a="http://schemas.openxmlformats.org/drawingml/2006/main"/>
-          <a:p xmlns:a="http://schemas.openxmlformats.org/drawingml/2006/main">
-            <a:pPr algn="ctr">
-              <a:defRPr sz="2250" b="1">
-                <a:solidFill>
-                  <a:srgbClr val="F5B61C"/>
-                </a:solidFill>
-                <a:latin typeface="DejaVu Sans"/>
-                <a:ea typeface="DejaVu Sans"/>
-                <a:cs typeface="DejaVu Sans"/>
-              </a:defRPr>
-            </a:pPr>
-            <a:r>
-              <a:rPr sz="2250" b="1">
-                <a:solidFill>
-                  <a:srgbClr val="F5B61C"/>
-                </a:solidFill>
-                <a:latin typeface="DejaVu Sans"/>
-                <a:ea typeface="DejaVu Sans"/>
-                <a:cs typeface="DejaVu Sans"/>
-              </a:rPr>
-              <a:t>?</a:t>
-            </a:r>
-          </a:p>
-        </p:txBody>
-      </p:sp>
-      <p:sp>
-        <p:nvSpPr>
-          <p:cNvPr id="31" name="">
-            <a:extLst xmlns:a="http://schemas.openxmlformats.org/drawingml/2006/main">
-              <a:ext uri="{FF2B5EF4-FFF2-40B4-BE49-F238E27FC236}">
-                <a16:creationId xmlns:a16="http://schemas.microsoft.com/office/drawing/2014/main" id="{0789981C-5FDB-4CCB-9A72-1E35243195CC}"/>
-              </a:ext>
-            </a:extLst>
-          </p:cNvPr>
-          <p:cNvSpPr>
-            <a:spLocks xmlns:a="http://schemas.openxmlformats.org/drawingml/2006/main" noGrp="1"/>
-          </p:cNvSpPr>
-          <p:nvPr/>
-        </p:nvSpPr>
-        <p:spPr>
-          <a:xfrm xmlns:a="http://schemas.openxmlformats.org/drawingml/2006/main">
-            <a:off x="10277475" y="2143125"/>
-            <a:ext cx="1238250" cy="419100"/>
-          </a:xfrm>
-          <a:prstGeom xmlns:a="http://schemas.openxmlformats.org/drawingml/2006/main" prst="rect">
-            <a:avLst/>
-          </a:prstGeom>
-          <a:noFill xmlns:a="http://schemas.openxmlformats.org/drawingml/2006/main"/>
-          <a:ln xmlns:a="http://schemas.openxmlformats.org/drawingml/2006/main" w="0">
-            <a:noFill/>
-          </a:ln>
-        </p:spPr>
-        <p:txBody>
-          <a:bodyPr xmlns:a="http://schemas.openxmlformats.org/drawingml/2006/main" wrap="square" lIns="0" tIns="0" rIns="0" bIns="0" anchor="ctr">
-            <a:noAutofit/>
-          </a:bodyPr>
-          <a:lstStyle xmlns:a="http://schemas.openxmlformats.org/drawingml/2006/main"/>
-          <a:p xmlns:a="http://schemas.openxmlformats.org/drawingml/2006/main">
-            <a:pPr algn="ctr">
-              <a:defRPr sz="2250" b="1">
-                <a:solidFill>
-                  <a:srgbClr val="F5B61C"/>
-                </a:solidFill>
-                <a:latin typeface="DejaVu Sans"/>
-                <a:ea typeface="DejaVu Sans"/>
-                <a:cs typeface="DejaVu Sans"/>
-              </a:defRPr>
-            </a:pPr>
-            <a:r>
-              <a:rPr sz="2250" b="1">
-                <a:solidFill>
-                  <a:srgbClr val="F5B61C"/>
-                </a:solidFill>
-                <a:latin typeface="DejaVu Sans"/>
-                <a:ea typeface="DejaVu Sans"/>
-                <a:cs typeface="DejaVu Sans"/>
-              </a:rPr>
-              <a:t>?</a:t>
-            </a:r>
-          </a:p>
-        </p:txBody>
-      </p:sp>
-      <p:sp>
-        <p:nvSpPr>
-          <p:cNvPr id="32" name="">
-            <a:extLst xmlns:a="http://schemas.openxmlformats.org/drawingml/2006/main">
-              <a:ext uri="{FF2B5EF4-FFF2-40B4-BE49-F238E27FC236}">
-                <a16:creationId xmlns:a16="http://schemas.microsoft.com/office/drawing/2014/main" id="{669650C0-D7DA-404B-BD69-B5C59F2B51EA}"/>
-              </a:ext>
-            </a:extLst>
-          </p:cNvPr>
-          <p:cNvSpPr>
-            <a:spLocks xmlns:a="http://schemas.openxmlformats.org/drawingml/2006/main" noGrp="1"/>
-          </p:cNvSpPr>
-          <p:nvPr/>
-        </p:nvSpPr>
-        <p:spPr>
-          <a:xfrm xmlns:a="http://schemas.openxmlformats.org/drawingml/2006/main">
-            <a:off x="609600" y="4362450"/>
-            <a:ext cx="10648950" cy="714375"/>
+              <a:t>per week</a:t>
+            </a:r>
+          </a:p>
+        </p:txBody>
+      </p:sp>
+      <p:sp>
+        <p:nvSpPr>
+          <p:cNvPr id="37" name="">
+            <a:extLst xmlns:a="http://schemas.openxmlformats.org/drawingml/2006/main">
+              <a:ext uri="{FF2B5EF4-FFF2-40B4-BE49-F238E27FC236}">
+                <a16:creationId xmlns:a16="http://schemas.microsoft.com/office/drawing/2014/main" id="{E641CFBD-B236-4649-8658-C1A8B6D67F8D}"/>
+              </a:ext>
+            </a:extLst>
+          </p:cNvPr>
+          <p:cNvSpPr>
+            <a:spLocks xmlns:a="http://schemas.openxmlformats.org/drawingml/2006/main" noGrp="1"/>
+          </p:cNvSpPr>
+          <p:nvPr/>
+        </p:nvSpPr>
+        <p:spPr>
+          <a:xfrm xmlns:a="http://schemas.openxmlformats.org/drawingml/2006/main">
+            <a:off x="609600" y="4114800"/>
+            <a:ext cx="7029450" cy="285750"/>
           </a:xfrm>
           <a:prstGeom xmlns:a="http://schemas.openxmlformats.org/drawingml/2006/main" prst="rect">
             <a:avLst/>
@@ -9942,7 +10469,144 @@
           <a:lstStyle xmlns:a="http://schemas.openxmlformats.org/drawingml/2006/main"/>
           <a:p xmlns:a="http://schemas.openxmlformats.org/drawingml/2006/main">
             <a:pPr algn="l">
-              <a:defRPr sz="2250" b="0">
+              <a:defRPr sz="1650" b="1">
+                <a:solidFill>
+                  <a:srgbClr val="28C7F7"/>
+                </a:solidFill>
+                <a:latin typeface="DejaVu Sans"/>
+                <a:ea typeface="DejaVu Sans"/>
+                <a:cs typeface="DejaVu Sans"/>
+              </a:defRPr>
+            </a:pPr>
+            <a:r>
+              <a:rPr sz="1650" b="1">
+                <a:solidFill>
+                  <a:srgbClr val="28C7F7"/>
+                </a:solidFill>
+                <a:latin typeface="DejaVu Sans"/>
+                <a:ea typeface="DejaVu Sans"/>
+                <a:cs typeface="DejaVu Sans"/>
+              </a:rPr>
+              <a:t>THEORY OF CONSTRAINTS</a:t>
+            </a:r>
+          </a:p>
+        </p:txBody>
+      </p:sp>
+      <p:sp>
+        <p:nvSpPr>
+          <p:cNvPr id="38" name="">
+            <a:extLst xmlns:a="http://schemas.openxmlformats.org/drawingml/2006/main">
+              <a:ext uri="{FF2B5EF4-FFF2-40B4-BE49-F238E27FC236}">
+                <a16:creationId xmlns:a16="http://schemas.microsoft.com/office/drawing/2014/main" id="{9B0CDC50-DDD8-44CE-9138-E5AAAE2DB296}"/>
+              </a:ext>
+            </a:extLst>
+          </p:cNvPr>
+          <p:cNvSpPr>
+            <a:spLocks xmlns:a="http://schemas.openxmlformats.org/drawingml/2006/main" noGrp="1"/>
+          </p:cNvSpPr>
+          <p:nvPr/>
+        </p:nvSpPr>
+        <p:spPr>
+          <a:xfrm xmlns:a="http://schemas.openxmlformats.org/drawingml/2006/main">
+            <a:off x="609600" y="4476750"/>
+            <a:ext cx="6762750" cy="876300"/>
+          </a:xfrm>
+          <a:prstGeom xmlns:a="http://schemas.openxmlformats.org/drawingml/2006/main" prst="rect">
+            <a:avLst/>
+          </a:prstGeom>
+          <a:noFill xmlns:a="http://schemas.openxmlformats.org/drawingml/2006/main"/>
+          <a:ln xmlns:a="http://schemas.openxmlformats.org/drawingml/2006/main" w="0">
+            <a:noFill/>
+          </a:ln>
+        </p:spPr>
+        <p:txBody>
+          <a:bodyPr xmlns:a="http://schemas.openxmlformats.org/drawingml/2006/main" wrap="square" lIns="0" tIns="0" rIns="0" bIns="0" anchor="ctr">
+            <a:noAutofit/>
+          </a:bodyPr>
+          <a:lstStyle xmlns:a="http://schemas.openxmlformats.org/drawingml/2006/main"/>
+          <a:p xmlns:a="http://schemas.openxmlformats.org/drawingml/2006/main">
+            <a:pPr algn="l">
+              <a:defRPr sz="1950" b="1">
+                <a:solidFill>
+                  <a:srgbClr val="F4F7FA"/>
+                </a:solidFill>
+                <a:latin typeface="DejaVu Sans"/>
+                <a:ea typeface="DejaVu Sans"/>
+                <a:cs typeface="DejaVu Sans"/>
+              </a:defRPr>
+            </a:pPr>
+            <a:r>
+              <a:rPr sz="1950" b="1">
+                <a:solidFill>
+                  <a:srgbClr val="F4F7FA"/>
+                </a:solidFill>
+                <a:latin typeface="DejaVu Sans"/>
+                <a:ea typeface="DejaVu Sans"/>
+                <a:cs typeface="DejaVu Sans"/>
+              </a:rPr>
+              <a:t>Faster work outside the bottleneck</a:t>
+            </a:r>
+          </a:p>
+          <a:p xmlns:a="http://schemas.openxmlformats.org/drawingml/2006/main">
+            <a:pPr algn="l">
+              <a:defRPr sz="1950" b="1">
+                <a:solidFill>
+                  <a:srgbClr val="F4F7FA"/>
+                </a:solidFill>
+                <a:latin typeface="DejaVu Sans"/>
+                <a:ea typeface="DejaVu Sans"/>
+                <a:cs typeface="DejaVu Sans"/>
+              </a:defRPr>
+            </a:pPr>
+            <a:r>
+              <a:rPr sz="1950" b="1">
+                <a:solidFill>
+                  <a:srgbClr val="F4F7FA"/>
+                </a:solidFill>
+                <a:latin typeface="DejaVu Sans"/>
+                <a:ea typeface="DejaVu Sans"/>
+                <a:cs typeface="DejaVu Sans"/>
+              </a:rPr>
+              <a:t>does not increase delivery capacity.</a:t>
+            </a:r>
+          </a:p>
+        </p:txBody>
+      </p:sp>
+      <p:sp>
+        <p:nvSpPr>
+          <p:cNvPr id="39" name="">
+            <a:extLst xmlns:a="http://schemas.openxmlformats.org/drawingml/2006/main">
+              <a:ext uri="{FF2B5EF4-FFF2-40B4-BE49-F238E27FC236}">
+                <a16:creationId xmlns:a16="http://schemas.microsoft.com/office/drawing/2014/main" id="{04750798-E5AA-417E-96EF-CE7A85887BFD}"/>
+              </a:ext>
+            </a:extLst>
+          </p:cNvPr>
+          <p:cNvSpPr>
+            <a:spLocks xmlns:a="http://schemas.openxmlformats.org/drawingml/2006/main" noGrp="1"/>
+          </p:cNvSpPr>
+          <p:nvPr/>
+        </p:nvSpPr>
+        <p:spPr>
+          <a:xfrm xmlns:a="http://schemas.openxmlformats.org/drawingml/2006/main">
+            <a:off x="609600" y="5410200"/>
+            <a:ext cx="6858000" cy="857250"/>
+          </a:xfrm>
+          <a:prstGeom xmlns:a="http://schemas.openxmlformats.org/drawingml/2006/main" prst="rect">
+            <a:avLst/>
+          </a:prstGeom>
+          <a:noFill xmlns:a="http://schemas.openxmlformats.org/drawingml/2006/main"/>
+          <a:ln xmlns:a="http://schemas.openxmlformats.org/drawingml/2006/main" w="0">
+            <a:noFill/>
+          </a:ln>
+        </p:spPr>
+        <p:txBody>
+          <a:bodyPr xmlns:a="http://schemas.openxmlformats.org/drawingml/2006/main" wrap="square" lIns="0" tIns="0" rIns="0" bIns="0" anchor="ctr">
+            <a:noAutofit/>
+          </a:bodyPr>
+          <a:lstStyle xmlns:a="http://schemas.openxmlformats.org/drawingml/2006/main"/>
+          <a:p xmlns:a="http://schemas.openxmlformats.org/drawingml/2006/main">
+            <a:pPr algn="l">
+              <a:defRPr sz="1725" b="0">
                 <a:solidFill>
                   <a:srgbClr val="ADB8C5"/>
                 </a:solidFill>
@@ -9952,7 +10616,7 @@
               </a:defRPr>
             </a:pPr>
             <a:r>
-              <a:rPr sz="2250" b="0">
+              <a:rPr sz="1725" b="0">
                 <a:solidFill>
                   <a:srgbClr val="ADB8C5"/>
                 </a:solidFill>
@@ -9960,17 +10624,40 @@
                 <a:ea typeface="DejaVu Sans"/>
                 <a:cs typeface="DejaVu Sans"/>
               </a:rPr>
-              <a:t>If coding is the bottleneck, the bottleneck can move.</a:t>
-            </a:r>
-          </a:p>
-        </p:txBody>
-      </p:sp>
-      <p:sp>
-        <p:nvSpPr>
-          <p:cNvPr id="33" name="">
-            <a:extLst xmlns:a="http://schemas.openxmlformats.org/drawingml/2006/main">
-              <a:ext uri="{FF2B5EF4-FFF2-40B4-BE49-F238E27FC236}">
-                <a16:creationId xmlns:a16="http://schemas.microsoft.com/office/drawing/2014/main" id="{2FAD8A52-3C9E-451E-BCEE-58A8C392DAFA}"/>
+              <a:t>Pushing more work into a fixed bottleneck builds</a:t>
+            </a:r>
+          </a:p>
+          <a:p xmlns:a="http://schemas.openxmlformats.org/drawingml/2006/main">
+            <a:pPr algn="l">
+              <a:defRPr sz="1725" b="0">
+                <a:solidFill>
+                  <a:srgbClr val="ADB8C5"/>
+                </a:solidFill>
+                <a:latin typeface="DejaVu Sans"/>
+                <a:ea typeface="DejaVu Sans"/>
+                <a:cs typeface="DejaVu Sans"/>
+              </a:defRPr>
+            </a:pPr>
+            <a:r>
+              <a:rPr sz="1725" b="0">
+                <a:solidFill>
+                  <a:srgbClr val="ADB8C5"/>
+                </a:solidFill>
+                <a:latin typeface="DejaVu Sans"/>
+                <a:ea typeface="DejaVu Sans"/>
+                <a:cs typeface="DejaVu Sans"/>
+              </a:rPr>
+              <a:t>WIP and waiting time. Quality can suffer under overload.</a:t>
+            </a:r>
+          </a:p>
+        </p:txBody>
+      </p:sp>
+      <p:sp>
+        <p:nvSpPr>
+          <p:cNvPr id="40" name="">
+            <a:extLst xmlns:a="http://schemas.openxmlformats.org/drawingml/2006/main">
+              <a:ext uri="{FF2B5EF4-FFF2-40B4-BE49-F238E27FC236}">
+                <a16:creationId xmlns:a16="http://schemas.microsoft.com/office/drawing/2014/main" id="{B5900CBC-EB42-4265-BFF4-65FCF50D0D36}"/>
               </a:ext>
             </a:extLst>
           </p:cNvPr>
@@ -9981,8 +10668,8 @@
         </p:nvSpPr>
         <p:spPr>
           <a:xfrm xmlns:a="http://schemas.openxmlformats.org/drawingml/2006/main" flipH="0" flipV="0">
-            <a:off x="609600" y="5734050"/>
-            <a:ext cx="10972800" cy="0"/>
+            <a:off x="7867650" y="4114800"/>
+            <a:ext cx="0" cy="2085975"/>
           </a:xfrm>
           <a:prstGeom xmlns:a="http://schemas.openxmlformats.org/drawingml/2006/main" prst="line">
             <a:avLst/>
@@ -9998,22 +10685,22 @@
       </p:sp>
       <p:sp>
         <p:nvSpPr>
-          <p:cNvPr id="34" name="">
-            <a:extLst xmlns:a="http://schemas.openxmlformats.org/drawingml/2006/main">
-              <a:ext uri="{FF2B5EF4-FFF2-40B4-BE49-F238E27FC236}">
-                <a16:creationId xmlns:a16="http://schemas.microsoft.com/office/drawing/2014/main" id="{EA3BD866-6762-4FB1-9381-238A931986E0}"/>
-              </a:ext>
-            </a:extLst>
-          </p:cNvPr>
-          <p:cNvSpPr>
-            <a:spLocks xmlns:a="http://schemas.openxmlformats.org/drawingml/2006/main" noGrp="1"/>
-          </p:cNvSpPr>
-          <p:nvPr/>
-        </p:nvSpPr>
-        <p:spPr>
-          <a:xfrm xmlns:a="http://schemas.openxmlformats.org/drawingml/2006/main">
-            <a:off x="609600" y="5905500"/>
-            <a:ext cx="10648950" cy="666750"/>
+          <p:cNvPr id="41" name="">
+            <a:extLst xmlns:a="http://schemas.openxmlformats.org/drawingml/2006/main">
+              <a:ext uri="{FF2B5EF4-FFF2-40B4-BE49-F238E27FC236}">
+                <a16:creationId xmlns:a16="http://schemas.microsoft.com/office/drawing/2014/main" id="{6BA615B9-1750-42C8-A67D-97610DAD83D0}"/>
+              </a:ext>
+            </a:extLst>
+          </p:cNvPr>
+          <p:cNvSpPr>
+            <a:spLocks xmlns:a="http://schemas.openxmlformats.org/drawingml/2006/main" noGrp="1"/>
+          </p:cNvSpPr>
+          <p:nvPr/>
+        </p:nvSpPr>
+        <p:spPr>
+          <a:xfrm xmlns:a="http://schemas.openxmlformats.org/drawingml/2006/main">
+            <a:off x="8248650" y="4238625"/>
+            <a:ext cx="3333750" cy="647700"/>
           </a:xfrm>
           <a:prstGeom xmlns:a="http://schemas.openxmlformats.org/drawingml/2006/main" prst="rect">
             <a:avLst/>
@@ -10030,25 +10717,208 @@
           <a:lstStyle xmlns:a="http://schemas.openxmlformats.org/drawingml/2006/main"/>
           <a:p xmlns:a="http://schemas.openxmlformats.org/drawingml/2006/main">
             <a:pPr algn="l">
-              <a:defRPr sz="2550" b="1">
-                <a:solidFill>
-                  <a:srgbClr val="28C7F7"/>
-                </a:solidFill>
-                <a:latin typeface="DejaVu Sans"/>
-                <a:ea typeface="DejaVu Sans"/>
-                <a:cs typeface="DejaVu Sans"/>
-              </a:defRPr>
-            </a:pPr>
-            <a:r>
-              <a:rPr sz="2550" b="1">
-                <a:solidFill>
-                  <a:srgbClr val="28C7F7"/>
-                </a:solidFill>
-                <a:latin typeface="DejaVu Sans"/>
-                <a:ea typeface="DejaVu Sans"/>
-                <a:cs typeface="DejaVu Sans"/>
-              </a:rPr>
-              <a:t>Local acceleration ≠ system throughput</a:t>
+              <a:defRPr sz="3750" b="1">
+                <a:solidFill>
+                  <a:srgbClr val="F5B61C"/>
+                </a:solidFill>
+                <a:latin typeface="DejaVu Sans"/>
+                <a:ea typeface="DejaVu Sans"/>
+                <a:cs typeface="DejaVu Sans"/>
+              </a:defRPr>
+            </a:pPr>
+            <a:r>
+              <a:rPr sz="3750" b="1">
+                <a:solidFill>
+                  <a:srgbClr val="F5B61C"/>
+                </a:solidFill>
+                <a:latin typeface="DejaVu Sans"/>
+                <a:ea typeface="DejaVu Sans"/>
+                <a:cs typeface="DejaVu Sans"/>
+              </a:rPr>
+              <a:t>+92 / week</a:t>
+            </a:r>
+          </a:p>
+        </p:txBody>
+      </p:sp>
+      <p:sp>
+        <p:nvSpPr>
+          <p:cNvPr id="42" name="">
+            <a:extLst xmlns:a="http://schemas.openxmlformats.org/drawingml/2006/main">
+              <a:ext uri="{FF2B5EF4-FFF2-40B4-BE49-F238E27FC236}">
+                <a16:creationId xmlns:a16="http://schemas.microsoft.com/office/drawing/2014/main" id="{B541D0FE-294C-4578-AF3A-6E8E032D694A}"/>
+              </a:ext>
+            </a:extLst>
+          </p:cNvPr>
+          <p:cNvSpPr>
+            <a:spLocks xmlns:a="http://schemas.openxmlformats.org/drawingml/2006/main" noGrp="1"/>
+          </p:cNvSpPr>
+          <p:nvPr/>
+        </p:nvSpPr>
+        <p:spPr>
+          <a:xfrm xmlns:a="http://schemas.openxmlformats.org/drawingml/2006/main">
+            <a:off x="8248650" y="4895850"/>
+            <a:ext cx="3333750" cy="533400"/>
+          </a:xfrm>
+          <a:prstGeom xmlns:a="http://schemas.openxmlformats.org/drawingml/2006/main" prst="rect">
+            <a:avLst/>
+          </a:prstGeom>
+          <a:noFill xmlns:a="http://schemas.openxmlformats.org/drawingml/2006/main"/>
+          <a:ln xmlns:a="http://schemas.openxmlformats.org/drawingml/2006/main" w="0">
+            <a:noFill/>
+          </a:ln>
+        </p:spPr>
+        <p:txBody>
+          <a:bodyPr xmlns:a="http://schemas.openxmlformats.org/drawingml/2006/main" wrap="square" lIns="0" tIns="0" rIns="0" bIns="0" anchor="ctr">
+            <a:noAutofit/>
+          </a:bodyPr>
+          <a:lstStyle xmlns:a="http://schemas.openxmlformats.org/drawingml/2006/main"/>
+          <a:p xmlns:a="http://schemas.openxmlformats.org/drawingml/2006/main">
+            <a:pPr algn="l">
+              <a:defRPr sz="1875" b="1">
+                <a:solidFill>
+                  <a:srgbClr val="F4F7FA"/>
+                </a:solidFill>
+                <a:latin typeface="DejaVu Sans"/>
+                <a:ea typeface="DejaVu Sans"/>
+                <a:cs typeface="DejaVu Sans"/>
+              </a:defRPr>
+            </a:pPr>
+            <a:r>
+              <a:rPr sz="1875" b="1">
+                <a:solidFill>
+                  <a:srgbClr val="F4F7FA"/>
+                </a:solidFill>
+                <a:latin typeface="DejaVu Sans"/>
+                <a:ea typeface="DejaVu Sans"/>
+                <a:cs typeface="DejaVu Sans"/>
+              </a:rPr>
+              <a:t>unfinished changes</a:t>
+            </a:r>
+          </a:p>
+          <a:p xmlns:a="http://schemas.openxmlformats.org/drawingml/2006/main">
+            <a:pPr algn="l">
+              <a:defRPr sz="1875" b="1">
+                <a:solidFill>
+                  <a:srgbClr val="F4F7FA"/>
+                </a:solidFill>
+                <a:latin typeface="DejaVu Sans"/>
+                <a:ea typeface="DejaVu Sans"/>
+                <a:cs typeface="DejaVu Sans"/>
+              </a:defRPr>
+            </a:pPr>
+            <a:r>
+              <a:rPr sz="1875" b="1">
+                <a:solidFill>
+                  <a:srgbClr val="F4F7FA"/>
+                </a:solidFill>
+                <a:latin typeface="DejaVu Sans"/>
+                <a:ea typeface="DejaVu Sans"/>
+                <a:cs typeface="DejaVu Sans"/>
+              </a:rPr>
+              <a:t>accumulate</a:t>
+            </a:r>
+          </a:p>
+        </p:txBody>
+      </p:sp>
+      <p:sp>
+        <p:nvSpPr>
+          <p:cNvPr id="43" name="">
+            <a:extLst xmlns:a="http://schemas.openxmlformats.org/drawingml/2006/main">
+              <a:ext uri="{FF2B5EF4-FFF2-40B4-BE49-F238E27FC236}">
+                <a16:creationId xmlns:a16="http://schemas.microsoft.com/office/drawing/2014/main" id="{3A41095A-19F0-4F7C-BA82-CA2A276A9499}"/>
+              </a:ext>
+            </a:extLst>
+          </p:cNvPr>
+          <p:cNvSpPr>
+            <a:spLocks xmlns:a="http://schemas.openxmlformats.org/drawingml/2006/main" noGrp="1"/>
+          </p:cNvSpPr>
+          <p:nvPr/>
+        </p:nvSpPr>
+        <p:spPr>
+          <a:xfrm xmlns:a="http://schemas.openxmlformats.org/drawingml/2006/main">
+            <a:off x="8248650" y="5543550"/>
+            <a:ext cx="3333750" cy="723900"/>
+          </a:xfrm>
+          <a:prstGeom xmlns:a="http://schemas.openxmlformats.org/drawingml/2006/main" prst="rect">
+            <a:avLst/>
+          </a:prstGeom>
+          <a:noFill xmlns:a="http://schemas.openxmlformats.org/drawingml/2006/main"/>
+          <a:ln xmlns:a="http://schemas.openxmlformats.org/drawingml/2006/main" w="0">
+            <a:noFill/>
+          </a:ln>
+        </p:spPr>
+        <p:txBody>
+          <a:bodyPr xmlns:a="http://schemas.openxmlformats.org/drawingml/2006/main" wrap="square" lIns="0" tIns="0" rIns="0" bIns="0" anchor="ctr">
+            <a:noAutofit/>
+          </a:bodyPr>
+          <a:lstStyle xmlns:a="http://schemas.openxmlformats.org/drawingml/2006/main"/>
+          <a:p xmlns:a="http://schemas.openxmlformats.org/drawingml/2006/main">
+            <a:pPr algn="l">
+              <a:defRPr sz="1500" b="0">
+                <a:solidFill>
+                  <a:srgbClr val="ADB8C5"/>
+                </a:solidFill>
+                <a:latin typeface="DejaVu Sans"/>
+                <a:ea typeface="DejaVu Sans"/>
+                <a:cs typeface="DejaVu Sans"/>
+              </a:defRPr>
+            </a:pPr>
+            <a:r>
+              <a:rPr sz="1500" b="0">
+                <a:solidFill>
+                  <a:srgbClr val="ADB8C5"/>
+                </a:solidFill>
+                <a:latin typeface="DejaVu Sans"/>
+                <a:ea typeface="DejaVu Sans"/>
+                <a:cs typeface="DejaVu Sans"/>
+              </a:rPr>
+              <a:t>Illustrative: 100 in, 8 out.</a:t>
+            </a:r>
+          </a:p>
+          <a:p xmlns:a="http://schemas.openxmlformats.org/drawingml/2006/main">
+            <a:pPr algn="l">
+              <a:defRPr sz="1500" b="0">
+                <a:solidFill>
+                  <a:srgbClr val="ADB8C5"/>
+                </a:solidFill>
+                <a:latin typeface="DejaVu Sans"/>
+                <a:ea typeface="DejaVu Sans"/>
+                <a:cs typeface="DejaVu Sans"/>
+              </a:defRPr>
+            </a:pPr>
+            <a:r>
+              <a:rPr sz="1500" b="0">
+                <a:solidFill>
+                  <a:srgbClr val="ADB8C5"/>
+                </a:solidFill>
+                <a:latin typeface="DejaVu Sans"/>
+                <a:ea typeface="DejaVu Sans"/>
+                <a:cs typeface="DejaVu Sans"/>
+              </a:rPr>
+              <a:t>Fixed rates, comparable work.</a:t>
+            </a:r>
+          </a:p>
+          <a:p xmlns:a="http://schemas.openxmlformats.org/drawingml/2006/main">
+            <a:pPr algn="l">
+              <a:defRPr sz="1500" b="0">
+                <a:solidFill>
+                  <a:srgbClr val="ADB8C5"/>
+                </a:solidFill>
+                <a:latin typeface="DejaVu Sans"/>
+                <a:ea typeface="DejaVu Sans"/>
+                <a:cs typeface="DejaVu Sans"/>
+              </a:defRPr>
+            </a:pPr>
+            <a:r>
+              <a:rPr sz="1500" b="0">
+                <a:solidFill>
+                  <a:srgbClr val="ADB8C5"/>
+                </a:solidFill>
+                <a:latin typeface="DejaVu Sans"/>
+                <a:ea typeface="DejaVu Sans"/>
+                <a:cs typeface="DejaVu Sans"/>
+              </a:rPr>
+              <a:t>No WIP limit, no discarded work.</a:t>
             </a:r>
           </a:p>
         </p:txBody>
@@ -10056,7 +10926,7 @@
     </p:spTree>
     <p:extLst>
       <p:ext uri="{BB962C8B-B14F-4D97-AF65-F5344CB8AC3E}">
-        <p14:creationId xmlns:p14="http://schemas.microsoft.com/office/powerpoint/2010/main" val="1150965629"/>
+        <p14:creationId xmlns:p14="http://schemas.microsoft.com/office/powerpoint/2010/main" val="849262705"/>
       </p:ext>
     </p:extLst>
   </p:cSld>
@@ -10084,10 +10954,10 @@
       </p:grpSpPr>
       <p:sp>
         <p:nvSpPr>
-          <p:cNvPr id="40" name="">
-            <a:extLst xmlns:a="http://schemas.openxmlformats.org/drawingml/2006/main">
-              <a:ext uri="{FF2B5EF4-FFF2-40B4-BE49-F238E27FC236}">
-                <a16:creationId xmlns:a16="http://schemas.microsoft.com/office/drawing/2014/main" id="{306CA492-F75E-44AA-BB9B-DE3CED8B9E56}"/>
+          <p:cNvPr id="39" name="">
+            <a:extLst xmlns:a="http://schemas.openxmlformats.org/drawingml/2006/main">
+              <a:ext uri="{FF2B5EF4-FFF2-40B4-BE49-F238E27FC236}">
+                <a16:creationId xmlns:a16="http://schemas.microsoft.com/office/drawing/2014/main" id="{710304D6-A771-423D-9F44-A7076FEB65B4}"/>
               </a:ext>
             </a:extLst>
           </p:cNvPr>
@@ -10144,7 +11014,7 @@
           <p:cNvPr id="2" name="">
             <a:extLst xmlns:a="http://schemas.openxmlformats.org/drawingml/2006/main">
               <a:ext uri="{FF2B5EF4-FFF2-40B4-BE49-F238E27FC236}">
-                <a16:creationId xmlns:a16="http://schemas.microsoft.com/office/drawing/2014/main" id="{E21ACA5A-D16D-41A1-B94C-CCD500175498}"/>
+                <a16:creationId xmlns:a16="http://schemas.microsoft.com/office/drawing/2014/main" id="{05A235A6-3E24-449E-AE01-62AE6AEDBB6B}"/>
               </a:ext>
             </a:extLst>
           </p:cNvPr>
@@ -10175,7 +11045,7 @@
           <p:cNvPr id="3" name="">
             <a:extLst xmlns:a="http://schemas.openxmlformats.org/drawingml/2006/main">
               <a:ext uri="{FF2B5EF4-FFF2-40B4-BE49-F238E27FC236}">
-                <a16:creationId xmlns:a16="http://schemas.microsoft.com/office/drawing/2014/main" id="{5118D90C-3C73-4FF0-887C-F327E8B756B0}"/>
+                <a16:creationId xmlns:a16="http://schemas.microsoft.com/office/drawing/2014/main" id="{F3432B29-5027-4405-8751-AF76BB7B8717}"/>
               </a:ext>
             </a:extLst>
           </p:cNvPr>
@@ -10232,211 +11102,7 @@
           <p:cNvPr id="4" name="">
             <a:extLst xmlns:a="http://schemas.openxmlformats.org/drawingml/2006/main">
               <a:ext uri="{FF2B5EF4-FFF2-40B4-BE49-F238E27FC236}">
-                <a16:creationId xmlns:a16="http://schemas.microsoft.com/office/drawing/2014/main" id="{9B1537B1-57B2-47F0-AFE1-0DA15966D006}"/>
-              </a:ext>
-            </a:extLst>
-          </p:cNvPr>
-          <p:cNvSpPr>
-            <a:spLocks xmlns:a="http://schemas.openxmlformats.org/drawingml/2006/main" noGrp="1"/>
-          </p:cNvSpPr>
-          <p:nvPr/>
-        </p:nvSpPr>
-        <p:spPr>
-          <a:xfrm xmlns:a="http://schemas.openxmlformats.org/drawingml/2006/main">
-            <a:off x="609600" y="1809750"/>
-            <a:ext cx="5276850" cy="3676650"/>
-          </a:xfrm>
-          <a:prstGeom xmlns:a="http://schemas.openxmlformats.org/drawingml/2006/main" prst="rect">
-            <a:avLst/>
-          </a:prstGeom>
-          <a:solidFill xmlns:a="http://schemas.openxmlformats.org/drawingml/2006/main">
-            <a:srgbClr val="141C26"/>
-          </a:solidFill>
-          <a:ln xmlns:a="http://schemas.openxmlformats.org/drawingml/2006/main" w="14288">
-            <a:solidFill>
-              <a:srgbClr val="28C7F7"/>
-            </a:solidFill>
-            <a:prstDash val="solid"/>
-          </a:ln>
-        </p:spPr>
-      </p:sp>
-      <p:sp>
-        <p:nvSpPr>
-          <p:cNvPr id="5" name="">
-            <a:extLst xmlns:a="http://schemas.openxmlformats.org/drawingml/2006/main">
-              <a:ext uri="{FF2B5EF4-FFF2-40B4-BE49-F238E27FC236}">
-                <a16:creationId xmlns:a16="http://schemas.microsoft.com/office/drawing/2014/main" id="{6EBC6D43-912A-489D-90A1-255DF6CAA551}"/>
-              </a:ext>
-            </a:extLst>
-          </p:cNvPr>
-          <p:cNvSpPr>
-            <a:spLocks xmlns:a="http://schemas.openxmlformats.org/drawingml/2006/main" noGrp="1"/>
-          </p:cNvSpPr>
-          <p:nvPr/>
-        </p:nvSpPr>
-        <p:spPr>
-          <a:xfrm xmlns:a="http://schemas.openxmlformats.org/drawingml/2006/main">
-            <a:off x="800100" y="1981200"/>
-            <a:ext cx="4857750" cy="285750"/>
-          </a:xfrm>
-          <a:prstGeom xmlns:a="http://schemas.openxmlformats.org/drawingml/2006/main" prst="rect">
-            <a:avLst/>
-          </a:prstGeom>
-          <a:noFill xmlns:a="http://schemas.openxmlformats.org/drawingml/2006/main"/>
-          <a:ln xmlns:a="http://schemas.openxmlformats.org/drawingml/2006/main" w="0">
-            <a:noFill/>
-          </a:ln>
-        </p:spPr>
-        <p:txBody>
-          <a:bodyPr xmlns:a="http://schemas.openxmlformats.org/drawingml/2006/main" wrap="square" lIns="0" tIns="0" rIns="0" bIns="0" anchor="ctr">
-            <a:noAutofit/>
-          </a:bodyPr>
-          <a:lstStyle xmlns:a="http://schemas.openxmlformats.org/drawingml/2006/main"/>
-          <a:p xmlns:a="http://schemas.openxmlformats.org/drawingml/2006/main">
-            <a:pPr algn="l">
-              <a:defRPr sz="1650" b="1">
-                <a:solidFill>
-                  <a:srgbClr val="28C7F7"/>
-                </a:solidFill>
-                <a:latin typeface="DejaVu Sans"/>
-                <a:ea typeface="DejaVu Sans"/>
-                <a:cs typeface="DejaVu Sans"/>
-              </a:defRPr>
-            </a:pPr>
-            <a:r>
-              <a:rPr sz="1650" b="1">
-                <a:solidFill>
-                  <a:srgbClr val="28C7F7"/>
-                </a:solidFill>
-                <a:latin typeface="DejaVu Sans"/>
-                <a:ea typeface="DejaVu Sans"/>
-                <a:cs typeface="DejaVu Sans"/>
-              </a:rPr>
-              <a:t>NBER · 2026</a:t>
-            </a:r>
-          </a:p>
-        </p:txBody>
-      </p:sp>
-      <p:sp>
-        <p:nvSpPr>
-          <p:cNvPr id="6" name="">
-            <a:extLst xmlns:a="http://schemas.openxmlformats.org/drawingml/2006/main">
-              <a:ext uri="{FF2B5EF4-FFF2-40B4-BE49-F238E27FC236}">
-                <a16:creationId xmlns:a16="http://schemas.microsoft.com/office/drawing/2014/main" id="{ECED1936-6E98-43AC-B765-450083C5D96C}"/>
-              </a:ext>
-            </a:extLst>
-          </p:cNvPr>
-          <p:cNvSpPr>
-            <a:spLocks xmlns:a="http://schemas.openxmlformats.org/drawingml/2006/main" noGrp="1"/>
-          </p:cNvSpPr>
-          <p:nvPr/>
-        </p:nvSpPr>
-        <p:spPr>
-          <a:xfrm xmlns:a="http://schemas.openxmlformats.org/drawingml/2006/main">
-            <a:off x="800100" y="2438400"/>
-            <a:ext cx="1504950" cy="571500"/>
-          </a:xfrm>
-          <a:prstGeom xmlns:a="http://schemas.openxmlformats.org/drawingml/2006/main" prst="rect">
-            <a:avLst/>
-          </a:prstGeom>
-          <a:noFill xmlns:a="http://schemas.openxmlformats.org/drawingml/2006/main"/>
-          <a:ln xmlns:a="http://schemas.openxmlformats.org/drawingml/2006/main" w="0">
-            <a:noFill/>
-          </a:ln>
-        </p:spPr>
-        <p:txBody>
-          <a:bodyPr xmlns:a="http://schemas.openxmlformats.org/drawingml/2006/main" wrap="square" lIns="0" tIns="0" rIns="0" bIns="0" anchor="ctr">
-            <a:noAutofit/>
-          </a:bodyPr>
-          <a:lstStyle xmlns:a="http://schemas.openxmlformats.org/drawingml/2006/main"/>
-          <a:p xmlns:a="http://schemas.openxmlformats.org/drawingml/2006/main">
-            <a:pPr algn="l">
-              <a:defRPr sz="3300" b="1">
-                <a:solidFill>
-                  <a:srgbClr val="F4F7FA"/>
-                </a:solidFill>
-                <a:latin typeface="DejaVu Sans"/>
-                <a:ea typeface="DejaVu Sans"/>
-                <a:cs typeface="DejaVu Sans"/>
-              </a:defRPr>
-            </a:pPr>
-            <a:r>
-              <a:rPr sz="3300" b="1">
-                <a:solidFill>
-                  <a:srgbClr val="F4F7FA"/>
-                </a:solidFill>
-                <a:latin typeface="DejaVu Sans"/>
-                <a:ea typeface="DejaVu Sans"/>
-                <a:cs typeface="DejaVu Sans"/>
-              </a:rPr>
-              <a:t>17.3×</a:t>
-            </a:r>
-          </a:p>
-        </p:txBody>
-      </p:sp>
-      <p:sp>
-        <p:nvSpPr>
-          <p:cNvPr id="7" name="">
-            <a:extLst xmlns:a="http://schemas.openxmlformats.org/drawingml/2006/main">
-              <a:ext uri="{FF2B5EF4-FFF2-40B4-BE49-F238E27FC236}">
-                <a16:creationId xmlns:a16="http://schemas.microsoft.com/office/drawing/2014/main" id="{18D541EA-E259-4490-B385-1126A6E2897C}"/>
-              </a:ext>
-            </a:extLst>
-          </p:cNvPr>
-          <p:cNvSpPr>
-            <a:spLocks xmlns:a="http://schemas.openxmlformats.org/drawingml/2006/main" noGrp="1"/>
-          </p:cNvSpPr>
-          <p:nvPr/>
-        </p:nvSpPr>
-        <p:spPr>
-          <a:xfrm xmlns:a="http://schemas.openxmlformats.org/drawingml/2006/main">
-            <a:off x="800100" y="3048000"/>
-            <a:ext cx="1524000" cy="285750"/>
-          </a:xfrm>
-          <a:prstGeom xmlns:a="http://schemas.openxmlformats.org/drawingml/2006/main" prst="rect">
-            <a:avLst/>
-          </a:prstGeom>
-          <a:noFill xmlns:a="http://schemas.openxmlformats.org/drawingml/2006/main"/>
-          <a:ln xmlns:a="http://schemas.openxmlformats.org/drawingml/2006/main" w="0">
-            <a:noFill/>
-          </a:ln>
-        </p:spPr>
-        <p:txBody>
-          <a:bodyPr xmlns:a="http://schemas.openxmlformats.org/drawingml/2006/main" wrap="square" lIns="0" tIns="0" rIns="0" bIns="0" anchor="ctr">
-            <a:noAutofit/>
-          </a:bodyPr>
-          <a:lstStyle xmlns:a="http://schemas.openxmlformats.org/drawingml/2006/main"/>
-          <a:p xmlns:a="http://schemas.openxmlformats.org/drawingml/2006/main">
-            <a:pPr algn="l">
-              <a:defRPr sz="1575" b="0">
-                <a:solidFill>
-                  <a:srgbClr val="ADB8C5"/>
-                </a:solidFill>
-                <a:latin typeface="DejaVu Sans"/>
-                <a:ea typeface="DejaVu Sans"/>
-                <a:cs typeface="DejaVu Sans"/>
-              </a:defRPr>
-            </a:pPr>
-            <a:r>
-              <a:rPr sz="1575" b="0">
-                <a:solidFill>
-                  <a:srgbClr val="ADB8C5"/>
-                </a:solidFill>
-                <a:latin typeface="DejaVu Sans"/>
-                <a:ea typeface="DejaVu Sans"/>
-                <a:cs typeface="DejaVu Sans"/>
-              </a:rPr>
-              <a:t>changed LOC</a:t>
-            </a:r>
-          </a:p>
-        </p:txBody>
-      </p:sp>
-      <p:sp>
-        <p:nvSpPr>
-          <p:cNvPr id="8" name="">
-            <a:extLst xmlns:a="http://schemas.openxmlformats.org/drawingml/2006/main">
-              <a:ext uri="{FF2B5EF4-FFF2-40B4-BE49-F238E27FC236}">
-                <a16:creationId xmlns:a16="http://schemas.microsoft.com/office/drawing/2014/main" id="{799313F0-D678-4B90-80CF-6D635D9B8530}"/>
+                <a16:creationId xmlns:a16="http://schemas.microsoft.com/office/drawing/2014/main" id="{F55EB63C-17FE-4407-BCF2-016A94F02BCA}"/>
               </a:ext>
             </a:extLst>
           </p:cNvPr>
@@ -10447,8 +11113,8 @@
         </p:nvSpPr>
         <p:spPr>
           <a:xfrm xmlns:a="http://schemas.openxmlformats.org/drawingml/2006/main" flipH="0" flipV="0">
-            <a:off x="2324100" y="2543175"/>
-            <a:ext cx="0" cy="714375"/>
+            <a:off x="5553075" y="1847850"/>
+            <a:ext cx="0" cy="4343400"/>
           </a:xfrm>
           <a:prstGeom xmlns:a="http://schemas.openxmlformats.org/drawingml/2006/main" prst="line">
             <a:avLst/>
@@ -10464,22 +11130,22 @@
       </p:sp>
       <p:sp>
         <p:nvSpPr>
-          <p:cNvPr id="9" name="">
-            <a:extLst xmlns:a="http://schemas.openxmlformats.org/drawingml/2006/main">
-              <a:ext uri="{FF2B5EF4-FFF2-40B4-BE49-F238E27FC236}">
-                <a16:creationId xmlns:a16="http://schemas.microsoft.com/office/drawing/2014/main" id="{98BB36D1-229A-417D-B3A8-92CBA364229B}"/>
-              </a:ext>
-            </a:extLst>
-          </p:cNvPr>
-          <p:cNvSpPr>
-            <a:spLocks xmlns:a="http://schemas.openxmlformats.org/drawingml/2006/main" noGrp="1"/>
-          </p:cNvSpPr>
-          <p:nvPr/>
-        </p:nvSpPr>
-        <p:spPr>
-          <a:xfrm xmlns:a="http://schemas.openxmlformats.org/drawingml/2006/main">
-            <a:off x="2457450" y="2438400"/>
-            <a:ext cx="1504950" cy="571500"/>
+          <p:cNvPr id="5" name="">
+            <a:extLst xmlns:a="http://schemas.openxmlformats.org/drawingml/2006/main">
+              <a:ext uri="{FF2B5EF4-FFF2-40B4-BE49-F238E27FC236}">
+                <a16:creationId xmlns:a16="http://schemas.microsoft.com/office/drawing/2014/main" id="{897F0617-8010-40E2-B5CA-EAE4E814BD4A}"/>
+              </a:ext>
+            </a:extLst>
+          </p:cNvPr>
+          <p:cNvSpPr>
+            <a:spLocks xmlns:a="http://schemas.openxmlformats.org/drawingml/2006/main" noGrp="1"/>
+          </p:cNvSpPr>
+          <p:nvPr/>
+        </p:nvSpPr>
+        <p:spPr>
+          <a:xfrm xmlns:a="http://schemas.openxmlformats.org/drawingml/2006/main">
+            <a:off x="609600" y="1857375"/>
+            <a:ext cx="4762500" cy="285750"/>
           </a:xfrm>
           <a:prstGeom xmlns:a="http://schemas.openxmlformats.org/drawingml/2006/main" prst="rect">
             <a:avLst/>
@@ -10496,47 +11162,104 @@
           <a:lstStyle xmlns:a="http://schemas.openxmlformats.org/drawingml/2006/main"/>
           <a:p xmlns:a="http://schemas.openxmlformats.org/drawingml/2006/main">
             <a:pPr algn="l">
-              <a:defRPr sz="3300" b="1">
-                <a:solidFill>
-                  <a:srgbClr val="F4F7FA"/>
-                </a:solidFill>
-                <a:latin typeface="DejaVu Sans"/>
-                <a:ea typeface="DejaVu Sans"/>
-                <a:cs typeface="DejaVu Sans"/>
-              </a:defRPr>
-            </a:pPr>
-            <a:r>
-              <a:rPr sz="3300" b="1">
-                <a:solidFill>
-                  <a:srgbClr val="F4F7FA"/>
-                </a:solidFill>
-                <a:latin typeface="DejaVu Sans"/>
-                <a:ea typeface="DejaVu Sans"/>
-                <a:cs typeface="DejaVu Sans"/>
-              </a:rPr>
-              <a:t>2.8×</a:t>
-            </a:r>
-          </a:p>
-        </p:txBody>
-      </p:sp>
-      <p:sp>
-        <p:nvSpPr>
-          <p:cNvPr id="10" name="">
-            <a:extLst xmlns:a="http://schemas.openxmlformats.org/drawingml/2006/main">
-              <a:ext uri="{FF2B5EF4-FFF2-40B4-BE49-F238E27FC236}">
-                <a16:creationId xmlns:a16="http://schemas.microsoft.com/office/drawing/2014/main" id="{C1284336-C9B1-4367-8DD2-D6B4779D1E8E}"/>
-              </a:ext>
-            </a:extLst>
-          </p:cNvPr>
-          <p:cNvSpPr>
-            <a:spLocks xmlns:a="http://schemas.openxmlformats.org/drawingml/2006/main" noGrp="1"/>
-          </p:cNvSpPr>
-          <p:nvPr/>
-        </p:nvSpPr>
-        <p:spPr>
-          <a:xfrm xmlns:a="http://schemas.openxmlformats.org/drawingml/2006/main">
-            <a:off x="2457450" y="3048000"/>
-            <a:ext cx="1524000" cy="285750"/>
+              <a:defRPr sz="1650" b="1">
+                <a:solidFill>
+                  <a:srgbClr val="28C7F7"/>
+                </a:solidFill>
+                <a:latin typeface="DejaVu Sans"/>
+                <a:ea typeface="DejaVu Sans"/>
+                <a:cs typeface="DejaVu Sans"/>
+              </a:defRPr>
+            </a:pPr>
+            <a:r>
+              <a:rPr sz="1650" b="1">
+                <a:solidFill>
+                  <a:srgbClr val="28C7F7"/>
+                </a:solidFill>
+                <a:latin typeface="DejaVu Sans"/>
+                <a:ea typeface="DejaVu Sans"/>
+                <a:cs typeface="DejaVu Sans"/>
+              </a:rPr>
+              <a:t>NBER · 2026</a:t>
+            </a:r>
+          </a:p>
+        </p:txBody>
+      </p:sp>
+      <p:sp>
+        <p:nvSpPr>
+          <p:cNvPr id="6" name="">
+            <a:extLst xmlns:a="http://schemas.openxmlformats.org/drawingml/2006/main">
+              <a:ext uri="{FF2B5EF4-FFF2-40B4-BE49-F238E27FC236}">
+                <a16:creationId xmlns:a16="http://schemas.microsoft.com/office/drawing/2014/main" id="{5EE4D21A-C789-4EB5-A4A6-FE6A6A580BCE}"/>
+              </a:ext>
+            </a:extLst>
+          </p:cNvPr>
+          <p:cNvSpPr>
+            <a:spLocks xmlns:a="http://schemas.openxmlformats.org/drawingml/2006/main" noGrp="1"/>
+          </p:cNvSpPr>
+          <p:nvPr/>
+        </p:nvSpPr>
+        <p:spPr>
+          <a:xfrm xmlns:a="http://schemas.openxmlformats.org/drawingml/2006/main">
+            <a:off x="609600" y="2343150"/>
+            <a:ext cx="1495425" cy="571500"/>
+          </a:xfrm>
+          <a:prstGeom xmlns:a="http://schemas.openxmlformats.org/drawingml/2006/main" prst="rect">
+            <a:avLst/>
+          </a:prstGeom>
+          <a:noFill xmlns:a="http://schemas.openxmlformats.org/drawingml/2006/main"/>
+          <a:ln xmlns:a="http://schemas.openxmlformats.org/drawingml/2006/main" w="0">
+            <a:noFill/>
+          </a:ln>
+        </p:spPr>
+        <p:txBody>
+          <a:bodyPr xmlns:a="http://schemas.openxmlformats.org/drawingml/2006/main" wrap="square" lIns="0" tIns="0" rIns="0" bIns="0" anchor="ctr">
+            <a:noAutofit/>
+          </a:bodyPr>
+          <a:lstStyle xmlns:a="http://schemas.openxmlformats.org/drawingml/2006/main"/>
+          <a:p xmlns:a="http://schemas.openxmlformats.org/drawingml/2006/main">
+            <a:pPr algn="l">
+              <a:defRPr sz="3225" b="1">
+                <a:solidFill>
+                  <a:srgbClr val="F4F7FA"/>
+                </a:solidFill>
+                <a:latin typeface="DejaVu Sans"/>
+                <a:ea typeface="DejaVu Sans"/>
+                <a:cs typeface="DejaVu Sans"/>
+              </a:defRPr>
+            </a:pPr>
+            <a:r>
+              <a:rPr sz="3225" b="1">
+                <a:solidFill>
+                  <a:srgbClr val="F4F7FA"/>
+                </a:solidFill>
+                <a:latin typeface="DejaVu Sans"/>
+                <a:ea typeface="DejaVu Sans"/>
+                <a:cs typeface="DejaVu Sans"/>
+              </a:rPr>
+              <a:t>17.3×</a:t>
+            </a:r>
+          </a:p>
+        </p:txBody>
+      </p:sp>
+      <p:sp>
+        <p:nvSpPr>
+          <p:cNvPr id="7" name="">
+            <a:extLst xmlns:a="http://schemas.openxmlformats.org/drawingml/2006/main">
+              <a:ext uri="{FF2B5EF4-FFF2-40B4-BE49-F238E27FC236}">
+                <a16:creationId xmlns:a16="http://schemas.microsoft.com/office/drawing/2014/main" id="{F54C00BF-1568-4FC7-9703-EB1CFE439831}"/>
+              </a:ext>
+            </a:extLst>
+          </p:cNvPr>
+          <p:cNvSpPr>
+            <a:spLocks xmlns:a="http://schemas.openxmlformats.org/drawingml/2006/main" noGrp="1"/>
+          </p:cNvSpPr>
+          <p:nvPr/>
+        </p:nvSpPr>
+        <p:spPr>
+          <a:xfrm xmlns:a="http://schemas.openxmlformats.org/drawingml/2006/main">
+            <a:off x="609600" y="2924175"/>
+            <a:ext cx="1495425" cy="285750"/>
           </a:xfrm>
           <a:prstGeom xmlns:a="http://schemas.openxmlformats.org/drawingml/2006/main" prst="rect">
             <a:avLst/>
@@ -10571,6 +11294,120 @@
                 <a:ea typeface="DejaVu Sans"/>
                 <a:cs typeface="DejaVu Sans"/>
               </a:rPr>
+              <a:t>changed LOC</a:t>
+            </a:r>
+          </a:p>
+        </p:txBody>
+      </p:sp>
+      <p:sp>
+        <p:nvSpPr>
+          <p:cNvPr id="8" name="">
+            <a:extLst xmlns:a="http://schemas.openxmlformats.org/drawingml/2006/main">
+              <a:ext uri="{FF2B5EF4-FFF2-40B4-BE49-F238E27FC236}">
+                <a16:creationId xmlns:a16="http://schemas.microsoft.com/office/drawing/2014/main" id="{0FBAE462-8D5C-4586-B4D3-D474F2712C6C}"/>
+              </a:ext>
+            </a:extLst>
+          </p:cNvPr>
+          <p:cNvSpPr>
+            <a:spLocks xmlns:a="http://schemas.openxmlformats.org/drawingml/2006/main" noGrp="1"/>
+          </p:cNvSpPr>
+          <p:nvPr/>
+        </p:nvSpPr>
+        <p:spPr>
+          <a:xfrm xmlns:a="http://schemas.openxmlformats.org/drawingml/2006/main">
+            <a:off x="2219325" y="2343150"/>
+            <a:ext cx="1495425" cy="571500"/>
+          </a:xfrm>
+          <a:prstGeom xmlns:a="http://schemas.openxmlformats.org/drawingml/2006/main" prst="rect">
+            <a:avLst/>
+          </a:prstGeom>
+          <a:noFill xmlns:a="http://schemas.openxmlformats.org/drawingml/2006/main"/>
+          <a:ln xmlns:a="http://schemas.openxmlformats.org/drawingml/2006/main" w="0">
+            <a:noFill/>
+          </a:ln>
+        </p:spPr>
+        <p:txBody>
+          <a:bodyPr xmlns:a="http://schemas.openxmlformats.org/drawingml/2006/main" wrap="square" lIns="0" tIns="0" rIns="0" bIns="0" anchor="ctr">
+            <a:noAutofit/>
+          </a:bodyPr>
+          <a:lstStyle xmlns:a="http://schemas.openxmlformats.org/drawingml/2006/main"/>
+          <a:p xmlns:a="http://schemas.openxmlformats.org/drawingml/2006/main">
+            <a:pPr algn="l">
+              <a:defRPr sz="3225" b="1">
+                <a:solidFill>
+                  <a:srgbClr val="F4F7FA"/>
+                </a:solidFill>
+                <a:latin typeface="DejaVu Sans"/>
+                <a:ea typeface="DejaVu Sans"/>
+                <a:cs typeface="DejaVu Sans"/>
+              </a:defRPr>
+            </a:pPr>
+            <a:r>
+              <a:rPr sz="3225" b="1">
+                <a:solidFill>
+                  <a:srgbClr val="F4F7FA"/>
+                </a:solidFill>
+                <a:latin typeface="DejaVu Sans"/>
+                <a:ea typeface="DejaVu Sans"/>
+                <a:cs typeface="DejaVu Sans"/>
+              </a:rPr>
+              <a:t>2.8×</a:t>
+            </a:r>
+          </a:p>
+        </p:txBody>
+      </p:sp>
+      <p:sp>
+        <p:nvSpPr>
+          <p:cNvPr id="9" name="">
+            <a:extLst xmlns:a="http://schemas.openxmlformats.org/drawingml/2006/main">
+              <a:ext uri="{FF2B5EF4-FFF2-40B4-BE49-F238E27FC236}">
+                <a16:creationId xmlns:a16="http://schemas.microsoft.com/office/drawing/2014/main" id="{4713B25E-8539-4483-82F1-2D2E23B9FFCA}"/>
+              </a:ext>
+            </a:extLst>
+          </p:cNvPr>
+          <p:cNvSpPr>
+            <a:spLocks xmlns:a="http://schemas.openxmlformats.org/drawingml/2006/main" noGrp="1"/>
+          </p:cNvSpPr>
+          <p:nvPr/>
+        </p:nvSpPr>
+        <p:spPr>
+          <a:xfrm xmlns:a="http://schemas.openxmlformats.org/drawingml/2006/main">
+            <a:off x="2219325" y="2924175"/>
+            <a:ext cx="1495425" cy="285750"/>
+          </a:xfrm>
+          <a:prstGeom xmlns:a="http://schemas.openxmlformats.org/drawingml/2006/main" prst="rect">
+            <a:avLst/>
+          </a:prstGeom>
+          <a:noFill xmlns:a="http://schemas.openxmlformats.org/drawingml/2006/main"/>
+          <a:ln xmlns:a="http://schemas.openxmlformats.org/drawingml/2006/main" w="0">
+            <a:noFill/>
+          </a:ln>
+        </p:spPr>
+        <p:txBody>
+          <a:bodyPr xmlns:a="http://schemas.openxmlformats.org/drawingml/2006/main" wrap="square" lIns="0" tIns="0" rIns="0" bIns="0" anchor="ctr">
+            <a:noAutofit/>
+          </a:bodyPr>
+          <a:lstStyle xmlns:a="http://schemas.openxmlformats.org/drawingml/2006/main"/>
+          <a:p xmlns:a="http://schemas.openxmlformats.org/drawingml/2006/main">
+            <a:pPr algn="l">
+              <a:defRPr sz="1575" b="0">
+                <a:solidFill>
+                  <a:srgbClr val="ADB8C5"/>
+                </a:solidFill>
+                <a:latin typeface="DejaVu Sans"/>
+                <a:ea typeface="DejaVu Sans"/>
+                <a:cs typeface="DejaVu Sans"/>
+              </a:defRPr>
+            </a:pPr>
+            <a:r>
+              <a:rPr sz="1575" b="0">
+                <a:solidFill>
+                  <a:srgbClr val="ADB8C5"/>
+                </a:solidFill>
+                <a:latin typeface="DejaVu Sans"/>
+                <a:ea typeface="DejaVu Sans"/>
+                <a:cs typeface="DejaVu Sans"/>
+              </a:rPr>
               <a:t>commits</a:t>
             </a:r>
           </a:p>
@@ -10578,10 +11415,1060 @@
       </p:sp>
       <p:sp>
         <p:nvSpPr>
+          <p:cNvPr id="10" name="">
+            <a:extLst xmlns:a="http://schemas.openxmlformats.org/drawingml/2006/main">
+              <a:ext uri="{FF2B5EF4-FFF2-40B4-BE49-F238E27FC236}">
+                <a16:creationId xmlns:a16="http://schemas.microsoft.com/office/drawing/2014/main" id="{379BFE28-F9E8-4DB9-89A4-E5A685CECD52}"/>
+              </a:ext>
+            </a:extLst>
+          </p:cNvPr>
+          <p:cNvSpPr>
+            <a:spLocks xmlns:a="http://schemas.openxmlformats.org/drawingml/2006/main" noGrp="1"/>
+          </p:cNvSpPr>
+          <p:nvPr/>
+        </p:nvSpPr>
+        <p:spPr>
+          <a:xfrm xmlns:a="http://schemas.openxmlformats.org/drawingml/2006/main">
+            <a:off x="3829050" y="2343150"/>
+            <a:ext cx="1495425" cy="571500"/>
+          </a:xfrm>
+          <a:prstGeom xmlns:a="http://schemas.openxmlformats.org/drawingml/2006/main" prst="rect">
+            <a:avLst/>
+          </a:prstGeom>
+          <a:noFill xmlns:a="http://schemas.openxmlformats.org/drawingml/2006/main"/>
+          <a:ln xmlns:a="http://schemas.openxmlformats.org/drawingml/2006/main" w="0">
+            <a:noFill/>
+          </a:ln>
+        </p:spPr>
+        <p:txBody>
+          <a:bodyPr xmlns:a="http://schemas.openxmlformats.org/drawingml/2006/main" wrap="square" lIns="0" tIns="0" rIns="0" bIns="0" anchor="ctr">
+            <a:noAutofit/>
+          </a:bodyPr>
+          <a:lstStyle xmlns:a="http://schemas.openxmlformats.org/drawingml/2006/main"/>
+          <a:p xmlns:a="http://schemas.openxmlformats.org/drawingml/2006/main">
+            <a:pPr algn="l">
+              <a:defRPr sz="3225" b="1">
+                <a:solidFill>
+                  <a:srgbClr val="F4F7FA"/>
+                </a:solidFill>
+                <a:latin typeface="DejaVu Sans"/>
+                <a:ea typeface="DejaVu Sans"/>
+                <a:cs typeface="DejaVu Sans"/>
+              </a:defRPr>
+            </a:pPr>
+            <a:r>
+              <a:rPr sz="3225" b="1">
+                <a:solidFill>
+                  <a:srgbClr val="F4F7FA"/>
+                </a:solidFill>
+                <a:latin typeface="DejaVu Sans"/>
+                <a:ea typeface="DejaVu Sans"/>
+                <a:cs typeface="DejaVu Sans"/>
+              </a:rPr>
+              <a:t>1.3×</a:t>
+            </a:r>
+          </a:p>
+        </p:txBody>
+      </p:sp>
+      <p:sp>
+        <p:nvSpPr>
           <p:cNvPr id="11" name="">
             <a:extLst xmlns:a="http://schemas.openxmlformats.org/drawingml/2006/main">
               <a:ext uri="{FF2B5EF4-FFF2-40B4-BE49-F238E27FC236}">
-                <a16:creationId xmlns:a16="http://schemas.microsoft.com/office/drawing/2014/main" id="{6E598E1E-295B-42E9-87F1-352CE6F3DBF0}"/>
+                <a16:creationId xmlns:a16="http://schemas.microsoft.com/office/drawing/2014/main" id="{5A77A9F1-CD3B-4A06-A6BB-726566B33126}"/>
+              </a:ext>
+            </a:extLst>
+          </p:cNvPr>
+          <p:cNvSpPr>
+            <a:spLocks xmlns:a="http://schemas.openxmlformats.org/drawingml/2006/main" noGrp="1"/>
+          </p:cNvSpPr>
+          <p:nvPr/>
+        </p:nvSpPr>
+        <p:spPr>
+          <a:xfrm xmlns:a="http://schemas.openxmlformats.org/drawingml/2006/main">
+            <a:off x="3829050" y="2924175"/>
+            <a:ext cx="1495425" cy="285750"/>
+          </a:xfrm>
+          <a:prstGeom xmlns:a="http://schemas.openxmlformats.org/drawingml/2006/main" prst="rect">
+            <a:avLst/>
+          </a:prstGeom>
+          <a:noFill xmlns:a="http://schemas.openxmlformats.org/drawingml/2006/main"/>
+          <a:ln xmlns:a="http://schemas.openxmlformats.org/drawingml/2006/main" w="0">
+            <a:noFill/>
+          </a:ln>
+        </p:spPr>
+        <p:txBody>
+          <a:bodyPr xmlns:a="http://schemas.openxmlformats.org/drawingml/2006/main" wrap="square" lIns="0" tIns="0" rIns="0" bIns="0" anchor="ctr">
+            <a:noAutofit/>
+          </a:bodyPr>
+          <a:lstStyle xmlns:a="http://schemas.openxmlformats.org/drawingml/2006/main"/>
+          <a:p xmlns:a="http://schemas.openxmlformats.org/drawingml/2006/main">
+            <a:pPr algn="l">
+              <a:defRPr sz="1575" b="0">
+                <a:solidFill>
+                  <a:srgbClr val="ADB8C5"/>
+                </a:solidFill>
+                <a:latin typeface="DejaVu Sans"/>
+                <a:ea typeface="DejaVu Sans"/>
+                <a:cs typeface="DejaVu Sans"/>
+              </a:defRPr>
+            </a:pPr>
+            <a:r>
+              <a:rPr sz="1575" b="0">
+                <a:solidFill>
+                  <a:srgbClr val="ADB8C5"/>
+                </a:solidFill>
+                <a:latin typeface="DejaVu Sans"/>
+                <a:ea typeface="DejaVu Sans"/>
+                <a:cs typeface="DejaVu Sans"/>
+              </a:rPr>
+              <a:t>releases</a:t>
+            </a:r>
+          </a:p>
+        </p:txBody>
+      </p:sp>
+      <p:sp>
+        <p:nvSpPr>
+          <p:cNvPr id="12" name="">
+            <a:extLst xmlns:a="http://schemas.openxmlformats.org/drawingml/2006/main">
+              <a:ext uri="{FF2B5EF4-FFF2-40B4-BE49-F238E27FC236}">
+                <a16:creationId xmlns:a16="http://schemas.microsoft.com/office/drawing/2014/main" id="{3DC064D5-7879-4A62-8886-9730B32E8D1C}"/>
+              </a:ext>
+            </a:extLst>
+          </p:cNvPr>
+          <p:cNvSpPr>
+            <a:spLocks xmlns:a="http://schemas.openxmlformats.org/drawingml/2006/main" noGrp="1"/>
+          </p:cNvSpPr>
+          <p:nvPr/>
+        </p:nvSpPr>
+        <p:spPr>
+          <a:xfrm xmlns:a="http://schemas.openxmlformats.org/drawingml/2006/main">
+            <a:off x="609600" y="3352800"/>
+            <a:ext cx="4724400" cy="514350"/>
+          </a:xfrm>
+          <a:prstGeom xmlns:a="http://schemas.openxmlformats.org/drawingml/2006/main" prst="rect">
+            <a:avLst/>
+          </a:prstGeom>
+          <a:noFill xmlns:a="http://schemas.openxmlformats.org/drawingml/2006/main"/>
+          <a:ln xmlns:a="http://schemas.openxmlformats.org/drawingml/2006/main" w="0">
+            <a:noFill/>
+          </a:ln>
+        </p:spPr>
+        <p:txBody>
+          <a:bodyPr xmlns:a="http://schemas.openxmlformats.org/drawingml/2006/main" wrap="square" lIns="0" tIns="0" rIns="0" bIns="0" anchor="ctr">
+            <a:noAutofit/>
+          </a:bodyPr>
+          <a:lstStyle xmlns:a="http://schemas.openxmlformats.org/drawingml/2006/main"/>
+          <a:p xmlns:a="http://schemas.openxmlformats.org/drawingml/2006/main">
+            <a:pPr algn="l">
+              <a:defRPr sz="1650" b="1">
+                <a:solidFill>
+                  <a:srgbClr val="28C7F7"/>
+                </a:solidFill>
+                <a:latin typeface="DejaVu Sans"/>
+                <a:ea typeface="DejaVu Sans"/>
+                <a:cs typeface="DejaVu Sans"/>
+              </a:defRPr>
+            </a:pPr>
+            <a:r>
+              <a:rPr sz="1650" b="1">
+                <a:solidFill>
+                  <a:srgbClr val="28C7F7"/>
+                </a:solidFill>
+                <a:latin typeface="DejaVu Sans"/>
+                <a:ea typeface="DejaVu Sans"/>
+                <a:cs typeface="DejaVu Sans"/>
+              </a:rPr>
+              <a:t>Cumulative estimates across</a:t>
+            </a:r>
+          </a:p>
+          <a:p xmlns:a="http://schemas.openxmlformats.org/drawingml/2006/main">
+            <a:pPr algn="l">
+              <a:defRPr sz="1650" b="1">
+                <a:solidFill>
+                  <a:srgbClr val="28C7F7"/>
+                </a:solidFill>
+                <a:latin typeface="DejaVu Sans"/>
+                <a:ea typeface="DejaVu Sans"/>
+                <a:cs typeface="DejaVu Sans"/>
+              </a:defRPr>
+            </a:pPr>
+            <a:r>
+              <a:rPr sz="1650" b="1">
+                <a:solidFill>
+                  <a:srgbClr val="28C7F7"/>
+                </a:solidFill>
+                <a:latin typeface="DejaVu Sans"/>
+                <a:ea typeface="DejaVu Sans"/>
+                <a:cs typeface="DejaVu Sans"/>
+              </a:rPr>
+              <a:t>autocomplete + sync + async</a:t>
+            </a:r>
+          </a:p>
+        </p:txBody>
+      </p:sp>
+      <p:sp>
+        <p:nvSpPr>
+          <p:cNvPr id="13" name="">
+            <a:extLst xmlns:a="http://schemas.openxmlformats.org/drawingml/2006/main">
+              <a:ext uri="{FF2B5EF4-FFF2-40B4-BE49-F238E27FC236}">
+                <a16:creationId xmlns:a16="http://schemas.microsoft.com/office/drawing/2014/main" id="{8A48F464-F589-4F6F-972D-F6F1CD0675C5}"/>
+              </a:ext>
+            </a:extLst>
+          </p:cNvPr>
+          <p:cNvSpPr>
+            <a:spLocks xmlns:a="http://schemas.openxmlformats.org/drawingml/2006/main" noGrp="1"/>
+          </p:cNvSpPr>
+          <p:nvPr/>
+        </p:nvSpPr>
+        <p:spPr>
+          <a:xfrm xmlns:a="http://schemas.openxmlformats.org/drawingml/2006/main">
+            <a:off x="609600" y="3914775"/>
+            <a:ext cx="4724400" cy="523875"/>
+          </a:xfrm>
+          <a:prstGeom xmlns:a="http://schemas.openxmlformats.org/drawingml/2006/main" prst="rect">
+            <a:avLst/>
+          </a:prstGeom>
+          <a:noFill xmlns:a="http://schemas.openxmlformats.org/drawingml/2006/main"/>
+          <a:ln xmlns:a="http://schemas.openxmlformats.org/drawingml/2006/main" w="0">
+            <a:noFill/>
+          </a:ln>
+        </p:spPr>
+        <p:txBody>
+          <a:bodyPr xmlns:a="http://schemas.openxmlformats.org/drawingml/2006/main" wrap="square" lIns="0" tIns="0" rIns="0" bIns="0" anchor="ctr">
+            <a:noAutofit/>
+          </a:bodyPr>
+          <a:lstStyle xmlns:a="http://schemas.openxmlformats.org/drawingml/2006/main"/>
+          <a:p xmlns:a="http://schemas.openxmlformats.org/drawingml/2006/main">
+            <a:pPr algn="l">
+              <a:defRPr sz="1500" b="0">
+                <a:solidFill>
+                  <a:srgbClr val="ADB8C5"/>
+                </a:solidFill>
+                <a:latin typeface="DejaVu Sans"/>
+                <a:ea typeface="DejaVu Sans"/>
+                <a:cs typeface="DejaVu Sans"/>
+              </a:defRPr>
+            </a:pPr>
+            <a:r>
+              <a:rPr sz="1500" b="0">
+                <a:solidFill>
+                  <a:srgbClr val="ADB8C5"/>
+                </a:solidFill>
+                <a:latin typeface="DejaVu Sans"/>
+                <a:ea typeface="DejaVu Sans"/>
+                <a:cs typeface="DejaVu Sans"/>
+              </a:rPr>
+              <a:t>Changed LOC = additions + deletions.</a:t>
+            </a:r>
+          </a:p>
+          <a:p xmlns:a="http://schemas.openxmlformats.org/drawingml/2006/main">
+            <a:pPr algn="l">
+              <a:defRPr sz="1500" b="0">
+                <a:solidFill>
+                  <a:srgbClr val="ADB8C5"/>
+                </a:solidFill>
+                <a:latin typeface="DejaVu Sans"/>
+                <a:ea typeface="DejaVu Sans"/>
+                <a:cs typeface="DejaVu Sans"/>
+              </a:defRPr>
+            </a:pPr>
+            <a:r>
+              <a:rPr sz="1500" b="0">
+                <a:solidFill>
+                  <a:srgbClr val="ADB8C5"/>
+                </a:solidFill>
+                <a:latin typeface="DejaVu Sans"/>
+                <a:ea typeface="DejaVu Sans"/>
+                <a:cs typeface="DejaVu Sans"/>
+              </a:rPr>
+              <a:t>Separate async release effect not estimated.</a:t>
+            </a:r>
+          </a:p>
+        </p:txBody>
+      </p:sp>
+      <p:sp>
+        <p:nvSpPr>
+          <p:cNvPr id="14" name="">
+            <a:extLst xmlns:a="http://schemas.openxmlformats.org/drawingml/2006/main">
+              <a:ext uri="{FF2B5EF4-FFF2-40B4-BE49-F238E27FC236}">
+                <a16:creationId xmlns:a16="http://schemas.microsoft.com/office/drawing/2014/main" id="{C19A8826-F2A7-4928-9F5B-A5B6B07B10D5}"/>
+              </a:ext>
+            </a:extLst>
+          </p:cNvPr>
+          <p:cNvSpPr>
+            <a:spLocks xmlns:a="http://schemas.openxmlformats.org/drawingml/2006/main" noGrp="1"/>
+          </p:cNvSpPr>
+          <p:nvPr/>
+        </p:nvSpPr>
+        <p:spPr>
+          <a:xfrm xmlns:a="http://schemas.openxmlformats.org/drawingml/2006/main">
+            <a:off x="609600" y="4543425"/>
+            <a:ext cx="4724400" cy="581025"/>
+          </a:xfrm>
+          <a:prstGeom xmlns:a="http://schemas.openxmlformats.org/drawingml/2006/main" prst="rect">
+            <a:avLst/>
+          </a:prstGeom>
+          <a:noFill xmlns:a="http://schemas.openxmlformats.org/drawingml/2006/main"/>
+          <a:ln xmlns:a="http://schemas.openxmlformats.org/drawingml/2006/main" w="0">
+            <a:noFill/>
+          </a:ln>
+        </p:spPr>
+        <p:txBody>
+          <a:bodyPr xmlns:a="http://schemas.openxmlformats.org/drawingml/2006/main" wrap="square" lIns="0" tIns="0" rIns="0" bIns="0" anchor="ctr">
+            <a:noAutofit/>
+          </a:bodyPr>
+          <a:lstStyle xmlns:a="http://schemas.openxmlformats.org/drawingml/2006/main"/>
+          <a:p xmlns:a="http://schemas.openxmlformats.org/drawingml/2006/main">
+            <a:pPr algn="l">
+              <a:defRPr sz="1800" b="1">
+                <a:solidFill>
+                  <a:srgbClr val="F4F7FA"/>
+                </a:solidFill>
+                <a:latin typeface="DejaVu Sans"/>
+                <a:ea typeface="DejaVu Sans"/>
+                <a:cs typeface="DejaVu Sans"/>
+              </a:defRPr>
+            </a:pPr>
+            <a:r>
+              <a:rPr sz="1800" b="1">
+                <a:solidFill>
+                  <a:srgbClr val="F4F7FA"/>
+                </a:solidFill>
+                <a:latin typeface="DejaVu Sans"/>
+                <a:ea typeface="DejaVu Sans"/>
+                <a:cs typeface="DejaVu Sans"/>
+              </a:rPr>
+              <a:t>More apps. Aggregate usage</a:t>
+            </a:r>
+          </a:p>
+          <a:p xmlns:a="http://schemas.openxmlformats.org/drawingml/2006/main">
+            <a:pPr algn="l">
+              <a:defRPr sz="1800" b="1">
+                <a:solidFill>
+                  <a:srgbClr val="F4F7FA"/>
+                </a:solidFill>
+                <a:latin typeface="DejaVu Sans"/>
+                <a:ea typeface="DejaVu Sans"/>
+                <a:cs typeface="DejaVu Sans"/>
+              </a:defRPr>
+            </a:pPr>
+            <a:r>
+              <a:rPr sz="1800" b="1">
+                <a:solidFill>
+                  <a:srgbClr val="F4F7FA"/>
+                </a:solidFill>
+                <a:latin typeface="DejaVu Sans"/>
+                <a:ea typeface="DejaVu Sans"/>
+                <a:cs typeface="DejaVu Sans"/>
+              </a:rPr>
+              <a:t>flat or lower in these cohorts.</a:t>
+            </a:r>
+          </a:p>
+        </p:txBody>
+      </p:sp>
+      <p:sp>
+        <p:nvSpPr>
+          <p:cNvPr id="15" name="">
+            <a:extLst xmlns:a="http://schemas.openxmlformats.org/drawingml/2006/main">
+              <a:ext uri="{FF2B5EF4-FFF2-40B4-BE49-F238E27FC236}">
+                <a16:creationId xmlns:a16="http://schemas.microsoft.com/office/drawing/2014/main" id="{DD06AF9E-5384-4B6C-A7E3-0869245EF48B}"/>
+              </a:ext>
+            </a:extLst>
+          </p:cNvPr>
+          <p:cNvSpPr>
+            <a:spLocks xmlns:a="http://schemas.openxmlformats.org/drawingml/2006/main" noGrp="1"/>
+          </p:cNvSpPr>
+          <p:nvPr/>
+        </p:nvSpPr>
+        <p:spPr>
+          <a:xfrm xmlns:a="http://schemas.openxmlformats.org/drawingml/2006/main">
+            <a:off x="609600" y="5248275"/>
+            <a:ext cx="2428875" cy="276225"/>
+          </a:xfrm>
+          <a:prstGeom xmlns:a="http://schemas.openxmlformats.org/drawingml/2006/main" prst="rect">
+            <a:avLst/>
+          </a:prstGeom>
+          <a:noFill xmlns:a="http://schemas.openxmlformats.org/drawingml/2006/main"/>
+          <a:ln xmlns:a="http://schemas.openxmlformats.org/drawingml/2006/main" w="0">
+            <a:noFill/>
+          </a:ln>
+        </p:spPr>
+        <p:txBody>
+          <a:bodyPr xmlns:a="http://schemas.openxmlformats.org/drawingml/2006/main" wrap="square" lIns="0" tIns="0" rIns="0" bIns="0" anchor="ctr">
+            <a:noAutofit/>
+          </a:bodyPr>
+          <a:lstStyle xmlns:a="http://schemas.openxmlformats.org/drawingml/2006/main"/>
+          <a:p xmlns:a="http://schemas.openxmlformats.org/drawingml/2006/main">
+            <a:pPr algn="l">
+              <a:defRPr sz="1500" b="0">
+                <a:solidFill>
+                  <a:srgbClr val="ADB8C5"/>
+                </a:solidFill>
+                <a:latin typeface="DejaVu Sans"/>
+                <a:ea typeface="DejaVu Sans"/>
+                <a:cs typeface="DejaVu Sans"/>
+              </a:defRPr>
+            </a:pPr>
+            <a:r>
+              <a:rPr sz="1500" b="0">
+                <a:solidFill>
+                  <a:srgbClr val="ADB8C5"/>
+                </a:solidFill>
+                <a:latin typeface="DejaVu Sans"/>
+                <a:ea typeface="DejaVu Sans"/>
+                <a:cs typeface="DejaVu Sans"/>
+              </a:rPr>
+              <a:t>iOS: &lt;10 ratings</a:t>
+            </a:r>
+          </a:p>
+        </p:txBody>
+      </p:sp>
+      <p:sp>
+        <p:nvSpPr>
+          <p:cNvPr id="16" name="">
+            <a:extLst xmlns:a="http://schemas.openxmlformats.org/drawingml/2006/main">
+              <a:ext uri="{FF2B5EF4-FFF2-40B4-BE49-F238E27FC236}">
+                <a16:creationId xmlns:a16="http://schemas.microsoft.com/office/drawing/2014/main" id="{A866D678-1302-470C-BB32-AE87028D11EC}"/>
+              </a:ext>
+            </a:extLst>
+          </p:cNvPr>
+          <p:cNvSpPr>
+            <a:spLocks xmlns:a="http://schemas.openxmlformats.org/drawingml/2006/main" noGrp="1"/>
+          </p:cNvSpPr>
+          <p:nvPr/>
+        </p:nvSpPr>
+        <p:spPr>
+          <a:xfrm xmlns:a="http://schemas.openxmlformats.org/drawingml/2006/main">
+            <a:off x="3038475" y="5248275"/>
+            <a:ext cx="2295525" cy="276225"/>
+          </a:xfrm>
+          <a:prstGeom xmlns:a="http://schemas.openxmlformats.org/drawingml/2006/main" prst="rect">
+            <a:avLst/>
+          </a:prstGeom>
+          <a:noFill xmlns:a="http://schemas.openxmlformats.org/drawingml/2006/main"/>
+          <a:ln xmlns:a="http://schemas.openxmlformats.org/drawingml/2006/main" w="0">
+            <a:noFill/>
+          </a:ln>
+        </p:spPr>
+        <p:txBody>
+          <a:bodyPr xmlns:a="http://schemas.openxmlformats.org/drawingml/2006/main" wrap="square" lIns="0" tIns="0" rIns="0" bIns="0" anchor="ctr">
+            <a:noAutofit/>
+          </a:bodyPr>
+          <a:lstStyle xmlns:a="http://schemas.openxmlformats.org/drawingml/2006/main"/>
+          <a:p xmlns:a="http://schemas.openxmlformats.org/drawingml/2006/main">
+            <a:pPr algn="r">
+              <a:defRPr sz="1725" b="1">
+                <a:solidFill>
+                  <a:srgbClr val="F5B61C"/>
+                </a:solidFill>
+                <a:latin typeface="DejaVu Sans"/>
+                <a:ea typeface="DejaVu Sans"/>
+                <a:cs typeface="DejaVu Sans"/>
+              </a:defRPr>
+            </a:pPr>
+            <a:r>
+              <a:rPr sz="1725" b="1">
+                <a:solidFill>
+                  <a:srgbClr val="F5B61C"/>
+                </a:solidFill>
+                <a:latin typeface="DejaVu Sans"/>
+                <a:ea typeface="DejaVu Sans"/>
+                <a:cs typeface="DejaVu Sans"/>
+              </a:rPr>
+              <a:t>79% → 86%</a:t>
+            </a:r>
+          </a:p>
+        </p:txBody>
+      </p:sp>
+      <p:sp>
+        <p:nvSpPr>
+          <p:cNvPr id="17" name="">
+            <a:extLst xmlns:a="http://schemas.openxmlformats.org/drawingml/2006/main">
+              <a:ext uri="{FF2B5EF4-FFF2-40B4-BE49-F238E27FC236}">
+                <a16:creationId xmlns:a16="http://schemas.microsoft.com/office/drawing/2014/main" id="{3151578C-BE5E-4CD9-80CE-82AD805A091E}"/>
+              </a:ext>
+            </a:extLst>
+          </p:cNvPr>
+          <p:cNvSpPr>
+            <a:spLocks xmlns:a="http://schemas.openxmlformats.org/drawingml/2006/main" noGrp="1"/>
+          </p:cNvSpPr>
+          <p:nvPr/>
+        </p:nvSpPr>
+        <p:spPr>
+          <a:xfrm xmlns:a="http://schemas.openxmlformats.org/drawingml/2006/main">
+            <a:off x="609600" y="5581650"/>
+            <a:ext cx="2428875" cy="276225"/>
+          </a:xfrm>
+          <a:prstGeom xmlns:a="http://schemas.openxmlformats.org/drawingml/2006/main" prst="rect">
+            <a:avLst/>
+          </a:prstGeom>
+          <a:noFill xmlns:a="http://schemas.openxmlformats.org/drawingml/2006/main"/>
+          <a:ln xmlns:a="http://schemas.openxmlformats.org/drawingml/2006/main" w="0">
+            <a:noFill/>
+          </a:ln>
+        </p:spPr>
+        <p:txBody>
+          <a:bodyPr xmlns:a="http://schemas.openxmlformats.org/drawingml/2006/main" wrap="square" lIns="0" tIns="0" rIns="0" bIns="0" anchor="ctr">
+            <a:noAutofit/>
+          </a:bodyPr>
+          <a:lstStyle xmlns:a="http://schemas.openxmlformats.org/drawingml/2006/main"/>
+          <a:p xmlns:a="http://schemas.openxmlformats.org/drawingml/2006/main">
+            <a:pPr algn="l">
+              <a:defRPr sz="1500" b="0">
+                <a:solidFill>
+                  <a:srgbClr val="ADB8C5"/>
+                </a:solidFill>
+                <a:latin typeface="DejaVu Sans"/>
+                <a:ea typeface="DejaVu Sans"/>
+                <a:cs typeface="DejaVu Sans"/>
+              </a:defRPr>
+            </a:pPr>
+            <a:r>
+              <a:rPr sz="1500" b="0">
+                <a:solidFill>
+                  <a:srgbClr val="ADB8C5"/>
+                </a:solidFill>
+                <a:latin typeface="DejaVu Sans"/>
+                <a:ea typeface="DejaVu Sans"/>
+                <a:cs typeface="DejaVu Sans"/>
+              </a:rPr>
+              <a:t>Chrome: &lt;10 downloads</a:t>
+            </a:r>
+          </a:p>
+        </p:txBody>
+      </p:sp>
+      <p:sp>
+        <p:nvSpPr>
+          <p:cNvPr id="18" name="">
+            <a:extLst xmlns:a="http://schemas.openxmlformats.org/drawingml/2006/main">
+              <a:ext uri="{FF2B5EF4-FFF2-40B4-BE49-F238E27FC236}">
+                <a16:creationId xmlns:a16="http://schemas.microsoft.com/office/drawing/2014/main" id="{027C38DA-D218-4B2A-9221-ABFDAE846734}"/>
+              </a:ext>
+            </a:extLst>
+          </p:cNvPr>
+          <p:cNvSpPr>
+            <a:spLocks xmlns:a="http://schemas.openxmlformats.org/drawingml/2006/main" noGrp="1"/>
+          </p:cNvSpPr>
+          <p:nvPr/>
+        </p:nvSpPr>
+        <p:spPr>
+          <a:xfrm xmlns:a="http://schemas.openxmlformats.org/drawingml/2006/main">
+            <a:off x="3038475" y="5581650"/>
+            <a:ext cx="2295525" cy="276225"/>
+          </a:xfrm>
+          <a:prstGeom xmlns:a="http://schemas.openxmlformats.org/drawingml/2006/main" prst="rect">
+            <a:avLst/>
+          </a:prstGeom>
+          <a:noFill xmlns:a="http://schemas.openxmlformats.org/drawingml/2006/main"/>
+          <a:ln xmlns:a="http://schemas.openxmlformats.org/drawingml/2006/main" w="0">
+            <a:noFill/>
+          </a:ln>
+        </p:spPr>
+        <p:txBody>
+          <a:bodyPr xmlns:a="http://schemas.openxmlformats.org/drawingml/2006/main" wrap="square" lIns="0" tIns="0" rIns="0" bIns="0" anchor="ctr">
+            <a:noAutofit/>
+          </a:bodyPr>
+          <a:lstStyle xmlns:a="http://schemas.openxmlformats.org/drawingml/2006/main"/>
+          <a:p xmlns:a="http://schemas.openxmlformats.org/drawingml/2006/main">
+            <a:pPr algn="r">
+              <a:defRPr sz="1725" b="1">
+                <a:solidFill>
+                  <a:srgbClr val="F5B61C"/>
+                </a:solidFill>
+                <a:latin typeface="DejaVu Sans"/>
+                <a:ea typeface="DejaVu Sans"/>
+                <a:cs typeface="DejaVu Sans"/>
+              </a:defRPr>
+            </a:pPr>
+            <a:r>
+              <a:rPr sz="1725" b="1">
+                <a:solidFill>
+                  <a:srgbClr val="F5B61C"/>
+                </a:solidFill>
+                <a:latin typeface="DejaVu Sans"/>
+                <a:ea typeface="DejaVu Sans"/>
+                <a:cs typeface="DejaVu Sans"/>
+              </a:rPr>
+              <a:t>18% → 31%</a:t>
+            </a:r>
+          </a:p>
+        </p:txBody>
+      </p:sp>
+      <p:sp>
+        <p:nvSpPr>
+          <p:cNvPr id="19" name="">
+            <a:extLst xmlns:a="http://schemas.openxmlformats.org/drawingml/2006/main">
+              <a:ext uri="{FF2B5EF4-FFF2-40B4-BE49-F238E27FC236}">
+                <a16:creationId xmlns:a16="http://schemas.microsoft.com/office/drawing/2014/main" id="{8FFE4DF5-6765-4194-814C-703A3FBA44AD}"/>
+              </a:ext>
+            </a:extLst>
+          </p:cNvPr>
+          <p:cNvSpPr>
+            <a:spLocks xmlns:a="http://schemas.openxmlformats.org/drawingml/2006/main" noGrp="1"/>
+          </p:cNvSpPr>
+          <p:nvPr/>
+        </p:nvSpPr>
+        <p:spPr>
+          <a:xfrm xmlns:a="http://schemas.openxmlformats.org/drawingml/2006/main">
+            <a:off x="609600" y="5953125"/>
+            <a:ext cx="4724400" cy="304800"/>
+          </a:xfrm>
+          <a:prstGeom xmlns:a="http://schemas.openxmlformats.org/drawingml/2006/main" prst="rect">
+            <a:avLst/>
+          </a:prstGeom>
+          <a:noFill xmlns:a="http://schemas.openxmlformats.org/drawingml/2006/main"/>
+          <a:ln xmlns:a="http://schemas.openxmlformats.org/drawingml/2006/main" w="0">
+            <a:noFill/>
+          </a:ln>
+        </p:spPr>
+        <p:txBody>
+          <a:bodyPr xmlns:a="http://schemas.openxmlformats.org/drawingml/2006/main" wrap="square" lIns="0" tIns="0" rIns="0" bIns="0" anchor="ctr">
+            <a:noAutofit/>
+          </a:bodyPr>
+          <a:lstStyle xmlns:a="http://schemas.openxmlformats.org/drawingml/2006/main"/>
+          <a:p xmlns:a="http://schemas.openxmlformats.org/drawingml/2006/main">
+            <a:pPr algn="l">
+              <a:defRPr sz="1500" b="0">
+                <a:solidFill>
+                  <a:srgbClr val="ADB8C5"/>
+                </a:solidFill>
+                <a:latin typeface="DejaVu Sans"/>
+                <a:ea typeface="DejaVu Sans"/>
+                <a:cs typeface="DejaVu Sans"/>
+              </a:defRPr>
+            </a:pPr>
+            <a:r>
+              <a:rPr sz="1500" b="0">
+                <a:solidFill>
+                  <a:srgbClr val="ADB8C5"/>
+                </a:solidFill>
+                <a:latin typeface="DejaVu Sans"/>
+                <a:ea typeface="DejaVu Sans"/>
+                <a:cs typeface="DejaVu Sans"/>
+              </a:rPr>
+              <a:t>New cohorts; first 3 months. Usage proxies.</a:t>
+            </a:r>
+          </a:p>
+        </p:txBody>
+      </p:sp>
+      <p:sp>
+        <p:nvSpPr>
+          <p:cNvPr id="20" name="">
+            <a:extLst xmlns:a="http://schemas.openxmlformats.org/drawingml/2006/main">
+              <a:ext uri="{FF2B5EF4-FFF2-40B4-BE49-F238E27FC236}">
+                <a16:creationId xmlns:a16="http://schemas.microsoft.com/office/drawing/2014/main" id="{6859F961-3112-453E-B0F5-9879FCD193DA}"/>
+              </a:ext>
+            </a:extLst>
+          </p:cNvPr>
+          <p:cNvSpPr>
+            <a:spLocks xmlns:a="http://schemas.openxmlformats.org/drawingml/2006/main" noGrp="1"/>
+          </p:cNvSpPr>
+          <p:nvPr/>
+        </p:nvSpPr>
+        <p:spPr>
+          <a:xfrm xmlns:a="http://schemas.openxmlformats.org/drawingml/2006/main">
+            <a:off x="5867400" y="1857375"/>
+            <a:ext cx="5715000" cy="285750"/>
+          </a:xfrm>
+          <a:prstGeom xmlns:a="http://schemas.openxmlformats.org/drawingml/2006/main" prst="rect">
+            <a:avLst/>
+          </a:prstGeom>
+          <a:noFill xmlns:a="http://schemas.openxmlformats.org/drawingml/2006/main"/>
+          <a:ln xmlns:a="http://schemas.openxmlformats.org/drawingml/2006/main" w="0">
+            <a:noFill/>
+          </a:ln>
+        </p:spPr>
+        <p:txBody>
+          <a:bodyPr xmlns:a="http://schemas.openxmlformats.org/drawingml/2006/main" wrap="square" lIns="0" tIns="0" rIns="0" bIns="0" anchor="ctr">
+            <a:noAutofit/>
+          </a:bodyPr>
+          <a:lstStyle xmlns:a="http://schemas.openxmlformats.org/drawingml/2006/main"/>
+          <a:p xmlns:a="http://schemas.openxmlformats.org/drawingml/2006/main">
+            <a:pPr algn="l">
+              <a:defRPr sz="1650" b="1">
+                <a:solidFill>
+                  <a:srgbClr val="28C7F7"/>
+                </a:solidFill>
+                <a:latin typeface="DejaVu Sans"/>
+                <a:ea typeface="DejaVu Sans"/>
+                <a:cs typeface="DejaVu Sans"/>
+              </a:defRPr>
+            </a:pPr>
+            <a:r>
+              <a:rPr sz="1650" b="1">
+                <a:solidFill>
+                  <a:srgbClr val="28C7F7"/>
+                </a:solidFill>
+                <a:latin typeface="DejaVu Sans"/>
+                <a:ea typeface="DejaVu Sans"/>
+                <a:cs typeface="DejaVu Sans"/>
+              </a:rPr>
+              <a:t>DORA · 2025</a:t>
+            </a:r>
+          </a:p>
+        </p:txBody>
+      </p:sp>
+      <p:sp>
+        <p:nvSpPr>
+          <p:cNvPr id="21" name="">
+            <a:extLst xmlns:a="http://schemas.openxmlformats.org/drawingml/2006/main">
+              <a:ext uri="{FF2B5EF4-FFF2-40B4-BE49-F238E27FC236}">
+                <a16:creationId xmlns:a16="http://schemas.microsoft.com/office/drawing/2014/main" id="{DBC1E5A6-724F-4689-9C9A-40491E2F7056}"/>
+              </a:ext>
+            </a:extLst>
+          </p:cNvPr>
+          <p:cNvSpPr>
+            <a:spLocks xmlns:a="http://schemas.openxmlformats.org/drawingml/2006/main" noGrp="1"/>
+          </p:cNvSpPr>
+          <p:nvPr/>
+        </p:nvSpPr>
+        <p:spPr>
+          <a:xfrm xmlns:a="http://schemas.openxmlformats.org/drawingml/2006/main">
+            <a:off x="5867400" y="2209800"/>
+            <a:ext cx="2686050" cy="457200"/>
+          </a:xfrm>
+          <a:prstGeom xmlns:a="http://schemas.openxmlformats.org/drawingml/2006/main" prst="rect">
+            <a:avLst/>
+          </a:prstGeom>
+          <a:noFill xmlns:a="http://schemas.openxmlformats.org/drawingml/2006/main"/>
+          <a:ln xmlns:a="http://schemas.openxmlformats.org/drawingml/2006/main" w="0">
+            <a:noFill/>
+          </a:ln>
+        </p:spPr>
+        <p:txBody>
+          <a:bodyPr xmlns:a="http://schemas.openxmlformats.org/drawingml/2006/main" wrap="square" lIns="0" tIns="0" rIns="0" bIns="0" anchor="ctr">
+            <a:noAutofit/>
+          </a:bodyPr>
+          <a:lstStyle xmlns:a="http://schemas.openxmlformats.org/drawingml/2006/main"/>
+          <a:p xmlns:a="http://schemas.openxmlformats.org/drawingml/2006/main">
+            <a:pPr algn="l">
+              <a:defRPr sz="2625" b="1">
+                <a:solidFill>
+                  <a:srgbClr val="F4F7FA"/>
+                </a:solidFill>
+                <a:latin typeface="DejaVu Sans"/>
+                <a:ea typeface="DejaVu Sans"/>
+                <a:cs typeface="DejaVu Sans"/>
+              </a:defRPr>
+            </a:pPr>
+            <a:r>
+              <a:rPr sz="2625" b="1">
+                <a:solidFill>
+                  <a:srgbClr val="F4F7FA"/>
+                </a:solidFill>
+                <a:latin typeface="DejaVu Sans"/>
+                <a:ea typeface="DejaVu Sans"/>
+                <a:cs typeface="DejaVu Sans"/>
+              </a:rPr>
+              <a:t>&gt;80%</a:t>
+            </a:r>
+          </a:p>
+        </p:txBody>
+      </p:sp>
+      <p:sp>
+        <p:nvSpPr>
+          <p:cNvPr id="22" name="">
+            <a:extLst xmlns:a="http://schemas.openxmlformats.org/drawingml/2006/main">
+              <a:ext uri="{FF2B5EF4-FFF2-40B4-BE49-F238E27FC236}">
+                <a16:creationId xmlns:a16="http://schemas.microsoft.com/office/drawing/2014/main" id="{33FE97EC-0B8E-42FE-8783-CCC9829ECD77}"/>
+              </a:ext>
+            </a:extLst>
+          </p:cNvPr>
+          <p:cNvSpPr>
+            <a:spLocks xmlns:a="http://schemas.openxmlformats.org/drawingml/2006/main" noGrp="1"/>
+          </p:cNvSpPr>
+          <p:nvPr/>
+        </p:nvSpPr>
+        <p:spPr>
+          <a:xfrm xmlns:a="http://schemas.openxmlformats.org/drawingml/2006/main">
+            <a:off x="5867400" y="2667000"/>
+            <a:ext cx="2686050" cy="485775"/>
+          </a:xfrm>
+          <a:prstGeom xmlns:a="http://schemas.openxmlformats.org/drawingml/2006/main" prst="rect">
+            <a:avLst/>
+          </a:prstGeom>
+          <a:noFill xmlns:a="http://schemas.openxmlformats.org/drawingml/2006/main"/>
+          <a:ln xmlns:a="http://schemas.openxmlformats.org/drawingml/2006/main" w="0">
+            <a:noFill/>
+          </a:ln>
+        </p:spPr>
+        <p:txBody>
+          <a:bodyPr xmlns:a="http://schemas.openxmlformats.org/drawingml/2006/main" wrap="square" lIns="0" tIns="0" rIns="0" bIns="0" anchor="ctr">
+            <a:noAutofit/>
+          </a:bodyPr>
+          <a:lstStyle xmlns:a="http://schemas.openxmlformats.org/drawingml/2006/main"/>
+          <a:p xmlns:a="http://schemas.openxmlformats.org/drawingml/2006/main">
+            <a:pPr algn="l">
+              <a:defRPr sz="1575" b="0">
+                <a:solidFill>
+                  <a:srgbClr val="ADB8C5"/>
+                </a:solidFill>
+                <a:latin typeface="DejaVu Sans"/>
+                <a:ea typeface="DejaVu Sans"/>
+                <a:cs typeface="DejaVu Sans"/>
+              </a:defRPr>
+            </a:pPr>
+            <a:r>
+              <a:rPr sz="1575" b="0">
+                <a:solidFill>
+                  <a:srgbClr val="ADB8C5"/>
+                </a:solidFill>
+                <a:latin typeface="DejaVu Sans"/>
+                <a:ea typeface="DejaVu Sans"/>
+                <a:cs typeface="DejaVu Sans"/>
+              </a:rPr>
+              <a:t>report productivity</a:t>
+            </a:r>
+          </a:p>
+          <a:p xmlns:a="http://schemas.openxmlformats.org/drawingml/2006/main">
+            <a:pPr algn="l">
+              <a:defRPr sz="1575" b="0">
+                <a:solidFill>
+                  <a:srgbClr val="ADB8C5"/>
+                </a:solidFill>
+                <a:latin typeface="DejaVu Sans"/>
+                <a:ea typeface="DejaVu Sans"/>
+                <a:cs typeface="DejaVu Sans"/>
+              </a:defRPr>
+            </a:pPr>
+            <a:r>
+              <a:rPr sz="1575" b="0">
+                <a:solidFill>
+                  <a:srgbClr val="ADB8C5"/>
+                </a:solidFill>
+                <a:latin typeface="DejaVu Sans"/>
+                <a:ea typeface="DejaVu Sans"/>
+                <a:cs typeface="DejaVu Sans"/>
+              </a:rPr>
+              <a:t>improvement</a:t>
+            </a:r>
+          </a:p>
+        </p:txBody>
+      </p:sp>
+      <p:sp>
+        <p:nvSpPr>
+          <p:cNvPr id="23" name="">
+            <a:extLst xmlns:a="http://schemas.openxmlformats.org/drawingml/2006/main">
+              <a:ext uri="{FF2B5EF4-FFF2-40B4-BE49-F238E27FC236}">
+                <a16:creationId xmlns:a16="http://schemas.microsoft.com/office/drawing/2014/main" id="{76F2EB1E-236F-4ECC-8A00-DD3DF7D217ED}"/>
+              </a:ext>
+            </a:extLst>
+          </p:cNvPr>
+          <p:cNvSpPr>
+            <a:spLocks xmlns:a="http://schemas.openxmlformats.org/drawingml/2006/main" noGrp="1"/>
+          </p:cNvSpPr>
+          <p:nvPr/>
+        </p:nvSpPr>
+        <p:spPr>
+          <a:xfrm xmlns:a="http://schemas.openxmlformats.org/drawingml/2006/main">
+            <a:off x="8724900" y="2209800"/>
+            <a:ext cx="2686050" cy="457200"/>
+          </a:xfrm>
+          <a:prstGeom xmlns:a="http://schemas.openxmlformats.org/drawingml/2006/main" prst="rect">
+            <a:avLst/>
+          </a:prstGeom>
+          <a:noFill xmlns:a="http://schemas.openxmlformats.org/drawingml/2006/main"/>
+          <a:ln xmlns:a="http://schemas.openxmlformats.org/drawingml/2006/main" w="0">
+            <a:noFill/>
+          </a:ln>
+        </p:spPr>
+        <p:txBody>
+          <a:bodyPr xmlns:a="http://schemas.openxmlformats.org/drawingml/2006/main" wrap="square" lIns="0" tIns="0" rIns="0" bIns="0" anchor="ctr">
+            <a:noAutofit/>
+          </a:bodyPr>
+          <a:lstStyle xmlns:a="http://schemas.openxmlformats.org/drawingml/2006/main"/>
+          <a:p xmlns:a="http://schemas.openxmlformats.org/drawingml/2006/main">
+            <a:pPr algn="l">
+              <a:defRPr sz="2625" b="1">
+                <a:solidFill>
+                  <a:srgbClr val="F4F7FA"/>
+                </a:solidFill>
+                <a:latin typeface="DejaVu Sans"/>
+                <a:ea typeface="DejaVu Sans"/>
+                <a:cs typeface="DejaVu Sans"/>
+              </a:defRPr>
+            </a:pPr>
+            <a:r>
+              <a:rPr sz="2625" b="1">
+                <a:solidFill>
+                  <a:srgbClr val="F4F7FA"/>
+                </a:solidFill>
+                <a:latin typeface="DejaVu Sans"/>
+                <a:ea typeface="DejaVu Sans"/>
+                <a:cs typeface="DejaVu Sans"/>
+              </a:rPr>
+              <a:t>59%</a:t>
+            </a:r>
+          </a:p>
+        </p:txBody>
+      </p:sp>
+      <p:sp>
+        <p:nvSpPr>
+          <p:cNvPr id="24" name="">
+            <a:extLst xmlns:a="http://schemas.openxmlformats.org/drawingml/2006/main">
+              <a:ext uri="{FF2B5EF4-FFF2-40B4-BE49-F238E27FC236}">
+                <a16:creationId xmlns:a16="http://schemas.microsoft.com/office/drawing/2014/main" id="{A632DDD1-6654-469F-A12A-FBBD706D0914}"/>
+              </a:ext>
+            </a:extLst>
+          </p:cNvPr>
+          <p:cNvSpPr>
+            <a:spLocks xmlns:a="http://schemas.openxmlformats.org/drawingml/2006/main" noGrp="1"/>
+          </p:cNvSpPr>
+          <p:nvPr/>
+        </p:nvSpPr>
+        <p:spPr>
+          <a:xfrm xmlns:a="http://schemas.openxmlformats.org/drawingml/2006/main">
+            <a:off x="8724900" y="2667000"/>
+            <a:ext cx="2686050" cy="485775"/>
+          </a:xfrm>
+          <a:prstGeom xmlns:a="http://schemas.openxmlformats.org/drawingml/2006/main" prst="rect">
+            <a:avLst/>
+          </a:prstGeom>
+          <a:noFill xmlns:a="http://schemas.openxmlformats.org/drawingml/2006/main"/>
+          <a:ln xmlns:a="http://schemas.openxmlformats.org/drawingml/2006/main" w="0">
+            <a:noFill/>
+          </a:ln>
+        </p:spPr>
+        <p:txBody>
+          <a:bodyPr xmlns:a="http://schemas.openxmlformats.org/drawingml/2006/main" wrap="square" lIns="0" tIns="0" rIns="0" bIns="0" anchor="ctr">
+            <a:noAutofit/>
+          </a:bodyPr>
+          <a:lstStyle xmlns:a="http://schemas.openxmlformats.org/drawingml/2006/main"/>
+          <a:p xmlns:a="http://schemas.openxmlformats.org/drawingml/2006/main">
+            <a:pPr algn="l">
+              <a:defRPr sz="1575" b="0">
+                <a:solidFill>
+                  <a:srgbClr val="ADB8C5"/>
+                </a:solidFill>
+                <a:latin typeface="DejaVu Sans"/>
+                <a:ea typeface="DejaVu Sans"/>
+                <a:cs typeface="DejaVu Sans"/>
+              </a:defRPr>
+            </a:pPr>
+            <a:r>
+              <a:rPr sz="1575" b="0">
+                <a:solidFill>
+                  <a:srgbClr val="ADB8C5"/>
+                </a:solidFill>
+                <a:latin typeface="DejaVu Sans"/>
+                <a:ea typeface="DejaVu Sans"/>
+                <a:cs typeface="DejaVu Sans"/>
+              </a:rPr>
+              <a:t>report code-quality</a:t>
+            </a:r>
+          </a:p>
+          <a:p xmlns:a="http://schemas.openxmlformats.org/drawingml/2006/main">
+            <a:pPr algn="l">
+              <a:defRPr sz="1575" b="0">
+                <a:solidFill>
+                  <a:srgbClr val="ADB8C5"/>
+                </a:solidFill>
+                <a:latin typeface="DejaVu Sans"/>
+                <a:ea typeface="DejaVu Sans"/>
+                <a:cs typeface="DejaVu Sans"/>
+              </a:defRPr>
+            </a:pPr>
+            <a:r>
+              <a:rPr sz="1575" b="0">
+                <a:solidFill>
+                  <a:srgbClr val="ADB8C5"/>
+                </a:solidFill>
+                <a:latin typeface="DejaVu Sans"/>
+                <a:ea typeface="DejaVu Sans"/>
+                <a:cs typeface="DejaVu Sans"/>
+              </a:rPr>
+              <a:t>improvement</a:t>
+            </a:r>
+          </a:p>
+        </p:txBody>
+      </p:sp>
+      <p:sp>
+        <p:nvSpPr>
+          <p:cNvPr id="25" name="">
+            <a:extLst xmlns:a="http://schemas.openxmlformats.org/drawingml/2006/main">
+              <a:ext uri="{FF2B5EF4-FFF2-40B4-BE49-F238E27FC236}">
+                <a16:creationId xmlns:a16="http://schemas.microsoft.com/office/drawing/2014/main" id="{AAFC766E-899F-4A96-810F-FB556037BD4E}"/>
+              </a:ext>
+            </a:extLst>
+          </p:cNvPr>
+          <p:cNvSpPr>
+            <a:spLocks xmlns:a="http://schemas.openxmlformats.org/drawingml/2006/main" noGrp="1"/>
+          </p:cNvSpPr>
+          <p:nvPr/>
+        </p:nvSpPr>
+        <p:spPr>
+          <a:xfrm xmlns:a="http://schemas.openxmlformats.org/drawingml/2006/main">
+            <a:off x="5867400" y="3238500"/>
+            <a:ext cx="5715000" cy="409575"/>
+          </a:xfrm>
+          <a:prstGeom xmlns:a="http://schemas.openxmlformats.org/drawingml/2006/main" prst="rect">
+            <a:avLst/>
+          </a:prstGeom>
+          <a:noFill xmlns:a="http://schemas.openxmlformats.org/drawingml/2006/main"/>
+          <a:ln xmlns:a="http://schemas.openxmlformats.org/drawingml/2006/main" w="0">
+            <a:noFill/>
+          </a:ln>
+        </p:spPr>
+        <p:txBody>
+          <a:bodyPr xmlns:a="http://schemas.openxmlformats.org/drawingml/2006/main" wrap="square" lIns="0" tIns="0" rIns="0" bIns="0" anchor="ctr">
+            <a:noAutofit/>
+          </a:bodyPr>
+          <a:lstStyle xmlns:a="http://schemas.openxmlformats.org/drawingml/2006/main"/>
+          <a:p xmlns:a="http://schemas.openxmlformats.org/drawingml/2006/main">
+            <a:pPr algn="l">
+              <a:defRPr sz="1500" b="0">
+                <a:solidFill>
+                  <a:srgbClr val="F5B61C"/>
+                </a:solidFill>
+                <a:latin typeface="DejaVu Sans"/>
+                <a:ea typeface="DejaVu Sans"/>
+                <a:cs typeface="DejaVu Sans"/>
+              </a:defRPr>
+            </a:pPr>
+            <a:r>
+              <a:rPr sz="1500" b="0">
+                <a:solidFill>
+                  <a:srgbClr val="F5B61C"/>
+                </a:solidFill>
+                <a:latin typeface="DejaVu Sans"/>
+                <a:ea typeface="DejaVu Sans"/>
+                <a:cs typeface="DejaVu Sans"/>
+              </a:rPr>
+              <a:t>Self-reports. Adoption is also associated</a:t>
+            </a:r>
+          </a:p>
+          <a:p xmlns:a="http://schemas.openxmlformats.org/drawingml/2006/main">
+            <a:pPr algn="l">
+              <a:defRPr sz="1500" b="0">
+                <a:solidFill>
+                  <a:srgbClr val="F5B61C"/>
+                </a:solidFill>
+                <a:latin typeface="DejaVu Sans"/>
+                <a:ea typeface="DejaVu Sans"/>
+                <a:cs typeface="DejaVu Sans"/>
+              </a:defRPr>
+            </a:pPr>
+            <a:r>
+              <a:rPr sz="1500" b="0">
+                <a:solidFill>
+                  <a:srgbClr val="F5B61C"/>
+                </a:solidFill>
+                <a:latin typeface="DejaVu Sans"/>
+                <a:ea typeface="DejaVu Sans"/>
+                <a:cs typeface="DejaVu Sans"/>
+              </a:rPr>
+              <a:t>with lower delivery stability.</a:t>
+            </a:r>
+          </a:p>
+        </p:txBody>
+      </p:sp>
+      <p:sp>
+        <p:nvSpPr>
+          <p:cNvPr id="26" name="">
+            <a:extLst xmlns:a="http://schemas.openxmlformats.org/drawingml/2006/main">
+              <a:ext uri="{FF2B5EF4-FFF2-40B4-BE49-F238E27FC236}">
+                <a16:creationId xmlns:a16="http://schemas.microsoft.com/office/drawing/2014/main" id="{723C02EF-757C-4C34-92AE-924CFCEF419F}"/>
               </a:ext>
             </a:extLst>
           </p:cNvPr>
@@ -10592,8 +12479,8 @@
         </p:nvSpPr>
         <p:spPr>
           <a:xfrm xmlns:a="http://schemas.openxmlformats.org/drawingml/2006/main" flipH="0" flipV="0">
-            <a:off x="3981450" y="2543175"/>
-            <a:ext cx="0" cy="714375"/>
+            <a:off x="5867400" y="3733800"/>
+            <a:ext cx="5715000" cy="0"/>
           </a:xfrm>
           <a:prstGeom xmlns:a="http://schemas.openxmlformats.org/drawingml/2006/main" prst="line">
             <a:avLst/>
@@ -10609,22 +12496,22 @@
       </p:sp>
       <p:sp>
         <p:nvSpPr>
-          <p:cNvPr id="12" name="">
-            <a:extLst xmlns:a="http://schemas.openxmlformats.org/drawingml/2006/main">
-              <a:ext uri="{FF2B5EF4-FFF2-40B4-BE49-F238E27FC236}">
-                <a16:creationId xmlns:a16="http://schemas.microsoft.com/office/drawing/2014/main" id="{00387AFE-8A48-41B6-AFC4-15BCC4043B97}"/>
-              </a:ext>
-            </a:extLst>
-          </p:cNvPr>
-          <p:cNvSpPr>
-            <a:spLocks xmlns:a="http://schemas.openxmlformats.org/drawingml/2006/main" noGrp="1"/>
-          </p:cNvSpPr>
-          <p:nvPr/>
-        </p:nvSpPr>
-        <p:spPr>
-          <a:xfrm xmlns:a="http://schemas.openxmlformats.org/drawingml/2006/main">
-            <a:off x="4114800" y="2438400"/>
-            <a:ext cx="1504950" cy="571500"/>
+          <p:cNvPr id="27" name="">
+            <a:extLst xmlns:a="http://schemas.openxmlformats.org/drawingml/2006/main">
+              <a:ext uri="{FF2B5EF4-FFF2-40B4-BE49-F238E27FC236}">
+                <a16:creationId xmlns:a16="http://schemas.microsoft.com/office/drawing/2014/main" id="{39C821AE-E516-4C81-85EC-F2D26FC724EB}"/>
+              </a:ext>
+            </a:extLst>
+          </p:cNvPr>
+          <p:cNvSpPr>
+            <a:spLocks xmlns:a="http://schemas.openxmlformats.org/drawingml/2006/main" noGrp="1"/>
+          </p:cNvSpPr>
+          <p:nvPr/>
+        </p:nvSpPr>
+        <p:spPr>
+          <a:xfrm xmlns:a="http://schemas.openxmlformats.org/drawingml/2006/main">
+            <a:off x="5867400" y="3867150"/>
+            <a:ext cx="5715000" cy="266700"/>
           </a:xfrm>
           <a:prstGeom xmlns:a="http://schemas.openxmlformats.org/drawingml/2006/main" prst="rect">
             <a:avLst/>
@@ -10641,47 +12528,47 @@
           <a:lstStyle xmlns:a="http://schemas.openxmlformats.org/drawingml/2006/main"/>
           <a:p xmlns:a="http://schemas.openxmlformats.org/drawingml/2006/main">
             <a:pPr algn="l">
-              <a:defRPr sz="3300" b="1">
-                <a:solidFill>
-                  <a:srgbClr val="F4F7FA"/>
-                </a:solidFill>
-                <a:latin typeface="DejaVu Sans"/>
-                <a:ea typeface="DejaVu Sans"/>
-                <a:cs typeface="DejaVu Sans"/>
-              </a:defRPr>
-            </a:pPr>
-            <a:r>
-              <a:rPr sz="3300" b="1">
-                <a:solidFill>
-                  <a:srgbClr val="F4F7FA"/>
-                </a:solidFill>
-                <a:latin typeface="DejaVu Sans"/>
-                <a:ea typeface="DejaVu Sans"/>
-                <a:cs typeface="DejaVu Sans"/>
-              </a:rPr>
-              <a:t>1.3×</a:t>
-            </a:r>
-          </a:p>
-        </p:txBody>
-      </p:sp>
-      <p:sp>
-        <p:nvSpPr>
-          <p:cNvPr id="13" name="">
-            <a:extLst xmlns:a="http://schemas.openxmlformats.org/drawingml/2006/main">
-              <a:ext uri="{FF2B5EF4-FFF2-40B4-BE49-F238E27FC236}">
-                <a16:creationId xmlns:a16="http://schemas.microsoft.com/office/drawing/2014/main" id="{1BC88615-55F0-4C8B-B69B-F22724EEE6CE}"/>
-              </a:ext>
-            </a:extLst>
-          </p:cNvPr>
-          <p:cNvSpPr>
-            <a:spLocks xmlns:a="http://schemas.openxmlformats.org/drawingml/2006/main" noGrp="1"/>
-          </p:cNvSpPr>
-          <p:nvPr/>
-        </p:nvSpPr>
-        <p:spPr>
-          <a:xfrm xmlns:a="http://schemas.openxmlformats.org/drawingml/2006/main">
-            <a:off x="4114800" y="3048000"/>
-            <a:ext cx="1524000" cy="285750"/>
+              <a:defRPr sz="1650" b="1">
+                <a:solidFill>
+                  <a:srgbClr val="28C7F7"/>
+                </a:solidFill>
+                <a:latin typeface="DejaVu Sans"/>
+                <a:ea typeface="DejaVu Sans"/>
+                <a:cs typeface="DejaVu Sans"/>
+              </a:defRPr>
+            </a:pPr>
+            <a:r>
+              <a:rPr sz="1650" b="1">
+                <a:solidFill>
+                  <a:srgbClr val="28C7F7"/>
+                </a:solidFill>
+                <a:latin typeface="DejaVu Sans"/>
+                <a:ea typeface="DejaVu Sans"/>
+                <a:cs typeface="DejaVu Sans"/>
+              </a:rPr>
+              <a:t>GITCLEAR · JUN 2026</a:t>
+            </a:r>
+          </a:p>
+        </p:txBody>
+      </p:sp>
+      <p:sp>
+        <p:nvSpPr>
+          <p:cNvPr id="28" name="">
+            <a:extLst xmlns:a="http://schemas.openxmlformats.org/drawingml/2006/main">
+              <a:ext uri="{FF2B5EF4-FFF2-40B4-BE49-F238E27FC236}">
+                <a16:creationId xmlns:a16="http://schemas.microsoft.com/office/drawing/2014/main" id="{1954C17A-8EC1-4E50-842C-2F020A8D3041}"/>
+              </a:ext>
+            </a:extLst>
+          </p:cNvPr>
+          <p:cNvSpPr>
+            <a:spLocks xmlns:a="http://schemas.openxmlformats.org/drawingml/2006/main" noGrp="1"/>
+          </p:cNvSpPr>
+          <p:nvPr/>
+        </p:nvSpPr>
+        <p:spPr>
+          <a:xfrm xmlns:a="http://schemas.openxmlformats.org/drawingml/2006/main">
+            <a:off x="5867400" y="4219575"/>
+            <a:ext cx="5715000" cy="352425"/>
           </a:xfrm>
           <a:prstGeom xmlns:a="http://schemas.openxmlformats.org/drawingml/2006/main" prst="rect">
             <a:avLst/>
@@ -10698,47 +12585,47 @@
           <a:lstStyle xmlns:a="http://schemas.openxmlformats.org/drawingml/2006/main"/>
           <a:p xmlns:a="http://schemas.openxmlformats.org/drawingml/2006/main">
             <a:pPr algn="l">
-              <a:defRPr sz="1575" b="0">
-                <a:solidFill>
-                  <a:srgbClr val="ADB8C5"/>
-                </a:solidFill>
-                <a:latin typeface="DejaVu Sans"/>
-                <a:ea typeface="DejaVu Sans"/>
-                <a:cs typeface="DejaVu Sans"/>
-              </a:defRPr>
-            </a:pPr>
-            <a:r>
-              <a:rPr sz="1575" b="0">
-                <a:solidFill>
-                  <a:srgbClr val="ADB8C5"/>
-                </a:solidFill>
-                <a:latin typeface="DejaVu Sans"/>
-                <a:ea typeface="DejaVu Sans"/>
-                <a:cs typeface="DejaVu Sans"/>
-              </a:rPr>
-              <a:t>releases</a:t>
-            </a:r>
-          </a:p>
-        </p:txBody>
-      </p:sp>
-      <p:sp>
-        <p:nvSpPr>
-          <p:cNvPr id="14" name="">
-            <a:extLst xmlns:a="http://schemas.openxmlformats.org/drawingml/2006/main">
-              <a:ext uri="{FF2B5EF4-FFF2-40B4-BE49-F238E27FC236}">
-                <a16:creationId xmlns:a16="http://schemas.microsoft.com/office/drawing/2014/main" id="{3DE64480-C0E1-45FB-B56F-D6D8021DD1E8}"/>
-              </a:ext>
-            </a:extLst>
-          </p:cNvPr>
-          <p:cNvSpPr>
-            <a:spLocks xmlns:a="http://schemas.openxmlformats.org/drawingml/2006/main" noGrp="1"/>
-          </p:cNvSpPr>
-          <p:nvPr/>
-        </p:nvSpPr>
-        <p:spPr>
-          <a:xfrm xmlns:a="http://schemas.openxmlformats.org/drawingml/2006/main">
-            <a:off x="800100" y="3524250"/>
-            <a:ext cx="4876800" cy="342900"/>
+              <a:defRPr sz="2025" b="1">
+                <a:solidFill>
+                  <a:srgbClr val="F4F7FA"/>
+                </a:solidFill>
+                <a:latin typeface="DejaVu Sans"/>
+                <a:ea typeface="DejaVu Sans"/>
+                <a:cs typeface="DejaVu Sans"/>
+              </a:defRPr>
+            </a:pPr>
+            <a:r>
+              <a:rPr sz="2025" b="1">
+                <a:solidFill>
+                  <a:srgbClr val="F4F7FA"/>
+                </a:solidFill>
+                <a:latin typeface="DejaVu Sans"/>
+                <a:ea typeface="DejaVu Sans"/>
+                <a:cs typeface="DejaVu Sans"/>
+              </a:rPr>
+              <a:t>Moved-code share: 13% → 3.8%</a:t>
+            </a:r>
+          </a:p>
+        </p:txBody>
+      </p:sp>
+      <p:sp>
+        <p:nvSpPr>
+          <p:cNvPr id="29" name="">
+            <a:extLst xmlns:a="http://schemas.openxmlformats.org/drawingml/2006/main">
+              <a:ext uri="{FF2B5EF4-FFF2-40B4-BE49-F238E27FC236}">
+                <a16:creationId xmlns:a16="http://schemas.microsoft.com/office/drawing/2014/main" id="{7EFAC698-9BE1-481A-9C25-2F3E75D268AD}"/>
+              </a:ext>
+            </a:extLst>
+          </p:cNvPr>
+          <p:cNvSpPr>
+            <a:spLocks xmlns:a="http://schemas.openxmlformats.org/drawingml/2006/main" noGrp="1"/>
+          </p:cNvSpPr>
+          <p:nvPr/>
+        </p:nvSpPr>
+        <p:spPr>
+          <a:xfrm xmlns:a="http://schemas.openxmlformats.org/drawingml/2006/main">
+            <a:off x="5867400" y="4591050"/>
+            <a:ext cx="5715000" cy="342900"/>
           </a:xfrm>
           <a:prstGeom xmlns:a="http://schemas.openxmlformats.org/drawingml/2006/main" prst="rect">
             <a:avLst/>
@@ -10755,47 +12642,47 @@
           <a:lstStyle xmlns:a="http://schemas.openxmlformats.org/drawingml/2006/main"/>
           <a:p xmlns:a="http://schemas.openxmlformats.org/drawingml/2006/main">
             <a:pPr algn="l">
-              <a:defRPr sz="1725" b="1">
-                <a:solidFill>
-                  <a:srgbClr val="28C7F7"/>
-                </a:solidFill>
-                <a:latin typeface="DejaVu Sans"/>
-                <a:ea typeface="DejaVu Sans"/>
-                <a:cs typeface="DejaVu Sans"/>
-              </a:defRPr>
-            </a:pPr>
-            <a:r>
-              <a:rPr sz="1725" b="1">
-                <a:solidFill>
-                  <a:srgbClr val="28C7F7"/>
-                </a:solidFill>
-                <a:latin typeface="DejaVu Sans"/>
-                <a:ea typeface="DejaVu Sans"/>
-                <a:cs typeface="DejaVu Sans"/>
-              </a:rPr>
-              <a:t>Autocomplete + sync + async agents</a:t>
-            </a:r>
-          </a:p>
-        </p:txBody>
-      </p:sp>
-      <p:sp>
-        <p:nvSpPr>
-          <p:cNvPr id="15" name="">
-            <a:extLst xmlns:a="http://schemas.openxmlformats.org/drawingml/2006/main">
-              <a:ext uri="{FF2B5EF4-FFF2-40B4-BE49-F238E27FC236}">
-                <a16:creationId xmlns:a16="http://schemas.microsoft.com/office/drawing/2014/main" id="{64EBDB1D-628C-4732-A150-88568E066ABB}"/>
-              </a:ext>
-            </a:extLst>
-          </p:cNvPr>
-          <p:cNvSpPr>
-            <a:spLocks xmlns:a="http://schemas.openxmlformats.org/drawingml/2006/main" noGrp="1"/>
-          </p:cNvSpPr>
-          <p:nvPr/>
-        </p:nvSpPr>
-        <p:spPr>
-          <a:xfrm xmlns:a="http://schemas.openxmlformats.org/drawingml/2006/main">
-            <a:off x="800100" y="3981450"/>
-            <a:ext cx="4876800" cy="552450"/>
+              <a:defRPr sz="2025" b="1">
+                <a:solidFill>
+                  <a:srgbClr val="F4F7FA"/>
+                </a:solidFill>
+                <a:latin typeface="DejaVu Sans"/>
+                <a:ea typeface="DejaVu Sans"/>
+                <a:cs typeface="DejaVu Sans"/>
+              </a:defRPr>
+            </a:pPr>
+            <a:r>
+              <a:rPr sz="2025" b="1">
+                <a:solidFill>
+                  <a:srgbClr val="F4F7FA"/>
+                </a:solidFill>
+                <a:latin typeface="DejaVu Sans"/>
+                <a:ea typeface="DejaVu Sans"/>
+                <a:cs typeface="DejaVu Sans"/>
+              </a:rPr>
+              <a:t>Duplicated blocks: +81%</a:t>
+            </a:r>
+          </a:p>
+        </p:txBody>
+      </p:sp>
+      <p:sp>
+        <p:nvSpPr>
+          <p:cNvPr id="30" name="">
+            <a:extLst xmlns:a="http://schemas.openxmlformats.org/drawingml/2006/main">
+              <a:ext uri="{FF2B5EF4-FFF2-40B4-BE49-F238E27FC236}">
+                <a16:creationId xmlns:a16="http://schemas.microsoft.com/office/drawing/2014/main" id="{A712DF09-64BD-4CBB-AACE-3636B1148EE6}"/>
+              </a:ext>
+            </a:extLst>
+          </p:cNvPr>
+          <p:cNvSpPr>
+            <a:spLocks xmlns:a="http://schemas.openxmlformats.org/drawingml/2006/main" noGrp="1"/>
+          </p:cNvSpPr>
+          <p:nvPr/>
+        </p:nvSpPr>
+        <p:spPr>
+          <a:xfrm xmlns:a="http://schemas.openxmlformats.org/drawingml/2006/main">
+            <a:off x="5867400" y="4962525"/>
+            <a:ext cx="5715000" cy="371475"/>
           </a:xfrm>
           <a:prstGeom xmlns:a="http://schemas.openxmlformats.org/drawingml/2006/main" prst="rect">
             <a:avLst/>
@@ -10830,7 +12717,7 @@
                 <a:ea typeface="DejaVu Sans"/>
                 <a:cs typeface="DejaVu Sans"/>
               </a:rPr>
-              <a:t>Changed LOC = additions + deletions.</a:t>
+              <a:t>2023 vs YTD 2026. Reuse/refactoring proxy,</a:t>
             </a:r>
           </a:p>
           <a:p xmlns:a="http://schemas.openxmlformats.org/drawingml/2006/main">
@@ -10853,17 +12740,17 @@
                 <a:ea typeface="DejaVu Sans"/>
                 <a:cs typeface="DejaVu Sans"/>
               </a:rPr>
-              <a:t>Separate async release effect not estimated.</a:t>
-            </a:r>
-          </a:p>
-        </p:txBody>
-      </p:sp>
-      <p:sp>
-        <p:nvSpPr>
-          <p:cNvPr id="16" name="">
-            <a:extLst xmlns:a="http://schemas.openxmlformats.org/drawingml/2006/main">
-              <a:ext uri="{FF2B5EF4-FFF2-40B4-BE49-F238E27FC236}">
-                <a16:creationId xmlns:a16="http://schemas.microsoft.com/office/drawing/2014/main" id="{A7D7B3D9-797A-4C56-80AE-1F9A611C053A}"/>
+              <a:t>not a count of refactoring tasks.</a:t>
+            </a:r>
+          </a:p>
+        </p:txBody>
+      </p:sp>
+      <p:sp>
+        <p:nvSpPr>
+          <p:cNvPr id="31" name="">
+            <a:extLst xmlns:a="http://schemas.openxmlformats.org/drawingml/2006/main">
+              <a:ext uri="{FF2B5EF4-FFF2-40B4-BE49-F238E27FC236}">
+                <a16:creationId xmlns:a16="http://schemas.microsoft.com/office/drawing/2014/main" id="{27660343-3E91-4D4F-9521-6A49D776CB43}"/>
               </a:ext>
             </a:extLst>
           </p:cNvPr>
@@ -10874,8 +12761,8 @@
         </p:nvSpPr>
         <p:spPr>
           <a:xfrm xmlns:a="http://schemas.openxmlformats.org/drawingml/2006/main" flipH="0" flipV="0">
-            <a:off x="800100" y="4667250"/>
-            <a:ext cx="4876800" cy="0"/>
+            <a:off x="5867400" y="5457825"/>
+            <a:ext cx="5715000" cy="0"/>
           </a:xfrm>
           <a:prstGeom xmlns:a="http://schemas.openxmlformats.org/drawingml/2006/main" prst="line">
             <a:avLst/>
@@ -10891,22 +12778,22 @@
       </p:sp>
       <p:sp>
         <p:nvSpPr>
-          <p:cNvPr id="17" name="">
-            <a:extLst xmlns:a="http://schemas.openxmlformats.org/drawingml/2006/main">
-              <a:ext uri="{FF2B5EF4-FFF2-40B4-BE49-F238E27FC236}">
-                <a16:creationId xmlns:a16="http://schemas.microsoft.com/office/drawing/2014/main" id="{54EF9AE1-0282-4BEA-989E-F7ED42045038}"/>
-              </a:ext>
-            </a:extLst>
-          </p:cNvPr>
-          <p:cNvSpPr>
-            <a:spLocks xmlns:a="http://schemas.openxmlformats.org/drawingml/2006/main" noGrp="1"/>
-          </p:cNvSpPr>
-          <p:nvPr/>
-        </p:nvSpPr>
-        <p:spPr>
-          <a:xfrm xmlns:a="http://schemas.openxmlformats.org/drawingml/2006/main">
-            <a:off x="800100" y="4762500"/>
-            <a:ext cx="4876800" cy="571500"/>
+          <p:cNvPr id="32" name="">
+            <a:extLst xmlns:a="http://schemas.openxmlformats.org/drawingml/2006/main">
+              <a:ext uri="{FF2B5EF4-FFF2-40B4-BE49-F238E27FC236}">
+                <a16:creationId xmlns:a16="http://schemas.microsoft.com/office/drawing/2014/main" id="{30AE3C11-D8B3-43B9-8DDF-180E116F426F}"/>
+              </a:ext>
+            </a:extLst>
+          </p:cNvPr>
+          <p:cNvSpPr>
+            <a:spLocks xmlns:a="http://schemas.openxmlformats.org/drawingml/2006/main" noGrp="1"/>
+          </p:cNvSpPr>
+          <p:nvPr/>
+        </p:nvSpPr>
+        <p:spPr>
+          <a:xfrm xmlns:a="http://schemas.openxmlformats.org/drawingml/2006/main">
+            <a:off x="5867400" y="5562600"/>
+            <a:ext cx="2800350" cy="238125"/>
           </a:xfrm>
           <a:prstGeom xmlns:a="http://schemas.openxmlformats.org/drawingml/2006/main" prst="rect">
             <a:avLst/>
@@ -10923,187 +12810,74 @@
           <a:lstStyle xmlns:a="http://schemas.openxmlformats.org/drawingml/2006/main"/>
           <a:p xmlns:a="http://schemas.openxmlformats.org/drawingml/2006/main">
             <a:pPr algn="l">
-              <a:defRPr sz="1725" b="1">
-                <a:solidFill>
-                  <a:srgbClr val="F4F7FA"/>
-                </a:solidFill>
-                <a:latin typeface="DejaVu Sans"/>
-                <a:ea typeface="DejaVu Sans"/>
-                <a:cs typeface="DejaVu Sans"/>
-              </a:defRPr>
-            </a:pPr>
-            <a:r>
-              <a:rPr sz="1725" b="1">
-                <a:solidFill>
-                  <a:srgbClr val="F4F7FA"/>
-                </a:solidFill>
-                <a:latin typeface="DejaVu Sans"/>
-                <a:ea typeface="DejaVu Sans"/>
-                <a:cs typeface="DejaVu Sans"/>
-              </a:rPr>
-              <a:t>More apps. No aggregate usage gain</a:t>
-            </a:r>
-          </a:p>
+              <a:defRPr sz="1500" b="1">
+                <a:solidFill>
+                  <a:srgbClr val="28C7F7"/>
+                </a:solidFill>
+                <a:latin typeface="DejaVu Sans"/>
+                <a:ea typeface="DejaVu Sans"/>
+                <a:cs typeface="DejaVu Sans"/>
+              </a:defRPr>
+            </a:pPr>
+            <a:r>
+              <a:rPr sz="1500" b="1">
+                <a:solidFill>
+                  <a:srgbClr val="28C7F7"/>
+                </a:solidFill>
+                <a:latin typeface="DejaVu Sans"/>
+                <a:ea typeface="DejaVu Sans"/>
+                <a:cs typeface="DejaVu Sans"/>
+              </a:rPr>
+              <a:t>METR · MAY 2026</a:t>
+            </a:r>
+          </a:p>
+        </p:txBody>
+      </p:sp>
+      <p:sp>
+        <p:nvSpPr>
+          <p:cNvPr id="33" name="">
+            <a:extLst xmlns:a="http://schemas.openxmlformats.org/drawingml/2006/main">
+              <a:ext uri="{FF2B5EF4-FFF2-40B4-BE49-F238E27FC236}">
+                <a16:creationId xmlns:a16="http://schemas.microsoft.com/office/drawing/2014/main" id="{1CFE4651-F94B-4BA8-9359-B874CE6DD4FF}"/>
+              </a:ext>
+            </a:extLst>
+          </p:cNvPr>
+          <p:cNvSpPr>
+            <a:spLocks xmlns:a="http://schemas.openxmlformats.org/drawingml/2006/main" noGrp="1"/>
+          </p:cNvSpPr>
+          <p:nvPr/>
+        </p:nvSpPr>
+        <p:spPr>
+          <a:xfrm xmlns:a="http://schemas.openxmlformats.org/drawingml/2006/main">
+            <a:off x="5867400" y="5819775"/>
+            <a:ext cx="2800350" cy="314325"/>
+          </a:xfrm>
+          <a:prstGeom xmlns:a="http://schemas.openxmlformats.org/drawingml/2006/main" prst="rect">
+            <a:avLst/>
+          </a:prstGeom>
+          <a:noFill xmlns:a="http://schemas.openxmlformats.org/drawingml/2006/main"/>
+          <a:ln xmlns:a="http://schemas.openxmlformats.org/drawingml/2006/main" w="0">
+            <a:noFill/>
+          </a:ln>
+        </p:spPr>
+        <p:txBody>
+          <a:bodyPr xmlns:a="http://schemas.openxmlformats.org/drawingml/2006/main" wrap="square" lIns="0" tIns="0" rIns="0" bIns="0" anchor="ctr">
+            <a:noAutofit/>
+          </a:bodyPr>
+          <a:lstStyle xmlns:a="http://schemas.openxmlformats.org/drawingml/2006/main"/>
           <a:p xmlns:a="http://schemas.openxmlformats.org/drawingml/2006/main">
             <a:pPr algn="l">
-              <a:defRPr sz="1725" b="1">
-                <a:solidFill>
-                  <a:srgbClr val="F4F7FA"/>
-                </a:solidFill>
-                <a:latin typeface="DejaVu Sans"/>
-                <a:ea typeface="DejaVu Sans"/>
-                <a:cs typeface="DejaVu Sans"/>
-              </a:defRPr>
-            </a:pPr>
-            <a:r>
-              <a:rPr sz="1725" b="1">
-                <a:solidFill>
-                  <a:srgbClr val="F4F7FA"/>
-                </a:solidFill>
-                <a:latin typeface="DejaVu Sans"/>
-                <a:ea typeface="DejaVu Sans"/>
-                <a:cs typeface="DejaVu Sans"/>
-              </a:rPr>
-              <a:t>in these cohorts.</a:t>
-            </a:r>
-          </a:p>
-        </p:txBody>
-      </p:sp>
-      <p:sp>
-        <p:nvSpPr>
-          <p:cNvPr id="18" name="">
-            <a:extLst xmlns:a="http://schemas.openxmlformats.org/drawingml/2006/main">
-              <a:ext uri="{FF2B5EF4-FFF2-40B4-BE49-F238E27FC236}">
-                <a16:creationId xmlns:a16="http://schemas.microsoft.com/office/drawing/2014/main" id="{31B9340B-191E-4C5B-A993-C052A8FF5BB6}"/>
-              </a:ext>
-            </a:extLst>
-          </p:cNvPr>
-          <p:cNvSpPr>
-            <a:spLocks xmlns:a="http://schemas.openxmlformats.org/drawingml/2006/main" noGrp="1"/>
-          </p:cNvSpPr>
-          <p:nvPr/>
-        </p:nvSpPr>
-        <p:spPr>
-          <a:xfrm xmlns:a="http://schemas.openxmlformats.org/drawingml/2006/main">
-            <a:off x="6153150" y="1809750"/>
-            <a:ext cx="2571750" cy="1781175"/>
-          </a:xfrm>
-          <a:prstGeom xmlns:a="http://schemas.openxmlformats.org/drawingml/2006/main" prst="rect">
-            <a:avLst/>
-          </a:prstGeom>
-          <a:solidFill xmlns:a="http://schemas.openxmlformats.org/drawingml/2006/main">
-            <a:srgbClr val="0B0F14"/>
-          </a:solidFill>
-          <a:ln xmlns:a="http://schemas.openxmlformats.org/drawingml/2006/main" w="14288">
-            <a:solidFill>
-              <a:srgbClr val="344454"/>
-            </a:solidFill>
-            <a:prstDash val="solid"/>
-          </a:ln>
-        </p:spPr>
-      </p:sp>
-      <p:sp>
-        <p:nvSpPr>
-          <p:cNvPr id="19" name="">
-            <a:extLst xmlns:a="http://schemas.openxmlformats.org/drawingml/2006/main">
-              <a:ext uri="{FF2B5EF4-FFF2-40B4-BE49-F238E27FC236}">
-                <a16:creationId xmlns:a16="http://schemas.microsoft.com/office/drawing/2014/main" id="{147320DC-62BA-4E3B-9F82-2F94D7467B12}"/>
-              </a:ext>
-            </a:extLst>
-          </p:cNvPr>
-          <p:cNvSpPr>
-            <a:spLocks xmlns:a="http://schemas.openxmlformats.org/drawingml/2006/main" noGrp="1"/>
-          </p:cNvSpPr>
-          <p:nvPr/>
-        </p:nvSpPr>
-        <p:spPr>
-          <a:xfrm xmlns:a="http://schemas.openxmlformats.org/drawingml/2006/main">
-            <a:off x="6305550" y="1943100"/>
-            <a:ext cx="2266950" cy="285750"/>
-          </a:xfrm>
-          <a:prstGeom xmlns:a="http://schemas.openxmlformats.org/drawingml/2006/main" prst="rect">
-            <a:avLst/>
-          </a:prstGeom>
-          <a:noFill xmlns:a="http://schemas.openxmlformats.org/drawingml/2006/main"/>
-          <a:ln xmlns:a="http://schemas.openxmlformats.org/drawingml/2006/main" w="0">
-            <a:noFill/>
-          </a:ln>
-        </p:spPr>
-        <p:txBody>
-          <a:bodyPr xmlns:a="http://schemas.openxmlformats.org/drawingml/2006/main" wrap="square" lIns="0" tIns="0" rIns="0" bIns="0" anchor="ctr">
-            <a:noAutofit/>
-          </a:bodyPr>
-          <a:lstStyle xmlns:a="http://schemas.openxmlformats.org/drawingml/2006/main"/>
-          <a:p xmlns:a="http://schemas.openxmlformats.org/drawingml/2006/main">
-            <a:pPr algn="l">
-              <a:defRPr sz="1350" b="1">
-                <a:solidFill>
-                  <a:srgbClr val="28C7F7"/>
-                </a:solidFill>
-                <a:latin typeface="DejaVu Sans"/>
-                <a:ea typeface="DejaVu Sans"/>
-                <a:cs typeface="DejaVu Sans"/>
-              </a:defRPr>
-            </a:pPr>
-            <a:r>
-              <a:rPr sz="1350" b="1">
-                <a:solidFill>
-                  <a:srgbClr val="28C7F7"/>
-                </a:solidFill>
-                <a:latin typeface="DejaVu Sans"/>
-                <a:ea typeface="DejaVu Sans"/>
-                <a:cs typeface="DejaVu Sans"/>
-              </a:rPr>
-              <a:t>METR · MAY 2026</a:t>
-            </a:r>
-          </a:p>
-        </p:txBody>
-      </p:sp>
-      <p:sp>
-        <p:nvSpPr>
-          <p:cNvPr id="20" name="">
-            <a:extLst xmlns:a="http://schemas.openxmlformats.org/drawingml/2006/main">
-              <a:ext uri="{FF2B5EF4-FFF2-40B4-BE49-F238E27FC236}">
-                <a16:creationId xmlns:a16="http://schemas.microsoft.com/office/drawing/2014/main" id="{5219698C-AC53-4644-AE13-D62A5782EAE7}"/>
-              </a:ext>
-            </a:extLst>
-          </p:cNvPr>
-          <p:cNvSpPr>
-            <a:spLocks xmlns:a="http://schemas.openxmlformats.org/drawingml/2006/main" noGrp="1"/>
-          </p:cNvSpPr>
-          <p:nvPr/>
-        </p:nvSpPr>
-        <p:spPr>
-          <a:xfrm xmlns:a="http://schemas.openxmlformats.org/drawingml/2006/main">
-            <a:off x="6305550" y="2286000"/>
-            <a:ext cx="2266950" cy="628650"/>
-          </a:xfrm>
-          <a:prstGeom xmlns:a="http://schemas.openxmlformats.org/drawingml/2006/main" prst="rect">
-            <a:avLst/>
-          </a:prstGeom>
-          <a:noFill xmlns:a="http://schemas.openxmlformats.org/drawingml/2006/main"/>
-          <a:ln xmlns:a="http://schemas.openxmlformats.org/drawingml/2006/main" w="0">
-            <a:noFill/>
-          </a:ln>
-        </p:spPr>
-        <p:txBody>
-          <a:bodyPr xmlns:a="http://schemas.openxmlformats.org/drawingml/2006/main" wrap="square" lIns="0" tIns="0" rIns="0" bIns="0" anchor="ctr">
-            <a:noAutofit/>
-          </a:bodyPr>
-          <a:lstStyle xmlns:a="http://schemas.openxmlformats.org/drawingml/2006/main"/>
-          <a:p xmlns:a="http://schemas.openxmlformats.org/drawingml/2006/main">
-            <a:pPr algn="l">
-              <a:defRPr sz="1875" b="1">
-                <a:solidFill>
-                  <a:srgbClr val="F4F7FA"/>
-                </a:solidFill>
-                <a:latin typeface="DejaVu Sans"/>
-                <a:ea typeface="DejaVu Sans"/>
-                <a:cs typeface="DejaVu Sans"/>
-              </a:defRPr>
-            </a:pPr>
-            <a:r>
-              <a:rPr sz="1875" b="1">
+              <a:defRPr sz="1800" b="1">
+                <a:solidFill>
+                  <a:srgbClr val="F4F7FA"/>
+                </a:solidFill>
+                <a:latin typeface="DejaVu Sans"/>
+                <a:ea typeface="DejaVu Sans"/>
+                <a:cs typeface="DejaVu Sans"/>
+              </a:defRPr>
+            </a:pPr>
+            <a:r>
+              <a:rPr sz="1800" b="1">
                 <a:solidFill>
                   <a:srgbClr val="F4F7FA"/>
                 </a:solidFill>
@@ -11118,714 +12892,22 @@
       </p:sp>
       <p:sp>
         <p:nvSpPr>
-          <p:cNvPr id="21" name="">
-            <a:extLst xmlns:a="http://schemas.openxmlformats.org/drawingml/2006/main">
-              <a:ext uri="{FF2B5EF4-FFF2-40B4-BE49-F238E27FC236}">
-                <a16:creationId xmlns:a16="http://schemas.microsoft.com/office/drawing/2014/main" id="{48D951AB-65CB-4A16-8A6A-724111067A94}"/>
-              </a:ext>
-            </a:extLst>
-          </p:cNvPr>
-          <p:cNvSpPr>
-            <a:spLocks xmlns:a="http://schemas.openxmlformats.org/drawingml/2006/main" noGrp="1"/>
-          </p:cNvSpPr>
-          <p:nvPr/>
-        </p:nvSpPr>
-        <p:spPr>
-          <a:xfrm xmlns:a="http://schemas.openxmlformats.org/drawingml/2006/main">
-            <a:off x="6305550" y="2943225"/>
-            <a:ext cx="2266950" cy="571500"/>
-          </a:xfrm>
-          <a:prstGeom xmlns:a="http://schemas.openxmlformats.org/drawingml/2006/main" prst="rect">
-            <a:avLst/>
-          </a:prstGeom>
-          <a:noFill xmlns:a="http://schemas.openxmlformats.org/drawingml/2006/main"/>
-          <a:ln xmlns:a="http://schemas.openxmlformats.org/drawingml/2006/main" w="0">
-            <a:noFill/>
-          </a:ln>
-        </p:spPr>
-        <p:txBody>
-          <a:bodyPr xmlns:a="http://schemas.openxmlformats.org/drawingml/2006/main" wrap="square" lIns="0" tIns="0" rIns="0" bIns="0" anchor="ctr">
-            <a:noAutofit/>
-          </a:bodyPr>
-          <a:lstStyle xmlns:a="http://schemas.openxmlformats.org/drawingml/2006/main"/>
-          <a:p xmlns:a="http://schemas.openxmlformats.org/drawingml/2006/main">
-            <a:pPr algn="l">
-              <a:defRPr sz="1350" b="0">
-                <a:solidFill>
-                  <a:srgbClr val="ADB8C5"/>
-                </a:solidFill>
-                <a:latin typeface="DejaVu Sans"/>
-                <a:ea typeface="DejaVu Sans"/>
-                <a:cs typeface="DejaVu Sans"/>
-              </a:defRPr>
-            </a:pPr>
-            <a:r>
-              <a:rPr sz="1350" b="0">
-                <a:solidFill>
-                  <a:srgbClr val="ADB8C5"/>
-                </a:solidFill>
-                <a:latin typeface="DejaVu Sans"/>
-                <a:ea typeface="DejaVu Sans"/>
-                <a:cs typeface="DejaVu Sans"/>
-              </a:rPr>
-              <a:t>Self-reported survey; not causal uplift</a:t>
-            </a:r>
-          </a:p>
-        </p:txBody>
-      </p:sp>
-      <p:sp>
-        <p:nvSpPr>
-          <p:cNvPr id="22" name="">
-            <a:extLst xmlns:a="http://schemas.openxmlformats.org/drawingml/2006/main">
-              <a:ext uri="{FF2B5EF4-FFF2-40B4-BE49-F238E27FC236}">
-                <a16:creationId xmlns:a16="http://schemas.microsoft.com/office/drawing/2014/main" id="{FF0BD951-CD88-475B-8DD2-DC71230479CE}"/>
-              </a:ext>
-            </a:extLst>
-          </p:cNvPr>
-          <p:cNvSpPr>
-            <a:spLocks xmlns:a="http://schemas.openxmlformats.org/drawingml/2006/main" noGrp="1"/>
-          </p:cNvSpPr>
-          <p:nvPr/>
-        </p:nvSpPr>
-        <p:spPr>
-          <a:xfrm xmlns:a="http://schemas.openxmlformats.org/drawingml/2006/main">
-            <a:off x="8896350" y="1809750"/>
-            <a:ext cx="2571750" cy="1781175"/>
-          </a:xfrm>
-          <a:prstGeom xmlns:a="http://schemas.openxmlformats.org/drawingml/2006/main" prst="rect">
-            <a:avLst/>
-          </a:prstGeom>
-          <a:solidFill xmlns:a="http://schemas.openxmlformats.org/drawingml/2006/main">
-            <a:srgbClr val="0B0F14"/>
-          </a:solidFill>
-          <a:ln xmlns:a="http://schemas.openxmlformats.org/drawingml/2006/main" w="14288">
-            <a:solidFill>
-              <a:srgbClr val="344454"/>
-            </a:solidFill>
-            <a:prstDash val="solid"/>
-          </a:ln>
-        </p:spPr>
-      </p:sp>
-      <p:sp>
-        <p:nvSpPr>
-          <p:cNvPr id="23" name="">
-            <a:extLst xmlns:a="http://schemas.openxmlformats.org/drawingml/2006/main">
-              <a:ext uri="{FF2B5EF4-FFF2-40B4-BE49-F238E27FC236}">
-                <a16:creationId xmlns:a16="http://schemas.microsoft.com/office/drawing/2014/main" id="{91B0CB2B-650B-4451-B69A-13BEF9D73B9C}"/>
-              </a:ext>
-            </a:extLst>
-          </p:cNvPr>
-          <p:cNvSpPr>
-            <a:spLocks xmlns:a="http://schemas.openxmlformats.org/drawingml/2006/main" noGrp="1"/>
-          </p:cNvSpPr>
-          <p:nvPr/>
-        </p:nvSpPr>
-        <p:spPr>
-          <a:xfrm xmlns:a="http://schemas.openxmlformats.org/drawingml/2006/main">
-            <a:off x="9048750" y="1943100"/>
-            <a:ext cx="2266950" cy="285750"/>
-          </a:xfrm>
-          <a:prstGeom xmlns:a="http://schemas.openxmlformats.org/drawingml/2006/main" prst="rect">
-            <a:avLst/>
-          </a:prstGeom>
-          <a:noFill xmlns:a="http://schemas.openxmlformats.org/drawingml/2006/main"/>
-          <a:ln xmlns:a="http://schemas.openxmlformats.org/drawingml/2006/main" w="0">
-            <a:noFill/>
-          </a:ln>
-        </p:spPr>
-        <p:txBody>
-          <a:bodyPr xmlns:a="http://schemas.openxmlformats.org/drawingml/2006/main" wrap="square" lIns="0" tIns="0" rIns="0" bIns="0" anchor="ctr">
-            <a:noAutofit/>
-          </a:bodyPr>
-          <a:lstStyle xmlns:a="http://schemas.openxmlformats.org/drawingml/2006/main"/>
-          <a:p xmlns:a="http://schemas.openxmlformats.org/drawingml/2006/main">
-            <a:pPr algn="l">
-              <a:defRPr sz="1350" b="1">
-                <a:solidFill>
-                  <a:srgbClr val="28C7F7"/>
-                </a:solidFill>
-                <a:latin typeface="DejaVu Sans"/>
-                <a:ea typeface="DejaVu Sans"/>
-                <a:cs typeface="DejaVu Sans"/>
-              </a:defRPr>
-            </a:pPr>
-            <a:r>
-              <a:rPr sz="1350" b="1">
-                <a:solidFill>
-                  <a:srgbClr val="28C7F7"/>
-                </a:solidFill>
-                <a:latin typeface="DejaVu Sans"/>
-                <a:ea typeface="DejaVu Sans"/>
-                <a:cs typeface="DejaVu Sans"/>
-              </a:rPr>
-              <a:t>DORA · 2025</a:t>
-            </a:r>
-          </a:p>
-        </p:txBody>
-      </p:sp>
-      <p:sp>
-        <p:nvSpPr>
-          <p:cNvPr id="24" name="">
-            <a:extLst xmlns:a="http://schemas.openxmlformats.org/drawingml/2006/main">
-              <a:ext uri="{FF2B5EF4-FFF2-40B4-BE49-F238E27FC236}">
-                <a16:creationId xmlns:a16="http://schemas.microsoft.com/office/drawing/2014/main" id="{791F75F7-2C15-4DAB-93ED-7C0368104BE9}"/>
-              </a:ext>
-            </a:extLst>
-          </p:cNvPr>
-          <p:cNvSpPr>
-            <a:spLocks xmlns:a="http://schemas.openxmlformats.org/drawingml/2006/main" noGrp="1"/>
-          </p:cNvSpPr>
-          <p:nvPr/>
-        </p:nvSpPr>
-        <p:spPr>
-          <a:xfrm xmlns:a="http://schemas.openxmlformats.org/drawingml/2006/main">
-            <a:off x="9048750" y="2286000"/>
-            <a:ext cx="2266950" cy="628650"/>
-          </a:xfrm>
-          <a:prstGeom xmlns:a="http://schemas.openxmlformats.org/drawingml/2006/main" prst="rect">
-            <a:avLst/>
-          </a:prstGeom>
-          <a:noFill xmlns:a="http://schemas.openxmlformats.org/drawingml/2006/main"/>
-          <a:ln xmlns:a="http://schemas.openxmlformats.org/drawingml/2006/main" w="0">
-            <a:noFill/>
-          </a:ln>
-        </p:spPr>
-        <p:txBody>
-          <a:bodyPr xmlns:a="http://schemas.openxmlformats.org/drawingml/2006/main" wrap="square" lIns="0" tIns="0" rIns="0" bIns="0" anchor="ctr">
-            <a:noAutofit/>
-          </a:bodyPr>
-          <a:lstStyle xmlns:a="http://schemas.openxmlformats.org/drawingml/2006/main"/>
-          <a:p xmlns:a="http://schemas.openxmlformats.org/drawingml/2006/main">
-            <a:pPr algn="l">
-              <a:defRPr sz="1875" b="1">
-                <a:solidFill>
-                  <a:srgbClr val="F4F7FA"/>
-                </a:solidFill>
-                <a:latin typeface="DejaVu Sans"/>
-                <a:ea typeface="DejaVu Sans"/>
-                <a:cs typeface="DejaVu Sans"/>
-              </a:defRPr>
-            </a:pPr>
-            <a:r>
-              <a:rPr sz="1875" b="1">
-                <a:solidFill>
-                  <a:srgbClr val="F4F7FA"/>
-                </a:solidFill>
-                <a:latin typeface="DejaVu Sans"/>
-                <a:ea typeface="DejaVu Sans"/>
-                <a:cs typeface="DejaVu Sans"/>
-              </a:rPr>
-              <a:t>Throughput ↑   Stability ↓</a:t>
-            </a:r>
-          </a:p>
-        </p:txBody>
-      </p:sp>
-      <p:sp>
-        <p:nvSpPr>
-          <p:cNvPr id="25" name="">
-            <a:extLst xmlns:a="http://schemas.openxmlformats.org/drawingml/2006/main">
-              <a:ext uri="{FF2B5EF4-FFF2-40B4-BE49-F238E27FC236}">
-                <a16:creationId xmlns:a16="http://schemas.microsoft.com/office/drawing/2014/main" id="{4ED7482C-D978-4C19-812E-9F684C5249F9}"/>
-              </a:ext>
-            </a:extLst>
-          </p:cNvPr>
-          <p:cNvSpPr>
-            <a:spLocks xmlns:a="http://schemas.openxmlformats.org/drawingml/2006/main" noGrp="1"/>
-          </p:cNvSpPr>
-          <p:nvPr/>
-        </p:nvSpPr>
-        <p:spPr>
-          <a:xfrm xmlns:a="http://schemas.openxmlformats.org/drawingml/2006/main">
-            <a:off x="9048750" y="2943225"/>
-            <a:ext cx="2266950" cy="571500"/>
-          </a:xfrm>
-          <a:prstGeom xmlns:a="http://schemas.openxmlformats.org/drawingml/2006/main" prst="rect">
-            <a:avLst/>
-          </a:prstGeom>
-          <a:noFill xmlns:a="http://schemas.openxmlformats.org/drawingml/2006/main"/>
-          <a:ln xmlns:a="http://schemas.openxmlformats.org/drawingml/2006/main" w="0">
-            <a:noFill/>
-          </a:ln>
-        </p:spPr>
-        <p:txBody>
-          <a:bodyPr xmlns:a="http://schemas.openxmlformats.org/drawingml/2006/main" wrap="square" lIns="0" tIns="0" rIns="0" bIns="0" anchor="ctr">
-            <a:noAutofit/>
-          </a:bodyPr>
-          <a:lstStyle xmlns:a="http://schemas.openxmlformats.org/drawingml/2006/main"/>
-          <a:p xmlns:a="http://schemas.openxmlformats.org/drawingml/2006/main">
-            <a:pPr algn="l">
-              <a:defRPr sz="1350" b="0">
-                <a:solidFill>
-                  <a:srgbClr val="ADB8C5"/>
-                </a:solidFill>
-                <a:latin typeface="DejaVu Sans"/>
-                <a:ea typeface="DejaVu Sans"/>
-                <a:cs typeface="DejaVu Sans"/>
-              </a:defRPr>
-            </a:pPr>
-            <a:r>
-              <a:rPr sz="1350" b="0">
-                <a:solidFill>
-                  <a:srgbClr val="ADB8C5"/>
-                </a:solidFill>
-                <a:latin typeface="DejaVu Sans"/>
-                <a:ea typeface="DejaVu Sans"/>
-                <a:cs typeface="DejaVu Sans"/>
-              </a:rPr>
-              <a:t>Product performance ↑; associations</a:t>
-            </a:r>
-          </a:p>
-        </p:txBody>
-      </p:sp>
-      <p:sp>
-        <p:nvSpPr>
-          <p:cNvPr id="26" name="">
-            <a:extLst xmlns:a="http://schemas.openxmlformats.org/drawingml/2006/main">
-              <a:ext uri="{FF2B5EF4-FFF2-40B4-BE49-F238E27FC236}">
-                <a16:creationId xmlns:a16="http://schemas.microsoft.com/office/drawing/2014/main" id="{705DE4AC-66F5-4251-B1EA-B8AA3F66E0EF}"/>
-              </a:ext>
-            </a:extLst>
-          </p:cNvPr>
-          <p:cNvSpPr>
-            <a:spLocks xmlns:a="http://schemas.openxmlformats.org/drawingml/2006/main" noGrp="1"/>
-          </p:cNvSpPr>
-          <p:nvPr/>
-        </p:nvSpPr>
-        <p:spPr>
-          <a:xfrm xmlns:a="http://schemas.openxmlformats.org/drawingml/2006/main">
-            <a:off x="6153150" y="3705225"/>
-            <a:ext cx="2571750" cy="1781175"/>
-          </a:xfrm>
-          <a:prstGeom xmlns:a="http://schemas.openxmlformats.org/drawingml/2006/main" prst="rect">
-            <a:avLst/>
-          </a:prstGeom>
-          <a:solidFill xmlns:a="http://schemas.openxmlformats.org/drawingml/2006/main">
-            <a:srgbClr val="0B0F14"/>
-          </a:solidFill>
-          <a:ln xmlns:a="http://schemas.openxmlformats.org/drawingml/2006/main" w="14288">
-            <a:solidFill>
-              <a:srgbClr val="344454"/>
-            </a:solidFill>
-            <a:prstDash val="solid"/>
-          </a:ln>
-        </p:spPr>
-      </p:sp>
-      <p:sp>
-        <p:nvSpPr>
-          <p:cNvPr id="27" name="">
-            <a:extLst xmlns:a="http://schemas.openxmlformats.org/drawingml/2006/main">
-              <a:ext uri="{FF2B5EF4-FFF2-40B4-BE49-F238E27FC236}">
-                <a16:creationId xmlns:a16="http://schemas.microsoft.com/office/drawing/2014/main" id="{BF1CD846-C9CD-4CE6-8543-A6B220F5DACE}"/>
-              </a:ext>
-            </a:extLst>
-          </p:cNvPr>
-          <p:cNvSpPr>
-            <a:spLocks xmlns:a="http://schemas.openxmlformats.org/drawingml/2006/main" noGrp="1"/>
-          </p:cNvSpPr>
-          <p:nvPr/>
-        </p:nvSpPr>
-        <p:spPr>
-          <a:xfrm xmlns:a="http://schemas.openxmlformats.org/drawingml/2006/main">
-            <a:off x="6305550" y="3838575"/>
-            <a:ext cx="2266950" cy="285750"/>
-          </a:xfrm>
-          <a:prstGeom xmlns:a="http://schemas.openxmlformats.org/drawingml/2006/main" prst="rect">
-            <a:avLst/>
-          </a:prstGeom>
-          <a:noFill xmlns:a="http://schemas.openxmlformats.org/drawingml/2006/main"/>
-          <a:ln xmlns:a="http://schemas.openxmlformats.org/drawingml/2006/main" w="0">
-            <a:noFill/>
-          </a:ln>
-        </p:spPr>
-        <p:txBody>
-          <a:bodyPr xmlns:a="http://schemas.openxmlformats.org/drawingml/2006/main" wrap="square" lIns="0" tIns="0" rIns="0" bIns="0" anchor="ctr">
-            <a:noAutofit/>
-          </a:bodyPr>
-          <a:lstStyle xmlns:a="http://schemas.openxmlformats.org/drawingml/2006/main"/>
-          <a:p xmlns:a="http://schemas.openxmlformats.org/drawingml/2006/main">
-            <a:pPr algn="l">
-              <a:defRPr sz="1350" b="1">
-                <a:solidFill>
-                  <a:srgbClr val="28C7F7"/>
-                </a:solidFill>
-                <a:latin typeface="DejaVu Sans"/>
-                <a:ea typeface="DejaVu Sans"/>
-                <a:cs typeface="DejaVu Sans"/>
-              </a:defRPr>
-            </a:pPr>
-            <a:r>
-              <a:rPr sz="1350" b="1">
-                <a:solidFill>
-                  <a:srgbClr val="28C7F7"/>
-                </a:solidFill>
-                <a:latin typeface="DejaVu Sans"/>
-                <a:ea typeface="DejaVu Sans"/>
-                <a:cs typeface="DejaVu Sans"/>
-              </a:rPr>
-              <a:t>GITCLEAR · JUN 2026</a:t>
-            </a:r>
-          </a:p>
-        </p:txBody>
-      </p:sp>
-      <p:sp>
-        <p:nvSpPr>
-          <p:cNvPr id="28" name="">
-            <a:extLst xmlns:a="http://schemas.openxmlformats.org/drawingml/2006/main">
-              <a:ext uri="{FF2B5EF4-FFF2-40B4-BE49-F238E27FC236}">
-                <a16:creationId xmlns:a16="http://schemas.microsoft.com/office/drawing/2014/main" id="{0F253525-28CD-4116-B369-16A32E2934B9}"/>
-              </a:ext>
-            </a:extLst>
-          </p:cNvPr>
-          <p:cNvSpPr>
-            <a:spLocks xmlns:a="http://schemas.openxmlformats.org/drawingml/2006/main" noGrp="1"/>
-          </p:cNvSpPr>
-          <p:nvPr/>
-        </p:nvSpPr>
-        <p:spPr>
-          <a:xfrm xmlns:a="http://schemas.openxmlformats.org/drawingml/2006/main">
-            <a:off x="6305550" y="4181475"/>
-            <a:ext cx="2266950" cy="628650"/>
-          </a:xfrm>
-          <a:prstGeom xmlns:a="http://schemas.openxmlformats.org/drawingml/2006/main" prst="rect">
-            <a:avLst/>
-          </a:prstGeom>
-          <a:noFill xmlns:a="http://schemas.openxmlformats.org/drawingml/2006/main"/>
-          <a:ln xmlns:a="http://schemas.openxmlformats.org/drawingml/2006/main" w="0">
-            <a:noFill/>
-          </a:ln>
-        </p:spPr>
-        <p:txBody>
-          <a:bodyPr xmlns:a="http://schemas.openxmlformats.org/drawingml/2006/main" wrap="square" lIns="0" tIns="0" rIns="0" bIns="0" anchor="ctr">
-            <a:noAutofit/>
-          </a:bodyPr>
-          <a:lstStyle xmlns:a="http://schemas.openxmlformats.org/drawingml/2006/main"/>
-          <a:p xmlns:a="http://schemas.openxmlformats.org/drawingml/2006/main">
-            <a:pPr algn="l">
-              <a:defRPr sz="1875" b="1">
-                <a:solidFill>
-                  <a:srgbClr val="F4F7FA"/>
-                </a:solidFill>
-                <a:latin typeface="DejaVu Sans"/>
-                <a:ea typeface="DejaVu Sans"/>
-                <a:cs typeface="DejaVu Sans"/>
-              </a:defRPr>
-            </a:pPr>
-            <a:r>
-              <a:rPr sz="1875" b="1">
-                <a:solidFill>
-                  <a:srgbClr val="F4F7FA"/>
-                </a:solidFill>
-                <a:latin typeface="DejaVu Sans"/>
-                <a:ea typeface="DejaVu Sans"/>
-                <a:cs typeface="DejaVu Sans"/>
-              </a:rPr>
-              <a:t>13% → 3.8%</a:t>
-            </a:r>
-          </a:p>
-        </p:txBody>
-      </p:sp>
-      <p:sp>
-        <p:nvSpPr>
-          <p:cNvPr id="29" name="">
-            <a:extLst xmlns:a="http://schemas.openxmlformats.org/drawingml/2006/main">
-              <a:ext uri="{FF2B5EF4-FFF2-40B4-BE49-F238E27FC236}">
-                <a16:creationId xmlns:a16="http://schemas.microsoft.com/office/drawing/2014/main" id="{DF732AC1-D1C3-42DD-A10C-D30F7972FA8D}"/>
-              </a:ext>
-            </a:extLst>
-          </p:cNvPr>
-          <p:cNvSpPr>
-            <a:spLocks xmlns:a="http://schemas.openxmlformats.org/drawingml/2006/main" noGrp="1"/>
-          </p:cNvSpPr>
-          <p:nvPr/>
-        </p:nvSpPr>
-        <p:spPr>
-          <a:xfrm xmlns:a="http://schemas.openxmlformats.org/drawingml/2006/main">
-            <a:off x="6305550" y="4838700"/>
-            <a:ext cx="2266950" cy="571500"/>
-          </a:xfrm>
-          <a:prstGeom xmlns:a="http://schemas.openxmlformats.org/drawingml/2006/main" prst="rect">
-            <a:avLst/>
-          </a:prstGeom>
-          <a:noFill xmlns:a="http://schemas.openxmlformats.org/drawingml/2006/main"/>
-          <a:ln xmlns:a="http://schemas.openxmlformats.org/drawingml/2006/main" w="0">
-            <a:noFill/>
-          </a:ln>
-        </p:spPr>
-        <p:txBody>
-          <a:bodyPr xmlns:a="http://schemas.openxmlformats.org/drawingml/2006/main" wrap="square" lIns="0" tIns="0" rIns="0" bIns="0" anchor="ctr">
-            <a:noAutofit/>
-          </a:bodyPr>
-          <a:lstStyle xmlns:a="http://schemas.openxmlformats.org/drawingml/2006/main"/>
-          <a:p xmlns:a="http://schemas.openxmlformats.org/drawingml/2006/main">
-            <a:pPr algn="l">
-              <a:defRPr sz="1350" b="0">
-                <a:solidFill>
-                  <a:srgbClr val="ADB8C5"/>
-                </a:solidFill>
-                <a:latin typeface="DejaVu Sans"/>
-                <a:ea typeface="DejaVu Sans"/>
-                <a:cs typeface="DejaVu Sans"/>
-              </a:defRPr>
-            </a:pPr>
-            <a:r>
-              <a:rPr sz="1350" b="0">
-                <a:solidFill>
-                  <a:srgbClr val="ADB8C5"/>
-                </a:solidFill>
-                <a:latin typeface="DejaVu Sans"/>
-                <a:ea typeface="DejaVu Sans"/>
-                <a:cs typeface="DejaVu Sans"/>
-              </a:rPr>
-              <a:t>Refactoring share; 2023 → YTD 2026</a:t>
-            </a:r>
-          </a:p>
-        </p:txBody>
-      </p:sp>
-      <p:sp>
-        <p:nvSpPr>
-          <p:cNvPr id="30" name="">
-            <a:extLst xmlns:a="http://schemas.openxmlformats.org/drawingml/2006/main">
-              <a:ext uri="{FF2B5EF4-FFF2-40B4-BE49-F238E27FC236}">
-                <a16:creationId xmlns:a16="http://schemas.microsoft.com/office/drawing/2014/main" id="{018D4C8C-5F1D-4E7B-846D-B75C3BA04DDE}"/>
-              </a:ext>
-            </a:extLst>
-          </p:cNvPr>
-          <p:cNvSpPr>
-            <a:spLocks xmlns:a="http://schemas.openxmlformats.org/drawingml/2006/main" noGrp="1"/>
-          </p:cNvSpPr>
-          <p:nvPr/>
-        </p:nvSpPr>
-        <p:spPr>
-          <a:xfrm xmlns:a="http://schemas.openxmlformats.org/drawingml/2006/main">
-            <a:off x="8896350" y="3705225"/>
-            <a:ext cx="2571750" cy="1781175"/>
-          </a:xfrm>
-          <a:prstGeom xmlns:a="http://schemas.openxmlformats.org/drawingml/2006/main" prst="rect">
-            <a:avLst/>
-          </a:prstGeom>
-          <a:solidFill xmlns:a="http://schemas.openxmlformats.org/drawingml/2006/main">
-            <a:srgbClr val="0B0F14"/>
-          </a:solidFill>
-          <a:ln xmlns:a="http://schemas.openxmlformats.org/drawingml/2006/main" w="14288">
-            <a:solidFill>
-              <a:srgbClr val="344454"/>
-            </a:solidFill>
-            <a:prstDash val="solid"/>
-          </a:ln>
-        </p:spPr>
-      </p:sp>
-      <p:sp>
-        <p:nvSpPr>
-          <p:cNvPr id="31" name="">
-            <a:extLst xmlns:a="http://schemas.openxmlformats.org/drawingml/2006/main">
-              <a:ext uri="{FF2B5EF4-FFF2-40B4-BE49-F238E27FC236}">
-                <a16:creationId xmlns:a16="http://schemas.microsoft.com/office/drawing/2014/main" id="{9A3A349D-958D-447B-B290-88498CDC4705}"/>
-              </a:ext>
-            </a:extLst>
-          </p:cNvPr>
-          <p:cNvSpPr>
-            <a:spLocks xmlns:a="http://schemas.openxmlformats.org/drawingml/2006/main" noGrp="1"/>
-          </p:cNvSpPr>
-          <p:nvPr/>
-        </p:nvSpPr>
-        <p:spPr>
-          <a:xfrm xmlns:a="http://schemas.openxmlformats.org/drawingml/2006/main">
-            <a:off x="9048750" y="3838575"/>
-            <a:ext cx="2266950" cy="285750"/>
-          </a:xfrm>
-          <a:prstGeom xmlns:a="http://schemas.openxmlformats.org/drawingml/2006/main" prst="rect">
-            <a:avLst/>
-          </a:prstGeom>
-          <a:noFill xmlns:a="http://schemas.openxmlformats.org/drawingml/2006/main"/>
-          <a:ln xmlns:a="http://schemas.openxmlformats.org/drawingml/2006/main" w="0">
-            <a:noFill/>
-          </a:ln>
-        </p:spPr>
-        <p:txBody>
-          <a:bodyPr xmlns:a="http://schemas.openxmlformats.org/drawingml/2006/main" wrap="square" lIns="0" tIns="0" rIns="0" bIns="0" anchor="ctr">
-            <a:noAutofit/>
-          </a:bodyPr>
-          <a:lstStyle xmlns:a="http://schemas.openxmlformats.org/drawingml/2006/main"/>
-          <a:p xmlns:a="http://schemas.openxmlformats.org/drawingml/2006/main">
-            <a:pPr algn="l">
-              <a:defRPr sz="1350" b="1">
-                <a:solidFill>
-                  <a:srgbClr val="28C7F7"/>
-                </a:solidFill>
-                <a:latin typeface="DejaVu Sans"/>
-                <a:ea typeface="DejaVu Sans"/>
-                <a:cs typeface="DejaVu Sans"/>
-              </a:defRPr>
-            </a:pPr>
-            <a:r>
-              <a:rPr sz="1350" b="1">
-                <a:solidFill>
-                  <a:srgbClr val="28C7F7"/>
-                </a:solidFill>
-                <a:latin typeface="DejaVu Sans"/>
-                <a:ea typeface="DejaVu Sans"/>
-                <a:cs typeface="DejaVu Sans"/>
-              </a:rPr>
-              <a:t>XU + AGARWAL · 2026</a:t>
-            </a:r>
-          </a:p>
-        </p:txBody>
-      </p:sp>
-      <p:sp>
-        <p:nvSpPr>
-          <p:cNvPr id="32" name="">
-            <a:extLst xmlns:a="http://schemas.openxmlformats.org/drawingml/2006/main">
-              <a:ext uri="{FF2B5EF4-FFF2-40B4-BE49-F238E27FC236}">
-                <a16:creationId xmlns:a16="http://schemas.microsoft.com/office/drawing/2014/main" id="{F58CEB16-58AA-4F07-98B7-AA4F6A4829A1}"/>
-              </a:ext>
-            </a:extLst>
-          </p:cNvPr>
-          <p:cNvSpPr>
-            <a:spLocks xmlns:a="http://schemas.openxmlformats.org/drawingml/2006/main" noGrp="1"/>
-          </p:cNvSpPr>
-          <p:nvPr/>
-        </p:nvSpPr>
-        <p:spPr>
-          <a:xfrm xmlns:a="http://schemas.openxmlformats.org/drawingml/2006/main">
-            <a:off x="9048750" y="4181475"/>
-            <a:ext cx="2266950" cy="628650"/>
-          </a:xfrm>
-          <a:prstGeom xmlns:a="http://schemas.openxmlformats.org/drawingml/2006/main" prst="rect">
-            <a:avLst/>
-          </a:prstGeom>
-          <a:noFill xmlns:a="http://schemas.openxmlformats.org/drawingml/2006/main"/>
-          <a:ln xmlns:a="http://schemas.openxmlformats.org/drawingml/2006/main" w="0">
-            <a:noFill/>
-          </a:ln>
-        </p:spPr>
-        <p:txBody>
-          <a:bodyPr xmlns:a="http://schemas.openxmlformats.org/drawingml/2006/main" wrap="square" lIns="0" tIns="0" rIns="0" bIns="0" anchor="ctr">
-            <a:noAutofit/>
-          </a:bodyPr>
-          <a:lstStyle xmlns:a="http://schemas.openxmlformats.org/drawingml/2006/main"/>
-          <a:p xmlns:a="http://schemas.openxmlformats.org/drawingml/2006/main">
-            <a:pPr algn="l">
-              <a:defRPr sz="1875" b="1">
-                <a:solidFill>
-                  <a:srgbClr val="F4F7FA"/>
-                </a:solidFill>
-                <a:latin typeface="DejaVu Sans"/>
-                <a:ea typeface="DejaVu Sans"/>
-                <a:cs typeface="DejaVu Sans"/>
-              </a:defRPr>
-            </a:pPr>
-            <a:r>
-              <a:rPr sz="1875" b="1">
-                <a:solidFill>
-                  <a:srgbClr val="F4F7FA"/>
-                </a:solidFill>
-                <a:latin typeface="DejaVu Sans"/>
-                <a:ea typeface="DejaVu Sans"/>
-                <a:cs typeface="DejaVu Sans"/>
-              </a:rPr>
-              <a:t>Complexity +35% / +43%</a:t>
-            </a:r>
-          </a:p>
-        </p:txBody>
-      </p:sp>
-      <p:sp>
-        <p:nvSpPr>
-          <p:cNvPr id="33" name="">
-            <a:extLst xmlns:a="http://schemas.openxmlformats.org/drawingml/2006/main">
-              <a:ext uri="{FF2B5EF4-FFF2-40B4-BE49-F238E27FC236}">
-                <a16:creationId xmlns:a16="http://schemas.microsoft.com/office/drawing/2014/main" id="{C555F85E-C9F0-4F8F-8086-E1F3C1CDEC42}"/>
-              </a:ext>
-            </a:extLst>
-          </p:cNvPr>
-          <p:cNvSpPr>
-            <a:spLocks xmlns:a="http://schemas.openxmlformats.org/drawingml/2006/main" noGrp="1"/>
-          </p:cNvSpPr>
-          <p:nvPr/>
-        </p:nvSpPr>
-        <p:spPr>
-          <a:xfrm xmlns:a="http://schemas.openxmlformats.org/drawingml/2006/main">
-            <a:off x="9048750" y="4838700"/>
-            <a:ext cx="2266950" cy="571500"/>
-          </a:xfrm>
-          <a:prstGeom xmlns:a="http://schemas.openxmlformats.org/drawingml/2006/main" prst="rect">
-            <a:avLst/>
-          </a:prstGeom>
-          <a:noFill xmlns:a="http://schemas.openxmlformats.org/drawingml/2006/main"/>
-          <a:ln xmlns:a="http://schemas.openxmlformats.org/drawingml/2006/main" w="0">
-            <a:noFill/>
-          </a:ln>
-        </p:spPr>
-        <p:txBody>
-          <a:bodyPr xmlns:a="http://schemas.openxmlformats.org/drawingml/2006/main" wrap="square" lIns="0" tIns="0" rIns="0" bIns="0" anchor="ctr">
-            <a:noAutofit/>
-          </a:bodyPr>
-          <a:lstStyle xmlns:a="http://schemas.openxmlformats.org/drawingml/2006/main"/>
-          <a:p xmlns:a="http://schemas.openxmlformats.org/drawingml/2006/main">
-            <a:pPr algn="l">
-              <a:defRPr sz="1350" b="0">
-                <a:solidFill>
-                  <a:srgbClr val="ADB8C5"/>
-                </a:solidFill>
-                <a:latin typeface="DejaVu Sans"/>
-                <a:ea typeface="DejaVu Sans"/>
-                <a:cs typeface="DejaVu Sans"/>
-              </a:defRPr>
-            </a:pPr>
-            <a:r>
-              <a:rPr sz="1350" b="0">
-                <a:solidFill>
-                  <a:srgbClr val="ADB8C5"/>
-                </a:solidFill>
-                <a:latin typeface="DejaVu Sans"/>
-                <a:ea typeface="DejaVu Sans"/>
-                <a:cs typeface="DejaVu Sans"/>
-              </a:rPr>
-              <a:t>Agarwal: complexity proxy.</a:t>
-            </a:r>
-          </a:p>
-          <a:p xmlns:a="http://schemas.openxmlformats.org/drawingml/2006/main">
-            <a:pPr algn="l">
-              <a:defRPr sz="1350" b="0">
-                <a:solidFill>
-                  <a:srgbClr val="ADB8C5"/>
-                </a:solidFill>
-                <a:latin typeface="DejaVu Sans"/>
-                <a:ea typeface="DejaVu Sans"/>
-                <a:cs typeface="DejaVu Sans"/>
-              </a:defRPr>
-            </a:pPr>
-            <a:r>
-              <a:rPr sz="1350" b="0">
-                <a:solidFill>
-                  <a:srgbClr val="ADB8C5"/>
-                </a:solidFill>
-                <a:latin typeface="DejaVu Sans"/>
-                <a:ea typeface="DejaVu Sans"/>
-                <a:cs typeface="DejaVu Sans"/>
-              </a:rPr>
-              <a:t>Xu: contributor workload.</a:t>
-            </a:r>
-          </a:p>
-        </p:txBody>
-      </p:sp>
-      <p:sp>
-        <p:nvSpPr>
           <p:cNvPr id="34" name="">
             <a:extLst xmlns:a="http://schemas.openxmlformats.org/drawingml/2006/main">
               <a:ext uri="{FF2B5EF4-FFF2-40B4-BE49-F238E27FC236}">
-                <a16:creationId xmlns:a16="http://schemas.microsoft.com/office/drawing/2014/main" id="{15E479F5-237B-457A-9F17-EA23231FACFC}"/>
-              </a:ext>
-            </a:extLst>
-          </p:cNvPr>
-          <p:cNvSpPr>
-            <a:spLocks xmlns:a="http://schemas.openxmlformats.org/drawingml/2006/main" noGrp="1"/>
-          </p:cNvSpPr>
-          <p:nvPr/>
-        </p:nvSpPr>
-        <p:spPr>
-          <a:xfrm xmlns:a="http://schemas.openxmlformats.org/drawingml/2006/main">
-            <a:off x="609600" y="5562600"/>
-            <a:ext cx="2895600" cy="285750"/>
+                <a16:creationId xmlns:a16="http://schemas.microsoft.com/office/drawing/2014/main" id="{72B0BC0D-D80D-46D8-84DE-09089B92BF4D}"/>
+              </a:ext>
+            </a:extLst>
+          </p:cNvPr>
+          <p:cNvSpPr>
+            <a:spLocks xmlns:a="http://schemas.openxmlformats.org/drawingml/2006/main" noGrp="1"/>
+          </p:cNvSpPr>
+          <p:nvPr/>
+        </p:nvSpPr>
+        <p:spPr>
+          <a:xfrm xmlns:a="http://schemas.openxmlformats.org/drawingml/2006/main">
+            <a:off x="5867400" y="6134100"/>
+            <a:ext cx="2800350" cy="238125"/>
           </a:xfrm>
           <a:prstGeom xmlns:a="http://schemas.openxmlformats.org/drawingml/2006/main" prst="rect">
             <a:avLst/>
@@ -11860,7 +12942,7 @@
                 <a:ea typeface="DejaVu Sans"/>
                 <a:cs typeface="DejaVu Sans"/>
               </a:rPr>
-              <a:t>iOS: &lt;10 ratings</a:t>
+              <a:t>Median self-report; survey</a:t>
             </a:r>
           </a:p>
         </p:txBody>
@@ -11870,38 +12952,95 @@
           <p:cNvPr id="35" name="">
             <a:extLst xmlns:a="http://schemas.openxmlformats.org/drawingml/2006/main">
               <a:ext uri="{FF2B5EF4-FFF2-40B4-BE49-F238E27FC236}">
-                <a16:creationId xmlns:a16="http://schemas.microsoft.com/office/drawing/2014/main" id="{40E8AA75-664E-49EA-9AA7-E666A2546EA7}"/>
-              </a:ext>
-            </a:extLst>
-          </p:cNvPr>
-          <p:cNvSpPr>
-            <a:spLocks xmlns:a="http://schemas.openxmlformats.org/drawingml/2006/main" noGrp="1"/>
-          </p:cNvSpPr>
-          <p:nvPr/>
-        </p:nvSpPr>
-        <p:spPr>
-          <a:xfrm xmlns:a="http://schemas.openxmlformats.org/drawingml/2006/main">
-            <a:off x="3543300" y="5543550"/>
-            <a:ext cx="2343150" cy="323850"/>
-          </a:xfrm>
-          <a:prstGeom xmlns:a="http://schemas.openxmlformats.org/drawingml/2006/main" prst="rect">
-            <a:avLst/>
-          </a:prstGeom>
-          <a:noFill xmlns:a="http://schemas.openxmlformats.org/drawingml/2006/main"/>
-          <a:ln xmlns:a="http://schemas.openxmlformats.org/drawingml/2006/main" w="0">
-            <a:noFill/>
-          </a:ln>
-        </p:spPr>
-        <p:txBody>
-          <a:bodyPr xmlns:a="http://schemas.openxmlformats.org/drawingml/2006/main" wrap="square" lIns="0" tIns="0" rIns="0" bIns="0" anchor="ctr">
-            <a:noAutofit/>
-          </a:bodyPr>
-          <a:lstStyle xmlns:a="http://schemas.openxmlformats.org/drawingml/2006/main"/>
-          <a:p xmlns:a="http://schemas.openxmlformats.org/drawingml/2006/main">
-            <a:pPr algn="r">
+                <a16:creationId xmlns:a16="http://schemas.microsoft.com/office/drawing/2014/main" id="{A6C0A1EA-ED31-4C0D-AD41-8B69DA09A7DB}"/>
+              </a:ext>
+            </a:extLst>
+          </p:cNvPr>
+          <p:cNvSpPr>
+            <a:spLocks xmlns:a="http://schemas.openxmlformats.org/drawingml/2006/main" noGrp="1"/>
+          </p:cNvSpPr>
+          <p:nvPr/>
+        </p:nvSpPr>
+        <p:spPr>
+          <a:xfrm xmlns:a="http://schemas.openxmlformats.org/drawingml/2006/main">
+            <a:off x="8782050" y="5562600"/>
+            <a:ext cx="2800350" cy="238125"/>
+          </a:xfrm>
+          <a:prstGeom xmlns:a="http://schemas.openxmlformats.org/drawingml/2006/main" prst="rect">
+            <a:avLst/>
+          </a:prstGeom>
+          <a:noFill xmlns:a="http://schemas.openxmlformats.org/drawingml/2006/main"/>
+          <a:ln xmlns:a="http://schemas.openxmlformats.org/drawingml/2006/main" w="0">
+            <a:noFill/>
+          </a:ln>
+        </p:spPr>
+        <p:txBody>
+          <a:bodyPr xmlns:a="http://schemas.openxmlformats.org/drawingml/2006/main" wrap="square" lIns="0" tIns="0" rIns="0" bIns="0" anchor="ctr">
+            <a:noAutofit/>
+          </a:bodyPr>
+          <a:lstStyle xmlns:a="http://schemas.openxmlformats.org/drawingml/2006/main"/>
+          <a:p xmlns:a="http://schemas.openxmlformats.org/drawingml/2006/main">
+            <a:pPr algn="l">
+              <a:defRPr sz="1500" b="1">
+                <a:solidFill>
+                  <a:srgbClr val="28C7F7"/>
+                </a:solidFill>
+                <a:latin typeface="DejaVu Sans"/>
+                <a:ea typeface="DejaVu Sans"/>
+                <a:cs typeface="DejaVu Sans"/>
+              </a:defRPr>
+            </a:pPr>
+            <a:r>
+              <a:rPr sz="1500" b="1">
+                <a:solidFill>
+                  <a:srgbClr val="28C7F7"/>
+                </a:solidFill>
+                <a:latin typeface="DejaVu Sans"/>
+                <a:ea typeface="DejaVu Sans"/>
+                <a:cs typeface="DejaVu Sans"/>
+              </a:rPr>
+              <a:t>XU + AGARWAL · 2026</a:t>
+            </a:r>
+          </a:p>
+        </p:txBody>
+      </p:sp>
+      <p:sp>
+        <p:nvSpPr>
+          <p:cNvPr id="36" name="">
+            <a:extLst xmlns:a="http://schemas.openxmlformats.org/drawingml/2006/main">
+              <a:ext uri="{FF2B5EF4-FFF2-40B4-BE49-F238E27FC236}">
+                <a16:creationId xmlns:a16="http://schemas.microsoft.com/office/drawing/2014/main" id="{52959990-82AD-4D34-BBA3-7100343C1A3A}"/>
+              </a:ext>
+            </a:extLst>
+          </p:cNvPr>
+          <p:cNvSpPr>
+            <a:spLocks xmlns:a="http://schemas.openxmlformats.org/drawingml/2006/main" noGrp="1"/>
+          </p:cNvSpPr>
+          <p:nvPr/>
+        </p:nvSpPr>
+        <p:spPr>
+          <a:xfrm xmlns:a="http://schemas.openxmlformats.org/drawingml/2006/main">
+            <a:off x="8782050" y="5819775"/>
+            <a:ext cx="2800350" cy="314325"/>
+          </a:xfrm>
+          <a:prstGeom xmlns:a="http://schemas.openxmlformats.org/drawingml/2006/main" prst="rect">
+            <a:avLst/>
+          </a:prstGeom>
+          <a:noFill xmlns:a="http://schemas.openxmlformats.org/drawingml/2006/main"/>
+          <a:ln xmlns:a="http://schemas.openxmlformats.org/drawingml/2006/main" w="0">
+            <a:noFill/>
+          </a:ln>
+        </p:spPr>
+        <p:txBody>
+          <a:bodyPr xmlns:a="http://schemas.openxmlformats.org/drawingml/2006/main" wrap="square" lIns="0" tIns="0" rIns="0" bIns="0" anchor="ctr">
+            <a:noAutofit/>
+          </a:bodyPr>
+          <a:lstStyle xmlns:a="http://schemas.openxmlformats.org/drawingml/2006/main"/>
+          <a:p xmlns:a="http://schemas.openxmlformats.org/drawingml/2006/main">
+            <a:pPr algn="l">
               <a:defRPr sz="1800" b="1">
                 <a:solidFill>
-                  <a:srgbClr val="F5B61C"/>
+                  <a:srgbClr val="F4F7FA"/>
                 </a:solidFill>
                 <a:latin typeface="DejaVu Sans"/>
                 <a:ea typeface="DejaVu Sans"/>
@@ -11911,35 +13050,35 @@
             <a:r>
               <a:rPr sz="1800" b="1">
                 <a:solidFill>
-                  <a:srgbClr val="F5B61C"/>
-                </a:solidFill>
-                <a:latin typeface="DejaVu Sans"/>
-                <a:ea typeface="DejaVu Sans"/>
-                <a:cs typeface="DejaVu Sans"/>
-              </a:rPr>
-              <a:t>79% → 86%</a:t>
-            </a:r>
-          </a:p>
-        </p:txBody>
-      </p:sp>
-      <p:sp>
-        <p:nvSpPr>
-          <p:cNvPr id="36" name="">
-            <a:extLst xmlns:a="http://schemas.openxmlformats.org/drawingml/2006/main">
-              <a:ext uri="{FF2B5EF4-FFF2-40B4-BE49-F238E27FC236}">
-                <a16:creationId xmlns:a16="http://schemas.microsoft.com/office/drawing/2014/main" id="{74AC1F57-BD1F-494C-B1E9-21927CE93B99}"/>
-              </a:ext>
-            </a:extLst>
-          </p:cNvPr>
-          <p:cNvSpPr>
-            <a:spLocks xmlns:a="http://schemas.openxmlformats.org/drawingml/2006/main" noGrp="1"/>
-          </p:cNvSpPr>
-          <p:nvPr/>
-        </p:nvSpPr>
-        <p:spPr>
-          <a:xfrm xmlns:a="http://schemas.openxmlformats.org/drawingml/2006/main">
-            <a:off x="6153150" y="5562600"/>
-            <a:ext cx="2895600" cy="285750"/>
+                  <a:srgbClr val="F4F7FA"/>
+                </a:solidFill>
+                <a:latin typeface="DejaVu Sans"/>
+                <a:ea typeface="DejaVu Sans"/>
+                <a:cs typeface="DejaVu Sans"/>
+              </a:rPr>
+              <a:t>+35% / +43%</a:t>
+            </a:r>
+          </a:p>
+        </p:txBody>
+      </p:sp>
+      <p:sp>
+        <p:nvSpPr>
+          <p:cNvPr id="37" name="">
+            <a:extLst xmlns:a="http://schemas.openxmlformats.org/drawingml/2006/main">
+              <a:ext uri="{FF2B5EF4-FFF2-40B4-BE49-F238E27FC236}">
+                <a16:creationId xmlns:a16="http://schemas.microsoft.com/office/drawing/2014/main" id="{AFE9C197-CD42-45EA-A185-DDDA4735DCA4}"/>
+              </a:ext>
+            </a:extLst>
+          </p:cNvPr>
+          <p:cNvSpPr>
+            <a:spLocks xmlns:a="http://schemas.openxmlformats.org/drawingml/2006/main" noGrp="1"/>
+          </p:cNvSpPr>
+          <p:nvPr/>
+        </p:nvSpPr>
+        <p:spPr>
+          <a:xfrm xmlns:a="http://schemas.openxmlformats.org/drawingml/2006/main">
+            <a:off x="8782050" y="6134100"/>
+            <a:ext cx="2800350" cy="238125"/>
           </a:xfrm>
           <a:prstGeom xmlns:a="http://schemas.openxmlformats.org/drawingml/2006/main" prst="rect">
             <a:avLst/>
@@ -11974,64 +13113,7 @@
                 <a:ea typeface="DejaVu Sans"/>
                 <a:cs typeface="DejaVu Sans"/>
               </a:rPr>
-              <a:t>Chrome: &lt;10 downloads</a:t>
-            </a:r>
-          </a:p>
-        </p:txBody>
-      </p:sp>
-      <p:sp>
-        <p:nvSpPr>
-          <p:cNvPr id="37" name="">
-            <a:extLst xmlns:a="http://schemas.openxmlformats.org/drawingml/2006/main">
-              <a:ext uri="{FF2B5EF4-FFF2-40B4-BE49-F238E27FC236}">
-                <a16:creationId xmlns:a16="http://schemas.microsoft.com/office/drawing/2014/main" id="{0DFC88DE-912B-47C1-9BAF-4ADC93534F2A}"/>
-              </a:ext>
-            </a:extLst>
-          </p:cNvPr>
-          <p:cNvSpPr>
-            <a:spLocks xmlns:a="http://schemas.openxmlformats.org/drawingml/2006/main" noGrp="1"/>
-          </p:cNvSpPr>
-          <p:nvPr/>
-        </p:nvSpPr>
-        <p:spPr>
-          <a:xfrm xmlns:a="http://schemas.openxmlformats.org/drawingml/2006/main">
-            <a:off x="9086850" y="5543550"/>
-            <a:ext cx="2343150" cy="323850"/>
-          </a:xfrm>
-          <a:prstGeom xmlns:a="http://schemas.openxmlformats.org/drawingml/2006/main" prst="rect">
-            <a:avLst/>
-          </a:prstGeom>
-          <a:noFill xmlns:a="http://schemas.openxmlformats.org/drawingml/2006/main"/>
-          <a:ln xmlns:a="http://schemas.openxmlformats.org/drawingml/2006/main" w="0">
-            <a:noFill/>
-          </a:ln>
-        </p:spPr>
-        <p:txBody>
-          <a:bodyPr xmlns:a="http://schemas.openxmlformats.org/drawingml/2006/main" wrap="square" lIns="0" tIns="0" rIns="0" bIns="0" anchor="ctr">
-            <a:noAutofit/>
-          </a:bodyPr>
-          <a:lstStyle xmlns:a="http://schemas.openxmlformats.org/drawingml/2006/main"/>
-          <a:p xmlns:a="http://schemas.openxmlformats.org/drawingml/2006/main">
-            <a:pPr algn="r">
-              <a:defRPr sz="1800" b="1">
-                <a:solidFill>
-                  <a:srgbClr val="F5B61C"/>
-                </a:solidFill>
-                <a:latin typeface="DejaVu Sans"/>
-                <a:ea typeface="DejaVu Sans"/>
-                <a:cs typeface="DejaVu Sans"/>
-              </a:defRPr>
-            </a:pPr>
-            <a:r>
-              <a:rPr sz="1800" b="1">
-                <a:solidFill>
-                  <a:srgbClr val="F5B61C"/>
-                </a:solidFill>
-                <a:latin typeface="DejaVu Sans"/>
-                <a:ea typeface="DejaVu Sans"/>
-                <a:cs typeface="DejaVu Sans"/>
-              </a:rPr>
-              <a:t>18% → 31%</a:t>
+              <a:t>Agarwal: complexity proxy</a:t>
             </a:r>
           </a:p>
         </p:txBody>
@@ -12041,19 +13123,19 @@
           <p:cNvPr id="38" name="">
             <a:extLst xmlns:a="http://schemas.openxmlformats.org/drawingml/2006/main">
               <a:ext uri="{FF2B5EF4-FFF2-40B4-BE49-F238E27FC236}">
-                <a16:creationId xmlns:a16="http://schemas.microsoft.com/office/drawing/2014/main" id="{74709EC7-5596-41BC-BDEC-E280662F8F5D}"/>
-              </a:ext>
-            </a:extLst>
-          </p:cNvPr>
-          <p:cNvSpPr>
-            <a:spLocks xmlns:a="http://schemas.openxmlformats.org/drawingml/2006/main" noGrp="1"/>
-          </p:cNvSpPr>
-          <p:nvPr/>
-        </p:nvSpPr>
-        <p:spPr>
-          <a:xfrm xmlns:a="http://schemas.openxmlformats.org/drawingml/2006/main">
-            <a:off x="609600" y="5953125"/>
-            <a:ext cx="10668000" cy="266700"/>
+                <a16:creationId xmlns:a16="http://schemas.microsoft.com/office/drawing/2014/main" id="{84F96D58-F844-455F-BEF4-E767D8FFEEA8}"/>
+              </a:ext>
+            </a:extLst>
+          </p:cNvPr>
+          <p:cNvSpPr>
+            <a:spLocks xmlns:a="http://schemas.openxmlformats.org/drawingml/2006/main" noGrp="1"/>
+          </p:cNvSpPr>
+          <p:nvPr/>
+        </p:nvSpPr>
+        <p:spPr>
+          <a:xfrm xmlns:a="http://schemas.openxmlformats.org/drawingml/2006/main">
+            <a:off x="609600" y="6448425"/>
+            <a:ext cx="10429875" cy="257175"/>
           </a:xfrm>
           <a:prstGeom xmlns:a="http://schemas.openxmlformats.org/drawingml/2006/main" prst="rect">
             <a:avLst/>
@@ -12070,74 +13152,17 @@
           <a:lstStyle xmlns:a="http://schemas.openxmlformats.org/drawingml/2006/main"/>
           <a:p xmlns:a="http://schemas.openxmlformats.org/drawingml/2006/main">
             <a:pPr algn="l">
-              <a:defRPr sz="1500" b="0">
-                <a:solidFill>
-                  <a:srgbClr val="ADB8C5"/>
-                </a:solidFill>
-                <a:latin typeface="DejaVu Sans"/>
-                <a:ea typeface="DejaVu Sans"/>
-                <a:cs typeface="DejaVu Sans"/>
-              </a:defRPr>
-            </a:pPr>
-            <a:r>
-              <a:rPr sz="1500" b="0">
-                <a:solidFill>
-                  <a:srgbClr val="ADB8C5"/>
-                </a:solidFill>
-                <a:latin typeface="DejaVu Sans"/>
-                <a:ea typeface="DejaVu Sans"/>
-                <a:cs typeface="DejaVu Sans"/>
-              </a:rPr>
-              <a:t>New cohorts, first 3 months. Usage proxies, not welfare.</a:t>
-            </a:r>
-          </a:p>
-        </p:txBody>
-      </p:sp>
-      <p:sp>
-        <p:nvSpPr>
-          <p:cNvPr id="39" name="">
-            <a:extLst xmlns:a="http://schemas.openxmlformats.org/drawingml/2006/main">
-              <a:ext uri="{FF2B5EF4-FFF2-40B4-BE49-F238E27FC236}">
-                <a16:creationId xmlns:a16="http://schemas.microsoft.com/office/drawing/2014/main" id="{3335C7AC-C601-46A4-91F0-B5376CC46914}"/>
-              </a:ext>
-            </a:extLst>
-          </p:cNvPr>
-          <p:cNvSpPr>
-            <a:spLocks xmlns:a="http://schemas.openxmlformats.org/drawingml/2006/main" noGrp="1"/>
-          </p:cNvSpPr>
-          <p:nvPr/>
-        </p:nvSpPr>
-        <p:spPr>
-          <a:xfrm xmlns:a="http://schemas.openxmlformats.org/drawingml/2006/main">
-            <a:off x="609600" y="6334125"/>
-            <a:ext cx="10429875" cy="304800"/>
-          </a:xfrm>
-          <a:prstGeom xmlns:a="http://schemas.openxmlformats.org/drawingml/2006/main" prst="rect">
-            <a:avLst/>
-          </a:prstGeom>
-          <a:noFill xmlns:a="http://schemas.openxmlformats.org/drawingml/2006/main"/>
-          <a:ln xmlns:a="http://schemas.openxmlformats.org/drawingml/2006/main" w="0">
-            <a:noFill/>
-          </a:ln>
-        </p:spPr>
-        <p:txBody>
-          <a:bodyPr xmlns:a="http://schemas.openxmlformats.org/drawingml/2006/main" wrap="square" lIns="0" tIns="0" rIns="0" bIns="0" anchor="ctr">
-            <a:noAutofit/>
-          </a:bodyPr>
-          <a:lstStyle xmlns:a="http://schemas.openxmlformats.org/drawingml/2006/main"/>
-          <a:p xmlns:a="http://schemas.openxmlformats.org/drawingml/2006/main">
-            <a:pPr algn="l">
-              <a:defRPr sz="1800" b="1">
-                <a:solidFill>
-                  <a:srgbClr val="F4F7FA"/>
-                </a:solidFill>
-                <a:latin typeface="DejaVu Sans"/>
-                <a:ea typeface="DejaVu Sans"/>
-                <a:cs typeface="DejaVu Sans"/>
-              </a:defRPr>
-            </a:pPr>
-            <a:r>
-              <a:rPr sz="1800" b="1">
+              <a:defRPr sz="1650" b="1">
+                <a:solidFill>
+                  <a:srgbClr val="F4F7FA"/>
+                </a:solidFill>
+                <a:latin typeface="DejaVu Sans"/>
+                <a:ea typeface="DejaVu Sans"/>
+                <a:cs typeface="DejaVu Sans"/>
+              </a:defRPr>
+            </a:pPr>
+            <a:r>
+              <a:rPr sz="1650" b="1">
                 <a:solidFill>
                   <a:srgbClr val="F4F7FA"/>
                 </a:solidFill>
@@ -12153,7 +13178,7 @@
     </p:spTree>
     <p:extLst>
       <p:ext uri="{BB962C8B-B14F-4D97-AF65-F5344CB8AC3E}">
-        <p14:creationId xmlns:p14="http://schemas.microsoft.com/office/powerpoint/2010/main" val="341373732"/>
+        <p14:creationId xmlns:p14="http://schemas.microsoft.com/office/powerpoint/2010/main" val="1108874476"/>
       </p:ext>
     </p:extLst>
   </p:cSld>
@@ -12184,7 +13209,7 @@
           <p:cNvPr id="23" name="">
             <a:extLst xmlns:a="http://schemas.openxmlformats.org/drawingml/2006/main">
               <a:ext uri="{FF2B5EF4-FFF2-40B4-BE49-F238E27FC236}">
-                <a16:creationId xmlns:a16="http://schemas.microsoft.com/office/drawing/2014/main" id="{67BF8B59-6E0F-40F0-9A96-22D44EFB1223}"/>
+                <a16:creationId xmlns:a16="http://schemas.microsoft.com/office/drawing/2014/main" id="{B40CA088-72F9-4438-B4A9-9DEF9F6C26BA}"/>
               </a:ext>
             </a:extLst>
           </p:cNvPr>
@@ -12241,7 +13266,7 @@
           <p:cNvPr id="2" name="">
             <a:extLst xmlns:a="http://schemas.openxmlformats.org/drawingml/2006/main">
               <a:ext uri="{FF2B5EF4-FFF2-40B4-BE49-F238E27FC236}">
-                <a16:creationId xmlns:a16="http://schemas.microsoft.com/office/drawing/2014/main" id="{7076F486-CF88-4E76-BC7F-DA21110C67F9}"/>
+                <a16:creationId xmlns:a16="http://schemas.microsoft.com/office/drawing/2014/main" id="{93FB1217-2B58-4546-8DA7-7555A058A9B1}"/>
               </a:ext>
             </a:extLst>
           </p:cNvPr>
@@ -12272,7 +13297,7 @@
           <p:cNvPr id="3" name="">
             <a:extLst xmlns:a="http://schemas.openxmlformats.org/drawingml/2006/main">
               <a:ext uri="{FF2B5EF4-FFF2-40B4-BE49-F238E27FC236}">
-                <a16:creationId xmlns:a16="http://schemas.microsoft.com/office/drawing/2014/main" id="{C802B9E3-7B6C-47AD-8D17-AE956E85252E}"/>
+                <a16:creationId xmlns:a16="http://schemas.microsoft.com/office/drawing/2014/main" id="{7B20EE35-8953-4491-B36F-1E1F48E0EC74}"/>
               </a:ext>
             </a:extLst>
           </p:cNvPr>
@@ -12329,7 +13354,7 @@
           <p:cNvPr id="4" name="">
             <a:extLst xmlns:a="http://schemas.openxmlformats.org/drawingml/2006/main">
               <a:ext uri="{FF2B5EF4-FFF2-40B4-BE49-F238E27FC236}">
-                <a16:creationId xmlns:a16="http://schemas.microsoft.com/office/drawing/2014/main" id="{1C204B36-40FF-4256-B2D3-E09ED4D51A2D}"/>
+                <a16:creationId xmlns:a16="http://schemas.microsoft.com/office/drawing/2014/main" id="{6A2E152F-FE48-40DD-991C-3F67D2BEC360}"/>
               </a:ext>
             </a:extLst>
           </p:cNvPr>
@@ -12360,7 +13385,7 @@
           <p:cNvPr id="5" name="">
             <a:extLst xmlns:a="http://schemas.openxmlformats.org/drawingml/2006/main">
               <a:ext uri="{FF2B5EF4-FFF2-40B4-BE49-F238E27FC236}">
-                <a16:creationId xmlns:a16="http://schemas.microsoft.com/office/drawing/2014/main" id="{6615961D-AC62-4F72-A0E5-94440CCD2183}"/>
+                <a16:creationId xmlns:a16="http://schemas.microsoft.com/office/drawing/2014/main" id="{893F7AD7-B96B-45D3-89F3-2FE0A588A725}"/>
               </a:ext>
             </a:extLst>
           </p:cNvPr>
@@ -12391,7 +13416,7 @@
           <p:cNvPr id="6" name="">
             <a:extLst xmlns:a="http://schemas.openxmlformats.org/drawingml/2006/main">
               <a:ext uri="{FF2B5EF4-FFF2-40B4-BE49-F238E27FC236}">
-                <a16:creationId xmlns:a16="http://schemas.microsoft.com/office/drawing/2014/main" id="{D0B9A2D3-A829-4A5B-8643-D22DF59EC873}"/>
+                <a16:creationId xmlns:a16="http://schemas.microsoft.com/office/drawing/2014/main" id="{82923048-C34B-4691-81D7-51F737524349}"/>
               </a:ext>
             </a:extLst>
           </p:cNvPr>
@@ -12422,7 +13447,7 @@
           <p:cNvPr id="7" name="">
             <a:extLst xmlns:a="http://schemas.openxmlformats.org/drawingml/2006/main">
               <a:ext uri="{FF2B5EF4-FFF2-40B4-BE49-F238E27FC236}">
-                <a16:creationId xmlns:a16="http://schemas.microsoft.com/office/drawing/2014/main" id="{21E1B065-6082-4737-B5B4-4FA55B1DA655}"/>
+                <a16:creationId xmlns:a16="http://schemas.microsoft.com/office/drawing/2014/main" id="{5F43168B-5B02-4F55-B45F-DC2D6C56053C}"/>
               </a:ext>
             </a:extLst>
           </p:cNvPr>
@@ -12453,7 +13478,7 @@
           <p:cNvPr id="8" name="">
             <a:extLst xmlns:a="http://schemas.openxmlformats.org/drawingml/2006/main">
               <a:ext uri="{FF2B5EF4-FFF2-40B4-BE49-F238E27FC236}">
-                <a16:creationId xmlns:a16="http://schemas.microsoft.com/office/drawing/2014/main" id="{05171195-4027-4A5C-9AA2-5454BFC4EBF4}"/>
+                <a16:creationId xmlns:a16="http://schemas.microsoft.com/office/drawing/2014/main" id="{CF2CDA1D-CADA-4CF7-A762-A65A52A76BBE}"/>
               </a:ext>
             </a:extLst>
           </p:cNvPr>
@@ -12484,7 +13509,7 @@
           <p:cNvPr id="9" name="">
             <a:extLst xmlns:a="http://schemas.openxmlformats.org/drawingml/2006/main">
               <a:ext uri="{FF2B5EF4-FFF2-40B4-BE49-F238E27FC236}">
-                <a16:creationId xmlns:a16="http://schemas.microsoft.com/office/drawing/2014/main" id="{B6432490-D512-48D1-A70E-DF83A365ED11}"/>
+                <a16:creationId xmlns:a16="http://schemas.microsoft.com/office/drawing/2014/main" id="{7001DFAE-AA8E-4D7A-80BA-7143C923F2C5}"/>
               </a:ext>
             </a:extLst>
           </p:cNvPr>
@@ -12515,7 +13540,7 @@
           <p:cNvPr id="10" name="">
             <a:extLst xmlns:a="http://schemas.openxmlformats.org/drawingml/2006/main">
               <a:ext uri="{FF2B5EF4-FFF2-40B4-BE49-F238E27FC236}">
-                <a16:creationId xmlns:a16="http://schemas.microsoft.com/office/drawing/2014/main" id="{4C2302C1-55C7-49FE-9046-FD265B429BCB}"/>
+                <a16:creationId xmlns:a16="http://schemas.microsoft.com/office/drawing/2014/main" id="{38AB8372-2ACE-49DB-9B20-617DD4F29DA2}"/>
               </a:ext>
             </a:extLst>
           </p:cNvPr>
@@ -12546,7 +13571,7 @@
           <p:cNvPr id="11" name="">
             <a:extLst xmlns:a="http://schemas.openxmlformats.org/drawingml/2006/main">
               <a:ext uri="{FF2B5EF4-FFF2-40B4-BE49-F238E27FC236}">
-                <a16:creationId xmlns:a16="http://schemas.microsoft.com/office/drawing/2014/main" id="{34108906-6D10-4FA5-8571-CE8B86715B73}"/>
+                <a16:creationId xmlns:a16="http://schemas.microsoft.com/office/drawing/2014/main" id="{A1B70A63-9AE7-4D4A-B363-F6ED5DFF5B09}"/>
               </a:ext>
             </a:extLst>
           </p:cNvPr>
@@ -12577,7 +13602,7 @@
           <p:cNvPr id="12" name="">
             <a:extLst xmlns:a="http://schemas.openxmlformats.org/drawingml/2006/main">
               <a:ext uri="{FF2B5EF4-FFF2-40B4-BE49-F238E27FC236}">
-                <a16:creationId xmlns:a16="http://schemas.microsoft.com/office/drawing/2014/main" id="{8BEA07AE-B353-4E49-A35D-9186CFB0E1CD}"/>
+                <a16:creationId xmlns:a16="http://schemas.microsoft.com/office/drawing/2014/main" id="{8868DF8C-1708-4A97-97A2-EA68AF61FAAE}"/>
               </a:ext>
             </a:extLst>
           </p:cNvPr>
@@ -12608,7 +13633,7 @@
           <p:cNvPr id="13" name="">
             <a:extLst xmlns:a="http://schemas.openxmlformats.org/drawingml/2006/main">
               <a:ext uri="{FF2B5EF4-FFF2-40B4-BE49-F238E27FC236}">
-                <a16:creationId xmlns:a16="http://schemas.microsoft.com/office/drawing/2014/main" id="{B32806E6-83B1-45F4-B481-0D3EB243EDC6}"/>
+                <a16:creationId xmlns:a16="http://schemas.microsoft.com/office/drawing/2014/main" id="{92AB5AE1-DB7B-4C8F-B6E9-E3BC58CD17C2}"/>
               </a:ext>
             </a:extLst>
           </p:cNvPr>
@@ -12639,7 +13664,7 @@
           <p:cNvPr id="14" name="">
             <a:extLst xmlns:a="http://schemas.openxmlformats.org/drawingml/2006/main">
               <a:ext uri="{FF2B5EF4-FFF2-40B4-BE49-F238E27FC236}">
-                <a16:creationId xmlns:a16="http://schemas.microsoft.com/office/drawing/2014/main" id="{7EBEFD30-E9E9-4DC0-97F1-839E7C65C9E1}"/>
+                <a16:creationId xmlns:a16="http://schemas.microsoft.com/office/drawing/2014/main" id="{7C6D3483-14A0-4F9A-9C61-E7E539A6DAD3}"/>
               </a:ext>
             </a:extLst>
           </p:cNvPr>
@@ -12696,7 +13721,7 @@
           <p:cNvPr id="15" name="">
             <a:extLst xmlns:a="http://schemas.openxmlformats.org/drawingml/2006/main">
               <a:ext uri="{FF2B5EF4-FFF2-40B4-BE49-F238E27FC236}">
-                <a16:creationId xmlns:a16="http://schemas.microsoft.com/office/drawing/2014/main" id="{FF7437F7-EDE0-4591-B867-0431DA2055FF}"/>
+                <a16:creationId xmlns:a16="http://schemas.microsoft.com/office/drawing/2014/main" id="{8FC9233F-2E64-449C-836E-6D760E87AC65}"/>
               </a:ext>
             </a:extLst>
           </p:cNvPr>
@@ -12753,7 +13778,7 @@
           <p:cNvPr id="16" name="">
             <a:extLst xmlns:a="http://schemas.openxmlformats.org/drawingml/2006/main">
               <a:ext uri="{FF2B5EF4-FFF2-40B4-BE49-F238E27FC236}">
-                <a16:creationId xmlns:a16="http://schemas.microsoft.com/office/drawing/2014/main" id="{DE0DF600-CC58-4FDB-AE8D-E652EF322B4D}"/>
+                <a16:creationId xmlns:a16="http://schemas.microsoft.com/office/drawing/2014/main" id="{0DECC077-308D-44D1-85C6-BEB23B3545FA}"/>
               </a:ext>
             </a:extLst>
           </p:cNvPr>
@@ -12833,7 +13858,7 @@
           <p:cNvPr id="17" name="">
             <a:extLst xmlns:a="http://schemas.openxmlformats.org/drawingml/2006/main">
               <a:ext uri="{FF2B5EF4-FFF2-40B4-BE49-F238E27FC236}">
-                <a16:creationId xmlns:a16="http://schemas.microsoft.com/office/drawing/2014/main" id="{06225251-C23C-400A-9134-3F7DE17B706E}"/>
+                <a16:creationId xmlns:a16="http://schemas.microsoft.com/office/drawing/2014/main" id="{AAD6FE78-BE48-4CBD-AEBD-F9951F003AA3}"/>
               </a:ext>
             </a:extLst>
           </p:cNvPr>
@@ -12890,7 +13915,7 @@
           <p:cNvPr id="18" name="">
             <a:extLst xmlns:a="http://schemas.openxmlformats.org/drawingml/2006/main">
               <a:ext uri="{FF2B5EF4-FFF2-40B4-BE49-F238E27FC236}">
-                <a16:creationId xmlns:a16="http://schemas.microsoft.com/office/drawing/2014/main" id="{027C465C-4798-4BDE-BF20-D5693E29A2A1}"/>
+                <a16:creationId xmlns:a16="http://schemas.microsoft.com/office/drawing/2014/main" id="{8823621C-E03C-4D10-B847-6CA8CD7A176C}"/>
               </a:ext>
             </a:extLst>
           </p:cNvPr>
@@ -12947,7 +13972,7 @@
           <p:cNvPr id="19" name="">
             <a:extLst xmlns:a="http://schemas.openxmlformats.org/drawingml/2006/main">
               <a:ext uri="{FF2B5EF4-FFF2-40B4-BE49-F238E27FC236}">
-                <a16:creationId xmlns:a16="http://schemas.microsoft.com/office/drawing/2014/main" id="{2E9966DF-5BD7-4B5F-953F-677B51B7BD20}"/>
+                <a16:creationId xmlns:a16="http://schemas.microsoft.com/office/drawing/2014/main" id="{D3D52316-0886-4924-B655-1A4671FFD557}"/>
               </a:ext>
             </a:extLst>
           </p:cNvPr>
@@ -13004,7 +14029,7 @@
           <p:cNvPr id="20" name="">
             <a:extLst xmlns:a="http://schemas.openxmlformats.org/drawingml/2006/main">
               <a:ext uri="{FF2B5EF4-FFF2-40B4-BE49-F238E27FC236}">
-                <a16:creationId xmlns:a16="http://schemas.microsoft.com/office/drawing/2014/main" id="{0956C147-A6CC-4DF2-9790-D105B58DF671}"/>
+                <a16:creationId xmlns:a16="http://schemas.microsoft.com/office/drawing/2014/main" id="{123F3C71-C80D-42EE-BE66-9FEE17708501}"/>
               </a:ext>
             </a:extLst>
           </p:cNvPr>
@@ -13061,7 +14086,7 @@
           <p:cNvPr id="21" name="">
             <a:extLst xmlns:a="http://schemas.openxmlformats.org/drawingml/2006/main">
               <a:ext uri="{FF2B5EF4-FFF2-40B4-BE49-F238E27FC236}">
-                <a16:creationId xmlns:a16="http://schemas.microsoft.com/office/drawing/2014/main" id="{DA3B45B3-E7EA-4005-9868-52C0F04F040A}"/>
+                <a16:creationId xmlns:a16="http://schemas.microsoft.com/office/drawing/2014/main" id="{D93F72EB-463C-4F0E-A26C-BD20D3ECA439}"/>
               </a:ext>
             </a:extLst>
           </p:cNvPr>
@@ -13092,7 +14117,7 @@
           <p:cNvPr id="22" name="">
             <a:extLst xmlns:a="http://schemas.openxmlformats.org/drawingml/2006/main">
               <a:ext uri="{FF2B5EF4-FFF2-40B4-BE49-F238E27FC236}">
-                <a16:creationId xmlns:a16="http://schemas.microsoft.com/office/drawing/2014/main" id="{30857A5D-9FDB-405F-B706-71567E5B9062}"/>
+                <a16:creationId xmlns:a16="http://schemas.microsoft.com/office/drawing/2014/main" id="{DEB6B3A4-5222-44C3-BDE9-E488B9526482}"/>
               </a:ext>
             </a:extLst>
           </p:cNvPr>
@@ -13147,7 +14172,7 @@
     </p:spTree>
     <p:extLst>
       <p:ext uri="{BB962C8B-B14F-4D97-AF65-F5344CB8AC3E}">
-        <p14:creationId xmlns:p14="http://schemas.microsoft.com/office/powerpoint/2010/main" val="308255621"/>
+        <p14:creationId xmlns:p14="http://schemas.microsoft.com/office/powerpoint/2010/main" val="1175337324"/>
       </p:ext>
     </p:extLst>
   </p:cSld>
@@ -13178,7 +14203,7 @@
           <p:cNvPr id="20" name="">
             <a:extLst xmlns:a="http://schemas.openxmlformats.org/drawingml/2006/main">
               <a:ext uri="{FF2B5EF4-FFF2-40B4-BE49-F238E27FC236}">
-                <a16:creationId xmlns:a16="http://schemas.microsoft.com/office/drawing/2014/main" id="{B59197EA-6680-43EA-A76D-2011EB6391D5}"/>
+                <a16:creationId xmlns:a16="http://schemas.microsoft.com/office/drawing/2014/main" id="{1B1C7D43-C5FA-4027-862F-180AC1955E87}"/>
               </a:ext>
             </a:extLst>
           </p:cNvPr>
@@ -13235,7 +14260,7 @@
           <p:cNvPr id="2" name="">
             <a:extLst xmlns:a="http://schemas.openxmlformats.org/drawingml/2006/main">
               <a:ext uri="{FF2B5EF4-FFF2-40B4-BE49-F238E27FC236}">
-                <a16:creationId xmlns:a16="http://schemas.microsoft.com/office/drawing/2014/main" id="{DB2D57A7-4122-4A1D-AF18-37FC713AC887}"/>
+                <a16:creationId xmlns:a16="http://schemas.microsoft.com/office/drawing/2014/main" id="{15EC291D-6E2D-47DD-9163-BFD1C849A502}"/>
               </a:ext>
             </a:extLst>
           </p:cNvPr>
@@ -13266,7 +14291,7 @@
           <p:cNvPr id="3" name="">
             <a:extLst xmlns:a="http://schemas.openxmlformats.org/drawingml/2006/main">
               <a:ext uri="{FF2B5EF4-FFF2-40B4-BE49-F238E27FC236}">
-                <a16:creationId xmlns:a16="http://schemas.microsoft.com/office/drawing/2014/main" id="{88DE52B3-FBD5-4156-9514-344686A508AE}"/>
+                <a16:creationId xmlns:a16="http://schemas.microsoft.com/office/drawing/2014/main" id="{216FB1CB-2640-4C7B-899E-F33EDFCB4130}"/>
               </a:ext>
             </a:extLst>
           </p:cNvPr>
@@ -13323,7 +14348,7 @@
           <p:cNvPr id="4" name="">
             <a:extLst xmlns:a="http://schemas.openxmlformats.org/drawingml/2006/main">
               <a:ext uri="{FF2B5EF4-FFF2-40B4-BE49-F238E27FC236}">
-                <a16:creationId xmlns:a16="http://schemas.microsoft.com/office/drawing/2014/main" id="{3C2EC4C7-CA0A-48A8-B7F6-6DD17191FD9F}"/>
+                <a16:creationId xmlns:a16="http://schemas.microsoft.com/office/drawing/2014/main" id="{5EB4C98B-726F-4F44-97CE-3B00DB3A07BC}"/>
               </a:ext>
             </a:extLst>
           </p:cNvPr>
@@ -13380,7 +14405,7 @@
           <p:cNvPr id="5" name="">
             <a:extLst xmlns:a="http://schemas.openxmlformats.org/drawingml/2006/main">
               <a:ext uri="{FF2B5EF4-FFF2-40B4-BE49-F238E27FC236}">
-                <a16:creationId xmlns:a16="http://schemas.microsoft.com/office/drawing/2014/main" id="{CF382E93-2DE0-452C-95FF-31D85371FA19}"/>
+                <a16:creationId xmlns:a16="http://schemas.microsoft.com/office/drawing/2014/main" id="{BE49E7EA-D252-420D-BED0-8F016D89A50D}"/>
               </a:ext>
             </a:extLst>
           </p:cNvPr>
@@ -13437,7 +14462,7 @@
           <p:cNvPr id="6" name="">
             <a:extLst xmlns:a="http://schemas.openxmlformats.org/drawingml/2006/main">
               <a:ext uri="{FF2B5EF4-FFF2-40B4-BE49-F238E27FC236}">
-                <a16:creationId xmlns:a16="http://schemas.microsoft.com/office/drawing/2014/main" id="{E707532C-AC4C-4AEE-9041-AC12A56B3C8C}"/>
+                <a16:creationId xmlns:a16="http://schemas.microsoft.com/office/drawing/2014/main" id="{77BC3590-C8BF-4CE3-9FF0-6168BF202F9B}"/>
               </a:ext>
             </a:extLst>
           </p:cNvPr>
@@ -13494,7 +14519,7 @@
           <p:cNvPr id="7" name="">
             <a:extLst xmlns:a="http://schemas.openxmlformats.org/drawingml/2006/main">
               <a:ext uri="{FF2B5EF4-FFF2-40B4-BE49-F238E27FC236}">
-                <a16:creationId xmlns:a16="http://schemas.microsoft.com/office/drawing/2014/main" id="{CF738EED-66A0-4F79-91EA-C7CF8D42438D}"/>
+                <a16:creationId xmlns:a16="http://schemas.microsoft.com/office/drawing/2014/main" id="{44B5E77B-E345-4FFB-80B5-98E079F62053}"/>
               </a:ext>
             </a:extLst>
           </p:cNvPr>
@@ -13527,7 +14552,7 @@
           <p:cNvPr id="8" name="">
             <a:extLst xmlns:a="http://schemas.openxmlformats.org/drawingml/2006/main">
               <a:ext uri="{FF2B5EF4-FFF2-40B4-BE49-F238E27FC236}">
-                <a16:creationId xmlns:a16="http://schemas.microsoft.com/office/drawing/2014/main" id="{E2BB7D33-2B72-467B-9D2A-5DAAC1C806BD}"/>
+                <a16:creationId xmlns:a16="http://schemas.microsoft.com/office/drawing/2014/main" id="{2CF45533-F693-4152-AFD5-D6861A97D357}"/>
               </a:ext>
             </a:extLst>
           </p:cNvPr>
@@ -13584,7 +14609,7 @@
           <p:cNvPr id="9" name="">
             <a:extLst xmlns:a="http://schemas.openxmlformats.org/drawingml/2006/main">
               <a:ext uri="{FF2B5EF4-FFF2-40B4-BE49-F238E27FC236}">
-                <a16:creationId xmlns:a16="http://schemas.microsoft.com/office/drawing/2014/main" id="{D3F154AC-0CE1-41A1-8AD7-44AE76C64929}"/>
+                <a16:creationId xmlns:a16="http://schemas.microsoft.com/office/drawing/2014/main" id="{F2B6D82C-A694-47F5-9261-4E4DFED9589C}"/>
               </a:ext>
             </a:extLst>
           </p:cNvPr>
@@ -13617,7 +14642,7 @@
           <p:cNvPr id="10" name="">
             <a:extLst xmlns:a="http://schemas.openxmlformats.org/drawingml/2006/main">
               <a:ext uri="{FF2B5EF4-FFF2-40B4-BE49-F238E27FC236}">
-                <a16:creationId xmlns:a16="http://schemas.microsoft.com/office/drawing/2014/main" id="{23A81BB3-74A3-4B5E-99B2-195479D2C936}"/>
+                <a16:creationId xmlns:a16="http://schemas.microsoft.com/office/drawing/2014/main" id="{F39040DF-4D6A-4E0A-BB10-C4E19A08B0E5}"/>
               </a:ext>
             </a:extLst>
           </p:cNvPr>
@@ -13700,7 +14725,7 @@
           <p:cNvPr id="12" name="">
             <a:extLst xmlns:a="http://schemas.openxmlformats.org/drawingml/2006/main">
               <a:ext uri="{FF2B5EF4-FFF2-40B4-BE49-F238E27FC236}">
-                <a16:creationId xmlns:a16="http://schemas.microsoft.com/office/drawing/2014/main" id="{E8F086DC-08F4-4121-9AEE-B4F9CDC012A9}"/>
+                <a16:creationId xmlns:a16="http://schemas.microsoft.com/office/drawing/2014/main" id="{055D59F3-4CB7-453E-BFEC-D26FA49726B6}"/>
               </a:ext>
             </a:extLst>
           </p:cNvPr>
@@ -13780,7 +14805,7 @@
           <p:cNvPr id="13" name="">
             <a:extLst xmlns:a="http://schemas.openxmlformats.org/drawingml/2006/main">
               <a:ext uri="{FF2B5EF4-FFF2-40B4-BE49-F238E27FC236}">
-                <a16:creationId xmlns:a16="http://schemas.microsoft.com/office/drawing/2014/main" id="{C4E45B17-2387-4AB7-AA2B-BC5208A47CC5}"/>
+                <a16:creationId xmlns:a16="http://schemas.microsoft.com/office/drawing/2014/main" id="{10704EBE-CB90-44DD-884C-578B005E2C98}"/>
               </a:ext>
             </a:extLst>
           </p:cNvPr>
@@ -13837,7 +14862,7 @@
           <p:cNvPr id="14" name="">
             <a:extLst xmlns:a="http://schemas.openxmlformats.org/drawingml/2006/main">
               <a:ext uri="{FF2B5EF4-FFF2-40B4-BE49-F238E27FC236}">
-                <a16:creationId xmlns:a16="http://schemas.microsoft.com/office/drawing/2014/main" id="{FDA5FF34-9775-46DB-9917-AA7B384F7679}"/>
+                <a16:creationId xmlns:a16="http://schemas.microsoft.com/office/drawing/2014/main" id="{109081F5-483D-4BF7-A24A-AB3F10498A53}"/>
               </a:ext>
             </a:extLst>
           </p:cNvPr>
@@ -13894,7 +14919,7 @@
           <p:cNvPr id="15" name="">
             <a:extLst xmlns:a="http://schemas.openxmlformats.org/drawingml/2006/main">
               <a:ext uri="{FF2B5EF4-FFF2-40B4-BE49-F238E27FC236}">
-                <a16:creationId xmlns:a16="http://schemas.microsoft.com/office/drawing/2014/main" id="{1A0A9802-9959-4BA0-809B-1313A5B81F19}"/>
+                <a16:creationId xmlns:a16="http://schemas.microsoft.com/office/drawing/2014/main" id="{394C9C06-1334-468E-A3BB-D873AD6B106E}"/>
               </a:ext>
             </a:extLst>
           </p:cNvPr>
@@ -13951,7 +14976,7 @@
           <p:cNvPr id="16" name="">
             <a:extLst xmlns:a="http://schemas.openxmlformats.org/drawingml/2006/main">
               <a:ext uri="{FF2B5EF4-FFF2-40B4-BE49-F238E27FC236}">
-                <a16:creationId xmlns:a16="http://schemas.microsoft.com/office/drawing/2014/main" id="{F986E9B5-9DB9-46C6-8605-4ADC727121FF}"/>
+                <a16:creationId xmlns:a16="http://schemas.microsoft.com/office/drawing/2014/main" id="{3309F5A2-D34B-4283-BAD9-98B338E823FD}"/>
               </a:ext>
             </a:extLst>
           </p:cNvPr>
@@ -14008,7 +15033,7 @@
           <p:cNvPr id="17" name="">
             <a:extLst xmlns:a="http://schemas.openxmlformats.org/drawingml/2006/main">
               <a:ext uri="{FF2B5EF4-FFF2-40B4-BE49-F238E27FC236}">
-                <a16:creationId xmlns:a16="http://schemas.microsoft.com/office/drawing/2014/main" id="{24224078-8138-4FE8-8E8D-0A6647623E41}"/>
+                <a16:creationId xmlns:a16="http://schemas.microsoft.com/office/drawing/2014/main" id="{8CD652D2-E76A-4641-B4C1-7AC9B7A4FDF2}"/>
               </a:ext>
             </a:extLst>
           </p:cNvPr>
@@ -14065,7 +15090,7 @@
           <p:cNvPr id="18" name="">
             <a:extLst xmlns:a="http://schemas.openxmlformats.org/drawingml/2006/main">
               <a:ext uri="{FF2B5EF4-FFF2-40B4-BE49-F238E27FC236}">
-                <a16:creationId xmlns:a16="http://schemas.microsoft.com/office/drawing/2014/main" id="{D44FAD2F-405A-44E1-857D-9674308B7ABE}"/>
+                <a16:creationId xmlns:a16="http://schemas.microsoft.com/office/drawing/2014/main" id="{6349E69B-F99A-4968-B01C-03471FE305C8}"/>
               </a:ext>
             </a:extLst>
           </p:cNvPr>
@@ -14096,7 +15121,7 @@
           <p:cNvPr id="19" name="">
             <a:extLst xmlns:a="http://schemas.openxmlformats.org/drawingml/2006/main">
               <a:ext uri="{FF2B5EF4-FFF2-40B4-BE49-F238E27FC236}">
-                <a16:creationId xmlns:a16="http://schemas.microsoft.com/office/drawing/2014/main" id="{F484E58C-BF18-4C2C-9CEA-490F246CFBF7}"/>
+                <a16:creationId xmlns:a16="http://schemas.microsoft.com/office/drawing/2014/main" id="{1F00F072-1084-485E-A9A0-29DCF34BB043}"/>
               </a:ext>
             </a:extLst>
           </p:cNvPr>
@@ -14151,7 +15176,7 @@
     </p:spTree>
     <p:extLst>
       <p:ext uri="{BB962C8B-B14F-4D97-AF65-F5344CB8AC3E}">
-        <p14:creationId xmlns:p14="http://schemas.microsoft.com/office/powerpoint/2010/main" val="30907407"/>
+        <p14:creationId xmlns:p14="http://schemas.microsoft.com/office/powerpoint/2010/main" val="988219005"/>
       </p:ext>
     </p:extLst>
   </p:cSld>
@@ -14182,7 +15207,7 @@
           <p:cNvPr id="22" name="">
             <a:extLst xmlns:a="http://schemas.openxmlformats.org/drawingml/2006/main">
               <a:ext uri="{FF2B5EF4-FFF2-40B4-BE49-F238E27FC236}">
-                <a16:creationId xmlns:a16="http://schemas.microsoft.com/office/drawing/2014/main" id="{2F0A1A73-8F63-464F-B3E3-A85D2CF8CB3C}"/>
+                <a16:creationId xmlns:a16="http://schemas.microsoft.com/office/drawing/2014/main" id="{08746542-82A3-4643-8F05-E46D34F5C452}"/>
               </a:ext>
             </a:extLst>
           </p:cNvPr>
@@ -14262,7 +15287,7 @@
           <p:cNvPr id="2" name="">
             <a:extLst xmlns:a="http://schemas.openxmlformats.org/drawingml/2006/main">
               <a:ext uri="{FF2B5EF4-FFF2-40B4-BE49-F238E27FC236}">
-                <a16:creationId xmlns:a16="http://schemas.microsoft.com/office/drawing/2014/main" id="{DCE48C41-5F63-4BB8-9C41-7D891A4F3F4E}"/>
+                <a16:creationId xmlns:a16="http://schemas.microsoft.com/office/drawing/2014/main" id="{F91E5EBB-58AF-4088-BF68-416EA54DAF80}"/>
               </a:ext>
             </a:extLst>
           </p:cNvPr>
@@ -14293,7 +15318,7 @@
           <p:cNvPr id="3" name="">
             <a:extLst xmlns:a="http://schemas.openxmlformats.org/drawingml/2006/main">
               <a:ext uri="{FF2B5EF4-FFF2-40B4-BE49-F238E27FC236}">
-                <a16:creationId xmlns:a16="http://schemas.microsoft.com/office/drawing/2014/main" id="{003E1E73-D188-4EB5-BCAB-6FD6D9F5593D}"/>
+                <a16:creationId xmlns:a16="http://schemas.microsoft.com/office/drawing/2014/main" id="{1EC854C1-C701-4B4B-9AA9-A1E6FE6BFEBB}"/>
               </a:ext>
             </a:extLst>
           </p:cNvPr>
@@ -14350,7 +15375,7 @@
           <p:cNvPr id="4" name="">
             <a:extLst xmlns:a="http://schemas.openxmlformats.org/drawingml/2006/main">
               <a:ext uri="{FF2B5EF4-FFF2-40B4-BE49-F238E27FC236}">
-                <a16:creationId xmlns:a16="http://schemas.microsoft.com/office/drawing/2014/main" id="{E395B5FF-537A-423C-BF5C-C20E846C31EF}"/>
+                <a16:creationId xmlns:a16="http://schemas.microsoft.com/office/drawing/2014/main" id="{46EB117A-A40C-4D21-B29D-C739E7FEA773}"/>
               </a:ext>
             </a:extLst>
           </p:cNvPr>
@@ -14407,7 +15432,7 @@
           <p:cNvPr id="5" name="">
             <a:extLst xmlns:a="http://schemas.openxmlformats.org/drawingml/2006/main">
               <a:ext uri="{FF2B5EF4-FFF2-40B4-BE49-F238E27FC236}">
-                <a16:creationId xmlns:a16="http://schemas.microsoft.com/office/drawing/2014/main" id="{078BD4F1-C96A-4414-B865-B0D9B74E5501}"/>
+                <a16:creationId xmlns:a16="http://schemas.microsoft.com/office/drawing/2014/main" id="{30F5C5EF-398C-4217-AC5E-4916CDC38F9E}"/>
               </a:ext>
             </a:extLst>
           </p:cNvPr>
@@ -14438,7 +15463,7 @@
           <p:cNvPr id="6" name="">
             <a:extLst xmlns:a="http://schemas.openxmlformats.org/drawingml/2006/main">
               <a:ext uri="{FF2B5EF4-FFF2-40B4-BE49-F238E27FC236}">
-                <a16:creationId xmlns:a16="http://schemas.microsoft.com/office/drawing/2014/main" id="{17795297-06E7-472B-92C7-412682A2395E}"/>
+                <a16:creationId xmlns:a16="http://schemas.microsoft.com/office/drawing/2014/main" id="{FF158B1C-7735-4A6E-B41C-8035611CF8F7}"/>
               </a:ext>
             </a:extLst>
           </p:cNvPr>
@@ -14495,7 +15520,7 @@
           <p:cNvPr id="7" name="">
             <a:extLst xmlns:a="http://schemas.openxmlformats.org/drawingml/2006/main">
               <a:ext uri="{FF2B5EF4-FFF2-40B4-BE49-F238E27FC236}">
-                <a16:creationId xmlns:a16="http://schemas.microsoft.com/office/drawing/2014/main" id="{3F71D555-651F-41F8-8F38-97BE560C8653}"/>
+                <a16:creationId xmlns:a16="http://schemas.microsoft.com/office/drawing/2014/main" id="{7A2927DD-A61A-41B8-B407-25492C1027A5}"/>
               </a:ext>
             </a:extLst>
           </p:cNvPr>
@@ -14552,7 +15577,7 @@
           <p:cNvPr id="8" name="">
             <a:extLst xmlns:a="http://schemas.openxmlformats.org/drawingml/2006/main">
               <a:ext uri="{FF2B5EF4-FFF2-40B4-BE49-F238E27FC236}">
-                <a16:creationId xmlns:a16="http://schemas.microsoft.com/office/drawing/2014/main" id="{BA54902E-0214-47B0-B801-356B36440B7B}"/>
+                <a16:creationId xmlns:a16="http://schemas.microsoft.com/office/drawing/2014/main" id="{634ABA3C-73AE-4D03-B49A-E45FEFD7199D}"/>
               </a:ext>
             </a:extLst>
           </p:cNvPr>
@@ -14609,7 +15634,7 @@
           <p:cNvPr id="9" name="">
             <a:extLst xmlns:a="http://schemas.openxmlformats.org/drawingml/2006/main">
               <a:ext uri="{FF2B5EF4-FFF2-40B4-BE49-F238E27FC236}">
-                <a16:creationId xmlns:a16="http://schemas.microsoft.com/office/drawing/2014/main" id="{EF00C471-7DAE-44DD-ACC8-C37DC18C5A11}"/>
+                <a16:creationId xmlns:a16="http://schemas.microsoft.com/office/drawing/2014/main" id="{87D8DF61-F682-4CCA-88D9-896B4A639CB6}"/>
               </a:ext>
             </a:extLst>
           </p:cNvPr>
@@ -14666,7 +15691,7 @@
           <p:cNvPr id="10" name="">
             <a:extLst xmlns:a="http://schemas.openxmlformats.org/drawingml/2006/main">
               <a:ext uri="{FF2B5EF4-FFF2-40B4-BE49-F238E27FC236}">
-                <a16:creationId xmlns:a16="http://schemas.microsoft.com/office/drawing/2014/main" id="{186A86FC-4868-46C3-BDCD-7446A16EE909}"/>
+                <a16:creationId xmlns:a16="http://schemas.microsoft.com/office/drawing/2014/main" id="{1875C7AE-8914-4525-BFCD-DAF9294FA996}"/>
               </a:ext>
             </a:extLst>
           </p:cNvPr>
@@ -14723,7 +15748,7 @@
           <p:cNvPr id="11" name="">
             <a:extLst xmlns:a="http://schemas.openxmlformats.org/drawingml/2006/main">
               <a:ext uri="{FF2B5EF4-FFF2-40B4-BE49-F238E27FC236}">
-                <a16:creationId xmlns:a16="http://schemas.microsoft.com/office/drawing/2014/main" id="{DE63346C-FDAC-4C5E-8D22-06101EB5A982}"/>
+                <a16:creationId xmlns:a16="http://schemas.microsoft.com/office/drawing/2014/main" id="{86222AAB-1DCE-44A5-953D-F7A9B1CA3E00}"/>
               </a:ext>
             </a:extLst>
           </p:cNvPr>
@@ -14754,7 +15779,7 @@
           <p:cNvPr id="12" name="">
             <a:extLst xmlns:a="http://schemas.openxmlformats.org/drawingml/2006/main">
               <a:ext uri="{FF2B5EF4-FFF2-40B4-BE49-F238E27FC236}">
-                <a16:creationId xmlns:a16="http://schemas.microsoft.com/office/drawing/2014/main" id="{17562353-A2ED-4DE3-91D4-7E9B25A28A0F}"/>
+                <a16:creationId xmlns:a16="http://schemas.microsoft.com/office/drawing/2014/main" id="{E4FCD0D9-8B45-4FAA-B1B1-B0D862E848BC}"/>
               </a:ext>
             </a:extLst>
           </p:cNvPr>
@@ -14811,7 +15836,7 @@
           <p:cNvPr id="13" name="">
             <a:extLst xmlns:a="http://schemas.openxmlformats.org/drawingml/2006/main">
               <a:ext uri="{FF2B5EF4-FFF2-40B4-BE49-F238E27FC236}">
-                <a16:creationId xmlns:a16="http://schemas.microsoft.com/office/drawing/2014/main" id="{57A4309A-5239-438A-9D2A-DB55C2CF47B8}"/>
+                <a16:creationId xmlns:a16="http://schemas.microsoft.com/office/drawing/2014/main" id="{3833516C-22EE-442C-A18D-53BE20BAF5EA}"/>
               </a:ext>
             </a:extLst>
           </p:cNvPr>
@@ -14868,7 +15893,7 @@
           <p:cNvPr id="14" name="">
             <a:extLst xmlns:a="http://schemas.openxmlformats.org/drawingml/2006/main">
               <a:ext uri="{FF2B5EF4-FFF2-40B4-BE49-F238E27FC236}">
-                <a16:creationId xmlns:a16="http://schemas.microsoft.com/office/drawing/2014/main" id="{2CDD511D-6111-4292-AFA1-BE12A52EDA4B}"/>
+                <a16:creationId xmlns:a16="http://schemas.microsoft.com/office/drawing/2014/main" id="{D727D3AB-E26A-4912-985B-103BDC4ACD0B}"/>
               </a:ext>
             </a:extLst>
           </p:cNvPr>
@@ -14925,7 +15950,7 @@
           <p:cNvPr id="15" name="">
             <a:extLst xmlns:a="http://schemas.openxmlformats.org/drawingml/2006/main">
               <a:ext uri="{FF2B5EF4-FFF2-40B4-BE49-F238E27FC236}">
-                <a16:creationId xmlns:a16="http://schemas.microsoft.com/office/drawing/2014/main" id="{E03D89B6-71DB-439D-92D5-63E0BB93F399}"/>
+                <a16:creationId xmlns:a16="http://schemas.microsoft.com/office/drawing/2014/main" id="{FE89503B-A5C0-48E9-95F4-AECDC48316E5}"/>
               </a:ext>
             </a:extLst>
           </p:cNvPr>
@@ -14982,7 +16007,7 @@
           <p:cNvPr id="16" name="">
             <a:extLst xmlns:a="http://schemas.openxmlformats.org/drawingml/2006/main">
               <a:ext uri="{FF2B5EF4-FFF2-40B4-BE49-F238E27FC236}">
-                <a16:creationId xmlns:a16="http://schemas.microsoft.com/office/drawing/2014/main" id="{FA3B1398-CED0-43D2-A4FD-A1AB93F3E576}"/>
+                <a16:creationId xmlns:a16="http://schemas.microsoft.com/office/drawing/2014/main" id="{25322CCB-DD10-4BD6-8E10-39D3B25AF65B}"/>
               </a:ext>
             </a:extLst>
           </p:cNvPr>
@@ -15039,7 +16064,7 @@
           <p:cNvPr id="17" name="">
             <a:extLst xmlns:a="http://schemas.openxmlformats.org/drawingml/2006/main">
               <a:ext uri="{FF2B5EF4-FFF2-40B4-BE49-F238E27FC236}">
-                <a16:creationId xmlns:a16="http://schemas.microsoft.com/office/drawing/2014/main" id="{2C1FE53D-B528-4893-93A3-8938BFC62045}"/>
+                <a16:creationId xmlns:a16="http://schemas.microsoft.com/office/drawing/2014/main" id="{041641C7-F75F-4C01-A4C0-65854EF966DF}"/>
               </a:ext>
             </a:extLst>
           </p:cNvPr>
@@ -15070,7 +16095,7 @@
           <p:cNvPr id="18" name="">
             <a:extLst xmlns:a="http://schemas.openxmlformats.org/drawingml/2006/main">
               <a:ext uri="{FF2B5EF4-FFF2-40B4-BE49-F238E27FC236}">
-                <a16:creationId xmlns:a16="http://schemas.microsoft.com/office/drawing/2014/main" id="{A3FA4DF7-13F0-4599-9F6A-62F92DA24AD1}"/>
+                <a16:creationId xmlns:a16="http://schemas.microsoft.com/office/drawing/2014/main" id="{B68A754B-AA2E-4119-9AFA-922F0F8ACDBE}"/>
               </a:ext>
             </a:extLst>
           </p:cNvPr>
@@ -15127,7 +16152,7 @@
           <p:cNvPr id="19" name="">
             <a:extLst xmlns:a="http://schemas.openxmlformats.org/drawingml/2006/main">
               <a:ext uri="{FF2B5EF4-FFF2-40B4-BE49-F238E27FC236}">
-                <a16:creationId xmlns:a16="http://schemas.microsoft.com/office/drawing/2014/main" id="{E9CC9FD9-3DDB-450A-9E95-F76B65750CFF}"/>
+                <a16:creationId xmlns:a16="http://schemas.microsoft.com/office/drawing/2014/main" id="{CAB9441C-5074-45C9-AFFD-D06575F5400E}"/>
               </a:ext>
             </a:extLst>
           </p:cNvPr>
@@ -15158,7 +16183,7 @@
           <p:cNvPr id="20" name="">
             <a:extLst xmlns:a="http://schemas.openxmlformats.org/drawingml/2006/main">
               <a:ext uri="{FF2B5EF4-FFF2-40B4-BE49-F238E27FC236}">
-                <a16:creationId xmlns:a16="http://schemas.microsoft.com/office/drawing/2014/main" id="{2DB31188-7112-4A1A-8ADA-8A30C0B0209F}"/>
+                <a16:creationId xmlns:a16="http://schemas.microsoft.com/office/drawing/2014/main" id="{13A6B546-FFC4-4DF3-82E4-F627CF29870E}"/>
               </a:ext>
             </a:extLst>
           </p:cNvPr>
@@ -15215,7 +16240,7 @@
           <p:cNvPr id="21" name="">
             <a:extLst xmlns:a="http://schemas.openxmlformats.org/drawingml/2006/main">
               <a:ext uri="{FF2B5EF4-FFF2-40B4-BE49-F238E27FC236}">
-                <a16:creationId xmlns:a16="http://schemas.microsoft.com/office/drawing/2014/main" id="{0C701978-DCF4-4725-BFB5-A1325B2E118C}"/>
+                <a16:creationId xmlns:a16="http://schemas.microsoft.com/office/drawing/2014/main" id="{23A28569-3DE0-4FD7-A4F3-8D77D3581FD5}"/>
               </a:ext>
             </a:extLst>
           </p:cNvPr>
@@ -15270,7 +16295,7 @@
     </p:spTree>
     <p:extLst>
       <p:ext uri="{BB962C8B-B14F-4D97-AF65-F5344CB8AC3E}">
-        <p14:creationId xmlns:p14="http://schemas.microsoft.com/office/powerpoint/2010/main" val="565923428"/>
+        <p14:creationId xmlns:p14="http://schemas.microsoft.com/office/powerpoint/2010/main" val="1442209617"/>
       </p:ext>
     </p:extLst>
   </p:cSld>
@@ -15301,7 +16326,7 @@
           <p:cNvPr id="13" name="">
             <a:extLst xmlns:a="http://schemas.openxmlformats.org/drawingml/2006/main">
               <a:ext uri="{FF2B5EF4-FFF2-40B4-BE49-F238E27FC236}">
-                <a16:creationId xmlns:a16="http://schemas.microsoft.com/office/drawing/2014/main" id="{C16AA865-FE26-49A8-B72B-335B52F415D8}"/>
+                <a16:creationId xmlns:a16="http://schemas.microsoft.com/office/drawing/2014/main" id="{98413F2C-DBB6-486F-B008-83DA94C438BE}"/>
               </a:ext>
             </a:extLst>
           </p:cNvPr>
@@ -15358,7 +16383,7 @@
           <p:cNvPr id="2" name="">
             <a:extLst xmlns:a="http://schemas.openxmlformats.org/drawingml/2006/main">
               <a:ext uri="{FF2B5EF4-FFF2-40B4-BE49-F238E27FC236}">
-                <a16:creationId xmlns:a16="http://schemas.microsoft.com/office/drawing/2014/main" id="{79A49568-D7B3-448C-9FF8-18162A96926E}"/>
+                <a16:creationId xmlns:a16="http://schemas.microsoft.com/office/drawing/2014/main" id="{F7B34010-F979-4BA8-A410-93564BD19400}"/>
               </a:ext>
             </a:extLst>
           </p:cNvPr>
@@ -15389,7 +16414,7 @@
           <p:cNvPr id="3" name="">
             <a:extLst xmlns:a="http://schemas.openxmlformats.org/drawingml/2006/main">
               <a:ext uri="{FF2B5EF4-FFF2-40B4-BE49-F238E27FC236}">
-                <a16:creationId xmlns:a16="http://schemas.microsoft.com/office/drawing/2014/main" id="{95AF1DBA-329C-4D84-ACB1-85ADEF3AAD38}"/>
+                <a16:creationId xmlns:a16="http://schemas.microsoft.com/office/drawing/2014/main" id="{09482CDA-659C-47EE-93C8-1F8F6978C8A2}"/>
               </a:ext>
             </a:extLst>
           </p:cNvPr>
@@ -15446,7 +16471,7 @@
           <p:cNvPr id="4" name="">
             <a:extLst xmlns:a="http://schemas.openxmlformats.org/drawingml/2006/main">
               <a:ext uri="{FF2B5EF4-FFF2-40B4-BE49-F238E27FC236}">
-                <a16:creationId xmlns:a16="http://schemas.microsoft.com/office/drawing/2014/main" id="{99CEC481-3A9F-43D3-BD0C-BF7A8087704E}"/>
+                <a16:creationId xmlns:a16="http://schemas.microsoft.com/office/drawing/2014/main" id="{03439260-AF7F-4F03-AC19-B1A288CDB573}"/>
               </a:ext>
             </a:extLst>
           </p:cNvPr>
@@ -15503,7 +16528,7 @@
           <p:cNvPr id="5" name="">
             <a:extLst xmlns:a="http://schemas.openxmlformats.org/drawingml/2006/main">
               <a:ext uri="{FF2B5EF4-FFF2-40B4-BE49-F238E27FC236}">
-                <a16:creationId xmlns:a16="http://schemas.microsoft.com/office/drawing/2014/main" id="{557FA0E0-8351-474B-AB94-237B0C2923B6}"/>
+                <a16:creationId xmlns:a16="http://schemas.microsoft.com/office/drawing/2014/main" id="{F0217BFD-BECE-4519-A579-142979690CC6}"/>
               </a:ext>
             </a:extLst>
           </p:cNvPr>
@@ -15560,7 +16585,7 @@
           <p:cNvPr id="6" name="">
             <a:extLst xmlns:a="http://schemas.openxmlformats.org/drawingml/2006/main">
               <a:ext uri="{FF2B5EF4-FFF2-40B4-BE49-F238E27FC236}">
-                <a16:creationId xmlns:a16="http://schemas.microsoft.com/office/drawing/2014/main" id="{637917FB-7DF1-4B32-BE79-590D2DC58BB6}"/>
+                <a16:creationId xmlns:a16="http://schemas.microsoft.com/office/drawing/2014/main" id="{357DCFA6-E85D-4147-900A-3DC8F4C1C91F}"/>
               </a:ext>
             </a:extLst>
           </p:cNvPr>
@@ -15617,7 +16642,7 @@
           <p:cNvPr id="7" name="">
             <a:extLst xmlns:a="http://schemas.openxmlformats.org/drawingml/2006/main">
               <a:ext uri="{FF2B5EF4-FFF2-40B4-BE49-F238E27FC236}">
-                <a16:creationId xmlns:a16="http://schemas.microsoft.com/office/drawing/2014/main" id="{07F6EF4E-F5FB-457C-B7E1-E6631FA5D49A}"/>
+                <a16:creationId xmlns:a16="http://schemas.microsoft.com/office/drawing/2014/main" id="{4CE33FB9-C7A1-48EA-AAFE-4DE8C9D3AFBA}"/>
               </a:ext>
             </a:extLst>
           </p:cNvPr>
@@ -15674,7 +16699,7 @@
           <p:cNvPr id="8" name="">
             <a:extLst xmlns:a="http://schemas.openxmlformats.org/drawingml/2006/main">
               <a:ext uri="{FF2B5EF4-FFF2-40B4-BE49-F238E27FC236}">
-                <a16:creationId xmlns:a16="http://schemas.microsoft.com/office/drawing/2014/main" id="{7CAD02FB-6233-4C6F-9EEA-54C774A3E3F0}"/>
+                <a16:creationId xmlns:a16="http://schemas.microsoft.com/office/drawing/2014/main" id="{23D4C4D3-E22C-4836-A0E3-6B0CDB4107F9}"/>
               </a:ext>
             </a:extLst>
           </p:cNvPr>
@@ -15731,7 +16756,7 @@
           <p:cNvPr id="9" name="">
             <a:extLst xmlns:a="http://schemas.openxmlformats.org/drawingml/2006/main">
               <a:ext uri="{FF2B5EF4-FFF2-40B4-BE49-F238E27FC236}">
-                <a16:creationId xmlns:a16="http://schemas.microsoft.com/office/drawing/2014/main" id="{A5F8153D-63D4-46FD-93E3-24E758432A97}"/>
+                <a16:creationId xmlns:a16="http://schemas.microsoft.com/office/drawing/2014/main" id="{90FECABC-A7EE-4BAC-8712-7EE00EACA798}"/>
               </a:ext>
             </a:extLst>
           </p:cNvPr>
@@ -15788,7 +16813,7 @@
           <p:cNvPr id="10" name="">
             <a:extLst xmlns:a="http://schemas.openxmlformats.org/drawingml/2006/main">
               <a:ext uri="{FF2B5EF4-FFF2-40B4-BE49-F238E27FC236}">
-                <a16:creationId xmlns:a16="http://schemas.microsoft.com/office/drawing/2014/main" id="{4E0B87B9-2D56-405C-B95B-E809B64EC058}"/>
+                <a16:creationId xmlns:a16="http://schemas.microsoft.com/office/drawing/2014/main" id="{00536182-4722-4C78-BDC6-D377AC36EA76}"/>
               </a:ext>
             </a:extLst>
           </p:cNvPr>
@@ -15845,7 +16870,7 @@
           <p:cNvPr id="11" name="">
             <a:extLst xmlns:a="http://schemas.openxmlformats.org/drawingml/2006/main">
               <a:ext uri="{FF2B5EF4-FFF2-40B4-BE49-F238E27FC236}">
-                <a16:creationId xmlns:a16="http://schemas.microsoft.com/office/drawing/2014/main" id="{C0B1B467-51DF-4036-8591-2F4C58062268}"/>
+                <a16:creationId xmlns:a16="http://schemas.microsoft.com/office/drawing/2014/main" id="{ABE7FB23-266F-43EB-B347-05DC3FC8C0AC}"/>
               </a:ext>
             </a:extLst>
           </p:cNvPr>
@@ -15876,7 +16901,7 @@
           <p:cNvPr id="12" name="">
             <a:extLst xmlns:a="http://schemas.openxmlformats.org/drawingml/2006/main">
               <a:ext uri="{FF2B5EF4-FFF2-40B4-BE49-F238E27FC236}">
-                <a16:creationId xmlns:a16="http://schemas.microsoft.com/office/drawing/2014/main" id="{00796DD5-B26C-4D16-BF4D-1A0C5DFE1AF6}"/>
+                <a16:creationId xmlns:a16="http://schemas.microsoft.com/office/drawing/2014/main" id="{332CB311-6E80-40B0-9C6A-5AEF3FDE07F8}"/>
               </a:ext>
             </a:extLst>
           </p:cNvPr>
@@ -15931,7 +16956,7 @@
     </p:spTree>
     <p:extLst>
       <p:ext uri="{BB962C8B-B14F-4D97-AF65-F5344CB8AC3E}">
-        <p14:creationId xmlns:p14="http://schemas.microsoft.com/office/powerpoint/2010/main" val="336562536"/>
+        <p14:creationId xmlns:p14="http://schemas.microsoft.com/office/powerpoint/2010/main" val="1859476994"/>
       </p:ext>
     </p:extLst>
   </p:cSld>
@@ -15962,7 +16987,7 @@
           <p:cNvPr id="19" name="">
             <a:extLst xmlns:a="http://schemas.openxmlformats.org/drawingml/2006/main">
               <a:ext uri="{FF2B5EF4-FFF2-40B4-BE49-F238E27FC236}">
-                <a16:creationId xmlns:a16="http://schemas.microsoft.com/office/drawing/2014/main" id="{7CDACA27-66E1-4A67-A637-530859728115}"/>
+                <a16:creationId xmlns:a16="http://schemas.microsoft.com/office/drawing/2014/main" id="{A749873E-1E9C-4C23-9D50-A56ABC4D6764}"/>
               </a:ext>
             </a:extLst>
           </p:cNvPr>
@@ -16019,7 +17044,7 @@
           <p:cNvPr id="2" name="">
             <a:extLst xmlns:a="http://schemas.openxmlformats.org/drawingml/2006/main">
               <a:ext uri="{FF2B5EF4-FFF2-40B4-BE49-F238E27FC236}">
-                <a16:creationId xmlns:a16="http://schemas.microsoft.com/office/drawing/2014/main" id="{886426A5-FE12-4847-AEE0-55A432CC8B86}"/>
+                <a16:creationId xmlns:a16="http://schemas.microsoft.com/office/drawing/2014/main" id="{409A72A6-681D-4376-8628-29167B0C8C21}"/>
               </a:ext>
             </a:extLst>
           </p:cNvPr>
@@ -16050,7 +17075,7 @@
           <p:cNvPr id="3" name="">
             <a:extLst xmlns:a="http://schemas.openxmlformats.org/drawingml/2006/main">
               <a:ext uri="{FF2B5EF4-FFF2-40B4-BE49-F238E27FC236}">
-                <a16:creationId xmlns:a16="http://schemas.microsoft.com/office/drawing/2014/main" id="{9B747D2D-3FE7-43F3-9311-F7AF86318579}"/>
+                <a16:creationId xmlns:a16="http://schemas.microsoft.com/office/drawing/2014/main" id="{E2A6FB15-37BC-4129-9CA5-D88F0BBD57BD}"/>
               </a:ext>
             </a:extLst>
           </p:cNvPr>
@@ -16107,7 +17132,7 @@
           <p:cNvPr id="4" name="">
             <a:extLst xmlns:a="http://schemas.openxmlformats.org/drawingml/2006/main">
               <a:ext uri="{FF2B5EF4-FFF2-40B4-BE49-F238E27FC236}">
-                <a16:creationId xmlns:a16="http://schemas.microsoft.com/office/drawing/2014/main" id="{99C59E01-291B-4BC8-A430-C0760D3530E8}"/>
+                <a16:creationId xmlns:a16="http://schemas.microsoft.com/office/drawing/2014/main" id="{6F1C2FA6-46C3-4F5E-9AFB-D3C0C9FEE67C}"/>
               </a:ext>
             </a:extLst>
           </p:cNvPr>
@@ -16164,7 +17189,7 @@
           <p:cNvPr id="5" name="">
             <a:extLst xmlns:a="http://schemas.openxmlformats.org/drawingml/2006/main">
               <a:ext uri="{FF2B5EF4-FFF2-40B4-BE49-F238E27FC236}">
-                <a16:creationId xmlns:a16="http://schemas.microsoft.com/office/drawing/2014/main" id="{1AC8D3F1-0D13-483C-B7DB-40A18531CFFD}"/>
+                <a16:creationId xmlns:a16="http://schemas.microsoft.com/office/drawing/2014/main" id="{ABE18D7A-D6C4-4FB5-8C6C-B27EB1BCE181}"/>
               </a:ext>
             </a:extLst>
           </p:cNvPr>
@@ -16244,7 +17269,7 @@
           <p:cNvPr id="6" name="">
             <a:extLst xmlns:a="http://schemas.openxmlformats.org/drawingml/2006/main">
               <a:ext uri="{FF2B5EF4-FFF2-40B4-BE49-F238E27FC236}">
-                <a16:creationId xmlns:a16="http://schemas.microsoft.com/office/drawing/2014/main" id="{50AB536F-865E-4510-B79C-C1C249145BC7}"/>
+                <a16:creationId xmlns:a16="http://schemas.microsoft.com/office/drawing/2014/main" id="{391F752E-BC98-4AFC-909E-EE42A6FEC2E8}"/>
               </a:ext>
             </a:extLst>
           </p:cNvPr>
@@ -16301,7 +17326,7 @@
           <p:cNvPr id="7" name="">
             <a:extLst xmlns:a="http://schemas.openxmlformats.org/drawingml/2006/main">
               <a:ext uri="{FF2B5EF4-FFF2-40B4-BE49-F238E27FC236}">
-                <a16:creationId xmlns:a16="http://schemas.microsoft.com/office/drawing/2014/main" id="{601E79B8-6045-4B77-8247-4859EDD34FA0}"/>
+                <a16:creationId xmlns:a16="http://schemas.microsoft.com/office/drawing/2014/main" id="{6C5F6F55-8466-403A-A919-480B67562279}"/>
               </a:ext>
             </a:extLst>
           </p:cNvPr>
@@ -16334,7 +17359,7 @@
           <p:cNvPr id="8" name="">
             <a:extLst xmlns:a="http://schemas.openxmlformats.org/drawingml/2006/main">
               <a:ext uri="{FF2B5EF4-FFF2-40B4-BE49-F238E27FC236}">
-                <a16:creationId xmlns:a16="http://schemas.microsoft.com/office/drawing/2014/main" id="{448BDF74-425E-4811-9039-7551CF87BC24}"/>
+                <a16:creationId xmlns:a16="http://schemas.microsoft.com/office/drawing/2014/main" id="{C457A1C3-524B-4245-A8B1-018111D3C0C0}"/>
               </a:ext>
             </a:extLst>
           </p:cNvPr>
@@ -16391,7 +17416,7 @@
           <p:cNvPr id="9" name="">
             <a:extLst xmlns:a="http://schemas.openxmlformats.org/drawingml/2006/main">
               <a:ext uri="{FF2B5EF4-FFF2-40B4-BE49-F238E27FC236}">
-                <a16:creationId xmlns:a16="http://schemas.microsoft.com/office/drawing/2014/main" id="{CEB17CAB-0885-4E9B-B880-3514D9C72F03}"/>
+                <a16:creationId xmlns:a16="http://schemas.microsoft.com/office/drawing/2014/main" id="{F1CE5C02-54BD-480E-A9A6-AE5D70A3830C}"/>
               </a:ext>
             </a:extLst>
           </p:cNvPr>
@@ -16424,7 +17449,7 @@
           <p:cNvPr id="10" name="">
             <a:extLst xmlns:a="http://schemas.openxmlformats.org/drawingml/2006/main">
               <a:ext uri="{FF2B5EF4-FFF2-40B4-BE49-F238E27FC236}">
-                <a16:creationId xmlns:a16="http://schemas.microsoft.com/office/drawing/2014/main" id="{CC0916F4-F7AC-46A9-8083-854ED65C5E77}"/>
+                <a16:creationId xmlns:a16="http://schemas.microsoft.com/office/drawing/2014/main" id="{8C76C922-AFDA-4710-B2A9-D28C1116AF3D}"/>
               </a:ext>
             </a:extLst>
           </p:cNvPr>
@@ -16481,7 +17506,7 @@
           <p:cNvPr id="11" name="">
             <a:extLst xmlns:a="http://schemas.openxmlformats.org/drawingml/2006/main">
               <a:ext uri="{FF2B5EF4-FFF2-40B4-BE49-F238E27FC236}">
-                <a16:creationId xmlns:a16="http://schemas.microsoft.com/office/drawing/2014/main" id="{F1F289B5-40F4-4F63-A5D4-524D36DDB47C}"/>
+                <a16:creationId xmlns:a16="http://schemas.microsoft.com/office/drawing/2014/main" id="{AE9FE60D-3A72-43A6-978A-F17C8242A23A}"/>
               </a:ext>
             </a:extLst>
           </p:cNvPr>
@@ -16538,7 +17563,7 @@
           <p:cNvPr id="12" name="">
             <a:extLst xmlns:a="http://schemas.openxmlformats.org/drawingml/2006/main">
               <a:ext uri="{FF2B5EF4-FFF2-40B4-BE49-F238E27FC236}">
-                <a16:creationId xmlns:a16="http://schemas.microsoft.com/office/drawing/2014/main" id="{88BF7AE6-AD11-419B-AB24-F782845C6859}"/>
+                <a16:creationId xmlns:a16="http://schemas.microsoft.com/office/drawing/2014/main" id="{E4D1EB29-E5D7-4CB1-B503-3D79130E2D28}"/>
               </a:ext>
             </a:extLst>
           </p:cNvPr>
@@ -16595,7 +17620,7 @@
           <p:cNvPr id="13" name="">
             <a:extLst xmlns:a="http://schemas.openxmlformats.org/drawingml/2006/main">
               <a:ext uri="{FF2B5EF4-FFF2-40B4-BE49-F238E27FC236}">
-                <a16:creationId xmlns:a16="http://schemas.microsoft.com/office/drawing/2014/main" id="{AD2D733C-F37C-4440-93DC-25F778B23E0B}"/>
+                <a16:creationId xmlns:a16="http://schemas.microsoft.com/office/drawing/2014/main" id="{A86BB566-7C76-4A5D-BD05-DA289486BCF8}"/>
               </a:ext>
             </a:extLst>
           </p:cNvPr>
@@ -16652,7 +17677,7 @@
           <p:cNvPr id="14" name="">
             <a:extLst xmlns:a="http://schemas.openxmlformats.org/drawingml/2006/main">
               <a:ext uri="{FF2B5EF4-FFF2-40B4-BE49-F238E27FC236}">
-                <a16:creationId xmlns:a16="http://schemas.microsoft.com/office/drawing/2014/main" id="{61785CB9-D768-4E73-B234-C4CF20C2705B}"/>
+                <a16:creationId xmlns:a16="http://schemas.microsoft.com/office/drawing/2014/main" id="{81707C82-5285-44D9-908D-9AD85D30EC40}"/>
               </a:ext>
             </a:extLst>
           </p:cNvPr>
@@ -16709,7 +17734,7 @@
           <p:cNvPr id="15" name="">
             <a:extLst xmlns:a="http://schemas.openxmlformats.org/drawingml/2006/main">
               <a:ext uri="{FF2B5EF4-FFF2-40B4-BE49-F238E27FC236}">
-                <a16:creationId xmlns:a16="http://schemas.microsoft.com/office/drawing/2014/main" id="{841CB9AB-23A9-4872-8D36-52C2D2ED6DDD}"/>
+                <a16:creationId xmlns:a16="http://schemas.microsoft.com/office/drawing/2014/main" id="{7B745CA2-72A7-45AB-BF4B-CE7D1EC5D101}"/>
               </a:ext>
             </a:extLst>
           </p:cNvPr>
@@ -16742,7 +17767,7 @@
           <p:cNvPr id="16" name="">
             <a:extLst xmlns:a="http://schemas.openxmlformats.org/drawingml/2006/main">
               <a:ext uri="{FF2B5EF4-FFF2-40B4-BE49-F238E27FC236}">
-                <a16:creationId xmlns:a16="http://schemas.microsoft.com/office/drawing/2014/main" id="{A6F26962-1400-462A-8D22-BBD6CBC9E0F7}"/>
+                <a16:creationId xmlns:a16="http://schemas.microsoft.com/office/drawing/2014/main" id="{87F45E82-8710-4A00-B4B3-2D10EF24761B}"/>
               </a:ext>
             </a:extLst>
           </p:cNvPr>
@@ -16799,7 +17824,7 @@
           <p:cNvPr id="17" name="">
             <a:extLst xmlns:a="http://schemas.openxmlformats.org/drawingml/2006/main">
               <a:ext uri="{FF2B5EF4-FFF2-40B4-BE49-F238E27FC236}">
-                <a16:creationId xmlns:a16="http://schemas.microsoft.com/office/drawing/2014/main" id="{B3AA26D8-3EE8-4631-8A8E-59ADAC60D7AA}"/>
+                <a16:creationId xmlns:a16="http://schemas.microsoft.com/office/drawing/2014/main" id="{286AC7DA-0ED6-48CF-9EE7-90F431A7E50F}"/>
               </a:ext>
             </a:extLst>
           </p:cNvPr>
@@ -16830,7 +17855,7 @@
           <p:cNvPr id="18" name="">
             <a:extLst xmlns:a="http://schemas.openxmlformats.org/drawingml/2006/main">
               <a:ext uri="{FF2B5EF4-FFF2-40B4-BE49-F238E27FC236}">
-                <a16:creationId xmlns:a16="http://schemas.microsoft.com/office/drawing/2014/main" id="{5EAA6A83-5D50-4858-8E92-1D63D060FA0B}"/>
+                <a16:creationId xmlns:a16="http://schemas.microsoft.com/office/drawing/2014/main" id="{72BDDA3C-3F04-4C8A-A602-27756D615F27}"/>
               </a:ext>
             </a:extLst>
           </p:cNvPr>
@@ -16885,7 +17910,7 @@
     </p:spTree>
     <p:extLst>
       <p:ext uri="{BB962C8B-B14F-4D97-AF65-F5344CB8AC3E}">
-        <p14:creationId xmlns:p14="http://schemas.microsoft.com/office/powerpoint/2010/main" val="951931673"/>
+        <p14:creationId xmlns:p14="http://schemas.microsoft.com/office/powerpoint/2010/main" val="64278385"/>
       </p:ext>
     </p:extLst>
   </p:cSld>

--- a/assets/presentations/pmday-2026/ai-changes-both-sides.pptx
+++ b/assets/presentations/pmday-2026/ai-changes-both-sides.pptx
@@ -2,26 +2,26 @@
 <file path=ppt/presentation.xml><?xml version="1.0" encoding="utf-8"?>
 <p:presentation xmlns:p="http://schemas.openxmlformats.org/presentationml/2006/main">
   <p:sldMasterIdLst>
-    <p:sldMasterId xmlns:r="http://schemas.openxmlformats.org/officeDocument/2006/relationships" id="2147483648" r:id="R5d8fcc0c389644af"/>
+    <p:sldMasterId xmlns:r="http://schemas.openxmlformats.org/officeDocument/2006/relationships" id="2147483648" r:id="Re236cfbcd8de495b"/>
   </p:sldMasterIdLst>
   <p:notesMasterIdLst>
-    <p:notesMasterId xmlns:r="http://schemas.openxmlformats.org/officeDocument/2006/relationships" r:id="R10ade2a4823645cc"/>
+    <p:notesMasterId xmlns:r="http://schemas.openxmlformats.org/officeDocument/2006/relationships" r:id="R68bf61bd34734cd8"/>
   </p:notesMasterIdLst>
   <p:sldIdLst>
-    <p:sldId xmlns:r="http://schemas.openxmlformats.org/officeDocument/2006/relationships" id="256" r:id="Ra111139d2e0c4bfd"/>
-    <p:sldId xmlns:r="http://schemas.openxmlformats.org/officeDocument/2006/relationships" id="257" r:id="Recc21c0419f642d8"/>
-    <p:sldId xmlns:r="http://schemas.openxmlformats.org/officeDocument/2006/relationships" id="258" r:id="Re7fff0aecef74d9e"/>
-    <p:sldId xmlns:r="http://schemas.openxmlformats.org/officeDocument/2006/relationships" id="259" r:id="Re5cb8de3c4a24157"/>
-    <p:sldId xmlns:r="http://schemas.openxmlformats.org/officeDocument/2006/relationships" id="260" r:id="R2002f9702749494e"/>
-    <p:sldId xmlns:r="http://schemas.openxmlformats.org/officeDocument/2006/relationships" id="261" r:id="R1530516c06294ff5"/>
-    <p:sldId xmlns:r="http://schemas.openxmlformats.org/officeDocument/2006/relationships" id="262" r:id="Rb66b3c6e1d1640a5"/>
-    <p:sldId xmlns:r="http://schemas.openxmlformats.org/officeDocument/2006/relationships" id="263" r:id="Re34f95b9f6f742fa"/>
-    <p:sldId xmlns:r="http://schemas.openxmlformats.org/officeDocument/2006/relationships" id="264" r:id="Rc437afb9f74e4be1"/>
-    <p:sldId xmlns:r="http://schemas.openxmlformats.org/officeDocument/2006/relationships" id="265" r:id="R1a44bccfe5e5431d"/>
-    <p:sldId xmlns:r="http://schemas.openxmlformats.org/officeDocument/2006/relationships" id="266" r:id="R3181d128e00949c1"/>
-    <p:sldId xmlns:r="http://schemas.openxmlformats.org/officeDocument/2006/relationships" id="267" r:id="R98afc8bb7086423d"/>
-    <p:sldId xmlns:r="http://schemas.openxmlformats.org/officeDocument/2006/relationships" id="268" r:id="R5fec5151696d485f"/>
-    <p:sldId xmlns:r="http://schemas.openxmlformats.org/officeDocument/2006/relationships" id="269" r:id="R5ed276a104504c3f"/>
+    <p:sldId xmlns:r="http://schemas.openxmlformats.org/officeDocument/2006/relationships" id="256" r:id="R56f5734e083f4d03"/>
+    <p:sldId xmlns:r="http://schemas.openxmlformats.org/officeDocument/2006/relationships" id="257" r:id="Rc170d078b3a74250"/>
+    <p:sldId xmlns:r="http://schemas.openxmlformats.org/officeDocument/2006/relationships" id="258" r:id="Raaded7f471a24c13"/>
+    <p:sldId xmlns:r="http://schemas.openxmlformats.org/officeDocument/2006/relationships" id="259" r:id="R6d8b65e51f9e4778"/>
+    <p:sldId xmlns:r="http://schemas.openxmlformats.org/officeDocument/2006/relationships" id="260" r:id="Rdea9830c010b4378"/>
+    <p:sldId xmlns:r="http://schemas.openxmlformats.org/officeDocument/2006/relationships" id="261" r:id="R51e7469559b7483e"/>
+    <p:sldId xmlns:r="http://schemas.openxmlformats.org/officeDocument/2006/relationships" id="262" r:id="R5ad7da01d4ca43b5"/>
+    <p:sldId xmlns:r="http://schemas.openxmlformats.org/officeDocument/2006/relationships" id="263" r:id="R936332774b7340ed"/>
+    <p:sldId xmlns:r="http://schemas.openxmlformats.org/officeDocument/2006/relationships" id="264" r:id="R8f54d043439d463d"/>
+    <p:sldId xmlns:r="http://schemas.openxmlformats.org/officeDocument/2006/relationships" id="265" r:id="R21f67659b6d04b47"/>
+    <p:sldId xmlns:r="http://schemas.openxmlformats.org/officeDocument/2006/relationships" id="266" r:id="Rc3dee2fcd6194cfa"/>
+    <p:sldId xmlns:r="http://schemas.openxmlformats.org/officeDocument/2006/relationships" id="267" r:id="Rc6be020d0cbe4434"/>
+    <p:sldId xmlns:r="http://schemas.openxmlformats.org/officeDocument/2006/relationships" id="268" r:id="Re57599d4dd75408a"/>
+    <p:sldId xmlns:r="http://schemas.openxmlformats.org/officeDocument/2006/relationships" id="269" r:id="R3566406c5e634149"/>
   </p:sldIdLst>
   <p:sldSz cx="12192000" cy="6858000"/>
   <p:notesSz cx="6858000" cy="9144000"/>
@@ -1090,17 +1090,22 @@
           <a:lstStyle xmlns:a="http://schemas.openxmlformats.org/drawingml/2006/main"/>
           <a:p xmlns:a="http://schemas.openxmlformats.org/drawingml/2006/main">
             <a:r>
-              <a:t>NBER: понад 100 тисяч GitHub developers; matched event study, не RCT. Changed LOC = additions + deletions, не чисте зростання кодової бази.</a:t>
-            </a:r>
-          </a:p>
-          <a:p xmlns:a="http://schemas.openxmlformats.org/drawingml/2006/main">
-            <a:r>
-              <a:t>Table 5, друкована с. 33, тижні 21–30: Autocomplete — LOC +228.2%, commits +35.9%, PRs +11.0%, releases +10.2%. Synchronous agents — LOC +741.3%, commits +109.1%, PRs +65.5%, releases +20.3%. Asynchronous agents — LOC +658.3%, commits +33.6%, PRs +71.8%; releases не оцінено окремо. Figure 1, с. 3: cumulative LOC 17.3×, files 3.9×, commits 2.8×, PRs 2.5×, repos 1.5×, releases 1.3×. Не перемножувати компоненти.</a:t>
-            </a:r>
-          </a:p>
-          <a:p xmlns:a="http://schemas.openxmlformats.org/drawingml/2006/main">
-            <a:r>
-              <a:t>Figure 12, с. 41; §8.2, с. 42–43: iOS — 30–50 тисяч нових apps/month → близько 100 тисяч у квітні 2026; Android — 42 тисячі у січні 2025 → близько 60 тисяч у середині 2026; Chrome — 5 тисяч у 2023 → близько 13 тисяч у середині 2026. Total cohort usage за перші 3 місяці стабільне або знижується. Частка iOS apps із &lt;10 ratings: 79→86%; Chrome extensions із &lt;10 downloads: 18→31%. SourceForge без прискорення entry, не входить у три usage panels. Це не всі existing apps, не весь software market і не пряме вимірювання consumer welfare. Chrome decline передував agentic era.</a:t>
+              <a:t>NBER WP 35275: May 2026, revised September 2026; current official PDF downloaded 2026-09-21. Понад 500 тисяч GitHub developers; matched event study, не RCT. Попередні 17.3× / 2.8×, 79→86% та 18→31% належали старій редакції й замінені. Changed LOC = additions + deletions, не чисте зростання кодової бази.</a:t>
+            </a:r>
+          </a:p>
+          <a:p xmlns:a="http://schemas.openxmlformats.org/drawingml/2006/main">
+            <a:r>
+              <a:t>Table 6, друкована с.33 / PDF p.35, тижні 21–30: Autocomplete — LOC +234.3%, files +50.0%, commits +30.2%, PRs +18.3%, repos +11.9%, releases +9.0%. Sync — LOC +957.5%, files +265.0%, commits +153.2%, PRs +86.0%, repos +47.3%, releases +19.8%. Async — LOC +1254.9%, files +83.3%, commits +60.7%, PRs +68.5%, repos +19.2%; releases не оцінено окремо. Figure 1, друкована с.2 / PDF p.4: авторські округлені cumulative levels — LOC 25.5×, files 5.0×, commits 3.4×, PRs 2.7×, repos 1.8×, releases 1.3×. Арифметика за округленою Table 6: 1+(234.3+957.5+1254.9)/100=25.467; commits 1+(30.2+153.2+60.7)/100=3.441; releases 1+(9.0+19.8)/100=1.288. Не перемножувати компоненти і не видавати ці суми за точні raw-data estimates. Прочерк async releases не означає нульового ефекту.</a:t>
+            </a:r>
+          </a:p>
+          <a:p xmlns:a="http://schemas.openxmlformats.org/drawingml/2006/main">
+            <a:r>
+              <a:t>Figure 11, друкована с.44 / PDF p.46; §7.2, с.43–46: iOS нові apps/month приблизно 33–45 тисяч у 2023–early 2025 → 108 тисяч у квітні 2026; Android 42 тисячі у січні 2025 → 99 тисяч у mid-2026; Chrome приблизно семикратне зростання від 2023, що почалося до agentic era. SourceForge показує невелике зростання new projects і винесений у Figure OA-17, без надійної usage-панелі. Usage за перші 3 місяці: iOS cohort ratings приблизно стабільні; Android downloads помірно зростають, але значно повільніше за entry; Chrome downloads падають. Тому коректно «usage does not keep pace», а не «usage ніде не зростає».</a:t>
+            </a:r>
+          </a:p>
+          <a:p xmlns:a="http://schemas.openxmlformats.org/drawingml/2006/main">
+            <a:r>
+              <a:t>§7.2.3, друкована с.46 / PDF p.48: January 2025 → April 2026, частка iOS із &lt;10 ratings приблизно 78% → 87%; Chrome із &lt;10 downloads 19% → 33%; Android із ≤100 downloads приблизно 22% → 26%. Авторські цілі відсотки; не точні частки з raw data. Це порівняння нових когорт за перші 3 місяці, не всіх existing apps, не весь software market і не пряме вимірювання consumer welfare. Зміни часток приблизно +9/+14/+4 відсоткових пункти відповідно.</a:t>
             </a:r>
           </a:p>
           <a:p xmlns:a="http://schemas.openxmlformats.org/drawingml/2006/main">
@@ -1110,7 +1115,7 @@
           </a:p>
           <a:p xmlns:a="http://schemas.openxmlformats.org/drawingml/2006/main">
             <a:r>
-              <a:t>METR, травень 2026: 349 technical workers; 1.4–2× median self-reported work value залежно від питання, 3× self-reported speed; є selection bias. Старий RCT 2025 із +19% часу — лише історичний контекст.</a:t>
+              <a:t>METR, 11 травня 2026: 349 technical workers; 1.4–2× medians across 3 self-reported work-value questions; це не credible/confidence interval, 3× self-reported speed; є selection bias. Старий RCT 2025 із +19% часу — лише історичний контекст.</a:t>
             </a:r>
           </a:p>
           <a:p xmlns:a="http://schemas.openxmlformats.org/drawingml/2006/main">
@@ -1125,12 +1130,17 @@
           </a:p>
           <a:p xmlns:a="http://schemas.openxmlformats.org/drawingml/2006/main">
             <a:r>
-              <a:t>Agarwal, v2, Table 2: complexity +34.85/+42.87%, warnings +17.73/+19.00%; зміна IDE-first warnings статистично незначуща. Не трактувати це як борг на одну фічу.</a:t>
+              <a:t>Agarwal, v2, Table 2: complexity Agent-first +34.85% / IDE-first +42.87%, warnings +17.73/+19.00%; зміна IDE-first warnings статистично незначуща. Не трактувати це як борг на одну фічу.</a:t>
             </a:r>
           </a:p>
           <a:p xmlns:a="http://schemas.openxmlformats.org/drawingml/2006/main">
             <a:r>
               <a:t>DORA: позитивний зв’язок AI adoption з throughput одночасно з негативним зі stability. Small batches, p.58: сильніший позитивний зв’язок AI із product performance та менше friction, хоча індивідуальні gains можуть бути меншими. ToC / review-testing-integration queues, p.81. Це мотивує системну оптимізацію на слайді 7, не доводить універсальну причинність.</a:t>
+            </a:r>
+          </a:p>
+          <a:p xmlns:a="http://schemas.openxmlformats.org/drawingml/2006/main">
+            <a:r>
+              <a:t>Повторна числова перевірка 2026-09-21: DORA Fig.28 vector coordinates та сторінку звірено повторно; коефіцієнт і межі лише приблизні. &gt;80% збережено як авторський поріг: сума округлених bars 41+31+13=85 не встановлює точного агрегату. GitClear calls 343→223 дають приблизно −35%; +81% — авторське округлення, +15% churn — число з резюме без окремої baseline-пари. Точний місяць публікації GitClear не підтверджено на перевіреній сторінці, тому на екрані лише 2026. Див. EVIDENCE.md та відповідні локальні нотатки.</a:t>
             </a:r>
           </a:p>
           <a:p xmlns:a="http://schemas.openxmlformats.org/drawingml/2006/main">
@@ -1658,7 +1668,7 @@
   </p:cSld>
   <p:clrMap bg1="lt1" tx1="dk1" bg2="lt2" tx2="dk2" accent1="accent1" accent2="accent2" accent3="accent3" accent4="accent4" accent5="accent5" accent6="accent6" hlink="hlink" folHlink="folHlink"/>
   <p:sldLayoutIdLst>
-    <p:sldLayoutId xmlns:r="http://schemas.openxmlformats.org/officeDocument/2006/relationships" id="2147483649" r:id="R717928390e7e4388"/>
+    <p:sldLayoutId xmlns:r="http://schemas.openxmlformats.org/officeDocument/2006/relationships" id="2147483649" r:id="R39cf953be6ca4bfa"/>
   </p:sldLayoutIdLst>
   <p:txStyles>
     <p:titleStyle>
@@ -2209,7 +2219,7 @@
           <p:cNvPr id="10" name="">
             <a:extLst xmlns:a="http://schemas.openxmlformats.org/drawingml/2006/main">
               <a:ext uri="{FF2B5EF4-FFF2-40B4-BE49-F238E27FC236}">
-                <a16:creationId xmlns:a16="http://schemas.microsoft.com/office/drawing/2014/main" id="{64993F33-AA7F-43E9-A9B1-0C10DF03F246}"/>
+                <a16:creationId xmlns:a16="http://schemas.microsoft.com/office/drawing/2014/main" id="{433D9586-CA0E-411F-8CF9-AC646562074E}"/>
               </a:ext>
             </a:extLst>
           </p:cNvPr>
@@ -2266,7 +2276,7 @@
           <p:cNvPr id="2" name="">
             <a:extLst xmlns:a="http://schemas.openxmlformats.org/drawingml/2006/main">
               <a:ext uri="{FF2B5EF4-FFF2-40B4-BE49-F238E27FC236}">
-                <a16:creationId xmlns:a16="http://schemas.microsoft.com/office/drawing/2014/main" id="{384F4B5C-36C0-4830-AD20-3C84CA994A9E}"/>
+                <a16:creationId xmlns:a16="http://schemas.microsoft.com/office/drawing/2014/main" id="{9F4AB7D5-D652-4F45-B8BE-9F9D302CE7F6}"/>
               </a:ext>
             </a:extLst>
           </p:cNvPr>
@@ -2346,7 +2356,7 @@
           <p:cNvPr id="3" name="">
             <a:extLst xmlns:a="http://schemas.openxmlformats.org/drawingml/2006/main">
               <a:ext uri="{FF2B5EF4-FFF2-40B4-BE49-F238E27FC236}">
-                <a16:creationId xmlns:a16="http://schemas.microsoft.com/office/drawing/2014/main" id="{41DB12ED-A520-41C0-9AFB-8DE8C2241AE2}"/>
+                <a16:creationId xmlns:a16="http://schemas.microsoft.com/office/drawing/2014/main" id="{03466D3D-491C-4292-990F-47A838A71D0B}"/>
               </a:ext>
             </a:extLst>
           </p:cNvPr>
@@ -2407,7 +2417,7 @@
           <p:nvPr/>
         </p:nvPicPr>
         <p:blipFill>
-          <a:blip xmlns:r="http://schemas.openxmlformats.org/officeDocument/2006/relationships" xmlns:a="http://schemas.openxmlformats.org/drawingml/2006/main" r:embed="R2ef7a0b80e1c4e84"/>
+          <a:blip xmlns:r="http://schemas.openxmlformats.org/officeDocument/2006/relationships" xmlns:a="http://schemas.openxmlformats.org/drawingml/2006/main" r:embed="R93a8465d1ed74d84"/>
           <a:stretch xmlns:a="http://schemas.openxmlformats.org/drawingml/2006/main"/>
         </p:blipFill>
         <p:spPr>
@@ -2425,7 +2435,7 @@
           <p:cNvPr id="5" name="">
             <a:extLst xmlns:a="http://schemas.openxmlformats.org/drawingml/2006/main">
               <a:ext uri="{FF2B5EF4-FFF2-40B4-BE49-F238E27FC236}">
-                <a16:creationId xmlns:a16="http://schemas.microsoft.com/office/drawing/2014/main" id="{2E7A07D4-49E6-4EE7-9C75-259FFCD6D548}"/>
+                <a16:creationId xmlns:a16="http://schemas.microsoft.com/office/drawing/2014/main" id="{9E3D5945-30DE-4E69-8EB0-745EFC3FC808}"/>
               </a:ext>
             </a:extLst>
           </p:cNvPr>
@@ -2482,7 +2492,7 @@
           <p:cNvPr id="6" name="">
             <a:extLst xmlns:a="http://schemas.openxmlformats.org/drawingml/2006/main">
               <a:ext uri="{FF2B5EF4-FFF2-40B4-BE49-F238E27FC236}">
-                <a16:creationId xmlns:a16="http://schemas.microsoft.com/office/drawing/2014/main" id="{A932991C-E037-4ACD-BEC4-104DD7B820D1}"/>
+                <a16:creationId xmlns:a16="http://schemas.microsoft.com/office/drawing/2014/main" id="{2A36A5E0-88FF-4851-9F4E-E6A726C636A6}"/>
               </a:ext>
             </a:extLst>
           </p:cNvPr>
@@ -2539,7 +2549,7 @@
           <p:cNvPr id="7" name="">
             <a:extLst xmlns:a="http://schemas.openxmlformats.org/drawingml/2006/main">
               <a:ext uri="{FF2B5EF4-FFF2-40B4-BE49-F238E27FC236}">
-                <a16:creationId xmlns:a16="http://schemas.microsoft.com/office/drawing/2014/main" id="{8A678390-23E1-480C-86D9-107EC68B8D7A}"/>
+                <a16:creationId xmlns:a16="http://schemas.microsoft.com/office/drawing/2014/main" id="{E99FD36D-374D-42D9-B35E-760321CF0A80}"/>
               </a:ext>
             </a:extLst>
           </p:cNvPr>
@@ -2596,7 +2606,7 @@
           <p:cNvPr id="8" name="">
             <a:extLst xmlns:a="http://schemas.openxmlformats.org/drawingml/2006/main">
               <a:ext uri="{FF2B5EF4-FFF2-40B4-BE49-F238E27FC236}">
-                <a16:creationId xmlns:a16="http://schemas.microsoft.com/office/drawing/2014/main" id="{BEDDF72A-EA4B-4B9B-8A86-0082F8F241D8}"/>
+                <a16:creationId xmlns:a16="http://schemas.microsoft.com/office/drawing/2014/main" id="{A83E2D34-1297-483D-9246-948A551D387C}"/>
               </a:ext>
             </a:extLst>
           </p:cNvPr>
@@ -2653,7 +2663,7 @@
           <p:cNvPr id="9" name="">
             <a:extLst xmlns:a="http://schemas.openxmlformats.org/drawingml/2006/main">
               <a:ext uri="{FF2B5EF4-FFF2-40B4-BE49-F238E27FC236}">
-                <a16:creationId xmlns:a16="http://schemas.microsoft.com/office/drawing/2014/main" id="{4E944CBC-CFB3-427E-A0F4-9A7050235618}"/>
+                <a16:creationId xmlns:a16="http://schemas.microsoft.com/office/drawing/2014/main" id="{9C253FE1-75CA-439A-95B1-975765FECCBA}"/>
               </a:ext>
             </a:extLst>
           </p:cNvPr>
@@ -2708,7 +2718,7 @@
     </p:spTree>
     <p:extLst>
       <p:ext uri="{BB962C8B-B14F-4D97-AF65-F5344CB8AC3E}">
-        <p14:creationId xmlns:p14="http://schemas.microsoft.com/office/powerpoint/2010/main" val="1103237118"/>
+        <p14:creationId xmlns:p14="http://schemas.microsoft.com/office/powerpoint/2010/main" val="1290162583"/>
       </p:ext>
     </p:extLst>
   </p:cSld>
@@ -2739,7 +2749,7 @@
           <p:cNvPr id="25" name="">
             <a:extLst xmlns:a="http://schemas.openxmlformats.org/drawingml/2006/main">
               <a:ext uri="{FF2B5EF4-FFF2-40B4-BE49-F238E27FC236}">
-                <a16:creationId xmlns:a16="http://schemas.microsoft.com/office/drawing/2014/main" id="{0657578B-4246-41C2-8D2B-649547E87744}"/>
+                <a16:creationId xmlns:a16="http://schemas.microsoft.com/office/drawing/2014/main" id="{2934BDA3-28E6-4A83-BE30-C1F6C1F2C1F2}"/>
               </a:ext>
             </a:extLst>
           </p:cNvPr>
@@ -2796,7 +2806,7 @@
           <p:cNvPr id="2" name="">
             <a:extLst xmlns:a="http://schemas.openxmlformats.org/drawingml/2006/main">
               <a:ext uri="{FF2B5EF4-FFF2-40B4-BE49-F238E27FC236}">
-                <a16:creationId xmlns:a16="http://schemas.microsoft.com/office/drawing/2014/main" id="{7518D657-E920-46C9-945C-34B990647DD3}"/>
+                <a16:creationId xmlns:a16="http://schemas.microsoft.com/office/drawing/2014/main" id="{1ED277C5-BBDB-4710-B077-666F9D94048A}"/>
               </a:ext>
             </a:extLst>
           </p:cNvPr>
@@ -2827,7 +2837,7 @@
           <p:cNvPr id="3" name="">
             <a:extLst xmlns:a="http://schemas.openxmlformats.org/drawingml/2006/main">
               <a:ext uri="{FF2B5EF4-FFF2-40B4-BE49-F238E27FC236}">
-                <a16:creationId xmlns:a16="http://schemas.microsoft.com/office/drawing/2014/main" id="{F80D1767-8C6D-42CB-B8F5-B5ED11FFF959}"/>
+                <a16:creationId xmlns:a16="http://schemas.microsoft.com/office/drawing/2014/main" id="{409119FC-6CD7-4A58-BCA1-AA4867E8E293}"/>
               </a:ext>
             </a:extLst>
           </p:cNvPr>
@@ -2884,7 +2894,7 @@
           <p:cNvPr id="4" name="">
             <a:extLst xmlns:a="http://schemas.openxmlformats.org/drawingml/2006/main">
               <a:ext uri="{FF2B5EF4-FFF2-40B4-BE49-F238E27FC236}">
-                <a16:creationId xmlns:a16="http://schemas.microsoft.com/office/drawing/2014/main" id="{E0BBCA44-8EF3-4B35-8822-E64D6835BEDB}"/>
+                <a16:creationId xmlns:a16="http://schemas.microsoft.com/office/drawing/2014/main" id="{E78798CC-5A80-4B1D-8005-9F381BEA1524}"/>
               </a:ext>
             </a:extLst>
           </p:cNvPr>
@@ -2941,7 +2951,7 @@
           <p:cNvPr id="5" name="">
             <a:extLst xmlns:a="http://schemas.openxmlformats.org/drawingml/2006/main">
               <a:ext uri="{FF2B5EF4-FFF2-40B4-BE49-F238E27FC236}">
-                <a16:creationId xmlns:a16="http://schemas.microsoft.com/office/drawing/2014/main" id="{C56E5204-C34A-4520-A229-AAABDEFAD8EE}"/>
+                <a16:creationId xmlns:a16="http://schemas.microsoft.com/office/drawing/2014/main" id="{459559C5-0C7E-4F2D-A2CD-D306E130F6C1}"/>
               </a:ext>
             </a:extLst>
           </p:cNvPr>
@@ -2974,7 +2984,7 @@
           <p:cNvPr id="6" name="">
             <a:extLst xmlns:a="http://schemas.openxmlformats.org/drawingml/2006/main">
               <a:ext uri="{FF2B5EF4-FFF2-40B4-BE49-F238E27FC236}">
-                <a16:creationId xmlns:a16="http://schemas.microsoft.com/office/drawing/2014/main" id="{85D77815-6D15-4C55-ACC4-F630989F9A2E}"/>
+                <a16:creationId xmlns:a16="http://schemas.microsoft.com/office/drawing/2014/main" id="{E860CE39-ECBD-4BF9-A2F7-2409EBA04F11}"/>
               </a:ext>
             </a:extLst>
           </p:cNvPr>
@@ -3031,7 +3041,7 @@
           <p:cNvPr id="7" name="">
             <a:extLst xmlns:a="http://schemas.openxmlformats.org/drawingml/2006/main">
               <a:ext uri="{FF2B5EF4-FFF2-40B4-BE49-F238E27FC236}">
-                <a16:creationId xmlns:a16="http://schemas.microsoft.com/office/drawing/2014/main" id="{5F75A075-3455-472E-9A41-7CCBEEC7CE33}"/>
+                <a16:creationId xmlns:a16="http://schemas.microsoft.com/office/drawing/2014/main" id="{15FB34AD-0350-494B-B02B-915964C5BEE1}"/>
               </a:ext>
             </a:extLst>
           </p:cNvPr>
@@ -3064,7 +3074,7 @@
           <p:cNvPr id="8" name="">
             <a:extLst xmlns:a="http://schemas.openxmlformats.org/drawingml/2006/main">
               <a:ext uri="{FF2B5EF4-FFF2-40B4-BE49-F238E27FC236}">
-                <a16:creationId xmlns:a16="http://schemas.microsoft.com/office/drawing/2014/main" id="{85D52076-6CF4-43A5-9793-22CDC05762FD}"/>
+                <a16:creationId xmlns:a16="http://schemas.microsoft.com/office/drawing/2014/main" id="{8CC2BF37-85B6-40C8-B21A-D6CAB711B7AD}"/>
               </a:ext>
             </a:extLst>
           </p:cNvPr>
@@ -3121,7 +3131,7 @@
           <p:cNvPr id="9" name="">
             <a:extLst xmlns:a="http://schemas.openxmlformats.org/drawingml/2006/main">
               <a:ext uri="{FF2B5EF4-FFF2-40B4-BE49-F238E27FC236}">
-                <a16:creationId xmlns:a16="http://schemas.microsoft.com/office/drawing/2014/main" id="{01D4FEFE-3EBC-4EC4-96F1-F606BFE7FC08}"/>
+                <a16:creationId xmlns:a16="http://schemas.microsoft.com/office/drawing/2014/main" id="{69DE54E7-FDB3-4CD9-A13E-44C91720AF54}"/>
               </a:ext>
             </a:extLst>
           </p:cNvPr>
@@ -3154,7 +3164,7 @@
           <p:cNvPr id="10" name="">
             <a:extLst xmlns:a="http://schemas.openxmlformats.org/drawingml/2006/main">
               <a:ext uri="{FF2B5EF4-FFF2-40B4-BE49-F238E27FC236}">
-                <a16:creationId xmlns:a16="http://schemas.microsoft.com/office/drawing/2014/main" id="{42AAABB7-1B1E-4BD5-A6A2-78E157C282B5}"/>
+                <a16:creationId xmlns:a16="http://schemas.microsoft.com/office/drawing/2014/main" id="{5AD5D2B0-8802-4213-99C0-2C8576E1A453}"/>
               </a:ext>
             </a:extLst>
           </p:cNvPr>
@@ -3211,7 +3221,7 @@
           <p:cNvPr id="11" name="">
             <a:extLst xmlns:a="http://schemas.openxmlformats.org/drawingml/2006/main">
               <a:ext uri="{FF2B5EF4-FFF2-40B4-BE49-F238E27FC236}">
-                <a16:creationId xmlns:a16="http://schemas.microsoft.com/office/drawing/2014/main" id="{2237652C-AA29-48EC-BF08-DF916EF4F031}"/>
+                <a16:creationId xmlns:a16="http://schemas.microsoft.com/office/drawing/2014/main" id="{32FC07BD-BF9E-4230-8FF2-52FEB41B58D4}"/>
               </a:ext>
             </a:extLst>
           </p:cNvPr>
@@ -3244,7 +3254,7 @@
           <p:cNvPr id="12" name="">
             <a:extLst xmlns:a="http://schemas.openxmlformats.org/drawingml/2006/main">
               <a:ext uri="{FF2B5EF4-FFF2-40B4-BE49-F238E27FC236}">
-                <a16:creationId xmlns:a16="http://schemas.microsoft.com/office/drawing/2014/main" id="{34B35BFA-9D24-49C7-AA22-D601E6754655}"/>
+                <a16:creationId xmlns:a16="http://schemas.microsoft.com/office/drawing/2014/main" id="{4A19CBD3-5640-4B9A-9D20-5B9766F2D1F7}"/>
               </a:ext>
             </a:extLst>
           </p:cNvPr>
@@ -3301,7 +3311,7 @@
           <p:cNvPr id="13" name="">
             <a:extLst xmlns:a="http://schemas.openxmlformats.org/drawingml/2006/main">
               <a:ext uri="{FF2B5EF4-FFF2-40B4-BE49-F238E27FC236}">
-                <a16:creationId xmlns:a16="http://schemas.microsoft.com/office/drawing/2014/main" id="{97F3E113-8945-4B59-B1C0-9A3237B4A147}"/>
+                <a16:creationId xmlns:a16="http://schemas.microsoft.com/office/drawing/2014/main" id="{296DADCA-68CF-4C1B-8BA2-504FF4302C29}"/>
               </a:ext>
             </a:extLst>
           </p:cNvPr>
@@ -3334,7 +3344,7 @@
           <p:cNvPr id="14" name="">
             <a:extLst xmlns:a="http://schemas.openxmlformats.org/drawingml/2006/main">
               <a:ext uri="{FF2B5EF4-FFF2-40B4-BE49-F238E27FC236}">
-                <a16:creationId xmlns:a16="http://schemas.microsoft.com/office/drawing/2014/main" id="{857F6404-43DB-4D4F-8D3B-60677A3FE39C}"/>
+                <a16:creationId xmlns:a16="http://schemas.microsoft.com/office/drawing/2014/main" id="{AF4244F0-D12F-4D22-8C6C-CF9B19FCC1ED}"/>
               </a:ext>
             </a:extLst>
           </p:cNvPr>
@@ -3495,7 +3505,7 @@
           <p:cNvPr id="19" name="">
             <a:extLst xmlns:a="http://schemas.openxmlformats.org/drawingml/2006/main">
               <a:ext uri="{FF2B5EF4-FFF2-40B4-BE49-F238E27FC236}">
-                <a16:creationId xmlns:a16="http://schemas.microsoft.com/office/drawing/2014/main" id="{D96D144B-509B-40E4-BF55-9D7775E0CBBD}"/>
+                <a16:creationId xmlns:a16="http://schemas.microsoft.com/office/drawing/2014/main" id="{390D0B4C-660F-406C-990F-CF07E989C785}"/>
               </a:ext>
             </a:extLst>
           </p:cNvPr>
@@ -3552,7 +3562,7 @@
           <p:cNvPr id="20" name="">
             <a:extLst xmlns:a="http://schemas.openxmlformats.org/drawingml/2006/main">
               <a:ext uri="{FF2B5EF4-FFF2-40B4-BE49-F238E27FC236}">
-                <a16:creationId xmlns:a16="http://schemas.microsoft.com/office/drawing/2014/main" id="{203494CC-AAB3-4302-9A03-C2585C7752BF}"/>
+                <a16:creationId xmlns:a16="http://schemas.microsoft.com/office/drawing/2014/main" id="{318F8134-9209-459C-96D9-C1D6C34A01E2}"/>
               </a:ext>
             </a:extLst>
           </p:cNvPr>
@@ -3609,7 +3619,7 @@
           <p:cNvPr id="21" name="">
             <a:extLst xmlns:a="http://schemas.openxmlformats.org/drawingml/2006/main">
               <a:ext uri="{FF2B5EF4-FFF2-40B4-BE49-F238E27FC236}">
-                <a16:creationId xmlns:a16="http://schemas.microsoft.com/office/drawing/2014/main" id="{27E1099E-2E2C-479F-8CD1-F204F3403741}"/>
+                <a16:creationId xmlns:a16="http://schemas.microsoft.com/office/drawing/2014/main" id="{68960C85-786E-4D68-B862-A930652357FD}"/>
               </a:ext>
             </a:extLst>
           </p:cNvPr>
@@ -3666,7 +3676,7 @@
           <p:cNvPr id="22" name="">
             <a:extLst xmlns:a="http://schemas.openxmlformats.org/drawingml/2006/main">
               <a:ext uri="{FF2B5EF4-FFF2-40B4-BE49-F238E27FC236}">
-                <a16:creationId xmlns:a16="http://schemas.microsoft.com/office/drawing/2014/main" id="{E05118AD-2F1A-4AF1-B24C-0B436C039508}"/>
+                <a16:creationId xmlns:a16="http://schemas.microsoft.com/office/drawing/2014/main" id="{3B2948AD-AB22-48A3-B726-0E459B5D0BE6}"/>
               </a:ext>
             </a:extLst>
           </p:cNvPr>
@@ -3723,7 +3733,7 @@
           <p:cNvPr id="23" name="">
             <a:extLst xmlns:a="http://schemas.openxmlformats.org/drawingml/2006/main">
               <a:ext uri="{FF2B5EF4-FFF2-40B4-BE49-F238E27FC236}">
-                <a16:creationId xmlns:a16="http://schemas.microsoft.com/office/drawing/2014/main" id="{9401799D-695C-4E8D-98D5-E854909666C5}"/>
+                <a16:creationId xmlns:a16="http://schemas.microsoft.com/office/drawing/2014/main" id="{35084420-1248-4527-A416-6A9D23C7E87B}"/>
               </a:ext>
             </a:extLst>
           </p:cNvPr>
@@ -3754,7 +3764,7 @@
           <p:cNvPr id="24" name="">
             <a:extLst xmlns:a="http://schemas.openxmlformats.org/drawingml/2006/main">
               <a:ext uri="{FF2B5EF4-FFF2-40B4-BE49-F238E27FC236}">
-                <a16:creationId xmlns:a16="http://schemas.microsoft.com/office/drawing/2014/main" id="{FEBE13A9-23A2-4DE3-83AD-47FF536542C1}"/>
+                <a16:creationId xmlns:a16="http://schemas.microsoft.com/office/drawing/2014/main" id="{5D4FD366-0E52-4934-A2CB-50CB57915C51}"/>
               </a:ext>
             </a:extLst>
           </p:cNvPr>
@@ -3809,7 +3819,7 @@
     </p:spTree>
     <p:extLst>
       <p:ext uri="{BB962C8B-B14F-4D97-AF65-F5344CB8AC3E}">
-        <p14:creationId xmlns:p14="http://schemas.microsoft.com/office/powerpoint/2010/main" val="174314789"/>
+        <p14:creationId xmlns:p14="http://schemas.microsoft.com/office/powerpoint/2010/main" val="264847720"/>
       </p:ext>
     </p:extLst>
   </p:cSld>
@@ -3840,7 +3850,7 @@
           <p:cNvPr id="8" name="">
             <a:extLst xmlns:a="http://schemas.openxmlformats.org/drawingml/2006/main">
               <a:ext uri="{FF2B5EF4-FFF2-40B4-BE49-F238E27FC236}">
-                <a16:creationId xmlns:a16="http://schemas.microsoft.com/office/drawing/2014/main" id="{AF00E282-EDB9-43D2-A4BB-C6F5CCB0D10E}"/>
+                <a16:creationId xmlns:a16="http://schemas.microsoft.com/office/drawing/2014/main" id="{496FC24C-6EC7-49C6-9D5C-78A65E741E53}"/>
               </a:ext>
             </a:extLst>
           </p:cNvPr>
@@ -3897,7 +3907,7 @@
           <p:cNvPr id="2" name="">
             <a:extLst xmlns:a="http://schemas.openxmlformats.org/drawingml/2006/main">
               <a:ext uri="{FF2B5EF4-FFF2-40B4-BE49-F238E27FC236}">
-                <a16:creationId xmlns:a16="http://schemas.microsoft.com/office/drawing/2014/main" id="{A39800C3-919A-4BBD-AFA6-452C3C5B57C7}"/>
+                <a16:creationId xmlns:a16="http://schemas.microsoft.com/office/drawing/2014/main" id="{341A2C7E-0BEA-4F2D-8EF0-59D9B3E26C31}"/>
               </a:ext>
             </a:extLst>
           </p:cNvPr>
@@ -3928,7 +3938,7 @@
           <p:cNvPr id="3" name="">
             <a:extLst xmlns:a="http://schemas.openxmlformats.org/drawingml/2006/main">
               <a:ext uri="{FF2B5EF4-FFF2-40B4-BE49-F238E27FC236}">
-                <a16:creationId xmlns:a16="http://schemas.microsoft.com/office/drawing/2014/main" id="{AB24B5B6-C244-430D-B97C-7A803C4B2636}"/>
+                <a16:creationId xmlns:a16="http://schemas.microsoft.com/office/drawing/2014/main" id="{4FACA426-4733-4CBF-AA4B-6E86935DE4EE}"/>
               </a:ext>
             </a:extLst>
           </p:cNvPr>
@@ -4328,7 +4338,7 @@
           <p:cNvPr id="5" name="">
             <a:extLst xmlns:a="http://schemas.openxmlformats.org/drawingml/2006/main">
               <a:ext uri="{FF2B5EF4-FFF2-40B4-BE49-F238E27FC236}">
-                <a16:creationId xmlns:a16="http://schemas.microsoft.com/office/drawing/2014/main" id="{378EA4B1-AF39-4D9F-8D7D-7606A2A38707}"/>
+                <a16:creationId xmlns:a16="http://schemas.microsoft.com/office/drawing/2014/main" id="{136F8BC4-C119-43E3-A02A-6197D2914B8F}"/>
               </a:ext>
             </a:extLst>
           </p:cNvPr>
@@ -4385,7 +4395,7 @@
           <p:cNvPr id="6" name="">
             <a:extLst xmlns:a="http://schemas.openxmlformats.org/drawingml/2006/main">
               <a:ext uri="{FF2B5EF4-FFF2-40B4-BE49-F238E27FC236}">
-                <a16:creationId xmlns:a16="http://schemas.microsoft.com/office/drawing/2014/main" id="{612528BE-BBE4-403F-A168-34751E10988A}"/>
+                <a16:creationId xmlns:a16="http://schemas.microsoft.com/office/drawing/2014/main" id="{458AFE5E-E53C-4E24-A0CE-23172575CAF3}"/>
               </a:ext>
             </a:extLst>
           </p:cNvPr>
@@ -4416,7 +4426,7 @@
           <p:cNvPr id="7" name="">
             <a:extLst xmlns:a="http://schemas.openxmlformats.org/drawingml/2006/main">
               <a:ext uri="{FF2B5EF4-FFF2-40B4-BE49-F238E27FC236}">
-                <a16:creationId xmlns:a16="http://schemas.microsoft.com/office/drawing/2014/main" id="{2F5E5206-442F-4897-930A-F3395DAF18D2}"/>
+                <a16:creationId xmlns:a16="http://schemas.microsoft.com/office/drawing/2014/main" id="{DAD3A4F0-9A38-479B-927C-924FBB0967AF}"/>
               </a:ext>
             </a:extLst>
           </p:cNvPr>
@@ -4471,7 +4481,7 @@
     </p:spTree>
     <p:extLst>
       <p:ext uri="{BB962C8B-B14F-4D97-AF65-F5344CB8AC3E}">
-        <p14:creationId xmlns:p14="http://schemas.microsoft.com/office/powerpoint/2010/main" val="2137794210"/>
+        <p14:creationId xmlns:p14="http://schemas.microsoft.com/office/powerpoint/2010/main" val="1223876052"/>
       </p:ext>
     </p:extLst>
   </p:cSld>
@@ -4502,7 +4512,7 @@
           <p:cNvPr id="32" name="">
             <a:extLst xmlns:a="http://schemas.openxmlformats.org/drawingml/2006/main">
               <a:ext uri="{FF2B5EF4-FFF2-40B4-BE49-F238E27FC236}">
-                <a16:creationId xmlns:a16="http://schemas.microsoft.com/office/drawing/2014/main" id="{42E6D622-1D1D-4631-B352-B2E0A43F4C05}"/>
+                <a16:creationId xmlns:a16="http://schemas.microsoft.com/office/drawing/2014/main" id="{13C8C6AF-A5E9-4749-B48C-C05FB43D2971}"/>
               </a:ext>
             </a:extLst>
           </p:cNvPr>
@@ -4559,7 +4569,7 @@
           <p:cNvPr id="2" name="">
             <a:extLst xmlns:a="http://schemas.openxmlformats.org/drawingml/2006/main">
               <a:ext uri="{FF2B5EF4-FFF2-40B4-BE49-F238E27FC236}">
-                <a16:creationId xmlns:a16="http://schemas.microsoft.com/office/drawing/2014/main" id="{46FF5450-1E0B-49E8-991B-C74DBF6E75EA}"/>
+                <a16:creationId xmlns:a16="http://schemas.microsoft.com/office/drawing/2014/main" id="{69CFF263-20B3-477A-B077-D36384856E51}"/>
               </a:ext>
             </a:extLst>
           </p:cNvPr>
@@ -4590,7 +4600,7 @@
           <p:cNvPr id="3" name="">
             <a:extLst xmlns:a="http://schemas.openxmlformats.org/drawingml/2006/main">
               <a:ext uri="{FF2B5EF4-FFF2-40B4-BE49-F238E27FC236}">
-                <a16:creationId xmlns:a16="http://schemas.microsoft.com/office/drawing/2014/main" id="{BC66A3D4-F361-4921-AF07-7EAA9CB72313}"/>
+                <a16:creationId xmlns:a16="http://schemas.microsoft.com/office/drawing/2014/main" id="{0918869A-F28A-4660-84E6-02681326D7D7}"/>
               </a:ext>
             </a:extLst>
           </p:cNvPr>
@@ -4647,7 +4657,7 @@
           <p:cNvPr id="4" name="">
             <a:extLst xmlns:a="http://schemas.openxmlformats.org/drawingml/2006/main">
               <a:ext uri="{FF2B5EF4-FFF2-40B4-BE49-F238E27FC236}">
-                <a16:creationId xmlns:a16="http://schemas.microsoft.com/office/drawing/2014/main" id="{E4B10553-522D-4397-9306-434A0B500B95}"/>
+                <a16:creationId xmlns:a16="http://schemas.microsoft.com/office/drawing/2014/main" id="{5DB15A46-3502-42FF-8005-D3AD49A666C0}"/>
               </a:ext>
             </a:extLst>
           </p:cNvPr>
@@ -4680,7 +4690,7 @@
           <p:cNvPr id="5" name="">
             <a:extLst xmlns:a="http://schemas.openxmlformats.org/drawingml/2006/main">
               <a:ext uri="{FF2B5EF4-FFF2-40B4-BE49-F238E27FC236}">
-                <a16:creationId xmlns:a16="http://schemas.microsoft.com/office/drawing/2014/main" id="{F66D6C04-AB7B-4599-AF98-2B41A2460EFE}"/>
+                <a16:creationId xmlns:a16="http://schemas.microsoft.com/office/drawing/2014/main" id="{4B648074-C46D-4191-A6EC-34F10305A425}"/>
               </a:ext>
             </a:extLst>
           </p:cNvPr>
@@ -4737,7 +4747,7 @@
           <p:cNvPr id="6" name="">
             <a:extLst xmlns:a="http://schemas.openxmlformats.org/drawingml/2006/main">
               <a:ext uri="{FF2B5EF4-FFF2-40B4-BE49-F238E27FC236}">
-                <a16:creationId xmlns:a16="http://schemas.microsoft.com/office/drawing/2014/main" id="{1992D63F-2F09-4BC5-B4EE-94C3DC141531}"/>
+                <a16:creationId xmlns:a16="http://schemas.microsoft.com/office/drawing/2014/main" id="{6AED620E-F042-456C-8DED-BDE1AFFA0806}"/>
               </a:ext>
             </a:extLst>
           </p:cNvPr>
@@ -4770,7 +4780,7 @@
           <p:cNvPr id="7" name="">
             <a:extLst xmlns:a="http://schemas.openxmlformats.org/drawingml/2006/main">
               <a:ext uri="{FF2B5EF4-FFF2-40B4-BE49-F238E27FC236}">
-                <a16:creationId xmlns:a16="http://schemas.microsoft.com/office/drawing/2014/main" id="{2F1AF8DF-46FA-458C-A6A1-769857F83CF6}"/>
+                <a16:creationId xmlns:a16="http://schemas.microsoft.com/office/drawing/2014/main" id="{6111C9A8-C2D3-4428-B4BC-CE596DA6EC8D}"/>
               </a:ext>
             </a:extLst>
           </p:cNvPr>
@@ -4827,7 +4837,7 @@
           <p:cNvPr id="8" name="">
             <a:extLst xmlns:a="http://schemas.openxmlformats.org/drawingml/2006/main">
               <a:ext uri="{FF2B5EF4-FFF2-40B4-BE49-F238E27FC236}">
-                <a16:creationId xmlns:a16="http://schemas.microsoft.com/office/drawing/2014/main" id="{07F2F772-AA2C-4EEA-AB90-C632932B490F}"/>
+                <a16:creationId xmlns:a16="http://schemas.microsoft.com/office/drawing/2014/main" id="{90F1C674-1598-4A12-93CC-F0218E4B4198}"/>
               </a:ext>
             </a:extLst>
           </p:cNvPr>
@@ -4860,7 +4870,7 @@
           <p:cNvPr id="9" name="">
             <a:extLst xmlns:a="http://schemas.openxmlformats.org/drawingml/2006/main">
               <a:ext uri="{FF2B5EF4-FFF2-40B4-BE49-F238E27FC236}">
-                <a16:creationId xmlns:a16="http://schemas.microsoft.com/office/drawing/2014/main" id="{082869A7-25D4-4E51-8F58-AAFFA0B99902}"/>
+                <a16:creationId xmlns:a16="http://schemas.microsoft.com/office/drawing/2014/main" id="{986D905A-2E02-462E-9BAD-D83C7014E4C6}"/>
               </a:ext>
             </a:extLst>
           </p:cNvPr>
@@ -4917,7 +4927,7 @@
           <p:cNvPr id="10" name="">
             <a:extLst xmlns:a="http://schemas.openxmlformats.org/drawingml/2006/main">
               <a:ext uri="{FF2B5EF4-FFF2-40B4-BE49-F238E27FC236}">
-                <a16:creationId xmlns:a16="http://schemas.microsoft.com/office/drawing/2014/main" id="{26269ACE-D69E-4D35-9BF1-8D1C9BF17F86}"/>
+                <a16:creationId xmlns:a16="http://schemas.microsoft.com/office/drawing/2014/main" id="{CE30363C-907E-4FF1-89C4-D90A5D32DFC8}"/>
               </a:ext>
             </a:extLst>
           </p:cNvPr>
@@ -4950,7 +4960,7 @@
           <p:cNvPr id="11" name="">
             <a:extLst xmlns:a="http://schemas.openxmlformats.org/drawingml/2006/main">
               <a:ext uri="{FF2B5EF4-FFF2-40B4-BE49-F238E27FC236}">
-                <a16:creationId xmlns:a16="http://schemas.microsoft.com/office/drawing/2014/main" id="{21E9717D-21FF-4053-A973-97F208BB432C}"/>
+                <a16:creationId xmlns:a16="http://schemas.microsoft.com/office/drawing/2014/main" id="{F9980455-647E-4E3A-8176-639EA4CFECB0}"/>
               </a:ext>
             </a:extLst>
           </p:cNvPr>
@@ -5007,7 +5017,7 @@
           <p:cNvPr id="12" name="">
             <a:extLst xmlns:a="http://schemas.openxmlformats.org/drawingml/2006/main">
               <a:ext uri="{FF2B5EF4-FFF2-40B4-BE49-F238E27FC236}">
-                <a16:creationId xmlns:a16="http://schemas.microsoft.com/office/drawing/2014/main" id="{8847E2D9-FF37-4437-8851-972EAC0C62E6}"/>
+                <a16:creationId xmlns:a16="http://schemas.microsoft.com/office/drawing/2014/main" id="{75BB8B12-5ADB-43C5-8AEE-AF34A343A7E2}"/>
               </a:ext>
             </a:extLst>
           </p:cNvPr>
@@ -5040,7 +5050,7 @@
           <p:cNvPr id="13" name="">
             <a:extLst xmlns:a="http://schemas.openxmlformats.org/drawingml/2006/main">
               <a:ext uri="{FF2B5EF4-FFF2-40B4-BE49-F238E27FC236}">
-                <a16:creationId xmlns:a16="http://schemas.microsoft.com/office/drawing/2014/main" id="{0E7EEE24-F292-4546-84E1-4E634EA26093}"/>
+                <a16:creationId xmlns:a16="http://schemas.microsoft.com/office/drawing/2014/main" id="{E4A88C1A-91F1-4ED2-9530-131FDCCAE00B}"/>
               </a:ext>
             </a:extLst>
           </p:cNvPr>
@@ -5201,7 +5211,7 @@
           <p:cNvPr id="18" name="">
             <a:extLst xmlns:a="http://schemas.openxmlformats.org/drawingml/2006/main">
               <a:ext uri="{FF2B5EF4-FFF2-40B4-BE49-F238E27FC236}">
-                <a16:creationId xmlns:a16="http://schemas.microsoft.com/office/drawing/2014/main" id="{FC1B7F88-91BD-4B7D-AB91-EB5E24C182F5}"/>
+                <a16:creationId xmlns:a16="http://schemas.microsoft.com/office/drawing/2014/main" id="{E45A984A-B169-498D-953A-89A2FD47757B}"/>
               </a:ext>
             </a:extLst>
           </p:cNvPr>
@@ -5234,7 +5244,7 @@
           <p:cNvPr id="19" name="">
             <a:extLst xmlns:a="http://schemas.openxmlformats.org/drawingml/2006/main">
               <a:ext uri="{FF2B5EF4-FFF2-40B4-BE49-F238E27FC236}">
-                <a16:creationId xmlns:a16="http://schemas.microsoft.com/office/drawing/2014/main" id="{CDA4C618-72A7-4C71-AF91-C8D7DC28C9E5}"/>
+                <a16:creationId xmlns:a16="http://schemas.microsoft.com/office/drawing/2014/main" id="{DC625860-A7F4-4516-A9B0-BD45749C2F1E}"/>
               </a:ext>
             </a:extLst>
           </p:cNvPr>
@@ -5291,7 +5301,7 @@
           <p:cNvPr id="20" name="">
             <a:extLst xmlns:a="http://schemas.openxmlformats.org/drawingml/2006/main">
               <a:ext uri="{FF2B5EF4-FFF2-40B4-BE49-F238E27FC236}">
-                <a16:creationId xmlns:a16="http://schemas.microsoft.com/office/drawing/2014/main" id="{BD70EE2F-8B0F-45D0-8D48-49E2FCE37D16}"/>
+                <a16:creationId xmlns:a16="http://schemas.microsoft.com/office/drawing/2014/main" id="{7D816891-4F03-44D4-B8B0-5E53E6651AB0}"/>
               </a:ext>
             </a:extLst>
           </p:cNvPr>
@@ -5324,7 +5334,7 @@
           <p:cNvPr id="21" name="">
             <a:extLst xmlns:a="http://schemas.openxmlformats.org/drawingml/2006/main">
               <a:ext uri="{FF2B5EF4-FFF2-40B4-BE49-F238E27FC236}">
-                <a16:creationId xmlns:a16="http://schemas.microsoft.com/office/drawing/2014/main" id="{162D168F-7FFD-4869-BFED-229108B0BABB}"/>
+                <a16:creationId xmlns:a16="http://schemas.microsoft.com/office/drawing/2014/main" id="{3A745B2C-543A-44C3-A321-CD4BBCC06F70}"/>
               </a:ext>
             </a:extLst>
           </p:cNvPr>
@@ -5381,7 +5391,7 @@
           <p:cNvPr id="22" name="">
             <a:extLst xmlns:a="http://schemas.openxmlformats.org/drawingml/2006/main">
               <a:ext uri="{FF2B5EF4-FFF2-40B4-BE49-F238E27FC236}">
-                <a16:creationId xmlns:a16="http://schemas.microsoft.com/office/drawing/2014/main" id="{3CE842E6-207D-4750-8541-EEB6A6BCD30F}"/>
+                <a16:creationId xmlns:a16="http://schemas.microsoft.com/office/drawing/2014/main" id="{8A83F9E9-85CF-4CA4-94F0-7B72F184D9B8}"/>
               </a:ext>
             </a:extLst>
           </p:cNvPr>
@@ -5414,7 +5424,7 @@
           <p:cNvPr id="23" name="">
             <a:extLst xmlns:a="http://schemas.openxmlformats.org/drawingml/2006/main">
               <a:ext uri="{FF2B5EF4-FFF2-40B4-BE49-F238E27FC236}">
-                <a16:creationId xmlns:a16="http://schemas.microsoft.com/office/drawing/2014/main" id="{D96F5C55-9B40-48AE-9B74-FFD8E993DA01}"/>
+                <a16:creationId xmlns:a16="http://schemas.microsoft.com/office/drawing/2014/main" id="{6E25CEE6-69AD-421E-B95E-FAECE3585EB7}"/>
               </a:ext>
             </a:extLst>
           </p:cNvPr>
@@ -5578,7 +5588,7 @@
           <p:cNvPr id="28" name="">
             <a:extLst xmlns:a="http://schemas.openxmlformats.org/drawingml/2006/main">
               <a:ext uri="{FF2B5EF4-FFF2-40B4-BE49-F238E27FC236}">
-                <a16:creationId xmlns:a16="http://schemas.microsoft.com/office/drawing/2014/main" id="{BCEE45B9-3D15-4AC8-AE70-5AFD412DA271}"/>
+                <a16:creationId xmlns:a16="http://schemas.microsoft.com/office/drawing/2014/main" id="{4F011E6A-5D08-48E0-8AE5-BD0CAE3CD25F}"/>
               </a:ext>
             </a:extLst>
           </p:cNvPr>
@@ -5635,7 +5645,7 @@
           <p:cNvPr id="29" name="">
             <a:extLst xmlns:a="http://schemas.openxmlformats.org/drawingml/2006/main">
               <a:ext uri="{FF2B5EF4-FFF2-40B4-BE49-F238E27FC236}">
-                <a16:creationId xmlns:a16="http://schemas.microsoft.com/office/drawing/2014/main" id="{1EFEDCE2-F407-4F83-9B92-28E85F6C1AC2}"/>
+                <a16:creationId xmlns:a16="http://schemas.microsoft.com/office/drawing/2014/main" id="{F4098478-930C-48BD-BA00-9C42A20FC314}"/>
               </a:ext>
             </a:extLst>
           </p:cNvPr>
@@ -5692,7 +5702,7 @@
           <p:cNvPr id="30" name="">
             <a:extLst xmlns:a="http://schemas.openxmlformats.org/drawingml/2006/main">
               <a:ext uri="{FF2B5EF4-FFF2-40B4-BE49-F238E27FC236}">
-                <a16:creationId xmlns:a16="http://schemas.microsoft.com/office/drawing/2014/main" id="{45786761-AF50-4868-8DC8-A5C6F5970C1E}"/>
+                <a16:creationId xmlns:a16="http://schemas.microsoft.com/office/drawing/2014/main" id="{A7A62D12-FF37-4B5D-B8E6-F5AE993CCF12}"/>
               </a:ext>
             </a:extLst>
           </p:cNvPr>
@@ -5723,7 +5733,7 @@
           <p:cNvPr id="31" name="">
             <a:extLst xmlns:a="http://schemas.openxmlformats.org/drawingml/2006/main">
               <a:ext uri="{FF2B5EF4-FFF2-40B4-BE49-F238E27FC236}">
-                <a16:creationId xmlns:a16="http://schemas.microsoft.com/office/drawing/2014/main" id="{2DAF3526-4519-402F-BCF9-69E1C8229D6C}"/>
+                <a16:creationId xmlns:a16="http://schemas.microsoft.com/office/drawing/2014/main" id="{D91A7991-C374-400F-9FE5-362961170F1D}"/>
               </a:ext>
             </a:extLst>
           </p:cNvPr>
@@ -5778,7 +5788,7 @@
     </p:spTree>
     <p:extLst>
       <p:ext uri="{BB962C8B-B14F-4D97-AF65-F5344CB8AC3E}">
-        <p14:creationId xmlns:p14="http://schemas.microsoft.com/office/powerpoint/2010/main" val="415600603"/>
+        <p14:creationId xmlns:p14="http://schemas.microsoft.com/office/powerpoint/2010/main" val="93176709"/>
       </p:ext>
     </p:extLst>
   </p:cSld>
@@ -5809,7 +5819,7 @@
           <p:cNvPr id="7" name="">
             <a:extLst xmlns:a="http://schemas.openxmlformats.org/drawingml/2006/main">
               <a:ext uri="{FF2B5EF4-FFF2-40B4-BE49-F238E27FC236}">
-                <a16:creationId xmlns:a16="http://schemas.microsoft.com/office/drawing/2014/main" id="{BB74AF8D-6A57-4EFC-BEF5-B46BDA20798F}"/>
+                <a16:creationId xmlns:a16="http://schemas.microsoft.com/office/drawing/2014/main" id="{26E86F8F-AF7C-4988-806F-61FA7BC42C7C}"/>
               </a:ext>
             </a:extLst>
           </p:cNvPr>
@@ -5866,7 +5876,7 @@
           <p:cNvPr id="2" name="">
             <a:extLst xmlns:a="http://schemas.openxmlformats.org/drawingml/2006/main">
               <a:ext uri="{FF2B5EF4-FFF2-40B4-BE49-F238E27FC236}">
-                <a16:creationId xmlns:a16="http://schemas.microsoft.com/office/drawing/2014/main" id="{C88E2438-D823-4197-82E5-D99171946BEA}"/>
+                <a16:creationId xmlns:a16="http://schemas.microsoft.com/office/drawing/2014/main" id="{721AD406-ECFF-4E9C-A472-E99E430652FA}"/>
               </a:ext>
             </a:extLst>
           </p:cNvPr>
@@ -5897,7 +5907,7 @@
           <p:cNvPr id="3" name="">
             <a:extLst xmlns:a="http://schemas.openxmlformats.org/drawingml/2006/main">
               <a:ext uri="{FF2B5EF4-FFF2-40B4-BE49-F238E27FC236}">
-                <a16:creationId xmlns:a16="http://schemas.microsoft.com/office/drawing/2014/main" id="{192ED037-8CA7-4AC6-9232-BE06F2AD522E}"/>
+                <a16:creationId xmlns:a16="http://schemas.microsoft.com/office/drawing/2014/main" id="{324396A9-CF5E-4BE7-9CAD-09FDEE17470D}"/>
               </a:ext>
             </a:extLst>
           </p:cNvPr>
@@ -6377,7 +6387,7 @@
           <p:cNvPr id="5" name="">
             <a:extLst xmlns:a="http://schemas.openxmlformats.org/drawingml/2006/main">
               <a:ext uri="{FF2B5EF4-FFF2-40B4-BE49-F238E27FC236}">
-                <a16:creationId xmlns:a16="http://schemas.microsoft.com/office/drawing/2014/main" id="{5CC1F57A-A9B0-4475-9581-A390EE363AA6}"/>
+                <a16:creationId xmlns:a16="http://schemas.microsoft.com/office/drawing/2014/main" id="{EEA98B04-98CA-41A9-962E-B59420024E31}"/>
               </a:ext>
             </a:extLst>
           </p:cNvPr>
@@ -6408,7 +6418,7 @@
           <p:cNvPr id="6" name="">
             <a:extLst xmlns:a="http://schemas.openxmlformats.org/drawingml/2006/main">
               <a:ext uri="{FF2B5EF4-FFF2-40B4-BE49-F238E27FC236}">
-                <a16:creationId xmlns:a16="http://schemas.microsoft.com/office/drawing/2014/main" id="{FC36E7D1-9274-4D01-A92B-A225EAB103D6}"/>
+                <a16:creationId xmlns:a16="http://schemas.microsoft.com/office/drawing/2014/main" id="{DDB33D7B-5415-4E32-B919-6B1F84FA7625}"/>
               </a:ext>
             </a:extLst>
           </p:cNvPr>
@@ -6463,7 +6473,7 @@
     </p:spTree>
     <p:extLst>
       <p:ext uri="{BB962C8B-B14F-4D97-AF65-F5344CB8AC3E}">
-        <p14:creationId xmlns:p14="http://schemas.microsoft.com/office/powerpoint/2010/main" val="53369033"/>
+        <p14:creationId xmlns:p14="http://schemas.microsoft.com/office/powerpoint/2010/main" val="1623132250"/>
       </p:ext>
     </p:extLst>
   </p:cSld>
@@ -6494,7 +6504,7 @@
           <p:cNvPr id="21" name="">
             <a:extLst xmlns:a="http://schemas.openxmlformats.org/drawingml/2006/main">
               <a:ext uri="{FF2B5EF4-FFF2-40B4-BE49-F238E27FC236}">
-                <a16:creationId xmlns:a16="http://schemas.microsoft.com/office/drawing/2014/main" id="{457D86F9-D1E3-4880-BFDE-9DA716606671}"/>
+                <a16:creationId xmlns:a16="http://schemas.microsoft.com/office/drawing/2014/main" id="{41E9B2DB-643C-440E-ACEA-231CAEA1CA37}"/>
               </a:ext>
             </a:extLst>
           </p:cNvPr>
@@ -6574,7 +6584,7 @@
           <p:cNvPr id="2" name="">
             <a:extLst xmlns:a="http://schemas.openxmlformats.org/drawingml/2006/main">
               <a:ext uri="{FF2B5EF4-FFF2-40B4-BE49-F238E27FC236}">
-                <a16:creationId xmlns:a16="http://schemas.microsoft.com/office/drawing/2014/main" id="{D99184FC-157D-4F50-BA19-C23C4DDD112A}"/>
+                <a16:creationId xmlns:a16="http://schemas.microsoft.com/office/drawing/2014/main" id="{1F0717E3-0A5F-4782-ABCC-043C0EB20ABE}"/>
               </a:ext>
             </a:extLst>
           </p:cNvPr>
@@ -6605,7 +6615,7 @@
           <p:cNvPr id="3" name="">
             <a:extLst xmlns:a="http://schemas.openxmlformats.org/drawingml/2006/main">
               <a:ext uri="{FF2B5EF4-FFF2-40B4-BE49-F238E27FC236}">
-                <a16:creationId xmlns:a16="http://schemas.microsoft.com/office/drawing/2014/main" id="{6D2FB3B5-C462-4AFF-B7C5-EF1AB2FFC9E4}"/>
+                <a16:creationId xmlns:a16="http://schemas.microsoft.com/office/drawing/2014/main" id="{3F33A32E-DE73-4E56-B52D-577779A047B7}"/>
               </a:ext>
             </a:extLst>
           </p:cNvPr>
@@ -6662,7 +6672,7 @@
           <p:cNvPr id="4" name="">
             <a:extLst xmlns:a="http://schemas.openxmlformats.org/drawingml/2006/main">
               <a:ext uri="{FF2B5EF4-FFF2-40B4-BE49-F238E27FC236}">
-                <a16:creationId xmlns:a16="http://schemas.microsoft.com/office/drawing/2014/main" id="{8959CF0F-1EEB-4C62-8EEB-4686CDF05991}"/>
+                <a16:creationId xmlns:a16="http://schemas.microsoft.com/office/drawing/2014/main" id="{B5D630FE-1261-4724-BF38-DA27DFC237FB}"/>
               </a:ext>
             </a:extLst>
           </p:cNvPr>
@@ -6719,7 +6729,7 @@
           <p:cNvPr id="5" name="">
             <a:extLst xmlns:a="http://schemas.openxmlformats.org/drawingml/2006/main">
               <a:ext uri="{FF2B5EF4-FFF2-40B4-BE49-F238E27FC236}">
-                <a16:creationId xmlns:a16="http://schemas.microsoft.com/office/drawing/2014/main" id="{9F28F117-4E9C-4BA9-9514-472CC4BFFEEB}"/>
+                <a16:creationId xmlns:a16="http://schemas.microsoft.com/office/drawing/2014/main" id="{F20014B9-1D24-4718-A4D2-750010556009}"/>
               </a:ext>
             </a:extLst>
           </p:cNvPr>
@@ -6776,7 +6786,7 @@
           <p:cNvPr id="6" name="">
             <a:extLst xmlns:a="http://schemas.openxmlformats.org/drawingml/2006/main">
               <a:ext uri="{FF2B5EF4-FFF2-40B4-BE49-F238E27FC236}">
-                <a16:creationId xmlns:a16="http://schemas.microsoft.com/office/drawing/2014/main" id="{90FA0A31-09B9-4D1F-92F9-552C1523AA29}"/>
+                <a16:creationId xmlns:a16="http://schemas.microsoft.com/office/drawing/2014/main" id="{A1ADAA30-2270-46F3-92CB-0C13181FAFB4}"/>
               </a:ext>
             </a:extLst>
           </p:cNvPr>
@@ -6807,7 +6817,7 @@
           <p:cNvPr id="7" name="">
             <a:extLst xmlns:a="http://schemas.openxmlformats.org/drawingml/2006/main">
               <a:ext uri="{FF2B5EF4-FFF2-40B4-BE49-F238E27FC236}">
-                <a16:creationId xmlns:a16="http://schemas.microsoft.com/office/drawing/2014/main" id="{AFECFFA5-0939-4584-B7AD-E9D4D8200179}"/>
+                <a16:creationId xmlns:a16="http://schemas.microsoft.com/office/drawing/2014/main" id="{31886E7D-8F1B-4D43-AA74-EB94D8B9F5D1}"/>
               </a:ext>
             </a:extLst>
           </p:cNvPr>
@@ -6864,7 +6874,7 @@
           <p:cNvPr id="8" name="">
             <a:extLst xmlns:a="http://schemas.openxmlformats.org/drawingml/2006/main">
               <a:ext uri="{FF2B5EF4-FFF2-40B4-BE49-F238E27FC236}">
-                <a16:creationId xmlns:a16="http://schemas.microsoft.com/office/drawing/2014/main" id="{27002E90-9C4E-43FF-956A-8EFEDA3ED77B}"/>
+                <a16:creationId xmlns:a16="http://schemas.microsoft.com/office/drawing/2014/main" id="{F8C2EF94-5749-4192-848B-35417E28082E}"/>
               </a:ext>
             </a:extLst>
           </p:cNvPr>
@@ -6921,7 +6931,7 @@
           <p:cNvPr id="9" name="">
             <a:extLst xmlns:a="http://schemas.openxmlformats.org/drawingml/2006/main">
               <a:ext uri="{FF2B5EF4-FFF2-40B4-BE49-F238E27FC236}">
-                <a16:creationId xmlns:a16="http://schemas.microsoft.com/office/drawing/2014/main" id="{44454CA9-DDAD-47ED-9B68-AF801AF19007}"/>
+                <a16:creationId xmlns:a16="http://schemas.microsoft.com/office/drawing/2014/main" id="{B8BA126B-05A5-46DE-A58C-A943A06D7955}"/>
               </a:ext>
             </a:extLst>
           </p:cNvPr>
@@ -6978,7 +6988,7 @@
           <p:cNvPr id="10" name="">
             <a:extLst xmlns:a="http://schemas.openxmlformats.org/drawingml/2006/main">
               <a:ext uri="{FF2B5EF4-FFF2-40B4-BE49-F238E27FC236}">
-                <a16:creationId xmlns:a16="http://schemas.microsoft.com/office/drawing/2014/main" id="{DF1E67AC-745C-48C1-B517-B5CA04C801A7}"/>
+                <a16:creationId xmlns:a16="http://schemas.microsoft.com/office/drawing/2014/main" id="{573764B7-66B8-47B3-9BFA-6A40C755C883}"/>
               </a:ext>
             </a:extLst>
           </p:cNvPr>
@@ -7035,7 +7045,7 @@
           <p:cNvPr id="11" name="">
             <a:extLst xmlns:a="http://schemas.openxmlformats.org/drawingml/2006/main">
               <a:ext uri="{FF2B5EF4-FFF2-40B4-BE49-F238E27FC236}">
-                <a16:creationId xmlns:a16="http://schemas.microsoft.com/office/drawing/2014/main" id="{338FDD35-C08C-4AD7-93C7-9A11D61302CC}"/>
+                <a16:creationId xmlns:a16="http://schemas.microsoft.com/office/drawing/2014/main" id="{1DB51FA7-9DC6-4771-B41B-0D84EF0B0F1D}"/>
               </a:ext>
             </a:extLst>
           </p:cNvPr>
@@ -7092,7 +7102,7 @@
           <p:cNvPr id="12" name="">
             <a:extLst xmlns:a="http://schemas.openxmlformats.org/drawingml/2006/main">
               <a:ext uri="{FF2B5EF4-FFF2-40B4-BE49-F238E27FC236}">
-                <a16:creationId xmlns:a16="http://schemas.microsoft.com/office/drawing/2014/main" id="{86E0CC7E-12DF-43A5-B8D9-9B3FF405D169}"/>
+                <a16:creationId xmlns:a16="http://schemas.microsoft.com/office/drawing/2014/main" id="{6BA6AC91-C0C8-4FE3-9E5E-F383F7B8CCF5}"/>
               </a:ext>
             </a:extLst>
           </p:cNvPr>
@@ -7149,7 +7159,7 @@
           <p:cNvPr id="13" name="">
             <a:extLst xmlns:a="http://schemas.openxmlformats.org/drawingml/2006/main">
               <a:ext uri="{FF2B5EF4-FFF2-40B4-BE49-F238E27FC236}">
-                <a16:creationId xmlns:a16="http://schemas.microsoft.com/office/drawing/2014/main" id="{9E6F00B1-4764-4765-B2E9-A1A265A2F27B}"/>
+                <a16:creationId xmlns:a16="http://schemas.microsoft.com/office/drawing/2014/main" id="{69C2E13A-8DBD-4AF6-AEE2-C74FA4DB4FA4}"/>
               </a:ext>
             </a:extLst>
           </p:cNvPr>
@@ -7180,7 +7190,7 @@
           <p:cNvPr id="14" name="">
             <a:extLst xmlns:a="http://schemas.openxmlformats.org/drawingml/2006/main">
               <a:ext uri="{FF2B5EF4-FFF2-40B4-BE49-F238E27FC236}">
-                <a16:creationId xmlns:a16="http://schemas.microsoft.com/office/drawing/2014/main" id="{2D22A654-877A-4CE3-B975-03DEAA18B930}"/>
+                <a16:creationId xmlns:a16="http://schemas.microsoft.com/office/drawing/2014/main" id="{90D74532-F315-40E3-BDDC-60379C5ED0E7}"/>
               </a:ext>
             </a:extLst>
           </p:cNvPr>
@@ -7237,7 +7247,7 @@
           <p:cNvPr id="15" name="">
             <a:extLst xmlns:a="http://schemas.openxmlformats.org/drawingml/2006/main">
               <a:ext uri="{FF2B5EF4-FFF2-40B4-BE49-F238E27FC236}">
-                <a16:creationId xmlns:a16="http://schemas.microsoft.com/office/drawing/2014/main" id="{CE666907-A5ED-4C0A-A404-3A7367F58916}"/>
+                <a16:creationId xmlns:a16="http://schemas.microsoft.com/office/drawing/2014/main" id="{B87639FF-E7E3-4CD5-9A33-34698F092398}"/>
               </a:ext>
             </a:extLst>
           </p:cNvPr>
@@ -7294,7 +7304,7 @@
           <p:cNvPr id="16" name="">
             <a:extLst xmlns:a="http://schemas.openxmlformats.org/drawingml/2006/main">
               <a:ext uri="{FF2B5EF4-FFF2-40B4-BE49-F238E27FC236}">
-                <a16:creationId xmlns:a16="http://schemas.microsoft.com/office/drawing/2014/main" id="{9AFD0DE6-7608-4E51-951D-89B9D8089232}"/>
+                <a16:creationId xmlns:a16="http://schemas.microsoft.com/office/drawing/2014/main" id="{EFC6400B-C1C3-4D9B-9536-98A4F921BDCC}"/>
               </a:ext>
             </a:extLst>
           </p:cNvPr>
@@ -7351,7 +7361,7 @@
           <p:cNvPr id="17" name="">
             <a:extLst xmlns:a="http://schemas.openxmlformats.org/drawingml/2006/main">
               <a:ext uri="{FF2B5EF4-FFF2-40B4-BE49-F238E27FC236}">
-                <a16:creationId xmlns:a16="http://schemas.microsoft.com/office/drawing/2014/main" id="{6B8669FA-E6F1-49A9-93CA-CF2A81F8407B}"/>
+                <a16:creationId xmlns:a16="http://schemas.microsoft.com/office/drawing/2014/main" id="{4A4CFB3F-C079-40B8-B8EB-99C503E9D748}"/>
               </a:ext>
             </a:extLst>
           </p:cNvPr>
@@ -7408,7 +7418,7 @@
           <p:cNvPr id="18" name="">
             <a:extLst xmlns:a="http://schemas.openxmlformats.org/drawingml/2006/main">
               <a:ext uri="{FF2B5EF4-FFF2-40B4-BE49-F238E27FC236}">
-                <a16:creationId xmlns:a16="http://schemas.microsoft.com/office/drawing/2014/main" id="{5A1AC03A-9BAE-47C9-9AFE-1F0021820A6B}"/>
+                <a16:creationId xmlns:a16="http://schemas.microsoft.com/office/drawing/2014/main" id="{891A143A-C5EA-4B2B-A13F-43C73B1DA6C8}"/>
               </a:ext>
             </a:extLst>
           </p:cNvPr>
@@ -7465,7 +7475,7 @@
           <p:cNvPr id="19" name="">
             <a:extLst xmlns:a="http://schemas.openxmlformats.org/drawingml/2006/main">
               <a:ext uri="{FF2B5EF4-FFF2-40B4-BE49-F238E27FC236}">
-                <a16:creationId xmlns:a16="http://schemas.microsoft.com/office/drawing/2014/main" id="{7A05A8EF-D10A-4521-9E51-C4EC3E92DBE7}"/>
+                <a16:creationId xmlns:a16="http://schemas.microsoft.com/office/drawing/2014/main" id="{FF156E55-06F0-455B-A2B4-5117E70ADBAB}"/>
               </a:ext>
             </a:extLst>
           </p:cNvPr>
@@ -7496,7 +7506,7 @@
           <p:cNvPr id="20" name="">
             <a:extLst xmlns:a="http://schemas.openxmlformats.org/drawingml/2006/main">
               <a:ext uri="{FF2B5EF4-FFF2-40B4-BE49-F238E27FC236}">
-                <a16:creationId xmlns:a16="http://schemas.microsoft.com/office/drawing/2014/main" id="{4C5882E7-6F77-4F10-978C-66FCD155D6E8}"/>
+                <a16:creationId xmlns:a16="http://schemas.microsoft.com/office/drawing/2014/main" id="{550FDE2A-EBD5-4563-AE6B-DEFED39B1622}"/>
               </a:ext>
             </a:extLst>
           </p:cNvPr>
@@ -7551,7 +7561,7 @@
     </p:spTree>
     <p:extLst>
       <p:ext uri="{BB962C8B-B14F-4D97-AF65-F5344CB8AC3E}">
-        <p14:creationId xmlns:p14="http://schemas.microsoft.com/office/powerpoint/2010/main" val="1075498167"/>
+        <p14:creationId xmlns:p14="http://schemas.microsoft.com/office/powerpoint/2010/main" val="970810297"/>
       </p:ext>
     </p:extLst>
   </p:cSld>
@@ -7582,7 +7592,7 @@
           <p:cNvPr id="21" name="">
             <a:extLst xmlns:a="http://schemas.openxmlformats.org/drawingml/2006/main">
               <a:ext uri="{FF2B5EF4-FFF2-40B4-BE49-F238E27FC236}">
-                <a16:creationId xmlns:a16="http://schemas.microsoft.com/office/drawing/2014/main" id="{33EE68E6-D4F2-45EA-AF87-9C038A8155FD}"/>
+                <a16:creationId xmlns:a16="http://schemas.microsoft.com/office/drawing/2014/main" id="{ACE5E03B-C13A-4D8F-92DC-2B3D4C784D5F}"/>
               </a:ext>
             </a:extLst>
           </p:cNvPr>
@@ -7639,7 +7649,7 @@
           <p:cNvPr id="2" name="">
             <a:extLst xmlns:a="http://schemas.openxmlformats.org/drawingml/2006/main">
               <a:ext uri="{FF2B5EF4-FFF2-40B4-BE49-F238E27FC236}">
-                <a16:creationId xmlns:a16="http://schemas.microsoft.com/office/drawing/2014/main" id="{54C063C2-2B70-4E07-94E3-76D27EA1CA17}"/>
+                <a16:creationId xmlns:a16="http://schemas.microsoft.com/office/drawing/2014/main" id="{6B487388-8F63-435A-B154-30D9E1B233C2}"/>
               </a:ext>
             </a:extLst>
           </p:cNvPr>
@@ -7670,7 +7680,7 @@
           <p:cNvPr id="3" name="">
             <a:extLst xmlns:a="http://schemas.openxmlformats.org/drawingml/2006/main">
               <a:ext uri="{FF2B5EF4-FFF2-40B4-BE49-F238E27FC236}">
-                <a16:creationId xmlns:a16="http://schemas.microsoft.com/office/drawing/2014/main" id="{00A453BA-2859-4977-B51B-D420747DD85A}"/>
+                <a16:creationId xmlns:a16="http://schemas.microsoft.com/office/drawing/2014/main" id="{2A22C287-AC15-4FF6-9046-3B8299F34A1D}"/>
               </a:ext>
             </a:extLst>
           </p:cNvPr>
@@ -7727,7 +7737,7 @@
           <p:cNvPr id="4" name="">
             <a:extLst xmlns:a="http://schemas.openxmlformats.org/drawingml/2006/main">
               <a:ext uri="{FF2B5EF4-FFF2-40B4-BE49-F238E27FC236}">
-                <a16:creationId xmlns:a16="http://schemas.microsoft.com/office/drawing/2014/main" id="{A5F39C5B-337C-42CB-BAD2-6708983375FE}"/>
+                <a16:creationId xmlns:a16="http://schemas.microsoft.com/office/drawing/2014/main" id="{614829E3-F90D-4B7A-BBED-D3052F7FCE55}"/>
               </a:ext>
             </a:extLst>
           </p:cNvPr>
@@ -7760,7 +7770,7 @@
           <p:cNvPr id="5" name="">
             <a:extLst xmlns:a="http://schemas.openxmlformats.org/drawingml/2006/main">
               <a:ext uri="{FF2B5EF4-FFF2-40B4-BE49-F238E27FC236}">
-                <a16:creationId xmlns:a16="http://schemas.microsoft.com/office/drawing/2014/main" id="{597BD4DB-E5F0-4A7B-BA26-182BADBB6B14}"/>
+                <a16:creationId xmlns:a16="http://schemas.microsoft.com/office/drawing/2014/main" id="{090C7CC3-C9FB-41C0-A077-FCAD36068E95}"/>
               </a:ext>
             </a:extLst>
           </p:cNvPr>
@@ -7817,7 +7827,7 @@
           <p:cNvPr id="6" name="">
             <a:extLst xmlns:a="http://schemas.openxmlformats.org/drawingml/2006/main">
               <a:ext uri="{FF2B5EF4-FFF2-40B4-BE49-F238E27FC236}">
-                <a16:creationId xmlns:a16="http://schemas.microsoft.com/office/drawing/2014/main" id="{4EABD9B8-AE2D-44A4-9292-2513D73A509C}"/>
+                <a16:creationId xmlns:a16="http://schemas.microsoft.com/office/drawing/2014/main" id="{F2E9C6BA-53E5-4D41-8443-40356FC16E4D}"/>
               </a:ext>
             </a:extLst>
           </p:cNvPr>
@@ -7897,7 +7907,7 @@
           <p:cNvPr id="7" name="">
             <a:extLst xmlns:a="http://schemas.openxmlformats.org/drawingml/2006/main">
               <a:ext uri="{FF2B5EF4-FFF2-40B4-BE49-F238E27FC236}">
-                <a16:creationId xmlns:a16="http://schemas.microsoft.com/office/drawing/2014/main" id="{472806F0-2D59-4839-A154-65259696D139}"/>
+                <a16:creationId xmlns:a16="http://schemas.microsoft.com/office/drawing/2014/main" id="{3216F2EF-3652-4B68-AEDD-6865A2203451}"/>
               </a:ext>
             </a:extLst>
           </p:cNvPr>
@@ -7977,7 +7987,7 @@
           <p:cNvPr id="8" name="">
             <a:extLst xmlns:a="http://schemas.openxmlformats.org/drawingml/2006/main">
               <a:ext uri="{FF2B5EF4-FFF2-40B4-BE49-F238E27FC236}">
-                <a16:creationId xmlns:a16="http://schemas.microsoft.com/office/drawing/2014/main" id="{86EB014B-F21D-441E-87BB-11FD19433CAF}"/>
+                <a16:creationId xmlns:a16="http://schemas.microsoft.com/office/drawing/2014/main" id="{C1E2CC17-B8C5-4CE0-9B26-C9606DB087EE}"/>
               </a:ext>
             </a:extLst>
           </p:cNvPr>
@@ -8010,7 +8020,7 @@
           <p:cNvPr id="9" name="">
             <a:extLst xmlns:a="http://schemas.openxmlformats.org/drawingml/2006/main">
               <a:ext uri="{FF2B5EF4-FFF2-40B4-BE49-F238E27FC236}">
-                <a16:creationId xmlns:a16="http://schemas.microsoft.com/office/drawing/2014/main" id="{4D86422D-F686-4D5F-947C-7A89A231EE6E}"/>
+                <a16:creationId xmlns:a16="http://schemas.microsoft.com/office/drawing/2014/main" id="{7DE38FF1-6FAB-49D5-A4A4-E6D00C2EDACE}"/>
               </a:ext>
             </a:extLst>
           </p:cNvPr>
@@ -8067,7 +8077,7 @@
           <p:cNvPr id="10" name="">
             <a:extLst xmlns:a="http://schemas.openxmlformats.org/drawingml/2006/main">
               <a:ext uri="{FF2B5EF4-FFF2-40B4-BE49-F238E27FC236}">
-                <a16:creationId xmlns:a16="http://schemas.microsoft.com/office/drawing/2014/main" id="{6B7D0A80-1DA0-4218-8ABE-083CDD653C93}"/>
+                <a16:creationId xmlns:a16="http://schemas.microsoft.com/office/drawing/2014/main" id="{B108BFC4-DE8D-4C5F-A602-1BD0B009468A}"/>
               </a:ext>
             </a:extLst>
           </p:cNvPr>
@@ -8147,7 +8157,7 @@
           <p:cNvPr id="11" name="">
             <a:extLst xmlns:a="http://schemas.openxmlformats.org/drawingml/2006/main">
               <a:ext uri="{FF2B5EF4-FFF2-40B4-BE49-F238E27FC236}">
-                <a16:creationId xmlns:a16="http://schemas.microsoft.com/office/drawing/2014/main" id="{09F83EA2-1D04-40B2-B2FE-B09B6C6C4C3F}"/>
+                <a16:creationId xmlns:a16="http://schemas.microsoft.com/office/drawing/2014/main" id="{4384744C-795E-4A49-9B42-6AEB437B9512}"/>
               </a:ext>
             </a:extLst>
           </p:cNvPr>
@@ -8227,7 +8237,7 @@
           <p:cNvPr id="12" name="">
             <a:extLst xmlns:a="http://schemas.openxmlformats.org/drawingml/2006/main">
               <a:ext uri="{FF2B5EF4-FFF2-40B4-BE49-F238E27FC236}">
-                <a16:creationId xmlns:a16="http://schemas.microsoft.com/office/drawing/2014/main" id="{B8ABB109-8423-4D4D-8A8B-D22D53FAA5AF}"/>
+                <a16:creationId xmlns:a16="http://schemas.microsoft.com/office/drawing/2014/main" id="{575C24AE-EF17-44A5-8C56-9324458F5CF0}"/>
               </a:ext>
             </a:extLst>
           </p:cNvPr>
@@ -8260,7 +8270,7 @@
           <p:cNvPr id="13" name="">
             <a:extLst xmlns:a="http://schemas.openxmlformats.org/drawingml/2006/main">
               <a:ext uri="{FF2B5EF4-FFF2-40B4-BE49-F238E27FC236}">
-                <a16:creationId xmlns:a16="http://schemas.microsoft.com/office/drawing/2014/main" id="{FC47528D-9256-476F-9878-249BB07780CE}"/>
+                <a16:creationId xmlns:a16="http://schemas.microsoft.com/office/drawing/2014/main" id="{D47C7F9C-6CD0-4E1A-9569-3ACFE6AF6B87}"/>
               </a:ext>
             </a:extLst>
           </p:cNvPr>
@@ -8317,7 +8327,7 @@
           <p:cNvPr id="14" name="">
             <a:extLst xmlns:a="http://schemas.openxmlformats.org/drawingml/2006/main">
               <a:ext uri="{FF2B5EF4-FFF2-40B4-BE49-F238E27FC236}">
-                <a16:creationId xmlns:a16="http://schemas.microsoft.com/office/drawing/2014/main" id="{C7D7E87F-B516-4E42-B262-2D508D4FF2C9}"/>
+                <a16:creationId xmlns:a16="http://schemas.microsoft.com/office/drawing/2014/main" id="{3335F5DF-BB9C-4BE7-ABE5-BA041AA5E86A}"/>
               </a:ext>
             </a:extLst>
           </p:cNvPr>
@@ -8397,7 +8407,7 @@
           <p:cNvPr id="15" name="">
             <a:extLst xmlns:a="http://schemas.openxmlformats.org/drawingml/2006/main">
               <a:ext uri="{FF2B5EF4-FFF2-40B4-BE49-F238E27FC236}">
-                <a16:creationId xmlns:a16="http://schemas.microsoft.com/office/drawing/2014/main" id="{38FAF65A-98A8-41A2-BD33-6AFC76F5C676}"/>
+                <a16:creationId xmlns:a16="http://schemas.microsoft.com/office/drawing/2014/main" id="{DD427B2C-1D15-4315-AE47-073447CE467B}"/>
               </a:ext>
             </a:extLst>
           </p:cNvPr>
@@ -8529,7 +8539,7 @@
           <p:cNvPr id="18" name="">
             <a:extLst xmlns:a="http://schemas.openxmlformats.org/drawingml/2006/main">
               <a:ext uri="{FF2B5EF4-FFF2-40B4-BE49-F238E27FC236}">
-                <a16:creationId xmlns:a16="http://schemas.microsoft.com/office/drawing/2014/main" id="{CD44B4AC-536F-4947-992F-7371DAC2BCC3}"/>
+                <a16:creationId xmlns:a16="http://schemas.microsoft.com/office/drawing/2014/main" id="{62FC3679-BAE4-4D9F-AA4F-FB921C4F84BB}"/>
               </a:ext>
             </a:extLst>
           </p:cNvPr>
@@ -8586,7 +8596,7 @@
           <p:cNvPr id="19" name="">
             <a:extLst xmlns:a="http://schemas.openxmlformats.org/drawingml/2006/main">
               <a:ext uri="{FF2B5EF4-FFF2-40B4-BE49-F238E27FC236}">
-                <a16:creationId xmlns:a16="http://schemas.microsoft.com/office/drawing/2014/main" id="{01FA73E0-9529-4C1F-A98A-73104343436F}"/>
+                <a16:creationId xmlns:a16="http://schemas.microsoft.com/office/drawing/2014/main" id="{00569DF3-F674-4007-B8DC-FBFE77A209B4}"/>
               </a:ext>
             </a:extLst>
           </p:cNvPr>
@@ -8617,7 +8627,7 @@
           <p:cNvPr id="20" name="">
             <a:extLst xmlns:a="http://schemas.openxmlformats.org/drawingml/2006/main">
               <a:ext uri="{FF2B5EF4-FFF2-40B4-BE49-F238E27FC236}">
-                <a16:creationId xmlns:a16="http://schemas.microsoft.com/office/drawing/2014/main" id="{A94C2F45-EC82-4509-802E-EF61FD943B78}"/>
+                <a16:creationId xmlns:a16="http://schemas.microsoft.com/office/drawing/2014/main" id="{2E4A15EE-4D1C-45DE-B78C-F647FA55EC3E}"/>
               </a:ext>
             </a:extLst>
           </p:cNvPr>
@@ -8672,7 +8682,7 @@
     </p:spTree>
     <p:extLst>
       <p:ext uri="{BB962C8B-B14F-4D97-AF65-F5344CB8AC3E}">
-        <p14:creationId xmlns:p14="http://schemas.microsoft.com/office/powerpoint/2010/main" val="135374681"/>
+        <p14:creationId xmlns:p14="http://schemas.microsoft.com/office/powerpoint/2010/main" val="1094194874"/>
       </p:ext>
     </p:extLst>
   </p:cSld>
@@ -8703,7 +8713,7 @@
           <p:cNvPr id="68" name="">
             <a:extLst xmlns:a="http://schemas.openxmlformats.org/drawingml/2006/main">
               <a:ext uri="{FF2B5EF4-FFF2-40B4-BE49-F238E27FC236}">
-                <a16:creationId xmlns:a16="http://schemas.microsoft.com/office/drawing/2014/main" id="{F956A45D-BA8C-40A0-87E7-83039AA8A16C}"/>
+                <a16:creationId xmlns:a16="http://schemas.microsoft.com/office/drawing/2014/main" id="{DDAAA0C6-DDB3-4165-8609-87BBEB0D8208}"/>
               </a:ext>
             </a:extLst>
           </p:cNvPr>
@@ -8760,7 +8770,7 @@
           <p:cNvPr id="2" name="">
             <a:extLst xmlns:a="http://schemas.openxmlformats.org/drawingml/2006/main">
               <a:ext uri="{FF2B5EF4-FFF2-40B4-BE49-F238E27FC236}">
-                <a16:creationId xmlns:a16="http://schemas.microsoft.com/office/drawing/2014/main" id="{5E12D6D8-4DAE-4D18-9ECD-7AF83C8E8741}"/>
+                <a16:creationId xmlns:a16="http://schemas.microsoft.com/office/drawing/2014/main" id="{1E72C741-8CEC-4ACD-84BA-8D61ACC45F34}"/>
               </a:ext>
             </a:extLst>
           </p:cNvPr>
@@ -8791,7 +8801,7 @@
           <p:cNvPr id="3" name="">
             <a:extLst xmlns:a="http://schemas.openxmlformats.org/drawingml/2006/main">
               <a:ext uri="{FF2B5EF4-FFF2-40B4-BE49-F238E27FC236}">
-                <a16:creationId xmlns:a16="http://schemas.microsoft.com/office/drawing/2014/main" id="{5B067776-706D-408F-A56B-CA7D824915CF}"/>
+                <a16:creationId xmlns:a16="http://schemas.microsoft.com/office/drawing/2014/main" id="{3019C8A7-53E6-4E0D-8ECD-BA2433991E78}"/>
               </a:ext>
             </a:extLst>
           </p:cNvPr>
@@ -8848,7 +8858,7 @@
           <p:cNvPr id="4" name="">
             <a:extLst xmlns:a="http://schemas.openxmlformats.org/drawingml/2006/main">
               <a:ext uri="{FF2B5EF4-FFF2-40B4-BE49-F238E27FC236}">
-                <a16:creationId xmlns:a16="http://schemas.microsoft.com/office/drawing/2014/main" id="{641CCB41-0326-444F-93D8-C495DB85A101}"/>
+                <a16:creationId xmlns:a16="http://schemas.microsoft.com/office/drawing/2014/main" id="{850D2980-D248-44F0-9169-B94723C53ABD}"/>
               </a:ext>
             </a:extLst>
           </p:cNvPr>
@@ -8905,7 +8915,7 @@
           <p:cNvPr id="5" name="">
             <a:extLst xmlns:a="http://schemas.openxmlformats.org/drawingml/2006/main">
               <a:ext uri="{FF2B5EF4-FFF2-40B4-BE49-F238E27FC236}">
-                <a16:creationId xmlns:a16="http://schemas.microsoft.com/office/drawing/2014/main" id="{F9693E2D-0BFF-4422-B73B-DC2B8662226E}"/>
+                <a16:creationId xmlns:a16="http://schemas.microsoft.com/office/drawing/2014/main" id="{1D32B1E1-275E-40A2-92D2-883C7E8DFA95}"/>
               </a:ext>
             </a:extLst>
           </p:cNvPr>
@@ -8938,7 +8948,7 @@
           <p:cNvPr id="6" name="">
             <a:extLst xmlns:a="http://schemas.openxmlformats.org/drawingml/2006/main">
               <a:ext uri="{FF2B5EF4-FFF2-40B4-BE49-F238E27FC236}">
-                <a16:creationId xmlns:a16="http://schemas.microsoft.com/office/drawing/2014/main" id="{700F7A59-688D-4114-81AA-E0F423A5027F}"/>
+                <a16:creationId xmlns:a16="http://schemas.microsoft.com/office/drawing/2014/main" id="{610709A0-E509-454E-BF74-C3D7C0E5177E}"/>
               </a:ext>
             </a:extLst>
           </p:cNvPr>
@@ -8995,7 +9005,7 @@
           <p:cNvPr id="7" name="">
             <a:extLst xmlns:a="http://schemas.openxmlformats.org/drawingml/2006/main">
               <a:ext uri="{FF2B5EF4-FFF2-40B4-BE49-F238E27FC236}">
-                <a16:creationId xmlns:a16="http://schemas.microsoft.com/office/drawing/2014/main" id="{ED873C37-88CF-4ABB-9430-252A2597A874}"/>
+                <a16:creationId xmlns:a16="http://schemas.microsoft.com/office/drawing/2014/main" id="{88BDCF18-F41B-4D34-B78A-E8751E3F50ED}"/>
               </a:ext>
             </a:extLst>
           </p:cNvPr>
@@ -9028,7 +9038,7 @@
           <p:cNvPr id="8" name="">
             <a:extLst xmlns:a="http://schemas.openxmlformats.org/drawingml/2006/main">
               <a:ext uri="{FF2B5EF4-FFF2-40B4-BE49-F238E27FC236}">
-                <a16:creationId xmlns:a16="http://schemas.microsoft.com/office/drawing/2014/main" id="{2A886099-0493-4E4A-AB84-1F07F5DAE926}"/>
+                <a16:creationId xmlns:a16="http://schemas.microsoft.com/office/drawing/2014/main" id="{925A8029-FCEC-458F-BFC6-66A3DF9F2A84}"/>
               </a:ext>
             </a:extLst>
           </p:cNvPr>
@@ -9085,7 +9095,7 @@
           <p:cNvPr id="9" name="">
             <a:extLst xmlns:a="http://schemas.openxmlformats.org/drawingml/2006/main">
               <a:ext uri="{FF2B5EF4-FFF2-40B4-BE49-F238E27FC236}">
-                <a16:creationId xmlns:a16="http://schemas.microsoft.com/office/drawing/2014/main" id="{0864EA53-9E0E-4173-8D89-D75B174CE3E5}"/>
+                <a16:creationId xmlns:a16="http://schemas.microsoft.com/office/drawing/2014/main" id="{4A33CFB0-47E9-4F6D-88D6-EBD5D362CB79}"/>
               </a:ext>
             </a:extLst>
           </p:cNvPr>
@@ -9118,7 +9128,7 @@
           <p:cNvPr id="10" name="">
             <a:extLst xmlns:a="http://schemas.openxmlformats.org/drawingml/2006/main">
               <a:ext uri="{FF2B5EF4-FFF2-40B4-BE49-F238E27FC236}">
-                <a16:creationId xmlns:a16="http://schemas.microsoft.com/office/drawing/2014/main" id="{C390F390-58CF-4D0B-B735-8AFB129B7339}"/>
+                <a16:creationId xmlns:a16="http://schemas.microsoft.com/office/drawing/2014/main" id="{6EE60F58-7800-423B-81E3-228922D162E4}"/>
               </a:ext>
             </a:extLst>
           </p:cNvPr>
@@ -9175,7 +9185,7 @@
           <p:cNvPr id="11" name="">
             <a:extLst xmlns:a="http://schemas.openxmlformats.org/drawingml/2006/main">
               <a:ext uri="{FF2B5EF4-FFF2-40B4-BE49-F238E27FC236}">
-                <a16:creationId xmlns:a16="http://schemas.microsoft.com/office/drawing/2014/main" id="{D37729C8-4B2B-4FE7-B4C5-A56450A6C68D}"/>
+                <a16:creationId xmlns:a16="http://schemas.microsoft.com/office/drawing/2014/main" id="{51716EF4-940E-4E91-AAEF-E4E581D6801A}"/>
               </a:ext>
             </a:extLst>
           </p:cNvPr>
@@ -9208,7 +9218,7 @@
           <p:cNvPr id="12" name="">
             <a:extLst xmlns:a="http://schemas.openxmlformats.org/drawingml/2006/main">
               <a:ext uri="{FF2B5EF4-FFF2-40B4-BE49-F238E27FC236}">
-                <a16:creationId xmlns:a16="http://schemas.microsoft.com/office/drawing/2014/main" id="{BA63EAB3-2074-4E01-A807-2E8383CD26A5}"/>
+                <a16:creationId xmlns:a16="http://schemas.microsoft.com/office/drawing/2014/main" id="{5377ACDD-BEFC-4BCC-97F7-2DD61C424EFB}"/>
               </a:ext>
             </a:extLst>
           </p:cNvPr>
@@ -9265,7 +9275,7 @@
           <p:cNvPr id="13" name="">
             <a:extLst xmlns:a="http://schemas.openxmlformats.org/drawingml/2006/main">
               <a:ext uri="{FF2B5EF4-FFF2-40B4-BE49-F238E27FC236}">
-                <a16:creationId xmlns:a16="http://schemas.microsoft.com/office/drawing/2014/main" id="{E93BF5F0-5F06-4286-B08A-7400E3956250}"/>
+                <a16:creationId xmlns:a16="http://schemas.microsoft.com/office/drawing/2014/main" id="{A046E72D-559D-40B2-9AA0-0A9735F90E50}"/>
               </a:ext>
             </a:extLst>
           </p:cNvPr>
@@ -9298,7 +9308,7 @@
           <p:cNvPr id="14" name="">
             <a:extLst xmlns:a="http://schemas.openxmlformats.org/drawingml/2006/main">
               <a:ext uri="{FF2B5EF4-FFF2-40B4-BE49-F238E27FC236}">
-                <a16:creationId xmlns:a16="http://schemas.microsoft.com/office/drawing/2014/main" id="{FEB5D73C-55AB-415A-A926-7854630AACAF}"/>
+                <a16:creationId xmlns:a16="http://schemas.microsoft.com/office/drawing/2014/main" id="{73AE2115-5386-4AB8-ADFF-DCE7BACF0F5C}"/>
               </a:ext>
             </a:extLst>
           </p:cNvPr>
@@ -9355,7 +9365,7 @@
           <p:cNvPr id="15" name="">
             <a:extLst xmlns:a="http://schemas.openxmlformats.org/drawingml/2006/main">
               <a:ext uri="{FF2B5EF4-FFF2-40B4-BE49-F238E27FC236}">
-                <a16:creationId xmlns:a16="http://schemas.microsoft.com/office/drawing/2014/main" id="{2606EDD2-2CF5-406B-BD6F-2D2414FA4A42}"/>
+                <a16:creationId xmlns:a16="http://schemas.microsoft.com/office/drawing/2014/main" id="{21CE3474-E6E1-43BA-BE6C-117C1798DB73}"/>
               </a:ext>
             </a:extLst>
           </p:cNvPr>
@@ -9388,7 +9398,7 @@
           <p:cNvPr id="16" name="">
             <a:extLst xmlns:a="http://schemas.openxmlformats.org/drawingml/2006/main">
               <a:ext uri="{FF2B5EF4-FFF2-40B4-BE49-F238E27FC236}">
-                <a16:creationId xmlns:a16="http://schemas.microsoft.com/office/drawing/2014/main" id="{4CF2C0CA-6BA4-4E91-9D0C-6376CF30353F}"/>
+                <a16:creationId xmlns:a16="http://schemas.microsoft.com/office/drawing/2014/main" id="{B27B0486-E40F-43F6-A649-63FFA51F4FFF}"/>
               </a:ext>
             </a:extLst>
           </p:cNvPr>
@@ -9445,7 +9455,7 @@
           <p:cNvPr id="17" name="">
             <a:extLst xmlns:a="http://schemas.openxmlformats.org/drawingml/2006/main">
               <a:ext uri="{FF2B5EF4-FFF2-40B4-BE49-F238E27FC236}">
-                <a16:creationId xmlns:a16="http://schemas.microsoft.com/office/drawing/2014/main" id="{DEC3530F-DE20-4B60-8C9F-C1DEDB1CF9FE}"/>
+                <a16:creationId xmlns:a16="http://schemas.microsoft.com/office/drawing/2014/main" id="{CCB72435-481F-436F-B7A0-ED68D66BB0FA}"/>
               </a:ext>
             </a:extLst>
           </p:cNvPr>
@@ -9478,7 +9488,7 @@
           <p:cNvPr id="18" name="">
             <a:extLst xmlns:a="http://schemas.openxmlformats.org/drawingml/2006/main">
               <a:ext uri="{FF2B5EF4-FFF2-40B4-BE49-F238E27FC236}">
-                <a16:creationId xmlns:a16="http://schemas.microsoft.com/office/drawing/2014/main" id="{2A3DD20A-B9BA-4D19-AC56-4B0041B27BE1}"/>
+                <a16:creationId xmlns:a16="http://schemas.microsoft.com/office/drawing/2014/main" id="{C0F13EDC-8C96-4C05-A082-4EF760A503E6}"/>
               </a:ext>
             </a:extLst>
           </p:cNvPr>
@@ -9535,7 +9545,7 @@
           <p:cNvPr id="19" name="">
             <a:extLst xmlns:a="http://schemas.openxmlformats.org/drawingml/2006/main">
               <a:ext uri="{FF2B5EF4-FFF2-40B4-BE49-F238E27FC236}">
-                <a16:creationId xmlns:a16="http://schemas.microsoft.com/office/drawing/2014/main" id="{9385FA65-85BD-40B9-93AF-C703C7F22BAF}"/>
+                <a16:creationId xmlns:a16="http://schemas.microsoft.com/office/drawing/2014/main" id="{14113902-4315-4E75-BF43-FE9A715ECAAC}"/>
               </a:ext>
             </a:extLst>
           </p:cNvPr>
@@ -9568,7 +9578,7 @@
           <p:cNvPr id="20" name="">
             <a:extLst xmlns:a="http://schemas.openxmlformats.org/drawingml/2006/main">
               <a:ext uri="{FF2B5EF4-FFF2-40B4-BE49-F238E27FC236}">
-                <a16:creationId xmlns:a16="http://schemas.microsoft.com/office/drawing/2014/main" id="{0809ED2C-C89E-46FF-BA88-B1F8CFA5C085}"/>
+                <a16:creationId xmlns:a16="http://schemas.microsoft.com/office/drawing/2014/main" id="{CB0EF4B6-202B-4586-9722-DFC4FE5D46C0}"/>
               </a:ext>
             </a:extLst>
           </p:cNvPr>
@@ -9625,7 +9635,7 @@
           <p:cNvPr id="21" name="">
             <a:extLst xmlns:a="http://schemas.openxmlformats.org/drawingml/2006/main">
               <a:ext uri="{FF2B5EF4-FFF2-40B4-BE49-F238E27FC236}">
-                <a16:creationId xmlns:a16="http://schemas.microsoft.com/office/drawing/2014/main" id="{04E3575D-4D2F-4D94-9F42-B3AC78EFA6E4}"/>
+                <a16:creationId xmlns:a16="http://schemas.microsoft.com/office/drawing/2014/main" id="{0449FC4C-1A24-410B-BECD-B8C7BE4F4356}"/>
               </a:ext>
             </a:extLst>
           </p:cNvPr>
@@ -9656,7 +9666,7 @@
           <p:cNvPr id="22" name="">
             <a:extLst xmlns:a="http://schemas.openxmlformats.org/drawingml/2006/main">
               <a:ext uri="{FF2B5EF4-FFF2-40B4-BE49-F238E27FC236}">
-                <a16:creationId xmlns:a16="http://schemas.microsoft.com/office/drawing/2014/main" id="{BC4A71F6-1918-4E92-A5FD-E0638563DB03}"/>
+                <a16:creationId xmlns:a16="http://schemas.microsoft.com/office/drawing/2014/main" id="{41502BED-4272-490F-BD6F-F3A263D7BB1B}"/>
               </a:ext>
             </a:extLst>
           </p:cNvPr>
@@ -9687,7 +9697,7 @@
           <p:cNvPr id="23" name="">
             <a:extLst xmlns:a="http://schemas.openxmlformats.org/drawingml/2006/main">
               <a:ext uri="{FF2B5EF4-FFF2-40B4-BE49-F238E27FC236}">
-                <a16:creationId xmlns:a16="http://schemas.microsoft.com/office/drawing/2014/main" id="{30170334-82BD-41ED-B153-D63805339837}"/>
+                <a16:creationId xmlns:a16="http://schemas.microsoft.com/office/drawing/2014/main" id="{7FFAF795-CD79-460B-8A78-35CFA1A24E3A}"/>
               </a:ext>
             </a:extLst>
           </p:cNvPr>
@@ -9718,7 +9728,7 @@
           <p:cNvPr id="24" name="">
             <a:extLst xmlns:a="http://schemas.openxmlformats.org/drawingml/2006/main">
               <a:ext uri="{FF2B5EF4-FFF2-40B4-BE49-F238E27FC236}">
-                <a16:creationId xmlns:a16="http://schemas.microsoft.com/office/drawing/2014/main" id="{ED09DF8C-1A22-4DB5-9B6A-B109FC7556C0}"/>
+                <a16:creationId xmlns:a16="http://schemas.microsoft.com/office/drawing/2014/main" id="{2D8B0E24-9B6E-4688-98B7-80814EFD9C36}"/>
               </a:ext>
             </a:extLst>
           </p:cNvPr>
@@ -9749,7 +9759,7 @@
           <p:cNvPr id="25" name="">
             <a:extLst xmlns:a="http://schemas.openxmlformats.org/drawingml/2006/main">
               <a:ext uri="{FF2B5EF4-FFF2-40B4-BE49-F238E27FC236}">
-                <a16:creationId xmlns:a16="http://schemas.microsoft.com/office/drawing/2014/main" id="{AC184259-2B14-45AF-A19B-B0A8323CB754}"/>
+                <a16:creationId xmlns:a16="http://schemas.microsoft.com/office/drawing/2014/main" id="{E4878F89-AC79-4B5A-B7E2-844C07593343}"/>
               </a:ext>
             </a:extLst>
           </p:cNvPr>
@@ -9780,7 +9790,7 @@
           <p:cNvPr id="26" name="">
             <a:extLst xmlns:a="http://schemas.openxmlformats.org/drawingml/2006/main">
               <a:ext uri="{FF2B5EF4-FFF2-40B4-BE49-F238E27FC236}">
-                <a16:creationId xmlns:a16="http://schemas.microsoft.com/office/drawing/2014/main" id="{801015C6-B2E5-430C-9CD3-CCD05FEA35D4}"/>
+                <a16:creationId xmlns:a16="http://schemas.microsoft.com/office/drawing/2014/main" id="{1C7D8CBD-6317-41B7-B0C0-2FCE0F065AE2}"/>
               </a:ext>
             </a:extLst>
           </p:cNvPr>
@@ -9811,7 +9821,7 @@
           <p:cNvPr id="27" name="">
             <a:extLst xmlns:a="http://schemas.openxmlformats.org/drawingml/2006/main">
               <a:ext uri="{FF2B5EF4-FFF2-40B4-BE49-F238E27FC236}">
-                <a16:creationId xmlns:a16="http://schemas.microsoft.com/office/drawing/2014/main" id="{A95A4920-7A11-4FEE-B5C5-A1249998F51C}"/>
+                <a16:creationId xmlns:a16="http://schemas.microsoft.com/office/drawing/2014/main" id="{3AEB435B-70EA-4C16-BD6A-F92E197B6DE8}"/>
               </a:ext>
             </a:extLst>
           </p:cNvPr>
@@ -9842,7 +9852,7 @@
           <p:cNvPr id="28" name="">
             <a:extLst xmlns:a="http://schemas.openxmlformats.org/drawingml/2006/main">
               <a:ext uri="{FF2B5EF4-FFF2-40B4-BE49-F238E27FC236}">
-                <a16:creationId xmlns:a16="http://schemas.microsoft.com/office/drawing/2014/main" id="{D5D28CC6-CC95-47B9-B966-B988636106FC}"/>
+                <a16:creationId xmlns:a16="http://schemas.microsoft.com/office/drawing/2014/main" id="{039DF332-C727-41E0-BDF4-55774EAC2090}"/>
               </a:ext>
             </a:extLst>
           </p:cNvPr>
@@ -9899,7 +9909,7 @@
           <p:cNvPr id="29" name="">
             <a:extLst xmlns:a="http://schemas.openxmlformats.org/drawingml/2006/main">
               <a:ext uri="{FF2B5EF4-FFF2-40B4-BE49-F238E27FC236}">
-                <a16:creationId xmlns:a16="http://schemas.microsoft.com/office/drawing/2014/main" id="{EC324559-D462-47B7-B6A9-316C168D6BA2}"/>
+                <a16:creationId xmlns:a16="http://schemas.microsoft.com/office/drawing/2014/main" id="{E7257718-12D7-4301-AA67-2D199F183365}"/>
               </a:ext>
             </a:extLst>
           </p:cNvPr>
@@ -9956,7 +9966,7 @@
           <p:cNvPr id="30" name="">
             <a:extLst xmlns:a="http://schemas.openxmlformats.org/drawingml/2006/main">
               <a:ext uri="{FF2B5EF4-FFF2-40B4-BE49-F238E27FC236}">
-                <a16:creationId xmlns:a16="http://schemas.microsoft.com/office/drawing/2014/main" id="{A2357A1C-C50A-460F-A3AC-28D944CE562E}"/>
+                <a16:creationId xmlns:a16="http://schemas.microsoft.com/office/drawing/2014/main" id="{6244509D-2B1B-400A-A717-98E270C58C87}"/>
               </a:ext>
             </a:extLst>
           </p:cNvPr>
@@ -10013,7 +10023,7 @@
           <p:cNvPr id="31" name="">
             <a:extLst xmlns:a="http://schemas.openxmlformats.org/drawingml/2006/main">
               <a:ext uri="{FF2B5EF4-FFF2-40B4-BE49-F238E27FC236}">
-                <a16:creationId xmlns:a16="http://schemas.microsoft.com/office/drawing/2014/main" id="{10E6BA4D-D953-43EC-A8BB-0128239C3F1C}"/>
+                <a16:creationId xmlns:a16="http://schemas.microsoft.com/office/drawing/2014/main" id="{0A92537E-8430-42DD-818F-492B75165A55}"/>
               </a:ext>
             </a:extLst>
           </p:cNvPr>
@@ -10070,7 +10080,7 @@
           <p:cNvPr id="32" name="">
             <a:extLst xmlns:a="http://schemas.openxmlformats.org/drawingml/2006/main">
               <a:ext uri="{FF2B5EF4-FFF2-40B4-BE49-F238E27FC236}">
-                <a16:creationId xmlns:a16="http://schemas.microsoft.com/office/drawing/2014/main" id="{F6ACB435-CB77-4AC0-B7F3-86BCA69C4B3F}"/>
+                <a16:creationId xmlns:a16="http://schemas.microsoft.com/office/drawing/2014/main" id="{B85E4242-55ED-4C31-88C7-5AC50809A36A}"/>
               </a:ext>
             </a:extLst>
           </p:cNvPr>
@@ -10127,7 +10137,7 @@
           <p:cNvPr id="33" name="">
             <a:extLst xmlns:a="http://schemas.openxmlformats.org/drawingml/2006/main">
               <a:ext uri="{FF2B5EF4-FFF2-40B4-BE49-F238E27FC236}">
-                <a16:creationId xmlns:a16="http://schemas.microsoft.com/office/drawing/2014/main" id="{0DDCABF2-21CA-41AD-A6EA-7AC850CFE9F0}"/>
+                <a16:creationId xmlns:a16="http://schemas.microsoft.com/office/drawing/2014/main" id="{6CA1F079-D723-415C-89A6-6246BD062A5C}"/>
               </a:ext>
             </a:extLst>
           </p:cNvPr>
@@ -10184,7 +10194,7 @@
           <p:cNvPr id="34" name="">
             <a:extLst xmlns:a="http://schemas.openxmlformats.org/drawingml/2006/main">
               <a:ext uri="{FF2B5EF4-FFF2-40B4-BE49-F238E27FC236}">
-                <a16:creationId xmlns:a16="http://schemas.microsoft.com/office/drawing/2014/main" id="{08F561B8-2337-4BBC-BDDA-73722D6E48BF}"/>
+                <a16:creationId xmlns:a16="http://schemas.microsoft.com/office/drawing/2014/main" id="{7FB98EBA-8D46-449C-A3FB-12087A5B2161}"/>
               </a:ext>
             </a:extLst>
           </p:cNvPr>
@@ -10241,7 +10251,7 @@
           <p:cNvPr id="35" name="">
             <a:extLst xmlns:a="http://schemas.openxmlformats.org/drawingml/2006/main">
               <a:ext uri="{FF2B5EF4-FFF2-40B4-BE49-F238E27FC236}">
-                <a16:creationId xmlns:a16="http://schemas.microsoft.com/office/drawing/2014/main" id="{79967EF0-067C-4359-AB98-51DBAF746E28}"/>
+                <a16:creationId xmlns:a16="http://schemas.microsoft.com/office/drawing/2014/main" id="{383E0E43-3E7C-41E4-9154-392F5C11E2B2}"/>
               </a:ext>
             </a:extLst>
           </p:cNvPr>
@@ -10298,7 +10308,7 @@
           <p:cNvPr id="36" name="">
             <a:extLst xmlns:a="http://schemas.openxmlformats.org/drawingml/2006/main">
               <a:ext uri="{FF2B5EF4-FFF2-40B4-BE49-F238E27FC236}">
-                <a16:creationId xmlns:a16="http://schemas.microsoft.com/office/drawing/2014/main" id="{B6F6B98C-7D65-4A54-8BE7-517DE00D1423}"/>
+                <a16:creationId xmlns:a16="http://schemas.microsoft.com/office/drawing/2014/main" id="{4258C02F-026C-4A22-B9C7-A78A3AE83DF2}"/>
               </a:ext>
             </a:extLst>
           </p:cNvPr>
@@ -10355,7 +10365,7 @@
           <p:cNvPr id="37" name="">
             <a:extLst xmlns:a="http://schemas.openxmlformats.org/drawingml/2006/main">
               <a:ext uri="{FF2B5EF4-FFF2-40B4-BE49-F238E27FC236}">
-                <a16:creationId xmlns:a16="http://schemas.microsoft.com/office/drawing/2014/main" id="{DB0F1FB4-8931-4E51-B070-C7EAD3487B48}"/>
+                <a16:creationId xmlns:a16="http://schemas.microsoft.com/office/drawing/2014/main" id="{193269A6-8E22-4A5E-93B6-ABF611FCBB73}"/>
               </a:ext>
             </a:extLst>
           </p:cNvPr>
@@ -10412,7 +10422,7 @@
           <p:cNvPr id="38" name="">
             <a:extLst xmlns:a="http://schemas.openxmlformats.org/drawingml/2006/main">
               <a:ext uri="{FF2B5EF4-FFF2-40B4-BE49-F238E27FC236}">
-                <a16:creationId xmlns:a16="http://schemas.microsoft.com/office/drawing/2014/main" id="{5972D063-CF64-42B6-B999-7AA4E3A1EDDA}"/>
+                <a16:creationId xmlns:a16="http://schemas.microsoft.com/office/drawing/2014/main" id="{EA917623-A3FC-4EF4-9131-8798B581690F}"/>
               </a:ext>
             </a:extLst>
           </p:cNvPr>
@@ -10469,7 +10479,7 @@
           <p:cNvPr id="39" name="">
             <a:extLst xmlns:a="http://schemas.openxmlformats.org/drawingml/2006/main">
               <a:ext uri="{FF2B5EF4-FFF2-40B4-BE49-F238E27FC236}">
-                <a16:creationId xmlns:a16="http://schemas.microsoft.com/office/drawing/2014/main" id="{7B1ECD5A-DF17-4D19-8C9B-BB4AB5E456A9}"/>
+                <a16:creationId xmlns:a16="http://schemas.microsoft.com/office/drawing/2014/main" id="{33365B40-EA1C-4D84-ACE6-9E4F98EB9102}"/>
               </a:ext>
             </a:extLst>
           </p:cNvPr>
@@ -10526,7 +10536,7 @@
           <p:cNvPr id="40" name="">
             <a:extLst xmlns:a="http://schemas.openxmlformats.org/drawingml/2006/main">
               <a:ext uri="{FF2B5EF4-FFF2-40B4-BE49-F238E27FC236}">
-                <a16:creationId xmlns:a16="http://schemas.microsoft.com/office/drawing/2014/main" id="{33B1B275-D272-452A-BEF1-387C14760E9A}"/>
+                <a16:creationId xmlns:a16="http://schemas.microsoft.com/office/drawing/2014/main" id="{639FEBA1-8499-4D9F-B472-80ED68059B06}"/>
               </a:ext>
             </a:extLst>
           </p:cNvPr>
@@ -10583,7 +10593,7 @@
           <p:cNvPr id="41" name="">
             <a:extLst xmlns:a="http://schemas.openxmlformats.org/drawingml/2006/main">
               <a:ext uri="{FF2B5EF4-FFF2-40B4-BE49-F238E27FC236}">
-                <a16:creationId xmlns:a16="http://schemas.microsoft.com/office/drawing/2014/main" id="{CCD25E0D-7588-416E-B912-423387754408}"/>
+                <a16:creationId xmlns:a16="http://schemas.microsoft.com/office/drawing/2014/main" id="{F3ED3325-D643-402B-912C-0F424125350B}"/>
               </a:ext>
             </a:extLst>
           </p:cNvPr>
@@ -10640,7 +10650,7 @@
           <p:cNvPr id="42" name="">
             <a:extLst xmlns:a="http://schemas.openxmlformats.org/drawingml/2006/main">
               <a:ext uri="{FF2B5EF4-FFF2-40B4-BE49-F238E27FC236}">
-                <a16:creationId xmlns:a16="http://schemas.microsoft.com/office/drawing/2014/main" id="{850EAC4C-8082-4F59-83D5-0DE7AC67BD2A}"/>
+                <a16:creationId xmlns:a16="http://schemas.microsoft.com/office/drawing/2014/main" id="{3B395B1F-F60F-477E-96AF-BA5E770BFFB1}"/>
               </a:ext>
             </a:extLst>
           </p:cNvPr>
@@ -10673,7 +10683,7 @@
           <p:cNvPr id="43" name="">
             <a:extLst xmlns:a="http://schemas.openxmlformats.org/drawingml/2006/main">
               <a:ext uri="{FF2B5EF4-FFF2-40B4-BE49-F238E27FC236}">
-                <a16:creationId xmlns:a16="http://schemas.microsoft.com/office/drawing/2014/main" id="{1197C83A-A653-4BD2-91A8-63FA6C154E01}"/>
+                <a16:creationId xmlns:a16="http://schemas.microsoft.com/office/drawing/2014/main" id="{AD8430CC-412C-4944-BDC2-31C73BF7CD40}"/>
               </a:ext>
             </a:extLst>
           </p:cNvPr>
@@ -10730,7 +10740,7 @@
           <p:cNvPr id="44" name="">
             <a:extLst xmlns:a="http://schemas.openxmlformats.org/drawingml/2006/main">
               <a:ext uri="{FF2B5EF4-FFF2-40B4-BE49-F238E27FC236}">
-                <a16:creationId xmlns:a16="http://schemas.microsoft.com/office/drawing/2014/main" id="{49492FFB-CD4C-44FD-B312-2E6E5C3849BA}"/>
+                <a16:creationId xmlns:a16="http://schemas.microsoft.com/office/drawing/2014/main" id="{F2CFA8BF-5D7E-4D19-8819-156134BE52D4}"/>
               </a:ext>
             </a:extLst>
           </p:cNvPr>
@@ -10763,7 +10773,7 @@
           <p:cNvPr id="45" name="">
             <a:extLst xmlns:a="http://schemas.openxmlformats.org/drawingml/2006/main">
               <a:ext uri="{FF2B5EF4-FFF2-40B4-BE49-F238E27FC236}">
-                <a16:creationId xmlns:a16="http://schemas.microsoft.com/office/drawing/2014/main" id="{A4018D93-B241-4DAE-B1A2-D877C3E15E60}"/>
+                <a16:creationId xmlns:a16="http://schemas.microsoft.com/office/drawing/2014/main" id="{16810AED-DDC4-4A26-8874-B92B71C0F333}"/>
               </a:ext>
             </a:extLst>
           </p:cNvPr>
@@ -10820,7 +10830,7 @@
           <p:cNvPr id="46" name="">
             <a:extLst xmlns:a="http://schemas.openxmlformats.org/drawingml/2006/main">
               <a:ext uri="{FF2B5EF4-FFF2-40B4-BE49-F238E27FC236}">
-                <a16:creationId xmlns:a16="http://schemas.microsoft.com/office/drawing/2014/main" id="{B790BC6B-7AB4-46E5-880B-AD621C02B9A0}"/>
+                <a16:creationId xmlns:a16="http://schemas.microsoft.com/office/drawing/2014/main" id="{1A165016-81CE-4B29-9816-C5C43649385C}"/>
               </a:ext>
             </a:extLst>
           </p:cNvPr>
@@ -10853,7 +10863,7 @@
           <p:cNvPr id="47" name="">
             <a:extLst xmlns:a="http://schemas.openxmlformats.org/drawingml/2006/main">
               <a:ext uri="{FF2B5EF4-FFF2-40B4-BE49-F238E27FC236}">
-                <a16:creationId xmlns:a16="http://schemas.microsoft.com/office/drawing/2014/main" id="{66DAA835-B8D6-48CF-94FB-5DCEFE6A0855}"/>
+                <a16:creationId xmlns:a16="http://schemas.microsoft.com/office/drawing/2014/main" id="{D95BA70A-446B-42EB-B456-EDF52F38E04E}"/>
               </a:ext>
             </a:extLst>
           </p:cNvPr>
@@ -10910,7 +10920,7 @@
           <p:cNvPr id="48" name="">
             <a:extLst xmlns:a="http://schemas.openxmlformats.org/drawingml/2006/main">
               <a:ext uri="{FF2B5EF4-FFF2-40B4-BE49-F238E27FC236}">
-                <a16:creationId xmlns:a16="http://schemas.microsoft.com/office/drawing/2014/main" id="{DEC6F310-2B86-4464-AF7C-6AFE59AB86E2}"/>
+                <a16:creationId xmlns:a16="http://schemas.microsoft.com/office/drawing/2014/main" id="{D0907226-60F9-4118-8097-0AEFC9254320}"/>
               </a:ext>
             </a:extLst>
           </p:cNvPr>
@@ -10941,7 +10951,7 @@
           <p:cNvPr id="49" name="">
             <a:extLst xmlns:a="http://schemas.openxmlformats.org/drawingml/2006/main">
               <a:ext uri="{FF2B5EF4-FFF2-40B4-BE49-F238E27FC236}">
-                <a16:creationId xmlns:a16="http://schemas.microsoft.com/office/drawing/2014/main" id="{D9A54453-C7BE-43C8-A172-BD12D1CFBB22}"/>
+                <a16:creationId xmlns:a16="http://schemas.microsoft.com/office/drawing/2014/main" id="{B6AE0B66-CFAE-408C-BB40-AB29744237D8}"/>
               </a:ext>
             </a:extLst>
           </p:cNvPr>
@@ -10972,7 +10982,7 @@
           <p:cNvPr id="50" name="">
             <a:extLst xmlns:a="http://schemas.openxmlformats.org/drawingml/2006/main">
               <a:ext uri="{FF2B5EF4-FFF2-40B4-BE49-F238E27FC236}">
-                <a16:creationId xmlns:a16="http://schemas.microsoft.com/office/drawing/2014/main" id="{A7310CD8-853D-4517-804E-65C4E28C9003}"/>
+                <a16:creationId xmlns:a16="http://schemas.microsoft.com/office/drawing/2014/main" id="{09EC4EB0-A93C-4705-AF50-172801D08FCB}"/>
               </a:ext>
             </a:extLst>
           </p:cNvPr>
@@ -11029,7 +11039,7 @@
           <p:cNvPr id="51" name="">
             <a:extLst xmlns:a="http://schemas.openxmlformats.org/drawingml/2006/main">
               <a:ext uri="{FF2B5EF4-FFF2-40B4-BE49-F238E27FC236}">
-                <a16:creationId xmlns:a16="http://schemas.microsoft.com/office/drawing/2014/main" id="{7EE0F90A-997C-4BFC-B07E-FB64C5BC4B24}"/>
+                <a16:creationId xmlns:a16="http://schemas.microsoft.com/office/drawing/2014/main" id="{5652CC55-B0B1-4679-BF42-6154A32425D6}"/>
               </a:ext>
             </a:extLst>
           </p:cNvPr>
@@ -11086,7 +11096,7 @@
           <p:cNvPr id="52" name="">
             <a:extLst xmlns:a="http://schemas.openxmlformats.org/drawingml/2006/main">
               <a:ext uri="{FF2B5EF4-FFF2-40B4-BE49-F238E27FC236}">
-                <a16:creationId xmlns:a16="http://schemas.microsoft.com/office/drawing/2014/main" id="{C7FA2AD6-F310-4582-9AB8-E2785CFDB88B}"/>
+                <a16:creationId xmlns:a16="http://schemas.microsoft.com/office/drawing/2014/main" id="{A65C1DDA-6E07-4F3B-9171-0F6D0598289A}"/>
               </a:ext>
             </a:extLst>
           </p:cNvPr>
@@ -11143,7 +11153,7 @@
           <p:cNvPr id="53" name="">
             <a:extLst xmlns:a="http://schemas.openxmlformats.org/drawingml/2006/main">
               <a:ext uri="{FF2B5EF4-FFF2-40B4-BE49-F238E27FC236}">
-                <a16:creationId xmlns:a16="http://schemas.microsoft.com/office/drawing/2014/main" id="{77998EAC-5546-46F9-8F53-745ADE657CB9}"/>
+                <a16:creationId xmlns:a16="http://schemas.microsoft.com/office/drawing/2014/main" id="{F7F00F5F-F130-4031-99D5-0611DF2EEAE9}"/>
               </a:ext>
             </a:extLst>
           </p:cNvPr>
@@ -11223,7 +11233,7 @@
           <p:cNvPr id="54" name="">
             <a:extLst xmlns:a="http://schemas.openxmlformats.org/drawingml/2006/main">
               <a:ext uri="{FF2B5EF4-FFF2-40B4-BE49-F238E27FC236}">
-                <a16:creationId xmlns:a16="http://schemas.microsoft.com/office/drawing/2014/main" id="{DAC9C497-8FB4-4DB9-9DD7-4FC22E076861}"/>
+                <a16:creationId xmlns:a16="http://schemas.microsoft.com/office/drawing/2014/main" id="{9C420BD5-CF01-4E9E-A657-86EA724009C1}"/>
               </a:ext>
             </a:extLst>
           </p:cNvPr>
@@ -11256,7 +11266,7 @@
           <p:cNvPr id="55" name="">
             <a:extLst xmlns:a="http://schemas.openxmlformats.org/drawingml/2006/main">
               <a:ext uri="{FF2B5EF4-FFF2-40B4-BE49-F238E27FC236}">
-                <a16:creationId xmlns:a16="http://schemas.microsoft.com/office/drawing/2014/main" id="{B8A7E032-33EB-4BB2-8A4D-9179FD0BF053}"/>
+                <a16:creationId xmlns:a16="http://schemas.microsoft.com/office/drawing/2014/main" id="{B9188751-4DC0-4681-85E7-A82149099762}"/>
               </a:ext>
             </a:extLst>
           </p:cNvPr>
@@ -11313,7 +11323,7 @@
           <p:cNvPr id="56" name="">
             <a:extLst xmlns:a="http://schemas.openxmlformats.org/drawingml/2006/main">
               <a:ext uri="{FF2B5EF4-FFF2-40B4-BE49-F238E27FC236}">
-                <a16:creationId xmlns:a16="http://schemas.microsoft.com/office/drawing/2014/main" id="{C621CAD3-5392-44A9-81CC-15CC873DFD8E}"/>
+                <a16:creationId xmlns:a16="http://schemas.microsoft.com/office/drawing/2014/main" id="{FE0CB03C-D5E6-47BF-8B9A-A923E4BC10DD}"/>
               </a:ext>
             </a:extLst>
           </p:cNvPr>
@@ -11346,7 +11356,7 @@
           <p:cNvPr id="57" name="">
             <a:extLst xmlns:a="http://schemas.openxmlformats.org/drawingml/2006/main">
               <a:ext uri="{FF2B5EF4-FFF2-40B4-BE49-F238E27FC236}">
-                <a16:creationId xmlns:a16="http://schemas.microsoft.com/office/drawing/2014/main" id="{6772B283-A7F4-45DC-B556-8AA369187C23}"/>
+                <a16:creationId xmlns:a16="http://schemas.microsoft.com/office/drawing/2014/main" id="{843EB952-557A-4B85-B092-A18C73182791}"/>
               </a:ext>
             </a:extLst>
           </p:cNvPr>
@@ -11403,7 +11413,7 @@
           <p:cNvPr id="58" name="">
             <a:extLst xmlns:a="http://schemas.openxmlformats.org/drawingml/2006/main">
               <a:ext uri="{FF2B5EF4-FFF2-40B4-BE49-F238E27FC236}">
-                <a16:creationId xmlns:a16="http://schemas.microsoft.com/office/drawing/2014/main" id="{AD385E86-7A8F-4A00-B94C-84973D632C75}"/>
+                <a16:creationId xmlns:a16="http://schemas.microsoft.com/office/drawing/2014/main" id="{FA59DAA5-5565-468B-926E-A3B9FD789FE9}"/>
               </a:ext>
             </a:extLst>
           </p:cNvPr>
@@ -11436,7 +11446,7 @@
           <p:cNvPr id="59" name="">
             <a:extLst xmlns:a="http://schemas.openxmlformats.org/drawingml/2006/main">
               <a:ext uri="{FF2B5EF4-FFF2-40B4-BE49-F238E27FC236}">
-                <a16:creationId xmlns:a16="http://schemas.microsoft.com/office/drawing/2014/main" id="{EDD1F9DD-DF89-4EA0-9C8A-15AE7115C933}"/>
+                <a16:creationId xmlns:a16="http://schemas.microsoft.com/office/drawing/2014/main" id="{A1F2D2F7-EE8A-410B-B132-063130423C7E}"/>
               </a:ext>
             </a:extLst>
           </p:cNvPr>
@@ -11493,7 +11503,7 @@
           <p:cNvPr id="60" name="">
             <a:extLst xmlns:a="http://schemas.openxmlformats.org/drawingml/2006/main">
               <a:ext uri="{FF2B5EF4-FFF2-40B4-BE49-F238E27FC236}">
-                <a16:creationId xmlns:a16="http://schemas.microsoft.com/office/drawing/2014/main" id="{97170FF0-0DB3-4888-BCCC-3EF1A3606488}"/>
+                <a16:creationId xmlns:a16="http://schemas.microsoft.com/office/drawing/2014/main" id="{E5E3841E-A28C-4FA2-871B-82B1E375DF22}"/>
               </a:ext>
             </a:extLst>
           </p:cNvPr>
@@ -11524,7 +11534,7 @@
           <p:cNvPr id="61" name="">
             <a:extLst xmlns:a="http://schemas.openxmlformats.org/drawingml/2006/main">
               <a:ext uri="{FF2B5EF4-FFF2-40B4-BE49-F238E27FC236}">
-                <a16:creationId xmlns:a16="http://schemas.microsoft.com/office/drawing/2014/main" id="{B28AFE3D-76DA-4789-8637-3BAC7781075C}"/>
+                <a16:creationId xmlns:a16="http://schemas.microsoft.com/office/drawing/2014/main" id="{DE604B14-6B27-4AAD-9B01-1CA9CC73C7FA}"/>
               </a:ext>
             </a:extLst>
           </p:cNvPr>
@@ -11555,7 +11565,7 @@
           <p:cNvPr id="62" name="">
             <a:extLst xmlns:a="http://schemas.openxmlformats.org/drawingml/2006/main">
               <a:ext uri="{FF2B5EF4-FFF2-40B4-BE49-F238E27FC236}">
-                <a16:creationId xmlns:a16="http://schemas.microsoft.com/office/drawing/2014/main" id="{B9B85F70-C6B6-4209-94D1-FCE09E9EF98E}"/>
+                <a16:creationId xmlns:a16="http://schemas.microsoft.com/office/drawing/2014/main" id="{29536A47-6C34-4F76-9619-3464625ABD25}"/>
               </a:ext>
             </a:extLst>
           </p:cNvPr>
@@ -11612,7 +11622,7 @@
           <p:cNvPr id="63" name="">
             <a:extLst xmlns:a="http://schemas.openxmlformats.org/drawingml/2006/main">
               <a:ext uri="{FF2B5EF4-FFF2-40B4-BE49-F238E27FC236}">
-                <a16:creationId xmlns:a16="http://schemas.microsoft.com/office/drawing/2014/main" id="{722D8F83-D143-4C5F-841F-3B9860046846}"/>
+                <a16:creationId xmlns:a16="http://schemas.microsoft.com/office/drawing/2014/main" id="{8A1702A8-FE80-475A-9FE7-275EE471BC07}"/>
               </a:ext>
             </a:extLst>
           </p:cNvPr>
@@ -11669,7 +11679,7 @@
           <p:cNvPr id="64" name="">
             <a:extLst xmlns:a="http://schemas.openxmlformats.org/drawingml/2006/main">
               <a:ext uri="{FF2B5EF4-FFF2-40B4-BE49-F238E27FC236}">
-                <a16:creationId xmlns:a16="http://schemas.microsoft.com/office/drawing/2014/main" id="{35E905C4-EED3-4BD2-A1BD-B840B43CFFE5}"/>
+                <a16:creationId xmlns:a16="http://schemas.microsoft.com/office/drawing/2014/main" id="{E8518028-B0C8-4ACA-BE9D-E8932F2AA8D9}"/>
               </a:ext>
             </a:extLst>
           </p:cNvPr>
@@ -11700,7 +11710,7 @@
           <p:cNvPr id="65" name="">
             <a:extLst xmlns:a="http://schemas.openxmlformats.org/drawingml/2006/main">
               <a:ext uri="{FF2B5EF4-FFF2-40B4-BE49-F238E27FC236}">
-                <a16:creationId xmlns:a16="http://schemas.microsoft.com/office/drawing/2014/main" id="{DCCCAC18-7F9A-4CBC-B0A4-005ABDC95A5A}"/>
+                <a16:creationId xmlns:a16="http://schemas.microsoft.com/office/drawing/2014/main" id="{463D5A1D-23EF-4FEF-8A38-9F994F1F4CC9}"/>
               </a:ext>
             </a:extLst>
           </p:cNvPr>
@@ -11757,7 +11767,7 @@
           <p:cNvPr id="66" name="">
             <a:extLst xmlns:a="http://schemas.openxmlformats.org/drawingml/2006/main">
               <a:ext uri="{FF2B5EF4-FFF2-40B4-BE49-F238E27FC236}">
-                <a16:creationId xmlns:a16="http://schemas.microsoft.com/office/drawing/2014/main" id="{DD52E734-784E-413B-9149-356BAFB525FA}"/>
+                <a16:creationId xmlns:a16="http://schemas.microsoft.com/office/drawing/2014/main" id="{53D108B7-EA56-4213-A80D-5AB95F158739}"/>
               </a:ext>
             </a:extLst>
           </p:cNvPr>
@@ -11814,7 +11824,7 @@
           <p:cNvPr id="67" name="">
             <a:extLst xmlns:a="http://schemas.openxmlformats.org/drawingml/2006/main">
               <a:ext uri="{FF2B5EF4-FFF2-40B4-BE49-F238E27FC236}">
-                <a16:creationId xmlns:a16="http://schemas.microsoft.com/office/drawing/2014/main" id="{499599A3-5DFE-43E3-A7CA-AD4DC6DCC281}"/>
+                <a16:creationId xmlns:a16="http://schemas.microsoft.com/office/drawing/2014/main" id="{5A96461D-7465-464F-BA64-D4E8F53D062B}"/>
               </a:ext>
             </a:extLst>
           </p:cNvPr>
@@ -11869,7 +11879,7 @@
     </p:spTree>
     <p:extLst>
       <p:ext uri="{BB962C8B-B14F-4D97-AF65-F5344CB8AC3E}">
-        <p14:creationId xmlns:p14="http://schemas.microsoft.com/office/powerpoint/2010/main" val="1488332322"/>
+        <p14:creationId xmlns:p14="http://schemas.microsoft.com/office/powerpoint/2010/main" val="2069666540"/>
       </p:ext>
     </p:extLst>
   </p:cSld>
@@ -11900,7 +11910,7 @@
           <p:cNvPr id="46" name="">
             <a:extLst xmlns:a="http://schemas.openxmlformats.org/drawingml/2006/main">
               <a:ext uri="{FF2B5EF4-FFF2-40B4-BE49-F238E27FC236}">
-                <a16:creationId xmlns:a16="http://schemas.microsoft.com/office/drawing/2014/main" id="{B1D81563-C56E-4994-9317-3CD109561BF2}"/>
+                <a16:creationId xmlns:a16="http://schemas.microsoft.com/office/drawing/2014/main" id="{BB9B2193-6489-4321-A210-A412036BA0A7}"/>
               </a:ext>
             </a:extLst>
           </p:cNvPr>
@@ -11957,7 +11967,7 @@
           <p:cNvPr id="2" name="">
             <a:extLst xmlns:a="http://schemas.openxmlformats.org/drawingml/2006/main">
               <a:ext uri="{FF2B5EF4-FFF2-40B4-BE49-F238E27FC236}">
-                <a16:creationId xmlns:a16="http://schemas.microsoft.com/office/drawing/2014/main" id="{5F69D1C0-8824-436B-92CB-9031A0FF9001}"/>
+                <a16:creationId xmlns:a16="http://schemas.microsoft.com/office/drawing/2014/main" id="{F468E70C-F617-4DA0-81A2-EA37D6A495BF}"/>
               </a:ext>
             </a:extLst>
           </p:cNvPr>
@@ -11988,7 +11998,7 @@
           <p:cNvPr id="3" name="">
             <a:extLst xmlns:a="http://schemas.openxmlformats.org/drawingml/2006/main">
               <a:ext uri="{FF2B5EF4-FFF2-40B4-BE49-F238E27FC236}">
-                <a16:creationId xmlns:a16="http://schemas.microsoft.com/office/drawing/2014/main" id="{BB1575C0-E038-4BAE-A2A2-337610BCBCA8}"/>
+                <a16:creationId xmlns:a16="http://schemas.microsoft.com/office/drawing/2014/main" id="{5A6F0219-E244-41FE-A79E-9C0502187029}"/>
               </a:ext>
             </a:extLst>
           </p:cNvPr>
@@ -12045,7 +12055,7 @@
           <p:cNvPr id="4" name="">
             <a:extLst xmlns:a="http://schemas.openxmlformats.org/drawingml/2006/main">
               <a:ext uri="{FF2B5EF4-FFF2-40B4-BE49-F238E27FC236}">
-                <a16:creationId xmlns:a16="http://schemas.microsoft.com/office/drawing/2014/main" id="{B54E7535-2535-46FC-BEA3-8A66CBCBAD9D}"/>
+                <a16:creationId xmlns:a16="http://schemas.microsoft.com/office/drawing/2014/main" id="{404667B7-73C5-4142-B290-AAD68E6AE2FD}"/>
               </a:ext>
             </a:extLst>
           </p:cNvPr>
@@ -12076,7 +12086,7 @@
           <p:cNvPr id="5" name="">
             <a:extLst xmlns:a="http://schemas.openxmlformats.org/drawingml/2006/main">
               <a:ext uri="{FF2B5EF4-FFF2-40B4-BE49-F238E27FC236}">
-                <a16:creationId xmlns:a16="http://schemas.microsoft.com/office/drawing/2014/main" id="{D5686C32-5DE8-410D-8B38-EE3453091BA4}"/>
+                <a16:creationId xmlns:a16="http://schemas.microsoft.com/office/drawing/2014/main" id="{9BB1D8E0-945F-4936-B114-1EC894880443}"/>
               </a:ext>
             </a:extLst>
           </p:cNvPr>
@@ -12123,7 +12133,7 @@
                 <a:ea typeface="DejaVu Sans"/>
                 <a:cs typeface="DejaVu Sans"/>
               </a:rPr>
-              <a:t>NBER · 2026</a:t>
+              <a:t>NBER · SEP 2026 REVISION</a:t>
             </a:r>
           </a:p>
         </p:txBody>
@@ -12133,7 +12143,7 @@
           <p:cNvPr id="6" name="">
             <a:extLst xmlns:a="http://schemas.openxmlformats.org/drawingml/2006/main">
               <a:ext uri="{FF2B5EF4-FFF2-40B4-BE49-F238E27FC236}">
-                <a16:creationId xmlns:a16="http://schemas.microsoft.com/office/drawing/2014/main" id="{7E3B7303-E251-458C-8C47-C90003CBE38D}"/>
+                <a16:creationId xmlns:a16="http://schemas.microsoft.com/office/drawing/2014/main" id="{5522FA1F-2F0E-44C7-9E6B-93BA2F03DFB9}"/>
               </a:ext>
             </a:extLst>
           </p:cNvPr>
@@ -12180,7 +12190,7 @@
                 <a:ea typeface="DejaVu Sans"/>
                 <a:cs typeface="DejaVu Sans"/>
               </a:rPr>
-              <a:t>17.3×</a:t>
+              <a:t>25.5×</a:t>
             </a:r>
           </a:p>
         </p:txBody>
@@ -12190,7 +12200,7 @@
           <p:cNvPr id="7" name="">
             <a:extLst xmlns:a="http://schemas.openxmlformats.org/drawingml/2006/main">
               <a:ext uri="{FF2B5EF4-FFF2-40B4-BE49-F238E27FC236}">
-                <a16:creationId xmlns:a16="http://schemas.microsoft.com/office/drawing/2014/main" id="{E55B1111-2273-4ACA-A020-F839B2C3C136}"/>
+                <a16:creationId xmlns:a16="http://schemas.microsoft.com/office/drawing/2014/main" id="{93C59127-4D91-46E5-B0C3-6BA98BBF8BAC}"/>
               </a:ext>
             </a:extLst>
           </p:cNvPr>
@@ -12247,7 +12257,7 @@
           <p:cNvPr id="8" name="">
             <a:extLst xmlns:a="http://schemas.openxmlformats.org/drawingml/2006/main">
               <a:ext uri="{FF2B5EF4-FFF2-40B4-BE49-F238E27FC236}">
-                <a16:creationId xmlns:a16="http://schemas.microsoft.com/office/drawing/2014/main" id="{C4E2FE82-0B48-458E-AB0B-BECCF803F4C1}"/>
+                <a16:creationId xmlns:a16="http://schemas.microsoft.com/office/drawing/2014/main" id="{7EAFE741-0C72-49AE-93D8-1315C317AE50}"/>
               </a:ext>
             </a:extLst>
           </p:cNvPr>
@@ -12294,7 +12304,7 @@
                 <a:ea typeface="DejaVu Sans"/>
                 <a:cs typeface="DejaVu Sans"/>
               </a:rPr>
-              <a:t>2.8×</a:t>
+              <a:t>3.4×</a:t>
             </a:r>
           </a:p>
         </p:txBody>
@@ -12304,7 +12314,7 @@
           <p:cNvPr id="9" name="">
             <a:extLst xmlns:a="http://schemas.openxmlformats.org/drawingml/2006/main">
               <a:ext uri="{FF2B5EF4-FFF2-40B4-BE49-F238E27FC236}">
-                <a16:creationId xmlns:a16="http://schemas.microsoft.com/office/drawing/2014/main" id="{EAAFAC70-F20D-4967-87CB-1F7D0FA46F3A}"/>
+                <a16:creationId xmlns:a16="http://schemas.microsoft.com/office/drawing/2014/main" id="{DCAAEE87-86AE-4AFB-8107-CFC7B4EC9E05}"/>
               </a:ext>
             </a:extLst>
           </p:cNvPr>
@@ -12361,7 +12371,7 @@
           <p:cNvPr id="10" name="">
             <a:extLst xmlns:a="http://schemas.openxmlformats.org/drawingml/2006/main">
               <a:ext uri="{FF2B5EF4-FFF2-40B4-BE49-F238E27FC236}">
-                <a16:creationId xmlns:a16="http://schemas.microsoft.com/office/drawing/2014/main" id="{33D1F367-6372-4271-9C8F-5C52E7E2D570}"/>
+                <a16:creationId xmlns:a16="http://schemas.microsoft.com/office/drawing/2014/main" id="{7F755B50-E5E1-43DE-A6B3-30D194C1DFF4}"/>
               </a:ext>
             </a:extLst>
           </p:cNvPr>
@@ -12418,7 +12428,7 @@
           <p:cNvPr id="11" name="">
             <a:extLst xmlns:a="http://schemas.openxmlformats.org/drawingml/2006/main">
               <a:ext uri="{FF2B5EF4-FFF2-40B4-BE49-F238E27FC236}">
-                <a16:creationId xmlns:a16="http://schemas.microsoft.com/office/drawing/2014/main" id="{AAB23C4D-2149-4874-B022-93FD796F2C03}"/>
+                <a16:creationId xmlns:a16="http://schemas.microsoft.com/office/drawing/2014/main" id="{066B57FD-94FA-4B02-BFF6-91C4D2BE0D53}"/>
               </a:ext>
             </a:extLst>
           </p:cNvPr>
@@ -12475,7 +12485,7 @@
           <p:cNvPr id="12" name="">
             <a:extLst xmlns:a="http://schemas.openxmlformats.org/drawingml/2006/main">
               <a:ext uri="{FF2B5EF4-FFF2-40B4-BE49-F238E27FC236}">
-                <a16:creationId xmlns:a16="http://schemas.microsoft.com/office/drawing/2014/main" id="{74610405-5208-4155-A752-F9A15FF9FFD7}"/>
+                <a16:creationId xmlns:a16="http://schemas.microsoft.com/office/drawing/2014/main" id="{1222BDCB-2B12-485A-9F90-441C8224DDA5}"/>
               </a:ext>
             </a:extLst>
           </p:cNvPr>
@@ -12532,7 +12542,7 @@
           <p:cNvPr id="13" name="">
             <a:extLst xmlns:a="http://schemas.openxmlformats.org/drawingml/2006/main">
               <a:ext uri="{FF2B5EF4-FFF2-40B4-BE49-F238E27FC236}">
-                <a16:creationId xmlns:a16="http://schemas.microsoft.com/office/drawing/2014/main" id="{79D66AD7-DC0A-4027-BC9E-63B098EC55BD}"/>
+                <a16:creationId xmlns:a16="http://schemas.microsoft.com/office/drawing/2014/main" id="{44FBE73A-42A4-4B4C-80B3-B57D2DA6C9C0}"/>
               </a:ext>
             </a:extLst>
           </p:cNvPr>
@@ -12579,7 +12589,7 @@
                 <a:ea typeface="DejaVu Sans"/>
                 <a:cs typeface="DejaVu Sans"/>
               </a:rPr>
-              <a:t>Changed LOC = additions + deletions.</a:t>
+              <a:t>Fig. 1 rounded; LOC = additions + deletions.</a:t>
             </a:r>
           </a:p>
           <a:p xmlns:a="http://schemas.openxmlformats.org/drawingml/2006/main">
@@ -12612,7 +12622,7 @@
           <p:cNvPr id="14" name="">
             <a:extLst xmlns:a="http://schemas.openxmlformats.org/drawingml/2006/main">
               <a:ext uri="{FF2B5EF4-FFF2-40B4-BE49-F238E27FC236}">
-                <a16:creationId xmlns:a16="http://schemas.microsoft.com/office/drawing/2014/main" id="{ECC5F0A4-9678-4020-993F-EA54635E7004}"/>
+                <a16:creationId xmlns:a16="http://schemas.microsoft.com/office/drawing/2014/main" id="{FD9D0A36-67B1-461C-BF64-B9B54DCFC5E2}"/>
               </a:ext>
             </a:extLst>
           </p:cNvPr>
@@ -12659,7 +12669,7 @@
                 <a:ea typeface="DejaVu Sans"/>
                 <a:cs typeface="DejaVu Sans"/>
               </a:rPr>
-              <a:t>More apps. Aggregate usage</a:t>
+              <a:t>More apps. Usage does not</a:t>
             </a:r>
           </a:p>
           <a:p xmlns:a="http://schemas.openxmlformats.org/drawingml/2006/main">
@@ -12682,7 +12692,7 @@
                 <a:ea typeface="DejaVu Sans"/>
                 <a:cs typeface="DejaVu Sans"/>
               </a:rPr>
-              <a:t>flat or lower in these cohorts.</a:t>
+              <a:t>keep pace with new releases.</a:t>
             </a:r>
           </a:p>
         </p:txBody>
@@ -12692,7 +12702,7 @@
           <p:cNvPr id="15" name="">
             <a:extLst xmlns:a="http://schemas.openxmlformats.org/drawingml/2006/main">
               <a:ext uri="{FF2B5EF4-FFF2-40B4-BE49-F238E27FC236}">
-                <a16:creationId xmlns:a16="http://schemas.microsoft.com/office/drawing/2014/main" id="{2A0806F9-E9F3-482E-A58F-551E7775C734}"/>
+                <a16:creationId xmlns:a16="http://schemas.microsoft.com/office/drawing/2014/main" id="{392CCC39-9E5D-4FCE-9E68-EB7497DBD4C0}"/>
               </a:ext>
             </a:extLst>
           </p:cNvPr>
@@ -12749,7 +12759,7 @@
           <p:cNvPr id="16" name="">
             <a:extLst xmlns:a="http://schemas.openxmlformats.org/drawingml/2006/main">
               <a:ext uri="{FF2B5EF4-FFF2-40B4-BE49-F238E27FC236}">
-                <a16:creationId xmlns:a16="http://schemas.microsoft.com/office/drawing/2014/main" id="{1B989595-E2A1-46AF-9E23-57C27DEE04EA}"/>
+                <a16:creationId xmlns:a16="http://schemas.microsoft.com/office/drawing/2014/main" id="{87210894-86B9-4629-A82C-166C70D12AD7}"/>
               </a:ext>
             </a:extLst>
           </p:cNvPr>
@@ -12796,7 +12806,7 @@
                 <a:ea typeface="DejaVu Sans"/>
                 <a:cs typeface="DejaVu Sans"/>
               </a:rPr>
-              <a:t>79% → 86%</a:t>
+              <a:t>≈78% → 87%</a:t>
             </a:r>
           </a:p>
         </p:txBody>
@@ -12806,7 +12816,7 @@
           <p:cNvPr id="17" name="">
             <a:extLst xmlns:a="http://schemas.openxmlformats.org/drawingml/2006/main">
               <a:ext uri="{FF2B5EF4-FFF2-40B4-BE49-F238E27FC236}">
-                <a16:creationId xmlns:a16="http://schemas.microsoft.com/office/drawing/2014/main" id="{2809B229-0342-4787-AFF5-C3E88558960C}"/>
+                <a16:creationId xmlns:a16="http://schemas.microsoft.com/office/drawing/2014/main" id="{97AF7967-F81F-407A-BE09-2B0A32DBC865}"/>
               </a:ext>
             </a:extLst>
           </p:cNvPr>
@@ -12863,7 +12873,7 @@
           <p:cNvPr id="18" name="">
             <a:extLst xmlns:a="http://schemas.openxmlformats.org/drawingml/2006/main">
               <a:ext uri="{FF2B5EF4-FFF2-40B4-BE49-F238E27FC236}">
-                <a16:creationId xmlns:a16="http://schemas.microsoft.com/office/drawing/2014/main" id="{B1951F57-24C8-40C4-90CA-655A6B934851}"/>
+                <a16:creationId xmlns:a16="http://schemas.microsoft.com/office/drawing/2014/main" id="{75E750E9-D00C-4BBD-A60E-72FD4FACD6F6}"/>
               </a:ext>
             </a:extLst>
           </p:cNvPr>
@@ -12910,7 +12920,7 @@
                 <a:ea typeface="DejaVu Sans"/>
                 <a:cs typeface="DejaVu Sans"/>
               </a:rPr>
-              <a:t>18% → 31%</a:t>
+              <a:t>19% → 33%</a:t>
             </a:r>
           </a:p>
         </p:txBody>
@@ -12920,7 +12930,7 @@
           <p:cNvPr id="19" name="">
             <a:extLst xmlns:a="http://schemas.openxmlformats.org/drawingml/2006/main">
               <a:ext uri="{FF2B5EF4-FFF2-40B4-BE49-F238E27FC236}">
-                <a16:creationId xmlns:a16="http://schemas.microsoft.com/office/drawing/2014/main" id="{EAA2BF86-A236-4623-8D6D-DBF35C24F05D}"/>
+                <a16:creationId xmlns:a16="http://schemas.microsoft.com/office/drawing/2014/main" id="{1895FB02-CC91-4A82-B5A7-812A5252577A}"/>
               </a:ext>
             </a:extLst>
           </p:cNvPr>
@@ -12967,7 +12977,7 @@
                 <a:ea typeface="DejaVu Sans"/>
                 <a:cs typeface="DejaVu Sans"/>
               </a:rPr>
-              <a:t>New cohorts; first 3 months. Usage proxies.</a:t>
+              <a:t>Jan 2025 → Apr 2026; first 3 months.</a:t>
             </a:r>
           </a:p>
         </p:txBody>
@@ -12977,7 +12987,7 @@
           <p:cNvPr id="20" name="">
             <a:extLst xmlns:a="http://schemas.openxmlformats.org/drawingml/2006/main">
               <a:ext uri="{FF2B5EF4-FFF2-40B4-BE49-F238E27FC236}">
-                <a16:creationId xmlns:a16="http://schemas.microsoft.com/office/drawing/2014/main" id="{FF4E2760-DD67-4197-8D3C-320B2A1CD8F4}"/>
+                <a16:creationId xmlns:a16="http://schemas.microsoft.com/office/drawing/2014/main" id="{DC5A7E1A-9D32-4AF0-A702-FC0B63987E74}"/>
               </a:ext>
             </a:extLst>
           </p:cNvPr>
@@ -13034,7 +13044,7 @@
           <p:cNvPr id="21" name="">
             <a:extLst xmlns:a="http://schemas.openxmlformats.org/drawingml/2006/main">
               <a:ext uri="{FF2B5EF4-FFF2-40B4-BE49-F238E27FC236}">
-                <a16:creationId xmlns:a16="http://schemas.microsoft.com/office/drawing/2014/main" id="{C8BD9B78-4E4A-4306-B545-598B7F516611}"/>
+                <a16:creationId xmlns:a16="http://schemas.microsoft.com/office/drawing/2014/main" id="{DEF76610-66C0-441F-B0C1-88DD2571DDF7}"/>
               </a:ext>
             </a:extLst>
           </p:cNvPr>
@@ -13091,7 +13101,7 @@
           <p:cNvPr id="22" name="">
             <a:extLst xmlns:a="http://schemas.openxmlformats.org/drawingml/2006/main">
               <a:ext uri="{FF2B5EF4-FFF2-40B4-BE49-F238E27FC236}">
-                <a16:creationId xmlns:a16="http://schemas.microsoft.com/office/drawing/2014/main" id="{DE0EDBA4-0BE2-4AB2-A7FA-DC8643EF7BA7}"/>
+                <a16:creationId xmlns:a16="http://schemas.microsoft.com/office/drawing/2014/main" id="{F516D23C-2C4B-4BDE-815D-9707B51DB0D2}"/>
               </a:ext>
             </a:extLst>
           </p:cNvPr>
@@ -13148,7 +13158,7 @@
           <p:cNvPr id="23" name="">
             <a:extLst xmlns:a="http://schemas.openxmlformats.org/drawingml/2006/main">
               <a:ext uri="{FF2B5EF4-FFF2-40B4-BE49-F238E27FC236}">
-                <a16:creationId xmlns:a16="http://schemas.microsoft.com/office/drawing/2014/main" id="{C5E770D1-9A1B-490A-84F2-4EA44D681EBC}"/>
+                <a16:creationId xmlns:a16="http://schemas.microsoft.com/office/drawing/2014/main" id="{62675F50-C290-4D11-B3EE-3D8AECF37D87}"/>
               </a:ext>
             </a:extLst>
           </p:cNvPr>
@@ -13205,7 +13215,7 @@
           <p:cNvPr id="24" name="">
             <a:extLst xmlns:a="http://schemas.openxmlformats.org/drawingml/2006/main">
               <a:ext uri="{FF2B5EF4-FFF2-40B4-BE49-F238E27FC236}">
-                <a16:creationId xmlns:a16="http://schemas.microsoft.com/office/drawing/2014/main" id="{45574296-6797-45A6-BA85-723189B5A95E}"/>
+                <a16:creationId xmlns:a16="http://schemas.microsoft.com/office/drawing/2014/main" id="{9EEF1418-1BCC-4961-B3F0-CF14E22B2C04}"/>
               </a:ext>
             </a:extLst>
           </p:cNvPr>
@@ -13262,7 +13272,7 @@
           <p:cNvPr id="25" name="">
             <a:extLst xmlns:a="http://schemas.openxmlformats.org/drawingml/2006/main">
               <a:ext uri="{FF2B5EF4-FFF2-40B4-BE49-F238E27FC236}">
-                <a16:creationId xmlns:a16="http://schemas.microsoft.com/office/drawing/2014/main" id="{D633509B-A5EC-4B09-BA03-93AB84CD0E8A}"/>
+                <a16:creationId xmlns:a16="http://schemas.microsoft.com/office/drawing/2014/main" id="{10E11E63-EFA1-405F-A56F-B5753CAE9386}"/>
               </a:ext>
             </a:extLst>
           </p:cNvPr>
@@ -13342,7 +13352,7 @@
           <p:cNvPr id="26" name="">
             <a:extLst xmlns:a="http://schemas.openxmlformats.org/drawingml/2006/main">
               <a:ext uri="{FF2B5EF4-FFF2-40B4-BE49-F238E27FC236}">
-                <a16:creationId xmlns:a16="http://schemas.microsoft.com/office/drawing/2014/main" id="{6737E127-2563-4C59-821E-D369CF411BF3}"/>
+                <a16:creationId xmlns:a16="http://schemas.microsoft.com/office/drawing/2014/main" id="{4A32CBA8-2143-4A5A-B3B1-601478FF95E2}"/>
               </a:ext>
             </a:extLst>
           </p:cNvPr>
@@ -13389,7 +13399,7 @@
                 <a:ea typeface="DejaVu Sans"/>
                 <a:cs typeface="DejaVu Sans"/>
               </a:rPr>
-              <a:t>Report improvement: &gt;80% productivity; 59% code quality.</a:t>
+              <a:t>Respondents reporting improvement: &gt;80% productivity; 59% quality.</a:t>
             </a:r>
           </a:p>
         </p:txBody>
@@ -13399,7 +13409,7 @@
           <p:cNvPr id="27" name="">
             <a:extLst xmlns:a="http://schemas.openxmlformats.org/drawingml/2006/main">
               <a:ext uri="{FF2B5EF4-FFF2-40B4-BE49-F238E27FC236}">
-                <a16:creationId xmlns:a16="http://schemas.microsoft.com/office/drawing/2014/main" id="{BDB8E301-D8B8-4C2D-A9D3-F3049DE5E187}"/>
+                <a16:creationId xmlns:a16="http://schemas.microsoft.com/office/drawing/2014/main" id="{989B8691-522A-4F97-A61B-256205E6E7AB}"/>
               </a:ext>
             </a:extLst>
           </p:cNvPr>
@@ -13430,7 +13440,7 @@
           <p:cNvPr id="28" name="">
             <a:extLst xmlns:a="http://schemas.openxmlformats.org/drawingml/2006/main">
               <a:ext uri="{FF2B5EF4-FFF2-40B4-BE49-F238E27FC236}">
-                <a16:creationId xmlns:a16="http://schemas.microsoft.com/office/drawing/2014/main" id="{BD30590A-5D4F-41AB-8D3A-033C47635C24}"/>
+                <a16:creationId xmlns:a16="http://schemas.microsoft.com/office/drawing/2014/main" id="{AAD44F22-40C1-44EA-9F07-74FDD9790672}"/>
               </a:ext>
             </a:extLst>
           </p:cNvPr>
@@ -13477,7 +13487,7 @@
                 <a:ea typeface="DejaVu Sans"/>
                 <a:cs typeface="DejaVu Sans"/>
               </a:rPr>
-              <a:t>GITCLEAR · JUN 2026</a:t>
+              <a:t>GITCLEAR · 2026 SUMMARY</a:t>
             </a:r>
           </a:p>
         </p:txBody>
@@ -13487,7 +13497,7 @@
           <p:cNvPr id="29" name="">
             <a:extLst xmlns:a="http://schemas.openxmlformats.org/drawingml/2006/main">
               <a:ext uri="{FF2B5EF4-FFF2-40B4-BE49-F238E27FC236}">
-                <a16:creationId xmlns:a16="http://schemas.microsoft.com/office/drawing/2014/main" id="{A153B523-162D-415D-AD60-A82BAD997874}"/>
+                <a16:creationId xmlns:a16="http://schemas.microsoft.com/office/drawing/2014/main" id="{72382F8D-1922-4F54-9FAC-EBCC641BB3E9}"/>
               </a:ext>
             </a:extLst>
           </p:cNvPr>
@@ -13544,7 +13554,7 @@
           <p:cNvPr id="30" name="">
             <a:extLst xmlns:a="http://schemas.openxmlformats.org/drawingml/2006/main">
               <a:ext uri="{FF2B5EF4-FFF2-40B4-BE49-F238E27FC236}">
-                <a16:creationId xmlns:a16="http://schemas.microsoft.com/office/drawing/2014/main" id="{E2E4014A-300B-4757-B6B8-3FE4BD111208}"/>
+                <a16:creationId xmlns:a16="http://schemas.microsoft.com/office/drawing/2014/main" id="{A30D65EF-C32B-4498-A988-65C4252F5251}"/>
               </a:ext>
             </a:extLst>
           </p:cNvPr>
@@ -13601,7 +13611,7 @@
           <p:cNvPr id="31" name="">
             <a:extLst xmlns:a="http://schemas.openxmlformats.org/drawingml/2006/main">
               <a:ext uri="{FF2B5EF4-FFF2-40B4-BE49-F238E27FC236}">
-                <a16:creationId xmlns:a16="http://schemas.microsoft.com/office/drawing/2014/main" id="{F066C3A5-4C27-455B-95B2-02A3962CCDFF}"/>
+                <a16:creationId xmlns:a16="http://schemas.microsoft.com/office/drawing/2014/main" id="{ADBC052E-80EA-4910-9A4A-63D55AC2D449}"/>
               </a:ext>
             </a:extLst>
           </p:cNvPr>
@@ -13658,7 +13668,7 @@
           <p:cNvPr id="32" name="">
             <a:extLst xmlns:a="http://schemas.openxmlformats.org/drawingml/2006/main">
               <a:ext uri="{FF2B5EF4-FFF2-40B4-BE49-F238E27FC236}">
-                <a16:creationId xmlns:a16="http://schemas.microsoft.com/office/drawing/2014/main" id="{0477650C-DE1A-4876-B1BA-273CBED17300}"/>
+                <a16:creationId xmlns:a16="http://schemas.microsoft.com/office/drawing/2014/main" id="{F8045808-0D1F-43B1-9D5C-482239D462A1}"/>
               </a:ext>
             </a:extLst>
           </p:cNvPr>
@@ -13705,7 +13715,7 @@
                 <a:ea typeface="DejaVu Sans"/>
                 <a:cs typeface="DejaVu Sans"/>
               </a:rPr>
-              <a:t>−35%</a:t>
+              <a:t>343 → 223</a:t>
             </a:r>
           </a:p>
         </p:txBody>
@@ -13715,7 +13725,7 @@
           <p:cNvPr id="33" name="">
             <a:extLst xmlns:a="http://schemas.openxmlformats.org/drawingml/2006/main">
               <a:ext uri="{FF2B5EF4-FFF2-40B4-BE49-F238E27FC236}">
-                <a16:creationId xmlns:a16="http://schemas.microsoft.com/office/drawing/2014/main" id="{F1EA8228-E56C-4887-B69B-1C77F07B523C}"/>
+                <a16:creationId xmlns:a16="http://schemas.microsoft.com/office/drawing/2014/main" id="{0FA0E384-4A87-49AB-9FBB-DD4AB4BCB82C}"/>
               </a:ext>
             </a:extLst>
           </p:cNvPr>
@@ -13772,7 +13782,7 @@
           <p:cNvPr id="34" name="">
             <a:extLst xmlns:a="http://schemas.openxmlformats.org/drawingml/2006/main">
               <a:ext uri="{FF2B5EF4-FFF2-40B4-BE49-F238E27FC236}">
-                <a16:creationId xmlns:a16="http://schemas.microsoft.com/office/drawing/2014/main" id="{4D34EF9B-9E79-47EA-846E-A9F0600FB797}"/>
+                <a16:creationId xmlns:a16="http://schemas.microsoft.com/office/drawing/2014/main" id="{7670474E-4F3A-49EE-A502-72D61D8EDD33}"/>
               </a:ext>
             </a:extLst>
           </p:cNvPr>
@@ -13819,7 +13829,7 @@
                 <a:ea typeface="DejaVu Sans"/>
                 <a:cs typeface="DejaVu Sans"/>
               </a:rPr>
-              <a:t>+81%</a:t>
+              <a:t>≈+81%</a:t>
             </a:r>
           </a:p>
         </p:txBody>
@@ -13829,7 +13839,7 @@
           <p:cNvPr id="35" name="">
             <a:extLst xmlns:a="http://schemas.openxmlformats.org/drawingml/2006/main">
               <a:ext uri="{FF2B5EF4-FFF2-40B4-BE49-F238E27FC236}">
-                <a16:creationId xmlns:a16="http://schemas.microsoft.com/office/drawing/2014/main" id="{45296008-26A7-4155-B9F1-09148DB061AA}"/>
+                <a16:creationId xmlns:a16="http://schemas.microsoft.com/office/drawing/2014/main" id="{A89B2D42-73E7-4543-9190-8760070A3927}"/>
               </a:ext>
             </a:extLst>
           </p:cNvPr>
@@ -13876,7 +13886,7 @@
                 <a:ea typeface="DejaVu Sans"/>
                 <a:cs typeface="DejaVu Sans"/>
               </a:rPr>
-              <a:t>Two-week code churn</a:t>
+              <a:t>Two-week churn (reported)</a:t>
             </a:r>
           </a:p>
         </p:txBody>
@@ -13886,7 +13896,7 @@
           <p:cNvPr id="36" name="">
             <a:extLst xmlns:a="http://schemas.openxmlformats.org/drawingml/2006/main">
               <a:ext uri="{FF2B5EF4-FFF2-40B4-BE49-F238E27FC236}">
-                <a16:creationId xmlns:a16="http://schemas.microsoft.com/office/drawing/2014/main" id="{EE7BC32F-05BA-49AE-934F-48B241E422CD}"/>
+                <a16:creationId xmlns:a16="http://schemas.microsoft.com/office/drawing/2014/main" id="{35175BBE-4848-4A31-8A25-C4C1D4FCB566}"/>
               </a:ext>
             </a:extLst>
           </p:cNvPr>
@@ -13943,7 +13953,7 @@
           <p:cNvPr id="37" name="">
             <a:extLst xmlns:a="http://schemas.openxmlformats.org/drawingml/2006/main">
               <a:ext uri="{FF2B5EF4-FFF2-40B4-BE49-F238E27FC236}">
-                <a16:creationId xmlns:a16="http://schemas.microsoft.com/office/drawing/2014/main" id="{8A54CEB0-E879-47EF-B136-B59A3A3A0BDC}"/>
+                <a16:creationId xmlns:a16="http://schemas.microsoft.com/office/drawing/2014/main" id="{581260C8-2621-41CE-B432-95667BF38215}"/>
               </a:ext>
             </a:extLst>
           </p:cNvPr>
@@ -13990,7 +14000,7 @@
                 <a:ea typeface="DejaVu Sans"/>
                 <a:cs typeface="DejaVu Sans"/>
               </a:rPr>
-              <a:t>Observed code proxies; not a causal AI estimate.</a:t>
+              <a:t>2023 → YTD 2026; churn baseline unstated. Observational.</a:t>
             </a:r>
           </a:p>
         </p:txBody>
@@ -14000,7 +14010,7 @@
           <p:cNvPr id="38" name="">
             <a:extLst xmlns:a="http://schemas.openxmlformats.org/drawingml/2006/main">
               <a:ext uri="{FF2B5EF4-FFF2-40B4-BE49-F238E27FC236}">
-                <a16:creationId xmlns:a16="http://schemas.microsoft.com/office/drawing/2014/main" id="{D6749B61-53B3-4D14-95DA-7B3C870817EF}"/>
+                <a16:creationId xmlns:a16="http://schemas.microsoft.com/office/drawing/2014/main" id="{70EAA8D8-0E28-4141-A9B7-39223DB2860E}"/>
               </a:ext>
             </a:extLst>
           </p:cNvPr>
@@ -14031,7 +14041,7 @@
           <p:cNvPr id="39" name="">
             <a:extLst xmlns:a="http://schemas.openxmlformats.org/drawingml/2006/main">
               <a:ext uri="{FF2B5EF4-FFF2-40B4-BE49-F238E27FC236}">
-                <a16:creationId xmlns:a16="http://schemas.microsoft.com/office/drawing/2014/main" id="{BFD6C9D1-6732-494A-9F9B-2E7BC67EEAF0}"/>
+                <a16:creationId xmlns:a16="http://schemas.microsoft.com/office/drawing/2014/main" id="{5FAA1CDC-F1BA-43A7-8507-C53CC5715A71}"/>
               </a:ext>
             </a:extLst>
           </p:cNvPr>
@@ -14088,7 +14098,7 @@
           <p:cNvPr id="40" name="">
             <a:extLst xmlns:a="http://schemas.openxmlformats.org/drawingml/2006/main">
               <a:ext uri="{FF2B5EF4-FFF2-40B4-BE49-F238E27FC236}">
-                <a16:creationId xmlns:a16="http://schemas.microsoft.com/office/drawing/2014/main" id="{ACE93ABC-0C05-479E-8A43-8F55844EE14B}"/>
+                <a16:creationId xmlns:a16="http://schemas.microsoft.com/office/drawing/2014/main" id="{E265188D-167F-4CAF-A128-BDE1D0A417C0}"/>
               </a:ext>
             </a:extLst>
           </p:cNvPr>
@@ -14145,7 +14155,7 @@
           <p:cNvPr id="41" name="">
             <a:extLst xmlns:a="http://schemas.openxmlformats.org/drawingml/2006/main">
               <a:ext uri="{FF2B5EF4-FFF2-40B4-BE49-F238E27FC236}">
-                <a16:creationId xmlns:a16="http://schemas.microsoft.com/office/drawing/2014/main" id="{F6682437-B164-4B62-B29E-3B2082A5853B}"/>
+                <a16:creationId xmlns:a16="http://schemas.microsoft.com/office/drawing/2014/main" id="{C91D6A3F-F158-4518-9241-C78A10F914DB}"/>
               </a:ext>
             </a:extLst>
           </p:cNvPr>
@@ -14192,7 +14202,7 @@
                 <a:ea typeface="DejaVu Sans"/>
                 <a:cs typeface="DejaVu Sans"/>
               </a:rPr>
-              <a:t>Median self-reported work value; survey, not causal uplift</a:t>
+              <a:t>Medians across 3 questions; self-reported, not causal.</a:t>
             </a:r>
           </a:p>
         </p:txBody>
@@ -14202,7 +14212,7 @@
           <p:cNvPr id="42" name="">
             <a:extLst xmlns:a="http://schemas.openxmlformats.org/drawingml/2006/main">
               <a:ext uri="{FF2B5EF4-FFF2-40B4-BE49-F238E27FC236}">
-                <a16:creationId xmlns:a16="http://schemas.microsoft.com/office/drawing/2014/main" id="{672C4459-6FC4-40DC-AE24-3A8BD6804970}"/>
+                <a16:creationId xmlns:a16="http://schemas.microsoft.com/office/drawing/2014/main" id="{A2DBB079-3373-4598-B4F2-798AD7B06BBD}"/>
               </a:ext>
             </a:extLst>
           </p:cNvPr>
@@ -14249,7 +14259,7 @@
                 <a:ea typeface="DejaVu Sans"/>
                 <a:cs typeface="DejaVu Sans"/>
               </a:rPr>
-              <a:t>XU + AGARWAL · 2026</a:t>
+              <a:t>AGARWAL · JAN 2026</a:t>
             </a:r>
           </a:p>
         </p:txBody>
@@ -14259,7 +14269,7 @@
           <p:cNvPr id="43" name="">
             <a:extLst xmlns:a="http://schemas.openxmlformats.org/drawingml/2006/main">
               <a:ext uri="{FF2B5EF4-FFF2-40B4-BE49-F238E27FC236}">
-                <a16:creationId xmlns:a16="http://schemas.microsoft.com/office/drawing/2014/main" id="{2F3D3845-F581-4862-A39E-0338D98CBFF7}"/>
+                <a16:creationId xmlns:a16="http://schemas.microsoft.com/office/drawing/2014/main" id="{74A04938-1C68-4948-9CB5-BE2824401D0D}"/>
               </a:ext>
             </a:extLst>
           </p:cNvPr>
@@ -14288,25 +14298,25 @@
           <a:lstStyle xmlns:a="http://schemas.openxmlformats.org/drawingml/2006/main"/>
           <a:p xmlns:a="http://schemas.openxmlformats.org/drawingml/2006/main">
             <a:pPr algn="r">
-              <a:defRPr sz="1725" b="1">
-                <a:solidFill>
-                  <a:srgbClr val="F4F7FA"/>
-                </a:solidFill>
-                <a:latin typeface="DejaVu Sans"/>
-                <a:ea typeface="DejaVu Sans"/>
-                <a:cs typeface="DejaVu Sans"/>
-              </a:defRPr>
-            </a:pPr>
-            <a:r>
-              <a:rPr sz="1725" b="1">
-                <a:solidFill>
-                  <a:srgbClr val="F4F7FA"/>
-                </a:solidFill>
-                <a:latin typeface="DejaVu Sans"/>
-                <a:ea typeface="DejaVu Sans"/>
-                <a:cs typeface="DejaVu Sans"/>
-              </a:rPr>
-              <a:t>+35% / +43%</a:t>
+              <a:defRPr sz="1575" b="1">
+                <a:solidFill>
+                  <a:srgbClr val="F4F7FA"/>
+                </a:solidFill>
+                <a:latin typeface="DejaVu Sans"/>
+                <a:ea typeface="DejaVu Sans"/>
+                <a:cs typeface="DejaVu Sans"/>
+              </a:defRPr>
+            </a:pPr>
+            <a:r>
+              <a:rPr sz="1575" b="1">
+                <a:solidFill>
+                  <a:srgbClr val="F4F7FA"/>
+                </a:solidFill>
+                <a:latin typeface="DejaVu Sans"/>
+                <a:ea typeface="DejaVu Sans"/>
+                <a:cs typeface="DejaVu Sans"/>
+              </a:rPr>
+              <a:t>+34.85% / +42.87%</a:t>
             </a:r>
           </a:p>
         </p:txBody>
@@ -14316,7 +14326,7 @@
           <p:cNvPr id="44" name="">
             <a:extLst xmlns:a="http://schemas.openxmlformats.org/drawingml/2006/main">
               <a:ext uri="{FF2B5EF4-FFF2-40B4-BE49-F238E27FC236}">
-                <a16:creationId xmlns:a16="http://schemas.microsoft.com/office/drawing/2014/main" id="{10870B62-C1A4-47BC-8B6F-540A349C6717}"/>
+                <a16:creationId xmlns:a16="http://schemas.microsoft.com/office/drawing/2014/main" id="{762B7AF6-4109-44A5-B5C6-774F9017B577}"/>
               </a:ext>
             </a:extLst>
           </p:cNvPr>
@@ -14363,7 +14373,7 @@
                 <a:ea typeface="DejaVu Sans"/>
                 <a:cs typeface="DejaVu Sans"/>
               </a:rPr>
-              <a:t>Agarwal: complexity proxy. Xu: contributor workload shifts.</a:t>
+              <a:t>Complexity: Agent-first / IDE-first. Xu: workload shifts.</a:t>
             </a:r>
           </a:p>
         </p:txBody>
@@ -14373,7 +14383,7 @@
           <p:cNvPr id="45" name="">
             <a:extLst xmlns:a="http://schemas.openxmlformats.org/drawingml/2006/main">
               <a:ext uri="{FF2B5EF4-FFF2-40B4-BE49-F238E27FC236}">
-                <a16:creationId xmlns:a16="http://schemas.microsoft.com/office/drawing/2014/main" id="{53B673D2-C086-4BB0-8A1E-9CAB8E31F8D2}"/>
+                <a16:creationId xmlns:a16="http://schemas.microsoft.com/office/drawing/2014/main" id="{27558AFD-09D6-4244-9333-F6DCED5B7161}"/>
               </a:ext>
             </a:extLst>
           </p:cNvPr>
@@ -14428,7 +14438,7 @@
     </p:spTree>
     <p:extLst>
       <p:ext uri="{BB962C8B-B14F-4D97-AF65-F5344CB8AC3E}">
-        <p14:creationId xmlns:p14="http://schemas.microsoft.com/office/powerpoint/2010/main" val="652858348"/>
+        <p14:creationId xmlns:p14="http://schemas.microsoft.com/office/powerpoint/2010/main" val="586916912"/>
       </p:ext>
     </p:extLst>
   </p:cSld>
@@ -14459,7 +14469,7 @@
           <p:cNvPr id="21" name="">
             <a:extLst xmlns:a="http://schemas.openxmlformats.org/drawingml/2006/main">
               <a:ext uri="{FF2B5EF4-FFF2-40B4-BE49-F238E27FC236}">
-                <a16:creationId xmlns:a16="http://schemas.microsoft.com/office/drawing/2014/main" id="{8CDCAED2-C079-43E2-B2F3-309A4C7AA644}"/>
+                <a16:creationId xmlns:a16="http://schemas.microsoft.com/office/drawing/2014/main" id="{AD0438DD-0743-48CC-B6D9-5246D82B9449}"/>
               </a:ext>
             </a:extLst>
           </p:cNvPr>
@@ -14516,7 +14526,7 @@
           <p:cNvPr id="2" name="">
             <a:extLst xmlns:a="http://schemas.openxmlformats.org/drawingml/2006/main">
               <a:ext uri="{FF2B5EF4-FFF2-40B4-BE49-F238E27FC236}">
-                <a16:creationId xmlns:a16="http://schemas.microsoft.com/office/drawing/2014/main" id="{4A24FF51-7083-4A83-8751-D03416CF180D}"/>
+                <a16:creationId xmlns:a16="http://schemas.microsoft.com/office/drawing/2014/main" id="{3AB995F6-D4DF-4189-A4DC-920FAB913C52}"/>
               </a:ext>
             </a:extLst>
           </p:cNvPr>
@@ -14547,7 +14557,7 @@
           <p:cNvPr id="3" name="">
             <a:extLst xmlns:a="http://schemas.openxmlformats.org/drawingml/2006/main">
               <a:ext uri="{FF2B5EF4-FFF2-40B4-BE49-F238E27FC236}">
-                <a16:creationId xmlns:a16="http://schemas.microsoft.com/office/drawing/2014/main" id="{DD8C0301-12E7-4061-AFB1-FE7FEF6A3A4D}"/>
+                <a16:creationId xmlns:a16="http://schemas.microsoft.com/office/drawing/2014/main" id="{B8CACF29-AECD-48DD-9793-914169465D5B}"/>
               </a:ext>
             </a:extLst>
           </p:cNvPr>
@@ -14604,7 +14614,7 @@
           <p:cNvPr id="4" name="">
             <a:extLst xmlns:a="http://schemas.openxmlformats.org/drawingml/2006/main">
               <a:ext uri="{FF2B5EF4-FFF2-40B4-BE49-F238E27FC236}">
-                <a16:creationId xmlns:a16="http://schemas.microsoft.com/office/drawing/2014/main" id="{A1521179-50EF-4C0F-A805-DD64DEB1FD70}"/>
+                <a16:creationId xmlns:a16="http://schemas.microsoft.com/office/drawing/2014/main" id="{1531D7E0-C531-4D7D-B15F-11D904C67B3B}"/>
               </a:ext>
             </a:extLst>
           </p:cNvPr>
@@ -14635,7 +14645,7 @@
           <p:cNvPr id="5" name="">
             <a:extLst xmlns:a="http://schemas.openxmlformats.org/drawingml/2006/main">
               <a:ext uri="{FF2B5EF4-FFF2-40B4-BE49-F238E27FC236}">
-                <a16:creationId xmlns:a16="http://schemas.microsoft.com/office/drawing/2014/main" id="{39C19E7C-A27A-42A0-9ABB-CD074F05D5F2}"/>
+                <a16:creationId xmlns:a16="http://schemas.microsoft.com/office/drawing/2014/main" id="{70B2695D-990A-4212-8B27-415FF73BCC6C}"/>
               </a:ext>
             </a:extLst>
           </p:cNvPr>
@@ -14666,7 +14676,7 @@
           <p:cNvPr id="6" name="">
             <a:extLst xmlns:a="http://schemas.openxmlformats.org/drawingml/2006/main">
               <a:ext uri="{FF2B5EF4-FFF2-40B4-BE49-F238E27FC236}">
-                <a16:creationId xmlns:a16="http://schemas.microsoft.com/office/drawing/2014/main" id="{41F4CF03-0746-4CC3-B7AE-CA9C220BE0AD}"/>
+                <a16:creationId xmlns:a16="http://schemas.microsoft.com/office/drawing/2014/main" id="{50F24B08-38FF-473D-B260-787637E24C52}"/>
               </a:ext>
             </a:extLst>
           </p:cNvPr>
@@ -15063,7 +15073,7 @@
           <p:cNvPr id="7" name="">
             <a:extLst xmlns:a="http://schemas.openxmlformats.org/drawingml/2006/main">
               <a:ext uri="{FF2B5EF4-FFF2-40B4-BE49-F238E27FC236}">
-                <a16:creationId xmlns:a16="http://schemas.microsoft.com/office/drawing/2014/main" id="{33D913F4-84BC-4A07-BFA4-1FA819C4371F}"/>
+                <a16:creationId xmlns:a16="http://schemas.microsoft.com/office/drawing/2014/main" id="{6B1DC226-D562-41EF-84CE-FB7FD4D91C4C}"/>
               </a:ext>
             </a:extLst>
           </p:cNvPr>
@@ -15094,7 +15104,7 @@
           <p:cNvPr id="8" name="">
             <a:extLst xmlns:a="http://schemas.openxmlformats.org/drawingml/2006/main">
               <a:ext uri="{FF2B5EF4-FFF2-40B4-BE49-F238E27FC236}">
-                <a16:creationId xmlns:a16="http://schemas.microsoft.com/office/drawing/2014/main" id="{4B4A008A-30A5-412E-A784-6AF8F886C11C}"/>
+                <a16:creationId xmlns:a16="http://schemas.microsoft.com/office/drawing/2014/main" id="{72992E83-B019-4B59-8DCC-981A09F48C06}"/>
               </a:ext>
             </a:extLst>
           </p:cNvPr>
@@ -15151,7 +15161,7 @@
           <p:cNvPr id="9" name="">
             <a:extLst xmlns:a="http://schemas.openxmlformats.org/drawingml/2006/main">
               <a:ext uri="{FF2B5EF4-FFF2-40B4-BE49-F238E27FC236}">
-                <a16:creationId xmlns:a16="http://schemas.microsoft.com/office/drawing/2014/main" id="{92740204-2AA6-49C4-BB36-D6E0491AB37F}"/>
+                <a16:creationId xmlns:a16="http://schemas.microsoft.com/office/drawing/2014/main" id="{8A076380-8FF9-4C45-BE8E-C12F28535F80}"/>
               </a:ext>
             </a:extLst>
           </p:cNvPr>
@@ -15208,7 +15218,7 @@
           <p:cNvPr id="10" name="">
             <a:extLst xmlns:a="http://schemas.openxmlformats.org/drawingml/2006/main">
               <a:ext uri="{FF2B5EF4-FFF2-40B4-BE49-F238E27FC236}">
-                <a16:creationId xmlns:a16="http://schemas.microsoft.com/office/drawing/2014/main" id="{031DC1D9-7C1E-4238-BE91-B34A4AEDF61E}"/>
+                <a16:creationId xmlns:a16="http://schemas.microsoft.com/office/drawing/2014/main" id="{7EADE54B-C2C2-49FF-9CB1-565FD4ACA7DC}"/>
               </a:ext>
             </a:extLst>
           </p:cNvPr>
@@ -15288,7 +15298,7 @@
           <p:cNvPr id="11" name="">
             <a:extLst xmlns:a="http://schemas.openxmlformats.org/drawingml/2006/main">
               <a:ext uri="{FF2B5EF4-FFF2-40B4-BE49-F238E27FC236}">
-                <a16:creationId xmlns:a16="http://schemas.microsoft.com/office/drawing/2014/main" id="{2258070B-34BE-4A91-902F-CA481BAE0E96}"/>
+                <a16:creationId xmlns:a16="http://schemas.microsoft.com/office/drawing/2014/main" id="{EB33BF52-8D75-4494-A599-CE748EE5D6AE}"/>
               </a:ext>
             </a:extLst>
           </p:cNvPr>
@@ -15345,7 +15355,7 @@
           <p:cNvPr id="12" name="">
             <a:extLst xmlns:a="http://schemas.openxmlformats.org/drawingml/2006/main">
               <a:ext uri="{FF2B5EF4-FFF2-40B4-BE49-F238E27FC236}">
-                <a16:creationId xmlns:a16="http://schemas.microsoft.com/office/drawing/2014/main" id="{8B7E5F23-A6C9-495C-BB52-E6DA7AB9D8FE}"/>
+                <a16:creationId xmlns:a16="http://schemas.microsoft.com/office/drawing/2014/main" id="{9A48B593-42FD-45C7-9CB8-516877003359}"/>
               </a:ext>
             </a:extLst>
           </p:cNvPr>
@@ -15402,7 +15412,7 @@
           <p:cNvPr id="13" name="">
             <a:extLst xmlns:a="http://schemas.openxmlformats.org/drawingml/2006/main">
               <a:ext uri="{FF2B5EF4-FFF2-40B4-BE49-F238E27FC236}">
-                <a16:creationId xmlns:a16="http://schemas.microsoft.com/office/drawing/2014/main" id="{93C5E641-F28C-40E3-8D08-BB9138A7BA24}"/>
+                <a16:creationId xmlns:a16="http://schemas.microsoft.com/office/drawing/2014/main" id="{7AD981BA-9267-4738-83F5-1834493CAEA7}"/>
               </a:ext>
             </a:extLst>
           </p:cNvPr>
@@ -15459,7 +15469,7 @@
           <p:cNvPr id="14" name="">
             <a:extLst xmlns:a="http://schemas.openxmlformats.org/drawingml/2006/main">
               <a:ext uri="{FF2B5EF4-FFF2-40B4-BE49-F238E27FC236}">
-                <a16:creationId xmlns:a16="http://schemas.microsoft.com/office/drawing/2014/main" id="{042A0DEB-4DCF-4918-B10F-926B54A2D23B}"/>
+                <a16:creationId xmlns:a16="http://schemas.microsoft.com/office/drawing/2014/main" id="{CAC69F5B-B349-468B-8CC7-14A73FEC1753}"/>
               </a:ext>
             </a:extLst>
           </p:cNvPr>
@@ -15516,7 +15526,7 @@
           <p:cNvPr id="15" name="">
             <a:extLst xmlns:a="http://schemas.openxmlformats.org/drawingml/2006/main">
               <a:ext uri="{FF2B5EF4-FFF2-40B4-BE49-F238E27FC236}">
-                <a16:creationId xmlns:a16="http://schemas.microsoft.com/office/drawing/2014/main" id="{750F38AB-088B-4528-92E4-01F536C35002}"/>
+                <a16:creationId xmlns:a16="http://schemas.microsoft.com/office/drawing/2014/main" id="{A6C197F0-FF85-4D49-B79F-BBEF1077A63B}"/>
               </a:ext>
             </a:extLst>
           </p:cNvPr>
@@ -15573,7 +15583,7 @@
           <p:cNvPr id="16" name="">
             <a:extLst xmlns:a="http://schemas.openxmlformats.org/drawingml/2006/main">
               <a:ext uri="{FF2B5EF4-FFF2-40B4-BE49-F238E27FC236}">
-                <a16:creationId xmlns:a16="http://schemas.microsoft.com/office/drawing/2014/main" id="{24ED7B37-7E05-4352-B1A4-FD4EF3B9E412}"/>
+                <a16:creationId xmlns:a16="http://schemas.microsoft.com/office/drawing/2014/main" id="{D75091AD-AF8E-4674-9B5D-385B063B96E4}"/>
               </a:ext>
             </a:extLst>
           </p:cNvPr>
@@ -15653,7 +15663,7 @@
           <p:cNvPr id="17" name="">
             <a:extLst xmlns:a="http://schemas.openxmlformats.org/drawingml/2006/main">
               <a:ext uri="{FF2B5EF4-FFF2-40B4-BE49-F238E27FC236}">
-                <a16:creationId xmlns:a16="http://schemas.microsoft.com/office/drawing/2014/main" id="{999A732D-495A-4F79-9E4F-70EBC9B1E9BA}"/>
+                <a16:creationId xmlns:a16="http://schemas.microsoft.com/office/drawing/2014/main" id="{50C2082E-0979-42B7-82DE-DB4217D78444}"/>
               </a:ext>
             </a:extLst>
           </p:cNvPr>
@@ -15710,7 +15720,7 @@
           <p:cNvPr id="18" name="">
             <a:extLst xmlns:a="http://schemas.openxmlformats.org/drawingml/2006/main">
               <a:ext uri="{FF2B5EF4-FFF2-40B4-BE49-F238E27FC236}">
-                <a16:creationId xmlns:a16="http://schemas.microsoft.com/office/drawing/2014/main" id="{0B3C0977-2FD7-4374-BBBD-4BBBFCCD24D9}"/>
+                <a16:creationId xmlns:a16="http://schemas.microsoft.com/office/drawing/2014/main" id="{0DD3CFD9-8B04-413D-9FE0-422FD4F6BD25}"/>
               </a:ext>
             </a:extLst>
           </p:cNvPr>
@@ -15767,7 +15777,7 @@
           <p:cNvPr id="19" name="">
             <a:extLst xmlns:a="http://schemas.openxmlformats.org/drawingml/2006/main">
               <a:ext uri="{FF2B5EF4-FFF2-40B4-BE49-F238E27FC236}">
-                <a16:creationId xmlns:a16="http://schemas.microsoft.com/office/drawing/2014/main" id="{BEBD4B82-C0B2-42FC-A55C-76BE8B063B6E}"/>
+                <a16:creationId xmlns:a16="http://schemas.microsoft.com/office/drawing/2014/main" id="{E553B1E7-2A27-4A29-8C2F-006A3D99A03E}"/>
               </a:ext>
             </a:extLst>
           </p:cNvPr>
@@ -15798,7 +15808,7 @@
           <p:cNvPr id="20" name="">
             <a:extLst xmlns:a="http://schemas.openxmlformats.org/drawingml/2006/main">
               <a:ext uri="{FF2B5EF4-FFF2-40B4-BE49-F238E27FC236}">
-                <a16:creationId xmlns:a16="http://schemas.microsoft.com/office/drawing/2014/main" id="{045BA6B2-0CE3-4903-9446-BAAF18793D84}"/>
+                <a16:creationId xmlns:a16="http://schemas.microsoft.com/office/drawing/2014/main" id="{81D579F6-D585-481A-A5A0-C950EB7FFBF7}"/>
               </a:ext>
             </a:extLst>
           </p:cNvPr>
@@ -15853,7 +15863,7 @@
     </p:spTree>
     <p:extLst>
       <p:ext uri="{BB962C8B-B14F-4D97-AF65-F5344CB8AC3E}">
-        <p14:creationId xmlns:p14="http://schemas.microsoft.com/office/powerpoint/2010/main" val="1801804329"/>
+        <p14:creationId xmlns:p14="http://schemas.microsoft.com/office/powerpoint/2010/main" val="1172285752"/>
       </p:ext>
     </p:extLst>
   </p:cSld>
@@ -15884,7 +15894,7 @@
           <p:cNvPr id="24" name="">
             <a:extLst xmlns:a="http://schemas.openxmlformats.org/drawingml/2006/main">
               <a:ext uri="{FF2B5EF4-FFF2-40B4-BE49-F238E27FC236}">
-                <a16:creationId xmlns:a16="http://schemas.microsoft.com/office/drawing/2014/main" id="{9EF7427B-5147-4461-A3F5-A414D68495FA}"/>
+                <a16:creationId xmlns:a16="http://schemas.microsoft.com/office/drawing/2014/main" id="{1D915CE9-1A70-431C-9B5F-3F804F94316B}"/>
               </a:ext>
             </a:extLst>
           </p:cNvPr>
@@ -15941,7 +15951,7 @@
           <p:cNvPr id="2" name="">
             <a:extLst xmlns:a="http://schemas.openxmlformats.org/drawingml/2006/main">
               <a:ext uri="{FF2B5EF4-FFF2-40B4-BE49-F238E27FC236}">
-                <a16:creationId xmlns:a16="http://schemas.microsoft.com/office/drawing/2014/main" id="{54584BCD-FDBF-4D3B-9A7E-B448862DB63C}"/>
+                <a16:creationId xmlns:a16="http://schemas.microsoft.com/office/drawing/2014/main" id="{70041C53-10FC-471E-94EB-5E62E770D108}"/>
               </a:ext>
             </a:extLst>
           </p:cNvPr>
@@ -15972,7 +15982,7 @@
           <p:cNvPr id="3" name="">
             <a:extLst xmlns:a="http://schemas.openxmlformats.org/drawingml/2006/main">
               <a:ext uri="{FF2B5EF4-FFF2-40B4-BE49-F238E27FC236}">
-                <a16:creationId xmlns:a16="http://schemas.microsoft.com/office/drawing/2014/main" id="{2C8BC1B4-62C9-4E48-B1B6-18F906580B34}"/>
+                <a16:creationId xmlns:a16="http://schemas.microsoft.com/office/drawing/2014/main" id="{DDF22393-6DF9-41BB-B0D1-196FA54337AA}"/>
               </a:ext>
             </a:extLst>
           </p:cNvPr>
@@ -16029,7 +16039,7 @@
           <p:cNvPr id="4" name="">
             <a:extLst xmlns:a="http://schemas.openxmlformats.org/drawingml/2006/main">
               <a:ext uri="{FF2B5EF4-FFF2-40B4-BE49-F238E27FC236}">
-                <a16:creationId xmlns:a16="http://schemas.microsoft.com/office/drawing/2014/main" id="{AB098F30-6978-4022-A059-EAA56A170A2D}"/>
+                <a16:creationId xmlns:a16="http://schemas.microsoft.com/office/drawing/2014/main" id="{F5C24FD7-75BD-4C19-B1DE-E133AB8177F9}"/>
               </a:ext>
             </a:extLst>
           </p:cNvPr>
@@ -16086,7 +16096,7 @@
           <p:cNvPr id="5" name="">
             <a:extLst xmlns:a="http://schemas.openxmlformats.org/drawingml/2006/main">
               <a:ext uri="{FF2B5EF4-FFF2-40B4-BE49-F238E27FC236}">
-                <a16:creationId xmlns:a16="http://schemas.microsoft.com/office/drawing/2014/main" id="{279314B9-1FAC-4A24-B414-559BB72F0CFD}"/>
+                <a16:creationId xmlns:a16="http://schemas.microsoft.com/office/drawing/2014/main" id="{44A57D47-9974-4E64-8F78-4748B5C748C3}"/>
               </a:ext>
             </a:extLst>
           </p:cNvPr>
@@ -16143,7 +16153,7 @@
           <p:cNvPr id="6" name="">
             <a:extLst xmlns:a="http://schemas.openxmlformats.org/drawingml/2006/main">
               <a:ext uri="{FF2B5EF4-FFF2-40B4-BE49-F238E27FC236}">
-                <a16:creationId xmlns:a16="http://schemas.microsoft.com/office/drawing/2014/main" id="{0330D391-9D43-4442-8D86-B073C76E4400}"/>
+                <a16:creationId xmlns:a16="http://schemas.microsoft.com/office/drawing/2014/main" id="{366F3340-18F8-481E-BCD8-411E93A63542}"/>
               </a:ext>
             </a:extLst>
           </p:cNvPr>
@@ -16176,7 +16186,7 @@
           <p:cNvPr id="7" name="">
             <a:extLst xmlns:a="http://schemas.openxmlformats.org/drawingml/2006/main">
               <a:ext uri="{FF2B5EF4-FFF2-40B4-BE49-F238E27FC236}">
-                <a16:creationId xmlns:a16="http://schemas.microsoft.com/office/drawing/2014/main" id="{7FEF8001-1CE6-4240-AE07-2F6C99D57F80}"/>
+                <a16:creationId xmlns:a16="http://schemas.microsoft.com/office/drawing/2014/main" id="{CFA5B6EC-A9DC-4C93-8B1E-006F61D161BA}"/>
               </a:ext>
             </a:extLst>
           </p:cNvPr>
@@ -16256,7 +16266,7 @@
           <p:cNvPr id="8" name="">
             <a:extLst xmlns:a="http://schemas.openxmlformats.org/drawingml/2006/main">
               <a:ext uri="{FF2B5EF4-FFF2-40B4-BE49-F238E27FC236}">
-                <a16:creationId xmlns:a16="http://schemas.microsoft.com/office/drawing/2014/main" id="{3F095A59-D111-4392-8071-F541ADB8388B}"/>
+                <a16:creationId xmlns:a16="http://schemas.microsoft.com/office/drawing/2014/main" id="{846A72D3-7E32-4CD5-B201-82DD04C0BCD1}"/>
               </a:ext>
             </a:extLst>
           </p:cNvPr>
@@ -16359,7 +16369,7 @@
           <p:cNvPr id="9" name="">
             <a:extLst xmlns:a="http://schemas.openxmlformats.org/drawingml/2006/main">
               <a:ext uri="{FF2B5EF4-FFF2-40B4-BE49-F238E27FC236}">
-                <a16:creationId xmlns:a16="http://schemas.microsoft.com/office/drawing/2014/main" id="{407ADCA6-007F-45F9-82CE-91D09CA8751A}"/>
+                <a16:creationId xmlns:a16="http://schemas.microsoft.com/office/drawing/2014/main" id="{4DE3185C-6A9D-45DC-85FD-F30828E450C1}"/>
               </a:ext>
             </a:extLst>
           </p:cNvPr>
@@ -16392,7 +16402,7 @@
           <p:cNvPr id="10" name="">
             <a:extLst xmlns:a="http://schemas.openxmlformats.org/drawingml/2006/main">
               <a:ext uri="{FF2B5EF4-FFF2-40B4-BE49-F238E27FC236}">
-                <a16:creationId xmlns:a16="http://schemas.microsoft.com/office/drawing/2014/main" id="{44E0D7A2-BC09-471C-905C-945C5A017320}"/>
+                <a16:creationId xmlns:a16="http://schemas.microsoft.com/office/drawing/2014/main" id="{D3123DAF-5207-41D5-8670-FA953AF03877}"/>
               </a:ext>
             </a:extLst>
           </p:cNvPr>
@@ -16472,7 +16482,7 @@
           <p:cNvPr id="11" name="">
             <a:extLst xmlns:a="http://schemas.openxmlformats.org/drawingml/2006/main">
               <a:ext uri="{FF2B5EF4-FFF2-40B4-BE49-F238E27FC236}">
-                <a16:creationId xmlns:a16="http://schemas.microsoft.com/office/drawing/2014/main" id="{6887609A-BB16-47D6-8660-F233CF2EE74A}"/>
+                <a16:creationId xmlns:a16="http://schemas.microsoft.com/office/drawing/2014/main" id="{C875A0FA-613E-4B6C-A847-951C0D0D93CF}"/>
               </a:ext>
             </a:extLst>
           </p:cNvPr>
@@ -16575,7 +16585,7 @@
           <p:cNvPr id="12" name="">
             <a:extLst xmlns:a="http://schemas.openxmlformats.org/drawingml/2006/main">
               <a:ext uri="{FF2B5EF4-FFF2-40B4-BE49-F238E27FC236}">
-                <a16:creationId xmlns:a16="http://schemas.microsoft.com/office/drawing/2014/main" id="{FF32C3CD-FC89-4A34-A24C-DE0320A98180}"/>
+                <a16:creationId xmlns:a16="http://schemas.microsoft.com/office/drawing/2014/main" id="{2AB86B81-7C78-4EDA-A0B1-80F97E02FC1A}"/>
               </a:ext>
             </a:extLst>
           </p:cNvPr>
@@ -16608,7 +16618,7 @@
           <p:cNvPr id="13" name="">
             <a:extLst xmlns:a="http://schemas.openxmlformats.org/drawingml/2006/main">
               <a:ext uri="{FF2B5EF4-FFF2-40B4-BE49-F238E27FC236}">
-                <a16:creationId xmlns:a16="http://schemas.microsoft.com/office/drawing/2014/main" id="{76ECA203-E40B-44A2-9AB6-EF1A898A783C}"/>
+                <a16:creationId xmlns:a16="http://schemas.microsoft.com/office/drawing/2014/main" id="{902E3E13-7701-4899-BFD7-0D0F8B39CA2F}"/>
               </a:ext>
             </a:extLst>
           </p:cNvPr>
@@ -16688,7 +16698,7 @@
           <p:cNvPr id="14" name="">
             <a:extLst xmlns:a="http://schemas.openxmlformats.org/drawingml/2006/main">
               <a:ext uri="{FF2B5EF4-FFF2-40B4-BE49-F238E27FC236}">
-                <a16:creationId xmlns:a16="http://schemas.microsoft.com/office/drawing/2014/main" id="{3832DC54-17C7-4D06-9574-1A632053AB93}"/>
+                <a16:creationId xmlns:a16="http://schemas.microsoft.com/office/drawing/2014/main" id="{16255EF2-E85A-43F5-A8F1-AEEAF9C24182}"/>
               </a:ext>
             </a:extLst>
           </p:cNvPr>
@@ -16791,7 +16801,7 @@
           <p:cNvPr id="15" name="">
             <a:extLst xmlns:a="http://schemas.openxmlformats.org/drawingml/2006/main">
               <a:ext uri="{FF2B5EF4-FFF2-40B4-BE49-F238E27FC236}">
-                <a16:creationId xmlns:a16="http://schemas.microsoft.com/office/drawing/2014/main" id="{0F856338-26AF-4182-9701-EDDD4FDE9D79}"/>
+                <a16:creationId xmlns:a16="http://schemas.microsoft.com/office/drawing/2014/main" id="{80CB47E1-4453-43F2-9983-BE8C6408687F}"/>
               </a:ext>
             </a:extLst>
           </p:cNvPr>
@@ -16824,7 +16834,7 @@
           <p:cNvPr id="16" name="">
             <a:extLst xmlns:a="http://schemas.openxmlformats.org/drawingml/2006/main">
               <a:ext uri="{FF2B5EF4-FFF2-40B4-BE49-F238E27FC236}">
-                <a16:creationId xmlns:a16="http://schemas.microsoft.com/office/drawing/2014/main" id="{E02C66CE-FBD3-4B33-BD14-58A917D4CA45}"/>
+                <a16:creationId xmlns:a16="http://schemas.microsoft.com/office/drawing/2014/main" id="{03D08823-1207-40CC-90B8-DA53245A4545}"/>
               </a:ext>
             </a:extLst>
           </p:cNvPr>
@@ -16904,7 +16914,7 @@
           <p:cNvPr id="17" name="">
             <a:extLst xmlns:a="http://schemas.openxmlformats.org/drawingml/2006/main">
               <a:ext uri="{FF2B5EF4-FFF2-40B4-BE49-F238E27FC236}">
-                <a16:creationId xmlns:a16="http://schemas.microsoft.com/office/drawing/2014/main" id="{DE3379DD-F2C3-43CB-AC8A-2BC702905461}"/>
+                <a16:creationId xmlns:a16="http://schemas.microsoft.com/office/drawing/2014/main" id="{8201C107-98B2-488C-8790-C6661BB53189}"/>
               </a:ext>
             </a:extLst>
           </p:cNvPr>
@@ -17085,7 +17095,7 @@
           <p:cNvPr id="21" name="">
             <a:extLst xmlns:a="http://schemas.openxmlformats.org/drawingml/2006/main">
               <a:ext uri="{FF2B5EF4-FFF2-40B4-BE49-F238E27FC236}">
-                <a16:creationId xmlns:a16="http://schemas.microsoft.com/office/drawing/2014/main" id="{4D9EB0F1-6814-40E7-B3E3-CB3526FA65EC}"/>
+                <a16:creationId xmlns:a16="http://schemas.microsoft.com/office/drawing/2014/main" id="{1117D6EA-6113-4FA1-9883-FCD7A9607484}"/>
               </a:ext>
             </a:extLst>
           </p:cNvPr>
@@ -17142,7 +17152,7 @@
           <p:cNvPr id="22" name="">
             <a:extLst xmlns:a="http://schemas.openxmlformats.org/drawingml/2006/main">
               <a:ext uri="{FF2B5EF4-FFF2-40B4-BE49-F238E27FC236}">
-                <a16:creationId xmlns:a16="http://schemas.microsoft.com/office/drawing/2014/main" id="{8ED286AA-5B0F-4AFC-80DE-4959B5D4E47C}"/>
+                <a16:creationId xmlns:a16="http://schemas.microsoft.com/office/drawing/2014/main" id="{E74CE51D-22E6-4BA1-A6BE-4387A9E99F10}"/>
               </a:ext>
             </a:extLst>
           </p:cNvPr>
@@ -17173,7 +17183,7 @@
           <p:cNvPr id="23" name="">
             <a:extLst xmlns:a="http://schemas.openxmlformats.org/drawingml/2006/main">
               <a:ext uri="{FF2B5EF4-FFF2-40B4-BE49-F238E27FC236}">
-                <a16:creationId xmlns:a16="http://schemas.microsoft.com/office/drawing/2014/main" id="{DD896936-EAFB-42A1-9C5C-885A010FAD84}"/>
+                <a16:creationId xmlns:a16="http://schemas.microsoft.com/office/drawing/2014/main" id="{2F5189A1-F94A-41D2-9206-D26F74CBBB5C}"/>
               </a:ext>
             </a:extLst>
           </p:cNvPr>
@@ -17228,7 +17238,7 @@
     </p:spTree>
     <p:extLst>
       <p:ext uri="{BB962C8B-B14F-4D97-AF65-F5344CB8AC3E}">
-        <p14:creationId xmlns:p14="http://schemas.microsoft.com/office/powerpoint/2010/main" val="651339990"/>
+        <p14:creationId xmlns:p14="http://schemas.microsoft.com/office/powerpoint/2010/main" val="1609656176"/>
       </p:ext>
     </p:extLst>
   </p:cSld>
@@ -17259,7 +17269,7 @@
           <p:cNvPr id="32" name="">
             <a:extLst xmlns:a="http://schemas.openxmlformats.org/drawingml/2006/main">
               <a:ext uri="{FF2B5EF4-FFF2-40B4-BE49-F238E27FC236}">
-                <a16:creationId xmlns:a16="http://schemas.microsoft.com/office/drawing/2014/main" id="{01ABF768-B3A6-43F1-B03D-F1725935840C}"/>
+                <a16:creationId xmlns:a16="http://schemas.microsoft.com/office/drawing/2014/main" id="{8C1D3574-6D4F-4163-A91D-8A040D9F746D}"/>
               </a:ext>
             </a:extLst>
           </p:cNvPr>
@@ -17339,7 +17349,7 @@
           <p:cNvPr id="2" name="">
             <a:extLst xmlns:a="http://schemas.openxmlformats.org/drawingml/2006/main">
               <a:ext uri="{FF2B5EF4-FFF2-40B4-BE49-F238E27FC236}">
-                <a16:creationId xmlns:a16="http://schemas.microsoft.com/office/drawing/2014/main" id="{6192726A-4541-40B4-9543-F7B1D22CAA48}"/>
+                <a16:creationId xmlns:a16="http://schemas.microsoft.com/office/drawing/2014/main" id="{E786CB6A-2DF7-4E22-9C3D-DC281A96DF65}"/>
               </a:ext>
             </a:extLst>
           </p:cNvPr>
@@ -17370,7 +17380,7 @@
           <p:cNvPr id="3" name="">
             <a:extLst xmlns:a="http://schemas.openxmlformats.org/drawingml/2006/main">
               <a:ext uri="{FF2B5EF4-FFF2-40B4-BE49-F238E27FC236}">
-                <a16:creationId xmlns:a16="http://schemas.microsoft.com/office/drawing/2014/main" id="{10AFA2B6-9CB6-45F5-8104-DD82BC4F9613}"/>
+                <a16:creationId xmlns:a16="http://schemas.microsoft.com/office/drawing/2014/main" id="{5B76330E-BB83-42E5-A860-716656783739}"/>
               </a:ext>
             </a:extLst>
           </p:cNvPr>
@@ -17427,7 +17437,7 @@
           <p:cNvPr id="4" name="">
             <a:extLst xmlns:a="http://schemas.openxmlformats.org/drawingml/2006/main">
               <a:ext uri="{FF2B5EF4-FFF2-40B4-BE49-F238E27FC236}">
-                <a16:creationId xmlns:a16="http://schemas.microsoft.com/office/drawing/2014/main" id="{37CB5E65-E02B-4576-B585-FEE9BC31C7A6}"/>
+                <a16:creationId xmlns:a16="http://schemas.microsoft.com/office/drawing/2014/main" id="{ECD91F2D-7FDA-4F6C-820F-63C57E8F8F04}"/>
               </a:ext>
             </a:extLst>
           </p:cNvPr>
@@ -17484,7 +17494,7 @@
           <p:cNvPr id="5" name="">
             <a:extLst xmlns:a="http://schemas.openxmlformats.org/drawingml/2006/main">
               <a:ext uri="{FF2B5EF4-FFF2-40B4-BE49-F238E27FC236}">
-                <a16:creationId xmlns:a16="http://schemas.microsoft.com/office/drawing/2014/main" id="{0D08CB82-4DF1-4FFC-BC63-A6C7B22005C3}"/>
+                <a16:creationId xmlns:a16="http://schemas.microsoft.com/office/drawing/2014/main" id="{D3CABF32-FACD-45B7-B6EB-86CD8EFE9886}"/>
               </a:ext>
             </a:extLst>
           </p:cNvPr>
@@ -17541,7 +17551,7 @@
           <p:cNvPr id="6" name="">
             <a:extLst xmlns:a="http://schemas.openxmlformats.org/drawingml/2006/main">
               <a:ext uri="{FF2B5EF4-FFF2-40B4-BE49-F238E27FC236}">
-                <a16:creationId xmlns:a16="http://schemas.microsoft.com/office/drawing/2014/main" id="{3FF01222-DC52-4B84-B49F-A85AA46D506F}"/>
+                <a16:creationId xmlns:a16="http://schemas.microsoft.com/office/drawing/2014/main" id="{4177584B-51D6-47A4-92FF-7E7F5E7E6693}"/>
               </a:ext>
             </a:extLst>
           </p:cNvPr>
@@ -17598,7 +17608,7 @@
           <p:cNvPr id="7" name="">
             <a:extLst xmlns:a="http://schemas.openxmlformats.org/drawingml/2006/main">
               <a:ext uri="{FF2B5EF4-FFF2-40B4-BE49-F238E27FC236}">
-                <a16:creationId xmlns:a16="http://schemas.microsoft.com/office/drawing/2014/main" id="{8E9437CF-04C2-4FD5-8EE8-4270668EB1DC}"/>
+                <a16:creationId xmlns:a16="http://schemas.microsoft.com/office/drawing/2014/main" id="{63097131-9CDD-4CFA-AA89-56F5F294CF9A}"/>
               </a:ext>
             </a:extLst>
           </p:cNvPr>
@@ -17655,7 +17665,7 @@
           <p:cNvPr id="8" name="">
             <a:extLst xmlns:a="http://schemas.openxmlformats.org/drawingml/2006/main">
               <a:ext uri="{FF2B5EF4-FFF2-40B4-BE49-F238E27FC236}">
-                <a16:creationId xmlns:a16="http://schemas.microsoft.com/office/drawing/2014/main" id="{1DFDE493-CC49-4472-B785-1C1C80DE5FF7}"/>
+                <a16:creationId xmlns:a16="http://schemas.microsoft.com/office/drawing/2014/main" id="{8E93DE9A-8C01-4A5C-B6B7-4485BF847310}"/>
               </a:ext>
             </a:extLst>
           </p:cNvPr>
@@ -17712,7 +17722,7 @@
           <p:cNvPr id="9" name="">
             <a:extLst xmlns:a="http://schemas.openxmlformats.org/drawingml/2006/main">
               <a:ext uri="{FF2B5EF4-FFF2-40B4-BE49-F238E27FC236}">
-                <a16:creationId xmlns:a16="http://schemas.microsoft.com/office/drawing/2014/main" id="{70F026D6-BD59-4B59-B68D-E772938CC7AE}"/>
+                <a16:creationId xmlns:a16="http://schemas.microsoft.com/office/drawing/2014/main" id="{9CB7E5CD-BD57-4087-81A3-A17ADE340B39}"/>
               </a:ext>
             </a:extLst>
           </p:cNvPr>
@@ -17769,7 +17779,7 @@
           <p:cNvPr id="10" name="">
             <a:extLst xmlns:a="http://schemas.openxmlformats.org/drawingml/2006/main">
               <a:ext uri="{FF2B5EF4-FFF2-40B4-BE49-F238E27FC236}">
-                <a16:creationId xmlns:a16="http://schemas.microsoft.com/office/drawing/2014/main" id="{74F34E97-821F-42BC-B27A-F8D019C9E19A}"/>
+                <a16:creationId xmlns:a16="http://schemas.microsoft.com/office/drawing/2014/main" id="{C068A848-ABF6-497A-B7F3-0B02A08B2D3D}"/>
               </a:ext>
             </a:extLst>
           </p:cNvPr>
@@ -17800,7 +17810,7 @@
           <p:cNvPr id="11" name="">
             <a:extLst xmlns:a="http://schemas.openxmlformats.org/drawingml/2006/main">
               <a:ext uri="{FF2B5EF4-FFF2-40B4-BE49-F238E27FC236}">
-                <a16:creationId xmlns:a16="http://schemas.microsoft.com/office/drawing/2014/main" id="{3844B907-9924-4991-8780-FB16C7D470BB}"/>
+                <a16:creationId xmlns:a16="http://schemas.microsoft.com/office/drawing/2014/main" id="{1ABE8123-4A60-43BD-9688-2045E43B0936}"/>
               </a:ext>
             </a:extLst>
           </p:cNvPr>
@@ -17857,7 +17867,7 @@
           <p:cNvPr id="12" name="">
             <a:extLst xmlns:a="http://schemas.openxmlformats.org/drawingml/2006/main">
               <a:ext uri="{FF2B5EF4-FFF2-40B4-BE49-F238E27FC236}">
-                <a16:creationId xmlns:a16="http://schemas.microsoft.com/office/drawing/2014/main" id="{E4F23F36-80DD-47A8-AFBE-CCA72F1B5637}"/>
+                <a16:creationId xmlns:a16="http://schemas.microsoft.com/office/drawing/2014/main" id="{B039B597-CD36-47A1-B647-F4622B946FF5}"/>
               </a:ext>
             </a:extLst>
           </p:cNvPr>
@@ -17914,7 +17924,7 @@
           <p:cNvPr id="13" name="">
             <a:extLst xmlns:a="http://schemas.openxmlformats.org/drawingml/2006/main">
               <a:ext uri="{FF2B5EF4-FFF2-40B4-BE49-F238E27FC236}">
-                <a16:creationId xmlns:a16="http://schemas.microsoft.com/office/drawing/2014/main" id="{AE37F604-3724-4C3C-B9C3-89443951C5E3}"/>
+                <a16:creationId xmlns:a16="http://schemas.microsoft.com/office/drawing/2014/main" id="{6F825A41-90F6-4061-8666-6F28CF82814F}"/>
               </a:ext>
             </a:extLst>
           </p:cNvPr>
@@ -17971,7 +17981,7 @@
           <p:cNvPr id="14" name="">
             <a:extLst xmlns:a="http://schemas.openxmlformats.org/drawingml/2006/main">
               <a:ext uri="{FF2B5EF4-FFF2-40B4-BE49-F238E27FC236}">
-                <a16:creationId xmlns:a16="http://schemas.microsoft.com/office/drawing/2014/main" id="{4BBE2A3B-30E4-41E1-B661-82C717796D3E}"/>
+                <a16:creationId xmlns:a16="http://schemas.microsoft.com/office/drawing/2014/main" id="{132C31C1-6772-4B92-B6B2-4C65DE330D5A}"/>
               </a:ext>
             </a:extLst>
           </p:cNvPr>
@@ -18028,7 +18038,7 @@
           <p:cNvPr id="15" name="">
             <a:extLst xmlns:a="http://schemas.openxmlformats.org/drawingml/2006/main">
               <a:ext uri="{FF2B5EF4-FFF2-40B4-BE49-F238E27FC236}">
-                <a16:creationId xmlns:a16="http://schemas.microsoft.com/office/drawing/2014/main" id="{74DFB657-2240-4B15-8566-C714D69BD59A}"/>
+                <a16:creationId xmlns:a16="http://schemas.microsoft.com/office/drawing/2014/main" id="{87354A19-307F-47C7-90F4-C28F82267FEC}"/>
               </a:ext>
             </a:extLst>
           </p:cNvPr>
@@ -18085,7 +18095,7 @@
           <p:cNvPr id="16" name="">
             <a:extLst xmlns:a="http://schemas.openxmlformats.org/drawingml/2006/main">
               <a:ext uri="{FF2B5EF4-FFF2-40B4-BE49-F238E27FC236}">
-                <a16:creationId xmlns:a16="http://schemas.microsoft.com/office/drawing/2014/main" id="{5C378DE2-B466-4CC1-9238-7E3FB3ACE5D5}"/>
+                <a16:creationId xmlns:a16="http://schemas.microsoft.com/office/drawing/2014/main" id="{A23BB8B1-5C90-43E5-B361-1A6E37D71EFA}"/>
               </a:ext>
             </a:extLst>
           </p:cNvPr>
@@ -18142,7 +18152,7 @@
           <p:cNvPr id="17" name="">
             <a:extLst xmlns:a="http://schemas.openxmlformats.org/drawingml/2006/main">
               <a:ext uri="{FF2B5EF4-FFF2-40B4-BE49-F238E27FC236}">
-                <a16:creationId xmlns:a16="http://schemas.microsoft.com/office/drawing/2014/main" id="{D89E5EB3-12F1-46F6-BE9D-95DF980ECD5C}"/>
+                <a16:creationId xmlns:a16="http://schemas.microsoft.com/office/drawing/2014/main" id="{9334D397-C5E4-428C-9E86-DEDFE05E96FB}"/>
               </a:ext>
             </a:extLst>
           </p:cNvPr>
@@ -18199,7 +18209,7 @@
           <p:cNvPr id="18" name="">
             <a:extLst xmlns:a="http://schemas.openxmlformats.org/drawingml/2006/main">
               <a:ext uri="{FF2B5EF4-FFF2-40B4-BE49-F238E27FC236}">
-                <a16:creationId xmlns:a16="http://schemas.microsoft.com/office/drawing/2014/main" id="{29F558D2-A42C-4B54-B384-9F5DDC23DAD4}"/>
+                <a16:creationId xmlns:a16="http://schemas.microsoft.com/office/drawing/2014/main" id="{1482239B-62C3-4DBD-8D10-D87E2821083D}"/>
               </a:ext>
             </a:extLst>
           </p:cNvPr>
@@ -18256,7 +18266,7 @@
           <p:cNvPr id="19" name="">
             <a:extLst xmlns:a="http://schemas.openxmlformats.org/drawingml/2006/main">
               <a:ext uri="{FF2B5EF4-FFF2-40B4-BE49-F238E27FC236}">
-                <a16:creationId xmlns:a16="http://schemas.microsoft.com/office/drawing/2014/main" id="{BF2CA8E6-7547-4BD0-BA3D-3E2E3F037510}"/>
+                <a16:creationId xmlns:a16="http://schemas.microsoft.com/office/drawing/2014/main" id="{7E0B86F3-F4EF-4141-AEF0-1C6EA8D2E95C}"/>
               </a:ext>
             </a:extLst>
           </p:cNvPr>
@@ -18313,7 +18323,7 @@
           <p:cNvPr id="20" name="">
             <a:extLst xmlns:a="http://schemas.openxmlformats.org/drawingml/2006/main">
               <a:ext uri="{FF2B5EF4-FFF2-40B4-BE49-F238E27FC236}">
-                <a16:creationId xmlns:a16="http://schemas.microsoft.com/office/drawing/2014/main" id="{599C27A7-919D-4F30-9C82-8A6B8D5B98C8}"/>
+                <a16:creationId xmlns:a16="http://schemas.microsoft.com/office/drawing/2014/main" id="{08972BDA-6B66-4DE3-87F9-841754FDA988}"/>
               </a:ext>
             </a:extLst>
           </p:cNvPr>
@@ -18370,7 +18380,7 @@
           <p:cNvPr id="21" name="">
             <a:extLst xmlns:a="http://schemas.openxmlformats.org/drawingml/2006/main">
               <a:ext uri="{FF2B5EF4-FFF2-40B4-BE49-F238E27FC236}">
-                <a16:creationId xmlns:a16="http://schemas.microsoft.com/office/drawing/2014/main" id="{D5705578-2841-413B-993F-A55D9F00EC63}"/>
+                <a16:creationId xmlns:a16="http://schemas.microsoft.com/office/drawing/2014/main" id="{EAF32317-CAA6-41D1-A69C-546F92AACFA7}"/>
               </a:ext>
             </a:extLst>
           </p:cNvPr>
@@ -18427,7 +18437,7 @@
           <p:cNvPr id="22" name="">
             <a:extLst xmlns:a="http://schemas.openxmlformats.org/drawingml/2006/main">
               <a:ext uri="{FF2B5EF4-FFF2-40B4-BE49-F238E27FC236}">
-                <a16:creationId xmlns:a16="http://schemas.microsoft.com/office/drawing/2014/main" id="{CFE1A348-308E-4546-A686-B6B53A65C9DF}"/>
+                <a16:creationId xmlns:a16="http://schemas.microsoft.com/office/drawing/2014/main" id="{A70A2A55-F637-46F2-A2FA-9AAE0FA6C8C5}"/>
               </a:ext>
             </a:extLst>
           </p:cNvPr>
@@ -18484,7 +18494,7 @@
           <p:cNvPr id="23" name="">
             <a:extLst xmlns:a="http://schemas.openxmlformats.org/drawingml/2006/main">
               <a:ext uri="{FF2B5EF4-FFF2-40B4-BE49-F238E27FC236}">
-                <a16:creationId xmlns:a16="http://schemas.microsoft.com/office/drawing/2014/main" id="{BA0BC734-0027-4348-97D3-7825C1AE6798}"/>
+                <a16:creationId xmlns:a16="http://schemas.microsoft.com/office/drawing/2014/main" id="{DA641BD9-C7DE-4BDE-995D-4568D72F96FC}"/>
               </a:ext>
             </a:extLst>
           </p:cNvPr>
@@ -18541,7 +18551,7 @@
           <p:cNvPr id="24" name="">
             <a:extLst xmlns:a="http://schemas.openxmlformats.org/drawingml/2006/main">
               <a:ext uri="{FF2B5EF4-FFF2-40B4-BE49-F238E27FC236}">
-                <a16:creationId xmlns:a16="http://schemas.microsoft.com/office/drawing/2014/main" id="{83692943-6133-4180-80A5-68E63663E426}"/>
+                <a16:creationId xmlns:a16="http://schemas.microsoft.com/office/drawing/2014/main" id="{A8CB017E-EA05-4735-A200-7F54FEEFC37F}"/>
               </a:ext>
             </a:extLst>
           </p:cNvPr>
@@ -18598,7 +18608,7 @@
           <p:cNvPr id="25" name="">
             <a:extLst xmlns:a="http://schemas.openxmlformats.org/drawingml/2006/main">
               <a:ext uri="{FF2B5EF4-FFF2-40B4-BE49-F238E27FC236}">
-                <a16:creationId xmlns:a16="http://schemas.microsoft.com/office/drawing/2014/main" id="{28B024ED-6D0F-4985-8209-95B7288B4BB3}"/>
+                <a16:creationId xmlns:a16="http://schemas.microsoft.com/office/drawing/2014/main" id="{255AE024-7B31-4ECB-9E34-086E94788480}"/>
               </a:ext>
             </a:extLst>
           </p:cNvPr>
@@ -18655,7 +18665,7 @@
           <p:cNvPr id="26" name="">
             <a:extLst xmlns:a="http://schemas.openxmlformats.org/drawingml/2006/main">
               <a:ext uri="{FF2B5EF4-FFF2-40B4-BE49-F238E27FC236}">
-                <a16:creationId xmlns:a16="http://schemas.microsoft.com/office/drawing/2014/main" id="{A8F53A12-910D-4264-9B1B-F3A7787FFDE0}"/>
+                <a16:creationId xmlns:a16="http://schemas.microsoft.com/office/drawing/2014/main" id="{3CDC307A-2DD5-4933-981C-25B1F35058B5}"/>
               </a:ext>
             </a:extLst>
           </p:cNvPr>
@@ -18712,7 +18722,7 @@
           <p:cNvPr id="27" name="">
             <a:extLst xmlns:a="http://schemas.openxmlformats.org/drawingml/2006/main">
               <a:ext uri="{FF2B5EF4-FFF2-40B4-BE49-F238E27FC236}">
-                <a16:creationId xmlns:a16="http://schemas.microsoft.com/office/drawing/2014/main" id="{912B34E9-00BC-4714-AE0B-8246C2365D6B}"/>
+                <a16:creationId xmlns:a16="http://schemas.microsoft.com/office/drawing/2014/main" id="{D037374D-2D8A-4CD9-9F79-FD722F5B021C}"/>
               </a:ext>
             </a:extLst>
           </p:cNvPr>
@@ -18769,7 +18779,7 @@
           <p:cNvPr id="28" name="">
             <a:extLst xmlns:a="http://schemas.openxmlformats.org/drawingml/2006/main">
               <a:ext uri="{FF2B5EF4-FFF2-40B4-BE49-F238E27FC236}">
-                <a16:creationId xmlns:a16="http://schemas.microsoft.com/office/drawing/2014/main" id="{62B6B943-A8BB-445A-81D7-DC5A87D311DF}"/>
+                <a16:creationId xmlns:a16="http://schemas.microsoft.com/office/drawing/2014/main" id="{6FF33164-DBD4-438E-B503-06E78DFC4372}"/>
               </a:ext>
             </a:extLst>
           </p:cNvPr>
@@ -18826,7 +18836,7 @@
           <p:cNvPr id="29" name="">
             <a:extLst xmlns:a="http://schemas.openxmlformats.org/drawingml/2006/main">
               <a:ext uri="{FF2B5EF4-FFF2-40B4-BE49-F238E27FC236}">
-                <a16:creationId xmlns:a16="http://schemas.microsoft.com/office/drawing/2014/main" id="{9C538ACF-1782-490E-8FC8-780F574F004C}"/>
+                <a16:creationId xmlns:a16="http://schemas.microsoft.com/office/drawing/2014/main" id="{754229C7-F408-47FE-BC3A-7B89F5805CEA}"/>
               </a:ext>
             </a:extLst>
           </p:cNvPr>
@@ -18857,7 +18867,7 @@
           <p:cNvPr id="30" name="">
             <a:extLst xmlns:a="http://schemas.openxmlformats.org/drawingml/2006/main">
               <a:ext uri="{FF2B5EF4-FFF2-40B4-BE49-F238E27FC236}">
-                <a16:creationId xmlns:a16="http://schemas.microsoft.com/office/drawing/2014/main" id="{D3608966-998F-4258-8CD9-BBE7C3AE9759}"/>
+                <a16:creationId xmlns:a16="http://schemas.microsoft.com/office/drawing/2014/main" id="{3CE0FA7F-1F1D-409B-9C08-29903271B469}"/>
               </a:ext>
             </a:extLst>
           </p:cNvPr>
@@ -18914,7 +18924,7 @@
           <p:cNvPr id="31" name="">
             <a:extLst xmlns:a="http://schemas.openxmlformats.org/drawingml/2006/main">
               <a:ext uri="{FF2B5EF4-FFF2-40B4-BE49-F238E27FC236}">
-                <a16:creationId xmlns:a16="http://schemas.microsoft.com/office/drawing/2014/main" id="{51BF388A-E6F2-4104-AD59-D3F67281B2C8}"/>
+                <a16:creationId xmlns:a16="http://schemas.microsoft.com/office/drawing/2014/main" id="{9869D33C-B8AE-4958-BA24-E78CD0E002B3}"/>
               </a:ext>
             </a:extLst>
           </p:cNvPr>
@@ -18969,7 +18979,7 @@
     </p:spTree>
     <p:extLst>
       <p:ext uri="{BB962C8B-B14F-4D97-AF65-F5344CB8AC3E}">
-        <p14:creationId xmlns:p14="http://schemas.microsoft.com/office/powerpoint/2010/main" val="37158302"/>
+        <p14:creationId xmlns:p14="http://schemas.microsoft.com/office/powerpoint/2010/main" val="325607186"/>
       </p:ext>
     </p:extLst>
   </p:cSld>
@@ -19000,7 +19010,7 @@
           <p:cNvPr id="13" name="">
             <a:extLst xmlns:a="http://schemas.openxmlformats.org/drawingml/2006/main">
               <a:ext uri="{FF2B5EF4-FFF2-40B4-BE49-F238E27FC236}">
-                <a16:creationId xmlns:a16="http://schemas.microsoft.com/office/drawing/2014/main" id="{A0A2160D-6EA6-48A1-81CC-6CD987A0B36B}"/>
+                <a16:creationId xmlns:a16="http://schemas.microsoft.com/office/drawing/2014/main" id="{7AE9B6A7-A90F-4EB6-8778-DB1D7E155BD3}"/>
               </a:ext>
             </a:extLst>
           </p:cNvPr>
@@ -19057,7 +19067,7 @@
           <p:cNvPr id="2" name="">
             <a:extLst xmlns:a="http://schemas.openxmlformats.org/drawingml/2006/main">
               <a:ext uri="{FF2B5EF4-FFF2-40B4-BE49-F238E27FC236}">
-                <a16:creationId xmlns:a16="http://schemas.microsoft.com/office/drawing/2014/main" id="{BD2E84F7-BE80-4525-BC99-A6410F1DA3F7}"/>
+                <a16:creationId xmlns:a16="http://schemas.microsoft.com/office/drawing/2014/main" id="{EC11FADB-C515-40EC-B3B7-494ED163CC22}"/>
               </a:ext>
             </a:extLst>
           </p:cNvPr>
@@ -19088,7 +19098,7 @@
           <p:cNvPr id="3" name="">
             <a:extLst xmlns:a="http://schemas.openxmlformats.org/drawingml/2006/main">
               <a:ext uri="{FF2B5EF4-FFF2-40B4-BE49-F238E27FC236}">
-                <a16:creationId xmlns:a16="http://schemas.microsoft.com/office/drawing/2014/main" id="{CAEC155B-26CE-43EB-A0D5-3A513D48FA70}"/>
+                <a16:creationId xmlns:a16="http://schemas.microsoft.com/office/drawing/2014/main" id="{526A9B82-B63E-4BEE-95BF-141FBB4738AA}"/>
               </a:ext>
             </a:extLst>
           </p:cNvPr>
@@ -19145,7 +19155,7 @@
           <p:cNvPr id="4" name="">
             <a:extLst xmlns:a="http://schemas.openxmlformats.org/drawingml/2006/main">
               <a:ext uri="{FF2B5EF4-FFF2-40B4-BE49-F238E27FC236}">
-                <a16:creationId xmlns:a16="http://schemas.microsoft.com/office/drawing/2014/main" id="{10FF0476-119E-47F3-BB9C-182B3CC78C5C}"/>
+                <a16:creationId xmlns:a16="http://schemas.microsoft.com/office/drawing/2014/main" id="{675D2CFE-C711-4569-A87F-6038CD025B7D}"/>
               </a:ext>
             </a:extLst>
           </p:cNvPr>
@@ -19202,7 +19212,7 @@
           <p:cNvPr id="5" name="">
             <a:extLst xmlns:a="http://schemas.openxmlformats.org/drawingml/2006/main">
               <a:ext uri="{FF2B5EF4-FFF2-40B4-BE49-F238E27FC236}">
-                <a16:creationId xmlns:a16="http://schemas.microsoft.com/office/drawing/2014/main" id="{A6B5BE9C-C3F5-498A-AEE1-131CD7228D52}"/>
+                <a16:creationId xmlns:a16="http://schemas.microsoft.com/office/drawing/2014/main" id="{599889B8-0690-4AE5-B7B2-468E8E3B5AB9}"/>
               </a:ext>
             </a:extLst>
           </p:cNvPr>
@@ -19259,7 +19269,7 @@
           <p:cNvPr id="6" name="">
             <a:extLst xmlns:a="http://schemas.openxmlformats.org/drawingml/2006/main">
               <a:ext uri="{FF2B5EF4-FFF2-40B4-BE49-F238E27FC236}">
-                <a16:creationId xmlns:a16="http://schemas.microsoft.com/office/drawing/2014/main" id="{0C4003EA-D2B0-431A-B446-A9276DDCDAB9}"/>
+                <a16:creationId xmlns:a16="http://schemas.microsoft.com/office/drawing/2014/main" id="{ABAC7CE7-8FC1-4EFA-A2E9-62D5C2C034CB}"/>
               </a:ext>
             </a:extLst>
           </p:cNvPr>
@@ -19316,7 +19326,7 @@
           <p:cNvPr id="7" name="">
             <a:extLst xmlns:a="http://schemas.openxmlformats.org/drawingml/2006/main">
               <a:ext uri="{FF2B5EF4-FFF2-40B4-BE49-F238E27FC236}">
-                <a16:creationId xmlns:a16="http://schemas.microsoft.com/office/drawing/2014/main" id="{3C0808F7-36A6-46DB-B91C-0E07244C7C2A}"/>
+                <a16:creationId xmlns:a16="http://schemas.microsoft.com/office/drawing/2014/main" id="{D4CE2CE5-8CD3-4A06-886B-1B062D47A0AD}"/>
               </a:ext>
             </a:extLst>
           </p:cNvPr>
@@ -19373,7 +19383,7 @@
           <p:cNvPr id="8" name="">
             <a:extLst xmlns:a="http://schemas.openxmlformats.org/drawingml/2006/main">
               <a:ext uri="{FF2B5EF4-FFF2-40B4-BE49-F238E27FC236}">
-                <a16:creationId xmlns:a16="http://schemas.microsoft.com/office/drawing/2014/main" id="{04E0A51F-135B-47D7-8B99-B1CAE8378C9C}"/>
+                <a16:creationId xmlns:a16="http://schemas.microsoft.com/office/drawing/2014/main" id="{3AD9B918-B2F0-47F5-82FA-9FE7542136BF}"/>
               </a:ext>
             </a:extLst>
           </p:cNvPr>
@@ -19430,7 +19440,7 @@
           <p:cNvPr id="9" name="">
             <a:extLst xmlns:a="http://schemas.openxmlformats.org/drawingml/2006/main">
               <a:ext uri="{FF2B5EF4-FFF2-40B4-BE49-F238E27FC236}">
-                <a16:creationId xmlns:a16="http://schemas.microsoft.com/office/drawing/2014/main" id="{0F7CE378-E27A-47CF-9C87-324C3E5920D1}"/>
+                <a16:creationId xmlns:a16="http://schemas.microsoft.com/office/drawing/2014/main" id="{560BAF99-8D0C-4F8A-B293-BBA4940E800D}"/>
               </a:ext>
             </a:extLst>
           </p:cNvPr>
@@ -19487,7 +19497,7 @@
           <p:cNvPr id="10" name="">
             <a:extLst xmlns:a="http://schemas.openxmlformats.org/drawingml/2006/main">
               <a:ext uri="{FF2B5EF4-FFF2-40B4-BE49-F238E27FC236}">
-                <a16:creationId xmlns:a16="http://schemas.microsoft.com/office/drawing/2014/main" id="{0C10A195-B033-47DC-8E04-DDD83FBC00B6}"/>
+                <a16:creationId xmlns:a16="http://schemas.microsoft.com/office/drawing/2014/main" id="{3F438168-3A45-4E2F-8972-615039320EDD}"/>
               </a:ext>
             </a:extLst>
           </p:cNvPr>
@@ -19544,7 +19554,7 @@
           <p:cNvPr id="11" name="">
             <a:extLst xmlns:a="http://schemas.openxmlformats.org/drawingml/2006/main">
               <a:ext uri="{FF2B5EF4-FFF2-40B4-BE49-F238E27FC236}">
-                <a16:creationId xmlns:a16="http://schemas.microsoft.com/office/drawing/2014/main" id="{2E4F82FE-B038-4688-A1A1-ADCCDD8B56EA}"/>
+                <a16:creationId xmlns:a16="http://schemas.microsoft.com/office/drawing/2014/main" id="{953A5C78-1E26-4460-8B1E-68D1BB5D39D2}"/>
               </a:ext>
             </a:extLst>
           </p:cNvPr>
@@ -19575,7 +19585,7 @@
           <p:cNvPr id="12" name="">
             <a:extLst xmlns:a="http://schemas.openxmlformats.org/drawingml/2006/main">
               <a:ext uri="{FF2B5EF4-FFF2-40B4-BE49-F238E27FC236}">
-                <a16:creationId xmlns:a16="http://schemas.microsoft.com/office/drawing/2014/main" id="{7062B5D2-E45D-4163-8BBE-2E35E65B238A}"/>
+                <a16:creationId xmlns:a16="http://schemas.microsoft.com/office/drawing/2014/main" id="{E1515BF2-D057-474E-AEA0-EAEA85AD2C7B}"/>
               </a:ext>
             </a:extLst>
           </p:cNvPr>
@@ -19630,7 +19640,7 @@
     </p:spTree>
     <p:extLst>
       <p:ext uri="{BB962C8B-B14F-4D97-AF65-F5344CB8AC3E}">
-        <p14:creationId xmlns:p14="http://schemas.microsoft.com/office/powerpoint/2010/main" val="1010104369"/>
+        <p14:creationId xmlns:p14="http://schemas.microsoft.com/office/powerpoint/2010/main" val="377141941"/>
       </p:ext>
     </p:extLst>
   </p:cSld>
@@ -19661,7 +19671,7 @@
           <p:cNvPr id="19" name="">
             <a:extLst xmlns:a="http://schemas.openxmlformats.org/drawingml/2006/main">
               <a:ext uri="{FF2B5EF4-FFF2-40B4-BE49-F238E27FC236}">
-                <a16:creationId xmlns:a16="http://schemas.microsoft.com/office/drawing/2014/main" id="{7F8C494D-50CA-4A95-B9FF-56628330FF0C}"/>
+                <a16:creationId xmlns:a16="http://schemas.microsoft.com/office/drawing/2014/main" id="{4F950A4C-7639-4709-BD4A-827D4997A321}"/>
               </a:ext>
             </a:extLst>
           </p:cNvPr>
@@ -19718,7 +19728,7 @@
           <p:cNvPr id="2" name="">
             <a:extLst xmlns:a="http://schemas.openxmlformats.org/drawingml/2006/main">
               <a:ext uri="{FF2B5EF4-FFF2-40B4-BE49-F238E27FC236}">
-                <a16:creationId xmlns:a16="http://schemas.microsoft.com/office/drawing/2014/main" id="{C52A8733-7B72-4C7B-BCC3-A8B3D37F7F36}"/>
+                <a16:creationId xmlns:a16="http://schemas.microsoft.com/office/drawing/2014/main" id="{3B5D382E-3C3B-4294-8513-3318BF94DB28}"/>
               </a:ext>
             </a:extLst>
           </p:cNvPr>
@@ -19749,7 +19759,7 @@
           <p:cNvPr id="3" name="">
             <a:extLst xmlns:a="http://schemas.openxmlformats.org/drawingml/2006/main">
               <a:ext uri="{FF2B5EF4-FFF2-40B4-BE49-F238E27FC236}">
-                <a16:creationId xmlns:a16="http://schemas.microsoft.com/office/drawing/2014/main" id="{73580599-876F-458E-B099-BCC545D2674E}"/>
+                <a16:creationId xmlns:a16="http://schemas.microsoft.com/office/drawing/2014/main" id="{AD1DDAEC-721B-403D-8D9B-FAC1617E7459}"/>
               </a:ext>
             </a:extLst>
           </p:cNvPr>
@@ -19806,7 +19816,7 @@
           <p:cNvPr id="4" name="">
             <a:extLst xmlns:a="http://schemas.openxmlformats.org/drawingml/2006/main">
               <a:ext uri="{FF2B5EF4-FFF2-40B4-BE49-F238E27FC236}">
-                <a16:creationId xmlns:a16="http://schemas.microsoft.com/office/drawing/2014/main" id="{661075AC-F3EA-4AF2-B76F-0E37CBDF5ED3}"/>
+                <a16:creationId xmlns:a16="http://schemas.microsoft.com/office/drawing/2014/main" id="{7FCDD981-044A-48AB-B6FC-ED0BE1C441C8}"/>
               </a:ext>
             </a:extLst>
           </p:cNvPr>
@@ -19863,7 +19873,7 @@
           <p:cNvPr id="5" name="">
             <a:extLst xmlns:a="http://schemas.openxmlformats.org/drawingml/2006/main">
               <a:ext uri="{FF2B5EF4-FFF2-40B4-BE49-F238E27FC236}">
-                <a16:creationId xmlns:a16="http://schemas.microsoft.com/office/drawing/2014/main" id="{4B44D3D5-103F-40CC-A5EA-A505964EC26E}"/>
+                <a16:creationId xmlns:a16="http://schemas.microsoft.com/office/drawing/2014/main" id="{6C96F0E4-5E4C-4793-81F9-A5E1B7D92278}"/>
               </a:ext>
             </a:extLst>
           </p:cNvPr>
@@ -19943,7 +19953,7 @@
           <p:cNvPr id="6" name="">
             <a:extLst xmlns:a="http://schemas.openxmlformats.org/drawingml/2006/main">
               <a:ext uri="{FF2B5EF4-FFF2-40B4-BE49-F238E27FC236}">
-                <a16:creationId xmlns:a16="http://schemas.microsoft.com/office/drawing/2014/main" id="{456BEAA9-8395-4FE8-B6CB-C15F989A68AE}"/>
+                <a16:creationId xmlns:a16="http://schemas.microsoft.com/office/drawing/2014/main" id="{A13D70CE-7FEC-4163-8799-2B51009C4020}"/>
               </a:ext>
             </a:extLst>
           </p:cNvPr>
@@ -20000,7 +20010,7 @@
           <p:cNvPr id="7" name="">
             <a:extLst xmlns:a="http://schemas.openxmlformats.org/drawingml/2006/main">
               <a:ext uri="{FF2B5EF4-FFF2-40B4-BE49-F238E27FC236}">
-                <a16:creationId xmlns:a16="http://schemas.microsoft.com/office/drawing/2014/main" id="{7DCE09A8-757A-4733-B53E-273B14B08220}"/>
+                <a16:creationId xmlns:a16="http://schemas.microsoft.com/office/drawing/2014/main" id="{A94E690B-1BEB-4F17-8E5D-8C669E07D654}"/>
               </a:ext>
             </a:extLst>
           </p:cNvPr>
@@ -20033,7 +20043,7 @@
           <p:cNvPr id="8" name="">
             <a:extLst xmlns:a="http://schemas.openxmlformats.org/drawingml/2006/main">
               <a:ext uri="{FF2B5EF4-FFF2-40B4-BE49-F238E27FC236}">
-                <a16:creationId xmlns:a16="http://schemas.microsoft.com/office/drawing/2014/main" id="{45B5CBDE-FB4C-4FD9-884C-ADC4B8AE34D7}"/>
+                <a16:creationId xmlns:a16="http://schemas.microsoft.com/office/drawing/2014/main" id="{B0E922DA-8288-408B-B6CD-E1B1EB36E4A7}"/>
               </a:ext>
             </a:extLst>
           </p:cNvPr>
@@ -20090,7 +20100,7 @@
           <p:cNvPr id="9" name="">
             <a:extLst xmlns:a="http://schemas.openxmlformats.org/drawingml/2006/main">
               <a:ext uri="{FF2B5EF4-FFF2-40B4-BE49-F238E27FC236}">
-                <a16:creationId xmlns:a16="http://schemas.microsoft.com/office/drawing/2014/main" id="{D3F13BD8-4B25-4D50-A138-F3A75387CA16}"/>
+                <a16:creationId xmlns:a16="http://schemas.microsoft.com/office/drawing/2014/main" id="{C0826683-5AC5-46C8-B37F-5B2D0894C500}"/>
               </a:ext>
             </a:extLst>
           </p:cNvPr>
@@ -20123,7 +20133,7 @@
           <p:cNvPr id="10" name="">
             <a:extLst xmlns:a="http://schemas.openxmlformats.org/drawingml/2006/main">
               <a:ext uri="{FF2B5EF4-FFF2-40B4-BE49-F238E27FC236}">
-                <a16:creationId xmlns:a16="http://schemas.microsoft.com/office/drawing/2014/main" id="{9F3D225B-FF37-451C-B3D2-C5A9A44116BC}"/>
+                <a16:creationId xmlns:a16="http://schemas.microsoft.com/office/drawing/2014/main" id="{27141085-DD8A-4ECB-AB57-C6E742F00050}"/>
               </a:ext>
             </a:extLst>
           </p:cNvPr>
@@ -20180,7 +20190,7 @@
           <p:cNvPr id="11" name="">
             <a:extLst xmlns:a="http://schemas.openxmlformats.org/drawingml/2006/main">
               <a:ext uri="{FF2B5EF4-FFF2-40B4-BE49-F238E27FC236}">
-                <a16:creationId xmlns:a16="http://schemas.microsoft.com/office/drawing/2014/main" id="{F47B2249-DD2E-411C-813D-1F2A9FFC53A5}"/>
+                <a16:creationId xmlns:a16="http://schemas.microsoft.com/office/drawing/2014/main" id="{3649D383-FD8E-4E5F-8CAA-F3A196C4E597}"/>
               </a:ext>
             </a:extLst>
           </p:cNvPr>
@@ -20237,7 +20247,7 @@
           <p:cNvPr id="12" name="">
             <a:extLst xmlns:a="http://schemas.openxmlformats.org/drawingml/2006/main">
               <a:ext uri="{FF2B5EF4-FFF2-40B4-BE49-F238E27FC236}">
-                <a16:creationId xmlns:a16="http://schemas.microsoft.com/office/drawing/2014/main" id="{5E4F96D2-260C-4BA6-99B0-3A500BB38AB7}"/>
+                <a16:creationId xmlns:a16="http://schemas.microsoft.com/office/drawing/2014/main" id="{1B80E947-5C83-4E02-9A79-0DE675D742D1}"/>
               </a:ext>
             </a:extLst>
           </p:cNvPr>
@@ -20294,7 +20304,7 @@
           <p:cNvPr id="13" name="">
             <a:extLst xmlns:a="http://schemas.openxmlformats.org/drawingml/2006/main">
               <a:ext uri="{FF2B5EF4-FFF2-40B4-BE49-F238E27FC236}">
-                <a16:creationId xmlns:a16="http://schemas.microsoft.com/office/drawing/2014/main" id="{DDFEDB49-19A4-46A5-9FE0-67AB4B879EC9}"/>
+                <a16:creationId xmlns:a16="http://schemas.microsoft.com/office/drawing/2014/main" id="{512222E7-AD88-4FBD-BF35-04EBDB697AB9}"/>
               </a:ext>
             </a:extLst>
           </p:cNvPr>
@@ -20351,7 +20361,7 @@
           <p:cNvPr id="14" name="">
             <a:extLst xmlns:a="http://schemas.openxmlformats.org/drawingml/2006/main">
               <a:ext uri="{FF2B5EF4-FFF2-40B4-BE49-F238E27FC236}">
-                <a16:creationId xmlns:a16="http://schemas.microsoft.com/office/drawing/2014/main" id="{0B2E479C-64AE-48F3-821D-A19ED4B7EBB0}"/>
+                <a16:creationId xmlns:a16="http://schemas.microsoft.com/office/drawing/2014/main" id="{DA682149-530A-494A-A454-026C97A40583}"/>
               </a:ext>
             </a:extLst>
           </p:cNvPr>
@@ -20408,7 +20418,7 @@
           <p:cNvPr id="15" name="">
             <a:extLst xmlns:a="http://schemas.openxmlformats.org/drawingml/2006/main">
               <a:ext uri="{FF2B5EF4-FFF2-40B4-BE49-F238E27FC236}">
-                <a16:creationId xmlns:a16="http://schemas.microsoft.com/office/drawing/2014/main" id="{151B41DD-4AE9-418E-BB96-C72D2CDE7AA3}"/>
+                <a16:creationId xmlns:a16="http://schemas.microsoft.com/office/drawing/2014/main" id="{2F9BA2C4-F55A-4C35-BB56-B70C7C28717D}"/>
               </a:ext>
             </a:extLst>
           </p:cNvPr>
@@ -20441,7 +20451,7 @@
           <p:cNvPr id="16" name="">
             <a:extLst xmlns:a="http://schemas.openxmlformats.org/drawingml/2006/main">
               <a:ext uri="{FF2B5EF4-FFF2-40B4-BE49-F238E27FC236}">
-                <a16:creationId xmlns:a16="http://schemas.microsoft.com/office/drawing/2014/main" id="{69E1FAB0-0357-4E94-BFC4-E03CE4F00B32}"/>
+                <a16:creationId xmlns:a16="http://schemas.microsoft.com/office/drawing/2014/main" id="{7C5C0FF7-B135-46A9-A815-8DFCA8E18B4E}"/>
               </a:ext>
             </a:extLst>
           </p:cNvPr>
@@ -20498,7 +20508,7 @@
           <p:cNvPr id="17" name="">
             <a:extLst xmlns:a="http://schemas.openxmlformats.org/drawingml/2006/main">
               <a:ext uri="{FF2B5EF4-FFF2-40B4-BE49-F238E27FC236}">
-                <a16:creationId xmlns:a16="http://schemas.microsoft.com/office/drawing/2014/main" id="{0BF8BF89-C90D-4926-AF0F-C5BC7B9E8363}"/>
+                <a16:creationId xmlns:a16="http://schemas.microsoft.com/office/drawing/2014/main" id="{754276ED-966F-4BB2-9D48-7F39E7B9594A}"/>
               </a:ext>
             </a:extLst>
           </p:cNvPr>
@@ -20529,7 +20539,7 @@
           <p:cNvPr id="18" name="">
             <a:extLst xmlns:a="http://schemas.openxmlformats.org/drawingml/2006/main">
               <a:ext uri="{FF2B5EF4-FFF2-40B4-BE49-F238E27FC236}">
-                <a16:creationId xmlns:a16="http://schemas.microsoft.com/office/drawing/2014/main" id="{981E2074-E953-44BD-8880-780FE023CB17}"/>
+                <a16:creationId xmlns:a16="http://schemas.microsoft.com/office/drawing/2014/main" id="{AE7835B7-7488-4BFA-89AA-45249531221C}"/>
               </a:ext>
             </a:extLst>
           </p:cNvPr>
@@ -20584,7 +20594,7 @@
     </p:spTree>
     <p:extLst>
       <p:ext uri="{BB962C8B-B14F-4D97-AF65-F5344CB8AC3E}">
-        <p14:creationId xmlns:p14="http://schemas.microsoft.com/office/powerpoint/2010/main" val="615758645"/>
+        <p14:creationId xmlns:p14="http://schemas.microsoft.com/office/powerpoint/2010/main" val="764084816"/>
       </p:ext>
     </p:extLst>
   </p:cSld>

--- a/assets/presentations/pmday-2026/ai-changes-both-sides.pptx
+++ b/assets/presentations/pmday-2026/ai-changes-both-sides.pptx
@@ -2,26 +2,26 @@
 <file path=ppt/presentation.xml><?xml version="1.0" encoding="utf-8"?>
 <p:presentation xmlns:p="http://schemas.openxmlformats.org/presentationml/2006/main" xmlns:r="http://schemas.openxmlformats.org/officeDocument/2006/relationships" embedTrueTypeFonts="1" saveSubsetFonts="0">
   <p:sldMasterIdLst>
-    <p:sldMasterId id="2147483648" r:id="R3eef2fa9813446d4"/>
+    <p:sldMasterId id="2147483648" r:id="R6afd41ce6f5a43ce"/>
   </p:sldMasterIdLst>
   <p:notesMasterIdLst>
-    <p:notesMasterId r:id="R7ba17766cd4140e1"/>
+    <p:notesMasterId r:id="R08fc7b9174bb458c"/>
   </p:notesMasterIdLst>
   <p:sldIdLst>
-    <p:sldId id="256" r:id="R1fc5ceff0d214e9f"/>
-    <p:sldId id="257" r:id="R4f26e664c9f642fe"/>
-    <p:sldId id="258" r:id="R752e4a5b00d94569"/>
-    <p:sldId id="259" r:id="Raf33ad7148034d5f"/>
-    <p:sldId id="260" r:id="R1061c5a404704fa7"/>
-    <p:sldId id="261" r:id="Rceb1ebe6c70845d9"/>
-    <p:sldId id="262" r:id="Rdb0539ebbce346b6"/>
-    <p:sldId id="263" r:id="R632700a7e1794bff"/>
-    <p:sldId id="264" r:id="Rc89757a79a0f4424"/>
-    <p:sldId id="265" r:id="R6e9d3855611c4e1f"/>
-    <p:sldId id="266" r:id="Rba6c127794da48c4"/>
-    <p:sldId id="267" r:id="R754bfb2a41574caf"/>
-    <p:sldId id="268" r:id="Re40d839d12f54637"/>
-    <p:sldId id="269" r:id="R7f07d1b462f84a01"/>
+    <p:sldId id="256" r:id="R6ae962ef92de4a21"/>
+    <p:sldId id="257" r:id="R5c1c812a31c84db8"/>
+    <p:sldId id="258" r:id="Rdfa92d576924486e"/>
+    <p:sldId id="259" r:id="Ra647f649e2a44f03"/>
+    <p:sldId id="260" r:id="Rda6307b5ae98413f"/>
+    <p:sldId id="261" r:id="R58aa99502ade4622"/>
+    <p:sldId id="262" r:id="R76537c50ea684176"/>
+    <p:sldId id="263" r:id="R17ca6d163abf45a6"/>
+    <p:sldId id="264" r:id="Rdf974524e17643b4"/>
+    <p:sldId id="265" r:id="Rd04c11ffbafa4a8c"/>
+    <p:sldId id="266" r:id="Rcc1f2a6bb41747a9"/>
+    <p:sldId id="267" r:id="R9e61755143924d56"/>
+    <p:sldId id="268" r:id="R797166bce4be48c6"/>
+    <p:sldId id="269" r:id="R1935d7ede7764753"/>
   </p:sldIdLst>
   <p:sldSz cx="12192000" cy="6858000"/>
   <p:notesSz cx="6858000" cy="9144000"/>
@@ -562,6 +562,21 @@
           </a:p>
           <a:p xmlns:a="http://schemas.openxmlformats.org/drawingml/2006/main">
             <a:r>
+              <a:t>Що саме змінюється в QA. Golden Set — версіонований набір звичайних, крайових, adversarial і business-critical сценаріїв з очікуваними властивостями змісту та прикладами неприйнятного результату. Це інструмент вимірювання: він сам може бути неповним, застарілим або невдало розміченим. QA разом із domain experts калібрує rubric та evaluator: де він пропускає небезпечну відповідь, де помилково блокує корисну, як розходяться людські оцінки. Розробник забезпечує runner, конфігурацію, provenance та порівняння baseline із candidate.</a:t>
+            </a:r>
+          </a:p>
+          <a:p xmlns:a="http://schemas.openxmlformats.org/drawingml/2006/main">
+            <a:r>
+              <a:t>Eval Gate пов’язує отримані evidence з погодженим рішенням: block, обмежена експозиція або release у визначених межах. Сам score ще не приймає business risk. Повторні запуски показують варіативність усередині сценарію, а різні сценарії — coverage. Цілеспрямовано зібраний Golden Set не є автоматично репрезентативною вибіркою production traffic; його pass rate не можна без обґрунтування підставити як реальну частоту помилок. Навчальні 4/200 та Wilson interval вище мають власні явно названі припущення.</a:t>
+            </a:r>
+          </a:p>
+          <a:p xmlns:a="http://schemas.openxmlformats.org/drawingml/2006/main">
+            <a:r>
+              <a:t>Зміна моделі, prompt, retrieval або складу запитів може змінити розподіл результатів навіть без зміни application code. Після інциденту додаємо відтворюваний regression case, перевіряємо чутливість evaluator і причину пропуску. Фінальну release evidence оцінюємо на незалежних від налаштування даних. Бізнесу показуємо не слово «drift», а зміну кількості виправлень, ескалацій, неприйнятних наслідків, затримки й вартості.</a:t>
+            </a:r>
+          </a:p>
+          <a:p xmlns:a="http://schemas.openxmlformats.org/drawingml/2006/main">
+            <a:r>
               <a:t/>
             </a:r>
           </a:p>
@@ -593,6 +608,16 @@
           <a:p xmlns:a="http://schemas.openxmlformats.org/drawingml/2006/main">
             <a:r>
               <a:t>https://github.com/UncertaintyArchitectureGroup/uncertainty-architecture/blob/main/01-patterns/thinking-system-review.md</a:t>
+            </a:r>
+          </a:p>
+          <a:p xmlns:a="http://schemas.openxmlformats.org/drawingml/2006/main">
+            <a:r>
+              <a:t>https://github.com/UncertaintyArchitectureGroup/uncertainty-architecture/blob/main/content/raw/Designing%20Non-Deterministic%20Systems%3A%20Maintaining%20Engineering%20Rigor%20in%20the%20AI%20Era.pdf#page=14</a:t>
+            </a:r>
+          </a:p>
+          <a:p xmlns:a="http://schemas.openxmlformats.org/drawingml/2006/main">
+            <a:r>
+              <a:t>https://github.com/UncertaintyArchitectureGroup/uncertainty-architecture/blob/main/content/raw/Designing%20Non-Deterministic%20Systems%3A%20Maintaining%20Engineering%20Rigor%20in%20the%20AI%20Era.pdf#page=19</a:t>
             </a:r>
           </a:p>
         </p:txBody>
@@ -682,6 +707,21 @@
           </a:p>
           <a:p xmlns:a="http://schemas.openxmlformats.org/drawingml/2006/main">
             <a:r>
+              <a:t>Практичний engineering object — версія поведінки, а не лише commit застосунку. Один і той самий endpoint із новим prompt, knowledge snapshot, моделлю, evaluator або правами інструментів може мати інший профіль якості й ризику. Тому evidence та rollback прив’язуються до узгодженого набору версій. Окремий Prompt Registry не обов’язковий: для малої команди достатньо наявного version control та deployment/configuration механізму, якщо вони дозволяють встановити, що саме працювало, хто погодив зміну і як повернутись.</a:t>
+            </a:r>
+          </a:p>
+          <a:p xmlns:a="http://schemas.openxmlformats.org/drawingml/2006/main">
+            <a:r>
+              <a:t>READY включає quality, cost і latency budgets та місткість ручного шляху. Для експерименту потрібні обмеження експозиції й ресурсів до початку роботи. DONE включає deterministic tests, coverage поведінкових сценаріїв, невизначеність оцінки й порівняння з baseline. Валідний JSON перевіряє форму: структурно правильний об’єкт може містити вигадану інструкцію. Тому schema pass доповнюється semantic evidence, permissions і перевіреним recovery path.</a:t>
+            </a:r>
+          </a:p>
+          <a:p xmlns:a="http://schemas.openxmlformats.org/drawingml/2006/main">
+            <a:r>
+              <a:t>RELEASE має явні варіанти block, canary або scoped release. Canary також потребує попереднього дозволу, обмеженої аудиторії, моніторингу та можливості зупинити експозицію. Усі попередні критерії й власники залишаються. Rollback повертає конфігурацію, але не скасовує вже виконану зовнішню дію: для таких наслідків потрібні containment, ручне виправлення або компенсація.</a:t>
+            </a:r>
+          </a:p>
+          <a:p xmlns:a="http://schemas.openxmlformats.org/drawingml/2006/main">
+            <a:r>
               <a:t/>
             </a:r>
           </a:p>
@@ -698,6 +738,21 @@
           <a:p xmlns:a="http://schemas.openxmlformats.org/drawingml/2006/main">
             <a:r>
               <a:t>https://github.com/UncertaintyArchitectureGroup/uncertainty-architecture/blob/main/00-doctrine/nested-control-lifecycle.md</a:t>
+            </a:r>
+          </a:p>
+          <a:p xmlns:a="http://schemas.openxmlformats.org/drawingml/2006/main">
+            <a:r>
+              <a:t>https://github.com/UncertaintyArchitectureGroup/uncertainty-architecture/blob/main/content/raw/Designing%20Non-Deterministic%20Systems%3A%20Maintaining%20Engineering%20Rigor%20in%20the%20AI%20Era.pdf#page=6</a:t>
+            </a:r>
+          </a:p>
+          <a:p xmlns:a="http://schemas.openxmlformats.org/drawingml/2006/main">
+            <a:r>
+              <a:t>https://github.com/UncertaintyArchitectureGroup/uncertainty-architecture/blob/main/content/raw/Designing%20Non-Deterministic%20Systems%3A%20Maintaining%20Engineering%20Rigor%20in%20the%20AI%20Era.pdf#page=9</a:t>
+            </a:r>
+          </a:p>
+          <a:p xmlns:a="http://schemas.openxmlformats.org/drawingml/2006/main">
+            <a:r>
+              <a:t>https://github.com/UncertaintyArchitectureGroup/uncertainty-architecture/blob/main/content/raw/Designing%20Non-Deterministic%20Systems%3A%20Maintaining%20Engineering%20Rigor%20in%20the%20AI%20Era.pdf#page=13</a:t>
             </a:r>
           </a:p>
         </p:txBody>
@@ -787,6 +842,26 @@
           </a:p>
           <a:p xmlns:a="http://schemas.openxmlformats.org/drawingml/2006/main">
             <a:r>
+              <a:t>Архітектор проектує, де саме дозволена невизначеність і де рішення має бути enforced до наслідку. Для IT-асистента можна дозволити різні пояснення approved knowledge, але окремо перевіряти tool authority, доступ до даних та обов’язкове approval. Синтаксичний validator не доводить правильність змісту, а semantic evaluator також помиляється. Закритий feedback loop не є автоматично доказом безпеки: оцінка може бути неправильною, реакція запізнілою, а actuator — недієвим.</a:t>
+            </a:r>
+          </a:p>
+          <a:p xmlns:a="http://schemas.openxmlformats.org/drawingml/2006/main">
+            <a:r>
+              <a:t>До архітектурної відповідальності входять vendor/model changes, isolation boundaries, telemetry та конфігураційний rollback. Provider abstraction відокремлює контракт застосунку від конкретного API, але заміна provider не зберігає поведінку автоматично: потрібні нові evidence та рішення у відповідному scope. Human-in-the-loop означає людину з контекстом, повноваженнями, компетентністю, часом і пропускною здатністю, а не кнопку approve.</a:t>
+            </a:r>
+          </a:p>
+          <a:p xmlns:a="http://schemas.openxmlformats.org/drawingml/2006/main">
+            <a:r>
+              <a:t>Для кожного material signal визначаємо допустимий час реакції й спостережуваний ефект корекції. Якщо шкода може настати раніше, ніж надійде feedback, потрібний придатний попередній gate, менша authority або відмова від такого шляху. Fallback — конкретний режим: approved static guidance, ручний support або зрозуміла відмова, з перевіреною місткістю. Він має зменшувати наслідки, а не повторювати ту саму неперевірену генерацію під іншою назвою.</a:t>
+            </a:r>
+          </a:p>
+          <a:p xmlns:a="http://schemas.openxmlformats.org/drawingml/2006/main">
+            <a:r>
+              <a:t>Архітектурне veto — обґрунтований висновок, що в даному scope немає достатнього контролю, evidence, економіки чи operational capacity. Архітектор документує цей висновок і вимагає звуження, redesign або зупинки відповідно до призначених decision rights. Це не довільне одноосібне право розширювати бізнес-політику. Уповноважений project owner приймає рішення про життєздатність і можливе подальше bounded research.</a:t>
+            </a:r>
+          </a:p>
+          <a:p xmlns:a="http://schemas.openxmlformats.org/drawingml/2006/main">
+            <a:r>
               <a:t/>
             </a:r>
           </a:p>
@@ -808,6 +883,31 @@
           <a:p xmlns:a="http://schemas.openxmlformats.org/drawingml/2006/main">
             <a:r>
               <a:t>https://github.com/UncertaintyArchitectureGroup/uncertainty-architecture/blob/main/01-patterns/thinking-system-review.md</a:t>
+            </a:r>
+          </a:p>
+          <a:p xmlns:a="http://schemas.openxmlformats.org/drawingml/2006/main">
+            <a:r>
+              <a:t>https://github.com/UncertaintyArchitectureGroup/uncertainty-architecture/blob/main/content/raw/Designing%20Non-Deterministic%20Systems%3A%20Maintaining%20Engineering%20Rigor%20in%20the%20AI%20Era.pdf#page=10</a:t>
+            </a:r>
+          </a:p>
+          <a:p xmlns:a="http://schemas.openxmlformats.org/drawingml/2006/main">
+            <a:r>
+              <a:t>https://github.com/UncertaintyArchitectureGroup/uncertainty-architecture/blob/main/content/raw/Designing%20Non-Deterministic%20Systems%3A%20Maintaining%20Engineering%20Rigor%20in%20the%20AI%20Era.pdf#page=11</a:t>
+            </a:r>
+          </a:p>
+          <a:p xmlns:a="http://schemas.openxmlformats.org/drawingml/2006/main">
+            <a:r>
+              <a:t>https://github.com/UncertaintyArchitectureGroup/uncertainty-architecture/blob/main/content/raw/Designing%20Non-Deterministic%20Systems%3A%20Maintaining%20Engineering%20Rigor%20in%20the%20AI%20Era.pdf#page=15</a:t>
+            </a:r>
+          </a:p>
+          <a:p xmlns:a="http://schemas.openxmlformats.org/drawingml/2006/main">
+            <a:r>
+              <a:t>https://github.com/UncertaintyArchitectureGroup/uncertainty-architecture/blob/main/content/raw/Designing%20Non-Deterministic%20Systems%3A%20Maintaining%20Engineering%20Rigor%20in%20the%20AI%20Era.pdf#page=16</a:t>
+            </a:r>
+          </a:p>
+          <a:p xmlns:a="http://schemas.openxmlformats.org/drawingml/2006/main">
+            <a:r>
+              <a:t>https://github.com/UncertaintyArchitectureGroup/uncertainty-architecture/blob/main/content/raw/Designing%20Non-Deterministic%20Systems%3A%20Maintaining%20Engineering%20Rigor%20in%20the%20AI%20Era.pdf#page=18</a:t>
             </a:r>
           </a:p>
         </p:txBody>
@@ -902,6 +1002,26 @@
           </a:p>
           <a:p xmlns:a="http://schemas.openxmlformats.org/drawingml/2006/main">
             <a:r>
+              <a:t>Фабрика й лабораторія співіснують. Команда продовжує постачати перевірені deterministic features, але для поведінкових невідомих спочатку формулює гіпотезу й план evidence. Робочий приклад: «Чи достатньо approved knowledge, щоб асистент корисно обробляв типові IT-звернення без вигаданих кроків у допустимих межах вартості та затримки?». Експеримент може показати, що потрібні нові знання, інший scope, ручний support або взагалі інше технічне рішення.</a:t>
+            </a:r>
+          </a:p>
+          <a:p xmlns:a="http://schemas.openxmlformats.org/drawingml/2006/main">
+            <a:r>
+              <a:t>Project Manager закладає в план підготовку даних, час domain experts, evaluation runs, аналіз, реалізацію controls і rehearsal. Фіксує resource/time box дослідження та decision date. Можна погодити термін отримання evidence й рішення, але не видавати невідому feasibility за гарантовану production capability. Після trial команда уточнює прогноз, scope і залежності; це кероване перепланування за новими даними.</a:t>
+            </a:r>
+          </a:p>
+          <a:p xmlns:a="http://schemas.openxmlformats.org/drawingml/2006/main">
+            <a:r>
+              <a:t>На planning розділяємо work із відомим способом реалізації та material unknowns. На sprint review поряд із demo показуємо baseline/candidate, проблемні сценарії, cost/latency, evaluator uncertainty і рішення. На retrospective перевіряємо, які припущення та засоби вимірювання підвели. Production incidents повертаються в Golden Set, backlog і review тієї межі, яка виявилася неадекватною. Звичайні Scrum events можуть бути цими контрольними точками без створення окремої бюрократії.</a:t>
+            </a:r>
+          </a:p>
+          <a:p xmlns:a="http://schemas.openxmlformats.org/drawingml/2006/main">
+            <a:r>
+              <a:t>Негативний експеримент є корисним, коли він закриває важливе питання й змінює рішення, а не просто збільшує лічильник проведених дослідів. Кількість tickets, LOC або красивих demo окремо не описує готовність до відповідальної експлуатації.</a:t>
+            </a:r>
+          </a:p>
+          <a:p xmlns:a="http://schemas.openxmlformats.org/drawingml/2006/main">
+            <a:r>
               <a:t/>
             </a:r>
           </a:p>
@@ -918,6 +1038,11 @@
           <a:p xmlns:a="http://schemas.openxmlformats.org/drawingml/2006/main">
             <a:r>
               <a:t>https://github.com/UncertaintyArchitectureGroup/uncertainty-architecture/blob/main/00-doctrine/nested-control-lifecycle.md</a:t>
+            </a:r>
+          </a:p>
+          <a:p xmlns:a="http://schemas.openxmlformats.org/drawingml/2006/main">
+            <a:r>
+              <a:t>https://github.com/UncertaintyArchitectureGroup/uncertainty-architecture/blob/main/content/raw/Designing%20Non-Deterministic%20Systems%3A%20Maintaining%20Engineering%20Rigor%20in%20the%20AI%20Era.pdf#page=20</a:t>
             </a:r>
           </a:p>
         </p:txBody>
@@ -1000,6 +1125,31 @@
               <a:t>Фінал: «AI розширює наші можливості. Команда все одно відповідає за систему цілком: як ми її будуємо, яку поведінку дозволяємо, на яких доказах випускаємо і як виправляємо відхилення». Пауза, Q&amp;A.</a:t>
             </a:r>
           </a:p>
+          <a:p xmlns:a="http://schemas.openxmlformats.org/drawingml/2006/main">
+            <a:r>
+              <a:t>Конкретний перший крок для команди: обрати один AI workflow із реальним бізнес-наслідком. Узгодити корисний результат, дозволену варіативність, неприйнятні наслідки, cost/latency та escalation. Підготувати невеликий початковий Golden Set із domain experts, перевірити evaluator й розширювати evidence відповідно до рішення та ризику, без універсального мінімального sample size. Зв’язати Eval Gate з дозволеним block/canary/release, перевірити fallback і людину, яка зможе діяти.</a:t>
+            </a:r>
+          </a:p>
+          <a:p xmlns:a="http://schemas.openxmlformats.org/drawingml/2006/main">
+            <a:r>
+              <a:t>Саме тут поєднуються дві половини доповіді. HOW: команда має розуміти реалізацію, докази, обмеження і способи відновлення навіть за великого обсягу AI-generated code. WHAT: оскільки частина поведінки формується під час роботи, специфікація, тестування і відповідальність продовжуються через runtime evidence та контроль. Відповідальність не переноситься на модель або на одного QA; вона проходить через узгоджені boundaries, evidence, authority і реальну здатність змінити роботу системи.</a:t>
+            </a:r>
+          </a:p>
+          <a:p xmlns:a="http://schemas.openxmlformats.org/drawingml/2006/main">
+            <a:r>
+              <a:t/>
+            </a:r>
+          </a:p>
+          <a:p xmlns:a="http://schemas.openxmlformats.org/drawingml/2006/main">
+            <a:r>
+              <a:t>Sources:</a:t>
+            </a:r>
+          </a:p>
+          <a:p xmlns:a="http://schemas.openxmlformats.org/drawingml/2006/main">
+            <a:r>
+              <a:t>https://github.com/UncertaintyArchitectureGroup/uncertainty-architecture/blob/main/content/raw/Designing%20Non-Deterministic%20Systems%3A%20Maintaining%20Engineering%20Rigor%20in%20the%20AI%20Era.pdf#page=22</a:t>
+            </a:r>
+          </a:p>
         </p:txBody>
       </p:sp>
       <p:sp>
@@ -1772,6 +1922,21 @@
           </a:p>
           <a:p xmlns:a="http://schemas.openxmlformats.org/drawingml/2006/main">
             <a:r>
+              <a:t>Деталізація бізнес-контракту. Два формулювання відповіді можуть бути однаково правильними: асистент має право скоротити пояснення або змінити тон, але повинен зберегти затверджені кроки, умови та застереження. Заміна тексту сама по собі не є дефектом. Порушення змісту, неправомірна дія або непрацездатний обов’язковий fallback — вже інше питання. Тому команда описує не всі речення наперед, а дозволені джерела й теми, потрібні semantic properties, неприйнятні наслідки та реакцію на невизначеність.</a:t>
+            </a:r>
+          </a:p>
+          <a:p xmlns:a="http://schemas.openxmlformats.org/drawingml/2006/main">
+            <a:r>
+              <a:t>Product Manager і BA додають до прикладів контракт на експлуатацію: який ручний rework бізнес здатен обробити; скільки коштує корисно завершений запит з урахуванням перевірок, повторів і людей; яку затримку користувач витримає; за яких умов потрібні уточнення, людина або відмова. Якщо ці межі невідомі, це питання для дослідження зі stakeholders, а не число, яке QA має вгадати. Для IT-асистента питання бізнесу звучить так: «Коли краще не дати інструкцію, а передати звернення фахівцю, і чи зможемо ми обслужити цей потік?».</a:t>
+            </a:r>
+          </a:p>
+          <a:p xmlns:a="http://schemas.openxmlformats.org/drawingml/2006/main">
+            <a:r>
+              <a:t>Спільна мова формується через позначені приклади й контрприклади, rubric, класи наслідків, approved sources та decision owner. Prompt впливає на відповіді, але не задає повного acceptance specification. Графічна область і один semantic-distance score також не замінюють цей контракт. Межі якості, вартості й latency не стають жорсткими гарантіями без окремого реалізованого enforcement path.</a:t>
+            </a:r>
+          </a:p>
+          <a:p xmlns:a="http://schemas.openxmlformats.org/drawingml/2006/main">
+            <a:r>
               <a:t/>
             </a:r>
           </a:p>
@@ -1803,6 +1968,21 @@
           <a:p xmlns:a="http://schemas.openxmlformats.org/drawingml/2006/main">
             <a:r>
               <a:t>https://github.com/UncertaintyArchitectureGroup/uncertainty-architecture/blob/main/00-doctrine/requirements-correctness-and-bugs.md</a:t>
+            </a:r>
+          </a:p>
+          <a:p xmlns:a="http://schemas.openxmlformats.org/drawingml/2006/main">
+            <a:r>
+              <a:t>https://github.com/UncertaintyArchitectureGroup/uncertainty-architecture/blob/main/content/raw/Designing%20Non-Deterministic%20Systems%3A%20Maintaining%20Engineering%20Rigor%20in%20the%20AI%20Era.pdf#page=5</a:t>
+            </a:r>
+          </a:p>
+          <a:p xmlns:a="http://schemas.openxmlformats.org/drawingml/2006/main">
+            <a:r>
+              <a:t>https://github.com/UncertaintyArchitectureGroup/uncertainty-architecture/blob/main/content/raw/Designing%20Non-Deterministic%20Systems%3A%20Maintaining%20Engineering%20Rigor%20in%20the%20AI%20Era.pdf#page=7</a:t>
+            </a:r>
+          </a:p>
+          <a:p xmlns:a="http://schemas.openxmlformats.org/drawingml/2006/main">
+            <a:r>
+              <a:t>https://github.com/UncertaintyArchitectureGroup/uncertainty-architecture/blob/main/content/raw/Designing%20Non-Deterministic%20Systems%3A%20Maintaining%20Engineering%20Rigor%20in%20the%20AI%20Era.pdf#page=17</a:t>
             </a:r>
           </a:p>
         </p:txBody>
@@ -1870,7 +2050,7 @@
   </p:cSld>
   <p:clrMap bg1="lt1" tx1="dk1" bg2="lt2" tx2="dk2" accent1="accent1" accent2="accent2" accent3="accent3" accent4="accent4" accent5="accent5" accent6="accent6" hlink="hlink" folHlink="folHlink"/>
   <p:sldLayoutIdLst>
-    <p:sldLayoutId xmlns:r="http://schemas.openxmlformats.org/officeDocument/2006/relationships" id="2147483649" r:id="Rc82c131ec7d847d9"/>
+    <p:sldLayoutId xmlns:r="http://schemas.openxmlformats.org/officeDocument/2006/relationships" id="2147483649" r:id="R7a6994ccc91842b0"/>
   </p:sldLayoutIdLst>
   <p:txStyles>
     <p:titleStyle>
@@ -2421,7 +2601,7 @@
           <p:cNvPr id="10" name="">
             <a:extLst xmlns:a="http://schemas.openxmlformats.org/drawingml/2006/main">
               <a:ext uri="{FF2B5EF4-FFF2-40B4-BE49-F238E27FC236}">
-                <a16:creationId xmlns:a16="http://schemas.microsoft.com/office/drawing/2014/main" id="{772148C6-3476-4160-8601-A5F5F1488A24}"/>
+                <a16:creationId xmlns:a16="http://schemas.microsoft.com/office/drawing/2014/main" id="{6EA25C2E-878C-4A8A-BDDC-0BB51B8A4DDF}"/>
               </a:ext>
             </a:extLst>
           </p:cNvPr>
@@ -2478,7 +2658,7 @@
           <p:cNvPr id="2" name="">
             <a:extLst xmlns:a="http://schemas.openxmlformats.org/drawingml/2006/main">
               <a:ext uri="{FF2B5EF4-FFF2-40B4-BE49-F238E27FC236}">
-                <a16:creationId xmlns:a16="http://schemas.microsoft.com/office/drawing/2014/main" id="{3E73AE06-830B-432F-84D6-194943879B39}"/>
+                <a16:creationId xmlns:a16="http://schemas.microsoft.com/office/drawing/2014/main" id="{5B25C9BD-16BD-49F5-9650-1C7989944495}"/>
               </a:ext>
             </a:extLst>
           </p:cNvPr>
@@ -2558,7 +2738,7 @@
           <p:cNvPr id="3" name="">
             <a:extLst xmlns:a="http://schemas.openxmlformats.org/drawingml/2006/main">
               <a:ext uri="{FF2B5EF4-FFF2-40B4-BE49-F238E27FC236}">
-                <a16:creationId xmlns:a16="http://schemas.microsoft.com/office/drawing/2014/main" id="{891C1594-7CB4-46C5-9063-BA95B043C7CA}"/>
+                <a16:creationId xmlns:a16="http://schemas.microsoft.com/office/drawing/2014/main" id="{B934B01C-64DD-4E16-9547-4C54FD6CC152}"/>
               </a:ext>
             </a:extLst>
           </p:cNvPr>
@@ -2619,7 +2799,7 @@
           <p:nvPr/>
         </p:nvPicPr>
         <p:blipFill>
-          <a:blip xmlns:r="http://schemas.openxmlformats.org/officeDocument/2006/relationships" xmlns:a="http://schemas.openxmlformats.org/drawingml/2006/main" r:embed="R38f83b0b59fa4090"/>
+          <a:blip xmlns:r="http://schemas.openxmlformats.org/officeDocument/2006/relationships" xmlns:a="http://schemas.openxmlformats.org/drawingml/2006/main" r:embed="R6c512f1bba4e420a"/>
           <a:stretch xmlns:a="http://schemas.openxmlformats.org/drawingml/2006/main"/>
         </p:blipFill>
         <p:spPr>
@@ -2637,7 +2817,7 @@
           <p:cNvPr id="5" name="">
             <a:extLst xmlns:a="http://schemas.openxmlformats.org/drawingml/2006/main">
               <a:ext uri="{FF2B5EF4-FFF2-40B4-BE49-F238E27FC236}">
-                <a16:creationId xmlns:a16="http://schemas.microsoft.com/office/drawing/2014/main" id="{48F30661-B0F8-4F95-9E60-7B7C8E49BB7B}"/>
+                <a16:creationId xmlns:a16="http://schemas.microsoft.com/office/drawing/2014/main" id="{5D73E8BA-8F19-413D-A03A-1068533A842E}"/>
               </a:ext>
             </a:extLst>
           </p:cNvPr>
@@ -2694,7 +2874,7 @@
           <p:cNvPr id="6" name="">
             <a:extLst xmlns:a="http://schemas.openxmlformats.org/drawingml/2006/main">
               <a:ext uri="{FF2B5EF4-FFF2-40B4-BE49-F238E27FC236}">
-                <a16:creationId xmlns:a16="http://schemas.microsoft.com/office/drawing/2014/main" id="{9747F3D7-2630-4DE1-8307-31A7587082C7}"/>
+                <a16:creationId xmlns:a16="http://schemas.microsoft.com/office/drawing/2014/main" id="{6F64A888-FA98-4A42-A643-D19F1EB94CC1}"/>
               </a:ext>
             </a:extLst>
           </p:cNvPr>
@@ -2751,7 +2931,7 @@
           <p:cNvPr id="7" name="">
             <a:extLst xmlns:a="http://schemas.openxmlformats.org/drawingml/2006/main">
               <a:ext uri="{FF2B5EF4-FFF2-40B4-BE49-F238E27FC236}">
-                <a16:creationId xmlns:a16="http://schemas.microsoft.com/office/drawing/2014/main" id="{0F37A60C-89D8-4063-936D-4DACCE10978D}"/>
+                <a16:creationId xmlns:a16="http://schemas.microsoft.com/office/drawing/2014/main" id="{33AE5C12-65D0-445D-8377-DAD1278B78FE}"/>
               </a:ext>
             </a:extLst>
           </p:cNvPr>
@@ -2808,7 +2988,7 @@
           <p:cNvPr id="8" name="">
             <a:extLst xmlns:a="http://schemas.openxmlformats.org/drawingml/2006/main">
               <a:ext uri="{FF2B5EF4-FFF2-40B4-BE49-F238E27FC236}">
-                <a16:creationId xmlns:a16="http://schemas.microsoft.com/office/drawing/2014/main" id="{4DABE831-9040-4B88-86DA-C1357DE1D9A3}"/>
+                <a16:creationId xmlns:a16="http://schemas.microsoft.com/office/drawing/2014/main" id="{76BD820A-E501-4F15-9B5A-61740BA01B2F}"/>
               </a:ext>
             </a:extLst>
           </p:cNvPr>
@@ -2865,7 +3045,7 @@
           <p:cNvPr id="9" name="">
             <a:extLst xmlns:a="http://schemas.openxmlformats.org/drawingml/2006/main">
               <a:ext uri="{FF2B5EF4-FFF2-40B4-BE49-F238E27FC236}">
-                <a16:creationId xmlns:a16="http://schemas.microsoft.com/office/drawing/2014/main" id="{D8EE4586-9677-4E9F-9464-932AD21D0094}"/>
+                <a16:creationId xmlns:a16="http://schemas.microsoft.com/office/drawing/2014/main" id="{62DDD849-15F0-44FD-BD8B-A7B4D0B2D223}"/>
               </a:ext>
             </a:extLst>
           </p:cNvPr>
@@ -2920,7 +3100,7 @@
     </p:spTree>
     <p:extLst>
       <p:ext uri="{BB962C8B-B14F-4D97-AF65-F5344CB8AC3E}">
-        <p14:creationId xmlns:p14="http://schemas.microsoft.com/office/powerpoint/2010/main" val="12729308"/>
+        <p14:creationId xmlns:p14="http://schemas.microsoft.com/office/powerpoint/2010/main" val="640247853"/>
       </p:ext>
     </p:extLst>
   </p:cSld>
@@ -2948,10 +3128,10 @@
       </p:grpSpPr>
       <p:sp>
         <p:nvSpPr>
-          <p:cNvPr id="33" name="">
-            <a:extLst xmlns:a="http://schemas.openxmlformats.org/drawingml/2006/main">
-              <a:ext uri="{FF2B5EF4-FFF2-40B4-BE49-F238E27FC236}">
-                <a16:creationId xmlns:a16="http://schemas.microsoft.com/office/drawing/2014/main" id="{920BBE26-737A-4633-81C8-3E71C7E246E7}"/>
+          <p:cNvPr id="35" name="">
+            <a:extLst xmlns:a="http://schemas.openxmlformats.org/drawingml/2006/main">
+              <a:ext uri="{FF2B5EF4-FFF2-40B4-BE49-F238E27FC236}">
+                <a16:creationId xmlns:a16="http://schemas.microsoft.com/office/drawing/2014/main" id="{D94CDA76-B99D-4E77-B7C8-8FF57D94FD90}"/>
               </a:ext>
             </a:extLst>
           </p:cNvPr>
@@ -3008,7 +3188,7 @@
           <p:cNvPr id="2" name="">
             <a:extLst xmlns:a="http://schemas.openxmlformats.org/drawingml/2006/main">
               <a:ext uri="{FF2B5EF4-FFF2-40B4-BE49-F238E27FC236}">
-                <a16:creationId xmlns:a16="http://schemas.microsoft.com/office/drawing/2014/main" id="{7B380591-E26E-4582-B5C1-FC69C0947D64}"/>
+                <a16:creationId xmlns:a16="http://schemas.microsoft.com/office/drawing/2014/main" id="{BCDB572D-5310-49F6-BA36-B5A648071E21}"/>
               </a:ext>
             </a:extLst>
           </p:cNvPr>
@@ -3039,7 +3219,7 @@
           <p:cNvPr id="3" name="">
             <a:extLst xmlns:a="http://schemas.openxmlformats.org/drawingml/2006/main">
               <a:ext uri="{FF2B5EF4-FFF2-40B4-BE49-F238E27FC236}">
-                <a16:creationId xmlns:a16="http://schemas.microsoft.com/office/drawing/2014/main" id="{E0232E73-4AE4-44FE-879B-090A436A67A6}"/>
+                <a16:creationId xmlns:a16="http://schemas.microsoft.com/office/drawing/2014/main" id="{4EE4A970-B8EE-41F0-8322-4177F25D934A}"/>
               </a:ext>
             </a:extLst>
           </p:cNvPr>
@@ -3096,18 +3276,18 @@
           <p:cNvPr id="4" name="">
             <a:extLst xmlns:a="http://schemas.openxmlformats.org/drawingml/2006/main">
               <a:ext uri="{FF2B5EF4-FFF2-40B4-BE49-F238E27FC236}">
-                <a16:creationId xmlns:a16="http://schemas.microsoft.com/office/drawing/2014/main" id="{AB6BCFFA-6180-47BF-B4D1-D1CC2D65C346}"/>
-              </a:ext>
-            </a:extLst>
-          </p:cNvPr>
-          <p:cNvSpPr>
-            <a:spLocks xmlns:a="http://schemas.openxmlformats.org/drawingml/2006/main" noGrp="1"/>
-          </p:cNvSpPr>
-          <p:nvPr/>
-        </p:nvSpPr>
-        <p:spPr>
-          <a:xfrm xmlns:a="http://schemas.openxmlformats.org/drawingml/2006/main">
-            <a:off x="609600" y="1752600"/>
+                <a16:creationId xmlns:a16="http://schemas.microsoft.com/office/drawing/2014/main" id="{A5AAC520-4BCC-49DB-88A7-DD4116A89D15}"/>
+              </a:ext>
+            </a:extLst>
+          </p:cNvPr>
+          <p:cNvSpPr>
+            <a:spLocks xmlns:a="http://schemas.openxmlformats.org/drawingml/2006/main" noGrp="1"/>
+          </p:cNvSpPr>
+          <p:nvPr/>
+        </p:nvSpPr>
+        <p:spPr>
+          <a:xfrm xmlns:a="http://schemas.openxmlformats.org/drawingml/2006/main">
+            <a:off x="609600" y="1676400"/>
             <a:ext cx="10972800" cy="304800"/>
           </a:xfrm>
           <a:prstGeom xmlns:a="http://schemas.openxmlformats.org/drawingml/2006/main" prst="rect">
@@ -3153,7 +3333,7 @@
           <p:cNvPr id="5" name="">
             <a:extLst xmlns:a="http://schemas.openxmlformats.org/drawingml/2006/main">
               <a:ext uri="{FF2B5EF4-FFF2-40B4-BE49-F238E27FC236}">
-                <a16:creationId xmlns:a16="http://schemas.microsoft.com/office/drawing/2014/main" id="{26D95E38-E2EC-4A34-82C7-850BF6E11B59}"/>
+                <a16:creationId xmlns:a16="http://schemas.microsoft.com/office/drawing/2014/main" id="{93F486A8-C946-4851-B598-87118EA8F375}"/>
               </a:ext>
             </a:extLst>
           </p:cNvPr>
@@ -3164,8 +3344,8 @@
         </p:nvSpPr>
         <p:spPr>
           <a:xfrm xmlns:a="http://schemas.openxmlformats.org/drawingml/2006/main" flipH="0" flipV="0">
-            <a:off x="5934075" y="2209800"/>
-            <a:ext cx="0" cy="2009775"/>
+            <a:off x="5934075" y="2105025"/>
+            <a:ext cx="0" cy="1828800"/>
           </a:xfrm>
           <a:prstGeom xmlns:a="http://schemas.openxmlformats.org/drawingml/2006/main" prst="line">
             <a:avLst/>
@@ -3184,19 +3364,19 @@
           <p:cNvPr id="6" name="">
             <a:extLst xmlns:a="http://schemas.openxmlformats.org/drawingml/2006/main">
               <a:ext uri="{FF2B5EF4-FFF2-40B4-BE49-F238E27FC236}">
-                <a16:creationId xmlns:a16="http://schemas.microsoft.com/office/drawing/2014/main" id="{D68A2912-6E24-4FDD-A3BB-7D8EF05AA744}"/>
-              </a:ext>
-            </a:extLst>
-          </p:cNvPr>
-          <p:cNvSpPr>
-            <a:spLocks xmlns:a="http://schemas.openxmlformats.org/drawingml/2006/main" noGrp="1"/>
-          </p:cNvSpPr>
-          <p:nvPr/>
-        </p:nvSpPr>
-        <p:spPr>
-          <a:xfrm xmlns:a="http://schemas.openxmlformats.org/drawingml/2006/main">
-            <a:off x="609600" y="2228850"/>
-            <a:ext cx="5048250" cy="295275"/>
+                <a16:creationId xmlns:a16="http://schemas.microsoft.com/office/drawing/2014/main" id="{3622FF7F-0FE3-40C2-B5B8-FC9202DFB7EC}"/>
+              </a:ext>
+            </a:extLst>
+          </p:cNvPr>
+          <p:cNvSpPr>
+            <a:spLocks xmlns:a="http://schemas.openxmlformats.org/drawingml/2006/main" noGrp="1"/>
+          </p:cNvSpPr>
+          <p:nvPr/>
+        </p:nvSpPr>
+        <p:spPr>
+          <a:xfrm xmlns:a="http://schemas.openxmlformats.org/drawingml/2006/main">
+            <a:off x="609600" y="2114550"/>
+            <a:ext cx="5048250" cy="276225"/>
           </a:xfrm>
           <a:prstGeom xmlns:a="http://schemas.openxmlformats.org/drawingml/2006/main" prst="rect">
             <a:avLst/>
@@ -3241,19 +3421,19 @@
           <p:cNvPr id="7" name="">
             <a:extLst xmlns:a="http://schemas.openxmlformats.org/drawingml/2006/main">
               <a:ext uri="{FF2B5EF4-FFF2-40B4-BE49-F238E27FC236}">
-                <a16:creationId xmlns:a16="http://schemas.microsoft.com/office/drawing/2014/main" id="{885B032F-D0F7-4D0A-8346-8C6D8D0BA21A}"/>
-              </a:ext>
-            </a:extLst>
-          </p:cNvPr>
-          <p:cNvSpPr>
-            <a:spLocks xmlns:a="http://schemas.openxmlformats.org/drawingml/2006/main" noGrp="1"/>
-          </p:cNvSpPr>
-          <p:nvPr/>
-        </p:nvSpPr>
-        <p:spPr>
-          <a:xfrm xmlns:a="http://schemas.openxmlformats.org/drawingml/2006/main">
-            <a:off x="609600" y="2619375"/>
-            <a:ext cx="5048250" cy="533400"/>
+                <a16:creationId xmlns:a16="http://schemas.microsoft.com/office/drawing/2014/main" id="{A5060348-45BF-419D-B93B-747DF91ED91E}"/>
+              </a:ext>
+            </a:extLst>
+          </p:cNvPr>
+          <p:cNvSpPr>
+            <a:spLocks xmlns:a="http://schemas.openxmlformats.org/drawingml/2006/main" noGrp="1"/>
+          </p:cNvSpPr>
+          <p:nvPr/>
+        </p:nvSpPr>
+        <p:spPr>
+          <a:xfrm xmlns:a="http://schemas.openxmlformats.org/drawingml/2006/main">
+            <a:off x="609600" y="2457450"/>
+            <a:ext cx="5048250" cy="514350"/>
           </a:xfrm>
           <a:prstGeom xmlns:a="http://schemas.openxmlformats.org/drawingml/2006/main" prst="rect">
             <a:avLst/>
@@ -3298,19 +3478,19 @@
           <p:cNvPr id="8" name="">
             <a:extLst xmlns:a="http://schemas.openxmlformats.org/drawingml/2006/main">
               <a:ext uri="{FF2B5EF4-FFF2-40B4-BE49-F238E27FC236}">
-                <a16:creationId xmlns:a16="http://schemas.microsoft.com/office/drawing/2014/main" id="{B483B7DE-0B65-4590-8382-184A06729E3D}"/>
-              </a:ext>
-            </a:extLst>
-          </p:cNvPr>
-          <p:cNvSpPr>
-            <a:spLocks xmlns:a="http://schemas.openxmlformats.org/drawingml/2006/main" noGrp="1"/>
-          </p:cNvSpPr>
-          <p:nvPr/>
-        </p:nvSpPr>
-        <p:spPr>
-          <a:xfrm xmlns:a="http://schemas.openxmlformats.org/drawingml/2006/main">
-            <a:off x="609600" y="3181350"/>
-            <a:ext cx="5048250" cy="266700"/>
+                <a16:creationId xmlns:a16="http://schemas.microsoft.com/office/drawing/2014/main" id="{B72173C9-241C-4364-9E39-8DEA0E8FA86D}"/>
+              </a:ext>
+            </a:extLst>
+          </p:cNvPr>
+          <p:cNvSpPr>
+            <a:spLocks xmlns:a="http://schemas.openxmlformats.org/drawingml/2006/main" noGrp="1"/>
+          </p:cNvSpPr>
+          <p:nvPr/>
+        </p:nvSpPr>
+        <p:spPr>
+          <a:xfrm xmlns:a="http://schemas.openxmlformats.org/drawingml/2006/main">
+            <a:off x="609600" y="3000375"/>
+            <a:ext cx="5048250" cy="257175"/>
           </a:xfrm>
           <a:prstGeom xmlns:a="http://schemas.openxmlformats.org/drawingml/2006/main" prst="rect">
             <a:avLst/>
@@ -3355,19 +3535,19 @@
           <p:cNvPr id="9" name="">
             <a:extLst xmlns:a="http://schemas.openxmlformats.org/drawingml/2006/main">
               <a:ext uri="{FF2B5EF4-FFF2-40B4-BE49-F238E27FC236}">
-                <a16:creationId xmlns:a16="http://schemas.microsoft.com/office/drawing/2014/main" id="{ECCF5736-A6BF-41BE-B14C-748ACD058C9D}"/>
-              </a:ext>
-            </a:extLst>
-          </p:cNvPr>
-          <p:cNvSpPr>
-            <a:spLocks xmlns:a="http://schemas.openxmlformats.org/drawingml/2006/main" noGrp="1"/>
-          </p:cNvSpPr>
-          <p:nvPr/>
-        </p:nvSpPr>
-        <p:spPr>
-          <a:xfrm xmlns:a="http://schemas.openxmlformats.org/drawingml/2006/main">
-            <a:off x="609600" y="3562350"/>
-            <a:ext cx="5048250" cy="276225"/>
+                <a16:creationId xmlns:a16="http://schemas.microsoft.com/office/drawing/2014/main" id="{6615C91A-C266-45AD-AC46-135FCC699D83}"/>
+              </a:ext>
+            </a:extLst>
+          </p:cNvPr>
+          <p:cNvSpPr>
+            <a:spLocks xmlns:a="http://schemas.openxmlformats.org/drawingml/2006/main" noGrp="1"/>
+          </p:cNvSpPr>
+          <p:nvPr/>
+        </p:nvSpPr>
+        <p:spPr>
+          <a:xfrm xmlns:a="http://schemas.openxmlformats.org/drawingml/2006/main">
+            <a:off x="609600" y="3305175"/>
+            <a:ext cx="5048250" cy="266700"/>
           </a:xfrm>
           <a:prstGeom xmlns:a="http://schemas.openxmlformats.org/drawingml/2006/main" prst="rect">
             <a:avLst/>
@@ -3412,7 +3592,7 @@
           <p:cNvPr id="10" name="">
             <a:extLst xmlns:a="http://schemas.openxmlformats.org/drawingml/2006/main">
               <a:ext uri="{FF2B5EF4-FFF2-40B4-BE49-F238E27FC236}">
-                <a16:creationId xmlns:a16="http://schemas.microsoft.com/office/drawing/2014/main" id="{CBC486FB-FA10-419C-B46C-89D195F9DF57}"/>
+                <a16:creationId xmlns:a16="http://schemas.microsoft.com/office/drawing/2014/main" id="{57E89CCD-8A76-4B40-BEAE-BEF94CB09122}"/>
               </a:ext>
             </a:extLst>
           </p:cNvPr>
@@ -3423,7 +3603,7 @@
         </p:nvSpPr>
         <p:spPr>
           <a:xfrm xmlns:a="http://schemas.openxmlformats.org/drawingml/2006/main" flipH="0" flipV="0">
-            <a:off x="895350" y="4038600"/>
+            <a:off x="895350" y="3762375"/>
             <a:ext cx="4381500" cy="0"/>
           </a:xfrm>
           <a:prstGeom xmlns:a="http://schemas.openxmlformats.org/drawingml/2006/main" prst="line">
@@ -3443,7 +3623,7 @@
           <p:cNvPr id="11" name="">
             <a:extLst xmlns:a="http://schemas.openxmlformats.org/drawingml/2006/main">
               <a:ext uri="{FF2B5EF4-FFF2-40B4-BE49-F238E27FC236}">
-                <a16:creationId xmlns:a16="http://schemas.microsoft.com/office/drawing/2014/main" id="{1960CC00-C9B8-4312-ACA9-4779E3BF4C83}"/>
+                <a16:creationId xmlns:a16="http://schemas.microsoft.com/office/drawing/2014/main" id="{C29FBBC2-3E12-4058-93F7-24A8F48E06D0}"/>
               </a:ext>
             </a:extLst>
           </p:cNvPr>
@@ -3454,7 +3634,7 @@
         </p:nvSpPr>
         <p:spPr>
           <a:xfrm xmlns:a="http://schemas.openxmlformats.org/drawingml/2006/main" flipH="0" flipV="0">
-            <a:off x="1465268" y="4038600"/>
+            <a:off x="1465268" y="3762375"/>
             <a:ext cx="3102296" cy="0"/>
           </a:xfrm>
           <a:prstGeom xmlns:a="http://schemas.openxmlformats.org/drawingml/2006/main" prst="line">
@@ -3474,7 +3654,7 @@
           <p:cNvPr id="12" name="">
             <a:extLst xmlns:a="http://schemas.openxmlformats.org/drawingml/2006/main">
               <a:ext uri="{FF2B5EF4-FFF2-40B4-BE49-F238E27FC236}">
-                <a16:creationId xmlns:a16="http://schemas.microsoft.com/office/drawing/2014/main" id="{2B5C8A58-0A22-40B6-819D-DE633480DD8E}"/>
+                <a16:creationId xmlns:a16="http://schemas.microsoft.com/office/drawing/2014/main" id="{1A790B9D-29D8-4384-9A9F-6C4315EA1CC8}"/>
               </a:ext>
             </a:extLst>
           </p:cNvPr>
@@ -3485,7 +3665,7 @@
         </p:nvSpPr>
         <p:spPr>
           <a:xfrm xmlns:a="http://schemas.openxmlformats.org/drawingml/2006/main" flipH="0" flipV="0">
-            <a:off x="1465268" y="3971925"/>
+            <a:off x="1465268" y="3695700"/>
             <a:ext cx="0" cy="133350"/>
           </a:xfrm>
           <a:prstGeom xmlns:a="http://schemas.openxmlformats.org/drawingml/2006/main" prst="line">
@@ -3505,7 +3685,7 @@
           <p:cNvPr id="13" name="">
             <a:extLst xmlns:a="http://schemas.openxmlformats.org/drawingml/2006/main">
               <a:ext uri="{FF2B5EF4-FFF2-40B4-BE49-F238E27FC236}">
-                <a16:creationId xmlns:a16="http://schemas.microsoft.com/office/drawing/2014/main" id="{63F3FF0A-4BEB-4ACD-A60A-52CB7FD84D22}"/>
+                <a16:creationId xmlns:a16="http://schemas.microsoft.com/office/drawing/2014/main" id="{55239A97-8F4A-42A5-8486-FEF9FE7369A6}"/>
               </a:ext>
             </a:extLst>
           </p:cNvPr>
@@ -3516,7 +3696,7 @@
         </p:nvSpPr>
         <p:spPr>
           <a:xfrm xmlns:a="http://schemas.openxmlformats.org/drawingml/2006/main" flipH="0" flipV="0">
-            <a:off x="4567565" y="3971925"/>
+            <a:off x="4567565" y="3695700"/>
             <a:ext cx="0" cy="133350"/>
           </a:xfrm>
           <a:prstGeom xmlns:a="http://schemas.openxmlformats.org/drawingml/2006/main" prst="line">
@@ -3536,18 +3716,18 @@
           <p:cNvPr id="14" name="">
             <a:extLst xmlns:a="http://schemas.openxmlformats.org/drawingml/2006/main">
               <a:ext uri="{FF2B5EF4-FFF2-40B4-BE49-F238E27FC236}">
-                <a16:creationId xmlns:a16="http://schemas.microsoft.com/office/drawing/2014/main" id="{907EBF31-83D2-4613-830C-F197BB729D6A}"/>
-              </a:ext>
-            </a:extLst>
-          </p:cNvPr>
-          <p:cNvSpPr>
-            <a:spLocks xmlns:a="http://schemas.openxmlformats.org/drawingml/2006/main" noGrp="1"/>
-          </p:cNvSpPr>
-          <p:nvPr/>
-        </p:nvSpPr>
-        <p:spPr>
-          <a:xfrm xmlns:a="http://schemas.openxmlformats.org/drawingml/2006/main">
-            <a:off x="2308225" y="3990975"/>
+                <a16:creationId xmlns:a16="http://schemas.microsoft.com/office/drawing/2014/main" id="{DCA2CC1C-23A9-4463-9F43-C65F3352AF80}"/>
+              </a:ext>
+            </a:extLst>
+          </p:cNvPr>
+          <p:cNvSpPr>
+            <a:spLocks xmlns:a="http://schemas.openxmlformats.org/drawingml/2006/main" noGrp="1"/>
+          </p:cNvSpPr>
+          <p:nvPr/>
+        </p:nvSpPr>
+        <p:spPr>
+          <a:xfrm xmlns:a="http://schemas.openxmlformats.org/drawingml/2006/main">
+            <a:off x="2308225" y="3714750"/>
             <a:ext cx="95250" cy="95250"/>
           </a:xfrm>
           <a:prstGeom xmlns:a="http://schemas.openxmlformats.org/drawingml/2006/main" prst="rect">
@@ -3569,18 +3749,18 @@
           <p:cNvPr id="15" name="">
             <a:extLst xmlns:a="http://schemas.openxmlformats.org/drawingml/2006/main">
               <a:ext uri="{FF2B5EF4-FFF2-40B4-BE49-F238E27FC236}">
-                <a16:creationId xmlns:a16="http://schemas.microsoft.com/office/drawing/2014/main" id="{AB1CC14E-6227-4ADC-BBB4-1988C1CA38BC}"/>
-              </a:ext>
-            </a:extLst>
-          </p:cNvPr>
-          <p:cNvSpPr>
-            <a:spLocks xmlns:a="http://schemas.openxmlformats.org/drawingml/2006/main" noGrp="1"/>
-          </p:cNvSpPr>
-          <p:nvPr/>
-        </p:nvSpPr>
-        <p:spPr>
-          <a:xfrm xmlns:a="http://schemas.openxmlformats.org/drawingml/2006/main">
-            <a:off x="714375" y="4171950"/>
+                <a16:creationId xmlns:a16="http://schemas.microsoft.com/office/drawing/2014/main" id="{130BC8B3-EA91-4ACA-867A-AD207DCB24FA}"/>
+              </a:ext>
+            </a:extLst>
+          </p:cNvPr>
+          <p:cNvSpPr>
+            <a:spLocks xmlns:a="http://schemas.openxmlformats.org/drawingml/2006/main" noGrp="1"/>
+          </p:cNvSpPr>
+          <p:nvPr/>
+        </p:nvSpPr>
+        <p:spPr>
+          <a:xfrm xmlns:a="http://schemas.openxmlformats.org/drawingml/2006/main">
+            <a:off x="714375" y="3905250"/>
             <a:ext cx="381000" cy="219075"/>
           </a:xfrm>
           <a:prstGeom xmlns:a="http://schemas.openxmlformats.org/drawingml/2006/main" prst="rect">
@@ -3626,18 +3806,18 @@
           <p:cNvPr id="16" name="">
             <a:extLst xmlns:a="http://schemas.openxmlformats.org/drawingml/2006/main">
               <a:ext uri="{FF2B5EF4-FFF2-40B4-BE49-F238E27FC236}">
-                <a16:creationId xmlns:a16="http://schemas.microsoft.com/office/drawing/2014/main" id="{EE00CA2E-EF2E-4BA8-AB7E-56033BC3A0BD}"/>
-              </a:ext>
-            </a:extLst>
-          </p:cNvPr>
-          <p:cNvSpPr>
-            <a:spLocks xmlns:a="http://schemas.openxmlformats.org/drawingml/2006/main" noGrp="1"/>
-          </p:cNvSpPr>
-          <p:nvPr/>
-        </p:nvSpPr>
-        <p:spPr>
-          <a:xfrm xmlns:a="http://schemas.openxmlformats.org/drawingml/2006/main">
-            <a:off x="2174875" y="4171950"/>
+                <a16:creationId xmlns:a16="http://schemas.microsoft.com/office/drawing/2014/main" id="{585079A4-7FB3-4ACF-834A-CE5E17F4167D}"/>
+              </a:ext>
+            </a:extLst>
+          </p:cNvPr>
+          <p:cNvSpPr>
+            <a:spLocks xmlns:a="http://schemas.openxmlformats.org/drawingml/2006/main" noGrp="1"/>
+          </p:cNvSpPr>
+          <p:nvPr/>
+        </p:nvSpPr>
+        <p:spPr>
+          <a:xfrm xmlns:a="http://schemas.openxmlformats.org/drawingml/2006/main">
+            <a:off x="2174875" y="3905250"/>
             <a:ext cx="381000" cy="219075"/>
           </a:xfrm>
           <a:prstGeom xmlns:a="http://schemas.openxmlformats.org/drawingml/2006/main" prst="rect">
@@ -3683,18 +3863,18 @@
           <p:cNvPr id="17" name="">
             <a:extLst xmlns:a="http://schemas.openxmlformats.org/drawingml/2006/main">
               <a:ext uri="{FF2B5EF4-FFF2-40B4-BE49-F238E27FC236}">
-                <a16:creationId xmlns:a16="http://schemas.microsoft.com/office/drawing/2014/main" id="{1A3CA624-A815-4859-9666-D1F0610A5B9D}"/>
-              </a:ext>
-            </a:extLst>
-          </p:cNvPr>
-          <p:cNvSpPr>
-            <a:spLocks xmlns:a="http://schemas.openxmlformats.org/drawingml/2006/main" noGrp="1"/>
-          </p:cNvSpPr>
-          <p:nvPr/>
-        </p:nvSpPr>
-        <p:spPr>
-          <a:xfrm xmlns:a="http://schemas.openxmlformats.org/drawingml/2006/main">
-            <a:off x="3635375" y="4171950"/>
+                <a16:creationId xmlns:a16="http://schemas.microsoft.com/office/drawing/2014/main" id="{587A8754-C988-490C-B7E8-05F9860AB04E}"/>
+              </a:ext>
+            </a:extLst>
+          </p:cNvPr>
+          <p:cNvSpPr>
+            <a:spLocks xmlns:a="http://schemas.openxmlformats.org/drawingml/2006/main" noGrp="1"/>
+          </p:cNvSpPr>
+          <p:nvPr/>
+        </p:nvSpPr>
+        <p:spPr>
+          <a:xfrm xmlns:a="http://schemas.openxmlformats.org/drawingml/2006/main">
+            <a:off x="3635375" y="3905250"/>
             <a:ext cx="381000" cy="219075"/>
           </a:xfrm>
           <a:prstGeom xmlns:a="http://schemas.openxmlformats.org/drawingml/2006/main" prst="rect">
@@ -3740,18 +3920,18 @@
           <p:cNvPr id="18" name="">
             <a:extLst xmlns:a="http://schemas.openxmlformats.org/drawingml/2006/main">
               <a:ext uri="{FF2B5EF4-FFF2-40B4-BE49-F238E27FC236}">
-                <a16:creationId xmlns:a16="http://schemas.microsoft.com/office/drawing/2014/main" id="{412641CB-7E66-4B77-BC5B-FE5223F29A92}"/>
-              </a:ext>
-            </a:extLst>
-          </p:cNvPr>
-          <p:cNvSpPr>
-            <a:spLocks xmlns:a="http://schemas.openxmlformats.org/drawingml/2006/main" noGrp="1"/>
-          </p:cNvSpPr>
-          <p:nvPr/>
-        </p:nvSpPr>
-        <p:spPr>
-          <a:xfrm xmlns:a="http://schemas.openxmlformats.org/drawingml/2006/main">
-            <a:off x="5095875" y="4171950"/>
+                <a16:creationId xmlns:a16="http://schemas.microsoft.com/office/drawing/2014/main" id="{C2DDF047-942F-4857-AF85-3678F85314BE}"/>
+              </a:ext>
+            </a:extLst>
+          </p:cNvPr>
+          <p:cNvSpPr>
+            <a:spLocks xmlns:a="http://schemas.openxmlformats.org/drawingml/2006/main" noGrp="1"/>
+          </p:cNvSpPr>
+          <p:nvPr/>
+        </p:nvSpPr>
+        <p:spPr>
+          <a:xfrm xmlns:a="http://schemas.openxmlformats.org/drawingml/2006/main">
+            <a:off x="5095875" y="3905250"/>
             <a:ext cx="381000" cy="219075"/>
           </a:xfrm>
           <a:prstGeom xmlns:a="http://schemas.openxmlformats.org/drawingml/2006/main" prst="rect">
@@ -3797,19 +3977,19 @@
           <p:cNvPr id="19" name="">
             <a:extLst xmlns:a="http://schemas.openxmlformats.org/drawingml/2006/main">
               <a:ext uri="{FF2B5EF4-FFF2-40B4-BE49-F238E27FC236}">
-                <a16:creationId xmlns:a16="http://schemas.microsoft.com/office/drawing/2014/main" id="{6F7A8876-6E5D-48FD-A61F-9286AC37A530}"/>
-              </a:ext>
-            </a:extLst>
-          </p:cNvPr>
-          <p:cNvSpPr>
-            <a:spLocks xmlns:a="http://schemas.openxmlformats.org/drawingml/2006/main" noGrp="1"/>
-          </p:cNvSpPr>
-          <p:nvPr/>
-        </p:nvSpPr>
-        <p:spPr>
-          <a:xfrm xmlns:a="http://schemas.openxmlformats.org/drawingml/2006/main">
-            <a:off x="6286500" y="2228850"/>
-            <a:ext cx="5295900" cy="295275"/>
+                <a16:creationId xmlns:a16="http://schemas.microsoft.com/office/drawing/2014/main" id="{AF7EA3C3-A9DB-410C-B62A-20874420457E}"/>
+              </a:ext>
+            </a:extLst>
+          </p:cNvPr>
+          <p:cNvSpPr>
+            <a:spLocks xmlns:a="http://schemas.openxmlformats.org/drawingml/2006/main" noGrp="1"/>
+          </p:cNvSpPr>
+          <p:nvPr/>
+        </p:nvSpPr>
+        <p:spPr>
+          <a:xfrm xmlns:a="http://schemas.openxmlformats.org/drawingml/2006/main">
+            <a:off x="6286500" y="2114550"/>
+            <a:ext cx="5295900" cy="276225"/>
           </a:xfrm>
           <a:prstGeom xmlns:a="http://schemas.openxmlformats.org/drawingml/2006/main" prst="rect">
             <a:avLst/>
@@ -3854,19 +4034,19 @@
           <p:cNvPr id="20" name="">
             <a:extLst xmlns:a="http://schemas.openxmlformats.org/drawingml/2006/main">
               <a:ext uri="{FF2B5EF4-FFF2-40B4-BE49-F238E27FC236}">
-                <a16:creationId xmlns:a16="http://schemas.microsoft.com/office/drawing/2014/main" id="{6B7B5244-8F0A-407B-B2E8-DE31B6F27B23}"/>
-              </a:ext>
-            </a:extLst>
-          </p:cNvPr>
-          <p:cNvSpPr>
-            <a:spLocks xmlns:a="http://schemas.openxmlformats.org/drawingml/2006/main" noGrp="1"/>
-          </p:cNvSpPr>
-          <p:nvPr/>
-        </p:nvSpPr>
-        <p:spPr>
-          <a:xfrm xmlns:a="http://schemas.openxmlformats.org/drawingml/2006/main">
-            <a:off x="6286500" y="2676525"/>
-            <a:ext cx="5295900" cy="342900"/>
+                <a16:creationId xmlns:a16="http://schemas.microsoft.com/office/drawing/2014/main" id="{47A64372-4270-4334-9BF5-0673669B8A98}"/>
+              </a:ext>
+            </a:extLst>
+          </p:cNvPr>
+          <p:cNvSpPr>
+            <a:spLocks xmlns:a="http://schemas.openxmlformats.org/drawingml/2006/main" noGrp="1"/>
+          </p:cNvSpPr>
+          <p:nvPr/>
+        </p:nvSpPr>
+        <p:spPr>
+          <a:xfrm xmlns:a="http://schemas.openxmlformats.org/drawingml/2006/main">
+            <a:off x="6286500" y="2505075"/>
+            <a:ext cx="5295900" cy="333375"/>
           </a:xfrm>
           <a:prstGeom xmlns:a="http://schemas.openxmlformats.org/drawingml/2006/main" prst="rect">
             <a:avLst/>
@@ -3911,19 +4091,19 @@
           <p:cNvPr id="21" name="">
             <a:extLst xmlns:a="http://schemas.openxmlformats.org/drawingml/2006/main">
               <a:ext uri="{FF2B5EF4-FFF2-40B4-BE49-F238E27FC236}">
-                <a16:creationId xmlns:a16="http://schemas.microsoft.com/office/drawing/2014/main" id="{595120E9-2347-4C26-B896-85A3986D2319}"/>
-              </a:ext>
-            </a:extLst>
-          </p:cNvPr>
-          <p:cNvSpPr>
-            <a:spLocks xmlns:a="http://schemas.openxmlformats.org/drawingml/2006/main" noGrp="1"/>
-          </p:cNvSpPr>
-          <p:nvPr/>
-        </p:nvSpPr>
-        <p:spPr>
-          <a:xfrm xmlns:a="http://schemas.openxmlformats.org/drawingml/2006/main">
-            <a:off x="6286500" y="3152775"/>
-            <a:ext cx="5295900" cy="342900"/>
+                <a16:creationId xmlns:a16="http://schemas.microsoft.com/office/drawing/2014/main" id="{59BDC597-FCDE-4AFD-962D-4B2FBBEBAC83}"/>
+              </a:ext>
+            </a:extLst>
+          </p:cNvPr>
+          <p:cNvSpPr>
+            <a:spLocks xmlns:a="http://schemas.openxmlformats.org/drawingml/2006/main" noGrp="1"/>
+          </p:cNvSpPr>
+          <p:nvPr/>
+        </p:nvSpPr>
+        <p:spPr>
+          <a:xfrm xmlns:a="http://schemas.openxmlformats.org/drawingml/2006/main">
+            <a:off x="6286500" y="2933700"/>
+            <a:ext cx="5295900" cy="333375"/>
           </a:xfrm>
           <a:prstGeom xmlns:a="http://schemas.openxmlformats.org/drawingml/2006/main" prst="rect">
             <a:avLst/>
@@ -3968,19 +4148,19 @@
           <p:cNvPr id="22" name="">
             <a:extLst xmlns:a="http://schemas.openxmlformats.org/drawingml/2006/main">
               <a:ext uri="{FF2B5EF4-FFF2-40B4-BE49-F238E27FC236}">
-                <a16:creationId xmlns:a16="http://schemas.microsoft.com/office/drawing/2014/main" id="{93080437-A04D-41C5-8772-73A4050EF0C0}"/>
-              </a:ext>
-            </a:extLst>
-          </p:cNvPr>
-          <p:cNvSpPr>
-            <a:spLocks xmlns:a="http://schemas.openxmlformats.org/drawingml/2006/main" noGrp="1"/>
-          </p:cNvSpPr>
-          <p:nvPr/>
-        </p:nvSpPr>
-        <p:spPr>
-          <a:xfrm xmlns:a="http://schemas.openxmlformats.org/drawingml/2006/main">
-            <a:off x="6286500" y="3752850"/>
-            <a:ext cx="5295900" cy="457200"/>
+                <a16:creationId xmlns:a16="http://schemas.microsoft.com/office/drawing/2014/main" id="{0982925D-68F5-42EB-B53C-A29F3F915A2D}"/>
+              </a:ext>
+            </a:extLst>
+          </p:cNvPr>
+          <p:cNvSpPr>
+            <a:spLocks xmlns:a="http://schemas.openxmlformats.org/drawingml/2006/main" noGrp="1"/>
+          </p:cNvSpPr>
+          <p:nvPr/>
+        </p:nvSpPr>
+        <p:spPr>
+          <a:xfrm xmlns:a="http://schemas.openxmlformats.org/drawingml/2006/main">
+            <a:off x="6286500" y="3457575"/>
+            <a:ext cx="5295900" cy="438150"/>
           </a:xfrm>
           <a:prstGeom xmlns:a="http://schemas.openxmlformats.org/drawingml/2006/main" prst="rect">
             <a:avLst/>
@@ -4025,19 +4205,19 @@
           <p:cNvPr id="23" name="">
             <a:extLst xmlns:a="http://schemas.openxmlformats.org/drawingml/2006/main">
               <a:ext uri="{FF2B5EF4-FFF2-40B4-BE49-F238E27FC236}">
-                <a16:creationId xmlns:a16="http://schemas.microsoft.com/office/drawing/2014/main" id="{9C9D5A6E-8127-4C99-9152-6B5780451E91}"/>
-              </a:ext>
-            </a:extLst>
-          </p:cNvPr>
-          <p:cNvSpPr>
-            <a:spLocks xmlns:a="http://schemas.openxmlformats.org/drawingml/2006/main" noGrp="1"/>
-          </p:cNvSpPr>
-          <p:nvPr/>
-        </p:nvSpPr>
-        <p:spPr>
-          <a:xfrm xmlns:a="http://schemas.openxmlformats.org/drawingml/2006/main">
-            <a:off x="609600" y="4524375"/>
-            <a:ext cx="10972800" cy="257175"/>
+                <a16:creationId xmlns:a16="http://schemas.microsoft.com/office/drawing/2014/main" id="{79EA16CE-B5BC-465A-B49A-9640CDE1C62F}"/>
+              </a:ext>
+            </a:extLst>
+          </p:cNvPr>
+          <p:cNvSpPr>
+            <a:spLocks xmlns:a="http://schemas.openxmlformats.org/drawingml/2006/main" noGrp="1"/>
+          </p:cNvSpPr>
+          <p:nvPr/>
+        </p:nvSpPr>
+        <p:spPr>
+          <a:xfrm xmlns:a="http://schemas.openxmlformats.org/drawingml/2006/main">
+            <a:off x="609600" y="4219575"/>
+            <a:ext cx="10972800" cy="238125"/>
           </a:xfrm>
           <a:prstGeom xmlns:a="http://schemas.openxmlformats.org/drawingml/2006/main" prst="rect">
             <a:avLst/>
@@ -4082,19 +4262,19 @@
           <p:cNvPr id="24" name="">
             <a:extLst xmlns:a="http://schemas.openxmlformats.org/drawingml/2006/main">
               <a:ext uri="{FF2B5EF4-FFF2-40B4-BE49-F238E27FC236}">
-                <a16:creationId xmlns:a16="http://schemas.microsoft.com/office/drawing/2014/main" id="{64F63D37-CFB2-4A52-B3B5-6FD12FFB3173}"/>
-              </a:ext>
-            </a:extLst>
-          </p:cNvPr>
-          <p:cNvSpPr>
-            <a:spLocks xmlns:a="http://schemas.openxmlformats.org/drawingml/2006/main" noGrp="1"/>
-          </p:cNvSpPr>
-          <p:nvPr/>
-        </p:nvSpPr>
-        <p:spPr>
-          <a:xfrm xmlns:a="http://schemas.openxmlformats.org/drawingml/2006/main">
-            <a:off x="609600" y="4876800"/>
-            <a:ext cx="10972800" cy="323850"/>
+                <a16:creationId xmlns:a16="http://schemas.microsoft.com/office/drawing/2014/main" id="{CE0685CA-0BD5-4189-A7AC-E52F237164DF}"/>
+              </a:ext>
+            </a:extLst>
+          </p:cNvPr>
+          <p:cNvSpPr>
+            <a:spLocks xmlns:a="http://schemas.openxmlformats.org/drawingml/2006/main" noGrp="1"/>
+          </p:cNvSpPr>
+          <p:nvPr/>
+        </p:nvSpPr>
+        <p:spPr>
+          <a:xfrm xmlns:a="http://schemas.openxmlformats.org/drawingml/2006/main">
+            <a:off x="609600" y="4552950"/>
+            <a:ext cx="10972800" cy="276225"/>
           </a:xfrm>
           <a:prstGeom xmlns:a="http://schemas.openxmlformats.org/drawingml/2006/main" prst="rect">
             <a:avLst/>
@@ -4111,7 +4291,64 @@
           <a:lstStyle xmlns:a="http://schemas.openxmlformats.org/drawingml/2006/main"/>
           <a:p xmlns:a="http://schemas.openxmlformats.org/drawingml/2006/main">
             <a:pPr algn="l">
-              <a:defRPr sz="1650" b="1">
+              <a:defRPr sz="1500" b="1">
+                <a:solidFill>
+                  <a:srgbClr val="28C7F7"/>
+                </a:solidFill>
+                <a:latin typeface="Roboto"/>
+                <a:ea typeface="Roboto"/>
+                <a:cs typeface="Roboto"/>
+              </a:defRPr>
+            </a:pPr>
+            <a:r>
+              <a:rPr sz="1500" b="1">
+                <a:solidFill>
+                  <a:srgbClr val="28C7F7"/>
+                </a:solidFill>
+                <a:latin typeface="Roboto"/>
+                <a:ea typeface="Roboto"/>
+                <a:cs typeface="Roboto"/>
+              </a:rPr>
+              <a:t>Golden Set: routine, edge and adversarial cases. Eval Gate: compare versions against agreed limits.</a:t>
+            </a:r>
+          </a:p>
+        </p:txBody>
+      </p:sp>
+      <p:sp>
+        <p:nvSpPr>
+          <p:cNvPr id="25" name="">
+            <a:extLst xmlns:a="http://schemas.openxmlformats.org/drawingml/2006/main">
+              <a:ext uri="{FF2B5EF4-FFF2-40B4-BE49-F238E27FC236}">
+                <a16:creationId xmlns:a16="http://schemas.microsoft.com/office/drawing/2014/main" id="{12ED1A67-B081-42D7-863E-FE5D0DD03181}"/>
+              </a:ext>
+            </a:extLst>
+          </p:cNvPr>
+          <p:cNvSpPr>
+            <a:spLocks xmlns:a="http://schemas.openxmlformats.org/drawingml/2006/main" noGrp="1"/>
+          </p:cNvSpPr>
+          <p:nvPr/>
+        </p:nvSpPr>
+        <p:spPr>
+          <a:xfrm xmlns:a="http://schemas.openxmlformats.org/drawingml/2006/main">
+            <a:off x="609600" y="4867275"/>
+            <a:ext cx="10972800" cy="257175"/>
+          </a:xfrm>
+          <a:prstGeom xmlns:a="http://schemas.openxmlformats.org/drawingml/2006/main" prst="rect">
+            <a:avLst/>
+          </a:prstGeom>
+          <a:noFill xmlns:a="http://schemas.openxmlformats.org/drawingml/2006/main"/>
+          <a:ln xmlns:a="http://schemas.openxmlformats.org/drawingml/2006/main" w="0">
+            <a:noFill/>
+          </a:ln>
+        </p:spPr>
+        <p:txBody>
+          <a:bodyPr xmlns:a="http://schemas.openxmlformats.org/drawingml/2006/main" wrap="square" lIns="0" tIns="0" rIns="0" bIns="0" anchor="ctr">
+            <a:noAutofit/>
+          </a:bodyPr>
+          <a:lstStyle xmlns:a="http://schemas.openxmlformats.org/drawingml/2006/main"/>
+          <a:p xmlns:a="http://schemas.openxmlformats.org/drawingml/2006/main">
+            <a:pPr algn="l">
+              <a:defRPr sz="1500" b="0">
                 <a:solidFill>
                   <a:srgbClr val="F4F7FA"/>
                 </a:solidFill>
@@ -4121,7 +4358,7 @@
               </a:defRPr>
             </a:pPr>
             <a:r>
-              <a:rPr sz="1650" b="1">
+              <a:rPr sz="1500" b="0">
                 <a:solidFill>
                   <a:srgbClr val="F4F7FA"/>
                 </a:solidFill>
@@ -4129,6 +4366,63 @@
                 <a:ea typeface="Roboto"/>
                 <a:cs typeface="Roboto"/>
               </a:rPr>
+              <a:t>QA calibrates the evaluator with domain experts. Incidents become new regression cases.</a:t>
+            </a:r>
+          </a:p>
+        </p:txBody>
+      </p:sp>
+      <p:sp>
+        <p:nvSpPr>
+          <p:cNvPr id="26" name="">
+            <a:extLst xmlns:a="http://schemas.openxmlformats.org/drawingml/2006/main">
+              <a:ext uri="{FF2B5EF4-FFF2-40B4-BE49-F238E27FC236}">
+                <a16:creationId xmlns:a16="http://schemas.microsoft.com/office/drawing/2014/main" id="{2EBBC9D9-32BB-4A19-9952-0EA172F0E798}"/>
+              </a:ext>
+            </a:extLst>
+          </p:cNvPr>
+          <p:cNvSpPr>
+            <a:spLocks xmlns:a="http://schemas.openxmlformats.org/drawingml/2006/main" noGrp="1"/>
+          </p:cNvSpPr>
+          <p:nvPr/>
+        </p:nvSpPr>
+        <p:spPr>
+          <a:xfrm xmlns:a="http://schemas.openxmlformats.org/drawingml/2006/main">
+            <a:off x="609600" y="5238750"/>
+            <a:ext cx="10972800" cy="295275"/>
+          </a:xfrm>
+          <a:prstGeom xmlns:a="http://schemas.openxmlformats.org/drawingml/2006/main" prst="rect">
+            <a:avLst/>
+          </a:prstGeom>
+          <a:noFill xmlns:a="http://schemas.openxmlformats.org/drawingml/2006/main"/>
+          <a:ln xmlns:a="http://schemas.openxmlformats.org/drawingml/2006/main" w="0">
+            <a:noFill/>
+          </a:ln>
+        </p:spPr>
+        <p:txBody>
+          <a:bodyPr xmlns:a="http://schemas.openxmlformats.org/drawingml/2006/main" wrap="square" lIns="0" tIns="0" rIns="0" bIns="0" anchor="ctr">
+            <a:noAutofit/>
+          </a:bodyPr>
+          <a:lstStyle xmlns:a="http://schemas.openxmlformats.org/drawingml/2006/main"/>
+          <a:p xmlns:a="http://schemas.openxmlformats.org/drawingml/2006/main">
+            <a:pPr algn="l">
+              <a:defRPr sz="1575" b="1">
+                <a:solidFill>
+                  <a:srgbClr val="F4F7FA"/>
+                </a:solidFill>
+                <a:latin typeface="Roboto"/>
+                <a:ea typeface="Roboto"/>
+                <a:cs typeface="Roboto"/>
+              </a:defRPr>
+            </a:pPr>
+            <a:r>
+              <a:rPr sz="1575" b="1">
+                <a:solidFill>
+                  <a:srgbClr val="F4F7FA"/>
+                </a:solidFill>
+                <a:latin typeface="Roboto"/>
+                <a:ea typeface="Roboto"/>
+                <a:cs typeface="Roboto"/>
+              </a:rPr>
               <a:t>Ask the business: “How much rework is tolerable? Which harm must be prevented?”</a:t>
             </a:r>
           </a:p>
@@ -4136,21 +4430,21 @@
       </p:sp>
       <p:sp>
         <p:nvSpPr>
-          <p:cNvPr id="25" name="">
-            <a:extLst xmlns:a="http://schemas.openxmlformats.org/drawingml/2006/main">
-              <a:ext uri="{FF2B5EF4-FFF2-40B4-BE49-F238E27FC236}">
-                <a16:creationId xmlns:a16="http://schemas.microsoft.com/office/drawing/2014/main" id="{5B20F363-94DC-4C6D-A4C7-07A5F3EC0556}"/>
-              </a:ext>
-            </a:extLst>
-          </p:cNvPr>
-          <p:cNvSpPr>
-            <a:spLocks xmlns:a="http://schemas.openxmlformats.org/drawingml/2006/main" noGrp="1"/>
-          </p:cNvSpPr>
-          <p:nvPr/>
-        </p:nvSpPr>
-        <p:spPr>
-          <a:xfrm xmlns:a="http://schemas.openxmlformats.org/drawingml/2006/main">
-            <a:off x="609600" y="5229225"/>
+          <p:cNvPr id="27" name="">
+            <a:extLst xmlns:a="http://schemas.openxmlformats.org/drawingml/2006/main">
+              <a:ext uri="{FF2B5EF4-FFF2-40B4-BE49-F238E27FC236}">
+                <a16:creationId xmlns:a16="http://schemas.microsoft.com/office/drawing/2014/main" id="{E4560EAF-45BF-4E97-AF0E-5DC96FA9A0EA}"/>
+              </a:ext>
+            </a:extLst>
+          </p:cNvPr>
+          <p:cNvSpPr>
+            <a:spLocks xmlns:a="http://schemas.openxmlformats.org/drawingml/2006/main" noGrp="1"/>
+          </p:cNvSpPr>
+          <p:nvPr/>
+        </p:nvSpPr>
+        <p:spPr>
+          <a:xfrm xmlns:a="http://schemas.openxmlformats.org/drawingml/2006/main">
+            <a:off x="609600" y="5619750"/>
             <a:ext cx="3524250" cy="219075"/>
           </a:xfrm>
           <a:prstGeom xmlns:a="http://schemas.openxmlformats.org/drawingml/2006/main" prst="rect">
@@ -4193,21 +4487,21 @@
       </p:sp>
       <p:sp>
         <p:nvSpPr>
-          <p:cNvPr id="26" name="">
-            <a:extLst xmlns:a="http://schemas.openxmlformats.org/drawingml/2006/main">
-              <a:ext uri="{FF2B5EF4-FFF2-40B4-BE49-F238E27FC236}">
-                <a16:creationId xmlns:a16="http://schemas.microsoft.com/office/drawing/2014/main" id="{29F5949C-09E9-44DB-95E1-C1F4E63C7269}"/>
-              </a:ext>
-            </a:extLst>
-          </p:cNvPr>
-          <p:cNvSpPr>
-            <a:spLocks xmlns:a="http://schemas.openxmlformats.org/drawingml/2006/main" noGrp="1"/>
-          </p:cNvSpPr>
-          <p:nvPr/>
-        </p:nvSpPr>
-        <p:spPr>
-          <a:xfrm xmlns:a="http://schemas.openxmlformats.org/drawingml/2006/main">
-            <a:off x="609600" y="5467350"/>
+          <p:cNvPr id="28" name="">
+            <a:extLst xmlns:a="http://schemas.openxmlformats.org/drawingml/2006/main">
+              <a:ext uri="{FF2B5EF4-FFF2-40B4-BE49-F238E27FC236}">
+                <a16:creationId xmlns:a16="http://schemas.microsoft.com/office/drawing/2014/main" id="{671FC828-EDB6-4BD7-A8DB-850DA1E5E186}"/>
+              </a:ext>
+            </a:extLst>
+          </p:cNvPr>
+          <p:cNvSpPr>
+            <a:spLocks xmlns:a="http://schemas.openxmlformats.org/drawingml/2006/main" noGrp="1"/>
+          </p:cNvSpPr>
+          <p:nvPr/>
+        </p:nvSpPr>
+        <p:spPr>
+          <a:xfrm xmlns:a="http://schemas.openxmlformats.org/drawingml/2006/main">
+            <a:off x="609600" y="5857875"/>
             <a:ext cx="3524250" cy="228600"/>
           </a:xfrm>
           <a:prstGeom xmlns:a="http://schemas.openxmlformats.org/drawingml/2006/main" prst="rect">
@@ -4250,21 +4544,21 @@
       </p:sp>
       <p:sp>
         <p:nvSpPr>
-          <p:cNvPr id="27" name="">
-            <a:extLst xmlns:a="http://schemas.openxmlformats.org/drawingml/2006/main">
-              <a:ext uri="{FF2B5EF4-FFF2-40B4-BE49-F238E27FC236}">
-                <a16:creationId xmlns:a16="http://schemas.microsoft.com/office/drawing/2014/main" id="{BA0A8FA3-FF3A-4477-84B4-7DFE40F4549F}"/>
-              </a:ext>
-            </a:extLst>
-          </p:cNvPr>
-          <p:cNvSpPr>
-            <a:spLocks xmlns:a="http://schemas.openxmlformats.org/drawingml/2006/main" noGrp="1"/>
-          </p:cNvSpPr>
-          <p:nvPr/>
-        </p:nvSpPr>
-        <p:spPr>
-          <a:xfrm xmlns:a="http://schemas.openxmlformats.org/drawingml/2006/main">
-            <a:off x="4391025" y="5229225"/>
+          <p:cNvPr id="29" name="">
+            <a:extLst xmlns:a="http://schemas.openxmlformats.org/drawingml/2006/main">
+              <a:ext uri="{FF2B5EF4-FFF2-40B4-BE49-F238E27FC236}">
+                <a16:creationId xmlns:a16="http://schemas.microsoft.com/office/drawing/2014/main" id="{67CF1CD3-33D1-4063-B0DD-5A009A1D20F6}"/>
+              </a:ext>
+            </a:extLst>
+          </p:cNvPr>
+          <p:cNvSpPr>
+            <a:spLocks xmlns:a="http://schemas.openxmlformats.org/drawingml/2006/main" noGrp="1"/>
+          </p:cNvSpPr>
+          <p:nvPr/>
+        </p:nvSpPr>
+        <p:spPr>
+          <a:xfrm xmlns:a="http://schemas.openxmlformats.org/drawingml/2006/main">
+            <a:off x="4391025" y="5619750"/>
             <a:ext cx="3524250" cy="219075"/>
           </a:xfrm>
           <a:prstGeom xmlns:a="http://schemas.openxmlformats.org/drawingml/2006/main" prst="rect">
@@ -4307,21 +4601,21 @@
       </p:sp>
       <p:sp>
         <p:nvSpPr>
-          <p:cNvPr id="28" name="">
-            <a:extLst xmlns:a="http://schemas.openxmlformats.org/drawingml/2006/main">
-              <a:ext uri="{FF2B5EF4-FFF2-40B4-BE49-F238E27FC236}">
-                <a16:creationId xmlns:a16="http://schemas.microsoft.com/office/drawing/2014/main" id="{529AF9DD-61E3-43E2-8DB9-4416660ACCFE}"/>
-              </a:ext>
-            </a:extLst>
-          </p:cNvPr>
-          <p:cNvSpPr>
-            <a:spLocks xmlns:a="http://schemas.openxmlformats.org/drawingml/2006/main" noGrp="1"/>
-          </p:cNvSpPr>
-          <p:nvPr/>
-        </p:nvSpPr>
-        <p:spPr>
-          <a:xfrm xmlns:a="http://schemas.openxmlformats.org/drawingml/2006/main">
-            <a:off x="4391025" y="5467350"/>
+          <p:cNvPr id="30" name="">
+            <a:extLst xmlns:a="http://schemas.openxmlformats.org/drawingml/2006/main">
+              <a:ext uri="{FF2B5EF4-FFF2-40B4-BE49-F238E27FC236}">
+                <a16:creationId xmlns:a16="http://schemas.microsoft.com/office/drawing/2014/main" id="{3E2B601F-3A3B-4C38-A323-A1D8ACF8FA82}"/>
+              </a:ext>
+            </a:extLst>
+          </p:cNvPr>
+          <p:cNvSpPr>
+            <a:spLocks xmlns:a="http://schemas.openxmlformats.org/drawingml/2006/main" noGrp="1"/>
+          </p:cNvSpPr>
+          <p:nvPr/>
+        </p:nvSpPr>
+        <p:spPr>
+          <a:xfrm xmlns:a="http://schemas.openxmlformats.org/drawingml/2006/main">
+            <a:off x="4391025" y="5857875"/>
             <a:ext cx="3524250" cy="228600"/>
           </a:xfrm>
           <a:prstGeom xmlns:a="http://schemas.openxmlformats.org/drawingml/2006/main" prst="rect">
@@ -4364,21 +4658,21 @@
       </p:sp>
       <p:sp>
         <p:nvSpPr>
-          <p:cNvPr id="29" name="">
-            <a:extLst xmlns:a="http://schemas.openxmlformats.org/drawingml/2006/main">
-              <a:ext uri="{FF2B5EF4-FFF2-40B4-BE49-F238E27FC236}">
-                <a16:creationId xmlns:a16="http://schemas.microsoft.com/office/drawing/2014/main" id="{E989ABAE-6184-4CAA-BD65-943646C59295}"/>
-              </a:ext>
-            </a:extLst>
-          </p:cNvPr>
-          <p:cNvSpPr>
-            <a:spLocks xmlns:a="http://schemas.openxmlformats.org/drawingml/2006/main" noGrp="1"/>
-          </p:cNvSpPr>
-          <p:nvPr/>
-        </p:nvSpPr>
-        <p:spPr>
-          <a:xfrm xmlns:a="http://schemas.openxmlformats.org/drawingml/2006/main">
-            <a:off x="8172450" y="5229225"/>
+          <p:cNvPr id="31" name="">
+            <a:extLst xmlns:a="http://schemas.openxmlformats.org/drawingml/2006/main">
+              <a:ext uri="{FF2B5EF4-FFF2-40B4-BE49-F238E27FC236}">
+                <a16:creationId xmlns:a16="http://schemas.microsoft.com/office/drawing/2014/main" id="{4121F469-3BB3-4752-ADE7-D855D2A8EF7E}"/>
+              </a:ext>
+            </a:extLst>
+          </p:cNvPr>
+          <p:cNvSpPr>
+            <a:spLocks xmlns:a="http://schemas.openxmlformats.org/drawingml/2006/main" noGrp="1"/>
+          </p:cNvSpPr>
+          <p:nvPr/>
+        </p:nvSpPr>
+        <p:spPr>
+          <a:xfrm xmlns:a="http://schemas.openxmlformats.org/drawingml/2006/main">
+            <a:off x="8172450" y="5619750"/>
             <a:ext cx="3524250" cy="219075"/>
           </a:xfrm>
           <a:prstGeom xmlns:a="http://schemas.openxmlformats.org/drawingml/2006/main" prst="rect">
@@ -4421,21 +4715,21 @@
       </p:sp>
       <p:sp>
         <p:nvSpPr>
-          <p:cNvPr id="30" name="">
-            <a:extLst xmlns:a="http://schemas.openxmlformats.org/drawingml/2006/main">
-              <a:ext uri="{FF2B5EF4-FFF2-40B4-BE49-F238E27FC236}">
-                <a16:creationId xmlns:a16="http://schemas.microsoft.com/office/drawing/2014/main" id="{0465D62E-B928-453E-83D4-FBB4E8EDC7FB}"/>
-              </a:ext>
-            </a:extLst>
-          </p:cNvPr>
-          <p:cNvSpPr>
-            <a:spLocks xmlns:a="http://schemas.openxmlformats.org/drawingml/2006/main" noGrp="1"/>
-          </p:cNvSpPr>
-          <p:nvPr/>
-        </p:nvSpPr>
-        <p:spPr>
-          <a:xfrm xmlns:a="http://schemas.openxmlformats.org/drawingml/2006/main">
-            <a:off x="8172450" y="5467350"/>
+          <p:cNvPr id="32" name="">
+            <a:extLst xmlns:a="http://schemas.openxmlformats.org/drawingml/2006/main">
+              <a:ext uri="{FF2B5EF4-FFF2-40B4-BE49-F238E27FC236}">
+                <a16:creationId xmlns:a16="http://schemas.microsoft.com/office/drawing/2014/main" id="{4DEC3D11-781C-4705-BF04-CB4B32F2D425}"/>
+              </a:ext>
+            </a:extLst>
+          </p:cNvPr>
+          <p:cNvSpPr>
+            <a:spLocks xmlns:a="http://schemas.openxmlformats.org/drawingml/2006/main" noGrp="1"/>
+          </p:cNvSpPr>
+          <p:nvPr/>
+        </p:nvSpPr>
+        <p:spPr>
+          <a:xfrm xmlns:a="http://schemas.openxmlformats.org/drawingml/2006/main">
+            <a:off x="8172450" y="5857875"/>
             <a:ext cx="3524250" cy="228600"/>
           </a:xfrm>
           <a:prstGeom xmlns:a="http://schemas.openxmlformats.org/drawingml/2006/main" prst="rect">
@@ -4478,10 +4772,10 @@
       </p:sp>
       <p:sp>
         <p:nvSpPr>
-          <p:cNvPr id="31" name="">
-            <a:extLst xmlns:a="http://schemas.openxmlformats.org/drawingml/2006/main">
-              <a:ext uri="{FF2B5EF4-FFF2-40B4-BE49-F238E27FC236}">
-                <a16:creationId xmlns:a16="http://schemas.microsoft.com/office/drawing/2014/main" id="{C73F7618-8B92-4E3D-B597-A2F8D2DB1618}"/>
+          <p:cNvPr id="33" name="">
+            <a:extLst xmlns:a="http://schemas.openxmlformats.org/drawingml/2006/main">
+              <a:ext uri="{FF2B5EF4-FFF2-40B4-BE49-F238E27FC236}">
+                <a16:creationId xmlns:a16="http://schemas.microsoft.com/office/drawing/2014/main" id="{4F53DC59-EB65-456E-A5FC-183B1237834F}"/>
               </a:ext>
             </a:extLst>
           </p:cNvPr>
@@ -4492,7 +4786,7 @@
         </p:nvSpPr>
         <p:spPr>
           <a:xfrm xmlns:a="http://schemas.openxmlformats.org/drawingml/2006/main" flipH="0" flipV="0">
-            <a:off x="609600" y="5734050"/>
+            <a:off x="609600" y="6172200"/>
             <a:ext cx="10972800" cy="0"/>
           </a:xfrm>
           <a:prstGeom xmlns:a="http://schemas.openxmlformats.org/drawingml/2006/main" prst="line">
@@ -4509,22 +4803,22 @@
       </p:sp>
       <p:sp>
         <p:nvSpPr>
-          <p:cNvPr id="32" name="">
-            <a:extLst xmlns:a="http://schemas.openxmlformats.org/drawingml/2006/main">
-              <a:ext uri="{FF2B5EF4-FFF2-40B4-BE49-F238E27FC236}">
-                <a16:creationId xmlns:a16="http://schemas.microsoft.com/office/drawing/2014/main" id="{A1EFBB2E-FE62-432C-8293-FA08FF53FBD0}"/>
-              </a:ext>
-            </a:extLst>
-          </p:cNvPr>
-          <p:cNvSpPr>
-            <a:spLocks xmlns:a="http://schemas.openxmlformats.org/drawingml/2006/main" noGrp="1"/>
-          </p:cNvSpPr>
-          <p:nvPr/>
-        </p:nvSpPr>
-        <p:spPr>
-          <a:xfrm xmlns:a="http://schemas.openxmlformats.org/drawingml/2006/main">
-            <a:off x="609600" y="5905500"/>
-            <a:ext cx="10648950" cy="666750"/>
+          <p:cNvPr id="34" name="">
+            <a:extLst xmlns:a="http://schemas.openxmlformats.org/drawingml/2006/main">
+              <a:ext uri="{FF2B5EF4-FFF2-40B4-BE49-F238E27FC236}">
+                <a16:creationId xmlns:a16="http://schemas.microsoft.com/office/drawing/2014/main" id="{2C6CBFA9-4FE5-4201-8415-CD708183CB9A}"/>
+              </a:ext>
+            </a:extLst>
+          </p:cNvPr>
+          <p:cNvSpPr>
+            <a:spLocks xmlns:a="http://schemas.openxmlformats.org/drawingml/2006/main" noGrp="1"/>
+          </p:cNvSpPr>
+          <p:nvPr/>
+        </p:nvSpPr>
+        <p:spPr>
+          <a:xfrm xmlns:a="http://schemas.openxmlformats.org/drawingml/2006/main">
+            <a:off x="609600" y="6267450"/>
+            <a:ext cx="10648950" cy="371475"/>
           </a:xfrm>
           <a:prstGeom xmlns:a="http://schemas.openxmlformats.org/drawingml/2006/main" prst="rect">
             <a:avLst/>
@@ -4541,7 +4835,7 @@
           <a:lstStyle xmlns:a="http://schemas.openxmlformats.org/drawingml/2006/main"/>
           <a:p xmlns:a="http://schemas.openxmlformats.org/drawingml/2006/main">
             <a:pPr algn="l">
-              <a:defRPr sz="1950" b="1">
+              <a:defRPr sz="1800" b="1">
                 <a:solidFill>
                   <a:srgbClr val="F4F7FA"/>
                 </a:solidFill>
@@ -4551,7 +4845,7 @@
               </a:defRPr>
             </a:pPr>
             <a:r>
-              <a:rPr sz="1950" b="1">
+              <a:rPr sz="1800" b="1">
                 <a:solidFill>
                   <a:srgbClr val="F4F7FA"/>
                 </a:solidFill>
@@ -4567,7 +4861,7 @@
     </p:spTree>
     <p:extLst>
       <p:ext uri="{BB962C8B-B14F-4D97-AF65-F5344CB8AC3E}">
-        <p14:creationId xmlns:p14="http://schemas.microsoft.com/office/powerpoint/2010/main" val="1531145158"/>
+        <p14:creationId xmlns:p14="http://schemas.microsoft.com/office/powerpoint/2010/main" val="843440048"/>
       </p:ext>
     </p:extLst>
   </p:cSld>
@@ -4595,10 +4889,10 @@
       </p:grpSpPr>
       <p:sp>
         <p:nvSpPr>
-          <p:cNvPr id="9" name="">
-            <a:extLst xmlns:a="http://schemas.openxmlformats.org/drawingml/2006/main">
-              <a:ext uri="{FF2B5EF4-FFF2-40B4-BE49-F238E27FC236}">
-                <a16:creationId xmlns:a16="http://schemas.microsoft.com/office/drawing/2014/main" id="{DC57EB3F-842C-46A2-BAB8-280434AB5D8D}"/>
+          <p:cNvPr id="10" name="">
+            <a:extLst xmlns:a="http://schemas.openxmlformats.org/drawingml/2006/main">
+              <a:ext uri="{FF2B5EF4-FFF2-40B4-BE49-F238E27FC236}">
+                <a16:creationId xmlns:a16="http://schemas.microsoft.com/office/drawing/2014/main" id="{8C4105BC-D4D0-488A-8B1B-2DCFB937F29E}"/>
               </a:ext>
             </a:extLst>
           </p:cNvPr>
@@ -4655,7 +4949,7 @@
           <p:cNvPr id="2" name="">
             <a:extLst xmlns:a="http://schemas.openxmlformats.org/drawingml/2006/main">
               <a:ext uri="{FF2B5EF4-FFF2-40B4-BE49-F238E27FC236}">
-                <a16:creationId xmlns:a16="http://schemas.microsoft.com/office/drawing/2014/main" id="{F405D8CE-C15B-4C2F-9E82-715A30011016}"/>
+                <a16:creationId xmlns:a16="http://schemas.microsoft.com/office/drawing/2014/main" id="{66FCEED0-220A-4FE6-A4A6-458589161959}"/>
               </a:ext>
             </a:extLst>
           </p:cNvPr>
@@ -4686,7 +4980,7 @@
           <p:cNvPr id="3" name="">
             <a:extLst xmlns:a="http://schemas.openxmlformats.org/drawingml/2006/main">
               <a:ext uri="{FF2B5EF4-FFF2-40B4-BE49-F238E27FC236}">
-                <a16:creationId xmlns:a16="http://schemas.microsoft.com/office/drawing/2014/main" id="{89538DCF-9F76-421F-89FB-5285BC625EA3}"/>
+                <a16:creationId xmlns:a16="http://schemas.microsoft.com/office/drawing/2014/main" id="{AF57310B-E684-4B71-BCFB-52FB214A1E3B}"/>
               </a:ext>
             </a:extLst>
           </p:cNvPr>
@@ -4743,19 +5037,19 @@
           <p:cNvPr id="4" name="">
             <a:extLst xmlns:a="http://schemas.openxmlformats.org/drawingml/2006/main">
               <a:ext uri="{FF2B5EF4-FFF2-40B4-BE49-F238E27FC236}">
-                <a16:creationId xmlns:a16="http://schemas.microsoft.com/office/drawing/2014/main" id="{E4D3703C-74B8-4419-BC91-43E9DE9300EF}"/>
-              </a:ext>
-            </a:extLst>
-          </p:cNvPr>
-          <p:cNvSpPr>
-            <a:spLocks xmlns:a="http://schemas.openxmlformats.org/drawingml/2006/main" noGrp="1"/>
-          </p:cNvSpPr>
-          <p:nvPr/>
-        </p:nvSpPr>
-        <p:spPr>
-          <a:xfrm xmlns:a="http://schemas.openxmlformats.org/drawingml/2006/main">
-            <a:off x="609600" y="1752600"/>
-            <a:ext cx="10972800" cy="342900"/>
+                <a16:creationId xmlns:a16="http://schemas.microsoft.com/office/drawing/2014/main" id="{5C13CEFD-A38F-40C9-BDBB-839E02156502}"/>
+              </a:ext>
+            </a:extLst>
+          </p:cNvPr>
+          <p:cNvSpPr>
+            <a:spLocks xmlns:a="http://schemas.openxmlformats.org/drawingml/2006/main" noGrp="1"/>
+          </p:cNvSpPr>
+          <p:nvPr/>
+        </p:nvSpPr>
+        <p:spPr>
+          <a:xfrm xmlns:a="http://schemas.openxmlformats.org/drawingml/2006/main">
+            <a:off x="609600" y="1676400"/>
+            <a:ext cx="10972800" cy="304800"/>
           </a:xfrm>
           <a:prstGeom xmlns:a="http://schemas.openxmlformats.org/drawingml/2006/main" prst="rect">
             <a:avLst/>
@@ -4795,15 +5089,72 @@
           </a:p>
         </p:txBody>
       </p:sp>
+      <p:sp>
+        <p:nvSpPr>
+          <p:cNvPr id="5" name="">
+            <a:extLst xmlns:a="http://schemas.openxmlformats.org/drawingml/2006/main">
+              <a:ext uri="{FF2B5EF4-FFF2-40B4-BE49-F238E27FC236}">
+                <a16:creationId xmlns:a16="http://schemas.microsoft.com/office/drawing/2014/main" id="{B5B2CB33-6913-4F51-8F86-9A9C5686C5E8}"/>
+              </a:ext>
+            </a:extLst>
+          </p:cNvPr>
+          <p:cNvSpPr>
+            <a:spLocks xmlns:a="http://schemas.openxmlformats.org/drawingml/2006/main" noGrp="1"/>
+          </p:cNvSpPr>
+          <p:nvPr/>
+        </p:nvSpPr>
+        <p:spPr>
+          <a:xfrm xmlns:a="http://schemas.openxmlformats.org/drawingml/2006/main">
+            <a:off x="609600" y="2038350"/>
+            <a:ext cx="10972800" cy="266700"/>
+          </a:xfrm>
+          <a:prstGeom xmlns:a="http://schemas.openxmlformats.org/drawingml/2006/main" prst="rect">
+            <a:avLst/>
+          </a:prstGeom>
+          <a:noFill xmlns:a="http://schemas.openxmlformats.org/drawingml/2006/main"/>
+          <a:ln xmlns:a="http://schemas.openxmlformats.org/drawingml/2006/main" w="0">
+            <a:noFill/>
+          </a:ln>
+        </p:spPr>
+        <p:txBody>
+          <a:bodyPr xmlns:a="http://schemas.openxmlformats.org/drawingml/2006/main" wrap="square" lIns="0" tIns="0" rIns="0" bIns="0" anchor="ctr">
+            <a:noAutofit/>
+          </a:bodyPr>
+          <a:lstStyle xmlns:a="http://schemas.openxmlformats.org/drawingml/2006/main"/>
+          <a:p xmlns:a="http://schemas.openxmlformats.org/drawingml/2006/main">
+            <a:pPr algn="l">
+              <a:defRPr sz="1500" b="0">
+                <a:solidFill>
+                  <a:srgbClr val="ADB8C5"/>
+                </a:solidFill>
+                <a:latin typeface="Roboto"/>
+                <a:ea typeface="Roboto"/>
+                <a:cs typeface="Roboto"/>
+              </a:defRPr>
+            </a:pPr>
+            <a:r>
+              <a:rPr sz="1500" b="0">
+                <a:solidFill>
+                  <a:srgbClr val="ADB8C5"/>
+                </a:solidFill>
+                <a:latin typeface="Roboto"/>
+                <a:ea typeface="Roboto"/>
+                <a:cs typeface="Roboto"/>
+              </a:rPr>
+              <a:t>Behavior changes with prompts, models or retrieval, even when application code stays the same.</a:t>
+            </a:r>
+          </a:p>
+        </p:txBody>
+      </p:sp>
       <p:graphicFrame>
         <p:nvGraphicFramePr>
-          <p:cNvPr id="13" name=""/>
+          <p:cNvPr id="15" name=""/>
           <p:cNvGraphicFramePr/>
           <p:nvPr/>
         </p:nvGraphicFramePr>
         <p:xfrm>
-          <a:off xmlns:a="http://schemas.openxmlformats.org/drawingml/2006/main" x="609600" y="2276475"/>
-          <a:ext xmlns:a="http://schemas.openxmlformats.org/drawingml/2006/main" cx="10972800" cy="2895600"/>
+          <a:off xmlns:a="http://schemas.openxmlformats.org/drawingml/2006/main" x="609600" y="2438400"/>
+          <a:ext xmlns:a="http://schemas.openxmlformats.org/drawingml/2006/main" cx="10972800" cy="3124200"/>
         </p:xfrm>
         <a:graphic xmlns:a="http://schemas.openxmlformats.org/drawingml/2006/main">
           <a:graphicData uri="http://schemas.openxmlformats.org/drawingml/2006/table">
@@ -4814,10 +5165,10 @@
                 <a:gridCol w="4781550"/>
                 <a:gridCol w="4724400"/>
               </a:tblGrid>
-              <a:tr h="723900">
+              <a:tr h="781050">
                 <a:tc>
                   <a:txBody>
-                    <a:bodyPr lIns="171450" tIns="76200" rIns="171450" bIns="76200">
+                    <a:bodyPr lIns="171450" tIns="66675" rIns="171450" bIns="66675">
                       <a:noAutofit/>
                     </a:bodyPr>
                     <a:lstStyle/>
@@ -4843,7 +5194,7 @@
                 </a:tc>
                 <a:tc>
                   <a:txBody>
-                    <a:bodyPr lIns="171450" tIns="76200" rIns="171450" bIns="76200">
+                    <a:bodyPr lIns="171450" tIns="66675" rIns="171450" bIns="66675">
                       <a:noAutofit/>
                     </a:bodyPr>
                     <a:lstStyle/>
@@ -4869,7 +5220,7 @@
                 </a:tc>
                 <a:tc>
                   <a:txBody>
-                    <a:bodyPr lIns="171450" tIns="76200" rIns="171450" bIns="76200">
+                    <a:bodyPr lIns="171450" tIns="66675" rIns="171450" bIns="66675">
                       <a:noAutofit/>
                     </a:bodyPr>
                     <a:lstStyle/>
@@ -4894,16 +5245,16 @@
                   </a:tcPr>
                 </a:tc>
               </a:tr>
-              <a:tr h="723900">
+              <a:tr h="781050">
                 <a:tc>
                   <a:txBody>
-                    <a:bodyPr lIns="171450" tIns="76200" rIns="171450" bIns="76200">
+                    <a:bodyPr lIns="171450" tIns="66675" rIns="171450" bIns="66675">
                       <a:noAutofit/>
                     </a:bodyPr>
                     <a:lstStyle/>
                     <a:p>
                       <a:r>
-                        <a:rPr sz="1650" b="1">
+                        <a:rPr sz="1575" b="1">
                           <a:solidFill>
                             <a:srgbClr val="F4F7FA"/>
                           </a:solidFill>
@@ -4923,13 +5274,13 @@
                 </a:tc>
                 <a:tc>
                   <a:txBody>
-                    <a:bodyPr lIns="171450" tIns="76200" rIns="171450" bIns="76200">
+                    <a:bodyPr lIns="171450" tIns="66675" rIns="171450" bIns="66675">
                       <a:noAutofit/>
                     </a:bodyPr>
                     <a:lstStyle/>
                     <a:p>
                       <a:r>
-                        <a:rPr sz="1650" b="0">
+                        <a:rPr sz="1575" b="0">
                           <a:solidFill>
                             <a:srgbClr val="F4F7FA"/>
                           </a:solidFill>
@@ -4942,7 +5293,7 @@
                     </a:p>
                     <a:p>
                       <a:r>
-                        <a:rPr sz="1650" b="0">
+                        <a:rPr sz="1575" b="0">
                           <a:solidFill>
                             <a:srgbClr val="F4F7FA"/>
                           </a:solidFill>
@@ -4951,6 +5302,19 @@
                           <a:cs typeface="Roboto"/>
                         </a:rPr>
                         <a:t>Fallback owner + dependencies</a:t>
+                      </a:r>
+                    </a:p>
+                    <a:p>
+                      <a:r>
+                        <a:rPr sz="1575" b="0">
+                          <a:solidFill>
+                            <a:srgbClr val="F4F7FA"/>
+                          </a:solidFill>
+                          <a:latin typeface="Roboto"/>
+                          <a:ea typeface="Roboto"/>
+                          <a:cs typeface="Roboto"/>
+                        </a:rPr>
+                        <a:t>Quality, cost and latency budgets</a:t>
                       </a:r>
                     </a:p>
                   </a:txBody>
@@ -4962,13 +5326,13 @@
                 </a:tc>
                 <a:tc>
                   <a:txBody>
-                    <a:bodyPr lIns="171450" tIns="76200" rIns="171450" bIns="76200">
+                    <a:bodyPr lIns="171450" tIns="66675" rIns="171450" bIns="66675">
                       <a:noAutofit/>
                     </a:bodyPr>
                     <a:lstStyle/>
                     <a:p>
                       <a:r>
-                        <a:rPr sz="1650" b="0">
+                        <a:rPr sz="1575" b="0">
                           <a:solidFill>
                             <a:srgbClr val="28C7F7"/>
                           </a:solidFill>
@@ -4981,7 +5345,7 @@
                     </a:p>
                     <a:p>
                       <a:r>
-                        <a:rPr sz="1650" b="0">
+                        <a:rPr sz="1575" b="0">
                           <a:solidFill>
                             <a:srgbClr val="28C7F7"/>
                           </a:solidFill>
@@ -5000,16 +5364,16 @@
                   </a:tcPr>
                 </a:tc>
               </a:tr>
-              <a:tr h="723900">
+              <a:tr h="781050">
                 <a:tc>
                   <a:txBody>
-                    <a:bodyPr lIns="171450" tIns="76200" rIns="171450" bIns="76200">
+                    <a:bodyPr lIns="171450" tIns="66675" rIns="171450" bIns="66675">
                       <a:noAutofit/>
                     </a:bodyPr>
                     <a:lstStyle/>
                     <a:p>
                       <a:r>
-                        <a:rPr sz="1650" b="1">
+                        <a:rPr sz="1575" b="1">
                           <a:solidFill>
                             <a:srgbClr val="F4F7FA"/>
                           </a:solidFill>
@@ -5029,13 +5393,13 @@
                 </a:tc>
                 <a:tc>
                   <a:txBody>
-                    <a:bodyPr lIns="171450" tIns="76200" rIns="171450" bIns="76200">
+                    <a:bodyPr lIns="171450" tIns="66675" rIns="171450" bIns="66675">
                       <a:noAutofit/>
                     </a:bodyPr>
                     <a:lstStyle/>
                     <a:p>
                       <a:r>
-                        <a:rPr sz="1650" b="0">
+                        <a:rPr sz="1575" b="0">
                           <a:solidFill>
                             <a:srgbClr val="F4F7FA"/>
                           </a:solidFill>
@@ -5048,7 +5412,7 @@
                     </a:p>
                     <a:p>
                       <a:r>
-                        <a:rPr sz="1650" b="0">
+                        <a:rPr sz="1575" b="0">
                           <a:solidFill>
                             <a:srgbClr val="F4F7FA"/>
                           </a:solidFill>
@@ -5057,6 +5421,19 @@
                           <a:cs typeface="Roboto"/>
                         </a:rPr>
                         <a:t>Tests, evals, rollback rehearsal</a:t>
+                      </a:r>
+                    </a:p>
+                    <a:p>
+                      <a:r>
+                        <a:rPr sz="1575" b="0">
+                          <a:solidFill>
+                            <a:srgbClr val="F4F7FA"/>
+                          </a:solidFill>
+                          <a:latin typeface="Roboto"/>
+                          <a:ea typeface="Roboto"/>
+                          <a:cs typeface="Roboto"/>
+                        </a:rPr>
+                        <a:t>Coverage, uncertainty, baseline</a:t>
                       </a:r>
                     </a:p>
                   </a:txBody>
@@ -5068,13 +5445,13 @@
                 </a:tc>
                 <a:tc>
                   <a:txBody>
-                    <a:bodyPr lIns="171450" tIns="76200" rIns="171450" bIns="76200">
+                    <a:bodyPr lIns="171450" tIns="66675" rIns="171450" bIns="66675">
                       <a:noAutofit/>
                     </a:bodyPr>
                     <a:lstStyle/>
                     <a:p>
                       <a:r>
-                        <a:rPr sz="1650" b="0">
+                        <a:rPr sz="1575" b="0">
                           <a:solidFill>
                             <a:srgbClr val="28C7F7"/>
                           </a:solidFill>
@@ -5087,7 +5464,7 @@
                     </a:p>
                     <a:p>
                       <a:r>
-                        <a:rPr sz="1650" b="0">
+                        <a:rPr sz="1575" b="0">
                           <a:solidFill>
                             <a:srgbClr val="28C7F7"/>
                           </a:solidFill>
@@ -5106,16 +5483,16 @@
                   </a:tcPr>
                 </a:tc>
               </a:tr>
-              <a:tr h="723900">
+              <a:tr h="781050">
                 <a:tc>
                   <a:txBody>
-                    <a:bodyPr lIns="171450" tIns="76200" rIns="171450" bIns="76200">
+                    <a:bodyPr lIns="171450" tIns="66675" rIns="171450" bIns="66675">
                       <a:noAutofit/>
                     </a:bodyPr>
                     <a:lstStyle/>
                     <a:p>
                       <a:r>
-                        <a:rPr sz="1650" b="1">
+                        <a:rPr sz="1575" b="1">
                           <a:solidFill>
                             <a:srgbClr val="F4F7FA"/>
                           </a:solidFill>
@@ -5135,13 +5512,13 @@
                 </a:tc>
                 <a:tc>
                   <a:txBody>
-                    <a:bodyPr lIns="171450" tIns="76200" rIns="171450" bIns="76200">
+                    <a:bodyPr lIns="171450" tIns="66675" rIns="171450" bIns="66675">
                       <a:noAutofit/>
                     </a:bodyPr>
                     <a:lstStyle/>
                     <a:p>
                       <a:r>
-                        <a:rPr sz="1650" b="0">
+                        <a:rPr sz="1575" b="0">
                           <a:solidFill>
                             <a:srgbClr val="F4F7FA"/>
                           </a:solidFill>
@@ -5154,7 +5531,7 @@
                     </a:p>
                     <a:p>
                       <a:r>
-                        <a:rPr sz="1650" b="0">
+                        <a:rPr sz="1575" b="0">
                           <a:solidFill>
                             <a:srgbClr val="F4F7FA"/>
                           </a:solidFill>
@@ -5163,6 +5540,19 @@
                           <a:cs typeface="Roboto"/>
                         </a:rPr>
                         <a:t>Residual risk + stop triggers</a:t>
+                      </a:r>
+                    </a:p>
+                    <a:p>
+                      <a:r>
+                        <a:rPr sz="1575" b="0">
+                          <a:solidFill>
+                            <a:srgbClr val="F4F7FA"/>
+                          </a:solidFill>
+                          <a:latin typeface="Roboto"/>
+                          <a:ea typeface="Roboto"/>
+                          <a:cs typeface="Roboto"/>
+                        </a:rPr>
+                        <a:t>Block, canary or scoped release</a:t>
                       </a:r>
                     </a:p>
                   </a:txBody>
@@ -5174,13 +5564,13 @@
                 </a:tc>
                 <a:tc>
                   <a:txBody>
-                    <a:bodyPr lIns="171450" tIns="76200" rIns="171450" bIns="76200">
+                    <a:bodyPr lIns="171450" tIns="66675" rIns="171450" bIns="66675">
                       <a:noAutofit/>
                     </a:bodyPr>
                     <a:lstStyle/>
                     <a:p>
                       <a:r>
-                        <a:rPr sz="1650" b="0">
+                        <a:rPr sz="1575" b="0">
                           <a:solidFill>
                             <a:srgbClr val="28C7F7"/>
                           </a:solidFill>
@@ -5193,7 +5583,7 @@
                     </a:p>
                     <a:p>
                       <a:r>
-                        <a:rPr sz="1650" b="0">
+                        <a:rPr sz="1575" b="0">
                           <a:solidFill>
                             <a:srgbClr val="28C7F7"/>
                           </a:solidFill>
@@ -5218,22 +5608,22 @@
       </p:graphicFrame>
       <p:sp>
         <p:nvSpPr>
-          <p:cNvPr id="6" name="">
-            <a:extLst xmlns:a="http://schemas.openxmlformats.org/drawingml/2006/main">
-              <a:ext uri="{FF2B5EF4-FFF2-40B4-BE49-F238E27FC236}">
-                <a16:creationId xmlns:a16="http://schemas.microsoft.com/office/drawing/2014/main" id="{71334ECB-FB24-464B-8398-68C1384B5116}"/>
-              </a:ext>
-            </a:extLst>
-          </p:cNvPr>
-          <p:cNvSpPr>
-            <a:spLocks xmlns:a="http://schemas.openxmlformats.org/drawingml/2006/main" noGrp="1"/>
-          </p:cNvSpPr>
-          <p:nvPr/>
-        </p:nvSpPr>
-        <p:spPr>
-          <a:xfrm xmlns:a="http://schemas.openxmlformats.org/drawingml/2006/main">
-            <a:off x="609600" y="5314950"/>
-            <a:ext cx="10972800" cy="333375"/>
+          <p:cNvPr id="7" name="">
+            <a:extLst xmlns:a="http://schemas.openxmlformats.org/drawingml/2006/main">
+              <a:ext uri="{FF2B5EF4-FFF2-40B4-BE49-F238E27FC236}">
+                <a16:creationId xmlns:a16="http://schemas.microsoft.com/office/drawing/2014/main" id="{80621E57-4391-46DC-A8E1-A20B170ACFAB}"/>
+              </a:ext>
+            </a:extLst>
+          </p:cNvPr>
+          <p:cNvSpPr>
+            <a:spLocks xmlns:a="http://schemas.openxmlformats.org/drawingml/2006/main" noGrp="1"/>
+          </p:cNvSpPr>
+          <p:nvPr/>
+        </p:nvSpPr>
+        <p:spPr>
+          <a:xfrm xmlns:a="http://schemas.openxmlformats.org/drawingml/2006/main">
+            <a:off x="609600" y="5648325"/>
+            <a:ext cx="10972800" cy="266700"/>
           </a:xfrm>
           <a:prstGeom xmlns:a="http://schemas.openxmlformats.org/drawingml/2006/main" prst="rect">
             <a:avLst/>
@@ -5252,6 +5642,63 @@
             <a:pPr algn="l">
               <a:defRPr sz="1575" b="0">
                 <a:solidFill>
+                  <a:srgbClr val="F5B61C"/>
+                </a:solidFill>
+                <a:latin typeface="Roboto"/>
+                <a:ea typeface="Roboto"/>
+                <a:cs typeface="Roboto"/>
+              </a:defRPr>
+            </a:pPr>
+            <a:r>
+              <a:rPr sz="1575" b="0">
+                <a:solidFill>
+                  <a:srgbClr val="F5B61C"/>
+                </a:solidFill>
+                <a:latin typeface="Roboto"/>
+                <a:ea typeface="Roboto"/>
+                <a:cs typeface="Roboto"/>
+              </a:rPr>
+              <a:t>Valid JSON can still contain an incorrect instruction.</a:t>
+            </a:r>
+          </a:p>
+        </p:txBody>
+      </p:sp>
+      <p:sp>
+        <p:nvSpPr>
+          <p:cNvPr id="8" name="">
+            <a:extLst xmlns:a="http://schemas.openxmlformats.org/drawingml/2006/main">
+              <a:ext uri="{FF2B5EF4-FFF2-40B4-BE49-F238E27FC236}">
+                <a16:creationId xmlns:a16="http://schemas.microsoft.com/office/drawing/2014/main" id="{3B528AE5-5397-4B1B-AD21-9A63DAAA4188}"/>
+              </a:ext>
+            </a:extLst>
+          </p:cNvPr>
+          <p:cNvSpPr>
+            <a:spLocks xmlns:a="http://schemas.openxmlformats.org/drawingml/2006/main" noGrp="1"/>
+          </p:cNvSpPr>
+          <p:nvPr/>
+        </p:nvSpPr>
+        <p:spPr>
+          <a:xfrm xmlns:a="http://schemas.openxmlformats.org/drawingml/2006/main">
+            <a:off x="609600" y="5981700"/>
+            <a:ext cx="10972800" cy="257175"/>
+          </a:xfrm>
+          <a:prstGeom xmlns:a="http://schemas.openxmlformats.org/drawingml/2006/main" prst="rect">
+            <a:avLst/>
+          </a:prstGeom>
+          <a:noFill xmlns:a="http://schemas.openxmlformats.org/drawingml/2006/main"/>
+          <a:ln xmlns:a="http://schemas.openxmlformats.org/drawingml/2006/main" w="0">
+            <a:noFill/>
+          </a:ln>
+        </p:spPr>
+        <p:txBody>
+          <a:bodyPr xmlns:a="http://schemas.openxmlformats.org/drawingml/2006/main" wrap="square" lIns="0" tIns="0" rIns="0" bIns="0" anchor="ctr">
+            <a:noAutofit/>
+          </a:bodyPr>
+          <a:lstStyle xmlns:a="http://schemas.openxmlformats.org/drawingml/2006/main"/>
+          <a:p xmlns:a="http://schemas.openxmlformats.org/drawingml/2006/main">
+            <a:pPr algn="l">
+              <a:defRPr sz="1500" b="0">
+                <a:solidFill>
                   <a:srgbClr val="ADB8C5"/>
                 </a:solidFill>
                 <a:latin typeface="Roboto"/>
@@ -5260,7 +5707,7 @@
               </a:defRPr>
             </a:pPr>
             <a:r>
-              <a:rPr sz="1575" b="0">
+              <a:rPr sz="1500" b="0">
                 <a:solidFill>
                   <a:srgbClr val="ADB8C5"/>
                 </a:solidFill>
@@ -5275,53 +5722,22 @@
       </p:sp>
       <p:sp>
         <p:nvSpPr>
-          <p:cNvPr id="7" name="">
-            <a:extLst xmlns:a="http://schemas.openxmlformats.org/drawingml/2006/main">
-              <a:ext uri="{FF2B5EF4-FFF2-40B4-BE49-F238E27FC236}">
-                <a16:creationId xmlns:a16="http://schemas.microsoft.com/office/drawing/2014/main" id="{B87727A0-AD93-423D-A9AB-C758E1BE2B01}"/>
-              </a:ext>
-            </a:extLst>
-          </p:cNvPr>
-          <p:cNvSpPr>
-            <a:spLocks xmlns:a="http://schemas.openxmlformats.org/drawingml/2006/main" noGrp="1"/>
-          </p:cNvSpPr>
-          <p:nvPr/>
-        </p:nvSpPr>
-        <p:spPr>
-          <a:xfrm xmlns:a="http://schemas.openxmlformats.org/drawingml/2006/main" flipH="0" flipV="0">
-            <a:off x="609600" y="5734050"/>
-            <a:ext cx="10972800" cy="0"/>
-          </a:xfrm>
-          <a:prstGeom xmlns:a="http://schemas.openxmlformats.org/drawingml/2006/main" prst="line">
-            <a:avLst/>
-          </a:prstGeom>
-          <a:noFill xmlns:a="http://schemas.openxmlformats.org/drawingml/2006/main"/>
-          <a:ln xmlns:a="http://schemas.openxmlformats.org/drawingml/2006/main" w="19050">
-            <a:solidFill>
-              <a:srgbClr val="344454"/>
-            </a:solidFill>
-            <a:prstDash val="solid"/>
-          </a:ln>
-        </p:spPr>
-      </p:sp>
-      <p:sp>
-        <p:nvSpPr>
-          <p:cNvPr id="8" name="">
-            <a:extLst xmlns:a="http://schemas.openxmlformats.org/drawingml/2006/main">
-              <a:ext uri="{FF2B5EF4-FFF2-40B4-BE49-F238E27FC236}">
-                <a16:creationId xmlns:a16="http://schemas.microsoft.com/office/drawing/2014/main" id="{EA1359AB-E667-42A1-AA46-F6741FCFDFFF}"/>
-              </a:ext>
-            </a:extLst>
-          </p:cNvPr>
-          <p:cNvSpPr>
-            <a:spLocks xmlns:a="http://schemas.openxmlformats.org/drawingml/2006/main" noGrp="1"/>
-          </p:cNvSpPr>
-          <p:nvPr/>
-        </p:nvSpPr>
-        <p:spPr>
-          <a:xfrm xmlns:a="http://schemas.openxmlformats.org/drawingml/2006/main">
-            <a:off x="609600" y="5905500"/>
-            <a:ext cx="10648950" cy="666750"/>
+          <p:cNvPr id="9" name="">
+            <a:extLst xmlns:a="http://schemas.openxmlformats.org/drawingml/2006/main">
+              <a:ext uri="{FF2B5EF4-FFF2-40B4-BE49-F238E27FC236}">
+                <a16:creationId xmlns:a16="http://schemas.microsoft.com/office/drawing/2014/main" id="{D11DFFAF-2B35-401D-A413-4F11A75AE85A}"/>
+              </a:ext>
+            </a:extLst>
+          </p:cNvPr>
+          <p:cNvSpPr>
+            <a:spLocks xmlns:a="http://schemas.openxmlformats.org/drawingml/2006/main" noGrp="1"/>
+          </p:cNvSpPr>
+          <p:nvPr/>
+        </p:nvSpPr>
+        <p:spPr>
+          <a:xfrm xmlns:a="http://schemas.openxmlformats.org/drawingml/2006/main">
+            <a:off x="609600" y="6324600"/>
+            <a:ext cx="10648950" cy="323850"/>
           </a:xfrm>
           <a:prstGeom xmlns:a="http://schemas.openxmlformats.org/drawingml/2006/main" prst="rect">
             <a:avLst/>
@@ -5338,7 +5754,7 @@
           <a:lstStyle xmlns:a="http://schemas.openxmlformats.org/drawingml/2006/main"/>
           <a:p xmlns:a="http://schemas.openxmlformats.org/drawingml/2006/main">
             <a:pPr algn="l">
-              <a:defRPr sz="2100" b="1">
+              <a:defRPr sz="1950" b="1">
                 <a:solidFill>
                   <a:srgbClr val="F4F7FA"/>
                 </a:solidFill>
@@ -5348,7 +5764,7 @@
               </a:defRPr>
             </a:pPr>
             <a:r>
-              <a:rPr sz="2100" b="1">
+              <a:rPr sz="1950" b="1">
                 <a:solidFill>
                   <a:srgbClr val="F4F7FA"/>
                 </a:solidFill>
@@ -5364,7 +5780,7 @@
     </p:spTree>
     <p:extLst>
       <p:ext uri="{BB962C8B-B14F-4D97-AF65-F5344CB8AC3E}">
-        <p14:creationId xmlns:p14="http://schemas.microsoft.com/office/powerpoint/2010/main" val="1719985046"/>
+        <p14:creationId xmlns:p14="http://schemas.microsoft.com/office/powerpoint/2010/main" val="1215168919"/>
       </p:ext>
     </p:extLst>
   </p:cSld>
@@ -5392,10 +5808,10 @@
       </p:grpSpPr>
       <p:sp>
         <p:nvSpPr>
-          <p:cNvPr id="34" name="">
-            <a:extLst xmlns:a="http://schemas.openxmlformats.org/drawingml/2006/main">
-              <a:ext uri="{FF2B5EF4-FFF2-40B4-BE49-F238E27FC236}">
-                <a16:creationId xmlns:a16="http://schemas.microsoft.com/office/drawing/2014/main" id="{897F75A6-AC42-4204-8A1E-FB3CB5435885}"/>
+          <p:cNvPr id="39" name="">
+            <a:extLst xmlns:a="http://schemas.openxmlformats.org/drawingml/2006/main">
+              <a:ext uri="{FF2B5EF4-FFF2-40B4-BE49-F238E27FC236}">
+                <a16:creationId xmlns:a16="http://schemas.microsoft.com/office/drawing/2014/main" id="{8195134E-90C0-40C2-BB7E-04E90C4EFDF3}"/>
               </a:ext>
             </a:extLst>
           </p:cNvPr>
@@ -5452,7 +5868,7 @@
           <p:cNvPr id="2" name="">
             <a:extLst xmlns:a="http://schemas.openxmlformats.org/drawingml/2006/main">
               <a:ext uri="{FF2B5EF4-FFF2-40B4-BE49-F238E27FC236}">
-                <a16:creationId xmlns:a16="http://schemas.microsoft.com/office/drawing/2014/main" id="{D09A8E84-F68D-45E4-A039-02AB8AC687D4}"/>
+                <a16:creationId xmlns:a16="http://schemas.microsoft.com/office/drawing/2014/main" id="{9D3103DF-A86A-4584-8CDC-21957918B800}"/>
               </a:ext>
             </a:extLst>
           </p:cNvPr>
@@ -5483,7 +5899,7 @@
           <p:cNvPr id="3" name="">
             <a:extLst xmlns:a="http://schemas.openxmlformats.org/drawingml/2006/main">
               <a:ext uri="{FF2B5EF4-FFF2-40B4-BE49-F238E27FC236}">
-                <a16:creationId xmlns:a16="http://schemas.microsoft.com/office/drawing/2014/main" id="{7F65F5D1-0071-42DE-B4EA-651AD1324D52}"/>
+                <a16:creationId xmlns:a16="http://schemas.microsoft.com/office/drawing/2014/main" id="{CA60FE6C-116A-45B0-9915-5DB82F0CD66C}"/>
               </a:ext>
             </a:extLst>
           </p:cNvPr>
@@ -5540,19 +5956,19 @@
           <p:cNvPr id="4" name="">
             <a:extLst xmlns:a="http://schemas.openxmlformats.org/drawingml/2006/main">
               <a:ext uri="{FF2B5EF4-FFF2-40B4-BE49-F238E27FC236}">
-                <a16:creationId xmlns:a16="http://schemas.microsoft.com/office/drawing/2014/main" id="{F203CB6D-C1B5-448E-B428-669E18813975}"/>
-              </a:ext>
-            </a:extLst>
-          </p:cNvPr>
-          <p:cNvSpPr>
-            <a:spLocks xmlns:a="http://schemas.openxmlformats.org/drawingml/2006/main" noGrp="1"/>
-          </p:cNvSpPr>
-          <p:nvPr/>
-        </p:nvSpPr>
-        <p:spPr>
-          <a:xfrm xmlns:a="http://schemas.openxmlformats.org/drawingml/2006/main">
-            <a:off x="609600" y="1752600"/>
-            <a:ext cx="10972800" cy="342900"/>
+                <a16:creationId xmlns:a16="http://schemas.microsoft.com/office/drawing/2014/main" id="{16AA9149-0709-4708-9DD0-8BF16D989C4D}"/>
+              </a:ext>
+            </a:extLst>
+          </p:cNvPr>
+          <p:cNvSpPr>
+            <a:spLocks xmlns:a="http://schemas.openxmlformats.org/drawingml/2006/main" noGrp="1"/>
+          </p:cNvSpPr>
+          <p:nvPr/>
+        </p:nvSpPr>
+        <p:spPr>
+          <a:xfrm xmlns:a="http://schemas.openxmlformats.org/drawingml/2006/main">
+            <a:off x="609600" y="1676400"/>
+            <a:ext cx="10972800" cy="304800"/>
           </a:xfrm>
           <a:prstGeom xmlns:a="http://schemas.openxmlformats.org/drawingml/2006/main" prst="rect">
             <a:avLst/>
@@ -5597,19 +6013,76 @@
           <p:cNvPr id="5" name="">
             <a:extLst xmlns:a="http://schemas.openxmlformats.org/drawingml/2006/main">
               <a:ext uri="{FF2B5EF4-FFF2-40B4-BE49-F238E27FC236}">
-                <a16:creationId xmlns:a16="http://schemas.microsoft.com/office/drawing/2014/main" id="{79A439BE-776C-4E4E-A9A7-862669814D14}"/>
-              </a:ext>
-            </a:extLst>
-          </p:cNvPr>
-          <p:cNvSpPr>
-            <a:spLocks xmlns:a="http://schemas.openxmlformats.org/drawingml/2006/main" noGrp="1"/>
-          </p:cNvSpPr>
-          <p:nvPr/>
-        </p:nvSpPr>
-        <p:spPr>
-          <a:xfrm xmlns:a="http://schemas.openxmlformats.org/drawingml/2006/main">
-            <a:off x="609600" y="2466975"/>
-            <a:ext cx="2400300" cy="742950"/>
+                <a16:creationId xmlns:a16="http://schemas.microsoft.com/office/drawing/2014/main" id="{322C47E8-8EAF-48E5-BF43-773981594D45}"/>
+              </a:ext>
+            </a:extLst>
+          </p:cNvPr>
+          <p:cNvSpPr>
+            <a:spLocks xmlns:a="http://schemas.openxmlformats.org/drawingml/2006/main" noGrp="1"/>
+          </p:cNvSpPr>
+          <p:nvPr/>
+        </p:nvSpPr>
+        <p:spPr>
+          <a:xfrm xmlns:a="http://schemas.openxmlformats.org/drawingml/2006/main">
+            <a:off x="609600" y="2057400"/>
+            <a:ext cx="10972800" cy="266700"/>
+          </a:xfrm>
+          <a:prstGeom xmlns:a="http://schemas.openxmlformats.org/drawingml/2006/main" prst="rect">
+            <a:avLst/>
+          </a:prstGeom>
+          <a:noFill xmlns:a="http://schemas.openxmlformats.org/drawingml/2006/main"/>
+          <a:ln xmlns:a="http://schemas.openxmlformats.org/drawingml/2006/main" w="0">
+            <a:noFill/>
+          </a:ln>
+        </p:spPr>
+        <p:txBody>
+          <a:bodyPr xmlns:a="http://schemas.openxmlformats.org/drawingml/2006/main" wrap="square" lIns="0" tIns="0" rIns="0" bIns="0" anchor="ctr">
+            <a:noAutofit/>
+          </a:bodyPr>
+          <a:lstStyle xmlns:a="http://schemas.openxmlformats.org/drawingml/2006/main"/>
+          <a:p xmlns:a="http://schemas.openxmlformats.org/drawingml/2006/main">
+            <a:pPr algn="l">
+              <a:defRPr sz="1500" b="0">
+                <a:solidFill>
+                  <a:srgbClr val="ADB8C5"/>
+                </a:solidFill>
+                <a:latin typeface="Roboto"/>
+                <a:ea typeface="Roboto"/>
+                <a:cs typeface="Roboto"/>
+              </a:defRPr>
+            </a:pPr>
+            <a:r>
+              <a:rPr sz="1500" b="0">
+                <a:solidFill>
+                  <a:srgbClr val="ADB8C5"/>
+                </a:solidFill>
+                <a:latin typeface="Roboto"/>
+                <a:ea typeface="Roboto"/>
+                <a:cs typeface="Roboto"/>
+              </a:rPr>
+              <a:t>Allowlist + required approval; deny when the gate is unavailable.</a:t>
+            </a:r>
+          </a:p>
+        </p:txBody>
+      </p:sp>
+      <p:sp>
+        <p:nvSpPr>
+          <p:cNvPr id="6" name="">
+            <a:extLst xmlns:a="http://schemas.openxmlformats.org/drawingml/2006/main">
+              <a:ext uri="{FF2B5EF4-FFF2-40B4-BE49-F238E27FC236}">
+                <a16:creationId xmlns:a16="http://schemas.microsoft.com/office/drawing/2014/main" id="{B2D71B0F-AF11-4F71-BD20-16CC7D2A5976}"/>
+              </a:ext>
+            </a:extLst>
+          </p:cNvPr>
+          <p:cNvSpPr>
+            <a:spLocks xmlns:a="http://schemas.openxmlformats.org/drawingml/2006/main" noGrp="1"/>
+          </p:cNvSpPr>
+          <p:nvPr/>
+        </p:nvSpPr>
+        <p:spPr>
+          <a:xfrm xmlns:a="http://schemas.openxmlformats.org/drawingml/2006/main">
+            <a:off x="609600" y="2457450"/>
+            <a:ext cx="2400300" cy="685800"/>
           </a:xfrm>
           <a:prstGeom xmlns:a="http://schemas.openxmlformats.org/drawingml/2006/main" prst="rect">
             <a:avLst/>
@@ -5627,22 +6100,22 @@
       </p:sp>
       <p:sp>
         <p:nvSpPr>
-          <p:cNvPr id="6" name="">
-            <a:extLst xmlns:a="http://schemas.openxmlformats.org/drawingml/2006/main">
-              <a:ext uri="{FF2B5EF4-FFF2-40B4-BE49-F238E27FC236}">
-                <a16:creationId xmlns:a16="http://schemas.microsoft.com/office/drawing/2014/main" id="{E430757B-5011-451E-A164-17D477966AD7}"/>
-              </a:ext>
-            </a:extLst>
-          </p:cNvPr>
-          <p:cNvSpPr>
-            <a:spLocks xmlns:a="http://schemas.openxmlformats.org/drawingml/2006/main" noGrp="1"/>
-          </p:cNvSpPr>
-          <p:nvPr/>
-        </p:nvSpPr>
-        <p:spPr>
-          <a:xfrm xmlns:a="http://schemas.openxmlformats.org/drawingml/2006/main">
-            <a:off x="723900" y="2543175"/>
-            <a:ext cx="2171700" cy="590550"/>
+          <p:cNvPr id="7" name="">
+            <a:extLst xmlns:a="http://schemas.openxmlformats.org/drawingml/2006/main">
+              <a:ext uri="{FF2B5EF4-FFF2-40B4-BE49-F238E27FC236}">
+                <a16:creationId xmlns:a16="http://schemas.microsoft.com/office/drawing/2014/main" id="{BB67BEEA-464C-44F7-BBE3-29B9EFA489C3}"/>
+              </a:ext>
+            </a:extLst>
+          </p:cNvPr>
+          <p:cNvSpPr>
+            <a:spLocks xmlns:a="http://schemas.openxmlformats.org/drawingml/2006/main" noGrp="1"/>
+          </p:cNvSpPr>
+          <p:nvPr/>
+        </p:nvSpPr>
+        <p:spPr>
+          <a:xfrm xmlns:a="http://schemas.openxmlformats.org/drawingml/2006/main">
+            <a:off x="723900" y="2533650"/>
+            <a:ext cx="2171700" cy="533400"/>
           </a:xfrm>
           <a:prstGeom xmlns:a="http://schemas.openxmlformats.org/drawingml/2006/main" prst="rect">
             <a:avLst/>
@@ -5684,22 +6157,22 @@
       </p:sp>
       <p:sp>
         <p:nvSpPr>
-          <p:cNvPr id="7" name="">
-            <a:extLst xmlns:a="http://schemas.openxmlformats.org/drawingml/2006/main">
-              <a:ext uri="{FF2B5EF4-FFF2-40B4-BE49-F238E27FC236}">
-                <a16:creationId xmlns:a16="http://schemas.microsoft.com/office/drawing/2014/main" id="{87743F06-7FE0-41D4-A02C-2ABC047FBDED}"/>
-              </a:ext>
-            </a:extLst>
-          </p:cNvPr>
-          <p:cNvSpPr>
-            <a:spLocks xmlns:a="http://schemas.openxmlformats.org/drawingml/2006/main" noGrp="1"/>
-          </p:cNvSpPr>
-          <p:nvPr/>
-        </p:nvSpPr>
-        <p:spPr>
-          <a:xfrm xmlns:a="http://schemas.openxmlformats.org/drawingml/2006/main">
-            <a:off x="3467100" y="2466975"/>
-            <a:ext cx="2400300" cy="742950"/>
+          <p:cNvPr id="8" name="">
+            <a:extLst xmlns:a="http://schemas.openxmlformats.org/drawingml/2006/main">
+              <a:ext uri="{FF2B5EF4-FFF2-40B4-BE49-F238E27FC236}">
+                <a16:creationId xmlns:a16="http://schemas.microsoft.com/office/drawing/2014/main" id="{3A51F3FC-05A0-42A5-A727-A970B6438FFA}"/>
+              </a:ext>
+            </a:extLst>
+          </p:cNvPr>
+          <p:cNvSpPr>
+            <a:spLocks xmlns:a="http://schemas.openxmlformats.org/drawingml/2006/main" noGrp="1"/>
+          </p:cNvSpPr>
+          <p:nvPr/>
+        </p:nvSpPr>
+        <p:spPr>
+          <a:xfrm xmlns:a="http://schemas.openxmlformats.org/drawingml/2006/main">
+            <a:off x="3467100" y="2457450"/>
+            <a:ext cx="2400300" cy="685800"/>
           </a:xfrm>
           <a:prstGeom xmlns:a="http://schemas.openxmlformats.org/drawingml/2006/main" prst="rect">
             <a:avLst/>
@@ -5717,22 +6190,22 @@
       </p:sp>
       <p:sp>
         <p:nvSpPr>
-          <p:cNvPr id="8" name="">
-            <a:extLst xmlns:a="http://schemas.openxmlformats.org/drawingml/2006/main">
-              <a:ext uri="{FF2B5EF4-FFF2-40B4-BE49-F238E27FC236}">
-                <a16:creationId xmlns:a16="http://schemas.microsoft.com/office/drawing/2014/main" id="{4F2645F5-EBEE-4A1C-AFCB-4DE91AE79D12}"/>
-              </a:ext>
-            </a:extLst>
-          </p:cNvPr>
-          <p:cNvSpPr>
-            <a:spLocks xmlns:a="http://schemas.openxmlformats.org/drawingml/2006/main" noGrp="1"/>
-          </p:cNvSpPr>
-          <p:nvPr/>
-        </p:nvSpPr>
-        <p:spPr>
-          <a:xfrm xmlns:a="http://schemas.openxmlformats.org/drawingml/2006/main">
-            <a:off x="3581400" y="2543175"/>
-            <a:ext cx="2171700" cy="590550"/>
+          <p:cNvPr id="9" name="">
+            <a:extLst xmlns:a="http://schemas.openxmlformats.org/drawingml/2006/main">
+              <a:ext uri="{FF2B5EF4-FFF2-40B4-BE49-F238E27FC236}">
+                <a16:creationId xmlns:a16="http://schemas.microsoft.com/office/drawing/2014/main" id="{D9654680-967E-4E09-8E96-7CF02C0985A8}"/>
+              </a:ext>
+            </a:extLst>
+          </p:cNvPr>
+          <p:cNvSpPr>
+            <a:spLocks xmlns:a="http://schemas.openxmlformats.org/drawingml/2006/main" noGrp="1"/>
+          </p:cNvSpPr>
+          <p:nvPr/>
+        </p:nvSpPr>
+        <p:spPr>
+          <a:xfrm xmlns:a="http://schemas.openxmlformats.org/drawingml/2006/main">
+            <a:off x="3581400" y="2533650"/>
+            <a:ext cx="2171700" cy="533400"/>
           </a:xfrm>
           <a:prstGeom xmlns:a="http://schemas.openxmlformats.org/drawingml/2006/main" prst="rect">
             <a:avLst/>
@@ -5774,22 +6247,22 @@
       </p:sp>
       <p:sp>
         <p:nvSpPr>
-          <p:cNvPr id="9" name="">
-            <a:extLst xmlns:a="http://schemas.openxmlformats.org/drawingml/2006/main">
-              <a:ext uri="{FF2B5EF4-FFF2-40B4-BE49-F238E27FC236}">
-                <a16:creationId xmlns:a16="http://schemas.microsoft.com/office/drawing/2014/main" id="{14EE02E6-6943-4BED-A3E0-882B060577C2}"/>
-              </a:ext>
-            </a:extLst>
-          </p:cNvPr>
-          <p:cNvSpPr>
-            <a:spLocks xmlns:a="http://schemas.openxmlformats.org/drawingml/2006/main" noGrp="1"/>
-          </p:cNvSpPr>
-          <p:nvPr/>
-        </p:nvSpPr>
-        <p:spPr>
-          <a:xfrm xmlns:a="http://schemas.openxmlformats.org/drawingml/2006/main">
-            <a:off x="6324600" y="2466975"/>
-            <a:ext cx="2400300" cy="742950"/>
+          <p:cNvPr id="10" name="">
+            <a:extLst xmlns:a="http://schemas.openxmlformats.org/drawingml/2006/main">
+              <a:ext uri="{FF2B5EF4-FFF2-40B4-BE49-F238E27FC236}">
+                <a16:creationId xmlns:a16="http://schemas.microsoft.com/office/drawing/2014/main" id="{F051C155-23EC-481E-B4AB-0175A4A51BE8}"/>
+              </a:ext>
+            </a:extLst>
+          </p:cNvPr>
+          <p:cNvSpPr>
+            <a:spLocks xmlns:a="http://schemas.openxmlformats.org/drawingml/2006/main" noGrp="1"/>
+          </p:cNvSpPr>
+          <p:nvPr/>
+        </p:nvSpPr>
+        <p:spPr>
+          <a:xfrm xmlns:a="http://schemas.openxmlformats.org/drawingml/2006/main">
+            <a:off x="6324600" y="2457450"/>
+            <a:ext cx="2400300" cy="685800"/>
           </a:xfrm>
           <a:prstGeom xmlns:a="http://schemas.openxmlformats.org/drawingml/2006/main" prst="rect">
             <a:avLst/>
@@ -5807,22 +6280,22 @@
       </p:sp>
       <p:sp>
         <p:nvSpPr>
-          <p:cNvPr id="10" name="">
-            <a:extLst xmlns:a="http://schemas.openxmlformats.org/drawingml/2006/main">
-              <a:ext uri="{FF2B5EF4-FFF2-40B4-BE49-F238E27FC236}">
-                <a16:creationId xmlns:a16="http://schemas.microsoft.com/office/drawing/2014/main" id="{1EBFCCBB-3083-4DB7-ABA2-19FF9FD5D990}"/>
-              </a:ext>
-            </a:extLst>
-          </p:cNvPr>
-          <p:cNvSpPr>
-            <a:spLocks xmlns:a="http://schemas.openxmlformats.org/drawingml/2006/main" noGrp="1"/>
-          </p:cNvSpPr>
-          <p:nvPr/>
-        </p:nvSpPr>
-        <p:spPr>
-          <a:xfrm xmlns:a="http://schemas.openxmlformats.org/drawingml/2006/main">
-            <a:off x="6438900" y="2543175"/>
-            <a:ext cx="2171700" cy="590550"/>
+          <p:cNvPr id="11" name="">
+            <a:extLst xmlns:a="http://schemas.openxmlformats.org/drawingml/2006/main">
+              <a:ext uri="{FF2B5EF4-FFF2-40B4-BE49-F238E27FC236}">
+                <a16:creationId xmlns:a16="http://schemas.microsoft.com/office/drawing/2014/main" id="{F5508DC2-7D69-4B9E-B0BB-3332CCEF6922}"/>
+              </a:ext>
+            </a:extLst>
+          </p:cNvPr>
+          <p:cNvSpPr>
+            <a:spLocks xmlns:a="http://schemas.openxmlformats.org/drawingml/2006/main" noGrp="1"/>
+          </p:cNvSpPr>
+          <p:nvPr/>
+        </p:nvSpPr>
+        <p:spPr>
+          <a:xfrm xmlns:a="http://schemas.openxmlformats.org/drawingml/2006/main">
+            <a:off x="6438900" y="2533650"/>
+            <a:ext cx="2171700" cy="533400"/>
           </a:xfrm>
           <a:prstGeom xmlns:a="http://schemas.openxmlformats.org/drawingml/2006/main" prst="rect">
             <a:avLst/>
@@ -5864,22 +6337,22 @@
       </p:sp>
       <p:sp>
         <p:nvSpPr>
-          <p:cNvPr id="11" name="">
-            <a:extLst xmlns:a="http://schemas.openxmlformats.org/drawingml/2006/main">
-              <a:ext uri="{FF2B5EF4-FFF2-40B4-BE49-F238E27FC236}">
-                <a16:creationId xmlns:a16="http://schemas.microsoft.com/office/drawing/2014/main" id="{D501A6A2-E5FC-463C-B731-B7BE45FBD4BE}"/>
-              </a:ext>
-            </a:extLst>
-          </p:cNvPr>
-          <p:cNvSpPr>
-            <a:spLocks xmlns:a="http://schemas.openxmlformats.org/drawingml/2006/main" noGrp="1"/>
-          </p:cNvSpPr>
-          <p:nvPr/>
-        </p:nvSpPr>
-        <p:spPr>
-          <a:xfrm xmlns:a="http://schemas.openxmlformats.org/drawingml/2006/main">
-            <a:off x="9182100" y="2466975"/>
-            <a:ext cx="2400300" cy="742950"/>
+          <p:cNvPr id="12" name="">
+            <a:extLst xmlns:a="http://schemas.openxmlformats.org/drawingml/2006/main">
+              <a:ext uri="{FF2B5EF4-FFF2-40B4-BE49-F238E27FC236}">
+                <a16:creationId xmlns:a16="http://schemas.microsoft.com/office/drawing/2014/main" id="{28B37610-185E-4B97-8BC0-D5C6A15E55F9}"/>
+              </a:ext>
+            </a:extLst>
+          </p:cNvPr>
+          <p:cNvSpPr>
+            <a:spLocks xmlns:a="http://schemas.openxmlformats.org/drawingml/2006/main" noGrp="1"/>
+          </p:cNvSpPr>
+          <p:nvPr/>
+        </p:nvSpPr>
+        <p:spPr>
+          <a:xfrm xmlns:a="http://schemas.openxmlformats.org/drawingml/2006/main">
+            <a:off x="9182100" y="2457450"/>
+            <a:ext cx="2400300" cy="685800"/>
           </a:xfrm>
           <a:prstGeom xmlns:a="http://schemas.openxmlformats.org/drawingml/2006/main" prst="rect">
             <a:avLst/>
@@ -5897,22 +6370,22 @@
       </p:sp>
       <p:sp>
         <p:nvSpPr>
-          <p:cNvPr id="12" name="">
-            <a:extLst xmlns:a="http://schemas.openxmlformats.org/drawingml/2006/main">
-              <a:ext uri="{FF2B5EF4-FFF2-40B4-BE49-F238E27FC236}">
-                <a16:creationId xmlns:a16="http://schemas.microsoft.com/office/drawing/2014/main" id="{CC9733EA-EB5C-461A-9D5B-5749351F1BD6}"/>
-              </a:ext>
-            </a:extLst>
-          </p:cNvPr>
-          <p:cNvSpPr>
-            <a:spLocks xmlns:a="http://schemas.openxmlformats.org/drawingml/2006/main" noGrp="1"/>
-          </p:cNvSpPr>
-          <p:nvPr/>
-        </p:nvSpPr>
-        <p:spPr>
-          <a:xfrm xmlns:a="http://schemas.openxmlformats.org/drawingml/2006/main">
-            <a:off x="9296400" y="2543175"/>
-            <a:ext cx="2171700" cy="590550"/>
+          <p:cNvPr id="13" name="">
+            <a:extLst xmlns:a="http://schemas.openxmlformats.org/drawingml/2006/main">
+              <a:ext uri="{FF2B5EF4-FFF2-40B4-BE49-F238E27FC236}">
+                <a16:creationId xmlns:a16="http://schemas.microsoft.com/office/drawing/2014/main" id="{E684E6C3-AAB2-409A-A465-DCCAA8DEB7AB}"/>
+              </a:ext>
+            </a:extLst>
+          </p:cNvPr>
+          <p:cNvSpPr>
+            <a:spLocks xmlns:a="http://schemas.openxmlformats.org/drawingml/2006/main" noGrp="1"/>
+          </p:cNvSpPr>
+          <p:nvPr/>
+        </p:nvSpPr>
+        <p:spPr>
+          <a:xfrm xmlns:a="http://schemas.openxmlformats.org/drawingml/2006/main">
+            <a:off x="9296400" y="2533650"/>
+            <a:ext cx="2171700" cy="533400"/>
           </a:xfrm>
           <a:prstGeom xmlns:a="http://schemas.openxmlformats.org/drawingml/2006/main" prst="rect">
             <a:avLst/>
@@ -5954,16 +6427,16 @@
       </p:sp>
       <p:cxnSp>
         <p:nvCxnSpPr>
-          <p:cNvPr id="46" name=""/>
+          <p:cNvPr id="52" name=""/>
           <p:cNvCxnSpPr>
-            <a:stCxn xmlns:a="http://schemas.openxmlformats.org/drawingml/2006/main" id="5" idx="3"/>
-            <a:endCxn xmlns:a="http://schemas.openxmlformats.org/drawingml/2006/main" id="7" idx="1"/>
+            <a:stCxn xmlns:a="http://schemas.openxmlformats.org/drawingml/2006/main" id="6" idx="3"/>
+            <a:endCxn xmlns:a="http://schemas.openxmlformats.org/drawingml/2006/main" id="8" idx="1"/>
           </p:cNvCxnSpPr>
           <p:nvPr/>
         </p:nvCxnSpPr>
         <p:spPr>
           <a:xfrm xmlns:a="http://schemas.openxmlformats.org/drawingml/2006/main">
-            <a:off x="3009900" y="2838450"/>
+            <a:off x="3009900" y="2800350"/>
             <a:ext cx="457200" cy="0"/>
           </a:xfrm>
           <a:prstGeom xmlns:a="http://schemas.openxmlformats.org/drawingml/2006/main" prst="straightConnector1">
@@ -5980,16 +6453,16 @@
       </p:cxnSp>
       <p:cxnSp>
         <p:nvCxnSpPr>
-          <p:cNvPr id="47" name=""/>
+          <p:cNvPr id="53" name=""/>
           <p:cNvCxnSpPr>
-            <a:stCxn xmlns:a="http://schemas.openxmlformats.org/drawingml/2006/main" id="7" idx="3"/>
-            <a:endCxn xmlns:a="http://schemas.openxmlformats.org/drawingml/2006/main" id="9" idx="1"/>
+            <a:stCxn xmlns:a="http://schemas.openxmlformats.org/drawingml/2006/main" id="8" idx="3"/>
+            <a:endCxn xmlns:a="http://schemas.openxmlformats.org/drawingml/2006/main" id="10" idx="1"/>
           </p:cNvCxnSpPr>
           <p:nvPr/>
         </p:nvCxnSpPr>
         <p:spPr>
           <a:xfrm xmlns:a="http://schemas.openxmlformats.org/drawingml/2006/main">
-            <a:off x="5867400" y="2838450"/>
+            <a:off x="5867400" y="2800350"/>
             <a:ext cx="457200" cy="0"/>
           </a:xfrm>
           <a:prstGeom xmlns:a="http://schemas.openxmlformats.org/drawingml/2006/main" prst="straightConnector1">
@@ -6006,16 +6479,16 @@
       </p:cxnSp>
       <p:cxnSp>
         <p:nvCxnSpPr>
-          <p:cNvPr id="48" name=""/>
+          <p:cNvPr id="54" name=""/>
           <p:cNvCxnSpPr>
-            <a:stCxn xmlns:a="http://schemas.openxmlformats.org/drawingml/2006/main" id="9" idx="3"/>
-            <a:endCxn xmlns:a="http://schemas.openxmlformats.org/drawingml/2006/main" id="11" idx="1"/>
+            <a:stCxn xmlns:a="http://schemas.openxmlformats.org/drawingml/2006/main" id="10" idx="3"/>
+            <a:endCxn xmlns:a="http://schemas.openxmlformats.org/drawingml/2006/main" id="12" idx="1"/>
           </p:cNvCxnSpPr>
           <p:nvPr/>
         </p:nvCxnSpPr>
         <p:spPr>
           <a:xfrm xmlns:a="http://schemas.openxmlformats.org/drawingml/2006/main">
-            <a:off x="8724900" y="2838450"/>
+            <a:off x="8724900" y="2800350"/>
             <a:ext cx="457200" cy="0"/>
           </a:xfrm>
           <a:prstGeom xmlns:a="http://schemas.openxmlformats.org/drawingml/2006/main" prst="straightConnector1">
@@ -6032,22 +6505,22 @@
       </p:cxnSp>
       <p:sp>
         <p:nvSpPr>
-          <p:cNvPr id="16" name="">
-            <a:extLst xmlns:a="http://schemas.openxmlformats.org/drawingml/2006/main">
-              <a:ext uri="{FF2B5EF4-FFF2-40B4-BE49-F238E27FC236}">
-                <a16:creationId xmlns:a16="http://schemas.microsoft.com/office/drawing/2014/main" id="{3609706A-7CC5-40C7-99DB-EC68DF4BB62A}"/>
-              </a:ext>
-            </a:extLst>
-          </p:cNvPr>
-          <p:cNvSpPr>
-            <a:spLocks xmlns:a="http://schemas.openxmlformats.org/drawingml/2006/main" noGrp="1"/>
-          </p:cNvSpPr>
-          <p:nvPr/>
-        </p:nvSpPr>
-        <p:spPr>
-          <a:xfrm xmlns:a="http://schemas.openxmlformats.org/drawingml/2006/main">
-            <a:off x="609600" y="2114550"/>
-            <a:ext cx="10972800" cy="276225"/>
+          <p:cNvPr id="17" name="">
+            <a:extLst xmlns:a="http://schemas.openxmlformats.org/drawingml/2006/main">
+              <a:ext uri="{FF2B5EF4-FFF2-40B4-BE49-F238E27FC236}">
+                <a16:creationId xmlns:a16="http://schemas.microsoft.com/office/drawing/2014/main" id="{D78AF184-CFAB-447B-9690-B38ECE3A4CCE}"/>
+              </a:ext>
+            </a:extLst>
+          </p:cNvPr>
+          <p:cNvSpPr>
+            <a:spLocks xmlns:a="http://schemas.openxmlformats.org/drawingml/2006/main" noGrp="1"/>
+          </p:cNvSpPr>
+          <p:nvPr/>
+        </p:nvSpPr>
+        <p:spPr>
+          <a:xfrm xmlns:a="http://schemas.openxmlformats.org/drawingml/2006/main">
+            <a:off x="609600" y="3400425"/>
+            <a:ext cx="2609850" cy="247650"/>
           </a:xfrm>
           <a:prstGeom xmlns:a="http://schemas.openxmlformats.org/drawingml/2006/main" prst="rect">
             <a:avLst/>
@@ -6064,7 +6537,64 @@
           <a:lstStyle xmlns:a="http://schemas.openxmlformats.org/drawingml/2006/main"/>
           <a:p xmlns:a="http://schemas.openxmlformats.org/drawingml/2006/main">
             <a:pPr algn="l">
-              <a:defRPr sz="1500" b="0">
+              <a:defRPr sz="1350" b="1">
+                <a:solidFill>
+                  <a:srgbClr val="28C7F7"/>
+                </a:solidFill>
+                <a:latin typeface="Roboto"/>
+                <a:ea typeface="Roboto"/>
+                <a:cs typeface="Roboto"/>
+              </a:defRPr>
+            </a:pPr>
+            <a:r>
+              <a:rPr sz="1350" b="1">
+                <a:solidFill>
+                  <a:srgbClr val="28C7F7"/>
+                </a:solidFill>
+                <a:latin typeface="Roboto"/>
+                <a:ea typeface="Roboto"/>
+                <a:cs typeface="Roboto"/>
+              </a:rPr>
+              <a:t>ARCHITECTURE ALSO OWNS</a:t>
+            </a:r>
+          </a:p>
+        </p:txBody>
+      </p:sp>
+      <p:sp>
+        <p:nvSpPr>
+          <p:cNvPr id="18" name="">
+            <a:extLst xmlns:a="http://schemas.openxmlformats.org/drawingml/2006/main">
+              <a:ext uri="{FF2B5EF4-FFF2-40B4-BE49-F238E27FC236}">
+                <a16:creationId xmlns:a16="http://schemas.microsoft.com/office/drawing/2014/main" id="{799A0CB5-F0C7-4A68-908F-435A8D00BA84}"/>
+              </a:ext>
+            </a:extLst>
+          </p:cNvPr>
+          <p:cNvSpPr>
+            <a:spLocks xmlns:a="http://schemas.openxmlformats.org/drawingml/2006/main" noGrp="1"/>
+          </p:cNvSpPr>
+          <p:nvPr/>
+        </p:nvSpPr>
+        <p:spPr>
+          <a:xfrm xmlns:a="http://schemas.openxmlformats.org/drawingml/2006/main">
+            <a:off x="609600" y="3695700"/>
+            <a:ext cx="2609850" cy="295275"/>
+          </a:xfrm>
+          <a:prstGeom xmlns:a="http://schemas.openxmlformats.org/drawingml/2006/main" prst="rect">
+            <a:avLst/>
+          </a:prstGeom>
+          <a:noFill xmlns:a="http://schemas.openxmlformats.org/drawingml/2006/main"/>
+          <a:ln xmlns:a="http://schemas.openxmlformats.org/drawingml/2006/main" w="0">
+            <a:noFill/>
+          </a:ln>
+        </p:spPr>
+        <p:txBody>
+          <a:bodyPr xmlns:a="http://schemas.openxmlformats.org/drawingml/2006/main" wrap="square" lIns="0" tIns="0" rIns="0" bIns="0" anchor="ctr">
+            <a:noAutofit/>
+          </a:bodyPr>
+          <a:lstStyle xmlns:a="http://schemas.openxmlformats.org/drawingml/2006/main"/>
+          <a:p xmlns:a="http://schemas.openxmlformats.org/drawingml/2006/main">
+            <a:pPr algn="l">
+              <a:defRPr sz="1425" b="0">
                 <a:solidFill>
                   <a:srgbClr val="ADB8C5"/>
                 </a:solidFill>
@@ -6074,7 +6604,7 @@
               </a:defRPr>
             </a:pPr>
             <a:r>
-              <a:rPr sz="1500" b="0">
+              <a:rPr sz="1425" b="0">
                 <a:solidFill>
                   <a:srgbClr val="ADB8C5"/>
                 </a:solidFill>
@@ -6082,29 +6612,143 @@
                 <a:ea typeface="Roboto"/>
                 <a:cs typeface="Roboto"/>
               </a:rPr>
-              <a:t>Allowlist + required approval; deny when the gate is unavailable.</a:t>
-            </a:r>
-          </a:p>
-        </p:txBody>
-      </p:sp>
-      <p:sp>
-        <p:nvSpPr>
-          <p:cNvPr id="17" name="">
-            <a:extLst xmlns:a="http://schemas.openxmlformats.org/drawingml/2006/main">
-              <a:ext uri="{FF2B5EF4-FFF2-40B4-BE49-F238E27FC236}">
-                <a16:creationId xmlns:a16="http://schemas.microsoft.com/office/drawing/2014/main" id="{14218C54-BDA0-4F62-A409-6E0898F5C4E4}"/>
-              </a:ext>
-            </a:extLst>
-          </p:cNvPr>
-          <p:cNvSpPr>
-            <a:spLocks xmlns:a="http://schemas.openxmlformats.org/drawingml/2006/main" noGrp="1"/>
-          </p:cNvSpPr>
-          <p:nvPr/>
-        </p:nvSpPr>
-        <p:spPr>
-          <a:xfrm xmlns:a="http://schemas.openxmlformats.org/drawingml/2006/main">
-            <a:off x="6324600" y="3781425"/>
-            <a:ext cx="2400300" cy="409575"/>
+              <a:t>Provider changes and isolation</a:t>
+            </a:r>
+          </a:p>
+        </p:txBody>
+      </p:sp>
+      <p:sp>
+        <p:nvSpPr>
+          <p:cNvPr id="19" name="">
+            <a:extLst xmlns:a="http://schemas.openxmlformats.org/drawingml/2006/main">
+              <a:ext uri="{FF2B5EF4-FFF2-40B4-BE49-F238E27FC236}">
+                <a16:creationId xmlns:a16="http://schemas.microsoft.com/office/drawing/2014/main" id="{59E90FC7-54B5-4B5D-B932-516EDF30201B}"/>
+              </a:ext>
+            </a:extLst>
+          </p:cNvPr>
+          <p:cNvSpPr>
+            <a:spLocks xmlns:a="http://schemas.openxmlformats.org/drawingml/2006/main" noGrp="1"/>
+          </p:cNvSpPr>
+          <p:nvPr/>
+        </p:nvSpPr>
+        <p:spPr>
+          <a:xfrm xmlns:a="http://schemas.openxmlformats.org/drawingml/2006/main">
+            <a:off x="609600" y="4019550"/>
+            <a:ext cx="2609850" cy="295275"/>
+          </a:xfrm>
+          <a:prstGeom xmlns:a="http://schemas.openxmlformats.org/drawingml/2006/main" prst="rect">
+            <a:avLst/>
+          </a:prstGeom>
+          <a:noFill xmlns:a="http://schemas.openxmlformats.org/drawingml/2006/main"/>
+          <a:ln xmlns:a="http://schemas.openxmlformats.org/drawingml/2006/main" w="0">
+            <a:noFill/>
+          </a:ln>
+        </p:spPr>
+        <p:txBody>
+          <a:bodyPr xmlns:a="http://schemas.openxmlformats.org/drawingml/2006/main" wrap="square" lIns="0" tIns="0" rIns="0" bIns="0" anchor="ctr">
+            <a:noAutofit/>
+          </a:bodyPr>
+          <a:lstStyle xmlns:a="http://schemas.openxmlformats.org/drawingml/2006/main"/>
+          <a:p xmlns:a="http://schemas.openxmlformats.org/drawingml/2006/main">
+            <a:pPr algn="l">
+              <a:defRPr sz="1425" b="0">
+                <a:solidFill>
+                  <a:srgbClr val="ADB8C5"/>
+                </a:solidFill>
+                <a:latin typeface="Roboto"/>
+                <a:ea typeface="Roboto"/>
+                <a:cs typeface="Roboto"/>
+              </a:defRPr>
+            </a:pPr>
+            <a:r>
+              <a:rPr sz="1425" b="0">
+                <a:solidFill>
+                  <a:srgbClr val="ADB8C5"/>
+                </a:solidFill>
+                <a:latin typeface="Roboto"/>
+                <a:ea typeface="Roboto"/>
+                <a:cs typeface="Roboto"/>
+              </a:rPr>
+              <a:t>Human response capacity</a:t>
+            </a:r>
+          </a:p>
+        </p:txBody>
+      </p:sp>
+      <p:sp>
+        <p:nvSpPr>
+          <p:cNvPr id="20" name="">
+            <a:extLst xmlns:a="http://schemas.openxmlformats.org/drawingml/2006/main">
+              <a:ext uri="{FF2B5EF4-FFF2-40B4-BE49-F238E27FC236}">
+                <a16:creationId xmlns:a16="http://schemas.microsoft.com/office/drawing/2014/main" id="{FF3B1614-600A-484E-8914-726FBD23D9D4}"/>
+              </a:ext>
+            </a:extLst>
+          </p:cNvPr>
+          <p:cNvSpPr>
+            <a:spLocks xmlns:a="http://schemas.openxmlformats.org/drawingml/2006/main" noGrp="1"/>
+          </p:cNvSpPr>
+          <p:nvPr/>
+        </p:nvSpPr>
+        <p:spPr>
+          <a:xfrm xmlns:a="http://schemas.openxmlformats.org/drawingml/2006/main">
+            <a:off x="609600" y="4343400"/>
+            <a:ext cx="2609850" cy="295275"/>
+          </a:xfrm>
+          <a:prstGeom xmlns:a="http://schemas.openxmlformats.org/drawingml/2006/main" prst="rect">
+            <a:avLst/>
+          </a:prstGeom>
+          <a:noFill xmlns:a="http://schemas.openxmlformats.org/drawingml/2006/main"/>
+          <a:ln xmlns:a="http://schemas.openxmlformats.org/drawingml/2006/main" w="0">
+            <a:noFill/>
+          </a:ln>
+        </p:spPr>
+        <p:txBody>
+          <a:bodyPr xmlns:a="http://schemas.openxmlformats.org/drawingml/2006/main" wrap="square" lIns="0" tIns="0" rIns="0" bIns="0" anchor="ctr">
+            <a:noAutofit/>
+          </a:bodyPr>
+          <a:lstStyle xmlns:a="http://schemas.openxmlformats.org/drawingml/2006/main"/>
+          <a:p xmlns:a="http://schemas.openxmlformats.org/drawingml/2006/main">
+            <a:pPr algn="l">
+              <a:defRPr sz="1425" b="0">
+                <a:solidFill>
+                  <a:srgbClr val="ADB8C5"/>
+                </a:solidFill>
+                <a:latin typeface="Roboto"/>
+                <a:ea typeface="Roboto"/>
+                <a:cs typeface="Roboto"/>
+              </a:defRPr>
+            </a:pPr>
+            <a:r>
+              <a:rPr sz="1425" b="0">
+                <a:solidFill>
+                  <a:srgbClr val="ADB8C5"/>
+                </a:solidFill>
+                <a:latin typeface="Roboto"/>
+                <a:ea typeface="Roboto"/>
+                <a:cs typeface="Roboto"/>
+              </a:rPr>
+              <a:t>Fallible semantic checks</a:t>
+            </a:r>
+          </a:p>
+        </p:txBody>
+      </p:sp>
+      <p:sp>
+        <p:nvSpPr>
+          <p:cNvPr id="21" name="">
+            <a:extLst xmlns:a="http://schemas.openxmlformats.org/drawingml/2006/main">
+              <a:ext uri="{FF2B5EF4-FFF2-40B4-BE49-F238E27FC236}">
+                <a16:creationId xmlns:a16="http://schemas.microsoft.com/office/drawing/2014/main" id="{98DBAC77-0FCF-4F06-B5BB-59BE60184A68}"/>
+              </a:ext>
+            </a:extLst>
+          </p:cNvPr>
+          <p:cNvSpPr>
+            <a:spLocks xmlns:a="http://schemas.openxmlformats.org/drawingml/2006/main" noGrp="1"/>
+          </p:cNvSpPr>
+          <p:nvPr/>
+        </p:nvSpPr>
+        <p:spPr>
+          <a:xfrm xmlns:a="http://schemas.openxmlformats.org/drawingml/2006/main">
+            <a:off x="6324600" y="3543300"/>
+            <a:ext cx="2400300" cy="361950"/>
           </a:xfrm>
           <a:prstGeom xmlns:a="http://schemas.openxmlformats.org/drawingml/2006/main" prst="rect">
             <a:avLst/>
@@ -6122,22 +6766,22 @@
       </p:sp>
       <p:sp>
         <p:nvSpPr>
-          <p:cNvPr id="18" name="">
-            <a:extLst xmlns:a="http://schemas.openxmlformats.org/drawingml/2006/main">
-              <a:ext uri="{FF2B5EF4-FFF2-40B4-BE49-F238E27FC236}">
-                <a16:creationId xmlns:a16="http://schemas.microsoft.com/office/drawing/2014/main" id="{A1575A20-3B4E-4CCC-8AB2-FD9620DCA9BE}"/>
-              </a:ext>
-            </a:extLst>
-          </p:cNvPr>
-          <p:cNvSpPr>
-            <a:spLocks xmlns:a="http://schemas.openxmlformats.org/drawingml/2006/main" noGrp="1"/>
-          </p:cNvSpPr>
-          <p:nvPr/>
-        </p:nvSpPr>
-        <p:spPr>
-          <a:xfrm xmlns:a="http://schemas.openxmlformats.org/drawingml/2006/main">
-            <a:off x="6438900" y="3857625"/>
-            <a:ext cx="2171700" cy="257175"/>
+          <p:cNvPr id="22" name="">
+            <a:extLst xmlns:a="http://schemas.openxmlformats.org/drawingml/2006/main">
+              <a:ext uri="{FF2B5EF4-FFF2-40B4-BE49-F238E27FC236}">
+                <a16:creationId xmlns:a16="http://schemas.microsoft.com/office/drawing/2014/main" id="{43901F42-A3B6-4972-8D86-3E2521386D7E}"/>
+              </a:ext>
+            </a:extLst>
+          </p:cNvPr>
+          <p:cNvSpPr>
+            <a:spLocks xmlns:a="http://schemas.openxmlformats.org/drawingml/2006/main" noGrp="1"/>
+          </p:cNvSpPr>
+          <p:nvPr/>
+        </p:nvSpPr>
+        <p:spPr>
+          <a:xfrm xmlns:a="http://schemas.openxmlformats.org/drawingml/2006/main">
+            <a:off x="6438900" y="3619500"/>
+            <a:ext cx="2171700" cy="209550"/>
           </a:xfrm>
           <a:prstGeom xmlns:a="http://schemas.openxmlformats.org/drawingml/2006/main" prst="rect">
             <a:avLst/>
@@ -6179,22 +6823,22 @@
       </p:sp>
       <p:sp>
         <p:nvSpPr>
-          <p:cNvPr id="19" name="">
-            <a:extLst xmlns:a="http://schemas.openxmlformats.org/drawingml/2006/main">
-              <a:ext uri="{FF2B5EF4-FFF2-40B4-BE49-F238E27FC236}">
-                <a16:creationId xmlns:a16="http://schemas.microsoft.com/office/drawing/2014/main" id="{2CFA7870-F98C-4FCC-A6D3-C3DCE19D5EAE}"/>
-              </a:ext>
-            </a:extLst>
-          </p:cNvPr>
-          <p:cNvSpPr>
-            <a:spLocks xmlns:a="http://schemas.openxmlformats.org/drawingml/2006/main" noGrp="1"/>
-          </p:cNvSpPr>
-          <p:nvPr/>
-        </p:nvSpPr>
-        <p:spPr>
-          <a:xfrm xmlns:a="http://schemas.openxmlformats.org/drawingml/2006/main">
-            <a:off x="9182100" y="4524375"/>
-            <a:ext cx="2400300" cy="666750"/>
+          <p:cNvPr id="23" name="">
+            <a:extLst xmlns:a="http://schemas.openxmlformats.org/drawingml/2006/main">
+              <a:ext uri="{FF2B5EF4-FFF2-40B4-BE49-F238E27FC236}">
+                <a16:creationId xmlns:a16="http://schemas.microsoft.com/office/drawing/2014/main" id="{A15DEE46-9DA6-4207-9685-EBB74987B7C6}"/>
+              </a:ext>
+            </a:extLst>
+          </p:cNvPr>
+          <p:cNvSpPr>
+            <a:spLocks xmlns:a="http://schemas.openxmlformats.org/drawingml/2006/main" noGrp="1"/>
+          </p:cNvSpPr>
+          <p:nvPr/>
+        </p:nvSpPr>
+        <p:spPr>
+          <a:xfrm xmlns:a="http://schemas.openxmlformats.org/drawingml/2006/main">
+            <a:off x="9182100" y="4229100"/>
+            <a:ext cx="2400300" cy="571500"/>
           </a:xfrm>
           <a:prstGeom xmlns:a="http://schemas.openxmlformats.org/drawingml/2006/main" prst="rect">
             <a:avLst/>
@@ -6212,22 +6856,22 @@
       </p:sp>
       <p:sp>
         <p:nvSpPr>
-          <p:cNvPr id="20" name="">
-            <a:extLst xmlns:a="http://schemas.openxmlformats.org/drawingml/2006/main">
-              <a:ext uri="{FF2B5EF4-FFF2-40B4-BE49-F238E27FC236}">
-                <a16:creationId xmlns:a16="http://schemas.microsoft.com/office/drawing/2014/main" id="{3F2A35BE-9F72-4C06-9793-87129B7C37C2}"/>
-              </a:ext>
-            </a:extLst>
-          </p:cNvPr>
-          <p:cNvSpPr>
-            <a:spLocks xmlns:a="http://schemas.openxmlformats.org/drawingml/2006/main" noGrp="1"/>
-          </p:cNvSpPr>
-          <p:nvPr/>
-        </p:nvSpPr>
-        <p:spPr>
-          <a:xfrm xmlns:a="http://schemas.openxmlformats.org/drawingml/2006/main">
-            <a:off x="9296400" y="4600575"/>
-            <a:ext cx="2171700" cy="514350"/>
+          <p:cNvPr id="24" name="">
+            <a:extLst xmlns:a="http://schemas.openxmlformats.org/drawingml/2006/main">
+              <a:ext uri="{FF2B5EF4-FFF2-40B4-BE49-F238E27FC236}">
+                <a16:creationId xmlns:a16="http://schemas.microsoft.com/office/drawing/2014/main" id="{3339EF18-EF41-4219-A37C-84AF99659032}"/>
+              </a:ext>
+            </a:extLst>
+          </p:cNvPr>
+          <p:cNvSpPr>
+            <a:spLocks xmlns:a="http://schemas.openxmlformats.org/drawingml/2006/main" noGrp="1"/>
+          </p:cNvSpPr>
+          <p:nvPr/>
+        </p:nvSpPr>
+        <p:spPr>
+          <a:xfrm xmlns:a="http://schemas.openxmlformats.org/drawingml/2006/main">
+            <a:off x="9296400" y="4305300"/>
+            <a:ext cx="2171700" cy="419100"/>
           </a:xfrm>
           <a:prstGeom xmlns:a="http://schemas.openxmlformats.org/drawingml/2006/main" prst="rect">
             <a:avLst/>
@@ -6269,22 +6913,22 @@
       </p:sp>
       <p:sp>
         <p:nvSpPr>
-          <p:cNvPr id="21" name="">
-            <a:extLst xmlns:a="http://schemas.openxmlformats.org/drawingml/2006/main">
-              <a:ext uri="{FF2B5EF4-FFF2-40B4-BE49-F238E27FC236}">
-                <a16:creationId xmlns:a16="http://schemas.microsoft.com/office/drawing/2014/main" id="{5D045F09-516F-4D9D-AEED-B1310C105712}"/>
-              </a:ext>
-            </a:extLst>
-          </p:cNvPr>
-          <p:cNvSpPr>
-            <a:spLocks xmlns:a="http://schemas.openxmlformats.org/drawingml/2006/main" noGrp="1"/>
-          </p:cNvSpPr>
-          <p:nvPr/>
-        </p:nvSpPr>
-        <p:spPr>
-          <a:xfrm xmlns:a="http://schemas.openxmlformats.org/drawingml/2006/main">
-            <a:off x="6324600" y="4524375"/>
-            <a:ext cx="2400300" cy="666750"/>
+          <p:cNvPr id="25" name="">
+            <a:extLst xmlns:a="http://schemas.openxmlformats.org/drawingml/2006/main">
+              <a:ext uri="{FF2B5EF4-FFF2-40B4-BE49-F238E27FC236}">
+                <a16:creationId xmlns:a16="http://schemas.microsoft.com/office/drawing/2014/main" id="{DDC69DB0-E866-46F9-A183-C1F92299E603}"/>
+              </a:ext>
+            </a:extLst>
+          </p:cNvPr>
+          <p:cNvSpPr>
+            <a:spLocks xmlns:a="http://schemas.openxmlformats.org/drawingml/2006/main" noGrp="1"/>
+          </p:cNvSpPr>
+          <p:nvPr/>
+        </p:nvSpPr>
+        <p:spPr>
+          <a:xfrm xmlns:a="http://schemas.openxmlformats.org/drawingml/2006/main">
+            <a:off x="6324600" y="4229100"/>
+            <a:ext cx="2400300" cy="571500"/>
           </a:xfrm>
           <a:prstGeom xmlns:a="http://schemas.openxmlformats.org/drawingml/2006/main" prst="rect">
             <a:avLst/>
@@ -6302,22 +6946,22 @@
       </p:sp>
       <p:sp>
         <p:nvSpPr>
-          <p:cNvPr id="22" name="">
-            <a:extLst xmlns:a="http://schemas.openxmlformats.org/drawingml/2006/main">
-              <a:ext uri="{FF2B5EF4-FFF2-40B4-BE49-F238E27FC236}">
-                <a16:creationId xmlns:a16="http://schemas.microsoft.com/office/drawing/2014/main" id="{4CE6033E-8054-40EB-9FFA-9C773D4110D8}"/>
-              </a:ext>
-            </a:extLst>
-          </p:cNvPr>
-          <p:cNvSpPr>
-            <a:spLocks xmlns:a="http://schemas.openxmlformats.org/drawingml/2006/main" noGrp="1"/>
-          </p:cNvSpPr>
-          <p:nvPr/>
-        </p:nvSpPr>
-        <p:spPr>
-          <a:xfrm xmlns:a="http://schemas.openxmlformats.org/drawingml/2006/main">
-            <a:off x="6438900" y="4600575"/>
-            <a:ext cx="2171700" cy="514350"/>
+          <p:cNvPr id="26" name="">
+            <a:extLst xmlns:a="http://schemas.openxmlformats.org/drawingml/2006/main">
+              <a:ext uri="{FF2B5EF4-FFF2-40B4-BE49-F238E27FC236}">
+                <a16:creationId xmlns:a16="http://schemas.microsoft.com/office/drawing/2014/main" id="{96D85496-4F30-45AF-A0FA-CBF9CD705F51}"/>
+              </a:ext>
+            </a:extLst>
+          </p:cNvPr>
+          <p:cNvSpPr>
+            <a:spLocks xmlns:a="http://schemas.openxmlformats.org/drawingml/2006/main" noGrp="1"/>
+          </p:cNvSpPr>
+          <p:nvPr/>
+        </p:nvSpPr>
+        <p:spPr>
+          <a:xfrm xmlns:a="http://schemas.openxmlformats.org/drawingml/2006/main">
+            <a:off x="6438900" y="4305300"/>
+            <a:ext cx="2171700" cy="419100"/>
           </a:xfrm>
           <a:prstGeom xmlns:a="http://schemas.openxmlformats.org/drawingml/2006/main" prst="rect">
             <a:avLst/>
@@ -6359,22 +7003,22 @@
       </p:sp>
       <p:sp>
         <p:nvSpPr>
-          <p:cNvPr id="23" name="">
-            <a:extLst xmlns:a="http://schemas.openxmlformats.org/drawingml/2006/main">
-              <a:ext uri="{FF2B5EF4-FFF2-40B4-BE49-F238E27FC236}">
-                <a16:creationId xmlns:a16="http://schemas.microsoft.com/office/drawing/2014/main" id="{EEFA914A-D73D-4A40-AE5D-897FCD6DC821}"/>
-              </a:ext>
-            </a:extLst>
-          </p:cNvPr>
-          <p:cNvSpPr>
-            <a:spLocks xmlns:a="http://schemas.openxmlformats.org/drawingml/2006/main" noGrp="1"/>
-          </p:cNvSpPr>
-          <p:nvPr/>
-        </p:nvSpPr>
-        <p:spPr>
-          <a:xfrm xmlns:a="http://schemas.openxmlformats.org/drawingml/2006/main">
-            <a:off x="3467100" y="4524375"/>
-            <a:ext cx="2400300" cy="666750"/>
+          <p:cNvPr id="27" name="">
+            <a:extLst xmlns:a="http://schemas.openxmlformats.org/drawingml/2006/main">
+              <a:ext uri="{FF2B5EF4-FFF2-40B4-BE49-F238E27FC236}">
+                <a16:creationId xmlns:a16="http://schemas.microsoft.com/office/drawing/2014/main" id="{7CC5BA4B-4198-4A30-BAA1-FBE451716206}"/>
+              </a:ext>
+            </a:extLst>
+          </p:cNvPr>
+          <p:cNvSpPr>
+            <a:spLocks xmlns:a="http://schemas.openxmlformats.org/drawingml/2006/main" noGrp="1"/>
+          </p:cNvSpPr>
+          <p:nvPr/>
+        </p:nvSpPr>
+        <p:spPr>
+          <a:xfrm xmlns:a="http://schemas.openxmlformats.org/drawingml/2006/main">
+            <a:off x="3467100" y="4229100"/>
+            <a:ext cx="2400300" cy="571500"/>
           </a:xfrm>
           <a:prstGeom xmlns:a="http://schemas.openxmlformats.org/drawingml/2006/main" prst="rect">
             <a:avLst/>
@@ -6392,22 +7036,22 @@
       </p:sp>
       <p:sp>
         <p:nvSpPr>
-          <p:cNvPr id="24" name="">
-            <a:extLst xmlns:a="http://schemas.openxmlformats.org/drawingml/2006/main">
-              <a:ext uri="{FF2B5EF4-FFF2-40B4-BE49-F238E27FC236}">
-                <a16:creationId xmlns:a16="http://schemas.microsoft.com/office/drawing/2014/main" id="{ED3A8622-2305-4289-B2D5-55004DCF3FFC}"/>
-              </a:ext>
-            </a:extLst>
-          </p:cNvPr>
-          <p:cNvSpPr>
-            <a:spLocks xmlns:a="http://schemas.openxmlformats.org/drawingml/2006/main" noGrp="1"/>
-          </p:cNvSpPr>
-          <p:nvPr/>
-        </p:nvSpPr>
-        <p:spPr>
-          <a:xfrm xmlns:a="http://schemas.openxmlformats.org/drawingml/2006/main">
-            <a:off x="3581400" y="4600575"/>
-            <a:ext cx="2171700" cy="514350"/>
+          <p:cNvPr id="28" name="">
+            <a:extLst xmlns:a="http://schemas.openxmlformats.org/drawingml/2006/main">
+              <a:ext uri="{FF2B5EF4-FFF2-40B4-BE49-F238E27FC236}">
+                <a16:creationId xmlns:a16="http://schemas.microsoft.com/office/drawing/2014/main" id="{6CAF1378-ED69-4467-B84A-D1D06081C1EF}"/>
+              </a:ext>
+            </a:extLst>
+          </p:cNvPr>
+          <p:cNvSpPr>
+            <a:spLocks xmlns:a="http://schemas.openxmlformats.org/drawingml/2006/main" noGrp="1"/>
+          </p:cNvSpPr>
+          <p:nvPr/>
+        </p:nvSpPr>
+        <p:spPr>
+          <a:xfrm xmlns:a="http://schemas.openxmlformats.org/drawingml/2006/main">
+            <a:off x="3581400" y="4305300"/>
+            <a:ext cx="2171700" cy="419100"/>
           </a:xfrm>
           <a:prstGeom xmlns:a="http://schemas.openxmlformats.org/drawingml/2006/main" prst="rect">
             <a:avLst/>
@@ -6449,17 +7093,17 @@
       </p:sp>
       <p:cxnSp>
         <p:nvCxnSpPr>
-          <p:cNvPr id="58" name=""/>
+          <p:cNvPr id="67" name=""/>
           <p:cNvCxnSpPr>
-            <a:stCxn xmlns:a="http://schemas.openxmlformats.org/drawingml/2006/main" id="11" idx="2"/>
-            <a:endCxn xmlns:a="http://schemas.openxmlformats.org/drawingml/2006/main" id="19" idx="0"/>
+            <a:stCxn xmlns:a="http://schemas.openxmlformats.org/drawingml/2006/main" id="12" idx="2"/>
+            <a:endCxn xmlns:a="http://schemas.openxmlformats.org/drawingml/2006/main" id="23" idx="0"/>
           </p:cNvCxnSpPr>
           <p:nvPr/>
         </p:nvCxnSpPr>
         <p:spPr>
           <a:xfrm xmlns:a="http://schemas.openxmlformats.org/drawingml/2006/main">
-            <a:off x="10382250" y="3209925"/>
-            <a:ext cx="0" cy="1314450"/>
+            <a:off x="10382250" y="3143250"/>
+            <a:ext cx="0" cy="1085850"/>
           </a:xfrm>
           <a:prstGeom xmlns:a="http://schemas.openxmlformats.org/drawingml/2006/main" prst="straightConnector1">
             <a:avLst/>
@@ -6475,16 +7119,16 @@
       </p:cxnSp>
       <p:cxnSp>
         <p:nvCxnSpPr>
-          <p:cNvPr id="59" name=""/>
+          <p:cNvPr id="68" name=""/>
           <p:cNvCxnSpPr>
-            <a:stCxn xmlns:a="http://schemas.openxmlformats.org/drawingml/2006/main" id="19" idx="1"/>
-            <a:endCxn xmlns:a="http://schemas.openxmlformats.org/drawingml/2006/main" id="21" idx="3"/>
+            <a:stCxn xmlns:a="http://schemas.openxmlformats.org/drawingml/2006/main" id="23" idx="1"/>
+            <a:endCxn xmlns:a="http://schemas.openxmlformats.org/drawingml/2006/main" id="25" idx="3"/>
           </p:cNvCxnSpPr>
           <p:nvPr/>
         </p:nvCxnSpPr>
         <p:spPr>
           <a:xfrm xmlns:a="http://schemas.openxmlformats.org/drawingml/2006/main" flipH="1">
-            <a:off x="8724900" y="4857750"/>
+            <a:off x="8724900" y="4514850"/>
             <a:ext cx="457200" cy="0"/>
           </a:xfrm>
           <a:prstGeom xmlns:a="http://schemas.openxmlformats.org/drawingml/2006/main" prst="straightConnector1">
@@ -6501,17 +7145,17 @@
       </p:cxnSp>
       <p:cxnSp>
         <p:nvCxnSpPr>
-          <p:cNvPr id="60" name=""/>
+          <p:cNvPr id="69" name=""/>
           <p:cNvCxnSpPr>
-            <a:stCxn xmlns:a="http://schemas.openxmlformats.org/drawingml/2006/main" id="17" idx="2"/>
-            <a:endCxn xmlns:a="http://schemas.openxmlformats.org/drawingml/2006/main" id="21" idx="0"/>
+            <a:stCxn xmlns:a="http://schemas.openxmlformats.org/drawingml/2006/main" id="21" idx="2"/>
+            <a:endCxn xmlns:a="http://schemas.openxmlformats.org/drawingml/2006/main" id="25" idx="0"/>
           </p:cNvCxnSpPr>
           <p:nvPr/>
         </p:nvCxnSpPr>
         <p:spPr>
           <a:xfrm xmlns:a="http://schemas.openxmlformats.org/drawingml/2006/main">
-            <a:off x="7524750" y="4191000"/>
-            <a:ext cx="0" cy="333375"/>
+            <a:off x="7524750" y="3905250"/>
+            <a:ext cx="0" cy="323850"/>
           </a:xfrm>
           <a:prstGeom xmlns:a="http://schemas.openxmlformats.org/drawingml/2006/main" prst="straightConnector1">
             <a:avLst/>
@@ -6527,16 +7171,16 @@
       </p:cxnSp>
       <p:cxnSp>
         <p:nvCxnSpPr>
-          <p:cNvPr id="61" name=""/>
+          <p:cNvPr id="70" name=""/>
           <p:cNvCxnSpPr>
-            <a:stCxn xmlns:a="http://schemas.openxmlformats.org/drawingml/2006/main" id="21" idx="1"/>
-            <a:endCxn xmlns:a="http://schemas.openxmlformats.org/drawingml/2006/main" id="23" idx="3"/>
+            <a:stCxn xmlns:a="http://schemas.openxmlformats.org/drawingml/2006/main" id="25" idx="1"/>
+            <a:endCxn xmlns:a="http://schemas.openxmlformats.org/drawingml/2006/main" id="27" idx="3"/>
           </p:cNvCxnSpPr>
           <p:nvPr/>
         </p:nvCxnSpPr>
         <p:spPr>
           <a:xfrm xmlns:a="http://schemas.openxmlformats.org/drawingml/2006/main" flipH="1">
-            <a:off x="5867400" y="4857750"/>
+            <a:off x="5867400" y="4514850"/>
             <a:ext cx="457200" cy="0"/>
           </a:xfrm>
           <a:prstGeom xmlns:a="http://schemas.openxmlformats.org/drawingml/2006/main" prst="straightConnector1">
@@ -6553,17 +7197,17 @@
       </p:cxnSp>
       <p:cxnSp>
         <p:nvCxnSpPr>
-          <p:cNvPr id="62" name=""/>
+          <p:cNvPr id="71" name=""/>
           <p:cNvCxnSpPr>
-            <a:stCxn xmlns:a="http://schemas.openxmlformats.org/drawingml/2006/main" id="23" idx="0"/>
-            <a:endCxn xmlns:a="http://schemas.openxmlformats.org/drawingml/2006/main" id="7" idx="2"/>
+            <a:stCxn xmlns:a="http://schemas.openxmlformats.org/drawingml/2006/main" id="27" idx="0"/>
+            <a:endCxn xmlns:a="http://schemas.openxmlformats.org/drawingml/2006/main" id="8" idx="2"/>
           </p:cNvCxnSpPr>
           <p:nvPr/>
         </p:nvCxnSpPr>
         <p:spPr>
           <a:xfrm xmlns:a="http://schemas.openxmlformats.org/drawingml/2006/main" flipV="1">
-            <a:off x="4667250" y="3209925"/>
-            <a:ext cx="0" cy="1314450"/>
+            <a:off x="4667250" y="3143250"/>
+            <a:ext cx="0" cy="1085850"/>
           </a:xfrm>
           <a:prstGeom xmlns:a="http://schemas.openxmlformats.org/drawingml/2006/main" prst="straightConnector1">
             <a:avLst/>
@@ -6579,21 +7223,21 @@
       </p:cxnSp>
       <p:sp>
         <p:nvSpPr>
-          <p:cNvPr id="30" name="">
-            <a:extLst xmlns:a="http://schemas.openxmlformats.org/drawingml/2006/main">
-              <a:ext uri="{FF2B5EF4-FFF2-40B4-BE49-F238E27FC236}">
-                <a16:creationId xmlns:a16="http://schemas.microsoft.com/office/drawing/2014/main" id="{B6DD798D-E834-4DD4-BBF7-82D07259BB87}"/>
-              </a:ext>
-            </a:extLst>
-          </p:cNvPr>
-          <p:cNvSpPr>
-            <a:spLocks xmlns:a="http://schemas.openxmlformats.org/drawingml/2006/main" noGrp="1"/>
-          </p:cNvSpPr>
-          <p:nvPr/>
-        </p:nvSpPr>
-        <p:spPr>
-          <a:xfrm xmlns:a="http://schemas.openxmlformats.org/drawingml/2006/main">
-            <a:off x="609600" y="5305425"/>
+          <p:cNvPr id="34" name="">
+            <a:extLst xmlns:a="http://schemas.openxmlformats.org/drawingml/2006/main">
+              <a:ext uri="{FF2B5EF4-FFF2-40B4-BE49-F238E27FC236}">
+                <a16:creationId xmlns:a16="http://schemas.microsoft.com/office/drawing/2014/main" id="{9EB6DF52-B5D6-40E0-BB63-B88C20ED3102}"/>
+              </a:ext>
+            </a:extLst>
+          </p:cNvPr>
+          <p:cNvSpPr>
+            <a:spLocks xmlns:a="http://schemas.openxmlformats.org/drawingml/2006/main" noGrp="1"/>
+          </p:cNvSpPr>
+          <p:nvPr/>
+        </p:nvSpPr>
+        <p:spPr>
+          <a:xfrm xmlns:a="http://schemas.openxmlformats.org/drawingml/2006/main">
+            <a:off x="609600" y="4943475"/>
             <a:ext cx="10972800" cy="266700"/>
           </a:xfrm>
           <a:prstGeom xmlns:a="http://schemas.openxmlformats.org/drawingml/2006/main" prst="rect">
@@ -6636,21 +7280,21 @@
       </p:sp>
       <p:sp>
         <p:nvSpPr>
-          <p:cNvPr id="31" name="">
-            <a:extLst xmlns:a="http://schemas.openxmlformats.org/drawingml/2006/main">
-              <a:ext uri="{FF2B5EF4-FFF2-40B4-BE49-F238E27FC236}">
-                <a16:creationId xmlns:a16="http://schemas.microsoft.com/office/drawing/2014/main" id="{6B921D53-1496-4E4E-9BFA-8F4F293BE42B}"/>
-              </a:ext>
-            </a:extLst>
-          </p:cNvPr>
-          <p:cNvSpPr>
-            <a:spLocks xmlns:a="http://schemas.openxmlformats.org/drawingml/2006/main" noGrp="1"/>
-          </p:cNvSpPr>
-          <p:nvPr/>
-        </p:nvSpPr>
-        <p:spPr>
-          <a:xfrm xmlns:a="http://schemas.openxmlformats.org/drawingml/2006/main">
-            <a:off x="609600" y="5610225"/>
+          <p:cNvPr id="35" name="">
+            <a:extLst xmlns:a="http://schemas.openxmlformats.org/drawingml/2006/main">
+              <a:ext uri="{FF2B5EF4-FFF2-40B4-BE49-F238E27FC236}">
+                <a16:creationId xmlns:a16="http://schemas.microsoft.com/office/drawing/2014/main" id="{3CD9056D-7C34-4953-9B37-D33537104C7B}"/>
+              </a:ext>
+            </a:extLst>
+          </p:cNvPr>
+          <p:cNvSpPr>
+            <a:spLocks xmlns:a="http://schemas.openxmlformats.org/drawingml/2006/main" noGrp="1"/>
+          </p:cNvSpPr>
+          <p:nvPr/>
+        </p:nvSpPr>
+        <p:spPr>
+          <a:xfrm xmlns:a="http://schemas.openxmlformats.org/drawingml/2006/main">
+            <a:off x="609600" y="5276850"/>
             <a:ext cx="10972800" cy="257175"/>
           </a:xfrm>
           <a:prstGeom xmlns:a="http://schemas.openxmlformats.org/drawingml/2006/main" prst="rect">
@@ -6693,10 +7337,67 @@
       </p:sp>
       <p:sp>
         <p:nvSpPr>
-          <p:cNvPr id="32" name="">
-            <a:extLst xmlns:a="http://schemas.openxmlformats.org/drawingml/2006/main">
-              <a:ext uri="{FF2B5EF4-FFF2-40B4-BE49-F238E27FC236}">
-                <a16:creationId xmlns:a16="http://schemas.microsoft.com/office/drawing/2014/main" id="{DB495834-3B7D-47B6-ACD2-E56C911FF5EA}"/>
+          <p:cNvPr id="36" name="">
+            <a:extLst xmlns:a="http://schemas.openxmlformats.org/drawingml/2006/main">
+              <a:ext uri="{FF2B5EF4-FFF2-40B4-BE49-F238E27FC236}">
+                <a16:creationId xmlns:a16="http://schemas.microsoft.com/office/drawing/2014/main" id="{96685751-601F-4849-B518-14CC21588C09}"/>
+              </a:ext>
+            </a:extLst>
+          </p:cNvPr>
+          <p:cNvSpPr>
+            <a:spLocks xmlns:a="http://schemas.openxmlformats.org/drawingml/2006/main" noGrp="1"/>
+          </p:cNvSpPr>
+          <p:nvPr/>
+        </p:nvSpPr>
+        <p:spPr>
+          <a:xfrm xmlns:a="http://schemas.openxmlformats.org/drawingml/2006/main">
+            <a:off x="609600" y="5619750"/>
+            <a:ext cx="10972800" cy="342900"/>
+          </a:xfrm>
+          <a:prstGeom xmlns:a="http://schemas.openxmlformats.org/drawingml/2006/main" prst="rect">
+            <a:avLst/>
+          </a:prstGeom>
+          <a:noFill xmlns:a="http://schemas.openxmlformats.org/drawingml/2006/main"/>
+          <a:ln xmlns:a="http://schemas.openxmlformats.org/drawingml/2006/main" w="0">
+            <a:noFill/>
+          </a:ln>
+        </p:spPr>
+        <p:txBody>
+          <a:bodyPr xmlns:a="http://schemas.openxmlformats.org/drawingml/2006/main" wrap="square" lIns="0" tIns="0" rIns="0" bIns="0" anchor="ctr">
+            <a:noAutofit/>
+          </a:bodyPr>
+          <a:lstStyle xmlns:a="http://schemas.openxmlformats.org/drawingml/2006/main"/>
+          <a:p xmlns:a="http://schemas.openxmlformats.org/drawingml/2006/main">
+            <a:pPr algn="l">
+              <a:defRPr sz="1575" b="0">
+                <a:solidFill>
+                  <a:srgbClr val="F5B61C"/>
+                </a:solidFill>
+                <a:latin typeface="Roboto"/>
+                <a:ea typeface="Roboto"/>
+                <a:cs typeface="Roboto"/>
+              </a:defRPr>
+            </a:pPr>
+            <a:r>
+              <a:rPr sz="1575" b="0">
+                <a:solidFill>
+                  <a:srgbClr val="F5B61C"/>
+                </a:solidFill>
+                <a:latin typeface="Roboto"/>
+                <a:ea typeface="Roboto"/>
+                <a:cs typeface="Roboto"/>
+              </a:rPr>
+              <a:t>If control or viable cost cannot be demonstrated, narrow the scope or stop this AI path.</a:t>
+            </a:r>
+          </a:p>
+        </p:txBody>
+      </p:sp>
+      <p:sp>
+        <p:nvSpPr>
+          <p:cNvPr id="37" name="">
+            <a:extLst xmlns:a="http://schemas.openxmlformats.org/drawingml/2006/main">
+              <a:ext uri="{FF2B5EF4-FFF2-40B4-BE49-F238E27FC236}">
+                <a16:creationId xmlns:a16="http://schemas.microsoft.com/office/drawing/2014/main" id="{1AB38786-9F4A-454F-9356-1B77B6585EA1}"/>
               </a:ext>
             </a:extLst>
           </p:cNvPr>
@@ -6707,7 +7408,7 @@
         </p:nvSpPr>
         <p:spPr>
           <a:xfrm xmlns:a="http://schemas.openxmlformats.org/drawingml/2006/main" flipH="0" flipV="0">
-            <a:off x="609600" y="5905500"/>
+            <a:off x="609600" y="6086475"/>
             <a:ext cx="10972800" cy="0"/>
           </a:xfrm>
           <a:prstGeom xmlns:a="http://schemas.openxmlformats.org/drawingml/2006/main" prst="line">
@@ -6724,22 +7425,22 @@
       </p:sp>
       <p:sp>
         <p:nvSpPr>
-          <p:cNvPr id="33" name="">
-            <a:extLst xmlns:a="http://schemas.openxmlformats.org/drawingml/2006/main">
-              <a:ext uri="{FF2B5EF4-FFF2-40B4-BE49-F238E27FC236}">
-                <a16:creationId xmlns:a16="http://schemas.microsoft.com/office/drawing/2014/main" id="{BE1B8E2C-BBCC-480D-80BA-A0F03D9A8B3B}"/>
-              </a:ext>
-            </a:extLst>
-          </p:cNvPr>
-          <p:cNvSpPr>
-            <a:spLocks xmlns:a="http://schemas.openxmlformats.org/drawingml/2006/main" noGrp="1"/>
-          </p:cNvSpPr>
-          <p:nvPr/>
-        </p:nvSpPr>
-        <p:spPr>
-          <a:xfrm xmlns:a="http://schemas.openxmlformats.org/drawingml/2006/main">
-            <a:off x="609600" y="6048375"/>
-            <a:ext cx="10648950" cy="476250"/>
+          <p:cNvPr id="38" name="">
+            <a:extLst xmlns:a="http://schemas.openxmlformats.org/drawingml/2006/main">
+              <a:ext uri="{FF2B5EF4-FFF2-40B4-BE49-F238E27FC236}">
+                <a16:creationId xmlns:a16="http://schemas.microsoft.com/office/drawing/2014/main" id="{3191BA4C-D296-4572-9283-B8867A6756BC}"/>
+              </a:ext>
+            </a:extLst>
+          </p:cNvPr>
+          <p:cNvSpPr>
+            <a:spLocks xmlns:a="http://schemas.openxmlformats.org/drawingml/2006/main" noGrp="1"/>
+          </p:cNvSpPr>
+          <p:nvPr/>
+        </p:nvSpPr>
+        <p:spPr>
+          <a:xfrm xmlns:a="http://schemas.openxmlformats.org/drawingml/2006/main">
+            <a:off x="609600" y="6181725"/>
+            <a:ext cx="10648950" cy="438150"/>
           </a:xfrm>
           <a:prstGeom xmlns:a="http://schemas.openxmlformats.org/drawingml/2006/main" prst="rect">
             <a:avLst/>
@@ -6782,7 +7483,7 @@
     </p:spTree>
     <p:extLst>
       <p:ext uri="{BB962C8B-B14F-4D97-AF65-F5344CB8AC3E}">
-        <p14:creationId xmlns:p14="http://schemas.microsoft.com/office/powerpoint/2010/main" val="403390539"/>
+        <p14:creationId xmlns:p14="http://schemas.microsoft.com/office/powerpoint/2010/main" val="1594820169"/>
       </p:ext>
     </p:extLst>
   </p:cSld>
@@ -6810,10 +7511,10 @@
       </p:grpSpPr>
       <p:sp>
         <p:nvSpPr>
-          <p:cNvPr id="20" name="">
-            <a:extLst xmlns:a="http://schemas.openxmlformats.org/drawingml/2006/main">
-              <a:ext uri="{FF2B5EF4-FFF2-40B4-BE49-F238E27FC236}">
-                <a16:creationId xmlns:a16="http://schemas.microsoft.com/office/drawing/2014/main" id="{1B62CA5E-9B35-4EF9-9833-B08DA924A1AE}"/>
+          <p:cNvPr id="22" name="">
+            <a:extLst xmlns:a="http://schemas.openxmlformats.org/drawingml/2006/main">
+              <a:ext uri="{FF2B5EF4-FFF2-40B4-BE49-F238E27FC236}">
+                <a16:creationId xmlns:a16="http://schemas.microsoft.com/office/drawing/2014/main" id="{CAAA680C-4C53-4A23-B4D3-3F1D2E03BA85}"/>
               </a:ext>
             </a:extLst>
           </p:cNvPr>
@@ -6870,7 +7571,7 @@
           <p:cNvPr id="2" name="">
             <a:extLst xmlns:a="http://schemas.openxmlformats.org/drawingml/2006/main">
               <a:ext uri="{FF2B5EF4-FFF2-40B4-BE49-F238E27FC236}">
-                <a16:creationId xmlns:a16="http://schemas.microsoft.com/office/drawing/2014/main" id="{0B2E4C1D-5192-428A-9043-37C52767E772}"/>
+                <a16:creationId xmlns:a16="http://schemas.microsoft.com/office/drawing/2014/main" id="{ABBEB8F6-DE6A-4B0E-9048-3DBE0ED13949}"/>
               </a:ext>
             </a:extLst>
           </p:cNvPr>
@@ -6901,7 +7602,7 @@
           <p:cNvPr id="3" name="">
             <a:extLst xmlns:a="http://schemas.openxmlformats.org/drawingml/2006/main">
               <a:ext uri="{FF2B5EF4-FFF2-40B4-BE49-F238E27FC236}">
-                <a16:creationId xmlns:a16="http://schemas.microsoft.com/office/drawing/2014/main" id="{FF9D3387-196D-4728-9113-6E0B48162CB5}"/>
+                <a16:creationId xmlns:a16="http://schemas.microsoft.com/office/drawing/2014/main" id="{792710D3-0B7D-450A-A440-84AD8262244C}"/>
               </a:ext>
             </a:extLst>
           </p:cNvPr>
@@ -6958,19 +7659,19 @@
           <p:cNvPr id="4" name="">
             <a:extLst xmlns:a="http://schemas.openxmlformats.org/drawingml/2006/main">
               <a:ext uri="{FF2B5EF4-FFF2-40B4-BE49-F238E27FC236}">
-                <a16:creationId xmlns:a16="http://schemas.microsoft.com/office/drawing/2014/main" id="{CDF6D3FE-CF8C-4284-B23A-9948929AC196}"/>
-              </a:ext>
-            </a:extLst>
-          </p:cNvPr>
-          <p:cNvSpPr>
-            <a:spLocks xmlns:a="http://schemas.openxmlformats.org/drawingml/2006/main" noGrp="1"/>
-          </p:cNvSpPr>
-          <p:nvPr/>
-        </p:nvSpPr>
-        <p:spPr>
-          <a:xfrm xmlns:a="http://schemas.openxmlformats.org/drawingml/2006/main">
-            <a:off x="609600" y="1752600"/>
-            <a:ext cx="10972800" cy="342900"/>
+                <a16:creationId xmlns:a16="http://schemas.microsoft.com/office/drawing/2014/main" id="{D146A858-D218-4830-8E9D-168C61B2CC07}"/>
+              </a:ext>
+            </a:extLst>
+          </p:cNvPr>
+          <p:cNvSpPr>
+            <a:spLocks xmlns:a="http://schemas.openxmlformats.org/drawingml/2006/main" noGrp="1"/>
+          </p:cNvSpPr>
+          <p:nvPr/>
+        </p:nvSpPr>
+        <p:spPr>
+          <a:xfrm xmlns:a="http://schemas.openxmlformats.org/drawingml/2006/main">
+            <a:off x="609600" y="1676400"/>
+            <a:ext cx="10972800" cy="304800"/>
           </a:xfrm>
           <a:prstGeom xmlns:a="http://schemas.openxmlformats.org/drawingml/2006/main" prst="rect">
             <a:avLst/>
@@ -7015,19 +7716,76 @@
           <p:cNvPr id="5" name="">
             <a:extLst xmlns:a="http://schemas.openxmlformats.org/drawingml/2006/main">
               <a:ext uri="{FF2B5EF4-FFF2-40B4-BE49-F238E27FC236}">
-                <a16:creationId xmlns:a16="http://schemas.microsoft.com/office/drawing/2014/main" id="{BEDAD510-C409-48CF-BC5B-5042B84AF31C}"/>
-              </a:ext>
-            </a:extLst>
-          </p:cNvPr>
-          <p:cNvSpPr>
-            <a:spLocks xmlns:a="http://schemas.openxmlformats.org/drawingml/2006/main" noGrp="1"/>
-          </p:cNvSpPr>
-          <p:nvPr/>
-        </p:nvSpPr>
-        <p:spPr>
-          <a:xfrm xmlns:a="http://schemas.openxmlformats.org/drawingml/2006/main">
-            <a:off x="609600" y="2238375"/>
-            <a:ext cx="2400300" cy="571500"/>
+                <a16:creationId xmlns:a16="http://schemas.microsoft.com/office/drawing/2014/main" id="{4C68A4C1-E758-48A8-95C5-29201F1413A0}"/>
+              </a:ext>
+            </a:extLst>
+          </p:cNvPr>
+          <p:cNvSpPr>
+            <a:spLocks xmlns:a="http://schemas.openxmlformats.org/drawingml/2006/main" noGrp="1"/>
+          </p:cNvSpPr>
+          <p:nvPr/>
+        </p:nvSpPr>
+        <p:spPr>
+          <a:xfrm xmlns:a="http://schemas.openxmlformats.org/drawingml/2006/main">
+            <a:off x="609600" y="2057400"/>
+            <a:ext cx="10972800" cy="257175"/>
+          </a:xfrm>
+          <a:prstGeom xmlns:a="http://schemas.openxmlformats.org/drawingml/2006/main" prst="rect">
+            <a:avLst/>
+          </a:prstGeom>
+          <a:noFill xmlns:a="http://schemas.openxmlformats.org/drawingml/2006/main"/>
+          <a:ln xmlns:a="http://schemas.openxmlformats.org/drawingml/2006/main" w="0">
+            <a:noFill/>
+          </a:ln>
+        </p:spPr>
+        <p:txBody>
+          <a:bodyPr xmlns:a="http://schemas.openxmlformats.org/drawingml/2006/main" wrap="square" lIns="0" tIns="0" rIns="0" bIns="0" anchor="ctr">
+            <a:noAutofit/>
+          </a:bodyPr>
+          <a:lstStyle xmlns:a="http://schemas.openxmlformats.org/drawingml/2006/main"/>
+          <a:p xmlns:a="http://schemas.openxmlformats.org/drawingml/2006/main">
+            <a:pPr algn="l">
+              <a:defRPr sz="1575" b="0">
+                <a:solidFill>
+                  <a:srgbClr val="F4F7FA"/>
+                </a:solidFill>
+                <a:latin typeface="Roboto"/>
+                <a:ea typeface="Roboto"/>
+                <a:cs typeface="Roboto"/>
+              </a:defRPr>
+            </a:pPr>
+            <a:r>
+              <a:rPr sz="1575" b="0">
+                <a:solidFill>
+                  <a:srgbClr val="F4F7FA"/>
+                </a:solidFill>
+                <a:latin typeface="Roboto"/>
+                <a:ea typeface="Roboto"/>
+                <a:cs typeface="Roboto"/>
+              </a:rPr>
+              <a:t>Delivery now includes experiments, evaluation time and decisions about feasibility.</a:t>
+            </a:r>
+          </a:p>
+        </p:txBody>
+      </p:sp>
+      <p:sp>
+        <p:nvSpPr>
+          <p:cNvPr id="6" name="">
+            <a:extLst xmlns:a="http://schemas.openxmlformats.org/drawingml/2006/main">
+              <a:ext uri="{FF2B5EF4-FFF2-40B4-BE49-F238E27FC236}">
+                <a16:creationId xmlns:a16="http://schemas.microsoft.com/office/drawing/2014/main" id="{0ADD2423-1ACC-4420-B9B0-BE74784BE4A2}"/>
+              </a:ext>
+            </a:extLst>
+          </p:cNvPr>
+          <p:cNvSpPr>
+            <a:spLocks xmlns:a="http://schemas.openxmlformats.org/drawingml/2006/main" noGrp="1"/>
+          </p:cNvSpPr>
+          <p:nvPr/>
+        </p:nvSpPr>
+        <p:spPr>
+          <a:xfrm xmlns:a="http://schemas.openxmlformats.org/drawingml/2006/main">
+            <a:off x="609600" y="2428875"/>
+            <a:ext cx="2400300" cy="476250"/>
           </a:xfrm>
           <a:prstGeom xmlns:a="http://schemas.openxmlformats.org/drawingml/2006/main" prst="rect">
             <a:avLst/>
@@ -7045,22 +7803,22 @@
       </p:sp>
       <p:sp>
         <p:nvSpPr>
-          <p:cNvPr id="6" name="">
-            <a:extLst xmlns:a="http://schemas.openxmlformats.org/drawingml/2006/main">
-              <a:ext uri="{FF2B5EF4-FFF2-40B4-BE49-F238E27FC236}">
-                <a16:creationId xmlns:a16="http://schemas.microsoft.com/office/drawing/2014/main" id="{DF16A256-3F56-43A0-8202-9F8DB58E0C75}"/>
-              </a:ext>
-            </a:extLst>
-          </p:cNvPr>
-          <p:cNvSpPr>
-            <a:spLocks xmlns:a="http://schemas.openxmlformats.org/drawingml/2006/main" noGrp="1"/>
-          </p:cNvSpPr>
-          <p:nvPr/>
-        </p:nvSpPr>
-        <p:spPr>
-          <a:xfrm xmlns:a="http://schemas.openxmlformats.org/drawingml/2006/main">
-            <a:off x="723900" y="2314575"/>
-            <a:ext cx="2171700" cy="419100"/>
+          <p:cNvPr id="7" name="">
+            <a:extLst xmlns:a="http://schemas.openxmlformats.org/drawingml/2006/main">
+              <a:ext uri="{FF2B5EF4-FFF2-40B4-BE49-F238E27FC236}">
+                <a16:creationId xmlns:a16="http://schemas.microsoft.com/office/drawing/2014/main" id="{068FED98-4D36-478B-B108-F3A3489CF101}"/>
+              </a:ext>
+            </a:extLst>
+          </p:cNvPr>
+          <p:cNvSpPr>
+            <a:spLocks xmlns:a="http://schemas.openxmlformats.org/drawingml/2006/main" noGrp="1"/>
+          </p:cNvSpPr>
+          <p:nvPr/>
+        </p:nvSpPr>
+        <p:spPr>
+          <a:xfrm xmlns:a="http://schemas.openxmlformats.org/drawingml/2006/main">
+            <a:off x="723900" y="2505075"/>
+            <a:ext cx="2171700" cy="323850"/>
           </a:xfrm>
           <a:prstGeom xmlns:a="http://schemas.openxmlformats.org/drawingml/2006/main" prst="rect">
             <a:avLst/>
@@ -7102,22 +7860,22 @@
       </p:sp>
       <p:sp>
         <p:nvSpPr>
-          <p:cNvPr id="7" name="">
-            <a:extLst xmlns:a="http://schemas.openxmlformats.org/drawingml/2006/main">
-              <a:ext uri="{FF2B5EF4-FFF2-40B4-BE49-F238E27FC236}">
-                <a16:creationId xmlns:a16="http://schemas.microsoft.com/office/drawing/2014/main" id="{4BE7C5CC-CBFF-49F2-A91E-B1B9E2C27C3D}"/>
-              </a:ext>
-            </a:extLst>
-          </p:cNvPr>
-          <p:cNvSpPr>
-            <a:spLocks xmlns:a="http://schemas.openxmlformats.org/drawingml/2006/main" noGrp="1"/>
-          </p:cNvSpPr>
-          <p:nvPr/>
-        </p:nvSpPr>
-        <p:spPr>
-          <a:xfrm xmlns:a="http://schemas.openxmlformats.org/drawingml/2006/main">
-            <a:off x="3467100" y="2238375"/>
-            <a:ext cx="2400300" cy="571500"/>
+          <p:cNvPr id="8" name="">
+            <a:extLst xmlns:a="http://schemas.openxmlformats.org/drawingml/2006/main">
+              <a:ext uri="{FF2B5EF4-FFF2-40B4-BE49-F238E27FC236}">
+                <a16:creationId xmlns:a16="http://schemas.microsoft.com/office/drawing/2014/main" id="{E6DA3887-C01D-4B89-8136-071C606AD653}"/>
+              </a:ext>
+            </a:extLst>
+          </p:cNvPr>
+          <p:cNvSpPr>
+            <a:spLocks xmlns:a="http://schemas.openxmlformats.org/drawingml/2006/main" noGrp="1"/>
+          </p:cNvSpPr>
+          <p:nvPr/>
+        </p:nvSpPr>
+        <p:spPr>
+          <a:xfrm xmlns:a="http://schemas.openxmlformats.org/drawingml/2006/main">
+            <a:off x="3467100" y="2428875"/>
+            <a:ext cx="2400300" cy="476250"/>
           </a:xfrm>
           <a:prstGeom xmlns:a="http://schemas.openxmlformats.org/drawingml/2006/main" prst="rect">
             <a:avLst/>
@@ -7135,22 +7893,22 @@
       </p:sp>
       <p:sp>
         <p:nvSpPr>
-          <p:cNvPr id="8" name="">
-            <a:extLst xmlns:a="http://schemas.openxmlformats.org/drawingml/2006/main">
-              <a:ext uri="{FF2B5EF4-FFF2-40B4-BE49-F238E27FC236}">
-                <a16:creationId xmlns:a16="http://schemas.microsoft.com/office/drawing/2014/main" id="{A6C97205-CCA7-471E-88C5-DC13D2122E71}"/>
-              </a:ext>
-            </a:extLst>
-          </p:cNvPr>
-          <p:cNvSpPr>
-            <a:spLocks xmlns:a="http://schemas.openxmlformats.org/drawingml/2006/main" noGrp="1"/>
-          </p:cNvSpPr>
-          <p:nvPr/>
-        </p:nvSpPr>
-        <p:spPr>
-          <a:xfrm xmlns:a="http://schemas.openxmlformats.org/drawingml/2006/main">
-            <a:off x="3581400" y="2314575"/>
-            <a:ext cx="2171700" cy="419100"/>
+          <p:cNvPr id="9" name="">
+            <a:extLst xmlns:a="http://schemas.openxmlformats.org/drawingml/2006/main">
+              <a:ext uri="{FF2B5EF4-FFF2-40B4-BE49-F238E27FC236}">
+                <a16:creationId xmlns:a16="http://schemas.microsoft.com/office/drawing/2014/main" id="{B9521AF5-8CFA-41D9-B28C-7F5DE2F6096A}"/>
+              </a:ext>
+            </a:extLst>
+          </p:cNvPr>
+          <p:cNvSpPr>
+            <a:spLocks xmlns:a="http://schemas.openxmlformats.org/drawingml/2006/main" noGrp="1"/>
+          </p:cNvSpPr>
+          <p:nvPr/>
+        </p:nvSpPr>
+        <p:spPr>
+          <a:xfrm xmlns:a="http://schemas.openxmlformats.org/drawingml/2006/main">
+            <a:off x="3581400" y="2505075"/>
+            <a:ext cx="2171700" cy="323850"/>
           </a:xfrm>
           <a:prstGeom xmlns:a="http://schemas.openxmlformats.org/drawingml/2006/main" prst="rect">
             <a:avLst/>
@@ -7192,22 +7950,22 @@
       </p:sp>
       <p:sp>
         <p:nvSpPr>
-          <p:cNvPr id="9" name="">
-            <a:extLst xmlns:a="http://schemas.openxmlformats.org/drawingml/2006/main">
-              <a:ext uri="{FF2B5EF4-FFF2-40B4-BE49-F238E27FC236}">
-                <a16:creationId xmlns:a16="http://schemas.microsoft.com/office/drawing/2014/main" id="{FE4ACBC5-A5C5-4E7E-BEBB-3C3680A9F662}"/>
-              </a:ext>
-            </a:extLst>
-          </p:cNvPr>
-          <p:cNvSpPr>
-            <a:spLocks xmlns:a="http://schemas.openxmlformats.org/drawingml/2006/main" noGrp="1"/>
-          </p:cNvSpPr>
-          <p:nvPr/>
-        </p:nvSpPr>
-        <p:spPr>
-          <a:xfrm xmlns:a="http://schemas.openxmlformats.org/drawingml/2006/main">
-            <a:off x="6324600" y="2238375"/>
-            <a:ext cx="2400300" cy="571500"/>
+          <p:cNvPr id="10" name="">
+            <a:extLst xmlns:a="http://schemas.openxmlformats.org/drawingml/2006/main">
+              <a:ext uri="{FF2B5EF4-FFF2-40B4-BE49-F238E27FC236}">
+                <a16:creationId xmlns:a16="http://schemas.microsoft.com/office/drawing/2014/main" id="{9C721864-8B1D-40FF-83D1-4C17CB8D43AB}"/>
+              </a:ext>
+            </a:extLst>
+          </p:cNvPr>
+          <p:cNvSpPr>
+            <a:spLocks xmlns:a="http://schemas.openxmlformats.org/drawingml/2006/main" noGrp="1"/>
+          </p:cNvSpPr>
+          <p:nvPr/>
+        </p:nvSpPr>
+        <p:spPr>
+          <a:xfrm xmlns:a="http://schemas.openxmlformats.org/drawingml/2006/main">
+            <a:off x="6324600" y="2428875"/>
+            <a:ext cx="2400300" cy="476250"/>
           </a:xfrm>
           <a:prstGeom xmlns:a="http://schemas.openxmlformats.org/drawingml/2006/main" prst="rect">
             <a:avLst/>
@@ -7225,22 +7983,22 @@
       </p:sp>
       <p:sp>
         <p:nvSpPr>
-          <p:cNvPr id="10" name="">
-            <a:extLst xmlns:a="http://schemas.openxmlformats.org/drawingml/2006/main">
-              <a:ext uri="{FF2B5EF4-FFF2-40B4-BE49-F238E27FC236}">
-                <a16:creationId xmlns:a16="http://schemas.microsoft.com/office/drawing/2014/main" id="{DA8186E1-63B0-4D4F-80EA-75CCC587F087}"/>
-              </a:ext>
-            </a:extLst>
-          </p:cNvPr>
-          <p:cNvSpPr>
-            <a:spLocks xmlns:a="http://schemas.openxmlformats.org/drawingml/2006/main" noGrp="1"/>
-          </p:cNvSpPr>
-          <p:nvPr/>
-        </p:nvSpPr>
-        <p:spPr>
-          <a:xfrm xmlns:a="http://schemas.openxmlformats.org/drawingml/2006/main">
-            <a:off x="6438900" y="2314575"/>
-            <a:ext cx="2171700" cy="419100"/>
+          <p:cNvPr id="11" name="">
+            <a:extLst xmlns:a="http://schemas.openxmlformats.org/drawingml/2006/main">
+              <a:ext uri="{FF2B5EF4-FFF2-40B4-BE49-F238E27FC236}">
+                <a16:creationId xmlns:a16="http://schemas.microsoft.com/office/drawing/2014/main" id="{25E811C8-4853-4060-B955-B089B5EFDFAA}"/>
+              </a:ext>
+            </a:extLst>
+          </p:cNvPr>
+          <p:cNvSpPr>
+            <a:spLocks xmlns:a="http://schemas.openxmlformats.org/drawingml/2006/main" noGrp="1"/>
+          </p:cNvSpPr>
+          <p:nvPr/>
+        </p:nvSpPr>
+        <p:spPr>
+          <a:xfrm xmlns:a="http://schemas.openxmlformats.org/drawingml/2006/main">
+            <a:off x="6438900" y="2505075"/>
+            <a:ext cx="2171700" cy="323850"/>
           </a:xfrm>
           <a:prstGeom xmlns:a="http://schemas.openxmlformats.org/drawingml/2006/main" prst="rect">
             <a:avLst/>
@@ -7282,22 +8040,22 @@
       </p:sp>
       <p:sp>
         <p:nvSpPr>
-          <p:cNvPr id="11" name="">
-            <a:extLst xmlns:a="http://schemas.openxmlformats.org/drawingml/2006/main">
-              <a:ext uri="{FF2B5EF4-FFF2-40B4-BE49-F238E27FC236}">
-                <a16:creationId xmlns:a16="http://schemas.microsoft.com/office/drawing/2014/main" id="{F1004A10-73E2-45E3-BED0-7163CC58F520}"/>
-              </a:ext>
-            </a:extLst>
-          </p:cNvPr>
-          <p:cNvSpPr>
-            <a:spLocks xmlns:a="http://schemas.openxmlformats.org/drawingml/2006/main" noGrp="1"/>
-          </p:cNvSpPr>
-          <p:nvPr/>
-        </p:nvSpPr>
-        <p:spPr>
-          <a:xfrm xmlns:a="http://schemas.openxmlformats.org/drawingml/2006/main">
-            <a:off x="9182100" y="2238375"/>
-            <a:ext cx="2400300" cy="571500"/>
+          <p:cNvPr id="12" name="">
+            <a:extLst xmlns:a="http://schemas.openxmlformats.org/drawingml/2006/main">
+              <a:ext uri="{FF2B5EF4-FFF2-40B4-BE49-F238E27FC236}">
+                <a16:creationId xmlns:a16="http://schemas.microsoft.com/office/drawing/2014/main" id="{58D5D951-28FE-4493-B818-831589C5D80F}"/>
+              </a:ext>
+            </a:extLst>
+          </p:cNvPr>
+          <p:cNvSpPr>
+            <a:spLocks xmlns:a="http://schemas.openxmlformats.org/drawingml/2006/main" noGrp="1"/>
+          </p:cNvSpPr>
+          <p:nvPr/>
+        </p:nvSpPr>
+        <p:spPr>
+          <a:xfrm xmlns:a="http://schemas.openxmlformats.org/drawingml/2006/main">
+            <a:off x="9182100" y="2428875"/>
+            <a:ext cx="2400300" cy="476250"/>
           </a:xfrm>
           <a:prstGeom xmlns:a="http://schemas.openxmlformats.org/drawingml/2006/main" prst="rect">
             <a:avLst/>
@@ -7315,22 +8073,22 @@
       </p:sp>
       <p:sp>
         <p:nvSpPr>
-          <p:cNvPr id="12" name="">
-            <a:extLst xmlns:a="http://schemas.openxmlformats.org/drawingml/2006/main">
-              <a:ext uri="{FF2B5EF4-FFF2-40B4-BE49-F238E27FC236}">
-                <a16:creationId xmlns:a16="http://schemas.microsoft.com/office/drawing/2014/main" id="{3092C4D5-551A-462C-9ADA-D3E61CC196CC}"/>
-              </a:ext>
-            </a:extLst>
-          </p:cNvPr>
-          <p:cNvSpPr>
-            <a:spLocks xmlns:a="http://schemas.openxmlformats.org/drawingml/2006/main" noGrp="1"/>
-          </p:cNvSpPr>
-          <p:nvPr/>
-        </p:nvSpPr>
-        <p:spPr>
-          <a:xfrm xmlns:a="http://schemas.openxmlformats.org/drawingml/2006/main">
-            <a:off x="9296400" y="2314575"/>
-            <a:ext cx="2171700" cy="419100"/>
+          <p:cNvPr id="13" name="">
+            <a:extLst xmlns:a="http://schemas.openxmlformats.org/drawingml/2006/main">
+              <a:ext uri="{FF2B5EF4-FFF2-40B4-BE49-F238E27FC236}">
+                <a16:creationId xmlns:a16="http://schemas.microsoft.com/office/drawing/2014/main" id="{C600E804-02EB-4D17-8A89-61C80EA25E3C}"/>
+              </a:ext>
+            </a:extLst>
+          </p:cNvPr>
+          <p:cNvSpPr>
+            <a:spLocks xmlns:a="http://schemas.openxmlformats.org/drawingml/2006/main" noGrp="1"/>
+          </p:cNvSpPr>
+          <p:nvPr/>
+        </p:nvSpPr>
+        <p:spPr>
+          <a:xfrm xmlns:a="http://schemas.openxmlformats.org/drawingml/2006/main">
+            <a:off x="9296400" y="2505075"/>
+            <a:ext cx="2171700" cy="323850"/>
           </a:xfrm>
           <a:prstGeom xmlns:a="http://schemas.openxmlformats.org/drawingml/2006/main" prst="rect">
             <a:avLst/>
@@ -7372,16 +8130,16 @@
       </p:sp>
       <p:cxnSp>
         <p:nvCxnSpPr>
-          <p:cNvPr id="32" name=""/>
+          <p:cNvPr id="35" name=""/>
           <p:cNvCxnSpPr>
-            <a:stCxn xmlns:a="http://schemas.openxmlformats.org/drawingml/2006/main" id="5" idx="3"/>
-            <a:endCxn xmlns:a="http://schemas.openxmlformats.org/drawingml/2006/main" id="7" idx="1"/>
+            <a:stCxn xmlns:a="http://schemas.openxmlformats.org/drawingml/2006/main" id="6" idx="3"/>
+            <a:endCxn xmlns:a="http://schemas.openxmlformats.org/drawingml/2006/main" id="8" idx="1"/>
           </p:cNvCxnSpPr>
           <p:nvPr/>
         </p:nvCxnSpPr>
         <p:spPr>
           <a:xfrm xmlns:a="http://schemas.openxmlformats.org/drawingml/2006/main">
-            <a:off x="3009900" y="2524125"/>
+            <a:off x="3009900" y="2667000"/>
             <a:ext cx="457200" cy="0"/>
           </a:xfrm>
           <a:prstGeom xmlns:a="http://schemas.openxmlformats.org/drawingml/2006/main" prst="straightConnector1">
@@ -7398,16 +8156,16 @@
       </p:cxnSp>
       <p:cxnSp>
         <p:nvCxnSpPr>
-          <p:cNvPr id="33" name=""/>
+          <p:cNvPr id="36" name=""/>
           <p:cNvCxnSpPr>
-            <a:stCxn xmlns:a="http://schemas.openxmlformats.org/drawingml/2006/main" id="7" idx="3"/>
-            <a:endCxn xmlns:a="http://schemas.openxmlformats.org/drawingml/2006/main" id="9" idx="1"/>
+            <a:stCxn xmlns:a="http://schemas.openxmlformats.org/drawingml/2006/main" id="8" idx="3"/>
+            <a:endCxn xmlns:a="http://schemas.openxmlformats.org/drawingml/2006/main" id="10" idx="1"/>
           </p:cNvCxnSpPr>
           <p:nvPr/>
         </p:nvCxnSpPr>
         <p:spPr>
           <a:xfrm xmlns:a="http://schemas.openxmlformats.org/drawingml/2006/main">
-            <a:off x="5867400" y="2524125"/>
+            <a:off x="5867400" y="2667000"/>
             <a:ext cx="457200" cy="0"/>
           </a:xfrm>
           <a:prstGeom xmlns:a="http://schemas.openxmlformats.org/drawingml/2006/main" prst="straightConnector1">
@@ -7424,16 +8182,16 @@
       </p:cxnSp>
       <p:cxnSp>
         <p:nvCxnSpPr>
-          <p:cNvPr id="34" name=""/>
+          <p:cNvPr id="37" name=""/>
           <p:cNvCxnSpPr>
-            <a:stCxn xmlns:a="http://schemas.openxmlformats.org/drawingml/2006/main" id="9" idx="3"/>
-            <a:endCxn xmlns:a="http://schemas.openxmlformats.org/drawingml/2006/main" id="11" idx="1"/>
+            <a:stCxn xmlns:a="http://schemas.openxmlformats.org/drawingml/2006/main" id="10" idx="3"/>
+            <a:endCxn xmlns:a="http://schemas.openxmlformats.org/drawingml/2006/main" id="12" idx="1"/>
           </p:cNvCxnSpPr>
           <p:nvPr/>
         </p:nvCxnSpPr>
         <p:spPr>
           <a:xfrm xmlns:a="http://schemas.openxmlformats.org/drawingml/2006/main">
-            <a:off x="8724900" y="2524125"/>
+            <a:off x="8724900" y="2667000"/>
             <a:ext cx="457200" cy="0"/>
           </a:xfrm>
           <a:prstGeom xmlns:a="http://schemas.openxmlformats.org/drawingml/2006/main" prst="straightConnector1">
@@ -7450,22 +8208,79 @@
       </p:cxnSp>
       <p:sp>
         <p:nvSpPr>
-          <p:cNvPr id="16" name="">
-            <a:extLst xmlns:a="http://schemas.openxmlformats.org/drawingml/2006/main">
-              <a:ext uri="{FF2B5EF4-FFF2-40B4-BE49-F238E27FC236}">
-                <a16:creationId xmlns:a16="http://schemas.microsoft.com/office/drawing/2014/main" id="{F83BFA3C-04D9-44C5-926C-F43FCC75225D}"/>
-              </a:ext>
-            </a:extLst>
-          </p:cNvPr>
-          <p:cNvSpPr>
-            <a:spLocks xmlns:a="http://schemas.openxmlformats.org/drawingml/2006/main" noGrp="1"/>
-          </p:cNvSpPr>
-          <p:nvPr/>
-        </p:nvSpPr>
-        <p:spPr>
-          <a:xfrm xmlns:a="http://schemas.openxmlformats.org/drawingml/2006/main">
-            <a:off x="609600" y="2933700"/>
+          <p:cNvPr id="17" name="">
+            <a:extLst xmlns:a="http://schemas.openxmlformats.org/drawingml/2006/main">
+              <a:ext uri="{FF2B5EF4-FFF2-40B4-BE49-F238E27FC236}">
+                <a16:creationId xmlns:a16="http://schemas.microsoft.com/office/drawing/2014/main" id="{C43058B2-B148-4992-A71F-A15D86B4BC92}"/>
+              </a:ext>
+            </a:extLst>
+          </p:cNvPr>
+          <p:cNvSpPr>
+            <a:spLocks xmlns:a="http://schemas.openxmlformats.org/drawingml/2006/main" noGrp="1"/>
+          </p:cNvSpPr>
+          <p:nvPr/>
+        </p:nvSpPr>
+        <p:spPr>
+          <a:xfrm xmlns:a="http://schemas.openxmlformats.org/drawingml/2006/main">
+            <a:off x="609600" y="3019425"/>
             <a:ext cx="10972800" cy="257175"/>
+          </a:xfrm>
+          <a:prstGeom xmlns:a="http://schemas.openxmlformats.org/drawingml/2006/main" prst="rect">
+            <a:avLst/>
+          </a:prstGeom>
+          <a:noFill xmlns:a="http://schemas.openxmlformats.org/drawingml/2006/main"/>
+          <a:ln xmlns:a="http://schemas.openxmlformats.org/drawingml/2006/main" w="0">
+            <a:noFill/>
+          </a:ln>
+        </p:spPr>
+        <p:txBody>
+          <a:bodyPr xmlns:a="http://schemas.openxmlformats.org/drawingml/2006/main" wrap="square" lIns="0" tIns="0" rIns="0" bIns="0" anchor="ctr">
+            <a:noAutofit/>
+          </a:bodyPr>
+          <a:lstStyle xmlns:a="http://schemas.openxmlformats.org/drawingml/2006/main"/>
+          <a:p xmlns:a="http://schemas.openxmlformats.org/drawingml/2006/main">
+            <a:pPr algn="l">
+              <a:defRPr sz="1500" b="0">
+                <a:solidFill>
+                  <a:srgbClr val="ADB8C5"/>
+                </a:solidFill>
+                <a:latin typeface="Roboto"/>
+                <a:ea typeface="Roboto"/>
+                <a:cs typeface="Roboto"/>
+              </a:defRPr>
+            </a:pPr>
+            <a:r>
+              <a:rPr sz="1500" b="0">
+                <a:solidFill>
+                  <a:srgbClr val="ADB8C5"/>
+                </a:solidFill>
+                <a:latin typeface="Roboto"/>
+                <a:ea typeface="Roboto"/>
+                <a:cs typeface="Roboto"/>
+              </a:rPr>
+              <a:t>Adapt or stop; production evidence feeds the next iteration.</a:t>
+            </a:r>
+          </a:p>
+        </p:txBody>
+      </p:sp>
+      <p:sp>
+        <p:nvSpPr>
+          <p:cNvPr id="18" name="">
+            <a:extLst xmlns:a="http://schemas.openxmlformats.org/drawingml/2006/main">
+              <a:ext uri="{FF2B5EF4-FFF2-40B4-BE49-F238E27FC236}">
+                <a16:creationId xmlns:a16="http://schemas.microsoft.com/office/drawing/2014/main" id="{D7DACE9E-32D3-4DCD-A309-E2AEBC172C06}"/>
+              </a:ext>
+            </a:extLst>
+          </p:cNvPr>
+          <p:cNvSpPr>
+            <a:spLocks xmlns:a="http://schemas.openxmlformats.org/drawingml/2006/main" noGrp="1"/>
+          </p:cNvSpPr>
+          <p:nvPr/>
+        </p:nvSpPr>
+        <p:spPr>
+          <a:xfrm xmlns:a="http://schemas.openxmlformats.org/drawingml/2006/main">
+            <a:off x="609600" y="3333750"/>
+            <a:ext cx="10972800" cy="266700"/>
           </a:xfrm>
           <a:prstGeom xmlns:a="http://schemas.openxmlformats.org/drawingml/2006/main" prst="rect">
             <a:avLst/>
@@ -7484,7 +8299,7 @@
             <a:pPr algn="l">
               <a:defRPr sz="1575" b="0">
                 <a:solidFill>
-                  <a:srgbClr val="ADB8C5"/>
+                  <a:srgbClr val="28C7F7"/>
                 </a:solidFill>
                 <a:latin typeface="Roboto"/>
                 <a:ea typeface="Roboto"/>
@@ -7494,26 +8309,26 @@
             <a:r>
               <a:rPr sz="1575" b="0">
                 <a:solidFill>
-                  <a:srgbClr val="ADB8C5"/>
-                </a:solidFill>
-                <a:latin typeface="Roboto"/>
-                <a:ea typeface="Roboto"/>
-                <a:cs typeface="Roboto"/>
-              </a:rPr>
-              <a:t>Adapt or stop; production evidence feeds the next iteration.</a:t>
+                  <a:srgbClr val="28C7F7"/>
+                </a:solidFill>
+                <a:latin typeface="Roboto"/>
+                <a:ea typeface="Roboto"/>
+                <a:cs typeface="Roboto"/>
+              </a:rPr>
+              <a:t>Trial: can approved knowledge answer routine cases without unsupported steps?</a:t>
             </a:r>
           </a:p>
         </p:txBody>
       </p:sp>
       <p:graphicFrame>
         <p:nvGraphicFramePr>
-          <p:cNvPr id="36" name=""/>
+          <p:cNvPr id="40" name=""/>
           <p:cNvGraphicFramePr/>
           <p:nvPr/>
         </p:nvGraphicFramePr>
         <p:xfrm>
-          <a:off xmlns:a="http://schemas.openxmlformats.org/drawingml/2006/main" x="609600" y="3333750"/>
-          <a:ext xmlns:a="http://schemas.openxmlformats.org/drawingml/2006/main" cx="10972800" cy="2266950"/>
+          <a:off xmlns:a="http://schemas.openxmlformats.org/drawingml/2006/main" x="609600" y="3695700"/>
+          <a:ext xmlns:a="http://schemas.openxmlformats.org/drawingml/2006/main" cx="10972800" cy="2190750"/>
         </p:xfrm>
         <a:graphic xmlns:a="http://schemas.openxmlformats.org/drawingml/2006/main">
           <a:graphicData uri="http://schemas.openxmlformats.org/drawingml/2006/table">
@@ -7524,7 +8339,7 @@
                 <a:gridCol w="4467225"/>
                 <a:gridCol w="4476750"/>
               </a:tblGrid>
-              <a:tr h="566738">
+              <a:tr h="547688">
                 <a:tc>
                   <a:txBody>
                     <a:bodyPr lIns="171450" tIns="66675" rIns="171450" bIns="66675">
@@ -7604,7 +8419,7 @@
                   </a:tcPr>
                 </a:tc>
               </a:tr>
-              <a:tr h="566738">
+              <a:tr h="547688">
                 <a:tc>
                   <a:txBody>
                     <a:bodyPr lIns="171450" tIns="66675" rIns="171450" bIns="66675">
@@ -7684,7 +8499,7 @@
                   </a:tcPr>
                 </a:tc>
               </a:tr>
-              <a:tr h="566738">
+              <a:tr h="547688">
                 <a:tc>
                   <a:txBody>
                     <a:bodyPr lIns="171450" tIns="66675" rIns="171450" bIns="66675">
@@ -7764,7 +8579,7 @@
                   </a:tcPr>
                 </a:tc>
               </a:tr>
-              <a:tr h="566738">
+              <a:tr h="547688">
                 <a:tc>
                   <a:txBody>
                     <a:bodyPr lIns="171450" tIns="66675" rIns="171450" bIns="66675">
@@ -7850,53 +8665,22 @@
       </p:graphicFrame>
       <p:sp>
         <p:nvSpPr>
-          <p:cNvPr id="18" name="">
-            <a:extLst xmlns:a="http://schemas.openxmlformats.org/drawingml/2006/main">
-              <a:ext uri="{FF2B5EF4-FFF2-40B4-BE49-F238E27FC236}">
-                <a16:creationId xmlns:a16="http://schemas.microsoft.com/office/drawing/2014/main" id="{565ADA42-F6DF-4771-B8BA-A30CE250801E}"/>
-              </a:ext>
-            </a:extLst>
-          </p:cNvPr>
-          <p:cNvSpPr>
-            <a:spLocks xmlns:a="http://schemas.openxmlformats.org/drawingml/2006/main" noGrp="1"/>
-          </p:cNvSpPr>
-          <p:nvPr/>
-        </p:nvSpPr>
-        <p:spPr>
-          <a:xfrm xmlns:a="http://schemas.openxmlformats.org/drawingml/2006/main" flipH="0" flipV="0">
-            <a:off x="609600" y="5734050"/>
-            <a:ext cx="10972800" cy="0"/>
-          </a:xfrm>
-          <a:prstGeom xmlns:a="http://schemas.openxmlformats.org/drawingml/2006/main" prst="line">
-            <a:avLst/>
-          </a:prstGeom>
-          <a:noFill xmlns:a="http://schemas.openxmlformats.org/drawingml/2006/main"/>
-          <a:ln xmlns:a="http://schemas.openxmlformats.org/drawingml/2006/main" w="19050">
-            <a:solidFill>
-              <a:srgbClr val="344454"/>
-            </a:solidFill>
-            <a:prstDash val="solid"/>
-          </a:ln>
-        </p:spPr>
-      </p:sp>
-      <p:sp>
-        <p:nvSpPr>
-          <p:cNvPr id="19" name="">
-            <a:extLst xmlns:a="http://schemas.openxmlformats.org/drawingml/2006/main">
-              <a:ext uri="{FF2B5EF4-FFF2-40B4-BE49-F238E27FC236}">
-                <a16:creationId xmlns:a16="http://schemas.microsoft.com/office/drawing/2014/main" id="{B54D38C6-2000-4BDD-9D9F-96F7AF7D7FA4}"/>
-              </a:ext>
-            </a:extLst>
-          </p:cNvPr>
-          <p:cNvSpPr>
-            <a:spLocks xmlns:a="http://schemas.openxmlformats.org/drawingml/2006/main" noGrp="1"/>
-          </p:cNvSpPr>
-          <p:nvPr/>
-        </p:nvSpPr>
-        <p:spPr>
-          <a:xfrm xmlns:a="http://schemas.openxmlformats.org/drawingml/2006/main">
-            <a:off x="609600" y="5905500"/>
-            <a:ext cx="10648950" cy="666750"/>
+          <p:cNvPr id="20" name="">
+            <a:extLst xmlns:a="http://schemas.openxmlformats.org/drawingml/2006/main">
+              <a:ext uri="{FF2B5EF4-FFF2-40B4-BE49-F238E27FC236}">
+                <a16:creationId xmlns:a16="http://schemas.microsoft.com/office/drawing/2014/main" id="{61C6B4F3-D414-41B1-9D3E-BA16DB5FDBE2}"/>
+              </a:ext>
+            </a:extLst>
+          </p:cNvPr>
+          <p:cNvSpPr>
+            <a:spLocks xmlns:a="http://schemas.openxmlformats.org/drawingml/2006/main" noGrp="1"/>
+          </p:cNvSpPr>
+          <p:nvPr/>
+        </p:nvSpPr>
+        <p:spPr>
+          <a:xfrm xmlns:a="http://schemas.openxmlformats.org/drawingml/2006/main">
+            <a:off x="609600" y="5962650"/>
+            <a:ext cx="10972800" cy="266700"/>
           </a:xfrm>
           <a:prstGeom xmlns:a="http://schemas.openxmlformats.org/drawingml/2006/main" prst="rect">
             <a:avLst/>
@@ -7913,7 +8697,64 @@
           <a:lstStyle xmlns:a="http://schemas.openxmlformats.org/drawingml/2006/main"/>
           <a:p xmlns:a="http://schemas.openxmlformats.org/drawingml/2006/main">
             <a:pPr algn="l">
-              <a:defRPr sz="2100" b="1">
+              <a:defRPr sz="1500" b="0">
+                <a:solidFill>
+                  <a:srgbClr val="F5B61C"/>
+                </a:solidFill>
+                <a:latin typeface="Roboto"/>
+                <a:ea typeface="Roboto"/>
+                <a:cs typeface="Roboto"/>
+              </a:defRPr>
+            </a:pPr>
+            <a:r>
+              <a:rPr sz="1500" b="0">
+                <a:solidFill>
+                  <a:srgbClr val="F5B61C"/>
+                </a:solidFill>
+                <a:latin typeface="Roboto"/>
+                <a:ea typeface="Roboto"/>
+                <a:cs typeface="Roboto"/>
+              </a:rPr>
+              <a:t>Time-box the investigation before promising production capability.</a:t>
+            </a:r>
+          </a:p>
+        </p:txBody>
+      </p:sp>
+      <p:sp>
+        <p:nvSpPr>
+          <p:cNvPr id="21" name="">
+            <a:extLst xmlns:a="http://schemas.openxmlformats.org/drawingml/2006/main">
+              <a:ext uri="{FF2B5EF4-FFF2-40B4-BE49-F238E27FC236}">
+                <a16:creationId xmlns:a16="http://schemas.microsoft.com/office/drawing/2014/main" id="{E79FCAA3-A946-47BC-BE6F-42BC8DD51FCD}"/>
+              </a:ext>
+            </a:extLst>
+          </p:cNvPr>
+          <p:cNvSpPr>
+            <a:spLocks xmlns:a="http://schemas.openxmlformats.org/drawingml/2006/main" noGrp="1"/>
+          </p:cNvSpPr>
+          <p:nvPr/>
+        </p:nvSpPr>
+        <p:spPr>
+          <a:xfrm xmlns:a="http://schemas.openxmlformats.org/drawingml/2006/main">
+            <a:off x="609600" y="6334125"/>
+            <a:ext cx="10648950" cy="304800"/>
+          </a:xfrm>
+          <a:prstGeom xmlns:a="http://schemas.openxmlformats.org/drawingml/2006/main" prst="rect">
+            <a:avLst/>
+          </a:prstGeom>
+          <a:noFill xmlns:a="http://schemas.openxmlformats.org/drawingml/2006/main"/>
+          <a:ln xmlns:a="http://schemas.openxmlformats.org/drawingml/2006/main" w="0">
+            <a:noFill/>
+          </a:ln>
+        </p:spPr>
+        <p:txBody>
+          <a:bodyPr xmlns:a="http://schemas.openxmlformats.org/drawingml/2006/main" wrap="square" lIns="0" tIns="0" rIns="0" bIns="0" anchor="ctr">
+            <a:noAutofit/>
+          </a:bodyPr>
+          <a:lstStyle xmlns:a="http://schemas.openxmlformats.org/drawingml/2006/main"/>
+          <a:p xmlns:a="http://schemas.openxmlformats.org/drawingml/2006/main">
+            <a:pPr algn="l">
+              <a:defRPr sz="1875" b="1">
                 <a:solidFill>
                   <a:srgbClr val="F4F7FA"/>
                 </a:solidFill>
@@ -7923,7 +8764,7 @@
               </a:defRPr>
             </a:pPr>
             <a:r>
-              <a:rPr sz="2100" b="1">
+              <a:rPr sz="1875" b="1">
                 <a:solidFill>
                   <a:srgbClr val="F4F7FA"/>
                 </a:solidFill>
@@ -7939,7 +8780,7 @@
     </p:spTree>
     <p:extLst>
       <p:ext uri="{BB962C8B-B14F-4D97-AF65-F5344CB8AC3E}">
-        <p14:creationId xmlns:p14="http://schemas.microsoft.com/office/powerpoint/2010/main" val="1495338830"/>
+        <p14:creationId xmlns:p14="http://schemas.microsoft.com/office/powerpoint/2010/main" val="679121277"/>
       </p:ext>
     </p:extLst>
   </p:cSld>
@@ -7967,10 +8808,10 @@
       </p:grpSpPr>
       <p:sp>
         <p:nvSpPr>
-          <p:cNvPr id="21" name="">
-            <a:extLst xmlns:a="http://schemas.openxmlformats.org/drawingml/2006/main">
-              <a:ext uri="{FF2B5EF4-FFF2-40B4-BE49-F238E27FC236}">
-                <a16:creationId xmlns:a16="http://schemas.microsoft.com/office/drawing/2014/main" id="{6A544B35-DC3A-4438-A2DB-8A391875F6C5}"/>
+          <p:cNvPr id="23" name="">
+            <a:extLst xmlns:a="http://schemas.openxmlformats.org/drawingml/2006/main">
+              <a:ext uri="{FF2B5EF4-FFF2-40B4-BE49-F238E27FC236}">
+                <a16:creationId xmlns:a16="http://schemas.microsoft.com/office/drawing/2014/main" id="{EC35B943-3FB4-444B-A744-91AC036A7AB1}"/>
               </a:ext>
             </a:extLst>
           </p:cNvPr>
@@ -8050,7 +8891,7 @@
           <p:cNvPr id="2" name="">
             <a:extLst xmlns:a="http://schemas.openxmlformats.org/drawingml/2006/main">
               <a:ext uri="{FF2B5EF4-FFF2-40B4-BE49-F238E27FC236}">
-                <a16:creationId xmlns:a16="http://schemas.microsoft.com/office/drawing/2014/main" id="{9ADDE5D8-A2A1-4088-9750-62051E8258AE}"/>
+                <a16:creationId xmlns:a16="http://schemas.microsoft.com/office/drawing/2014/main" id="{9C96BFA7-8978-4156-BB0C-C4D64F092411}"/>
               </a:ext>
             </a:extLst>
           </p:cNvPr>
@@ -8081,7 +8922,7 @@
           <p:cNvPr id="3" name="">
             <a:extLst xmlns:a="http://schemas.openxmlformats.org/drawingml/2006/main">
               <a:ext uri="{FF2B5EF4-FFF2-40B4-BE49-F238E27FC236}">
-                <a16:creationId xmlns:a16="http://schemas.microsoft.com/office/drawing/2014/main" id="{992A408D-EA73-4A5C-8BBB-B97844EE428D}"/>
+                <a16:creationId xmlns:a16="http://schemas.microsoft.com/office/drawing/2014/main" id="{ACB3C06D-8C8C-4CB9-B6A3-80BBA5137F4D}"/>
               </a:ext>
             </a:extLst>
           </p:cNvPr>
@@ -8138,19 +8979,19 @@
           <p:cNvPr id="4" name="">
             <a:extLst xmlns:a="http://schemas.openxmlformats.org/drawingml/2006/main">
               <a:ext uri="{FF2B5EF4-FFF2-40B4-BE49-F238E27FC236}">
-                <a16:creationId xmlns:a16="http://schemas.microsoft.com/office/drawing/2014/main" id="{397CBD32-8C2D-4A5D-B236-23DB91847BF9}"/>
-              </a:ext>
-            </a:extLst>
-          </p:cNvPr>
-          <p:cNvSpPr>
-            <a:spLocks xmlns:a="http://schemas.openxmlformats.org/drawingml/2006/main" noGrp="1"/>
-          </p:cNvSpPr>
-          <p:nvPr/>
-        </p:nvSpPr>
-        <p:spPr>
-          <a:xfrm xmlns:a="http://schemas.openxmlformats.org/drawingml/2006/main">
-            <a:off x="609600" y="1971675"/>
-            <a:ext cx="5238750" cy="342900"/>
+                <a16:creationId xmlns:a16="http://schemas.microsoft.com/office/drawing/2014/main" id="{675478BA-CA2E-4CE0-8384-F91867A61A69}"/>
+              </a:ext>
+            </a:extLst>
+          </p:cNvPr>
+          <p:cNvSpPr>
+            <a:spLocks xmlns:a="http://schemas.openxmlformats.org/drawingml/2006/main" noGrp="1"/>
+          </p:cNvSpPr>
+          <p:nvPr/>
+        </p:nvSpPr>
+        <p:spPr>
+          <a:xfrm xmlns:a="http://schemas.openxmlformats.org/drawingml/2006/main">
+            <a:off x="609600" y="1809750"/>
+            <a:ext cx="5238750" cy="323850"/>
           </a:xfrm>
           <a:prstGeom xmlns:a="http://schemas.openxmlformats.org/drawingml/2006/main" prst="rect">
             <a:avLst/>
@@ -8195,19 +9036,19 @@
           <p:cNvPr id="5" name="">
             <a:extLst xmlns:a="http://schemas.openxmlformats.org/drawingml/2006/main">
               <a:ext uri="{FF2B5EF4-FFF2-40B4-BE49-F238E27FC236}">
-                <a16:creationId xmlns:a16="http://schemas.microsoft.com/office/drawing/2014/main" id="{10924785-3D19-4430-8975-273F161BEB9C}"/>
-              </a:ext>
-            </a:extLst>
-          </p:cNvPr>
-          <p:cNvSpPr>
-            <a:spLocks xmlns:a="http://schemas.openxmlformats.org/drawingml/2006/main" noGrp="1"/>
-          </p:cNvSpPr>
-          <p:nvPr/>
-        </p:nvSpPr>
-        <p:spPr>
-          <a:xfrm xmlns:a="http://schemas.openxmlformats.org/drawingml/2006/main">
-            <a:off x="609600" y="2476500"/>
-            <a:ext cx="5238750" cy="495300"/>
+                <a16:creationId xmlns:a16="http://schemas.microsoft.com/office/drawing/2014/main" id="{35FCCEB4-4297-4BB1-8EAC-27398EF93F6B}"/>
+              </a:ext>
+            </a:extLst>
+          </p:cNvPr>
+          <p:cNvSpPr>
+            <a:spLocks xmlns:a="http://schemas.openxmlformats.org/drawingml/2006/main" noGrp="1"/>
+          </p:cNvSpPr>
+          <p:nvPr/>
+        </p:nvSpPr>
+        <p:spPr>
+          <a:xfrm xmlns:a="http://schemas.openxmlformats.org/drawingml/2006/main">
+            <a:off x="609600" y="2228850"/>
+            <a:ext cx="5238750" cy="457200"/>
           </a:xfrm>
           <a:prstGeom xmlns:a="http://schemas.openxmlformats.org/drawingml/2006/main" prst="rect">
             <a:avLst/>
@@ -8252,7 +9093,7 @@
           <p:cNvPr id="6" name="">
             <a:extLst xmlns:a="http://schemas.openxmlformats.org/drawingml/2006/main">
               <a:ext uri="{FF2B5EF4-FFF2-40B4-BE49-F238E27FC236}">
-                <a16:creationId xmlns:a16="http://schemas.microsoft.com/office/drawing/2014/main" id="{C1510938-C1D3-4E01-AFD3-86D0A5BDD3AA}"/>
+                <a16:creationId xmlns:a16="http://schemas.microsoft.com/office/drawing/2014/main" id="{CE844D99-AB4B-400D-BC9E-A6D6DAC8E3A1}"/>
               </a:ext>
             </a:extLst>
           </p:cNvPr>
@@ -8263,7 +9104,7 @@
         </p:nvSpPr>
         <p:spPr>
           <a:xfrm xmlns:a="http://schemas.openxmlformats.org/drawingml/2006/main" flipH="0" flipV="0">
-            <a:off x="609600" y="3181350"/>
+            <a:off x="609600" y="2876550"/>
             <a:ext cx="5238750" cy="0"/>
           </a:xfrm>
           <a:prstGeom xmlns:a="http://schemas.openxmlformats.org/drawingml/2006/main" prst="line">
@@ -8283,18 +9124,18 @@
           <p:cNvPr id="7" name="">
             <a:extLst xmlns:a="http://schemas.openxmlformats.org/drawingml/2006/main">
               <a:ext uri="{FF2B5EF4-FFF2-40B4-BE49-F238E27FC236}">
-                <a16:creationId xmlns:a16="http://schemas.microsoft.com/office/drawing/2014/main" id="{679C9F66-232D-4D33-9E42-B1D195706D66}"/>
-              </a:ext>
-            </a:extLst>
-          </p:cNvPr>
-          <p:cNvSpPr>
-            <a:spLocks xmlns:a="http://schemas.openxmlformats.org/drawingml/2006/main" noGrp="1"/>
-          </p:cNvSpPr>
-          <p:nvPr/>
-        </p:nvSpPr>
-        <p:spPr>
-          <a:xfrm xmlns:a="http://schemas.openxmlformats.org/drawingml/2006/main">
-            <a:off x="609600" y="3371850"/>
+                <a16:creationId xmlns:a16="http://schemas.microsoft.com/office/drawing/2014/main" id="{F29F9024-B494-4FF6-8383-BF169CA5AB2C}"/>
+              </a:ext>
+            </a:extLst>
+          </p:cNvPr>
+          <p:cNvSpPr>
+            <a:spLocks xmlns:a="http://schemas.openxmlformats.org/drawingml/2006/main" noGrp="1"/>
+          </p:cNvSpPr>
+          <p:nvPr/>
+        </p:nvSpPr>
+        <p:spPr>
+          <a:xfrm xmlns:a="http://schemas.openxmlformats.org/drawingml/2006/main">
+            <a:off x="609600" y="3057525"/>
             <a:ext cx="5238750" cy="381000"/>
           </a:xfrm>
           <a:prstGeom xmlns:a="http://schemas.openxmlformats.org/drawingml/2006/main" prst="rect">
@@ -8340,18 +9181,18 @@
           <p:cNvPr id="8" name="">
             <a:extLst xmlns:a="http://schemas.openxmlformats.org/drawingml/2006/main">
               <a:ext uri="{FF2B5EF4-FFF2-40B4-BE49-F238E27FC236}">
-                <a16:creationId xmlns:a16="http://schemas.microsoft.com/office/drawing/2014/main" id="{C277486B-8FD2-4488-8BFA-014B98F24124}"/>
-              </a:ext>
-            </a:extLst>
-          </p:cNvPr>
-          <p:cNvSpPr>
-            <a:spLocks xmlns:a="http://schemas.openxmlformats.org/drawingml/2006/main" noGrp="1"/>
-          </p:cNvSpPr>
-          <p:nvPr/>
-        </p:nvSpPr>
-        <p:spPr>
-          <a:xfrm xmlns:a="http://schemas.openxmlformats.org/drawingml/2006/main">
-            <a:off x="609600" y="3790950"/>
+                <a16:creationId xmlns:a16="http://schemas.microsoft.com/office/drawing/2014/main" id="{F3686B4C-8ECE-4BFB-9F2B-A7DCC809F4FD}"/>
+              </a:ext>
+            </a:extLst>
+          </p:cNvPr>
+          <p:cNvSpPr>
+            <a:spLocks xmlns:a="http://schemas.openxmlformats.org/drawingml/2006/main" noGrp="1"/>
+          </p:cNvSpPr>
+          <p:nvPr/>
+        </p:nvSpPr>
+        <p:spPr>
+          <a:xfrm xmlns:a="http://schemas.openxmlformats.org/drawingml/2006/main">
+            <a:off x="609600" y="3476625"/>
             <a:ext cx="5238750" cy="381000"/>
           </a:xfrm>
           <a:prstGeom xmlns:a="http://schemas.openxmlformats.org/drawingml/2006/main" prst="rect">
@@ -8397,18 +9238,18 @@
           <p:cNvPr id="9" name="">
             <a:extLst xmlns:a="http://schemas.openxmlformats.org/drawingml/2006/main">
               <a:ext uri="{FF2B5EF4-FFF2-40B4-BE49-F238E27FC236}">
-                <a16:creationId xmlns:a16="http://schemas.microsoft.com/office/drawing/2014/main" id="{F855802E-3E6C-4DB5-B3D8-73E5797C1986}"/>
-              </a:ext>
-            </a:extLst>
-          </p:cNvPr>
-          <p:cNvSpPr>
-            <a:spLocks xmlns:a="http://schemas.openxmlformats.org/drawingml/2006/main" noGrp="1"/>
-          </p:cNvSpPr>
-          <p:nvPr/>
-        </p:nvSpPr>
-        <p:spPr>
-          <a:xfrm xmlns:a="http://schemas.openxmlformats.org/drawingml/2006/main">
-            <a:off x="609600" y="4210050"/>
+                <a16:creationId xmlns:a16="http://schemas.microsoft.com/office/drawing/2014/main" id="{7D536A8F-5829-49EE-BF00-95FE0B8F4542}"/>
+              </a:ext>
+            </a:extLst>
+          </p:cNvPr>
+          <p:cNvSpPr>
+            <a:spLocks xmlns:a="http://schemas.openxmlformats.org/drawingml/2006/main" noGrp="1"/>
+          </p:cNvSpPr>
+          <p:nvPr/>
+        </p:nvSpPr>
+        <p:spPr>
+          <a:xfrm xmlns:a="http://schemas.openxmlformats.org/drawingml/2006/main">
+            <a:off x="609600" y="3895725"/>
             <a:ext cx="5238750" cy="381000"/>
           </a:xfrm>
           <a:prstGeom xmlns:a="http://schemas.openxmlformats.org/drawingml/2006/main" prst="rect">
@@ -8454,18 +9295,18 @@
           <p:cNvPr id="10" name="">
             <a:extLst xmlns:a="http://schemas.openxmlformats.org/drawingml/2006/main">
               <a:ext uri="{FF2B5EF4-FFF2-40B4-BE49-F238E27FC236}">
-                <a16:creationId xmlns:a16="http://schemas.microsoft.com/office/drawing/2014/main" id="{2B63D24F-12D3-4C38-A4A8-9F9CC5DF4F19}"/>
-              </a:ext>
-            </a:extLst>
-          </p:cNvPr>
-          <p:cNvSpPr>
-            <a:spLocks xmlns:a="http://schemas.openxmlformats.org/drawingml/2006/main" noGrp="1"/>
-          </p:cNvSpPr>
-          <p:nvPr/>
-        </p:nvSpPr>
-        <p:spPr>
-          <a:xfrm xmlns:a="http://schemas.openxmlformats.org/drawingml/2006/main">
-            <a:off x="609600" y="4629150"/>
+                <a16:creationId xmlns:a16="http://schemas.microsoft.com/office/drawing/2014/main" id="{F4D1AA38-7393-4FA9-A674-9A03D5356F31}"/>
+              </a:ext>
+            </a:extLst>
+          </p:cNvPr>
+          <p:cNvSpPr>
+            <a:spLocks xmlns:a="http://schemas.openxmlformats.org/drawingml/2006/main" noGrp="1"/>
+          </p:cNvSpPr>
+          <p:nvPr/>
+        </p:nvSpPr>
+        <p:spPr>
+          <a:xfrm xmlns:a="http://schemas.openxmlformats.org/drawingml/2006/main">
+            <a:off x="609600" y="4314825"/>
             <a:ext cx="5238750" cy="381000"/>
           </a:xfrm>
           <a:prstGeom xmlns:a="http://schemas.openxmlformats.org/drawingml/2006/main" prst="rect">
@@ -8511,19 +9352,19 @@
           <p:cNvPr id="11" name="">
             <a:extLst xmlns:a="http://schemas.openxmlformats.org/drawingml/2006/main">
               <a:ext uri="{FF2B5EF4-FFF2-40B4-BE49-F238E27FC236}">
-                <a16:creationId xmlns:a16="http://schemas.microsoft.com/office/drawing/2014/main" id="{516898C7-5AA2-4B75-AEEF-C0774B4C995A}"/>
-              </a:ext>
-            </a:extLst>
-          </p:cNvPr>
-          <p:cNvSpPr>
-            <a:spLocks xmlns:a="http://schemas.openxmlformats.org/drawingml/2006/main" noGrp="1"/>
-          </p:cNvSpPr>
-          <p:nvPr/>
-        </p:nvSpPr>
-        <p:spPr>
-          <a:xfrm xmlns:a="http://schemas.openxmlformats.org/drawingml/2006/main">
-            <a:off x="6324600" y="1971675"/>
-            <a:ext cx="5238750" cy="342900"/>
+                <a16:creationId xmlns:a16="http://schemas.microsoft.com/office/drawing/2014/main" id="{0CDB184F-9CE6-4BAB-B30E-574123C1106E}"/>
+              </a:ext>
+            </a:extLst>
+          </p:cNvPr>
+          <p:cNvSpPr>
+            <a:spLocks xmlns:a="http://schemas.openxmlformats.org/drawingml/2006/main" noGrp="1"/>
+          </p:cNvSpPr>
+          <p:nvPr/>
+        </p:nvSpPr>
+        <p:spPr>
+          <a:xfrm xmlns:a="http://schemas.openxmlformats.org/drawingml/2006/main">
+            <a:off x="6324600" y="1809750"/>
+            <a:ext cx="5238750" cy="323850"/>
           </a:xfrm>
           <a:prstGeom xmlns:a="http://schemas.openxmlformats.org/drawingml/2006/main" prst="rect">
             <a:avLst/>
@@ -8568,19 +9409,19 @@
           <p:cNvPr id="12" name="">
             <a:extLst xmlns:a="http://schemas.openxmlformats.org/drawingml/2006/main">
               <a:ext uri="{FF2B5EF4-FFF2-40B4-BE49-F238E27FC236}">
-                <a16:creationId xmlns:a16="http://schemas.microsoft.com/office/drawing/2014/main" id="{E9AA1EB7-609A-4576-A0CC-EC07BBEEAEE9}"/>
-              </a:ext>
-            </a:extLst>
-          </p:cNvPr>
-          <p:cNvSpPr>
-            <a:spLocks xmlns:a="http://schemas.openxmlformats.org/drawingml/2006/main" noGrp="1"/>
-          </p:cNvSpPr>
-          <p:nvPr/>
-        </p:nvSpPr>
-        <p:spPr>
-          <a:xfrm xmlns:a="http://schemas.openxmlformats.org/drawingml/2006/main">
-            <a:off x="6324600" y="2476500"/>
-            <a:ext cx="5238750" cy="495300"/>
+                <a16:creationId xmlns:a16="http://schemas.microsoft.com/office/drawing/2014/main" id="{56BEA4B4-702F-4DC5-A6B1-C7F13E8267F5}"/>
+              </a:ext>
+            </a:extLst>
+          </p:cNvPr>
+          <p:cNvSpPr>
+            <a:spLocks xmlns:a="http://schemas.openxmlformats.org/drawingml/2006/main" noGrp="1"/>
+          </p:cNvSpPr>
+          <p:nvPr/>
+        </p:nvSpPr>
+        <p:spPr>
+          <a:xfrm xmlns:a="http://schemas.openxmlformats.org/drawingml/2006/main">
+            <a:off x="6324600" y="2228850"/>
+            <a:ext cx="5238750" cy="457200"/>
           </a:xfrm>
           <a:prstGeom xmlns:a="http://schemas.openxmlformats.org/drawingml/2006/main" prst="rect">
             <a:avLst/>
@@ -8625,7 +9466,7 @@
           <p:cNvPr id="13" name="">
             <a:extLst xmlns:a="http://schemas.openxmlformats.org/drawingml/2006/main">
               <a:ext uri="{FF2B5EF4-FFF2-40B4-BE49-F238E27FC236}">
-                <a16:creationId xmlns:a16="http://schemas.microsoft.com/office/drawing/2014/main" id="{44DB1BF5-E896-4352-B151-51BFEB933A83}"/>
+                <a16:creationId xmlns:a16="http://schemas.microsoft.com/office/drawing/2014/main" id="{60BD395D-3D0D-4EDD-9948-0C5FA811FCCB}"/>
               </a:ext>
             </a:extLst>
           </p:cNvPr>
@@ -8636,7 +9477,7 @@
         </p:nvSpPr>
         <p:spPr>
           <a:xfrm xmlns:a="http://schemas.openxmlformats.org/drawingml/2006/main" flipH="0" flipV="0">
-            <a:off x="6324600" y="3181350"/>
+            <a:off x="6324600" y="2876550"/>
             <a:ext cx="5238750" cy="0"/>
           </a:xfrm>
           <a:prstGeom xmlns:a="http://schemas.openxmlformats.org/drawingml/2006/main" prst="line">
@@ -8656,18 +9497,18 @@
           <p:cNvPr id="14" name="">
             <a:extLst xmlns:a="http://schemas.openxmlformats.org/drawingml/2006/main">
               <a:ext uri="{FF2B5EF4-FFF2-40B4-BE49-F238E27FC236}">
-                <a16:creationId xmlns:a16="http://schemas.microsoft.com/office/drawing/2014/main" id="{C00DE342-8D36-4D1E-90AE-82ACF167EA01}"/>
-              </a:ext>
-            </a:extLst>
-          </p:cNvPr>
-          <p:cNvSpPr>
-            <a:spLocks xmlns:a="http://schemas.openxmlformats.org/drawingml/2006/main" noGrp="1"/>
-          </p:cNvSpPr>
-          <p:nvPr/>
-        </p:nvSpPr>
-        <p:spPr>
-          <a:xfrm xmlns:a="http://schemas.openxmlformats.org/drawingml/2006/main">
-            <a:off x="6324600" y="3371850"/>
+                <a16:creationId xmlns:a16="http://schemas.microsoft.com/office/drawing/2014/main" id="{C1C84054-7CD8-4DED-84F3-429D395EFDBF}"/>
+              </a:ext>
+            </a:extLst>
+          </p:cNvPr>
+          <p:cNvSpPr>
+            <a:spLocks xmlns:a="http://schemas.openxmlformats.org/drawingml/2006/main" noGrp="1"/>
+          </p:cNvSpPr>
+          <p:nvPr/>
+        </p:nvSpPr>
+        <p:spPr>
+          <a:xfrm xmlns:a="http://schemas.openxmlformats.org/drawingml/2006/main">
+            <a:off x="6324600" y="3057525"/>
             <a:ext cx="5238750" cy="381000"/>
           </a:xfrm>
           <a:prstGeom xmlns:a="http://schemas.openxmlformats.org/drawingml/2006/main" prst="rect">
@@ -8713,18 +9554,18 @@
           <p:cNvPr id="15" name="">
             <a:extLst xmlns:a="http://schemas.openxmlformats.org/drawingml/2006/main">
               <a:ext uri="{FF2B5EF4-FFF2-40B4-BE49-F238E27FC236}">
-                <a16:creationId xmlns:a16="http://schemas.microsoft.com/office/drawing/2014/main" id="{2FAA82AD-CBC7-4A12-9F3A-0619EE6CABE3}"/>
-              </a:ext>
-            </a:extLst>
-          </p:cNvPr>
-          <p:cNvSpPr>
-            <a:spLocks xmlns:a="http://schemas.openxmlformats.org/drawingml/2006/main" noGrp="1"/>
-          </p:cNvSpPr>
-          <p:nvPr/>
-        </p:nvSpPr>
-        <p:spPr>
-          <a:xfrm xmlns:a="http://schemas.openxmlformats.org/drawingml/2006/main">
-            <a:off x="6324600" y="3790950"/>
+                <a16:creationId xmlns:a16="http://schemas.microsoft.com/office/drawing/2014/main" id="{B0ABA99E-E527-4944-BE8B-16575473775F}"/>
+              </a:ext>
+            </a:extLst>
+          </p:cNvPr>
+          <p:cNvSpPr>
+            <a:spLocks xmlns:a="http://schemas.openxmlformats.org/drawingml/2006/main" noGrp="1"/>
+          </p:cNvSpPr>
+          <p:nvPr/>
+        </p:nvSpPr>
+        <p:spPr>
+          <a:xfrm xmlns:a="http://schemas.openxmlformats.org/drawingml/2006/main">
+            <a:off x="6324600" y="3476625"/>
             <a:ext cx="5238750" cy="381000"/>
           </a:xfrm>
           <a:prstGeom xmlns:a="http://schemas.openxmlformats.org/drawingml/2006/main" prst="rect">
@@ -8770,18 +9611,18 @@
           <p:cNvPr id="16" name="">
             <a:extLst xmlns:a="http://schemas.openxmlformats.org/drawingml/2006/main">
               <a:ext uri="{FF2B5EF4-FFF2-40B4-BE49-F238E27FC236}">
-                <a16:creationId xmlns:a16="http://schemas.microsoft.com/office/drawing/2014/main" id="{8DF4C222-96D4-4DB0-8346-F2A4F8048EED}"/>
-              </a:ext>
-            </a:extLst>
-          </p:cNvPr>
-          <p:cNvSpPr>
-            <a:spLocks xmlns:a="http://schemas.openxmlformats.org/drawingml/2006/main" noGrp="1"/>
-          </p:cNvSpPr>
-          <p:nvPr/>
-        </p:nvSpPr>
-        <p:spPr>
-          <a:xfrm xmlns:a="http://schemas.openxmlformats.org/drawingml/2006/main">
-            <a:off x="6324600" y="4210050"/>
+                <a16:creationId xmlns:a16="http://schemas.microsoft.com/office/drawing/2014/main" id="{6712380B-21A6-4B97-932F-DEDDA12A3F91}"/>
+              </a:ext>
+            </a:extLst>
+          </p:cNvPr>
+          <p:cNvSpPr>
+            <a:spLocks xmlns:a="http://schemas.openxmlformats.org/drawingml/2006/main" noGrp="1"/>
+          </p:cNvSpPr>
+          <p:nvPr/>
+        </p:nvSpPr>
+        <p:spPr>
+          <a:xfrm xmlns:a="http://schemas.openxmlformats.org/drawingml/2006/main">
+            <a:off x="6324600" y="3895725"/>
             <a:ext cx="5238750" cy="381000"/>
           </a:xfrm>
           <a:prstGeom xmlns:a="http://schemas.openxmlformats.org/drawingml/2006/main" prst="rect">
@@ -8827,18 +9668,18 @@
           <p:cNvPr id="17" name="">
             <a:extLst xmlns:a="http://schemas.openxmlformats.org/drawingml/2006/main">
               <a:ext uri="{FF2B5EF4-FFF2-40B4-BE49-F238E27FC236}">
-                <a16:creationId xmlns:a16="http://schemas.microsoft.com/office/drawing/2014/main" id="{941BD648-5CA0-4FAB-B1F2-38B3B51416BB}"/>
-              </a:ext>
-            </a:extLst>
-          </p:cNvPr>
-          <p:cNvSpPr>
-            <a:spLocks xmlns:a="http://schemas.openxmlformats.org/drawingml/2006/main" noGrp="1"/>
-          </p:cNvSpPr>
-          <p:nvPr/>
-        </p:nvSpPr>
-        <p:spPr>
-          <a:xfrm xmlns:a="http://schemas.openxmlformats.org/drawingml/2006/main">
-            <a:off x="6324600" y="4629150"/>
+                <a16:creationId xmlns:a16="http://schemas.microsoft.com/office/drawing/2014/main" id="{35985FB6-F742-49E9-B2D4-A6F79D3DBBF5}"/>
+              </a:ext>
+            </a:extLst>
+          </p:cNvPr>
+          <p:cNvSpPr>
+            <a:spLocks xmlns:a="http://schemas.openxmlformats.org/drawingml/2006/main" noGrp="1"/>
+          </p:cNvSpPr>
+          <p:nvPr/>
+        </p:nvSpPr>
+        <p:spPr>
+          <a:xfrm xmlns:a="http://schemas.openxmlformats.org/drawingml/2006/main">
+            <a:off x="6324600" y="4314825"/>
             <a:ext cx="5238750" cy="381000"/>
           </a:xfrm>
           <a:prstGeom xmlns:a="http://schemas.openxmlformats.org/drawingml/2006/main" prst="rect">
@@ -8884,19 +9725,19 @@
           <p:cNvPr id="18" name="">
             <a:extLst xmlns:a="http://schemas.openxmlformats.org/drawingml/2006/main">
               <a:ext uri="{FF2B5EF4-FFF2-40B4-BE49-F238E27FC236}">
-                <a16:creationId xmlns:a16="http://schemas.microsoft.com/office/drawing/2014/main" id="{1B03AD3C-3C46-4B1F-949B-32B7858C7AEC}"/>
-              </a:ext>
-            </a:extLst>
-          </p:cNvPr>
-          <p:cNvSpPr>
-            <a:spLocks xmlns:a="http://schemas.openxmlformats.org/drawingml/2006/main" noGrp="1"/>
-          </p:cNvSpPr>
-          <p:nvPr/>
-        </p:nvSpPr>
-        <p:spPr>
-          <a:xfrm xmlns:a="http://schemas.openxmlformats.org/drawingml/2006/main">
-            <a:off x="609600" y="5314950"/>
-            <a:ext cx="10972800" cy="304800"/>
+                <a16:creationId xmlns:a16="http://schemas.microsoft.com/office/drawing/2014/main" id="{8FC76B28-12DE-40B5-ADF7-3E0C26968FB1}"/>
+              </a:ext>
+            </a:extLst>
+          </p:cNvPr>
+          <p:cNvSpPr>
+            <a:spLocks xmlns:a="http://schemas.openxmlformats.org/drawingml/2006/main" noGrp="1"/>
+          </p:cNvSpPr>
+          <p:nvPr/>
+        </p:nvSpPr>
+        <p:spPr>
+          <a:xfrm xmlns:a="http://schemas.openxmlformats.org/drawingml/2006/main">
+            <a:off x="609600" y="4924425"/>
+            <a:ext cx="10972800" cy="238125"/>
           </a:xfrm>
           <a:prstGeom xmlns:a="http://schemas.openxmlformats.org/drawingml/2006/main" prst="rect">
             <a:avLst/>
@@ -8913,7 +9754,64 @@
           <a:lstStyle xmlns:a="http://schemas.openxmlformats.org/drawingml/2006/main"/>
           <a:p xmlns:a="http://schemas.openxmlformats.org/drawingml/2006/main">
             <a:pPr algn="l">
-              <a:defRPr sz="1875" b="0">
+              <a:defRPr sz="1425" b="1">
+                <a:solidFill>
+                  <a:srgbClr val="28C7F7"/>
+                </a:solidFill>
+                <a:latin typeface="Roboto"/>
+                <a:ea typeface="Roboto"/>
+                <a:cs typeface="Roboto"/>
+              </a:defRPr>
+            </a:pPr>
+            <a:r>
+              <a:rPr sz="1425" b="1">
+                <a:solidFill>
+                  <a:srgbClr val="28C7F7"/>
+                </a:solidFill>
+                <a:latin typeface="Roboto"/>
+                <a:ea typeface="Roboto"/>
+                <a:cs typeface="Roboto"/>
+              </a:rPr>
+              <a:t>START WITH ONE WORKFLOW</a:t>
+            </a:r>
+          </a:p>
+        </p:txBody>
+      </p:sp>
+      <p:sp>
+        <p:nvSpPr>
+          <p:cNvPr id="19" name="">
+            <a:extLst xmlns:a="http://schemas.openxmlformats.org/drawingml/2006/main">
+              <a:ext uri="{FF2B5EF4-FFF2-40B4-BE49-F238E27FC236}">
+                <a16:creationId xmlns:a16="http://schemas.microsoft.com/office/drawing/2014/main" id="{A5DA2FB1-680A-49E7-B940-1FEF34A2937E}"/>
+              </a:ext>
+            </a:extLst>
+          </p:cNvPr>
+          <p:cNvSpPr>
+            <a:spLocks xmlns:a="http://schemas.openxmlformats.org/drawingml/2006/main" noGrp="1"/>
+          </p:cNvSpPr>
+          <p:nvPr/>
+        </p:nvSpPr>
+        <p:spPr>
+          <a:xfrm xmlns:a="http://schemas.openxmlformats.org/drawingml/2006/main">
+            <a:off x="609600" y="5219700"/>
+            <a:ext cx="10972800" cy="295275"/>
+          </a:xfrm>
+          <a:prstGeom xmlns:a="http://schemas.openxmlformats.org/drawingml/2006/main" prst="rect">
+            <a:avLst/>
+          </a:prstGeom>
+          <a:noFill xmlns:a="http://schemas.openxmlformats.org/drawingml/2006/main"/>
+          <a:ln xmlns:a="http://schemas.openxmlformats.org/drawingml/2006/main" w="0">
+            <a:noFill/>
+          </a:ln>
+        </p:spPr>
+        <p:txBody>
+          <a:bodyPr xmlns:a="http://schemas.openxmlformats.org/drawingml/2006/main" wrap="square" lIns="0" tIns="0" rIns="0" bIns="0" anchor="ctr">
+            <a:noAutofit/>
+          </a:bodyPr>
+          <a:lstStyle xmlns:a="http://schemas.openxmlformats.org/drawingml/2006/main"/>
+          <a:p xmlns:a="http://schemas.openxmlformats.org/drawingml/2006/main">
+            <a:pPr algn="l">
+              <a:defRPr sz="1650" b="0">
                 <a:solidFill>
                   <a:srgbClr val="F4F7FA"/>
                 </a:solidFill>
@@ -8923,7 +9821,7 @@
               </a:defRPr>
             </a:pPr>
             <a:r>
-              <a:rPr sz="1875" b="0">
+              <a:rPr sz="1650" b="0">
                 <a:solidFill>
                   <a:srgbClr val="F4F7FA"/>
                 </a:solidFill>
@@ -8931,6 +9829,63 @@
                 <a:ea typeface="Roboto"/>
                 <a:cs typeface="Roboto"/>
               </a:rPr>
+              <a:t>Agree tolerances, calibrate a Golden Set, connect an Eval Gate and rehearse the fallback.</a:t>
+            </a:r>
+          </a:p>
+        </p:txBody>
+      </p:sp>
+      <p:sp>
+        <p:nvSpPr>
+          <p:cNvPr id="20" name="">
+            <a:extLst xmlns:a="http://schemas.openxmlformats.org/drawingml/2006/main">
+              <a:ext uri="{FF2B5EF4-FFF2-40B4-BE49-F238E27FC236}">
+                <a16:creationId xmlns:a16="http://schemas.microsoft.com/office/drawing/2014/main" id="{A08D0A8D-4DA8-48D4-A5AC-CD843BBB699F}"/>
+              </a:ext>
+            </a:extLst>
+          </p:cNvPr>
+          <p:cNvSpPr>
+            <a:spLocks xmlns:a="http://schemas.openxmlformats.org/drawingml/2006/main" noGrp="1"/>
+          </p:cNvSpPr>
+          <p:nvPr/>
+        </p:nvSpPr>
+        <p:spPr>
+          <a:xfrm xmlns:a="http://schemas.openxmlformats.org/drawingml/2006/main">
+            <a:off x="609600" y="5724525"/>
+            <a:ext cx="10972800" cy="295275"/>
+          </a:xfrm>
+          <a:prstGeom xmlns:a="http://schemas.openxmlformats.org/drawingml/2006/main" prst="rect">
+            <a:avLst/>
+          </a:prstGeom>
+          <a:noFill xmlns:a="http://schemas.openxmlformats.org/drawingml/2006/main"/>
+          <a:ln xmlns:a="http://schemas.openxmlformats.org/drawingml/2006/main" w="0">
+            <a:noFill/>
+          </a:ln>
+        </p:spPr>
+        <p:txBody>
+          <a:bodyPr xmlns:a="http://schemas.openxmlformats.org/drawingml/2006/main" wrap="square" lIns="0" tIns="0" rIns="0" bIns="0" anchor="ctr">
+            <a:noAutofit/>
+          </a:bodyPr>
+          <a:lstStyle xmlns:a="http://schemas.openxmlformats.org/drawingml/2006/main"/>
+          <a:p xmlns:a="http://schemas.openxmlformats.org/drawingml/2006/main">
+            <a:pPr algn="l">
+              <a:defRPr sz="1725" b="0">
+                <a:solidFill>
+                  <a:srgbClr val="ADB8C5"/>
+                </a:solidFill>
+                <a:latin typeface="Roboto"/>
+                <a:ea typeface="Roboto"/>
+                <a:cs typeface="Roboto"/>
+              </a:defRPr>
+            </a:pPr>
+            <a:r>
+              <a:rPr sz="1725" b="0">
+                <a:solidFill>
+                  <a:srgbClr val="ADB8C5"/>
+                </a:solidFill>
+                <a:latin typeface="Roboto"/>
+                <a:ea typeface="Roboto"/>
+                <a:cs typeface="Roboto"/>
+              </a:rPr>
               <a:t>Team process: hypothesize → measure → decide → adapt</a:t>
             </a:r>
           </a:p>
@@ -8938,10 +9893,10 @@
       </p:sp>
       <p:sp>
         <p:nvSpPr>
-          <p:cNvPr id="19" name="">
-            <a:extLst xmlns:a="http://schemas.openxmlformats.org/drawingml/2006/main">
-              <a:ext uri="{FF2B5EF4-FFF2-40B4-BE49-F238E27FC236}">
-                <a16:creationId xmlns:a16="http://schemas.microsoft.com/office/drawing/2014/main" id="{82CB197D-7238-4FDD-9CBD-AEEFF4377CC1}"/>
+          <p:cNvPr id="21" name="">
+            <a:extLst xmlns:a="http://schemas.openxmlformats.org/drawingml/2006/main">
+              <a:ext uri="{FF2B5EF4-FFF2-40B4-BE49-F238E27FC236}">
+                <a16:creationId xmlns:a16="http://schemas.microsoft.com/office/drawing/2014/main" id="{8795A2DB-333E-4E5D-B20A-3F45E34A835A}"/>
               </a:ext>
             </a:extLst>
           </p:cNvPr>
@@ -8952,7 +9907,7 @@
         </p:nvSpPr>
         <p:spPr>
           <a:xfrm xmlns:a="http://schemas.openxmlformats.org/drawingml/2006/main" flipH="0" flipV="0">
-            <a:off x="609600" y="5734050"/>
+            <a:off x="609600" y="6153150"/>
             <a:ext cx="10972800" cy="0"/>
           </a:xfrm>
           <a:prstGeom xmlns:a="http://schemas.openxmlformats.org/drawingml/2006/main" prst="line">
@@ -8969,22 +9924,22 @@
       </p:sp>
       <p:sp>
         <p:nvSpPr>
-          <p:cNvPr id="20" name="">
-            <a:extLst xmlns:a="http://schemas.openxmlformats.org/drawingml/2006/main">
-              <a:ext uri="{FF2B5EF4-FFF2-40B4-BE49-F238E27FC236}">
-                <a16:creationId xmlns:a16="http://schemas.microsoft.com/office/drawing/2014/main" id="{68A03594-8B0F-4D09-A7FE-AC917E98ED28}"/>
-              </a:ext>
-            </a:extLst>
-          </p:cNvPr>
-          <p:cNvSpPr>
-            <a:spLocks xmlns:a="http://schemas.openxmlformats.org/drawingml/2006/main" noGrp="1"/>
-          </p:cNvSpPr>
-          <p:nvPr/>
-        </p:nvSpPr>
-        <p:spPr>
-          <a:xfrm xmlns:a="http://schemas.openxmlformats.org/drawingml/2006/main">
-            <a:off x="609600" y="5905500"/>
-            <a:ext cx="10648950" cy="666750"/>
+          <p:cNvPr id="22" name="">
+            <a:extLst xmlns:a="http://schemas.openxmlformats.org/drawingml/2006/main">
+              <a:ext uri="{FF2B5EF4-FFF2-40B4-BE49-F238E27FC236}">
+                <a16:creationId xmlns:a16="http://schemas.microsoft.com/office/drawing/2014/main" id="{9DB0AA14-580A-43B5-B6E5-3D400C1E6C64}"/>
+              </a:ext>
+            </a:extLst>
+          </p:cNvPr>
+          <p:cNvSpPr>
+            <a:spLocks xmlns:a="http://schemas.openxmlformats.org/drawingml/2006/main" noGrp="1"/>
+          </p:cNvSpPr>
+          <p:nvPr/>
+        </p:nvSpPr>
+        <p:spPr>
+          <a:xfrm xmlns:a="http://schemas.openxmlformats.org/drawingml/2006/main">
+            <a:off x="609600" y="6267450"/>
+            <a:ext cx="10648950" cy="361950"/>
           </a:xfrm>
           <a:prstGeom xmlns:a="http://schemas.openxmlformats.org/drawingml/2006/main" prst="rect">
             <a:avLst/>
@@ -9001,7 +9956,7 @@
           <a:lstStyle xmlns:a="http://schemas.openxmlformats.org/drawingml/2006/main"/>
           <a:p xmlns:a="http://schemas.openxmlformats.org/drawingml/2006/main">
             <a:pPr algn="l">
-              <a:defRPr sz="2250" b="1">
+              <a:defRPr sz="2100" b="1">
                 <a:solidFill>
                   <a:srgbClr val="F4F7FA"/>
                 </a:solidFill>
@@ -9011,7 +9966,7 @@
               </a:defRPr>
             </a:pPr>
             <a:r>
-              <a:rPr sz="2250" b="1">
+              <a:rPr sz="2100" b="1">
                 <a:solidFill>
                   <a:srgbClr val="F4F7FA"/>
                 </a:solidFill>
@@ -9027,7 +9982,7 @@
     </p:spTree>
     <p:extLst>
       <p:ext uri="{BB962C8B-B14F-4D97-AF65-F5344CB8AC3E}">
-        <p14:creationId xmlns:p14="http://schemas.microsoft.com/office/powerpoint/2010/main" val="411208371"/>
+        <p14:creationId xmlns:p14="http://schemas.microsoft.com/office/powerpoint/2010/main" val="50431976"/>
       </p:ext>
     </p:extLst>
   </p:cSld>
@@ -9058,7 +10013,7 @@
           <p:cNvPr id="21" name="">
             <a:extLst xmlns:a="http://schemas.openxmlformats.org/drawingml/2006/main">
               <a:ext uri="{FF2B5EF4-FFF2-40B4-BE49-F238E27FC236}">
-                <a16:creationId xmlns:a16="http://schemas.microsoft.com/office/drawing/2014/main" id="{E346B379-8CB4-4ACC-94BC-49C4D3E38CA2}"/>
+                <a16:creationId xmlns:a16="http://schemas.microsoft.com/office/drawing/2014/main" id="{555EDDCD-F5AF-40E5-A2DA-F18A913DC330}"/>
               </a:ext>
             </a:extLst>
           </p:cNvPr>
@@ -9115,7 +10070,7 @@
           <p:cNvPr id="2" name="">
             <a:extLst xmlns:a="http://schemas.openxmlformats.org/drawingml/2006/main">
               <a:ext uri="{FF2B5EF4-FFF2-40B4-BE49-F238E27FC236}">
-                <a16:creationId xmlns:a16="http://schemas.microsoft.com/office/drawing/2014/main" id="{8A5691D1-FF79-42B6-9E50-450F3E22F3A5}"/>
+                <a16:creationId xmlns:a16="http://schemas.microsoft.com/office/drawing/2014/main" id="{3405C5D9-2E12-4D64-9A07-7FD1ADB391E6}"/>
               </a:ext>
             </a:extLst>
           </p:cNvPr>
@@ -9146,7 +10101,7 @@
           <p:cNvPr id="3" name="">
             <a:extLst xmlns:a="http://schemas.openxmlformats.org/drawingml/2006/main">
               <a:ext uri="{FF2B5EF4-FFF2-40B4-BE49-F238E27FC236}">
-                <a16:creationId xmlns:a16="http://schemas.microsoft.com/office/drawing/2014/main" id="{E69D3A62-5B5E-4357-BFAC-8D510252FF42}"/>
+                <a16:creationId xmlns:a16="http://schemas.microsoft.com/office/drawing/2014/main" id="{15D532D2-CB64-4A12-B359-3F37D74A8811}"/>
               </a:ext>
             </a:extLst>
           </p:cNvPr>
@@ -9203,7 +10158,7 @@
           <p:cNvPr id="4" name="">
             <a:extLst xmlns:a="http://schemas.openxmlformats.org/drawingml/2006/main">
               <a:ext uri="{FF2B5EF4-FFF2-40B4-BE49-F238E27FC236}">
-                <a16:creationId xmlns:a16="http://schemas.microsoft.com/office/drawing/2014/main" id="{C745BBD3-7BA9-44E3-B236-C98C5EEDBFD8}"/>
+                <a16:creationId xmlns:a16="http://schemas.microsoft.com/office/drawing/2014/main" id="{958CFC86-F629-4EAD-9E4D-E819377CEE86}"/>
               </a:ext>
             </a:extLst>
           </p:cNvPr>
@@ -9236,7 +10191,7 @@
           <p:cNvPr id="5" name="">
             <a:extLst xmlns:a="http://schemas.openxmlformats.org/drawingml/2006/main">
               <a:ext uri="{FF2B5EF4-FFF2-40B4-BE49-F238E27FC236}">
-                <a16:creationId xmlns:a16="http://schemas.microsoft.com/office/drawing/2014/main" id="{4D697BA5-E389-4224-9BA8-7B059E005AB5}"/>
+                <a16:creationId xmlns:a16="http://schemas.microsoft.com/office/drawing/2014/main" id="{89167018-8D39-4F83-B314-7D35E27725A2}"/>
               </a:ext>
             </a:extLst>
           </p:cNvPr>
@@ -9293,7 +10248,7 @@
           <p:cNvPr id="6" name="">
             <a:extLst xmlns:a="http://schemas.openxmlformats.org/drawingml/2006/main">
               <a:ext uri="{FF2B5EF4-FFF2-40B4-BE49-F238E27FC236}">
-                <a16:creationId xmlns:a16="http://schemas.microsoft.com/office/drawing/2014/main" id="{1550E23A-9C19-43F6-A3CA-0B357C17B697}"/>
+                <a16:creationId xmlns:a16="http://schemas.microsoft.com/office/drawing/2014/main" id="{200C55F6-A0B9-45EA-B9BC-4AF6FEDBF236}"/>
               </a:ext>
             </a:extLst>
           </p:cNvPr>
@@ -9373,7 +10328,7 @@
           <p:cNvPr id="7" name="">
             <a:extLst xmlns:a="http://schemas.openxmlformats.org/drawingml/2006/main">
               <a:ext uri="{FF2B5EF4-FFF2-40B4-BE49-F238E27FC236}">
-                <a16:creationId xmlns:a16="http://schemas.microsoft.com/office/drawing/2014/main" id="{CEF7BFAE-E81F-4733-84AE-7B6C6D7C7141}"/>
+                <a16:creationId xmlns:a16="http://schemas.microsoft.com/office/drawing/2014/main" id="{7FF9CE7C-132E-4446-8155-103991121EFC}"/>
               </a:ext>
             </a:extLst>
           </p:cNvPr>
@@ -9453,7 +10408,7 @@
           <p:cNvPr id="8" name="">
             <a:extLst xmlns:a="http://schemas.openxmlformats.org/drawingml/2006/main">
               <a:ext uri="{FF2B5EF4-FFF2-40B4-BE49-F238E27FC236}">
-                <a16:creationId xmlns:a16="http://schemas.microsoft.com/office/drawing/2014/main" id="{F7900C3D-6DF7-4B61-82E1-218BB26C4721}"/>
+                <a16:creationId xmlns:a16="http://schemas.microsoft.com/office/drawing/2014/main" id="{BB9FE901-3934-4A1E-AC9C-05E3CE39E3D0}"/>
               </a:ext>
             </a:extLst>
           </p:cNvPr>
@@ -9486,7 +10441,7 @@
           <p:cNvPr id="9" name="">
             <a:extLst xmlns:a="http://schemas.openxmlformats.org/drawingml/2006/main">
               <a:ext uri="{FF2B5EF4-FFF2-40B4-BE49-F238E27FC236}">
-                <a16:creationId xmlns:a16="http://schemas.microsoft.com/office/drawing/2014/main" id="{12CAEC9E-04BC-41D9-8F5D-CA0CDCE7049B}"/>
+                <a16:creationId xmlns:a16="http://schemas.microsoft.com/office/drawing/2014/main" id="{BC72979C-3BE1-4E52-A2C7-86AE24979C92}"/>
               </a:ext>
             </a:extLst>
           </p:cNvPr>
@@ -9543,7 +10498,7 @@
           <p:cNvPr id="10" name="">
             <a:extLst xmlns:a="http://schemas.openxmlformats.org/drawingml/2006/main">
               <a:ext uri="{FF2B5EF4-FFF2-40B4-BE49-F238E27FC236}">
-                <a16:creationId xmlns:a16="http://schemas.microsoft.com/office/drawing/2014/main" id="{4CC12AEB-0E8F-46D4-A9DB-2827B1F40D8F}"/>
+                <a16:creationId xmlns:a16="http://schemas.microsoft.com/office/drawing/2014/main" id="{53BA1850-DA45-4A91-9145-7FBC02BD1B99}"/>
               </a:ext>
             </a:extLst>
           </p:cNvPr>
@@ -9623,7 +10578,7 @@
           <p:cNvPr id="11" name="">
             <a:extLst xmlns:a="http://schemas.openxmlformats.org/drawingml/2006/main">
               <a:ext uri="{FF2B5EF4-FFF2-40B4-BE49-F238E27FC236}">
-                <a16:creationId xmlns:a16="http://schemas.microsoft.com/office/drawing/2014/main" id="{1CEC04F6-F007-4BE3-9772-44460D364C09}"/>
+                <a16:creationId xmlns:a16="http://schemas.microsoft.com/office/drawing/2014/main" id="{1B5B70C8-DBB5-4EC4-ADA5-7FE87C3A1842}"/>
               </a:ext>
             </a:extLst>
           </p:cNvPr>
@@ -9703,7 +10658,7 @@
           <p:cNvPr id="12" name="">
             <a:extLst xmlns:a="http://schemas.openxmlformats.org/drawingml/2006/main">
               <a:ext uri="{FF2B5EF4-FFF2-40B4-BE49-F238E27FC236}">
-                <a16:creationId xmlns:a16="http://schemas.microsoft.com/office/drawing/2014/main" id="{6E972538-7E8B-4380-AF06-A4B8709B8DAC}"/>
+                <a16:creationId xmlns:a16="http://schemas.microsoft.com/office/drawing/2014/main" id="{D1BAB3C7-4207-4E1C-8049-36EBC740FF37}"/>
               </a:ext>
             </a:extLst>
           </p:cNvPr>
@@ -9736,7 +10691,7 @@
           <p:cNvPr id="13" name="">
             <a:extLst xmlns:a="http://schemas.openxmlformats.org/drawingml/2006/main">
               <a:ext uri="{FF2B5EF4-FFF2-40B4-BE49-F238E27FC236}">
-                <a16:creationId xmlns:a16="http://schemas.microsoft.com/office/drawing/2014/main" id="{F9BC968B-F0CA-4A75-AC82-EE4B20646B6B}"/>
+                <a16:creationId xmlns:a16="http://schemas.microsoft.com/office/drawing/2014/main" id="{1B699484-9336-40DB-9F2E-79053970774B}"/>
               </a:ext>
             </a:extLst>
           </p:cNvPr>
@@ -9793,7 +10748,7 @@
           <p:cNvPr id="14" name="">
             <a:extLst xmlns:a="http://schemas.openxmlformats.org/drawingml/2006/main">
               <a:ext uri="{FF2B5EF4-FFF2-40B4-BE49-F238E27FC236}">
-                <a16:creationId xmlns:a16="http://schemas.microsoft.com/office/drawing/2014/main" id="{995157D7-7F79-43EB-A8E0-573E26017FB8}"/>
+                <a16:creationId xmlns:a16="http://schemas.microsoft.com/office/drawing/2014/main" id="{6683BCA0-883D-4459-A064-6F3C6C022DC4}"/>
               </a:ext>
             </a:extLst>
           </p:cNvPr>
@@ -9873,7 +10828,7 @@
           <p:cNvPr id="15" name="">
             <a:extLst xmlns:a="http://schemas.openxmlformats.org/drawingml/2006/main">
               <a:ext uri="{FF2B5EF4-FFF2-40B4-BE49-F238E27FC236}">
-                <a16:creationId xmlns:a16="http://schemas.microsoft.com/office/drawing/2014/main" id="{4C882D8F-B9C3-492E-9BB3-38AEF40CA8F8}"/>
+                <a16:creationId xmlns:a16="http://schemas.microsoft.com/office/drawing/2014/main" id="{A6D4CCFE-7B80-4F92-ACE6-C2DA5CF74DE9}"/>
               </a:ext>
             </a:extLst>
           </p:cNvPr>
@@ -10005,7 +10960,7 @@
           <p:cNvPr id="18" name="">
             <a:extLst xmlns:a="http://schemas.openxmlformats.org/drawingml/2006/main">
               <a:ext uri="{FF2B5EF4-FFF2-40B4-BE49-F238E27FC236}">
-                <a16:creationId xmlns:a16="http://schemas.microsoft.com/office/drawing/2014/main" id="{F1071683-723B-4E8A-92D9-EBD1074DC233}"/>
+                <a16:creationId xmlns:a16="http://schemas.microsoft.com/office/drawing/2014/main" id="{0E084FA9-0D43-4DDE-AD4C-6F19D9A7A2CA}"/>
               </a:ext>
             </a:extLst>
           </p:cNvPr>
@@ -10062,7 +11017,7 @@
           <p:cNvPr id="19" name="">
             <a:extLst xmlns:a="http://schemas.openxmlformats.org/drawingml/2006/main">
               <a:ext uri="{FF2B5EF4-FFF2-40B4-BE49-F238E27FC236}">
-                <a16:creationId xmlns:a16="http://schemas.microsoft.com/office/drawing/2014/main" id="{A81BEFEF-F55F-4A98-8E01-6608A87B4F40}"/>
+                <a16:creationId xmlns:a16="http://schemas.microsoft.com/office/drawing/2014/main" id="{DBDBF3FE-B141-4C0F-9F08-2480A0D6A57D}"/>
               </a:ext>
             </a:extLst>
           </p:cNvPr>
@@ -10093,7 +11048,7 @@
           <p:cNvPr id="20" name="">
             <a:extLst xmlns:a="http://schemas.openxmlformats.org/drawingml/2006/main">
               <a:ext uri="{FF2B5EF4-FFF2-40B4-BE49-F238E27FC236}">
-                <a16:creationId xmlns:a16="http://schemas.microsoft.com/office/drawing/2014/main" id="{241D4754-8260-4B84-B4E0-2402BA1184A3}"/>
+                <a16:creationId xmlns:a16="http://schemas.microsoft.com/office/drawing/2014/main" id="{1382876E-5094-49D8-8216-F9C47E370CED}"/>
               </a:ext>
             </a:extLst>
           </p:cNvPr>
@@ -10148,7 +11103,7 @@
     </p:spTree>
     <p:extLst>
       <p:ext uri="{BB962C8B-B14F-4D97-AF65-F5344CB8AC3E}">
-        <p14:creationId xmlns:p14="http://schemas.microsoft.com/office/powerpoint/2010/main" val="1930427599"/>
+        <p14:creationId xmlns:p14="http://schemas.microsoft.com/office/powerpoint/2010/main" val="2096953442"/>
       </p:ext>
     </p:extLst>
   </p:cSld>
@@ -10179,7 +11134,7 @@
           <p:cNvPr id="68" name="">
             <a:extLst xmlns:a="http://schemas.openxmlformats.org/drawingml/2006/main">
               <a:ext uri="{FF2B5EF4-FFF2-40B4-BE49-F238E27FC236}">
-                <a16:creationId xmlns:a16="http://schemas.microsoft.com/office/drawing/2014/main" id="{73D9D096-5B94-4C6C-B7C6-E4DC31AED542}"/>
+                <a16:creationId xmlns:a16="http://schemas.microsoft.com/office/drawing/2014/main" id="{600AA6F9-9517-48BB-97AA-806FA17F5D8D}"/>
               </a:ext>
             </a:extLst>
           </p:cNvPr>
@@ -10236,7 +11191,7 @@
           <p:cNvPr id="2" name="">
             <a:extLst xmlns:a="http://schemas.openxmlformats.org/drawingml/2006/main">
               <a:ext uri="{FF2B5EF4-FFF2-40B4-BE49-F238E27FC236}">
-                <a16:creationId xmlns:a16="http://schemas.microsoft.com/office/drawing/2014/main" id="{F919A5EE-A81C-4EE2-9B7D-C72C7EA9E1F8}"/>
+                <a16:creationId xmlns:a16="http://schemas.microsoft.com/office/drawing/2014/main" id="{83F00256-42E2-48BC-ACFC-F463E06CF346}"/>
               </a:ext>
             </a:extLst>
           </p:cNvPr>
@@ -10267,7 +11222,7 @@
           <p:cNvPr id="3" name="">
             <a:extLst xmlns:a="http://schemas.openxmlformats.org/drawingml/2006/main">
               <a:ext uri="{FF2B5EF4-FFF2-40B4-BE49-F238E27FC236}">
-                <a16:creationId xmlns:a16="http://schemas.microsoft.com/office/drawing/2014/main" id="{7A12C945-4340-4B1A-9AB2-C3CF85414C78}"/>
+                <a16:creationId xmlns:a16="http://schemas.microsoft.com/office/drawing/2014/main" id="{B2F6A2BB-B8DA-4774-AEB3-5E1439C4AEF2}"/>
               </a:ext>
             </a:extLst>
           </p:cNvPr>
@@ -10324,7 +11279,7 @@
           <p:cNvPr id="4" name="">
             <a:extLst xmlns:a="http://schemas.openxmlformats.org/drawingml/2006/main">
               <a:ext uri="{FF2B5EF4-FFF2-40B4-BE49-F238E27FC236}">
-                <a16:creationId xmlns:a16="http://schemas.microsoft.com/office/drawing/2014/main" id="{A78331AC-5AF8-4252-AAF9-96A457B56FA3}"/>
+                <a16:creationId xmlns:a16="http://schemas.microsoft.com/office/drawing/2014/main" id="{FE78B4F4-1BC3-48A3-B187-5D65293D2CEF}"/>
               </a:ext>
             </a:extLst>
           </p:cNvPr>
@@ -10381,7 +11336,7 @@
           <p:cNvPr id="5" name="">
             <a:extLst xmlns:a="http://schemas.openxmlformats.org/drawingml/2006/main">
               <a:ext uri="{FF2B5EF4-FFF2-40B4-BE49-F238E27FC236}">
-                <a16:creationId xmlns:a16="http://schemas.microsoft.com/office/drawing/2014/main" id="{31CAD963-E527-4777-B014-D250A20443C3}"/>
+                <a16:creationId xmlns:a16="http://schemas.microsoft.com/office/drawing/2014/main" id="{A900BAC8-1D0D-459D-B076-C741A218077F}"/>
               </a:ext>
             </a:extLst>
           </p:cNvPr>
@@ -10414,7 +11369,7 @@
           <p:cNvPr id="6" name="">
             <a:extLst xmlns:a="http://schemas.openxmlformats.org/drawingml/2006/main">
               <a:ext uri="{FF2B5EF4-FFF2-40B4-BE49-F238E27FC236}">
-                <a16:creationId xmlns:a16="http://schemas.microsoft.com/office/drawing/2014/main" id="{DED22396-0063-4EFE-B8CA-8E3EF13E5D6F}"/>
+                <a16:creationId xmlns:a16="http://schemas.microsoft.com/office/drawing/2014/main" id="{0EAB431E-4F3D-4C17-A563-F892FF695F01}"/>
               </a:ext>
             </a:extLst>
           </p:cNvPr>
@@ -10471,7 +11426,7 @@
           <p:cNvPr id="7" name="">
             <a:extLst xmlns:a="http://schemas.openxmlformats.org/drawingml/2006/main">
               <a:ext uri="{FF2B5EF4-FFF2-40B4-BE49-F238E27FC236}">
-                <a16:creationId xmlns:a16="http://schemas.microsoft.com/office/drawing/2014/main" id="{6374BDFE-CB86-4BC9-A839-0094C01ADACE}"/>
+                <a16:creationId xmlns:a16="http://schemas.microsoft.com/office/drawing/2014/main" id="{3030C92D-A4C5-416E-9994-FC4D9F9C1998}"/>
               </a:ext>
             </a:extLst>
           </p:cNvPr>
@@ -10504,7 +11459,7 @@
           <p:cNvPr id="8" name="">
             <a:extLst xmlns:a="http://schemas.openxmlformats.org/drawingml/2006/main">
               <a:ext uri="{FF2B5EF4-FFF2-40B4-BE49-F238E27FC236}">
-                <a16:creationId xmlns:a16="http://schemas.microsoft.com/office/drawing/2014/main" id="{C078920A-604F-4DA8-B591-D424021841DA}"/>
+                <a16:creationId xmlns:a16="http://schemas.microsoft.com/office/drawing/2014/main" id="{7B99C4EA-9B5A-4B2E-B419-B7199974B46F}"/>
               </a:ext>
             </a:extLst>
           </p:cNvPr>
@@ -10561,7 +11516,7 @@
           <p:cNvPr id="9" name="">
             <a:extLst xmlns:a="http://schemas.openxmlformats.org/drawingml/2006/main">
               <a:ext uri="{FF2B5EF4-FFF2-40B4-BE49-F238E27FC236}">
-                <a16:creationId xmlns:a16="http://schemas.microsoft.com/office/drawing/2014/main" id="{791CF66B-7F82-43CD-BA63-45A11432F816}"/>
+                <a16:creationId xmlns:a16="http://schemas.microsoft.com/office/drawing/2014/main" id="{985A8EB5-C7FF-47F8-AB19-C357F0B4EF4B}"/>
               </a:ext>
             </a:extLst>
           </p:cNvPr>
@@ -10594,7 +11549,7 @@
           <p:cNvPr id="10" name="">
             <a:extLst xmlns:a="http://schemas.openxmlformats.org/drawingml/2006/main">
               <a:ext uri="{FF2B5EF4-FFF2-40B4-BE49-F238E27FC236}">
-                <a16:creationId xmlns:a16="http://schemas.microsoft.com/office/drawing/2014/main" id="{113A7198-80D6-4C9C-9D50-D2B9A2FF4C91}"/>
+                <a16:creationId xmlns:a16="http://schemas.microsoft.com/office/drawing/2014/main" id="{40EA8BB0-86DD-4FBA-9A80-BDE34D5C573F}"/>
               </a:ext>
             </a:extLst>
           </p:cNvPr>
@@ -10651,7 +11606,7 @@
           <p:cNvPr id="11" name="">
             <a:extLst xmlns:a="http://schemas.openxmlformats.org/drawingml/2006/main">
               <a:ext uri="{FF2B5EF4-FFF2-40B4-BE49-F238E27FC236}">
-                <a16:creationId xmlns:a16="http://schemas.microsoft.com/office/drawing/2014/main" id="{A09B293B-92ED-48AE-8C02-875F0AADDE9E}"/>
+                <a16:creationId xmlns:a16="http://schemas.microsoft.com/office/drawing/2014/main" id="{30A00BC4-2E5C-4C1D-B88A-EE25076547D5}"/>
               </a:ext>
             </a:extLst>
           </p:cNvPr>
@@ -10684,7 +11639,7 @@
           <p:cNvPr id="12" name="">
             <a:extLst xmlns:a="http://schemas.openxmlformats.org/drawingml/2006/main">
               <a:ext uri="{FF2B5EF4-FFF2-40B4-BE49-F238E27FC236}">
-                <a16:creationId xmlns:a16="http://schemas.microsoft.com/office/drawing/2014/main" id="{699A4167-C98F-4C8E-B074-7F5E27D22C11}"/>
+                <a16:creationId xmlns:a16="http://schemas.microsoft.com/office/drawing/2014/main" id="{D9D37933-B372-4FE4-B175-D11849E29690}"/>
               </a:ext>
             </a:extLst>
           </p:cNvPr>
@@ -10741,7 +11696,7 @@
           <p:cNvPr id="13" name="">
             <a:extLst xmlns:a="http://schemas.openxmlformats.org/drawingml/2006/main">
               <a:ext uri="{FF2B5EF4-FFF2-40B4-BE49-F238E27FC236}">
-                <a16:creationId xmlns:a16="http://schemas.microsoft.com/office/drawing/2014/main" id="{60107899-62B7-40A4-A5CB-A3B5218F924E}"/>
+                <a16:creationId xmlns:a16="http://schemas.microsoft.com/office/drawing/2014/main" id="{D3FFCBC0-D1E8-49EC-9ECF-877AC74D0CE2}"/>
               </a:ext>
             </a:extLst>
           </p:cNvPr>
@@ -10774,7 +11729,7 @@
           <p:cNvPr id="14" name="">
             <a:extLst xmlns:a="http://schemas.openxmlformats.org/drawingml/2006/main">
               <a:ext uri="{FF2B5EF4-FFF2-40B4-BE49-F238E27FC236}">
-                <a16:creationId xmlns:a16="http://schemas.microsoft.com/office/drawing/2014/main" id="{A1EAF439-40F3-4D86-B11A-01A8D4891C70}"/>
+                <a16:creationId xmlns:a16="http://schemas.microsoft.com/office/drawing/2014/main" id="{6A52FDFF-6B09-4266-9C96-56DD5489D848}"/>
               </a:ext>
             </a:extLst>
           </p:cNvPr>
@@ -10831,7 +11786,7 @@
           <p:cNvPr id="15" name="">
             <a:extLst xmlns:a="http://schemas.openxmlformats.org/drawingml/2006/main">
               <a:ext uri="{FF2B5EF4-FFF2-40B4-BE49-F238E27FC236}">
-                <a16:creationId xmlns:a16="http://schemas.microsoft.com/office/drawing/2014/main" id="{3B72B3CF-12F0-40FC-8579-33E6F4F59FD3}"/>
+                <a16:creationId xmlns:a16="http://schemas.microsoft.com/office/drawing/2014/main" id="{6EF0CD11-0EA7-4355-98C7-490EA14B34C7}"/>
               </a:ext>
             </a:extLst>
           </p:cNvPr>
@@ -10864,7 +11819,7 @@
           <p:cNvPr id="16" name="">
             <a:extLst xmlns:a="http://schemas.openxmlformats.org/drawingml/2006/main">
               <a:ext uri="{FF2B5EF4-FFF2-40B4-BE49-F238E27FC236}">
-                <a16:creationId xmlns:a16="http://schemas.microsoft.com/office/drawing/2014/main" id="{4F358552-DD74-4259-8C72-DEBE172254D7}"/>
+                <a16:creationId xmlns:a16="http://schemas.microsoft.com/office/drawing/2014/main" id="{D78F2C0D-191F-4941-B486-4D754CEB5294}"/>
               </a:ext>
             </a:extLst>
           </p:cNvPr>
@@ -10921,7 +11876,7 @@
           <p:cNvPr id="17" name="">
             <a:extLst xmlns:a="http://schemas.openxmlformats.org/drawingml/2006/main">
               <a:ext uri="{FF2B5EF4-FFF2-40B4-BE49-F238E27FC236}">
-                <a16:creationId xmlns:a16="http://schemas.microsoft.com/office/drawing/2014/main" id="{D53A631A-EE69-42B4-A17B-A3CBE5DD5DDB}"/>
+                <a16:creationId xmlns:a16="http://schemas.microsoft.com/office/drawing/2014/main" id="{DB4AD50E-3662-4136-ADBB-E13EECA8B40A}"/>
               </a:ext>
             </a:extLst>
           </p:cNvPr>
@@ -10954,7 +11909,7 @@
           <p:cNvPr id="18" name="">
             <a:extLst xmlns:a="http://schemas.openxmlformats.org/drawingml/2006/main">
               <a:ext uri="{FF2B5EF4-FFF2-40B4-BE49-F238E27FC236}">
-                <a16:creationId xmlns:a16="http://schemas.microsoft.com/office/drawing/2014/main" id="{7EFC55CA-5CB4-4A1D-85CF-70EFA0621E9D}"/>
+                <a16:creationId xmlns:a16="http://schemas.microsoft.com/office/drawing/2014/main" id="{D13BF32F-CBED-42BE-9A4E-FFF6B513F6C3}"/>
               </a:ext>
             </a:extLst>
           </p:cNvPr>
@@ -11011,7 +11966,7 @@
           <p:cNvPr id="19" name="">
             <a:extLst xmlns:a="http://schemas.openxmlformats.org/drawingml/2006/main">
               <a:ext uri="{FF2B5EF4-FFF2-40B4-BE49-F238E27FC236}">
-                <a16:creationId xmlns:a16="http://schemas.microsoft.com/office/drawing/2014/main" id="{9DC41D5C-7DA3-44FF-9E62-0EADB8AA9813}"/>
+                <a16:creationId xmlns:a16="http://schemas.microsoft.com/office/drawing/2014/main" id="{2A7A2451-D406-45DC-8CB6-39E3B6B05D9A}"/>
               </a:ext>
             </a:extLst>
           </p:cNvPr>
@@ -11044,7 +11999,7 @@
           <p:cNvPr id="20" name="">
             <a:extLst xmlns:a="http://schemas.openxmlformats.org/drawingml/2006/main">
               <a:ext uri="{FF2B5EF4-FFF2-40B4-BE49-F238E27FC236}">
-                <a16:creationId xmlns:a16="http://schemas.microsoft.com/office/drawing/2014/main" id="{B3DE83EE-5B4B-42AC-8BF4-C551D9570290}"/>
+                <a16:creationId xmlns:a16="http://schemas.microsoft.com/office/drawing/2014/main" id="{A32CE986-C61A-489B-BF9B-049E903188BE}"/>
               </a:ext>
             </a:extLst>
           </p:cNvPr>
@@ -11101,7 +12056,7 @@
           <p:cNvPr id="21" name="">
             <a:extLst xmlns:a="http://schemas.openxmlformats.org/drawingml/2006/main">
               <a:ext uri="{FF2B5EF4-FFF2-40B4-BE49-F238E27FC236}">
-                <a16:creationId xmlns:a16="http://schemas.microsoft.com/office/drawing/2014/main" id="{ACAD783A-D2A5-4772-A6D1-81B769728F62}"/>
+                <a16:creationId xmlns:a16="http://schemas.microsoft.com/office/drawing/2014/main" id="{13407E27-F4D5-428D-AFAA-19E4692765DD}"/>
               </a:ext>
             </a:extLst>
           </p:cNvPr>
@@ -11132,7 +12087,7 @@
           <p:cNvPr id="22" name="">
             <a:extLst xmlns:a="http://schemas.openxmlformats.org/drawingml/2006/main">
               <a:ext uri="{FF2B5EF4-FFF2-40B4-BE49-F238E27FC236}">
-                <a16:creationId xmlns:a16="http://schemas.microsoft.com/office/drawing/2014/main" id="{65414BEC-01DB-439C-AC5D-A532521427E5}"/>
+                <a16:creationId xmlns:a16="http://schemas.microsoft.com/office/drawing/2014/main" id="{4EC64F02-8779-4A67-A410-F93600310BD9}"/>
               </a:ext>
             </a:extLst>
           </p:cNvPr>
@@ -11163,7 +12118,7 @@
           <p:cNvPr id="23" name="">
             <a:extLst xmlns:a="http://schemas.openxmlformats.org/drawingml/2006/main">
               <a:ext uri="{FF2B5EF4-FFF2-40B4-BE49-F238E27FC236}">
-                <a16:creationId xmlns:a16="http://schemas.microsoft.com/office/drawing/2014/main" id="{0857327C-B399-49C0-8B0A-98ABF82F0249}"/>
+                <a16:creationId xmlns:a16="http://schemas.microsoft.com/office/drawing/2014/main" id="{99F3BBD8-2A3B-49F4-A758-4C1F98366A58}"/>
               </a:ext>
             </a:extLst>
           </p:cNvPr>
@@ -11194,7 +12149,7 @@
           <p:cNvPr id="24" name="">
             <a:extLst xmlns:a="http://schemas.openxmlformats.org/drawingml/2006/main">
               <a:ext uri="{FF2B5EF4-FFF2-40B4-BE49-F238E27FC236}">
-                <a16:creationId xmlns:a16="http://schemas.microsoft.com/office/drawing/2014/main" id="{A9863E98-B601-4391-88DB-922611F9E157}"/>
+                <a16:creationId xmlns:a16="http://schemas.microsoft.com/office/drawing/2014/main" id="{70E11820-5350-43DF-9FA4-A60D80B12F90}"/>
               </a:ext>
             </a:extLst>
           </p:cNvPr>
@@ -11225,7 +12180,7 @@
           <p:cNvPr id="25" name="">
             <a:extLst xmlns:a="http://schemas.openxmlformats.org/drawingml/2006/main">
               <a:ext uri="{FF2B5EF4-FFF2-40B4-BE49-F238E27FC236}">
-                <a16:creationId xmlns:a16="http://schemas.microsoft.com/office/drawing/2014/main" id="{CC3A1FA8-B60E-4850-981A-1CA91088519F}"/>
+                <a16:creationId xmlns:a16="http://schemas.microsoft.com/office/drawing/2014/main" id="{BFE4B45A-C008-4215-9E96-117CDEC3400B}"/>
               </a:ext>
             </a:extLst>
           </p:cNvPr>
@@ -11256,7 +12211,7 @@
           <p:cNvPr id="26" name="">
             <a:extLst xmlns:a="http://schemas.openxmlformats.org/drawingml/2006/main">
               <a:ext uri="{FF2B5EF4-FFF2-40B4-BE49-F238E27FC236}">
-                <a16:creationId xmlns:a16="http://schemas.microsoft.com/office/drawing/2014/main" id="{87496211-B884-4EB5-8F95-62192BCC1907}"/>
+                <a16:creationId xmlns:a16="http://schemas.microsoft.com/office/drawing/2014/main" id="{A10655FB-ADE3-458F-A70E-469FC9794726}"/>
               </a:ext>
             </a:extLst>
           </p:cNvPr>
@@ -11287,7 +12242,7 @@
           <p:cNvPr id="27" name="">
             <a:extLst xmlns:a="http://schemas.openxmlformats.org/drawingml/2006/main">
               <a:ext uri="{FF2B5EF4-FFF2-40B4-BE49-F238E27FC236}">
-                <a16:creationId xmlns:a16="http://schemas.microsoft.com/office/drawing/2014/main" id="{EBC8931C-10D9-408E-AC36-420691EE8730}"/>
+                <a16:creationId xmlns:a16="http://schemas.microsoft.com/office/drawing/2014/main" id="{B19B4059-C754-4BDA-AC92-2184A8B98E78}"/>
               </a:ext>
             </a:extLst>
           </p:cNvPr>
@@ -11318,7 +12273,7 @@
           <p:cNvPr id="28" name="">
             <a:extLst xmlns:a="http://schemas.openxmlformats.org/drawingml/2006/main">
               <a:ext uri="{FF2B5EF4-FFF2-40B4-BE49-F238E27FC236}">
-                <a16:creationId xmlns:a16="http://schemas.microsoft.com/office/drawing/2014/main" id="{72582C46-2C89-4015-963C-6F452801C081}"/>
+                <a16:creationId xmlns:a16="http://schemas.microsoft.com/office/drawing/2014/main" id="{3DED5CEC-381B-42BC-99C9-9866109DDB78}"/>
               </a:ext>
             </a:extLst>
           </p:cNvPr>
@@ -11375,7 +12330,7 @@
           <p:cNvPr id="29" name="">
             <a:extLst xmlns:a="http://schemas.openxmlformats.org/drawingml/2006/main">
               <a:ext uri="{FF2B5EF4-FFF2-40B4-BE49-F238E27FC236}">
-                <a16:creationId xmlns:a16="http://schemas.microsoft.com/office/drawing/2014/main" id="{14F5A389-7379-4E76-BB01-25F800FED31F}"/>
+                <a16:creationId xmlns:a16="http://schemas.microsoft.com/office/drawing/2014/main" id="{5975D5AA-F5E3-4C69-B96E-10F111393313}"/>
               </a:ext>
             </a:extLst>
           </p:cNvPr>
@@ -11432,7 +12387,7 @@
           <p:cNvPr id="30" name="">
             <a:extLst xmlns:a="http://schemas.openxmlformats.org/drawingml/2006/main">
               <a:ext uri="{FF2B5EF4-FFF2-40B4-BE49-F238E27FC236}">
-                <a16:creationId xmlns:a16="http://schemas.microsoft.com/office/drawing/2014/main" id="{8F6C50DF-DEF1-478F-87C8-63B6C12BDE59}"/>
+                <a16:creationId xmlns:a16="http://schemas.microsoft.com/office/drawing/2014/main" id="{28A97BF4-7B36-4F77-AF47-FC54265EF93B}"/>
               </a:ext>
             </a:extLst>
           </p:cNvPr>
@@ -11489,7 +12444,7 @@
           <p:cNvPr id="31" name="">
             <a:extLst xmlns:a="http://schemas.openxmlformats.org/drawingml/2006/main">
               <a:ext uri="{FF2B5EF4-FFF2-40B4-BE49-F238E27FC236}">
-                <a16:creationId xmlns:a16="http://schemas.microsoft.com/office/drawing/2014/main" id="{A3E5347B-44A9-4313-B3BA-D01E10606BD4}"/>
+                <a16:creationId xmlns:a16="http://schemas.microsoft.com/office/drawing/2014/main" id="{E47C0123-CADE-447F-A82B-085473DBA471}"/>
               </a:ext>
             </a:extLst>
           </p:cNvPr>
@@ -11546,7 +12501,7 @@
           <p:cNvPr id="32" name="">
             <a:extLst xmlns:a="http://schemas.openxmlformats.org/drawingml/2006/main">
               <a:ext uri="{FF2B5EF4-FFF2-40B4-BE49-F238E27FC236}">
-                <a16:creationId xmlns:a16="http://schemas.microsoft.com/office/drawing/2014/main" id="{293B8AE2-60DF-44AA-8620-5C08E8B105A7}"/>
+                <a16:creationId xmlns:a16="http://schemas.microsoft.com/office/drawing/2014/main" id="{1A48B619-5A75-4A1B-A37B-1CBB0E09C550}"/>
               </a:ext>
             </a:extLst>
           </p:cNvPr>
@@ -11603,7 +12558,7 @@
           <p:cNvPr id="33" name="">
             <a:extLst xmlns:a="http://schemas.openxmlformats.org/drawingml/2006/main">
               <a:ext uri="{FF2B5EF4-FFF2-40B4-BE49-F238E27FC236}">
-                <a16:creationId xmlns:a16="http://schemas.microsoft.com/office/drawing/2014/main" id="{C57EFDC7-54E8-4C67-8E6B-126BD540E752}"/>
+                <a16:creationId xmlns:a16="http://schemas.microsoft.com/office/drawing/2014/main" id="{6A5C3767-8E02-4C97-9B21-E827B9D7A9B0}"/>
               </a:ext>
             </a:extLst>
           </p:cNvPr>
@@ -11660,7 +12615,7 @@
           <p:cNvPr id="34" name="">
             <a:extLst xmlns:a="http://schemas.openxmlformats.org/drawingml/2006/main">
               <a:ext uri="{FF2B5EF4-FFF2-40B4-BE49-F238E27FC236}">
-                <a16:creationId xmlns:a16="http://schemas.microsoft.com/office/drawing/2014/main" id="{816856B4-CB84-4DC2-950B-0EB0B9DC3C6D}"/>
+                <a16:creationId xmlns:a16="http://schemas.microsoft.com/office/drawing/2014/main" id="{E1A4106A-CC6E-46DB-A2FE-456A95F9C7F2}"/>
               </a:ext>
             </a:extLst>
           </p:cNvPr>
@@ -11717,7 +12672,7 @@
           <p:cNvPr id="35" name="">
             <a:extLst xmlns:a="http://schemas.openxmlformats.org/drawingml/2006/main">
               <a:ext uri="{FF2B5EF4-FFF2-40B4-BE49-F238E27FC236}">
-                <a16:creationId xmlns:a16="http://schemas.microsoft.com/office/drawing/2014/main" id="{6B64116F-4644-4382-9785-2074C2961455}"/>
+                <a16:creationId xmlns:a16="http://schemas.microsoft.com/office/drawing/2014/main" id="{FF375ADB-D8F7-4F97-ACBE-BB08983045C3}"/>
               </a:ext>
             </a:extLst>
           </p:cNvPr>
@@ -11774,7 +12729,7 @@
           <p:cNvPr id="36" name="">
             <a:extLst xmlns:a="http://schemas.openxmlformats.org/drawingml/2006/main">
               <a:ext uri="{FF2B5EF4-FFF2-40B4-BE49-F238E27FC236}">
-                <a16:creationId xmlns:a16="http://schemas.microsoft.com/office/drawing/2014/main" id="{F4F67C78-E645-40F5-9B5B-BBDE8DAD62C2}"/>
+                <a16:creationId xmlns:a16="http://schemas.microsoft.com/office/drawing/2014/main" id="{CA88384D-4B58-467D-8F75-473A16FAC0EC}"/>
               </a:ext>
             </a:extLst>
           </p:cNvPr>
@@ -11831,7 +12786,7 @@
           <p:cNvPr id="37" name="">
             <a:extLst xmlns:a="http://schemas.openxmlformats.org/drawingml/2006/main">
               <a:ext uri="{FF2B5EF4-FFF2-40B4-BE49-F238E27FC236}">
-                <a16:creationId xmlns:a16="http://schemas.microsoft.com/office/drawing/2014/main" id="{3EB8A7C8-672F-4A04-AC37-6E820C2DF453}"/>
+                <a16:creationId xmlns:a16="http://schemas.microsoft.com/office/drawing/2014/main" id="{E7D1F28A-1EBC-4DE6-97D0-EC6FCF1113E5}"/>
               </a:ext>
             </a:extLst>
           </p:cNvPr>
@@ -11888,7 +12843,7 @@
           <p:cNvPr id="38" name="">
             <a:extLst xmlns:a="http://schemas.openxmlformats.org/drawingml/2006/main">
               <a:ext uri="{FF2B5EF4-FFF2-40B4-BE49-F238E27FC236}">
-                <a16:creationId xmlns:a16="http://schemas.microsoft.com/office/drawing/2014/main" id="{5D08C5E9-AA9C-41A6-89C7-19DE15BE85EE}"/>
+                <a16:creationId xmlns:a16="http://schemas.microsoft.com/office/drawing/2014/main" id="{E8F51C7D-6EC6-496B-8790-3561535BF429}"/>
               </a:ext>
             </a:extLst>
           </p:cNvPr>
@@ -11945,7 +12900,7 @@
           <p:cNvPr id="39" name="">
             <a:extLst xmlns:a="http://schemas.openxmlformats.org/drawingml/2006/main">
               <a:ext uri="{FF2B5EF4-FFF2-40B4-BE49-F238E27FC236}">
-                <a16:creationId xmlns:a16="http://schemas.microsoft.com/office/drawing/2014/main" id="{E7806480-F275-43BD-94A4-A6F500363169}"/>
+                <a16:creationId xmlns:a16="http://schemas.microsoft.com/office/drawing/2014/main" id="{739DA376-99B7-4AF0-91CF-E9C9D5004DB5}"/>
               </a:ext>
             </a:extLst>
           </p:cNvPr>
@@ -12002,7 +12957,7 @@
           <p:cNvPr id="40" name="">
             <a:extLst xmlns:a="http://schemas.openxmlformats.org/drawingml/2006/main">
               <a:ext uri="{FF2B5EF4-FFF2-40B4-BE49-F238E27FC236}">
-                <a16:creationId xmlns:a16="http://schemas.microsoft.com/office/drawing/2014/main" id="{3928055F-7B56-4900-9313-4D01FEDA2D0D}"/>
+                <a16:creationId xmlns:a16="http://schemas.microsoft.com/office/drawing/2014/main" id="{2C8ADF08-63AE-478E-BA62-F61D05F18735}"/>
               </a:ext>
             </a:extLst>
           </p:cNvPr>
@@ -12059,7 +13014,7 @@
           <p:cNvPr id="41" name="">
             <a:extLst xmlns:a="http://schemas.openxmlformats.org/drawingml/2006/main">
               <a:ext uri="{FF2B5EF4-FFF2-40B4-BE49-F238E27FC236}">
-                <a16:creationId xmlns:a16="http://schemas.microsoft.com/office/drawing/2014/main" id="{F443873F-95A8-4E29-BF2C-BCB3D65C13C2}"/>
+                <a16:creationId xmlns:a16="http://schemas.microsoft.com/office/drawing/2014/main" id="{5564876A-0E81-4432-A71D-15BC071A5230}"/>
               </a:ext>
             </a:extLst>
           </p:cNvPr>
@@ -12116,7 +13071,7 @@
           <p:cNvPr id="42" name="">
             <a:extLst xmlns:a="http://schemas.openxmlformats.org/drawingml/2006/main">
               <a:ext uri="{FF2B5EF4-FFF2-40B4-BE49-F238E27FC236}">
-                <a16:creationId xmlns:a16="http://schemas.microsoft.com/office/drawing/2014/main" id="{530BFEA2-79E6-4A8F-866E-FD8075EB651B}"/>
+                <a16:creationId xmlns:a16="http://schemas.microsoft.com/office/drawing/2014/main" id="{45DD4FB7-4DCC-4AC9-8B41-CDDE4694762E}"/>
               </a:ext>
             </a:extLst>
           </p:cNvPr>
@@ -12149,7 +13104,7 @@
           <p:cNvPr id="43" name="">
             <a:extLst xmlns:a="http://schemas.openxmlformats.org/drawingml/2006/main">
               <a:ext uri="{FF2B5EF4-FFF2-40B4-BE49-F238E27FC236}">
-                <a16:creationId xmlns:a16="http://schemas.microsoft.com/office/drawing/2014/main" id="{326A1F29-9F69-425E-9D91-E7FE8A549C3C}"/>
+                <a16:creationId xmlns:a16="http://schemas.microsoft.com/office/drawing/2014/main" id="{6086B0EE-9F4A-43F1-9232-7A2034F358C7}"/>
               </a:ext>
             </a:extLst>
           </p:cNvPr>
@@ -12206,7 +13161,7 @@
           <p:cNvPr id="44" name="">
             <a:extLst xmlns:a="http://schemas.openxmlformats.org/drawingml/2006/main">
               <a:ext uri="{FF2B5EF4-FFF2-40B4-BE49-F238E27FC236}">
-                <a16:creationId xmlns:a16="http://schemas.microsoft.com/office/drawing/2014/main" id="{4946647A-461A-48D5-A5A1-1C27619CF0C8}"/>
+                <a16:creationId xmlns:a16="http://schemas.microsoft.com/office/drawing/2014/main" id="{27C1512B-12AB-4E20-9058-DA31B54CB595}"/>
               </a:ext>
             </a:extLst>
           </p:cNvPr>
@@ -12239,7 +13194,7 @@
           <p:cNvPr id="45" name="">
             <a:extLst xmlns:a="http://schemas.openxmlformats.org/drawingml/2006/main">
               <a:ext uri="{FF2B5EF4-FFF2-40B4-BE49-F238E27FC236}">
-                <a16:creationId xmlns:a16="http://schemas.microsoft.com/office/drawing/2014/main" id="{E1B28AA5-4A84-42E9-97BB-A7C8BA089310}"/>
+                <a16:creationId xmlns:a16="http://schemas.microsoft.com/office/drawing/2014/main" id="{D3CCEE21-B686-4FC0-8D1A-72D27DBBDD10}"/>
               </a:ext>
             </a:extLst>
           </p:cNvPr>
@@ -12296,7 +13251,7 @@
           <p:cNvPr id="46" name="">
             <a:extLst xmlns:a="http://schemas.openxmlformats.org/drawingml/2006/main">
               <a:ext uri="{FF2B5EF4-FFF2-40B4-BE49-F238E27FC236}">
-                <a16:creationId xmlns:a16="http://schemas.microsoft.com/office/drawing/2014/main" id="{CCA145BC-43DE-44A9-970E-CA587750DB8A}"/>
+                <a16:creationId xmlns:a16="http://schemas.microsoft.com/office/drawing/2014/main" id="{E92BAC23-86B3-43BE-97F6-A97CE2D2A67E}"/>
               </a:ext>
             </a:extLst>
           </p:cNvPr>
@@ -12329,7 +13284,7 @@
           <p:cNvPr id="47" name="">
             <a:extLst xmlns:a="http://schemas.openxmlformats.org/drawingml/2006/main">
               <a:ext uri="{FF2B5EF4-FFF2-40B4-BE49-F238E27FC236}">
-                <a16:creationId xmlns:a16="http://schemas.microsoft.com/office/drawing/2014/main" id="{AAFBC8E1-2A28-4D78-B499-3A99217EB600}"/>
+                <a16:creationId xmlns:a16="http://schemas.microsoft.com/office/drawing/2014/main" id="{7CF1F448-A51C-4267-B665-5E2EBE385E53}"/>
               </a:ext>
             </a:extLst>
           </p:cNvPr>
@@ -12386,7 +13341,7 @@
           <p:cNvPr id="48" name="">
             <a:extLst xmlns:a="http://schemas.openxmlformats.org/drawingml/2006/main">
               <a:ext uri="{FF2B5EF4-FFF2-40B4-BE49-F238E27FC236}">
-                <a16:creationId xmlns:a16="http://schemas.microsoft.com/office/drawing/2014/main" id="{CA4A95A8-2134-4A04-81C0-81151CF2B25C}"/>
+                <a16:creationId xmlns:a16="http://schemas.microsoft.com/office/drawing/2014/main" id="{239F66E9-FA22-49E7-B99C-A15F744F02AC}"/>
               </a:ext>
             </a:extLst>
           </p:cNvPr>
@@ -12417,7 +13372,7 @@
           <p:cNvPr id="49" name="">
             <a:extLst xmlns:a="http://schemas.openxmlformats.org/drawingml/2006/main">
               <a:ext uri="{FF2B5EF4-FFF2-40B4-BE49-F238E27FC236}">
-                <a16:creationId xmlns:a16="http://schemas.microsoft.com/office/drawing/2014/main" id="{6FFB12F6-79FB-407B-9B36-8EA48DA41A02}"/>
+                <a16:creationId xmlns:a16="http://schemas.microsoft.com/office/drawing/2014/main" id="{8F100B14-9A02-4A73-AFAD-4D9D39C49071}"/>
               </a:ext>
             </a:extLst>
           </p:cNvPr>
@@ -12448,7 +13403,7 @@
           <p:cNvPr id="50" name="">
             <a:extLst xmlns:a="http://schemas.openxmlformats.org/drawingml/2006/main">
               <a:ext uri="{FF2B5EF4-FFF2-40B4-BE49-F238E27FC236}">
-                <a16:creationId xmlns:a16="http://schemas.microsoft.com/office/drawing/2014/main" id="{0E9FEEA6-6E0C-45AF-9E19-0CD6A9531115}"/>
+                <a16:creationId xmlns:a16="http://schemas.microsoft.com/office/drawing/2014/main" id="{BBE45132-CE40-4BEA-8EA6-2429A043A637}"/>
               </a:ext>
             </a:extLst>
           </p:cNvPr>
@@ -12505,7 +13460,7 @@
           <p:cNvPr id="51" name="">
             <a:extLst xmlns:a="http://schemas.openxmlformats.org/drawingml/2006/main">
               <a:ext uri="{FF2B5EF4-FFF2-40B4-BE49-F238E27FC236}">
-                <a16:creationId xmlns:a16="http://schemas.microsoft.com/office/drawing/2014/main" id="{A09698C7-B505-4E62-ABDF-214190AFEE8E}"/>
+                <a16:creationId xmlns:a16="http://schemas.microsoft.com/office/drawing/2014/main" id="{110CEAEC-2EB2-4409-89C3-A88CB8AB6C55}"/>
               </a:ext>
             </a:extLst>
           </p:cNvPr>
@@ -12562,7 +13517,7 @@
           <p:cNvPr id="52" name="">
             <a:extLst xmlns:a="http://schemas.openxmlformats.org/drawingml/2006/main">
               <a:ext uri="{FF2B5EF4-FFF2-40B4-BE49-F238E27FC236}">
-                <a16:creationId xmlns:a16="http://schemas.microsoft.com/office/drawing/2014/main" id="{1E001984-425D-4D7E-8729-92E6F7CC2C95}"/>
+                <a16:creationId xmlns:a16="http://schemas.microsoft.com/office/drawing/2014/main" id="{9D5913BC-6EAB-49A9-8BCC-85089CE18652}"/>
               </a:ext>
             </a:extLst>
           </p:cNvPr>
@@ -12619,7 +13574,7 @@
           <p:cNvPr id="53" name="">
             <a:extLst xmlns:a="http://schemas.openxmlformats.org/drawingml/2006/main">
               <a:ext uri="{FF2B5EF4-FFF2-40B4-BE49-F238E27FC236}">
-                <a16:creationId xmlns:a16="http://schemas.microsoft.com/office/drawing/2014/main" id="{E9304899-9EBB-4FA7-98E6-C2B2EDFE9135}"/>
+                <a16:creationId xmlns:a16="http://schemas.microsoft.com/office/drawing/2014/main" id="{28A5847C-D9BD-4A92-A627-D4DBDAD7BBA2}"/>
               </a:ext>
             </a:extLst>
           </p:cNvPr>
@@ -12699,7 +13654,7 @@
           <p:cNvPr id="54" name="">
             <a:extLst xmlns:a="http://schemas.openxmlformats.org/drawingml/2006/main">
               <a:ext uri="{FF2B5EF4-FFF2-40B4-BE49-F238E27FC236}">
-                <a16:creationId xmlns:a16="http://schemas.microsoft.com/office/drawing/2014/main" id="{224308DF-C301-4B51-BCB2-B1F2901CF818}"/>
+                <a16:creationId xmlns:a16="http://schemas.microsoft.com/office/drawing/2014/main" id="{61A43B5C-5844-4B46-9EB6-17D39FB12D4D}"/>
               </a:ext>
             </a:extLst>
           </p:cNvPr>
@@ -12732,7 +13687,7 @@
           <p:cNvPr id="55" name="">
             <a:extLst xmlns:a="http://schemas.openxmlformats.org/drawingml/2006/main">
               <a:ext uri="{FF2B5EF4-FFF2-40B4-BE49-F238E27FC236}">
-                <a16:creationId xmlns:a16="http://schemas.microsoft.com/office/drawing/2014/main" id="{2A01D789-0946-4EC3-961B-B06039D4BA21}"/>
+                <a16:creationId xmlns:a16="http://schemas.microsoft.com/office/drawing/2014/main" id="{11FB0F8B-2962-4997-B097-DF02B9D1C09D}"/>
               </a:ext>
             </a:extLst>
           </p:cNvPr>
@@ -12789,7 +13744,7 @@
           <p:cNvPr id="56" name="">
             <a:extLst xmlns:a="http://schemas.openxmlformats.org/drawingml/2006/main">
               <a:ext uri="{FF2B5EF4-FFF2-40B4-BE49-F238E27FC236}">
-                <a16:creationId xmlns:a16="http://schemas.microsoft.com/office/drawing/2014/main" id="{1809F3B4-FB22-4625-9210-071F4B957EE4}"/>
+                <a16:creationId xmlns:a16="http://schemas.microsoft.com/office/drawing/2014/main" id="{A910F3AE-B5B3-473C-BCEB-F60339BD76D5}"/>
               </a:ext>
             </a:extLst>
           </p:cNvPr>
@@ -12822,7 +13777,7 @@
           <p:cNvPr id="57" name="">
             <a:extLst xmlns:a="http://schemas.openxmlformats.org/drawingml/2006/main">
               <a:ext uri="{FF2B5EF4-FFF2-40B4-BE49-F238E27FC236}">
-                <a16:creationId xmlns:a16="http://schemas.microsoft.com/office/drawing/2014/main" id="{8E087A51-0681-4D28-8A12-5A6772107809}"/>
+                <a16:creationId xmlns:a16="http://schemas.microsoft.com/office/drawing/2014/main" id="{89C518C5-8894-4715-93C1-4C585D242273}"/>
               </a:ext>
             </a:extLst>
           </p:cNvPr>
@@ -12879,7 +13834,7 @@
           <p:cNvPr id="58" name="">
             <a:extLst xmlns:a="http://schemas.openxmlformats.org/drawingml/2006/main">
               <a:ext uri="{FF2B5EF4-FFF2-40B4-BE49-F238E27FC236}">
-                <a16:creationId xmlns:a16="http://schemas.microsoft.com/office/drawing/2014/main" id="{E6188E39-B385-4765-968D-430CECBF4194}"/>
+                <a16:creationId xmlns:a16="http://schemas.microsoft.com/office/drawing/2014/main" id="{42AE6095-F2D8-4D4E-9D08-A784F728CF98}"/>
               </a:ext>
             </a:extLst>
           </p:cNvPr>
@@ -12912,7 +13867,7 @@
           <p:cNvPr id="59" name="">
             <a:extLst xmlns:a="http://schemas.openxmlformats.org/drawingml/2006/main">
               <a:ext uri="{FF2B5EF4-FFF2-40B4-BE49-F238E27FC236}">
-                <a16:creationId xmlns:a16="http://schemas.microsoft.com/office/drawing/2014/main" id="{4663DCAA-353F-4D9A-8998-6C26C4ED6BA4}"/>
+                <a16:creationId xmlns:a16="http://schemas.microsoft.com/office/drawing/2014/main" id="{702D26C3-48D7-4F26-8B06-A4742E33CA0E}"/>
               </a:ext>
             </a:extLst>
           </p:cNvPr>
@@ -12969,7 +13924,7 @@
           <p:cNvPr id="60" name="">
             <a:extLst xmlns:a="http://schemas.openxmlformats.org/drawingml/2006/main">
               <a:ext uri="{FF2B5EF4-FFF2-40B4-BE49-F238E27FC236}">
-                <a16:creationId xmlns:a16="http://schemas.microsoft.com/office/drawing/2014/main" id="{DC4B89E6-F71C-477D-92BE-377A0C0C8700}"/>
+                <a16:creationId xmlns:a16="http://schemas.microsoft.com/office/drawing/2014/main" id="{CEB36E81-D603-4E2D-9624-A541A7AD1DEC}"/>
               </a:ext>
             </a:extLst>
           </p:cNvPr>
@@ -13000,7 +13955,7 @@
           <p:cNvPr id="61" name="">
             <a:extLst xmlns:a="http://schemas.openxmlformats.org/drawingml/2006/main">
               <a:ext uri="{FF2B5EF4-FFF2-40B4-BE49-F238E27FC236}">
-                <a16:creationId xmlns:a16="http://schemas.microsoft.com/office/drawing/2014/main" id="{69847D4D-2D69-4D4C-A552-8CF4D375D356}"/>
+                <a16:creationId xmlns:a16="http://schemas.microsoft.com/office/drawing/2014/main" id="{B7365471-849C-4C43-A61F-8A16757ABB9A}"/>
               </a:ext>
             </a:extLst>
           </p:cNvPr>
@@ -13031,7 +13986,7 @@
           <p:cNvPr id="62" name="">
             <a:extLst xmlns:a="http://schemas.openxmlformats.org/drawingml/2006/main">
               <a:ext uri="{FF2B5EF4-FFF2-40B4-BE49-F238E27FC236}">
-                <a16:creationId xmlns:a16="http://schemas.microsoft.com/office/drawing/2014/main" id="{5E919E97-D32B-419A-95C2-43B44507C07A}"/>
+                <a16:creationId xmlns:a16="http://schemas.microsoft.com/office/drawing/2014/main" id="{111B64A8-BAA3-453E-A3F5-A173D2FF9932}"/>
               </a:ext>
             </a:extLst>
           </p:cNvPr>
@@ -13088,7 +14043,7 @@
           <p:cNvPr id="63" name="">
             <a:extLst xmlns:a="http://schemas.openxmlformats.org/drawingml/2006/main">
               <a:ext uri="{FF2B5EF4-FFF2-40B4-BE49-F238E27FC236}">
-                <a16:creationId xmlns:a16="http://schemas.microsoft.com/office/drawing/2014/main" id="{A199D9F0-1E0B-4CEF-AB1A-99FEC5FDA017}"/>
+                <a16:creationId xmlns:a16="http://schemas.microsoft.com/office/drawing/2014/main" id="{2A5BAB1B-2DE3-4C6E-9F39-E51979CD1BEF}"/>
               </a:ext>
             </a:extLst>
           </p:cNvPr>
@@ -13145,7 +14100,7 @@
           <p:cNvPr id="64" name="">
             <a:extLst xmlns:a="http://schemas.openxmlformats.org/drawingml/2006/main">
               <a:ext uri="{FF2B5EF4-FFF2-40B4-BE49-F238E27FC236}">
-                <a16:creationId xmlns:a16="http://schemas.microsoft.com/office/drawing/2014/main" id="{7095FE84-9511-4778-A6FF-CBB4409D7BDB}"/>
+                <a16:creationId xmlns:a16="http://schemas.microsoft.com/office/drawing/2014/main" id="{0E70DFC8-9005-47D6-977B-6E626BD97ABE}"/>
               </a:ext>
             </a:extLst>
           </p:cNvPr>
@@ -13176,7 +14131,7 @@
           <p:cNvPr id="65" name="">
             <a:extLst xmlns:a="http://schemas.openxmlformats.org/drawingml/2006/main">
               <a:ext uri="{FF2B5EF4-FFF2-40B4-BE49-F238E27FC236}">
-                <a16:creationId xmlns:a16="http://schemas.microsoft.com/office/drawing/2014/main" id="{9EF0FF78-8370-4F85-9714-73FD1020D38E}"/>
+                <a16:creationId xmlns:a16="http://schemas.microsoft.com/office/drawing/2014/main" id="{62F9C863-A9DB-4337-8B6B-77CE482CA7C1}"/>
               </a:ext>
             </a:extLst>
           </p:cNvPr>
@@ -13233,7 +14188,7 @@
           <p:cNvPr id="66" name="">
             <a:extLst xmlns:a="http://schemas.openxmlformats.org/drawingml/2006/main">
               <a:ext uri="{FF2B5EF4-FFF2-40B4-BE49-F238E27FC236}">
-                <a16:creationId xmlns:a16="http://schemas.microsoft.com/office/drawing/2014/main" id="{217E178A-123E-4026-8566-E9B0441B1B42}"/>
+                <a16:creationId xmlns:a16="http://schemas.microsoft.com/office/drawing/2014/main" id="{BF51EC13-EEB1-4479-97B4-0C003BD0D9F6}"/>
               </a:ext>
             </a:extLst>
           </p:cNvPr>
@@ -13290,7 +14245,7 @@
           <p:cNvPr id="67" name="">
             <a:extLst xmlns:a="http://schemas.openxmlformats.org/drawingml/2006/main">
               <a:ext uri="{FF2B5EF4-FFF2-40B4-BE49-F238E27FC236}">
-                <a16:creationId xmlns:a16="http://schemas.microsoft.com/office/drawing/2014/main" id="{8EC2A353-6C6E-44A7-A671-A27F77FCD14C}"/>
+                <a16:creationId xmlns:a16="http://schemas.microsoft.com/office/drawing/2014/main" id="{51DEC7EE-F9AA-41F4-AD34-02E8A84D1048}"/>
               </a:ext>
             </a:extLst>
           </p:cNvPr>
@@ -13345,7 +14300,7 @@
     </p:spTree>
     <p:extLst>
       <p:ext uri="{BB962C8B-B14F-4D97-AF65-F5344CB8AC3E}">
-        <p14:creationId xmlns:p14="http://schemas.microsoft.com/office/powerpoint/2010/main" val="84199661"/>
+        <p14:creationId xmlns:p14="http://schemas.microsoft.com/office/powerpoint/2010/main" val="329325458"/>
       </p:ext>
     </p:extLst>
   </p:cSld>
@@ -13376,7 +14331,7 @@
           <p:cNvPr id="45" name="">
             <a:extLst xmlns:a="http://schemas.openxmlformats.org/drawingml/2006/main">
               <a:ext uri="{FF2B5EF4-FFF2-40B4-BE49-F238E27FC236}">
-                <a16:creationId xmlns:a16="http://schemas.microsoft.com/office/drawing/2014/main" id="{359F458A-8BD5-45CF-BEDB-D789432CB35E}"/>
+                <a16:creationId xmlns:a16="http://schemas.microsoft.com/office/drawing/2014/main" id="{B0043DB8-A82B-490C-928C-F0823A19BE5D}"/>
               </a:ext>
             </a:extLst>
           </p:cNvPr>
@@ -13433,7 +14388,7 @@
           <p:cNvPr id="2" name="">
             <a:extLst xmlns:a="http://schemas.openxmlformats.org/drawingml/2006/main">
               <a:ext uri="{FF2B5EF4-FFF2-40B4-BE49-F238E27FC236}">
-                <a16:creationId xmlns:a16="http://schemas.microsoft.com/office/drawing/2014/main" id="{610BE56E-FFDC-4E1C-AF5F-0FCF8E0A472D}"/>
+                <a16:creationId xmlns:a16="http://schemas.microsoft.com/office/drawing/2014/main" id="{6014E88D-4B55-4E6B-862C-7E36E3409D3C}"/>
               </a:ext>
             </a:extLst>
           </p:cNvPr>
@@ -13464,7 +14419,7 @@
           <p:cNvPr id="3" name="">
             <a:extLst xmlns:a="http://schemas.openxmlformats.org/drawingml/2006/main">
               <a:ext uri="{FF2B5EF4-FFF2-40B4-BE49-F238E27FC236}">
-                <a16:creationId xmlns:a16="http://schemas.microsoft.com/office/drawing/2014/main" id="{5750B51E-ADA0-4A14-A44C-A867441D2AB0}"/>
+                <a16:creationId xmlns:a16="http://schemas.microsoft.com/office/drawing/2014/main" id="{7CF1A669-7FFB-44C1-9C61-5AFAEC95B24F}"/>
               </a:ext>
             </a:extLst>
           </p:cNvPr>
@@ -13521,7 +14476,7 @@
           <p:cNvPr id="4" name="">
             <a:extLst xmlns:a="http://schemas.openxmlformats.org/drawingml/2006/main">
               <a:ext uri="{FF2B5EF4-FFF2-40B4-BE49-F238E27FC236}">
-                <a16:creationId xmlns:a16="http://schemas.microsoft.com/office/drawing/2014/main" id="{804B2DE0-EB32-4469-B783-A4169C7B1E96}"/>
+                <a16:creationId xmlns:a16="http://schemas.microsoft.com/office/drawing/2014/main" id="{4F8E4C0E-FD3D-45B0-ADFC-7F69CE9BE60E}"/>
               </a:ext>
             </a:extLst>
           </p:cNvPr>
@@ -13552,7 +14507,7 @@
           <p:cNvPr id="5" name="">
             <a:extLst xmlns:a="http://schemas.openxmlformats.org/drawingml/2006/main">
               <a:ext uri="{FF2B5EF4-FFF2-40B4-BE49-F238E27FC236}">
-                <a16:creationId xmlns:a16="http://schemas.microsoft.com/office/drawing/2014/main" id="{291418DA-82BC-43D8-877F-9377841C0062}"/>
+                <a16:creationId xmlns:a16="http://schemas.microsoft.com/office/drawing/2014/main" id="{90D5190A-30AE-401B-B442-EAB85E5F29DC}"/>
               </a:ext>
             </a:extLst>
           </p:cNvPr>
@@ -13609,7 +14564,7 @@
           <p:cNvPr id="6" name="">
             <a:extLst xmlns:a="http://schemas.openxmlformats.org/drawingml/2006/main">
               <a:ext uri="{FF2B5EF4-FFF2-40B4-BE49-F238E27FC236}">
-                <a16:creationId xmlns:a16="http://schemas.microsoft.com/office/drawing/2014/main" id="{C5A140CF-E8A3-4A87-9934-AA3B17E41481}"/>
+                <a16:creationId xmlns:a16="http://schemas.microsoft.com/office/drawing/2014/main" id="{C8F8CB8E-6E9F-4738-8413-41ECB32CC7D7}"/>
               </a:ext>
             </a:extLst>
           </p:cNvPr>
@@ -13666,7 +14621,7 @@
           <p:cNvPr id="7" name="">
             <a:extLst xmlns:a="http://schemas.openxmlformats.org/drawingml/2006/main">
               <a:ext uri="{FF2B5EF4-FFF2-40B4-BE49-F238E27FC236}">
-                <a16:creationId xmlns:a16="http://schemas.microsoft.com/office/drawing/2014/main" id="{046D8EA0-8304-4435-8634-82366343926E}"/>
+                <a16:creationId xmlns:a16="http://schemas.microsoft.com/office/drawing/2014/main" id="{640A3107-7CB4-4548-8F9A-12E3AE207DED}"/>
               </a:ext>
             </a:extLst>
           </p:cNvPr>
@@ -13723,7 +14678,7 @@
           <p:cNvPr id="8" name="">
             <a:extLst xmlns:a="http://schemas.openxmlformats.org/drawingml/2006/main">
               <a:ext uri="{FF2B5EF4-FFF2-40B4-BE49-F238E27FC236}">
-                <a16:creationId xmlns:a16="http://schemas.microsoft.com/office/drawing/2014/main" id="{08B045DB-F504-4C06-9984-EAEEFEB2008E}"/>
+                <a16:creationId xmlns:a16="http://schemas.microsoft.com/office/drawing/2014/main" id="{D78119B2-17A8-4EA7-B674-678246B2833C}"/>
               </a:ext>
             </a:extLst>
           </p:cNvPr>
@@ -13780,7 +14735,7 @@
           <p:cNvPr id="9" name="">
             <a:extLst xmlns:a="http://schemas.openxmlformats.org/drawingml/2006/main">
               <a:ext uri="{FF2B5EF4-FFF2-40B4-BE49-F238E27FC236}">
-                <a16:creationId xmlns:a16="http://schemas.microsoft.com/office/drawing/2014/main" id="{C1BF8AF4-DD06-4F45-BED1-A946D8748AEA}"/>
+                <a16:creationId xmlns:a16="http://schemas.microsoft.com/office/drawing/2014/main" id="{0D7D4EAF-99BB-439B-BBFE-F5EA89B39538}"/>
               </a:ext>
             </a:extLst>
           </p:cNvPr>
@@ -13837,7 +14792,7 @@
           <p:cNvPr id="10" name="">
             <a:extLst xmlns:a="http://schemas.openxmlformats.org/drawingml/2006/main">
               <a:ext uri="{FF2B5EF4-FFF2-40B4-BE49-F238E27FC236}">
-                <a16:creationId xmlns:a16="http://schemas.microsoft.com/office/drawing/2014/main" id="{15FAC6B3-7F04-42B8-BBBD-FDDFB8CBC17E}"/>
+                <a16:creationId xmlns:a16="http://schemas.microsoft.com/office/drawing/2014/main" id="{C9CE9232-4814-49C8-A3D9-17079274F432}"/>
               </a:ext>
             </a:extLst>
           </p:cNvPr>
@@ -13894,7 +14849,7 @@
           <p:cNvPr id="11" name="">
             <a:extLst xmlns:a="http://schemas.openxmlformats.org/drawingml/2006/main">
               <a:ext uri="{FF2B5EF4-FFF2-40B4-BE49-F238E27FC236}">
-                <a16:creationId xmlns:a16="http://schemas.microsoft.com/office/drawing/2014/main" id="{FEE30D8D-8A56-4072-AC4F-9F6EC0377E74}"/>
+                <a16:creationId xmlns:a16="http://schemas.microsoft.com/office/drawing/2014/main" id="{033378CF-AA7E-4909-82D9-EEEE67B8D36B}"/>
               </a:ext>
             </a:extLst>
           </p:cNvPr>
@@ -13951,7 +14906,7 @@
           <p:cNvPr id="12" name="">
             <a:extLst xmlns:a="http://schemas.openxmlformats.org/drawingml/2006/main">
               <a:ext uri="{FF2B5EF4-FFF2-40B4-BE49-F238E27FC236}">
-                <a16:creationId xmlns:a16="http://schemas.microsoft.com/office/drawing/2014/main" id="{6E6FE5A7-283B-4677-A77B-D65F7D06D950}"/>
+                <a16:creationId xmlns:a16="http://schemas.microsoft.com/office/drawing/2014/main" id="{512AEADA-F140-40B3-B078-1600BF73E9C4}"/>
               </a:ext>
             </a:extLst>
           </p:cNvPr>
@@ -14008,7 +14963,7 @@
           <p:cNvPr id="13" name="">
             <a:extLst xmlns:a="http://schemas.openxmlformats.org/drawingml/2006/main">
               <a:ext uri="{FF2B5EF4-FFF2-40B4-BE49-F238E27FC236}">
-                <a16:creationId xmlns:a16="http://schemas.microsoft.com/office/drawing/2014/main" id="{91908112-C093-4858-92FF-C66CB5F999F7}"/>
+                <a16:creationId xmlns:a16="http://schemas.microsoft.com/office/drawing/2014/main" id="{7D036597-BC3A-48D5-957A-A2335D82AC9B}"/>
               </a:ext>
             </a:extLst>
           </p:cNvPr>
@@ -14088,7 +15043,7 @@
           <p:cNvPr id="14" name="">
             <a:extLst xmlns:a="http://schemas.openxmlformats.org/drawingml/2006/main">
               <a:ext uri="{FF2B5EF4-FFF2-40B4-BE49-F238E27FC236}">
-                <a16:creationId xmlns:a16="http://schemas.microsoft.com/office/drawing/2014/main" id="{022ED6D9-592B-4580-8E58-E218E8865887}"/>
+                <a16:creationId xmlns:a16="http://schemas.microsoft.com/office/drawing/2014/main" id="{3950114D-B960-4F57-AE91-B36266AD138B}"/>
               </a:ext>
             </a:extLst>
           </p:cNvPr>
@@ -14168,7 +15123,7 @@
           <p:cNvPr id="15" name="">
             <a:extLst xmlns:a="http://schemas.openxmlformats.org/drawingml/2006/main">
               <a:ext uri="{FF2B5EF4-FFF2-40B4-BE49-F238E27FC236}">
-                <a16:creationId xmlns:a16="http://schemas.microsoft.com/office/drawing/2014/main" id="{DF586DBE-BBAC-421A-BE96-4A80B43CF18B}"/>
+                <a16:creationId xmlns:a16="http://schemas.microsoft.com/office/drawing/2014/main" id="{FD7F03FB-6B21-4BB0-BA72-E4E4C77F4D82}"/>
               </a:ext>
             </a:extLst>
           </p:cNvPr>
@@ -14225,7 +15180,7 @@
           <p:cNvPr id="16" name="">
             <a:extLst xmlns:a="http://schemas.openxmlformats.org/drawingml/2006/main">
               <a:ext uri="{FF2B5EF4-FFF2-40B4-BE49-F238E27FC236}">
-                <a16:creationId xmlns:a16="http://schemas.microsoft.com/office/drawing/2014/main" id="{4D3C56E0-4795-46B1-951E-5D8AA405BAD6}"/>
+                <a16:creationId xmlns:a16="http://schemas.microsoft.com/office/drawing/2014/main" id="{D69971B2-E24D-4919-AC2E-B31ACCB23F00}"/>
               </a:ext>
             </a:extLst>
           </p:cNvPr>
@@ -14282,7 +15237,7 @@
           <p:cNvPr id="17" name="">
             <a:extLst xmlns:a="http://schemas.openxmlformats.org/drawingml/2006/main">
               <a:ext uri="{FF2B5EF4-FFF2-40B4-BE49-F238E27FC236}">
-                <a16:creationId xmlns:a16="http://schemas.microsoft.com/office/drawing/2014/main" id="{5C3CD09E-9484-4CD2-83FE-CBA89434F340}"/>
+                <a16:creationId xmlns:a16="http://schemas.microsoft.com/office/drawing/2014/main" id="{958F2E99-FD0F-4F28-B05C-590E310115CA}"/>
               </a:ext>
             </a:extLst>
           </p:cNvPr>
@@ -14339,7 +15294,7 @@
           <p:cNvPr id="18" name="">
             <a:extLst xmlns:a="http://schemas.openxmlformats.org/drawingml/2006/main">
               <a:ext uri="{FF2B5EF4-FFF2-40B4-BE49-F238E27FC236}">
-                <a16:creationId xmlns:a16="http://schemas.microsoft.com/office/drawing/2014/main" id="{FD762F46-ACAF-454C-A58E-03286F1DB221}"/>
+                <a16:creationId xmlns:a16="http://schemas.microsoft.com/office/drawing/2014/main" id="{D382AD02-20D8-42F3-887F-6F9B77716FAC}"/>
               </a:ext>
             </a:extLst>
           </p:cNvPr>
@@ -14396,7 +15351,7 @@
           <p:cNvPr id="19" name="">
             <a:extLst xmlns:a="http://schemas.openxmlformats.org/drawingml/2006/main">
               <a:ext uri="{FF2B5EF4-FFF2-40B4-BE49-F238E27FC236}">
-                <a16:creationId xmlns:a16="http://schemas.microsoft.com/office/drawing/2014/main" id="{9B2D5798-494F-46E8-B6C1-724C1286C6A0}"/>
+                <a16:creationId xmlns:a16="http://schemas.microsoft.com/office/drawing/2014/main" id="{025960E5-7411-4B49-9809-DFD94EC1FDBE}"/>
               </a:ext>
             </a:extLst>
           </p:cNvPr>
@@ -14453,7 +15408,7 @@
           <p:cNvPr id="20" name="">
             <a:extLst xmlns:a="http://schemas.openxmlformats.org/drawingml/2006/main">
               <a:ext uri="{FF2B5EF4-FFF2-40B4-BE49-F238E27FC236}">
-                <a16:creationId xmlns:a16="http://schemas.microsoft.com/office/drawing/2014/main" id="{C45AB308-5EB5-4B0D-9E12-A0A4255DDA33}"/>
+                <a16:creationId xmlns:a16="http://schemas.microsoft.com/office/drawing/2014/main" id="{45BE6E70-545C-4BB2-B6F1-6FB6B3E5D3BD}"/>
               </a:ext>
             </a:extLst>
           </p:cNvPr>
@@ -14510,7 +15465,7 @@
           <p:cNvPr id="21" name="">
             <a:extLst xmlns:a="http://schemas.openxmlformats.org/drawingml/2006/main">
               <a:ext uri="{FF2B5EF4-FFF2-40B4-BE49-F238E27FC236}">
-                <a16:creationId xmlns:a16="http://schemas.microsoft.com/office/drawing/2014/main" id="{8841A669-D1DC-468F-A449-2E732F6BCE87}"/>
+                <a16:creationId xmlns:a16="http://schemas.microsoft.com/office/drawing/2014/main" id="{C0C649A9-573F-45BE-9B0E-ED3F6013462E}"/>
               </a:ext>
             </a:extLst>
           </p:cNvPr>
@@ -14567,7 +15522,7 @@
           <p:cNvPr id="22" name="">
             <a:extLst xmlns:a="http://schemas.openxmlformats.org/drawingml/2006/main">
               <a:ext uri="{FF2B5EF4-FFF2-40B4-BE49-F238E27FC236}">
-                <a16:creationId xmlns:a16="http://schemas.microsoft.com/office/drawing/2014/main" id="{3FC2CF59-B241-4FDC-89DA-AF26767DFDFA}"/>
+                <a16:creationId xmlns:a16="http://schemas.microsoft.com/office/drawing/2014/main" id="{03BC7603-DB24-4DFF-99CB-20A5A99D26F3}"/>
               </a:ext>
             </a:extLst>
           </p:cNvPr>
@@ -14624,7 +15579,7 @@
           <p:cNvPr id="23" name="">
             <a:extLst xmlns:a="http://schemas.openxmlformats.org/drawingml/2006/main">
               <a:ext uri="{FF2B5EF4-FFF2-40B4-BE49-F238E27FC236}">
-                <a16:creationId xmlns:a16="http://schemas.microsoft.com/office/drawing/2014/main" id="{1AF2E50E-6566-4C8B-9ADB-4AEFEC4A3B6B}"/>
+                <a16:creationId xmlns:a16="http://schemas.microsoft.com/office/drawing/2014/main" id="{9DEAB266-53D4-4BA9-9243-EAA7E90B6ACE}"/>
               </a:ext>
             </a:extLst>
           </p:cNvPr>
@@ -14681,7 +15636,7 @@
           <p:cNvPr id="24" name="">
             <a:extLst xmlns:a="http://schemas.openxmlformats.org/drawingml/2006/main">
               <a:ext uri="{FF2B5EF4-FFF2-40B4-BE49-F238E27FC236}">
-                <a16:creationId xmlns:a16="http://schemas.microsoft.com/office/drawing/2014/main" id="{B1E7E3ED-0DCC-4BE3-9300-71AF32ECDDD7}"/>
+                <a16:creationId xmlns:a16="http://schemas.microsoft.com/office/drawing/2014/main" id="{89BDE5B5-BE75-4037-B270-3BB17B7E7B26}"/>
               </a:ext>
             </a:extLst>
           </p:cNvPr>
@@ -14738,7 +15693,7 @@
           <p:cNvPr id="25" name="">
             <a:extLst xmlns:a="http://schemas.openxmlformats.org/drawingml/2006/main">
               <a:ext uri="{FF2B5EF4-FFF2-40B4-BE49-F238E27FC236}">
-                <a16:creationId xmlns:a16="http://schemas.microsoft.com/office/drawing/2014/main" id="{435962A5-6442-4106-82AB-9259CC6F44BD}"/>
+                <a16:creationId xmlns:a16="http://schemas.microsoft.com/office/drawing/2014/main" id="{DE264192-623F-4895-A88F-1DF9F5E98898}"/>
               </a:ext>
             </a:extLst>
           </p:cNvPr>
@@ -14818,7 +15773,7 @@
           <p:cNvPr id="26" name="">
             <a:extLst xmlns:a="http://schemas.openxmlformats.org/drawingml/2006/main">
               <a:ext uri="{FF2B5EF4-FFF2-40B4-BE49-F238E27FC236}">
-                <a16:creationId xmlns:a16="http://schemas.microsoft.com/office/drawing/2014/main" id="{B2131EFD-905B-4520-8B30-1650211C4408}"/>
+                <a16:creationId xmlns:a16="http://schemas.microsoft.com/office/drawing/2014/main" id="{5B1CAE3D-2830-4135-9E74-CBA7731C74E4}"/>
               </a:ext>
             </a:extLst>
           </p:cNvPr>
@@ -14875,7 +15830,7 @@
           <p:cNvPr id="27" name="">
             <a:extLst xmlns:a="http://schemas.openxmlformats.org/drawingml/2006/main">
               <a:ext uri="{FF2B5EF4-FFF2-40B4-BE49-F238E27FC236}">
-                <a16:creationId xmlns:a16="http://schemas.microsoft.com/office/drawing/2014/main" id="{3A9AAA9C-26F3-4AD4-A3DF-6C325EC7A792}"/>
+                <a16:creationId xmlns:a16="http://schemas.microsoft.com/office/drawing/2014/main" id="{FC45FC72-E0A8-4ADD-971E-2C7EB86D0FA2}"/>
               </a:ext>
             </a:extLst>
           </p:cNvPr>
@@ -14906,7 +15861,7 @@
           <p:cNvPr id="28" name="">
             <a:extLst xmlns:a="http://schemas.openxmlformats.org/drawingml/2006/main">
               <a:ext uri="{FF2B5EF4-FFF2-40B4-BE49-F238E27FC236}">
-                <a16:creationId xmlns:a16="http://schemas.microsoft.com/office/drawing/2014/main" id="{1843D5EC-A218-41B6-B187-A48D3D7492DC}"/>
+                <a16:creationId xmlns:a16="http://schemas.microsoft.com/office/drawing/2014/main" id="{BE15E043-43D3-4D4E-A989-BF00B1219FFC}"/>
               </a:ext>
             </a:extLst>
           </p:cNvPr>
@@ -14963,7 +15918,7 @@
           <p:cNvPr id="29" name="">
             <a:extLst xmlns:a="http://schemas.openxmlformats.org/drawingml/2006/main">
               <a:ext uri="{FF2B5EF4-FFF2-40B4-BE49-F238E27FC236}">
-                <a16:creationId xmlns:a16="http://schemas.microsoft.com/office/drawing/2014/main" id="{4757FFB1-2F78-4A15-B189-F95DD0115DAD}"/>
+                <a16:creationId xmlns:a16="http://schemas.microsoft.com/office/drawing/2014/main" id="{84D62D40-0A58-49F8-9D35-2C52B43B0AE4}"/>
               </a:ext>
             </a:extLst>
           </p:cNvPr>
@@ -15020,7 +15975,7 @@
           <p:cNvPr id="30" name="">
             <a:extLst xmlns:a="http://schemas.openxmlformats.org/drawingml/2006/main">
               <a:ext uri="{FF2B5EF4-FFF2-40B4-BE49-F238E27FC236}">
-                <a16:creationId xmlns:a16="http://schemas.microsoft.com/office/drawing/2014/main" id="{80384B91-66A2-4A9E-A799-91A01B30EC30}"/>
+                <a16:creationId xmlns:a16="http://schemas.microsoft.com/office/drawing/2014/main" id="{D812D5F3-884B-43B9-8E15-DF2BFD1D4773}"/>
               </a:ext>
             </a:extLst>
           </p:cNvPr>
@@ -15077,7 +16032,7 @@
           <p:cNvPr id="31" name="">
             <a:extLst xmlns:a="http://schemas.openxmlformats.org/drawingml/2006/main">
               <a:ext uri="{FF2B5EF4-FFF2-40B4-BE49-F238E27FC236}">
-                <a16:creationId xmlns:a16="http://schemas.microsoft.com/office/drawing/2014/main" id="{5E3713FF-F14C-41DA-95C4-3408A6F21671}"/>
+                <a16:creationId xmlns:a16="http://schemas.microsoft.com/office/drawing/2014/main" id="{90AB162B-EBC5-4DB1-86C5-9D2BBA17E5EA}"/>
               </a:ext>
             </a:extLst>
           </p:cNvPr>
@@ -15134,7 +16089,7 @@
           <p:cNvPr id="32" name="">
             <a:extLst xmlns:a="http://schemas.openxmlformats.org/drawingml/2006/main">
               <a:ext uri="{FF2B5EF4-FFF2-40B4-BE49-F238E27FC236}">
-                <a16:creationId xmlns:a16="http://schemas.microsoft.com/office/drawing/2014/main" id="{997A4BFC-ABE0-4D61-BAC1-728B3399B635}"/>
+                <a16:creationId xmlns:a16="http://schemas.microsoft.com/office/drawing/2014/main" id="{2A31BDE9-8C1A-4F54-AE07-95AFFA8177B7}"/>
               </a:ext>
             </a:extLst>
           </p:cNvPr>
@@ -15191,7 +16146,7 @@
           <p:cNvPr id="33" name="">
             <a:extLst xmlns:a="http://schemas.openxmlformats.org/drawingml/2006/main">
               <a:ext uri="{FF2B5EF4-FFF2-40B4-BE49-F238E27FC236}">
-                <a16:creationId xmlns:a16="http://schemas.microsoft.com/office/drawing/2014/main" id="{2FE382C9-7802-4283-BA67-1A42990F6056}"/>
+                <a16:creationId xmlns:a16="http://schemas.microsoft.com/office/drawing/2014/main" id="{4A135513-F9BE-48D1-85E6-F31E4FE1818B}"/>
               </a:ext>
             </a:extLst>
           </p:cNvPr>
@@ -15248,7 +16203,7 @@
           <p:cNvPr id="34" name="">
             <a:extLst xmlns:a="http://schemas.openxmlformats.org/drawingml/2006/main">
               <a:ext uri="{FF2B5EF4-FFF2-40B4-BE49-F238E27FC236}">
-                <a16:creationId xmlns:a16="http://schemas.microsoft.com/office/drawing/2014/main" id="{10C9ECFF-3A3F-4ED1-A9DD-1BEA2B08F148}"/>
+                <a16:creationId xmlns:a16="http://schemas.microsoft.com/office/drawing/2014/main" id="{02C73361-F829-4DDF-9DE4-0D2835BABAB6}"/>
               </a:ext>
             </a:extLst>
           </p:cNvPr>
@@ -15305,7 +16260,7 @@
           <p:cNvPr id="35" name="">
             <a:extLst xmlns:a="http://schemas.openxmlformats.org/drawingml/2006/main">
               <a:ext uri="{FF2B5EF4-FFF2-40B4-BE49-F238E27FC236}">
-                <a16:creationId xmlns:a16="http://schemas.microsoft.com/office/drawing/2014/main" id="{9B241B95-EEE5-4123-A927-69174DD143B6}"/>
+                <a16:creationId xmlns:a16="http://schemas.microsoft.com/office/drawing/2014/main" id="{DA1C30A2-9717-49FB-BA5A-9B2657D03C29}"/>
               </a:ext>
             </a:extLst>
           </p:cNvPr>
@@ -15362,7 +16317,7 @@
           <p:cNvPr id="36" name="">
             <a:extLst xmlns:a="http://schemas.openxmlformats.org/drawingml/2006/main">
               <a:ext uri="{FF2B5EF4-FFF2-40B4-BE49-F238E27FC236}">
-                <a16:creationId xmlns:a16="http://schemas.microsoft.com/office/drawing/2014/main" id="{1F1C9C64-B3C0-474F-AAA2-678722551CA9}"/>
+                <a16:creationId xmlns:a16="http://schemas.microsoft.com/office/drawing/2014/main" id="{464258E3-73BE-413D-AF78-37835E33955A}"/>
               </a:ext>
             </a:extLst>
           </p:cNvPr>
@@ -15419,7 +16374,7 @@
           <p:cNvPr id="37" name="">
             <a:extLst xmlns:a="http://schemas.openxmlformats.org/drawingml/2006/main">
               <a:ext uri="{FF2B5EF4-FFF2-40B4-BE49-F238E27FC236}">
-                <a16:creationId xmlns:a16="http://schemas.microsoft.com/office/drawing/2014/main" id="{DD81D68E-DC1E-420E-855B-F7DC4844E3C7}"/>
+                <a16:creationId xmlns:a16="http://schemas.microsoft.com/office/drawing/2014/main" id="{5076792C-29F2-4EAA-A644-185DCE4473C1}"/>
               </a:ext>
             </a:extLst>
           </p:cNvPr>
@@ -15450,7 +16405,7 @@
           <p:cNvPr id="38" name="">
             <a:extLst xmlns:a="http://schemas.openxmlformats.org/drawingml/2006/main">
               <a:ext uri="{FF2B5EF4-FFF2-40B4-BE49-F238E27FC236}">
-                <a16:creationId xmlns:a16="http://schemas.microsoft.com/office/drawing/2014/main" id="{F53C7179-9E7A-46BC-B571-5242993681D9}"/>
+                <a16:creationId xmlns:a16="http://schemas.microsoft.com/office/drawing/2014/main" id="{7E791274-BA43-4494-A5FE-2802FCDEC3C8}"/>
               </a:ext>
             </a:extLst>
           </p:cNvPr>
@@ -15507,7 +16462,7 @@
           <p:cNvPr id="39" name="">
             <a:extLst xmlns:a="http://schemas.openxmlformats.org/drawingml/2006/main">
               <a:ext uri="{FF2B5EF4-FFF2-40B4-BE49-F238E27FC236}">
-                <a16:creationId xmlns:a16="http://schemas.microsoft.com/office/drawing/2014/main" id="{270D6BD9-0490-4A10-B2B8-6C52FEE259B3}"/>
+                <a16:creationId xmlns:a16="http://schemas.microsoft.com/office/drawing/2014/main" id="{B8AFBD52-EA66-488A-AC3E-15B04662BFD9}"/>
               </a:ext>
             </a:extLst>
           </p:cNvPr>
@@ -15564,7 +16519,7 @@
           <p:cNvPr id="40" name="">
             <a:extLst xmlns:a="http://schemas.openxmlformats.org/drawingml/2006/main">
               <a:ext uri="{FF2B5EF4-FFF2-40B4-BE49-F238E27FC236}">
-                <a16:creationId xmlns:a16="http://schemas.microsoft.com/office/drawing/2014/main" id="{6063B28E-7CDF-4C62-BAE6-ABCBB008BF97}"/>
+                <a16:creationId xmlns:a16="http://schemas.microsoft.com/office/drawing/2014/main" id="{CE2019BB-5FB2-4DF1-AE01-7A6405B0FC9D}"/>
               </a:ext>
             </a:extLst>
           </p:cNvPr>
@@ -15621,7 +16576,7 @@
           <p:cNvPr id="41" name="">
             <a:extLst xmlns:a="http://schemas.openxmlformats.org/drawingml/2006/main">
               <a:ext uri="{FF2B5EF4-FFF2-40B4-BE49-F238E27FC236}">
-                <a16:creationId xmlns:a16="http://schemas.microsoft.com/office/drawing/2014/main" id="{914CA1F8-566A-4F38-BB52-34FAD4A6CD34}"/>
+                <a16:creationId xmlns:a16="http://schemas.microsoft.com/office/drawing/2014/main" id="{D93D5329-5498-48DB-A26F-17346E023C3B}"/>
               </a:ext>
             </a:extLst>
           </p:cNvPr>
@@ -15678,7 +16633,7 @@
           <p:cNvPr id="42" name="">
             <a:extLst xmlns:a="http://schemas.openxmlformats.org/drawingml/2006/main">
               <a:ext uri="{FF2B5EF4-FFF2-40B4-BE49-F238E27FC236}">
-                <a16:creationId xmlns:a16="http://schemas.microsoft.com/office/drawing/2014/main" id="{BD58A200-F4D1-4DBA-85A9-A97359512241}"/>
+                <a16:creationId xmlns:a16="http://schemas.microsoft.com/office/drawing/2014/main" id="{A66D88C5-5A29-4D9C-95AA-80A7231EA1BD}"/>
               </a:ext>
             </a:extLst>
           </p:cNvPr>
@@ -15735,7 +16690,7 @@
           <p:cNvPr id="43" name="">
             <a:extLst xmlns:a="http://schemas.openxmlformats.org/drawingml/2006/main">
               <a:ext uri="{FF2B5EF4-FFF2-40B4-BE49-F238E27FC236}">
-                <a16:creationId xmlns:a16="http://schemas.microsoft.com/office/drawing/2014/main" id="{32D85CCA-FB7A-4F47-A12C-5E8FB2DA4C6F}"/>
+                <a16:creationId xmlns:a16="http://schemas.microsoft.com/office/drawing/2014/main" id="{8F092D2E-031D-450C-8538-83C5E719629A}"/>
               </a:ext>
             </a:extLst>
           </p:cNvPr>
@@ -15792,7 +16747,7 @@
           <p:cNvPr id="44" name="">
             <a:extLst xmlns:a="http://schemas.openxmlformats.org/drawingml/2006/main">
               <a:ext uri="{FF2B5EF4-FFF2-40B4-BE49-F238E27FC236}">
-                <a16:creationId xmlns:a16="http://schemas.microsoft.com/office/drawing/2014/main" id="{BC0E71CA-3E28-490D-873D-949F3941AF65}"/>
+                <a16:creationId xmlns:a16="http://schemas.microsoft.com/office/drawing/2014/main" id="{988926B3-04DF-4384-B986-C31B64A4E1D0}"/>
               </a:ext>
             </a:extLst>
           </p:cNvPr>
@@ -15847,7 +16802,7 @@
     </p:spTree>
     <p:extLst>
       <p:ext uri="{BB962C8B-B14F-4D97-AF65-F5344CB8AC3E}">
-        <p14:creationId xmlns:p14="http://schemas.microsoft.com/office/powerpoint/2010/main" val="329754571"/>
+        <p14:creationId xmlns:p14="http://schemas.microsoft.com/office/powerpoint/2010/main" val="435242221"/>
       </p:ext>
     </p:extLst>
   </p:cSld>
@@ -15878,7 +16833,7 @@
           <p:cNvPr id="21" name="">
             <a:extLst xmlns:a="http://schemas.openxmlformats.org/drawingml/2006/main">
               <a:ext uri="{FF2B5EF4-FFF2-40B4-BE49-F238E27FC236}">
-                <a16:creationId xmlns:a16="http://schemas.microsoft.com/office/drawing/2014/main" id="{27B76289-B903-4F4B-A567-6E3F3953ACEF}"/>
+                <a16:creationId xmlns:a16="http://schemas.microsoft.com/office/drawing/2014/main" id="{A49A4621-8ED1-48E4-90D5-B0D9AFC87F3A}"/>
               </a:ext>
             </a:extLst>
           </p:cNvPr>
@@ -15935,7 +16890,7 @@
           <p:cNvPr id="2" name="">
             <a:extLst xmlns:a="http://schemas.openxmlformats.org/drawingml/2006/main">
               <a:ext uri="{FF2B5EF4-FFF2-40B4-BE49-F238E27FC236}">
-                <a16:creationId xmlns:a16="http://schemas.microsoft.com/office/drawing/2014/main" id="{8ACA4598-B957-4EBE-BBA9-7E541E78DE24}"/>
+                <a16:creationId xmlns:a16="http://schemas.microsoft.com/office/drawing/2014/main" id="{EA761992-609F-4984-9471-15920062A833}"/>
               </a:ext>
             </a:extLst>
           </p:cNvPr>
@@ -15966,7 +16921,7 @@
           <p:cNvPr id="3" name="">
             <a:extLst xmlns:a="http://schemas.openxmlformats.org/drawingml/2006/main">
               <a:ext uri="{FF2B5EF4-FFF2-40B4-BE49-F238E27FC236}">
-                <a16:creationId xmlns:a16="http://schemas.microsoft.com/office/drawing/2014/main" id="{5088EEDC-CC9D-4CA8-A493-884F1EDE85F5}"/>
+                <a16:creationId xmlns:a16="http://schemas.microsoft.com/office/drawing/2014/main" id="{7269FE83-854B-42AA-BFBA-DFAED5D754E2}"/>
               </a:ext>
             </a:extLst>
           </p:cNvPr>
@@ -16023,7 +16978,7 @@
           <p:cNvPr id="4" name="">
             <a:extLst xmlns:a="http://schemas.openxmlformats.org/drawingml/2006/main">
               <a:ext uri="{FF2B5EF4-FFF2-40B4-BE49-F238E27FC236}">
-                <a16:creationId xmlns:a16="http://schemas.microsoft.com/office/drawing/2014/main" id="{6C5AC7D5-61B0-4186-80B3-2EA8EBCA42EC}"/>
+                <a16:creationId xmlns:a16="http://schemas.microsoft.com/office/drawing/2014/main" id="{778CE48A-203C-403F-9D16-46F9C8CC12D3}"/>
               </a:ext>
             </a:extLst>
           </p:cNvPr>
@@ -16054,7 +17009,7 @@
           <p:cNvPr id="5" name="">
             <a:extLst xmlns:a="http://schemas.openxmlformats.org/drawingml/2006/main">
               <a:ext uri="{FF2B5EF4-FFF2-40B4-BE49-F238E27FC236}">
-                <a16:creationId xmlns:a16="http://schemas.microsoft.com/office/drawing/2014/main" id="{21DE2C61-2119-4812-BC5B-8394E712F95A}"/>
+                <a16:creationId xmlns:a16="http://schemas.microsoft.com/office/drawing/2014/main" id="{DB59533F-7E9E-4A66-95DA-239FC7F97F50}"/>
               </a:ext>
             </a:extLst>
           </p:cNvPr>
@@ -16085,7 +17040,7 @@
           <p:cNvPr id="6" name="">
             <a:extLst xmlns:a="http://schemas.openxmlformats.org/drawingml/2006/main">
               <a:ext uri="{FF2B5EF4-FFF2-40B4-BE49-F238E27FC236}">
-                <a16:creationId xmlns:a16="http://schemas.microsoft.com/office/drawing/2014/main" id="{9706EA53-796A-46E4-A007-94070B6A73CB}"/>
+                <a16:creationId xmlns:a16="http://schemas.microsoft.com/office/drawing/2014/main" id="{FD51EB82-DF3E-425E-A966-A884E27F578A}"/>
               </a:ext>
             </a:extLst>
           </p:cNvPr>
@@ -16482,7 +17437,7 @@
           <p:cNvPr id="7" name="">
             <a:extLst xmlns:a="http://schemas.openxmlformats.org/drawingml/2006/main">
               <a:ext uri="{FF2B5EF4-FFF2-40B4-BE49-F238E27FC236}">
-                <a16:creationId xmlns:a16="http://schemas.microsoft.com/office/drawing/2014/main" id="{45108C15-43EB-4B74-8742-1F98FBF8705E}"/>
+                <a16:creationId xmlns:a16="http://schemas.microsoft.com/office/drawing/2014/main" id="{90679D84-39EB-4B7E-9AE4-A3CDAFAF6E3B}"/>
               </a:ext>
             </a:extLst>
           </p:cNvPr>
@@ -16513,7 +17468,7 @@
           <p:cNvPr id="8" name="">
             <a:extLst xmlns:a="http://schemas.openxmlformats.org/drawingml/2006/main">
               <a:ext uri="{FF2B5EF4-FFF2-40B4-BE49-F238E27FC236}">
-                <a16:creationId xmlns:a16="http://schemas.microsoft.com/office/drawing/2014/main" id="{FF1A37A1-0552-40B1-A0B4-E17D97330ACA}"/>
+                <a16:creationId xmlns:a16="http://schemas.microsoft.com/office/drawing/2014/main" id="{FF2BEAC5-DB92-472E-8D70-256CEAA0B71B}"/>
               </a:ext>
             </a:extLst>
           </p:cNvPr>
@@ -16570,7 +17525,7 @@
           <p:cNvPr id="9" name="">
             <a:extLst xmlns:a="http://schemas.openxmlformats.org/drawingml/2006/main">
               <a:ext uri="{FF2B5EF4-FFF2-40B4-BE49-F238E27FC236}">
-                <a16:creationId xmlns:a16="http://schemas.microsoft.com/office/drawing/2014/main" id="{5D55F45B-0774-4DEF-9DB7-72F67115AAC0}"/>
+                <a16:creationId xmlns:a16="http://schemas.microsoft.com/office/drawing/2014/main" id="{6E748056-47C5-47CF-A01F-5DE6E401B43D}"/>
               </a:ext>
             </a:extLst>
           </p:cNvPr>
@@ -16627,7 +17582,7 @@
           <p:cNvPr id="10" name="">
             <a:extLst xmlns:a="http://schemas.openxmlformats.org/drawingml/2006/main">
               <a:ext uri="{FF2B5EF4-FFF2-40B4-BE49-F238E27FC236}">
-                <a16:creationId xmlns:a16="http://schemas.microsoft.com/office/drawing/2014/main" id="{D1A752C9-AB53-4944-A063-9982667E3E51}"/>
+                <a16:creationId xmlns:a16="http://schemas.microsoft.com/office/drawing/2014/main" id="{93608072-602C-4182-8950-58E3AF48AC7A}"/>
               </a:ext>
             </a:extLst>
           </p:cNvPr>
@@ -16707,7 +17662,7 @@
           <p:cNvPr id="11" name="">
             <a:extLst xmlns:a="http://schemas.openxmlformats.org/drawingml/2006/main">
               <a:ext uri="{FF2B5EF4-FFF2-40B4-BE49-F238E27FC236}">
-                <a16:creationId xmlns:a16="http://schemas.microsoft.com/office/drawing/2014/main" id="{188A4A87-4A48-403D-A5A9-180D2E9408F2}"/>
+                <a16:creationId xmlns:a16="http://schemas.microsoft.com/office/drawing/2014/main" id="{6FE7739A-2EC5-4ECC-80B4-EF06CE3AE5A6}"/>
               </a:ext>
             </a:extLst>
           </p:cNvPr>
@@ -16764,7 +17719,7 @@
           <p:cNvPr id="12" name="">
             <a:extLst xmlns:a="http://schemas.openxmlformats.org/drawingml/2006/main">
               <a:ext uri="{FF2B5EF4-FFF2-40B4-BE49-F238E27FC236}">
-                <a16:creationId xmlns:a16="http://schemas.microsoft.com/office/drawing/2014/main" id="{B84893D8-78D6-4226-B745-C3BAB7875B16}"/>
+                <a16:creationId xmlns:a16="http://schemas.microsoft.com/office/drawing/2014/main" id="{5563B57D-FADF-4FCA-B2E5-0C7378751F52}"/>
               </a:ext>
             </a:extLst>
           </p:cNvPr>
@@ -16821,7 +17776,7 @@
           <p:cNvPr id="13" name="">
             <a:extLst xmlns:a="http://schemas.openxmlformats.org/drawingml/2006/main">
               <a:ext uri="{FF2B5EF4-FFF2-40B4-BE49-F238E27FC236}">
-                <a16:creationId xmlns:a16="http://schemas.microsoft.com/office/drawing/2014/main" id="{BE07BF3A-0534-445E-AAFF-08C8CA00B213}"/>
+                <a16:creationId xmlns:a16="http://schemas.microsoft.com/office/drawing/2014/main" id="{7A88FAA8-43F8-4177-9057-5E0BC6BAF7A9}"/>
               </a:ext>
             </a:extLst>
           </p:cNvPr>
@@ -16878,7 +17833,7 @@
           <p:cNvPr id="14" name="">
             <a:extLst xmlns:a="http://schemas.openxmlformats.org/drawingml/2006/main">
               <a:ext uri="{FF2B5EF4-FFF2-40B4-BE49-F238E27FC236}">
-                <a16:creationId xmlns:a16="http://schemas.microsoft.com/office/drawing/2014/main" id="{8B7122D8-0A48-4FAF-9DD7-D288CBF0224C}"/>
+                <a16:creationId xmlns:a16="http://schemas.microsoft.com/office/drawing/2014/main" id="{E8308AAC-7EBC-4457-B44A-33860DA00BC2}"/>
               </a:ext>
             </a:extLst>
           </p:cNvPr>
@@ -16935,7 +17890,7 @@
           <p:cNvPr id="15" name="">
             <a:extLst xmlns:a="http://schemas.openxmlformats.org/drawingml/2006/main">
               <a:ext uri="{FF2B5EF4-FFF2-40B4-BE49-F238E27FC236}">
-                <a16:creationId xmlns:a16="http://schemas.microsoft.com/office/drawing/2014/main" id="{9741A860-903B-4DB2-AD8B-B55A68A03000}"/>
+                <a16:creationId xmlns:a16="http://schemas.microsoft.com/office/drawing/2014/main" id="{E8A6F431-A708-4917-9515-9B4FA135A56F}"/>
               </a:ext>
             </a:extLst>
           </p:cNvPr>
@@ -16992,7 +17947,7 @@
           <p:cNvPr id="16" name="">
             <a:extLst xmlns:a="http://schemas.openxmlformats.org/drawingml/2006/main">
               <a:ext uri="{FF2B5EF4-FFF2-40B4-BE49-F238E27FC236}">
-                <a16:creationId xmlns:a16="http://schemas.microsoft.com/office/drawing/2014/main" id="{D3E2E8F2-E315-44DE-9D68-640C5A718D69}"/>
+                <a16:creationId xmlns:a16="http://schemas.microsoft.com/office/drawing/2014/main" id="{3D524BA8-EE75-4918-8D75-99BEF3385D50}"/>
               </a:ext>
             </a:extLst>
           </p:cNvPr>
@@ -17072,7 +18027,7 @@
           <p:cNvPr id="17" name="">
             <a:extLst xmlns:a="http://schemas.openxmlformats.org/drawingml/2006/main">
               <a:ext uri="{FF2B5EF4-FFF2-40B4-BE49-F238E27FC236}">
-                <a16:creationId xmlns:a16="http://schemas.microsoft.com/office/drawing/2014/main" id="{C473909A-D486-459E-B4F8-DA31A2984B2D}"/>
+                <a16:creationId xmlns:a16="http://schemas.microsoft.com/office/drawing/2014/main" id="{265A6746-DC95-4234-BA83-61CE50CF8634}"/>
               </a:ext>
             </a:extLst>
           </p:cNvPr>
@@ -17129,7 +18084,7 @@
           <p:cNvPr id="18" name="">
             <a:extLst xmlns:a="http://schemas.openxmlformats.org/drawingml/2006/main">
               <a:ext uri="{FF2B5EF4-FFF2-40B4-BE49-F238E27FC236}">
-                <a16:creationId xmlns:a16="http://schemas.microsoft.com/office/drawing/2014/main" id="{1B82E459-09F8-4D1E-87F1-92158F695CF4}"/>
+                <a16:creationId xmlns:a16="http://schemas.microsoft.com/office/drawing/2014/main" id="{C9E75820-E521-4C46-BF4E-3E0C5D3D455D}"/>
               </a:ext>
             </a:extLst>
           </p:cNvPr>
@@ -17186,7 +18141,7 @@
           <p:cNvPr id="19" name="">
             <a:extLst xmlns:a="http://schemas.openxmlformats.org/drawingml/2006/main">
               <a:ext uri="{FF2B5EF4-FFF2-40B4-BE49-F238E27FC236}">
-                <a16:creationId xmlns:a16="http://schemas.microsoft.com/office/drawing/2014/main" id="{E03CE6E1-2A0F-4D90-9B00-9EC4A9EC0358}"/>
+                <a16:creationId xmlns:a16="http://schemas.microsoft.com/office/drawing/2014/main" id="{D7D4ADD5-8839-4CA8-8F69-79A6DA39C4B5}"/>
               </a:ext>
             </a:extLst>
           </p:cNvPr>
@@ -17217,7 +18172,7 @@
           <p:cNvPr id="20" name="">
             <a:extLst xmlns:a="http://schemas.openxmlformats.org/drawingml/2006/main">
               <a:ext uri="{FF2B5EF4-FFF2-40B4-BE49-F238E27FC236}">
-                <a16:creationId xmlns:a16="http://schemas.microsoft.com/office/drawing/2014/main" id="{BFD06379-026C-41CF-BF36-4894768EFC49}"/>
+                <a16:creationId xmlns:a16="http://schemas.microsoft.com/office/drawing/2014/main" id="{8C0DCFD0-41F7-4873-A0EA-C540E2F66343}"/>
               </a:ext>
             </a:extLst>
           </p:cNvPr>
@@ -17272,7 +18227,7 @@
     </p:spTree>
     <p:extLst>
       <p:ext uri="{BB962C8B-B14F-4D97-AF65-F5344CB8AC3E}">
-        <p14:creationId xmlns:p14="http://schemas.microsoft.com/office/powerpoint/2010/main" val="1432547974"/>
+        <p14:creationId xmlns:p14="http://schemas.microsoft.com/office/powerpoint/2010/main" val="1609781418"/>
       </p:ext>
     </p:extLst>
   </p:cSld>
@@ -17303,7 +18258,7 @@
           <p:cNvPr id="24" name="">
             <a:extLst xmlns:a="http://schemas.openxmlformats.org/drawingml/2006/main">
               <a:ext uri="{FF2B5EF4-FFF2-40B4-BE49-F238E27FC236}">
-                <a16:creationId xmlns:a16="http://schemas.microsoft.com/office/drawing/2014/main" id="{A6EC418C-8ED8-4E12-B4D7-1EAA110E71B8}"/>
+                <a16:creationId xmlns:a16="http://schemas.microsoft.com/office/drawing/2014/main" id="{741D1ACD-B0CF-470D-B65B-D2996246358D}"/>
               </a:ext>
             </a:extLst>
           </p:cNvPr>
@@ -17360,7 +18315,7 @@
           <p:cNvPr id="2" name="">
             <a:extLst xmlns:a="http://schemas.openxmlformats.org/drawingml/2006/main">
               <a:ext uri="{FF2B5EF4-FFF2-40B4-BE49-F238E27FC236}">
-                <a16:creationId xmlns:a16="http://schemas.microsoft.com/office/drawing/2014/main" id="{A8E7C870-A045-4BE0-A86A-A040ED5CD2E1}"/>
+                <a16:creationId xmlns:a16="http://schemas.microsoft.com/office/drawing/2014/main" id="{3CF6B04C-3551-4784-8EFC-688EAD0BAD87}"/>
               </a:ext>
             </a:extLst>
           </p:cNvPr>
@@ -17391,7 +18346,7 @@
           <p:cNvPr id="3" name="">
             <a:extLst xmlns:a="http://schemas.openxmlformats.org/drawingml/2006/main">
               <a:ext uri="{FF2B5EF4-FFF2-40B4-BE49-F238E27FC236}">
-                <a16:creationId xmlns:a16="http://schemas.microsoft.com/office/drawing/2014/main" id="{50C97D8B-8680-4D10-BBE3-B8B350BF7FB0}"/>
+                <a16:creationId xmlns:a16="http://schemas.microsoft.com/office/drawing/2014/main" id="{9A705BF9-A8CA-429A-BF36-A3BE2419D14F}"/>
               </a:ext>
             </a:extLst>
           </p:cNvPr>
@@ -17448,7 +18403,7 @@
           <p:cNvPr id="4" name="">
             <a:extLst xmlns:a="http://schemas.openxmlformats.org/drawingml/2006/main">
               <a:ext uri="{FF2B5EF4-FFF2-40B4-BE49-F238E27FC236}">
-                <a16:creationId xmlns:a16="http://schemas.microsoft.com/office/drawing/2014/main" id="{28B0E8D0-0630-43F9-9FCC-9C8E2038F45E}"/>
+                <a16:creationId xmlns:a16="http://schemas.microsoft.com/office/drawing/2014/main" id="{3476FE5C-3DC8-4A6D-B457-1CCDCBCA9B20}"/>
               </a:ext>
             </a:extLst>
           </p:cNvPr>
@@ -17505,7 +18460,7 @@
           <p:cNvPr id="5" name="">
             <a:extLst xmlns:a="http://schemas.openxmlformats.org/drawingml/2006/main">
               <a:ext uri="{FF2B5EF4-FFF2-40B4-BE49-F238E27FC236}">
-                <a16:creationId xmlns:a16="http://schemas.microsoft.com/office/drawing/2014/main" id="{0FEAEE0E-FFF6-4DF1-A5EA-1BD80F1DBA52}"/>
+                <a16:creationId xmlns:a16="http://schemas.microsoft.com/office/drawing/2014/main" id="{F4F848F1-0962-444F-9FB1-855E93D772DA}"/>
               </a:ext>
             </a:extLst>
           </p:cNvPr>
@@ -17562,7 +18517,7 @@
           <p:cNvPr id="6" name="">
             <a:extLst xmlns:a="http://schemas.openxmlformats.org/drawingml/2006/main">
               <a:ext uri="{FF2B5EF4-FFF2-40B4-BE49-F238E27FC236}">
-                <a16:creationId xmlns:a16="http://schemas.microsoft.com/office/drawing/2014/main" id="{491F092D-9802-4231-93AF-89F0EDCE4FB9}"/>
+                <a16:creationId xmlns:a16="http://schemas.microsoft.com/office/drawing/2014/main" id="{1FF11A5B-3F30-4285-84F3-DF57F39ADBE3}"/>
               </a:ext>
             </a:extLst>
           </p:cNvPr>
@@ -17595,7 +18550,7 @@
           <p:cNvPr id="7" name="">
             <a:extLst xmlns:a="http://schemas.openxmlformats.org/drawingml/2006/main">
               <a:ext uri="{FF2B5EF4-FFF2-40B4-BE49-F238E27FC236}">
-                <a16:creationId xmlns:a16="http://schemas.microsoft.com/office/drawing/2014/main" id="{BF92C69A-FC79-4798-BECE-B9957BF4038D}"/>
+                <a16:creationId xmlns:a16="http://schemas.microsoft.com/office/drawing/2014/main" id="{2EEDE4C4-C3C8-4595-BD24-CCB84E638634}"/>
               </a:ext>
             </a:extLst>
           </p:cNvPr>
@@ -17675,7 +18630,7 @@
           <p:cNvPr id="8" name="">
             <a:extLst xmlns:a="http://schemas.openxmlformats.org/drawingml/2006/main">
               <a:ext uri="{FF2B5EF4-FFF2-40B4-BE49-F238E27FC236}">
-                <a16:creationId xmlns:a16="http://schemas.microsoft.com/office/drawing/2014/main" id="{EF476DE9-5E6B-4D26-8474-7D9C86EABD53}"/>
+                <a16:creationId xmlns:a16="http://schemas.microsoft.com/office/drawing/2014/main" id="{0E8F35BD-4C7B-4150-BAC6-4A634B2932F6}"/>
               </a:ext>
             </a:extLst>
           </p:cNvPr>
@@ -17778,7 +18733,7 @@
           <p:cNvPr id="9" name="">
             <a:extLst xmlns:a="http://schemas.openxmlformats.org/drawingml/2006/main">
               <a:ext uri="{FF2B5EF4-FFF2-40B4-BE49-F238E27FC236}">
-                <a16:creationId xmlns:a16="http://schemas.microsoft.com/office/drawing/2014/main" id="{31C8B5EF-3562-4158-975A-43341B7F8A42}"/>
+                <a16:creationId xmlns:a16="http://schemas.microsoft.com/office/drawing/2014/main" id="{56D4CFC7-6E8B-4B94-B101-D5BF4DCA27A1}"/>
               </a:ext>
             </a:extLst>
           </p:cNvPr>
@@ -17811,7 +18766,7 @@
           <p:cNvPr id="10" name="">
             <a:extLst xmlns:a="http://schemas.openxmlformats.org/drawingml/2006/main">
               <a:ext uri="{FF2B5EF4-FFF2-40B4-BE49-F238E27FC236}">
-                <a16:creationId xmlns:a16="http://schemas.microsoft.com/office/drawing/2014/main" id="{C6564FEE-BED3-43F7-9642-91F9ACA9A89D}"/>
+                <a16:creationId xmlns:a16="http://schemas.microsoft.com/office/drawing/2014/main" id="{CE0B82AE-0A89-4E30-AB02-CA0532B6FC5E}"/>
               </a:ext>
             </a:extLst>
           </p:cNvPr>
@@ -17891,7 +18846,7 @@
           <p:cNvPr id="11" name="">
             <a:extLst xmlns:a="http://schemas.openxmlformats.org/drawingml/2006/main">
               <a:ext uri="{FF2B5EF4-FFF2-40B4-BE49-F238E27FC236}">
-                <a16:creationId xmlns:a16="http://schemas.microsoft.com/office/drawing/2014/main" id="{58A27429-0834-4961-AD70-15B1DFF2ECE8}"/>
+                <a16:creationId xmlns:a16="http://schemas.microsoft.com/office/drawing/2014/main" id="{B174109B-2526-4567-B082-11B479186E4F}"/>
               </a:ext>
             </a:extLst>
           </p:cNvPr>
@@ -17994,7 +18949,7 @@
           <p:cNvPr id="12" name="">
             <a:extLst xmlns:a="http://schemas.openxmlformats.org/drawingml/2006/main">
               <a:ext uri="{FF2B5EF4-FFF2-40B4-BE49-F238E27FC236}">
-                <a16:creationId xmlns:a16="http://schemas.microsoft.com/office/drawing/2014/main" id="{9E926987-84F7-4AEB-B661-C13DD46A2E26}"/>
+                <a16:creationId xmlns:a16="http://schemas.microsoft.com/office/drawing/2014/main" id="{9FB325EC-8D1B-4F97-8867-24108A403E02}"/>
               </a:ext>
             </a:extLst>
           </p:cNvPr>
@@ -18027,7 +18982,7 @@
           <p:cNvPr id="13" name="">
             <a:extLst xmlns:a="http://schemas.openxmlformats.org/drawingml/2006/main">
               <a:ext uri="{FF2B5EF4-FFF2-40B4-BE49-F238E27FC236}">
-                <a16:creationId xmlns:a16="http://schemas.microsoft.com/office/drawing/2014/main" id="{9EEF0065-34AE-4957-AF06-CC471156C1D8}"/>
+                <a16:creationId xmlns:a16="http://schemas.microsoft.com/office/drawing/2014/main" id="{6C5B7654-B440-41BE-AA13-BC4E7508D71C}"/>
               </a:ext>
             </a:extLst>
           </p:cNvPr>
@@ -18107,7 +19062,7 @@
           <p:cNvPr id="14" name="">
             <a:extLst xmlns:a="http://schemas.openxmlformats.org/drawingml/2006/main">
               <a:ext uri="{FF2B5EF4-FFF2-40B4-BE49-F238E27FC236}">
-                <a16:creationId xmlns:a16="http://schemas.microsoft.com/office/drawing/2014/main" id="{4D33A3BE-5841-4C6C-9084-679B5E40CF34}"/>
+                <a16:creationId xmlns:a16="http://schemas.microsoft.com/office/drawing/2014/main" id="{0418F7C0-3EAA-4025-83D2-2C7511A3CD3A}"/>
               </a:ext>
             </a:extLst>
           </p:cNvPr>
@@ -18210,7 +19165,7 @@
           <p:cNvPr id="15" name="">
             <a:extLst xmlns:a="http://schemas.openxmlformats.org/drawingml/2006/main">
               <a:ext uri="{FF2B5EF4-FFF2-40B4-BE49-F238E27FC236}">
-                <a16:creationId xmlns:a16="http://schemas.microsoft.com/office/drawing/2014/main" id="{6C75C417-A957-4344-84D4-8BDC49359EA4}"/>
+                <a16:creationId xmlns:a16="http://schemas.microsoft.com/office/drawing/2014/main" id="{808F9CCF-9272-4BBD-8D88-B2F661B2EF1C}"/>
               </a:ext>
             </a:extLst>
           </p:cNvPr>
@@ -18243,7 +19198,7 @@
           <p:cNvPr id="16" name="">
             <a:extLst xmlns:a="http://schemas.openxmlformats.org/drawingml/2006/main">
               <a:ext uri="{FF2B5EF4-FFF2-40B4-BE49-F238E27FC236}">
-                <a16:creationId xmlns:a16="http://schemas.microsoft.com/office/drawing/2014/main" id="{F245AEA8-AC26-4A3C-B505-7E52C463A5B7}"/>
+                <a16:creationId xmlns:a16="http://schemas.microsoft.com/office/drawing/2014/main" id="{06CE2C1C-43B2-4849-A6E8-E76C96799A02}"/>
               </a:ext>
             </a:extLst>
           </p:cNvPr>
@@ -18323,7 +19278,7 @@
           <p:cNvPr id="17" name="">
             <a:extLst xmlns:a="http://schemas.openxmlformats.org/drawingml/2006/main">
               <a:ext uri="{FF2B5EF4-FFF2-40B4-BE49-F238E27FC236}">
-                <a16:creationId xmlns:a16="http://schemas.microsoft.com/office/drawing/2014/main" id="{806882B1-F9C3-464E-9641-F42705CDA5EE}"/>
+                <a16:creationId xmlns:a16="http://schemas.microsoft.com/office/drawing/2014/main" id="{3A45FD8E-E07F-40B7-B66B-09F9C7233856}"/>
               </a:ext>
             </a:extLst>
           </p:cNvPr>
@@ -18504,7 +19459,7 @@
           <p:cNvPr id="21" name="">
             <a:extLst xmlns:a="http://schemas.openxmlformats.org/drawingml/2006/main">
               <a:ext uri="{FF2B5EF4-FFF2-40B4-BE49-F238E27FC236}">
-                <a16:creationId xmlns:a16="http://schemas.microsoft.com/office/drawing/2014/main" id="{91941C98-32FF-4297-8E15-4502D50CE1C3}"/>
+                <a16:creationId xmlns:a16="http://schemas.microsoft.com/office/drawing/2014/main" id="{F05EDBD7-8E7A-4D28-AAAF-278D7430E7D8}"/>
               </a:ext>
             </a:extLst>
           </p:cNvPr>
@@ -18561,7 +19516,7 @@
           <p:cNvPr id="22" name="">
             <a:extLst xmlns:a="http://schemas.openxmlformats.org/drawingml/2006/main">
               <a:ext uri="{FF2B5EF4-FFF2-40B4-BE49-F238E27FC236}">
-                <a16:creationId xmlns:a16="http://schemas.microsoft.com/office/drawing/2014/main" id="{ED28A5AE-96BB-48A8-B09C-FD58AAC321A7}"/>
+                <a16:creationId xmlns:a16="http://schemas.microsoft.com/office/drawing/2014/main" id="{520810B1-89A4-4382-9713-905DAD7AF720}"/>
               </a:ext>
             </a:extLst>
           </p:cNvPr>
@@ -18592,7 +19547,7 @@
           <p:cNvPr id="23" name="">
             <a:extLst xmlns:a="http://schemas.openxmlformats.org/drawingml/2006/main">
               <a:ext uri="{FF2B5EF4-FFF2-40B4-BE49-F238E27FC236}">
-                <a16:creationId xmlns:a16="http://schemas.microsoft.com/office/drawing/2014/main" id="{8A9A22DE-5999-4D9C-89E1-1CD5087106BB}"/>
+                <a16:creationId xmlns:a16="http://schemas.microsoft.com/office/drawing/2014/main" id="{722C275E-30CE-4816-ACAF-9818AFB28204}"/>
               </a:ext>
             </a:extLst>
           </p:cNvPr>
@@ -18647,7 +19602,7 @@
     </p:spTree>
     <p:extLst>
       <p:ext uri="{BB962C8B-B14F-4D97-AF65-F5344CB8AC3E}">
-        <p14:creationId xmlns:p14="http://schemas.microsoft.com/office/powerpoint/2010/main" val="418379964"/>
+        <p14:creationId xmlns:p14="http://schemas.microsoft.com/office/powerpoint/2010/main" val="1571189558"/>
       </p:ext>
     </p:extLst>
   </p:cSld>
@@ -18678,7 +19633,7 @@
           <p:cNvPr id="32" name="">
             <a:extLst xmlns:a="http://schemas.openxmlformats.org/drawingml/2006/main">
               <a:ext uri="{FF2B5EF4-FFF2-40B4-BE49-F238E27FC236}">
-                <a16:creationId xmlns:a16="http://schemas.microsoft.com/office/drawing/2014/main" id="{BC2640CE-7582-452E-A88F-72E361070319}"/>
+                <a16:creationId xmlns:a16="http://schemas.microsoft.com/office/drawing/2014/main" id="{B27BA4D8-54C0-4465-976E-55527F404C49}"/>
               </a:ext>
             </a:extLst>
           </p:cNvPr>
@@ -18758,7 +19713,7 @@
           <p:cNvPr id="2" name="">
             <a:extLst xmlns:a="http://schemas.openxmlformats.org/drawingml/2006/main">
               <a:ext uri="{FF2B5EF4-FFF2-40B4-BE49-F238E27FC236}">
-                <a16:creationId xmlns:a16="http://schemas.microsoft.com/office/drawing/2014/main" id="{5AF272D1-5088-40DD-9C53-08A18414C982}"/>
+                <a16:creationId xmlns:a16="http://schemas.microsoft.com/office/drawing/2014/main" id="{84D5CC16-A465-4656-8F6D-07C6B194DC89}"/>
               </a:ext>
             </a:extLst>
           </p:cNvPr>
@@ -18789,7 +19744,7 @@
           <p:cNvPr id="3" name="">
             <a:extLst xmlns:a="http://schemas.openxmlformats.org/drawingml/2006/main">
               <a:ext uri="{FF2B5EF4-FFF2-40B4-BE49-F238E27FC236}">
-                <a16:creationId xmlns:a16="http://schemas.microsoft.com/office/drawing/2014/main" id="{8BC8ED2D-9F15-4B89-A8DA-3F258BD770A2}"/>
+                <a16:creationId xmlns:a16="http://schemas.microsoft.com/office/drawing/2014/main" id="{52173532-177B-4551-A257-B1CE140FE4B5}"/>
               </a:ext>
             </a:extLst>
           </p:cNvPr>
@@ -18846,7 +19801,7 @@
           <p:cNvPr id="4" name="">
             <a:extLst xmlns:a="http://schemas.openxmlformats.org/drawingml/2006/main">
               <a:ext uri="{FF2B5EF4-FFF2-40B4-BE49-F238E27FC236}">
-                <a16:creationId xmlns:a16="http://schemas.microsoft.com/office/drawing/2014/main" id="{A1537015-EC26-4D9B-A88F-C7700658DA00}"/>
+                <a16:creationId xmlns:a16="http://schemas.microsoft.com/office/drawing/2014/main" id="{2585A9B3-2D37-4E2C-A0F6-AED30779C08E}"/>
               </a:ext>
             </a:extLst>
           </p:cNvPr>
@@ -18903,7 +19858,7 @@
           <p:cNvPr id="5" name="">
             <a:extLst xmlns:a="http://schemas.openxmlformats.org/drawingml/2006/main">
               <a:ext uri="{FF2B5EF4-FFF2-40B4-BE49-F238E27FC236}">
-                <a16:creationId xmlns:a16="http://schemas.microsoft.com/office/drawing/2014/main" id="{14F41B56-185C-4FBB-BBCC-96A9FD6C1382}"/>
+                <a16:creationId xmlns:a16="http://schemas.microsoft.com/office/drawing/2014/main" id="{CA4415A5-9361-4EFC-9DC0-0F8CE04673F0}"/>
               </a:ext>
             </a:extLst>
           </p:cNvPr>
@@ -18960,7 +19915,7 @@
           <p:cNvPr id="6" name="">
             <a:extLst xmlns:a="http://schemas.openxmlformats.org/drawingml/2006/main">
               <a:ext uri="{FF2B5EF4-FFF2-40B4-BE49-F238E27FC236}">
-                <a16:creationId xmlns:a16="http://schemas.microsoft.com/office/drawing/2014/main" id="{A2E34272-BB6B-4988-B1AC-40C34D2A3AFD}"/>
+                <a16:creationId xmlns:a16="http://schemas.microsoft.com/office/drawing/2014/main" id="{4D6BDDBD-F4C9-466E-AFAE-CABF2294BB2A}"/>
               </a:ext>
             </a:extLst>
           </p:cNvPr>
@@ -19017,7 +19972,7 @@
           <p:cNvPr id="7" name="">
             <a:extLst xmlns:a="http://schemas.openxmlformats.org/drawingml/2006/main">
               <a:ext uri="{FF2B5EF4-FFF2-40B4-BE49-F238E27FC236}">
-                <a16:creationId xmlns:a16="http://schemas.microsoft.com/office/drawing/2014/main" id="{1E681936-8FAD-45C5-A5D7-28BC7069D138}"/>
+                <a16:creationId xmlns:a16="http://schemas.microsoft.com/office/drawing/2014/main" id="{0F9CC82B-A56B-49FF-9263-F99686683F32}"/>
               </a:ext>
             </a:extLst>
           </p:cNvPr>
@@ -19074,7 +20029,7 @@
           <p:cNvPr id="8" name="">
             <a:extLst xmlns:a="http://schemas.openxmlformats.org/drawingml/2006/main">
               <a:ext uri="{FF2B5EF4-FFF2-40B4-BE49-F238E27FC236}">
-                <a16:creationId xmlns:a16="http://schemas.microsoft.com/office/drawing/2014/main" id="{8775E16C-A897-4EF5-A030-4FCC8E1262C7}"/>
+                <a16:creationId xmlns:a16="http://schemas.microsoft.com/office/drawing/2014/main" id="{63B7243C-628D-479E-A3F5-2D3598A4096A}"/>
               </a:ext>
             </a:extLst>
           </p:cNvPr>
@@ -19131,7 +20086,7 @@
           <p:cNvPr id="9" name="">
             <a:extLst xmlns:a="http://schemas.openxmlformats.org/drawingml/2006/main">
               <a:ext uri="{FF2B5EF4-FFF2-40B4-BE49-F238E27FC236}">
-                <a16:creationId xmlns:a16="http://schemas.microsoft.com/office/drawing/2014/main" id="{4DBB2458-BCD5-4F03-84B4-9018DE954573}"/>
+                <a16:creationId xmlns:a16="http://schemas.microsoft.com/office/drawing/2014/main" id="{5690354D-0A0E-4470-AAEB-AEB1CEC2F037}"/>
               </a:ext>
             </a:extLst>
           </p:cNvPr>
@@ -19188,7 +20143,7 @@
           <p:cNvPr id="10" name="">
             <a:extLst xmlns:a="http://schemas.openxmlformats.org/drawingml/2006/main">
               <a:ext uri="{FF2B5EF4-FFF2-40B4-BE49-F238E27FC236}">
-                <a16:creationId xmlns:a16="http://schemas.microsoft.com/office/drawing/2014/main" id="{59885F92-D187-4123-99AF-31C70E79015D}"/>
+                <a16:creationId xmlns:a16="http://schemas.microsoft.com/office/drawing/2014/main" id="{D64A4B95-3951-41FA-8A95-D2A6641EAE90}"/>
               </a:ext>
             </a:extLst>
           </p:cNvPr>
@@ -19219,7 +20174,7 @@
           <p:cNvPr id="11" name="">
             <a:extLst xmlns:a="http://schemas.openxmlformats.org/drawingml/2006/main">
               <a:ext uri="{FF2B5EF4-FFF2-40B4-BE49-F238E27FC236}">
-                <a16:creationId xmlns:a16="http://schemas.microsoft.com/office/drawing/2014/main" id="{1960D365-090B-400D-AF0F-C80F015DB5EA}"/>
+                <a16:creationId xmlns:a16="http://schemas.microsoft.com/office/drawing/2014/main" id="{46960C84-1725-4610-8495-DE0FDE42C57A}"/>
               </a:ext>
             </a:extLst>
           </p:cNvPr>
@@ -19276,7 +20231,7 @@
           <p:cNvPr id="12" name="">
             <a:extLst xmlns:a="http://schemas.openxmlformats.org/drawingml/2006/main">
               <a:ext uri="{FF2B5EF4-FFF2-40B4-BE49-F238E27FC236}">
-                <a16:creationId xmlns:a16="http://schemas.microsoft.com/office/drawing/2014/main" id="{34B535CC-825A-467C-8A69-802E7D9C6925}"/>
+                <a16:creationId xmlns:a16="http://schemas.microsoft.com/office/drawing/2014/main" id="{8C427FCC-1E98-4B9C-979C-338DECADDCF8}"/>
               </a:ext>
             </a:extLst>
           </p:cNvPr>
@@ -19333,7 +20288,7 @@
           <p:cNvPr id="13" name="">
             <a:extLst xmlns:a="http://schemas.openxmlformats.org/drawingml/2006/main">
               <a:ext uri="{FF2B5EF4-FFF2-40B4-BE49-F238E27FC236}">
-                <a16:creationId xmlns:a16="http://schemas.microsoft.com/office/drawing/2014/main" id="{BB8CAFAF-0974-4D7A-BAF0-42B45D995DFE}"/>
+                <a16:creationId xmlns:a16="http://schemas.microsoft.com/office/drawing/2014/main" id="{F4A5B854-087D-4D91-815C-57E1B7CBACA4}"/>
               </a:ext>
             </a:extLst>
           </p:cNvPr>
@@ -19390,7 +20345,7 @@
           <p:cNvPr id="14" name="">
             <a:extLst xmlns:a="http://schemas.openxmlformats.org/drawingml/2006/main">
               <a:ext uri="{FF2B5EF4-FFF2-40B4-BE49-F238E27FC236}">
-                <a16:creationId xmlns:a16="http://schemas.microsoft.com/office/drawing/2014/main" id="{2D8E4715-7F2D-45EA-A15E-CAD126A963B8}"/>
+                <a16:creationId xmlns:a16="http://schemas.microsoft.com/office/drawing/2014/main" id="{CC8229A1-E882-46F3-9B06-CD8A01ECF3AE}"/>
               </a:ext>
             </a:extLst>
           </p:cNvPr>
@@ -19447,7 +20402,7 @@
           <p:cNvPr id="15" name="">
             <a:extLst xmlns:a="http://schemas.openxmlformats.org/drawingml/2006/main">
               <a:ext uri="{FF2B5EF4-FFF2-40B4-BE49-F238E27FC236}">
-                <a16:creationId xmlns:a16="http://schemas.microsoft.com/office/drawing/2014/main" id="{29EC5E00-AFBA-442D-ACE9-E1C069E08A14}"/>
+                <a16:creationId xmlns:a16="http://schemas.microsoft.com/office/drawing/2014/main" id="{878B08FC-58F7-4A77-819C-DE01EC531532}"/>
               </a:ext>
             </a:extLst>
           </p:cNvPr>
@@ -19504,7 +20459,7 @@
           <p:cNvPr id="16" name="">
             <a:extLst xmlns:a="http://schemas.openxmlformats.org/drawingml/2006/main">
               <a:ext uri="{FF2B5EF4-FFF2-40B4-BE49-F238E27FC236}">
-                <a16:creationId xmlns:a16="http://schemas.microsoft.com/office/drawing/2014/main" id="{77F9E7EA-D1A4-411B-8644-EA25C04D7157}"/>
+                <a16:creationId xmlns:a16="http://schemas.microsoft.com/office/drawing/2014/main" id="{10DC2530-D6AC-49A4-9F27-AF0963C0E726}"/>
               </a:ext>
             </a:extLst>
           </p:cNvPr>
@@ -19561,7 +20516,7 @@
           <p:cNvPr id="17" name="">
             <a:extLst xmlns:a="http://schemas.openxmlformats.org/drawingml/2006/main">
               <a:ext uri="{FF2B5EF4-FFF2-40B4-BE49-F238E27FC236}">
-                <a16:creationId xmlns:a16="http://schemas.microsoft.com/office/drawing/2014/main" id="{3CD2219B-A32D-44A8-9416-8E1E96EF0593}"/>
+                <a16:creationId xmlns:a16="http://schemas.microsoft.com/office/drawing/2014/main" id="{C5FCBBA6-8E5C-43AC-9B78-B71F05ABA793}"/>
               </a:ext>
             </a:extLst>
           </p:cNvPr>
@@ -19618,7 +20573,7 @@
           <p:cNvPr id="18" name="">
             <a:extLst xmlns:a="http://schemas.openxmlformats.org/drawingml/2006/main">
               <a:ext uri="{FF2B5EF4-FFF2-40B4-BE49-F238E27FC236}">
-                <a16:creationId xmlns:a16="http://schemas.microsoft.com/office/drawing/2014/main" id="{DF992577-1AB0-4C76-AB93-7F8CC723F255}"/>
+                <a16:creationId xmlns:a16="http://schemas.microsoft.com/office/drawing/2014/main" id="{B939E58D-3468-4CF7-8525-C20C033CF388}"/>
               </a:ext>
             </a:extLst>
           </p:cNvPr>
@@ -19675,7 +20630,7 @@
           <p:cNvPr id="19" name="">
             <a:extLst xmlns:a="http://schemas.openxmlformats.org/drawingml/2006/main">
               <a:ext uri="{FF2B5EF4-FFF2-40B4-BE49-F238E27FC236}">
-                <a16:creationId xmlns:a16="http://schemas.microsoft.com/office/drawing/2014/main" id="{14ECC1A5-1B8C-4847-AB2F-C837F0822A8A}"/>
+                <a16:creationId xmlns:a16="http://schemas.microsoft.com/office/drawing/2014/main" id="{5EAE91AD-083A-492C-AA40-5BF4E01C90AC}"/>
               </a:ext>
             </a:extLst>
           </p:cNvPr>
@@ -19732,7 +20687,7 @@
           <p:cNvPr id="20" name="">
             <a:extLst xmlns:a="http://schemas.openxmlformats.org/drawingml/2006/main">
               <a:ext uri="{FF2B5EF4-FFF2-40B4-BE49-F238E27FC236}">
-                <a16:creationId xmlns:a16="http://schemas.microsoft.com/office/drawing/2014/main" id="{6EB2F579-AD6B-47D9-B67B-30C9FF1259CD}"/>
+                <a16:creationId xmlns:a16="http://schemas.microsoft.com/office/drawing/2014/main" id="{7DA3390B-97B8-4DEA-85A5-01751C621E62}"/>
               </a:ext>
             </a:extLst>
           </p:cNvPr>
@@ -19789,7 +20744,7 @@
           <p:cNvPr id="21" name="">
             <a:extLst xmlns:a="http://schemas.openxmlformats.org/drawingml/2006/main">
               <a:ext uri="{FF2B5EF4-FFF2-40B4-BE49-F238E27FC236}">
-                <a16:creationId xmlns:a16="http://schemas.microsoft.com/office/drawing/2014/main" id="{437F569C-BDD7-408B-968F-FA3C7736E1DE}"/>
+                <a16:creationId xmlns:a16="http://schemas.microsoft.com/office/drawing/2014/main" id="{3D4693C6-A4E6-42FE-BA24-E10E754608AA}"/>
               </a:ext>
             </a:extLst>
           </p:cNvPr>
@@ -19846,7 +20801,7 @@
           <p:cNvPr id="22" name="">
             <a:extLst xmlns:a="http://schemas.openxmlformats.org/drawingml/2006/main">
               <a:ext uri="{FF2B5EF4-FFF2-40B4-BE49-F238E27FC236}">
-                <a16:creationId xmlns:a16="http://schemas.microsoft.com/office/drawing/2014/main" id="{8FC9C781-2B23-4E9D-8905-C15E871BEA57}"/>
+                <a16:creationId xmlns:a16="http://schemas.microsoft.com/office/drawing/2014/main" id="{3B1939CF-EE54-40C3-BDA4-A78F2DDE86AB}"/>
               </a:ext>
             </a:extLst>
           </p:cNvPr>
@@ -19903,7 +20858,7 @@
           <p:cNvPr id="23" name="">
             <a:extLst xmlns:a="http://schemas.openxmlformats.org/drawingml/2006/main">
               <a:ext uri="{FF2B5EF4-FFF2-40B4-BE49-F238E27FC236}">
-                <a16:creationId xmlns:a16="http://schemas.microsoft.com/office/drawing/2014/main" id="{D7ED5381-4E1E-40BC-8B18-F95FF776ADEC}"/>
+                <a16:creationId xmlns:a16="http://schemas.microsoft.com/office/drawing/2014/main" id="{6211012A-5E1D-4905-BFCC-F59FF8043DEA}"/>
               </a:ext>
             </a:extLst>
           </p:cNvPr>
@@ -19960,7 +20915,7 @@
           <p:cNvPr id="24" name="">
             <a:extLst xmlns:a="http://schemas.openxmlformats.org/drawingml/2006/main">
               <a:ext uri="{FF2B5EF4-FFF2-40B4-BE49-F238E27FC236}">
-                <a16:creationId xmlns:a16="http://schemas.microsoft.com/office/drawing/2014/main" id="{9D126AD4-4808-47CE-AA2D-91CED9DCA4B4}"/>
+                <a16:creationId xmlns:a16="http://schemas.microsoft.com/office/drawing/2014/main" id="{5A8D5988-ED49-4153-87CB-16499A4DB6E6}"/>
               </a:ext>
             </a:extLst>
           </p:cNvPr>
@@ -20017,7 +20972,7 @@
           <p:cNvPr id="25" name="">
             <a:extLst xmlns:a="http://schemas.openxmlformats.org/drawingml/2006/main">
               <a:ext uri="{FF2B5EF4-FFF2-40B4-BE49-F238E27FC236}">
-                <a16:creationId xmlns:a16="http://schemas.microsoft.com/office/drawing/2014/main" id="{292158BC-2F97-46DC-8F93-C69C2B40BA26}"/>
+                <a16:creationId xmlns:a16="http://schemas.microsoft.com/office/drawing/2014/main" id="{B9803AC9-88FC-4A7E-83AA-97F2745ECE9A}"/>
               </a:ext>
             </a:extLst>
           </p:cNvPr>
@@ -20074,7 +21029,7 @@
           <p:cNvPr id="26" name="">
             <a:extLst xmlns:a="http://schemas.openxmlformats.org/drawingml/2006/main">
               <a:ext uri="{FF2B5EF4-FFF2-40B4-BE49-F238E27FC236}">
-                <a16:creationId xmlns:a16="http://schemas.microsoft.com/office/drawing/2014/main" id="{24C3FF52-0CF3-4E8C-BC78-17B45226DC38}"/>
+                <a16:creationId xmlns:a16="http://schemas.microsoft.com/office/drawing/2014/main" id="{557A1971-F689-429D-A9B6-631AD598DF21}"/>
               </a:ext>
             </a:extLst>
           </p:cNvPr>
@@ -20131,7 +21086,7 @@
           <p:cNvPr id="27" name="">
             <a:extLst xmlns:a="http://schemas.openxmlformats.org/drawingml/2006/main">
               <a:ext uri="{FF2B5EF4-FFF2-40B4-BE49-F238E27FC236}">
-                <a16:creationId xmlns:a16="http://schemas.microsoft.com/office/drawing/2014/main" id="{DCC4673A-9075-4FAB-9E4F-06992A01B2DE}"/>
+                <a16:creationId xmlns:a16="http://schemas.microsoft.com/office/drawing/2014/main" id="{A0882576-6D68-49F8-B51F-C37A12851B7C}"/>
               </a:ext>
             </a:extLst>
           </p:cNvPr>
@@ -20188,7 +21143,7 @@
           <p:cNvPr id="28" name="">
             <a:extLst xmlns:a="http://schemas.openxmlformats.org/drawingml/2006/main">
               <a:ext uri="{FF2B5EF4-FFF2-40B4-BE49-F238E27FC236}">
-                <a16:creationId xmlns:a16="http://schemas.microsoft.com/office/drawing/2014/main" id="{560ACAEA-8616-4EF6-8106-963723EA8FF0}"/>
+                <a16:creationId xmlns:a16="http://schemas.microsoft.com/office/drawing/2014/main" id="{CA0E4040-4F8A-4B68-8F8E-E8037D2E825B}"/>
               </a:ext>
             </a:extLst>
           </p:cNvPr>
@@ -20245,7 +21200,7 @@
           <p:cNvPr id="29" name="">
             <a:extLst xmlns:a="http://schemas.openxmlformats.org/drawingml/2006/main">
               <a:ext uri="{FF2B5EF4-FFF2-40B4-BE49-F238E27FC236}">
-                <a16:creationId xmlns:a16="http://schemas.microsoft.com/office/drawing/2014/main" id="{CC52AA7E-244E-4F27-8110-2E714323584D}"/>
+                <a16:creationId xmlns:a16="http://schemas.microsoft.com/office/drawing/2014/main" id="{CC1BA984-FE7E-4B20-B88D-4E076B7EED7F}"/>
               </a:ext>
             </a:extLst>
           </p:cNvPr>
@@ -20276,7 +21231,7 @@
           <p:cNvPr id="30" name="">
             <a:extLst xmlns:a="http://schemas.openxmlformats.org/drawingml/2006/main">
               <a:ext uri="{FF2B5EF4-FFF2-40B4-BE49-F238E27FC236}">
-                <a16:creationId xmlns:a16="http://schemas.microsoft.com/office/drawing/2014/main" id="{78CC3939-2516-475F-A0E2-F57156A4A7F1}"/>
+                <a16:creationId xmlns:a16="http://schemas.microsoft.com/office/drawing/2014/main" id="{D1DB6EBE-8744-42CC-B610-E3B79867C026}"/>
               </a:ext>
             </a:extLst>
           </p:cNvPr>
@@ -20333,7 +21288,7 @@
           <p:cNvPr id="31" name="">
             <a:extLst xmlns:a="http://schemas.openxmlformats.org/drawingml/2006/main">
               <a:ext uri="{FF2B5EF4-FFF2-40B4-BE49-F238E27FC236}">
-                <a16:creationId xmlns:a16="http://schemas.microsoft.com/office/drawing/2014/main" id="{A649BFA2-775D-455E-A210-F7CB545D871E}"/>
+                <a16:creationId xmlns:a16="http://schemas.microsoft.com/office/drawing/2014/main" id="{D2A29099-6871-4316-BDFF-8F23913613E2}"/>
               </a:ext>
             </a:extLst>
           </p:cNvPr>
@@ -20388,7 +21343,7 @@
     </p:spTree>
     <p:extLst>
       <p:ext uri="{BB962C8B-B14F-4D97-AF65-F5344CB8AC3E}">
-        <p14:creationId xmlns:p14="http://schemas.microsoft.com/office/powerpoint/2010/main" val="1832670528"/>
+        <p14:creationId xmlns:p14="http://schemas.microsoft.com/office/powerpoint/2010/main" val="295389735"/>
       </p:ext>
     </p:extLst>
   </p:cSld>
@@ -20419,7 +21374,7 @@
           <p:cNvPr id="13" name="">
             <a:extLst xmlns:a="http://schemas.openxmlformats.org/drawingml/2006/main">
               <a:ext uri="{FF2B5EF4-FFF2-40B4-BE49-F238E27FC236}">
-                <a16:creationId xmlns:a16="http://schemas.microsoft.com/office/drawing/2014/main" id="{2C70F759-30FF-4B0E-B0DC-BB68BB7A9E33}"/>
+                <a16:creationId xmlns:a16="http://schemas.microsoft.com/office/drawing/2014/main" id="{B47F680A-7939-4D99-B9C5-C481DF7BE08E}"/>
               </a:ext>
             </a:extLst>
           </p:cNvPr>
@@ -20476,7 +21431,7 @@
           <p:cNvPr id="2" name="">
             <a:extLst xmlns:a="http://schemas.openxmlformats.org/drawingml/2006/main">
               <a:ext uri="{FF2B5EF4-FFF2-40B4-BE49-F238E27FC236}">
-                <a16:creationId xmlns:a16="http://schemas.microsoft.com/office/drawing/2014/main" id="{9520F6DB-9D44-4AA6-BB73-0E0B3420CC8C}"/>
+                <a16:creationId xmlns:a16="http://schemas.microsoft.com/office/drawing/2014/main" id="{F1083850-C17F-4DA5-B0A2-8F5FB8A7945D}"/>
               </a:ext>
             </a:extLst>
           </p:cNvPr>
@@ -20507,7 +21462,7 @@
           <p:cNvPr id="3" name="">
             <a:extLst xmlns:a="http://schemas.openxmlformats.org/drawingml/2006/main">
               <a:ext uri="{FF2B5EF4-FFF2-40B4-BE49-F238E27FC236}">
-                <a16:creationId xmlns:a16="http://schemas.microsoft.com/office/drawing/2014/main" id="{B2DEFA29-C489-41CC-8A9E-86900025FFF9}"/>
+                <a16:creationId xmlns:a16="http://schemas.microsoft.com/office/drawing/2014/main" id="{598051BD-CBEE-487B-B3AD-2285A7B2EEE2}"/>
               </a:ext>
             </a:extLst>
           </p:cNvPr>
@@ -20564,7 +21519,7 @@
           <p:cNvPr id="4" name="">
             <a:extLst xmlns:a="http://schemas.openxmlformats.org/drawingml/2006/main">
               <a:ext uri="{FF2B5EF4-FFF2-40B4-BE49-F238E27FC236}">
-                <a16:creationId xmlns:a16="http://schemas.microsoft.com/office/drawing/2014/main" id="{0A49B783-3F78-420C-9BBF-C30C2EC28A8B}"/>
+                <a16:creationId xmlns:a16="http://schemas.microsoft.com/office/drawing/2014/main" id="{7357E23E-7284-4BD2-AAAF-6F87515BC135}"/>
               </a:ext>
             </a:extLst>
           </p:cNvPr>
@@ -20621,7 +21576,7 @@
           <p:cNvPr id="5" name="">
             <a:extLst xmlns:a="http://schemas.openxmlformats.org/drawingml/2006/main">
               <a:ext uri="{FF2B5EF4-FFF2-40B4-BE49-F238E27FC236}">
-                <a16:creationId xmlns:a16="http://schemas.microsoft.com/office/drawing/2014/main" id="{A509CB2C-03CD-4DBA-8D88-D7CD96278DAB}"/>
+                <a16:creationId xmlns:a16="http://schemas.microsoft.com/office/drawing/2014/main" id="{AB0CA0EA-CE12-4E2E-AF17-8ECB90FE9016}"/>
               </a:ext>
             </a:extLst>
           </p:cNvPr>
@@ -20678,7 +21633,7 @@
           <p:cNvPr id="6" name="">
             <a:extLst xmlns:a="http://schemas.openxmlformats.org/drawingml/2006/main">
               <a:ext uri="{FF2B5EF4-FFF2-40B4-BE49-F238E27FC236}">
-                <a16:creationId xmlns:a16="http://schemas.microsoft.com/office/drawing/2014/main" id="{E4FA125A-9311-4373-AA37-946647AA0D83}"/>
+                <a16:creationId xmlns:a16="http://schemas.microsoft.com/office/drawing/2014/main" id="{5AFCC6CC-091F-4A5A-BAB2-C6AFB67E64B9}"/>
               </a:ext>
             </a:extLst>
           </p:cNvPr>
@@ -20735,7 +21690,7 @@
           <p:cNvPr id="7" name="">
             <a:extLst xmlns:a="http://schemas.openxmlformats.org/drawingml/2006/main">
               <a:ext uri="{FF2B5EF4-FFF2-40B4-BE49-F238E27FC236}">
-                <a16:creationId xmlns:a16="http://schemas.microsoft.com/office/drawing/2014/main" id="{C8DC011D-47A9-4453-8AE2-DAA2014484B3}"/>
+                <a16:creationId xmlns:a16="http://schemas.microsoft.com/office/drawing/2014/main" id="{AAFB4070-D917-42C7-BE40-6AD80401E2F5}"/>
               </a:ext>
             </a:extLst>
           </p:cNvPr>
@@ -20792,7 +21747,7 @@
           <p:cNvPr id="8" name="">
             <a:extLst xmlns:a="http://schemas.openxmlformats.org/drawingml/2006/main">
               <a:ext uri="{FF2B5EF4-FFF2-40B4-BE49-F238E27FC236}">
-                <a16:creationId xmlns:a16="http://schemas.microsoft.com/office/drawing/2014/main" id="{DCF922A9-E42E-48A3-B5E4-E9D82FFA9BAD}"/>
+                <a16:creationId xmlns:a16="http://schemas.microsoft.com/office/drawing/2014/main" id="{0445B188-1E8F-4471-8D3D-A58E7CC30E98}"/>
               </a:ext>
             </a:extLst>
           </p:cNvPr>
@@ -20849,7 +21804,7 @@
           <p:cNvPr id="9" name="">
             <a:extLst xmlns:a="http://schemas.openxmlformats.org/drawingml/2006/main">
               <a:ext uri="{FF2B5EF4-FFF2-40B4-BE49-F238E27FC236}">
-                <a16:creationId xmlns:a16="http://schemas.microsoft.com/office/drawing/2014/main" id="{5B688214-5B8E-4EB6-90D1-BBC3E5740B21}"/>
+                <a16:creationId xmlns:a16="http://schemas.microsoft.com/office/drawing/2014/main" id="{9AECD848-A22C-44BD-A7C7-751B8167FAC0}"/>
               </a:ext>
             </a:extLst>
           </p:cNvPr>
@@ -20906,7 +21861,7 @@
           <p:cNvPr id="10" name="">
             <a:extLst xmlns:a="http://schemas.openxmlformats.org/drawingml/2006/main">
               <a:ext uri="{FF2B5EF4-FFF2-40B4-BE49-F238E27FC236}">
-                <a16:creationId xmlns:a16="http://schemas.microsoft.com/office/drawing/2014/main" id="{078C58EC-34F7-4469-92B1-4D5E30E9450B}"/>
+                <a16:creationId xmlns:a16="http://schemas.microsoft.com/office/drawing/2014/main" id="{81F44783-6A8D-4B43-A9A2-84BA7E806882}"/>
               </a:ext>
             </a:extLst>
           </p:cNvPr>
@@ -20963,7 +21918,7 @@
           <p:cNvPr id="11" name="">
             <a:extLst xmlns:a="http://schemas.openxmlformats.org/drawingml/2006/main">
               <a:ext uri="{FF2B5EF4-FFF2-40B4-BE49-F238E27FC236}">
-                <a16:creationId xmlns:a16="http://schemas.microsoft.com/office/drawing/2014/main" id="{008417B4-080E-4639-86AA-85E45476850E}"/>
+                <a16:creationId xmlns:a16="http://schemas.microsoft.com/office/drawing/2014/main" id="{00BF600E-D18E-4D4E-A7CE-5C25BC9DD96B}"/>
               </a:ext>
             </a:extLst>
           </p:cNvPr>
@@ -20994,7 +21949,7 @@
           <p:cNvPr id="12" name="">
             <a:extLst xmlns:a="http://schemas.openxmlformats.org/drawingml/2006/main">
               <a:ext uri="{FF2B5EF4-FFF2-40B4-BE49-F238E27FC236}">
-                <a16:creationId xmlns:a16="http://schemas.microsoft.com/office/drawing/2014/main" id="{2A0D27C6-6A49-4FA3-99AC-37A2C229BB3B}"/>
+                <a16:creationId xmlns:a16="http://schemas.microsoft.com/office/drawing/2014/main" id="{955496C0-44A8-4D49-90B6-5B1AB55A5F3E}"/>
               </a:ext>
             </a:extLst>
           </p:cNvPr>
@@ -21049,7 +22004,7 @@
     </p:spTree>
     <p:extLst>
       <p:ext uri="{BB962C8B-B14F-4D97-AF65-F5344CB8AC3E}">
-        <p14:creationId xmlns:p14="http://schemas.microsoft.com/office/powerpoint/2010/main" val="1321814389"/>
+        <p14:creationId xmlns:p14="http://schemas.microsoft.com/office/powerpoint/2010/main" val="1544992799"/>
       </p:ext>
     </p:extLst>
   </p:cSld>
@@ -21077,10 +22032,10 @@
       </p:grpSpPr>
       <p:sp>
         <p:nvSpPr>
-          <p:cNvPr id="29" name="">
-            <a:extLst xmlns:a="http://schemas.openxmlformats.org/drawingml/2006/main">
-              <a:ext uri="{FF2B5EF4-FFF2-40B4-BE49-F238E27FC236}">
-                <a16:creationId xmlns:a16="http://schemas.microsoft.com/office/drawing/2014/main" id="{DB728F92-AEE8-4032-99E5-3C76D91D6521}"/>
+          <p:cNvPr id="34" name="">
+            <a:extLst xmlns:a="http://schemas.openxmlformats.org/drawingml/2006/main">
+              <a:ext uri="{FF2B5EF4-FFF2-40B4-BE49-F238E27FC236}">
+                <a16:creationId xmlns:a16="http://schemas.microsoft.com/office/drawing/2014/main" id="{A5F92864-E352-4A3F-9996-87C87B6D39AB}"/>
               </a:ext>
             </a:extLst>
           </p:cNvPr>
@@ -21137,7 +22092,7 @@
           <p:cNvPr id="2" name="">
             <a:extLst xmlns:a="http://schemas.openxmlformats.org/drawingml/2006/main">
               <a:ext uri="{FF2B5EF4-FFF2-40B4-BE49-F238E27FC236}">
-                <a16:creationId xmlns:a16="http://schemas.microsoft.com/office/drawing/2014/main" id="{23E76E4B-3B1C-4065-8AA2-7CD0A0AD4B6A}"/>
+                <a16:creationId xmlns:a16="http://schemas.microsoft.com/office/drawing/2014/main" id="{17847BC8-CD75-4E08-8DC1-4C1FFAA8474F}"/>
               </a:ext>
             </a:extLst>
           </p:cNvPr>
@@ -21168,7 +22123,7 @@
           <p:cNvPr id="3" name="">
             <a:extLst xmlns:a="http://schemas.openxmlformats.org/drawingml/2006/main">
               <a:ext uri="{FF2B5EF4-FFF2-40B4-BE49-F238E27FC236}">
-                <a16:creationId xmlns:a16="http://schemas.microsoft.com/office/drawing/2014/main" id="{9684F0C0-EA49-457C-B714-D097E994D681}"/>
+                <a16:creationId xmlns:a16="http://schemas.microsoft.com/office/drawing/2014/main" id="{187470C2-074A-4626-A19E-5200DCA2F360}"/>
               </a:ext>
             </a:extLst>
           </p:cNvPr>
@@ -21225,18 +22180,18 @@
           <p:cNvPr id="4" name="">
             <a:extLst xmlns:a="http://schemas.openxmlformats.org/drawingml/2006/main">
               <a:ext uri="{FF2B5EF4-FFF2-40B4-BE49-F238E27FC236}">
-                <a16:creationId xmlns:a16="http://schemas.microsoft.com/office/drawing/2014/main" id="{034E2F50-712A-455D-8CDA-DC5879EA3848}"/>
-              </a:ext>
-            </a:extLst>
-          </p:cNvPr>
-          <p:cNvSpPr>
-            <a:spLocks xmlns:a="http://schemas.openxmlformats.org/drawingml/2006/main" noGrp="1"/>
-          </p:cNvSpPr>
-          <p:nvPr/>
-        </p:nvSpPr>
-        <p:spPr>
-          <a:xfrm xmlns:a="http://schemas.openxmlformats.org/drawingml/2006/main">
-            <a:off x="609600" y="1752600"/>
+                <a16:creationId xmlns:a16="http://schemas.microsoft.com/office/drawing/2014/main" id="{E66172C8-FB4F-4489-89D6-C71626173E9D}"/>
+              </a:ext>
+            </a:extLst>
+          </p:cNvPr>
+          <p:cNvSpPr>
+            <a:spLocks xmlns:a="http://schemas.openxmlformats.org/drawingml/2006/main" noGrp="1"/>
+          </p:cNvSpPr>
+          <p:nvPr/>
+        </p:nvSpPr>
+        <p:spPr>
+          <a:xfrm xmlns:a="http://schemas.openxmlformats.org/drawingml/2006/main">
+            <a:off x="609600" y="1676400"/>
             <a:ext cx="10972800" cy="304800"/>
           </a:xfrm>
           <a:prstGeom xmlns:a="http://schemas.openxmlformats.org/drawingml/2006/main" prst="rect">
@@ -21282,7 +22237,7 @@
           <p:cNvPr id="5" name="">
             <a:extLst xmlns:a="http://schemas.openxmlformats.org/drawingml/2006/main">
               <a:ext uri="{FF2B5EF4-FFF2-40B4-BE49-F238E27FC236}">
-                <a16:creationId xmlns:a16="http://schemas.microsoft.com/office/drawing/2014/main" id="{1401A792-044A-4770-95C8-7C909D4506B0}"/>
+                <a16:creationId xmlns:a16="http://schemas.microsoft.com/office/drawing/2014/main" id="{2365349F-2B34-4A46-B252-E64FCB2786E2}"/>
               </a:ext>
             </a:extLst>
           </p:cNvPr>
@@ -21293,8 +22248,8 @@
         </p:nvSpPr>
         <p:spPr>
           <a:xfrm xmlns:a="http://schemas.openxmlformats.org/drawingml/2006/main" flipH="0" flipV="0">
-            <a:off x="5010150" y="2228850"/>
-            <a:ext cx="0" cy="2333625"/>
+            <a:off x="4838700" y="2095500"/>
+            <a:ext cx="0" cy="2095500"/>
           </a:xfrm>
           <a:prstGeom xmlns:a="http://schemas.openxmlformats.org/drawingml/2006/main" prst="line">
             <a:avLst/>
@@ -21313,19 +22268,19 @@
           <p:cNvPr id="6" name="">
             <a:extLst xmlns:a="http://schemas.openxmlformats.org/drawingml/2006/main">
               <a:ext uri="{FF2B5EF4-FFF2-40B4-BE49-F238E27FC236}">
-                <a16:creationId xmlns:a16="http://schemas.microsoft.com/office/drawing/2014/main" id="{0FA43591-41BC-4B96-8CD7-ADA0B2360826}"/>
-              </a:ext>
-            </a:extLst>
-          </p:cNvPr>
-          <p:cNvSpPr>
-            <a:spLocks xmlns:a="http://schemas.openxmlformats.org/drawingml/2006/main" noGrp="1"/>
-          </p:cNvSpPr>
-          <p:nvPr/>
-        </p:nvSpPr>
-        <p:spPr>
-          <a:xfrm xmlns:a="http://schemas.openxmlformats.org/drawingml/2006/main">
-            <a:off x="609600" y="2247900"/>
-            <a:ext cx="4171950" cy="285750"/>
+                <a16:creationId xmlns:a16="http://schemas.microsoft.com/office/drawing/2014/main" id="{B36BF598-33CF-4440-A93E-3F6A2FA89AD8}"/>
+              </a:ext>
+            </a:extLst>
+          </p:cNvPr>
+          <p:cNvSpPr>
+            <a:spLocks xmlns:a="http://schemas.openxmlformats.org/drawingml/2006/main" noGrp="1"/>
+          </p:cNvSpPr>
+          <p:nvPr/>
+        </p:nvSpPr>
+        <p:spPr>
+          <a:xfrm xmlns:a="http://schemas.openxmlformats.org/drawingml/2006/main">
+            <a:off x="609600" y="2095500"/>
+            <a:ext cx="4000500" cy="285750"/>
           </a:xfrm>
           <a:prstGeom xmlns:a="http://schemas.openxmlformats.org/drawingml/2006/main" prst="rect">
             <a:avLst/>
@@ -21370,19 +22325,19 @@
           <p:cNvPr id="7" name="">
             <a:extLst xmlns:a="http://schemas.openxmlformats.org/drawingml/2006/main">
               <a:ext uri="{FF2B5EF4-FFF2-40B4-BE49-F238E27FC236}">
-                <a16:creationId xmlns:a16="http://schemas.microsoft.com/office/drawing/2014/main" id="{8D8A3287-186A-4B08-BAB2-279C068A5A9A}"/>
-              </a:ext>
-            </a:extLst>
-          </p:cNvPr>
-          <p:cNvSpPr>
-            <a:spLocks xmlns:a="http://schemas.openxmlformats.org/drawingml/2006/main" noGrp="1"/>
-          </p:cNvSpPr>
-          <p:nvPr/>
-        </p:nvSpPr>
-        <p:spPr>
-          <a:xfrm xmlns:a="http://schemas.openxmlformats.org/drawingml/2006/main">
-            <a:off x="609600" y="2781300"/>
-            <a:ext cx="1676400" cy="628650"/>
+                <a16:creationId xmlns:a16="http://schemas.microsoft.com/office/drawing/2014/main" id="{1BDD83C7-0FB4-4FAA-80C4-88A75F4C06E3}"/>
+              </a:ext>
+            </a:extLst>
+          </p:cNvPr>
+          <p:cNvSpPr>
+            <a:spLocks xmlns:a="http://schemas.openxmlformats.org/drawingml/2006/main" noGrp="1"/>
+          </p:cNvSpPr>
+          <p:nvPr/>
+        </p:nvSpPr>
+        <p:spPr>
+          <a:xfrm xmlns:a="http://schemas.openxmlformats.org/drawingml/2006/main">
+            <a:off x="609600" y="2466975"/>
+            <a:ext cx="1609725" cy="552450"/>
           </a:xfrm>
           <a:prstGeom xmlns:a="http://schemas.openxmlformats.org/drawingml/2006/main" prst="rect">
             <a:avLst/>
@@ -21403,19 +22358,19 @@
           <p:cNvPr id="8" name="">
             <a:extLst xmlns:a="http://schemas.openxmlformats.org/drawingml/2006/main">
               <a:ext uri="{FF2B5EF4-FFF2-40B4-BE49-F238E27FC236}">
-                <a16:creationId xmlns:a16="http://schemas.microsoft.com/office/drawing/2014/main" id="{0C6C492E-C35C-4C00-BEE8-F1ECA0AAA831}"/>
-              </a:ext>
-            </a:extLst>
-          </p:cNvPr>
-          <p:cNvSpPr>
-            <a:spLocks xmlns:a="http://schemas.openxmlformats.org/drawingml/2006/main" noGrp="1"/>
-          </p:cNvSpPr>
-          <p:nvPr/>
-        </p:nvSpPr>
-        <p:spPr>
-          <a:xfrm xmlns:a="http://schemas.openxmlformats.org/drawingml/2006/main">
-            <a:off x="723900" y="2857500"/>
-            <a:ext cx="1447800" cy="476250"/>
+                <a16:creationId xmlns:a16="http://schemas.microsoft.com/office/drawing/2014/main" id="{B416CE7D-2458-47A6-81B4-CFE3A21B60C5}"/>
+              </a:ext>
+            </a:extLst>
+          </p:cNvPr>
+          <p:cNvSpPr>
+            <a:spLocks xmlns:a="http://schemas.openxmlformats.org/drawingml/2006/main" noGrp="1"/>
+          </p:cNvSpPr>
+          <p:nvPr/>
+        </p:nvSpPr>
+        <p:spPr>
+          <a:xfrm xmlns:a="http://schemas.openxmlformats.org/drawingml/2006/main">
+            <a:off x="723900" y="2543175"/>
+            <a:ext cx="1381125" cy="400050"/>
           </a:xfrm>
           <a:prstGeom xmlns:a="http://schemas.openxmlformats.org/drawingml/2006/main" prst="rect">
             <a:avLst/>
@@ -21460,19 +22415,19 @@
           <p:cNvPr id="9" name="">
             <a:extLst xmlns:a="http://schemas.openxmlformats.org/drawingml/2006/main">
               <a:ext uri="{FF2B5EF4-FFF2-40B4-BE49-F238E27FC236}">
-                <a16:creationId xmlns:a16="http://schemas.microsoft.com/office/drawing/2014/main" id="{82F4A0D9-EF59-4B49-B2C4-C9AF6DAF2720}"/>
-              </a:ext>
-            </a:extLst>
-          </p:cNvPr>
-          <p:cNvSpPr>
-            <a:spLocks xmlns:a="http://schemas.openxmlformats.org/drawingml/2006/main" noGrp="1"/>
-          </p:cNvSpPr>
-          <p:nvPr/>
-        </p:nvSpPr>
-        <p:spPr>
-          <a:xfrm xmlns:a="http://schemas.openxmlformats.org/drawingml/2006/main">
-            <a:off x="2933700" y="2781300"/>
-            <a:ext cx="1847850" cy="628650"/>
+                <a16:creationId xmlns:a16="http://schemas.microsoft.com/office/drawing/2014/main" id="{4F38F41D-D08A-47C7-A7CC-BD57BAA9334D}"/>
+              </a:ext>
+            </a:extLst>
+          </p:cNvPr>
+          <p:cNvSpPr>
+            <a:spLocks xmlns:a="http://schemas.openxmlformats.org/drawingml/2006/main" noGrp="1"/>
+          </p:cNvSpPr>
+          <p:nvPr/>
+        </p:nvSpPr>
+        <p:spPr>
+          <a:xfrm xmlns:a="http://schemas.openxmlformats.org/drawingml/2006/main">
+            <a:off x="2876550" y="2466975"/>
+            <a:ext cx="1733550" cy="552450"/>
           </a:xfrm>
           <a:prstGeom xmlns:a="http://schemas.openxmlformats.org/drawingml/2006/main" prst="rect">
             <a:avLst/>
@@ -21493,19 +22448,19 @@
           <p:cNvPr id="10" name="">
             <a:extLst xmlns:a="http://schemas.openxmlformats.org/drawingml/2006/main">
               <a:ext uri="{FF2B5EF4-FFF2-40B4-BE49-F238E27FC236}">
-                <a16:creationId xmlns:a16="http://schemas.microsoft.com/office/drawing/2014/main" id="{E834EA46-3F15-48E1-9EC1-C61E94DC3EE5}"/>
-              </a:ext>
-            </a:extLst>
-          </p:cNvPr>
-          <p:cNvSpPr>
-            <a:spLocks xmlns:a="http://schemas.openxmlformats.org/drawingml/2006/main" noGrp="1"/>
-          </p:cNvSpPr>
-          <p:nvPr/>
-        </p:nvSpPr>
-        <p:spPr>
-          <a:xfrm xmlns:a="http://schemas.openxmlformats.org/drawingml/2006/main">
-            <a:off x="3048000" y="2857500"/>
-            <a:ext cx="1619250" cy="476250"/>
+                <a16:creationId xmlns:a16="http://schemas.microsoft.com/office/drawing/2014/main" id="{6C0257C8-D924-4569-9CD5-8BE38D35BB89}"/>
+              </a:ext>
+            </a:extLst>
+          </p:cNvPr>
+          <p:cNvSpPr>
+            <a:spLocks xmlns:a="http://schemas.openxmlformats.org/drawingml/2006/main" noGrp="1"/>
+          </p:cNvSpPr>
+          <p:nvPr/>
+        </p:nvSpPr>
+        <p:spPr>
+          <a:xfrm xmlns:a="http://schemas.openxmlformats.org/drawingml/2006/main">
+            <a:off x="2990850" y="2543175"/>
+            <a:ext cx="1504950" cy="400050"/>
           </a:xfrm>
           <a:prstGeom xmlns:a="http://schemas.openxmlformats.org/drawingml/2006/main" prst="rect">
             <a:avLst/>
@@ -21547,7 +22502,7 @@
       </p:sp>
       <p:cxnSp>
         <p:nvCxnSpPr>
-          <p:cNvPr id="39" name=""/>
+          <p:cNvPr id="44" name=""/>
           <p:cNvCxnSpPr>
             <a:stCxn xmlns:a="http://schemas.openxmlformats.org/drawingml/2006/main" id="7" idx="3"/>
             <a:endCxn xmlns:a="http://schemas.openxmlformats.org/drawingml/2006/main" id="9" idx="1"/>
@@ -21556,8 +22511,8 @@
         </p:nvCxnSpPr>
         <p:spPr>
           <a:xfrm xmlns:a="http://schemas.openxmlformats.org/drawingml/2006/main">
-            <a:off x="2286000" y="3095625"/>
-            <a:ext cx="647700" cy="0"/>
+            <a:off x="2219325" y="2743200"/>
+            <a:ext cx="657225" cy="0"/>
           </a:xfrm>
           <a:prstGeom xmlns:a="http://schemas.openxmlformats.org/drawingml/2006/main" prst="straightConnector1">
             <a:avLst/>
@@ -21576,19 +22531,19 @@
           <p:cNvPr id="12" name="">
             <a:extLst xmlns:a="http://schemas.openxmlformats.org/drawingml/2006/main">
               <a:ext uri="{FF2B5EF4-FFF2-40B4-BE49-F238E27FC236}">
-                <a16:creationId xmlns:a16="http://schemas.microsoft.com/office/drawing/2014/main" id="{E86A876A-DCBA-467F-80A2-7B52919F694D}"/>
-              </a:ext>
-            </a:extLst>
-          </p:cNvPr>
-          <p:cNvSpPr>
-            <a:spLocks xmlns:a="http://schemas.openxmlformats.org/drawingml/2006/main" noGrp="1"/>
-          </p:cNvSpPr>
-          <p:nvPr/>
-        </p:nvSpPr>
-        <p:spPr>
-          <a:xfrm xmlns:a="http://schemas.openxmlformats.org/drawingml/2006/main">
-            <a:off x="609600" y="3619500"/>
-            <a:ext cx="4171950" cy="600075"/>
+                <a16:creationId xmlns:a16="http://schemas.microsoft.com/office/drawing/2014/main" id="{2776E413-D8D6-4E7A-886B-11A30901C79B}"/>
+              </a:ext>
+            </a:extLst>
+          </p:cNvPr>
+          <p:cNvSpPr>
+            <a:spLocks xmlns:a="http://schemas.openxmlformats.org/drawingml/2006/main" noGrp="1"/>
+          </p:cNvSpPr>
+          <p:nvPr/>
+        </p:nvSpPr>
+        <p:spPr>
+          <a:xfrm xmlns:a="http://schemas.openxmlformats.org/drawingml/2006/main">
+            <a:off x="609600" y="3143250"/>
+            <a:ext cx="4000500" cy="542925"/>
           </a:xfrm>
           <a:prstGeom xmlns:a="http://schemas.openxmlformats.org/drawingml/2006/main" prst="rect">
             <a:avLst/>
@@ -21605,7 +22560,7 @@
           <a:lstStyle xmlns:a="http://schemas.openxmlformats.org/drawingml/2006/main"/>
           <a:p xmlns:a="http://schemas.openxmlformats.org/drawingml/2006/main">
             <a:pPr algn="l">
-              <a:defRPr sz="2025" b="0">
+              <a:defRPr sz="1875" b="0">
                 <a:solidFill>
                   <a:srgbClr val="F4F7FA"/>
                 </a:solidFill>
@@ -21615,7 +22570,7 @@
               </a:defRPr>
             </a:pPr>
             <a:r>
-              <a:rPr sz="2025" b="0">
+              <a:rPr sz="1875" b="0">
                 <a:solidFill>
                   <a:srgbClr val="F4F7FA"/>
                 </a:solidFill>
@@ -21628,7 +22583,7 @@
           </a:p>
           <a:p xmlns:a="http://schemas.openxmlformats.org/drawingml/2006/main">
             <a:pPr algn="l">
-              <a:defRPr sz="2025" b="0">
+              <a:defRPr sz="1875" b="0">
                 <a:solidFill>
                   <a:srgbClr val="F4F7FA"/>
                 </a:solidFill>
@@ -21638,7 +22593,7 @@
               </a:defRPr>
             </a:pPr>
             <a:r>
-              <a:rPr sz="2025" b="0">
+              <a:rPr sz="1875" b="0">
                 <a:solidFill>
                   <a:srgbClr val="F4F7FA"/>
                 </a:solidFill>
@@ -21656,19 +22611,19 @@
           <p:cNvPr id="13" name="">
             <a:extLst xmlns:a="http://schemas.openxmlformats.org/drawingml/2006/main">
               <a:ext uri="{FF2B5EF4-FFF2-40B4-BE49-F238E27FC236}">
-                <a16:creationId xmlns:a16="http://schemas.microsoft.com/office/drawing/2014/main" id="{297D28A1-C151-4BB6-936B-EB07601CF217}"/>
-              </a:ext>
-            </a:extLst>
-          </p:cNvPr>
-          <p:cNvSpPr>
-            <a:spLocks xmlns:a="http://schemas.openxmlformats.org/drawingml/2006/main" noGrp="1"/>
-          </p:cNvSpPr>
-          <p:nvPr/>
-        </p:nvSpPr>
-        <p:spPr>
-          <a:xfrm xmlns:a="http://schemas.openxmlformats.org/drawingml/2006/main">
-            <a:off x="609600" y="4276725"/>
-            <a:ext cx="4171950" cy="523875"/>
+                <a16:creationId xmlns:a16="http://schemas.microsoft.com/office/drawing/2014/main" id="{B9FC7D7C-D72C-4CE3-8F38-FD1B812068F0}"/>
+              </a:ext>
+            </a:extLst>
+          </p:cNvPr>
+          <p:cNvSpPr>
+            <a:spLocks xmlns:a="http://schemas.openxmlformats.org/drawingml/2006/main" noGrp="1"/>
+          </p:cNvSpPr>
+          <p:nvPr/>
+        </p:nvSpPr>
+        <p:spPr>
+          <a:xfrm xmlns:a="http://schemas.openxmlformats.org/drawingml/2006/main">
+            <a:off x="609600" y="3810000"/>
+            <a:ext cx="4000500" cy="428625"/>
           </a:xfrm>
           <a:prstGeom xmlns:a="http://schemas.openxmlformats.org/drawingml/2006/main" prst="rect">
             <a:avLst/>
@@ -21736,19 +22691,19 @@
           <p:cNvPr id="14" name="">
             <a:extLst xmlns:a="http://schemas.openxmlformats.org/drawingml/2006/main">
               <a:ext uri="{FF2B5EF4-FFF2-40B4-BE49-F238E27FC236}">
-                <a16:creationId xmlns:a16="http://schemas.microsoft.com/office/drawing/2014/main" id="{2CB3B2BD-8BC2-4738-A341-2E341A391966}"/>
-              </a:ext>
-            </a:extLst>
-          </p:cNvPr>
-          <p:cNvSpPr>
-            <a:spLocks xmlns:a="http://schemas.openxmlformats.org/drawingml/2006/main" noGrp="1"/>
-          </p:cNvSpPr>
-          <p:nvPr/>
-        </p:nvSpPr>
-        <p:spPr>
-          <a:xfrm xmlns:a="http://schemas.openxmlformats.org/drawingml/2006/main">
-            <a:off x="5295900" y="2247900"/>
-            <a:ext cx="6286500" cy="285750"/>
+                <a16:creationId xmlns:a16="http://schemas.microsoft.com/office/drawing/2014/main" id="{C4B57B16-D8BD-439E-B154-9B62CFCC263F}"/>
+              </a:ext>
+            </a:extLst>
+          </p:cNvPr>
+          <p:cNvSpPr>
+            <a:spLocks xmlns:a="http://schemas.openxmlformats.org/drawingml/2006/main" noGrp="1"/>
+          </p:cNvSpPr>
+          <p:nvPr/>
+        </p:nvSpPr>
+        <p:spPr>
+          <a:xfrm xmlns:a="http://schemas.openxmlformats.org/drawingml/2006/main">
+            <a:off x="5105400" y="2095500"/>
+            <a:ext cx="6477000" cy="285750"/>
           </a:xfrm>
           <a:prstGeom xmlns:a="http://schemas.openxmlformats.org/drawingml/2006/main" prst="rect">
             <a:avLst/>
@@ -21793,7 +22748,7 @@
           <p:cNvPr id="15" name="">
             <a:extLst xmlns:a="http://schemas.openxmlformats.org/drawingml/2006/main">
               <a:ext uri="{FF2B5EF4-FFF2-40B4-BE49-F238E27FC236}">
-                <a16:creationId xmlns:a16="http://schemas.microsoft.com/office/drawing/2014/main" id="{01B95713-BDEF-43F7-907C-F4C1265D772E}"/>
+                <a16:creationId xmlns:a16="http://schemas.microsoft.com/office/drawing/2014/main" id="{0CE18DD7-47A7-42A1-AA41-98D9FB2429DF}"/>
               </a:ext>
             </a:extLst>
           </p:cNvPr>
@@ -21804,8 +22759,8 @@
         </p:nvSpPr>
         <p:spPr>
           <a:xfrm xmlns:a="http://schemas.openxmlformats.org/drawingml/2006/main" flipH="0" flipV="0">
-            <a:off x="5295900" y="2724150"/>
-            <a:ext cx="0" cy="514350"/>
+            <a:off x="5105400" y="2466975"/>
+            <a:ext cx="0" cy="466725"/>
           </a:xfrm>
           <a:prstGeom xmlns:a="http://schemas.openxmlformats.org/drawingml/2006/main" prst="line">
             <a:avLst/>
@@ -21824,19 +22779,19 @@
           <p:cNvPr id="16" name="">
             <a:extLst xmlns:a="http://schemas.openxmlformats.org/drawingml/2006/main">
               <a:ext uri="{FF2B5EF4-FFF2-40B4-BE49-F238E27FC236}">
-                <a16:creationId xmlns:a16="http://schemas.microsoft.com/office/drawing/2014/main" id="{55774801-0291-4DD9-BD50-B2E3EEB5FE2D}"/>
-              </a:ext>
-            </a:extLst>
-          </p:cNvPr>
-          <p:cNvSpPr>
-            <a:spLocks xmlns:a="http://schemas.openxmlformats.org/drawingml/2006/main" noGrp="1"/>
-          </p:cNvSpPr>
-          <p:nvPr/>
-        </p:nvSpPr>
-        <p:spPr>
-          <a:xfrm xmlns:a="http://schemas.openxmlformats.org/drawingml/2006/main">
-            <a:off x="5467350" y="2686050"/>
-            <a:ext cx="6115050" cy="257175"/>
+                <a16:creationId xmlns:a16="http://schemas.microsoft.com/office/drawing/2014/main" id="{BBECB1E8-0835-486A-A0AF-EDE65687C1D1}"/>
+              </a:ext>
+            </a:extLst>
+          </p:cNvPr>
+          <p:cNvSpPr>
+            <a:spLocks xmlns:a="http://schemas.openxmlformats.org/drawingml/2006/main" noGrp="1"/>
+          </p:cNvSpPr>
+          <p:nvPr/>
+        </p:nvSpPr>
+        <p:spPr>
+          <a:xfrm xmlns:a="http://schemas.openxmlformats.org/drawingml/2006/main">
+            <a:off x="5276850" y="2428875"/>
+            <a:ext cx="6305550" cy="228600"/>
           </a:xfrm>
           <a:prstGeom xmlns:a="http://schemas.openxmlformats.org/drawingml/2006/main" prst="rect">
             <a:avLst/>
@@ -21881,19 +22836,19 @@
           <p:cNvPr id="17" name="">
             <a:extLst xmlns:a="http://schemas.openxmlformats.org/drawingml/2006/main">
               <a:ext uri="{FF2B5EF4-FFF2-40B4-BE49-F238E27FC236}">
-                <a16:creationId xmlns:a16="http://schemas.microsoft.com/office/drawing/2014/main" id="{44EE21CF-FEC2-4501-9589-8BBC132ADBAA}"/>
-              </a:ext>
-            </a:extLst>
-          </p:cNvPr>
-          <p:cNvSpPr>
-            <a:spLocks xmlns:a="http://schemas.openxmlformats.org/drawingml/2006/main" noGrp="1"/>
-          </p:cNvSpPr>
-          <p:nvPr/>
-        </p:nvSpPr>
-        <p:spPr>
-          <a:xfrm xmlns:a="http://schemas.openxmlformats.org/drawingml/2006/main">
-            <a:off x="5467350" y="2971800"/>
-            <a:ext cx="6115050" cy="304800"/>
+                <a16:creationId xmlns:a16="http://schemas.microsoft.com/office/drawing/2014/main" id="{490D787A-D1AB-46DD-97F2-BCA3F156D6F0}"/>
+              </a:ext>
+            </a:extLst>
+          </p:cNvPr>
+          <p:cNvSpPr>
+            <a:spLocks xmlns:a="http://schemas.openxmlformats.org/drawingml/2006/main" noGrp="1"/>
+          </p:cNvSpPr>
+          <p:nvPr/>
+        </p:nvSpPr>
+        <p:spPr>
+          <a:xfrm xmlns:a="http://schemas.openxmlformats.org/drawingml/2006/main">
+            <a:off x="5276850" y="2667000"/>
+            <a:ext cx="6305550" cy="295275"/>
           </a:xfrm>
           <a:prstGeom xmlns:a="http://schemas.openxmlformats.org/drawingml/2006/main" prst="rect">
             <a:avLst/>
@@ -21938,7 +22893,7 @@
           <p:cNvPr id="18" name="">
             <a:extLst xmlns:a="http://schemas.openxmlformats.org/drawingml/2006/main">
               <a:ext uri="{FF2B5EF4-FFF2-40B4-BE49-F238E27FC236}">
-                <a16:creationId xmlns:a16="http://schemas.microsoft.com/office/drawing/2014/main" id="{5E5718CC-EF41-4C7E-B8F8-FEE1E86101A7}"/>
+                <a16:creationId xmlns:a16="http://schemas.microsoft.com/office/drawing/2014/main" id="{8AA61062-FF25-4A6A-AD28-A2C85A5D2B51}"/>
               </a:ext>
             </a:extLst>
           </p:cNvPr>
@@ -21949,8 +22904,8 @@
         </p:nvSpPr>
         <p:spPr>
           <a:xfrm xmlns:a="http://schemas.openxmlformats.org/drawingml/2006/main" flipH="0" flipV="0">
-            <a:off x="5295900" y="3438525"/>
-            <a:ext cx="0" cy="514350"/>
+            <a:off x="5105400" y="3067050"/>
+            <a:ext cx="0" cy="466725"/>
           </a:xfrm>
           <a:prstGeom xmlns:a="http://schemas.openxmlformats.org/drawingml/2006/main" prst="line">
             <a:avLst/>
@@ -21969,19 +22924,19 @@
           <p:cNvPr id="19" name="">
             <a:extLst xmlns:a="http://schemas.openxmlformats.org/drawingml/2006/main">
               <a:ext uri="{FF2B5EF4-FFF2-40B4-BE49-F238E27FC236}">
-                <a16:creationId xmlns:a16="http://schemas.microsoft.com/office/drawing/2014/main" id="{C2F6BE27-705A-4180-A5D3-44029EB03C2E}"/>
-              </a:ext>
-            </a:extLst>
-          </p:cNvPr>
-          <p:cNvSpPr>
-            <a:spLocks xmlns:a="http://schemas.openxmlformats.org/drawingml/2006/main" noGrp="1"/>
-          </p:cNvSpPr>
-          <p:nvPr/>
-        </p:nvSpPr>
-        <p:spPr>
-          <a:xfrm xmlns:a="http://schemas.openxmlformats.org/drawingml/2006/main">
-            <a:off x="5467350" y="3400425"/>
-            <a:ext cx="6115050" cy="257175"/>
+                <a16:creationId xmlns:a16="http://schemas.microsoft.com/office/drawing/2014/main" id="{66F3F57F-8DB2-47BA-B019-7979334E74CD}"/>
+              </a:ext>
+            </a:extLst>
+          </p:cNvPr>
+          <p:cNvSpPr>
+            <a:spLocks xmlns:a="http://schemas.openxmlformats.org/drawingml/2006/main" noGrp="1"/>
+          </p:cNvSpPr>
+          <p:nvPr/>
+        </p:nvSpPr>
+        <p:spPr>
+          <a:xfrm xmlns:a="http://schemas.openxmlformats.org/drawingml/2006/main">
+            <a:off x="5276850" y="3028950"/>
+            <a:ext cx="6305550" cy="228600"/>
           </a:xfrm>
           <a:prstGeom xmlns:a="http://schemas.openxmlformats.org/drawingml/2006/main" prst="rect">
             <a:avLst/>
@@ -22026,19 +22981,19 @@
           <p:cNvPr id="20" name="">
             <a:extLst xmlns:a="http://schemas.openxmlformats.org/drawingml/2006/main">
               <a:ext uri="{FF2B5EF4-FFF2-40B4-BE49-F238E27FC236}">
-                <a16:creationId xmlns:a16="http://schemas.microsoft.com/office/drawing/2014/main" id="{B38331C4-C184-446C-B6B0-5B806C483083}"/>
-              </a:ext>
-            </a:extLst>
-          </p:cNvPr>
-          <p:cNvSpPr>
-            <a:spLocks xmlns:a="http://schemas.openxmlformats.org/drawingml/2006/main" noGrp="1"/>
-          </p:cNvSpPr>
-          <p:nvPr/>
-        </p:nvSpPr>
-        <p:spPr>
-          <a:xfrm xmlns:a="http://schemas.openxmlformats.org/drawingml/2006/main">
-            <a:off x="5467350" y="3686175"/>
-            <a:ext cx="6115050" cy="304800"/>
+                <a16:creationId xmlns:a16="http://schemas.microsoft.com/office/drawing/2014/main" id="{9A0CC1B0-24A5-49D4-BA40-107F7AD8FA81}"/>
+              </a:ext>
+            </a:extLst>
+          </p:cNvPr>
+          <p:cNvSpPr>
+            <a:spLocks xmlns:a="http://schemas.openxmlformats.org/drawingml/2006/main" noGrp="1"/>
+          </p:cNvSpPr>
+          <p:nvPr/>
+        </p:nvSpPr>
+        <p:spPr>
+          <a:xfrm xmlns:a="http://schemas.openxmlformats.org/drawingml/2006/main">
+            <a:off x="5276850" y="3267075"/>
+            <a:ext cx="6305550" cy="295275"/>
           </a:xfrm>
           <a:prstGeom xmlns:a="http://schemas.openxmlformats.org/drawingml/2006/main" prst="rect">
             <a:avLst/>
@@ -22083,7 +23038,7 @@
           <p:cNvPr id="21" name="">
             <a:extLst xmlns:a="http://schemas.openxmlformats.org/drawingml/2006/main">
               <a:ext uri="{FF2B5EF4-FFF2-40B4-BE49-F238E27FC236}">
-                <a16:creationId xmlns:a16="http://schemas.microsoft.com/office/drawing/2014/main" id="{6600F3C7-3B4A-43AB-9A29-C481C051004E}"/>
+                <a16:creationId xmlns:a16="http://schemas.microsoft.com/office/drawing/2014/main" id="{7C6A96D7-66BC-4DA1-875A-BA0353E1BC1D}"/>
               </a:ext>
             </a:extLst>
           </p:cNvPr>
@@ -22094,8 +23049,8 @@
         </p:nvSpPr>
         <p:spPr>
           <a:xfrm xmlns:a="http://schemas.openxmlformats.org/drawingml/2006/main" flipH="0" flipV="0">
-            <a:off x="5295900" y="4152900"/>
-            <a:ext cx="0" cy="514350"/>
+            <a:off x="5105400" y="3667125"/>
+            <a:ext cx="0" cy="466725"/>
           </a:xfrm>
           <a:prstGeom xmlns:a="http://schemas.openxmlformats.org/drawingml/2006/main" prst="line">
             <a:avLst/>
@@ -22114,19 +23069,19 @@
           <p:cNvPr id="22" name="">
             <a:extLst xmlns:a="http://schemas.openxmlformats.org/drawingml/2006/main">
               <a:ext uri="{FF2B5EF4-FFF2-40B4-BE49-F238E27FC236}">
-                <a16:creationId xmlns:a16="http://schemas.microsoft.com/office/drawing/2014/main" id="{612FC08D-F5AD-4D12-ADA1-6F52B66D8F92}"/>
-              </a:ext>
-            </a:extLst>
-          </p:cNvPr>
-          <p:cNvSpPr>
-            <a:spLocks xmlns:a="http://schemas.openxmlformats.org/drawingml/2006/main" noGrp="1"/>
-          </p:cNvSpPr>
-          <p:nvPr/>
-        </p:nvSpPr>
-        <p:spPr>
-          <a:xfrm xmlns:a="http://schemas.openxmlformats.org/drawingml/2006/main">
-            <a:off x="5467350" y="4114800"/>
-            <a:ext cx="6115050" cy="257175"/>
+                <a16:creationId xmlns:a16="http://schemas.microsoft.com/office/drawing/2014/main" id="{2EBF3F29-1BAC-4564-B312-5D9E131B47E9}"/>
+              </a:ext>
+            </a:extLst>
+          </p:cNvPr>
+          <p:cNvSpPr>
+            <a:spLocks xmlns:a="http://schemas.openxmlformats.org/drawingml/2006/main" noGrp="1"/>
+          </p:cNvSpPr>
+          <p:nvPr/>
+        </p:nvSpPr>
+        <p:spPr>
+          <a:xfrm xmlns:a="http://schemas.openxmlformats.org/drawingml/2006/main">
+            <a:off x="5276850" y="3629025"/>
+            <a:ext cx="6305550" cy="228600"/>
           </a:xfrm>
           <a:prstGeom xmlns:a="http://schemas.openxmlformats.org/drawingml/2006/main" prst="rect">
             <a:avLst/>
@@ -22171,19 +23126,19 @@
           <p:cNvPr id="23" name="">
             <a:extLst xmlns:a="http://schemas.openxmlformats.org/drawingml/2006/main">
               <a:ext uri="{FF2B5EF4-FFF2-40B4-BE49-F238E27FC236}">
-                <a16:creationId xmlns:a16="http://schemas.microsoft.com/office/drawing/2014/main" id="{FD52BF7B-B0CD-42F1-9296-829128C62193}"/>
-              </a:ext>
-            </a:extLst>
-          </p:cNvPr>
-          <p:cNvSpPr>
-            <a:spLocks xmlns:a="http://schemas.openxmlformats.org/drawingml/2006/main" noGrp="1"/>
-          </p:cNvSpPr>
-          <p:nvPr/>
-        </p:nvSpPr>
-        <p:spPr>
-          <a:xfrm xmlns:a="http://schemas.openxmlformats.org/drawingml/2006/main">
-            <a:off x="5467350" y="4400550"/>
-            <a:ext cx="6115050" cy="304800"/>
+                <a16:creationId xmlns:a16="http://schemas.microsoft.com/office/drawing/2014/main" id="{169DF168-9F0E-4E42-B9FD-79A59CACC13F}"/>
+              </a:ext>
+            </a:extLst>
+          </p:cNvPr>
+          <p:cNvSpPr>
+            <a:spLocks xmlns:a="http://schemas.openxmlformats.org/drawingml/2006/main" noGrp="1"/>
+          </p:cNvSpPr>
+          <p:nvPr/>
+        </p:nvSpPr>
+        <p:spPr>
+          <a:xfrm xmlns:a="http://schemas.openxmlformats.org/drawingml/2006/main">
+            <a:off x="5276850" y="3867150"/>
+            <a:ext cx="6305550" cy="295275"/>
           </a:xfrm>
           <a:prstGeom xmlns:a="http://schemas.openxmlformats.org/drawingml/2006/main" prst="rect">
             <a:avLst/>
@@ -22228,7 +23183,7 @@
           <p:cNvPr id="24" name="">
             <a:extLst xmlns:a="http://schemas.openxmlformats.org/drawingml/2006/main">
               <a:ext uri="{FF2B5EF4-FFF2-40B4-BE49-F238E27FC236}">
-                <a16:creationId xmlns:a16="http://schemas.microsoft.com/office/drawing/2014/main" id="{508AC19B-15E0-4CDC-AC46-180FB9AB5D35}"/>
+                <a16:creationId xmlns:a16="http://schemas.microsoft.com/office/drawing/2014/main" id="{A6E831CC-1FE5-483B-A15B-2C201663DF94}"/>
               </a:ext>
             </a:extLst>
           </p:cNvPr>
@@ -22239,7 +23194,7 @@
         </p:nvSpPr>
         <p:spPr>
           <a:xfrm xmlns:a="http://schemas.openxmlformats.org/drawingml/2006/main" flipH="0" flipV="0">
-            <a:off x="609600" y="4953000"/>
+            <a:off x="609600" y="4324350"/>
             <a:ext cx="10972800" cy="0"/>
           </a:xfrm>
           <a:prstGeom xmlns:a="http://schemas.openxmlformats.org/drawingml/2006/main" prst="line">
@@ -22259,19 +23214,19 @@
           <p:cNvPr id="25" name="">
             <a:extLst xmlns:a="http://schemas.openxmlformats.org/drawingml/2006/main">
               <a:ext uri="{FF2B5EF4-FFF2-40B4-BE49-F238E27FC236}">
-                <a16:creationId xmlns:a16="http://schemas.microsoft.com/office/drawing/2014/main" id="{10D251A1-0E12-42EF-ACDE-10E8B2E8233F}"/>
-              </a:ext>
-            </a:extLst>
-          </p:cNvPr>
-          <p:cNvSpPr>
-            <a:spLocks xmlns:a="http://schemas.openxmlformats.org/drawingml/2006/main" noGrp="1"/>
-          </p:cNvSpPr>
-          <p:nvPr/>
-        </p:nvSpPr>
-        <p:spPr>
-          <a:xfrm xmlns:a="http://schemas.openxmlformats.org/drawingml/2006/main">
-            <a:off x="609600" y="5076825"/>
-            <a:ext cx="10972800" cy="295275"/>
+                <a16:creationId xmlns:a16="http://schemas.microsoft.com/office/drawing/2014/main" id="{CD72CEDC-3928-4094-AAD7-FE3D2C491B53}"/>
+              </a:ext>
+            </a:extLst>
+          </p:cNvPr>
+          <p:cNvSpPr>
+            <a:spLocks xmlns:a="http://schemas.openxmlformats.org/drawingml/2006/main" noGrp="1"/>
+          </p:cNvSpPr>
+          <p:nvPr/>
+        </p:nvSpPr>
+        <p:spPr>
+          <a:xfrm xmlns:a="http://schemas.openxmlformats.org/drawingml/2006/main">
+            <a:off x="609600" y="4410075"/>
+            <a:ext cx="10972800" cy="247650"/>
           </a:xfrm>
           <a:prstGeom xmlns:a="http://schemas.openxmlformats.org/drawingml/2006/main" prst="rect">
             <a:avLst/>
@@ -22288,7 +23243,64 @@
           <a:lstStyle xmlns:a="http://schemas.openxmlformats.org/drawingml/2006/main"/>
           <a:p xmlns:a="http://schemas.openxmlformats.org/drawingml/2006/main">
             <a:pPr algn="l">
-              <a:defRPr sz="1725" b="0">
+              <a:defRPr sz="1575" b="1">
+                <a:solidFill>
+                  <a:srgbClr val="F5B61C"/>
+                </a:solidFill>
+                <a:latin typeface="Roboto"/>
+                <a:ea typeface="Roboto"/>
+                <a:cs typeface="Roboto"/>
+              </a:defRPr>
+            </a:pPr>
+            <a:r>
+              <a:rPr sz="1575" b="1">
+                <a:solidFill>
+                  <a:srgbClr val="F5B61C"/>
+                </a:solidFill>
+                <a:latin typeface="Roboto"/>
+                <a:ea typeface="Roboto"/>
+                <a:cs typeface="Roboto"/>
+              </a:rPr>
+              <a:t>BUSINESS TOLERANCE CONTRACT</a:t>
+            </a:r>
+          </a:p>
+        </p:txBody>
+      </p:sp>
+      <p:sp>
+        <p:nvSpPr>
+          <p:cNvPr id="26" name="">
+            <a:extLst xmlns:a="http://schemas.openxmlformats.org/drawingml/2006/main">
+              <a:ext uri="{FF2B5EF4-FFF2-40B4-BE49-F238E27FC236}">
+                <a16:creationId xmlns:a16="http://schemas.microsoft.com/office/drawing/2014/main" id="{C9B5834A-534C-4AC1-A481-F0F70209D922}"/>
+              </a:ext>
+            </a:extLst>
+          </p:cNvPr>
+          <p:cNvSpPr>
+            <a:spLocks xmlns:a="http://schemas.openxmlformats.org/drawingml/2006/main" noGrp="1"/>
+          </p:cNvSpPr>
+          <p:nvPr/>
+        </p:nvSpPr>
+        <p:spPr>
+          <a:xfrm xmlns:a="http://schemas.openxmlformats.org/drawingml/2006/main">
+            <a:off x="609600" y="4762500"/>
+            <a:ext cx="5257800" cy="257175"/>
+          </a:xfrm>
+          <a:prstGeom xmlns:a="http://schemas.openxmlformats.org/drawingml/2006/main" prst="rect">
+            <a:avLst/>
+          </a:prstGeom>
+          <a:noFill xmlns:a="http://schemas.openxmlformats.org/drawingml/2006/main"/>
+          <a:ln xmlns:a="http://schemas.openxmlformats.org/drawingml/2006/main" w="0">
+            <a:noFill/>
+          </a:ln>
+        </p:spPr>
+        <p:txBody>
+          <a:bodyPr xmlns:a="http://schemas.openxmlformats.org/drawingml/2006/main" wrap="square" lIns="0" tIns="0" rIns="0" bIns="0" anchor="ctr">
+            <a:noAutofit/>
+          </a:bodyPr>
+          <a:lstStyle xmlns:a="http://schemas.openxmlformats.org/drawingml/2006/main"/>
+          <a:p xmlns:a="http://schemas.openxmlformats.org/drawingml/2006/main">
+            <a:pPr algn="l">
+              <a:defRPr sz="1650" b="0">
                 <a:solidFill>
                   <a:srgbClr val="F4F7FA"/>
                 </a:solidFill>
@@ -22298,7 +23310,7 @@
               </a:defRPr>
             </a:pPr>
             <a:r>
-              <a:rPr sz="1725" b="0">
+              <a:rPr sz="1650" b="0">
                 <a:solidFill>
                   <a:srgbClr val="F4F7FA"/>
                 </a:solidFill>
@@ -22306,6 +23318,291 @@
                 <a:ea typeface="Roboto"/>
                 <a:cs typeface="Roboto"/>
               </a:rPr>
+              <a:t>Allowed variation: wording</a:t>
+            </a:r>
+          </a:p>
+        </p:txBody>
+      </p:sp>
+      <p:sp>
+        <p:nvSpPr>
+          <p:cNvPr id="27" name="">
+            <a:extLst xmlns:a="http://schemas.openxmlformats.org/drawingml/2006/main">
+              <a:ext uri="{FF2B5EF4-FFF2-40B4-BE49-F238E27FC236}">
+                <a16:creationId xmlns:a16="http://schemas.microsoft.com/office/drawing/2014/main" id="{C6EF09E4-D9B7-4DFB-8C43-5130D822B178}"/>
+              </a:ext>
+            </a:extLst>
+          </p:cNvPr>
+          <p:cNvSpPr>
+            <a:spLocks xmlns:a="http://schemas.openxmlformats.org/drawingml/2006/main" noGrp="1"/>
+          </p:cNvSpPr>
+          <p:nvPr/>
+        </p:nvSpPr>
+        <p:spPr>
+          <a:xfrm xmlns:a="http://schemas.openxmlformats.org/drawingml/2006/main">
+            <a:off x="6286500" y="4762500"/>
+            <a:ext cx="5257800" cy="257175"/>
+          </a:xfrm>
+          <a:prstGeom xmlns:a="http://schemas.openxmlformats.org/drawingml/2006/main" prst="rect">
+            <a:avLst/>
+          </a:prstGeom>
+          <a:noFill xmlns:a="http://schemas.openxmlformats.org/drawingml/2006/main"/>
+          <a:ln xmlns:a="http://schemas.openxmlformats.org/drawingml/2006/main" w="0">
+            <a:noFill/>
+          </a:ln>
+        </p:spPr>
+        <p:txBody>
+          <a:bodyPr xmlns:a="http://schemas.openxmlformats.org/drawingml/2006/main" wrap="square" lIns="0" tIns="0" rIns="0" bIns="0" anchor="ctr">
+            <a:noAutofit/>
+          </a:bodyPr>
+          <a:lstStyle xmlns:a="http://schemas.openxmlformats.org/drawingml/2006/main"/>
+          <a:p xmlns:a="http://schemas.openxmlformats.org/drawingml/2006/main">
+            <a:pPr algn="l">
+              <a:defRPr sz="1650" b="0">
+                <a:solidFill>
+                  <a:srgbClr val="F4F7FA"/>
+                </a:solidFill>
+                <a:latin typeface="Roboto"/>
+                <a:ea typeface="Roboto"/>
+                <a:cs typeface="Roboto"/>
+              </a:defRPr>
+            </a:pPr>
+            <a:r>
+              <a:rPr sz="1650" b="0">
+                <a:solidFill>
+                  <a:srgbClr val="F4F7FA"/>
+                </a:solidFill>
+                <a:latin typeface="Roboto"/>
+                <a:ea typeface="Roboto"/>
+                <a:cs typeface="Roboto"/>
+              </a:rPr>
+              <a:t>Required meaning: approved steps</a:t>
+            </a:r>
+          </a:p>
+        </p:txBody>
+      </p:sp>
+      <p:sp>
+        <p:nvSpPr>
+          <p:cNvPr id="28" name="">
+            <a:extLst xmlns:a="http://schemas.openxmlformats.org/drawingml/2006/main">
+              <a:ext uri="{FF2B5EF4-FFF2-40B4-BE49-F238E27FC236}">
+                <a16:creationId xmlns:a16="http://schemas.microsoft.com/office/drawing/2014/main" id="{777A7C3B-CE35-4E98-AF07-23F8CBB44638}"/>
+              </a:ext>
+            </a:extLst>
+          </p:cNvPr>
+          <p:cNvSpPr>
+            <a:spLocks xmlns:a="http://schemas.openxmlformats.org/drawingml/2006/main" noGrp="1"/>
+          </p:cNvSpPr>
+          <p:nvPr/>
+        </p:nvSpPr>
+        <p:spPr>
+          <a:xfrm xmlns:a="http://schemas.openxmlformats.org/drawingml/2006/main">
+            <a:off x="609600" y="5057775"/>
+            <a:ext cx="5257800" cy="257175"/>
+          </a:xfrm>
+          <a:prstGeom xmlns:a="http://schemas.openxmlformats.org/drawingml/2006/main" prst="rect">
+            <a:avLst/>
+          </a:prstGeom>
+          <a:noFill xmlns:a="http://schemas.openxmlformats.org/drawingml/2006/main"/>
+          <a:ln xmlns:a="http://schemas.openxmlformats.org/drawingml/2006/main" w="0">
+            <a:noFill/>
+          </a:ln>
+        </p:spPr>
+        <p:txBody>
+          <a:bodyPr xmlns:a="http://schemas.openxmlformats.org/drawingml/2006/main" wrap="square" lIns="0" tIns="0" rIns="0" bIns="0" anchor="ctr">
+            <a:noAutofit/>
+          </a:bodyPr>
+          <a:lstStyle xmlns:a="http://schemas.openxmlformats.org/drawingml/2006/main"/>
+          <a:p xmlns:a="http://schemas.openxmlformats.org/drawingml/2006/main">
+            <a:pPr algn="l">
+              <a:defRPr sz="1650" b="0">
+                <a:solidFill>
+                  <a:srgbClr val="F4F7FA"/>
+                </a:solidFill>
+                <a:latin typeface="Roboto"/>
+                <a:ea typeface="Roboto"/>
+                <a:cs typeface="Roboto"/>
+              </a:defRPr>
+            </a:pPr>
+            <a:r>
+              <a:rPr sz="1650" b="0">
+                <a:solidFill>
+                  <a:srgbClr val="F4F7FA"/>
+                </a:solidFill>
+                <a:latin typeface="Roboto"/>
+                <a:ea typeface="Roboto"/>
+                <a:cs typeface="Roboto"/>
+              </a:rPr>
+              <a:t>Limits: rework, cost and latency</a:t>
+            </a:r>
+          </a:p>
+        </p:txBody>
+      </p:sp>
+      <p:sp>
+        <p:nvSpPr>
+          <p:cNvPr id="29" name="">
+            <a:extLst xmlns:a="http://schemas.openxmlformats.org/drawingml/2006/main">
+              <a:ext uri="{FF2B5EF4-FFF2-40B4-BE49-F238E27FC236}">
+                <a16:creationId xmlns:a16="http://schemas.microsoft.com/office/drawing/2014/main" id="{342736E0-2AC2-4E60-9B6B-33A2621A3815}"/>
+              </a:ext>
+            </a:extLst>
+          </p:cNvPr>
+          <p:cNvSpPr>
+            <a:spLocks xmlns:a="http://schemas.openxmlformats.org/drawingml/2006/main" noGrp="1"/>
+          </p:cNvSpPr>
+          <p:nvPr/>
+        </p:nvSpPr>
+        <p:spPr>
+          <a:xfrm xmlns:a="http://schemas.openxmlformats.org/drawingml/2006/main">
+            <a:off x="6286500" y="5057775"/>
+            <a:ext cx="5257800" cy="257175"/>
+          </a:xfrm>
+          <a:prstGeom xmlns:a="http://schemas.openxmlformats.org/drawingml/2006/main" prst="rect">
+            <a:avLst/>
+          </a:prstGeom>
+          <a:noFill xmlns:a="http://schemas.openxmlformats.org/drawingml/2006/main"/>
+          <a:ln xmlns:a="http://schemas.openxmlformats.org/drawingml/2006/main" w="0">
+            <a:noFill/>
+          </a:ln>
+        </p:spPr>
+        <p:txBody>
+          <a:bodyPr xmlns:a="http://schemas.openxmlformats.org/drawingml/2006/main" wrap="square" lIns="0" tIns="0" rIns="0" bIns="0" anchor="ctr">
+            <a:noAutofit/>
+          </a:bodyPr>
+          <a:lstStyle xmlns:a="http://schemas.openxmlformats.org/drawingml/2006/main"/>
+          <a:p xmlns:a="http://schemas.openxmlformats.org/drawingml/2006/main">
+            <a:pPr algn="l">
+              <a:defRPr sz="1650" b="0">
+                <a:solidFill>
+                  <a:srgbClr val="F4F7FA"/>
+                </a:solidFill>
+                <a:latin typeface="Roboto"/>
+                <a:ea typeface="Roboto"/>
+                <a:cs typeface="Roboto"/>
+              </a:defRPr>
+            </a:pPr>
+            <a:r>
+              <a:rPr sz="1650" b="0">
+                <a:solidFill>
+                  <a:srgbClr val="F4F7FA"/>
+                </a:solidFill>
+                <a:latin typeface="Roboto"/>
+                <a:ea typeface="Roboto"/>
+                <a:cs typeface="Roboto"/>
+              </a:rPr>
+              <a:t>Escalation: owner + fallback</a:t>
+            </a:r>
+          </a:p>
+        </p:txBody>
+      </p:sp>
+      <p:sp>
+        <p:nvSpPr>
+          <p:cNvPr id="30" name="">
+            <a:extLst xmlns:a="http://schemas.openxmlformats.org/drawingml/2006/main">
+              <a:ext uri="{FF2B5EF4-FFF2-40B4-BE49-F238E27FC236}">
+                <a16:creationId xmlns:a16="http://schemas.microsoft.com/office/drawing/2014/main" id="{6118A052-3ABC-478A-8D48-5C8DD9428E8E}"/>
+              </a:ext>
+            </a:extLst>
+          </p:cNvPr>
+          <p:cNvSpPr>
+            <a:spLocks xmlns:a="http://schemas.openxmlformats.org/drawingml/2006/main" noGrp="1"/>
+          </p:cNvSpPr>
+          <p:nvPr/>
+        </p:nvSpPr>
+        <p:spPr>
+          <a:xfrm xmlns:a="http://schemas.openxmlformats.org/drawingml/2006/main">
+            <a:off x="609600" y="5410200"/>
+            <a:ext cx="10972800" cy="266700"/>
+          </a:xfrm>
+          <a:prstGeom xmlns:a="http://schemas.openxmlformats.org/drawingml/2006/main" prst="rect">
+            <a:avLst/>
+          </a:prstGeom>
+          <a:noFill xmlns:a="http://schemas.openxmlformats.org/drawingml/2006/main"/>
+          <a:ln xmlns:a="http://schemas.openxmlformats.org/drawingml/2006/main" w="0">
+            <a:noFill/>
+          </a:ln>
+        </p:spPr>
+        <p:txBody>
+          <a:bodyPr xmlns:a="http://schemas.openxmlformats.org/drawingml/2006/main" wrap="square" lIns="0" tIns="0" rIns="0" bIns="0" anchor="ctr">
+            <a:noAutofit/>
+          </a:bodyPr>
+          <a:lstStyle xmlns:a="http://schemas.openxmlformats.org/drawingml/2006/main"/>
+          <a:p xmlns:a="http://schemas.openxmlformats.org/drawingml/2006/main">
+            <a:pPr algn="l">
+              <a:defRPr sz="1575" b="0">
+                <a:solidFill>
+                  <a:srgbClr val="ADB8C5"/>
+                </a:solidFill>
+                <a:latin typeface="Roboto"/>
+                <a:ea typeface="Roboto"/>
+                <a:cs typeface="Roboto"/>
+              </a:defRPr>
+            </a:pPr>
+            <a:r>
+              <a:rPr sz="1575" b="0">
+                <a:solidFill>
+                  <a:srgbClr val="ADB8C5"/>
+                </a:solidFill>
+                <a:latin typeface="Roboto"/>
+                <a:ea typeface="Roboto"/>
+                <a:cs typeface="Roboto"/>
+              </a:rPr>
+              <a:t>A prompt influences behavior. Examples and acceptance rules define the contract.</a:t>
+            </a:r>
+          </a:p>
+        </p:txBody>
+      </p:sp>
+      <p:sp>
+        <p:nvSpPr>
+          <p:cNvPr id="31" name="">
+            <a:extLst xmlns:a="http://schemas.openxmlformats.org/drawingml/2006/main">
+              <a:ext uri="{FF2B5EF4-FFF2-40B4-BE49-F238E27FC236}">
+                <a16:creationId xmlns:a16="http://schemas.microsoft.com/office/drawing/2014/main" id="{7DFEFF4C-E1B5-4DD4-B99D-FADC2ECDD2F5}"/>
+              </a:ext>
+            </a:extLst>
+          </p:cNvPr>
+          <p:cNvSpPr>
+            <a:spLocks xmlns:a="http://schemas.openxmlformats.org/drawingml/2006/main" noGrp="1"/>
+          </p:cNvSpPr>
+          <p:nvPr/>
+        </p:nvSpPr>
+        <p:spPr>
+          <a:xfrm xmlns:a="http://schemas.openxmlformats.org/drawingml/2006/main">
+            <a:off x="609600" y="5743575"/>
+            <a:ext cx="10972800" cy="257175"/>
+          </a:xfrm>
+          <a:prstGeom xmlns:a="http://schemas.openxmlformats.org/drawingml/2006/main" prst="rect">
+            <a:avLst/>
+          </a:prstGeom>
+          <a:noFill xmlns:a="http://schemas.openxmlformats.org/drawingml/2006/main"/>
+          <a:ln xmlns:a="http://schemas.openxmlformats.org/drawingml/2006/main" w="0">
+            <a:noFill/>
+          </a:ln>
+        </p:spPr>
+        <p:txBody>
+          <a:bodyPr xmlns:a="http://schemas.openxmlformats.org/drawingml/2006/main" wrap="square" lIns="0" tIns="0" rIns="0" bIns="0" anchor="ctr">
+            <a:noAutofit/>
+          </a:bodyPr>
+          <a:lstStyle xmlns:a="http://schemas.openxmlformats.org/drawingml/2006/main"/>
+          <a:p xmlns:a="http://schemas.openxmlformats.org/drawingml/2006/main">
+            <a:pPr algn="l">
+              <a:defRPr sz="1500" b="0">
+                <a:solidFill>
+                  <a:srgbClr val="F4F7FA"/>
+                </a:solidFill>
+                <a:latin typeface="Roboto"/>
+                <a:ea typeface="Roboto"/>
+                <a:cs typeface="Roboto"/>
+              </a:defRPr>
+            </a:pPr>
+            <a:r>
+              <a:rPr sz="1500" b="0">
+                <a:solidFill>
+                  <a:srgbClr val="F4F7FA"/>
+                </a:solidFill>
+                <a:latin typeface="Roboto"/>
+                <a:ea typeface="Roboto"/>
+                <a:cs typeface="Roboto"/>
+              </a:rPr>
               <a:t>Shared quality vocabulary exists. Product-specific semantic limits still need agreement.</a:t>
             </a:r>
           </a:p>
@@ -22313,22 +23610,22 @@
       </p:sp>
       <p:sp>
         <p:nvSpPr>
-          <p:cNvPr id="26" name="">
-            <a:extLst xmlns:a="http://schemas.openxmlformats.org/drawingml/2006/main">
-              <a:ext uri="{FF2B5EF4-FFF2-40B4-BE49-F238E27FC236}">
-                <a16:creationId xmlns:a16="http://schemas.microsoft.com/office/drawing/2014/main" id="{21C911ED-251C-4A19-8B66-D578588EBAB8}"/>
-              </a:ext>
-            </a:extLst>
-          </p:cNvPr>
-          <p:cNvSpPr>
-            <a:spLocks xmlns:a="http://schemas.openxmlformats.org/drawingml/2006/main" noGrp="1"/>
-          </p:cNvSpPr>
-          <p:nvPr/>
-        </p:nvSpPr>
-        <p:spPr>
-          <a:xfrm xmlns:a="http://schemas.openxmlformats.org/drawingml/2006/main">
-            <a:off x="609600" y="5448300"/>
-            <a:ext cx="10972800" cy="257175"/>
+          <p:cNvPr id="32" name="">
+            <a:extLst xmlns:a="http://schemas.openxmlformats.org/drawingml/2006/main">
+              <a:ext uri="{FF2B5EF4-FFF2-40B4-BE49-F238E27FC236}">
+                <a16:creationId xmlns:a16="http://schemas.microsoft.com/office/drawing/2014/main" id="{C22A686E-B1CF-4F22-BFB4-561874174772}"/>
+              </a:ext>
+            </a:extLst>
+          </p:cNvPr>
+          <p:cNvSpPr>
+            <a:spLocks xmlns:a="http://schemas.openxmlformats.org/drawingml/2006/main" noGrp="1"/>
+          </p:cNvSpPr>
+          <p:nvPr/>
+        </p:nvSpPr>
+        <p:spPr>
+          <a:xfrm xmlns:a="http://schemas.openxmlformats.org/drawingml/2006/main">
+            <a:off x="609600" y="6057900"/>
+            <a:ext cx="10972800" cy="238125"/>
           </a:xfrm>
           <a:prstGeom xmlns:a="http://schemas.openxmlformats.org/drawingml/2006/main" prst="rect">
             <a:avLst/>
@@ -22345,7 +23642,7 @@
           <a:lstStyle xmlns:a="http://schemas.openxmlformats.org/drawingml/2006/main"/>
           <a:p xmlns:a="http://schemas.openxmlformats.org/drawingml/2006/main">
             <a:pPr algn="l">
-              <a:defRPr sz="1425" b="0">
+              <a:defRPr sz="1350" b="0">
                 <a:solidFill>
                   <a:srgbClr val="ADB8C5"/>
                 </a:solidFill>
@@ -22355,7 +23652,7 @@
               </a:defRPr>
             </a:pPr>
             <a:r>
-              <a:rPr sz="1425" b="0">
+              <a:rPr sz="1350" b="0">
                 <a:solidFill>
                   <a:srgbClr val="ADB8C5"/>
                 </a:solidFill>
@@ -22370,53 +23667,22 @@
       </p:sp>
       <p:sp>
         <p:nvSpPr>
-          <p:cNvPr id="27" name="">
-            <a:extLst xmlns:a="http://schemas.openxmlformats.org/drawingml/2006/main">
-              <a:ext uri="{FF2B5EF4-FFF2-40B4-BE49-F238E27FC236}">
-                <a16:creationId xmlns:a16="http://schemas.microsoft.com/office/drawing/2014/main" id="{6536991D-3619-43DB-9868-9AB4D4BC79EF}"/>
-              </a:ext>
-            </a:extLst>
-          </p:cNvPr>
-          <p:cNvSpPr>
-            <a:spLocks xmlns:a="http://schemas.openxmlformats.org/drawingml/2006/main" noGrp="1"/>
-          </p:cNvSpPr>
-          <p:nvPr/>
-        </p:nvSpPr>
-        <p:spPr>
-          <a:xfrm xmlns:a="http://schemas.openxmlformats.org/drawingml/2006/main" flipH="0" flipV="0">
-            <a:off x="609600" y="5734050"/>
-            <a:ext cx="10972800" cy="0"/>
-          </a:xfrm>
-          <a:prstGeom xmlns:a="http://schemas.openxmlformats.org/drawingml/2006/main" prst="line">
-            <a:avLst/>
-          </a:prstGeom>
-          <a:noFill xmlns:a="http://schemas.openxmlformats.org/drawingml/2006/main"/>
-          <a:ln xmlns:a="http://schemas.openxmlformats.org/drawingml/2006/main" w="19050">
-            <a:solidFill>
-              <a:srgbClr val="344454"/>
-            </a:solidFill>
-            <a:prstDash val="solid"/>
-          </a:ln>
-        </p:spPr>
-      </p:sp>
-      <p:sp>
-        <p:nvSpPr>
-          <p:cNvPr id="28" name="">
-            <a:extLst xmlns:a="http://schemas.openxmlformats.org/drawingml/2006/main">
-              <a:ext uri="{FF2B5EF4-FFF2-40B4-BE49-F238E27FC236}">
-                <a16:creationId xmlns:a16="http://schemas.microsoft.com/office/drawing/2014/main" id="{E44E0BBC-C453-431B-B8AB-26390315ED70}"/>
-              </a:ext>
-            </a:extLst>
-          </p:cNvPr>
-          <p:cNvSpPr>
-            <a:spLocks xmlns:a="http://schemas.openxmlformats.org/drawingml/2006/main" noGrp="1"/>
-          </p:cNvSpPr>
-          <p:nvPr/>
-        </p:nvSpPr>
-        <p:spPr>
-          <a:xfrm xmlns:a="http://schemas.openxmlformats.org/drawingml/2006/main">
-            <a:off x="609600" y="5905500"/>
-            <a:ext cx="10648950" cy="666750"/>
+          <p:cNvPr id="33" name="">
+            <a:extLst xmlns:a="http://schemas.openxmlformats.org/drawingml/2006/main">
+              <a:ext uri="{FF2B5EF4-FFF2-40B4-BE49-F238E27FC236}">
+                <a16:creationId xmlns:a16="http://schemas.microsoft.com/office/drawing/2014/main" id="{E805AF79-324F-42AA-8D57-54D6B92B0737}"/>
+              </a:ext>
+            </a:extLst>
+          </p:cNvPr>
+          <p:cNvSpPr>
+            <a:spLocks xmlns:a="http://schemas.openxmlformats.org/drawingml/2006/main" noGrp="1"/>
+          </p:cNvSpPr>
+          <p:nvPr/>
+        </p:nvSpPr>
+        <p:spPr>
+          <a:xfrm xmlns:a="http://schemas.openxmlformats.org/drawingml/2006/main">
+            <a:off x="609600" y="6353175"/>
+            <a:ext cx="10648950" cy="304800"/>
           </a:xfrm>
           <a:prstGeom xmlns:a="http://schemas.openxmlformats.org/drawingml/2006/main" prst="rect">
             <a:avLst/>
@@ -22433,7 +23699,7 @@
           <a:lstStyle xmlns:a="http://schemas.openxmlformats.org/drawingml/2006/main"/>
           <a:p xmlns:a="http://schemas.openxmlformats.org/drawingml/2006/main">
             <a:pPr algn="l">
-              <a:defRPr sz="2025" b="1">
+              <a:defRPr sz="1875" b="1">
                 <a:solidFill>
                   <a:srgbClr val="F4F7FA"/>
                 </a:solidFill>
@@ -22443,7 +23709,7 @@
               </a:defRPr>
             </a:pPr>
             <a:r>
-              <a:rPr sz="2025" b="1">
+              <a:rPr sz="1875" b="1">
                 <a:solidFill>
                   <a:srgbClr val="F4F7FA"/>
                 </a:solidFill>
@@ -22459,7 +23725,7 @@
     </p:spTree>
     <p:extLst>
       <p:ext uri="{BB962C8B-B14F-4D97-AF65-F5344CB8AC3E}">
-        <p14:creationId xmlns:p14="http://schemas.microsoft.com/office/powerpoint/2010/main" val="1981166762"/>
+        <p14:creationId xmlns:p14="http://schemas.microsoft.com/office/powerpoint/2010/main" val="907131382"/>
       </p:ext>
     </p:extLst>
   </p:cSld>

--- a/assets/presentations/pmday-2026/ai-changes-both-sides.pptx
+++ b/assets/presentations/pmday-2026/ai-changes-both-sides.pptx
@@ -2,26 +2,26 @@
 <file path=ppt/presentation.xml><?xml version="1.0" encoding="utf-8"?>
 <p:presentation xmlns:p="http://schemas.openxmlformats.org/presentationml/2006/main" xmlns:r="http://schemas.openxmlformats.org/officeDocument/2006/relationships" embedTrueTypeFonts="1" saveSubsetFonts="0">
   <p:sldMasterIdLst>
-    <p:sldMasterId id="2147483648" r:id="Rfdcb9ee7896c4237"/>
+    <p:sldMasterId id="2147483648" r:id="Re95ee429059745ed"/>
   </p:sldMasterIdLst>
   <p:notesMasterIdLst>
-    <p:notesMasterId r:id="Rc8ea57c4871c444d"/>
+    <p:notesMasterId r:id="R7269d0d0a28846bb"/>
   </p:notesMasterIdLst>
   <p:sldIdLst>
-    <p:sldId id="256" r:id="Rf5adcd47a0a14bcb"/>
-    <p:sldId id="257" r:id="R22465a291ce441bc"/>
-    <p:sldId id="258" r:id="R54e9ddb0b04d4479"/>
-    <p:sldId id="259" r:id="R82f5e9bc4bd34d83"/>
-    <p:sldId id="260" r:id="R644dd115f96841df"/>
-    <p:sldId id="261" r:id="Rcf9544d11d0b4d4b"/>
-    <p:sldId id="262" r:id="R967c2346a4244444"/>
-    <p:sldId id="263" r:id="Rd8193ba3661d4462"/>
-    <p:sldId id="264" r:id="R3e81328f6fc54587"/>
-    <p:sldId id="265" r:id="R2a0811633db9433d"/>
-    <p:sldId id="266" r:id="Rf8fae3e60e664044"/>
-    <p:sldId id="267" r:id="Rbb0b09c3d6214181"/>
-    <p:sldId id="268" r:id="R3b6ec15628494196"/>
-    <p:sldId id="269" r:id="Ree03ea6431644011"/>
+    <p:sldId id="256" r:id="Ra594940ccb4a43b7"/>
+    <p:sldId id="257" r:id="R8474682efe704191"/>
+    <p:sldId id="258" r:id="R3b60accb82bb41b4"/>
+    <p:sldId id="259" r:id="Rbf2018390dc64637"/>
+    <p:sldId id="260" r:id="Ra2359db0dc334f2c"/>
+    <p:sldId id="261" r:id="R9d9994e7486e414f"/>
+    <p:sldId id="262" r:id="R1d2d39a1cbbc4d68"/>
+    <p:sldId id="263" r:id="R1b500ff596804ee5"/>
+    <p:sldId id="264" r:id="Rdc70dd7947404065"/>
+    <p:sldId id="265" r:id="R2af6bb1b16bb466a"/>
+    <p:sldId id="266" r:id="Re1d0e80115b24069"/>
+    <p:sldId id="267" r:id="Rdc6d74754d0e4baf"/>
+    <p:sldId id="268" r:id="Rb6a04a609ec6408a"/>
+    <p:sldId id="269" r:id="R025aeb5647734235"/>
   </p:sldIdLst>
   <p:sldSz cx="12192000" cy="6858000"/>
   <p:notesSz cx="6858000" cy="9144000"/>
@@ -592,6 +592,16 @@
           </a:p>
           <a:p xmlns:a="http://schemas.openxmlformats.org/drawingml/2006/main">
             <a:r>
+              <a:t>Візуальне уточнення за наданими скриншотами, 22 вересня 2026. Визначення дефекту й схематична область допусків адаптовані зі слайда 4 старої презентації з уточненням чинної UA doctrine Requirements, Correctness, and Bugs. Bug — порушення погодженої вимоги на рівні системи, яке спричинила або допустила реалізована система. Для model-mediated поведінки це, зокрема, вихід за погоджені умови чи допуски або заборонений наслідок. На схемі зелена область — дозволена варіативність, червоні стовпчики — наслідки за межами контракту, якщо система їх допустила. Графік концептуальний: висоти не є даними, нормальність не припускається, одиниць універсальної semantic distance немає. Схема і вибірка 196/3/1 — різні пояснювальні об’єкти; концептуальні стовпчики не відновлені з цих трьох категорій. Рідкісний результат не обов’язково Bug. Якщо запропоновану моделлю заборонену дію контролі належно зупинили до наслідку, це може бути коректним containment за контрактом. Якщо частота помилок допускається в певному контексті, потрібні також погоджені межі тяжкості, наслідків і правила обробки, а не тільки середній відсоток. Розподіл може змінюватися без змін коду, однак окремий tail event не доводить drift: для цього потрібні порівнювані вибірки, baseline, контекст і версії. Класичні детерміновані дефекти також залишаються. На екрані нижче збережено незалежний навчальний приклад: 196 прийнятних, 3 неправильні інструкції та 1 витік приватних даних, 4/200 = 2%, Wilson 95% приблизно 0,8%–5,0%. Частота і тяжкість — різні виміри рішення. У цьому прикладі витік порушує обов’язкову заборону й блокує release. Бізнес через Product/BA визначає прийнятність наслідків, QA/developers вимірюють і перевіряють evidence, уповноважений risk/release owner ухвалює рішення. Golden Set, Eval Gate, калібрування та incident regression залишаються робочими інструментами.</a:t>
+            </a:r>
+          </a:p>
+          <a:p xmlns:a="http://schemas.openxmlformats.org/drawingml/2006/main">
+            <a:r>
+              <a:t/>
+            </a:r>
+          </a:p>
+          <a:p xmlns:a="http://schemas.openxmlformats.org/drawingml/2006/main">
+            <a:r>
               <a:t>Sources:</a:t>
             </a:r>
           </a:p>
@@ -628,6 +638,16 @@
           <a:p xmlns:a="http://schemas.openxmlformats.org/drawingml/2006/main">
             <a:r>
               <a:t>https://github.com/UncertaintyArchitectureGroup/uncertainty-architecture/blob/main/content/raw/Designing%20Non-Deterministic%20Systems%3A%20Maintaining%20Engineering%20Rigor%20in%20the%20AI%20Era.pdf#page=19</a:t>
+            </a:r>
+          </a:p>
+          <a:p xmlns:a="http://schemas.openxmlformats.org/drawingml/2006/main">
+            <a:r>
+              <a:t>https://github.com/UncertaintyArchitectureGroup/uncertainty-architecture/blob/main/content/raw/Designing%20Non-Deterministic%20Systems%3A%20Maintaining%20Engineering%20Rigor%20in%20the%20AI%20Era.pdf#page=4</a:t>
+            </a:r>
+          </a:p>
+          <a:p xmlns:a="http://schemas.openxmlformats.org/drawingml/2006/main">
+            <a:r>
+              <a:t>https://github.com/UncertaintyArchitectureGroup/uncertainty-architecture/blob/main/00-doctrine/requirements-correctness-and-bugs.md</a:t>
             </a:r>
           </a:p>
         </p:txBody>
@@ -1877,12 +1897,27 @@
           </a:p>
           <a:p xmlns:a="http://schemas.openxmlformats.org/drawingml/2006/main">
             <a:r>
+              <a:t>Візуальне уточнення за наданими скриншотами, 22 вересня 2026. Графічне пояснення за слайдом 3 старої презентації: зліва одиничний результат за фіксованих input, state і version у детермінованому випадку, справа схематичний розподіл можливих результатів. Висота стовпчиків передає відносну частоту лише концептуально. Це не виміряна вибірка, не оцінка ймовірності, не твердження про нормальний розподіл чи математично важкі хвости. Горизонтальна вісь — умовна проєкція варіантів результату. Реальна семантика багатовимірна й може бути категоріальною. Центральна область показує корисну варіативність у прикладі, краї — рідші варіанти, які також потрібно оцінити. Рідкість сама по собі не робить результат дефектом. Інженерне завдання — сформулювати й реалізувати межі корисної поведінки. Детерміновані обов’язки, права та інваріанти в продукті залишаються. Обидві формули є навчальним контрастом, а не класифікацією всього software за одним параметром.</a:t>
+            </a:r>
+          </a:p>
+          <a:p xmlns:a="http://schemas.openxmlformats.org/drawingml/2006/main">
+            <a:r>
+              <a:t/>
+            </a:r>
+          </a:p>
+          <a:p xmlns:a="http://schemas.openxmlformats.org/drawingml/2006/main">
+            <a:r>
               <a:t>Sources:</a:t>
             </a:r>
           </a:p>
           <a:p xmlns:a="http://schemas.openxmlformats.org/drawingml/2006/main">
             <a:r>
               <a:t>https://github.com/UncertaintyArchitectureGroup/uncertainty-architecture/blob/main/00-doctrine/uncertainty-in-the-controlled-object.md</a:t>
+            </a:r>
+          </a:p>
+          <a:p xmlns:a="http://schemas.openxmlformats.org/drawingml/2006/main">
+            <a:r>
+              <a:t>https://github.com/UncertaintyArchitectureGroup/uncertainty-architecture/blob/main/content/raw/Designing%20Non-Deterministic%20Systems%3A%20Maintaining%20Engineering%20Rigor%20in%20the%20AI%20Era.pdf#page=3</a:t>
             </a:r>
           </a:p>
         </p:txBody>
@@ -2002,6 +2037,16 @@
           </a:p>
           <a:p xmlns:a="http://schemas.openxmlformats.org/drawingml/2006/main">
             <a:r>
+              <a:t>Візуальне уточнення за наданими скриншотами, 22 вересня 2026. Візуальна модель тепер безпосередньо відтворює логіку слайда 5 старої презентації: зліва вузький маршрут A–B, справа площина можливостей із перспективною сіткою, зовнішнім бурштиновим контуром погоджених допусків та внутрішньою блакитною областю цільової поведінки. Обидва прийнятні варіанти — коротке та докладне пояснення — належать спільній області. Зовні показано заборонений результат. Внутрішній контур — робочий орієнтир, зовнішній — контракт прийнятності. Простір між ними не є автоматичним дозволом: кожен результат повинен виконувати всі умови контракту. Це концептуальна багатовимірна область, а не виміряна координатна система чи універсальна embedding-distance метрика. Площина стисло показує сукупність умов щодо тем, джерел, обов’язкового змісту, даних, дій, authority, вартості, latency та failure handling. Вимога включає й точний сценарій, і цю область. CLARIFY визначає належну реакцію на нестачу контексту, а не ослаблення заборони. Попередні ALLOW / CLARIFY / PROHIBIT і приклади залишаються в нотатках та уточнюють геометрію.</a:t>
+            </a:r>
+          </a:p>
+          <a:p xmlns:a="http://schemas.openxmlformats.org/drawingml/2006/main">
+            <a:r>
+              <a:t/>
+            </a:r>
+          </a:p>
+          <a:p xmlns:a="http://schemas.openxmlformats.org/drawingml/2006/main">
+            <a:r>
               <a:t>Sources:</a:t>
             </a:r>
           </a:p>
@@ -2043,6 +2088,11 @@
           <a:p xmlns:a="http://schemas.openxmlformats.org/drawingml/2006/main">
             <a:r>
               <a:t>https://github.com/UncertaintyArchitectureGroup/uncertainty-architecture/blob/main/content/raw/Designing%20Non-Deterministic%20Systems%3A%20Maintaining%20Engineering%20Rigor%20in%20the%20AI%20Era.pdf#page=17</a:t>
+            </a:r>
+          </a:p>
+          <a:p xmlns:a="http://schemas.openxmlformats.org/drawingml/2006/main">
+            <a:r>
+              <a:t>https://github.com/UncertaintyArchitectureGroup/uncertainty-architecture/blob/main/content/raw/Designing%20Non-Deterministic%20Systems%3A%20Maintaining%20Engineering%20Rigor%20in%20the%20AI%20Era.pdf#page=5</a:t>
             </a:r>
           </a:p>
         </p:txBody>
@@ -2110,7 +2160,7 @@
   </p:cSld>
   <p:clrMap bg1="lt1" tx1="dk1" bg2="lt2" tx2="dk2" accent1="accent1" accent2="accent2" accent3="accent3" accent4="accent4" accent5="accent5" accent6="accent6" hlink="hlink" folHlink="folHlink"/>
   <p:sldLayoutIdLst>
-    <p:sldLayoutId xmlns:r="http://schemas.openxmlformats.org/officeDocument/2006/relationships" id="2147483649" r:id="Ra81427a03d2f4054"/>
+    <p:sldLayoutId xmlns:r="http://schemas.openxmlformats.org/officeDocument/2006/relationships" id="2147483649" r:id="Rdeb5ab3d99ba4023"/>
   </p:sldLayoutIdLst>
   <p:txStyles>
     <p:titleStyle>
@@ -2702,7 +2752,7 @@
                   <a:lstStyle xmlns:a="http://schemas.openxmlformats.org/drawingml/2006/main"/>
                   <a:p xmlns:a="http://schemas.openxmlformats.org/drawingml/2006/main">
                     <a:r>
-                      <a:rPr sz="1275" b="1">
+                      <a:rPr sz="1200" b="1">
                         <a:solidFill>
                           <a:srgbClr val="F4F7FA"/>
                         </a:solidFill>
@@ -2710,7 +2760,8 @@
                         <a:ea typeface="Roboto"/>
                         <a:cs typeface="Roboto"/>
                       </a:rPr>
-                      <a:t>196 (98%)</a:t>
+                      <a:t>196
+98%</a:t>
                     </a:r>
                   </a:p>
                 </c:rich>
@@ -2720,7 +2771,7 @@
                 <a:lstStyle xmlns:a="http://schemas.openxmlformats.org/drawingml/2006/main"/>
                 <a:p xmlns:a="http://schemas.openxmlformats.org/drawingml/2006/main">
                   <a:pPr>
-                    <a:defRPr sz="1275" b="1">
+                    <a:defRPr sz="1200" b="1">
                       <a:solidFill>
                         <a:srgbClr val="F4F7FA"/>
                       </a:solidFill>
@@ -2747,7 +2798,7 @@
                   <a:lstStyle xmlns:a="http://schemas.openxmlformats.org/drawingml/2006/main"/>
                   <a:p xmlns:a="http://schemas.openxmlformats.org/drawingml/2006/main">
                     <a:r>
-                      <a:rPr sz="1275" b="1">
+                      <a:rPr sz="1200" b="1">
                         <a:solidFill>
                           <a:srgbClr val="F4F7FA"/>
                         </a:solidFill>
@@ -2755,7 +2806,8 @@
                         <a:ea typeface="Roboto"/>
                         <a:cs typeface="Roboto"/>
                       </a:rPr>
-                      <a:t>3 (1.5%)</a:t>
+                      <a:t>3
+1.5%</a:t>
                     </a:r>
                   </a:p>
                 </c:rich>
@@ -2765,7 +2817,7 @@
                 <a:lstStyle xmlns:a="http://schemas.openxmlformats.org/drawingml/2006/main"/>
                 <a:p xmlns:a="http://schemas.openxmlformats.org/drawingml/2006/main">
                   <a:pPr>
-                    <a:defRPr sz="1275" b="1">
+                    <a:defRPr sz="1200" b="1">
                       <a:solidFill>
                         <a:srgbClr val="F4F7FA"/>
                       </a:solidFill>
@@ -2792,7 +2844,7 @@
                   <a:lstStyle xmlns:a="http://schemas.openxmlformats.org/drawingml/2006/main"/>
                   <a:p xmlns:a="http://schemas.openxmlformats.org/drawingml/2006/main">
                     <a:r>
-                      <a:rPr sz="1275" b="1">
+                      <a:rPr sz="1200" b="1">
                         <a:solidFill>
                           <a:srgbClr val="F4F7FA"/>
                         </a:solidFill>
@@ -2800,7 +2852,8 @@
                         <a:ea typeface="Roboto"/>
                         <a:cs typeface="Roboto"/>
                       </a:rPr>
-                      <a:t>1 (0.5%)</a:t>
+                      <a:t>1
+0.5%</a:t>
                     </a:r>
                   </a:p>
                 </c:rich>
@@ -2810,7 +2863,7 @@
                 <a:lstStyle xmlns:a="http://schemas.openxmlformats.org/drawingml/2006/main"/>
                 <a:p xmlns:a="http://schemas.openxmlformats.org/drawingml/2006/main">
                   <a:pPr>
-                    <a:defRPr sz="1275" b="1">
+                    <a:defRPr sz="1200" b="1">
                       <a:solidFill>
                         <a:srgbClr val="F4F7FA"/>
                       </a:solidFill>
@@ -2872,7 +2925,7 @@
             <a:lstStyle xmlns:a="http://schemas.openxmlformats.org/drawingml/2006/main"/>
             <a:p xmlns:a="http://schemas.openxmlformats.org/drawingml/2006/main">
               <a:pPr>
-                <a:defRPr sz="1275" b="1">
+                <a:defRPr sz="1200" b="1">
                   <a:solidFill>
                     <a:srgbClr val="F4F7FA"/>
                   </a:solidFill>
@@ -2918,7 +2971,7 @@
           <a:lstStyle xmlns:a="http://schemas.openxmlformats.org/drawingml/2006/main"/>
           <a:p xmlns:a="http://schemas.openxmlformats.org/drawingml/2006/main">
             <a:pPr>
-              <a:defRPr sz="1275">
+              <a:defRPr sz="1200">
                 <a:solidFill>
                   <a:srgbClr val="ADB8C5"/>
                 </a:solidFill>
@@ -2962,7 +3015,7 @@
           <a:lstStyle xmlns:a="http://schemas.openxmlformats.org/drawingml/2006/main"/>
           <a:p xmlns:a="http://schemas.openxmlformats.org/drawingml/2006/main">
             <a:pPr>
-              <a:defRPr sz="1200">
+              <a:defRPr sz="1125">
                 <a:solidFill>
                   <a:srgbClr val="ADB8C5"/>
                 </a:solidFill>
@@ -2975,7 +3028,7 @@
         </c:txPr>
         <c:crossAx val="48650112"/>
         <c:crossBetween val="between"/>
-        <c:majorUnit val="50"/>
+        <c:majorUnit val="100"/>
       </c:valAx>
       <c:spPr>
         <a:solidFill xmlns:a="http://schemas.openxmlformats.org/drawingml/2006/main">
@@ -3026,7 +3079,7 @@
           <p:cNvPr id="10" name="">
             <a:extLst xmlns:a="http://schemas.openxmlformats.org/drawingml/2006/main">
               <a:ext uri="{FF2B5EF4-FFF2-40B4-BE49-F238E27FC236}">
-                <a16:creationId xmlns:a16="http://schemas.microsoft.com/office/drawing/2014/main" id="{20F3CC44-2206-4978-8DE4-05A72051E64D}"/>
+                <a16:creationId xmlns:a16="http://schemas.microsoft.com/office/drawing/2014/main" id="{1BF87000-3E2B-412E-8031-9CAA145CFA9E}"/>
               </a:ext>
             </a:extLst>
           </p:cNvPr>
@@ -3083,7 +3136,7 @@
           <p:cNvPr id="2" name="">
             <a:extLst xmlns:a="http://schemas.openxmlformats.org/drawingml/2006/main">
               <a:ext uri="{FF2B5EF4-FFF2-40B4-BE49-F238E27FC236}">
-                <a16:creationId xmlns:a16="http://schemas.microsoft.com/office/drawing/2014/main" id="{694DAADF-EF9D-4506-9813-D1FE1F732A9F}"/>
+                <a16:creationId xmlns:a16="http://schemas.microsoft.com/office/drawing/2014/main" id="{3F2880F7-C93E-4C06-935A-B8CBDCFC2CA7}"/>
               </a:ext>
             </a:extLst>
           </p:cNvPr>
@@ -3163,7 +3216,7 @@
           <p:cNvPr id="3" name="">
             <a:extLst xmlns:a="http://schemas.openxmlformats.org/drawingml/2006/main">
               <a:ext uri="{FF2B5EF4-FFF2-40B4-BE49-F238E27FC236}">
-                <a16:creationId xmlns:a16="http://schemas.microsoft.com/office/drawing/2014/main" id="{F916C73D-CADA-4CE0-ADBC-69074599C454}"/>
+                <a16:creationId xmlns:a16="http://schemas.microsoft.com/office/drawing/2014/main" id="{32FF108F-BDEE-4CC6-BA05-EB15734E9AA6}"/>
               </a:ext>
             </a:extLst>
           </p:cNvPr>
@@ -3224,7 +3277,7 @@
           <p:nvPr/>
         </p:nvPicPr>
         <p:blipFill>
-          <a:blip xmlns:r="http://schemas.openxmlformats.org/officeDocument/2006/relationships" xmlns:a="http://schemas.openxmlformats.org/drawingml/2006/main" r:embed="R063c4ff176204e71"/>
+          <a:blip xmlns:r="http://schemas.openxmlformats.org/officeDocument/2006/relationships" xmlns:a="http://schemas.openxmlformats.org/drawingml/2006/main" r:embed="R6066cd9114c043b4"/>
           <a:stretch xmlns:a="http://schemas.openxmlformats.org/drawingml/2006/main"/>
         </p:blipFill>
         <p:spPr>
@@ -3242,7 +3295,7 @@
           <p:cNvPr id="5" name="">
             <a:extLst xmlns:a="http://schemas.openxmlformats.org/drawingml/2006/main">
               <a:ext uri="{FF2B5EF4-FFF2-40B4-BE49-F238E27FC236}">
-                <a16:creationId xmlns:a16="http://schemas.microsoft.com/office/drawing/2014/main" id="{87C91C7E-A9FF-4A79-9F95-43FFFB075EE1}"/>
+                <a16:creationId xmlns:a16="http://schemas.microsoft.com/office/drawing/2014/main" id="{B43F514F-C904-48B9-A567-E04BCDC28E9F}"/>
               </a:ext>
             </a:extLst>
           </p:cNvPr>
@@ -3299,7 +3352,7 @@
           <p:cNvPr id="6" name="">
             <a:extLst xmlns:a="http://schemas.openxmlformats.org/drawingml/2006/main">
               <a:ext uri="{FF2B5EF4-FFF2-40B4-BE49-F238E27FC236}">
-                <a16:creationId xmlns:a16="http://schemas.microsoft.com/office/drawing/2014/main" id="{0E11D32E-D64D-4646-89D2-F3B3083E0295}"/>
+                <a16:creationId xmlns:a16="http://schemas.microsoft.com/office/drawing/2014/main" id="{EDAB9CC1-C4A3-479F-B70C-549EE339E44B}"/>
               </a:ext>
             </a:extLst>
           </p:cNvPr>
@@ -3356,7 +3409,7 @@
           <p:cNvPr id="7" name="">
             <a:extLst xmlns:a="http://schemas.openxmlformats.org/drawingml/2006/main">
               <a:ext uri="{FF2B5EF4-FFF2-40B4-BE49-F238E27FC236}">
-                <a16:creationId xmlns:a16="http://schemas.microsoft.com/office/drawing/2014/main" id="{59D379CE-FE92-4847-83EA-5A708A2FFD30}"/>
+                <a16:creationId xmlns:a16="http://schemas.microsoft.com/office/drawing/2014/main" id="{8515CD5B-2640-4AA8-BED9-9BB1F66681CA}"/>
               </a:ext>
             </a:extLst>
           </p:cNvPr>
@@ -3413,7 +3466,7 @@
           <p:cNvPr id="8" name="">
             <a:extLst xmlns:a="http://schemas.openxmlformats.org/drawingml/2006/main">
               <a:ext uri="{FF2B5EF4-FFF2-40B4-BE49-F238E27FC236}">
-                <a16:creationId xmlns:a16="http://schemas.microsoft.com/office/drawing/2014/main" id="{91DC73BE-F732-4FBF-A808-3B79C3B0A453}"/>
+                <a16:creationId xmlns:a16="http://schemas.microsoft.com/office/drawing/2014/main" id="{F646F175-3A1B-444E-96C8-B0C1CC171D4B}"/>
               </a:ext>
             </a:extLst>
           </p:cNvPr>
@@ -3470,7 +3523,7 @@
           <p:cNvPr id="9" name="">
             <a:extLst xmlns:a="http://schemas.openxmlformats.org/drawingml/2006/main">
               <a:ext uri="{FF2B5EF4-FFF2-40B4-BE49-F238E27FC236}">
-                <a16:creationId xmlns:a16="http://schemas.microsoft.com/office/drawing/2014/main" id="{ECBEDA38-0931-4741-B42B-9D6D6204469B}"/>
+                <a16:creationId xmlns:a16="http://schemas.microsoft.com/office/drawing/2014/main" id="{36529BCD-737B-491C-9781-E896B9D47884}"/>
               </a:ext>
             </a:extLst>
           </p:cNvPr>
@@ -3525,7 +3578,7 @@
     </p:spTree>
     <p:extLst>
       <p:ext uri="{BB962C8B-B14F-4D97-AF65-F5344CB8AC3E}">
-        <p14:creationId xmlns:p14="http://schemas.microsoft.com/office/powerpoint/2010/main" val="282193042"/>
+        <p14:creationId xmlns:p14="http://schemas.microsoft.com/office/powerpoint/2010/main" val="2106144932"/>
       </p:ext>
     </p:extLst>
   </p:cSld>
@@ -3553,10 +3606,10 @@
       </p:grpSpPr>
       <p:sp>
         <p:nvSpPr>
-          <p:cNvPr id="27" name="">
-            <a:extLst xmlns:a="http://schemas.openxmlformats.org/drawingml/2006/main">
-              <a:ext uri="{FF2B5EF4-FFF2-40B4-BE49-F238E27FC236}">
-                <a16:creationId xmlns:a16="http://schemas.microsoft.com/office/drawing/2014/main" id="{4E1CC2A5-8243-4235-8B67-E424368717C5}"/>
+          <p:cNvPr id="46" name="">
+            <a:extLst xmlns:a="http://schemas.openxmlformats.org/drawingml/2006/main">
+              <a:ext uri="{FF2B5EF4-FFF2-40B4-BE49-F238E27FC236}">
+                <a16:creationId xmlns:a16="http://schemas.microsoft.com/office/drawing/2014/main" id="{C62A5AD7-9428-4360-8986-0E6429AFE10E}"/>
               </a:ext>
             </a:extLst>
           </p:cNvPr>
@@ -3613,7 +3666,7 @@
           <p:cNvPr id="2" name="">
             <a:extLst xmlns:a="http://schemas.openxmlformats.org/drawingml/2006/main">
               <a:ext uri="{FF2B5EF4-FFF2-40B4-BE49-F238E27FC236}">
-                <a16:creationId xmlns:a16="http://schemas.microsoft.com/office/drawing/2014/main" id="{F0543D30-F52C-4A94-97C2-E06916C13EED}"/>
+                <a16:creationId xmlns:a16="http://schemas.microsoft.com/office/drawing/2014/main" id="{94D386E3-FB25-40C8-A435-36A4E4626A9C}"/>
               </a:ext>
             </a:extLst>
           </p:cNvPr>
@@ -3644,7 +3697,7 @@
           <p:cNvPr id="3" name="">
             <a:extLst xmlns:a="http://schemas.openxmlformats.org/drawingml/2006/main">
               <a:ext uri="{FF2B5EF4-FFF2-40B4-BE49-F238E27FC236}">
-                <a16:creationId xmlns:a16="http://schemas.microsoft.com/office/drawing/2014/main" id="{7139AE07-F75E-4AF5-9D26-D9C22652C519}"/>
+                <a16:creationId xmlns:a16="http://schemas.microsoft.com/office/drawing/2014/main" id="{4E5EAB0F-AF74-4D25-B795-539D9BE72D69}"/>
               </a:ext>
             </a:extLst>
           </p:cNvPr>
@@ -3701,7 +3754,7 @@
           <p:cNvPr id="4" name="">
             <a:extLst xmlns:a="http://schemas.openxmlformats.org/drawingml/2006/main">
               <a:ext uri="{FF2B5EF4-FFF2-40B4-BE49-F238E27FC236}">
-                <a16:creationId xmlns:a16="http://schemas.microsoft.com/office/drawing/2014/main" id="{F4AA6AD0-3FDC-4887-965C-71C5A8243C52}"/>
+                <a16:creationId xmlns:a16="http://schemas.microsoft.com/office/drawing/2014/main" id="{902F2D9A-208B-487C-8102-220EB0D42E5B}"/>
               </a:ext>
             </a:extLst>
           </p:cNvPr>
@@ -3758,19 +3811,19 @@
           <p:cNvPr id="5" name="">
             <a:extLst xmlns:a="http://schemas.openxmlformats.org/drawingml/2006/main">
               <a:ext uri="{FF2B5EF4-FFF2-40B4-BE49-F238E27FC236}">
-                <a16:creationId xmlns:a16="http://schemas.microsoft.com/office/drawing/2014/main" id="{A812FEB6-C50B-465D-8DC0-AEE209407F6F}"/>
-              </a:ext>
-            </a:extLst>
-          </p:cNvPr>
-          <p:cNvSpPr>
-            <a:spLocks xmlns:a="http://schemas.openxmlformats.org/drawingml/2006/main" noGrp="1"/>
-          </p:cNvSpPr>
-          <p:nvPr/>
-        </p:nvSpPr>
-        <p:spPr>
-          <a:xfrm xmlns:a="http://schemas.openxmlformats.org/drawingml/2006/main">
-            <a:off x="609600" y="2076450"/>
-            <a:ext cx="5143500" cy="276225"/>
+                <a16:creationId xmlns:a16="http://schemas.microsoft.com/office/drawing/2014/main" id="{5D4D6A31-61A1-4464-8C92-C5F6AB5CC986}"/>
+              </a:ext>
+            </a:extLst>
+          </p:cNvPr>
+          <p:cNvSpPr>
+            <a:spLocks xmlns:a="http://schemas.openxmlformats.org/drawingml/2006/main" noGrp="1"/>
+          </p:cNvSpPr>
+          <p:nvPr/>
+        </p:nvSpPr>
+        <p:spPr>
+          <a:xfrm xmlns:a="http://schemas.openxmlformats.org/drawingml/2006/main">
+            <a:off x="609600" y="2105025"/>
+            <a:ext cx="4476750" cy="238125"/>
           </a:xfrm>
           <a:prstGeom xmlns:a="http://schemas.openxmlformats.org/drawingml/2006/main" prst="rect">
             <a:avLst/>
@@ -3787,63 +3840,905 @@
           <a:lstStyle xmlns:a="http://schemas.openxmlformats.org/drawingml/2006/main"/>
           <a:p xmlns:a="http://schemas.openxmlformats.org/drawingml/2006/main">
             <a:pPr algn="l">
-              <a:defRPr sz="1650" b="1">
-                <a:solidFill>
-                  <a:srgbClr val="28C7F7"/>
-                </a:solidFill>
-                <a:latin typeface="Roboto"/>
-                <a:ea typeface="Roboto"/>
-                <a:cs typeface="Roboto"/>
-              </a:defRPr>
-            </a:pPr>
-            <a:r>
-              <a:rPr sz="1650" b="1">
-                <a:solidFill>
-                  <a:srgbClr val="28C7F7"/>
-                </a:solidFill>
-                <a:latin typeface="Roboto"/>
-                <a:ea typeface="Roboto"/>
-                <a:cs typeface="Roboto"/>
-              </a:rPr>
-              <a:t>OUTPUT FREQUENCY</a:t>
-            </a:r>
-          </a:p>
-        </p:txBody>
-      </p:sp>
-      <p:graphicFrame>
-        <p:nvGraphicFramePr>
-          <p:cNvPr id="32" name="Chart"/>
-          <p:cNvGraphicFramePr/>
-          <p:nvPr/>
-        </p:nvGraphicFramePr>
-        <p:xfrm>
-          <a:off xmlns:a="http://schemas.openxmlformats.org/drawingml/2006/main" x="609600" y="2371725"/>
-          <a:ext xmlns:a="http://schemas.openxmlformats.org/drawingml/2006/main" cx="5143500" cy="2076450"/>
-        </p:xfrm>
-        <a:graphic xmlns:a="http://schemas.openxmlformats.org/drawingml/2006/main">
-          <a:graphicData uri="http://schemas.openxmlformats.org/drawingml/2006/chart">
-            <c:chart xmlns:r="http://schemas.openxmlformats.org/officeDocument/2006/relationships" xmlns:c="http://schemas.openxmlformats.org/drawingml/2006/chart" r:id="R3211feed631d48db"/>
-          </a:graphicData>
-        </a:graphic>
-      </p:graphicFrame>
+              <a:defRPr sz="1350" b="1">
+                <a:solidFill>
+                  <a:srgbClr val="F5B61C"/>
+                </a:solidFill>
+                <a:latin typeface="Roboto"/>
+                <a:ea typeface="Roboto"/>
+                <a:cs typeface="Roboto"/>
+              </a:defRPr>
+            </a:pPr>
+            <a:r>
+              <a:rPr sz="1350" b="1">
+                <a:solidFill>
+                  <a:srgbClr val="F5B61C"/>
+                </a:solidFill>
+                <a:latin typeface="Roboto"/>
+                <a:ea typeface="Roboto"/>
+                <a:cs typeface="Roboto"/>
+              </a:rPr>
+              <a:t>WHAT COUNTS AS A BUG</a:t>
+            </a:r>
+          </a:p>
+        </p:txBody>
+      </p:sp>
+      <p:sp>
+        <p:nvSpPr>
+          <p:cNvPr id="6" name="">
+            <a:extLst xmlns:a="http://schemas.openxmlformats.org/drawingml/2006/main">
+              <a:ext uri="{FF2B5EF4-FFF2-40B4-BE49-F238E27FC236}">
+                <a16:creationId xmlns:a16="http://schemas.microsoft.com/office/drawing/2014/main" id="{9F20DA0F-566B-446E-B71F-0F85B49B559E}"/>
+              </a:ext>
+            </a:extLst>
+          </p:cNvPr>
+          <p:cNvSpPr>
+            <a:spLocks xmlns:a="http://schemas.openxmlformats.org/drawingml/2006/main" noGrp="1"/>
+          </p:cNvSpPr>
+          <p:nvPr/>
+        </p:nvSpPr>
+        <p:spPr>
+          <a:xfrm xmlns:a="http://schemas.openxmlformats.org/drawingml/2006/main">
+            <a:off x="609600" y="2390775"/>
+            <a:ext cx="4476750" cy="647700"/>
+          </a:xfrm>
+          <a:prstGeom xmlns:a="http://schemas.openxmlformats.org/drawingml/2006/main" prst="rect">
+            <a:avLst/>
+          </a:prstGeom>
+          <a:noFill xmlns:a="http://schemas.openxmlformats.org/drawingml/2006/main"/>
+          <a:ln xmlns:a="http://schemas.openxmlformats.org/drawingml/2006/main" w="0">
+            <a:noFill/>
+          </a:ln>
+        </p:spPr>
+        <p:txBody>
+          <a:bodyPr xmlns:a="http://schemas.openxmlformats.org/drawingml/2006/main" wrap="square" lIns="0" tIns="0" rIns="0" bIns="0" anchor="ctr">
+            <a:noAutofit/>
+          </a:bodyPr>
+          <a:lstStyle xmlns:a="http://schemas.openxmlformats.org/drawingml/2006/main"/>
+          <a:p xmlns:a="http://schemas.openxmlformats.org/drawingml/2006/main">
+            <a:pPr algn="l">
+              <a:defRPr sz="2100" b="1">
+                <a:solidFill>
+                  <a:srgbClr val="F4F7FA"/>
+                </a:solidFill>
+                <a:latin typeface="Roboto"/>
+                <a:ea typeface="Roboto"/>
+                <a:cs typeface="Roboto"/>
+              </a:defRPr>
+            </a:pPr>
+            <a:r>
+              <a:rPr sz="2100" b="1">
+                <a:solidFill>
+                  <a:srgbClr val="F4F7FA"/>
+                </a:solidFill>
+                <a:latin typeface="Roboto"/>
+                <a:ea typeface="Roboto"/>
+                <a:cs typeface="Roboto"/>
+              </a:rPr>
+              <a:t>System behavior violates</a:t>
+            </a:r>
+          </a:p>
+          <a:p xmlns:a="http://schemas.openxmlformats.org/drawingml/2006/main">
+            <a:pPr algn="l">
+              <a:defRPr sz="2100" b="1">
+                <a:solidFill>
+                  <a:srgbClr val="F4F7FA"/>
+                </a:solidFill>
+                <a:latin typeface="Roboto"/>
+                <a:ea typeface="Roboto"/>
+                <a:cs typeface="Roboto"/>
+              </a:defRPr>
+            </a:pPr>
+            <a:r>
+              <a:rPr sz="2100" b="1">
+                <a:solidFill>
+                  <a:srgbClr val="F4F7FA"/>
+                </a:solidFill>
+                <a:latin typeface="Roboto"/>
+                <a:ea typeface="Roboto"/>
+                <a:cs typeface="Roboto"/>
+              </a:rPr>
+              <a:t>an approved requirement.</a:t>
+            </a:r>
+          </a:p>
+        </p:txBody>
+      </p:sp>
       <p:sp>
         <p:nvSpPr>
           <p:cNvPr id="7" name="">
             <a:extLst xmlns:a="http://schemas.openxmlformats.org/drawingml/2006/main">
               <a:ext uri="{FF2B5EF4-FFF2-40B4-BE49-F238E27FC236}">
-                <a16:creationId xmlns:a16="http://schemas.microsoft.com/office/drawing/2014/main" id="{65D23D23-5989-405C-A7D7-1D533FD697BF}"/>
-              </a:ext>
-            </a:extLst>
-          </p:cNvPr>
-          <p:cNvSpPr>
-            <a:spLocks xmlns:a="http://schemas.openxmlformats.org/drawingml/2006/main" noGrp="1"/>
-          </p:cNvSpPr>
-          <p:nvPr/>
-        </p:nvSpPr>
-        <p:spPr>
-          <a:xfrm xmlns:a="http://schemas.openxmlformats.org/drawingml/2006/main">
-            <a:off x="609600" y="4457700"/>
-            <a:ext cx="5143500" cy="238125"/>
+                <a16:creationId xmlns:a16="http://schemas.microsoft.com/office/drawing/2014/main" id="{BC0F21F8-D6EA-4250-AAEA-C04A6384DF36}"/>
+              </a:ext>
+            </a:extLst>
+          </p:cNvPr>
+          <p:cNvSpPr>
+            <a:spLocks xmlns:a="http://schemas.openxmlformats.org/drawingml/2006/main" noGrp="1"/>
+          </p:cNvSpPr>
+          <p:nvPr/>
+        </p:nvSpPr>
+        <p:spPr>
+          <a:xfrm xmlns:a="http://schemas.openxmlformats.org/drawingml/2006/main">
+            <a:off x="609600" y="3105150"/>
+            <a:ext cx="4619625" cy="504825"/>
+          </a:xfrm>
+          <a:prstGeom xmlns:a="http://schemas.openxmlformats.org/drawingml/2006/main" prst="rect">
+            <a:avLst/>
+          </a:prstGeom>
+          <a:noFill xmlns:a="http://schemas.openxmlformats.org/drawingml/2006/main"/>
+          <a:ln xmlns:a="http://schemas.openxmlformats.org/drawingml/2006/main" w="0">
+            <a:noFill/>
+          </a:ln>
+        </p:spPr>
+        <p:txBody>
+          <a:bodyPr xmlns:a="http://schemas.openxmlformats.org/drawingml/2006/main" wrap="square" lIns="0" tIns="0" rIns="0" bIns="0" anchor="ctr">
+            <a:noAutofit/>
+          </a:bodyPr>
+          <a:lstStyle xmlns:a="http://schemas.openxmlformats.org/drawingml/2006/main"/>
+          <a:p xmlns:a="http://schemas.openxmlformats.org/drawingml/2006/main">
+            <a:pPr algn="l">
+              <a:defRPr sz="1575" b="0">
+                <a:solidFill>
+                  <a:srgbClr val="ADB8C5"/>
+                </a:solidFill>
+                <a:latin typeface="Roboto"/>
+                <a:ea typeface="Roboto"/>
+                <a:cs typeface="Roboto"/>
+              </a:defRPr>
+            </a:pPr>
+            <a:r>
+              <a:rPr sz="1575" b="0">
+                <a:solidFill>
+                  <a:srgbClr val="ADB8C5"/>
+                </a:solidFill>
+                <a:latin typeface="Roboto"/>
+                <a:ea typeface="Roboto"/>
+                <a:cs typeface="Roboto"/>
+              </a:rPr>
+              <a:t>Model behavior can leave agreed tolerances</a:t>
+            </a:r>
+          </a:p>
+          <a:p xmlns:a="http://schemas.openxmlformats.org/drawingml/2006/main">
+            <a:pPr algn="l">
+              <a:defRPr sz="1575" b="0">
+                <a:solidFill>
+                  <a:srgbClr val="ADB8C5"/>
+                </a:solidFill>
+                <a:latin typeface="Roboto"/>
+                <a:ea typeface="Roboto"/>
+                <a:cs typeface="Roboto"/>
+              </a:defRPr>
+            </a:pPr>
+            <a:r>
+              <a:rPr sz="1575" b="0">
+                <a:solidFill>
+                  <a:srgbClr val="ADB8C5"/>
+                </a:solidFill>
+                <a:latin typeface="Roboto"/>
+                <a:ea typeface="Roboto"/>
+                <a:cs typeface="Roboto"/>
+              </a:rPr>
+              <a:t>or produce a prohibited outcome.</a:t>
+            </a:r>
+          </a:p>
+        </p:txBody>
+      </p:sp>
+      <p:sp>
+        <p:nvSpPr>
+          <p:cNvPr id="8" name="">
+            <a:extLst xmlns:a="http://schemas.openxmlformats.org/drawingml/2006/main">
+              <a:ext uri="{FF2B5EF4-FFF2-40B4-BE49-F238E27FC236}">
+                <a16:creationId xmlns:a16="http://schemas.microsoft.com/office/drawing/2014/main" id="{36AD539B-4627-4E29-9108-B31BA1613826}"/>
+              </a:ext>
+            </a:extLst>
+          </p:cNvPr>
+          <p:cNvSpPr>
+            <a:spLocks xmlns:a="http://schemas.openxmlformats.org/drawingml/2006/main" noGrp="1"/>
+          </p:cNvSpPr>
+          <p:nvPr/>
+        </p:nvSpPr>
+        <p:spPr>
+          <a:xfrm xmlns:a="http://schemas.openxmlformats.org/drawingml/2006/main">
+            <a:off x="609600" y="3657600"/>
+            <a:ext cx="4619625" cy="228600"/>
+          </a:xfrm>
+          <a:prstGeom xmlns:a="http://schemas.openxmlformats.org/drawingml/2006/main" prst="rect">
+            <a:avLst/>
+          </a:prstGeom>
+          <a:noFill xmlns:a="http://schemas.openxmlformats.org/drawingml/2006/main"/>
+          <a:ln xmlns:a="http://schemas.openxmlformats.org/drawingml/2006/main" w="0">
+            <a:noFill/>
+          </a:ln>
+        </p:spPr>
+        <p:txBody>
+          <a:bodyPr xmlns:a="http://schemas.openxmlformats.org/drawingml/2006/main" wrap="square" lIns="0" tIns="0" rIns="0" bIns="0" anchor="ctr">
+            <a:noAutofit/>
+          </a:bodyPr>
+          <a:lstStyle xmlns:a="http://schemas.openxmlformats.org/drawingml/2006/main"/>
+          <a:p xmlns:a="http://schemas.openxmlformats.org/drawingml/2006/main">
+            <a:pPr algn="l">
+              <a:defRPr sz="1275" b="0">
+                <a:solidFill>
+                  <a:srgbClr val="ADB8C5"/>
+                </a:solidFill>
+                <a:latin typeface="Roboto"/>
+                <a:ea typeface="Roboto"/>
+                <a:cs typeface="Roboto"/>
+              </a:defRPr>
+            </a:pPr>
+            <a:r>
+              <a:rPr sz="1275" b="0">
+                <a:solidFill>
+                  <a:srgbClr val="ADB8C5"/>
+                </a:solidFill>
+                <a:latin typeface="Roboto"/>
+                <a:ea typeface="Roboto"/>
+                <a:cs typeface="Roboto"/>
+              </a:rPr>
+              <a:t>The code may stay unchanged while behavior changes.</a:t>
+            </a:r>
+          </a:p>
+        </p:txBody>
+      </p:sp>
+      <p:sp>
+        <p:nvSpPr>
+          <p:cNvPr id="9" name="">
+            <a:extLst xmlns:a="http://schemas.openxmlformats.org/drawingml/2006/main">
+              <a:ext uri="{FF2B5EF4-FFF2-40B4-BE49-F238E27FC236}">
+                <a16:creationId xmlns:a16="http://schemas.microsoft.com/office/drawing/2014/main" id="{3104CB77-FC30-4C08-960C-BE1DD6A872C2}"/>
+              </a:ext>
+            </a:extLst>
+          </p:cNvPr>
+          <p:cNvSpPr>
+            <a:spLocks xmlns:a="http://schemas.openxmlformats.org/drawingml/2006/main" noGrp="1"/>
+          </p:cNvSpPr>
+          <p:nvPr/>
+        </p:nvSpPr>
+        <p:spPr>
+          <a:xfrm xmlns:a="http://schemas.openxmlformats.org/drawingml/2006/main">
+            <a:off x="6705600" y="2105025"/>
+            <a:ext cx="3771900" cy="238125"/>
+          </a:xfrm>
+          <a:prstGeom xmlns:a="http://schemas.openxmlformats.org/drawingml/2006/main" prst="rect">
+            <a:avLst/>
+          </a:prstGeom>
+          <a:noFill xmlns:a="http://schemas.openxmlformats.org/drawingml/2006/main"/>
+          <a:ln xmlns:a="http://schemas.openxmlformats.org/drawingml/2006/main" w="0">
+            <a:noFill/>
+          </a:ln>
+        </p:spPr>
+        <p:txBody>
+          <a:bodyPr xmlns:a="http://schemas.openxmlformats.org/drawingml/2006/main" wrap="square" lIns="0" tIns="0" rIns="0" bIns="0" anchor="ctr">
+            <a:noAutofit/>
+          </a:bodyPr>
+          <a:lstStyle xmlns:a="http://schemas.openxmlformats.org/drawingml/2006/main"/>
+          <a:p xmlns:a="http://schemas.openxmlformats.org/drawingml/2006/main">
+            <a:pPr algn="ctr">
+              <a:defRPr sz="1350" b="1">
+                <a:solidFill>
+                  <a:srgbClr val="57CB8F"/>
+                </a:solidFill>
+                <a:latin typeface="Roboto"/>
+                <a:ea typeface="Roboto"/>
+                <a:cs typeface="Roboto"/>
+              </a:defRPr>
+            </a:pPr>
+            <a:r>
+              <a:rPr sz="1350" b="1">
+                <a:solidFill>
+                  <a:srgbClr val="57CB8F"/>
+                </a:solidFill>
+                <a:latin typeface="Roboto"/>
+                <a:ea typeface="Roboto"/>
+                <a:cs typeface="Roboto"/>
+              </a:rPr>
+              <a:t>APPROVED BUSINESS TOLERANCES</a:t>
+            </a:r>
+          </a:p>
+        </p:txBody>
+      </p:sp>
+      <p:sp>
+        <p:nvSpPr>
+          <p:cNvPr id="10" name="">
+            <a:extLst xmlns:a="http://schemas.openxmlformats.org/drawingml/2006/main">
+              <a:ext uri="{FF2B5EF4-FFF2-40B4-BE49-F238E27FC236}">
+                <a16:creationId xmlns:a16="http://schemas.microsoft.com/office/drawing/2014/main" id="{0C9C5D74-8807-4757-AB11-58879699699A}"/>
+              </a:ext>
+            </a:extLst>
+          </p:cNvPr>
+          <p:cNvSpPr>
+            <a:spLocks xmlns:a="http://schemas.openxmlformats.org/drawingml/2006/main" noGrp="1"/>
+          </p:cNvSpPr>
+          <p:nvPr/>
+        </p:nvSpPr>
+        <p:spPr>
+          <a:xfrm xmlns:a="http://schemas.openxmlformats.org/drawingml/2006/main">
+            <a:off x="7639050" y="2409825"/>
+            <a:ext cx="2200275" cy="1276350"/>
+          </a:xfrm>
+          <a:prstGeom xmlns:a="http://schemas.openxmlformats.org/drawingml/2006/main" prst="rect">
+            <a:avLst/>
+          </a:prstGeom>
+          <a:solidFill xmlns:a="http://schemas.openxmlformats.org/drawingml/2006/main">
+            <a:srgbClr val="132A23"/>
+          </a:solidFill>
+          <a:ln xmlns:a="http://schemas.openxmlformats.org/drawingml/2006/main" w="0">
+            <a:noFill/>
+            <a:prstDash val="solid"/>
+          </a:ln>
+        </p:spPr>
+      </p:sp>
+      <p:sp>
+        <p:nvSpPr>
+          <p:cNvPr id="11" name="">
+            <a:extLst xmlns:a="http://schemas.openxmlformats.org/drawingml/2006/main">
+              <a:ext uri="{FF2B5EF4-FFF2-40B4-BE49-F238E27FC236}">
+                <a16:creationId xmlns:a16="http://schemas.microsoft.com/office/drawing/2014/main" id="{898F29B8-3324-4B40-B996-CF80E6BC5B65}"/>
+              </a:ext>
+            </a:extLst>
+          </p:cNvPr>
+          <p:cNvSpPr>
+            <a:spLocks xmlns:a="http://schemas.openxmlformats.org/drawingml/2006/main" noGrp="1"/>
+          </p:cNvSpPr>
+          <p:nvPr/>
+        </p:nvSpPr>
+        <p:spPr>
+          <a:xfrm xmlns:a="http://schemas.openxmlformats.org/drawingml/2006/main">
+            <a:off x="6496050" y="3543300"/>
+            <a:ext cx="219075" cy="142875"/>
+          </a:xfrm>
+          <a:prstGeom xmlns:a="http://schemas.openxmlformats.org/drawingml/2006/main" prst="rect">
+            <a:avLst/>
+          </a:prstGeom>
+          <a:solidFill xmlns:a="http://schemas.openxmlformats.org/drawingml/2006/main">
+            <a:srgbClr val="FF6B75"/>
+          </a:solidFill>
+          <a:ln xmlns:a="http://schemas.openxmlformats.org/drawingml/2006/main" w="0">
+            <a:solidFill>
+              <a:srgbClr val="FF6B75"/>
+            </a:solidFill>
+            <a:prstDash val="solid"/>
+          </a:ln>
+        </p:spPr>
+      </p:sp>
+      <p:sp>
+        <p:nvSpPr>
+          <p:cNvPr id="12" name="">
+            <a:extLst xmlns:a="http://schemas.openxmlformats.org/drawingml/2006/main">
+              <a:ext uri="{FF2B5EF4-FFF2-40B4-BE49-F238E27FC236}">
+                <a16:creationId xmlns:a16="http://schemas.microsoft.com/office/drawing/2014/main" id="{E1CCE427-079A-4950-95D1-9BDDC751AB80}"/>
+              </a:ext>
+            </a:extLst>
+          </p:cNvPr>
+          <p:cNvSpPr>
+            <a:spLocks xmlns:a="http://schemas.openxmlformats.org/drawingml/2006/main" noGrp="1"/>
+          </p:cNvSpPr>
+          <p:nvPr/>
+        </p:nvSpPr>
+        <p:spPr>
+          <a:xfrm xmlns:a="http://schemas.openxmlformats.org/drawingml/2006/main">
+            <a:off x="6800850" y="3467100"/>
+            <a:ext cx="219075" cy="219075"/>
+          </a:xfrm>
+          <a:prstGeom xmlns:a="http://schemas.openxmlformats.org/drawingml/2006/main" prst="rect">
+            <a:avLst/>
+          </a:prstGeom>
+          <a:solidFill xmlns:a="http://schemas.openxmlformats.org/drawingml/2006/main">
+            <a:srgbClr val="FF6B75"/>
+          </a:solidFill>
+          <a:ln xmlns:a="http://schemas.openxmlformats.org/drawingml/2006/main" w="0">
+            <a:solidFill>
+              <a:srgbClr val="FF6B75"/>
+            </a:solidFill>
+            <a:prstDash val="solid"/>
+          </a:ln>
+        </p:spPr>
+      </p:sp>
+      <p:sp>
+        <p:nvSpPr>
+          <p:cNvPr id="13" name="">
+            <a:extLst xmlns:a="http://schemas.openxmlformats.org/drawingml/2006/main">
+              <a:ext uri="{FF2B5EF4-FFF2-40B4-BE49-F238E27FC236}">
+                <a16:creationId xmlns:a16="http://schemas.microsoft.com/office/drawing/2014/main" id="{59F2EB2F-1F30-419D-B61F-9927B7FEC8D1}"/>
+              </a:ext>
+            </a:extLst>
+          </p:cNvPr>
+          <p:cNvSpPr>
+            <a:spLocks xmlns:a="http://schemas.openxmlformats.org/drawingml/2006/main" noGrp="1"/>
+          </p:cNvSpPr>
+          <p:nvPr/>
+        </p:nvSpPr>
+        <p:spPr>
+          <a:xfrm xmlns:a="http://schemas.openxmlformats.org/drawingml/2006/main">
+            <a:off x="7105650" y="3343275"/>
+            <a:ext cx="219075" cy="342900"/>
+          </a:xfrm>
+          <a:prstGeom xmlns:a="http://schemas.openxmlformats.org/drawingml/2006/main" prst="rect">
+            <a:avLst/>
+          </a:prstGeom>
+          <a:solidFill xmlns:a="http://schemas.openxmlformats.org/drawingml/2006/main">
+            <a:srgbClr val="FF6B75"/>
+          </a:solidFill>
+          <a:ln xmlns:a="http://schemas.openxmlformats.org/drawingml/2006/main" w="0">
+            <a:solidFill>
+              <a:srgbClr val="FF6B75"/>
+            </a:solidFill>
+            <a:prstDash val="solid"/>
+          </a:ln>
+        </p:spPr>
+      </p:sp>
+      <p:sp>
+        <p:nvSpPr>
+          <p:cNvPr id="14" name="">
+            <a:extLst xmlns:a="http://schemas.openxmlformats.org/drawingml/2006/main">
+              <a:ext uri="{FF2B5EF4-FFF2-40B4-BE49-F238E27FC236}">
+                <a16:creationId xmlns:a16="http://schemas.microsoft.com/office/drawing/2014/main" id="{4DCDE5D5-958A-4241-93CE-F35C1F5D33F1}"/>
+              </a:ext>
+            </a:extLst>
+          </p:cNvPr>
+          <p:cNvSpPr>
+            <a:spLocks xmlns:a="http://schemas.openxmlformats.org/drawingml/2006/main" noGrp="1"/>
+          </p:cNvSpPr>
+          <p:nvPr/>
+        </p:nvSpPr>
+        <p:spPr>
+          <a:xfrm xmlns:a="http://schemas.openxmlformats.org/drawingml/2006/main">
+            <a:off x="7410450" y="3190875"/>
+            <a:ext cx="219075" cy="495300"/>
+          </a:xfrm>
+          <a:prstGeom xmlns:a="http://schemas.openxmlformats.org/drawingml/2006/main" prst="rect">
+            <a:avLst/>
+          </a:prstGeom>
+          <a:solidFill xmlns:a="http://schemas.openxmlformats.org/drawingml/2006/main">
+            <a:srgbClr val="FF6B75"/>
+          </a:solidFill>
+          <a:ln xmlns:a="http://schemas.openxmlformats.org/drawingml/2006/main" w="0">
+            <a:solidFill>
+              <a:srgbClr val="FF6B75"/>
+            </a:solidFill>
+            <a:prstDash val="solid"/>
+          </a:ln>
+        </p:spPr>
+      </p:sp>
+      <p:sp>
+        <p:nvSpPr>
+          <p:cNvPr id="15" name="">
+            <a:extLst xmlns:a="http://schemas.openxmlformats.org/drawingml/2006/main">
+              <a:ext uri="{FF2B5EF4-FFF2-40B4-BE49-F238E27FC236}">
+                <a16:creationId xmlns:a16="http://schemas.microsoft.com/office/drawing/2014/main" id="{3F997D2C-6A8C-4CBD-AC74-8A7D1460AADB}"/>
+              </a:ext>
+            </a:extLst>
+          </p:cNvPr>
+          <p:cNvSpPr>
+            <a:spLocks xmlns:a="http://schemas.openxmlformats.org/drawingml/2006/main" noGrp="1"/>
+          </p:cNvSpPr>
+          <p:nvPr/>
+        </p:nvSpPr>
+        <p:spPr>
+          <a:xfrm xmlns:a="http://schemas.openxmlformats.org/drawingml/2006/main">
+            <a:off x="7715250" y="3000375"/>
+            <a:ext cx="219075" cy="685800"/>
+          </a:xfrm>
+          <a:prstGeom xmlns:a="http://schemas.openxmlformats.org/drawingml/2006/main" prst="rect">
+            <a:avLst/>
+          </a:prstGeom>
+          <a:solidFill xmlns:a="http://schemas.openxmlformats.org/drawingml/2006/main">
+            <a:srgbClr val="57CB8F"/>
+          </a:solidFill>
+          <a:ln xmlns:a="http://schemas.openxmlformats.org/drawingml/2006/main" w="0">
+            <a:solidFill>
+              <a:srgbClr val="57CB8F"/>
+            </a:solidFill>
+            <a:prstDash val="solid"/>
+          </a:ln>
+        </p:spPr>
+      </p:sp>
+      <p:sp>
+        <p:nvSpPr>
+          <p:cNvPr id="16" name="">
+            <a:extLst xmlns:a="http://schemas.openxmlformats.org/drawingml/2006/main">
+              <a:ext uri="{FF2B5EF4-FFF2-40B4-BE49-F238E27FC236}">
+                <a16:creationId xmlns:a16="http://schemas.microsoft.com/office/drawing/2014/main" id="{16801296-2BFF-45D7-BD15-BD89D9824C95}"/>
+              </a:ext>
+            </a:extLst>
+          </p:cNvPr>
+          <p:cNvSpPr>
+            <a:spLocks xmlns:a="http://schemas.openxmlformats.org/drawingml/2006/main" noGrp="1"/>
+          </p:cNvSpPr>
+          <p:nvPr/>
+        </p:nvSpPr>
+        <p:spPr>
+          <a:xfrm xmlns:a="http://schemas.openxmlformats.org/drawingml/2006/main">
+            <a:off x="8020050" y="2752725"/>
+            <a:ext cx="219075" cy="933450"/>
+          </a:xfrm>
+          <a:prstGeom xmlns:a="http://schemas.openxmlformats.org/drawingml/2006/main" prst="rect">
+            <a:avLst/>
+          </a:prstGeom>
+          <a:solidFill xmlns:a="http://schemas.openxmlformats.org/drawingml/2006/main">
+            <a:srgbClr val="57CB8F"/>
+          </a:solidFill>
+          <a:ln xmlns:a="http://schemas.openxmlformats.org/drawingml/2006/main" w="0">
+            <a:solidFill>
+              <a:srgbClr val="57CB8F"/>
+            </a:solidFill>
+            <a:prstDash val="solid"/>
+          </a:ln>
+        </p:spPr>
+      </p:sp>
+      <p:sp>
+        <p:nvSpPr>
+          <p:cNvPr id="17" name="">
+            <a:extLst xmlns:a="http://schemas.openxmlformats.org/drawingml/2006/main">
+              <a:ext uri="{FF2B5EF4-FFF2-40B4-BE49-F238E27FC236}">
+                <a16:creationId xmlns:a16="http://schemas.microsoft.com/office/drawing/2014/main" id="{1706FEA9-F1C8-4FFB-B8BC-096C52A9C8A3}"/>
+              </a:ext>
+            </a:extLst>
+          </p:cNvPr>
+          <p:cNvSpPr>
+            <a:spLocks xmlns:a="http://schemas.openxmlformats.org/drawingml/2006/main" noGrp="1"/>
+          </p:cNvSpPr>
+          <p:nvPr/>
+        </p:nvSpPr>
+        <p:spPr>
+          <a:xfrm xmlns:a="http://schemas.openxmlformats.org/drawingml/2006/main">
+            <a:off x="8324850" y="2533650"/>
+            <a:ext cx="219075" cy="1152525"/>
+          </a:xfrm>
+          <a:prstGeom xmlns:a="http://schemas.openxmlformats.org/drawingml/2006/main" prst="rect">
+            <a:avLst/>
+          </a:prstGeom>
+          <a:solidFill xmlns:a="http://schemas.openxmlformats.org/drawingml/2006/main">
+            <a:srgbClr val="57CB8F"/>
+          </a:solidFill>
+          <a:ln xmlns:a="http://schemas.openxmlformats.org/drawingml/2006/main" w="0">
+            <a:solidFill>
+              <a:srgbClr val="57CB8F"/>
+            </a:solidFill>
+            <a:prstDash val="solid"/>
+          </a:ln>
+        </p:spPr>
+      </p:sp>
+      <p:sp>
+        <p:nvSpPr>
+          <p:cNvPr id="18" name="">
+            <a:extLst xmlns:a="http://schemas.openxmlformats.org/drawingml/2006/main">
+              <a:ext uri="{FF2B5EF4-FFF2-40B4-BE49-F238E27FC236}">
+                <a16:creationId xmlns:a16="http://schemas.microsoft.com/office/drawing/2014/main" id="{FE34FCEF-E3A1-49C5-9DEB-636AB6A7DD23}"/>
+              </a:ext>
+            </a:extLst>
+          </p:cNvPr>
+          <p:cNvSpPr>
+            <a:spLocks xmlns:a="http://schemas.openxmlformats.org/drawingml/2006/main" noGrp="1"/>
+          </p:cNvSpPr>
+          <p:nvPr/>
+        </p:nvSpPr>
+        <p:spPr>
+          <a:xfrm xmlns:a="http://schemas.openxmlformats.org/drawingml/2006/main">
+            <a:off x="8629650" y="2705100"/>
+            <a:ext cx="219075" cy="981075"/>
+          </a:xfrm>
+          <a:prstGeom xmlns:a="http://schemas.openxmlformats.org/drawingml/2006/main" prst="rect">
+            <a:avLst/>
+          </a:prstGeom>
+          <a:solidFill xmlns:a="http://schemas.openxmlformats.org/drawingml/2006/main">
+            <a:srgbClr val="57CB8F"/>
+          </a:solidFill>
+          <a:ln xmlns:a="http://schemas.openxmlformats.org/drawingml/2006/main" w="0">
+            <a:solidFill>
+              <a:srgbClr val="57CB8F"/>
+            </a:solidFill>
+            <a:prstDash val="solid"/>
+          </a:ln>
+        </p:spPr>
+      </p:sp>
+      <p:sp>
+        <p:nvSpPr>
+          <p:cNvPr id="19" name="">
+            <a:extLst xmlns:a="http://schemas.openxmlformats.org/drawingml/2006/main">
+              <a:ext uri="{FF2B5EF4-FFF2-40B4-BE49-F238E27FC236}">
+                <a16:creationId xmlns:a16="http://schemas.microsoft.com/office/drawing/2014/main" id="{6BB82CC8-C392-4E5F-9568-3D097612F37E}"/>
+              </a:ext>
+            </a:extLst>
+          </p:cNvPr>
+          <p:cNvSpPr>
+            <a:spLocks xmlns:a="http://schemas.openxmlformats.org/drawingml/2006/main" noGrp="1"/>
+          </p:cNvSpPr>
+          <p:nvPr/>
+        </p:nvSpPr>
+        <p:spPr>
+          <a:xfrm xmlns:a="http://schemas.openxmlformats.org/drawingml/2006/main">
+            <a:off x="8934450" y="2952750"/>
+            <a:ext cx="219075" cy="733425"/>
+          </a:xfrm>
+          <a:prstGeom xmlns:a="http://schemas.openxmlformats.org/drawingml/2006/main" prst="rect">
+            <a:avLst/>
+          </a:prstGeom>
+          <a:solidFill xmlns:a="http://schemas.openxmlformats.org/drawingml/2006/main">
+            <a:srgbClr val="57CB8F"/>
+          </a:solidFill>
+          <a:ln xmlns:a="http://schemas.openxmlformats.org/drawingml/2006/main" w="0">
+            <a:solidFill>
+              <a:srgbClr val="57CB8F"/>
+            </a:solidFill>
+            <a:prstDash val="solid"/>
+          </a:ln>
+        </p:spPr>
+      </p:sp>
+      <p:sp>
+        <p:nvSpPr>
+          <p:cNvPr id="20" name="">
+            <a:extLst xmlns:a="http://schemas.openxmlformats.org/drawingml/2006/main">
+              <a:ext uri="{FF2B5EF4-FFF2-40B4-BE49-F238E27FC236}">
+                <a16:creationId xmlns:a16="http://schemas.microsoft.com/office/drawing/2014/main" id="{082C51E3-E094-4D74-A1EA-DAFE6461969F}"/>
+              </a:ext>
+            </a:extLst>
+          </p:cNvPr>
+          <p:cNvSpPr>
+            <a:spLocks xmlns:a="http://schemas.openxmlformats.org/drawingml/2006/main" noGrp="1"/>
+          </p:cNvSpPr>
+          <p:nvPr/>
+        </p:nvSpPr>
+        <p:spPr>
+          <a:xfrm xmlns:a="http://schemas.openxmlformats.org/drawingml/2006/main">
+            <a:off x="9239250" y="3171825"/>
+            <a:ext cx="219075" cy="514350"/>
+          </a:xfrm>
+          <a:prstGeom xmlns:a="http://schemas.openxmlformats.org/drawingml/2006/main" prst="rect">
+            <a:avLst/>
+          </a:prstGeom>
+          <a:solidFill xmlns:a="http://schemas.openxmlformats.org/drawingml/2006/main">
+            <a:srgbClr val="57CB8F"/>
+          </a:solidFill>
+          <a:ln xmlns:a="http://schemas.openxmlformats.org/drawingml/2006/main" w="0">
+            <a:solidFill>
+              <a:srgbClr val="57CB8F"/>
+            </a:solidFill>
+            <a:prstDash val="solid"/>
+          </a:ln>
+        </p:spPr>
+      </p:sp>
+      <p:sp>
+        <p:nvSpPr>
+          <p:cNvPr id="21" name="">
+            <a:extLst xmlns:a="http://schemas.openxmlformats.org/drawingml/2006/main">
+              <a:ext uri="{FF2B5EF4-FFF2-40B4-BE49-F238E27FC236}">
+                <a16:creationId xmlns:a16="http://schemas.microsoft.com/office/drawing/2014/main" id="{595C480A-1588-4834-B308-4627B704BEC4}"/>
+              </a:ext>
+            </a:extLst>
+          </p:cNvPr>
+          <p:cNvSpPr>
+            <a:spLocks xmlns:a="http://schemas.openxmlformats.org/drawingml/2006/main" noGrp="1"/>
+          </p:cNvSpPr>
+          <p:nvPr/>
+        </p:nvSpPr>
+        <p:spPr>
+          <a:xfrm xmlns:a="http://schemas.openxmlformats.org/drawingml/2006/main">
+            <a:off x="9544050" y="3352800"/>
+            <a:ext cx="219075" cy="333375"/>
+          </a:xfrm>
+          <a:prstGeom xmlns:a="http://schemas.openxmlformats.org/drawingml/2006/main" prst="rect">
+            <a:avLst/>
+          </a:prstGeom>
+          <a:solidFill xmlns:a="http://schemas.openxmlformats.org/drawingml/2006/main">
+            <a:srgbClr val="57CB8F"/>
+          </a:solidFill>
+          <a:ln xmlns:a="http://schemas.openxmlformats.org/drawingml/2006/main" w="0">
+            <a:solidFill>
+              <a:srgbClr val="57CB8F"/>
+            </a:solidFill>
+            <a:prstDash val="solid"/>
+          </a:ln>
+        </p:spPr>
+      </p:sp>
+      <p:sp>
+        <p:nvSpPr>
+          <p:cNvPr id="22" name="">
+            <a:extLst xmlns:a="http://schemas.openxmlformats.org/drawingml/2006/main">
+              <a:ext uri="{FF2B5EF4-FFF2-40B4-BE49-F238E27FC236}">
+                <a16:creationId xmlns:a16="http://schemas.microsoft.com/office/drawing/2014/main" id="{32B4A88D-97BB-4F10-81FB-B867141A4F86}"/>
+              </a:ext>
+            </a:extLst>
+          </p:cNvPr>
+          <p:cNvSpPr>
+            <a:spLocks xmlns:a="http://schemas.openxmlformats.org/drawingml/2006/main" noGrp="1"/>
+          </p:cNvSpPr>
+          <p:nvPr/>
+        </p:nvSpPr>
+        <p:spPr>
+          <a:xfrm xmlns:a="http://schemas.openxmlformats.org/drawingml/2006/main">
+            <a:off x="9848850" y="3457575"/>
+            <a:ext cx="219075" cy="228600"/>
+          </a:xfrm>
+          <a:prstGeom xmlns:a="http://schemas.openxmlformats.org/drawingml/2006/main" prst="rect">
+            <a:avLst/>
+          </a:prstGeom>
+          <a:solidFill xmlns:a="http://schemas.openxmlformats.org/drawingml/2006/main">
+            <a:srgbClr val="FF6B75"/>
+          </a:solidFill>
+          <a:ln xmlns:a="http://schemas.openxmlformats.org/drawingml/2006/main" w="0">
+            <a:solidFill>
+              <a:srgbClr val="FF6B75"/>
+            </a:solidFill>
+            <a:prstDash val="solid"/>
+          </a:ln>
+        </p:spPr>
+      </p:sp>
+      <p:sp>
+        <p:nvSpPr>
+          <p:cNvPr id="23" name="">
+            <a:extLst xmlns:a="http://schemas.openxmlformats.org/drawingml/2006/main">
+              <a:ext uri="{FF2B5EF4-FFF2-40B4-BE49-F238E27FC236}">
+                <a16:creationId xmlns:a16="http://schemas.microsoft.com/office/drawing/2014/main" id="{70E6D1C6-1DD0-47E3-BD71-BB395A784AF9}"/>
+              </a:ext>
+            </a:extLst>
+          </p:cNvPr>
+          <p:cNvSpPr>
+            <a:spLocks xmlns:a="http://schemas.openxmlformats.org/drawingml/2006/main" noGrp="1"/>
+          </p:cNvSpPr>
+          <p:nvPr/>
+        </p:nvSpPr>
+        <p:spPr>
+          <a:xfrm xmlns:a="http://schemas.openxmlformats.org/drawingml/2006/main">
+            <a:off x="10153650" y="3543300"/>
+            <a:ext cx="219075" cy="142875"/>
+          </a:xfrm>
+          <a:prstGeom xmlns:a="http://schemas.openxmlformats.org/drawingml/2006/main" prst="rect">
+            <a:avLst/>
+          </a:prstGeom>
+          <a:solidFill xmlns:a="http://schemas.openxmlformats.org/drawingml/2006/main">
+            <a:srgbClr val="FF6B75"/>
+          </a:solidFill>
+          <a:ln xmlns:a="http://schemas.openxmlformats.org/drawingml/2006/main" w="0">
+            <a:solidFill>
+              <a:srgbClr val="FF6B75"/>
+            </a:solidFill>
+            <a:prstDash val="solid"/>
+          </a:ln>
+        </p:spPr>
+      </p:sp>
+      <p:sp>
+        <p:nvSpPr>
+          <p:cNvPr id="24" name="">
+            <a:extLst xmlns:a="http://schemas.openxmlformats.org/drawingml/2006/main">
+              <a:ext uri="{FF2B5EF4-FFF2-40B4-BE49-F238E27FC236}">
+                <a16:creationId xmlns:a16="http://schemas.microsoft.com/office/drawing/2014/main" id="{D66397FB-A5AE-489C-A448-F8D834B12480}"/>
+              </a:ext>
+            </a:extLst>
+          </p:cNvPr>
+          <p:cNvSpPr>
+            <a:spLocks xmlns:a="http://schemas.openxmlformats.org/drawingml/2006/main" noGrp="1"/>
+          </p:cNvSpPr>
+          <p:nvPr/>
+        </p:nvSpPr>
+        <p:spPr>
+          <a:xfrm xmlns:a="http://schemas.openxmlformats.org/drawingml/2006/main" flipH="0" flipV="0">
+            <a:off x="7639050" y="2390775"/>
+            <a:ext cx="0" cy="1304925"/>
+          </a:xfrm>
+          <a:prstGeom xmlns:a="http://schemas.openxmlformats.org/drawingml/2006/main" prst="line">
+            <a:avLst/>
+          </a:prstGeom>
+          <a:noFill xmlns:a="http://schemas.openxmlformats.org/drawingml/2006/main"/>
+          <a:ln xmlns:a="http://schemas.openxmlformats.org/drawingml/2006/main" w="19050">
+            <a:solidFill>
+              <a:srgbClr val="57CB8F"/>
+            </a:solidFill>
+            <a:prstDash val="solid"/>
+          </a:ln>
+        </p:spPr>
+      </p:sp>
+      <p:sp>
+        <p:nvSpPr>
+          <p:cNvPr id="25" name="">
+            <a:extLst xmlns:a="http://schemas.openxmlformats.org/drawingml/2006/main">
+              <a:ext uri="{FF2B5EF4-FFF2-40B4-BE49-F238E27FC236}">
+                <a16:creationId xmlns:a16="http://schemas.microsoft.com/office/drawing/2014/main" id="{10E33D47-F9FD-43DD-9F31-0C4BA563A622}"/>
+              </a:ext>
+            </a:extLst>
+          </p:cNvPr>
+          <p:cNvSpPr>
+            <a:spLocks xmlns:a="http://schemas.openxmlformats.org/drawingml/2006/main" noGrp="1"/>
+          </p:cNvSpPr>
+          <p:nvPr/>
+        </p:nvSpPr>
+        <p:spPr>
+          <a:xfrm xmlns:a="http://schemas.openxmlformats.org/drawingml/2006/main" flipH="0" flipV="0">
+            <a:off x="9839325" y="2390775"/>
+            <a:ext cx="0" cy="1304925"/>
+          </a:xfrm>
+          <a:prstGeom xmlns:a="http://schemas.openxmlformats.org/drawingml/2006/main" prst="line">
+            <a:avLst/>
+          </a:prstGeom>
+          <a:noFill xmlns:a="http://schemas.openxmlformats.org/drawingml/2006/main"/>
+          <a:ln xmlns:a="http://schemas.openxmlformats.org/drawingml/2006/main" w="19050">
+            <a:solidFill>
+              <a:srgbClr val="57CB8F"/>
+            </a:solidFill>
+            <a:prstDash val="solid"/>
+          </a:ln>
+        </p:spPr>
+      </p:sp>
+      <p:sp>
+        <p:nvSpPr>
+          <p:cNvPr id="26" name="">
+            <a:extLst xmlns:a="http://schemas.openxmlformats.org/drawingml/2006/main">
+              <a:ext uri="{FF2B5EF4-FFF2-40B4-BE49-F238E27FC236}">
+                <a16:creationId xmlns:a16="http://schemas.microsoft.com/office/drawing/2014/main" id="{9A47580C-580B-4BD3-B80C-CF78141151CB}"/>
+              </a:ext>
+            </a:extLst>
+          </p:cNvPr>
+          <p:cNvSpPr>
+            <a:spLocks xmlns:a="http://schemas.openxmlformats.org/drawingml/2006/main" noGrp="1"/>
+          </p:cNvSpPr>
+          <p:nvPr/>
+        </p:nvSpPr>
+        <p:spPr>
+          <a:xfrm xmlns:a="http://schemas.openxmlformats.org/drawingml/2006/main" flipH="0" flipV="0">
+            <a:off x="5695950" y="3705225"/>
+            <a:ext cx="5886450" cy="0"/>
+          </a:xfrm>
+          <a:prstGeom xmlns:a="http://schemas.openxmlformats.org/drawingml/2006/main" prst="line">
+            <a:avLst/>
+          </a:prstGeom>
+          <a:noFill xmlns:a="http://schemas.openxmlformats.org/drawingml/2006/main"/>
+          <a:ln xmlns:a="http://schemas.openxmlformats.org/drawingml/2006/main" w="19050">
+            <a:solidFill>
+              <a:srgbClr val="ADB8C5"/>
+            </a:solidFill>
+            <a:prstDash val="solid"/>
+          </a:ln>
+        </p:spPr>
+      </p:sp>
+      <p:sp>
+        <p:nvSpPr>
+          <p:cNvPr id="27" name="">
+            <a:extLst xmlns:a="http://schemas.openxmlformats.org/drawingml/2006/main">
+              <a:ext uri="{FF2B5EF4-FFF2-40B4-BE49-F238E27FC236}">
+                <a16:creationId xmlns:a16="http://schemas.microsoft.com/office/drawing/2014/main" id="{491BE6D5-7232-4DCA-B06C-4321FE26B990}"/>
+              </a:ext>
+            </a:extLst>
+          </p:cNvPr>
+          <p:cNvSpPr>
+            <a:spLocks xmlns:a="http://schemas.openxmlformats.org/drawingml/2006/main" noGrp="1"/>
+          </p:cNvSpPr>
+          <p:nvPr/>
+        </p:nvSpPr>
+        <p:spPr>
+          <a:xfrm xmlns:a="http://schemas.openxmlformats.org/drawingml/2006/main" flipH="0" flipV="1">
+            <a:off x="10306050" y="3219450"/>
+            <a:ext cx="266700" cy="304800"/>
+          </a:xfrm>
+          <a:prstGeom xmlns:a="http://schemas.openxmlformats.org/drawingml/2006/main" prst="line">
+            <a:avLst/>
+          </a:prstGeom>
+          <a:noFill xmlns:a="http://schemas.openxmlformats.org/drawingml/2006/main"/>
+          <a:ln xmlns:a="http://schemas.openxmlformats.org/drawingml/2006/main" w="19050">
+            <a:solidFill>
+              <a:srgbClr val="FF6B75"/>
+            </a:solidFill>
+            <a:prstDash val="solid"/>
+          </a:ln>
+        </p:spPr>
+      </p:sp>
+      <p:sp>
+        <p:nvSpPr>
+          <p:cNvPr id="28" name="">
+            <a:extLst xmlns:a="http://schemas.openxmlformats.org/drawingml/2006/main">
+              <a:ext uri="{FF2B5EF4-FFF2-40B4-BE49-F238E27FC236}">
+                <a16:creationId xmlns:a16="http://schemas.microsoft.com/office/drawing/2014/main" id="{62E17306-92BA-4A5D-8B6A-89055A5651BF}"/>
+              </a:ext>
+            </a:extLst>
+          </p:cNvPr>
+          <p:cNvSpPr>
+            <a:spLocks xmlns:a="http://schemas.openxmlformats.org/drawingml/2006/main" noGrp="1"/>
+          </p:cNvSpPr>
+          <p:nvPr/>
+        </p:nvSpPr>
+        <p:spPr>
+          <a:xfrm xmlns:a="http://schemas.openxmlformats.org/drawingml/2006/main">
+            <a:off x="10629900" y="2743200"/>
+            <a:ext cx="952500" cy="542925"/>
           </a:xfrm>
           <a:prstGeom xmlns:a="http://schemas.openxmlformats.org/drawingml/2006/main" prst="rect">
             <a:avLst/>
@@ -3862,6 +4757,280 @@
             <a:pPr algn="l">
               <a:defRPr sz="1350" b="0">
                 <a:solidFill>
+                  <a:srgbClr val="FF6B75"/>
+                </a:solidFill>
+                <a:latin typeface="Roboto"/>
+                <a:ea typeface="Roboto"/>
+                <a:cs typeface="Roboto"/>
+              </a:defRPr>
+            </a:pPr>
+            <a:r>
+              <a:rPr sz="1350" b="0">
+                <a:solidFill>
+                  <a:srgbClr val="FF6B75"/>
+                </a:solidFill>
+                <a:latin typeface="Roboto"/>
+                <a:ea typeface="Roboto"/>
+                <a:cs typeface="Roboto"/>
+              </a:rPr>
+              <a:t>Bug:</a:t>
+            </a:r>
+          </a:p>
+          <a:p xmlns:a="http://schemas.openxmlformats.org/drawingml/2006/main">
+            <a:pPr algn="l">
+              <a:defRPr sz="1350" b="0">
+                <a:solidFill>
+                  <a:srgbClr val="FF6B75"/>
+                </a:solidFill>
+                <a:latin typeface="Roboto"/>
+                <a:ea typeface="Roboto"/>
+                <a:cs typeface="Roboto"/>
+              </a:defRPr>
+            </a:pPr>
+            <a:r>
+              <a:rPr sz="1350" b="0">
+                <a:solidFill>
+                  <a:srgbClr val="FF6B75"/>
+                </a:solidFill>
+                <a:latin typeface="Roboto"/>
+                <a:ea typeface="Roboto"/>
+                <a:cs typeface="Roboto"/>
+              </a:rPr>
+              <a:t>contract</a:t>
+            </a:r>
+          </a:p>
+          <a:p xmlns:a="http://schemas.openxmlformats.org/drawingml/2006/main">
+            <a:pPr algn="l">
+              <a:defRPr sz="1350" b="0">
+                <a:solidFill>
+                  <a:srgbClr val="FF6B75"/>
+                </a:solidFill>
+                <a:latin typeface="Roboto"/>
+                <a:ea typeface="Roboto"/>
+                <a:cs typeface="Roboto"/>
+              </a:defRPr>
+            </a:pPr>
+            <a:r>
+              <a:rPr sz="1350" b="0">
+                <a:solidFill>
+                  <a:srgbClr val="FF6B75"/>
+                </a:solidFill>
+                <a:latin typeface="Roboto"/>
+                <a:ea typeface="Roboto"/>
+                <a:cs typeface="Roboto"/>
+              </a:rPr>
+              <a:t>violation</a:t>
+            </a:r>
+          </a:p>
+        </p:txBody>
+      </p:sp>
+      <p:sp>
+        <p:nvSpPr>
+          <p:cNvPr id="29" name="">
+            <a:extLst xmlns:a="http://schemas.openxmlformats.org/drawingml/2006/main">
+              <a:ext uri="{FF2B5EF4-FFF2-40B4-BE49-F238E27FC236}">
+                <a16:creationId xmlns:a16="http://schemas.microsoft.com/office/drawing/2014/main" id="{CFFA8E7E-7ABD-4EFC-8F08-3647630D2A2E}"/>
+              </a:ext>
+            </a:extLst>
+          </p:cNvPr>
+          <p:cNvSpPr>
+            <a:spLocks xmlns:a="http://schemas.openxmlformats.org/drawingml/2006/main" noGrp="1"/>
+          </p:cNvSpPr>
+          <p:nvPr/>
+        </p:nvSpPr>
+        <p:spPr>
+          <a:xfrm xmlns:a="http://schemas.openxmlformats.org/drawingml/2006/main">
+            <a:off x="5657850" y="3743325"/>
+            <a:ext cx="1905000" cy="228600"/>
+          </a:xfrm>
+          <a:prstGeom xmlns:a="http://schemas.openxmlformats.org/drawingml/2006/main" prst="rect">
+            <a:avLst/>
+          </a:prstGeom>
+          <a:noFill xmlns:a="http://schemas.openxmlformats.org/drawingml/2006/main"/>
+          <a:ln xmlns:a="http://schemas.openxmlformats.org/drawingml/2006/main" w="0">
+            <a:noFill/>
+          </a:ln>
+        </p:spPr>
+        <p:txBody>
+          <a:bodyPr xmlns:a="http://schemas.openxmlformats.org/drawingml/2006/main" wrap="square" lIns="0" tIns="0" rIns="0" bIns="0" anchor="ctr">
+            <a:noAutofit/>
+          </a:bodyPr>
+          <a:lstStyle xmlns:a="http://schemas.openxmlformats.org/drawingml/2006/main"/>
+          <a:p xmlns:a="http://schemas.openxmlformats.org/drawingml/2006/main">
+            <a:pPr algn="ctr">
+              <a:defRPr sz="1275" b="0">
+                <a:solidFill>
+                  <a:srgbClr val="FF6B75"/>
+                </a:solidFill>
+                <a:latin typeface="Roboto"/>
+                <a:ea typeface="Roboto"/>
+                <a:cs typeface="Roboto"/>
+              </a:defRPr>
+            </a:pPr>
+            <a:r>
+              <a:rPr sz="1275" b="0">
+                <a:solidFill>
+                  <a:srgbClr val="FF6B75"/>
+                </a:solidFill>
+                <a:latin typeface="Roboto"/>
+                <a:ea typeface="Roboto"/>
+                <a:cs typeface="Roboto"/>
+              </a:rPr>
+              <a:t>Outside the contract</a:t>
+            </a:r>
+          </a:p>
+        </p:txBody>
+      </p:sp>
+      <p:sp>
+        <p:nvSpPr>
+          <p:cNvPr id="30" name="">
+            <a:extLst xmlns:a="http://schemas.openxmlformats.org/drawingml/2006/main">
+              <a:ext uri="{FF2B5EF4-FFF2-40B4-BE49-F238E27FC236}">
+                <a16:creationId xmlns:a16="http://schemas.microsoft.com/office/drawing/2014/main" id="{96866AA0-479C-40CD-BC5B-4658816109EE}"/>
+              </a:ext>
+            </a:extLst>
+          </p:cNvPr>
+          <p:cNvSpPr>
+            <a:spLocks xmlns:a="http://schemas.openxmlformats.org/drawingml/2006/main" noGrp="1"/>
+          </p:cNvSpPr>
+          <p:nvPr/>
+        </p:nvSpPr>
+        <p:spPr>
+          <a:xfrm xmlns:a="http://schemas.openxmlformats.org/drawingml/2006/main">
+            <a:off x="7715250" y="3743325"/>
+            <a:ext cx="2019300" cy="228600"/>
+          </a:xfrm>
+          <a:prstGeom xmlns:a="http://schemas.openxmlformats.org/drawingml/2006/main" prst="rect">
+            <a:avLst/>
+          </a:prstGeom>
+          <a:noFill xmlns:a="http://schemas.openxmlformats.org/drawingml/2006/main"/>
+          <a:ln xmlns:a="http://schemas.openxmlformats.org/drawingml/2006/main" w="0">
+            <a:noFill/>
+          </a:ln>
+        </p:spPr>
+        <p:txBody>
+          <a:bodyPr xmlns:a="http://schemas.openxmlformats.org/drawingml/2006/main" wrap="square" lIns="0" tIns="0" rIns="0" bIns="0" anchor="ctr">
+            <a:noAutofit/>
+          </a:bodyPr>
+          <a:lstStyle xmlns:a="http://schemas.openxmlformats.org/drawingml/2006/main"/>
+          <a:p xmlns:a="http://schemas.openxmlformats.org/drawingml/2006/main">
+            <a:pPr algn="ctr">
+              <a:defRPr sz="1425" b="1">
+                <a:solidFill>
+                  <a:srgbClr val="57CB8F"/>
+                </a:solidFill>
+                <a:latin typeface="Roboto"/>
+                <a:ea typeface="Roboto"/>
+                <a:cs typeface="Roboto"/>
+              </a:defRPr>
+            </a:pPr>
+            <a:r>
+              <a:rPr sz="1425" b="1">
+                <a:solidFill>
+                  <a:srgbClr val="57CB8F"/>
+                </a:solidFill>
+                <a:latin typeface="Roboto"/>
+                <a:ea typeface="Roboto"/>
+                <a:cs typeface="Roboto"/>
+              </a:rPr>
+              <a:t>Allowed variation</a:t>
+            </a:r>
+          </a:p>
+        </p:txBody>
+      </p:sp>
+      <p:sp>
+        <p:nvSpPr>
+          <p:cNvPr id="31" name="">
+            <a:extLst xmlns:a="http://schemas.openxmlformats.org/drawingml/2006/main">
+              <a:ext uri="{FF2B5EF4-FFF2-40B4-BE49-F238E27FC236}">
+                <a16:creationId xmlns:a16="http://schemas.microsoft.com/office/drawing/2014/main" id="{292513ED-C7B6-4832-9D14-6245AA5C9CEF}"/>
+              </a:ext>
+            </a:extLst>
+          </p:cNvPr>
+          <p:cNvSpPr>
+            <a:spLocks xmlns:a="http://schemas.openxmlformats.org/drawingml/2006/main" noGrp="1"/>
+          </p:cNvSpPr>
+          <p:nvPr/>
+        </p:nvSpPr>
+        <p:spPr>
+          <a:xfrm xmlns:a="http://schemas.openxmlformats.org/drawingml/2006/main">
+            <a:off x="9877425" y="3743325"/>
+            <a:ext cx="1704975" cy="228600"/>
+          </a:xfrm>
+          <a:prstGeom xmlns:a="http://schemas.openxmlformats.org/drawingml/2006/main" prst="rect">
+            <a:avLst/>
+          </a:prstGeom>
+          <a:noFill xmlns:a="http://schemas.openxmlformats.org/drawingml/2006/main"/>
+          <a:ln xmlns:a="http://schemas.openxmlformats.org/drawingml/2006/main" w="0">
+            <a:noFill/>
+          </a:ln>
+        </p:spPr>
+        <p:txBody>
+          <a:bodyPr xmlns:a="http://schemas.openxmlformats.org/drawingml/2006/main" wrap="square" lIns="0" tIns="0" rIns="0" bIns="0" anchor="ctr">
+            <a:noAutofit/>
+          </a:bodyPr>
+          <a:lstStyle xmlns:a="http://schemas.openxmlformats.org/drawingml/2006/main"/>
+          <a:p xmlns:a="http://schemas.openxmlformats.org/drawingml/2006/main">
+            <a:pPr algn="ctr">
+              <a:defRPr sz="1275" b="0">
+                <a:solidFill>
+                  <a:srgbClr val="FF6B75"/>
+                </a:solidFill>
+                <a:latin typeface="Roboto"/>
+                <a:ea typeface="Roboto"/>
+                <a:cs typeface="Roboto"/>
+              </a:defRPr>
+            </a:pPr>
+            <a:r>
+              <a:rPr sz="1275" b="0">
+                <a:solidFill>
+                  <a:srgbClr val="FF6B75"/>
+                </a:solidFill>
+                <a:latin typeface="Roboto"/>
+                <a:ea typeface="Roboto"/>
+                <a:cs typeface="Roboto"/>
+              </a:rPr>
+              <a:t>Outside the contract</a:t>
+            </a:r>
+          </a:p>
+        </p:txBody>
+      </p:sp>
+      <p:sp>
+        <p:nvSpPr>
+          <p:cNvPr id="32" name="">
+            <a:extLst xmlns:a="http://schemas.openxmlformats.org/drawingml/2006/main">
+              <a:ext uri="{FF2B5EF4-FFF2-40B4-BE49-F238E27FC236}">
+                <a16:creationId xmlns:a16="http://schemas.microsoft.com/office/drawing/2014/main" id="{15278F13-D83E-4795-B974-C8D1CF3B8ABC}"/>
+              </a:ext>
+            </a:extLst>
+          </p:cNvPr>
+          <p:cNvSpPr>
+            <a:spLocks xmlns:a="http://schemas.openxmlformats.org/drawingml/2006/main" noGrp="1"/>
+          </p:cNvSpPr>
+          <p:nvPr/>
+        </p:nvSpPr>
+        <p:spPr>
+          <a:xfrm xmlns:a="http://schemas.openxmlformats.org/drawingml/2006/main">
+            <a:off x="5657850" y="3990975"/>
+            <a:ext cx="5924550" cy="219075"/>
+          </a:xfrm>
+          <a:prstGeom xmlns:a="http://schemas.openxmlformats.org/drawingml/2006/main" prst="rect">
+            <a:avLst/>
+          </a:prstGeom>
+          <a:noFill xmlns:a="http://schemas.openxmlformats.org/drawingml/2006/main"/>
+          <a:ln xmlns:a="http://schemas.openxmlformats.org/drawingml/2006/main" w="0">
+            <a:noFill/>
+          </a:ln>
+        </p:spPr>
+        <p:txBody>
+          <a:bodyPr xmlns:a="http://schemas.openxmlformats.org/drawingml/2006/main" wrap="square" lIns="0" tIns="0" rIns="0" bIns="0" anchor="ctr">
+            <a:noAutofit/>
+          </a:bodyPr>
+          <a:lstStyle xmlns:a="http://schemas.openxmlformats.org/drawingml/2006/main"/>
+          <a:p xmlns:a="http://schemas.openxmlformats.org/drawingml/2006/main">
+            <a:pPr algn="l">
+              <a:defRPr sz="1200" b="0">
+                <a:solidFill>
                   <a:srgbClr val="ADB8C5"/>
                 </a:solidFill>
                 <a:latin typeface="Roboto"/>
@@ -3870,7 +5039,7 @@
               </a:defRPr>
             </a:pPr>
             <a:r>
-              <a:rPr sz="1350" b="0">
+              <a:rPr sz="1200" b="0">
                 <a:solidFill>
                   <a:srgbClr val="ADB8C5"/>
                 </a:solidFill>
@@ -3878,17 +5047,17 @@
                 <a:ea typeface="Roboto"/>
                 <a:cs typeface="Roboto"/>
               </a:rPr>
-              <a:t>Count in the sample (n = 200)</a:t>
-            </a:r>
-          </a:p>
-        </p:txBody>
-      </p:sp>
-      <p:sp>
-        <p:nvSpPr>
-          <p:cNvPr id="8" name="">
-            <a:extLst xmlns:a="http://schemas.openxmlformats.org/drawingml/2006/main">
-              <a:ext uri="{FF2B5EF4-FFF2-40B4-BE49-F238E27FC236}">
-                <a16:creationId xmlns:a16="http://schemas.microsoft.com/office/drawing/2014/main" id="{FA0B35B9-C253-4A6E-AD1B-44004B14959E}"/>
+              <a:t>Schematic projection, not measured data. Limits are product-specific.</a:t>
+            </a:r>
+          </a:p>
+        </p:txBody>
+      </p:sp>
+      <p:sp>
+        <p:nvSpPr>
+          <p:cNvPr id="33" name="">
+            <a:extLst xmlns:a="http://schemas.openxmlformats.org/drawingml/2006/main">
+              <a:ext uri="{FF2B5EF4-FFF2-40B4-BE49-F238E27FC236}">
+                <a16:creationId xmlns:a16="http://schemas.microsoft.com/office/drawing/2014/main" id="{77F6ACC8-1451-4EAD-872D-491C4CB791E4}"/>
               </a:ext>
             </a:extLst>
           </p:cNvPr>
@@ -3899,8 +5068,8 @@
         </p:nvSpPr>
         <p:spPr>
           <a:xfrm xmlns:a="http://schemas.openxmlformats.org/drawingml/2006/main" flipH="0" flipV="0">
-            <a:off x="5953125" y="2076450"/>
-            <a:ext cx="0" cy="2524125"/>
+            <a:off x="609600" y="4295775"/>
+            <a:ext cx="10972800" cy="0"/>
           </a:xfrm>
           <a:prstGeom xmlns:a="http://schemas.openxmlformats.org/drawingml/2006/main" prst="line">
             <a:avLst/>
@@ -3916,22 +5085,22 @@
       </p:sp>
       <p:sp>
         <p:nvSpPr>
-          <p:cNvPr id="9" name="">
-            <a:extLst xmlns:a="http://schemas.openxmlformats.org/drawingml/2006/main">
-              <a:ext uri="{FF2B5EF4-FFF2-40B4-BE49-F238E27FC236}">
-                <a16:creationId xmlns:a16="http://schemas.microsoft.com/office/drawing/2014/main" id="{87DB2F4A-BB9E-45A2-A793-FCD29B59F499}"/>
-              </a:ext>
-            </a:extLst>
-          </p:cNvPr>
-          <p:cNvSpPr>
-            <a:spLocks xmlns:a="http://schemas.openxmlformats.org/drawingml/2006/main" noGrp="1"/>
-          </p:cNvSpPr>
-          <p:nvPr/>
-        </p:nvSpPr>
-        <p:spPr>
-          <a:xfrm xmlns:a="http://schemas.openxmlformats.org/drawingml/2006/main">
-            <a:off x="6286500" y="2076450"/>
-            <a:ext cx="5295900" cy="276225"/>
+          <p:cNvPr id="34" name="">
+            <a:extLst xmlns:a="http://schemas.openxmlformats.org/drawingml/2006/main">
+              <a:ext uri="{FF2B5EF4-FFF2-40B4-BE49-F238E27FC236}">
+                <a16:creationId xmlns:a16="http://schemas.microsoft.com/office/drawing/2014/main" id="{3D018852-2587-4EC5-AFF1-3E068B52C01A}"/>
+              </a:ext>
+            </a:extLst>
+          </p:cNvPr>
+          <p:cNvSpPr>
+            <a:spLocks xmlns:a="http://schemas.openxmlformats.org/drawingml/2006/main" noGrp="1"/>
+          </p:cNvSpPr>
+          <p:nvPr/>
+        </p:nvSpPr>
+        <p:spPr>
+          <a:xfrm xmlns:a="http://schemas.openxmlformats.org/drawingml/2006/main">
+            <a:off x="609600" y="4343400"/>
+            <a:ext cx="5143500" cy="247650"/>
           </a:xfrm>
           <a:prstGeom xmlns:a="http://schemas.openxmlformats.org/drawingml/2006/main" prst="rect">
             <a:avLst/>
@@ -3948,47 +5117,94 @@
           <a:lstStyle xmlns:a="http://schemas.openxmlformats.org/drawingml/2006/main"/>
           <a:p xmlns:a="http://schemas.openxmlformats.org/drawingml/2006/main">
             <a:pPr algn="l">
-              <a:defRPr sz="1650" b="1">
-                <a:solidFill>
-                  <a:srgbClr val="F5B61C"/>
-                </a:solidFill>
-                <a:latin typeface="Roboto"/>
-                <a:ea typeface="Roboto"/>
-                <a:cs typeface="Roboto"/>
-              </a:defRPr>
-            </a:pPr>
-            <a:r>
-              <a:rPr sz="1650" b="1">
-                <a:solidFill>
-                  <a:srgbClr val="F5B61C"/>
-                </a:solidFill>
-                <a:latin typeface="Roboto"/>
-                <a:ea typeface="Roboto"/>
-                <a:cs typeface="Roboto"/>
-              </a:rPr>
-              <a:t>FREQUENCY + CONSEQUENCES</a:t>
-            </a:r>
-          </a:p>
-        </p:txBody>
-      </p:sp>
-      <p:sp>
-        <p:nvSpPr>
-          <p:cNvPr id="10" name="">
-            <a:extLst xmlns:a="http://schemas.openxmlformats.org/drawingml/2006/main">
-              <a:ext uri="{FF2B5EF4-FFF2-40B4-BE49-F238E27FC236}">
-                <a16:creationId xmlns:a16="http://schemas.microsoft.com/office/drawing/2014/main" id="{F71EF2F6-9629-4279-B4D6-E0DEED76A177}"/>
-              </a:ext>
-            </a:extLst>
-          </p:cNvPr>
-          <p:cNvSpPr>
-            <a:spLocks xmlns:a="http://schemas.openxmlformats.org/drawingml/2006/main" noGrp="1"/>
-          </p:cNvSpPr>
-          <p:nvPr/>
-        </p:nvSpPr>
-        <p:spPr>
-          <a:xfrm xmlns:a="http://schemas.openxmlformats.org/drawingml/2006/main">
-            <a:off x="6286500" y="2409825"/>
-            <a:ext cx="5295900" cy="466725"/>
+              <a:defRPr sz="1425" b="1">
+                <a:solidFill>
+                  <a:srgbClr val="28C7F7"/>
+                </a:solidFill>
+                <a:latin typeface="Roboto"/>
+                <a:ea typeface="Roboto"/>
+                <a:cs typeface="Roboto"/>
+              </a:defRPr>
+            </a:pPr>
+            <a:r>
+              <a:rPr sz="1425" b="1">
+                <a:solidFill>
+                  <a:srgbClr val="28C7F7"/>
+                </a:solidFill>
+                <a:latin typeface="Roboto"/>
+                <a:ea typeface="Roboto"/>
+                <a:cs typeface="Roboto"/>
+              </a:rPr>
+              <a:t>ILLUSTRATIVE SAMPLE · n = 200</a:t>
+            </a:r>
+          </a:p>
+        </p:txBody>
+      </p:sp>
+      <p:graphicFrame>
+        <p:nvGraphicFramePr>
+          <p:cNvPr id="80" name="Chart"/>
+          <p:cNvGraphicFramePr/>
+          <p:nvPr/>
+        </p:nvGraphicFramePr>
+        <p:xfrm>
+          <a:off xmlns:a="http://schemas.openxmlformats.org/drawingml/2006/main" x="609600" y="4610100"/>
+          <a:ext xmlns:a="http://schemas.openxmlformats.org/drawingml/2006/main" cx="5143500" cy="1228725"/>
+        </p:xfrm>
+        <a:graphic xmlns:a="http://schemas.openxmlformats.org/drawingml/2006/main">
+          <a:graphicData uri="http://schemas.openxmlformats.org/drawingml/2006/chart">
+            <c:chart xmlns:r="http://schemas.openxmlformats.org/officeDocument/2006/relationships" xmlns:c="http://schemas.openxmlformats.org/drawingml/2006/chart" r:id="Re32382c9d579452e"/>
+          </a:graphicData>
+        </a:graphic>
+      </p:graphicFrame>
+      <p:sp>
+        <p:nvSpPr>
+          <p:cNvPr id="36" name="">
+            <a:extLst xmlns:a="http://schemas.openxmlformats.org/drawingml/2006/main">
+              <a:ext uri="{FF2B5EF4-FFF2-40B4-BE49-F238E27FC236}">
+                <a16:creationId xmlns:a16="http://schemas.microsoft.com/office/drawing/2014/main" id="{83CDA815-F8AE-4A55-8529-A8EF764937B0}"/>
+              </a:ext>
+            </a:extLst>
+          </p:cNvPr>
+          <p:cNvSpPr>
+            <a:spLocks xmlns:a="http://schemas.openxmlformats.org/drawingml/2006/main" noGrp="1"/>
+          </p:cNvSpPr>
+          <p:nvPr/>
+        </p:nvSpPr>
+        <p:spPr>
+          <a:xfrm xmlns:a="http://schemas.openxmlformats.org/drawingml/2006/main" flipH="0" flipV="0">
+            <a:off x="5953125" y="4391025"/>
+            <a:ext cx="0" cy="1371600"/>
+          </a:xfrm>
+          <a:prstGeom xmlns:a="http://schemas.openxmlformats.org/drawingml/2006/main" prst="line">
+            <a:avLst/>
+          </a:prstGeom>
+          <a:noFill xmlns:a="http://schemas.openxmlformats.org/drawingml/2006/main"/>
+          <a:ln xmlns:a="http://schemas.openxmlformats.org/drawingml/2006/main" w="19050">
+            <a:solidFill>
+              <a:srgbClr val="344454"/>
+            </a:solidFill>
+            <a:prstDash val="solid"/>
+          </a:ln>
+        </p:spPr>
+      </p:sp>
+      <p:sp>
+        <p:nvSpPr>
+          <p:cNvPr id="37" name="">
+            <a:extLst xmlns:a="http://schemas.openxmlformats.org/drawingml/2006/main">
+              <a:ext uri="{FF2B5EF4-FFF2-40B4-BE49-F238E27FC236}">
+                <a16:creationId xmlns:a16="http://schemas.microsoft.com/office/drawing/2014/main" id="{9814F111-B468-4687-A862-640D9EB32F58}"/>
+              </a:ext>
+            </a:extLst>
+          </p:cNvPr>
+          <p:cNvSpPr>
+            <a:spLocks xmlns:a="http://schemas.openxmlformats.org/drawingml/2006/main" noGrp="1"/>
+          </p:cNvSpPr>
+          <p:nvPr/>
+        </p:nvSpPr>
+        <p:spPr>
+          <a:xfrm xmlns:a="http://schemas.openxmlformats.org/drawingml/2006/main">
+            <a:off x="6286500" y="4343400"/>
+            <a:ext cx="2324100" cy="371475"/>
           </a:xfrm>
           <a:prstGeom xmlns:a="http://schemas.openxmlformats.org/drawingml/2006/main" prst="rect">
             <a:avLst/>
@@ -4005,7 +5221,7 @@
           <a:lstStyle xmlns:a="http://schemas.openxmlformats.org/drawingml/2006/main"/>
           <a:p xmlns:a="http://schemas.openxmlformats.org/drawingml/2006/main">
             <a:pPr algn="l">
-              <a:defRPr sz="2925" b="1">
+              <a:defRPr sz="2325" b="1">
                 <a:solidFill>
                   <a:srgbClr val="F4F7FA"/>
                 </a:solidFill>
@@ -4015,7 +5231,7 @@
               </a:defRPr>
             </a:pPr>
             <a:r>
-              <a:rPr sz="2925" b="1">
+              <a:rPr sz="2325" b="1">
                 <a:solidFill>
                   <a:srgbClr val="F4F7FA"/>
                 </a:solidFill>
@@ -4030,21 +5246,135 @@
       </p:sp>
       <p:sp>
         <p:nvSpPr>
-          <p:cNvPr id="11" name="">
-            <a:extLst xmlns:a="http://schemas.openxmlformats.org/drawingml/2006/main">
-              <a:ext uri="{FF2B5EF4-FFF2-40B4-BE49-F238E27FC236}">
-                <a16:creationId xmlns:a16="http://schemas.microsoft.com/office/drawing/2014/main" id="{71F9063B-2EFF-48C6-81CC-4504B8CCE492}"/>
-              </a:ext>
-            </a:extLst>
-          </p:cNvPr>
-          <p:cNvSpPr>
-            <a:spLocks xmlns:a="http://schemas.openxmlformats.org/drawingml/2006/main" noGrp="1"/>
-          </p:cNvSpPr>
-          <p:nvPr/>
-        </p:nvSpPr>
-        <p:spPr>
-          <a:xfrm xmlns:a="http://schemas.openxmlformats.org/drawingml/2006/main">
-            <a:off x="6286500" y="2867025"/>
+          <p:cNvPr id="38" name="">
+            <a:extLst xmlns:a="http://schemas.openxmlformats.org/drawingml/2006/main">
+              <a:ext uri="{FF2B5EF4-FFF2-40B4-BE49-F238E27FC236}">
+                <a16:creationId xmlns:a16="http://schemas.microsoft.com/office/drawing/2014/main" id="{8A503F6C-5724-476C-9064-0C2831224E2F}"/>
+              </a:ext>
+            </a:extLst>
+          </p:cNvPr>
+          <p:cNvSpPr>
+            <a:spLocks xmlns:a="http://schemas.openxmlformats.org/drawingml/2006/main" noGrp="1"/>
+          </p:cNvSpPr>
+          <p:nvPr/>
+        </p:nvSpPr>
+        <p:spPr>
+          <a:xfrm xmlns:a="http://schemas.openxmlformats.org/drawingml/2006/main">
+            <a:off x="8658225" y="4410075"/>
+            <a:ext cx="2924175" cy="266700"/>
+          </a:xfrm>
+          <a:prstGeom xmlns:a="http://schemas.openxmlformats.org/drawingml/2006/main" prst="rect">
+            <a:avLst/>
+          </a:prstGeom>
+          <a:noFill xmlns:a="http://schemas.openxmlformats.org/drawingml/2006/main"/>
+          <a:ln xmlns:a="http://schemas.openxmlformats.org/drawingml/2006/main" w="0">
+            <a:noFill/>
+          </a:ln>
+        </p:spPr>
+        <p:txBody>
+          <a:bodyPr xmlns:a="http://schemas.openxmlformats.org/drawingml/2006/main" wrap="square" lIns="0" tIns="0" rIns="0" bIns="0" anchor="ctr">
+            <a:noAutofit/>
+          </a:bodyPr>
+          <a:lstStyle xmlns:a="http://schemas.openxmlformats.org/drawingml/2006/main"/>
+          <a:p xmlns:a="http://schemas.openxmlformats.org/drawingml/2006/main">
+            <a:pPr algn="l">
+              <a:defRPr sz="1350" b="0">
+                <a:solidFill>
+                  <a:srgbClr val="ADB8C5"/>
+                </a:solidFill>
+                <a:latin typeface="Roboto"/>
+                <a:ea typeface="Roboto"/>
+                <a:cs typeface="Roboto"/>
+              </a:defRPr>
+            </a:pPr>
+            <a:r>
+              <a:rPr sz="1350" b="0">
+                <a:solidFill>
+                  <a:srgbClr val="ADB8C5"/>
+                </a:solidFill>
+                <a:latin typeface="Roboto"/>
+                <a:ea typeface="Roboto"/>
+                <a:cs typeface="Roboto"/>
+              </a:rPr>
+              <a:t>Observed unacceptable outputs</a:t>
+            </a:r>
+          </a:p>
+        </p:txBody>
+      </p:sp>
+      <p:sp>
+        <p:nvSpPr>
+          <p:cNvPr id="39" name="">
+            <a:extLst xmlns:a="http://schemas.openxmlformats.org/drawingml/2006/main">
+              <a:ext uri="{FF2B5EF4-FFF2-40B4-BE49-F238E27FC236}">
+                <a16:creationId xmlns:a16="http://schemas.microsoft.com/office/drawing/2014/main" id="{9F623C6D-60A6-4AB7-9ADF-A6BEBDD11AF7}"/>
+              </a:ext>
+            </a:extLst>
+          </p:cNvPr>
+          <p:cNvSpPr>
+            <a:spLocks xmlns:a="http://schemas.openxmlformats.org/drawingml/2006/main" noGrp="1"/>
+          </p:cNvSpPr>
+          <p:nvPr/>
+        </p:nvSpPr>
+        <p:spPr>
+          <a:xfrm xmlns:a="http://schemas.openxmlformats.org/drawingml/2006/main">
+            <a:off x="6286500" y="4733925"/>
+            <a:ext cx="5295900" cy="257175"/>
+          </a:xfrm>
+          <a:prstGeom xmlns:a="http://schemas.openxmlformats.org/drawingml/2006/main" prst="rect">
+            <a:avLst/>
+          </a:prstGeom>
+          <a:noFill xmlns:a="http://schemas.openxmlformats.org/drawingml/2006/main"/>
+          <a:ln xmlns:a="http://schemas.openxmlformats.org/drawingml/2006/main" w="0">
+            <a:noFill/>
+          </a:ln>
+        </p:spPr>
+        <p:txBody>
+          <a:bodyPr xmlns:a="http://schemas.openxmlformats.org/drawingml/2006/main" wrap="square" lIns="0" tIns="0" rIns="0" bIns="0" anchor="ctr">
+            <a:noAutofit/>
+          </a:bodyPr>
+          <a:lstStyle xmlns:a="http://schemas.openxmlformats.org/drawingml/2006/main"/>
+          <a:p xmlns:a="http://schemas.openxmlformats.org/drawingml/2006/main">
+            <a:pPr algn="l">
+              <a:defRPr sz="1650" b="0">
+                <a:solidFill>
+                  <a:srgbClr val="28C7F7"/>
+                </a:solidFill>
+                <a:latin typeface="Roboto"/>
+                <a:ea typeface="Roboto"/>
+                <a:cs typeface="Roboto"/>
+              </a:defRPr>
+            </a:pPr>
+            <a:r>
+              <a:rPr sz="1650" b="0">
+                <a:solidFill>
+                  <a:srgbClr val="28C7F7"/>
+                </a:solidFill>
+                <a:latin typeface="Roboto"/>
+                <a:ea typeface="Roboto"/>
+                <a:cs typeface="Roboto"/>
+              </a:rPr>
+              <a:t>95% Wilson interval ≈ 0.8%–5.0%</a:t>
+            </a:r>
+          </a:p>
+        </p:txBody>
+      </p:sp>
+      <p:sp>
+        <p:nvSpPr>
+          <p:cNvPr id="40" name="">
+            <a:extLst xmlns:a="http://schemas.openxmlformats.org/drawingml/2006/main">
+              <a:ext uri="{FF2B5EF4-FFF2-40B4-BE49-F238E27FC236}">
+                <a16:creationId xmlns:a16="http://schemas.microsoft.com/office/drawing/2014/main" id="{5A9A1465-986F-4134-842A-BBAD52AF20A7}"/>
+              </a:ext>
+            </a:extLst>
+          </p:cNvPr>
+          <p:cNvSpPr>
+            <a:spLocks xmlns:a="http://schemas.openxmlformats.org/drawingml/2006/main" noGrp="1"/>
+          </p:cNvSpPr>
+          <p:nvPr/>
+        </p:nvSpPr>
+        <p:spPr>
+          <a:xfrm xmlns:a="http://schemas.openxmlformats.org/drawingml/2006/main">
+            <a:off x="6286500" y="5038725"/>
             <a:ext cx="5295900" cy="238125"/>
           </a:xfrm>
           <a:prstGeom xmlns:a="http://schemas.openxmlformats.org/drawingml/2006/main" prst="rect">
@@ -4064,7 +5394,7 @@
             <a:pPr algn="l">
               <a:defRPr sz="1500" b="0">
                 <a:solidFill>
-                  <a:srgbClr val="ADB8C5"/>
+                  <a:srgbClr val="F4F7FA"/>
                 </a:solidFill>
                 <a:latin typeface="Roboto"/>
                 <a:ea typeface="Roboto"/>
@@ -4074,125 +5404,11 @@
             <a:r>
               <a:rPr sz="1500" b="0">
                 <a:solidFill>
-                  <a:srgbClr val="ADB8C5"/>
-                </a:solidFill>
-                <a:latin typeface="Roboto"/>
-                <a:ea typeface="Roboto"/>
-                <a:cs typeface="Roboto"/>
-              </a:rPr>
-              <a:t>Observed unacceptable outputs</a:t>
-            </a:r>
-          </a:p>
-        </p:txBody>
-      </p:sp>
-      <p:sp>
-        <p:nvSpPr>
-          <p:cNvPr id="12" name="">
-            <a:extLst xmlns:a="http://schemas.openxmlformats.org/drawingml/2006/main">
-              <a:ext uri="{FF2B5EF4-FFF2-40B4-BE49-F238E27FC236}">
-                <a16:creationId xmlns:a16="http://schemas.microsoft.com/office/drawing/2014/main" id="{F17D728D-8330-4C45-AB41-859C4D3B222D}"/>
-              </a:ext>
-            </a:extLst>
-          </p:cNvPr>
-          <p:cNvSpPr>
-            <a:spLocks xmlns:a="http://schemas.openxmlformats.org/drawingml/2006/main" noGrp="1"/>
-          </p:cNvSpPr>
-          <p:nvPr/>
-        </p:nvSpPr>
-        <p:spPr>
-          <a:xfrm xmlns:a="http://schemas.openxmlformats.org/drawingml/2006/main">
-            <a:off x="6286500" y="3133725"/>
-            <a:ext cx="5295900" cy="257175"/>
-          </a:xfrm>
-          <a:prstGeom xmlns:a="http://schemas.openxmlformats.org/drawingml/2006/main" prst="rect">
-            <a:avLst/>
-          </a:prstGeom>
-          <a:noFill xmlns:a="http://schemas.openxmlformats.org/drawingml/2006/main"/>
-          <a:ln xmlns:a="http://schemas.openxmlformats.org/drawingml/2006/main" w="0">
-            <a:noFill/>
-          </a:ln>
-        </p:spPr>
-        <p:txBody>
-          <a:bodyPr xmlns:a="http://schemas.openxmlformats.org/drawingml/2006/main" wrap="square" lIns="0" tIns="0" rIns="0" bIns="0" anchor="ctr">
-            <a:noAutofit/>
-          </a:bodyPr>
-          <a:lstStyle xmlns:a="http://schemas.openxmlformats.org/drawingml/2006/main"/>
-          <a:p xmlns:a="http://schemas.openxmlformats.org/drawingml/2006/main">
-            <a:pPr algn="l">
-              <a:defRPr sz="1725" b="0">
-                <a:solidFill>
-                  <a:srgbClr val="28C7F7"/>
-                </a:solidFill>
-                <a:latin typeface="Roboto"/>
-                <a:ea typeface="Roboto"/>
-                <a:cs typeface="Roboto"/>
-              </a:defRPr>
-            </a:pPr>
-            <a:r>
-              <a:rPr sz="1725" b="0">
-                <a:solidFill>
-                  <a:srgbClr val="28C7F7"/>
-                </a:solidFill>
-                <a:latin typeface="Roboto"/>
-                <a:ea typeface="Roboto"/>
-                <a:cs typeface="Roboto"/>
-              </a:rPr>
-              <a:t>95% Wilson interval ≈ 0.8%–5.0%</a:t>
-            </a:r>
-          </a:p>
-        </p:txBody>
-      </p:sp>
-      <p:sp>
-        <p:nvSpPr>
-          <p:cNvPr id="13" name="">
-            <a:extLst xmlns:a="http://schemas.openxmlformats.org/drawingml/2006/main">
-              <a:ext uri="{FF2B5EF4-FFF2-40B4-BE49-F238E27FC236}">
-                <a16:creationId xmlns:a16="http://schemas.microsoft.com/office/drawing/2014/main" id="{9E01E1E5-054A-4455-A448-63C17E241B76}"/>
-              </a:ext>
-            </a:extLst>
-          </p:cNvPr>
-          <p:cNvSpPr>
-            <a:spLocks xmlns:a="http://schemas.openxmlformats.org/drawingml/2006/main" noGrp="1"/>
-          </p:cNvSpPr>
-          <p:nvPr/>
-        </p:nvSpPr>
-        <p:spPr>
-          <a:xfrm xmlns:a="http://schemas.openxmlformats.org/drawingml/2006/main">
-            <a:off x="6286500" y="3495675"/>
-            <a:ext cx="5295900" cy="295275"/>
-          </a:xfrm>
-          <a:prstGeom xmlns:a="http://schemas.openxmlformats.org/drawingml/2006/main" prst="rect">
-            <a:avLst/>
-          </a:prstGeom>
-          <a:noFill xmlns:a="http://schemas.openxmlformats.org/drawingml/2006/main"/>
-          <a:ln xmlns:a="http://schemas.openxmlformats.org/drawingml/2006/main" w="0">
-            <a:noFill/>
-          </a:ln>
-        </p:spPr>
-        <p:txBody>
-          <a:bodyPr xmlns:a="http://schemas.openxmlformats.org/drawingml/2006/main" wrap="square" lIns="0" tIns="0" rIns="0" bIns="0" anchor="ctr">
-            <a:noAutofit/>
-          </a:bodyPr>
-          <a:lstStyle xmlns:a="http://schemas.openxmlformats.org/drawingml/2006/main"/>
-          <a:p xmlns:a="http://schemas.openxmlformats.org/drawingml/2006/main">
-            <a:pPr algn="l">
-              <a:defRPr sz="1800" b="0">
-                <a:solidFill>
                   <a:srgbClr val="F4F7FA"/>
                 </a:solidFill>
                 <a:latin typeface="Roboto"/>
                 <a:ea typeface="Roboto"/>
                 <a:cs typeface="Roboto"/>
-              </a:defRPr>
-            </a:pPr>
-            <a:r>
-              <a:rPr sz="1800" b="0">
-                <a:solidFill>
-                  <a:srgbClr val="F4F7FA"/>
-                </a:solidFill>
-                <a:latin typeface="Roboto"/>
-                <a:ea typeface="Roboto"/>
-                <a:cs typeface="Roboto"/>
               </a:rPr>
               <a:t>3 incorrect instructions → rework</a:t>
             </a:r>
@@ -4201,250 +5417,22 @@
       </p:sp>
       <p:sp>
         <p:nvSpPr>
-          <p:cNvPr id="14" name="">
-            <a:extLst xmlns:a="http://schemas.openxmlformats.org/drawingml/2006/main">
-              <a:ext uri="{FF2B5EF4-FFF2-40B4-BE49-F238E27FC236}">
-                <a16:creationId xmlns:a16="http://schemas.microsoft.com/office/drawing/2014/main" id="{21CEE742-FA74-4FD5-93CF-6DF055732470}"/>
-              </a:ext>
-            </a:extLst>
-          </p:cNvPr>
-          <p:cNvSpPr>
-            <a:spLocks xmlns:a="http://schemas.openxmlformats.org/drawingml/2006/main" noGrp="1"/>
-          </p:cNvSpPr>
-          <p:nvPr/>
-        </p:nvSpPr>
-        <p:spPr>
-          <a:xfrm xmlns:a="http://schemas.openxmlformats.org/drawingml/2006/main">
-            <a:off x="6286500" y="3838575"/>
-            <a:ext cx="5295900" cy="295275"/>
-          </a:xfrm>
-          <a:prstGeom xmlns:a="http://schemas.openxmlformats.org/drawingml/2006/main" prst="rect">
-            <a:avLst/>
-          </a:prstGeom>
-          <a:noFill xmlns:a="http://schemas.openxmlformats.org/drawingml/2006/main"/>
-          <a:ln xmlns:a="http://schemas.openxmlformats.org/drawingml/2006/main" w="0">
-            <a:noFill/>
-          </a:ln>
-        </p:spPr>
-        <p:txBody>
-          <a:bodyPr xmlns:a="http://schemas.openxmlformats.org/drawingml/2006/main" wrap="square" lIns="0" tIns="0" rIns="0" bIns="0" anchor="ctr">
-            <a:noAutofit/>
-          </a:bodyPr>
-          <a:lstStyle xmlns:a="http://schemas.openxmlformats.org/drawingml/2006/main"/>
-          <a:p xmlns:a="http://schemas.openxmlformats.org/drawingml/2006/main">
-            <a:pPr algn="l">
-              <a:defRPr sz="1800" b="0">
-                <a:solidFill>
-                  <a:srgbClr val="FF6B75"/>
-                </a:solidFill>
-                <a:latin typeface="Roboto"/>
-                <a:ea typeface="Roboto"/>
-                <a:cs typeface="Roboto"/>
-              </a:defRPr>
-            </a:pPr>
-            <a:r>
-              <a:rPr sz="1800" b="0">
-                <a:solidFill>
-                  <a:srgbClr val="FF6B75"/>
-                </a:solidFill>
-                <a:latin typeface="Roboto"/>
-                <a:ea typeface="Roboto"/>
-                <a:cs typeface="Roboto"/>
-              </a:rPr>
-              <a:t>1 privacy leak → critical breach</a:t>
-            </a:r>
-          </a:p>
-        </p:txBody>
-      </p:sp>
-      <p:sp>
-        <p:nvSpPr>
-          <p:cNvPr id="15" name="">
-            <a:extLst xmlns:a="http://schemas.openxmlformats.org/drawingml/2006/main">
-              <a:ext uri="{FF2B5EF4-FFF2-40B4-BE49-F238E27FC236}">
-                <a16:creationId xmlns:a16="http://schemas.microsoft.com/office/drawing/2014/main" id="{E3D9B472-271C-4946-B70F-13628D7F0093}"/>
-              </a:ext>
-            </a:extLst>
-          </p:cNvPr>
-          <p:cNvSpPr>
-            <a:spLocks xmlns:a="http://schemas.openxmlformats.org/drawingml/2006/main" noGrp="1"/>
-          </p:cNvSpPr>
-          <p:nvPr/>
-        </p:nvSpPr>
-        <p:spPr>
-          <a:xfrm xmlns:a="http://schemas.openxmlformats.org/drawingml/2006/main">
-            <a:off x="6286500" y="4210050"/>
-            <a:ext cx="5295900" cy="323850"/>
-          </a:xfrm>
-          <a:prstGeom xmlns:a="http://schemas.openxmlformats.org/drawingml/2006/main" prst="rect">
-            <a:avLst/>
-          </a:prstGeom>
-          <a:noFill xmlns:a="http://schemas.openxmlformats.org/drawingml/2006/main"/>
-          <a:ln xmlns:a="http://schemas.openxmlformats.org/drawingml/2006/main" w="0">
-            <a:noFill/>
-          </a:ln>
-        </p:spPr>
-        <p:txBody>
-          <a:bodyPr xmlns:a="http://schemas.openxmlformats.org/drawingml/2006/main" wrap="square" lIns="0" tIns="0" rIns="0" bIns="0" anchor="ctr">
-            <a:noAutofit/>
-          </a:bodyPr>
-          <a:lstStyle xmlns:a="http://schemas.openxmlformats.org/drawingml/2006/main"/>
-          <a:p xmlns:a="http://schemas.openxmlformats.org/drawingml/2006/main">
-            <a:pPr algn="l">
-              <a:defRPr sz="1875" b="1">
-                <a:solidFill>
-                  <a:srgbClr val="FF6B75"/>
-                </a:solidFill>
-                <a:latin typeface="Roboto"/>
-                <a:ea typeface="Roboto"/>
-                <a:cs typeface="Roboto"/>
-              </a:defRPr>
-            </a:pPr>
-            <a:r>
-              <a:rPr sz="1875" b="1">
-                <a:solidFill>
-                  <a:srgbClr val="FF6B75"/>
-                </a:solidFill>
-                <a:latin typeface="Roboto"/>
-                <a:ea typeface="Roboto"/>
-                <a:cs typeface="Roboto"/>
-              </a:rPr>
-              <a:t>Critical breach → BLOCK RELEASE</a:t>
-            </a:r>
-          </a:p>
-        </p:txBody>
-      </p:sp>
-      <p:sp>
-        <p:nvSpPr>
-          <p:cNvPr id="16" name="">
-            <a:extLst xmlns:a="http://schemas.openxmlformats.org/drawingml/2006/main">
-              <a:ext uri="{FF2B5EF4-FFF2-40B4-BE49-F238E27FC236}">
-                <a16:creationId xmlns:a16="http://schemas.microsoft.com/office/drawing/2014/main" id="{9A65024B-8ACB-4CC0-A463-865829E6968B}"/>
-              </a:ext>
-            </a:extLst>
-          </p:cNvPr>
-          <p:cNvSpPr>
-            <a:spLocks xmlns:a="http://schemas.openxmlformats.org/drawingml/2006/main" noGrp="1"/>
-          </p:cNvSpPr>
-          <p:nvPr/>
-        </p:nvSpPr>
-        <p:spPr>
-          <a:xfrm xmlns:a="http://schemas.openxmlformats.org/drawingml/2006/main">
-            <a:off x="609600" y="4762500"/>
-            <a:ext cx="10972800" cy="228600"/>
-          </a:xfrm>
-          <a:prstGeom xmlns:a="http://schemas.openxmlformats.org/drawingml/2006/main" prst="rect">
-            <a:avLst/>
-          </a:prstGeom>
-          <a:noFill xmlns:a="http://schemas.openxmlformats.org/drawingml/2006/main"/>
-          <a:ln xmlns:a="http://schemas.openxmlformats.org/drawingml/2006/main" w="0">
-            <a:noFill/>
-          </a:ln>
-        </p:spPr>
-        <p:txBody>
-          <a:bodyPr xmlns:a="http://schemas.openxmlformats.org/drawingml/2006/main" wrap="square" lIns="0" tIns="0" rIns="0" bIns="0" anchor="ctr">
-            <a:noAutofit/>
-          </a:bodyPr>
-          <a:lstStyle xmlns:a="http://schemas.openxmlformats.org/drawingml/2006/main"/>
-          <a:p xmlns:a="http://schemas.openxmlformats.org/drawingml/2006/main">
-            <a:pPr algn="l">
-              <a:defRPr sz="1350" b="0">
-                <a:solidFill>
-                  <a:srgbClr val="ADB8C5"/>
-                </a:solidFill>
-                <a:latin typeface="Roboto"/>
-                <a:ea typeface="Roboto"/>
-                <a:cs typeface="Roboto"/>
-              </a:defRPr>
-            </a:pPr>
-            <a:r>
-              <a:rPr sz="1350" b="0">
-                <a:solidFill>
-                  <a:srgbClr val="ADB8C5"/>
-                </a:solidFill>
-                <a:latin typeface="Roboto"/>
-                <a:ea typeface="Roboto"/>
-                <a:cs typeface="Roboto"/>
-              </a:rPr>
-              <a:t>Illustrative independent sample, grouped by outcome. No production guarantee.</a:t>
-            </a:r>
-          </a:p>
-        </p:txBody>
-      </p:sp>
-      <p:sp>
-        <p:nvSpPr>
-          <p:cNvPr id="17" name="">
-            <a:extLst xmlns:a="http://schemas.openxmlformats.org/drawingml/2006/main">
-              <a:ext uri="{FF2B5EF4-FFF2-40B4-BE49-F238E27FC236}">
-                <a16:creationId xmlns:a16="http://schemas.microsoft.com/office/drawing/2014/main" id="{05A336B1-129A-401B-97C9-933C9D451391}"/>
-              </a:ext>
-            </a:extLst>
-          </p:cNvPr>
-          <p:cNvSpPr>
-            <a:spLocks xmlns:a="http://schemas.openxmlformats.org/drawingml/2006/main" noGrp="1"/>
-          </p:cNvSpPr>
-          <p:nvPr/>
-        </p:nvSpPr>
-        <p:spPr>
-          <a:xfrm xmlns:a="http://schemas.openxmlformats.org/drawingml/2006/main">
-            <a:off x="609600" y="5057775"/>
-            <a:ext cx="10972800" cy="266700"/>
-          </a:xfrm>
-          <a:prstGeom xmlns:a="http://schemas.openxmlformats.org/drawingml/2006/main" prst="rect">
-            <a:avLst/>
-          </a:prstGeom>
-          <a:noFill xmlns:a="http://schemas.openxmlformats.org/drawingml/2006/main"/>
-          <a:ln xmlns:a="http://schemas.openxmlformats.org/drawingml/2006/main" w="0">
-            <a:noFill/>
-          </a:ln>
-        </p:spPr>
-        <p:txBody>
-          <a:bodyPr xmlns:a="http://schemas.openxmlformats.org/drawingml/2006/main" wrap="square" lIns="0" tIns="0" rIns="0" bIns="0" anchor="ctr">
-            <a:noAutofit/>
-          </a:bodyPr>
-          <a:lstStyle xmlns:a="http://schemas.openxmlformats.org/drawingml/2006/main"/>
-          <a:p xmlns:a="http://schemas.openxmlformats.org/drawingml/2006/main">
-            <a:pPr algn="l">
-              <a:defRPr sz="1500" b="1">
-                <a:solidFill>
-                  <a:srgbClr val="28C7F7"/>
-                </a:solidFill>
-                <a:latin typeface="Roboto"/>
-                <a:ea typeface="Roboto"/>
-                <a:cs typeface="Roboto"/>
-              </a:defRPr>
-            </a:pPr>
-            <a:r>
-              <a:rPr sz="1500" b="1">
-                <a:solidFill>
-                  <a:srgbClr val="28C7F7"/>
-                </a:solidFill>
-                <a:latin typeface="Roboto"/>
-                <a:ea typeface="Roboto"/>
-                <a:cs typeface="Roboto"/>
-              </a:rPr>
-              <a:t>Golden Set: routine, edge and adversarial cases. Eval Gate: compare versions against agreed limits.</a:t>
-            </a:r>
-          </a:p>
-        </p:txBody>
-      </p:sp>
-      <p:sp>
-        <p:nvSpPr>
-          <p:cNvPr id="18" name="">
-            <a:extLst xmlns:a="http://schemas.openxmlformats.org/drawingml/2006/main">
-              <a:ext uri="{FF2B5EF4-FFF2-40B4-BE49-F238E27FC236}">
-                <a16:creationId xmlns:a16="http://schemas.microsoft.com/office/drawing/2014/main" id="{01DE462C-D565-4F88-8C04-455F6F30DE74}"/>
-              </a:ext>
-            </a:extLst>
-          </p:cNvPr>
-          <p:cNvSpPr>
-            <a:spLocks xmlns:a="http://schemas.openxmlformats.org/drawingml/2006/main" noGrp="1"/>
-          </p:cNvSpPr>
-          <p:nvPr/>
-        </p:nvSpPr>
-        <p:spPr>
-          <a:xfrm xmlns:a="http://schemas.openxmlformats.org/drawingml/2006/main">
-            <a:off x="609600" y="5353050"/>
-            <a:ext cx="10972800" cy="257175"/>
+          <p:cNvPr id="41" name="">
+            <a:extLst xmlns:a="http://schemas.openxmlformats.org/drawingml/2006/main">
+              <a:ext uri="{FF2B5EF4-FFF2-40B4-BE49-F238E27FC236}">
+                <a16:creationId xmlns:a16="http://schemas.microsoft.com/office/drawing/2014/main" id="{3F6BFD30-71B0-4B41-90E1-CCE69D5DA330}"/>
+              </a:ext>
+            </a:extLst>
+          </p:cNvPr>
+          <p:cNvSpPr>
+            <a:spLocks xmlns:a="http://schemas.openxmlformats.org/drawingml/2006/main" noGrp="1"/>
+          </p:cNvSpPr>
+          <p:nvPr/>
+        </p:nvSpPr>
+        <p:spPr>
+          <a:xfrm xmlns:a="http://schemas.openxmlformats.org/drawingml/2006/main">
+            <a:off x="6286500" y="5295900"/>
+            <a:ext cx="5295900" cy="238125"/>
           </a:xfrm>
           <a:prstGeom xmlns:a="http://schemas.openxmlformats.org/drawingml/2006/main" prst="rect">
             <a:avLst/>
@@ -4463,6 +5451,177 @@
             <a:pPr algn="l">
               <a:defRPr sz="1500" b="0">
                 <a:solidFill>
+                  <a:srgbClr val="FF6B75"/>
+                </a:solidFill>
+                <a:latin typeface="Roboto"/>
+                <a:ea typeface="Roboto"/>
+                <a:cs typeface="Roboto"/>
+              </a:defRPr>
+            </a:pPr>
+            <a:r>
+              <a:rPr sz="1500" b="0">
+                <a:solidFill>
+                  <a:srgbClr val="FF6B75"/>
+                </a:solidFill>
+                <a:latin typeface="Roboto"/>
+                <a:ea typeface="Roboto"/>
+                <a:cs typeface="Roboto"/>
+              </a:rPr>
+              <a:t>1 privacy leak → critical breach</a:t>
+            </a:r>
+          </a:p>
+        </p:txBody>
+      </p:sp>
+      <p:sp>
+        <p:nvSpPr>
+          <p:cNvPr id="42" name="">
+            <a:extLst xmlns:a="http://schemas.openxmlformats.org/drawingml/2006/main">
+              <a:ext uri="{FF2B5EF4-FFF2-40B4-BE49-F238E27FC236}">
+                <a16:creationId xmlns:a16="http://schemas.microsoft.com/office/drawing/2014/main" id="{2075034A-9BF0-46C5-B240-DBF72CE3FEDA}"/>
+              </a:ext>
+            </a:extLst>
+          </p:cNvPr>
+          <p:cNvSpPr>
+            <a:spLocks xmlns:a="http://schemas.openxmlformats.org/drawingml/2006/main" noGrp="1"/>
+          </p:cNvSpPr>
+          <p:nvPr/>
+        </p:nvSpPr>
+        <p:spPr>
+          <a:xfrm xmlns:a="http://schemas.openxmlformats.org/drawingml/2006/main">
+            <a:off x="6286500" y="5562600"/>
+            <a:ext cx="5295900" cy="266700"/>
+          </a:xfrm>
+          <a:prstGeom xmlns:a="http://schemas.openxmlformats.org/drawingml/2006/main" prst="rect">
+            <a:avLst/>
+          </a:prstGeom>
+          <a:noFill xmlns:a="http://schemas.openxmlformats.org/drawingml/2006/main"/>
+          <a:ln xmlns:a="http://schemas.openxmlformats.org/drawingml/2006/main" w="0">
+            <a:noFill/>
+          </a:ln>
+        </p:spPr>
+        <p:txBody>
+          <a:bodyPr xmlns:a="http://schemas.openxmlformats.org/drawingml/2006/main" wrap="square" lIns="0" tIns="0" rIns="0" bIns="0" anchor="ctr">
+            <a:noAutofit/>
+          </a:bodyPr>
+          <a:lstStyle xmlns:a="http://schemas.openxmlformats.org/drawingml/2006/main"/>
+          <a:p xmlns:a="http://schemas.openxmlformats.org/drawingml/2006/main">
+            <a:pPr algn="l">
+              <a:defRPr sz="1725" b="1">
+                <a:solidFill>
+                  <a:srgbClr val="FF6B75"/>
+                </a:solidFill>
+                <a:latin typeface="Roboto"/>
+                <a:ea typeface="Roboto"/>
+                <a:cs typeface="Roboto"/>
+              </a:defRPr>
+            </a:pPr>
+            <a:r>
+              <a:rPr sz="1725" b="1">
+                <a:solidFill>
+                  <a:srgbClr val="FF6B75"/>
+                </a:solidFill>
+                <a:latin typeface="Roboto"/>
+                <a:ea typeface="Roboto"/>
+                <a:cs typeface="Roboto"/>
+              </a:rPr>
+              <a:t>Critical breach → BLOCK RELEASE</a:t>
+            </a:r>
+          </a:p>
+        </p:txBody>
+      </p:sp>
+      <p:sp>
+        <p:nvSpPr>
+          <p:cNvPr id="43" name="">
+            <a:extLst xmlns:a="http://schemas.openxmlformats.org/drawingml/2006/main">
+              <a:ext uri="{FF2B5EF4-FFF2-40B4-BE49-F238E27FC236}">
+                <a16:creationId xmlns:a16="http://schemas.microsoft.com/office/drawing/2014/main" id="{82AE51BE-6893-4390-A9EB-DE7A7A25BF99}"/>
+              </a:ext>
+            </a:extLst>
+          </p:cNvPr>
+          <p:cNvSpPr>
+            <a:spLocks xmlns:a="http://schemas.openxmlformats.org/drawingml/2006/main" noGrp="1"/>
+          </p:cNvSpPr>
+          <p:nvPr/>
+        </p:nvSpPr>
+        <p:spPr>
+          <a:xfrm xmlns:a="http://schemas.openxmlformats.org/drawingml/2006/main">
+            <a:off x="609600" y="5915025"/>
+            <a:ext cx="10972800" cy="247650"/>
+          </a:xfrm>
+          <a:prstGeom xmlns:a="http://schemas.openxmlformats.org/drawingml/2006/main" prst="rect">
+            <a:avLst/>
+          </a:prstGeom>
+          <a:noFill xmlns:a="http://schemas.openxmlformats.org/drawingml/2006/main"/>
+          <a:ln xmlns:a="http://schemas.openxmlformats.org/drawingml/2006/main" w="0">
+            <a:noFill/>
+          </a:ln>
+        </p:spPr>
+        <p:txBody>
+          <a:bodyPr xmlns:a="http://schemas.openxmlformats.org/drawingml/2006/main" wrap="square" lIns="0" tIns="0" rIns="0" bIns="0" anchor="ctr">
+            <a:noAutofit/>
+          </a:bodyPr>
+          <a:lstStyle xmlns:a="http://schemas.openxmlformats.org/drawingml/2006/main"/>
+          <a:p xmlns:a="http://schemas.openxmlformats.org/drawingml/2006/main">
+            <a:pPr algn="l">
+              <a:defRPr sz="1425" b="1">
+                <a:solidFill>
+                  <a:srgbClr val="28C7F7"/>
+                </a:solidFill>
+                <a:latin typeface="Roboto"/>
+                <a:ea typeface="Roboto"/>
+                <a:cs typeface="Roboto"/>
+              </a:defRPr>
+            </a:pPr>
+            <a:r>
+              <a:rPr sz="1425" b="1">
+                <a:solidFill>
+                  <a:srgbClr val="28C7F7"/>
+                </a:solidFill>
+                <a:latin typeface="Roboto"/>
+                <a:ea typeface="Roboto"/>
+                <a:cs typeface="Roboto"/>
+              </a:rPr>
+              <a:t>Golden Set: routine, edge and adversarial cases. Eval Gate: compare versions against agreed limits.</a:t>
+            </a:r>
+          </a:p>
+        </p:txBody>
+      </p:sp>
+      <p:sp>
+        <p:nvSpPr>
+          <p:cNvPr id="44" name="">
+            <a:extLst xmlns:a="http://schemas.openxmlformats.org/drawingml/2006/main">
+              <a:ext uri="{FF2B5EF4-FFF2-40B4-BE49-F238E27FC236}">
+                <a16:creationId xmlns:a16="http://schemas.microsoft.com/office/drawing/2014/main" id="{8E327A75-FEBF-4AFB-8EA2-56F400AD07D7}"/>
+              </a:ext>
+            </a:extLst>
+          </p:cNvPr>
+          <p:cNvSpPr>
+            <a:spLocks xmlns:a="http://schemas.openxmlformats.org/drawingml/2006/main" noGrp="1"/>
+          </p:cNvSpPr>
+          <p:nvPr/>
+        </p:nvSpPr>
+        <p:spPr>
+          <a:xfrm xmlns:a="http://schemas.openxmlformats.org/drawingml/2006/main">
+            <a:off x="609600" y="6200775"/>
+            <a:ext cx="10972800" cy="238125"/>
+          </a:xfrm>
+          <a:prstGeom xmlns:a="http://schemas.openxmlformats.org/drawingml/2006/main" prst="rect">
+            <a:avLst/>
+          </a:prstGeom>
+          <a:noFill xmlns:a="http://schemas.openxmlformats.org/drawingml/2006/main"/>
+          <a:ln xmlns:a="http://schemas.openxmlformats.org/drawingml/2006/main" w="0">
+            <a:noFill/>
+          </a:ln>
+        </p:spPr>
+        <p:txBody>
+          <a:bodyPr xmlns:a="http://schemas.openxmlformats.org/drawingml/2006/main" wrap="square" lIns="0" tIns="0" rIns="0" bIns="0" anchor="ctr">
+            <a:noAutofit/>
+          </a:bodyPr>
+          <a:lstStyle xmlns:a="http://schemas.openxmlformats.org/drawingml/2006/main"/>
+          <a:p xmlns:a="http://schemas.openxmlformats.org/drawingml/2006/main">
+            <a:pPr algn="l">
+              <a:defRPr sz="1425" b="0">
+                <a:solidFill>
                   <a:srgbClr val="F4F7FA"/>
                 </a:solidFill>
                 <a:latin typeface="Roboto"/>
@@ -4471,7 +5630,7 @@
               </a:defRPr>
             </a:pPr>
             <a:r>
-              <a:rPr sz="1500" b="0">
+              <a:rPr sz="1425" b="0">
                 <a:solidFill>
                   <a:srgbClr val="F4F7FA"/>
                 </a:solidFill>
@@ -4486,22 +5645,22 @@
       </p:sp>
       <p:sp>
         <p:nvSpPr>
-          <p:cNvPr id="19" name="">
-            <a:extLst xmlns:a="http://schemas.openxmlformats.org/drawingml/2006/main">
-              <a:ext uri="{FF2B5EF4-FFF2-40B4-BE49-F238E27FC236}">
-                <a16:creationId xmlns:a16="http://schemas.microsoft.com/office/drawing/2014/main" id="{25B7F26D-1942-4585-83C2-45FEEAD2ACB5}"/>
-              </a:ext>
-            </a:extLst>
-          </p:cNvPr>
-          <p:cNvSpPr>
-            <a:spLocks xmlns:a="http://schemas.openxmlformats.org/drawingml/2006/main" noGrp="1"/>
-          </p:cNvSpPr>
-          <p:nvPr/>
-        </p:nvSpPr>
-        <p:spPr>
-          <a:xfrm xmlns:a="http://schemas.openxmlformats.org/drawingml/2006/main">
-            <a:off x="609600" y="5657850"/>
-            <a:ext cx="10972800" cy="276225"/>
+          <p:cNvPr id="45" name="">
+            <a:extLst xmlns:a="http://schemas.openxmlformats.org/drawingml/2006/main">
+              <a:ext uri="{FF2B5EF4-FFF2-40B4-BE49-F238E27FC236}">
+                <a16:creationId xmlns:a16="http://schemas.microsoft.com/office/drawing/2014/main" id="{FDC4D167-7D99-4CC9-A673-243357A8FC73}"/>
+              </a:ext>
+            </a:extLst>
+          </p:cNvPr>
+          <p:cNvSpPr>
+            <a:spLocks xmlns:a="http://schemas.openxmlformats.org/drawingml/2006/main" noGrp="1"/>
+          </p:cNvSpPr>
+          <p:nvPr/>
+        </p:nvSpPr>
+        <p:spPr>
+          <a:xfrm xmlns:a="http://schemas.openxmlformats.org/drawingml/2006/main">
+            <a:off x="609600" y="6486525"/>
+            <a:ext cx="10648950" cy="257175"/>
           </a:xfrm>
           <a:prstGeom xmlns:a="http://schemas.openxmlformats.org/drawingml/2006/main" prst="rect">
             <a:avLst/>
@@ -4518,7 +5677,7 @@
           <a:lstStyle xmlns:a="http://schemas.openxmlformats.org/drawingml/2006/main"/>
           <a:p xmlns:a="http://schemas.openxmlformats.org/drawingml/2006/main">
             <a:pPr algn="l">
-              <a:defRPr sz="1500" b="1">
+              <a:defRPr sz="1575" b="1">
                 <a:solidFill>
                   <a:srgbClr val="F4F7FA"/>
                 </a:solidFill>
@@ -4528,7 +5687,7 @@
               </a:defRPr>
             </a:pPr>
             <a:r>
-              <a:rPr sz="1500" b="1">
+              <a:rPr sz="1575" b="1">
                 <a:solidFill>
                   <a:srgbClr val="F4F7FA"/>
                 </a:solidFill>
@@ -4536,406 +5695,7 @@
                 <a:ea typeface="Roboto"/>
                 <a:cs typeface="Roboto"/>
               </a:rPr>
-              <a:t>Ask the business: “How much rework is tolerable? Which harm must be prevented?”</a:t>
-            </a:r>
-          </a:p>
-        </p:txBody>
-      </p:sp>
-      <p:sp>
-        <p:nvSpPr>
-          <p:cNvPr id="20" name="">
-            <a:extLst xmlns:a="http://schemas.openxmlformats.org/drawingml/2006/main">
-              <a:ext uri="{FF2B5EF4-FFF2-40B4-BE49-F238E27FC236}">
-                <a16:creationId xmlns:a16="http://schemas.microsoft.com/office/drawing/2014/main" id="{7148D8E6-0008-42B2-9C74-A51BA6B1BB68}"/>
-              </a:ext>
-            </a:extLst>
-          </p:cNvPr>
-          <p:cNvSpPr>
-            <a:spLocks xmlns:a="http://schemas.openxmlformats.org/drawingml/2006/main" noGrp="1"/>
-          </p:cNvSpPr>
-          <p:nvPr/>
-        </p:nvSpPr>
-        <p:spPr>
-          <a:xfrm xmlns:a="http://schemas.openxmlformats.org/drawingml/2006/main">
-            <a:off x="609600" y="5981700"/>
-            <a:ext cx="3524250" cy="200025"/>
-          </a:xfrm>
-          <a:prstGeom xmlns:a="http://schemas.openxmlformats.org/drawingml/2006/main" prst="rect">
-            <a:avLst/>
-          </a:prstGeom>
-          <a:noFill xmlns:a="http://schemas.openxmlformats.org/drawingml/2006/main"/>
-          <a:ln xmlns:a="http://schemas.openxmlformats.org/drawingml/2006/main" w="0">
-            <a:noFill/>
-          </a:ln>
-        </p:spPr>
-        <p:txBody>
-          <a:bodyPr xmlns:a="http://schemas.openxmlformats.org/drawingml/2006/main" wrap="square" lIns="0" tIns="0" rIns="0" bIns="0" anchor="ctr">
-            <a:noAutofit/>
-          </a:bodyPr>
-          <a:lstStyle xmlns:a="http://schemas.openxmlformats.org/drawingml/2006/main"/>
-          <a:p xmlns:a="http://schemas.openxmlformats.org/drawingml/2006/main">
-            <a:pPr algn="l">
-              <a:defRPr sz="1200" b="1">
-                <a:solidFill>
-                  <a:srgbClr val="28C7F7"/>
-                </a:solidFill>
-                <a:latin typeface="Roboto"/>
-                <a:ea typeface="Roboto"/>
-                <a:cs typeface="Roboto"/>
-              </a:defRPr>
-            </a:pPr>
-            <a:r>
-              <a:rPr sz="1200" b="1">
-                <a:solidFill>
-                  <a:srgbClr val="28C7F7"/>
-                </a:solidFill>
-                <a:latin typeface="Roboto"/>
-                <a:ea typeface="Roboto"/>
-                <a:cs typeface="Roboto"/>
-              </a:rPr>
-              <a:t>PRODUCT + BA</a:t>
-            </a:r>
-          </a:p>
-        </p:txBody>
-      </p:sp>
-      <p:sp>
-        <p:nvSpPr>
-          <p:cNvPr id="21" name="">
-            <a:extLst xmlns:a="http://schemas.openxmlformats.org/drawingml/2006/main">
-              <a:ext uri="{FF2B5EF4-FFF2-40B4-BE49-F238E27FC236}">
-                <a16:creationId xmlns:a16="http://schemas.microsoft.com/office/drawing/2014/main" id="{DCBF179B-02B7-4CCE-9CD8-30A8F80E4AC9}"/>
-              </a:ext>
-            </a:extLst>
-          </p:cNvPr>
-          <p:cNvSpPr>
-            <a:spLocks xmlns:a="http://schemas.openxmlformats.org/drawingml/2006/main" noGrp="1"/>
-          </p:cNvSpPr>
-          <p:nvPr/>
-        </p:nvSpPr>
-        <p:spPr>
-          <a:xfrm xmlns:a="http://schemas.openxmlformats.org/drawingml/2006/main">
-            <a:off x="609600" y="6200775"/>
-            <a:ext cx="3524250" cy="209550"/>
-          </a:xfrm>
-          <a:prstGeom xmlns:a="http://schemas.openxmlformats.org/drawingml/2006/main" prst="rect">
-            <a:avLst/>
-          </a:prstGeom>
-          <a:noFill xmlns:a="http://schemas.openxmlformats.org/drawingml/2006/main"/>
-          <a:ln xmlns:a="http://schemas.openxmlformats.org/drawingml/2006/main" w="0">
-            <a:noFill/>
-          </a:ln>
-        </p:spPr>
-        <p:txBody>
-          <a:bodyPr xmlns:a="http://schemas.openxmlformats.org/drawingml/2006/main" wrap="square" lIns="0" tIns="0" rIns="0" bIns="0" anchor="ctr">
-            <a:noAutofit/>
-          </a:bodyPr>
-          <a:lstStyle xmlns:a="http://schemas.openxmlformats.org/drawingml/2006/main"/>
-          <a:p xmlns:a="http://schemas.openxmlformats.org/drawingml/2006/main">
-            <a:pPr algn="l">
-              <a:defRPr sz="1275" b="0">
-                <a:solidFill>
-                  <a:srgbClr val="ADB8C5"/>
-                </a:solidFill>
-                <a:latin typeface="Roboto"/>
-                <a:ea typeface="Roboto"/>
-                <a:cs typeface="Roboto"/>
-              </a:defRPr>
-            </a:pPr>
-            <a:r>
-              <a:rPr sz="1275" b="0">
-                <a:solidFill>
-                  <a:srgbClr val="ADB8C5"/>
-                </a:solidFill>
-                <a:latin typeface="Roboto"/>
-                <a:ea typeface="Roboto"/>
-                <a:cs typeface="Roboto"/>
-              </a:rPr>
-              <a:t>Elicit impact; agree acceptance</a:t>
-            </a:r>
-          </a:p>
-        </p:txBody>
-      </p:sp>
-      <p:sp>
-        <p:nvSpPr>
-          <p:cNvPr id="22" name="">
-            <a:extLst xmlns:a="http://schemas.openxmlformats.org/drawingml/2006/main">
-              <a:ext uri="{FF2B5EF4-FFF2-40B4-BE49-F238E27FC236}">
-                <a16:creationId xmlns:a16="http://schemas.microsoft.com/office/drawing/2014/main" id="{FA0C95E0-3D17-48CB-AF33-7ECA2A26714F}"/>
-              </a:ext>
-            </a:extLst>
-          </p:cNvPr>
-          <p:cNvSpPr>
-            <a:spLocks xmlns:a="http://schemas.openxmlformats.org/drawingml/2006/main" noGrp="1"/>
-          </p:cNvSpPr>
-          <p:nvPr/>
-        </p:nvSpPr>
-        <p:spPr>
-          <a:xfrm xmlns:a="http://schemas.openxmlformats.org/drawingml/2006/main">
-            <a:off x="4391025" y="5981700"/>
-            <a:ext cx="3524250" cy="200025"/>
-          </a:xfrm>
-          <a:prstGeom xmlns:a="http://schemas.openxmlformats.org/drawingml/2006/main" prst="rect">
-            <a:avLst/>
-          </a:prstGeom>
-          <a:noFill xmlns:a="http://schemas.openxmlformats.org/drawingml/2006/main"/>
-          <a:ln xmlns:a="http://schemas.openxmlformats.org/drawingml/2006/main" w="0">
-            <a:noFill/>
-          </a:ln>
-        </p:spPr>
-        <p:txBody>
-          <a:bodyPr xmlns:a="http://schemas.openxmlformats.org/drawingml/2006/main" wrap="square" lIns="0" tIns="0" rIns="0" bIns="0" anchor="ctr">
-            <a:noAutofit/>
-          </a:bodyPr>
-          <a:lstStyle xmlns:a="http://schemas.openxmlformats.org/drawingml/2006/main"/>
-          <a:p xmlns:a="http://schemas.openxmlformats.org/drawingml/2006/main">
-            <a:pPr algn="l">
-              <a:defRPr sz="1200" b="1">
-                <a:solidFill>
-                  <a:srgbClr val="28C7F7"/>
-                </a:solidFill>
-                <a:latin typeface="Roboto"/>
-                <a:ea typeface="Roboto"/>
-                <a:cs typeface="Roboto"/>
-              </a:defRPr>
-            </a:pPr>
-            <a:r>
-              <a:rPr sz="1200" b="1">
-                <a:solidFill>
-                  <a:srgbClr val="28C7F7"/>
-                </a:solidFill>
-                <a:latin typeface="Roboto"/>
-                <a:ea typeface="Roboto"/>
-                <a:cs typeface="Roboto"/>
-              </a:rPr>
-              <a:t>QA + DEVELOPERS</a:t>
-            </a:r>
-          </a:p>
-        </p:txBody>
-      </p:sp>
-      <p:sp>
-        <p:nvSpPr>
-          <p:cNvPr id="23" name="">
-            <a:extLst xmlns:a="http://schemas.openxmlformats.org/drawingml/2006/main">
-              <a:ext uri="{FF2B5EF4-FFF2-40B4-BE49-F238E27FC236}">
-                <a16:creationId xmlns:a16="http://schemas.microsoft.com/office/drawing/2014/main" id="{E5E67822-47E5-4238-83D1-6CB32890EAD6}"/>
-              </a:ext>
-            </a:extLst>
-          </p:cNvPr>
-          <p:cNvSpPr>
-            <a:spLocks xmlns:a="http://schemas.openxmlformats.org/drawingml/2006/main" noGrp="1"/>
-          </p:cNvSpPr>
-          <p:nvPr/>
-        </p:nvSpPr>
-        <p:spPr>
-          <a:xfrm xmlns:a="http://schemas.openxmlformats.org/drawingml/2006/main">
-            <a:off x="4391025" y="6200775"/>
-            <a:ext cx="3524250" cy="209550"/>
-          </a:xfrm>
-          <a:prstGeom xmlns:a="http://schemas.openxmlformats.org/drawingml/2006/main" prst="rect">
-            <a:avLst/>
-          </a:prstGeom>
-          <a:noFill xmlns:a="http://schemas.openxmlformats.org/drawingml/2006/main"/>
-          <a:ln xmlns:a="http://schemas.openxmlformats.org/drawingml/2006/main" w="0">
-            <a:noFill/>
-          </a:ln>
-        </p:spPr>
-        <p:txBody>
-          <a:bodyPr xmlns:a="http://schemas.openxmlformats.org/drawingml/2006/main" wrap="square" lIns="0" tIns="0" rIns="0" bIns="0" anchor="ctr">
-            <a:noAutofit/>
-          </a:bodyPr>
-          <a:lstStyle xmlns:a="http://schemas.openxmlformats.org/drawingml/2006/main"/>
-          <a:p xmlns:a="http://schemas.openxmlformats.org/drawingml/2006/main">
-            <a:pPr algn="l">
-              <a:defRPr sz="1275" b="0">
-                <a:solidFill>
-                  <a:srgbClr val="ADB8C5"/>
-                </a:solidFill>
-                <a:latin typeface="Roboto"/>
-                <a:ea typeface="Roboto"/>
-                <a:cs typeface="Roboto"/>
-              </a:defRPr>
-            </a:pPr>
-            <a:r>
-              <a:rPr sz="1275" b="0">
-                <a:solidFill>
-                  <a:srgbClr val="ADB8C5"/>
-                </a:solidFill>
-                <a:latin typeface="Roboto"/>
-                <a:ea typeface="Roboto"/>
-                <a:cs typeface="Roboto"/>
-              </a:rPr>
-              <a:t>Sample, calibrate, compare versions</a:t>
-            </a:r>
-          </a:p>
-        </p:txBody>
-      </p:sp>
-      <p:sp>
-        <p:nvSpPr>
-          <p:cNvPr id="24" name="">
-            <a:extLst xmlns:a="http://schemas.openxmlformats.org/drawingml/2006/main">
-              <a:ext uri="{FF2B5EF4-FFF2-40B4-BE49-F238E27FC236}">
-                <a16:creationId xmlns:a16="http://schemas.microsoft.com/office/drawing/2014/main" id="{6A400060-0537-4F41-991E-A4CAD5C78B24}"/>
-              </a:ext>
-            </a:extLst>
-          </p:cNvPr>
-          <p:cNvSpPr>
-            <a:spLocks xmlns:a="http://schemas.openxmlformats.org/drawingml/2006/main" noGrp="1"/>
-          </p:cNvSpPr>
-          <p:nvPr/>
-        </p:nvSpPr>
-        <p:spPr>
-          <a:xfrm xmlns:a="http://schemas.openxmlformats.org/drawingml/2006/main">
-            <a:off x="8172450" y="5981700"/>
-            <a:ext cx="3524250" cy="200025"/>
-          </a:xfrm>
-          <a:prstGeom xmlns:a="http://schemas.openxmlformats.org/drawingml/2006/main" prst="rect">
-            <a:avLst/>
-          </a:prstGeom>
-          <a:noFill xmlns:a="http://schemas.openxmlformats.org/drawingml/2006/main"/>
-          <a:ln xmlns:a="http://schemas.openxmlformats.org/drawingml/2006/main" w="0">
-            <a:noFill/>
-          </a:ln>
-        </p:spPr>
-        <p:txBody>
-          <a:bodyPr xmlns:a="http://schemas.openxmlformats.org/drawingml/2006/main" wrap="square" lIns="0" tIns="0" rIns="0" bIns="0" anchor="ctr">
-            <a:noAutofit/>
-          </a:bodyPr>
-          <a:lstStyle xmlns:a="http://schemas.openxmlformats.org/drawingml/2006/main"/>
-          <a:p xmlns:a="http://schemas.openxmlformats.org/drawingml/2006/main">
-            <a:pPr algn="l">
-              <a:defRPr sz="1200" b="1">
-                <a:solidFill>
-                  <a:srgbClr val="F5B61C"/>
-                </a:solidFill>
-                <a:latin typeface="Roboto"/>
-                <a:ea typeface="Roboto"/>
-                <a:cs typeface="Roboto"/>
-              </a:defRPr>
-            </a:pPr>
-            <a:r>
-              <a:rPr sz="1200" b="1">
-                <a:solidFill>
-                  <a:srgbClr val="F5B61C"/>
-                </a:solidFill>
-                <a:latin typeface="Roboto"/>
-                <a:ea typeface="Roboto"/>
-                <a:cs typeface="Roboto"/>
-              </a:rPr>
-              <a:t>RISK / RELEASE OWNER</a:t>
-            </a:r>
-          </a:p>
-        </p:txBody>
-      </p:sp>
-      <p:sp>
-        <p:nvSpPr>
-          <p:cNvPr id="25" name="">
-            <a:extLst xmlns:a="http://schemas.openxmlformats.org/drawingml/2006/main">
-              <a:ext uri="{FF2B5EF4-FFF2-40B4-BE49-F238E27FC236}">
-                <a16:creationId xmlns:a16="http://schemas.microsoft.com/office/drawing/2014/main" id="{7E6678A8-5810-47C4-A0D9-2D28ED983684}"/>
-              </a:ext>
-            </a:extLst>
-          </p:cNvPr>
-          <p:cNvSpPr>
-            <a:spLocks xmlns:a="http://schemas.openxmlformats.org/drawingml/2006/main" noGrp="1"/>
-          </p:cNvSpPr>
-          <p:nvPr/>
-        </p:nvSpPr>
-        <p:spPr>
-          <a:xfrm xmlns:a="http://schemas.openxmlformats.org/drawingml/2006/main">
-            <a:off x="8172450" y="6200775"/>
-            <a:ext cx="3524250" cy="209550"/>
-          </a:xfrm>
-          <a:prstGeom xmlns:a="http://schemas.openxmlformats.org/drawingml/2006/main" prst="rect">
-            <a:avLst/>
-          </a:prstGeom>
-          <a:noFill xmlns:a="http://schemas.openxmlformats.org/drawingml/2006/main"/>
-          <a:ln xmlns:a="http://schemas.openxmlformats.org/drawingml/2006/main" w="0">
-            <a:noFill/>
-          </a:ln>
-        </p:spPr>
-        <p:txBody>
-          <a:bodyPr xmlns:a="http://schemas.openxmlformats.org/drawingml/2006/main" wrap="square" lIns="0" tIns="0" rIns="0" bIns="0" anchor="ctr">
-            <a:noAutofit/>
-          </a:bodyPr>
-          <a:lstStyle xmlns:a="http://schemas.openxmlformats.org/drawingml/2006/main"/>
-          <a:p xmlns:a="http://schemas.openxmlformats.org/drawingml/2006/main">
-            <a:pPr algn="l">
-              <a:defRPr sz="1275" b="0">
-                <a:solidFill>
-                  <a:srgbClr val="ADB8C5"/>
-                </a:solidFill>
-                <a:latin typeface="Roboto"/>
-                <a:ea typeface="Roboto"/>
-                <a:cs typeface="Roboto"/>
-              </a:defRPr>
-            </a:pPr>
-            <a:r>
-              <a:rPr sz="1275" b="0">
-                <a:solidFill>
-                  <a:srgbClr val="ADB8C5"/>
-                </a:solidFill>
-                <a:latin typeface="Roboto"/>
-                <a:ea typeface="Roboto"/>
-                <a:cs typeface="Roboto"/>
-              </a:rPr>
-              <a:t>Decide acceptability for this scope</a:t>
-            </a:r>
-          </a:p>
-        </p:txBody>
-      </p:sp>
-      <p:sp>
-        <p:nvSpPr>
-          <p:cNvPr id="26" name="">
-            <a:extLst xmlns:a="http://schemas.openxmlformats.org/drawingml/2006/main">
-              <a:ext uri="{FF2B5EF4-FFF2-40B4-BE49-F238E27FC236}">
-                <a16:creationId xmlns:a16="http://schemas.microsoft.com/office/drawing/2014/main" id="{CB584E73-367C-4396-B689-953F7DA1A56A}"/>
-              </a:ext>
-            </a:extLst>
-          </p:cNvPr>
-          <p:cNvSpPr>
-            <a:spLocks xmlns:a="http://schemas.openxmlformats.org/drawingml/2006/main" noGrp="1"/>
-          </p:cNvSpPr>
-          <p:nvPr/>
-        </p:nvSpPr>
-        <p:spPr>
-          <a:xfrm xmlns:a="http://schemas.openxmlformats.org/drawingml/2006/main">
-            <a:off x="609600" y="6505575"/>
-            <a:ext cx="10648950" cy="238125"/>
-          </a:xfrm>
-          <a:prstGeom xmlns:a="http://schemas.openxmlformats.org/drawingml/2006/main" prst="rect">
-            <a:avLst/>
-          </a:prstGeom>
-          <a:noFill xmlns:a="http://schemas.openxmlformats.org/drawingml/2006/main"/>
-          <a:ln xmlns:a="http://schemas.openxmlformats.org/drawingml/2006/main" w="0">
-            <a:noFill/>
-          </a:ln>
-        </p:spPr>
-        <p:txBody>
-          <a:bodyPr xmlns:a="http://schemas.openxmlformats.org/drawingml/2006/main" wrap="square" lIns="0" tIns="0" rIns="0" bIns="0" anchor="ctr">
-            <a:noAutofit/>
-          </a:bodyPr>
-          <a:lstStyle xmlns:a="http://schemas.openxmlformats.org/drawingml/2006/main"/>
-          <a:p xmlns:a="http://schemas.openxmlformats.org/drawingml/2006/main">
-            <a:pPr algn="l">
-              <a:defRPr sz="1650" b="1">
-                <a:solidFill>
-                  <a:srgbClr val="F4F7FA"/>
-                </a:solidFill>
-                <a:latin typeface="Roboto"/>
-                <a:ea typeface="Roboto"/>
-                <a:cs typeface="Roboto"/>
-              </a:defRPr>
-            </a:pPr>
-            <a:r>
-              <a:rPr sz="1650" b="1">
-                <a:solidFill>
-                  <a:srgbClr val="F4F7FA"/>
-                </a:solidFill>
-                <a:latin typeface="Roboto"/>
-                <a:ea typeface="Roboto"/>
-                <a:cs typeface="Roboto"/>
-              </a:rPr>
-              <a:t>Statistics estimate frequency. Business authority decides acceptable consequences.</a:t>
+              <a:t>Product + BA agree limits. QA + Dev measure. Risk / release owner decides.</a:t>
             </a:r>
           </a:p>
         </p:txBody>
@@ -4943,7 +5703,7 @@
     </p:spTree>
     <p:extLst>
       <p:ext uri="{BB962C8B-B14F-4D97-AF65-F5344CB8AC3E}">
-        <p14:creationId xmlns:p14="http://schemas.microsoft.com/office/powerpoint/2010/main" val="693035303"/>
+        <p14:creationId xmlns:p14="http://schemas.microsoft.com/office/powerpoint/2010/main" val="326337081"/>
       </p:ext>
     </p:extLst>
   </p:cSld>
@@ -4974,7 +5734,7 @@
           <p:cNvPr id="10" name="">
             <a:extLst xmlns:a="http://schemas.openxmlformats.org/drawingml/2006/main">
               <a:ext uri="{FF2B5EF4-FFF2-40B4-BE49-F238E27FC236}">
-                <a16:creationId xmlns:a16="http://schemas.microsoft.com/office/drawing/2014/main" id="{A01CE0A1-9FA7-41A6-9440-DBED635C862D}"/>
+                <a16:creationId xmlns:a16="http://schemas.microsoft.com/office/drawing/2014/main" id="{1A29FAC1-D028-4677-93B6-8B15EB115C23}"/>
               </a:ext>
             </a:extLst>
           </p:cNvPr>
@@ -5031,7 +5791,7 @@
           <p:cNvPr id="2" name="">
             <a:extLst xmlns:a="http://schemas.openxmlformats.org/drawingml/2006/main">
               <a:ext uri="{FF2B5EF4-FFF2-40B4-BE49-F238E27FC236}">
-                <a16:creationId xmlns:a16="http://schemas.microsoft.com/office/drawing/2014/main" id="{253736F6-22C6-4493-AAD7-C42A59290E20}"/>
+                <a16:creationId xmlns:a16="http://schemas.microsoft.com/office/drawing/2014/main" id="{EE3EB843-C27D-42D8-BC56-1FF5E76A6725}"/>
               </a:ext>
             </a:extLst>
           </p:cNvPr>
@@ -5062,7 +5822,7 @@
           <p:cNvPr id="3" name="">
             <a:extLst xmlns:a="http://schemas.openxmlformats.org/drawingml/2006/main">
               <a:ext uri="{FF2B5EF4-FFF2-40B4-BE49-F238E27FC236}">
-                <a16:creationId xmlns:a16="http://schemas.microsoft.com/office/drawing/2014/main" id="{85A2668A-80BF-4396-8471-F2EE30B7763C}"/>
+                <a16:creationId xmlns:a16="http://schemas.microsoft.com/office/drawing/2014/main" id="{CC2D52C3-F037-4E8B-982F-23B3B1FC810B}"/>
               </a:ext>
             </a:extLst>
           </p:cNvPr>
@@ -5119,7 +5879,7 @@
           <p:cNvPr id="4" name="">
             <a:extLst xmlns:a="http://schemas.openxmlformats.org/drawingml/2006/main">
               <a:ext uri="{FF2B5EF4-FFF2-40B4-BE49-F238E27FC236}">
-                <a16:creationId xmlns:a16="http://schemas.microsoft.com/office/drawing/2014/main" id="{1E75D794-EAD3-4007-823F-7C9BD8605699}"/>
+                <a16:creationId xmlns:a16="http://schemas.microsoft.com/office/drawing/2014/main" id="{C858B11D-AA58-49AF-99D7-D67920869F50}"/>
               </a:ext>
             </a:extLst>
           </p:cNvPr>
@@ -5176,7 +5936,7 @@
           <p:cNvPr id="5" name="">
             <a:extLst xmlns:a="http://schemas.openxmlformats.org/drawingml/2006/main">
               <a:ext uri="{FF2B5EF4-FFF2-40B4-BE49-F238E27FC236}">
-                <a16:creationId xmlns:a16="http://schemas.microsoft.com/office/drawing/2014/main" id="{A1D4BA13-6C78-4A66-8D8D-346FAF5179E9}"/>
+                <a16:creationId xmlns:a16="http://schemas.microsoft.com/office/drawing/2014/main" id="{D1A05A91-49CB-4621-ADD1-49F07208D33B}"/>
               </a:ext>
             </a:extLst>
           </p:cNvPr>
@@ -5915,7 +6675,7 @@
           <p:cNvPr id="7" name="">
             <a:extLst xmlns:a="http://schemas.openxmlformats.org/drawingml/2006/main">
               <a:ext uri="{FF2B5EF4-FFF2-40B4-BE49-F238E27FC236}">
-                <a16:creationId xmlns:a16="http://schemas.microsoft.com/office/drawing/2014/main" id="{E5C7162F-C24C-45BA-AE99-6A52D072AE2D}"/>
+                <a16:creationId xmlns:a16="http://schemas.microsoft.com/office/drawing/2014/main" id="{A787B11E-F60C-4F5A-A930-DDC7E4D1DB3A}"/>
               </a:ext>
             </a:extLst>
           </p:cNvPr>
@@ -5972,7 +6732,7 @@
           <p:cNvPr id="8" name="">
             <a:extLst xmlns:a="http://schemas.openxmlformats.org/drawingml/2006/main">
               <a:ext uri="{FF2B5EF4-FFF2-40B4-BE49-F238E27FC236}">
-                <a16:creationId xmlns:a16="http://schemas.microsoft.com/office/drawing/2014/main" id="{061F8EC8-E2E8-4657-8EF2-E58EF3E7451A}"/>
+                <a16:creationId xmlns:a16="http://schemas.microsoft.com/office/drawing/2014/main" id="{BE56AA0C-0139-4855-824B-E02C5C62ADC8}"/>
               </a:ext>
             </a:extLst>
           </p:cNvPr>
@@ -6029,7 +6789,7 @@
           <p:cNvPr id="9" name="">
             <a:extLst xmlns:a="http://schemas.openxmlformats.org/drawingml/2006/main">
               <a:ext uri="{FF2B5EF4-FFF2-40B4-BE49-F238E27FC236}">
-                <a16:creationId xmlns:a16="http://schemas.microsoft.com/office/drawing/2014/main" id="{76C2877B-2640-4727-9374-51D23CE2BDF5}"/>
+                <a16:creationId xmlns:a16="http://schemas.microsoft.com/office/drawing/2014/main" id="{25776134-DF88-4780-B570-A3C6249F8681}"/>
               </a:ext>
             </a:extLst>
           </p:cNvPr>
@@ -6084,7 +6844,7 @@
     </p:spTree>
     <p:extLst>
       <p:ext uri="{BB962C8B-B14F-4D97-AF65-F5344CB8AC3E}">
-        <p14:creationId xmlns:p14="http://schemas.microsoft.com/office/powerpoint/2010/main" val="1938495017"/>
+        <p14:creationId xmlns:p14="http://schemas.microsoft.com/office/powerpoint/2010/main" val="311805391"/>
       </p:ext>
     </p:extLst>
   </p:cSld>
@@ -6115,7 +6875,7 @@
           <p:cNvPr id="40" name="">
             <a:extLst xmlns:a="http://schemas.openxmlformats.org/drawingml/2006/main">
               <a:ext uri="{FF2B5EF4-FFF2-40B4-BE49-F238E27FC236}">
-                <a16:creationId xmlns:a16="http://schemas.microsoft.com/office/drawing/2014/main" id="{D48AF7FB-82D6-4A48-9801-B42A7B81094B}"/>
+                <a16:creationId xmlns:a16="http://schemas.microsoft.com/office/drawing/2014/main" id="{E335080D-25E3-4D67-B5B0-78D2F3A17BAF}"/>
               </a:ext>
             </a:extLst>
           </p:cNvPr>
@@ -6172,7 +6932,7 @@
           <p:cNvPr id="2" name="">
             <a:extLst xmlns:a="http://schemas.openxmlformats.org/drawingml/2006/main">
               <a:ext uri="{FF2B5EF4-FFF2-40B4-BE49-F238E27FC236}">
-                <a16:creationId xmlns:a16="http://schemas.microsoft.com/office/drawing/2014/main" id="{9AA3F471-E52A-43C8-A541-9C6A6F2D4509}"/>
+                <a16:creationId xmlns:a16="http://schemas.microsoft.com/office/drawing/2014/main" id="{23CDFD9F-EFD7-41CA-8FEE-B039C7E404C9}"/>
               </a:ext>
             </a:extLst>
           </p:cNvPr>
@@ -6203,7 +6963,7 @@
           <p:cNvPr id="3" name="">
             <a:extLst xmlns:a="http://schemas.openxmlformats.org/drawingml/2006/main">
               <a:ext uri="{FF2B5EF4-FFF2-40B4-BE49-F238E27FC236}">
-                <a16:creationId xmlns:a16="http://schemas.microsoft.com/office/drawing/2014/main" id="{BCAD244B-9C31-4EB5-B9FB-A166B5D96C2C}"/>
+                <a16:creationId xmlns:a16="http://schemas.microsoft.com/office/drawing/2014/main" id="{8D93AD9B-BB59-40B6-871B-203CB4C83C7F}"/>
               </a:ext>
             </a:extLst>
           </p:cNvPr>
@@ -6260,7 +7020,7 @@
           <p:cNvPr id="4" name="">
             <a:extLst xmlns:a="http://schemas.openxmlformats.org/drawingml/2006/main">
               <a:ext uri="{FF2B5EF4-FFF2-40B4-BE49-F238E27FC236}">
-                <a16:creationId xmlns:a16="http://schemas.microsoft.com/office/drawing/2014/main" id="{C5C831AF-2540-486E-BB4E-9CAD5B49A6A7}"/>
+                <a16:creationId xmlns:a16="http://schemas.microsoft.com/office/drawing/2014/main" id="{246A9AE1-A3F2-4DB1-9D36-588214A77EC5}"/>
               </a:ext>
             </a:extLst>
           </p:cNvPr>
@@ -6317,7 +7077,7 @@
           <p:cNvPr id="5" name="">
             <a:extLst xmlns:a="http://schemas.openxmlformats.org/drawingml/2006/main">
               <a:ext uri="{FF2B5EF4-FFF2-40B4-BE49-F238E27FC236}">
-                <a16:creationId xmlns:a16="http://schemas.microsoft.com/office/drawing/2014/main" id="{57E0E1A3-258B-47CF-AD4D-CF30BA57C519}"/>
+                <a16:creationId xmlns:a16="http://schemas.microsoft.com/office/drawing/2014/main" id="{3EAAEC4B-A86A-4862-BBA6-2EAC4C9DFCC3}"/>
               </a:ext>
             </a:extLst>
           </p:cNvPr>
@@ -6374,7 +7134,7 @@
           <p:cNvPr id="6" name="">
             <a:extLst xmlns:a="http://schemas.openxmlformats.org/drawingml/2006/main">
               <a:ext uri="{FF2B5EF4-FFF2-40B4-BE49-F238E27FC236}">
-                <a16:creationId xmlns:a16="http://schemas.microsoft.com/office/drawing/2014/main" id="{38DEFC53-7FE4-4472-9E59-2C88DCF6BADA}"/>
+                <a16:creationId xmlns:a16="http://schemas.microsoft.com/office/drawing/2014/main" id="{536C00F0-7CFA-4BD5-AB0F-338C1F20989C}"/>
               </a:ext>
             </a:extLst>
           </p:cNvPr>
@@ -6407,7 +7167,7 @@
           <p:cNvPr id="7" name="">
             <a:extLst xmlns:a="http://schemas.openxmlformats.org/drawingml/2006/main">
               <a:ext uri="{FF2B5EF4-FFF2-40B4-BE49-F238E27FC236}">
-                <a16:creationId xmlns:a16="http://schemas.microsoft.com/office/drawing/2014/main" id="{906C3155-1ED9-48F9-9046-4B95C83D94C9}"/>
+                <a16:creationId xmlns:a16="http://schemas.microsoft.com/office/drawing/2014/main" id="{974F3F83-C33A-47C3-AD1B-49C11B6714F1}"/>
               </a:ext>
             </a:extLst>
           </p:cNvPr>
@@ -6464,7 +7224,7 @@
           <p:cNvPr id="8" name="">
             <a:extLst xmlns:a="http://schemas.openxmlformats.org/drawingml/2006/main">
               <a:ext uri="{FF2B5EF4-FFF2-40B4-BE49-F238E27FC236}">
-                <a16:creationId xmlns:a16="http://schemas.microsoft.com/office/drawing/2014/main" id="{3A49371F-EF51-471F-958B-EEB8B269FCE8}"/>
+                <a16:creationId xmlns:a16="http://schemas.microsoft.com/office/drawing/2014/main" id="{417593DC-8D6C-4F23-BC81-4D592F3CA4AD}"/>
               </a:ext>
             </a:extLst>
           </p:cNvPr>
@@ -6497,7 +7257,7 @@
           <p:cNvPr id="9" name="">
             <a:extLst xmlns:a="http://schemas.openxmlformats.org/drawingml/2006/main">
               <a:ext uri="{FF2B5EF4-FFF2-40B4-BE49-F238E27FC236}">
-                <a16:creationId xmlns:a16="http://schemas.microsoft.com/office/drawing/2014/main" id="{FF0B0750-3907-4453-A5D0-7D141037EF45}"/>
+                <a16:creationId xmlns:a16="http://schemas.microsoft.com/office/drawing/2014/main" id="{AE99670C-9E51-42A4-B7E8-A93E88D95BD2}"/>
               </a:ext>
             </a:extLst>
           </p:cNvPr>
@@ -6554,7 +7314,7 @@
           <p:cNvPr id="10" name="">
             <a:extLst xmlns:a="http://schemas.openxmlformats.org/drawingml/2006/main">
               <a:ext uri="{FF2B5EF4-FFF2-40B4-BE49-F238E27FC236}">
-                <a16:creationId xmlns:a16="http://schemas.microsoft.com/office/drawing/2014/main" id="{EE604B93-59C3-43D5-BB32-5375F1D713D9}"/>
+                <a16:creationId xmlns:a16="http://schemas.microsoft.com/office/drawing/2014/main" id="{9AB9283F-B40B-4F97-8103-CE2E2D9C5D68}"/>
               </a:ext>
             </a:extLst>
           </p:cNvPr>
@@ -6587,7 +7347,7 @@
           <p:cNvPr id="11" name="">
             <a:extLst xmlns:a="http://schemas.openxmlformats.org/drawingml/2006/main">
               <a:ext uri="{FF2B5EF4-FFF2-40B4-BE49-F238E27FC236}">
-                <a16:creationId xmlns:a16="http://schemas.microsoft.com/office/drawing/2014/main" id="{245C6CCA-3C20-4574-AB2B-BC6E592C028B}"/>
+                <a16:creationId xmlns:a16="http://schemas.microsoft.com/office/drawing/2014/main" id="{62240DC4-A528-476B-915A-341B4A02B2F6}"/>
               </a:ext>
             </a:extLst>
           </p:cNvPr>
@@ -6644,7 +7404,7 @@
           <p:cNvPr id="12" name="">
             <a:extLst xmlns:a="http://schemas.openxmlformats.org/drawingml/2006/main">
               <a:ext uri="{FF2B5EF4-FFF2-40B4-BE49-F238E27FC236}">
-                <a16:creationId xmlns:a16="http://schemas.microsoft.com/office/drawing/2014/main" id="{9E216377-5D41-433C-A33B-ACE962E817A8}"/>
+                <a16:creationId xmlns:a16="http://schemas.microsoft.com/office/drawing/2014/main" id="{79BC8BD6-D429-4D83-B1C4-DE0AA0251F08}"/>
               </a:ext>
             </a:extLst>
           </p:cNvPr>
@@ -6677,7 +7437,7 @@
           <p:cNvPr id="13" name="">
             <a:extLst xmlns:a="http://schemas.openxmlformats.org/drawingml/2006/main">
               <a:ext uri="{FF2B5EF4-FFF2-40B4-BE49-F238E27FC236}">
-                <a16:creationId xmlns:a16="http://schemas.microsoft.com/office/drawing/2014/main" id="{59C495A9-E40A-4C67-BF11-865ED1BB87B1}"/>
+                <a16:creationId xmlns:a16="http://schemas.microsoft.com/office/drawing/2014/main" id="{44FF8419-4041-4069-8CF3-DC40E1D43F04}"/>
               </a:ext>
             </a:extLst>
           </p:cNvPr>
@@ -6812,7 +7572,7 @@
           <p:cNvPr id="17" name="">
             <a:extLst xmlns:a="http://schemas.openxmlformats.org/drawingml/2006/main">
               <a:ext uri="{FF2B5EF4-FFF2-40B4-BE49-F238E27FC236}">
-                <a16:creationId xmlns:a16="http://schemas.microsoft.com/office/drawing/2014/main" id="{9FEADD40-B454-47A1-9978-BC7CFB4C6CD4}"/>
+                <a16:creationId xmlns:a16="http://schemas.microsoft.com/office/drawing/2014/main" id="{DC33A2DF-773F-45DB-90E6-9DCEF80E9AC3}"/>
               </a:ext>
             </a:extLst>
           </p:cNvPr>
@@ -6869,7 +7629,7 @@
           <p:cNvPr id="18" name="">
             <a:extLst xmlns:a="http://schemas.openxmlformats.org/drawingml/2006/main">
               <a:ext uri="{FF2B5EF4-FFF2-40B4-BE49-F238E27FC236}">
-                <a16:creationId xmlns:a16="http://schemas.microsoft.com/office/drawing/2014/main" id="{F622B6A7-4DD3-4D5A-96C9-3B1A55AA3095}"/>
+                <a16:creationId xmlns:a16="http://schemas.microsoft.com/office/drawing/2014/main" id="{11F023D9-ED73-4DF9-8695-3977B75A380D}"/>
               </a:ext>
             </a:extLst>
           </p:cNvPr>
@@ -6926,7 +7686,7 @@
           <p:cNvPr id="19" name="">
             <a:extLst xmlns:a="http://schemas.openxmlformats.org/drawingml/2006/main">
               <a:ext uri="{FF2B5EF4-FFF2-40B4-BE49-F238E27FC236}">
-                <a16:creationId xmlns:a16="http://schemas.microsoft.com/office/drawing/2014/main" id="{C56347C0-EAD0-489B-B647-4926B23BC9B1}"/>
+                <a16:creationId xmlns:a16="http://schemas.microsoft.com/office/drawing/2014/main" id="{7AD6C7C8-B741-4895-B772-5D3420C24E8D}"/>
               </a:ext>
             </a:extLst>
           </p:cNvPr>
@@ -6983,7 +7743,7 @@
           <p:cNvPr id="20" name="">
             <a:extLst xmlns:a="http://schemas.openxmlformats.org/drawingml/2006/main">
               <a:ext uri="{FF2B5EF4-FFF2-40B4-BE49-F238E27FC236}">
-                <a16:creationId xmlns:a16="http://schemas.microsoft.com/office/drawing/2014/main" id="{3D8D3176-C44E-4324-9F36-E3F485520A4C}"/>
+                <a16:creationId xmlns:a16="http://schemas.microsoft.com/office/drawing/2014/main" id="{2FF2F089-86DC-4AA8-8B7D-AF5A6BB35F3C}"/>
               </a:ext>
             </a:extLst>
           </p:cNvPr>
@@ -7040,7 +7800,7 @@
           <p:cNvPr id="21" name="">
             <a:extLst xmlns:a="http://schemas.openxmlformats.org/drawingml/2006/main">
               <a:ext uri="{FF2B5EF4-FFF2-40B4-BE49-F238E27FC236}">
-                <a16:creationId xmlns:a16="http://schemas.microsoft.com/office/drawing/2014/main" id="{CBF90422-E2D5-4573-945B-7F57C2753F58}"/>
+                <a16:creationId xmlns:a16="http://schemas.microsoft.com/office/drawing/2014/main" id="{2E4F2D25-41F2-45CF-8E8A-A14AF9E87F14}"/>
               </a:ext>
             </a:extLst>
           </p:cNvPr>
@@ -7073,7 +7833,7 @@
           <p:cNvPr id="22" name="">
             <a:extLst xmlns:a="http://schemas.openxmlformats.org/drawingml/2006/main">
               <a:ext uri="{FF2B5EF4-FFF2-40B4-BE49-F238E27FC236}">
-                <a16:creationId xmlns:a16="http://schemas.microsoft.com/office/drawing/2014/main" id="{7989B3E5-6726-47E1-B594-BC72AD9B6322}"/>
+                <a16:creationId xmlns:a16="http://schemas.microsoft.com/office/drawing/2014/main" id="{A3C4A5F1-FAA0-40EA-9070-B848B318AC7C}"/>
               </a:ext>
             </a:extLst>
           </p:cNvPr>
@@ -7130,7 +7890,7 @@
           <p:cNvPr id="23" name="">
             <a:extLst xmlns:a="http://schemas.openxmlformats.org/drawingml/2006/main">
               <a:ext uri="{FF2B5EF4-FFF2-40B4-BE49-F238E27FC236}">
-                <a16:creationId xmlns:a16="http://schemas.microsoft.com/office/drawing/2014/main" id="{547AA986-F768-4956-9FBE-525D067D68ED}"/>
+                <a16:creationId xmlns:a16="http://schemas.microsoft.com/office/drawing/2014/main" id="{96F6C2F7-BD6E-49ED-AB53-B197CBD97728}"/>
               </a:ext>
             </a:extLst>
           </p:cNvPr>
@@ -7163,7 +7923,7 @@
           <p:cNvPr id="24" name="">
             <a:extLst xmlns:a="http://schemas.openxmlformats.org/drawingml/2006/main">
               <a:ext uri="{FF2B5EF4-FFF2-40B4-BE49-F238E27FC236}">
-                <a16:creationId xmlns:a16="http://schemas.microsoft.com/office/drawing/2014/main" id="{494406DE-6225-4792-8219-99E79EF643C3}"/>
+                <a16:creationId xmlns:a16="http://schemas.microsoft.com/office/drawing/2014/main" id="{F59B75F3-B6FF-4BCF-9839-C62501BB13B9}"/>
               </a:ext>
             </a:extLst>
           </p:cNvPr>
@@ -7220,7 +7980,7 @@
           <p:cNvPr id="25" name="">
             <a:extLst xmlns:a="http://schemas.openxmlformats.org/drawingml/2006/main">
               <a:ext uri="{FF2B5EF4-FFF2-40B4-BE49-F238E27FC236}">
-                <a16:creationId xmlns:a16="http://schemas.microsoft.com/office/drawing/2014/main" id="{C5C4FD00-EBFF-40CC-A751-1D6B0B52CBD4}"/>
+                <a16:creationId xmlns:a16="http://schemas.microsoft.com/office/drawing/2014/main" id="{4810FF58-B4FD-4D54-B14F-B09DF13CB0F0}"/>
               </a:ext>
             </a:extLst>
           </p:cNvPr>
@@ -7253,7 +8013,7 @@
           <p:cNvPr id="26" name="">
             <a:extLst xmlns:a="http://schemas.openxmlformats.org/drawingml/2006/main">
               <a:ext uri="{FF2B5EF4-FFF2-40B4-BE49-F238E27FC236}">
-                <a16:creationId xmlns:a16="http://schemas.microsoft.com/office/drawing/2014/main" id="{C6550093-B831-4780-8B12-A0FEA02EF4C2}"/>
+                <a16:creationId xmlns:a16="http://schemas.microsoft.com/office/drawing/2014/main" id="{BE4EEA76-B1AF-434A-AA14-1604964F647B}"/>
               </a:ext>
             </a:extLst>
           </p:cNvPr>
@@ -7333,7 +8093,7 @@
           <p:cNvPr id="27" name="">
             <a:extLst xmlns:a="http://schemas.openxmlformats.org/drawingml/2006/main">
               <a:ext uri="{FF2B5EF4-FFF2-40B4-BE49-F238E27FC236}">
-                <a16:creationId xmlns:a16="http://schemas.microsoft.com/office/drawing/2014/main" id="{2CD4A77F-2896-412F-A1F4-80297FE2B84D}"/>
+                <a16:creationId xmlns:a16="http://schemas.microsoft.com/office/drawing/2014/main" id="{7A4F30A7-3F54-4319-B506-E24BA3EF95BF}"/>
               </a:ext>
             </a:extLst>
           </p:cNvPr>
@@ -7366,7 +8126,7 @@
           <p:cNvPr id="28" name="">
             <a:extLst xmlns:a="http://schemas.openxmlformats.org/drawingml/2006/main">
               <a:ext uri="{FF2B5EF4-FFF2-40B4-BE49-F238E27FC236}">
-                <a16:creationId xmlns:a16="http://schemas.microsoft.com/office/drawing/2014/main" id="{88FCB5FF-13DF-447B-A2ED-8BB4FA5117C3}"/>
+                <a16:creationId xmlns:a16="http://schemas.microsoft.com/office/drawing/2014/main" id="{16E1C3E1-3E2E-44DD-A6F3-3CD0B38B05AD}"/>
               </a:ext>
             </a:extLst>
           </p:cNvPr>
@@ -7553,7 +8313,7 @@
           <p:cNvPr id="34" name="">
             <a:extLst xmlns:a="http://schemas.openxmlformats.org/drawingml/2006/main">
               <a:ext uri="{FF2B5EF4-FFF2-40B4-BE49-F238E27FC236}">
-                <a16:creationId xmlns:a16="http://schemas.microsoft.com/office/drawing/2014/main" id="{74B68485-7867-4E03-9CC6-D0650097F7D5}"/>
+                <a16:creationId xmlns:a16="http://schemas.microsoft.com/office/drawing/2014/main" id="{DE6960C3-F0AB-4E54-9686-2594D878B45E}"/>
               </a:ext>
             </a:extLst>
           </p:cNvPr>
@@ -7610,7 +8370,7 @@
           <p:cNvPr id="35" name="">
             <a:extLst xmlns:a="http://schemas.openxmlformats.org/drawingml/2006/main">
               <a:ext uri="{FF2B5EF4-FFF2-40B4-BE49-F238E27FC236}">
-                <a16:creationId xmlns:a16="http://schemas.microsoft.com/office/drawing/2014/main" id="{8C7522F5-C119-4E08-9E81-016163DA4A7B}"/>
+                <a16:creationId xmlns:a16="http://schemas.microsoft.com/office/drawing/2014/main" id="{07EB9379-F7E9-4D17-9CB6-E6B765B6916B}"/>
               </a:ext>
             </a:extLst>
           </p:cNvPr>
@@ -7667,7 +8427,7 @@
           <p:cNvPr id="36" name="">
             <a:extLst xmlns:a="http://schemas.openxmlformats.org/drawingml/2006/main">
               <a:ext uri="{FF2B5EF4-FFF2-40B4-BE49-F238E27FC236}">
-                <a16:creationId xmlns:a16="http://schemas.microsoft.com/office/drawing/2014/main" id="{F9032E0A-1EC6-4ADA-94B6-3EF82B36C5D6}"/>
+                <a16:creationId xmlns:a16="http://schemas.microsoft.com/office/drawing/2014/main" id="{4E653CF0-E0A7-4F93-9523-3C72A28F0707}"/>
               </a:ext>
             </a:extLst>
           </p:cNvPr>
@@ -7724,7 +8484,7 @@
           <p:cNvPr id="37" name="">
             <a:extLst xmlns:a="http://schemas.openxmlformats.org/drawingml/2006/main">
               <a:ext uri="{FF2B5EF4-FFF2-40B4-BE49-F238E27FC236}">
-                <a16:creationId xmlns:a16="http://schemas.microsoft.com/office/drawing/2014/main" id="{58349ACF-5C6C-402A-A16C-5CE15BB2F97D}"/>
+                <a16:creationId xmlns:a16="http://schemas.microsoft.com/office/drawing/2014/main" id="{5609F85E-B1E6-4804-B6B2-E6420D88B95E}"/>
               </a:ext>
             </a:extLst>
           </p:cNvPr>
@@ -7781,7 +8541,7 @@
           <p:cNvPr id="38" name="">
             <a:extLst xmlns:a="http://schemas.openxmlformats.org/drawingml/2006/main">
               <a:ext uri="{FF2B5EF4-FFF2-40B4-BE49-F238E27FC236}">
-                <a16:creationId xmlns:a16="http://schemas.microsoft.com/office/drawing/2014/main" id="{D79023B0-1F73-45F0-90E0-687E9D898529}"/>
+                <a16:creationId xmlns:a16="http://schemas.microsoft.com/office/drawing/2014/main" id="{21A779B6-53C6-4A08-B42F-34B9657292A5}"/>
               </a:ext>
             </a:extLst>
           </p:cNvPr>
@@ -7838,7 +8598,7 @@
           <p:cNvPr id="39" name="">
             <a:extLst xmlns:a="http://schemas.openxmlformats.org/drawingml/2006/main">
               <a:ext uri="{FF2B5EF4-FFF2-40B4-BE49-F238E27FC236}">
-                <a16:creationId xmlns:a16="http://schemas.microsoft.com/office/drawing/2014/main" id="{42AB0288-85BF-4DA7-960F-B0D9C82CB0B0}"/>
+                <a16:creationId xmlns:a16="http://schemas.microsoft.com/office/drawing/2014/main" id="{FD0CFF06-9D7E-4AC4-8A78-AE3A0CC716B6}"/>
               </a:ext>
             </a:extLst>
           </p:cNvPr>
@@ -7893,7 +8653,7 @@
     </p:spTree>
     <p:extLst>
       <p:ext uri="{BB962C8B-B14F-4D97-AF65-F5344CB8AC3E}">
-        <p14:creationId xmlns:p14="http://schemas.microsoft.com/office/powerpoint/2010/main" val="835954389"/>
+        <p14:creationId xmlns:p14="http://schemas.microsoft.com/office/powerpoint/2010/main" val="1705121223"/>
       </p:ext>
     </p:extLst>
   </p:cSld>
@@ -7924,7 +8684,7 @@
           <p:cNvPr id="11" name="">
             <a:extLst xmlns:a="http://schemas.openxmlformats.org/drawingml/2006/main">
               <a:ext uri="{FF2B5EF4-FFF2-40B4-BE49-F238E27FC236}">
-                <a16:creationId xmlns:a16="http://schemas.microsoft.com/office/drawing/2014/main" id="{D93778FA-7B46-43E9-90F1-83556A7DFA78}"/>
+                <a16:creationId xmlns:a16="http://schemas.microsoft.com/office/drawing/2014/main" id="{3DC64398-A323-4F49-B49A-8EE39B2E180C}"/>
               </a:ext>
             </a:extLst>
           </p:cNvPr>
@@ -7981,7 +8741,7 @@
           <p:cNvPr id="2" name="">
             <a:extLst xmlns:a="http://schemas.openxmlformats.org/drawingml/2006/main">
               <a:ext uri="{FF2B5EF4-FFF2-40B4-BE49-F238E27FC236}">
-                <a16:creationId xmlns:a16="http://schemas.microsoft.com/office/drawing/2014/main" id="{CB8BC0ED-A276-4898-BC94-2A55E1F32586}"/>
+                <a16:creationId xmlns:a16="http://schemas.microsoft.com/office/drawing/2014/main" id="{D84850C5-103E-4848-99A9-1AD8D0103E1F}"/>
               </a:ext>
             </a:extLst>
           </p:cNvPr>
@@ -8012,7 +8772,7 @@
           <p:cNvPr id="3" name="">
             <a:extLst xmlns:a="http://schemas.openxmlformats.org/drawingml/2006/main">
               <a:ext uri="{FF2B5EF4-FFF2-40B4-BE49-F238E27FC236}">
-                <a16:creationId xmlns:a16="http://schemas.microsoft.com/office/drawing/2014/main" id="{8AD1DF9E-4041-4C0F-A29A-515215E8006C}"/>
+                <a16:creationId xmlns:a16="http://schemas.microsoft.com/office/drawing/2014/main" id="{9C92758E-089E-4F60-A0A2-201375E663C8}"/>
               </a:ext>
             </a:extLst>
           </p:cNvPr>
@@ -8069,7 +8829,7 @@
           <p:cNvPr id="4" name="">
             <a:extLst xmlns:a="http://schemas.openxmlformats.org/drawingml/2006/main">
               <a:ext uri="{FF2B5EF4-FFF2-40B4-BE49-F238E27FC236}">
-                <a16:creationId xmlns:a16="http://schemas.microsoft.com/office/drawing/2014/main" id="{7B9D85A7-631F-4F83-A799-E928BD9FEA63}"/>
+                <a16:creationId xmlns:a16="http://schemas.microsoft.com/office/drawing/2014/main" id="{C4D30B07-F185-4B39-8164-9121C0CE8AC3}"/>
               </a:ext>
             </a:extLst>
           </p:cNvPr>
@@ -8126,7 +8886,7 @@
           <p:cNvPr id="5" name="">
             <a:extLst xmlns:a="http://schemas.openxmlformats.org/drawingml/2006/main">
               <a:ext uri="{FF2B5EF4-FFF2-40B4-BE49-F238E27FC236}">
-                <a16:creationId xmlns:a16="http://schemas.microsoft.com/office/drawing/2014/main" id="{849F5B5F-88A2-4260-8AA8-D28C03F8FD36}"/>
+                <a16:creationId xmlns:a16="http://schemas.microsoft.com/office/drawing/2014/main" id="{3614AD1C-403A-4A66-ABDB-032C723E7E47}"/>
               </a:ext>
             </a:extLst>
           </p:cNvPr>
@@ -8183,7 +8943,7 @@
           <p:cNvPr id="6" name="">
             <a:extLst xmlns:a="http://schemas.openxmlformats.org/drawingml/2006/main">
               <a:ext uri="{FF2B5EF4-FFF2-40B4-BE49-F238E27FC236}">
-                <a16:creationId xmlns:a16="http://schemas.microsoft.com/office/drawing/2014/main" id="{00B99C28-0674-4857-8713-B73B3CFA0A44}"/>
+                <a16:creationId xmlns:a16="http://schemas.microsoft.com/office/drawing/2014/main" id="{CC55C0B9-C6B7-4188-8B05-2CDF016F8C3E}"/>
               </a:ext>
             </a:extLst>
           </p:cNvPr>
@@ -8674,7 +9434,7 @@
           <p:cNvPr id="8" name="">
             <a:extLst xmlns:a="http://schemas.openxmlformats.org/drawingml/2006/main">
               <a:ext uri="{FF2B5EF4-FFF2-40B4-BE49-F238E27FC236}">
-                <a16:creationId xmlns:a16="http://schemas.microsoft.com/office/drawing/2014/main" id="{FCAD0F04-5833-4724-AA51-FC200D20014B}"/>
+                <a16:creationId xmlns:a16="http://schemas.microsoft.com/office/drawing/2014/main" id="{839F51B3-555F-45C2-8B0A-F20715C6257F}"/>
               </a:ext>
             </a:extLst>
           </p:cNvPr>
@@ -8731,7 +9491,7 @@
           <p:cNvPr id="9" name="">
             <a:extLst xmlns:a="http://schemas.openxmlformats.org/drawingml/2006/main">
               <a:ext uri="{FF2B5EF4-FFF2-40B4-BE49-F238E27FC236}">
-                <a16:creationId xmlns:a16="http://schemas.microsoft.com/office/drawing/2014/main" id="{9D273F5C-55A9-4A1D-825A-E31B5A4C8155}"/>
+                <a16:creationId xmlns:a16="http://schemas.microsoft.com/office/drawing/2014/main" id="{A39F0B89-9ED8-45B7-8FA4-16A1E61C8739}"/>
               </a:ext>
             </a:extLst>
           </p:cNvPr>
@@ -8788,7 +9548,7 @@
           <p:cNvPr id="10" name="">
             <a:extLst xmlns:a="http://schemas.openxmlformats.org/drawingml/2006/main">
               <a:ext uri="{FF2B5EF4-FFF2-40B4-BE49-F238E27FC236}">
-                <a16:creationId xmlns:a16="http://schemas.microsoft.com/office/drawing/2014/main" id="{44A706B0-C407-45E3-BEBC-252900C2DDFD}"/>
+                <a16:creationId xmlns:a16="http://schemas.microsoft.com/office/drawing/2014/main" id="{3E4E9CA2-C5D8-485B-AF6D-9A2A1F82D359}"/>
               </a:ext>
             </a:extLst>
           </p:cNvPr>
@@ -8843,7 +9603,7 @@
     </p:spTree>
     <p:extLst>
       <p:ext uri="{BB962C8B-B14F-4D97-AF65-F5344CB8AC3E}">
-        <p14:creationId xmlns:p14="http://schemas.microsoft.com/office/powerpoint/2010/main" val="1257275408"/>
+        <p14:creationId xmlns:p14="http://schemas.microsoft.com/office/powerpoint/2010/main" val="936891009"/>
       </p:ext>
     </p:extLst>
   </p:cSld>
@@ -8874,7 +9634,7 @@
           <p:cNvPr id="29" name="">
             <a:extLst xmlns:a="http://schemas.openxmlformats.org/drawingml/2006/main">
               <a:ext uri="{FF2B5EF4-FFF2-40B4-BE49-F238E27FC236}">
-                <a16:creationId xmlns:a16="http://schemas.microsoft.com/office/drawing/2014/main" id="{2911022C-3B96-4CBC-8652-12721BC215A9}"/>
+                <a16:creationId xmlns:a16="http://schemas.microsoft.com/office/drawing/2014/main" id="{9BB3FC9E-35AD-41F5-A07C-96A5E3BA605E}"/>
               </a:ext>
             </a:extLst>
           </p:cNvPr>
@@ -8954,7 +9714,7 @@
           <p:cNvPr id="2" name="">
             <a:extLst xmlns:a="http://schemas.openxmlformats.org/drawingml/2006/main">
               <a:ext uri="{FF2B5EF4-FFF2-40B4-BE49-F238E27FC236}">
-                <a16:creationId xmlns:a16="http://schemas.microsoft.com/office/drawing/2014/main" id="{BB9F5D31-1D38-418F-B385-C98AC02E505C}"/>
+                <a16:creationId xmlns:a16="http://schemas.microsoft.com/office/drawing/2014/main" id="{E676AFEB-38FB-4EE1-9B8D-28CB5F219935}"/>
               </a:ext>
             </a:extLst>
           </p:cNvPr>
@@ -8985,7 +9745,7 @@
           <p:cNvPr id="3" name="">
             <a:extLst xmlns:a="http://schemas.openxmlformats.org/drawingml/2006/main">
               <a:ext uri="{FF2B5EF4-FFF2-40B4-BE49-F238E27FC236}">
-                <a16:creationId xmlns:a16="http://schemas.microsoft.com/office/drawing/2014/main" id="{EDC0DA58-5762-4D33-B10B-89D948132B66}"/>
+                <a16:creationId xmlns:a16="http://schemas.microsoft.com/office/drawing/2014/main" id="{C9F66858-46ED-4C13-8EA3-74B252877748}"/>
               </a:ext>
             </a:extLst>
           </p:cNvPr>
@@ -9042,7 +9802,7 @@
           <p:cNvPr id="4" name="">
             <a:extLst xmlns:a="http://schemas.openxmlformats.org/drawingml/2006/main">
               <a:ext uri="{FF2B5EF4-FFF2-40B4-BE49-F238E27FC236}">
-                <a16:creationId xmlns:a16="http://schemas.microsoft.com/office/drawing/2014/main" id="{492F8A7F-7C1A-4E77-80F5-E644A7B7D8A3}"/>
+                <a16:creationId xmlns:a16="http://schemas.microsoft.com/office/drawing/2014/main" id="{CCCDD9F9-4DDC-4EDE-B9D4-445163A36B85}"/>
               </a:ext>
             </a:extLst>
           </p:cNvPr>
@@ -9099,7 +9859,7 @@
           <p:cNvPr id="5" name="">
             <a:extLst xmlns:a="http://schemas.openxmlformats.org/drawingml/2006/main">
               <a:ext uri="{FF2B5EF4-FFF2-40B4-BE49-F238E27FC236}">
-                <a16:creationId xmlns:a16="http://schemas.microsoft.com/office/drawing/2014/main" id="{B61DF73B-FCA5-48BC-9C2C-5448FE954718}"/>
+                <a16:creationId xmlns:a16="http://schemas.microsoft.com/office/drawing/2014/main" id="{40D1426A-9252-401C-AD13-50B36677FDA0}"/>
               </a:ext>
             </a:extLst>
           </p:cNvPr>
@@ -9156,7 +9916,7 @@
           <p:cNvPr id="6" name="">
             <a:extLst xmlns:a="http://schemas.openxmlformats.org/drawingml/2006/main">
               <a:ext uri="{FF2B5EF4-FFF2-40B4-BE49-F238E27FC236}">
-                <a16:creationId xmlns:a16="http://schemas.microsoft.com/office/drawing/2014/main" id="{D3100E8A-C509-4E2E-AF34-D47B6813672C}"/>
+                <a16:creationId xmlns:a16="http://schemas.microsoft.com/office/drawing/2014/main" id="{5CBB85D3-8E03-4689-9753-3DB209E26BFE}"/>
               </a:ext>
             </a:extLst>
           </p:cNvPr>
@@ -9236,7 +9996,7 @@
           <p:cNvPr id="7" name="">
             <a:extLst xmlns:a="http://schemas.openxmlformats.org/drawingml/2006/main">
               <a:ext uri="{FF2B5EF4-FFF2-40B4-BE49-F238E27FC236}">
-                <a16:creationId xmlns:a16="http://schemas.microsoft.com/office/drawing/2014/main" id="{E85F774A-6757-43A7-B944-8CC475305E56}"/>
+                <a16:creationId xmlns:a16="http://schemas.microsoft.com/office/drawing/2014/main" id="{5496CF23-DE15-4E08-8A22-AAAEA6F9A297}"/>
               </a:ext>
             </a:extLst>
           </p:cNvPr>
@@ -9293,7 +10053,7 @@
           <p:cNvPr id="8" name="">
             <a:extLst xmlns:a="http://schemas.openxmlformats.org/drawingml/2006/main">
               <a:ext uri="{FF2B5EF4-FFF2-40B4-BE49-F238E27FC236}">
-                <a16:creationId xmlns:a16="http://schemas.microsoft.com/office/drawing/2014/main" id="{FBC36FEB-126A-4BA9-83E5-2E725B0BFB6E}"/>
+                <a16:creationId xmlns:a16="http://schemas.microsoft.com/office/drawing/2014/main" id="{247DCA3F-067F-4F0E-9E79-9F5B01A446C0}"/>
               </a:ext>
             </a:extLst>
           </p:cNvPr>
@@ -9373,7 +10133,7 @@
           <p:cNvPr id="9" name="">
             <a:extLst xmlns:a="http://schemas.openxmlformats.org/drawingml/2006/main">
               <a:ext uri="{FF2B5EF4-FFF2-40B4-BE49-F238E27FC236}">
-                <a16:creationId xmlns:a16="http://schemas.microsoft.com/office/drawing/2014/main" id="{0A604693-C79D-4B49-9A60-8318827AAF62}"/>
+                <a16:creationId xmlns:a16="http://schemas.microsoft.com/office/drawing/2014/main" id="{A8EB57E0-709B-4BF4-AC4B-BC19F347B338}"/>
               </a:ext>
             </a:extLst>
           </p:cNvPr>
@@ -9404,7 +10164,7 @@
           <p:cNvPr id="10" name="">
             <a:extLst xmlns:a="http://schemas.openxmlformats.org/drawingml/2006/main">
               <a:ext uri="{FF2B5EF4-FFF2-40B4-BE49-F238E27FC236}">
-                <a16:creationId xmlns:a16="http://schemas.microsoft.com/office/drawing/2014/main" id="{E361FF64-AA24-4F1D-9491-1A745B36B2A8}"/>
+                <a16:creationId xmlns:a16="http://schemas.microsoft.com/office/drawing/2014/main" id="{28E9B54B-8944-499B-98C7-10F756F92523}"/>
               </a:ext>
             </a:extLst>
           </p:cNvPr>
@@ -9437,7 +10197,7 @@
           <p:cNvPr id="11" name="">
             <a:extLst xmlns:a="http://schemas.openxmlformats.org/drawingml/2006/main">
               <a:ext uri="{FF2B5EF4-FFF2-40B4-BE49-F238E27FC236}">
-                <a16:creationId xmlns:a16="http://schemas.microsoft.com/office/drawing/2014/main" id="{B14FCE75-2EF1-4591-88A8-9C5F3D48B399}"/>
+                <a16:creationId xmlns:a16="http://schemas.microsoft.com/office/drawing/2014/main" id="{08354446-B036-4544-A828-3C19A74E7A7F}"/>
               </a:ext>
             </a:extLst>
           </p:cNvPr>
@@ -9517,7 +10277,7 @@
           <p:cNvPr id="12" name="">
             <a:extLst xmlns:a="http://schemas.openxmlformats.org/drawingml/2006/main">
               <a:ext uri="{FF2B5EF4-FFF2-40B4-BE49-F238E27FC236}">
-                <a16:creationId xmlns:a16="http://schemas.microsoft.com/office/drawing/2014/main" id="{C5E4CD75-EE2F-4C87-AC88-5EB2DE2E595B}"/>
+                <a16:creationId xmlns:a16="http://schemas.microsoft.com/office/drawing/2014/main" id="{568E1DC3-5542-44FD-8811-A109C5C4DA6E}"/>
               </a:ext>
             </a:extLst>
           </p:cNvPr>
@@ -9550,7 +10310,7 @@
           <p:cNvPr id="13" name="">
             <a:extLst xmlns:a="http://schemas.openxmlformats.org/drawingml/2006/main">
               <a:ext uri="{FF2B5EF4-FFF2-40B4-BE49-F238E27FC236}">
-                <a16:creationId xmlns:a16="http://schemas.microsoft.com/office/drawing/2014/main" id="{08A73596-094B-4B88-8412-24A5BC6A37A4}"/>
+                <a16:creationId xmlns:a16="http://schemas.microsoft.com/office/drawing/2014/main" id="{60A2A0FA-2DA5-4FCB-854A-CDC95E2249DC}"/>
               </a:ext>
             </a:extLst>
           </p:cNvPr>
@@ -9607,7 +10367,7 @@
           <p:cNvPr id="14" name="">
             <a:extLst xmlns:a="http://schemas.openxmlformats.org/drawingml/2006/main">
               <a:ext uri="{FF2B5EF4-FFF2-40B4-BE49-F238E27FC236}">
-                <a16:creationId xmlns:a16="http://schemas.microsoft.com/office/drawing/2014/main" id="{2C7176D1-D68C-4605-9074-84ED9B2305D8}"/>
+                <a16:creationId xmlns:a16="http://schemas.microsoft.com/office/drawing/2014/main" id="{4BBA6D3E-F732-4C5C-A16F-09580190C55A}"/>
               </a:ext>
             </a:extLst>
           </p:cNvPr>
@@ -9640,7 +10400,7 @@
           <p:cNvPr id="15" name="">
             <a:extLst xmlns:a="http://schemas.openxmlformats.org/drawingml/2006/main">
               <a:ext uri="{FF2B5EF4-FFF2-40B4-BE49-F238E27FC236}">
-                <a16:creationId xmlns:a16="http://schemas.microsoft.com/office/drawing/2014/main" id="{35839E4D-9398-46C9-85A3-C348AE834961}"/>
+                <a16:creationId xmlns:a16="http://schemas.microsoft.com/office/drawing/2014/main" id="{3BBA948B-9E50-42A4-BBB9-97B8BA54E929}"/>
               </a:ext>
             </a:extLst>
           </p:cNvPr>
@@ -9697,7 +10457,7 @@
           <p:cNvPr id="16" name="">
             <a:extLst xmlns:a="http://schemas.openxmlformats.org/drawingml/2006/main">
               <a:ext uri="{FF2B5EF4-FFF2-40B4-BE49-F238E27FC236}">
-                <a16:creationId xmlns:a16="http://schemas.microsoft.com/office/drawing/2014/main" id="{001E98BC-6522-4CB2-816B-EF6FFEA739D2}"/>
+                <a16:creationId xmlns:a16="http://schemas.microsoft.com/office/drawing/2014/main" id="{9388D8FB-517D-4843-84C3-5D2E77DE57EE}"/>
               </a:ext>
             </a:extLst>
           </p:cNvPr>
@@ -9730,7 +10490,7 @@
           <p:cNvPr id="17" name="">
             <a:extLst xmlns:a="http://schemas.openxmlformats.org/drawingml/2006/main">
               <a:ext uri="{FF2B5EF4-FFF2-40B4-BE49-F238E27FC236}">
-                <a16:creationId xmlns:a16="http://schemas.microsoft.com/office/drawing/2014/main" id="{084E094C-8502-4A0F-9921-3803DD1DFA9F}"/>
+                <a16:creationId xmlns:a16="http://schemas.microsoft.com/office/drawing/2014/main" id="{3E8D3B84-69F5-4809-AD81-3C3DC13129D8}"/>
               </a:ext>
             </a:extLst>
           </p:cNvPr>
@@ -9891,7 +10651,7 @@
           <p:cNvPr id="22" name="">
             <a:extLst xmlns:a="http://schemas.openxmlformats.org/drawingml/2006/main">
               <a:ext uri="{FF2B5EF4-FFF2-40B4-BE49-F238E27FC236}">
-                <a16:creationId xmlns:a16="http://schemas.microsoft.com/office/drawing/2014/main" id="{D1160282-93D1-495F-B301-2F77F17DE761}"/>
+                <a16:creationId xmlns:a16="http://schemas.microsoft.com/office/drawing/2014/main" id="{47F92BDE-39E0-4536-9571-8FEA09BF6F32}"/>
               </a:ext>
             </a:extLst>
           </p:cNvPr>
@@ -9971,7 +10731,7 @@
           <p:cNvPr id="23" name="">
             <a:extLst xmlns:a="http://schemas.openxmlformats.org/drawingml/2006/main">
               <a:ext uri="{FF2B5EF4-FFF2-40B4-BE49-F238E27FC236}">
-                <a16:creationId xmlns:a16="http://schemas.microsoft.com/office/drawing/2014/main" id="{057B41F8-0F62-4B31-90C9-23CC55616FE2}"/>
+                <a16:creationId xmlns:a16="http://schemas.microsoft.com/office/drawing/2014/main" id="{D3BD2CE3-F072-4D37-A3E3-F21D93CE6F13}"/>
               </a:ext>
             </a:extLst>
           </p:cNvPr>
@@ -10002,7 +10762,7 @@
           <p:cNvPr id="24" name="">
             <a:extLst xmlns:a="http://schemas.openxmlformats.org/drawingml/2006/main">
               <a:ext uri="{FF2B5EF4-FFF2-40B4-BE49-F238E27FC236}">
-                <a16:creationId xmlns:a16="http://schemas.microsoft.com/office/drawing/2014/main" id="{7D96ED47-729B-4147-A55C-310A3538BCD8}"/>
+                <a16:creationId xmlns:a16="http://schemas.microsoft.com/office/drawing/2014/main" id="{CC439DEF-4B18-4C2F-A749-13E3BE0C5DC3}"/>
               </a:ext>
             </a:extLst>
           </p:cNvPr>
@@ -10059,7 +10819,7 @@
           <p:cNvPr id="25" name="">
             <a:extLst xmlns:a="http://schemas.openxmlformats.org/drawingml/2006/main">
               <a:ext uri="{FF2B5EF4-FFF2-40B4-BE49-F238E27FC236}">
-                <a16:creationId xmlns:a16="http://schemas.microsoft.com/office/drawing/2014/main" id="{E83B2DB2-268D-45BD-B1BB-4BCCEA039034}"/>
+                <a16:creationId xmlns:a16="http://schemas.microsoft.com/office/drawing/2014/main" id="{ABEABCA6-929F-4FB2-BEC4-F7AEE546946D}"/>
               </a:ext>
             </a:extLst>
           </p:cNvPr>
@@ -10116,7 +10876,7 @@
           <p:cNvPr id="26" name="">
             <a:extLst xmlns:a="http://schemas.openxmlformats.org/drawingml/2006/main">
               <a:ext uri="{FF2B5EF4-FFF2-40B4-BE49-F238E27FC236}">
-                <a16:creationId xmlns:a16="http://schemas.microsoft.com/office/drawing/2014/main" id="{E15DD14C-A0AC-4829-B7F3-566250964C9E}"/>
+                <a16:creationId xmlns:a16="http://schemas.microsoft.com/office/drawing/2014/main" id="{5EC72D4F-9D76-4055-AB71-B2878FF2147D}"/>
               </a:ext>
             </a:extLst>
           </p:cNvPr>
@@ -10173,7 +10933,7 @@
           <p:cNvPr id="27" name="">
             <a:extLst xmlns:a="http://schemas.openxmlformats.org/drawingml/2006/main">
               <a:ext uri="{FF2B5EF4-FFF2-40B4-BE49-F238E27FC236}">
-                <a16:creationId xmlns:a16="http://schemas.microsoft.com/office/drawing/2014/main" id="{DDC59BEB-5E8F-4835-8438-4AA7D85FCB80}"/>
+                <a16:creationId xmlns:a16="http://schemas.microsoft.com/office/drawing/2014/main" id="{54629CB6-85EA-4DF8-8018-B25B3C99BD96}"/>
               </a:ext>
             </a:extLst>
           </p:cNvPr>
@@ -10230,7 +10990,7 @@
           <p:cNvPr id="28" name="">
             <a:extLst xmlns:a="http://schemas.openxmlformats.org/drawingml/2006/main">
               <a:ext uri="{FF2B5EF4-FFF2-40B4-BE49-F238E27FC236}">
-                <a16:creationId xmlns:a16="http://schemas.microsoft.com/office/drawing/2014/main" id="{AB9AA1B7-AD59-4B2D-B80B-34782537578F}"/>
+                <a16:creationId xmlns:a16="http://schemas.microsoft.com/office/drawing/2014/main" id="{BD4E43F1-6BC0-4CCF-AA0F-B6689903A7C5}"/>
               </a:ext>
             </a:extLst>
           </p:cNvPr>
@@ -10285,7 +11045,7 @@
     </p:spTree>
     <p:extLst>
       <p:ext uri="{BB962C8B-B14F-4D97-AF65-F5344CB8AC3E}">
-        <p14:creationId xmlns:p14="http://schemas.microsoft.com/office/powerpoint/2010/main" val="1705260860"/>
+        <p14:creationId xmlns:p14="http://schemas.microsoft.com/office/powerpoint/2010/main" val="1790894192"/>
       </p:ext>
     </p:extLst>
   </p:cSld>
@@ -10316,7 +11076,7 @@
           <p:cNvPr id="21" name="">
             <a:extLst xmlns:a="http://schemas.openxmlformats.org/drawingml/2006/main">
               <a:ext uri="{FF2B5EF4-FFF2-40B4-BE49-F238E27FC236}">
-                <a16:creationId xmlns:a16="http://schemas.microsoft.com/office/drawing/2014/main" id="{5D199710-A3F1-42C9-92FA-D4EAD6813813}"/>
+                <a16:creationId xmlns:a16="http://schemas.microsoft.com/office/drawing/2014/main" id="{0F905D7A-EA29-4B61-A79A-9B38A5E5BE46}"/>
               </a:ext>
             </a:extLst>
           </p:cNvPr>
@@ -10373,7 +11133,7 @@
           <p:cNvPr id="2" name="">
             <a:extLst xmlns:a="http://schemas.openxmlformats.org/drawingml/2006/main">
               <a:ext uri="{FF2B5EF4-FFF2-40B4-BE49-F238E27FC236}">
-                <a16:creationId xmlns:a16="http://schemas.microsoft.com/office/drawing/2014/main" id="{F2694931-823D-4EF5-8FD9-C948BADD4C0A}"/>
+                <a16:creationId xmlns:a16="http://schemas.microsoft.com/office/drawing/2014/main" id="{CF8ECD39-3A51-4E11-8138-27C50C0F7905}"/>
               </a:ext>
             </a:extLst>
           </p:cNvPr>
@@ -10404,7 +11164,7 @@
           <p:cNvPr id="3" name="">
             <a:extLst xmlns:a="http://schemas.openxmlformats.org/drawingml/2006/main">
               <a:ext uri="{FF2B5EF4-FFF2-40B4-BE49-F238E27FC236}">
-                <a16:creationId xmlns:a16="http://schemas.microsoft.com/office/drawing/2014/main" id="{7C5BC63A-D1BC-4404-A0A9-4B3D4C4C16D4}"/>
+                <a16:creationId xmlns:a16="http://schemas.microsoft.com/office/drawing/2014/main" id="{5F7A7016-519C-4587-84CA-EAEED5071776}"/>
               </a:ext>
             </a:extLst>
           </p:cNvPr>
@@ -10461,7 +11221,7 @@
           <p:cNvPr id="4" name="">
             <a:extLst xmlns:a="http://schemas.openxmlformats.org/drawingml/2006/main">
               <a:ext uri="{FF2B5EF4-FFF2-40B4-BE49-F238E27FC236}">
-                <a16:creationId xmlns:a16="http://schemas.microsoft.com/office/drawing/2014/main" id="{377AA21D-9269-4D32-84BF-6DE383196CB5}"/>
+                <a16:creationId xmlns:a16="http://schemas.microsoft.com/office/drawing/2014/main" id="{254290B8-FF45-49AD-BD16-4669DF83A182}"/>
               </a:ext>
             </a:extLst>
           </p:cNvPr>
@@ -10494,7 +11254,7 @@
           <p:cNvPr id="5" name="">
             <a:extLst xmlns:a="http://schemas.openxmlformats.org/drawingml/2006/main">
               <a:ext uri="{FF2B5EF4-FFF2-40B4-BE49-F238E27FC236}">
-                <a16:creationId xmlns:a16="http://schemas.microsoft.com/office/drawing/2014/main" id="{1BF0F61A-CDDA-416D-B973-CCF0E986DA98}"/>
+                <a16:creationId xmlns:a16="http://schemas.microsoft.com/office/drawing/2014/main" id="{CEFE6A9A-FF47-4F67-A1F6-2D7D9B7CB072}"/>
               </a:ext>
             </a:extLst>
           </p:cNvPr>
@@ -10551,7 +11311,7 @@
           <p:cNvPr id="6" name="">
             <a:extLst xmlns:a="http://schemas.openxmlformats.org/drawingml/2006/main">
               <a:ext uri="{FF2B5EF4-FFF2-40B4-BE49-F238E27FC236}">
-                <a16:creationId xmlns:a16="http://schemas.microsoft.com/office/drawing/2014/main" id="{A6A95BCC-F416-4D42-9C83-773A84C1FE60}"/>
+                <a16:creationId xmlns:a16="http://schemas.microsoft.com/office/drawing/2014/main" id="{5EAB3376-440F-463B-868F-57F701E9FB5A}"/>
               </a:ext>
             </a:extLst>
           </p:cNvPr>
@@ -10631,7 +11391,7 @@
           <p:cNvPr id="7" name="">
             <a:extLst xmlns:a="http://schemas.openxmlformats.org/drawingml/2006/main">
               <a:ext uri="{FF2B5EF4-FFF2-40B4-BE49-F238E27FC236}">
-                <a16:creationId xmlns:a16="http://schemas.microsoft.com/office/drawing/2014/main" id="{12C62479-86B0-4715-907B-30C48B7D4D14}"/>
+                <a16:creationId xmlns:a16="http://schemas.microsoft.com/office/drawing/2014/main" id="{264F1498-83E1-4BF2-BF24-6AEBD0DE810C}"/>
               </a:ext>
             </a:extLst>
           </p:cNvPr>
@@ -10711,7 +11471,7 @@
           <p:cNvPr id="8" name="">
             <a:extLst xmlns:a="http://schemas.openxmlformats.org/drawingml/2006/main">
               <a:ext uri="{FF2B5EF4-FFF2-40B4-BE49-F238E27FC236}">
-                <a16:creationId xmlns:a16="http://schemas.microsoft.com/office/drawing/2014/main" id="{F1F6CC77-DC6E-45B4-938B-7F0782701B4D}"/>
+                <a16:creationId xmlns:a16="http://schemas.microsoft.com/office/drawing/2014/main" id="{904C9055-3415-44B6-A3EB-EFAD558DDD7E}"/>
               </a:ext>
             </a:extLst>
           </p:cNvPr>
@@ -10744,7 +11504,7 @@
           <p:cNvPr id="9" name="">
             <a:extLst xmlns:a="http://schemas.openxmlformats.org/drawingml/2006/main">
               <a:ext uri="{FF2B5EF4-FFF2-40B4-BE49-F238E27FC236}">
-                <a16:creationId xmlns:a16="http://schemas.microsoft.com/office/drawing/2014/main" id="{02FB3A88-F718-4002-B2D7-9ADDC6C392CD}"/>
+                <a16:creationId xmlns:a16="http://schemas.microsoft.com/office/drawing/2014/main" id="{B7377488-1A4D-4378-9E2B-AA3F5C109B89}"/>
               </a:ext>
             </a:extLst>
           </p:cNvPr>
@@ -10801,7 +11561,7 @@
           <p:cNvPr id="10" name="">
             <a:extLst xmlns:a="http://schemas.openxmlformats.org/drawingml/2006/main">
               <a:ext uri="{FF2B5EF4-FFF2-40B4-BE49-F238E27FC236}">
-                <a16:creationId xmlns:a16="http://schemas.microsoft.com/office/drawing/2014/main" id="{C9C78289-8428-485A-9884-E5455E5C4A09}"/>
+                <a16:creationId xmlns:a16="http://schemas.microsoft.com/office/drawing/2014/main" id="{BC93A068-4500-42E4-98E7-FB67D47ED41B}"/>
               </a:ext>
             </a:extLst>
           </p:cNvPr>
@@ -10881,7 +11641,7 @@
           <p:cNvPr id="11" name="">
             <a:extLst xmlns:a="http://schemas.openxmlformats.org/drawingml/2006/main">
               <a:ext uri="{FF2B5EF4-FFF2-40B4-BE49-F238E27FC236}">
-                <a16:creationId xmlns:a16="http://schemas.microsoft.com/office/drawing/2014/main" id="{C4A46D56-0D6F-4EEA-A7DE-D01AC1F98DA3}"/>
+                <a16:creationId xmlns:a16="http://schemas.microsoft.com/office/drawing/2014/main" id="{083C5CC5-549C-4177-A0CC-44B70AADD121}"/>
               </a:ext>
             </a:extLst>
           </p:cNvPr>
@@ -10961,7 +11721,7 @@
           <p:cNvPr id="12" name="">
             <a:extLst xmlns:a="http://schemas.openxmlformats.org/drawingml/2006/main">
               <a:ext uri="{FF2B5EF4-FFF2-40B4-BE49-F238E27FC236}">
-                <a16:creationId xmlns:a16="http://schemas.microsoft.com/office/drawing/2014/main" id="{D15D3C2E-366E-42C2-B40A-194D30B290F3}"/>
+                <a16:creationId xmlns:a16="http://schemas.microsoft.com/office/drawing/2014/main" id="{89F0152D-D3B6-416F-B66E-C003E1A89A28}"/>
               </a:ext>
             </a:extLst>
           </p:cNvPr>
@@ -10994,7 +11754,7 @@
           <p:cNvPr id="13" name="">
             <a:extLst xmlns:a="http://schemas.openxmlformats.org/drawingml/2006/main">
               <a:ext uri="{FF2B5EF4-FFF2-40B4-BE49-F238E27FC236}">
-                <a16:creationId xmlns:a16="http://schemas.microsoft.com/office/drawing/2014/main" id="{E53054B1-89B4-4775-85C3-941A35988C09}"/>
+                <a16:creationId xmlns:a16="http://schemas.microsoft.com/office/drawing/2014/main" id="{0CEC1D8E-2052-4D9D-9F4E-140DDA657C5B}"/>
               </a:ext>
             </a:extLst>
           </p:cNvPr>
@@ -11051,7 +11811,7 @@
           <p:cNvPr id="14" name="">
             <a:extLst xmlns:a="http://schemas.openxmlformats.org/drawingml/2006/main">
               <a:ext uri="{FF2B5EF4-FFF2-40B4-BE49-F238E27FC236}">
-                <a16:creationId xmlns:a16="http://schemas.microsoft.com/office/drawing/2014/main" id="{3801130E-9535-475C-A02F-BBB0B7BF2E41}"/>
+                <a16:creationId xmlns:a16="http://schemas.microsoft.com/office/drawing/2014/main" id="{5337FC75-CD19-4270-B44C-530099680342}"/>
               </a:ext>
             </a:extLst>
           </p:cNvPr>
@@ -11131,7 +11891,7 @@
           <p:cNvPr id="15" name="">
             <a:extLst xmlns:a="http://schemas.openxmlformats.org/drawingml/2006/main">
               <a:ext uri="{FF2B5EF4-FFF2-40B4-BE49-F238E27FC236}">
-                <a16:creationId xmlns:a16="http://schemas.microsoft.com/office/drawing/2014/main" id="{4CC7B6B9-76F1-49FA-9B84-D59D5F4B9520}"/>
+                <a16:creationId xmlns:a16="http://schemas.microsoft.com/office/drawing/2014/main" id="{E7E89AD7-4EF4-49E9-9891-680A478CE0C7}"/>
               </a:ext>
             </a:extLst>
           </p:cNvPr>
@@ -11263,7 +12023,7 @@
           <p:cNvPr id="18" name="">
             <a:extLst xmlns:a="http://schemas.openxmlformats.org/drawingml/2006/main">
               <a:ext uri="{FF2B5EF4-FFF2-40B4-BE49-F238E27FC236}">
-                <a16:creationId xmlns:a16="http://schemas.microsoft.com/office/drawing/2014/main" id="{143431A1-85CA-49B3-A519-68AFC1C80E6D}"/>
+                <a16:creationId xmlns:a16="http://schemas.microsoft.com/office/drawing/2014/main" id="{87EF59AF-F3CF-4138-9D53-AC53CF3686F4}"/>
               </a:ext>
             </a:extLst>
           </p:cNvPr>
@@ -11320,7 +12080,7 @@
           <p:cNvPr id="19" name="">
             <a:extLst xmlns:a="http://schemas.openxmlformats.org/drawingml/2006/main">
               <a:ext uri="{FF2B5EF4-FFF2-40B4-BE49-F238E27FC236}">
-                <a16:creationId xmlns:a16="http://schemas.microsoft.com/office/drawing/2014/main" id="{EB965B2E-58D6-4133-AE35-559C2D7F41DE}"/>
+                <a16:creationId xmlns:a16="http://schemas.microsoft.com/office/drawing/2014/main" id="{0ED29BF7-7D21-4B16-840A-412BBA7F2078}"/>
               </a:ext>
             </a:extLst>
           </p:cNvPr>
@@ -11351,7 +12111,7 @@
           <p:cNvPr id="20" name="">
             <a:extLst xmlns:a="http://schemas.openxmlformats.org/drawingml/2006/main">
               <a:ext uri="{FF2B5EF4-FFF2-40B4-BE49-F238E27FC236}">
-                <a16:creationId xmlns:a16="http://schemas.microsoft.com/office/drawing/2014/main" id="{37920680-3CEA-414A-A281-29994063DF47}"/>
+                <a16:creationId xmlns:a16="http://schemas.microsoft.com/office/drawing/2014/main" id="{B1C759E4-F691-43C6-8C1B-87C973213F61}"/>
               </a:ext>
             </a:extLst>
           </p:cNvPr>
@@ -11406,7 +12166,7 @@
     </p:spTree>
     <p:extLst>
       <p:ext uri="{BB962C8B-B14F-4D97-AF65-F5344CB8AC3E}">
-        <p14:creationId xmlns:p14="http://schemas.microsoft.com/office/powerpoint/2010/main" val="110789349"/>
+        <p14:creationId xmlns:p14="http://schemas.microsoft.com/office/powerpoint/2010/main" val="2098785607"/>
       </p:ext>
     </p:extLst>
   </p:cSld>
@@ -11437,7 +12197,7 @@
           <p:cNvPr id="68" name="">
             <a:extLst xmlns:a="http://schemas.openxmlformats.org/drawingml/2006/main">
               <a:ext uri="{FF2B5EF4-FFF2-40B4-BE49-F238E27FC236}">
-                <a16:creationId xmlns:a16="http://schemas.microsoft.com/office/drawing/2014/main" id="{89707A3D-591E-48ED-9B99-B4F9EC1F2399}"/>
+                <a16:creationId xmlns:a16="http://schemas.microsoft.com/office/drawing/2014/main" id="{0037867B-5A67-488D-82BF-881E7B7EAEC3}"/>
               </a:ext>
             </a:extLst>
           </p:cNvPr>
@@ -11494,7 +12254,7 @@
           <p:cNvPr id="2" name="">
             <a:extLst xmlns:a="http://schemas.openxmlformats.org/drawingml/2006/main">
               <a:ext uri="{FF2B5EF4-FFF2-40B4-BE49-F238E27FC236}">
-                <a16:creationId xmlns:a16="http://schemas.microsoft.com/office/drawing/2014/main" id="{B4E141A4-4088-4F9D-95E6-DDEC314B7A3E}"/>
+                <a16:creationId xmlns:a16="http://schemas.microsoft.com/office/drawing/2014/main" id="{B40CACA7-EBCE-4771-87BE-B24550493CF8}"/>
               </a:ext>
             </a:extLst>
           </p:cNvPr>
@@ -11525,7 +12285,7 @@
           <p:cNvPr id="3" name="">
             <a:extLst xmlns:a="http://schemas.openxmlformats.org/drawingml/2006/main">
               <a:ext uri="{FF2B5EF4-FFF2-40B4-BE49-F238E27FC236}">
-                <a16:creationId xmlns:a16="http://schemas.microsoft.com/office/drawing/2014/main" id="{DFA32022-BBA5-4A06-9B37-F1A1D549D415}"/>
+                <a16:creationId xmlns:a16="http://schemas.microsoft.com/office/drawing/2014/main" id="{88AF146F-4EBD-4337-A4DF-C45F3EDECC61}"/>
               </a:ext>
             </a:extLst>
           </p:cNvPr>
@@ -11582,7 +12342,7 @@
           <p:cNvPr id="4" name="">
             <a:extLst xmlns:a="http://schemas.openxmlformats.org/drawingml/2006/main">
               <a:ext uri="{FF2B5EF4-FFF2-40B4-BE49-F238E27FC236}">
-                <a16:creationId xmlns:a16="http://schemas.microsoft.com/office/drawing/2014/main" id="{A3C3FF46-47F3-4C0F-822A-E90BFD2AB21B}"/>
+                <a16:creationId xmlns:a16="http://schemas.microsoft.com/office/drawing/2014/main" id="{4EB909E6-19F1-4BED-A3F3-D3A07175215B}"/>
               </a:ext>
             </a:extLst>
           </p:cNvPr>
@@ -11639,7 +12399,7 @@
           <p:cNvPr id="5" name="">
             <a:extLst xmlns:a="http://schemas.openxmlformats.org/drawingml/2006/main">
               <a:ext uri="{FF2B5EF4-FFF2-40B4-BE49-F238E27FC236}">
-                <a16:creationId xmlns:a16="http://schemas.microsoft.com/office/drawing/2014/main" id="{B070A10B-51D1-4DB6-8871-F7358589C268}"/>
+                <a16:creationId xmlns:a16="http://schemas.microsoft.com/office/drawing/2014/main" id="{C41E2E8E-E21A-4F1D-8515-A9D526525EDF}"/>
               </a:ext>
             </a:extLst>
           </p:cNvPr>
@@ -11672,7 +12432,7 @@
           <p:cNvPr id="6" name="">
             <a:extLst xmlns:a="http://schemas.openxmlformats.org/drawingml/2006/main">
               <a:ext uri="{FF2B5EF4-FFF2-40B4-BE49-F238E27FC236}">
-                <a16:creationId xmlns:a16="http://schemas.microsoft.com/office/drawing/2014/main" id="{EC577646-B372-4887-93D0-971ED6DF9326}"/>
+                <a16:creationId xmlns:a16="http://schemas.microsoft.com/office/drawing/2014/main" id="{5A475937-D88C-473E-931D-A596F05646E5}"/>
               </a:ext>
             </a:extLst>
           </p:cNvPr>
@@ -11729,7 +12489,7 @@
           <p:cNvPr id="7" name="">
             <a:extLst xmlns:a="http://schemas.openxmlformats.org/drawingml/2006/main">
               <a:ext uri="{FF2B5EF4-FFF2-40B4-BE49-F238E27FC236}">
-                <a16:creationId xmlns:a16="http://schemas.microsoft.com/office/drawing/2014/main" id="{05E7FCD2-63DA-4A6F-BC4C-6451CF437395}"/>
+                <a16:creationId xmlns:a16="http://schemas.microsoft.com/office/drawing/2014/main" id="{39A92A0B-D6E0-4501-B808-8E20D454EC4C}"/>
               </a:ext>
             </a:extLst>
           </p:cNvPr>
@@ -11762,7 +12522,7 @@
           <p:cNvPr id="8" name="">
             <a:extLst xmlns:a="http://schemas.openxmlformats.org/drawingml/2006/main">
               <a:ext uri="{FF2B5EF4-FFF2-40B4-BE49-F238E27FC236}">
-                <a16:creationId xmlns:a16="http://schemas.microsoft.com/office/drawing/2014/main" id="{61FAFE54-30DB-496A-BD75-BA19F5C13388}"/>
+                <a16:creationId xmlns:a16="http://schemas.microsoft.com/office/drawing/2014/main" id="{2CDB20DA-CCAA-4019-B3AD-6901DABB531D}"/>
               </a:ext>
             </a:extLst>
           </p:cNvPr>
@@ -11819,7 +12579,7 @@
           <p:cNvPr id="9" name="">
             <a:extLst xmlns:a="http://schemas.openxmlformats.org/drawingml/2006/main">
               <a:ext uri="{FF2B5EF4-FFF2-40B4-BE49-F238E27FC236}">
-                <a16:creationId xmlns:a16="http://schemas.microsoft.com/office/drawing/2014/main" id="{8B92720B-1916-47D5-8804-D230CC818FA5}"/>
+                <a16:creationId xmlns:a16="http://schemas.microsoft.com/office/drawing/2014/main" id="{AE649C0E-B16B-4D6F-93C2-1670CDA5D13D}"/>
               </a:ext>
             </a:extLst>
           </p:cNvPr>
@@ -11852,7 +12612,7 @@
           <p:cNvPr id="10" name="">
             <a:extLst xmlns:a="http://schemas.openxmlformats.org/drawingml/2006/main">
               <a:ext uri="{FF2B5EF4-FFF2-40B4-BE49-F238E27FC236}">
-                <a16:creationId xmlns:a16="http://schemas.microsoft.com/office/drawing/2014/main" id="{36124121-39C2-4738-9D29-318259F48945}"/>
+                <a16:creationId xmlns:a16="http://schemas.microsoft.com/office/drawing/2014/main" id="{9B97329D-8788-43CB-AD97-5FAD4ED8E706}"/>
               </a:ext>
             </a:extLst>
           </p:cNvPr>
@@ -11909,7 +12669,7 @@
           <p:cNvPr id="11" name="">
             <a:extLst xmlns:a="http://schemas.openxmlformats.org/drawingml/2006/main">
               <a:ext uri="{FF2B5EF4-FFF2-40B4-BE49-F238E27FC236}">
-                <a16:creationId xmlns:a16="http://schemas.microsoft.com/office/drawing/2014/main" id="{A3653A57-DA9A-41D3-BE69-165C763243CF}"/>
+                <a16:creationId xmlns:a16="http://schemas.microsoft.com/office/drawing/2014/main" id="{F615A301-E55A-401F-8D23-849F34CE5C61}"/>
               </a:ext>
             </a:extLst>
           </p:cNvPr>
@@ -11942,7 +12702,7 @@
           <p:cNvPr id="12" name="">
             <a:extLst xmlns:a="http://schemas.openxmlformats.org/drawingml/2006/main">
               <a:ext uri="{FF2B5EF4-FFF2-40B4-BE49-F238E27FC236}">
-                <a16:creationId xmlns:a16="http://schemas.microsoft.com/office/drawing/2014/main" id="{400CD374-E482-4E07-83AC-565251036C2E}"/>
+                <a16:creationId xmlns:a16="http://schemas.microsoft.com/office/drawing/2014/main" id="{7CBA617F-6D7E-4582-9A73-82B8B15D9BC9}"/>
               </a:ext>
             </a:extLst>
           </p:cNvPr>
@@ -11999,7 +12759,7 @@
           <p:cNvPr id="13" name="">
             <a:extLst xmlns:a="http://schemas.openxmlformats.org/drawingml/2006/main">
               <a:ext uri="{FF2B5EF4-FFF2-40B4-BE49-F238E27FC236}">
-                <a16:creationId xmlns:a16="http://schemas.microsoft.com/office/drawing/2014/main" id="{CFF216A7-B296-4D04-A6D0-7D0662258528}"/>
+                <a16:creationId xmlns:a16="http://schemas.microsoft.com/office/drawing/2014/main" id="{AC95EF97-0AA4-4CE4-A6C5-37FB1B110DA6}"/>
               </a:ext>
             </a:extLst>
           </p:cNvPr>
@@ -12032,7 +12792,7 @@
           <p:cNvPr id="14" name="">
             <a:extLst xmlns:a="http://schemas.openxmlformats.org/drawingml/2006/main">
               <a:ext uri="{FF2B5EF4-FFF2-40B4-BE49-F238E27FC236}">
-                <a16:creationId xmlns:a16="http://schemas.microsoft.com/office/drawing/2014/main" id="{B38E97A2-6E2A-4A0C-881E-25B76703E146}"/>
+                <a16:creationId xmlns:a16="http://schemas.microsoft.com/office/drawing/2014/main" id="{4D368111-2A95-411C-85CE-252CD0043B19}"/>
               </a:ext>
             </a:extLst>
           </p:cNvPr>
@@ -12089,7 +12849,7 @@
           <p:cNvPr id="15" name="">
             <a:extLst xmlns:a="http://schemas.openxmlformats.org/drawingml/2006/main">
               <a:ext uri="{FF2B5EF4-FFF2-40B4-BE49-F238E27FC236}">
-                <a16:creationId xmlns:a16="http://schemas.microsoft.com/office/drawing/2014/main" id="{F6EC5F35-9B9A-493D-9830-EE482038DEF7}"/>
+                <a16:creationId xmlns:a16="http://schemas.microsoft.com/office/drawing/2014/main" id="{722EE975-B80D-4A4B-9655-0B4746654045}"/>
               </a:ext>
             </a:extLst>
           </p:cNvPr>
@@ -12122,7 +12882,7 @@
           <p:cNvPr id="16" name="">
             <a:extLst xmlns:a="http://schemas.openxmlformats.org/drawingml/2006/main">
               <a:ext uri="{FF2B5EF4-FFF2-40B4-BE49-F238E27FC236}">
-                <a16:creationId xmlns:a16="http://schemas.microsoft.com/office/drawing/2014/main" id="{D6D5470D-D9F5-4FB3-B9A3-C7AFED1D2CF7}"/>
+                <a16:creationId xmlns:a16="http://schemas.microsoft.com/office/drawing/2014/main" id="{B26712D5-6F5F-4E46-8AFE-FF0C12FBBDE3}"/>
               </a:ext>
             </a:extLst>
           </p:cNvPr>
@@ -12179,7 +12939,7 @@
           <p:cNvPr id="17" name="">
             <a:extLst xmlns:a="http://schemas.openxmlformats.org/drawingml/2006/main">
               <a:ext uri="{FF2B5EF4-FFF2-40B4-BE49-F238E27FC236}">
-                <a16:creationId xmlns:a16="http://schemas.microsoft.com/office/drawing/2014/main" id="{75DF3E79-3571-41E5-A4C5-9818179EBD66}"/>
+                <a16:creationId xmlns:a16="http://schemas.microsoft.com/office/drawing/2014/main" id="{E954C45B-BF57-40F3-9433-A95D81B8FF4A}"/>
               </a:ext>
             </a:extLst>
           </p:cNvPr>
@@ -12212,7 +12972,7 @@
           <p:cNvPr id="18" name="">
             <a:extLst xmlns:a="http://schemas.openxmlformats.org/drawingml/2006/main">
               <a:ext uri="{FF2B5EF4-FFF2-40B4-BE49-F238E27FC236}">
-                <a16:creationId xmlns:a16="http://schemas.microsoft.com/office/drawing/2014/main" id="{3B998084-44DD-4EF4-833B-91CA3A21D8D4}"/>
+                <a16:creationId xmlns:a16="http://schemas.microsoft.com/office/drawing/2014/main" id="{BB33AC59-07D7-4F12-AAF6-07BE17196453}"/>
               </a:ext>
             </a:extLst>
           </p:cNvPr>
@@ -12269,7 +13029,7 @@
           <p:cNvPr id="19" name="">
             <a:extLst xmlns:a="http://schemas.openxmlformats.org/drawingml/2006/main">
               <a:ext uri="{FF2B5EF4-FFF2-40B4-BE49-F238E27FC236}">
-                <a16:creationId xmlns:a16="http://schemas.microsoft.com/office/drawing/2014/main" id="{2BCC33F2-27CD-4025-B9CA-AC1311563722}"/>
+                <a16:creationId xmlns:a16="http://schemas.microsoft.com/office/drawing/2014/main" id="{43D76E58-E33C-4151-8CAF-6F4D5A52ACC8}"/>
               </a:ext>
             </a:extLst>
           </p:cNvPr>
@@ -12302,7 +13062,7 @@
           <p:cNvPr id="20" name="">
             <a:extLst xmlns:a="http://schemas.openxmlformats.org/drawingml/2006/main">
               <a:ext uri="{FF2B5EF4-FFF2-40B4-BE49-F238E27FC236}">
-                <a16:creationId xmlns:a16="http://schemas.microsoft.com/office/drawing/2014/main" id="{1FABE763-797F-4E89-BFDD-EEDBA306D72A}"/>
+                <a16:creationId xmlns:a16="http://schemas.microsoft.com/office/drawing/2014/main" id="{9891E4A6-9819-40BF-99AF-F92B3F7136B2}"/>
               </a:ext>
             </a:extLst>
           </p:cNvPr>
@@ -12359,7 +13119,7 @@
           <p:cNvPr id="21" name="">
             <a:extLst xmlns:a="http://schemas.openxmlformats.org/drawingml/2006/main">
               <a:ext uri="{FF2B5EF4-FFF2-40B4-BE49-F238E27FC236}">
-                <a16:creationId xmlns:a16="http://schemas.microsoft.com/office/drawing/2014/main" id="{4E76B98C-9DF6-41CF-A510-8DAF4C7431E0}"/>
+                <a16:creationId xmlns:a16="http://schemas.microsoft.com/office/drawing/2014/main" id="{D6F0AE28-3F21-4E16-AB68-118F76C9E6BF}"/>
               </a:ext>
             </a:extLst>
           </p:cNvPr>
@@ -12390,7 +13150,7 @@
           <p:cNvPr id="22" name="">
             <a:extLst xmlns:a="http://schemas.openxmlformats.org/drawingml/2006/main">
               <a:ext uri="{FF2B5EF4-FFF2-40B4-BE49-F238E27FC236}">
-                <a16:creationId xmlns:a16="http://schemas.microsoft.com/office/drawing/2014/main" id="{0163AD93-0AD6-4B7C-8E8A-7FBBC79B4FD5}"/>
+                <a16:creationId xmlns:a16="http://schemas.microsoft.com/office/drawing/2014/main" id="{99C7709E-10D9-42E3-B028-D576EE1CEB58}"/>
               </a:ext>
             </a:extLst>
           </p:cNvPr>
@@ -12421,7 +13181,7 @@
           <p:cNvPr id="23" name="">
             <a:extLst xmlns:a="http://schemas.openxmlformats.org/drawingml/2006/main">
               <a:ext uri="{FF2B5EF4-FFF2-40B4-BE49-F238E27FC236}">
-                <a16:creationId xmlns:a16="http://schemas.microsoft.com/office/drawing/2014/main" id="{70FB75FA-8ACA-4D92-985F-3AC0C722658D}"/>
+                <a16:creationId xmlns:a16="http://schemas.microsoft.com/office/drawing/2014/main" id="{5A7B0E48-A6DF-4F25-922B-8E66776FE479}"/>
               </a:ext>
             </a:extLst>
           </p:cNvPr>
@@ -12452,7 +13212,7 @@
           <p:cNvPr id="24" name="">
             <a:extLst xmlns:a="http://schemas.openxmlformats.org/drawingml/2006/main">
               <a:ext uri="{FF2B5EF4-FFF2-40B4-BE49-F238E27FC236}">
-                <a16:creationId xmlns:a16="http://schemas.microsoft.com/office/drawing/2014/main" id="{51FE68DA-A570-461C-866E-911B09771821}"/>
+                <a16:creationId xmlns:a16="http://schemas.microsoft.com/office/drawing/2014/main" id="{2D671764-B2D7-42A0-B314-B962338CBCFB}"/>
               </a:ext>
             </a:extLst>
           </p:cNvPr>
@@ -12483,7 +13243,7 @@
           <p:cNvPr id="25" name="">
             <a:extLst xmlns:a="http://schemas.openxmlformats.org/drawingml/2006/main">
               <a:ext uri="{FF2B5EF4-FFF2-40B4-BE49-F238E27FC236}">
-                <a16:creationId xmlns:a16="http://schemas.microsoft.com/office/drawing/2014/main" id="{0AF1D87B-71A5-4059-8285-A1E1757902A8}"/>
+                <a16:creationId xmlns:a16="http://schemas.microsoft.com/office/drawing/2014/main" id="{A80EDEEF-27CE-4078-89BB-B39AE8915CC3}"/>
               </a:ext>
             </a:extLst>
           </p:cNvPr>
@@ -12514,7 +13274,7 @@
           <p:cNvPr id="26" name="">
             <a:extLst xmlns:a="http://schemas.openxmlformats.org/drawingml/2006/main">
               <a:ext uri="{FF2B5EF4-FFF2-40B4-BE49-F238E27FC236}">
-                <a16:creationId xmlns:a16="http://schemas.microsoft.com/office/drawing/2014/main" id="{60ADA602-22A1-4853-980C-1C31A0C4A1C9}"/>
+                <a16:creationId xmlns:a16="http://schemas.microsoft.com/office/drawing/2014/main" id="{CAEE5E39-AF80-47DE-8604-D87FB6168956}"/>
               </a:ext>
             </a:extLst>
           </p:cNvPr>
@@ -12545,7 +13305,7 @@
           <p:cNvPr id="27" name="">
             <a:extLst xmlns:a="http://schemas.openxmlformats.org/drawingml/2006/main">
               <a:ext uri="{FF2B5EF4-FFF2-40B4-BE49-F238E27FC236}">
-                <a16:creationId xmlns:a16="http://schemas.microsoft.com/office/drawing/2014/main" id="{7DF9FDE6-B549-4F19-A520-F3584BCBCABA}"/>
+                <a16:creationId xmlns:a16="http://schemas.microsoft.com/office/drawing/2014/main" id="{94E1E859-5C7F-4A09-A03D-A1788A2429D9}"/>
               </a:ext>
             </a:extLst>
           </p:cNvPr>
@@ -12576,7 +13336,7 @@
           <p:cNvPr id="28" name="">
             <a:extLst xmlns:a="http://schemas.openxmlformats.org/drawingml/2006/main">
               <a:ext uri="{FF2B5EF4-FFF2-40B4-BE49-F238E27FC236}">
-                <a16:creationId xmlns:a16="http://schemas.microsoft.com/office/drawing/2014/main" id="{AA54C7FD-04F8-402B-98FF-0E2EE6069C8F}"/>
+                <a16:creationId xmlns:a16="http://schemas.microsoft.com/office/drawing/2014/main" id="{3D09859D-3027-43CF-899B-74082B5F8915}"/>
               </a:ext>
             </a:extLst>
           </p:cNvPr>
@@ -12633,7 +13393,7 @@
           <p:cNvPr id="29" name="">
             <a:extLst xmlns:a="http://schemas.openxmlformats.org/drawingml/2006/main">
               <a:ext uri="{FF2B5EF4-FFF2-40B4-BE49-F238E27FC236}">
-                <a16:creationId xmlns:a16="http://schemas.microsoft.com/office/drawing/2014/main" id="{550B8758-A514-4A79-A434-64CD7B32B9D6}"/>
+                <a16:creationId xmlns:a16="http://schemas.microsoft.com/office/drawing/2014/main" id="{520B7757-2881-4D5A-A878-F791B3FBF07D}"/>
               </a:ext>
             </a:extLst>
           </p:cNvPr>
@@ -12690,7 +13450,7 @@
           <p:cNvPr id="30" name="">
             <a:extLst xmlns:a="http://schemas.openxmlformats.org/drawingml/2006/main">
               <a:ext uri="{FF2B5EF4-FFF2-40B4-BE49-F238E27FC236}">
-                <a16:creationId xmlns:a16="http://schemas.microsoft.com/office/drawing/2014/main" id="{1684B066-7396-41C3-A87B-33757176FB94}"/>
+                <a16:creationId xmlns:a16="http://schemas.microsoft.com/office/drawing/2014/main" id="{FA9C907B-D3EB-4465-8066-FBB56E46169C}"/>
               </a:ext>
             </a:extLst>
           </p:cNvPr>
@@ -12747,7 +13507,7 @@
           <p:cNvPr id="31" name="">
             <a:extLst xmlns:a="http://schemas.openxmlformats.org/drawingml/2006/main">
               <a:ext uri="{FF2B5EF4-FFF2-40B4-BE49-F238E27FC236}">
-                <a16:creationId xmlns:a16="http://schemas.microsoft.com/office/drawing/2014/main" id="{F28A0DC5-21CF-4013-96BF-B97B217A2841}"/>
+                <a16:creationId xmlns:a16="http://schemas.microsoft.com/office/drawing/2014/main" id="{1A6D5F1F-DD16-4E3B-9B7F-BB5742407B86}"/>
               </a:ext>
             </a:extLst>
           </p:cNvPr>
@@ -12804,7 +13564,7 @@
           <p:cNvPr id="32" name="">
             <a:extLst xmlns:a="http://schemas.openxmlformats.org/drawingml/2006/main">
               <a:ext uri="{FF2B5EF4-FFF2-40B4-BE49-F238E27FC236}">
-                <a16:creationId xmlns:a16="http://schemas.microsoft.com/office/drawing/2014/main" id="{A42D0474-AF29-4D84-93F4-8E4400F40FD6}"/>
+                <a16:creationId xmlns:a16="http://schemas.microsoft.com/office/drawing/2014/main" id="{9B0D61FF-ECE9-476E-82BD-6C00DEB84B73}"/>
               </a:ext>
             </a:extLst>
           </p:cNvPr>
@@ -12861,7 +13621,7 @@
           <p:cNvPr id="33" name="">
             <a:extLst xmlns:a="http://schemas.openxmlformats.org/drawingml/2006/main">
               <a:ext uri="{FF2B5EF4-FFF2-40B4-BE49-F238E27FC236}">
-                <a16:creationId xmlns:a16="http://schemas.microsoft.com/office/drawing/2014/main" id="{AC0D5AB6-27C9-4FC0-A1D7-97754B4D5E78}"/>
+                <a16:creationId xmlns:a16="http://schemas.microsoft.com/office/drawing/2014/main" id="{724835F2-501A-4C72-B061-F7DF89873983}"/>
               </a:ext>
             </a:extLst>
           </p:cNvPr>
@@ -12918,7 +13678,7 @@
           <p:cNvPr id="34" name="">
             <a:extLst xmlns:a="http://schemas.openxmlformats.org/drawingml/2006/main">
               <a:ext uri="{FF2B5EF4-FFF2-40B4-BE49-F238E27FC236}">
-                <a16:creationId xmlns:a16="http://schemas.microsoft.com/office/drawing/2014/main" id="{6A4F6BF3-6260-4CA1-89B5-AC06508CEFA4}"/>
+                <a16:creationId xmlns:a16="http://schemas.microsoft.com/office/drawing/2014/main" id="{8BA77701-2836-449A-80B3-C4A48653341F}"/>
               </a:ext>
             </a:extLst>
           </p:cNvPr>
@@ -12975,7 +13735,7 @@
           <p:cNvPr id="35" name="">
             <a:extLst xmlns:a="http://schemas.openxmlformats.org/drawingml/2006/main">
               <a:ext uri="{FF2B5EF4-FFF2-40B4-BE49-F238E27FC236}">
-                <a16:creationId xmlns:a16="http://schemas.microsoft.com/office/drawing/2014/main" id="{478792F2-A09B-484C-B6A1-33647044B71E}"/>
+                <a16:creationId xmlns:a16="http://schemas.microsoft.com/office/drawing/2014/main" id="{01A23897-0F36-4C1D-B85E-4356515A309D}"/>
               </a:ext>
             </a:extLst>
           </p:cNvPr>
@@ -13032,7 +13792,7 @@
           <p:cNvPr id="36" name="">
             <a:extLst xmlns:a="http://schemas.openxmlformats.org/drawingml/2006/main">
               <a:ext uri="{FF2B5EF4-FFF2-40B4-BE49-F238E27FC236}">
-                <a16:creationId xmlns:a16="http://schemas.microsoft.com/office/drawing/2014/main" id="{6EC64F96-7998-4FC8-93B4-E8B2F53B13B8}"/>
+                <a16:creationId xmlns:a16="http://schemas.microsoft.com/office/drawing/2014/main" id="{3ABBC02B-C299-4DD6-8299-B9F487C92B2B}"/>
               </a:ext>
             </a:extLst>
           </p:cNvPr>
@@ -13089,7 +13849,7 @@
           <p:cNvPr id="37" name="">
             <a:extLst xmlns:a="http://schemas.openxmlformats.org/drawingml/2006/main">
               <a:ext uri="{FF2B5EF4-FFF2-40B4-BE49-F238E27FC236}">
-                <a16:creationId xmlns:a16="http://schemas.microsoft.com/office/drawing/2014/main" id="{4F6160FF-A2EF-4309-ACAD-3415C70563FD}"/>
+                <a16:creationId xmlns:a16="http://schemas.microsoft.com/office/drawing/2014/main" id="{6B6255D6-D809-450D-84FF-555F0957F7FC}"/>
               </a:ext>
             </a:extLst>
           </p:cNvPr>
@@ -13146,7 +13906,7 @@
           <p:cNvPr id="38" name="">
             <a:extLst xmlns:a="http://schemas.openxmlformats.org/drawingml/2006/main">
               <a:ext uri="{FF2B5EF4-FFF2-40B4-BE49-F238E27FC236}">
-                <a16:creationId xmlns:a16="http://schemas.microsoft.com/office/drawing/2014/main" id="{0D3D7F86-ED5D-4C09-BE0F-5209106A17AD}"/>
+                <a16:creationId xmlns:a16="http://schemas.microsoft.com/office/drawing/2014/main" id="{CA6CB50F-F6D0-4700-81CA-CB6B691B4E9D}"/>
               </a:ext>
             </a:extLst>
           </p:cNvPr>
@@ -13203,7 +13963,7 @@
           <p:cNvPr id="39" name="">
             <a:extLst xmlns:a="http://schemas.openxmlformats.org/drawingml/2006/main">
               <a:ext uri="{FF2B5EF4-FFF2-40B4-BE49-F238E27FC236}">
-                <a16:creationId xmlns:a16="http://schemas.microsoft.com/office/drawing/2014/main" id="{D34D3DE9-775E-4756-951E-03CA69EFABD6}"/>
+                <a16:creationId xmlns:a16="http://schemas.microsoft.com/office/drawing/2014/main" id="{D381831D-C57B-4367-9FBF-C4851BDA0189}"/>
               </a:ext>
             </a:extLst>
           </p:cNvPr>
@@ -13260,7 +14020,7 @@
           <p:cNvPr id="40" name="">
             <a:extLst xmlns:a="http://schemas.openxmlformats.org/drawingml/2006/main">
               <a:ext uri="{FF2B5EF4-FFF2-40B4-BE49-F238E27FC236}">
-                <a16:creationId xmlns:a16="http://schemas.microsoft.com/office/drawing/2014/main" id="{87D092A1-2E07-421F-A135-690B6FF1CA38}"/>
+                <a16:creationId xmlns:a16="http://schemas.microsoft.com/office/drawing/2014/main" id="{965018F5-E334-48C4-AE83-FA0E7B9A2ACA}"/>
               </a:ext>
             </a:extLst>
           </p:cNvPr>
@@ -13317,7 +14077,7 @@
           <p:cNvPr id="41" name="">
             <a:extLst xmlns:a="http://schemas.openxmlformats.org/drawingml/2006/main">
               <a:ext uri="{FF2B5EF4-FFF2-40B4-BE49-F238E27FC236}">
-                <a16:creationId xmlns:a16="http://schemas.microsoft.com/office/drawing/2014/main" id="{5E84BA72-12EC-44C8-801F-6D79D05CC5A3}"/>
+                <a16:creationId xmlns:a16="http://schemas.microsoft.com/office/drawing/2014/main" id="{F1E3EB62-C6B3-4685-88D5-755BC6D6BBE6}"/>
               </a:ext>
             </a:extLst>
           </p:cNvPr>
@@ -13374,7 +14134,7 @@
           <p:cNvPr id="42" name="">
             <a:extLst xmlns:a="http://schemas.openxmlformats.org/drawingml/2006/main">
               <a:ext uri="{FF2B5EF4-FFF2-40B4-BE49-F238E27FC236}">
-                <a16:creationId xmlns:a16="http://schemas.microsoft.com/office/drawing/2014/main" id="{924474DC-14BD-42A5-994A-7B118DD23C3F}"/>
+                <a16:creationId xmlns:a16="http://schemas.microsoft.com/office/drawing/2014/main" id="{9124AA41-0C4E-4A5F-BDFB-22FD6D93DD61}"/>
               </a:ext>
             </a:extLst>
           </p:cNvPr>
@@ -13407,7 +14167,7 @@
           <p:cNvPr id="43" name="">
             <a:extLst xmlns:a="http://schemas.openxmlformats.org/drawingml/2006/main">
               <a:ext uri="{FF2B5EF4-FFF2-40B4-BE49-F238E27FC236}">
-                <a16:creationId xmlns:a16="http://schemas.microsoft.com/office/drawing/2014/main" id="{86AD240E-598C-4043-AADF-BA2A59D3B32D}"/>
+                <a16:creationId xmlns:a16="http://schemas.microsoft.com/office/drawing/2014/main" id="{F2451209-91DB-49F4-ABBB-6274510A969D}"/>
               </a:ext>
             </a:extLst>
           </p:cNvPr>
@@ -13464,7 +14224,7 @@
           <p:cNvPr id="44" name="">
             <a:extLst xmlns:a="http://schemas.openxmlformats.org/drawingml/2006/main">
               <a:ext uri="{FF2B5EF4-FFF2-40B4-BE49-F238E27FC236}">
-                <a16:creationId xmlns:a16="http://schemas.microsoft.com/office/drawing/2014/main" id="{719DC9EF-06F8-4EF7-AC46-0116ADC3FE2C}"/>
+                <a16:creationId xmlns:a16="http://schemas.microsoft.com/office/drawing/2014/main" id="{CF0BCD54-C38A-40FD-BBA1-A68CD999085D}"/>
               </a:ext>
             </a:extLst>
           </p:cNvPr>
@@ -13497,7 +14257,7 @@
           <p:cNvPr id="45" name="">
             <a:extLst xmlns:a="http://schemas.openxmlformats.org/drawingml/2006/main">
               <a:ext uri="{FF2B5EF4-FFF2-40B4-BE49-F238E27FC236}">
-                <a16:creationId xmlns:a16="http://schemas.microsoft.com/office/drawing/2014/main" id="{24A8C8C3-9B44-4F40-A038-802F53754138}"/>
+                <a16:creationId xmlns:a16="http://schemas.microsoft.com/office/drawing/2014/main" id="{8CF8DEB2-FD6C-4CFE-850B-36206F13E477}"/>
               </a:ext>
             </a:extLst>
           </p:cNvPr>
@@ -13554,7 +14314,7 @@
           <p:cNvPr id="46" name="">
             <a:extLst xmlns:a="http://schemas.openxmlformats.org/drawingml/2006/main">
               <a:ext uri="{FF2B5EF4-FFF2-40B4-BE49-F238E27FC236}">
-                <a16:creationId xmlns:a16="http://schemas.microsoft.com/office/drawing/2014/main" id="{41E3DD77-D305-4E13-9E4B-01478526FDF7}"/>
+                <a16:creationId xmlns:a16="http://schemas.microsoft.com/office/drawing/2014/main" id="{363D1884-AAF4-4E4F-8CA0-6C3CDB2551A0}"/>
               </a:ext>
             </a:extLst>
           </p:cNvPr>
@@ -13587,7 +14347,7 @@
           <p:cNvPr id="47" name="">
             <a:extLst xmlns:a="http://schemas.openxmlformats.org/drawingml/2006/main">
               <a:ext uri="{FF2B5EF4-FFF2-40B4-BE49-F238E27FC236}">
-                <a16:creationId xmlns:a16="http://schemas.microsoft.com/office/drawing/2014/main" id="{83E57A01-60B6-42E0-9BCA-9068EEDCC716}"/>
+                <a16:creationId xmlns:a16="http://schemas.microsoft.com/office/drawing/2014/main" id="{D5104F99-5A02-414B-B059-5D2E280BCC31}"/>
               </a:ext>
             </a:extLst>
           </p:cNvPr>
@@ -13644,7 +14404,7 @@
           <p:cNvPr id="48" name="">
             <a:extLst xmlns:a="http://schemas.openxmlformats.org/drawingml/2006/main">
               <a:ext uri="{FF2B5EF4-FFF2-40B4-BE49-F238E27FC236}">
-                <a16:creationId xmlns:a16="http://schemas.microsoft.com/office/drawing/2014/main" id="{89D8BC9E-0799-4C92-BFB1-22A797BD19C7}"/>
+                <a16:creationId xmlns:a16="http://schemas.microsoft.com/office/drawing/2014/main" id="{3115649C-F003-4AA3-BE4D-4629F0EA3AA2}"/>
               </a:ext>
             </a:extLst>
           </p:cNvPr>
@@ -13675,7 +14435,7 @@
           <p:cNvPr id="49" name="">
             <a:extLst xmlns:a="http://schemas.openxmlformats.org/drawingml/2006/main">
               <a:ext uri="{FF2B5EF4-FFF2-40B4-BE49-F238E27FC236}">
-                <a16:creationId xmlns:a16="http://schemas.microsoft.com/office/drawing/2014/main" id="{8169B088-92BA-4BAC-A1ED-F85EC0437F1F}"/>
+                <a16:creationId xmlns:a16="http://schemas.microsoft.com/office/drawing/2014/main" id="{EDF016C6-7B68-4D91-AED7-AFB83A86BFD3}"/>
               </a:ext>
             </a:extLst>
           </p:cNvPr>
@@ -13706,7 +14466,7 @@
           <p:cNvPr id="50" name="">
             <a:extLst xmlns:a="http://schemas.openxmlformats.org/drawingml/2006/main">
               <a:ext uri="{FF2B5EF4-FFF2-40B4-BE49-F238E27FC236}">
-                <a16:creationId xmlns:a16="http://schemas.microsoft.com/office/drawing/2014/main" id="{A627782B-3E3C-4C3C-9E20-DB21AAC585A7}"/>
+                <a16:creationId xmlns:a16="http://schemas.microsoft.com/office/drawing/2014/main" id="{0EA281F4-0971-4E85-8BF6-626A0BE73242}"/>
               </a:ext>
             </a:extLst>
           </p:cNvPr>
@@ -13763,7 +14523,7 @@
           <p:cNvPr id="51" name="">
             <a:extLst xmlns:a="http://schemas.openxmlformats.org/drawingml/2006/main">
               <a:ext uri="{FF2B5EF4-FFF2-40B4-BE49-F238E27FC236}">
-                <a16:creationId xmlns:a16="http://schemas.microsoft.com/office/drawing/2014/main" id="{363670B4-8EC4-47E1-8BC8-7A4218EFF9C1}"/>
+                <a16:creationId xmlns:a16="http://schemas.microsoft.com/office/drawing/2014/main" id="{F098773B-2A8F-4DBE-A437-21010B139FFE}"/>
               </a:ext>
             </a:extLst>
           </p:cNvPr>
@@ -13820,7 +14580,7 @@
           <p:cNvPr id="52" name="">
             <a:extLst xmlns:a="http://schemas.openxmlformats.org/drawingml/2006/main">
               <a:ext uri="{FF2B5EF4-FFF2-40B4-BE49-F238E27FC236}">
-                <a16:creationId xmlns:a16="http://schemas.microsoft.com/office/drawing/2014/main" id="{CCEB988B-7180-4FD6-BC1C-D749DDCCE126}"/>
+                <a16:creationId xmlns:a16="http://schemas.microsoft.com/office/drawing/2014/main" id="{972491A8-871C-4AF6-A93D-5622916B94C8}"/>
               </a:ext>
             </a:extLst>
           </p:cNvPr>
@@ -13877,7 +14637,7 @@
           <p:cNvPr id="53" name="">
             <a:extLst xmlns:a="http://schemas.openxmlformats.org/drawingml/2006/main">
               <a:ext uri="{FF2B5EF4-FFF2-40B4-BE49-F238E27FC236}">
-                <a16:creationId xmlns:a16="http://schemas.microsoft.com/office/drawing/2014/main" id="{4A279AF4-E690-4EAC-922F-A2EBC098280B}"/>
+                <a16:creationId xmlns:a16="http://schemas.microsoft.com/office/drawing/2014/main" id="{BAE7144D-5783-4BD5-A069-D3676069FC3B}"/>
               </a:ext>
             </a:extLst>
           </p:cNvPr>
@@ -13957,7 +14717,7 @@
           <p:cNvPr id="54" name="">
             <a:extLst xmlns:a="http://schemas.openxmlformats.org/drawingml/2006/main">
               <a:ext uri="{FF2B5EF4-FFF2-40B4-BE49-F238E27FC236}">
-                <a16:creationId xmlns:a16="http://schemas.microsoft.com/office/drawing/2014/main" id="{9E7CF200-F64B-4206-870F-9595E01E0D58}"/>
+                <a16:creationId xmlns:a16="http://schemas.microsoft.com/office/drawing/2014/main" id="{C8EF5781-2A93-4D9F-8BBB-7A4225D0F10C}"/>
               </a:ext>
             </a:extLst>
           </p:cNvPr>
@@ -13990,7 +14750,7 @@
           <p:cNvPr id="55" name="">
             <a:extLst xmlns:a="http://schemas.openxmlformats.org/drawingml/2006/main">
               <a:ext uri="{FF2B5EF4-FFF2-40B4-BE49-F238E27FC236}">
-                <a16:creationId xmlns:a16="http://schemas.microsoft.com/office/drawing/2014/main" id="{61874CAA-05E3-49DD-B762-492C3E136950}"/>
+                <a16:creationId xmlns:a16="http://schemas.microsoft.com/office/drawing/2014/main" id="{E516D663-FED7-4CE7-A9CF-3587BCC02C2F}"/>
               </a:ext>
             </a:extLst>
           </p:cNvPr>
@@ -14047,7 +14807,7 @@
           <p:cNvPr id="56" name="">
             <a:extLst xmlns:a="http://schemas.openxmlformats.org/drawingml/2006/main">
               <a:ext uri="{FF2B5EF4-FFF2-40B4-BE49-F238E27FC236}">
-                <a16:creationId xmlns:a16="http://schemas.microsoft.com/office/drawing/2014/main" id="{E244CCD4-A06D-4379-8248-6B69112D252A}"/>
+                <a16:creationId xmlns:a16="http://schemas.microsoft.com/office/drawing/2014/main" id="{F207F64F-DC93-469F-9B9C-4F8122EC7AB2}"/>
               </a:ext>
             </a:extLst>
           </p:cNvPr>
@@ -14080,7 +14840,7 @@
           <p:cNvPr id="57" name="">
             <a:extLst xmlns:a="http://schemas.openxmlformats.org/drawingml/2006/main">
               <a:ext uri="{FF2B5EF4-FFF2-40B4-BE49-F238E27FC236}">
-                <a16:creationId xmlns:a16="http://schemas.microsoft.com/office/drawing/2014/main" id="{989958B7-D7AE-4A45-BE6B-9C4C17A176FA}"/>
+                <a16:creationId xmlns:a16="http://schemas.microsoft.com/office/drawing/2014/main" id="{3D3310FC-A125-4360-9E9D-29878DE68929}"/>
               </a:ext>
             </a:extLst>
           </p:cNvPr>
@@ -14137,7 +14897,7 @@
           <p:cNvPr id="58" name="">
             <a:extLst xmlns:a="http://schemas.openxmlformats.org/drawingml/2006/main">
               <a:ext uri="{FF2B5EF4-FFF2-40B4-BE49-F238E27FC236}">
-                <a16:creationId xmlns:a16="http://schemas.microsoft.com/office/drawing/2014/main" id="{D3857724-A91C-4E58-8EAC-59CF43C7BA9D}"/>
+                <a16:creationId xmlns:a16="http://schemas.microsoft.com/office/drawing/2014/main" id="{73A2E716-2882-4404-B350-2D73C2D9AD81}"/>
               </a:ext>
             </a:extLst>
           </p:cNvPr>
@@ -14170,7 +14930,7 @@
           <p:cNvPr id="59" name="">
             <a:extLst xmlns:a="http://schemas.openxmlformats.org/drawingml/2006/main">
               <a:ext uri="{FF2B5EF4-FFF2-40B4-BE49-F238E27FC236}">
-                <a16:creationId xmlns:a16="http://schemas.microsoft.com/office/drawing/2014/main" id="{325DFFEE-3DDF-4DF7-A941-7EDAA451B107}"/>
+                <a16:creationId xmlns:a16="http://schemas.microsoft.com/office/drawing/2014/main" id="{8BD81F3E-72E9-4ACF-9BDC-146D0FBDDFD6}"/>
               </a:ext>
             </a:extLst>
           </p:cNvPr>
@@ -14227,7 +14987,7 @@
           <p:cNvPr id="60" name="">
             <a:extLst xmlns:a="http://schemas.openxmlformats.org/drawingml/2006/main">
               <a:ext uri="{FF2B5EF4-FFF2-40B4-BE49-F238E27FC236}">
-                <a16:creationId xmlns:a16="http://schemas.microsoft.com/office/drawing/2014/main" id="{E3E60AAE-B190-4FA1-8B71-058CB1CF6655}"/>
+                <a16:creationId xmlns:a16="http://schemas.microsoft.com/office/drawing/2014/main" id="{95008470-0E75-4D2F-9E63-A7EBBE188924}"/>
               </a:ext>
             </a:extLst>
           </p:cNvPr>
@@ -14258,7 +15018,7 @@
           <p:cNvPr id="61" name="">
             <a:extLst xmlns:a="http://schemas.openxmlformats.org/drawingml/2006/main">
               <a:ext uri="{FF2B5EF4-FFF2-40B4-BE49-F238E27FC236}">
-                <a16:creationId xmlns:a16="http://schemas.microsoft.com/office/drawing/2014/main" id="{44823E4B-D65E-405A-9607-3966E827F1D5}"/>
+                <a16:creationId xmlns:a16="http://schemas.microsoft.com/office/drawing/2014/main" id="{C908FB41-3687-4D13-9C93-453877464BDC}"/>
               </a:ext>
             </a:extLst>
           </p:cNvPr>
@@ -14289,7 +15049,7 @@
           <p:cNvPr id="62" name="">
             <a:extLst xmlns:a="http://schemas.openxmlformats.org/drawingml/2006/main">
               <a:ext uri="{FF2B5EF4-FFF2-40B4-BE49-F238E27FC236}">
-                <a16:creationId xmlns:a16="http://schemas.microsoft.com/office/drawing/2014/main" id="{0192CB81-CA7C-4CE1-83A6-829DC8CD5635}"/>
+                <a16:creationId xmlns:a16="http://schemas.microsoft.com/office/drawing/2014/main" id="{C21D9C85-91CD-48EE-90C2-4E3827E2ABC6}"/>
               </a:ext>
             </a:extLst>
           </p:cNvPr>
@@ -14346,7 +15106,7 @@
           <p:cNvPr id="63" name="">
             <a:extLst xmlns:a="http://schemas.openxmlformats.org/drawingml/2006/main">
               <a:ext uri="{FF2B5EF4-FFF2-40B4-BE49-F238E27FC236}">
-                <a16:creationId xmlns:a16="http://schemas.microsoft.com/office/drawing/2014/main" id="{0563B098-4B46-4EC8-9814-5F8AAB4BF240}"/>
+                <a16:creationId xmlns:a16="http://schemas.microsoft.com/office/drawing/2014/main" id="{61371758-006F-4258-9E30-917FD6D79236}"/>
               </a:ext>
             </a:extLst>
           </p:cNvPr>
@@ -14403,7 +15163,7 @@
           <p:cNvPr id="64" name="">
             <a:extLst xmlns:a="http://schemas.openxmlformats.org/drawingml/2006/main">
               <a:ext uri="{FF2B5EF4-FFF2-40B4-BE49-F238E27FC236}">
-                <a16:creationId xmlns:a16="http://schemas.microsoft.com/office/drawing/2014/main" id="{DA65430D-C60C-43F4-A0AE-85806E96A8F0}"/>
+                <a16:creationId xmlns:a16="http://schemas.microsoft.com/office/drawing/2014/main" id="{F0102B12-7173-40EF-93AA-5394E7434879}"/>
               </a:ext>
             </a:extLst>
           </p:cNvPr>
@@ -14434,7 +15194,7 @@
           <p:cNvPr id="65" name="">
             <a:extLst xmlns:a="http://schemas.openxmlformats.org/drawingml/2006/main">
               <a:ext uri="{FF2B5EF4-FFF2-40B4-BE49-F238E27FC236}">
-                <a16:creationId xmlns:a16="http://schemas.microsoft.com/office/drawing/2014/main" id="{E0A23427-A72E-4CE0-8F8C-88E01BA36263}"/>
+                <a16:creationId xmlns:a16="http://schemas.microsoft.com/office/drawing/2014/main" id="{BD095414-FB88-421A-ABA3-BD6B9765A1BA}"/>
               </a:ext>
             </a:extLst>
           </p:cNvPr>
@@ -14491,7 +15251,7 @@
           <p:cNvPr id="66" name="">
             <a:extLst xmlns:a="http://schemas.openxmlformats.org/drawingml/2006/main">
               <a:ext uri="{FF2B5EF4-FFF2-40B4-BE49-F238E27FC236}">
-                <a16:creationId xmlns:a16="http://schemas.microsoft.com/office/drawing/2014/main" id="{2E6125FF-3FE8-43A7-9D7A-939CCD5BA468}"/>
+                <a16:creationId xmlns:a16="http://schemas.microsoft.com/office/drawing/2014/main" id="{B1877D3E-4F04-4F7B-B3D0-A7B41C126CD0}"/>
               </a:ext>
             </a:extLst>
           </p:cNvPr>
@@ -14548,7 +15308,7 @@
           <p:cNvPr id="67" name="">
             <a:extLst xmlns:a="http://schemas.openxmlformats.org/drawingml/2006/main">
               <a:ext uri="{FF2B5EF4-FFF2-40B4-BE49-F238E27FC236}">
-                <a16:creationId xmlns:a16="http://schemas.microsoft.com/office/drawing/2014/main" id="{54BAF62D-8B21-4555-A334-A224F01F1068}"/>
+                <a16:creationId xmlns:a16="http://schemas.microsoft.com/office/drawing/2014/main" id="{BB2486B4-237B-47B1-8FBF-68A73B5E1B0B}"/>
               </a:ext>
             </a:extLst>
           </p:cNvPr>
@@ -14603,7 +15363,7 @@
     </p:spTree>
     <p:extLst>
       <p:ext uri="{BB962C8B-B14F-4D97-AF65-F5344CB8AC3E}">
-        <p14:creationId xmlns:p14="http://schemas.microsoft.com/office/powerpoint/2010/main" val="75260708"/>
+        <p14:creationId xmlns:p14="http://schemas.microsoft.com/office/powerpoint/2010/main" val="452622132"/>
       </p:ext>
     </p:extLst>
   </p:cSld>
@@ -14634,7 +15394,7 @@
           <p:cNvPr id="45" name="">
             <a:extLst xmlns:a="http://schemas.openxmlformats.org/drawingml/2006/main">
               <a:ext uri="{FF2B5EF4-FFF2-40B4-BE49-F238E27FC236}">
-                <a16:creationId xmlns:a16="http://schemas.microsoft.com/office/drawing/2014/main" id="{647F4D9D-725C-4FE4-A4A9-ACCD5B399CA3}"/>
+                <a16:creationId xmlns:a16="http://schemas.microsoft.com/office/drawing/2014/main" id="{EAA77B05-EF30-49B5-AFD9-E5BC1255AD4E}"/>
               </a:ext>
             </a:extLst>
           </p:cNvPr>
@@ -14691,7 +15451,7 @@
           <p:cNvPr id="2" name="">
             <a:extLst xmlns:a="http://schemas.openxmlformats.org/drawingml/2006/main">
               <a:ext uri="{FF2B5EF4-FFF2-40B4-BE49-F238E27FC236}">
-                <a16:creationId xmlns:a16="http://schemas.microsoft.com/office/drawing/2014/main" id="{4E0A90E8-D1A1-4A39-B1E6-434CEACF7100}"/>
+                <a16:creationId xmlns:a16="http://schemas.microsoft.com/office/drawing/2014/main" id="{253711B7-A715-48E3-AB11-5F01BADB9325}"/>
               </a:ext>
             </a:extLst>
           </p:cNvPr>
@@ -14722,7 +15482,7 @@
           <p:cNvPr id="3" name="">
             <a:extLst xmlns:a="http://schemas.openxmlformats.org/drawingml/2006/main">
               <a:ext uri="{FF2B5EF4-FFF2-40B4-BE49-F238E27FC236}">
-                <a16:creationId xmlns:a16="http://schemas.microsoft.com/office/drawing/2014/main" id="{F32C07F8-683E-4952-A43A-9D3972E36D78}"/>
+                <a16:creationId xmlns:a16="http://schemas.microsoft.com/office/drawing/2014/main" id="{876B587B-16AA-4682-8A8A-32EFF3867B17}"/>
               </a:ext>
             </a:extLst>
           </p:cNvPr>
@@ -14779,7 +15539,7 @@
           <p:cNvPr id="4" name="">
             <a:extLst xmlns:a="http://schemas.openxmlformats.org/drawingml/2006/main">
               <a:ext uri="{FF2B5EF4-FFF2-40B4-BE49-F238E27FC236}">
-                <a16:creationId xmlns:a16="http://schemas.microsoft.com/office/drawing/2014/main" id="{68D634B0-6B5E-49FB-9E29-B9413F3D9244}"/>
+                <a16:creationId xmlns:a16="http://schemas.microsoft.com/office/drawing/2014/main" id="{80981DCF-13B1-4F27-9E96-19B5A33CD741}"/>
               </a:ext>
             </a:extLst>
           </p:cNvPr>
@@ -14810,7 +15570,7 @@
           <p:cNvPr id="5" name="">
             <a:extLst xmlns:a="http://schemas.openxmlformats.org/drawingml/2006/main">
               <a:ext uri="{FF2B5EF4-FFF2-40B4-BE49-F238E27FC236}">
-                <a16:creationId xmlns:a16="http://schemas.microsoft.com/office/drawing/2014/main" id="{E694841F-91FE-40A2-BC73-0261BE9ECF44}"/>
+                <a16:creationId xmlns:a16="http://schemas.microsoft.com/office/drawing/2014/main" id="{F15C2EC7-AE27-4D2A-B4E1-09511A967318}"/>
               </a:ext>
             </a:extLst>
           </p:cNvPr>
@@ -14867,7 +15627,7 @@
           <p:cNvPr id="6" name="">
             <a:extLst xmlns:a="http://schemas.openxmlformats.org/drawingml/2006/main">
               <a:ext uri="{FF2B5EF4-FFF2-40B4-BE49-F238E27FC236}">
-                <a16:creationId xmlns:a16="http://schemas.microsoft.com/office/drawing/2014/main" id="{9251CD25-4151-4227-8057-464451DD21A6}"/>
+                <a16:creationId xmlns:a16="http://schemas.microsoft.com/office/drawing/2014/main" id="{92C2BCF8-3ECE-453D-BCAD-E1A1296CCAC4}"/>
               </a:ext>
             </a:extLst>
           </p:cNvPr>
@@ -14924,7 +15684,7 @@
           <p:cNvPr id="7" name="">
             <a:extLst xmlns:a="http://schemas.openxmlformats.org/drawingml/2006/main">
               <a:ext uri="{FF2B5EF4-FFF2-40B4-BE49-F238E27FC236}">
-                <a16:creationId xmlns:a16="http://schemas.microsoft.com/office/drawing/2014/main" id="{9A199F01-433A-432A-A1F7-4883D47DFAC0}"/>
+                <a16:creationId xmlns:a16="http://schemas.microsoft.com/office/drawing/2014/main" id="{A299D1C5-1EB5-442B-AB48-047DFE0D2858}"/>
               </a:ext>
             </a:extLst>
           </p:cNvPr>
@@ -14981,7 +15741,7 @@
           <p:cNvPr id="8" name="">
             <a:extLst xmlns:a="http://schemas.openxmlformats.org/drawingml/2006/main">
               <a:ext uri="{FF2B5EF4-FFF2-40B4-BE49-F238E27FC236}">
-                <a16:creationId xmlns:a16="http://schemas.microsoft.com/office/drawing/2014/main" id="{B5A133D5-FF8B-411E-9194-C1E12876D7B3}"/>
+                <a16:creationId xmlns:a16="http://schemas.microsoft.com/office/drawing/2014/main" id="{1899DD66-490D-4928-A16F-8A44F0CB72AE}"/>
               </a:ext>
             </a:extLst>
           </p:cNvPr>
@@ -15038,7 +15798,7 @@
           <p:cNvPr id="9" name="">
             <a:extLst xmlns:a="http://schemas.openxmlformats.org/drawingml/2006/main">
               <a:ext uri="{FF2B5EF4-FFF2-40B4-BE49-F238E27FC236}">
-                <a16:creationId xmlns:a16="http://schemas.microsoft.com/office/drawing/2014/main" id="{F609B767-28E1-427E-9CE4-FDBF64604A24}"/>
+                <a16:creationId xmlns:a16="http://schemas.microsoft.com/office/drawing/2014/main" id="{CACE77FC-B22A-488D-99B6-329468000F71}"/>
               </a:ext>
             </a:extLst>
           </p:cNvPr>
@@ -15095,7 +15855,7 @@
           <p:cNvPr id="10" name="">
             <a:extLst xmlns:a="http://schemas.openxmlformats.org/drawingml/2006/main">
               <a:ext uri="{FF2B5EF4-FFF2-40B4-BE49-F238E27FC236}">
-                <a16:creationId xmlns:a16="http://schemas.microsoft.com/office/drawing/2014/main" id="{2AAC0068-B699-4108-8406-83106AC72ADB}"/>
+                <a16:creationId xmlns:a16="http://schemas.microsoft.com/office/drawing/2014/main" id="{B0B60E1A-0862-4E5F-91C6-F01832E7CC29}"/>
               </a:ext>
             </a:extLst>
           </p:cNvPr>
@@ -15152,7 +15912,7 @@
           <p:cNvPr id="11" name="">
             <a:extLst xmlns:a="http://schemas.openxmlformats.org/drawingml/2006/main">
               <a:ext uri="{FF2B5EF4-FFF2-40B4-BE49-F238E27FC236}">
-                <a16:creationId xmlns:a16="http://schemas.microsoft.com/office/drawing/2014/main" id="{7324C8C7-E0EF-473D-9FA6-4E3CEE190FC3}"/>
+                <a16:creationId xmlns:a16="http://schemas.microsoft.com/office/drawing/2014/main" id="{03B3DB78-1242-461A-9742-55C2C5BEE5A1}"/>
               </a:ext>
             </a:extLst>
           </p:cNvPr>
@@ -15209,7 +15969,7 @@
           <p:cNvPr id="12" name="">
             <a:extLst xmlns:a="http://schemas.openxmlformats.org/drawingml/2006/main">
               <a:ext uri="{FF2B5EF4-FFF2-40B4-BE49-F238E27FC236}">
-                <a16:creationId xmlns:a16="http://schemas.microsoft.com/office/drawing/2014/main" id="{4E15B3E0-265C-4FE1-A958-657243E96CF3}"/>
+                <a16:creationId xmlns:a16="http://schemas.microsoft.com/office/drawing/2014/main" id="{735B1A3D-97C2-471F-A8DD-70F56CC92CAD}"/>
               </a:ext>
             </a:extLst>
           </p:cNvPr>
@@ -15266,7 +16026,7 @@
           <p:cNvPr id="13" name="">
             <a:extLst xmlns:a="http://schemas.openxmlformats.org/drawingml/2006/main">
               <a:ext uri="{FF2B5EF4-FFF2-40B4-BE49-F238E27FC236}">
-                <a16:creationId xmlns:a16="http://schemas.microsoft.com/office/drawing/2014/main" id="{7F71B6BB-905F-422C-9A06-19C2D932D1A4}"/>
+                <a16:creationId xmlns:a16="http://schemas.microsoft.com/office/drawing/2014/main" id="{D23A90D1-5C9E-449F-A92A-84A6ED3752D8}"/>
               </a:ext>
             </a:extLst>
           </p:cNvPr>
@@ -15346,7 +16106,7 @@
           <p:cNvPr id="14" name="">
             <a:extLst xmlns:a="http://schemas.openxmlformats.org/drawingml/2006/main">
               <a:ext uri="{FF2B5EF4-FFF2-40B4-BE49-F238E27FC236}">
-                <a16:creationId xmlns:a16="http://schemas.microsoft.com/office/drawing/2014/main" id="{375F530C-F5E7-4A9B-8ECF-30D3B29D1ADB}"/>
+                <a16:creationId xmlns:a16="http://schemas.microsoft.com/office/drawing/2014/main" id="{68E07515-963F-4C37-8A85-243B2AF00D0F}"/>
               </a:ext>
             </a:extLst>
           </p:cNvPr>
@@ -15426,7 +16186,7 @@
           <p:cNvPr id="15" name="">
             <a:extLst xmlns:a="http://schemas.openxmlformats.org/drawingml/2006/main">
               <a:ext uri="{FF2B5EF4-FFF2-40B4-BE49-F238E27FC236}">
-                <a16:creationId xmlns:a16="http://schemas.microsoft.com/office/drawing/2014/main" id="{DEBDCB89-99F9-4437-AE1E-A5C6365E9A47}"/>
+                <a16:creationId xmlns:a16="http://schemas.microsoft.com/office/drawing/2014/main" id="{1DB1B6AD-8E47-42FD-8531-065D4991EB53}"/>
               </a:ext>
             </a:extLst>
           </p:cNvPr>
@@ -15483,7 +16243,7 @@
           <p:cNvPr id="16" name="">
             <a:extLst xmlns:a="http://schemas.openxmlformats.org/drawingml/2006/main">
               <a:ext uri="{FF2B5EF4-FFF2-40B4-BE49-F238E27FC236}">
-                <a16:creationId xmlns:a16="http://schemas.microsoft.com/office/drawing/2014/main" id="{3312886A-E7C2-4F3D-B9B5-CA633A9464A1}"/>
+                <a16:creationId xmlns:a16="http://schemas.microsoft.com/office/drawing/2014/main" id="{872E9CED-55A0-4759-B5DD-D47E96D3C6E2}"/>
               </a:ext>
             </a:extLst>
           </p:cNvPr>
@@ -15540,7 +16300,7 @@
           <p:cNvPr id="17" name="">
             <a:extLst xmlns:a="http://schemas.openxmlformats.org/drawingml/2006/main">
               <a:ext uri="{FF2B5EF4-FFF2-40B4-BE49-F238E27FC236}">
-                <a16:creationId xmlns:a16="http://schemas.microsoft.com/office/drawing/2014/main" id="{89BADC7B-4BD4-446A-BD59-022734776BE1}"/>
+                <a16:creationId xmlns:a16="http://schemas.microsoft.com/office/drawing/2014/main" id="{6FDD33E7-15D9-44C5-AB24-9664C274EFF9}"/>
               </a:ext>
             </a:extLst>
           </p:cNvPr>
@@ -15597,7 +16357,7 @@
           <p:cNvPr id="18" name="">
             <a:extLst xmlns:a="http://schemas.openxmlformats.org/drawingml/2006/main">
               <a:ext uri="{FF2B5EF4-FFF2-40B4-BE49-F238E27FC236}">
-                <a16:creationId xmlns:a16="http://schemas.microsoft.com/office/drawing/2014/main" id="{EBC02011-F726-4278-87CB-D4861C869066}"/>
+                <a16:creationId xmlns:a16="http://schemas.microsoft.com/office/drawing/2014/main" id="{91F14600-F85E-4AC2-BBB8-B14749B4C980}"/>
               </a:ext>
             </a:extLst>
           </p:cNvPr>
@@ -15654,7 +16414,7 @@
           <p:cNvPr id="19" name="">
             <a:extLst xmlns:a="http://schemas.openxmlformats.org/drawingml/2006/main">
               <a:ext uri="{FF2B5EF4-FFF2-40B4-BE49-F238E27FC236}">
-                <a16:creationId xmlns:a16="http://schemas.microsoft.com/office/drawing/2014/main" id="{BF3426D2-CA13-4D36-B9F3-AD1404C9342A}"/>
+                <a16:creationId xmlns:a16="http://schemas.microsoft.com/office/drawing/2014/main" id="{A2E30C1C-BB3E-4DB5-B3ED-468C1D884ADB}"/>
               </a:ext>
             </a:extLst>
           </p:cNvPr>
@@ -15711,7 +16471,7 @@
           <p:cNvPr id="20" name="">
             <a:extLst xmlns:a="http://schemas.openxmlformats.org/drawingml/2006/main">
               <a:ext uri="{FF2B5EF4-FFF2-40B4-BE49-F238E27FC236}">
-                <a16:creationId xmlns:a16="http://schemas.microsoft.com/office/drawing/2014/main" id="{B4DC2510-2E5C-475A-A199-5E24C278D48F}"/>
+                <a16:creationId xmlns:a16="http://schemas.microsoft.com/office/drawing/2014/main" id="{06B270CF-7E92-43B6-A1F8-C24D3123C4FD}"/>
               </a:ext>
             </a:extLst>
           </p:cNvPr>
@@ -15768,7 +16528,7 @@
           <p:cNvPr id="21" name="">
             <a:extLst xmlns:a="http://schemas.openxmlformats.org/drawingml/2006/main">
               <a:ext uri="{FF2B5EF4-FFF2-40B4-BE49-F238E27FC236}">
-                <a16:creationId xmlns:a16="http://schemas.microsoft.com/office/drawing/2014/main" id="{13D0779B-A964-4784-A379-2691056D45A6}"/>
+                <a16:creationId xmlns:a16="http://schemas.microsoft.com/office/drawing/2014/main" id="{5CECD013-37D5-4692-A50C-F90729A3ECD4}"/>
               </a:ext>
             </a:extLst>
           </p:cNvPr>
@@ -15825,7 +16585,7 @@
           <p:cNvPr id="22" name="">
             <a:extLst xmlns:a="http://schemas.openxmlformats.org/drawingml/2006/main">
               <a:ext uri="{FF2B5EF4-FFF2-40B4-BE49-F238E27FC236}">
-                <a16:creationId xmlns:a16="http://schemas.microsoft.com/office/drawing/2014/main" id="{169A71CB-3007-4188-BB0C-069A8670392E}"/>
+                <a16:creationId xmlns:a16="http://schemas.microsoft.com/office/drawing/2014/main" id="{D7A1CF97-6D85-460D-BEA7-F366979D198F}"/>
               </a:ext>
             </a:extLst>
           </p:cNvPr>
@@ -15882,7 +16642,7 @@
           <p:cNvPr id="23" name="">
             <a:extLst xmlns:a="http://schemas.openxmlformats.org/drawingml/2006/main">
               <a:ext uri="{FF2B5EF4-FFF2-40B4-BE49-F238E27FC236}">
-                <a16:creationId xmlns:a16="http://schemas.microsoft.com/office/drawing/2014/main" id="{72BA7BCB-43FD-4D75-9838-8BB4939029BD}"/>
+                <a16:creationId xmlns:a16="http://schemas.microsoft.com/office/drawing/2014/main" id="{8CF3809E-15E9-4576-8F04-69A23BE8AE21}"/>
               </a:ext>
             </a:extLst>
           </p:cNvPr>
@@ -15939,7 +16699,7 @@
           <p:cNvPr id="24" name="">
             <a:extLst xmlns:a="http://schemas.openxmlformats.org/drawingml/2006/main">
               <a:ext uri="{FF2B5EF4-FFF2-40B4-BE49-F238E27FC236}">
-                <a16:creationId xmlns:a16="http://schemas.microsoft.com/office/drawing/2014/main" id="{6CC3BEC3-ED8E-4FA3-A176-2321CA3C5FBF}"/>
+                <a16:creationId xmlns:a16="http://schemas.microsoft.com/office/drawing/2014/main" id="{3311DEEB-68F8-44A6-9093-E28E3F559D90}"/>
               </a:ext>
             </a:extLst>
           </p:cNvPr>
@@ -15996,7 +16756,7 @@
           <p:cNvPr id="25" name="">
             <a:extLst xmlns:a="http://schemas.openxmlformats.org/drawingml/2006/main">
               <a:ext uri="{FF2B5EF4-FFF2-40B4-BE49-F238E27FC236}">
-                <a16:creationId xmlns:a16="http://schemas.microsoft.com/office/drawing/2014/main" id="{6416B4C7-1BD2-4B58-A18F-D72D93426985}"/>
+                <a16:creationId xmlns:a16="http://schemas.microsoft.com/office/drawing/2014/main" id="{E89C5D3C-DBDD-47B0-939B-8A55968D0936}"/>
               </a:ext>
             </a:extLst>
           </p:cNvPr>
@@ -16076,7 +16836,7 @@
           <p:cNvPr id="26" name="">
             <a:extLst xmlns:a="http://schemas.openxmlformats.org/drawingml/2006/main">
               <a:ext uri="{FF2B5EF4-FFF2-40B4-BE49-F238E27FC236}">
-                <a16:creationId xmlns:a16="http://schemas.microsoft.com/office/drawing/2014/main" id="{575E5DC8-ACF2-401E-9791-2590FC7D2328}"/>
+                <a16:creationId xmlns:a16="http://schemas.microsoft.com/office/drawing/2014/main" id="{BF8BDB2C-96E1-4BE4-B708-70E47E0318D3}"/>
               </a:ext>
             </a:extLst>
           </p:cNvPr>
@@ -16133,7 +16893,7 @@
           <p:cNvPr id="27" name="">
             <a:extLst xmlns:a="http://schemas.openxmlformats.org/drawingml/2006/main">
               <a:ext uri="{FF2B5EF4-FFF2-40B4-BE49-F238E27FC236}">
-                <a16:creationId xmlns:a16="http://schemas.microsoft.com/office/drawing/2014/main" id="{63D1FD5B-E6E3-49FC-8264-B39080422F6C}"/>
+                <a16:creationId xmlns:a16="http://schemas.microsoft.com/office/drawing/2014/main" id="{ED3158A7-7214-41AF-A9A8-83C4A1AFE862}"/>
               </a:ext>
             </a:extLst>
           </p:cNvPr>
@@ -16164,7 +16924,7 @@
           <p:cNvPr id="28" name="">
             <a:extLst xmlns:a="http://schemas.openxmlformats.org/drawingml/2006/main">
               <a:ext uri="{FF2B5EF4-FFF2-40B4-BE49-F238E27FC236}">
-                <a16:creationId xmlns:a16="http://schemas.microsoft.com/office/drawing/2014/main" id="{85B83C26-A309-48A4-A783-97B114686CDA}"/>
+                <a16:creationId xmlns:a16="http://schemas.microsoft.com/office/drawing/2014/main" id="{F66D212A-F02A-4C5B-AE12-63FF9E32E4BF}"/>
               </a:ext>
             </a:extLst>
           </p:cNvPr>
@@ -16221,7 +16981,7 @@
           <p:cNvPr id="29" name="">
             <a:extLst xmlns:a="http://schemas.openxmlformats.org/drawingml/2006/main">
               <a:ext uri="{FF2B5EF4-FFF2-40B4-BE49-F238E27FC236}">
-                <a16:creationId xmlns:a16="http://schemas.microsoft.com/office/drawing/2014/main" id="{D96B84B9-78EA-41A4-83DF-AE47CF674688}"/>
+                <a16:creationId xmlns:a16="http://schemas.microsoft.com/office/drawing/2014/main" id="{3A30311F-9CC0-4D60-86F6-FAB08E29D814}"/>
               </a:ext>
             </a:extLst>
           </p:cNvPr>
@@ -16278,7 +17038,7 @@
           <p:cNvPr id="30" name="">
             <a:extLst xmlns:a="http://schemas.openxmlformats.org/drawingml/2006/main">
               <a:ext uri="{FF2B5EF4-FFF2-40B4-BE49-F238E27FC236}">
-                <a16:creationId xmlns:a16="http://schemas.microsoft.com/office/drawing/2014/main" id="{24BCA73E-49A0-4ED4-8599-7A4070D60CF8}"/>
+                <a16:creationId xmlns:a16="http://schemas.microsoft.com/office/drawing/2014/main" id="{41E063D2-19E1-4E7E-9129-CDB9DF1B5165}"/>
               </a:ext>
             </a:extLst>
           </p:cNvPr>
@@ -16335,7 +17095,7 @@
           <p:cNvPr id="31" name="">
             <a:extLst xmlns:a="http://schemas.openxmlformats.org/drawingml/2006/main">
               <a:ext uri="{FF2B5EF4-FFF2-40B4-BE49-F238E27FC236}">
-                <a16:creationId xmlns:a16="http://schemas.microsoft.com/office/drawing/2014/main" id="{625CB69D-C4B6-44A4-8357-7A9BA904510A}"/>
+                <a16:creationId xmlns:a16="http://schemas.microsoft.com/office/drawing/2014/main" id="{EABF0520-48BB-4430-A037-813A84B7C99F}"/>
               </a:ext>
             </a:extLst>
           </p:cNvPr>
@@ -16392,7 +17152,7 @@
           <p:cNvPr id="32" name="">
             <a:extLst xmlns:a="http://schemas.openxmlformats.org/drawingml/2006/main">
               <a:ext uri="{FF2B5EF4-FFF2-40B4-BE49-F238E27FC236}">
-                <a16:creationId xmlns:a16="http://schemas.microsoft.com/office/drawing/2014/main" id="{8D5C101C-275C-46AD-AC91-74BCEF9655A4}"/>
+                <a16:creationId xmlns:a16="http://schemas.microsoft.com/office/drawing/2014/main" id="{E50385CA-CFFC-4C10-928E-A659993B79F8}"/>
               </a:ext>
             </a:extLst>
           </p:cNvPr>
@@ -16449,7 +17209,7 @@
           <p:cNvPr id="33" name="">
             <a:extLst xmlns:a="http://schemas.openxmlformats.org/drawingml/2006/main">
               <a:ext uri="{FF2B5EF4-FFF2-40B4-BE49-F238E27FC236}">
-                <a16:creationId xmlns:a16="http://schemas.microsoft.com/office/drawing/2014/main" id="{AC509E85-950E-4951-856B-9DC622A6BC29}"/>
+                <a16:creationId xmlns:a16="http://schemas.microsoft.com/office/drawing/2014/main" id="{30F990E0-6DAB-4D7E-858A-622064F7B1DA}"/>
               </a:ext>
             </a:extLst>
           </p:cNvPr>
@@ -16506,7 +17266,7 @@
           <p:cNvPr id="34" name="">
             <a:extLst xmlns:a="http://schemas.openxmlformats.org/drawingml/2006/main">
               <a:ext uri="{FF2B5EF4-FFF2-40B4-BE49-F238E27FC236}">
-                <a16:creationId xmlns:a16="http://schemas.microsoft.com/office/drawing/2014/main" id="{CCEA33D5-4217-4F1D-AC47-B816B1F24FEE}"/>
+                <a16:creationId xmlns:a16="http://schemas.microsoft.com/office/drawing/2014/main" id="{1A048B50-A69C-4F30-B31F-489B4853DFBA}"/>
               </a:ext>
             </a:extLst>
           </p:cNvPr>
@@ -16563,7 +17323,7 @@
           <p:cNvPr id="35" name="">
             <a:extLst xmlns:a="http://schemas.openxmlformats.org/drawingml/2006/main">
               <a:ext uri="{FF2B5EF4-FFF2-40B4-BE49-F238E27FC236}">
-                <a16:creationId xmlns:a16="http://schemas.microsoft.com/office/drawing/2014/main" id="{5873E5F4-F3DB-4DDA-AFFE-A526100A6ED1}"/>
+                <a16:creationId xmlns:a16="http://schemas.microsoft.com/office/drawing/2014/main" id="{4BC1890C-2C33-48D1-8D13-B211ED270A19}"/>
               </a:ext>
             </a:extLst>
           </p:cNvPr>
@@ -16620,7 +17380,7 @@
           <p:cNvPr id="36" name="">
             <a:extLst xmlns:a="http://schemas.openxmlformats.org/drawingml/2006/main">
               <a:ext uri="{FF2B5EF4-FFF2-40B4-BE49-F238E27FC236}">
-                <a16:creationId xmlns:a16="http://schemas.microsoft.com/office/drawing/2014/main" id="{3AB4D426-CB9F-40D9-95EA-B73499207F00}"/>
+                <a16:creationId xmlns:a16="http://schemas.microsoft.com/office/drawing/2014/main" id="{CCF65E55-1865-449B-B1EB-FDAF6FAD8431}"/>
               </a:ext>
             </a:extLst>
           </p:cNvPr>
@@ -16677,7 +17437,7 @@
           <p:cNvPr id="37" name="">
             <a:extLst xmlns:a="http://schemas.openxmlformats.org/drawingml/2006/main">
               <a:ext uri="{FF2B5EF4-FFF2-40B4-BE49-F238E27FC236}">
-                <a16:creationId xmlns:a16="http://schemas.microsoft.com/office/drawing/2014/main" id="{F04499E7-AE85-44D7-BF26-A367329FC117}"/>
+                <a16:creationId xmlns:a16="http://schemas.microsoft.com/office/drawing/2014/main" id="{E2068AD0-9795-4FBF-B2E9-991E0570FA0F}"/>
               </a:ext>
             </a:extLst>
           </p:cNvPr>
@@ -16708,7 +17468,7 @@
           <p:cNvPr id="38" name="">
             <a:extLst xmlns:a="http://schemas.openxmlformats.org/drawingml/2006/main">
               <a:ext uri="{FF2B5EF4-FFF2-40B4-BE49-F238E27FC236}">
-                <a16:creationId xmlns:a16="http://schemas.microsoft.com/office/drawing/2014/main" id="{25F40C28-DE15-4DFD-AAB2-B1AC67FED8A6}"/>
+                <a16:creationId xmlns:a16="http://schemas.microsoft.com/office/drawing/2014/main" id="{89DFB629-2BF8-4492-8B1D-7CD166252C10}"/>
               </a:ext>
             </a:extLst>
           </p:cNvPr>
@@ -16765,7 +17525,7 @@
           <p:cNvPr id="39" name="">
             <a:extLst xmlns:a="http://schemas.openxmlformats.org/drawingml/2006/main">
               <a:ext uri="{FF2B5EF4-FFF2-40B4-BE49-F238E27FC236}">
-                <a16:creationId xmlns:a16="http://schemas.microsoft.com/office/drawing/2014/main" id="{4CECBBCE-5E68-4C94-9A26-F290BA5F358C}"/>
+                <a16:creationId xmlns:a16="http://schemas.microsoft.com/office/drawing/2014/main" id="{90BF6A74-C0CF-4FFD-831B-657B3BD16A29}"/>
               </a:ext>
             </a:extLst>
           </p:cNvPr>
@@ -16822,7 +17582,7 @@
           <p:cNvPr id="40" name="">
             <a:extLst xmlns:a="http://schemas.openxmlformats.org/drawingml/2006/main">
               <a:ext uri="{FF2B5EF4-FFF2-40B4-BE49-F238E27FC236}">
-                <a16:creationId xmlns:a16="http://schemas.microsoft.com/office/drawing/2014/main" id="{9819CC44-C9D5-41AF-98C2-4669900967F0}"/>
+                <a16:creationId xmlns:a16="http://schemas.microsoft.com/office/drawing/2014/main" id="{C9B5BFAC-4A69-4BAD-A1CC-093A5F1727D9}"/>
               </a:ext>
             </a:extLst>
           </p:cNvPr>
@@ -16879,7 +17639,7 @@
           <p:cNvPr id="41" name="">
             <a:extLst xmlns:a="http://schemas.openxmlformats.org/drawingml/2006/main">
               <a:ext uri="{FF2B5EF4-FFF2-40B4-BE49-F238E27FC236}">
-                <a16:creationId xmlns:a16="http://schemas.microsoft.com/office/drawing/2014/main" id="{B16C8F1F-210F-4598-930A-D6FA95CDB475}"/>
+                <a16:creationId xmlns:a16="http://schemas.microsoft.com/office/drawing/2014/main" id="{BC0237BD-3079-49DB-9374-67D187E327C3}"/>
               </a:ext>
             </a:extLst>
           </p:cNvPr>
@@ -16936,7 +17696,7 @@
           <p:cNvPr id="42" name="">
             <a:extLst xmlns:a="http://schemas.openxmlformats.org/drawingml/2006/main">
               <a:ext uri="{FF2B5EF4-FFF2-40B4-BE49-F238E27FC236}">
-                <a16:creationId xmlns:a16="http://schemas.microsoft.com/office/drawing/2014/main" id="{96AE3BC4-DA9B-4B0C-9384-4BF2C687FE9D}"/>
+                <a16:creationId xmlns:a16="http://schemas.microsoft.com/office/drawing/2014/main" id="{B16BFE70-802F-48C1-912C-987E6125F13F}"/>
               </a:ext>
             </a:extLst>
           </p:cNvPr>
@@ -16993,7 +17753,7 @@
           <p:cNvPr id="43" name="">
             <a:extLst xmlns:a="http://schemas.openxmlformats.org/drawingml/2006/main">
               <a:ext uri="{FF2B5EF4-FFF2-40B4-BE49-F238E27FC236}">
-                <a16:creationId xmlns:a16="http://schemas.microsoft.com/office/drawing/2014/main" id="{0BCD2646-17DC-40E8-87F7-A5C8ED7E964D}"/>
+                <a16:creationId xmlns:a16="http://schemas.microsoft.com/office/drawing/2014/main" id="{EF4731A2-A041-4EBB-A652-003B3AD68B17}"/>
               </a:ext>
             </a:extLst>
           </p:cNvPr>
@@ -17050,7 +17810,7 @@
           <p:cNvPr id="44" name="">
             <a:extLst xmlns:a="http://schemas.openxmlformats.org/drawingml/2006/main">
               <a:ext uri="{FF2B5EF4-FFF2-40B4-BE49-F238E27FC236}">
-                <a16:creationId xmlns:a16="http://schemas.microsoft.com/office/drawing/2014/main" id="{5A7A73E9-4F5C-4347-AA43-2CEFA352CC39}"/>
+                <a16:creationId xmlns:a16="http://schemas.microsoft.com/office/drawing/2014/main" id="{52392E1D-D304-4154-82CC-27DCEF0940F5}"/>
               </a:ext>
             </a:extLst>
           </p:cNvPr>
@@ -17105,7 +17865,7 @@
     </p:spTree>
     <p:extLst>
       <p:ext uri="{BB962C8B-B14F-4D97-AF65-F5344CB8AC3E}">
-        <p14:creationId xmlns:p14="http://schemas.microsoft.com/office/powerpoint/2010/main" val="217902108"/>
+        <p14:creationId xmlns:p14="http://schemas.microsoft.com/office/powerpoint/2010/main" val="1682141702"/>
       </p:ext>
     </p:extLst>
   </p:cSld>
@@ -17136,7 +17896,7 @@
           <p:cNvPr id="21" name="">
             <a:extLst xmlns:a="http://schemas.openxmlformats.org/drawingml/2006/main">
               <a:ext uri="{FF2B5EF4-FFF2-40B4-BE49-F238E27FC236}">
-                <a16:creationId xmlns:a16="http://schemas.microsoft.com/office/drawing/2014/main" id="{94E3084F-44C8-46FF-8046-ECF1F8E8CF9C}"/>
+                <a16:creationId xmlns:a16="http://schemas.microsoft.com/office/drawing/2014/main" id="{93DBFFB9-25DD-4F78-B41B-D8A98AA2C98A}"/>
               </a:ext>
             </a:extLst>
           </p:cNvPr>
@@ -17193,7 +17953,7 @@
           <p:cNvPr id="2" name="">
             <a:extLst xmlns:a="http://schemas.openxmlformats.org/drawingml/2006/main">
               <a:ext uri="{FF2B5EF4-FFF2-40B4-BE49-F238E27FC236}">
-                <a16:creationId xmlns:a16="http://schemas.microsoft.com/office/drawing/2014/main" id="{219B7024-1FE6-4E43-AA16-3040B6BACD65}"/>
+                <a16:creationId xmlns:a16="http://schemas.microsoft.com/office/drawing/2014/main" id="{E6F17E68-55FC-40AC-9AE4-2BDE8529BEDC}"/>
               </a:ext>
             </a:extLst>
           </p:cNvPr>
@@ -17224,7 +17984,7 @@
           <p:cNvPr id="3" name="">
             <a:extLst xmlns:a="http://schemas.openxmlformats.org/drawingml/2006/main">
               <a:ext uri="{FF2B5EF4-FFF2-40B4-BE49-F238E27FC236}">
-                <a16:creationId xmlns:a16="http://schemas.microsoft.com/office/drawing/2014/main" id="{A9481D04-0E19-448E-82CE-5CC52A31A686}"/>
+                <a16:creationId xmlns:a16="http://schemas.microsoft.com/office/drawing/2014/main" id="{079F1DFB-EB7B-4948-92A0-3A50E378B1CF}"/>
               </a:ext>
             </a:extLst>
           </p:cNvPr>
@@ -17281,7 +18041,7 @@
           <p:cNvPr id="4" name="">
             <a:extLst xmlns:a="http://schemas.openxmlformats.org/drawingml/2006/main">
               <a:ext uri="{FF2B5EF4-FFF2-40B4-BE49-F238E27FC236}">
-                <a16:creationId xmlns:a16="http://schemas.microsoft.com/office/drawing/2014/main" id="{D84A7862-5946-4BE1-AC9C-955C0B27C0C5}"/>
+                <a16:creationId xmlns:a16="http://schemas.microsoft.com/office/drawing/2014/main" id="{10AED6EB-006D-4B92-AB9D-5A761AA49C6C}"/>
               </a:ext>
             </a:extLst>
           </p:cNvPr>
@@ -17312,7 +18072,7 @@
           <p:cNvPr id="5" name="">
             <a:extLst xmlns:a="http://schemas.openxmlformats.org/drawingml/2006/main">
               <a:ext uri="{FF2B5EF4-FFF2-40B4-BE49-F238E27FC236}">
-                <a16:creationId xmlns:a16="http://schemas.microsoft.com/office/drawing/2014/main" id="{F5F06D5F-8528-4841-B6BE-4803A042236B}"/>
+                <a16:creationId xmlns:a16="http://schemas.microsoft.com/office/drawing/2014/main" id="{30F5FFA6-D858-4382-A96A-AC7D17BC083D}"/>
               </a:ext>
             </a:extLst>
           </p:cNvPr>
@@ -17343,7 +18103,7 @@
           <p:cNvPr id="6" name="">
             <a:extLst xmlns:a="http://schemas.openxmlformats.org/drawingml/2006/main">
               <a:ext uri="{FF2B5EF4-FFF2-40B4-BE49-F238E27FC236}">
-                <a16:creationId xmlns:a16="http://schemas.microsoft.com/office/drawing/2014/main" id="{14C2C506-735B-4AC0-9459-FCC9A898F041}"/>
+                <a16:creationId xmlns:a16="http://schemas.microsoft.com/office/drawing/2014/main" id="{2734C97F-0A49-4522-8F12-764E9EAB53E4}"/>
               </a:ext>
             </a:extLst>
           </p:cNvPr>
@@ -17740,7 +18500,7 @@
           <p:cNvPr id="7" name="">
             <a:extLst xmlns:a="http://schemas.openxmlformats.org/drawingml/2006/main">
               <a:ext uri="{FF2B5EF4-FFF2-40B4-BE49-F238E27FC236}">
-                <a16:creationId xmlns:a16="http://schemas.microsoft.com/office/drawing/2014/main" id="{4D98E2D3-0352-4B5C-889A-876B22F85AFE}"/>
+                <a16:creationId xmlns:a16="http://schemas.microsoft.com/office/drawing/2014/main" id="{C1CB306A-585F-471D-92F2-83C44A2C4027}"/>
               </a:ext>
             </a:extLst>
           </p:cNvPr>
@@ -17771,7 +18531,7 @@
           <p:cNvPr id="8" name="">
             <a:extLst xmlns:a="http://schemas.openxmlformats.org/drawingml/2006/main">
               <a:ext uri="{FF2B5EF4-FFF2-40B4-BE49-F238E27FC236}">
-                <a16:creationId xmlns:a16="http://schemas.microsoft.com/office/drawing/2014/main" id="{038B3187-1C01-4B2E-B0B8-2A42BDFF3274}"/>
+                <a16:creationId xmlns:a16="http://schemas.microsoft.com/office/drawing/2014/main" id="{0A8A2AC5-BC2C-4599-AE99-C3C8D4EB26F3}"/>
               </a:ext>
             </a:extLst>
           </p:cNvPr>
@@ -17828,7 +18588,7 @@
           <p:cNvPr id="9" name="">
             <a:extLst xmlns:a="http://schemas.openxmlformats.org/drawingml/2006/main">
               <a:ext uri="{FF2B5EF4-FFF2-40B4-BE49-F238E27FC236}">
-                <a16:creationId xmlns:a16="http://schemas.microsoft.com/office/drawing/2014/main" id="{15648BF9-9157-4477-8FF7-E9EC9F19248A}"/>
+                <a16:creationId xmlns:a16="http://schemas.microsoft.com/office/drawing/2014/main" id="{69FA3238-D1C0-41FD-97E0-94640A567986}"/>
               </a:ext>
             </a:extLst>
           </p:cNvPr>
@@ -17885,7 +18645,7 @@
           <p:cNvPr id="10" name="">
             <a:extLst xmlns:a="http://schemas.openxmlformats.org/drawingml/2006/main">
               <a:ext uri="{FF2B5EF4-FFF2-40B4-BE49-F238E27FC236}">
-                <a16:creationId xmlns:a16="http://schemas.microsoft.com/office/drawing/2014/main" id="{AAEB13EE-F946-48F6-87D5-6A5D791C207C}"/>
+                <a16:creationId xmlns:a16="http://schemas.microsoft.com/office/drawing/2014/main" id="{9055AD75-9D62-4B36-8EE3-8E934CE27D58}"/>
               </a:ext>
             </a:extLst>
           </p:cNvPr>
@@ -17965,7 +18725,7 @@
           <p:cNvPr id="11" name="">
             <a:extLst xmlns:a="http://schemas.openxmlformats.org/drawingml/2006/main">
               <a:ext uri="{FF2B5EF4-FFF2-40B4-BE49-F238E27FC236}">
-                <a16:creationId xmlns:a16="http://schemas.microsoft.com/office/drawing/2014/main" id="{C5C1E080-49FC-4269-AFB1-A6073A6727DA}"/>
+                <a16:creationId xmlns:a16="http://schemas.microsoft.com/office/drawing/2014/main" id="{6038EB56-4909-4355-8B42-4F7CFDA5F0C9}"/>
               </a:ext>
             </a:extLst>
           </p:cNvPr>
@@ -18022,7 +18782,7 @@
           <p:cNvPr id="12" name="">
             <a:extLst xmlns:a="http://schemas.openxmlformats.org/drawingml/2006/main">
               <a:ext uri="{FF2B5EF4-FFF2-40B4-BE49-F238E27FC236}">
-                <a16:creationId xmlns:a16="http://schemas.microsoft.com/office/drawing/2014/main" id="{9CF63304-22B3-444B-8B8F-10BF7BA72FAD}"/>
+                <a16:creationId xmlns:a16="http://schemas.microsoft.com/office/drawing/2014/main" id="{24649B25-281C-415B-8AA2-CA7D2FC276B3}"/>
               </a:ext>
             </a:extLst>
           </p:cNvPr>
@@ -18079,7 +18839,7 @@
           <p:cNvPr id="13" name="">
             <a:extLst xmlns:a="http://schemas.openxmlformats.org/drawingml/2006/main">
               <a:ext uri="{FF2B5EF4-FFF2-40B4-BE49-F238E27FC236}">
-                <a16:creationId xmlns:a16="http://schemas.microsoft.com/office/drawing/2014/main" id="{5D2E44A5-8FA9-49C4-8648-4318CDA07F2D}"/>
+                <a16:creationId xmlns:a16="http://schemas.microsoft.com/office/drawing/2014/main" id="{575A579A-DA3E-422C-A356-B8D97AD89DEB}"/>
               </a:ext>
             </a:extLst>
           </p:cNvPr>
@@ -18136,7 +18896,7 @@
           <p:cNvPr id="14" name="">
             <a:extLst xmlns:a="http://schemas.openxmlformats.org/drawingml/2006/main">
               <a:ext uri="{FF2B5EF4-FFF2-40B4-BE49-F238E27FC236}">
-                <a16:creationId xmlns:a16="http://schemas.microsoft.com/office/drawing/2014/main" id="{DD20F6D4-8477-4943-B6CC-15E3DB31037A}"/>
+                <a16:creationId xmlns:a16="http://schemas.microsoft.com/office/drawing/2014/main" id="{2238D76F-5B9A-4C01-8155-7E88E67B8422}"/>
               </a:ext>
             </a:extLst>
           </p:cNvPr>
@@ -18193,7 +18953,7 @@
           <p:cNvPr id="15" name="">
             <a:extLst xmlns:a="http://schemas.openxmlformats.org/drawingml/2006/main">
               <a:ext uri="{FF2B5EF4-FFF2-40B4-BE49-F238E27FC236}">
-                <a16:creationId xmlns:a16="http://schemas.microsoft.com/office/drawing/2014/main" id="{A97ABA20-0CB3-4EB1-8E34-A7C87D0118C8}"/>
+                <a16:creationId xmlns:a16="http://schemas.microsoft.com/office/drawing/2014/main" id="{D99C13E7-9BFC-4B7D-99DC-65854F8A969A}"/>
               </a:ext>
             </a:extLst>
           </p:cNvPr>
@@ -18250,7 +19010,7 @@
           <p:cNvPr id="16" name="">
             <a:extLst xmlns:a="http://schemas.openxmlformats.org/drawingml/2006/main">
               <a:ext uri="{FF2B5EF4-FFF2-40B4-BE49-F238E27FC236}">
-                <a16:creationId xmlns:a16="http://schemas.microsoft.com/office/drawing/2014/main" id="{B33CAC12-776B-490B-9DFE-058711F7527D}"/>
+                <a16:creationId xmlns:a16="http://schemas.microsoft.com/office/drawing/2014/main" id="{4DF6D0E1-0601-4A00-98C1-F2D8D092E2F4}"/>
               </a:ext>
             </a:extLst>
           </p:cNvPr>
@@ -18330,7 +19090,7 @@
           <p:cNvPr id="17" name="">
             <a:extLst xmlns:a="http://schemas.openxmlformats.org/drawingml/2006/main">
               <a:ext uri="{FF2B5EF4-FFF2-40B4-BE49-F238E27FC236}">
-                <a16:creationId xmlns:a16="http://schemas.microsoft.com/office/drawing/2014/main" id="{512CD922-119E-44CD-8151-E997307960C1}"/>
+                <a16:creationId xmlns:a16="http://schemas.microsoft.com/office/drawing/2014/main" id="{24315CEE-EC04-4885-8FA6-709DA3579414}"/>
               </a:ext>
             </a:extLst>
           </p:cNvPr>
@@ -18387,7 +19147,7 @@
           <p:cNvPr id="18" name="">
             <a:extLst xmlns:a="http://schemas.openxmlformats.org/drawingml/2006/main">
               <a:ext uri="{FF2B5EF4-FFF2-40B4-BE49-F238E27FC236}">
-                <a16:creationId xmlns:a16="http://schemas.microsoft.com/office/drawing/2014/main" id="{81E73B4D-6E86-4BEB-A7EC-D76812685229}"/>
+                <a16:creationId xmlns:a16="http://schemas.microsoft.com/office/drawing/2014/main" id="{3A00B33A-FCAA-4ED2-95B8-59F9C66B217F}"/>
               </a:ext>
             </a:extLst>
           </p:cNvPr>
@@ -18444,7 +19204,7 @@
           <p:cNvPr id="19" name="">
             <a:extLst xmlns:a="http://schemas.openxmlformats.org/drawingml/2006/main">
               <a:ext uri="{FF2B5EF4-FFF2-40B4-BE49-F238E27FC236}">
-                <a16:creationId xmlns:a16="http://schemas.microsoft.com/office/drawing/2014/main" id="{7165DBE1-DEBC-491E-A594-EEA1A212F086}"/>
+                <a16:creationId xmlns:a16="http://schemas.microsoft.com/office/drawing/2014/main" id="{A8752CD8-823F-4568-B1AF-3288CF293389}"/>
               </a:ext>
             </a:extLst>
           </p:cNvPr>
@@ -18475,7 +19235,7 @@
           <p:cNvPr id="20" name="">
             <a:extLst xmlns:a="http://schemas.openxmlformats.org/drawingml/2006/main">
               <a:ext uri="{FF2B5EF4-FFF2-40B4-BE49-F238E27FC236}">
-                <a16:creationId xmlns:a16="http://schemas.microsoft.com/office/drawing/2014/main" id="{8D68169B-ACCE-4A39-8D6E-59970989140C}"/>
+                <a16:creationId xmlns:a16="http://schemas.microsoft.com/office/drawing/2014/main" id="{C670DC1D-70D7-49C7-9E1C-98FE863B5D62}"/>
               </a:ext>
             </a:extLst>
           </p:cNvPr>
@@ -18530,7 +19290,7 @@
     </p:spTree>
     <p:extLst>
       <p:ext uri="{BB962C8B-B14F-4D97-AF65-F5344CB8AC3E}">
-        <p14:creationId xmlns:p14="http://schemas.microsoft.com/office/powerpoint/2010/main" val="2091287271"/>
+        <p14:creationId xmlns:p14="http://schemas.microsoft.com/office/powerpoint/2010/main" val="664236210"/>
       </p:ext>
     </p:extLst>
   </p:cSld>
@@ -18561,7 +19321,7 @@
           <p:cNvPr id="24" name="">
             <a:extLst xmlns:a="http://schemas.openxmlformats.org/drawingml/2006/main">
               <a:ext uri="{FF2B5EF4-FFF2-40B4-BE49-F238E27FC236}">
-                <a16:creationId xmlns:a16="http://schemas.microsoft.com/office/drawing/2014/main" id="{34108898-32E2-4F44-9C8E-ADD6A595B4D1}"/>
+                <a16:creationId xmlns:a16="http://schemas.microsoft.com/office/drawing/2014/main" id="{931FBF29-8A9F-47D5-84F9-67FB432EF99C}"/>
               </a:ext>
             </a:extLst>
           </p:cNvPr>
@@ -18618,7 +19378,7 @@
           <p:cNvPr id="2" name="">
             <a:extLst xmlns:a="http://schemas.openxmlformats.org/drawingml/2006/main">
               <a:ext uri="{FF2B5EF4-FFF2-40B4-BE49-F238E27FC236}">
-                <a16:creationId xmlns:a16="http://schemas.microsoft.com/office/drawing/2014/main" id="{B58AB9B2-B29F-4CF7-9425-2F61C4B37D05}"/>
+                <a16:creationId xmlns:a16="http://schemas.microsoft.com/office/drawing/2014/main" id="{F913471F-2D1C-4EA9-9B4E-BDF34A45738A}"/>
               </a:ext>
             </a:extLst>
           </p:cNvPr>
@@ -18649,7 +19409,7 @@
           <p:cNvPr id="3" name="">
             <a:extLst xmlns:a="http://schemas.openxmlformats.org/drawingml/2006/main">
               <a:ext uri="{FF2B5EF4-FFF2-40B4-BE49-F238E27FC236}">
-                <a16:creationId xmlns:a16="http://schemas.microsoft.com/office/drawing/2014/main" id="{E7715E46-5B6C-473F-B522-19D4D6EAD73B}"/>
+                <a16:creationId xmlns:a16="http://schemas.microsoft.com/office/drawing/2014/main" id="{D9490C16-8F5E-4682-924A-19B6512CCACB}"/>
               </a:ext>
             </a:extLst>
           </p:cNvPr>
@@ -18706,7 +19466,7 @@
           <p:cNvPr id="4" name="">
             <a:extLst xmlns:a="http://schemas.openxmlformats.org/drawingml/2006/main">
               <a:ext uri="{FF2B5EF4-FFF2-40B4-BE49-F238E27FC236}">
-                <a16:creationId xmlns:a16="http://schemas.microsoft.com/office/drawing/2014/main" id="{E0706684-D11A-49DF-8248-B84B309842D7}"/>
+                <a16:creationId xmlns:a16="http://schemas.microsoft.com/office/drawing/2014/main" id="{0DEAF6D5-8561-4B7D-97B5-6A7B419F8B15}"/>
               </a:ext>
             </a:extLst>
           </p:cNvPr>
@@ -18763,7 +19523,7 @@
           <p:cNvPr id="5" name="">
             <a:extLst xmlns:a="http://schemas.openxmlformats.org/drawingml/2006/main">
               <a:ext uri="{FF2B5EF4-FFF2-40B4-BE49-F238E27FC236}">
-                <a16:creationId xmlns:a16="http://schemas.microsoft.com/office/drawing/2014/main" id="{9052A9B3-2B74-4BC1-A42D-A0FCF6E12E3A}"/>
+                <a16:creationId xmlns:a16="http://schemas.microsoft.com/office/drawing/2014/main" id="{80BAAF48-BF90-453A-BAFB-40E956AB3FE4}"/>
               </a:ext>
             </a:extLst>
           </p:cNvPr>
@@ -18820,7 +19580,7 @@
           <p:cNvPr id="6" name="">
             <a:extLst xmlns:a="http://schemas.openxmlformats.org/drawingml/2006/main">
               <a:ext uri="{FF2B5EF4-FFF2-40B4-BE49-F238E27FC236}">
-                <a16:creationId xmlns:a16="http://schemas.microsoft.com/office/drawing/2014/main" id="{21A999C6-7641-4BB5-9867-D99F37352013}"/>
+                <a16:creationId xmlns:a16="http://schemas.microsoft.com/office/drawing/2014/main" id="{AB691021-6452-4553-AE82-C7577CBFBF6C}"/>
               </a:ext>
             </a:extLst>
           </p:cNvPr>
@@ -18853,7 +19613,7 @@
           <p:cNvPr id="7" name="">
             <a:extLst xmlns:a="http://schemas.openxmlformats.org/drawingml/2006/main">
               <a:ext uri="{FF2B5EF4-FFF2-40B4-BE49-F238E27FC236}">
-                <a16:creationId xmlns:a16="http://schemas.microsoft.com/office/drawing/2014/main" id="{EB161B12-F42F-412B-A097-04B613BCB925}"/>
+                <a16:creationId xmlns:a16="http://schemas.microsoft.com/office/drawing/2014/main" id="{F9DA47AE-A483-4A36-8FF9-522E4AD8AEE5}"/>
               </a:ext>
             </a:extLst>
           </p:cNvPr>
@@ -18933,7 +19693,7 @@
           <p:cNvPr id="8" name="">
             <a:extLst xmlns:a="http://schemas.openxmlformats.org/drawingml/2006/main">
               <a:ext uri="{FF2B5EF4-FFF2-40B4-BE49-F238E27FC236}">
-                <a16:creationId xmlns:a16="http://schemas.microsoft.com/office/drawing/2014/main" id="{C7EC8FE3-C1AE-49CC-8A1D-40A472494B00}"/>
+                <a16:creationId xmlns:a16="http://schemas.microsoft.com/office/drawing/2014/main" id="{7A52EFFF-5054-49A6-915D-ECDAB0837288}"/>
               </a:ext>
             </a:extLst>
           </p:cNvPr>
@@ -19036,7 +19796,7 @@
           <p:cNvPr id="9" name="">
             <a:extLst xmlns:a="http://schemas.openxmlformats.org/drawingml/2006/main">
               <a:ext uri="{FF2B5EF4-FFF2-40B4-BE49-F238E27FC236}">
-                <a16:creationId xmlns:a16="http://schemas.microsoft.com/office/drawing/2014/main" id="{295554C5-6A66-45B5-8785-004914FF12F5}"/>
+                <a16:creationId xmlns:a16="http://schemas.microsoft.com/office/drawing/2014/main" id="{558FD413-8E84-4B9A-8FF1-4ABF640EDD76}"/>
               </a:ext>
             </a:extLst>
           </p:cNvPr>
@@ -19069,7 +19829,7 @@
           <p:cNvPr id="10" name="">
             <a:extLst xmlns:a="http://schemas.openxmlformats.org/drawingml/2006/main">
               <a:ext uri="{FF2B5EF4-FFF2-40B4-BE49-F238E27FC236}">
-                <a16:creationId xmlns:a16="http://schemas.microsoft.com/office/drawing/2014/main" id="{CD12170F-C1C2-409A-8CAA-62C13C94D29A}"/>
+                <a16:creationId xmlns:a16="http://schemas.microsoft.com/office/drawing/2014/main" id="{BF36DFA0-83B6-45DD-A77F-592292BC5B72}"/>
               </a:ext>
             </a:extLst>
           </p:cNvPr>
@@ -19149,7 +19909,7 @@
           <p:cNvPr id="11" name="">
             <a:extLst xmlns:a="http://schemas.openxmlformats.org/drawingml/2006/main">
               <a:ext uri="{FF2B5EF4-FFF2-40B4-BE49-F238E27FC236}">
-                <a16:creationId xmlns:a16="http://schemas.microsoft.com/office/drawing/2014/main" id="{614E3AF2-492E-4E4C-B1EE-CFFF30E7CB25}"/>
+                <a16:creationId xmlns:a16="http://schemas.microsoft.com/office/drawing/2014/main" id="{F378237C-DD9B-4BF4-8AEF-20AE08C092D3}"/>
               </a:ext>
             </a:extLst>
           </p:cNvPr>
@@ -19252,7 +20012,7 @@
           <p:cNvPr id="12" name="">
             <a:extLst xmlns:a="http://schemas.openxmlformats.org/drawingml/2006/main">
               <a:ext uri="{FF2B5EF4-FFF2-40B4-BE49-F238E27FC236}">
-                <a16:creationId xmlns:a16="http://schemas.microsoft.com/office/drawing/2014/main" id="{06D7F6E9-0047-4B24-A7B7-EA68A2237293}"/>
+                <a16:creationId xmlns:a16="http://schemas.microsoft.com/office/drawing/2014/main" id="{AC949D59-1A10-421F-A2C0-ACB43A05E139}"/>
               </a:ext>
             </a:extLst>
           </p:cNvPr>
@@ -19285,7 +20045,7 @@
           <p:cNvPr id="13" name="">
             <a:extLst xmlns:a="http://schemas.openxmlformats.org/drawingml/2006/main">
               <a:ext uri="{FF2B5EF4-FFF2-40B4-BE49-F238E27FC236}">
-                <a16:creationId xmlns:a16="http://schemas.microsoft.com/office/drawing/2014/main" id="{9547AD57-5725-47D4-BDAE-159F69C72D2F}"/>
+                <a16:creationId xmlns:a16="http://schemas.microsoft.com/office/drawing/2014/main" id="{DDC4D709-84A2-4694-8853-C8AD44B205B4}"/>
               </a:ext>
             </a:extLst>
           </p:cNvPr>
@@ -19365,7 +20125,7 @@
           <p:cNvPr id="14" name="">
             <a:extLst xmlns:a="http://schemas.openxmlformats.org/drawingml/2006/main">
               <a:ext uri="{FF2B5EF4-FFF2-40B4-BE49-F238E27FC236}">
-                <a16:creationId xmlns:a16="http://schemas.microsoft.com/office/drawing/2014/main" id="{DC9A6074-B302-4886-BD14-4922D8DF2C72}"/>
+                <a16:creationId xmlns:a16="http://schemas.microsoft.com/office/drawing/2014/main" id="{73096573-2F3B-486E-86A8-BAFA7A0DC26D}"/>
               </a:ext>
             </a:extLst>
           </p:cNvPr>
@@ -19468,7 +20228,7 @@
           <p:cNvPr id="15" name="">
             <a:extLst xmlns:a="http://schemas.openxmlformats.org/drawingml/2006/main">
               <a:ext uri="{FF2B5EF4-FFF2-40B4-BE49-F238E27FC236}">
-                <a16:creationId xmlns:a16="http://schemas.microsoft.com/office/drawing/2014/main" id="{A0BD9B1D-2F33-4901-BB4C-1F4F3E37BDD4}"/>
+                <a16:creationId xmlns:a16="http://schemas.microsoft.com/office/drawing/2014/main" id="{A13D9694-088E-4C02-A86E-B4428EE73A4D}"/>
               </a:ext>
             </a:extLst>
           </p:cNvPr>
@@ -19501,7 +20261,7 @@
           <p:cNvPr id="16" name="">
             <a:extLst xmlns:a="http://schemas.openxmlformats.org/drawingml/2006/main">
               <a:ext uri="{FF2B5EF4-FFF2-40B4-BE49-F238E27FC236}">
-                <a16:creationId xmlns:a16="http://schemas.microsoft.com/office/drawing/2014/main" id="{14C331F6-7920-4A5A-ADB3-B7E5F084B1EE}"/>
+                <a16:creationId xmlns:a16="http://schemas.microsoft.com/office/drawing/2014/main" id="{D551A9D8-67DC-4A6B-9622-3AEDF4D73902}"/>
               </a:ext>
             </a:extLst>
           </p:cNvPr>
@@ -19581,7 +20341,7 @@
           <p:cNvPr id="17" name="">
             <a:extLst xmlns:a="http://schemas.openxmlformats.org/drawingml/2006/main">
               <a:ext uri="{FF2B5EF4-FFF2-40B4-BE49-F238E27FC236}">
-                <a16:creationId xmlns:a16="http://schemas.microsoft.com/office/drawing/2014/main" id="{A92D629A-21D9-487A-A735-C92BE8C86025}"/>
+                <a16:creationId xmlns:a16="http://schemas.microsoft.com/office/drawing/2014/main" id="{7E94A404-A6CE-4CBE-B76F-587856C3D4AC}"/>
               </a:ext>
             </a:extLst>
           </p:cNvPr>
@@ -19762,7 +20522,7 @@
           <p:cNvPr id="21" name="">
             <a:extLst xmlns:a="http://schemas.openxmlformats.org/drawingml/2006/main">
               <a:ext uri="{FF2B5EF4-FFF2-40B4-BE49-F238E27FC236}">
-                <a16:creationId xmlns:a16="http://schemas.microsoft.com/office/drawing/2014/main" id="{9B8FA0AC-E614-409A-88F3-DEE4C33B6B8F}"/>
+                <a16:creationId xmlns:a16="http://schemas.microsoft.com/office/drawing/2014/main" id="{33B11068-C29D-4001-86A0-4FCAF1E6879E}"/>
               </a:ext>
             </a:extLst>
           </p:cNvPr>
@@ -19819,7 +20579,7 @@
           <p:cNvPr id="22" name="">
             <a:extLst xmlns:a="http://schemas.openxmlformats.org/drawingml/2006/main">
               <a:ext uri="{FF2B5EF4-FFF2-40B4-BE49-F238E27FC236}">
-                <a16:creationId xmlns:a16="http://schemas.microsoft.com/office/drawing/2014/main" id="{70618908-6537-4352-9D3F-9AE4B971A1DB}"/>
+                <a16:creationId xmlns:a16="http://schemas.microsoft.com/office/drawing/2014/main" id="{06AD5E7B-10CC-4309-815E-22463E225AA7}"/>
               </a:ext>
             </a:extLst>
           </p:cNvPr>
@@ -19850,7 +20610,7 @@
           <p:cNvPr id="23" name="">
             <a:extLst xmlns:a="http://schemas.openxmlformats.org/drawingml/2006/main">
               <a:ext uri="{FF2B5EF4-FFF2-40B4-BE49-F238E27FC236}">
-                <a16:creationId xmlns:a16="http://schemas.microsoft.com/office/drawing/2014/main" id="{4C3270BF-EFEA-48BB-9499-BCC2D862C608}"/>
+                <a16:creationId xmlns:a16="http://schemas.microsoft.com/office/drawing/2014/main" id="{152C9C97-28A1-4BC7-8BB7-6055DC11A879}"/>
               </a:ext>
             </a:extLst>
           </p:cNvPr>
@@ -19905,7 +20665,7 @@
     </p:spTree>
     <p:extLst>
       <p:ext uri="{BB962C8B-B14F-4D97-AF65-F5344CB8AC3E}">
-        <p14:creationId xmlns:p14="http://schemas.microsoft.com/office/powerpoint/2010/main" val="1823060537"/>
+        <p14:creationId xmlns:p14="http://schemas.microsoft.com/office/powerpoint/2010/main" val="451299762"/>
       </p:ext>
     </p:extLst>
   </p:cSld>
@@ -19936,7 +20696,7 @@
           <p:cNvPr id="32" name="">
             <a:extLst xmlns:a="http://schemas.openxmlformats.org/drawingml/2006/main">
               <a:ext uri="{FF2B5EF4-FFF2-40B4-BE49-F238E27FC236}">
-                <a16:creationId xmlns:a16="http://schemas.microsoft.com/office/drawing/2014/main" id="{4BECBC4B-CB26-41FF-8726-7C499AD31265}"/>
+                <a16:creationId xmlns:a16="http://schemas.microsoft.com/office/drawing/2014/main" id="{0C39E912-3BEC-4ECE-80EC-5EC3378DE8B4}"/>
               </a:ext>
             </a:extLst>
           </p:cNvPr>
@@ -20016,7 +20776,7 @@
           <p:cNvPr id="2" name="">
             <a:extLst xmlns:a="http://schemas.openxmlformats.org/drawingml/2006/main">
               <a:ext uri="{FF2B5EF4-FFF2-40B4-BE49-F238E27FC236}">
-                <a16:creationId xmlns:a16="http://schemas.microsoft.com/office/drawing/2014/main" id="{8509E736-4918-4D03-9E56-7011B3684832}"/>
+                <a16:creationId xmlns:a16="http://schemas.microsoft.com/office/drawing/2014/main" id="{B226757A-75E8-40B2-9178-E53BDFFCC84C}"/>
               </a:ext>
             </a:extLst>
           </p:cNvPr>
@@ -20047,7 +20807,7 @@
           <p:cNvPr id="3" name="">
             <a:extLst xmlns:a="http://schemas.openxmlformats.org/drawingml/2006/main">
               <a:ext uri="{FF2B5EF4-FFF2-40B4-BE49-F238E27FC236}">
-                <a16:creationId xmlns:a16="http://schemas.microsoft.com/office/drawing/2014/main" id="{6D245AAD-7D78-43D0-850F-DC88E30B127E}"/>
+                <a16:creationId xmlns:a16="http://schemas.microsoft.com/office/drawing/2014/main" id="{3D54EF03-C282-4522-8318-2FC0B78B547C}"/>
               </a:ext>
             </a:extLst>
           </p:cNvPr>
@@ -20104,7 +20864,7 @@
           <p:cNvPr id="4" name="">
             <a:extLst xmlns:a="http://schemas.openxmlformats.org/drawingml/2006/main">
               <a:ext uri="{FF2B5EF4-FFF2-40B4-BE49-F238E27FC236}">
-                <a16:creationId xmlns:a16="http://schemas.microsoft.com/office/drawing/2014/main" id="{2971B8E3-C63A-482D-A89B-DA555D969329}"/>
+                <a16:creationId xmlns:a16="http://schemas.microsoft.com/office/drawing/2014/main" id="{EBABFF9C-4C40-4BCB-8E37-1DEDB34743FF}"/>
               </a:ext>
             </a:extLst>
           </p:cNvPr>
@@ -20161,7 +20921,7 @@
           <p:cNvPr id="5" name="">
             <a:extLst xmlns:a="http://schemas.openxmlformats.org/drawingml/2006/main">
               <a:ext uri="{FF2B5EF4-FFF2-40B4-BE49-F238E27FC236}">
-                <a16:creationId xmlns:a16="http://schemas.microsoft.com/office/drawing/2014/main" id="{A81EE517-435D-4BF2-A838-B3F6F5680E9F}"/>
+                <a16:creationId xmlns:a16="http://schemas.microsoft.com/office/drawing/2014/main" id="{9CF250A2-6DF4-4202-8BCC-E5AE613AFE2F}"/>
               </a:ext>
             </a:extLst>
           </p:cNvPr>
@@ -20218,7 +20978,7 @@
           <p:cNvPr id="6" name="">
             <a:extLst xmlns:a="http://schemas.openxmlformats.org/drawingml/2006/main">
               <a:ext uri="{FF2B5EF4-FFF2-40B4-BE49-F238E27FC236}">
-                <a16:creationId xmlns:a16="http://schemas.microsoft.com/office/drawing/2014/main" id="{5F0A6042-55CB-49AD-B531-2D1AC1133817}"/>
+                <a16:creationId xmlns:a16="http://schemas.microsoft.com/office/drawing/2014/main" id="{13F41046-72E4-4184-820E-8FCD4A09E0EF}"/>
               </a:ext>
             </a:extLst>
           </p:cNvPr>
@@ -20275,7 +21035,7 @@
           <p:cNvPr id="7" name="">
             <a:extLst xmlns:a="http://schemas.openxmlformats.org/drawingml/2006/main">
               <a:ext uri="{FF2B5EF4-FFF2-40B4-BE49-F238E27FC236}">
-                <a16:creationId xmlns:a16="http://schemas.microsoft.com/office/drawing/2014/main" id="{3595757B-EA33-4856-9565-34847AE253D9}"/>
+                <a16:creationId xmlns:a16="http://schemas.microsoft.com/office/drawing/2014/main" id="{968BBF54-D51E-41EF-95F4-4B17276B59CB}"/>
               </a:ext>
             </a:extLst>
           </p:cNvPr>
@@ -20332,7 +21092,7 @@
           <p:cNvPr id="8" name="">
             <a:extLst xmlns:a="http://schemas.openxmlformats.org/drawingml/2006/main">
               <a:ext uri="{FF2B5EF4-FFF2-40B4-BE49-F238E27FC236}">
-                <a16:creationId xmlns:a16="http://schemas.microsoft.com/office/drawing/2014/main" id="{DA8181AF-D53B-4A69-8E44-D45DAC7D9BF8}"/>
+                <a16:creationId xmlns:a16="http://schemas.microsoft.com/office/drawing/2014/main" id="{84A7B67F-B754-44B3-8367-01E44E2CC91B}"/>
               </a:ext>
             </a:extLst>
           </p:cNvPr>
@@ -20389,7 +21149,7 @@
           <p:cNvPr id="9" name="">
             <a:extLst xmlns:a="http://schemas.openxmlformats.org/drawingml/2006/main">
               <a:ext uri="{FF2B5EF4-FFF2-40B4-BE49-F238E27FC236}">
-                <a16:creationId xmlns:a16="http://schemas.microsoft.com/office/drawing/2014/main" id="{BF2EB73D-815E-40BC-8309-AA271B622EBE}"/>
+                <a16:creationId xmlns:a16="http://schemas.microsoft.com/office/drawing/2014/main" id="{2A31F96C-B487-46AD-A3DF-46C84B608A44}"/>
               </a:ext>
             </a:extLst>
           </p:cNvPr>
@@ -20446,7 +21206,7 @@
           <p:cNvPr id="10" name="">
             <a:extLst xmlns:a="http://schemas.openxmlformats.org/drawingml/2006/main">
               <a:ext uri="{FF2B5EF4-FFF2-40B4-BE49-F238E27FC236}">
-                <a16:creationId xmlns:a16="http://schemas.microsoft.com/office/drawing/2014/main" id="{C3873F6B-5C9F-4243-AF49-6B7412C33852}"/>
+                <a16:creationId xmlns:a16="http://schemas.microsoft.com/office/drawing/2014/main" id="{E5AFC177-6EDB-4467-A06E-C498177D6810}"/>
               </a:ext>
             </a:extLst>
           </p:cNvPr>
@@ -20477,7 +21237,7 @@
           <p:cNvPr id="11" name="">
             <a:extLst xmlns:a="http://schemas.openxmlformats.org/drawingml/2006/main">
               <a:ext uri="{FF2B5EF4-FFF2-40B4-BE49-F238E27FC236}">
-                <a16:creationId xmlns:a16="http://schemas.microsoft.com/office/drawing/2014/main" id="{A9FDF12A-CA41-4D66-A215-1BEC3D198CF0}"/>
+                <a16:creationId xmlns:a16="http://schemas.microsoft.com/office/drawing/2014/main" id="{1994C7A0-8DE3-4354-A822-01B0744DDA24}"/>
               </a:ext>
             </a:extLst>
           </p:cNvPr>
@@ -20534,7 +21294,7 @@
           <p:cNvPr id="12" name="">
             <a:extLst xmlns:a="http://schemas.openxmlformats.org/drawingml/2006/main">
               <a:ext uri="{FF2B5EF4-FFF2-40B4-BE49-F238E27FC236}">
-                <a16:creationId xmlns:a16="http://schemas.microsoft.com/office/drawing/2014/main" id="{1D0343C7-10A7-4225-8B46-0FAD162FC129}"/>
+                <a16:creationId xmlns:a16="http://schemas.microsoft.com/office/drawing/2014/main" id="{98FCD6A1-2CA0-42D2-B73F-2BABE7EC2A4A}"/>
               </a:ext>
             </a:extLst>
           </p:cNvPr>
@@ -20591,7 +21351,7 @@
           <p:cNvPr id="13" name="">
             <a:extLst xmlns:a="http://schemas.openxmlformats.org/drawingml/2006/main">
               <a:ext uri="{FF2B5EF4-FFF2-40B4-BE49-F238E27FC236}">
-                <a16:creationId xmlns:a16="http://schemas.microsoft.com/office/drawing/2014/main" id="{7BCC228D-7799-405E-9E72-008160836D77}"/>
+                <a16:creationId xmlns:a16="http://schemas.microsoft.com/office/drawing/2014/main" id="{F78A2E6B-4E36-4300-BAE9-A0AF2FB3B339}"/>
               </a:ext>
             </a:extLst>
           </p:cNvPr>
@@ -20648,7 +21408,7 @@
           <p:cNvPr id="14" name="">
             <a:extLst xmlns:a="http://schemas.openxmlformats.org/drawingml/2006/main">
               <a:ext uri="{FF2B5EF4-FFF2-40B4-BE49-F238E27FC236}">
-                <a16:creationId xmlns:a16="http://schemas.microsoft.com/office/drawing/2014/main" id="{1A2B27A1-336C-4D14-9733-F598E4B7D715}"/>
+                <a16:creationId xmlns:a16="http://schemas.microsoft.com/office/drawing/2014/main" id="{75E14177-F19D-43A2-9A71-FE32A78B6002}"/>
               </a:ext>
             </a:extLst>
           </p:cNvPr>
@@ -20705,7 +21465,7 @@
           <p:cNvPr id="15" name="">
             <a:extLst xmlns:a="http://schemas.openxmlformats.org/drawingml/2006/main">
               <a:ext uri="{FF2B5EF4-FFF2-40B4-BE49-F238E27FC236}">
-                <a16:creationId xmlns:a16="http://schemas.microsoft.com/office/drawing/2014/main" id="{D45E7A04-DC5C-4AF6-B63D-892EFC3CCB4C}"/>
+                <a16:creationId xmlns:a16="http://schemas.microsoft.com/office/drawing/2014/main" id="{9941FE46-8656-4579-AA75-BB921B8BEBD0}"/>
               </a:ext>
             </a:extLst>
           </p:cNvPr>
@@ -20762,7 +21522,7 @@
           <p:cNvPr id="16" name="">
             <a:extLst xmlns:a="http://schemas.openxmlformats.org/drawingml/2006/main">
               <a:ext uri="{FF2B5EF4-FFF2-40B4-BE49-F238E27FC236}">
-                <a16:creationId xmlns:a16="http://schemas.microsoft.com/office/drawing/2014/main" id="{2D72B6B4-2C41-4983-BE67-7CD3A3D2C317}"/>
+                <a16:creationId xmlns:a16="http://schemas.microsoft.com/office/drawing/2014/main" id="{90052B26-BD0D-4F14-AFB9-DF4E57F6F3BD}"/>
               </a:ext>
             </a:extLst>
           </p:cNvPr>
@@ -20819,7 +21579,7 @@
           <p:cNvPr id="17" name="">
             <a:extLst xmlns:a="http://schemas.openxmlformats.org/drawingml/2006/main">
               <a:ext uri="{FF2B5EF4-FFF2-40B4-BE49-F238E27FC236}">
-                <a16:creationId xmlns:a16="http://schemas.microsoft.com/office/drawing/2014/main" id="{080AC5D3-E88D-47FE-A1F5-F50F674A303F}"/>
+                <a16:creationId xmlns:a16="http://schemas.microsoft.com/office/drawing/2014/main" id="{6102CE25-7FED-413F-8F01-955A5807480D}"/>
               </a:ext>
             </a:extLst>
           </p:cNvPr>
@@ -20876,7 +21636,7 @@
           <p:cNvPr id="18" name="">
             <a:extLst xmlns:a="http://schemas.openxmlformats.org/drawingml/2006/main">
               <a:ext uri="{FF2B5EF4-FFF2-40B4-BE49-F238E27FC236}">
-                <a16:creationId xmlns:a16="http://schemas.microsoft.com/office/drawing/2014/main" id="{2446A6B8-319D-44FF-8014-998028FFAE06}"/>
+                <a16:creationId xmlns:a16="http://schemas.microsoft.com/office/drawing/2014/main" id="{4772B09C-8F15-42E4-9C5B-2A9B602ADBC2}"/>
               </a:ext>
             </a:extLst>
           </p:cNvPr>
@@ -20933,7 +21693,7 @@
           <p:cNvPr id="19" name="">
             <a:extLst xmlns:a="http://schemas.openxmlformats.org/drawingml/2006/main">
               <a:ext uri="{FF2B5EF4-FFF2-40B4-BE49-F238E27FC236}">
-                <a16:creationId xmlns:a16="http://schemas.microsoft.com/office/drawing/2014/main" id="{72D3F65B-11A9-43B3-9BA6-0B0C56FF8CED}"/>
+                <a16:creationId xmlns:a16="http://schemas.microsoft.com/office/drawing/2014/main" id="{0CFA055C-67FA-4F46-97A2-45806B4F68BC}"/>
               </a:ext>
             </a:extLst>
           </p:cNvPr>
@@ -20990,7 +21750,7 @@
           <p:cNvPr id="20" name="">
             <a:extLst xmlns:a="http://schemas.openxmlformats.org/drawingml/2006/main">
               <a:ext uri="{FF2B5EF4-FFF2-40B4-BE49-F238E27FC236}">
-                <a16:creationId xmlns:a16="http://schemas.microsoft.com/office/drawing/2014/main" id="{3D9B2E42-3CC4-4BA5-A5DA-0800564C361D}"/>
+                <a16:creationId xmlns:a16="http://schemas.microsoft.com/office/drawing/2014/main" id="{DAD99E06-0A40-4D79-98FD-EE1A42277908}"/>
               </a:ext>
             </a:extLst>
           </p:cNvPr>
@@ -21047,7 +21807,7 @@
           <p:cNvPr id="21" name="">
             <a:extLst xmlns:a="http://schemas.openxmlformats.org/drawingml/2006/main">
               <a:ext uri="{FF2B5EF4-FFF2-40B4-BE49-F238E27FC236}">
-                <a16:creationId xmlns:a16="http://schemas.microsoft.com/office/drawing/2014/main" id="{52A13B80-C9FF-4B4C-93AA-97CD6A78B926}"/>
+                <a16:creationId xmlns:a16="http://schemas.microsoft.com/office/drawing/2014/main" id="{995107C1-B8E5-423A-9146-5D1E267DFA4F}"/>
               </a:ext>
             </a:extLst>
           </p:cNvPr>
@@ -21104,7 +21864,7 @@
           <p:cNvPr id="22" name="">
             <a:extLst xmlns:a="http://schemas.openxmlformats.org/drawingml/2006/main">
               <a:ext uri="{FF2B5EF4-FFF2-40B4-BE49-F238E27FC236}">
-                <a16:creationId xmlns:a16="http://schemas.microsoft.com/office/drawing/2014/main" id="{8B6107F3-92BA-4999-A8D7-448541EA406D}"/>
+                <a16:creationId xmlns:a16="http://schemas.microsoft.com/office/drawing/2014/main" id="{81193023-CBBF-47EA-A3B4-ACF1D734588D}"/>
               </a:ext>
             </a:extLst>
           </p:cNvPr>
@@ -21161,7 +21921,7 @@
           <p:cNvPr id="23" name="">
             <a:extLst xmlns:a="http://schemas.openxmlformats.org/drawingml/2006/main">
               <a:ext uri="{FF2B5EF4-FFF2-40B4-BE49-F238E27FC236}">
-                <a16:creationId xmlns:a16="http://schemas.microsoft.com/office/drawing/2014/main" id="{2182DF6A-E7BF-4FAF-BE6B-A7EC9FDDD465}"/>
+                <a16:creationId xmlns:a16="http://schemas.microsoft.com/office/drawing/2014/main" id="{CA3A89B3-5A1B-4F92-9024-FEBD502F714C}"/>
               </a:ext>
             </a:extLst>
           </p:cNvPr>
@@ -21218,7 +21978,7 @@
           <p:cNvPr id="24" name="">
             <a:extLst xmlns:a="http://schemas.openxmlformats.org/drawingml/2006/main">
               <a:ext uri="{FF2B5EF4-FFF2-40B4-BE49-F238E27FC236}">
-                <a16:creationId xmlns:a16="http://schemas.microsoft.com/office/drawing/2014/main" id="{1F6C08C9-CEEE-4399-ABB1-E11A9E609D9B}"/>
+                <a16:creationId xmlns:a16="http://schemas.microsoft.com/office/drawing/2014/main" id="{8CFD5556-AE5F-49AA-BE77-D3F9AB24AE6F}"/>
               </a:ext>
             </a:extLst>
           </p:cNvPr>
@@ -21275,7 +22035,7 @@
           <p:cNvPr id="25" name="">
             <a:extLst xmlns:a="http://schemas.openxmlformats.org/drawingml/2006/main">
               <a:ext uri="{FF2B5EF4-FFF2-40B4-BE49-F238E27FC236}">
-                <a16:creationId xmlns:a16="http://schemas.microsoft.com/office/drawing/2014/main" id="{8B0FB9D3-1930-43C2-9EE3-2CD7B423C3C3}"/>
+                <a16:creationId xmlns:a16="http://schemas.microsoft.com/office/drawing/2014/main" id="{34021E0E-D812-4AD6-B8B7-71309CF19056}"/>
               </a:ext>
             </a:extLst>
           </p:cNvPr>
@@ -21332,7 +22092,7 @@
           <p:cNvPr id="26" name="">
             <a:extLst xmlns:a="http://schemas.openxmlformats.org/drawingml/2006/main">
               <a:ext uri="{FF2B5EF4-FFF2-40B4-BE49-F238E27FC236}">
-                <a16:creationId xmlns:a16="http://schemas.microsoft.com/office/drawing/2014/main" id="{2BC09BA4-F4EA-4E53-A852-E8AECF44CC88}"/>
+                <a16:creationId xmlns:a16="http://schemas.microsoft.com/office/drawing/2014/main" id="{F44B5CAD-0916-4BA1-9883-610347100FE8}"/>
               </a:ext>
             </a:extLst>
           </p:cNvPr>
@@ -21389,7 +22149,7 @@
           <p:cNvPr id="27" name="">
             <a:extLst xmlns:a="http://schemas.openxmlformats.org/drawingml/2006/main">
               <a:ext uri="{FF2B5EF4-FFF2-40B4-BE49-F238E27FC236}">
-                <a16:creationId xmlns:a16="http://schemas.microsoft.com/office/drawing/2014/main" id="{327C416C-7F67-4154-B9F0-F97A933DB5FE}"/>
+                <a16:creationId xmlns:a16="http://schemas.microsoft.com/office/drawing/2014/main" id="{3CA9DFEE-C031-44F7-AF52-7AB68700D320}"/>
               </a:ext>
             </a:extLst>
           </p:cNvPr>
@@ -21446,7 +22206,7 @@
           <p:cNvPr id="28" name="">
             <a:extLst xmlns:a="http://schemas.openxmlformats.org/drawingml/2006/main">
               <a:ext uri="{FF2B5EF4-FFF2-40B4-BE49-F238E27FC236}">
-                <a16:creationId xmlns:a16="http://schemas.microsoft.com/office/drawing/2014/main" id="{4BA08703-C46B-4264-A3DC-5229E040B990}"/>
+                <a16:creationId xmlns:a16="http://schemas.microsoft.com/office/drawing/2014/main" id="{C1F7264D-36D4-4403-90A6-8569B483F166}"/>
               </a:ext>
             </a:extLst>
           </p:cNvPr>
@@ -21503,7 +22263,7 @@
           <p:cNvPr id="29" name="">
             <a:extLst xmlns:a="http://schemas.openxmlformats.org/drawingml/2006/main">
               <a:ext uri="{FF2B5EF4-FFF2-40B4-BE49-F238E27FC236}">
-                <a16:creationId xmlns:a16="http://schemas.microsoft.com/office/drawing/2014/main" id="{B2AD054E-F4E0-48E6-8800-FD6D84B9943B}"/>
+                <a16:creationId xmlns:a16="http://schemas.microsoft.com/office/drawing/2014/main" id="{32536775-42EE-469F-9ACD-9789694C3EC5}"/>
               </a:ext>
             </a:extLst>
           </p:cNvPr>
@@ -21534,7 +22294,7 @@
           <p:cNvPr id="30" name="">
             <a:extLst xmlns:a="http://schemas.openxmlformats.org/drawingml/2006/main">
               <a:ext uri="{FF2B5EF4-FFF2-40B4-BE49-F238E27FC236}">
-                <a16:creationId xmlns:a16="http://schemas.microsoft.com/office/drawing/2014/main" id="{F7782D31-D756-462F-82BE-63B763EBFB42}"/>
+                <a16:creationId xmlns:a16="http://schemas.microsoft.com/office/drawing/2014/main" id="{DAC4B07B-DE74-471E-9AD0-B7784321CACC}"/>
               </a:ext>
             </a:extLst>
           </p:cNvPr>
@@ -21591,7 +22351,7 @@
           <p:cNvPr id="31" name="">
             <a:extLst xmlns:a="http://schemas.openxmlformats.org/drawingml/2006/main">
               <a:ext uri="{FF2B5EF4-FFF2-40B4-BE49-F238E27FC236}">
-                <a16:creationId xmlns:a16="http://schemas.microsoft.com/office/drawing/2014/main" id="{1AA8AB1A-2D9B-449A-851C-7C337619B173}"/>
+                <a16:creationId xmlns:a16="http://schemas.microsoft.com/office/drawing/2014/main" id="{0907FDD5-267B-48E8-BCDB-582D6B9C28CF}"/>
               </a:ext>
             </a:extLst>
           </p:cNvPr>
@@ -21646,7 +22406,7 @@
     </p:spTree>
     <p:extLst>
       <p:ext uri="{BB962C8B-B14F-4D97-AF65-F5344CB8AC3E}">
-        <p14:creationId xmlns:p14="http://schemas.microsoft.com/office/powerpoint/2010/main" val="1088254113"/>
+        <p14:creationId xmlns:p14="http://schemas.microsoft.com/office/powerpoint/2010/main" val="729465131"/>
       </p:ext>
     </p:extLst>
   </p:cSld>
@@ -21674,10 +22434,10 @@
       </p:grpSpPr>
       <p:sp>
         <p:nvSpPr>
-          <p:cNvPr id="13" name="">
-            <a:extLst xmlns:a="http://schemas.openxmlformats.org/drawingml/2006/main">
-              <a:ext uri="{FF2B5EF4-FFF2-40B4-BE49-F238E27FC236}">
-                <a16:creationId xmlns:a16="http://schemas.microsoft.com/office/drawing/2014/main" id="{A105F01B-DA63-49CE-A316-9D6D857B0304}"/>
+          <p:cNvPr id="35" name="">
+            <a:extLst xmlns:a="http://schemas.openxmlformats.org/drawingml/2006/main">
+              <a:ext uri="{FF2B5EF4-FFF2-40B4-BE49-F238E27FC236}">
+                <a16:creationId xmlns:a16="http://schemas.microsoft.com/office/drawing/2014/main" id="{13F8BDC0-D0F1-4EBB-BC0A-B5E34ED7094F}"/>
               </a:ext>
             </a:extLst>
           </p:cNvPr>
@@ -21734,7 +22494,7 @@
           <p:cNvPr id="2" name="">
             <a:extLst xmlns:a="http://schemas.openxmlformats.org/drawingml/2006/main">
               <a:ext uri="{FF2B5EF4-FFF2-40B4-BE49-F238E27FC236}">
-                <a16:creationId xmlns:a16="http://schemas.microsoft.com/office/drawing/2014/main" id="{2414296E-00FF-4DA0-BE4E-B8447C07CCE8}"/>
+                <a16:creationId xmlns:a16="http://schemas.microsoft.com/office/drawing/2014/main" id="{21751DE8-170B-4395-94D1-FEA7926A19D9}"/>
               </a:ext>
             </a:extLst>
           </p:cNvPr>
@@ -21765,7 +22525,7 @@
           <p:cNvPr id="3" name="">
             <a:extLst xmlns:a="http://schemas.openxmlformats.org/drawingml/2006/main">
               <a:ext uri="{FF2B5EF4-FFF2-40B4-BE49-F238E27FC236}">
-                <a16:creationId xmlns:a16="http://schemas.microsoft.com/office/drawing/2014/main" id="{8FFC03E6-E848-4343-A006-B6AA960594E4}"/>
+                <a16:creationId xmlns:a16="http://schemas.microsoft.com/office/drawing/2014/main" id="{684C84AB-46C9-4544-9E0C-5355A69C63DE}"/>
               </a:ext>
             </a:extLst>
           </p:cNvPr>
@@ -21822,19 +22582,19 @@
           <p:cNvPr id="4" name="">
             <a:extLst xmlns:a="http://schemas.openxmlformats.org/drawingml/2006/main">
               <a:ext uri="{FF2B5EF4-FFF2-40B4-BE49-F238E27FC236}">
-                <a16:creationId xmlns:a16="http://schemas.microsoft.com/office/drawing/2014/main" id="{5A20134B-CEA6-489C-90BC-CED3E3F18B91}"/>
-              </a:ext>
-            </a:extLst>
-          </p:cNvPr>
-          <p:cNvSpPr>
-            <a:spLocks xmlns:a="http://schemas.openxmlformats.org/drawingml/2006/main" noGrp="1"/>
-          </p:cNvSpPr>
-          <p:nvPr/>
-        </p:nvSpPr>
-        <p:spPr>
-          <a:xfrm xmlns:a="http://schemas.openxmlformats.org/drawingml/2006/main">
-            <a:off x="609600" y="1924050"/>
-            <a:ext cx="10648950" cy="304800"/>
+                <a16:creationId xmlns:a16="http://schemas.microsoft.com/office/drawing/2014/main" id="{D551F12A-7C6C-438C-A48E-82E1DB345882}"/>
+              </a:ext>
+            </a:extLst>
+          </p:cNvPr>
+          <p:cNvSpPr>
+            <a:spLocks xmlns:a="http://schemas.openxmlformats.org/drawingml/2006/main" noGrp="1"/>
+          </p:cNvSpPr>
+          <p:nvPr/>
+        </p:nvSpPr>
+        <p:spPr>
+          <a:xfrm xmlns:a="http://schemas.openxmlformats.org/drawingml/2006/main">
+            <a:off x="609600" y="1676400"/>
+            <a:ext cx="10648950" cy="266700"/>
           </a:xfrm>
           <a:prstGeom xmlns:a="http://schemas.openxmlformats.org/drawingml/2006/main" prst="rect">
             <a:avLst/>
@@ -21851,7 +22611,7 @@
           <a:lstStyle xmlns:a="http://schemas.openxmlformats.org/drawingml/2006/main"/>
           <a:p xmlns:a="http://schemas.openxmlformats.org/drawingml/2006/main">
             <a:pPr algn="l">
-              <a:defRPr sz="1725" b="1">
+              <a:defRPr sz="1575" b="1">
                 <a:solidFill>
                   <a:srgbClr val="28C7F7"/>
                 </a:solidFill>
@@ -21861,7 +22621,7 @@
               </a:defRPr>
             </a:pPr>
             <a:r>
-              <a:rPr sz="1725" b="1">
+              <a:rPr sz="1575" b="1">
                 <a:solidFill>
                   <a:srgbClr val="28C7F7"/>
                 </a:solidFill>
@@ -21879,19 +22639,19 @@
           <p:cNvPr id="5" name="">
             <a:extLst xmlns:a="http://schemas.openxmlformats.org/drawingml/2006/main">
               <a:ext uri="{FF2B5EF4-FFF2-40B4-BE49-F238E27FC236}">
-                <a16:creationId xmlns:a16="http://schemas.microsoft.com/office/drawing/2014/main" id="{FC11E502-A68F-43E6-9206-2305BDE94D6B}"/>
-              </a:ext>
-            </a:extLst>
-          </p:cNvPr>
-          <p:cNvSpPr>
-            <a:spLocks xmlns:a="http://schemas.openxmlformats.org/drawingml/2006/main" noGrp="1"/>
-          </p:cNvSpPr>
-          <p:nvPr/>
-        </p:nvSpPr>
-        <p:spPr>
-          <a:xfrm xmlns:a="http://schemas.openxmlformats.org/drawingml/2006/main">
-            <a:off x="609600" y="2390775"/>
-            <a:ext cx="10515600" cy="952500"/>
+                <a16:creationId xmlns:a16="http://schemas.microsoft.com/office/drawing/2014/main" id="{5E96D195-D364-43AF-8137-40015DD61F4C}"/>
+              </a:ext>
+            </a:extLst>
+          </p:cNvPr>
+          <p:cNvSpPr>
+            <a:spLocks xmlns:a="http://schemas.openxmlformats.org/drawingml/2006/main" noGrp="1"/>
+          </p:cNvSpPr>
+          <p:nvPr/>
+        </p:nvSpPr>
+        <p:spPr>
+          <a:xfrm xmlns:a="http://schemas.openxmlformats.org/drawingml/2006/main">
+            <a:off x="609600" y="2019300"/>
+            <a:ext cx="10972800" cy="590550"/>
           </a:xfrm>
           <a:prstGeom xmlns:a="http://schemas.openxmlformats.org/drawingml/2006/main" prst="rect">
             <a:avLst/>
@@ -21908,7 +22668,7 @@
           <a:lstStyle xmlns:a="http://schemas.openxmlformats.org/drawingml/2006/main"/>
           <a:p xmlns:a="http://schemas.openxmlformats.org/drawingml/2006/main">
             <a:pPr algn="l">
-              <a:defRPr sz="2400" b="1">
+              <a:defRPr sz="2025" b="1">
                 <a:solidFill>
                   <a:srgbClr val="F4F7FA"/>
                 </a:solidFill>
@@ -21918,7 +22678,7 @@
               </a:defRPr>
             </a:pPr>
             <a:r>
-              <a:rPr sz="2400" b="1">
+              <a:rPr sz="2025" b="1">
                 <a:solidFill>
                   <a:srgbClr val="F4F7FA"/>
                 </a:solidFill>
@@ -21936,19 +22696,19 @@
           <p:cNvPr id="6" name="">
             <a:extLst xmlns:a="http://schemas.openxmlformats.org/drawingml/2006/main">
               <a:ext uri="{FF2B5EF4-FFF2-40B4-BE49-F238E27FC236}">
-                <a16:creationId xmlns:a16="http://schemas.microsoft.com/office/drawing/2014/main" id="{438E7824-82C4-41ED-8BB2-786889AC6CCF}"/>
-              </a:ext>
-            </a:extLst>
-          </p:cNvPr>
-          <p:cNvSpPr>
-            <a:spLocks xmlns:a="http://schemas.openxmlformats.org/drawingml/2006/main" noGrp="1"/>
-          </p:cNvSpPr>
-          <p:nvPr/>
-        </p:nvSpPr>
-        <p:spPr>
-          <a:xfrm xmlns:a="http://schemas.openxmlformats.org/drawingml/2006/main">
-            <a:off x="609600" y="3695700"/>
-            <a:ext cx="5143500" cy="381000"/>
+                <a16:creationId xmlns:a16="http://schemas.microsoft.com/office/drawing/2014/main" id="{3264701E-1788-4EEB-A9FF-3F044ED05031}"/>
+              </a:ext>
+            </a:extLst>
+          </p:cNvPr>
+          <p:cNvSpPr>
+            <a:spLocks xmlns:a="http://schemas.openxmlformats.org/drawingml/2006/main" noGrp="1"/>
+          </p:cNvSpPr>
+          <p:nvPr/>
+        </p:nvSpPr>
+        <p:spPr>
+          <a:xfrm xmlns:a="http://schemas.openxmlformats.org/drawingml/2006/main">
+            <a:off x="609600" y="2781300"/>
+            <a:ext cx="5257800" cy="295275"/>
           </a:xfrm>
           <a:prstGeom xmlns:a="http://schemas.openxmlformats.org/drawingml/2006/main" prst="rect">
             <a:avLst/>
@@ -21965,7 +22725,7 @@
           <a:lstStyle xmlns:a="http://schemas.openxmlformats.org/drawingml/2006/main"/>
           <a:p xmlns:a="http://schemas.openxmlformats.org/drawingml/2006/main">
             <a:pPr algn="l">
-              <a:defRPr sz="1800" b="0">
+              <a:defRPr sz="1725" b="0">
                 <a:solidFill>
                   <a:srgbClr val="ADB8C5"/>
                 </a:solidFill>
@@ -21975,7 +22735,7 @@
               </a:defRPr>
             </a:pPr>
             <a:r>
-              <a:rPr sz="1800" b="0">
+              <a:rPr sz="1725" b="0">
                 <a:solidFill>
                   <a:srgbClr val="ADB8C5"/>
                 </a:solidFill>
@@ -21993,19 +22753,19 @@
           <p:cNvPr id="7" name="">
             <a:extLst xmlns:a="http://schemas.openxmlformats.org/drawingml/2006/main">
               <a:ext uri="{FF2B5EF4-FFF2-40B4-BE49-F238E27FC236}">
-                <a16:creationId xmlns:a16="http://schemas.microsoft.com/office/drawing/2014/main" id="{88BEB7FC-DCD2-42AF-A227-C257BF824EB3}"/>
-              </a:ext>
-            </a:extLst>
-          </p:cNvPr>
-          <p:cNvSpPr>
-            <a:spLocks xmlns:a="http://schemas.openxmlformats.org/drawingml/2006/main" noGrp="1"/>
-          </p:cNvSpPr>
-          <p:nvPr/>
-        </p:nvSpPr>
-        <p:spPr>
-          <a:xfrm xmlns:a="http://schemas.openxmlformats.org/drawingml/2006/main">
-            <a:off x="609600" y="4257675"/>
-            <a:ext cx="5143500" cy="762000"/>
+                <a16:creationId xmlns:a16="http://schemas.microsoft.com/office/drawing/2014/main" id="{2812172D-2B12-42F0-9568-5A95FD53FF2F}"/>
+              </a:ext>
+            </a:extLst>
+          </p:cNvPr>
+          <p:cNvSpPr>
+            <a:spLocks xmlns:a="http://schemas.openxmlformats.org/drawingml/2006/main" noGrp="1"/>
+          </p:cNvSpPr>
+          <p:nvPr/>
+        </p:nvSpPr>
+        <p:spPr>
+          <a:xfrm xmlns:a="http://schemas.openxmlformats.org/drawingml/2006/main">
+            <a:off x="609600" y="3124200"/>
+            <a:ext cx="5257800" cy="638175"/>
           </a:xfrm>
           <a:prstGeom xmlns:a="http://schemas.openxmlformats.org/drawingml/2006/main" prst="rect">
             <a:avLst/>
@@ -22022,7 +22782,7 @@
           <a:lstStyle xmlns:a="http://schemas.openxmlformats.org/drawingml/2006/main"/>
           <a:p xmlns:a="http://schemas.openxmlformats.org/drawingml/2006/main">
             <a:pPr algn="l">
-              <a:defRPr sz="4425" b="1">
+              <a:defRPr sz="3900" b="1">
                 <a:solidFill>
                   <a:srgbClr val="28C7F7"/>
                 </a:solidFill>
@@ -22032,7 +22792,7 @@
               </a:defRPr>
             </a:pPr>
             <a:r>
-              <a:rPr sz="4425" b="1">
+              <a:rPr sz="3900" b="1">
                 <a:solidFill>
                   <a:srgbClr val="28C7F7"/>
                 </a:solidFill>
@@ -22050,19 +22810,19 @@
           <p:cNvPr id="8" name="">
             <a:extLst xmlns:a="http://schemas.openxmlformats.org/drawingml/2006/main">
               <a:ext uri="{FF2B5EF4-FFF2-40B4-BE49-F238E27FC236}">
-                <a16:creationId xmlns:a16="http://schemas.microsoft.com/office/drawing/2014/main" id="{A1E7B38D-B2E1-451C-9206-E91B323BEDBB}"/>
-              </a:ext>
-            </a:extLst>
-          </p:cNvPr>
-          <p:cNvSpPr>
-            <a:spLocks xmlns:a="http://schemas.openxmlformats.org/drawingml/2006/main" noGrp="1"/>
-          </p:cNvSpPr>
-          <p:nvPr/>
-        </p:nvSpPr>
-        <p:spPr>
-          <a:xfrm xmlns:a="http://schemas.openxmlformats.org/drawingml/2006/main">
-            <a:off x="6324600" y="3695700"/>
-            <a:ext cx="5143500" cy="381000"/>
+                <a16:creationId xmlns:a16="http://schemas.microsoft.com/office/drawing/2014/main" id="{A6ACEB8E-4009-48F1-952C-ADF4F5C34E37}"/>
+              </a:ext>
+            </a:extLst>
+          </p:cNvPr>
+          <p:cNvSpPr>
+            <a:spLocks xmlns:a="http://schemas.openxmlformats.org/drawingml/2006/main" noGrp="1"/>
+          </p:cNvSpPr>
+          <p:nvPr/>
+        </p:nvSpPr>
+        <p:spPr>
+          <a:xfrm xmlns:a="http://schemas.openxmlformats.org/drawingml/2006/main">
+            <a:off x="6324600" y="2781300"/>
+            <a:ext cx="5257800" cy="295275"/>
           </a:xfrm>
           <a:prstGeom xmlns:a="http://schemas.openxmlformats.org/drawingml/2006/main" prst="rect">
             <a:avLst/>
@@ -22079,7 +22839,7 @@
           <a:lstStyle xmlns:a="http://schemas.openxmlformats.org/drawingml/2006/main"/>
           <a:p xmlns:a="http://schemas.openxmlformats.org/drawingml/2006/main">
             <a:pPr algn="l">
-              <a:defRPr sz="1800" b="0">
+              <a:defRPr sz="1725" b="0">
                 <a:solidFill>
                   <a:srgbClr val="ADB8C5"/>
                 </a:solidFill>
@@ -22089,7 +22849,7 @@
               </a:defRPr>
             </a:pPr>
             <a:r>
-              <a:rPr sz="1800" b="0">
+              <a:rPr sz="1725" b="0">
                 <a:solidFill>
                   <a:srgbClr val="ADB8C5"/>
                 </a:solidFill>
@@ -22107,19 +22867,19 @@
           <p:cNvPr id="9" name="">
             <a:extLst xmlns:a="http://schemas.openxmlformats.org/drawingml/2006/main">
               <a:ext uri="{FF2B5EF4-FFF2-40B4-BE49-F238E27FC236}">
-                <a16:creationId xmlns:a16="http://schemas.microsoft.com/office/drawing/2014/main" id="{23D50CEB-DC45-4CC3-ACF0-CA9E39242731}"/>
-              </a:ext>
-            </a:extLst>
-          </p:cNvPr>
-          <p:cNvSpPr>
-            <a:spLocks xmlns:a="http://schemas.openxmlformats.org/drawingml/2006/main" noGrp="1"/>
-          </p:cNvSpPr>
-          <p:nvPr/>
-        </p:nvSpPr>
-        <p:spPr>
-          <a:xfrm xmlns:a="http://schemas.openxmlformats.org/drawingml/2006/main">
-            <a:off x="6324600" y="4257675"/>
-            <a:ext cx="5143500" cy="762000"/>
+                <a16:creationId xmlns:a16="http://schemas.microsoft.com/office/drawing/2014/main" id="{A51C636D-B376-43C5-B2DC-FE1932A1C3A5}"/>
+              </a:ext>
+            </a:extLst>
+          </p:cNvPr>
+          <p:cNvSpPr>
+            <a:spLocks xmlns:a="http://schemas.openxmlformats.org/drawingml/2006/main" noGrp="1"/>
+          </p:cNvSpPr>
+          <p:nvPr/>
+        </p:nvSpPr>
+        <p:spPr>
+          <a:xfrm xmlns:a="http://schemas.openxmlformats.org/drawingml/2006/main">
+            <a:off x="6324600" y="3124200"/>
+            <a:ext cx="5257800" cy="638175"/>
           </a:xfrm>
           <a:prstGeom xmlns:a="http://schemas.openxmlformats.org/drawingml/2006/main" prst="rect">
             <a:avLst/>
@@ -22136,7 +22896,7 @@
           <a:lstStyle xmlns:a="http://schemas.openxmlformats.org/drawingml/2006/main"/>
           <a:p xmlns:a="http://schemas.openxmlformats.org/drawingml/2006/main">
             <a:pPr algn="l">
-              <a:defRPr sz="4425" b="1">
+              <a:defRPr sz="3900" b="1">
                 <a:solidFill>
                   <a:srgbClr val="F5B61C"/>
                 </a:solidFill>
@@ -22146,7 +22906,7 @@
               </a:defRPr>
             </a:pPr>
             <a:r>
-              <a:rPr sz="4425" b="1">
+              <a:rPr sz="3900" b="1">
                 <a:solidFill>
                   <a:srgbClr val="F5B61C"/>
                 </a:solidFill>
@@ -22164,64 +22924,7 @@
           <p:cNvPr id="10" name="">
             <a:extLst xmlns:a="http://schemas.openxmlformats.org/drawingml/2006/main">
               <a:ext uri="{FF2B5EF4-FFF2-40B4-BE49-F238E27FC236}">
-                <a16:creationId xmlns:a16="http://schemas.microsoft.com/office/drawing/2014/main" id="{DD774565-8D97-4FFA-8DB9-134CA1E2C17E}"/>
-              </a:ext>
-            </a:extLst>
-          </p:cNvPr>
-          <p:cNvSpPr>
-            <a:spLocks xmlns:a="http://schemas.openxmlformats.org/drawingml/2006/main" noGrp="1"/>
-          </p:cNvSpPr>
-          <p:nvPr/>
-        </p:nvSpPr>
-        <p:spPr>
-          <a:xfrm xmlns:a="http://schemas.openxmlformats.org/drawingml/2006/main">
-            <a:off x="609600" y="5276850"/>
-            <a:ext cx="10648950" cy="304800"/>
-          </a:xfrm>
-          <a:prstGeom xmlns:a="http://schemas.openxmlformats.org/drawingml/2006/main" prst="rect">
-            <a:avLst/>
-          </a:prstGeom>
-          <a:noFill xmlns:a="http://schemas.openxmlformats.org/drawingml/2006/main"/>
-          <a:ln xmlns:a="http://schemas.openxmlformats.org/drawingml/2006/main" w="0">
-            <a:noFill/>
-          </a:ln>
-        </p:spPr>
-        <p:txBody>
-          <a:bodyPr xmlns:a="http://schemas.openxmlformats.org/drawingml/2006/main" wrap="square" lIns="0" tIns="0" rIns="0" bIns="0" anchor="ctr">
-            <a:noAutofit/>
-          </a:bodyPr>
-          <a:lstStyle xmlns:a="http://schemas.openxmlformats.org/drawingml/2006/main"/>
-          <a:p xmlns:a="http://schemas.openxmlformats.org/drawingml/2006/main">
-            <a:pPr algn="l">
-              <a:defRPr sz="1650" b="0">
-                <a:solidFill>
-                  <a:srgbClr val="ADB8C5"/>
-                </a:solidFill>
-                <a:latin typeface="Roboto"/>
-                <a:ea typeface="Roboto"/>
-                <a:cs typeface="Roboto"/>
-              </a:defRPr>
-            </a:pPr>
-            <a:r>
-              <a:rPr sz="1650" b="0">
-                <a:solidFill>
-                  <a:srgbClr val="ADB8C5"/>
-                </a:solidFill>
-                <a:latin typeface="Roboto"/>
-                <a:ea typeface="Roboto"/>
-                <a:cs typeface="Roboto"/>
-              </a:rPr>
-              <a:t>Distribution also depends on context, model and configuration.</a:t>
-            </a:r>
-          </a:p>
-        </p:txBody>
-      </p:sp>
-      <p:sp>
-        <p:nvSpPr>
-          <p:cNvPr id="11" name="">
-            <a:extLst xmlns:a="http://schemas.openxmlformats.org/drawingml/2006/main">
-              <a:ext uri="{FF2B5EF4-FFF2-40B4-BE49-F238E27FC236}">
-                <a16:creationId xmlns:a16="http://schemas.microsoft.com/office/drawing/2014/main" id="{73444A3F-C2E3-46CB-B3DC-129DC4A08D4D}"/>
+                <a16:creationId xmlns:a16="http://schemas.microsoft.com/office/drawing/2014/main" id="{D3747756-F808-4F8A-AA9D-1227D4F8149D}"/>
               </a:ext>
             </a:extLst>
           </p:cNvPr>
@@ -22232,8 +22935,8 @@
         </p:nvSpPr>
         <p:spPr>
           <a:xfrm xmlns:a="http://schemas.openxmlformats.org/drawingml/2006/main" flipH="0" flipV="0">
-            <a:off x="609600" y="5734050"/>
-            <a:ext cx="10972800" cy="0"/>
+            <a:off x="6096000" y="2781300"/>
+            <a:ext cx="0" cy="2476500"/>
           </a:xfrm>
           <a:prstGeom xmlns:a="http://schemas.openxmlformats.org/drawingml/2006/main" prst="line">
             <a:avLst/>
@@ -22249,10 +22952,841 @@
       </p:sp>
       <p:sp>
         <p:nvSpPr>
+          <p:cNvPr id="11" name="">
+            <a:extLst xmlns:a="http://schemas.openxmlformats.org/drawingml/2006/main">
+              <a:ext uri="{FF2B5EF4-FFF2-40B4-BE49-F238E27FC236}">
+                <a16:creationId xmlns:a16="http://schemas.microsoft.com/office/drawing/2014/main" id="{106A0F73-5EE4-4D55-90BB-153395CE2342}"/>
+              </a:ext>
+            </a:extLst>
+          </p:cNvPr>
+          <p:cNvSpPr>
+            <a:spLocks xmlns:a="http://schemas.openxmlformats.org/drawingml/2006/main" noGrp="1"/>
+          </p:cNvSpPr>
+          <p:nvPr/>
+        </p:nvSpPr>
+        <p:spPr>
+          <a:xfrm xmlns:a="http://schemas.openxmlformats.org/drawingml/2006/main" flipH="0" flipV="0">
+            <a:off x="952500" y="4857750"/>
+            <a:ext cx="4476750" cy="0"/>
+          </a:xfrm>
+          <a:prstGeom xmlns:a="http://schemas.openxmlformats.org/drawingml/2006/main" prst="line">
+            <a:avLst/>
+          </a:prstGeom>
+          <a:noFill xmlns:a="http://schemas.openxmlformats.org/drawingml/2006/main"/>
+          <a:ln xmlns:a="http://schemas.openxmlformats.org/drawingml/2006/main" w="19050">
+            <a:solidFill>
+              <a:srgbClr val="ADB8C5"/>
+            </a:solidFill>
+            <a:prstDash val="solid"/>
+          </a:ln>
+        </p:spPr>
+      </p:sp>
+      <p:sp>
+        <p:nvSpPr>
           <p:cNvPr id="12" name="">
             <a:extLst xmlns:a="http://schemas.openxmlformats.org/drawingml/2006/main">
               <a:ext uri="{FF2B5EF4-FFF2-40B4-BE49-F238E27FC236}">
-                <a16:creationId xmlns:a16="http://schemas.microsoft.com/office/drawing/2014/main" id="{49917F71-8501-4F40-8DB1-090D3188208A}"/>
+                <a16:creationId xmlns:a16="http://schemas.microsoft.com/office/drawing/2014/main" id="{28871F58-E428-4B89-A5B2-C5AF602201AA}"/>
+              </a:ext>
+            </a:extLst>
+          </p:cNvPr>
+          <p:cNvSpPr>
+            <a:spLocks xmlns:a="http://schemas.openxmlformats.org/drawingml/2006/main" noGrp="1"/>
+          </p:cNvSpPr>
+          <p:nvPr/>
+        </p:nvSpPr>
+        <p:spPr>
+          <a:xfrm xmlns:a="http://schemas.openxmlformats.org/drawingml/2006/main">
+            <a:off x="3086100" y="3905250"/>
+            <a:ext cx="247650" cy="952500"/>
+          </a:xfrm>
+          <a:prstGeom xmlns:a="http://schemas.openxmlformats.org/drawingml/2006/main" prst="rect">
+            <a:avLst/>
+          </a:prstGeom>
+          <a:solidFill xmlns:a="http://schemas.openxmlformats.org/drawingml/2006/main">
+            <a:srgbClr val="28C7F7"/>
+          </a:solidFill>
+          <a:ln xmlns:a="http://schemas.openxmlformats.org/drawingml/2006/main" w="0">
+            <a:solidFill>
+              <a:srgbClr val="28C7F7"/>
+            </a:solidFill>
+            <a:prstDash val="solid"/>
+          </a:ln>
+        </p:spPr>
+      </p:sp>
+      <p:sp>
+        <p:nvSpPr>
+          <p:cNvPr id="13" name="">
+            <a:extLst xmlns:a="http://schemas.openxmlformats.org/drawingml/2006/main">
+              <a:ext uri="{FF2B5EF4-FFF2-40B4-BE49-F238E27FC236}">
+                <a16:creationId xmlns:a16="http://schemas.microsoft.com/office/drawing/2014/main" id="{2890D960-6021-4498-ACAB-A10213C8C63F}"/>
+              </a:ext>
+            </a:extLst>
+          </p:cNvPr>
+          <p:cNvSpPr>
+            <a:spLocks xmlns:a="http://schemas.openxmlformats.org/drawingml/2006/main" noGrp="1"/>
+          </p:cNvSpPr>
+          <p:nvPr/>
+        </p:nvSpPr>
+        <p:spPr>
+          <a:xfrm xmlns:a="http://schemas.openxmlformats.org/drawingml/2006/main">
+            <a:off x="1333500" y="4933950"/>
+            <a:ext cx="3810000" cy="247650"/>
+          </a:xfrm>
+          <a:prstGeom xmlns:a="http://schemas.openxmlformats.org/drawingml/2006/main" prst="rect">
+            <a:avLst/>
+          </a:prstGeom>
+          <a:noFill xmlns:a="http://schemas.openxmlformats.org/drawingml/2006/main"/>
+          <a:ln xmlns:a="http://schemas.openxmlformats.org/drawingml/2006/main" w="0">
+            <a:noFill/>
+          </a:ln>
+        </p:spPr>
+        <p:txBody>
+          <a:bodyPr xmlns:a="http://schemas.openxmlformats.org/drawingml/2006/main" wrap="square" lIns="0" tIns="0" rIns="0" bIns="0" anchor="ctr">
+            <a:noAutofit/>
+          </a:bodyPr>
+          <a:lstStyle xmlns:a="http://schemas.openxmlformats.org/drawingml/2006/main"/>
+          <a:p xmlns:a="http://schemas.openxmlformats.org/drawingml/2006/main">
+            <a:pPr algn="ctr">
+              <a:defRPr sz="1575" b="1">
+                <a:solidFill>
+                  <a:srgbClr val="28C7F7"/>
+                </a:solidFill>
+                <a:latin typeface="Roboto"/>
+                <a:ea typeface="Roboto"/>
+                <a:cs typeface="Roboto"/>
+              </a:defRPr>
+            </a:pPr>
+            <a:r>
+              <a:rPr sz="1575" b="1">
+                <a:solidFill>
+                  <a:srgbClr val="28C7F7"/>
+                </a:solidFill>
+                <a:latin typeface="Roboto"/>
+                <a:ea typeface="Roboto"/>
+                <a:cs typeface="Roboto"/>
+              </a:rPr>
+              <a:t>One fixed result</a:t>
+            </a:r>
+          </a:p>
+        </p:txBody>
+      </p:sp>
+      <p:sp>
+        <p:nvSpPr>
+          <p:cNvPr id="14" name="">
+            <a:extLst xmlns:a="http://schemas.openxmlformats.org/drawingml/2006/main">
+              <a:ext uri="{FF2B5EF4-FFF2-40B4-BE49-F238E27FC236}">
+                <a16:creationId xmlns:a16="http://schemas.microsoft.com/office/drawing/2014/main" id="{B8C94795-095B-4657-A1BD-709142578DF3}"/>
+              </a:ext>
+            </a:extLst>
+          </p:cNvPr>
+          <p:cNvSpPr>
+            <a:spLocks xmlns:a="http://schemas.openxmlformats.org/drawingml/2006/main" noGrp="1"/>
+          </p:cNvSpPr>
+          <p:nvPr/>
+        </p:nvSpPr>
+        <p:spPr>
+          <a:xfrm xmlns:a="http://schemas.openxmlformats.org/drawingml/2006/main">
+            <a:off x="7429500" y="4705350"/>
+            <a:ext cx="200025" cy="152400"/>
+          </a:xfrm>
+          <a:prstGeom xmlns:a="http://schemas.openxmlformats.org/drawingml/2006/main" prst="rect">
+            <a:avLst/>
+          </a:prstGeom>
+          <a:solidFill xmlns:a="http://schemas.openxmlformats.org/drawingml/2006/main">
+            <a:srgbClr val="F5B61C"/>
+          </a:solidFill>
+          <a:ln xmlns:a="http://schemas.openxmlformats.org/drawingml/2006/main" w="0">
+            <a:solidFill>
+              <a:srgbClr val="F5B61C"/>
+            </a:solidFill>
+            <a:prstDash val="solid"/>
+          </a:ln>
+        </p:spPr>
+      </p:sp>
+      <p:sp>
+        <p:nvSpPr>
+          <p:cNvPr id="15" name="">
+            <a:extLst xmlns:a="http://schemas.openxmlformats.org/drawingml/2006/main">
+              <a:ext uri="{FF2B5EF4-FFF2-40B4-BE49-F238E27FC236}">
+                <a16:creationId xmlns:a16="http://schemas.microsoft.com/office/drawing/2014/main" id="{7BA53C91-ACF5-432A-A807-6F6231F8FB12}"/>
+              </a:ext>
+            </a:extLst>
+          </p:cNvPr>
+          <p:cNvSpPr>
+            <a:spLocks xmlns:a="http://schemas.openxmlformats.org/drawingml/2006/main" noGrp="1"/>
+          </p:cNvSpPr>
+          <p:nvPr/>
+        </p:nvSpPr>
+        <p:spPr>
+          <a:xfrm xmlns:a="http://schemas.openxmlformats.org/drawingml/2006/main">
+            <a:off x="7705725" y="4591050"/>
+            <a:ext cx="200025" cy="266700"/>
+          </a:xfrm>
+          <a:prstGeom xmlns:a="http://schemas.openxmlformats.org/drawingml/2006/main" prst="rect">
+            <a:avLst/>
+          </a:prstGeom>
+          <a:solidFill xmlns:a="http://schemas.openxmlformats.org/drawingml/2006/main">
+            <a:srgbClr val="F5B61C"/>
+          </a:solidFill>
+          <a:ln xmlns:a="http://schemas.openxmlformats.org/drawingml/2006/main" w="0">
+            <a:solidFill>
+              <a:srgbClr val="F5B61C"/>
+            </a:solidFill>
+            <a:prstDash val="solid"/>
+          </a:ln>
+        </p:spPr>
+      </p:sp>
+      <p:sp>
+        <p:nvSpPr>
+          <p:cNvPr id="16" name="">
+            <a:extLst xmlns:a="http://schemas.openxmlformats.org/drawingml/2006/main">
+              <a:ext uri="{FF2B5EF4-FFF2-40B4-BE49-F238E27FC236}">
+                <a16:creationId xmlns:a16="http://schemas.microsoft.com/office/drawing/2014/main" id="{F29A7675-D700-4DFE-B798-C9B9F391AFDD}"/>
+              </a:ext>
+            </a:extLst>
+          </p:cNvPr>
+          <p:cNvSpPr>
+            <a:spLocks xmlns:a="http://schemas.openxmlformats.org/drawingml/2006/main" noGrp="1"/>
+          </p:cNvSpPr>
+          <p:nvPr/>
+        </p:nvSpPr>
+        <p:spPr>
+          <a:xfrm xmlns:a="http://schemas.openxmlformats.org/drawingml/2006/main">
+            <a:off x="7981950" y="4400550"/>
+            <a:ext cx="200025" cy="457200"/>
+          </a:xfrm>
+          <a:prstGeom xmlns:a="http://schemas.openxmlformats.org/drawingml/2006/main" prst="rect">
+            <a:avLst/>
+          </a:prstGeom>
+          <a:solidFill xmlns:a="http://schemas.openxmlformats.org/drawingml/2006/main">
+            <a:srgbClr val="28C7F7"/>
+          </a:solidFill>
+          <a:ln xmlns:a="http://schemas.openxmlformats.org/drawingml/2006/main" w="0">
+            <a:solidFill>
+              <a:srgbClr val="28C7F7"/>
+            </a:solidFill>
+            <a:prstDash val="solid"/>
+          </a:ln>
+        </p:spPr>
+      </p:sp>
+      <p:sp>
+        <p:nvSpPr>
+          <p:cNvPr id="17" name="">
+            <a:extLst xmlns:a="http://schemas.openxmlformats.org/drawingml/2006/main">
+              <a:ext uri="{FF2B5EF4-FFF2-40B4-BE49-F238E27FC236}">
+                <a16:creationId xmlns:a16="http://schemas.microsoft.com/office/drawing/2014/main" id="{B1A1EB81-CCF7-4167-AFC3-DB4BA9FB77A3}"/>
+              </a:ext>
+            </a:extLst>
+          </p:cNvPr>
+          <p:cNvSpPr>
+            <a:spLocks xmlns:a="http://schemas.openxmlformats.org/drawingml/2006/main" noGrp="1"/>
+          </p:cNvSpPr>
+          <p:nvPr/>
+        </p:nvSpPr>
+        <p:spPr>
+          <a:xfrm xmlns:a="http://schemas.openxmlformats.org/drawingml/2006/main">
+            <a:off x="8258175" y="4133850"/>
+            <a:ext cx="200025" cy="723900"/>
+          </a:xfrm>
+          <a:prstGeom xmlns:a="http://schemas.openxmlformats.org/drawingml/2006/main" prst="rect">
+            <a:avLst/>
+          </a:prstGeom>
+          <a:solidFill xmlns:a="http://schemas.openxmlformats.org/drawingml/2006/main">
+            <a:srgbClr val="28C7F7"/>
+          </a:solidFill>
+          <a:ln xmlns:a="http://schemas.openxmlformats.org/drawingml/2006/main" w="0">
+            <a:solidFill>
+              <a:srgbClr val="28C7F7"/>
+            </a:solidFill>
+            <a:prstDash val="solid"/>
+          </a:ln>
+        </p:spPr>
+      </p:sp>
+      <p:sp>
+        <p:nvSpPr>
+          <p:cNvPr id="18" name="">
+            <a:extLst xmlns:a="http://schemas.openxmlformats.org/drawingml/2006/main">
+              <a:ext uri="{FF2B5EF4-FFF2-40B4-BE49-F238E27FC236}">
+                <a16:creationId xmlns:a16="http://schemas.microsoft.com/office/drawing/2014/main" id="{3EF8CEA4-1B7A-4937-81BD-5A10DE7E45F2}"/>
+              </a:ext>
+            </a:extLst>
+          </p:cNvPr>
+          <p:cNvSpPr>
+            <a:spLocks xmlns:a="http://schemas.openxmlformats.org/drawingml/2006/main" noGrp="1"/>
+          </p:cNvSpPr>
+          <p:nvPr/>
+        </p:nvSpPr>
+        <p:spPr>
+          <a:xfrm xmlns:a="http://schemas.openxmlformats.org/drawingml/2006/main">
+            <a:off x="8534400" y="3857625"/>
+            <a:ext cx="200025" cy="1000125"/>
+          </a:xfrm>
+          <a:prstGeom xmlns:a="http://schemas.openxmlformats.org/drawingml/2006/main" prst="rect">
+            <a:avLst/>
+          </a:prstGeom>
+          <a:solidFill xmlns:a="http://schemas.openxmlformats.org/drawingml/2006/main">
+            <a:srgbClr val="28C7F7"/>
+          </a:solidFill>
+          <a:ln xmlns:a="http://schemas.openxmlformats.org/drawingml/2006/main" w="0">
+            <a:solidFill>
+              <a:srgbClr val="28C7F7"/>
+            </a:solidFill>
+            <a:prstDash val="solid"/>
+          </a:ln>
+        </p:spPr>
+      </p:sp>
+      <p:sp>
+        <p:nvSpPr>
+          <p:cNvPr id="19" name="">
+            <a:extLst xmlns:a="http://schemas.openxmlformats.org/drawingml/2006/main">
+              <a:ext uri="{FF2B5EF4-FFF2-40B4-BE49-F238E27FC236}">
+                <a16:creationId xmlns:a16="http://schemas.microsoft.com/office/drawing/2014/main" id="{034CFAF5-E5C3-4AE2-981D-771525581660}"/>
+              </a:ext>
+            </a:extLst>
+          </p:cNvPr>
+          <p:cNvSpPr>
+            <a:spLocks xmlns:a="http://schemas.openxmlformats.org/drawingml/2006/main" noGrp="1"/>
+          </p:cNvSpPr>
+          <p:nvPr/>
+        </p:nvSpPr>
+        <p:spPr>
+          <a:xfrm xmlns:a="http://schemas.openxmlformats.org/drawingml/2006/main">
+            <a:off x="8810625" y="3695700"/>
+            <a:ext cx="200025" cy="1162050"/>
+          </a:xfrm>
+          <a:prstGeom xmlns:a="http://schemas.openxmlformats.org/drawingml/2006/main" prst="rect">
+            <a:avLst/>
+          </a:prstGeom>
+          <a:solidFill xmlns:a="http://schemas.openxmlformats.org/drawingml/2006/main">
+            <a:srgbClr val="28C7F7"/>
+          </a:solidFill>
+          <a:ln xmlns:a="http://schemas.openxmlformats.org/drawingml/2006/main" w="0">
+            <a:solidFill>
+              <a:srgbClr val="28C7F7"/>
+            </a:solidFill>
+            <a:prstDash val="solid"/>
+          </a:ln>
+        </p:spPr>
+      </p:sp>
+      <p:sp>
+        <p:nvSpPr>
+          <p:cNvPr id="20" name="">
+            <a:extLst xmlns:a="http://schemas.openxmlformats.org/drawingml/2006/main">
+              <a:ext uri="{FF2B5EF4-FFF2-40B4-BE49-F238E27FC236}">
+                <a16:creationId xmlns:a16="http://schemas.microsoft.com/office/drawing/2014/main" id="{FB7614DF-75C2-4607-8445-D693DEC15EE2}"/>
+              </a:ext>
+            </a:extLst>
+          </p:cNvPr>
+          <p:cNvSpPr>
+            <a:spLocks xmlns:a="http://schemas.openxmlformats.org/drawingml/2006/main" noGrp="1"/>
+          </p:cNvSpPr>
+          <p:nvPr/>
+        </p:nvSpPr>
+        <p:spPr>
+          <a:xfrm xmlns:a="http://schemas.openxmlformats.org/drawingml/2006/main">
+            <a:off x="9086850" y="3857625"/>
+            <a:ext cx="200025" cy="1000125"/>
+          </a:xfrm>
+          <a:prstGeom xmlns:a="http://schemas.openxmlformats.org/drawingml/2006/main" prst="rect">
+            <a:avLst/>
+          </a:prstGeom>
+          <a:solidFill xmlns:a="http://schemas.openxmlformats.org/drawingml/2006/main">
+            <a:srgbClr val="28C7F7"/>
+          </a:solidFill>
+          <a:ln xmlns:a="http://schemas.openxmlformats.org/drawingml/2006/main" w="0">
+            <a:solidFill>
+              <a:srgbClr val="28C7F7"/>
+            </a:solidFill>
+            <a:prstDash val="solid"/>
+          </a:ln>
+        </p:spPr>
+      </p:sp>
+      <p:sp>
+        <p:nvSpPr>
+          <p:cNvPr id="21" name="">
+            <a:extLst xmlns:a="http://schemas.openxmlformats.org/drawingml/2006/main">
+              <a:ext uri="{FF2B5EF4-FFF2-40B4-BE49-F238E27FC236}">
+                <a16:creationId xmlns:a16="http://schemas.microsoft.com/office/drawing/2014/main" id="{BF0F568F-B43B-4D2B-990D-7A9DF6E240BB}"/>
+              </a:ext>
+            </a:extLst>
+          </p:cNvPr>
+          <p:cNvSpPr>
+            <a:spLocks xmlns:a="http://schemas.openxmlformats.org/drawingml/2006/main" noGrp="1"/>
+          </p:cNvSpPr>
+          <p:nvPr/>
+        </p:nvSpPr>
+        <p:spPr>
+          <a:xfrm xmlns:a="http://schemas.openxmlformats.org/drawingml/2006/main">
+            <a:off x="9363075" y="4133850"/>
+            <a:ext cx="200025" cy="723900"/>
+          </a:xfrm>
+          <a:prstGeom xmlns:a="http://schemas.openxmlformats.org/drawingml/2006/main" prst="rect">
+            <a:avLst/>
+          </a:prstGeom>
+          <a:solidFill xmlns:a="http://schemas.openxmlformats.org/drawingml/2006/main">
+            <a:srgbClr val="28C7F7"/>
+          </a:solidFill>
+          <a:ln xmlns:a="http://schemas.openxmlformats.org/drawingml/2006/main" w="0">
+            <a:solidFill>
+              <a:srgbClr val="28C7F7"/>
+            </a:solidFill>
+            <a:prstDash val="solid"/>
+          </a:ln>
+        </p:spPr>
+      </p:sp>
+      <p:sp>
+        <p:nvSpPr>
+          <p:cNvPr id="22" name="">
+            <a:extLst xmlns:a="http://schemas.openxmlformats.org/drawingml/2006/main">
+              <a:ext uri="{FF2B5EF4-FFF2-40B4-BE49-F238E27FC236}">
+                <a16:creationId xmlns:a16="http://schemas.microsoft.com/office/drawing/2014/main" id="{A4002634-7FA8-4776-B76C-5DF2D3C2676C}"/>
+              </a:ext>
+            </a:extLst>
+          </p:cNvPr>
+          <p:cNvSpPr>
+            <a:spLocks xmlns:a="http://schemas.openxmlformats.org/drawingml/2006/main" noGrp="1"/>
+          </p:cNvSpPr>
+          <p:nvPr/>
+        </p:nvSpPr>
+        <p:spPr>
+          <a:xfrm xmlns:a="http://schemas.openxmlformats.org/drawingml/2006/main">
+            <a:off x="9639300" y="4400550"/>
+            <a:ext cx="200025" cy="457200"/>
+          </a:xfrm>
+          <a:prstGeom xmlns:a="http://schemas.openxmlformats.org/drawingml/2006/main" prst="rect">
+            <a:avLst/>
+          </a:prstGeom>
+          <a:solidFill xmlns:a="http://schemas.openxmlformats.org/drawingml/2006/main">
+            <a:srgbClr val="28C7F7"/>
+          </a:solidFill>
+          <a:ln xmlns:a="http://schemas.openxmlformats.org/drawingml/2006/main" w="0">
+            <a:solidFill>
+              <a:srgbClr val="28C7F7"/>
+            </a:solidFill>
+            <a:prstDash val="solid"/>
+          </a:ln>
+        </p:spPr>
+      </p:sp>
+      <p:sp>
+        <p:nvSpPr>
+          <p:cNvPr id="23" name="">
+            <a:extLst xmlns:a="http://schemas.openxmlformats.org/drawingml/2006/main">
+              <a:ext uri="{FF2B5EF4-FFF2-40B4-BE49-F238E27FC236}">
+                <a16:creationId xmlns:a16="http://schemas.microsoft.com/office/drawing/2014/main" id="{D1D90329-5479-415D-9CB5-DC8611B860B2}"/>
+              </a:ext>
+            </a:extLst>
+          </p:cNvPr>
+          <p:cNvSpPr>
+            <a:spLocks xmlns:a="http://schemas.openxmlformats.org/drawingml/2006/main" noGrp="1"/>
+          </p:cNvSpPr>
+          <p:nvPr/>
+        </p:nvSpPr>
+        <p:spPr>
+          <a:xfrm xmlns:a="http://schemas.openxmlformats.org/drawingml/2006/main">
+            <a:off x="9915525" y="4591050"/>
+            <a:ext cx="200025" cy="266700"/>
+          </a:xfrm>
+          <a:prstGeom xmlns:a="http://schemas.openxmlformats.org/drawingml/2006/main" prst="rect">
+            <a:avLst/>
+          </a:prstGeom>
+          <a:solidFill xmlns:a="http://schemas.openxmlformats.org/drawingml/2006/main">
+            <a:srgbClr val="F5B61C"/>
+          </a:solidFill>
+          <a:ln xmlns:a="http://schemas.openxmlformats.org/drawingml/2006/main" w="0">
+            <a:solidFill>
+              <a:srgbClr val="F5B61C"/>
+            </a:solidFill>
+            <a:prstDash val="solid"/>
+          </a:ln>
+        </p:spPr>
+      </p:sp>
+      <p:sp>
+        <p:nvSpPr>
+          <p:cNvPr id="24" name="">
+            <a:extLst xmlns:a="http://schemas.openxmlformats.org/drawingml/2006/main">
+              <a:ext uri="{FF2B5EF4-FFF2-40B4-BE49-F238E27FC236}">
+                <a16:creationId xmlns:a16="http://schemas.microsoft.com/office/drawing/2014/main" id="{EDD31ED7-ABCF-4473-B50B-1BEB2F617152}"/>
+              </a:ext>
+            </a:extLst>
+          </p:cNvPr>
+          <p:cNvSpPr>
+            <a:spLocks xmlns:a="http://schemas.openxmlformats.org/drawingml/2006/main" noGrp="1"/>
+          </p:cNvSpPr>
+          <p:nvPr/>
+        </p:nvSpPr>
+        <p:spPr>
+          <a:xfrm xmlns:a="http://schemas.openxmlformats.org/drawingml/2006/main">
+            <a:off x="10191750" y="4705350"/>
+            <a:ext cx="200025" cy="152400"/>
+          </a:xfrm>
+          <a:prstGeom xmlns:a="http://schemas.openxmlformats.org/drawingml/2006/main" prst="rect">
+            <a:avLst/>
+          </a:prstGeom>
+          <a:solidFill xmlns:a="http://schemas.openxmlformats.org/drawingml/2006/main">
+            <a:srgbClr val="F5B61C"/>
+          </a:solidFill>
+          <a:ln xmlns:a="http://schemas.openxmlformats.org/drawingml/2006/main" w="0">
+            <a:solidFill>
+              <a:srgbClr val="F5B61C"/>
+            </a:solidFill>
+            <a:prstDash val="solid"/>
+          </a:ln>
+        </p:spPr>
+      </p:sp>
+      <p:sp>
+        <p:nvSpPr>
+          <p:cNvPr id="25" name="">
+            <a:extLst xmlns:a="http://schemas.openxmlformats.org/drawingml/2006/main">
+              <a:ext uri="{FF2B5EF4-FFF2-40B4-BE49-F238E27FC236}">
+                <a16:creationId xmlns:a16="http://schemas.microsoft.com/office/drawing/2014/main" id="{0CEFA7BC-EABA-4253-844A-5994783A693F}"/>
+              </a:ext>
+            </a:extLst>
+          </p:cNvPr>
+          <p:cNvSpPr>
+            <a:spLocks xmlns:a="http://schemas.openxmlformats.org/drawingml/2006/main" noGrp="1"/>
+          </p:cNvSpPr>
+          <p:nvPr/>
+        </p:nvSpPr>
+        <p:spPr>
+          <a:xfrm xmlns:a="http://schemas.openxmlformats.org/drawingml/2006/main" flipH="0" flipV="0">
+            <a:off x="6619875" y="4857750"/>
+            <a:ext cx="4867275" cy="0"/>
+          </a:xfrm>
+          <a:prstGeom xmlns:a="http://schemas.openxmlformats.org/drawingml/2006/main" prst="line">
+            <a:avLst/>
+          </a:prstGeom>
+          <a:noFill xmlns:a="http://schemas.openxmlformats.org/drawingml/2006/main"/>
+          <a:ln xmlns:a="http://schemas.openxmlformats.org/drawingml/2006/main" w="19050">
+            <a:solidFill>
+              <a:srgbClr val="ADB8C5"/>
+            </a:solidFill>
+            <a:prstDash val="solid"/>
+          </a:ln>
+        </p:spPr>
+      </p:sp>
+      <p:sp>
+        <p:nvSpPr>
+          <p:cNvPr id="26" name="">
+            <a:extLst xmlns:a="http://schemas.openxmlformats.org/drawingml/2006/main">
+              <a:ext uri="{FF2B5EF4-FFF2-40B4-BE49-F238E27FC236}">
+                <a16:creationId xmlns:a16="http://schemas.microsoft.com/office/drawing/2014/main" id="{BF3C73E0-44E0-4EBB-A8E5-835F3B58804A}"/>
+              </a:ext>
+            </a:extLst>
+          </p:cNvPr>
+          <p:cNvSpPr>
+            <a:spLocks xmlns:a="http://schemas.openxmlformats.org/drawingml/2006/main" noGrp="1"/>
+          </p:cNvSpPr>
+          <p:nvPr/>
+        </p:nvSpPr>
+        <p:spPr>
+          <a:xfrm xmlns:a="http://schemas.openxmlformats.org/drawingml/2006/main">
+            <a:off x="6543675" y="4991100"/>
+            <a:ext cx="1381125" cy="371475"/>
+          </a:xfrm>
+          <a:prstGeom xmlns:a="http://schemas.openxmlformats.org/drawingml/2006/main" prst="rect">
+            <a:avLst/>
+          </a:prstGeom>
+          <a:noFill xmlns:a="http://schemas.openxmlformats.org/drawingml/2006/main"/>
+          <a:ln xmlns:a="http://schemas.openxmlformats.org/drawingml/2006/main" w="0">
+            <a:noFill/>
+          </a:ln>
+        </p:spPr>
+        <p:txBody>
+          <a:bodyPr xmlns:a="http://schemas.openxmlformats.org/drawingml/2006/main" wrap="square" lIns="0" tIns="0" rIns="0" bIns="0" anchor="ctr">
+            <a:noAutofit/>
+          </a:bodyPr>
+          <a:lstStyle xmlns:a="http://schemas.openxmlformats.org/drawingml/2006/main"/>
+          <a:p xmlns:a="http://schemas.openxmlformats.org/drawingml/2006/main">
+            <a:pPr algn="ctr">
+              <a:defRPr sz="1275" b="0">
+                <a:solidFill>
+                  <a:srgbClr val="F5B61C"/>
+                </a:solidFill>
+                <a:latin typeface="Roboto"/>
+                <a:ea typeface="Roboto"/>
+                <a:cs typeface="Roboto"/>
+              </a:defRPr>
+            </a:pPr>
+            <a:r>
+              <a:rPr sz="1275" b="0">
+                <a:solidFill>
+                  <a:srgbClr val="F5B61C"/>
+                </a:solidFill>
+                <a:latin typeface="Roboto"/>
+                <a:ea typeface="Roboto"/>
+                <a:cs typeface="Roboto"/>
+              </a:rPr>
+              <a:t>Less frequent outcomes</a:t>
+            </a:r>
+          </a:p>
+        </p:txBody>
+      </p:sp>
+      <p:sp>
+        <p:nvSpPr>
+          <p:cNvPr id="27" name="">
+            <a:extLst xmlns:a="http://schemas.openxmlformats.org/drawingml/2006/main">
+              <a:ext uri="{FF2B5EF4-FFF2-40B4-BE49-F238E27FC236}">
+                <a16:creationId xmlns:a16="http://schemas.microsoft.com/office/drawing/2014/main" id="{74821213-4213-45C2-81FE-E7D33C4E0C46}"/>
+              </a:ext>
+            </a:extLst>
+          </p:cNvPr>
+          <p:cNvSpPr>
+            <a:spLocks xmlns:a="http://schemas.openxmlformats.org/drawingml/2006/main" noGrp="1"/>
+          </p:cNvSpPr>
+          <p:nvPr/>
+        </p:nvSpPr>
+        <p:spPr>
+          <a:xfrm xmlns:a="http://schemas.openxmlformats.org/drawingml/2006/main">
+            <a:off x="7991475" y="4962525"/>
+            <a:ext cx="2143125" cy="266700"/>
+          </a:xfrm>
+          <a:prstGeom xmlns:a="http://schemas.openxmlformats.org/drawingml/2006/main" prst="rect">
+            <a:avLst/>
+          </a:prstGeom>
+          <a:noFill xmlns:a="http://schemas.openxmlformats.org/drawingml/2006/main"/>
+          <a:ln xmlns:a="http://schemas.openxmlformats.org/drawingml/2006/main" w="0">
+            <a:noFill/>
+          </a:ln>
+        </p:spPr>
+        <p:txBody>
+          <a:bodyPr xmlns:a="http://schemas.openxmlformats.org/drawingml/2006/main" wrap="square" lIns="0" tIns="0" rIns="0" bIns="0" anchor="ctr">
+            <a:noAutofit/>
+          </a:bodyPr>
+          <a:lstStyle xmlns:a="http://schemas.openxmlformats.org/drawingml/2006/main"/>
+          <a:p xmlns:a="http://schemas.openxmlformats.org/drawingml/2006/main">
+            <a:pPr algn="ctr">
+              <a:defRPr sz="1500" b="1">
+                <a:solidFill>
+                  <a:srgbClr val="28C7F7"/>
+                </a:solidFill>
+                <a:latin typeface="Roboto"/>
+                <a:ea typeface="Roboto"/>
+                <a:cs typeface="Roboto"/>
+              </a:defRPr>
+            </a:pPr>
+            <a:r>
+              <a:rPr sz="1500" b="1">
+                <a:solidFill>
+                  <a:srgbClr val="28C7F7"/>
+                </a:solidFill>
+                <a:latin typeface="Roboto"/>
+                <a:ea typeface="Roboto"/>
+                <a:cs typeface="Roboto"/>
+              </a:rPr>
+              <a:t>Useful variation</a:t>
+            </a:r>
+          </a:p>
+        </p:txBody>
+      </p:sp>
+      <p:sp>
+        <p:nvSpPr>
+          <p:cNvPr id="28" name="">
+            <a:extLst xmlns:a="http://schemas.openxmlformats.org/drawingml/2006/main">
+              <a:ext uri="{FF2B5EF4-FFF2-40B4-BE49-F238E27FC236}">
+                <a16:creationId xmlns:a16="http://schemas.microsoft.com/office/drawing/2014/main" id="{F5AE842C-6B0B-41D1-AD19-69E95EC9D849}"/>
+              </a:ext>
+            </a:extLst>
+          </p:cNvPr>
+          <p:cNvSpPr>
+            <a:spLocks xmlns:a="http://schemas.openxmlformats.org/drawingml/2006/main" noGrp="1"/>
+          </p:cNvSpPr>
+          <p:nvPr/>
+        </p:nvSpPr>
+        <p:spPr>
+          <a:xfrm xmlns:a="http://schemas.openxmlformats.org/drawingml/2006/main">
+            <a:off x="10201275" y="4991100"/>
+            <a:ext cx="1381125" cy="371475"/>
+          </a:xfrm>
+          <a:prstGeom xmlns:a="http://schemas.openxmlformats.org/drawingml/2006/main" prst="rect">
+            <a:avLst/>
+          </a:prstGeom>
+          <a:noFill xmlns:a="http://schemas.openxmlformats.org/drawingml/2006/main"/>
+          <a:ln xmlns:a="http://schemas.openxmlformats.org/drawingml/2006/main" w="0">
+            <a:noFill/>
+          </a:ln>
+        </p:spPr>
+        <p:txBody>
+          <a:bodyPr xmlns:a="http://schemas.openxmlformats.org/drawingml/2006/main" wrap="square" lIns="0" tIns="0" rIns="0" bIns="0" anchor="ctr">
+            <a:noAutofit/>
+          </a:bodyPr>
+          <a:lstStyle xmlns:a="http://schemas.openxmlformats.org/drawingml/2006/main"/>
+          <a:p xmlns:a="http://schemas.openxmlformats.org/drawingml/2006/main">
+            <a:pPr algn="ctr">
+              <a:defRPr sz="1275" b="0">
+                <a:solidFill>
+                  <a:srgbClr val="F5B61C"/>
+                </a:solidFill>
+                <a:latin typeface="Roboto"/>
+                <a:ea typeface="Roboto"/>
+                <a:cs typeface="Roboto"/>
+              </a:defRPr>
+            </a:pPr>
+            <a:r>
+              <a:rPr sz="1275" b="0">
+                <a:solidFill>
+                  <a:srgbClr val="F5B61C"/>
+                </a:solidFill>
+                <a:latin typeface="Roboto"/>
+                <a:ea typeface="Roboto"/>
+                <a:cs typeface="Roboto"/>
+              </a:rPr>
+              <a:t>Less frequent outcomes</a:t>
+            </a:r>
+          </a:p>
+        </p:txBody>
+      </p:sp>
+      <p:sp>
+        <p:nvSpPr>
+          <p:cNvPr id="29" name="">
+            <a:extLst xmlns:a="http://schemas.openxmlformats.org/drawingml/2006/main">
+              <a:ext uri="{FF2B5EF4-FFF2-40B4-BE49-F238E27FC236}">
+                <a16:creationId xmlns:a16="http://schemas.microsoft.com/office/drawing/2014/main" id="{BAAA3C5D-17EF-4385-B99F-B2D521EE0207}"/>
+              </a:ext>
+            </a:extLst>
+          </p:cNvPr>
+          <p:cNvSpPr>
+            <a:spLocks xmlns:a="http://schemas.openxmlformats.org/drawingml/2006/main" noGrp="1"/>
+          </p:cNvSpPr>
+          <p:nvPr/>
+        </p:nvSpPr>
+        <p:spPr>
+          <a:xfrm xmlns:a="http://schemas.openxmlformats.org/drawingml/2006/main">
+            <a:off x="609600" y="5362575"/>
+            <a:ext cx="5257800" cy="257175"/>
+          </a:xfrm>
+          <a:prstGeom xmlns:a="http://schemas.openxmlformats.org/drawingml/2006/main" prst="rect">
+            <a:avLst/>
+          </a:prstGeom>
+          <a:noFill xmlns:a="http://schemas.openxmlformats.org/drawingml/2006/main"/>
+          <a:ln xmlns:a="http://schemas.openxmlformats.org/drawingml/2006/main" w="0">
+            <a:noFill/>
+          </a:ln>
+        </p:spPr>
+        <p:txBody>
+          <a:bodyPr xmlns:a="http://schemas.openxmlformats.org/drawingml/2006/main" wrap="square" lIns="0" tIns="0" rIns="0" bIns="0" anchor="ctr">
+            <a:noAutofit/>
+          </a:bodyPr>
+          <a:lstStyle xmlns:a="http://schemas.openxmlformats.org/drawingml/2006/main"/>
+          <a:p xmlns:a="http://schemas.openxmlformats.org/drawingml/2006/main">
+            <a:pPr algn="l">
+              <a:defRPr sz="1500" b="0">
+                <a:solidFill>
+                  <a:srgbClr val="F4F7FA"/>
+                </a:solidFill>
+                <a:latin typeface="Roboto"/>
+                <a:ea typeface="Roboto"/>
+                <a:cs typeface="Roboto"/>
+              </a:defRPr>
+            </a:pPr>
+            <a:r>
+              <a:rPr sz="1500" b="0">
+                <a:solidFill>
+                  <a:srgbClr val="F4F7FA"/>
+                </a:solidFill>
+                <a:latin typeface="Roboto"/>
+                <a:ea typeface="Roboto"/>
+                <a:cs typeface="Roboto"/>
+              </a:rPr>
+              <a:t>Same input, state and version: same result.</a:t>
+            </a:r>
+          </a:p>
+        </p:txBody>
+      </p:sp>
+      <p:sp>
+        <p:nvSpPr>
+          <p:cNvPr id="30" name="">
+            <a:extLst xmlns:a="http://schemas.openxmlformats.org/drawingml/2006/main">
+              <a:ext uri="{FF2B5EF4-FFF2-40B4-BE49-F238E27FC236}">
+                <a16:creationId xmlns:a16="http://schemas.microsoft.com/office/drawing/2014/main" id="{3673EEDA-0821-4CCB-A0D4-0FE4C2EFFCF8}"/>
+              </a:ext>
+            </a:extLst>
+          </p:cNvPr>
+          <p:cNvSpPr>
+            <a:spLocks xmlns:a="http://schemas.openxmlformats.org/drawingml/2006/main" noGrp="1"/>
+          </p:cNvSpPr>
+          <p:nvPr/>
+        </p:nvSpPr>
+        <p:spPr>
+          <a:xfrm xmlns:a="http://schemas.openxmlformats.org/drawingml/2006/main">
+            <a:off x="6324600" y="5362575"/>
+            <a:ext cx="5257800" cy="257175"/>
+          </a:xfrm>
+          <a:prstGeom xmlns:a="http://schemas.openxmlformats.org/drawingml/2006/main" prst="rect">
+            <a:avLst/>
+          </a:prstGeom>
+          <a:noFill xmlns:a="http://schemas.openxmlformats.org/drawingml/2006/main"/>
+          <a:ln xmlns:a="http://schemas.openxmlformats.org/drawingml/2006/main" w="0">
+            <a:noFill/>
+          </a:ln>
+        </p:spPr>
+        <p:txBody>
+          <a:bodyPr xmlns:a="http://schemas.openxmlformats.org/drawingml/2006/main" wrap="square" lIns="0" tIns="0" rIns="0" bIns="0" anchor="ctr">
+            <a:noAutofit/>
+          </a:bodyPr>
+          <a:lstStyle xmlns:a="http://schemas.openxmlformats.org/drawingml/2006/main"/>
+          <a:p xmlns:a="http://schemas.openxmlformats.org/drawingml/2006/main">
+            <a:pPr algn="l">
+              <a:defRPr sz="1500" b="0">
+                <a:solidFill>
+                  <a:srgbClr val="F4F7FA"/>
+                </a:solidFill>
+                <a:latin typeface="Roboto"/>
+                <a:ea typeface="Roboto"/>
+                <a:cs typeface="Roboto"/>
+              </a:defRPr>
+            </a:pPr>
+            <a:r>
+              <a:rPr sz="1500" b="0">
+                <a:solidFill>
+                  <a:srgbClr val="F4F7FA"/>
+                </a:solidFill>
+                <a:latin typeface="Roboto"/>
+                <a:ea typeface="Roboto"/>
+                <a:cs typeface="Roboto"/>
+              </a:rPr>
+              <a:t>The same request can produce different results.</a:t>
+            </a:r>
+          </a:p>
+        </p:txBody>
+      </p:sp>
+      <p:sp>
+        <p:nvSpPr>
+          <p:cNvPr id="31" name="">
+            <a:extLst xmlns:a="http://schemas.openxmlformats.org/drawingml/2006/main">
+              <a:ext uri="{FF2B5EF4-FFF2-40B4-BE49-F238E27FC236}">
+                <a16:creationId xmlns:a16="http://schemas.microsoft.com/office/drawing/2014/main" id="{97FA0265-31D3-4719-8701-634E729CE77C}"/>
+              </a:ext>
+            </a:extLst>
+          </p:cNvPr>
+          <p:cNvSpPr>
+            <a:spLocks xmlns:a="http://schemas.openxmlformats.org/drawingml/2006/main" noGrp="1"/>
+          </p:cNvSpPr>
+          <p:nvPr/>
+        </p:nvSpPr>
+        <p:spPr>
+          <a:xfrm xmlns:a="http://schemas.openxmlformats.org/drawingml/2006/main" flipH="0" flipV="0">
+            <a:off x="609600" y="5734050"/>
+            <a:ext cx="10972800" cy="0"/>
+          </a:xfrm>
+          <a:prstGeom xmlns:a="http://schemas.openxmlformats.org/drawingml/2006/main" prst="line">
+            <a:avLst/>
+          </a:prstGeom>
+          <a:noFill xmlns:a="http://schemas.openxmlformats.org/drawingml/2006/main"/>
+          <a:ln xmlns:a="http://schemas.openxmlformats.org/drawingml/2006/main" w="19050">
+            <a:solidFill>
+              <a:srgbClr val="344454"/>
+            </a:solidFill>
+            <a:prstDash val="solid"/>
+          </a:ln>
+        </p:spPr>
+      </p:sp>
+      <p:sp>
+        <p:nvSpPr>
+          <p:cNvPr id="32" name="">
+            <a:extLst xmlns:a="http://schemas.openxmlformats.org/drawingml/2006/main">
+              <a:ext uri="{FF2B5EF4-FFF2-40B4-BE49-F238E27FC236}">
+                <a16:creationId xmlns:a16="http://schemas.microsoft.com/office/drawing/2014/main" id="{EA047E74-2673-4815-88A8-15DFC83C2388}"/>
               </a:ext>
             </a:extLst>
           </p:cNvPr>
@@ -22300,6 +23834,120 @@
                 <a:cs typeface="Roboto"/>
               </a:rPr>
               <a:t>Engineer the useful region of behavior.</a:t>
+            </a:r>
+          </a:p>
+        </p:txBody>
+      </p:sp>
+      <p:sp>
+        <p:nvSpPr>
+          <p:cNvPr id="33" name="">
+            <a:extLst xmlns:a="http://schemas.openxmlformats.org/drawingml/2006/main">
+              <a:ext uri="{FF2B5EF4-FFF2-40B4-BE49-F238E27FC236}">
+                <a16:creationId xmlns:a16="http://schemas.microsoft.com/office/drawing/2014/main" id="{9608C02F-40E9-4960-A392-3542A4E77537}"/>
+              </a:ext>
+            </a:extLst>
+          </p:cNvPr>
+          <p:cNvSpPr>
+            <a:spLocks xmlns:a="http://schemas.openxmlformats.org/drawingml/2006/main" noGrp="1"/>
+          </p:cNvSpPr>
+          <p:nvPr/>
+        </p:nvSpPr>
+        <p:spPr>
+          <a:xfrm xmlns:a="http://schemas.openxmlformats.org/drawingml/2006/main">
+            <a:off x="609600" y="5791200"/>
+            <a:ext cx="10972800" cy="238125"/>
+          </a:xfrm>
+          <a:prstGeom xmlns:a="http://schemas.openxmlformats.org/drawingml/2006/main" prst="rect">
+            <a:avLst/>
+          </a:prstGeom>
+          <a:noFill xmlns:a="http://schemas.openxmlformats.org/drawingml/2006/main"/>
+          <a:ln xmlns:a="http://schemas.openxmlformats.org/drawingml/2006/main" w="0">
+            <a:noFill/>
+          </a:ln>
+        </p:spPr>
+        <p:txBody>
+          <a:bodyPr xmlns:a="http://schemas.openxmlformats.org/drawingml/2006/main" wrap="square" lIns="0" tIns="0" rIns="0" bIns="0" anchor="ctr">
+            <a:noAutofit/>
+          </a:bodyPr>
+          <a:lstStyle xmlns:a="http://schemas.openxmlformats.org/drawingml/2006/main"/>
+          <a:p xmlns:a="http://schemas.openxmlformats.org/drawingml/2006/main">
+            <a:pPr algn="l">
+              <a:defRPr sz="1425" b="0">
+                <a:solidFill>
+                  <a:srgbClr val="ADB8C5"/>
+                </a:solidFill>
+                <a:latin typeface="Roboto"/>
+                <a:ea typeface="Roboto"/>
+                <a:cs typeface="Roboto"/>
+              </a:defRPr>
+            </a:pPr>
+            <a:r>
+              <a:rPr sz="1425" b="0">
+                <a:solidFill>
+                  <a:srgbClr val="ADB8C5"/>
+                </a:solidFill>
+                <a:latin typeface="Roboto"/>
+                <a:ea typeface="Roboto"/>
+                <a:cs typeface="Roboto"/>
+              </a:rPr>
+              <a:t>Distribution also depends on context, model and configuration.</a:t>
+            </a:r>
+          </a:p>
+        </p:txBody>
+      </p:sp>
+      <p:sp>
+        <p:nvSpPr>
+          <p:cNvPr id="34" name="">
+            <a:extLst xmlns:a="http://schemas.openxmlformats.org/drawingml/2006/main">
+              <a:ext uri="{FF2B5EF4-FFF2-40B4-BE49-F238E27FC236}">
+                <a16:creationId xmlns:a16="http://schemas.microsoft.com/office/drawing/2014/main" id="{27AA7403-9D33-43F9-915C-FECAE47D24CA}"/>
+              </a:ext>
+            </a:extLst>
+          </p:cNvPr>
+          <p:cNvSpPr>
+            <a:spLocks xmlns:a="http://schemas.openxmlformats.org/drawingml/2006/main" noGrp="1"/>
+          </p:cNvSpPr>
+          <p:nvPr/>
+        </p:nvSpPr>
+        <p:spPr>
+          <a:xfrm xmlns:a="http://schemas.openxmlformats.org/drawingml/2006/main">
+            <a:off x="609600" y="6438900"/>
+            <a:ext cx="10648950" cy="228600"/>
+          </a:xfrm>
+          <a:prstGeom xmlns:a="http://schemas.openxmlformats.org/drawingml/2006/main" prst="rect">
+            <a:avLst/>
+          </a:prstGeom>
+          <a:noFill xmlns:a="http://schemas.openxmlformats.org/drawingml/2006/main"/>
+          <a:ln xmlns:a="http://schemas.openxmlformats.org/drawingml/2006/main" w="0">
+            <a:noFill/>
+          </a:ln>
+        </p:spPr>
+        <p:txBody>
+          <a:bodyPr xmlns:a="http://schemas.openxmlformats.org/drawingml/2006/main" wrap="square" lIns="0" tIns="0" rIns="0" bIns="0" anchor="ctr">
+            <a:noAutofit/>
+          </a:bodyPr>
+          <a:lstStyle xmlns:a="http://schemas.openxmlformats.org/drawingml/2006/main"/>
+          <a:p xmlns:a="http://schemas.openxmlformats.org/drawingml/2006/main">
+            <a:pPr algn="l">
+              <a:defRPr sz="1350" b="0">
+                <a:solidFill>
+                  <a:srgbClr val="ADB8C5"/>
+                </a:solidFill>
+                <a:latin typeface="Roboto"/>
+                <a:ea typeface="Roboto"/>
+                <a:cs typeface="Roboto"/>
+              </a:defRPr>
+            </a:pPr>
+            <a:r>
+              <a:rPr sz="1350" b="0">
+                <a:solidFill>
+                  <a:srgbClr val="ADB8C5"/>
+                </a:solidFill>
+                <a:latin typeface="Roboto"/>
+                <a:ea typeface="Roboto"/>
+                <a:cs typeface="Roboto"/>
+              </a:rPr>
+              <a:t>Schematic distribution, not measured data. Shape depends on the task.</a:t>
             </a:r>
           </a:p>
         </p:txBody>
@@ -22307,7 +23955,7 @@
     </p:spTree>
     <p:extLst>
       <p:ext uri="{BB962C8B-B14F-4D97-AF65-F5344CB8AC3E}">
-        <p14:creationId xmlns:p14="http://schemas.microsoft.com/office/powerpoint/2010/main" val="1966611121"/>
+        <p14:creationId xmlns:p14="http://schemas.microsoft.com/office/powerpoint/2010/main" val="1775940271"/>
       </p:ext>
     </p:extLst>
   </p:cSld>
@@ -22335,10 +23983,10 @@
       </p:grpSpPr>
       <p:sp>
         <p:nvSpPr>
-          <p:cNvPr id="38" name="">
-            <a:extLst xmlns:a="http://schemas.openxmlformats.org/drawingml/2006/main">
-              <a:ext uri="{FF2B5EF4-FFF2-40B4-BE49-F238E27FC236}">
-                <a16:creationId xmlns:a16="http://schemas.microsoft.com/office/drawing/2014/main" id="{00177D2D-F2C2-452A-8D87-E8C2AEBAF66E}"/>
+          <p:cNvPr id="48" name="">
+            <a:extLst xmlns:a="http://schemas.openxmlformats.org/drawingml/2006/main">
+              <a:ext uri="{FF2B5EF4-FFF2-40B4-BE49-F238E27FC236}">
+                <a16:creationId xmlns:a16="http://schemas.microsoft.com/office/drawing/2014/main" id="{255EB759-55AD-44DA-AE47-CF82074046E3}"/>
               </a:ext>
             </a:extLst>
           </p:cNvPr>
@@ -22395,7 +24043,7 @@
           <p:cNvPr id="2" name="">
             <a:extLst xmlns:a="http://schemas.openxmlformats.org/drawingml/2006/main">
               <a:ext uri="{FF2B5EF4-FFF2-40B4-BE49-F238E27FC236}">
-                <a16:creationId xmlns:a16="http://schemas.microsoft.com/office/drawing/2014/main" id="{312D3FA5-14DF-4FF7-88E5-C8ED5FD2CA0C}"/>
+                <a16:creationId xmlns:a16="http://schemas.microsoft.com/office/drawing/2014/main" id="{BC883579-E354-4D12-AFF3-0EFEBD983624}"/>
               </a:ext>
             </a:extLst>
           </p:cNvPr>
@@ -22426,7 +24074,7 @@
           <p:cNvPr id="3" name="">
             <a:extLst xmlns:a="http://schemas.openxmlformats.org/drawingml/2006/main">
               <a:ext uri="{FF2B5EF4-FFF2-40B4-BE49-F238E27FC236}">
-                <a16:creationId xmlns:a16="http://schemas.microsoft.com/office/drawing/2014/main" id="{C24B9B19-B3D6-4345-9F2F-DAA071A0EAB9}"/>
+                <a16:creationId xmlns:a16="http://schemas.microsoft.com/office/drawing/2014/main" id="{44085211-DAE6-4B03-924D-2CF8727FC9D1}"/>
               </a:ext>
             </a:extLst>
           </p:cNvPr>
@@ -22483,7 +24131,7 @@
           <p:cNvPr id="4" name="">
             <a:extLst xmlns:a="http://schemas.openxmlformats.org/drawingml/2006/main">
               <a:ext uri="{FF2B5EF4-FFF2-40B4-BE49-F238E27FC236}">
-                <a16:creationId xmlns:a16="http://schemas.microsoft.com/office/drawing/2014/main" id="{FDA10AAB-F080-47E9-A623-6953E258A37D}"/>
+                <a16:creationId xmlns:a16="http://schemas.microsoft.com/office/drawing/2014/main" id="{37684581-D47F-43CD-A0DF-16FA81894185}"/>
               </a:ext>
             </a:extLst>
           </p:cNvPr>
@@ -22540,7 +24188,7 @@
           <p:cNvPr id="5" name="">
             <a:extLst xmlns:a="http://schemas.openxmlformats.org/drawingml/2006/main">
               <a:ext uri="{FF2B5EF4-FFF2-40B4-BE49-F238E27FC236}">
-                <a16:creationId xmlns:a16="http://schemas.microsoft.com/office/drawing/2014/main" id="{0D4818FB-9FCF-4754-B734-4B8884D9BFCC}"/>
+                <a16:creationId xmlns:a16="http://schemas.microsoft.com/office/drawing/2014/main" id="{F13D72D1-B160-46D9-9F45-D4CF7B8739AC}"/>
               </a:ext>
             </a:extLst>
           </p:cNvPr>
@@ -22571,7 +24219,7 @@
           <p:cNvPr id="6" name="">
             <a:extLst xmlns:a="http://schemas.openxmlformats.org/drawingml/2006/main">
               <a:ext uri="{FF2B5EF4-FFF2-40B4-BE49-F238E27FC236}">
-                <a16:creationId xmlns:a16="http://schemas.microsoft.com/office/drawing/2014/main" id="{D7F30719-6DDD-46F8-B7A1-970ACFC0F2F5}"/>
+                <a16:creationId xmlns:a16="http://schemas.microsoft.com/office/drawing/2014/main" id="{205D0EED-B79F-4C5C-A738-8322BE61A325}"/>
               </a:ext>
             </a:extLst>
           </p:cNvPr>
@@ -22628,7 +24276,7 @@
           <p:cNvPr id="7" name="">
             <a:extLst xmlns:a="http://schemas.openxmlformats.org/drawingml/2006/main">
               <a:ext uri="{FF2B5EF4-FFF2-40B4-BE49-F238E27FC236}">
-                <a16:creationId xmlns:a16="http://schemas.microsoft.com/office/drawing/2014/main" id="{2D7FE723-83BC-40BB-A029-54C7ABAE8E74}"/>
+                <a16:creationId xmlns:a16="http://schemas.microsoft.com/office/drawing/2014/main" id="{DC3B0BDD-3D30-4C06-A2D4-6CCDAF2CAF39}"/>
               </a:ext>
             </a:extLst>
           </p:cNvPr>
@@ -22661,7 +24309,7 @@
           <p:cNvPr id="8" name="">
             <a:extLst xmlns:a="http://schemas.openxmlformats.org/drawingml/2006/main">
               <a:ext uri="{FF2B5EF4-FFF2-40B4-BE49-F238E27FC236}">
-                <a16:creationId xmlns:a16="http://schemas.microsoft.com/office/drawing/2014/main" id="{FF41354B-BF80-49D3-8E9A-B2452D51BF6F}"/>
+                <a16:creationId xmlns:a16="http://schemas.microsoft.com/office/drawing/2014/main" id="{5CD8DC9B-6BFC-4826-A0C1-A85EFD17CD5B}"/>
               </a:ext>
             </a:extLst>
           </p:cNvPr>
@@ -22718,7 +24366,7 @@
           <p:cNvPr id="9" name="">
             <a:extLst xmlns:a="http://schemas.openxmlformats.org/drawingml/2006/main">
               <a:ext uri="{FF2B5EF4-FFF2-40B4-BE49-F238E27FC236}">
-                <a16:creationId xmlns:a16="http://schemas.microsoft.com/office/drawing/2014/main" id="{5D68186F-BD55-4C9C-B73E-C4D855D92C78}"/>
+                <a16:creationId xmlns:a16="http://schemas.microsoft.com/office/drawing/2014/main" id="{0799000D-46F1-4225-A5E0-BEF69FAC4B68}"/>
               </a:ext>
             </a:extLst>
           </p:cNvPr>
@@ -22751,7 +24399,7 @@
           <p:cNvPr id="10" name="">
             <a:extLst xmlns:a="http://schemas.openxmlformats.org/drawingml/2006/main">
               <a:ext uri="{FF2B5EF4-FFF2-40B4-BE49-F238E27FC236}">
-                <a16:creationId xmlns:a16="http://schemas.microsoft.com/office/drawing/2014/main" id="{8E015922-34C7-4417-8E7B-0D9BC0CEFDC5}"/>
+                <a16:creationId xmlns:a16="http://schemas.microsoft.com/office/drawing/2014/main" id="{C72590C4-69BF-4D07-AF4E-9000B6E65E39}"/>
               </a:ext>
             </a:extLst>
           </p:cNvPr>
@@ -22805,7 +24453,7 @@
       </p:sp>
       <p:cxnSp>
         <p:nvCxnSpPr>
-          <p:cNvPr id="48" name=""/>
+          <p:cNvPr id="58" name=""/>
           <p:cNvCxnSpPr>
             <a:stCxn xmlns:a="http://schemas.openxmlformats.org/drawingml/2006/main" id="7" idx="3"/>
             <a:endCxn xmlns:a="http://schemas.openxmlformats.org/drawingml/2006/main" id="9" idx="1"/>
@@ -22834,7 +24482,7 @@
           <p:cNvPr id="12" name="">
             <a:extLst xmlns:a="http://schemas.openxmlformats.org/drawingml/2006/main">
               <a:ext uri="{FF2B5EF4-FFF2-40B4-BE49-F238E27FC236}">
-                <a16:creationId xmlns:a16="http://schemas.microsoft.com/office/drawing/2014/main" id="{4F47A930-9C27-41AE-A343-737B1FEF0818}"/>
+                <a16:creationId xmlns:a16="http://schemas.microsoft.com/office/drawing/2014/main" id="{138F9225-D0EA-4C74-BDD7-E814E81FD65B}"/>
               </a:ext>
             </a:extLst>
           </p:cNvPr>
@@ -22914,7 +24562,7 @@
           <p:cNvPr id="13" name="">
             <a:extLst xmlns:a="http://schemas.openxmlformats.org/drawingml/2006/main">
               <a:ext uri="{FF2B5EF4-FFF2-40B4-BE49-F238E27FC236}">
-                <a16:creationId xmlns:a16="http://schemas.microsoft.com/office/drawing/2014/main" id="{33C610F8-65A5-4B01-8CDE-D750C4D054CA}"/>
+                <a16:creationId xmlns:a16="http://schemas.microsoft.com/office/drawing/2014/main" id="{5CBC9F6B-9512-4C12-BEC1-0545D6041F7C}"/>
               </a:ext>
             </a:extLst>
           </p:cNvPr>
@@ -22994,7 +24642,7 @@
           <p:cNvPr id="14" name="">
             <a:extLst xmlns:a="http://schemas.openxmlformats.org/drawingml/2006/main">
               <a:ext uri="{FF2B5EF4-FFF2-40B4-BE49-F238E27FC236}">
-                <a16:creationId xmlns:a16="http://schemas.microsoft.com/office/drawing/2014/main" id="{8C9ED2FF-4601-41C8-89C2-BD2CA9A48C99}"/>
+                <a16:creationId xmlns:a16="http://schemas.microsoft.com/office/drawing/2014/main" id="{4CB801B6-2651-4515-92C0-E964A1A3EC45}"/>
               </a:ext>
             </a:extLst>
           </p:cNvPr>
@@ -23041,7 +24689,7 @@
                 <a:ea typeface="Roboto"/>
                 <a:cs typeface="Roboto"/>
               </a:rPr>
-              <a:t>ACCEPTABLE BEHAVIOR REGION</a:t>
+              <a:t>SPACE OF POSSIBLE BEHAVIORS</a:t>
             </a:r>
           </a:p>
         </p:txBody>
@@ -23051,82 +24699,493 @@
           <p:cNvPr id="15" name="">
             <a:extLst xmlns:a="http://schemas.openxmlformats.org/drawingml/2006/main">
               <a:ext uri="{FF2B5EF4-FFF2-40B4-BE49-F238E27FC236}">
-                <a16:creationId xmlns:a16="http://schemas.microsoft.com/office/drawing/2014/main" id="{9FFCDE24-AFDE-44EE-A906-D68DE65CB90E}"/>
-              </a:ext>
-            </a:extLst>
-          </p:cNvPr>
-          <p:cNvSpPr>
-            <a:spLocks xmlns:a="http://schemas.openxmlformats.org/drawingml/2006/main" noGrp="1"/>
-          </p:cNvSpPr>
-          <p:nvPr/>
-        </p:nvSpPr>
-        <p:spPr>
-          <a:xfrm xmlns:a="http://schemas.openxmlformats.org/drawingml/2006/main">
-            <a:off x="5105400" y="2400300"/>
-            <a:ext cx="6477000" cy="228600"/>
-          </a:xfrm>
-          <a:prstGeom xmlns:a="http://schemas.openxmlformats.org/drawingml/2006/main" prst="rect">
-            <a:avLst/>
-          </a:prstGeom>
-          <a:noFill xmlns:a="http://schemas.openxmlformats.org/drawingml/2006/main"/>
-          <a:ln xmlns:a="http://schemas.openxmlformats.org/drawingml/2006/main" w="0">
-            <a:noFill/>
-          </a:ln>
-        </p:spPr>
-        <p:txBody>
-          <a:bodyPr xmlns:a="http://schemas.openxmlformats.org/drawingml/2006/main" wrap="square" lIns="0" tIns="0" rIns="0" bIns="0" anchor="ctr">
-            <a:noAutofit/>
-          </a:bodyPr>
-          <a:lstStyle xmlns:a="http://schemas.openxmlformats.org/drawingml/2006/main"/>
-          <a:p xmlns:a="http://schemas.openxmlformats.org/drawingml/2006/main">
-            <a:pPr algn="l">
-              <a:defRPr sz="1350" b="0">
-                <a:solidFill>
-                  <a:srgbClr val="ADB8C5"/>
-                </a:solidFill>
-                <a:latin typeface="Roboto"/>
-                <a:ea typeface="Roboto"/>
-                <a:cs typeface="Roboto"/>
-              </a:defRPr>
-            </a:pPr>
-            <a:r>
-              <a:rPr sz="1350" b="0">
-                <a:solidFill>
-                  <a:srgbClr val="ADB8C5"/>
-                </a:solidFill>
-                <a:latin typeface="Roboto"/>
-                <a:ea typeface="Roboto"/>
-                <a:cs typeface="Roboto"/>
-              </a:rPr>
-              <a:t>Many valid outputs inside the same agreed limits</a:t>
-            </a:r>
-          </a:p>
-        </p:txBody>
+                <a16:creationId xmlns:a16="http://schemas.microsoft.com/office/drawing/2014/main" id="{E1ADA318-29B4-4935-A8D2-2AD4DA4ED90C}"/>
+              </a:ext>
+            </a:extLst>
+          </p:cNvPr>
+          <p:cNvSpPr>
+            <a:spLocks xmlns:a="http://schemas.openxmlformats.org/drawingml/2006/main" noGrp="1"/>
+          </p:cNvSpPr>
+          <p:nvPr/>
+        </p:nvSpPr>
+        <p:spPr>
+          <a:xfrm xmlns:a="http://schemas.openxmlformats.org/drawingml/2006/main" flipH="0" flipV="0">
+            <a:off x="5305425" y="2657475"/>
+            <a:ext cx="6172200" cy="0"/>
+          </a:xfrm>
+          <a:prstGeom xmlns:a="http://schemas.openxmlformats.org/drawingml/2006/main" prst="line">
+            <a:avLst/>
+          </a:prstGeom>
+          <a:noFill xmlns:a="http://schemas.openxmlformats.org/drawingml/2006/main"/>
+          <a:ln xmlns:a="http://schemas.openxmlformats.org/drawingml/2006/main" w="19050">
+            <a:solidFill>
+              <a:srgbClr val="344454"/>
+            </a:solidFill>
+            <a:prstDash val="solid"/>
+          </a:ln>
+        </p:spPr>
       </p:sp>
       <p:sp>
         <p:nvSpPr>
           <p:cNvPr id="16" name="">
             <a:extLst xmlns:a="http://schemas.openxmlformats.org/drawingml/2006/main">
               <a:ext uri="{FF2B5EF4-FFF2-40B4-BE49-F238E27FC236}">
-                <a16:creationId xmlns:a16="http://schemas.microsoft.com/office/drawing/2014/main" id="{75F8CCD6-085D-46BD-AAFA-AA396A8AA134}"/>
-              </a:ext>
-            </a:extLst>
-          </p:cNvPr>
-          <p:cNvSpPr>
-            <a:spLocks xmlns:a="http://schemas.openxmlformats.org/drawingml/2006/main" noGrp="1"/>
-          </p:cNvSpPr>
-          <p:nvPr/>
-        </p:nvSpPr>
-        <p:spPr>
-          <a:xfrm xmlns:a="http://schemas.openxmlformats.org/drawingml/2006/main">
-            <a:off x="5219700" y="2686050"/>
-            <a:ext cx="6248400" cy="895350"/>
-          </a:xfrm>
-          <a:prstGeom xmlns:a="http://schemas.openxmlformats.org/drawingml/2006/main" prst="rect">
-            <a:avLst/>
-          </a:prstGeom>
+                <a16:creationId xmlns:a16="http://schemas.microsoft.com/office/drawing/2014/main" id="{BAF66869-36A5-4358-8293-7FFA8F52ABEB}"/>
+              </a:ext>
+            </a:extLst>
+          </p:cNvPr>
+          <p:cNvSpPr>
+            <a:spLocks xmlns:a="http://schemas.openxmlformats.org/drawingml/2006/main" noGrp="1"/>
+          </p:cNvSpPr>
+          <p:nvPr/>
+        </p:nvSpPr>
+        <p:spPr>
+          <a:xfrm xmlns:a="http://schemas.openxmlformats.org/drawingml/2006/main" flipH="0" flipV="0">
+            <a:off x="5305425" y="2962275"/>
+            <a:ext cx="6172200" cy="0"/>
+          </a:xfrm>
+          <a:prstGeom xmlns:a="http://schemas.openxmlformats.org/drawingml/2006/main" prst="line">
+            <a:avLst/>
+          </a:prstGeom>
+          <a:noFill xmlns:a="http://schemas.openxmlformats.org/drawingml/2006/main"/>
+          <a:ln xmlns:a="http://schemas.openxmlformats.org/drawingml/2006/main" w="19050">
+            <a:solidFill>
+              <a:srgbClr val="344454"/>
+            </a:solidFill>
+            <a:prstDash val="solid"/>
+          </a:ln>
+        </p:spPr>
+      </p:sp>
+      <p:sp>
+        <p:nvSpPr>
+          <p:cNvPr id="17" name="">
+            <a:extLst xmlns:a="http://schemas.openxmlformats.org/drawingml/2006/main">
+              <a:ext uri="{FF2B5EF4-FFF2-40B4-BE49-F238E27FC236}">
+                <a16:creationId xmlns:a16="http://schemas.microsoft.com/office/drawing/2014/main" id="{E3C9FC50-37DD-4ECB-9E32-B3BEA891FA3D}"/>
+              </a:ext>
+            </a:extLst>
+          </p:cNvPr>
+          <p:cNvSpPr>
+            <a:spLocks xmlns:a="http://schemas.openxmlformats.org/drawingml/2006/main" noGrp="1"/>
+          </p:cNvSpPr>
+          <p:nvPr/>
+        </p:nvSpPr>
+        <p:spPr>
+          <a:xfrm xmlns:a="http://schemas.openxmlformats.org/drawingml/2006/main" flipH="0" flipV="0">
+            <a:off x="5305425" y="3267075"/>
+            <a:ext cx="6172200" cy="0"/>
+          </a:xfrm>
+          <a:prstGeom xmlns:a="http://schemas.openxmlformats.org/drawingml/2006/main" prst="line">
+            <a:avLst/>
+          </a:prstGeom>
+          <a:noFill xmlns:a="http://schemas.openxmlformats.org/drawingml/2006/main"/>
+          <a:ln xmlns:a="http://schemas.openxmlformats.org/drawingml/2006/main" w="19050">
+            <a:solidFill>
+              <a:srgbClr val="344454"/>
+            </a:solidFill>
+            <a:prstDash val="solid"/>
+          </a:ln>
+        </p:spPr>
+      </p:sp>
+      <p:sp>
+        <p:nvSpPr>
+          <p:cNvPr id="18" name="">
+            <a:extLst xmlns:a="http://schemas.openxmlformats.org/drawingml/2006/main">
+              <a:ext uri="{FF2B5EF4-FFF2-40B4-BE49-F238E27FC236}">
+                <a16:creationId xmlns:a16="http://schemas.microsoft.com/office/drawing/2014/main" id="{AD07F913-FCC6-4D30-9EC0-9DD4DEA46353}"/>
+              </a:ext>
+            </a:extLst>
+          </p:cNvPr>
+          <p:cNvSpPr>
+            <a:spLocks xmlns:a="http://schemas.openxmlformats.org/drawingml/2006/main" noGrp="1"/>
+          </p:cNvSpPr>
+          <p:nvPr/>
+        </p:nvSpPr>
+        <p:spPr>
+          <a:xfrm xmlns:a="http://schemas.openxmlformats.org/drawingml/2006/main" flipH="0" flipV="0">
+            <a:off x="5305425" y="3571875"/>
+            <a:ext cx="6172200" cy="0"/>
+          </a:xfrm>
+          <a:prstGeom xmlns:a="http://schemas.openxmlformats.org/drawingml/2006/main" prst="line">
+            <a:avLst/>
+          </a:prstGeom>
+          <a:noFill xmlns:a="http://schemas.openxmlformats.org/drawingml/2006/main"/>
+          <a:ln xmlns:a="http://schemas.openxmlformats.org/drawingml/2006/main" w="19050">
+            <a:solidFill>
+              <a:srgbClr val="344454"/>
+            </a:solidFill>
+            <a:prstDash val="solid"/>
+          </a:ln>
+        </p:spPr>
+      </p:sp>
+      <p:sp>
+        <p:nvSpPr>
+          <p:cNvPr id="19" name="">
+            <a:extLst xmlns:a="http://schemas.openxmlformats.org/drawingml/2006/main">
+              <a:ext uri="{FF2B5EF4-FFF2-40B4-BE49-F238E27FC236}">
+                <a16:creationId xmlns:a16="http://schemas.microsoft.com/office/drawing/2014/main" id="{1F3A0670-B94F-49D3-8825-F32282F6819D}"/>
+              </a:ext>
+            </a:extLst>
+          </p:cNvPr>
+          <p:cNvSpPr>
+            <a:spLocks xmlns:a="http://schemas.openxmlformats.org/drawingml/2006/main" noGrp="1"/>
+          </p:cNvSpPr>
+          <p:nvPr/>
+        </p:nvSpPr>
+        <p:spPr>
+          <a:xfrm xmlns:a="http://schemas.openxmlformats.org/drawingml/2006/main" flipH="0" flipV="0">
+            <a:off x="5305425" y="3876675"/>
+            <a:ext cx="6172200" cy="0"/>
+          </a:xfrm>
+          <a:prstGeom xmlns:a="http://schemas.openxmlformats.org/drawingml/2006/main" prst="line">
+            <a:avLst/>
+          </a:prstGeom>
+          <a:noFill xmlns:a="http://schemas.openxmlformats.org/drawingml/2006/main"/>
+          <a:ln xmlns:a="http://schemas.openxmlformats.org/drawingml/2006/main" w="19050">
+            <a:solidFill>
+              <a:srgbClr val="344454"/>
+            </a:solidFill>
+            <a:prstDash val="solid"/>
+          </a:ln>
+        </p:spPr>
+      </p:sp>
+      <p:sp>
+        <p:nvSpPr>
+          <p:cNvPr id="20" name="">
+            <a:extLst xmlns:a="http://schemas.openxmlformats.org/drawingml/2006/main">
+              <a:ext uri="{FF2B5EF4-FFF2-40B4-BE49-F238E27FC236}">
+                <a16:creationId xmlns:a16="http://schemas.microsoft.com/office/drawing/2014/main" id="{0DCD0110-55AE-4811-99E3-57B58C49B857}"/>
+              </a:ext>
+            </a:extLst>
+          </p:cNvPr>
+          <p:cNvSpPr>
+            <a:spLocks xmlns:a="http://schemas.openxmlformats.org/drawingml/2006/main" noGrp="1"/>
+          </p:cNvSpPr>
+          <p:nvPr/>
+        </p:nvSpPr>
+        <p:spPr>
+          <a:xfrm xmlns:a="http://schemas.openxmlformats.org/drawingml/2006/main" flipH="0" flipV="1">
+            <a:off x="5305425" y="2543175"/>
+            <a:ext cx="514350" cy="1352550"/>
+          </a:xfrm>
+          <a:prstGeom xmlns:a="http://schemas.openxmlformats.org/drawingml/2006/main" prst="line">
+            <a:avLst/>
+          </a:prstGeom>
+          <a:noFill xmlns:a="http://schemas.openxmlformats.org/drawingml/2006/main"/>
+          <a:ln xmlns:a="http://schemas.openxmlformats.org/drawingml/2006/main" w="19050">
+            <a:solidFill>
+              <a:srgbClr val="344454"/>
+            </a:solidFill>
+            <a:prstDash val="solid"/>
+          </a:ln>
+        </p:spPr>
+      </p:sp>
+      <p:sp>
+        <p:nvSpPr>
+          <p:cNvPr id="21" name="">
+            <a:extLst xmlns:a="http://schemas.openxmlformats.org/drawingml/2006/main">
+              <a:ext uri="{FF2B5EF4-FFF2-40B4-BE49-F238E27FC236}">
+                <a16:creationId xmlns:a16="http://schemas.microsoft.com/office/drawing/2014/main" id="{C8CC1D81-CA6A-4187-9766-69DF0FEA18C4}"/>
+              </a:ext>
+            </a:extLst>
+          </p:cNvPr>
+          <p:cNvSpPr>
+            <a:spLocks xmlns:a="http://schemas.openxmlformats.org/drawingml/2006/main" noGrp="1"/>
+          </p:cNvSpPr>
+          <p:nvPr/>
+        </p:nvSpPr>
+        <p:spPr>
+          <a:xfrm xmlns:a="http://schemas.openxmlformats.org/drawingml/2006/main" flipH="0" flipV="1">
+            <a:off x="6353175" y="2543175"/>
+            <a:ext cx="514350" cy="1352550"/>
+          </a:xfrm>
+          <a:prstGeom xmlns:a="http://schemas.openxmlformats.org/drawingml/2006/main" prst="line">
+            <a:avLst/>
+          </a:prstGeom>
+          <a:noFill xmlns:a="http://schemas.openxmlformats.org/drawingml/2006/main"/>
+          <a:ln xmlns:a="http://schemas.openxmlformats.org/drawingml/2006/main" w="19050">
+            <a:solidFill>
+              <a:srgbClr val="344454"/>
+            </a:solidFill>
+            <a:prstDash val="solid"/>
+          </a:ln>
+        </p:spPr>
+      </p:sp>
+      <p:sp>
+        <p:nvSpPr>
+          <p:cNvPr id="22" name="">
+            <a:extLst xmlns:a="http://schemas.openxmlformats.org/drawingml/2006/main">
+              <a:ext uri="{FF2B5EF4-FFF2-40B4-BE49-F238E27FC236}">
+                <a16:creationId xmlns:a16="http://schemas.microsoft.com/office/drawing/2014/main" id="{565FD1D5-CF7E-413C-8960-7274D2BD69FE}"/>
+              </a:ext>
+            </a:extLst>
+          </p:cNvPr>
+          <p:cNvSpPr>
+            <a:spLocks xmlns:a="http://schemas.openxmlformats.org/drawingml/2006/main" noGrp="1"/>
+          </p:cNvSpPr>
+          <p:nvPr/>
+        </p:nvSpPr>
+        <p:spPr>
+          <a:xfrm xmlns:a="http://schemas.openxmlformats.org/drawingml/2006/main" flipH="0" flipV="1">
+            <a:off x="7400925" y="2543175"/>
+            <a:ext cx="514350" cy="1352550"/>
+          </a:xfrm>
+          <a:prstGeom xmlns:a="http://schemas.openxmlformats.org/drawingml/2006/main" prst="line">
+            <a:avLst/>
+          </a:prstGeom>
+          <a:noFill xmlns:a="http://schemas.openxmlformats.org/drawingml/2006/main"/>
+          <a:ln xmlns:a="http://schemas.openxmlformats.org/drawingml/2006/main" w="19050">
+            <a:solidFill>
+              <a:srgbClr val="344454"/>
+            </a:solidFill>
+            <a:prstDash val="solid"/>
+          </a:ln>
+        </p:spPr>
+      </p:sp>
+      <p:sp>
+        <p:nvSpPr>
+          <p:cNvPr id="23" name="">
+            <a:extLst xmlns:a="http://schemas.openxmlformats.org/drawingml/2006/main">
+              <a:ext uri="{FF2B5EF4-FFF2-40B4-BE49-F238E27FC236}">
+                <a16:creationId xmlns:a16="http://schemas.microsoft.com/office/drawing/2014/main" id="{B4FE0A6D-50D7-4B7B-AB9F-B1F1E7FA2108}"/>
+              </a:ext>
+            </a:extLst>
+          </p:cNvPr>
+          <p:cNvSpPr>
+            <a:spLocks xmlns:a="http://schemas.openxmlformats.org/drawingml/2006/main" noGrp="1"/>
+          </p:cNvSpPr>
+          <p:nvPr/>
+        </p:nvSpPr>
+        <p:spPr>
+          <a:xfrm xmlns:a="http://schemas.openxmlformats.org/drawingml/2006/main" flipH="0" flipV="1">
+            <a:off x="8448675" y="2543175"/>
+            <a:ext cx="514350" cy="1352550"/>
+          </a:xfrm>
+          <a:prstGeom xmlns:a="http://schemas.openxmlformats.org/drawingml/2006/main" prst="line">
+            <a:avLst/>
+          </a:prstGeom>
+          <a:noFill xmlns:a="http://schemas.openxmlformats.org/drawingml/2006/main"/>
+          <a:ln xmlns:a="http://schemas.openxmlformats.org/drawingml/2006/main" w="19050">
+            <a:solidFill>
+              <a:srgbClr val="344454"/>
+            </a:solidFill>
+            <a:prstDash val="solid"/>
+          </a:ln>
+        </p:spPr>
+      </p:sp>
+      <p:sp>
+        <p:nvSpPr>
+          <p:cNvPr id="24" name="">
+            <a:extLst xmlns:a="http://schemas.openxmlformats.org/drawingml/2006/main">
+              <a:ext uri="{FF2B5EF4-FFF2-40B4-BE49-F238E27FC236}">
+                <a16:creationId xmlns:a16="http://schemas.microsoft.com/office/drawing/2014/main" id="{A53EEFBC-B379-41B1-8076-F0B98B2E7A98}"/>
+              </a:ext>
+            </a:extLst>
+          </p:cNvPr>
+          <p:cNvSpPr>
+            <a:spLocks xmlns:a="http://schemas.openxmlformats.org/drawingml/2006/main" noGrp="1"/>
+          </p:cNvSpPr>
+          <p:nvPr/>
+        </p:nvSpPr>
+        <p:spPr>
+          <a:xfrm xmlns:a="http://schemas.openxmlformats.org/drawingml/2006/main" flipH="0" flipV="1">
+            <a:off x="9496425" y="2543175"/>
+            <a:ext cx="514350" cy="1352550"/>
+          </a:xfrm>
+          <a:prstGeom xmlns:a="http://schemas.openxmlformats.org/drawingml/2006/main" prst="line">
+            <a:avLst/>
+          </a:prstGeom>
+          <a:noFill xmlns:a="http://schemas.openxmlformats.org/drawingml/2006/main"/>
+          <a:ln xmlns:a="http://schemas.openxmlformats.org/drawingml/2006/main" w="19050">
+            <a:solidFill>
+              <a:srgbClr val="344454"/>
+            </a:solidFill>
+            <a:prstDash val="solid"/>
+          </a:ln>
+        </p:spPr>
+      </p:sp>
+      <p:sp>
+        <p:nvSpPr>
+          <p:cNvPr id="25" name="">
+            <a:extLst xmlns:a="http://schemas.openxmlformats.org/drawingml/2006/main">
+              <a:ext uri="{FF2B5EF4-FFF2-40B4-BE49-F238E27FC236}">
+                <a16:creationId xmlns:a16="http://schemas.microsoft.com/office/drawing/2014/main" id="{FFE9247F-DF6E-4742-AEDE-5A7082C00473}"/>
+              </a:ext>
+            </a:extLst>
+          </p:cNvPr>
+          <p:cNvSpPr>
+            <a:spLocks xmlns:a="http://schemas.openxmlformats.org/drawingml/2006/main" noGrp="1"/>
+          </p:cNvSpPr>
+          <p:nvPr/>
+        </p:nvSpPr>
+        <p:spPr>
+          <a:xfrm xmlns:a="http://schemas.openxmlformats.org/drawingml/2006/main" flipH="0" flipV="1">
+            <a:off x="10544175" y="2543175"/>
+            <a:ext cx="514350" cy="1352550"/>
+          </a:xfrm>
+          <a:prstGeom xmlns:a="http://schemas.openxmlformats.org/drawingml/2006/main" prst="line">
+            <a:avLst/>
+          </a:prstGeom>
+          <a:noFill xmlns:a="http://schemas.openxmlformats.org/drawingml/2006/main"/>
+          <a:ln xmlns:a="http://schemas.openxmlformats.org/drawingml/2006/main" w="19050">
+            <a:solidFill>
+              <a:srgbClr val="344454"/>
+            </a:solidFill>
+            <a:prstDash val="solid"/>
+          </a:ln>
+        </p:spPr>
+      </p:sp>
+      <p:sp>
+        <p:nvSpPr>
+          <p:cNvPr id="26" name="">
+            <a:extLst xmlns:a="http://schemas.openxmlformats.org/drawingml/2006/main">
+              <a:ext uri="{FF2B5EF4-FFF2-40B4-BE49-F238E27FC236}">
+                <a16:creationId xmlns:a16="http://schemas.microsoft.com/office/drawing/2014/main" id="{75783C7F-06CE-42E2-BE04-57142EDFF024}"/>
+              </a:ext>
+            </a:extLst>
+          </p:cNvPr>
+          <p:cNvSpPr>
+            <a:spLocks xmlns:a="http://schemas.openxmlformats.org/drawingml/2006/main" noGrp="1"/>
+          </p:cNvSpPr>
+          <p:nvPr/>
+        </p:nvSpPr>
+        <p:spPr>
+          <a:xfrm xmlns:a="http://schemas.openxmlformats.org/drawingml/2006/main" flipH="0" flipV="0">
+            <a:off x="5305425" y="3914775"/>
+            <a:ext cx="6172200" cy="0"/>
+          </a:xfrm>
+          <a:prstGeom xmlns:a="http://schemas.openxmlformats.org/drawingml/2006/main" prst="line">
+            <a:avLst/>
+          </a:prstGeom>
+          <a:noFill xmlns:a="http://schemas.openxmlformats.org/drawingml/2006/main"/>
+          <a:ln xmlns:a="http://schemas.openxmlformats.org/drawingml/2006/main" w="19050">
+            <a:solidFill>
+              <a:srgbClr val="ADB8C5"/>
+            </a:solidFill>
+            <a:prstDash val="solid"/>
+          </a:ln>
+        </p:spPr>
+      </p:sp>
+      <p:sp>
+        <p:nvSpPr>
+          <p:cNvPr id="27" name="">
+            <a:extLst xmlns:a="http://schemas.openxmlformats.org/drawingml/2006/main">
+              <a:ext uri="{FF2B5EF4-FFF2-40B4-BE49-F238E27FC236}">
+                <a16:creationId xmlns:a16="http://schemas.microsoft.com/office/drawing/2014/main" id="{92C5655C-8250-43DC-A688-24ED36472335}"/>
+              </a:ext>
+            </a:extLst>
+          </p:cNvPr>
+          <p:cNvSpPr>
+            <a:spLocks xmlns:a="http://schemas.openxmlformats.org/drawingml/2006/main" noGrp="1"/>
+          </p:cNvSpPr>
+          <p:nvPr/>
+        </p:nvSpPr>
+        <p:spPr>
+          <a:xfrm xmlns:a="http://schemas.openxmlformats.org/drawingml/2006/main" flipH="0" flipV="1">
+            <a:off x="5305425" y="2505075"/>
+            <a:ext cx="0" cy="1409700"/>
+          </a:xfrm>
+          <a:prstGeom xmlns:a="http://schemas.openxmlformats.org/drawingml/2006/main" prst="line">
+            <a:avLst/>
+          </a:prstGeom>
+          <a:noFill xmlns:a="http://schemas.openxmlformats.org/drawingml/2006/main"/>
+          <a:ln xmlns:a="http://schemas.openxmlformats.org/drawingml/2006/main" w="19050">
+            <a:solidFill>
+              <a:srgbClr val="ADB8C5"/>
+            </a:solidFill>
+            <a:prstDash val="solid"/>
+          </a:ln>
+        </p:spPr>
+      </p:sp>
+      <p:sp>
+        <p:nvSpPr>
+          <p:cNvPr id="28" name="">
+            <a:extLst xmlns:a="http://schemas.openxmlformats.org/drawingml/2006/main">
+              <a:ext uri="{FF2B5EF4-FFF2-40B4-BE49-F238E27FC236}">
+                <a16:creationId xmlns:a16="http://schemas.microsoft.com/office/drawing/2014/main" id="{94669B70-D8AA-4FCB-821F-7DA1C187DD4D}"/>
+              </a:ext>
+            </a:extLst>
+          </p:cNvPr>
+          <p:cNvSpPr>
+            <a:spLocks xmlns:a="http://schemas.openxmlformats.org/drawingml/2006/main" noGrp="1"/>
+          </p:cNvSpPr>
+          <p:nvPr/>
+        </p:nvSpPr>
+        <p:spPr>
+          <a:xfrm xmlns:a="http://schemas.openxmlformats.org/drawingml/2006/main">
+            <a:off x="5857875" y="2638425"/>
+            <a:ext cx="4476750" cy="1143000"/>
+          </a:xfrm>
+          <a:custGeom xmlns:a="http://schemas.openxmlformats.org/drawingml/2006/main">
+            <a:pathLst>
+              <a:path w="4476750" h="1143000">
+                <a:moveTo>
+                  <a:pt x="419100" y="0"/>
+                </a:moveTo>
+                <a:lnTo>
+                  <a:pt x="4476750" y="0"/>
+                </a:lnTo>
+                <a:lnTo>
+                  <a:pt x="4057650" y="1143000"/>
+                </a:lnTo>
+                <a:lnTo>
+                  <a:pt x="0" y="1143000"/>
+                </a:lnTo>
+                <a:close/>
+              </a:path>
+            </a:pathLst>
+          </a:custGeom>
           <a:solidFill xmlns:a="http://schemas.openxmlformats.org/drawingml/2006/main">
-            <a:srgbClr val="10212C"/>
+            <a:srgbClr val="24231B"/>
+          </a:solidFill>
+          <a:ln xmlns:a="http://schemas.openxmlformats.org/drawingml/2006/main" w="19050">
+            <a:solidFill>
+              <a:srgbClr val="F5B61C"/>
+            </a:solidFill>
+            <a:prstDash val="solid"/>
+          </a:ln>
+        </p:spPr>
+      </p:sp>
+      <p:sp>
+        <p:nvSpPr>
+          <p:cNvPr id="29" name="">
+            <a:extLst xmlns:a="http://schemas.openxmlformats.org/drawingml/2006/main">
+              <a:ext uri="{FF2B5EF4-FFF2-40B4-BE49-F238E27FC236}">
+                <a16:creationId xmlns:a16="http://schemas.microsoft.com/office/drawing/2014/main" id="{3A2360A8-CD49-44C7-87DD-983D607F7B84}"/>
+              </a:ext>
+            </a:extLst>
+          </p:cNvPr>
+          <p:cNvSpPr>
+            <a:spLocks xmlns:a="http://schemas.openxmlformats.org/drawingml/2006/main" noGrp="1"/>
+          </p:cNvSpPr>
+          <p:nvPr/>
+        </p:nvSpPr>
+        <p:spPr>
+          <a:xfrm xmlns:a="http://schemas.openxmlformats.org/drawingml/2006/main">
+            <a:off x="6677025" y="2905125"/>
+            <a:ext cx="3067050" cy="762000"/>
+          </a:xfrm>
+          <a:custGeom xmlns:a="http://schemas.openxmlformats.org/drawingml/2006/main">
+            <a:pathLst>
+              <a:path w="3067050" h="762000">
+                <a:moveTo>
+                  <a:pt x="219075" y="0"/>
+                </a:moveTo>
+                <a:lnTo>
+                  <a:pt x="3067050" y="0"/>
+                </a:lnTo>
+                <a:lnTo>
+                  <a:pt x="2847975" y="762000"/>
+                </a:lnTo>
+                <a:lnTo>
+                  <a:pt x="0" y="762000"/>
+                </a:lnTo>
+                <a:close/>
+              </a:path>
+            </a:pathLst>
+          </a:custGeom>
+          <a:solidFill xmlns:a="http://schemas.openxmlformats.org/drawingml/2006/main">
+            <a:srgbClr val="122934"/>
           </a:solidFill>
           <a:ln xmlns:a="http://schemas.openxmlformats.org/drawingml/2006/main" w="19050">
             <a:solidFill>
@@ -23138,22 +25197,22 @@
       </p:sp>
       <p:sp>
         <p:nvSpPr>
-          <p:cNvPr id="17" name="">
-            <a:extLst xmlns:a="http://schemas.openxmlformats.org/drawingml/2006/main">
-              <a:ext uri="{FF2B5EF4-FFF2-40B4-BE49-F238E27FC236}">
-                <a16:creationId xmlns:a16="http://schemas.microsoft.com/office/drawing/2014/main" id="{D00EE93C-1D78-4A24-A9A0-3FDC576E3431}"/>
-              </a:ext>
-            </a:extLst>
-          </p:cNvPr>
-          <p:cNvSpPr>
-            <a:spLocks xmlns:a="http://schemas.openxmlformats.org/drawingml/2006/main" noGrp="1"/>
-          </p:cNvSpPr>
-          <p:nvPr/>
-        </p:nvSpPr>
-        <p:spPr>
-          <a:xfrm xmlns:a="http://schemas.openxmlformats.org/drawingml/2006/main">
-            <a:off x="5372100" y="2771775"/>
-            <a:ext cx="723900" cy="238125"/>
+          <p:cNvPr id="30" name="">
+            <a:extLst xmlns:a="http://schemas.openxmlformats.org/drawingml/2006/main">
+              <a:ext uri="{FF2B5EF4-FFF2-40B4-BE49-F238E27FC236}">
+                <a16:creationId xmlns:a16="http://schemas.microsoft.com/office/drawing/2014/main" id="{596CB38B-C529-4B3E-B10F-8AFE979E4B84}"/>
+              </a:ext>
+            </a:extLst>
+          </p:cNvPr>
+          <p:cNvSpPr>
+            <a:spLocks xmlns:a="http://schemas.openxmlformats.org/drawingml/2006/main" noGrp="1"/>
+          </p:cNvSpPr>
+          <p:nvPr/>
+        </p:nvSpPr>
+        <p:spPr>
+          <a:xfrm xmlns:a="http://schemas.openxmlformats.org/drawingml/2006/main">
+            <a:off x="7105650" y="2371725"/>
+            <a:ext cx="4191000" cy="247650"/>
           </a:xfrm>
           <a:prstGeom xmlns:a="http://schemas.openxmlformats.org/drawingml/2006/main" prst="rect">
             <a:avLst/>
@@ -23170,6 +25229,63 @@
           <a:lstStyle xmlns:a="http://schemas.openxmlformats.org/drawingml/2006/main"/>
           <a:p xmlns:a="http://schemas.openxmlformats.org/drawingml/2006/main">
             <a:pPr algn="l">
+              <a:defRPr sz="1425" b="1">
+                <a:solidFill>
+                  <a:srgbClr val="F5B61C"/>
+                </a:solidFill>
+                <a:latin typeface="Roboto"/>
+                <a:ea typeface="Roboto"/>
+                <a:cs typeface="Roboto"/>
+              </a:defRPr>
+            </a:pPr>
+            <a:r>
+              <a:rPr sz="1425" b="1">
+                <a:solidFill>
+                  <a:srgbClr val="F5B61C"/>
+                </a:solidFill>
+                <a:latin typeface="Roboto"/>
+                <a:ea typeface="Roboto"/>
+                <a:cs typeface="Roboto"/>
+              </a:rPr>
+              <a:t>Approved tolerance boundary</a:t>
+            </a:r>
+          </a:p>
+        </p:txBody>
+      </p:sp>
+      <p:sp>
+        <p:nvSpPr>
+          <p:cNvPr id="31" name="">
+            <a:extLst xmlns:a="http://schemas.openxmlformats.org/drawingml/2006/main">
+              <a:ext uri="{FF2B5EF4-FFF2-40B4-BE49-F238E27FC236}">
+                <a16:creationId xmlns:a16="http://schemas.microsoft.com/office/drawing/2014/main" id="{9C12DC02-CD55-410E-979D-9B60E1F586E9}"/>
+              </a:ext>
+            </a:extLst>
+          </p:cNvPr>
+          <p:cNvSpPr>
+            <a:spLocks xmlns:a="http://schemas.openxmlformats.org/drawingml/2006/main" noGrp="1"/>
+          </p:cNvSpPr>
+          <p:nvPr/>
+        </p:nvSpPr>
+        <p:spPr>
+          <a:xfrm xmlns:a="http://schemas.openxmlformats.org/drawingml/2006/main">
+            <a:off x="6896100" y="2952750"/>
+            <a:ext cx="2647950" cy="219075"/>
+          </a:xfrm>
+          <a:prstGeom xmlns:a="http://schemas.openxmlformats.org/drawingml/2006/main" prst="rect">
+            <a:avLst/>
+          </a:prstGeom>
+          <a:noFill xmlns:a="http://schemas.openxmlformats.org/drawingml/2006/main"/>
+          <a:ln xmlns:a="http://schemas.openxmlformats.org/drawingml/2006/main" w="0">
+            <a:noFill/>
+          </a:ln>
+        </p:spPr>
+        <p:txBody>
+          <a:bodyPr xmlns:a="http://schemas.openxmlformats.org/drawingml/2006/main" wrap="square" lIns="0" tIns="0" rIns="0" bIns="0" anchor="ctr">
+            <a:noAutofit/>
+          </a:bodyPr>
+          <a:lstStyle xmlns:a="http://schemas.openxmlformats.org/drawingml/2006/main"/>
+          <a:p xmlns:a="http://schemas.openxmlformats.org/drawingml/2006/main">
+            <a:pPr algn="ctr">
               <a:defRPr sz="1350" b="1">
                 <a:solidFill>
                   <a:srgbClr val="28C7F7"/>
@@ -23188,46 +25304,46 @@
                 <a:ea typeface="Roboto"/>
                 <a:cs typeface="Roboto"/>
               </a:rPr>
-              <a:t>ALLOW</a:t>
-            </a:r>
-          </a:p>
-        </p:txBody>
-      </p:sp>
-      <p:sp>
-        <p:nvSpPr>
-          <p:cNvPr id="18" name="">
-            <a:extLst xmlns:a="http://schemas.openxmlformats.org/drawingml/2006/main">
-              <a:ext uri="{FF2B5EF4-FFF2-40B4-BE49-F238E27FC236}">
-                <a16:creationId xmlns:a16="http://schemas.microsoft.com/office/drawing/2014/main" id="{8CC2455F-000B-42FC-AFC2-1F1FB94A5379}"/>
-              </a:ext>
-            </a:extLst>
-          </p:cNvPr>
-          <p:cNvSpPr>
-            <a:spLocks xmlns:a="http://schemas.openxmlformats.org/drawingml/2006/main" noGrp="1"/>
-          </p:cNvSpPr>
-          <p:nvPr/>
-        </p:nvSpPr>
-        <p:spPr>
-          <a:xfrm xmlns:a="http://schemas.openxmlformats.org/drawingml/2006/main">
-            <a:off x="6210300" y="2771775"/>
-            <a:ext cx="5124450" cy="238125"/>
-          </a:xfrm>
-          <a:prstGeom xmlns:a="http://schemas.openxmlformats.org/drawingml/2006/main" prst="rect">
-            <a:avLst/>
-          </a:prstGeom>
-          <a:noFill xmlns:a="http://schemas.openxmlformats.org/drawingml/2006/main"/>
-          <a:ln xmlns:a="http://schemas.openxmlformats.org/drawingml/2006/main" w="0">
-            <a:noFill/>
-          </a:ln>
-        </p:spPr>
-        <p:txBody>
-          <a:bodyPr xmlns:a="http://schemas.openxmlformats.org/drawingml/2006/main" wrap="square" lIns="0" tIns="0" rIns="0" bIns="0" anchor="ctr">
-            <a:noAutofit/>
-          </a:bodyPr>
-          <a:lstStyle xmlns:a="http://schemas.openxmlformats.org/drawingml/2006/main"/>
-          <a:p xmlns:a="http://schemas.openxmlformats.org/drawingml/2006/main">
-            <a:pPr algn="l">
-              <a:defRPr sz="1575" b="0">
+              <a:t>Target operating region</a:t>
+            </a:r>
+          </a:p>
+        </p:txBody>
+      </p:sp>
+      <p:sp>
+        <p:nvSpPr>
+          <p:cNvPr id="32" name="">
+            <a:extLst xmlns:a="http://schemas.openxmlformats.org/drawingml/2006/main">
+              <a:ext uri="{FF2B5EF4-FFF2-40B4-BE49-F238E27FC236}">
+                <a16:creationId xmlns:a16="http://schemas.microsoft.com/office/drawing/2014/main" id="{340C9E6E-FAD4-4EA0-A950-F047C8D8AFFB}"/>
+              </a:ext>
+            </a:extLst>
+          </p:cNvPr>
+          <p:cNvSpPr>
+            <a:spLocks xmlns:a="http://schemas.openxmlformats.org/drawingml/2006/main" noGrp="1"/>
+          </p:cNvSpPr>
+          <p:nvPr/>
+        </p:nvSpPr>
+        <p:spPr>
+          <a:xfrm xmlns:a="http://schemas.openxmlformats.org/drawingml/2006/main">
+            <a:off x="6953250" y="3228975"/>
+            <a:ext cx="2571750" cy="200025"/>
+          </a:xfrm>
+          <a:prstGeom xmlns:a="http://schemas.openxmlformats.org/drawingml/2006/main" prst="rect">
+            <a:avLst/>
+          </a:prstGeom>
+          <a:noFill xmlns:a="http://schemas.openxmlformats.org/drawingml/2006/main"/>
+          <a:ln xmlns:a="http://schemas.openxmlformats.org/drawingml/2006/main" w="0">
+            <a:noFill/>
+          </a:ln>
+        </p:spPr>
+        <p:txBody>
+          <a:bodyPr xmlns:a="http://schemas.openxmlformats.org/drawingml/2006/main" wrap="square" lIns="0" tIns="0" rIns="0" bIns="0" anchor="ctr">
+            <a:noAutofit/>
+          </a:bodyPr>
+          <a:lstStyle xmlns:a="http://schemas.openxmlformats.org/drawingml/2006/main"/>
+          <a:p xmlns:a="http://schemas.openxmlformats.org/drawingml/2006/main">
+            <a:pPr algn="ctr">
+              <a:defRPr sz="1275" b="0">
                 <a:solidFill>
                   <a:srgbClr val="F4F7FA"/>
                 </a:solidFill>
@@ -23237,7 +25353,7 @@
               </a:defRPr>
             </a:pPr>
             <a:r>
-              <a:rPr sz="1575" b="0">
+              <a:rPr sz="1275" b="0">
                 <a:solidFill>
                   <a:srgbClr val="F4F7FA"/>
                 </a:solidFill>
@@ -23245,211 +25361,96 @@
                 <a:ea typeface="Roboto"/>
                 <a:cs typeface="Roboto"/>
               </a:rPr>
-              <a:t>Explain an approved support article.</a:t>
-            </a:r>
-          </a:p>
-        </p:txBody>
-      </p:sp>
-      <p:sp>
-        <p:nvSpPr>
-          <p:cNvPr id="19" name="">
-            <a:extLst xmlns:a="http://schemas.openxmlformats.org/drawingml/2006/main">
-              <a:ext uri="{FF2B5EF4-FFF2-40B4-BE49-F238E27FC236}">
-                <a16:creationId xmlns:a16="http://schemas.microsoft.com/office/drawing/2014/main" id="{F534DA25-6BA4-4E3F-8B52-9E550F5AD316}"/>
-              </a:ext>
-            </a:extLst>
-          </p:cNvPr>
-          <p:cNvSpPr>
-            <a:spLocks xmlns:a="http://schemas.openxmlformats.org/drawingml/2006/main" noGrp="1"/>
-          </p:cNvSpPr>
-          <p:nvPr/>
-        </p:nvSpPr>
-        <p:spPr>
-          <a:xfrm xmlns:a="http://schemas.openxmlformats.org/drawingml/2006/main">
-            <a:off x="5410200" y="3248025"/>
-            <a:ext cx="85725" cy="85725"/>
-          </a:xfrm>
-          <a:prstGeom xmlns:a="http://schemas.openxmlformats.org/drawingml/2006/main" prst="ellipse">
+              <a:t>Short explanation</a:t>
+            </a:r>
+          </a:p>
+        </p:txBody>
+      </p:sp>
+      <p:sp>
+        <p:nvSpPr>
+          <p:cNvPr id="33" name="">
+            <a:extLst xmlns:a="http://schemas.openxmlformats.org/drawingml/2006/main">
+              <a:ext uri="{FF2B5EF4-FFF2-40B4-BE49-F238E27FC236}">
+                <a16:creationId xmlns:a16="http://schemas.microsoft.com/office/drawing/2014/main" id="{E55221E2-E6D7-4A94-B634-3355308C4767}"/>
+              </a:ext>
+            </a:extLst>
+          </p:cNvPr>
+          <p:cNvSpPr>
+            <a:spLocks xmlns:a="http://schemas.openxmlformats.org/drawingml/2006/main" noGrp="1"/>
+          </p:cNvSpPr>
+          <p:nvPr/>
+        </p:nvSpPr>
+        <p:spPr>
+          <a:xfrm xmlns:a="http://schemas.openxmlformats.org/drawingml/2006/main">
+            <a:off x="6953250" y="3438525"/>
+            <a:ext cx="2571750" cy="200025"/>
+          </a:xfrm>
+          <a:prstGeom xmlns:a="http://schemas.openxmlformats.org/drawingml/2006/main" prst="rect">
+            <a:avLst/>
+          </a:prstGeom>
+          <a:noFill xmlns:a="http://schemas.openxmlformats.org/drawingml/2006/main"/>
+          <a:ln xmlns:a="http://schemas.openxmlformats.org/drawingml/2006/main" w="0">
+            <a:noFill/>
+          </a:ln>
+        </p:spPr>
+        <p:txBody>
+          <a:bodyPr xmlns:a="http://schemas.openxmlformats.org/drawingml/2006/main" wrap="square" lIns="0" tIns="0" rIns="0" bIns="0" anchor="ctr">
+            <a:noAutofit/>
+          </a:bodyPr>
+          <a:lstStyle xmlns:a="http://schemas.openxmlformats.org/drawingml/2006/main"/>
+          <a:p xmlns:a="http://schemas.openxmlformats.org/drawingml/2006/main">
+            <a:pPr algn="ctr">
+              <a:defRPr sz="1275" b="0">
+                <a:solidFill>
+                  <a:srgbClr val="F4F7FA"/>
+                </a:solidFill>
+                <a:latin typeface="Roboto"/>
+                <a:ea typeface="Roboto"/>
+                <a:cs typeface="Roboto"/>
+              </a:defRPr>
+            </a:pPr>
+            <a:r>
+              <a:rPr sz="1275" b="0">
+                <a:solidFill>
+                  <a:srgbClr val="F4F7FA"/>
+                </a:solidFill>
+                <a:latin typeface="Roboto"/>
+                <a:ea typeface="Roboto"/>
+                <a:cs typeface="Roboto"/>
+              </a:rPr>
+              <a:t>Detailed explanation</a:t>
+            </a:r>
+          </a:p>
+        </p:txBody>
+      </p:sp>
+      <p:sp>
+        <p:nvSpPr>
+          <p:cNvPr id="34" name="">
+            <a:extLst xmlns:a="http://schemas.openxmlformats.org/drawingml/2006/main">
+              <a:ext uri="{FF2B5EF4-FFF2-40B4-BE49-F238E27FC236}">
+                <a16:creationId xmlns:a16="http://schemas.microsoft.com/office/drawing/2014/main" id="{B246209A-D179-4383-8116-165F08F1F705}"/>
+              </a:ext>
+            </a:extLst>
+          </p:cNvPr>
+          <p:cNvSpPr>
+            <a:spLocks xmlns:a="http://schemas.openxmlformats.org/drawingml/2006/main" noGrp="1"/>
+          </p:cNvSpPr>
+          <p:nvPr/>
+        </p:nvSpPr>
+        <p:spPr>
+          <a:xfrm xmlns:a="http://schemas.openxmlformats.org/drawingml/2006/main">
+            <a:off x="11106150" y="3133725"/>
+            <a:ext cx="95250" cy="95250"/>
+          </a:xfrm>
+          <a:prstGeom xmlns:a="http://schemas.openxmlformats.org/drawingml/2006/main" prst="rect">
             <a:avLst/>
           </a:prstGeom>
           <a:solidFill xmlns:a="http://schemas.openxmlformats.org/drawingml/2006/main">
-            <a:srgbClr val="28C7F7"/>
+            <a:srgbClr val="FF6B75"/>
           </a:solidFill>
           <a:ln xmlns:a="http://schemas.openxmlformats.org/drawingml/2006/main" w="0">
-            <a:noFill/>
-          </a:ln>
-        </p:spPr>
-      </p:sp>
-      <p:sp>
-        <p:nvSpPr>
-          <p:cNvPr id="20" name="">
-            <a:extLst xmlns:a="http://schemas.openxmlformats.org/drawingml/2006/main">
-              <a:ext uri="{FF2B5EF4-FFF2-40B4-BE49-F238E27FC236}">
-                <a16:creationId xmlns:a16="http://schemas.microsoft.com/office/drawing/2014/main" id="{2ABC69EA-602E-4C08-A876-BC116C74F5AE}"/>
-              </a:ext>
-            </a:extLst>
-          </p:cNvPr>
-          <p:cNvSpPr>
-            <a:spLocks xmlns:a="http://schemas.openxmlformats.org/drawingml/2006/main" noGrp="1"/>
-          </p:cNvSpPr>
-          <p:nvPr/>
-        </p:nvSpPr>
-        <p:spPr>
-          <a:xfrm xmlns:a="http://schemas.openxmlformats.org/drawingml/2006/main">
-            <a:off x="5581650" y="3143250"/>
-            <a:ext cx="2714625" cy="276225"/>
-          </a:xfrm>
-          <a:prstGeom xmlns:a="http://schemas.openxmlformats.org/drawingml/2006/main" prst="rect">
-            <a:avLst/>
-          </a:prstGeom>
-          <a:noFill xmlns:a="http://schemas.openxmlformats.org/drawingml/2006/main"/>
-          <a:ln xmlns:a="http://schemas.openxmlformats.org/drawingml/2006/main" w="0">
-            <a:noFill/>
-          </a:ln>
-        </p:spPr>
-        <p:txBody>
-          <a:bodyPr xmlns:a="http://schemas.openxmlformats.org/drawingml/2006/main" wrap="square" lIns="0" tIns="0" rIns="0" bIns="0" anchor="ctr">
-            <a:noAutofit/>
-          </a:bodyPr>
-          <a:lstStyle xmlns:a="http://schemas.openxmlformats.org/drawingml/2006/main"/>
-          <a:p xmlns:a="http://schemas.openxmlformats.org/drawingml/2006/main">
-            <a:pPr algn="l">
-              <a:defRPr sz="1425" b="0">
-                <a:solidFill>
-                  <a:srgbClr val="28C7F7"/>
-                </a:solidFill>
-                <a:latin typeface="Roboto"/>
-                <a:ea typeface="Roboto"/>
-                <a:cs typeface="Roboto"/>
-              </a:defRPr>
-            </a:pPr>
-            <a:r>
-              <a:rPr sz="1425" b="0">
-                <a:solidFill>
-                  <a:srgbClr val="28C7F7"/>
-                </a:solidFill>
-                <a:latin typeface="Roboto"/>
-                <a:ea typeface="Roboto"/>
-                <a:cs typeface="Roboto"/>
-              </a:rPr>
-              <a:t>Short explanation</a:t>
-            </a:r>
-          </a:p>
-        </p:txBody>
-      </p:sp>
-      <p:sp>
-        <p:nvSpPr>
-          <p:cNvPr id="21" name="">
-            <a:extLst xmlns:a="http://schemas.openxmlformats.org/drawingml/2006/main">
-              <a:ext uri="{FF2B5EF4-FFF2-40B4-BE49-F238E27FC236}">
-                <a16:creationId xmlns:a16="http://schemas.microsoft.com/office/drawing/2014/main" id="{7FF660B8-2340-4925-B7EE-EB4F263E2ABA}"/>
-              </a:ext>
-            </a:extLst>
-          </p:cNvPr>
-          <p:cNvSpPr>
-            <a:spLocks xmlns:a="http://schemas.openxmlformats.org/drawingml/2006/main" noGrp="1"/>
-          </p:cNvSpPr>
-          <p:nvPr/>
-        </p:nvSpPr>
-        <p:spPr>
-          <a:xfrm xmlns:a="http://schemas.openxmlformats.org/drawingml/2006/main">
-            <a:off x="8382000" y="3248025"/>
-            <a:ext cx="85725" cy="85725"/>
-          </a:xfrm>
-          <a:prstGeom xmlns:a="http://schemas.openxmlformats.org/drawingml/2006/main" prst="ellipse">
-            <a:avLst/>
-          </a:prstGeom>
-          <a:solidFill xmlns:a="http://schemas.openxmlformats.org/drawingml/2006/main">
-            <a:srgbClr val="28C7F7"/>
-          </a:solidFill>
-          <a:ln xmlns:a="http://schemas.openxmlformats.org/drawingml/2006/main" w="0">
-            <a:noFill/>
-          </a:ln>
-        </p:spPr>
-      </p:sp>
-      <p:sp>
-        <p:nvSpPr>
-          <p:cNvPr id="22" name="">
-            <a:extLst xmlns:a="http://schemas.openxmlformats.org/drawingml/2006/main">
-              <a:ext uri="{FF2B5EF4-FFF2-40B4-BE49-F238E27FC236}">
-                <a16:creationId xmlns:a16="http://schemas.microsoft.com/office/drawing/2014/main" id="{97DF654C-4CA3-4473-9B12-0C7DF77917F8}"/>
-              </a:ext>
-            </a:extLst>
-          </p:cNvPr>
-          <p:cNvSpPr>
-            <a:spLocks xmlns:a="http://schemas.openxmlformats.org/drawingml/2006/main" noGrp="1"/>
-          </p:cNvSpPr>
-          <p:nvPr/>
-        </p:nvSpPr>
-        <p:spPr>
-          <a:xfrm xmlns:a="http://schemas.openxmlformats.org/drawingml/2006/main">
-            <a:off x="8553450" y="3143250"/>
-            <a:ext cx="2714625" cy="276225"/>
-          </a:xfrm>
-          <a:prstGeom xmlns:a="http://schemas.openxmlformats.org/drawingml/2006/main" prst="rect">
-            <a:avLst/>
-          </a:prstGeom>
-          <a:noFill xmlns:a="http://schemas.openxmlformats.org/drawingml/2006/main"/>
-          <a:ln xmlns:a="http://schemas.openxmlformats.org/drawingml/2006/main" w="0">
-            <a:noFill/>
-          </a:ln>
-        </p:spPr>
-        <p:txBody>
-          <a:bodyPr xmlns:a="http://schemas.openxmlformats.org/drawingml/2006/main" wrap="square" lIns="0" tIns="0" rIns="0" bIns="0" anchor="ctr">
-            <a:noAutofit/>
-          </a:bodyPr>
-          <a:lstStyle xmlns:a="http://schemas.openxmlformats.org/drawingml/2006/main"/>
-          <a:p xmlns:a="http://schemas.openxmlformats.org/drawingml/2006/main">
-            <a:pPr algn="l">
-              <a:defRPr sz="1425" b="0">
-                <a:solidFill>
-                  <a:srgbClr val="28C7F7"/>
-                </a:solidFill>
-                <a:latin typeface="Roboto"/>
-                <a:ea typeface="Roboto"/>
-                <a:cs typeface="Roboto"/>
-              </a:defRPr>
-            </a:pPr>
-            <a:r>
-              <a:rPr sz="1425" b="0">
-                <a:solidFill>
-                  <a:srgbClr val="28C7F7"/>
-                </a:solidFill>
-                <a:latin typeface="Roboto"/>
-                <a:ea typeface="Roboto"/>
-                <a:cs typeface="Roboto"/>
-              </a:rPr>
-              <a:t>Detailed explanation</a:t>
-            </a:r>
-          </a:p>
-        </p:txBody>
-      </p:sp>
-      <p:sp>
-        <p:nvSpPr>
-          <p:cNvPr id="23" name="">
-            <a:extLst xmlns:a="http://schemas.openxmlformats.org/drawingml/2006/main">
-              <a:ext uri="{FF2B5EF4-FFF2-40B4-BE49-F238E27FC236}">
-                <a16:creationId xmlns:a16="http://schemas.microsoft.com/office/drawing/2014/main" id="{4BDF07EB-36F3-4414-985E-672F0FE9588F}"/>
-              </a:ext>
-            </a:extLst>
-          </p:cNvPr>
-          <p:cNvSpPr>
-            <a:spLocks xmlns:a="http://schemas.openxmlformats.org/drawingml/2006/main" noGrp="1"/>
-          </p:cNvSpPr>
-          <p:nvPr/>
-        </p:nvSpPr>
-        <p:spPr>
-          <a:xfrm xmlns:a="http://schemas.openxmlformats.org/drawingml/2006/main" flipH="0" flipV="0">
-            <a:off x="5219700" y="3638550"/>
-            <a:ext cx="6248400" cy="0"/>
-          </a:xfrm>
-          <a:prstGeom xmlns:a="http://schemas.openxmlformats.org/drawingml/2006/main" prst="line">
-            <a:avLst/>
-          </a:prstGeom>
-          <a:noFill xmlns:a="http://schemas.openxmlformats.org/drawingml/2006/main"/>
-          <a:ln xmlns:a="http://schemas.openxmlformats.org/drawingml/2006/main" w="19050">
             <a:solidFill>
-              <a:srgbClr val="F5B61C"/>
+              <a:srgbClr val="FF6B75"/>
             </a:solidFill>
             <a:prstDash val="solid"/>
           </a:ln>
@@ -23457,22 +25458,79 @@
       </p:sp>
       <p:sp>
         <p:nvSpPr>
-          <p:cNvPr id="24" name="">
-            <a:extLst xmlns:a="http://schemas.openxmlformats.org/drawingml/2006/main">
-              <a:ext uri="{FF2B5EF4-FFF2-40B4-BE49-F238E27FC236}">
-                <a16:creationId xmlns:a16="http://schemas.microsoft.com/office/drawing/2014/main" id="{D6A93900-8A66-46C8-AF6E-17062EC7B37E}"/>
-              </a:ext>
-            </a:extLst>
-          </p:cNvPr>
-          <p:cNvSpPr>
-            <a:spLocks xmlns:a="http://schemas.openxmlformats.org/drawingml/2006/main" noGrp="1"/>
-          </p:cNvSpPr>
-          <p:nvPr/>
-        </p:nvSpPr>
-        <p:spPr>
-          <a:xfrm xmlns:a="http://schemas.openxmlformats.org/drawingml/2006/main">
-            <a:off x="5219700" y="3686175"/>
-            <a:ext cx="885825" cy="238125"/>
+          <p:cNvPr id="35" name="">
+            <a:extLst xmlns:a="http://schemas.openxmlformats.org/drawingml/2006/main">
+              <a:ext uri="{FF2B5EF4-FFF2-40B4-BE49-F238E27FC236}">
+                <a16:creationId xmlns:a16="http://schemas.microsoft.com/office/drawing/2014/main" id="{4E8C3A24-03A0-4E64-8438-9921CAF1BA51}"/>
+              </a:ext>
+            </a:extLst>
+          </p:cNvPr>
+          <p:cNvSpPr>
+            <a:spLocks xmlns:a="http://schemas.openxmlformats.org/drawingml/2006/main" noGrp="1"/>
+          </p:cNvSpPr>
+          <p:nvPr/>
+        </p:nvSpPr>
+        <p:spPr>
+          <a:xfrm xmlns:a="http://schemas.openxmlformats.org/drawingml/2006/main">
+            <a:off x="10344150" y="3305175"/>
+            <a:ext cx="1238250" cy="409575"/>
+          </a:xfrm>
+          <a:prstGeom xmlns:a="http://schemas.openxmlformats.org/drawingml/2006/main" prst="rect">
+            <a:avLst/>
+          </a:prstGeom>
+          <a:noFill xmlns:a="http://schemas.openxmlformats.org/drawingml/2006/main"/>
+          <a:ln xmlns:a="http://schemas.openxmlformats.org/drawingml/2006/main" w="0">
+            <a:noFill/>
+          </a:ln>
+        </p:spPr>
+        <p:txBody>
+          <a:bodyPr xmlns:a="http://schemas.openxmlformats.org/drawingml/2006/main" wrap="square" lIns="0" tIns="0" rIns="0" bIns="0" anchor="ctr">
+            <a:noAutofit/>
+          </a:bodyPr>
+          <a:lstStyle xmlns:a="http://schemas.openxmlformats.org/drawingml/2006/main"/>
+          <a:p xmlns:a="http://schemas.openxmlformats.org/drawingml/2006/main">
+            <a:pPr algn="ctr">
+              <a:defRPr sz="1350" b="0">
+                <a:solidFill>
+                  <a:srgbClr val="FF6B75"/>
+                </a:solidFill>
+                <a:latin typeface="Roboto"/>
+                <a:ea typeface="Roboto"/>
+                <a:cs typeface="Roboto"/>
+              </a:defRPr>
+            </a:pPr>
+            <a:r>
+              <a:rPr sz="1350" b="0">
+                <a:solidFill>
+                  <a:srgbClr val="FF6B75"/>
+                </a:solidFill>
+                <a:latin typeface="Roboto"/>
+                <a:ea typeface="Roboto"/>
+                <a:cs typeface="Roboto"/>
+              </a:rPr>
+              <a:t>Prohibited outcome</a:t>
+            </a:r>
+          </a:p>
+        </p:txBody>
+      </p:sp>
+      <p:sp>
+        <p:nvSpPr>
+          <p:cNvPr id="36" name="">
+            <a:extLst xmlns:a="http://schemas.openxmlformats.org/drawingml/2006/main">
+              <a:ext uri="{FF2B5EF4-FFF2-40B4-BE49-F238E27FC236}">
+                <a16:creationId xmlns:a16="http://schemas.microsoft.com/office/drawing/2014/main" id="{DB26BBA2-8449-45F6-8BB3-60103712331D}"/>
+              </a:ext>
+            </a:extLst>
+          </p:cNvPr>
+          <p:cNvSpPr>
+            <a:spLocks xmlns:a="http://schemas.openxmlformats.org/drawingml/2006/main" noGrp="1"/>
+          </p:cNvSpPr>
+          <p:nvPr/>
+        </p:nvSpPr>
+        <p:spPr>
+          <a:xfrm xmlns:a="http://schemas.openxmlformats.org/drawingml/2006/main">
+            <a:off x="5305425" y="3933825"/>
+            <a:ext cx="6276975" cy="228600"/>
           </a:xfrm>
           <a:prstGeom xmlns:a="http://schemas.openxmlformats.org/drawingml/2006/main" prst="rect">
             <a:avLst/>
@@ -23489,47 +25547,47 @@
           <a:lstStyle xmlns:a="http://schemas.openxmlformats.org/drawingml/2006/main"/>
           <a:p xmlns:a="http://schemas.openxmlformats.org/drawingml/2006/main">
             <a:pPr algn="l">
-              <a:defRPr sz="1350" b="1">
-                <a:solidFill>
-                  <a:srgbClr val="F5B61C"/>
-                </a:solidFill>
-                <a:latin typeface="Roboto"/>
-                <a:ea typeface="Roboto"/>
-                <a:cs typeface="Roboto"/>
-              </a:defRPr>
-            </a:pPr>
-            <a:r>
-              <a:rPr sz="1350" b="1">
-                <a:solidFill>
-                  <a:srgbClr val="F5B61C"/>
-                </a:solidFill>
-                <a:latin typeface="Roboto"/>
-                <a:ea typeface="Roboto"/>
-                <a:cs typeface="Roboto"/>
-              </a:rPr>
-              <a:t>CLARIFY</a:t>
-            </a:r>
-          </a:p>
-        </p:txBody>
-      </p:sp>
-      <p:sp>
-        <p:nvSpPr>
-          <p:cNvPr id="25" name="">
-            <a:extLst xmlns:a="http://schemas.openxmlformats.org/drawingml/2006/main">
-              <a:ext uri="{FF2B5EF4-FFF2-40B4-BE49-F238E27FC236}">
-                <a16:creationId xmlns:a16="http://schemas.microsoft.com/office/drawing/2014/main" id="{34B8B7F5-5324-462C-AB27-897CF62D82B2}"/>
-              </a:ext>
-            </a:extLst>
-          </p:cNvPr>
-          <p:cNvSpPr>
-            <a:spLocks xmlns:a="http://schemas.openxmlformats.org/drawingml/2006/main" noGrp="1"/>
-          </p:cNvSpPr>
-          <p:nvPr/>
-        </p:nvSpPr>
-        <p:spPr>
-          <a:xfrm xmlns:a="http://schemas.openxmlformats.org/drawingml/2006/main">
-            <a:off x="6210300" y="3686175"/>
-            <a:ext cx="5257800" cy="238125"/>
+              <a:defRPr sz="1275" b="0">
+                <a:solidFill>
+                  <a:srgbClr val="ADB8C5"/>
+                </a:solidFill>
+                <a:latin typeface="Roboto"/>
+                <a:ea typeface="Roboto"/>
+                <a:cs typeface="Roboto"/>
+              </a:defRPr>
+            </a:pPr>
+            <a:r>
+              <a:rPr sz="1275" b="0">
+                <a:solidFill>
+                  <a:srgbClr val="ADB8C5"/>
+                </a:solidFill>
+                <a:latin typeface="Roboto"/>
+                <a:ea typeface="Roboto"/>
+                <a:cs typeface="Roboto"/>
+              </a:rPr>
+              <a:t>Conceptual space, not a universal semantic metric</a:t>
+            </a:r>
+          </a:p>
+        </p:txBody>
+      </p:sp>
+      <p:sp>
+        <p:nvSpPr>
+          <p:cNvPr id="37" name="">
+            <a:extLst xmlns:a="http://schemas.openxmlformats.org/drawingml/2006/main">
+              <a:ext uri="{FF2B5EF4-FFF2-40B4-BE49-F238E27FC236}">
+                <a16:creationId xmlns:a16="http://schemas.microsoft.com/office/drawing/2014/main" id="{E98EF069-A03C-49F0-9295-1F3664958164}"/>
+              </a:ext>
+            </a:extLst>
+          </p:cNvPr>
+          <p:cNvSpPr>
+            <a:spLocks xmlns:a="http://schemas.openxmlformats.org/drawingml/2006/main" noGrp="1"/>
+          </p:cNvSpPr>
+          <p:nvPr/>
+        </p:nvSpPr>
+        <p:spPr>
+          <a:xfrm xmlns:a="http://schemas.openxmlformats.org/drawingml/2006/main">
+            <a:off x="5105400" y="4210050"/>
+            <a:ext cx="6477000" cy="238125"/>
           </a:xfrm>
           <a:prstGeom xmlns:a="http://schemas.openxmlformats.org/drawingml/2006/main" prst="rect">
             <a:avLst/>
@@ -23546,7 +25604,7 @@
           <a:lstStyle xmlns:a="http://schemas.openxmlformats.org/drawingml/2006/main"/>
           <a:p xmlns:a="http://schemas.openxmlformats.org/drawingml/2006/main">
             <a:pPr algn="l">
-              <a:defRPr sz="1500" b="0">
+              <a:defRPr sz="1200" b="0">
                 <a:solidFill>
                   <a:srgbClr val="F4F7FA"/>
                 </a:solidFill>
@@ -23556,7 +25614,7 @@
               </a:defRPr>
             </a:pPr>
             <a:r>
-              <a:rPr sz="1500" b="0">
+              <a:rPr sz="1200" b="0">
                 <a:solidFill>
                   <a:srgbClr val="F4F7FA"/>
                 </a:solidFill>
@@ -23564,131 +25622,17 @@
                 <a:ea typeface="Roboto"/>
                 <a:cs typeface="Roboto"/>
               </a:rPr>
-              <a:t>Missing context? Ask before advising.</a:t>
-            </a:r>
-          </a:p>
-        </p:txBody>
-      </p:sp>
-      <p:sp>
-        <p:nvSpPr>
-          <p:cNvPr id="26" name="">
-            <a:extLst xmlns:a="http://schemas.openxmlformats.org/drawingml/2006/main">
-              <a:ext uri="{FF2B5EF4-FFF2-40B4-BE49-F238E27FC236}">
-                <a16:creationId xmlns:a16="http://schemas.microsoft.com/office/drawing/2014/main" id="{5A4114C1-D0B5-4253-880D-B1EC31F27B50}"/>
-              </a:ext>
-            </a:extLst>
-          </p:cNvPr>
-          <p:cNvSpPr>
-            <a:spLocks xmlns:a="http://schemas.openxmlformats.org/drawingml/2006/main" noGrp="1"/>
-          </p:cNvSpPr>
-          <p:nvPr/>
-        </p:nvSpPr>
-        <p:spPr>
-          <a:xfrm xmlns:a="http://schemas.openxmlformats.org/drawingml/2006/main">
-            <a:off x="5219700" y="3971925"/>
-            <a:ext cx="885825" cy="238125"/>
-          </a:xfrm>
-          <a:prstGeom xmlns:a="http://schemas.openxmlformats.org/drawingml/2006/main" prst="rect">
-            <a:avLst/>
-          </a:prstGeom>
-          <a:noFill xmlns:a="http://schemas.openxmlformats.org/drawingml/2006/main"/>
-          <a:ln xmlns:a="http://schemas.openxmlformats.org/drawingml/2006/main" w="0">
-            <a:noFill/>
-          </a:ln>
-        </p:spPr>
-        <p:txBody>
-          <a:bodyPr xmlns:a="http://schemas.openxmlformats.org/drawingml/2006/main" wrap="square" lIns="0" tIns="0" rIns="0" bIns="0" anchor="ctr">
-            <a:noAutofit/>
-          </a:bodyPr>
-          <a:lstStyle xmlns:a="http://schemas.openxmlformats.org/drawingml/2006/main"/>
-          <a:p xmlns:a="http://schemas.openxmlformats.org/drawingml/2006/main">
-            <a:pPr algn="l">
-              <a:defRPr sz="1350" b="1">
-                <a:solidFill>
-                  <a:srgbClr val="FF6B75"/>
-                </a:solidFill>
-                <a:latin typeface="Roboto"/>
-                <a:ea typeface="Roboto"/>
-                <a:cs typeface="Roboto"/>
-              </a:defRPr>
-            </a:pPr>
-            <a:r>
-              <a:rPr sz="1350" b="1">
-                <a:solidFill>
-                  <a:srgbClr val="FF6B75"/>
-                </a:solidFill>
-                <a:latin typeface="Roboto"/>
-                <a:ea typeface="Roboto"/>
-                <a:cs typeface="Roboto"/>
-              </a:rPr>
-              <a:t>PROHIBIT</a:t>
-            </a:r>
-          </a:p>
-        </p:txBody>
-      </p:sp>
-      <p:sp>
-        <p:nvSpPr>
-          <p:cNvPr id="27" name="">
-            <a:extLst xmlns:a="http://schemas.openxmlformats.org/drawingml/2006/main">
-              <a:ext uri="{FF2B5EF4-FFF2-40B4-BE49-F238E27FC236}">
-                <a16:creationId xmlns:a16="http://schemas.microsoft.com/office/drawing/2014/main" id="{215D0559-16FD-42C9-B8DC-020056A32DBE}"/>
-              </a:ext>
-            </a:extLst>
-          </p:cNvPr>
-          <p:cNvSpPr>
-            <a:spLocks xmlns:a="http://schemas.openxmlformats.org/drawingml/2006/main" noGrp="1"/>
-          </p:cNvSpPr>
-          <p:nvPr/>
-        </p:nvSpPr>
-        <p:spPr>
-          <a:xfrm xmlns:a="http://schemas.openxmlformats.org/drawingml/2006/main">
-            <a:off x="6210300" y="3971925"/>
-            <a:ext cx="5257800" cy="238125"/>
-          </a:xfrm>
-          <a:prstGeom xmlns:a="http://schemas.openxmlformats.org/drawingml/2006/main" prst="rect">
-            <a:avLst/>
-          </a:prstGeom>
-          <a:noFill xmlns:a="http://schemas.openxmlformats.org/drawingml/2006/main"/>
-          <a:ln xmlns:a="http://schemas.openxmlformats.org/drawingml/2006/main" w="0">
-            <a:noFill/>
-          </a:ln>
-        </p:spPr>
-        <p:txBody>
-          <a:bodyPr xmlns:a="http://schemas.openxmlformats.org/drawingml/2006/main" wrap="square" lIns="0" tIns="0" rIns="0" bIns="0" anchor="ctr">
-            <a:noAutofit/>
-          </a:bodyPr>
-          <a:lstStyle xmlns:a="http://schemas.openxmlformats.org/drawingml/2006/main"/>
-          <a:p xmlns:a="http://schemas.openxmlformats.org/drawingml/2006/main">
-            <a:pPr algn="l">
-              <a:defRPr sz="1500" b="0">
-                <a:solidFill>
-                  <a:srgbClr val="F4F7FA"/>
-                </a:solidFill>
-                <a:latin typeface="Roboto"/>
-                <a:ea typeface="Roboto"/>
-                <a:cs typeface="Roboto"/>
-              </a:defRPr>
-            </a:pPr>
-            <a:r>
-              <a:rPr sz="1500" b="0">
-                <a:solidFill>
-                  <a:srgbClr val="F4F7FA"/>
-                </a:solidFill>
-                <a:latin typeface="Roboto"/>
-                <a:ea typeface="Roboto"/>
-                <a:cs typeface="Roboto"/>
-              </a:rPr>
-              <a:t>Invent steps, expose data, bypass approval.</a:t>
-            </a:r>
-          </a:p>
-        </p:txBody>
-      </p:sp>
-      <p:sp>
-        <p:nvSpPr>
-          <p:cNvPr id="28" name="">
-            <a:extLst xmlns:a="http://schemas.openxmlformats.org/drawingml/2006/main">
-              <a:ext uri="{FF2B5EF4-FFF2-40B4-BE49-F238E27FC236}">
-                <a16:creationId xmlns:a16="http://schemas.microsoft.com/office/drawing/2014/main" id="{0BC0F546-F175-416E-A0D8-B5143E9920C7}"/>
+              <a:t>ALLOW approved sources   ·   CLARIFY missing context   ·   PROHIBIT unsafe actions</a:t>
+            </a:r>
+          </a:p>
+        </p:txBody>
+      </p:sp>
+      <p:sp>
+        <p:nvSpPr>
+          <p:cNvPr id="38" name="">
+            <a:extLst xmlns:a="http://schemas.openxmlformats.org/drawingml/2006/main">
+              <a:ext uri="{FF2B5EF4-FFF2-40B4-BE49-F238E27FC236}">
+                <a16:creationId xmlns:a16="http://schemas.microsoft.com/office/drawing/2014/main" id="{96C47428-5AC4-438D-87F4-42B002FD559A}"/>
               </a:ext>
             </a:extLst>
           </p:cNvPr>
@@ -23699,7 +25643,7 @@
         </p:nvSpPr>
         <p:spPr>
           <a:xfrm xmlns:a="http://schemas.openxmlformats.org/drawingml/2006/main" flipH="0" flipV="0">
-            <a:off x="609600" y="4324350"/>
+            <a:off x="609600" y="4543425"/>
             <a:ext cx="10972800" cy="0"/>
           </a:xfrm>
           <a:prstGeom xmlns:a="http://schemas.openxmlformats.org/drawingml/2006/main" prst="line">
@@ -23716,21 +25660,21 @@
       </p:sp>
       <p:sp>
         <p:nvSpPr>
-          <p:cNvPr id="29" name="">
-            <a:extLst xmlns:a="http://schemas.openxmlformats.org/drawingml/2006/main">
-              <a:ext uri="{FF2B5EF4-FFF2-40B4-BE49-F238E27FC236}">
-                <a16:creationId xmlns:a16="http://schemas.microsoft.com/office/drawing/2014/main" id="{1C0CF48D-7973-4ABC-9B32-6AF732AD0B02}"/>
-              </a:ext>
-            </a:extLst>
-          </p:cNvPr>
-          <p:cNvSpPr>
-            <a:spLocks xmlns:a="http://schemas.openxmlformats.org/drawingml/2006/main" noGrp="1"/>
-          </p:cNvSpPr>
-          <p:nvPr/>
-        </p:nvSpPr>
-        <p:spPr>
-          <a:xfrm xmlns:a="http://schemas.openxmlformats.org/drawingml/2006/main">
-            <a:off x="609600" y="4410075"/>
+          <p:cNvPr id="39" name="">
+            <a:extLst xmlns:a="http://schemas.openxmlformats.org/drawingml/2006/main">
+              <a:ext uri="{FF2B5EF4-FFF2-40B4-BE49-F238E27FC236}">
+                <a16:creationId xmlns:a16="http://schemas.microsoft.com/office/drawing/2014/main" id="{76B726DD-E454-4EDF-9E13-BB2027A02C18}"/>
+              </a:ext>
+            </a:extLst>
+          </p:cNvPr>
+          <p:cNvSpPr>
+            <a:spLocks xmlns:a="http://schemas.openxmlformats.org/drawingml/2006/main" noGrp="1"/>
+          </p:cNvSpPr>
+          <p:nvPr/>
+        </p:nvSpPr>
+        <p:spPr>
+          <a:xfrm xmlns:a="http://schemas.openxmlformats.org/drawingml/2006/main">
+            <a:off x="609600" y="4591050"/>
             <a:ext cx="10972800" cy="247650"/>
           </a:xfrm>
           <a:prstGeom xmlns:a="http://schemas.openxmlformats.org/drawingml/2006/main" prst="rect">
@@ -23748,7 +25692,7 @@
           <a:lstStyle xmlns:a="http://schemas.openxmlformats.org/drawingml/2006/main"/>
           <a:p xmlns:a="http://schemas.openxmlformats.org/drawingml/2006/main">
             <a:pPr algn="l">
-              <a:defRPr sz="1575" b="1">
+              <a:defRPr sz="1500" b="1">
                 <a:solidFill>
                   <a:srgbClr val="F5B61C"/>
                 </a:solidFill>
@@ -23758,7 +25702,7 @@
               </a:defRPr>
             </a:pPr>
             <a:r>
-              <a:rPr sz="1575" b="1">
+              <a:rPr sz="1500" b="1">
                 <a:solidFill>
                   <a:srgbClr val="F5B61C"/>
                 </a:solidFill>
@@ -23773,22 +25717,22 @@
       </p:sp>
       <p:sp>
         <p:nvSpPr>
-          <p:cNvPr id="30" name="">
-            <a:extLst xmlns:a="http://schemas.openxmlformats.org/drawingml/2006/main">
-              <a:ext uri="{FF2B5EF4-FFF2-40B4-BE49-F238E27FC236}">
-                <a16:creationId xmlns:a16="http://schemas.microsoft.com/office/drawing/2014/main" id="{AC29EF98-A043-447E-9EA4-384F48A9B803}"/>
-              </a:ext>
-            </a:extLst>
-          </p:cNvPr>
-          <p:cNvSpPr>
-            <a:spLocks xmlns:a="http://schemas.openxmlformats.org/drawingml/2006/main" noGrp="1"/>
-          </p:cNvSpPr>
-          <p:nvPr/>
-        </p:nvSpPr>
-        <p:spPr>
-          <a:xfrm xmlns:a="http://schemas.openxmlformats.org/drawingml/2006/main">
-            <a:off x="609600" y="4762500"/>
-            <a:ext cx="5257800" cy="257175"/>
+          <p:cNvPr id="40" name="">
+            <a:extLst xmlns:a="http://schemas.openxmlformats.org/drawingml/2006/main">
+              <a:ext uri="{FF2B5EF4-FFF2-40B4-BE49-F238E27FC236}">
+                <a16:creationId xmlns:a16="http://schemas.microsoft.com/office/drawing/2014/main" id="{7781B186-3C44-4C34-8AAD-844A3D5A72AE}"/>
+              </a:ext>
+            </a:extLst>
+          </p:cNvPr>
+          <p:cNvSpPr>
+            <a:spLocks xmlns:a="http://schemas.openxmlformats.org/drawingml/2006/main" noGrp="1"/>
+          </p:cNvSpPr>
+          <p:nvPr/>
+        </p:nvSpPr>
+        <p:spPr>
+          <a:xfrm xmlns:a="http://schemas.openxmlformats.org/drawingml/2006/main">
+            <a:off x="609600" y="4886325"/>
+            <a:ext cx="5257800" cy="247650"/>
           </a:xfrm>
           <a:prstGeom xmlns:a="http://schemas.openxmlformats.org/drawingml/2006/main" prst="rect">
             <a:avLst/>
@@ -23805,7 +25749,7 @@
           <a:lstStyle xmlns:a="http://schemas.openxmlformats.org/drawingml/2006/main"/>
           <a:p xmlns:a="http://schemas.openxmlformats.org/drawingml/2006/main">
             <a:pPr algn="l">
-              <a:defRPr sz="1650" b="0">
+              <a:defRPr sz="1575" b="0">
                 <a:solidFill>
                   <a:srgbClr val="F4F7FA"/>
                 </a:solidFill>
@@ -23815,7 +25759,7 @@
               </a:defRPr>
             </a:pPr>
             <a:r>
-              <a:rPr sz="1650" b="0">
+              <a:rPr sz="1575" b="0">
                 <a:solidFill>
                   <a:srgbClr val="F4F7FA"/>
                 </a:solidFill>
@@ -23830,22 +25774,22 @@
       </p:sp>
       <p:sp>
         <p:nvSpPr>
-          <p:cNvPr id="31" name="">
-            <a:extLst xmlns:a="http://schemas.openxmlformats.org/drawingml/2006/main">
-              <a:ext uri="{FF2B5EF4-FFF2-40B4-BE49-F238E27FC236}">
-                <a16:creationId xmlns:a16="http://schemas.microsoft.com/office/drawing/2014/main" id="{DEC29DED-FAD6-448E-9A86-38560D01579E}"/>
-              </a:ext>
-            </a:extLst>
-          </p:cNvPr>
-          <p:cNvSpPr>
-            <a:spLocks xmlns:a="http://schemas.openxmlformats.org/drawingml/2006/main" noGrp="1"/>
-          </p:cNvSpPr>
-          <p:nvPr/>
-        </p:nvSpPr>
-        <p:spPr>
-          <a:xfrm xmlns:a="http://schemas.openxmlformats.org/drawingml/2006/main">
-            <a:off x="6286500" y="4762500"/>
-            <a:ext cx="5257800" cy="257175"/>
+          <p:cNvPr id="41" name="">
+            <a:extLst xmlns:a="http://schemas.openxmlformats.org/drawingml/2006/main">
+              <a:ext uri="{FF2B5EF4-FFF2-40B4-BE49-F238E27FC236}">
+                <a16:creationId xmlns:a16="http://schemas.microsoft.com/office/drawing/2014/main" id="{A2E69EFF-7559-4020-B56F-1F9C280EA685}"/>
+              </a:ext>
+            </a:extLst>
+          </p:cNvPr>
+          <p:cNvSpPr>
+            <a:spLocks xmlns:a="http://schemas.openxmlformats.org/drawingml/2006/main" noGrp="1"/>
+          </p:cNvSpPr>
+          <p:nvPr/>
+        </p:nvSpPr>
+        <p:spPr>
+          <a:xfrm xmlns:a="http://schemas.openxmlformats.org/drawingml/2006/main">
+            <a:off x="6286500" y="4886325"/>
+            <a:ext cx="5257800" cy="247650"/>
           </a:xfrm>
           <a:prstGeom xmlns:a="http://schemas.openxmlformats.org/drawingml/2006/main" prst="rect">
             <a:avLst/>
@@ -23862,7 +25806,7 @@
           <a:lstStyle xmlns:a="http://schemas.openxmlformats.org/drawingml/2006/main"/>
           <a:p xmlns:a="http://schemas.openxmlformats.org/drawingml/2006/main">
             <a:pPr algn="l">
-              <a:defRPr sz="1650" b="0">
+              <a:defRPr sz="1575" b="0">
                 <a:solidFill>
                   <a:srgbClr val="F4F7FA"/>
                 </a:solidFill>
@@ -23872,7 +25816,7 @@
               </a:defRPr>
             </a:pPr>
             <a:r>
-              <a:rPr sz="1650" b="0">
+              <a:rPr sz="1575" b="0">
                 <a:solidFill>
                   <a:srgbClr val="F4F7FA"/>
                 </a:solidFill>
@@ -23887,22 +25831,22 @@
       </p:sp>
       <p:sp>
         <p:nvSpPr>
-          <p:cNvPr id="32" name="">
-            <a:extLst xmlns:a="http://schemas.openxmlformats.org/drawingml/2006/main">
-              <a:ext uri="{FF2B5EF4-FFF2-40B4-BE49-F238E27FC236}">
-                <a16:creationId xmlns:a16="http://schemas.microsoft.com/office/drawing/2014/main" id="{1F3231FC-C12B-4823-A225-18DB7CD666B7}"/>
-              </a:ext>
-            </a:extLst>
-          </p:cNvPr>
-          <p:cNvSpPr>
-            <a:spLocks xmlns:a="http://schemas.openxmlformats.org/drawingml/2006/main" noGrp="1"/>
-          </p:cNvSpPr>
-          <p:nvPr/>
-        </p:nvSpPr>
-        <p:spPr>
-          <a:xfrm xmlns:a="http://schemas.openxmlformats.org/drawingml/2006/main">
-            <a:off x="609600" y="5057775"/>
-            <a:ext cx="5257800" cy="257175"/>
+          <p:cNvPr id="42" name="">
+            <a:extLst xmlns:a="http://schemas.openxmlformats.org/drawingml/2006/main">
+              <a:ext uri="{FF2B5EF4-FFF2-40B4-BE49-F238E27FC236}">
+                <a16:creationId xmlns:a16="http://schemas.microsoft.com/office/drawing/2014/main" id="{552F844A-376A-4531-9C6B-9F09F257ABC2}"/>
+              </a:ext>
+            </a:extLst>
+          </p:cNvPr>
+          <p:cNvSpPr>
+            <a:spLocks xmlns:a="http://schemas.openxmlformats.org/drawingml/2006/main" noGrp="1"/>
+          </p:cNvSpPr>
+          <p:nvPr/>
+        </p:nvSpPr>
+        <p:spPr>
+          <a:xfrm xmlns:a="http://schemas.openxmlformats.org/drawingml/2006/main">
+            <a:off x="609600" y="5153025"/>
+            <a:ext cx="5257800" cy="247650"/>
           </a:xfrm>
           <a:prstGeom xmlns:a="http://schemas.openxmlformats.org/drawingml/2006/main" prst="rect">
             <a:avLst/>
@@ -23919,7 +25863,7 @@
           <a:lstStyle xmlns:a="http://schemas.openxmlformats.org/drawingml/2006/main"/>
           <a:p xmlns:a="http://schemas.openxmlformats.org/drawingml/2006/main">
             <a:pPr algn="l">
-              <a:defRPr sz="1650" b="0">
+              <a:defRPr sz="1575" b="0">
                 <a:solidFill>
                   <a:srgbClr val="F4F7FA"/>
                 </a:solidFill>
@@ -23929,7 +25873,7 @@
               </a:defRPr>
             </a:pPr>
             <a:r>
-              <a:rPr sz="1650" b="0">
+              <a:rPr sz="1575" b="0">
                 <a:solidFill>
                   <a:srgbClr val="F4F7FA"/>
                 </a:solidFill>
@@ -23944,22 +25888,22 @@
       </p:sp>
       <p:sp>
         <p:nvSpPr>
-          <p:cNvPr id="33" name="">
-            <a:extLst xmlns:a="http://schemas.openxmlformats.org/drawingml/2006/main">
-              <a:ext uri="{FF2B5EF4-FFF2-40B4-BE49-F238E27FC236}">
-                <a16:creationId xmlns:a16="http://schemas.microsoft.com/office/drawing/2014/main" id="{A066B0E9-D7F0-4292-BD79-E90EDBBDE931}"/>
-              </a:ext>
-            </a:extLst>
-          </p:cNvPr>
-          <p:cNvSpPr>
-            <a:spLocks xmlns:a="http://schemas.openxmlformats.org/drawingml/2006/main" noGrp="1"/>
-          </p:cNvSpPr>
-          <p:nvPr/>
-        </p:nvSpPr>
-        <p:spPr>
-          <a:xfrm xmlns:a="http://schemas.openxmlformats.org/drawingml/2006/main">
-            <a:off x="6286500" y="5057775"/>
-            <a:ext cx="5257800" cy="257175"/>
+          <p:cNvPr id="43" name="">
+            <a:extLst xmlns:a="http://schemas.openxmlformats.org/drawingml/2006/main">
+              <a:ext uri="{FF2B5EF4-FFF2-40B4-BE49-F238E27FC236}">
+                <a16:creationId xmlns:a16="http://schemas.microsoft.com/office/drawing/2014/main" id="{58389E65-5292-46C2-81D8-B376EBA1DD77}"/>
+              </a:ext>
+            </a:extLst>
+          </p:cNvPr>
+          <p:cNvSpPr>
+            <a:spLocks xmlns:a="http://schemas.openxmlformats.org/drawingml/2006/main" noGrp="1"/>
+          </p:cNvSpPr>
+          <p:nvPr/>
+        </p:nvSpPr>
+        <p:spPr>
+          <a:xfrm xmlns:a="http://schemas.openxmlformats.org/drawingml/2006/main">
+            <a:off x="6286500" y="5153025"/>
+            <a:ext cx="5257800" cy="247650"/>
           </a:xfrm>
           <a:prstGeom xmlns:a="http://schemas.openxmlformats.org/drawingml/2006/main" prst="rect">
             <a:avLst/>
@@ -23976,7 +25920,7 @@
           <a:lstStyle xmlns:a="http://schemas.openxmlformats.org/drawingml/2006/main"/>
           <a:p xmlns:a="http://schemas.openxmlformats.org/drawingml/2006/main">
             <a:pPr algn="l">
-              <a:defRPr sz="1650" b="0">
+              <a:defRPr sz="1575" b="0">
                 <a:solidFill>
                   <a:srgbClr val="F4F7FA"/>
                 </a:solidFill>
@@ -23986,7 +25930,7 @@
               </a:defRPr>
             </a:pPr>
             <a:r>
-              <a:rPr sz="1650" b="0">
+              <a:rPr sz="1575" b="0">
                 <a:solidFill>
                   <a:srgbClr val="F4F7FA"/>
                 </a:solidFill>
@@ -24001,10 +25945,10 @@
       </p:sp>
       <p:sp>
         <p:nvSpPr>
-          <p:cNvPr id="34" name="">
-            <a:extLst xmlns:a="http://schemas.openxmlformats.org/drawingml/2006/main">
-              <a:ext uri="{FF2B5EF4-FFF2-40B4-BE49-F238E27FC236}">
-                <a16:creationId xmlns:a16="http://schemas.microsoft.com/office/drawing/2014/main" id="{CADFDFAD-B32D-4A0E-8C3C-137D5D1BA2B5}"/>
+          <p:cNvPr id="44" name="">
+            <a:extLst xmlns:a="http://schemas.openxmlformats.org/drawingml/2006/main">
+              <a:ext uri="{FF2B5EF4-FFF2-40B4-BE49-F238E27FC236}">
+                <a16:creationId xmlns:a16="http://schemas.microsoft.com/office/drawing/2014/main" id="{2CB2BD4B-7493-4180-9E6A-F2E5FDA11E10}"/>
               </a:ext>
             </a:extLst>
           </p:cNvPr>
@@ -24058,10 +26002,10 @@
       </p:sp>
       <p:sp>
         <p:nvSpPr>
-          <p:cNvPr id="35" name="">
-            <a:extLst xmlns:a="http://schemas.openxmlformats.org/drawingml/2006/main">
-              <a:ext uri="{FF2B5EF4-FFF2-40B4-BE49-F238E27FC236}">
-                <a16:creationId xmlns:a16="http://schemas.microsoft.com/office/drawing/2014/main" id="{86D7F201-B950-4930-8354-238AAD006204}"/>
+          <p:cNvPr id="45" name="">
+            <a:extLst xmlns:a="http://schemas.openxmlformats.org/drawingml/2006/main">
+              <a:ext uri="{FF2B5EF4-FFF2-40B4-BE49-F238E27FC236}">
+                <a16:creationId xmlns:a16="http://schemas.microsoft.com/office/drawing/2014/main" id="{AA44383D-6388-4EE2-903C-4434FCF534F3}"/>
               </a:ext>
             </a:extLst>
           </p:cNvPr>
@@ -24115,10 +26059,10 @@
       </p:sp>
       <p:sp>
         <p:nvSpPr>
-          <p:cNvPr id="36" name="">
-            <a:extLst xmlns:a="http://schemas.openxmlformats.org/drawingml/2006/main">
-              <a:ext uri="{FF2B5EF4-FFF2-40B4-BE49-F238E27FC236}">
-                <a16:creationId xmlns:a16="http://schemas.microsoft.com/office/drawing/2014/main" id="{4A0AC3B6-B099-4A34-94DF-7169E8488B65}"/>
+          <p:cNvPr id="46" name="">
+            <a:extLst xmlns:a="http://schemas.openxmlformats.org/drawingml/2006/main">
+              <a:ext uri="{FF2B5EF4-FFF2-40B4-BE49-F238E27FC236}">
+                <a16:creationId xmlns:a16="http://schemas.microsoft.com/office/drawing/2014/main" id="{EEBB5E95-7CC7-4E34-8CE5-AB1C81C9F4E9}"/>
               </a:ext>
             </a:extLst>
           </p:cNvPr>
@@ -24172,10 +26116,10 @@
       </p:sp>
       <p:sp>
         <p:nvSpPr>
-          <p:cNvPr id="37" name="">
-            <a:extLst xmlns:a="http://schemas.openxmlformats.org/drawingml/2006/main">
-              <a:ext uri="{FF2B5EF4-FFF2-40B4-BE49-F238E27FC236}">
-                <a16:creationId xmlns:a16="http://schemas.microsoft.com/office/drawing/2014/main" id="{CCCE14D0-9554-4D4E-AAEC-192E555F6A46}"/>
+          <p:cNvPr id="47" name="">
+            <a:extLst xmlns:a="http://schemas.openxmlformats.org/drawingml/2006/main">
+              <a:ext uri="{FF2B5EF4-FFF2-40B4-BE49-F238E27FC236}">
+                <a16:creationId xmlns:a16="http://schemas.microsoft.com/office/drawing/2014/main" id="{2D04FD55-6DF5-400D-B52C-978CE941555D}"/>
               </a:ext>
             </a:extLst>
           </p:cNvPr>
@@ -24230,7 +26174,7 @@
     </p:spTree>
     <p:extLst>
       <p:ext uri="{BB962C8B-B14F-4D97-AF65-F5344CB8AC3E}">
-        <p14:creationId xmlns:p14="http://schemas.microsoft.com/office/powerpoint/2010/main" val="1339591411"/>
+        <p14:creationId xmlns:p14="http://schemas.microsoft.com/office/powerpoint/2010/main" val="1718965576"/>
       </p:ext>
     </p:extLst>
   </p:cSld>

--- a/assets/presentations/pmday-2026/ai-changes-both-sides.pptx
+++ b/assets/presentations/pmday-2026/ai-changes-both-sides.pptx
@@ -2,26 +2,26 @@
 <file path=ppt/presentation.xml><?xml version="1.0" encoding="utf-8"?>
 <p:presentation xmlns:p="http://schemas.openxmlformats.org/presentationml/2006/main">
   <p:sldMasterIdLst>
-    <p:sldMasterId xmlns:r="http://schemas.openxmlformats.org/officeDocument/2006/relationships" id="2147483648" r:id="Rd16cce49c2bc4311"/>
+    <p:sldMasterId xmlns:r="http://schemas.openxmlformats.org/officeDocument/2006/relationships" id="2147483648" r:id="R0151db1dee034aeb"/>
   </p:sldMasterIdLst>
   <p:notesMasterIdLst>
-    <p:notesMasterId xmlns:r="http://schemas.openxmlformats.org/officeDocument/2006/relationships" r:id="R09d81b496dcf450b"/>
+    <p:notesMasterId xmlns:r="http://schemas.openxmlformats.org/officeDocument/2006/relationships" r:id="R858b13ff945f44a9"/>
   </p:notesMasterIdLst>
   <p:sldIdLst>
-    <p:sldId xmlns:r="http://schemas.openxmlformats.org/officeDocument/2006/relationships" id="256" r:id="R6ab2ac02c3a44572"/>
-    <p:sldId xmlns:r="http://schemas.openxmlformats.org/officeDocument/2006/relationships" id="257" r:id="Ref869b5fe3904fcc"/>
-    <p:sldId xmlns:r="http://schemas.openxmlformats.org/officeDocument/2006/relationships" id="258" r:id="R889337fa20564d5b"/>
-    <p:sldId xmlns:r="http://schemas.openxmlformats.org/officeDocument/2006/relationships" id="259" r:id="R5f8203332c3542f3"/>
-    <p:sldId xmlns:r="http://schemas.openxmlformats.org/officeDocument/2006/relationships" id="260" r:id="R728444f5982c47e6"/>
-    <p:sldId xmlns:r="http://schemas.openxmlformats.org/officeDocument/2006/relationships" id="261" r:id="R94636823f9e448c1"/>
-    <p:sldId xmlns:r="http://schemas.openxmlformats.org/officeDocument/2006/relationships" id="262" r:id="Re4c45875d8f54e94"/>
-    <p:sldId xmlns:r="http://schemas.openxmlformats.org/officeDocument/2006/relationships" id="263" r:id="R83171ac28c634f47"/>
-    <p:sldId xmlns:r="http://schemas.openxmlformats.org/officeDocument/2006/relationships" id="264" r:id="R70d0c1fc259c4440"/>
-    <p:sldId xmlns:r="http://schemas.openxmlformats.org/officeDocument/2006/relationships" id="265" r:id="R280e88125b294806"/>
-    <p:sldId xmlns:r="http://schemas.openxmlformats.org/officeDocument/2006/relationships" id="266" r:id="R4d0212b418a74b65"/>
-    <p:sldId xmlns:r="http://schemas.openxmlformats.org/officeDocument/2006/relationships" id="267" r:id="R8ed5810187ca43bb"/>
-    <p:sldId xmlns:r="http://schemas.openxmlformats.org/officeDocument/2006/relationships" id="268" r:id="R7b513ec8cf21449a"/>
-    <p:sldId xmlns:r="http://schemas.openxmlformats.org/officeDocument/2006/relationships" id="269" r:id="R7cdd14243922415c"/>
+    <p:sldId xmlns:r="http://schemas.openxmlformats.org/officeDocument/2006/relationships" id="256" r:id="R7052cec219674b41"/>
+    <p:sldId xmlns:r="http://schemas.openxmlformats.org/officeDocument/2006/relationships" id="257" r:id="R746a4464ed7a49de"/>
+    <p:sldId xmlns:r="http://schemas.openxmlformats.org/officeDocument/2006/relationships" id="258" r:id="R8d7f0ec998674295"/>
+    <p:sldId xmlns:r="http://schemas.openxmlformats.org/officeDocument/2006/relationships" id="259" r:id="Rf55e0c6469854ee6"/>
+    <p:sldId xmlns:r="http://schemas.openxmlformats.org/officeDocument/2006/relationships" id="260" r:id="R0167def12030471b"/>
+    <p:sldId xmlns:r="http://schemas.openxmlformats.org/officeDocument/2006/relationships" id="261" r:id="R71e066491ccf4c1f"/>
+    <p:sldId xmlns:r="http://schemas.openxmlformats.org/officeDocument/2006/relationships" id="262" r:id="R437681ad2655404b"/>
+    <p:sldId xmlns:r="http://schemas.openxmlformats.org/officeDocument/2006/relationships" id="263" r:id="R137fc34aa87b43c1"/>
+    <p:sldId xmlns:r="http://schemas.openxmlformats.org/officeDocument/2006/relationships" id="264" r:id="R4c861553dbdc475d"/>
+    <p:sldId xmlns:r="http://schemas.openxmlformats.org/officeDocument/2006/relationships" id="265" r:id="Rb7325872cd23468f"/>
+    <p:sldId xmlns:r="http://schemas.openxmlformats.org/officeDocument/2006/relationships" id="266" r:id="R4069cdc71e79473a"/>
+    <p:sldId xmlns:r="http://schemas.openxmlformats.org/officeDocument/2006/relationships" id="267" r:id="R01c7a19c25ba436c"/>
+    <p:sldId xmlns:r="http://schemas.openxmlformats.org/officeDocument/2006/relationships" id="268" r:id="Rae0c134a67d84f2c"/>
+    <p:sldId xmlns:r="http://schemas.openxmlformats.org/officeDocument/2006/relationships" id="269" r:id="Rb7d10a8f522b4fe9"/>
   </p:sldIdLst>
   <p:sldSz cx="12192000" cy="6858000"/>
   <p:notesSz cx="6858000" cy="9144000"/>
@@ -2193,7 +2193,7 @@
   </p:cSld>
   <p:clrMap bg1="lt1" tx1="dk1" bg2="lt2" tx2="dk2" accent1="accent1" accent2="accent2" accent3="accent3" accent4="accent4" accent5="accent5" accent6="accent6" hlink="hlink" folHlink="folHlink"/>
   <p:sldLayoutIdLst>
-    <p:sldLayoutId id="2147483649" r:id="Raa4cc6a8767f4ff7"/>
+    <p:sldLayoutId id="2147483649" r:id="R4a37ac5f9b70465a"/>
   </p:sldLayoutIdLst>
   <p:txStyles>
     <p:titleStyle>
@@ -3112,7 +3112,7 @@
           <p:cNvPr id="10" name="">
             <a:extLst xmlns:a="http://schemas.openxmlformats.org/drawingml/2006/main">
               <a:ext uri="{FF2B5EF4-FFF2-40B4-BE49-F238E27FC236}">
-                <a16:creationId xmlns:a16="http://schemas.microsoft.com/office/drawing/2014/main" id="{122CD03F-2458-4B99-829D-7E039D5514DB}"/>
+                <a16:creationId xmlns:a16="http://schemas.microsoft.com/office/drawing/2014/main" id="{45982EA4-CE4B-45B4-B184-CE85ABD849E1}"/>
               </a:ext>
             </a:extLst>
           </p:cNvPr>
@@ -3169,7 +3169,7 @@
           <p:cNvPr id="2" name="">
             <a:extLst xmlns:a="http://schemas.openxmlformats.org/drawingml/2006/main">
               <a:ext uri="{FF2B5EF4-FFF2-40B4-BE49-F238E27FC236}">
-                <a16:creationId xmlns:a16="http://schemas.microsoft.com/office/drawing/2014/main" id="{50D28FC8-AD3E-4868-8EC6-98454AA1686A}"/>
+                <a16:creationId xmlns:a16="http://schemas.microsoft.com/office/drawing/2014/main" id="{F9268FD6-F050-4304-9C86-E7323F54F950}"/>
               </a:ext>
             </a:extLst>
           </p:cNvPr>
@@ -3249,7 +3249,7 @@
           <p:cNvPr id="3" name="">
             <a:extLst xmlns:a="http://schemas.openxmlformats.org/drawingml/2006/main">
               <a:ext uri="{FF2B5EF4-FFF2-40B4-BE49-F238E27FC236}">
-                <a16:creationId xmlns:a16="http://schemas.microsoft.com/office/drawing/2014/main" id="{4BAD9580-E504-40CB-AC6B-783DD7C7CF34}"/>
+                <a16:creationId xmlns:a16="http://schemas.microsoft.com/office/drawing/2014/main" id="{3C0220A0-0643-4EE7-A62F-1C8BF8D65B3C}"/>
               </a:ext>
             </a:extLst>
           </p:cNvPr>
@@ -3310,7 +3310,7 @@
           <p:nvPr/>
         </p:nvPicPr>
         <p:blipFill>
-          <a:blip xmlns:r="http://schemas.openxmlformats.org/officeDocument/2006/relationships" xmlns:a="http://schemas.openxmlformats.org/drawingml/2006/main" r:embed="R57d9f54852394f01"/>
+          <a:blip xmlns:r="http://schemas.openxmlformats.org/officeDocument/2006/relationships" xmlns:a="http://schemas.openxmlformats.org/drawingml/2006/main" r:embed="Ra7392916fd524628"/>
           <a:stretch xmlns:a="http://schemas.openxmlformats.org/drawingml/2006/main"/>
         </p:blipFill>
         <p:spPr>
@@ -3328,7 +3328,7 @@
           <p:cNvPr id="5" name="">
             <a:extLst xmlns:a="http://schemas.openxmlformats.org/drawingml/2006/main">
               <a:ext uri="{FF2B5EF4-FFF2-40B4-BE49-F238E27FC236}">
-                <a16:creationId xmlns:a16="http://schemas.microsoft.com/office/drawing/2014/main" id="{CD252CFB-E0D4-4E68-A432-81553113E693}"/>
+                <a16:creationId xmlns:a16="http://schemas.microsoft.com/office/drawing/2014/main" id="{0A082CCF-6AD6-4092-A62D-C17F8C3921FD}"/>
               </a:ext>
             </a:extLst>
           </p:cNvPr>
@@ -3385,7 +3385,7 @@
           <p:cNvPr id="6" name="">
             <a:extLst xmlns:a="http://schemas.openxmlformats.org/drawingml/2006/main">
               <a:ext uri="{FF2B5EF4-FFF2-40B4-BE49-F238E27FC236}">
-                <a16:creationId xmlns:a16="http://schemas.microsoft.com/office/drawing/2014/main" id="{F26B04CF-B371-4A4F-918A-D37FC51E4201}"/>
+                <a16:creationId xmlns:a16="http://schemas.microsoft.com/office/drawing/2014/main" id="{BBCBAE38-EE2F-46F2-B110-F15895262B2F}"/>
               </a:ext>
             </a:extLst>
           </p:cNvPr>
@@ -3442,7 +3442,7 @@
           <p:cNvPr id="7" name="">
             <a:extLst xmlns:a="http://schemas.openxmlformats.org/drawingml/2006/main">
               <a:ext uri="{FF2B5EF4-FFF2-40B4-BE49-F238E27FC236}">
-                <a16:creationId xmlns:a16="http://schemas.microsoft.com/office/drawing/2014/main" id="{9FD937DD-647C-4C13-8B0E-58DA5A5BE779}"/>
+                <a16:creationId xmlns:a16="http://schemas.microsoft.com/office/drawing/2014/main" id="{2E9D6FC9-443A-4361-BD1A-E685A9A5C70F}"/>
               </a:ext>
             </a:extLst>
           </p:cNvPr>
@@ -3499,7 +3499,7 @@
           <p:cNvPr id="8" name="">
             <a:extLst xmlns:a="http://schemas.openxmlformats.org/drawingml/2006/main">
               <a:ext uri="{FF2B5EF4-FFF2-40B4-BE49-F238E27FC236}">
-                <a16:creationId xmlns:a16="http://schemas.microsoft.com/office/drawing/2014/main" id="{FC5CF782-03ED-4393-BB1A-A1B90D0D0C36}"/>
+                <a16:creationId xmlns:a16="http://schemas.microsoft.com/office/drawing/2014/main" id="{F1D95438-3288-4B72-8B17-0B0A104956DE}"/>
               </a:ext>
             </a:extLst>
           </p:cNvPr>
@@ -3556,7 +3556,7 @@
           <p:cNvPr id="9" name="">
             <a:extLst xmlns:a="http://schemas.openxmlformats.org/drawingml/2006/main">
               <a:ext uri="{FF2B5EF4-FFF2-40B4-BE49-F238E27FC236}">
-                <a16:creationId xmlns:a16="http://schemas.microsoft.com/office/drawing/2014/main" id="{12B74BA0-5C68-472F-A5DC-9C6128938A55}"/>
+                <a16:creationId xmlns:a16="http://schemas.microsoft.com/office/drawing/2014/main" id="{13A6DB2B-D75D-4EBE-85FC-6088B8B8CF0D}"/>
               </a:ext>
             </a:extLst>
           </p:cNvPr>
@@ -3611,7 +3611,7 @@
     </p:spTree>
     <p:extLst>
       <p:ext uri="{BB962C8B-B14F-4D97-AF65-F5344CB8AC3E}">
-        <p14:creationId xmlns:p14="http://schemas.microsoft.com/office/powerpoint/2010/main" val="1881552192"/>
+        <p14:creationId xmlns:p14="http://schemas.microsoft.com/office/powerpoint/2010/main" val="124501376"/>
       </p:ext>
     </p:extLst>
   </p:cSld>
@@ -3642,7 +3642,7 @@
           <p:cNvPr id="46" name="">
             <a:extLst xmlns:a="http://schemas.openxmlformats.org/drawingml/2006/main">
               <a:ext uri="{FF2B5EF4-FFF2-40B4-BE49-F238E27FC236}">
-                <a16:creationId xmlns:a16="http://schemas.microsoft.com/office/drawing/2014/main" id="{25D778C1-DD8E-45FC-8FB1-F24E7DF3D2AF}"/>
+                <a16:creationId xmlns:a16="http://schemas.microsoft.com/office/drawing/2014/main" id="{88D71E00-F1B6-47FE-9E7F-F70045FE7FE6}"/>
               </a:ext>
             </a:extLst>
           </p:cNvPr>
@@ -3699,7 +3699,7 @@
           <p:cNvPr id="2" name="">
             <a:extLst xmlns:a="http://schemas.openxmlformats.org/drawingml/2006/main">
               <a:ext uri="{FF2B5EF4-FFF2-40B4-BE49-F238E27FC236}">
-                <a16:creationId xmlns:a16="http://schemas.microsoft.com/office/drawing/2014/main" id="{81DD9BD0-6C06-4BEF-9326-9354A8267F25}"/>
+                <a16:creationId xmlns:a16="http://schemas.microsoft.com/office/drawing/2014/main" id="{E3AAC84E-14F8-43B8-9CC8-89845AB8891D}"/>
               </a:ext>
             </a:extLst>
           </p:cNvPr>
@@ -3730,7 +3730,7 @@
           <p:cNvPr id="3" name="">
             <a:extLst xmlns:a="http://schemas.openxmlformats.org/drawingml/2006/main">
               <a:ext uri="{FF2B5EF4-FFF2-40B4-BE49-F238E27FC236}">
-                <a16:creationId xmlns:a16="http://schemas.microsoft.com/office/drawing/2014/main" id="{EC93935D-A503-4BDA-AD9F-62EB21E5F6BF}"/>
+                <a16:creationId xmlns:a16="http://schemas.microsoft.com/office/drawing/2014/main" id="{E75B1097-1E22-45C8-A4BF-99386C18A267}"/>
               </a:ext>
             </a:extLst>
           </p:cNvPr>
@@ -3787,7 +3787,7 @@
           <p:cNvPr id="4" name="">
             <a:extLst xmlns:a="http://schemas.openxmlformats.org/drawingml/2006/main">
               <a:ext uri="{FF2B5EF4-FFF2-40B4-BE49-F238E27FC236}">
-                <a16:creationId xmlns:a16="http://schemas.microsoft.com/office/drawing/2014/main" id="{F22FFD71-D8BC-49AA-A79A-E3DAF7A1C723}"/>
+                <a16:creationId xmlns:a16="http://schemas.microsoft.com/office/drawing/2014/main" id="{4401F8FE-676D-4032-A485-4DAC9C707F10}"/>
               </a:ext>
             </a:extLst>
           </p:cNvPr>
@@ -3844,7 +3844,7 @@
           <p:cNvPr id="5" name="">
             <a:extLst xmlns:a="http://schemas.openxmlformats.org/drawingml/2006/main">
               <a:ext uri="{FF2B5EF4-FFF2-40B4-BE49-F238E27FC236}">
-                <a16:creationId xmlns:a16="http://schemas.microsoft.com/office/drawing/2014/main" id="{56716FD9-442B-4CE8-A2EE-0C9EDFE554CD}"/>
+                <a16:creationId xmlns:a16="http://schemas.microsoft.com/office/drawing/2014/main" id="{584138C9-F83C-4832-9B43-A6182D4C4A74}"/>
               </a:ext>
             </a:extLst>
           </p:cNvPr>
@@ -3901,7 +3901,7 @@
           <p:cNvPr id="6" name="">
             <a:extLst xmlns:a="http://schemas.openxmlformats.org/drawingml/2006/main">
               <a:ext uri="{FF2B5EF4-FFF2-40B4-BE49-F238E27FC236}">
-                <a16:creationId xmlns:a16="http://schemas.microsoft.com/office/drawing/2014/main" id="{52EF2606-8910-49DF-B471-01940E506C3B}"/>
+                <a16:creationId xmlns:a16="http://schemas.microsoft.com/office/drawing/2014/main" id="{7DD00523-E8EC-4A31-B768-425F9626BE46}"/>
               </a:ext>
             </a:extLst>
           </p:cNvPr>
@@ -3981,7 +3981,7 @@
           <p:cNvPr id="7" name="">
             <a:extLst xmlns:a="http://schemas.openxmlformats.org/drawingml/2006/main">
               <a:ext uri="{FF2B5EF4-FFF2-40B4-BE49-F238E27FC236}">
-                <a16:creationId xmlns:a16="http://schemas.microsoft.com/office/drawing/2014/main" id="{F0D9FD0C-259D-487D-8D5F-0BC87C1F6D45}"/>
+                <a16:creationId xmlns:a16="http://schemas.microsoft.com/office/drawing/2014/main" id="{DCD3594A-3A2C-495D-920F-4CC7F4458288}"/>
               </a:ext>
             </a:extLst>
           </p:cNvPr>
@@ -4061,7 +4061,7 @@
           <p:cNvPr id="8" name="">
             <a:extLst xmlns:a="http://schemas.openxmlformats.org/drawingml/2006/main">
               <a:ext uri="{FF2B5EF4-FFF2-40B4-BE49-F238E27FC236}">
-                <a16:creationId xmlns:a16="http://schemas.microsoft.com/office/drawing/2014/main" id="{F6191158-7470-457C-8507-8E40F7ABECBA}"/>
+                <a16:creationId xmlns:a16="http://schemas.microsoft.com/office/drawing/2014/main" id="{A009E286-4F66-4657-9FD1-532C86F89F3F}"/>
               </a:ext>
             </a:extLst>
           </p:cNvPr>
@@ -4118,7 +4118,7 @@
           <p:cNvPr id="9" name="">
             <a:extLst xmlns:a="http://schemas.openxmlformats.org/drawingml/2006/main">
               <a:ext uri="{FF2B5EF4-FFF2-40B4-BE49-F238E27FC236}">
-                <a16:creationId xmlns:a16="http://schemas.microsoft.com/office/drawing/2014/main" id="{1D57D416-BC13-402C-BFD2-037825123CC1}"/>
+                <a16:creationId xmlns:a16="http://schemas.microsoft.com/office/drawing/2014/main" id="{950DCCC8-B88E-469D-99A6-A56BB3DBA3FD}"/>
               </a:ext>
             </a:extLst>
           </p:cNvPr>
@@ -4175,7 +4175,7 @@
           <p:cNvPr id="10" name="">
             <a:extLst xmlns:a="http://schemas.openxmlformats.org/drawingml/2006/main">
               <a:ext uri="{FF2B5EF4-FFF2-40B4-BE49-F238E27FC236}">
-                <a16:creationId xmlns:a16="http://schemas.microsoft.com/office/drawing/2014/main" id="{4AD03FCB-195E-45C7-8297-6DF2164DB570}"/>
+                <a16:creationId xmlns:a16="http://schemas.microsoft.com/office/drawing/2014/main" id="{1737EF7B-986D-4224-9FE5-119C64269AB7}"/>
               </a:ext>
             </a:extLst>
           </p:cNvPr>
@@ -4206,7 +4206,7 @@
           <p:cNvPr id="11" name="">
             <a:extLst xmlns:a="http://schemas.openxmlformats.org/drawingml/2006/main">
               <a:ext uri="{FF2B5EF4-FFF2-40B4-BE49-F238E27FC236}">
-                <a16:creationId xmlns:a16="http://schemas.microsoft.com/office/drawing/2014/main" id="{C7CA33C8-314F-4AA6-B367-4399F413798D}"/>
+                <a16:creationId xmlns:a16="http://schemas.microsoft.com/office/drawing/2014/main" id="{A8F1930F-961C-4A89-A8E2-A844E5E95335}"/>
               </a:ext>
             </a:extLst>
           </p:cNvPr>
@@ -4239,7 +4239,7 @@
           <p:cNvPr id="12" name="">
             <a:extLst xmlns:a="http://schemas.openxmlformats.org/drawingml/2006/main">
               <a:ext uri="{FF2B5EF4-FFF2-40B4-BE49-F238E27FC236}">
-                <a16:creationId xmlns:a16="http://schemas.microsoft.com/office/drawing/2014/main" id="{A3B84A68-157E-4341-9F2E-746A9C3C3252}"/>
+                <a16:creationId xmlns:a16="http://schemas.microsoft.com/office/drawing/2014/main" id="{63B4632C-643B-4257-AFB1-67F6C3C31D34}"/>
               </a:ext>
             </a:extLst>
           </p:cNvPr>
@@ -4272,7 +4272,7 @@
           <p:cNvPr id="13" name="">
             <a:extLst xmlns:a="http://schemas.openxmlformats.org/drawingml/2006/main">
               <a:ext uri="{FF2B5EF4-FFF2-40B4-BE49-F238E27FC236}">
-                <a16:creationId xmlns:a16="http://schemas.microsoft.com/office/drawing/2014/main" id="{1CEC3EF3-1E3B-44EE-9D7B-7F179D023BF8}"/>
+                <a16:creationId xmlns:a16="http://schemas.microsoft.com/office/drawing/2014/main" id="{D5A98AFC-AF10-45A8-B16E-715BE64EEE21}"/>
               </a:ext>
             </a:extLst>
           </p:cNvPr>
@@ -4305,7 +4305,7 @@
           <p:cNvPr id="14" name="">
             <a:extLst xmlns:a="http://schemas.openxmlformats.org/drawingml/2006/main">
               <a:ext uri="{FF2B5EF4-FFF2-40B4-BE49-F238E27FC236}">
-                <a16:creationId xmlns:a16="http://schemas.microsoft.com/office/drawing/2014/main" id="{CB661F33-B6D2-4A11-ADBB-CCE7F2072DE5}"/>
+                <a16:creationId xmlns:a16="http://schemas.microsoft.com/office/drawing/2014/main" id="{C0ECBD63-9168-40A0-98E7-D1438DA2AFA1}"/>
               </a:ext>
             </a:extLst>
           </p:cNvPr>
@@ -4338,7 +4338,7 @@
           <p:cNvPr id="15" name="">
             <a:extLst xmlns:a="http://schemas.openxmlformats.org/drawingml/2006/main">
               <a:ext uri="{FF2B5EF4-FFF2-40B4-BE49-F238E27FC236}">
-                <a16:creationId xmlns:a16="http://schemas.microsoft.com/office/drawing/2014/main" id="{22AB96E5-9385-4654-954E-8FBA164C8437}"/>
+                <a16:creationId xmlns:a16="http://schemas.microsoft.com/office/drawing/2014/main" id="{8B131308-A483-43D8-B8D0-EA330A71A389}"/>
               </a:ext>
             </a:extLst>
           </p:cNvPr>
@@ -4371,7 +4371,7 @@
           <p:cNvPr id="16" name="">
             <a:extLst xmlns:a="http://schemas.openxmlformats.org/drawingml/2006/main">
               <a:ext uri="{FF2B5EF4-FFF2-40B4-BE49-F238E27FC236}">
-                <a16:creationId xmlns:a16="http://schemas.microsoft.com/office/drawing/2014/main" id="{B4A412B8-217C-45BC-B682-FDE0132647E5}"/>
+                <a16:creationId xmlns:a16="http://schemas.microsoft.com/office/drawing/2014/main" id="{865A620B-AA65-49E5-AB9D-843915108A3D}"/>
               </a:ext>
             </a:extLst>
           </p:cNvPr>
@@ -4404,7 +4404,7 @@
           <p:cNvPr id="17" name="">
             <a:extLst xmlns:a="http://schemas.openxmlformats.org/drawingml/2006/main">
               <a:ext uri="{FF2B5EF4-FFF2-40B4-BE49-F238E27FC236}">
-                <a16:creationId xmlns:a16="http://schemas.microsoft.com/office/drawing/2014/main" id="{71F0FA08-8B40-4F26-9391-E1558A7BC762}"/>
+                <a16:creationId xmlns:a16="http://schemas.microsoft.com/office/drawing/2014/main" id="{1992D043-4BD1-4D3B-AC09-2054BA2CEE10}"/>
               </a:ext>
             </a:extLst>
           </p:cNvPr>
@@ -4437,7 +4437,7 @@
           <p:cNvPr id="18" name="">
             <a:extLst xmlns:a="http://schemas.openxmlformats.org/drawingml/2006/main">
               <a:ext uri="{FF2B5EF4-FFF2-40B4-BE49-F238E27FC236}">
-                <a16:creationId xmlns:a16="http://schemas.microsoft.com/office/drawing/2014/main" id="{1CDB3264-5C2B-4883-AC8E-D4C01E031B05}"/>
+                <a16:creationId xmlns:a16="http://schemas.microsoft.com/office/drawing/2014/main" id="{D4B0519C-F59F-4342-B7CC-A95DAB6D3CD1}"/>
               </a:ext>
             </a:extLst>
           </p:cNvPr>
@@ -4470,7 +4470,7 @@
           <p:cNvPr id="19" name="">
             <a:extLst xmlns:a="http://schemas.openxmlformats.org/drawingml/2006/main">
               <a:ext uri="{FF2B5EF4-FFF2-40B4-BE49-F238E27FC236}">
-                <a16:creationId xmlns:a16="http://schemas.microsoft.com/office/drawing/2014/main" id="{3BA798F1-EDEB-4D9D-83FE-3AAEC2F452DC}"/>
+                <a16:creationId xmlns:a16="http://schemas.microsoft.com/office/drawing/2014/main" id="{E3730CED-41AB-4558-9101-B7B8D0CA5A3B}"/>
               </a:ext>
             </a:extLst>
           </p:cNvPr>
@@ -4503,7 +4503,7 @@
           <p:cNvPr id="20" name="">
             <a:extLst xmlns:a="http://schemas.openxmlformats.org/drawingml/2006/main">
               <a:ext uri="{FF2B5EF4-FFF2-40B4-BE49-F238E27FC236}">
-                <a16:creationId xmlns:a16="http://schemas.microsoft.com/office/drawing/2014/main" id="{46A36C22-47DA-4CC5-9FBA-8436400E01A8}"/>
+                <a16:creationId xmlns:a16="http://schemas.microsoft.com/office/drawing/2014/main" id="{5AEA58C5-30A3-41B3-BC3B-DC730B891A21}"/>
               </a:ext>
             </a:extLst>
           </p:cNvPr>
@@ -4536,7 +4536,7 @@
           <p:cNvPr id="21" name="">
             <a:extLst xmlns:a="http://schemas.openxmlformats.org/drawingml/2006/main">
               <a:ext uri="{FF2B5EF4-FFF2-40B4-BE49-F238E27FC236}">
-                <a16:creationId xmlns:a16="http://schemas.microsoft.com/office/drawing/2014/main" id="{46EB5A79-0C48-4268-B10E-017AD96F7017}"/>
+                <a16:creationId xmlns:a16="http://schemas.microsoft.com/office/drawing/2014/main" id="{06F1E3A4-01B8-4658-9FFC-60D4DBD7FE70}"/>
               </a:ext>
             </a:extLst>
           </p:cNvPr>
@@ -4569,7 +4569,7 @@
           <p:cNvPr id="22" name="">
             <a:extLst xmlns:a="http://schemas.openxmlformats.org/drawingml/2006/main">
               <a:ext uri="{FF2B5EF4-FFF2-40B4-BE49-F238E27FC236}">
-                <a16:creationId xmlns:a16="http://schemas.microsoft.com/office/drawing/2014/main" id="{070C60B4-4B82-43DF-9D48-2B53608EB040}"/>
+                <a16:creationId xmlns:a16="http://schemas.microsoft.com/office/drawing/2014/main" id="{55792460-4E60-4367-9B93-C19ECFD32DCF}"/>
               </a:ext>
             </a:extLst>
           </p:cNvPr>
@@ -4602,7 +4602,7 @@
           <p:cNvPr id="23" name="">
             <a:extLst xmlns:a="http://schemas.openxmlformats.org/drawingml/2006/main">
               <a:ext uri="{FF2B5EF4-FFF2-40B4-BE49-F238E27FC236}">
-                <a16:creationId xmlns:a16="http://schemas.microsoft.com/office/drawing/2014/main" id="{6AC3D972-6EF8-40ED-B4FF-A47AE9B0DF39}"/>
+                <a16:creationId xmlns:a16="http://schemas.microsoft.com/office/drawing/2014/main" id="{FD4D2EA5-4A18-4AE4-AD09-D4274072A3A8}"/>
               </a:ext>
             </a:extLst>
           </p:cNvPr>
@@ -4635,7 +4635,7 @@
           <p:cNvPr id="24" name="">
             <a:extLst xmlns:a="http://schemas.openxmlformats.org/drawingml/2006/main">
               <a:ext uri="{FF2B5EF4-FFF2-40B4-BE49-F238E27FC236}">
-                <a16:creationId xmlns:a16="http://schemas.microsoft.com/office/drawing/2014/main" id="{FC4E0CFD-6AD5-4367-880C-D2149FCBEBAC}"/>
+                <a16:creationId xmlns:a16="http://schemas.microsoft.com/office/drawing/2014/main" id="{616AE507-E605-4025-999A-CF798852FACE}"/>
               </a:ext>
             </a:extLst>
           </p:cNvPr>
@@ -4666,7 +4666,7 @@
           <p:cNvPr id="25" name="">
             <a:extLst xmlns:a="http://schemas.openxmlformats.org/drawingml/2006/main">
               <a:ext uri="{FF2B5EF4-FFF2-40B4-BE49-F238E27FC236}">
-                <a16:creationId xmlns:a16="http://schemas.microsoft.com/office/drawing/2014/main" id="{327426F2-47F8-47E9-8D75-8FFD993934F0}"/>
+                <a16:creationId xmlns:a16="http://schemas.microsoft.com/office/drawing/2014/main" id="{B9C5015B-6DA4-446A-8E20-84F79EFDF7DB}"/>
               </a:ext>
             </a:extLst>
           </p:cNvPr>
@@ -4697,7 +4697,7 @@
           <p:cNvPr id="26" name="">
             <a:extLst xmlns:a="http://schemas.openxmlformats.org/drawingml/2006/main">
               <a:ext uri="{FF2B5EF4-FFF2-40B4-BE49-F238E27FC236}">
-                <a16:creationId xmlns:a16="http://schemas.microsoft.com/office/drawing/2014/main" id="{9840DD1B-73DF-4C10-A602-437630B04F2C}"/>
+                <a16:creationId xmlns:a16="http://schemas.microsoft.com/office/drawing/2014/main" id="{1889247F-C93F-42F3-93E2-428634B7AC5D}"/>
               </a:ext>
             </a:extLst>
           </p:cNvPr>
@@ -4728,7 +4728,7 @@
           <p:cNvPr id="27" name="">
             <a:extLst xmlns:a="http://schemas.openxmlformats.org/drawingml/2006/main">
               <a:ext uri="{FF2B5EF4-FFF2-40B4-BE49-F238E27FC236}">
-                <a16:creationId xmlns:a16="http://schemas.microsoft.com/office/drawing/2014/main" id="{20D0E27C-2FA0-4B03-9A43-B742BD72B852}"/>
+                <a16:creationId xmlns:a16="http://schemas.microsoft.com/office/drawing/2014/main" id="{F5D55212-CD85-463D-8F4E-8F0156745D73}"/>
               </a:ext>
             </a:extLst>
           </p:cNvPr>
@@ -4759,7 +4759,7 @@
           <p:cNvPr id="28" name="">
             <a:extLst xmlns:a="http://schemas.openxmlformats.org/drawingml/2006/main">
               <a:ext uri="{FF2B5EF4-FFF2-40B4-BE49-F238E27FC236}">
-                <a16:creationId xmlns:a16="http://schemas.microsoft.com/office/drawing/2014/main" id="{9DD9EFC2-F8E9-487A-ABF4-D1B51168E0DB}"/>
+                <a16:creationId xmlns:a16="http://schemas.microsoft.com/office/drawing/2014/main" id="{9A9A764F-35FC-4617-BA04-4411F6411C88}"/>
               </a:ext>
             </a:extLst>
           </p:cNvPr>
@@ -4862,7 +4862,7 @@
           <p:cNvPr id="29" name="">
             <a:extLst xmlns:a="http://schemas.openxmlformats.org/drawingml/2006/main">
               <a:ext uri="{FF2B5EF4-FFF2-40B4-BE49-F238E27FC236}">
-                <a16:creationId xmlns:a16="http://schemas.microsoft.com/office/drawing/2014/main" id="{EB6F4764-DD27-46F0-9B3D-E842892E1DCB}"/>
+                <a16:creationId xmlns:a16="http://schemas.microsoft.com/office/drawing/2014/main" id="{8844A858-1416-4C43-8D85-06B392AA59A1}"/>
               </a:ext>
             </a:extLst>
           </p:cNvPr>
@@ -4919,7 +4919,7 @@
           <p:cNvPr id="30" name="">
             <a:extLst xmlns:a="http://schemas.openxmlformats.org/drawingml/2006/main">
               <a:ext uri="{FF2B5EF4-FFF2-40B4-BE49-F238E27FC236}">
-                <a16:creationId xmlns:a16="http://schemas.microsoft.com/office/drawing/2014/main" id="{5EB1D22D-2342-415C-B37C-4B3CB98AB3F4}"/>
+                <a16:creationId xmlns:a16="http://schemas.microsoft.com/office/drawing/2014/main" id="{6CA74778-1242-404C-8189-69C1BA6F51BB}"/>
               </a:ext>
             </a:extLst>
           </p:cNvPr>
@@ -4976,7 +4976,7 @@
           <p:cNvPr id="31" name="">
             <a:extLst xmlns:a="http://schemas.openxmlformats.org/drawingml/2006/main">
               <a:ext uri="{FF2B5EF4-FFF2-40B4-BE49-F238E27FC236}">
-                <a16:creationId xmlns:a16="http://schemas.microsoft.com/office/drawing/2014/main" id="{1ABCA95F-E651-4FAE-B2EC-E168DF49D524}"/>
+                <a16:creationId xmlns:a16="http://schemas.microsoft.com/office/drawing/2014/main" id="{E62E2C27-AC01-49C3-AB87-876D30A3687F}"/>
               </a:ext>
             </a:extLst>
           </p:cNvPr>
@@ -5033,7 +5033,7 @@
           <p:cNvPr id="32" name="">
             <a:extLst xmlns:a="http://schemas.openxmlformats.org/drawingml/2006/main">
               <a:ext uri="{FF2B5EF4-FFF2-40B4-BE49-F238E27FC236}">
-                <a16:creationId xmlns:a16="http://schemas.microsoft.com/office/drawing/2014/main" id="{E40061CF-7918-489D-AD4B-508DF3802595}"/>
+                <a16:creationId xmlns:a16="http://schemas.microsoft.com/office/drawing/2014/main" id="{7C9F6AEB-D4C1-4CAC-A6B3-8E0439852FE3}"/>
               </a:ext>
             </a:extLst>
           </p:cNvPr>
@@ -5090,7 +5090,7 @@
           <p:cNvPr id="33" name="">
             <a:extLst xmlns:a="http://schemas.openxmlformats.org/drawingml/2006/main">
               <a:ext uri="{FF2B5EF4-FFF2-40B4-BE49-F238E27FC236}">
-                <a16:creationId xmlns:a16="http://schemas.microsoft.com/office/drawing/2014/main" id="{ED817C3C-22B0-4DD4-9759-BCD6FD930733}"/>
+                <a16:creationId xmlns:a16="http://schemas.microsoft.com/office/drawing/2014/main" id="{909FFAEA-B74F-4E28-914B-3D43FC258FC3}"/>
               </a:ext>
             </a:extLst>
           </p:cNvPr>
@@ -5121,7 +5121,7 @@
           <p:cNvPr id="34" name="">
             <a:extLst xmlns:a="http://schemas.openxmlformats.org/drawingml/2006/main">
               <a:ext uri="{FF2B5EF4-FFF2-40B4-BE49-F238E27FC236}">
-                <a16:creationId xmlns:a16="http://schemas.microsoft.com/office/drawing/2014/main" id="{F7CC3954-7157-4E2F-B26D-0C23B8147183}"/>
+                <a16:creationId xmlns:a16="http://schemas.microsoft.com/office/drawing/2014/main" id="{D766A13A-A7D9-421C-B0E0-E710371F6CFC}"/>
               </a:ext>
             </a:extLst>
           </p:cNvPr>
@@ -5185,7 +5185,7 @@
         </p:xfrm>
         <a:graphic xmlns:a="http://schemas.openxmlformats.org/drawingml/2006/main">
           <a:graphicData uri="http://schemas.openxmlformats.org/drawingml/2006/chart">
-            <c:chart xmlns:r="http://schemas.openxmlformats.org/officeDocument/2006/relationships" xmlns:c="http://schemas.openxmlformats.org/drawingml/2006/chart" r:id="R0f139ec6901146a1"/>
+            <c:chart xmlns:r="http://schemas.openxmlformats.org/officeDocument/2006/relationships" xmlns:c="http://schemas.openxmlformats.org/drawingml/2006/chart" r:id="Rf9ec41015da84701"/>
           </a:graphicData>
         </a:graphic>
       </p:graphicFrame>
@@ -5194,7 +5194,7 @@
           <p:cNvPr id="36" name="">
             <a:extLst xmlns:a="http://schemas.openxmlformats.org/drawingml/2006/main">
               <a:ext uri="{FF2B5EF4-FFF2-40B4-BE49-F238E27FC236}">
-                <a16:creationId xmlns:a16="http://schemas.microsoft.com/office/drawing/2014/main" id="{2AF54B9E-243C-4083-AEC1-B8E677525400}"/>
+                <a16:creationId xmlns:a16="http://schemas.microsoft.com/office/drawing/2014/main" id="{D274F3C3-8EF8-41F8-B77B-6DD3155AFF9E}"/>
               </a:ext>
             </a:extLst>
           </p:cNvPr>
@@ -5225,7 +5225,7 @@
           <p:cNvPr id="37" name="">
             <a:extLst xmlns:a="http://schemas.openxmlformats.org/drawingml/2006/main">
               <a:ext uri="{FF2B5EF4-FFF2-40B4-BE49-F238E27FC236}">
-                <a16:creationId xmlns:a16="http://schemas.microsoft.com/office/drawing/2014/main" id="{F9083982-C275-44DB-B695-A34933EA3953}"/>
+                <a16:creationId xmlns:a16="http://schemas.microsoft.com/office/drawing/2014/main" id="{A2A9E2D3-5F03-4C90-B2DE-F70EA8D9F171}"/>
               </a:ext>
             </a:extLst>
           </p:cNvPr>
@@ -5282,7 +5282,7 @@
           <p:cNvPr id="38" name="">
             <a:extLst xmlns:a="http://schemas.openxmlformats.org/drawingml/2006/main">
               <a:ext uri="{FF2B5EF4-FFF2-40B4-BE49-F238E27FC236}">
-                <a16:creationId xmlns:a16="http://schemas.microsoft.com/office/drawing/2014/main" id="{EAD42C54-E43C-4D8B-92A8-87BD26D2FC4E}"/>
+                <a16:creationId xmlns:a16="http://schemas.microsoft.com/office/drawing/2014/main" id="{DFC246C4-75ED-4316-96E6-5D107F6C7447}"/>
               </a:ext>
             </a:extLst>
           </p:cNvPr>
@@ -5339,7 +5339,7 @@
           <p:cNvPr id="39" name="">
             <a:extLst xmlns:a="http://schemas.openxmlformats.org/drawingml/2006/main">
               <a:ext uri="{FF2B5EF4-FFF2-40B4-BE49-F238E27FC236}">
-                <a16:creationId xmlns:a16="http://schemas.microsoft.com/office/drawing/2014/main" id="{84AEC26E-1C5B-40E9-A133-009F6BE72B53}"/>
+                <a16:creationId xmlns:a16="http://schemas.microsoft.com/office/drawing/2014/main" id="{C55786C0-80FB-4262-A2A7-BCBE90F9F423}"/>
               </a:ext>
             </a:extLst>
           </p:cNvPr>
@@ -5396,7 +5396,7 @@
           <p:cNvPr id="40" name="">
             <a:extLst xmlns:a="http://schemas.openxmlformats.org/drawingml/2006/main">
               <a:ext uri="{FF2B5EF4-FFF2-40B4-BE49-F238E27FC236}">
-                <a16:creationId xmlns:a16="http://schemas.microsoft.com/office/drawing/2014/main" id="{9ECC2887-1883-4698-BA53-B486670EF996}"/>
+                <a16:creationId xmlns:a16="http://schemas.microsoft.com/office/drawing/2014/main" id="{81C92086-6D95-4199-B6D9-96A14CDE540A}"/>
               </a:ext>
             </a:extLst>
           </p:cNvPr>
@@ -5453,7 +5453,7 @@
           <p:cNvPr id="41" name="">
             <a:extLst xmlns:a="http://schemas.openxmlformats.org/drawingml/2006/main">
               <a:ext uri="{FF2B5EF4-FFF2-40B4-BE49-F238E27FC236}">
-                <a16:creationId xmlns:a16="http://schemas.microsoft.com/office/drawing/2014/main" id="{ED93C8EC-CC5E-4009-9E37-13B1098CDCCA}"/>
+                <a16:creationId xmlns:a16="http://schemas.microsoft.com/office/drawing/2014/main" id="{959A7C62-1DB2-46FD-92DB-F46D86AAA97D}"/>
               </a:ext>
             </a:extLst>
           </p:cNvPr>
@@ -5510,7 +5510,7 @@
           <p:cNvPr id="42" name="">
             <a:extLst xmlns:a="http://schemas.openxmlformats.org/drawingml/2006/main">
               <a:ext uri="{FF2B5EF4-FFF2-40B4-BE49-F238E27FC236}">
-                <a16:creationId xmlns:a16="http://schemas.microsoft.com/office/drawing/2014/main" id="{8718287E-C4BA-4C5C-A752-D8404A2F08C4}"/>
+                <a16:creationId xmlns:a16="http://schemas.microsoft.com/office/drawing/2014/main" id="{264CF075-7DB3-456E-BF4B-B568A092009B}"/>
               </a:ext>
             </a:extLst>
           </p:cNvPr>
@@ -5567,7 +5567,7 @@
           <p:cNvPr id="43" name="">
             <a:extLst xmlns:a="http://schemas.openxmlformats.org/drawingml/2006/main">
               <a:ext uri="{FF2B5EF4-FFF2-40B4-BE49-F238E27FC236}">
-                <a16:creationId xmlns:a16="http://schemas.microsoft.com/office/drawing/2014/main" id="{55A93034-74EC-42A1-87E0-DCB36E6FC39F}"/>
+                <a16:creationId xmlns:a16="http://schemas.microsoft.com/office/drawing/2014/main" id="{5CA20663-D176-41CE-8DFE-A1080A1988A2}"/>
               </a:ext>
             </a:extLst>
           </p:cNvPr>
@@ -5624,7 +5624,7 @@
           <p:cNvPr id="44" name="">
             <a:extLst xmlns:a="http://schemas.openxmlformats.org/drawingml/2006/main">
               <a:ext uri="{FF2B5EF4-FFF2-40B4-BE49-F238E27FC236}">
-                <a16:creationId xmlns:a16="http://schemas.microsoft.com/office/drawing/2014/main" id="{E9909154-BAAB-4416-A18E-8EDF45256F05}"/>
+                <a16:creationId xmlns:a16="http://schemas.microsoft.com/office/drawing/2014/main" id="{D84F0CB0-5FD9-48AA-BCFC-A3A0BB44C59B}"/>
               </a:ext>
             </a:extLst>
           </p:cNvPr>
@@ -5681,7 +5681,7 @@
           <p:cNvPr id="45" name="">
             <a:extLst xmlns:a="http://schemas.openxmlformats.org/drawingml/2006/main">
               <a:ext uri="{FF2B5EF4-FFF2-40B4-BE49-F238E27FC236}">
-                <a16:creationId xmlns:a16="http://schemas.microsoft.com/office/drawing/2014/main" id="{CA3B1FC3-9F10-4BDA-92CF-114DE4B77ACA}"/>
+                <a16:creationId xmlns:a16="http://schemas.microsoft.com/office/drawing/2014/main" id="{25BE9A04-20B7-4A7A-822C-91B802B32D8D}"/>
               </a:ext>
             </a:extLst>
           </p:cNvPr>
@@ -5736,7 +5736,7 @@
     </p:spTree>
     <p:extLst>
       <p:ext uri="{BB962C8B-B14F-4D97-AF65-F5344CB8AC3E}">
-        <p14:creationId xmlns:p14="http://schemas.microsoft.com/office/powerpoint/2010/main" val="12852074"/>
+        <p14:creationId xmlns:p14="http://schemas.microsoft.com/office/powerpoint/2010/main" val="1961936349"/>
       </p:ext>
     </p:extLst>
   </p:cSld>
@@ -5767,7 +5767,7 @@
           <p:cNvPr id="10" name="">
             <a:extLst xmlns:a="http://schemas.openxmlformats.org/drawingml/2006/main">
               <a:ext uri="{FF2B5EF4-FFF2-40B4-BE49-F238E27FC236}">
-                <a16:creationId xmlns:a16="http://schemas.microsoft.com/office/drawing/2014/main" id="{C99634F2-FE04-481B-8316-B59449356CB1}"/>
+                <a16:creationId xmlns:a16="http://schemas.microsoft.com/office/drawing/2014/main" id="{BC3E50E5-4139-4C68-A65C-23378B778636}"/>
               </a:ext>
             </a:extLst>
           </p:cNvPr>
@@ -5824,7 +5824,7 @@
           <p:cNvPr id="2" name="">
             <a:extLst xmlns:a="http://schemas.openxmlformats.org/drawingml/2006/main">
               <a:ext uri="{FF2B5EF4-FFF2-40B4-BE49-F238E27FC236}">
-                <a16:creationId xmlns:a16="http://schemas.microsoft.com/office/drawing/2014/main" id="{732668D4-7F1D-4175-82CD-7276F24818AC}"/>
+                <a16:creationId xmlns:a16="http://schemas.microsoft.com/office/drawing/2014/main" id="{F61EF5AE-ADB4-4B9E-B138-DE82F9FB0F95}"/>
               </a:ext>
             </a:extLst>
           </p:cNvPr>
@@ -5855,7 +5855,7 @@
           <p:cNvPr id="3" name="">
             <a:extLst xmlns:a="http://schemas.openxmlformats.org/drawingml/2006/main">
               <a:ext uri="{FF2B5EF4-FFF2-40B4-BE49-F238E27FC236}">
-                <a16:creationId xmlns:a16="http://schemas.microsoft.com/office/drawing/2014/main" id="{08DC1222-83BB-43C9-AA6C-B7DDC064CA69}"/>
+                <a16:creationId xmlns:a16="http://schemas.microsoft.com/office/drawing/2014/main" id="{E0CFDEBE-2048-41B6-95C8-6F45492D1C79}"/>
               </a:ext>
             </a:extLst>
           </p:cNvPr>
@@ -5912,7 +5912,7 @@
           <p:cNvPr id="4" name="">
             <a:extLst xmlns:a="http://schemas.openxmlformats.org/drawingml/2006/main">
               <a:ext uri="{FF2B5EF4-FFF2-40B4-BE49-F238E27FC236}">
-                <a16:creationId xmlns:a16="http://schemas.microsoft.com/office/drawing/2014/main" id="{3A4B5DC3-609A-4C75-BC8B-115C2CE583A0}"/>
+                <a16:creationId xmlns:a16="http://schemas.microsoft.com/office/drawing/2014/main" id="{4A1B5F58-D3D6-47C4-8F95-A1EC68EDE479}"/>
               </a:ext>
             </a:extLst>
           </p:cNvPr>
@@ -5969,7 +5969,7 @@
           <p:cNvPr id="5" name="">
             <a:extLst xmlns:a="http://schemas.openxmlformats.org/drawingml/2006/main">
               <a:ext uri="{FF2B5EF4-FFF2-40B4-BE49-F238E27FC236}">
-                <a16:creationId xmlns:a16="http://schemas.microsoft.com/office/drawing/2014/main" id="{360D88B4-F686-4E40-81D5-8C527811E4CD}"/>
+                <a16:creationId xmlns:a16="http://schemas.microsoft.com/office/drawing/2014/main" id="{E949A618-4935-4E33-9C7A-470788D1011C}"/>
               </a:ext>
             </a:extLst>
           </p:cNvPr>
@@ -6840,7 +6840,7 @@
           <p:cNvPr id="7" name="">
             <a:extLst xmlns:a="http://schemas.openxmlformats.org/drawingml/2006/main">
               <a:ext uri="{FF2B5EF4-FFF2-40B4-BE49-F238E27FC236}">
-                <a16:creationId xmlns:a16="http://schemas.microsoft.com/office/drawing/2014/main" id="{CA08C843-E78C-4952-AFA4-87CC34320D5E}"/>
+                <a16:creationId xmlns:a16="http://schemas.microsoft.com/office/drawing/2014/main" id="{5E1CB62F-6404-47A3-8739-EA5A448C83D9}"/>
               </a:ext>
             </a:extLst>
           </p:cNvPr>
@@ -6897,7 +6897,7 @@
           <p:cNvPr id="8" name="">
             <a:extLst xmlns:a="http://schemas.openxmlformats.org/drawingml/2006/main">
               <a:ext uri="{FF2B5EF4-FFF2-40B4-BE49-F238E27FC236}">
-                <a16:creationId xmlns:a16="http://schemas.microsoft.com/office/drawing/2014/main" id="{7F041A1F-6D94-47C5-92E2-EE9BA2900A24}"/>
+                <a16:creationId xmlns:a16="http://schemas.microsoft.com/office/drawing/2014/main" id="{7FB74D9F-8C4C-4427-B352-BBD30F2A8F4F}"/>
               </a:ext>
             </a:extLst>
           </p:cNvPr>
@@ -6954,7 +6954,7 @@
           <p:cNvPr id="9" name="">
             <a:extLst xmlns:a="http://schemas.openxmlformats.org/drawingml/2006/main">
               <a:ext uri="{FF2B5EF4-FFF2-40B4-BE49-F238E27FC236}">
-                <a16:creationId xmlns:a16="http://schemas.microsoft.com/office/drawing/2014/main" id="{175997B0-0B77-4B33-B7AC-BBE8E6963862}"/>
+                <a16:creationId xmlns:a16="http://schemas.microsoft.com/office/drawing/2014/main" id="{002B6DD4-F199-479A-8CE5-6E26C56E7584}"/>
               </a:ext>
             </a:extLst>
           </p:cNvPr>
@@ -7009,7 +7009,7 @@
     </p:spTree>
     <p:extLst>
       <p:ext uri="{BB962C8B-B14F-4D97-AF65-F5344CB8AC3E}">
-        <p14:creationId xmlns:p14="http://schemas.microsoft.com/office/powerpoint/2010/main" val="519591481"/>
+        <p14:creationId xmlns:p14="http://schemas.microsoft.com/office/powerpoint/2010/main" val="1589561089"/>
       </p:ext>
     </p:extLst>
   </p:cSld>
@@ -7040,7 +7040,7 @@
           <p:cNvPr id="52" name="">
             <a:extLst xmlns:a="http://schemas.openxmlformats.org/drawingml/2006/main">
               <a:ext uri="{FF2B5EF4-FFF2-40B4-BE49-F238E27FC236}">
-                <a16:creationId xmlns:a16="http://schemas.microsoft.com/office/drawing/2014/main" id="{D83FE62C-DE07-491A-9F7C-0304D2425AFB}"/>
+                <a16:creationId xmlns:a16="http://schemas.microsoft.com/office/drawing/2014/main" id="{68E66601-7CEF-4952-B3D1-2B79062A6A4B}"/>
               </a:ext>
             </a:extLst>
           </p:cNvPr>
@@ -7097,7 +7097,7 @@
           <p:cNvPr id="2" name="">
             <a:extLst xmlns:a="http://schemas.openxmlformats.org/drawingml/2006/main">
               <a:ext uri="{FF2B5EF4-FFF2-40B4-BE49-F238E27FC236}">
-                <a16:creationId xmlns:a16="http://schemas.microsoft.com/office/drawing/2014/main" id="{4102CD68-E04B-4581-9305-160DB2ED5062}"/>
+                <a16:creationId xmlns:a16="http://schemas.microsoft.com/office/drawing/2014/main" id="{FC884DA2-9A88-465B-9308-6E23D62CF14D}"/>
               </a:ext>
             </a:extLst>
           </p:cNvPr>
@@ -7128,7 +7128,7 @@
           <p:cNvPr id="3" name="">
             <a:extLst xmlns:a="http://schemas.openxmlformats.org/drawingml/2006/main">
               <a:ext uri="{FF2B5EF4-FFF2-40B4-BE49-F238E27FC236}">
-                <a16:creationId xmlns:a16="http://schemas.microsoft.com/office/drawing/2014/main" id="{379B5780-FD70-4EB6-9C13-0738F9B4F700}"/>
+                <a16:creationId xmlns:a16="http://schemas.microsoft.com/office/drawing/2014/main" id="{E839AD60-43D1-4266-A69E-FA6EBA2BF719}"/>
               </a:ext>
             </a:extLst>
           </p:cNvPr>
@@ -7185,7 +7185,7 @@
           <p:cNvPr id="4" name="">
             <a:extLst xmlns:a="http://schemas.openxmlformats.org/drawingml/2006/main">
               <a:ext uri="{FF2B5EF4-FFF2-40B4-BE49-F238E27FC236}">
-                <a16:creationId xmlns:a16="http://schemas.microsoft.com/office/drawing/2014/main" id="{421136CD-9DC5-40A2-B968-8943372714E8}"/>
+                <a16:creationId xmlns:a16="http://schemas.microsoft.com/office/drawing/2014/main" id="{286F32CD-8BC4-481C-8AD1-70A57C10C61F}"/>
               </a:ext>
             </a:extLst>
           </p:cNvPr>
@@ -7242,7 +7242,7 @@
           <p:cNvPr id="5" name="">
             <a:extLst xmlns:a="http://schemas.openxmlformats.org/drawingml/2006/main">
               <a:ext uri="{FF2B5EF4-FFF2-40B4-BE49-F238E27FC236}">
-                <a16:creationId xmlns:a16="http://schemas.microsoft.com/office/drawing/2014/main" id="{4B1C2E85-BEE6-44F3-8327-7F0417BB36B5}"/>
+                <a16:creationId xmlns:a16="http://schemas.microsoft.com/office/drawing/2014/main" id="{A3213B5D-F409-476E-8978-1DE4971D4C67}"/>
               </a:ext>
             </a:extLst>
           </p:cNvPr>
@@ -7299,7 +7299,7 @@
           <p:cNvPr id="6" name="">
             <a:extLst xmlns:a="http://schemas.openxmlformats.org/drawingml/2006/main">
               <a:ext uri="{FF2B5EF4-FFF2-40B4-BE49-F238E27FC236}">
-                <a16:creationId xmlns:a16="http://schemas.microsoft.com/office/drawing/2014/main" id="{DE03CCCF-BC67-48B3-94AA-3846CB16778A}"/>
+                <a16:creationId xmlns:a16="http://schemas.microsoft.com/office/drawing/2014/main" id="{D9E04C06-1B86-4D48-AA0B-725A5E0F6DD1}"/>
               </a:ext>
             </a:extLst>
           </p:cNvPr>
@@ -7332,7 +7332,7 @@
           <p:cNvPr id="7" name="">
             <a:extLst xmlns:a="http://schemas.openxmlformats.org/drawingml/2006/main">
               <a:ext uri="{FF2B5EF4-FFF2-40B4-BE49-F238E27FC236}">
-                <a16:creationId xmlns:a16="http://schemas.microsoft.com/office/drawing/2014/main" id="{C3DC97FD-6015-481A-B04F-A2D8154F72C0}"/>
+                <a16:creationId xmlns:a16="http://schemas.microsoft.com/office/drawing/2014/main" id="{6B9D7445-88D2-4EF1-B0D0-E83CAFC0BB19}"/>
               </a:ext>
             </a:extLst>
           </p:cNvPr>
@@ -7389,7 +7389,7 @@
           <p:cNvPr id="8" name="">
             <a:extLst xmlns:a="http://schemas.openxmlformats.org/drawingml/2006/main">
               <a:ext uri="{FF2B5EF4-FFF2-40B4-BE49-F238E27FC236}">
-                <a16:creationId xmlns:a16="http://schemas.microsoft.com/office/drawing/2014/main" id="{B688775A-4E72-4711-9CE7-3E2993435A6C}"/>
+                <a16:creationId xmlns:a16="http://schemas.microsoft.com/office/drawing/2014/main" id="{BF853283-93C1-496C-A791-8ADCC1A80757}"/>
               </a:ext>
             </a:extLst>
           </p:cNvPr>
@@ -7422,7 +7422,7 @@
           <p:cNvPr id="9" name="">
             <a:extLst xmlns:a="http://schemas.openxmlformats.org/drawingml/2006/main">
               <a:ext uri="{FF2B5EF4-FFF2-40B4-BE49-F238E27FC236}">
-                <a16:creationId xmlns:a16="http://schemas.microsoft.com/office/drawing/2014/main" id="{E0443C68-3DF7-45B0-BD26-6A66E63B98CC}"/>
+                <a16:creationId xmlns:a16="http://schemas.microsoft.com/office/drawing/2014/main" id="{6FEC427B-0B51-4C23-8F9A-71C8FF044602}"/>
               </a:ext>
             </a:extLst>
           </p:cNvPr>
@@ -7502,7 +7502,7 @@
           <p:cNvPr id="10" name="">
             <a:extLst xmlns:a="http://schemas.openxmlformats.org/drawingml/2006/main">
               <a:ext uri="{FF2B5EF4-FFF2-40B4-BE49-F238E27FC236}">
-                <a16:creationId xmlns:a16="http://schemas.microsoft.com/office/drawing/2014/main" id="{1562B24B-71A5-4411-B0FD-844F2D600AFF}"/>
+                <a16:creationId xmlns:a16="http://schemas.microsoft.com/office/drawing/2014/main" id="{1775B2BA-B16F-4A74-AC5A-4CEA7BF05D7B}"/>
               </a:ext>
             </a:extLst>
           </p:cNvPr>
@@ -7535,7 +7535,7 @@
           <p:cNvPr id="11" name="">
             <a:extLst xmlns:a="http://schemas.openxmlformats.org/drawingml/2006/main">
               <a:ext uri="{FF2B5EF4-FFF2-40B4-BE49-F238E27FC236}">
-                <a16:creationId xmlns:a16="http://schemas.microsoft.com/office/drawing/2014/main" id="{62BA3AE9-2386-484E-9E9E-1BFD1E085F18}"/>
+                <a16:creationId xmlns:a16="http://schemas.microsoft.com/office/drawing/2014/main" id="{C928819F-9440-4F26-800C-64188113CD4D}"/>
               </a:ext>
             </a:extLst>
           </p:cNvPr>
@@ -7615,7 +7615,7 @@
           <p:cNvPr id="12" name="">
             <a:extLst xmlns:a="http://schemas.openxmlformats.org/drawingml/2006/main">
               <a:ext uri="{FF2B5EF4-FFF2-40B4-BE49-F238E27FC236}">
-                <a16:creationId xmlns:a16="http://schemas.microsoft.com/office/drawing/2014/main" id="{5327D404-3E45-486D-91D6-8630DC16B32A}"/>
+                <a16:creationId xmlns:a16="http://schemas.microsoft.com/office/drawing/2014/main" id="{5BFAC706-599E-4AD5-AF76-A10421E5C843}"/>
               </a:ext>
             </a:extLst>
           </p:cNvPr>
@@ -7648,7 +7648,7 @@
           <p:cNvPr id="13" name="">
             <a:extLst xmlns:a="http://schemas.openxmlformats.org/drawingml/2006/main">
               <a:ext uri="{FF2B5EF4-FFF2-40B4-BE49-F238E27FC236}">
-                <a16:creationId xmlns:a16="http://schemas.microsoft.com/office/drawing/2014/main" id="{9B5CDA2A-289F-454F-ACEC-F1B9F250AA03}"/>
+                <a16:creationId xmlns:a16="http://schemas.microsoft.com/office/drawing/2014/main" id="{3E9FAA01-84C7-493D-A0D1-1710ABE32D49}"/>
               </a:ext>
             </a:extLst>
           </p:cNvPr>
@@ -7728,7 +7728,7 @@
           <p:cNvPr id="14" name="">
             <a:extLst xmlns:a="http://schemas.openxmlformats.org/drawingml/2006/main">
               <a:ext uri="{FF2B5EF4-FFF2-40B4-BE49-F238E27FC236}">
-                <a16:creationId xmlns:a16="http://schemas.microsoft.com/office/drawing/2014/main" id="{8B54BC13-9537-4D93-95DA-DB459C5249B8}"/>
+                <a16:creationId xmlns:a16="http://schemas.microsoft.com/office/drawing/2014/main" id="{06EFEC3D-B1DC-4BFE-8F79-7AEA460CDDF0}"/>
               </a:ext>
             </a:extLst>
           </p:cNvPr>
@@ -7761,7 +7761,7 @@
           <p:cNvPr id="15" name="">
             <a:extLst xmlns:a="http://schemas.openxmlformats.org/drawingml/2006/main">
               <a:ext uri="{FF2B5EF4-FFF2-40B4-BE49-F238E27FC236}">
-                <a16:creationId xmlns:a16="http://schemas.microsoft.com/office/drawing/2014/main" id="{99625DA4-6710-42CB-9ADD-6B251B07B755}"/>
+                <a16:creationId xmlns:a16="http://schemas.microsoft.com/office/drawing/2014/main" id="{AABFFD00-2999-4974-BCE0-8ABF4D441E39}"/>
               </a:ext>
             </a:extLst>
           </p:cNvPr>
@@ -7945,7 +7945,7 @@
           <p:cNvPr id="20" name="">
             <a:extLst xmlns:a="http://schemas.openxmlformats.org/drawingml/2006/main">
               <a:ext uri="{FF2B5EF4-FFF2-40B4-BE49-F238E27FC236}">
-                <a16:creationId xmlns:a16="http://schemas.microsoft.com/office/drawing/2014/main" id="{D2E3E9AC-4402-4AEC-8671-C95407B2B7D0}"/>
+                <a16:creationId xmlns:a16="http://schemas.microsoft.com/office/drawing/2014/main" id="{491FBFC2-B023-4ED8-AB2E-9740FA7BF5AC}"/>
               </a:ext>
             </a:extLst>
           </p:cNvPr>
@@ -8002,7 +8002,7 @@
           <p:cNvPr id="21" name="">
             <a:extLst xmlns:a="http://schemas.openxmlformats.org/drawingml/2006/main">
               <a:ext uri="{FF2B5EF4-FFF2-40B4-BE49-F238E27FC236}">
-                <a16:creationId xmlns:a16="http://schemas.microsoft.com/office/drawing/2014/main" id="{735676EB-8872-49B1-A709-0767D33E3FE2}"/>
+                <a16:creationId xmlns:a16="http://schemas.microsoft.com/office/drawing/2014/main" id="{4972418F-9413-4D3D-8505-CB12F5E8C418}"/>
               </a:ext>
             </a:extLst>
           </p:cNvPr>
@@ -8035,7 +8035,7 @@
           <p:cNvPr id="22" name="">
             <a:extLst xmlns:a="http://schemas.openxmlformats.org/drawingml/2006/main">
               <a:ext uri="{FF2B5EF4-FFF2-40B4-BE49-F238E27FC236}">
-                <a16:creationId xmlns:a16="http://schemas.microsoft.com/office/drawing/2014/main" id="{1D9265C2-540E-41D2-9F77-DA2762961F80}"/>
+                <a16:creationId xmlns:a16="http://schemas.microsoft.com/office/drawing/2014/main" id="{7E9AF8BA-C12B-4592-A246-C4FA615C11E1}"/>
               </a:ext>
             </a:extLst>
           </p:cNvPr>
@@ -8092,7 +8092,7 @@
           <p:cNvPr id="23" name="">
             <a:extLst xmlns:a="http://schemas.openxmlformats.org/drawingml/2006/main">
               <a:ext uri="{FF2B5EF4-FFF2-40B4-BE49-F238E27FC236}">
-                <a16:creationId xmlns:a16="http://schemas.microsoft.com/office/drawing/2014/main" id="{9842E47D-49C1-47A7-979C-65BCE183F30C}"/>
+                <a16:creationId xmlns:a16="http://schemas.microsoft.com/office/drawing/2014/main" id="{6B379E56-539B-42BD-A3BA-E1773837DAC9}"/>
               </a:ext>
             </a:extLst>
           </p:cNvPr>
@@ -8125,7 +8125,7 @@
           <p:cNvPr id="24" name="">
             <a:extLst xmlns:a="http://schemas.openxmlformats.org/drawingml/2006/main">
               <a:ext uri="{FF2B5EF4-FFF2-40B4-BE49-F238E27FC236}">
-                <a16:creationId xmlns:a16="http://schemas.microsoft.com/office/drawing/2014/main" id="{C722CFBD-996D-4A1F-A592-2A79D28DB194}"/>
+                <a16:creationId xmlns:a16="http://schemas.microsoft.com/office/drawing/2014/main" id="{DC6B52D4-2A4E-41C1-9162-6EE25838138F}"/>
               </a:ext>
             </a:extLst>
           </p:cNvPr>
@@ -8231,7 +8231,7 @@
           <p:cNvPr id="26" name="">
             <a:extLst xmlns:a="http://schemas.openxmlformats.org/drawingml/2006/main">
               <a:ext uri="{FF2B5EF4-FFF2-40B4-BE49-F238E27FC236}">
-                <a16:creationId xmlns:a16="http://schemas.microsoft.com/office/drawing/2014/main" id="{4AB4BDCE-1191-4972-8507-6323659FB313}"/>
+                <a16:creationId xmlns:a16="http://schemas.microsoft.com/office/drawing/2014/main" id="{8F488E1C-C477-472C-829E-02BAFF460AAE}"/>
               </a:ext>
             </a:extLst>
           </p:cNvPr>
@@ -8314,7 +8314,7 @@
           <p:cNvPr id="28" name="">
             <a:extLst xmlns:a="http://schemas.openxmlformats.org/drawingml/2006/main">
               <a:ext uri="{FF2B5EF4-FFF2-40B4-BE49-F238E27FC236}">
-                <a16:creationId xmlns:a16="http://schemas.microsoft.com/office/drawing/2014/main" id="{66AE456D-1BB8-4B49-A8FA-BDDACCB738AB}"/>
+                <a16:creationId xmlns:a16="http://schemas.microsoft.com/office/drawing/2014/main" id="{35A2797C-73C6-4ABA-AA88-866B9EEDB666}"/>
               </a:ext>
             </a:extLst>
           </p:cNvPr>
@@ -8347,7 +8347,7 @@
           <p:cNvPr id="29" name="">
             <a:extLst xmlns:a="http://schemas.openxmlformats.org/drawingml/2006/main">
               <a:ext uri="{FF2B5EF4-FFF2-40B4-BE49-F238E27FC236}">
-                <a16:creationId xmlns:a16="http://schemas.microsoft.com/office/drawing/2014/main" id="{D700B04F-F45B-4714-ADFB-CAE22AFA9835}"/>
+                <a16:creationId xmlns:a16="http://schemas.microsoft.com/office/drawing/2014/main" id="{5E3E9329-5149-4374-ABD3-BDF7B9AA7A91}"/>
               </a:ext>
             </a:extLst>
           </p:cNvPr>
@@ -8453,7 +8453,7 @@
           <p:cNvPr id="31" name="">
             <a:extLst xmlns:a="http://schemas.openxmlformats.org/drawingml/2006/main">
               <a:ext uri="{FF2B5EF4-FFF2-40B4-BE49-F238E27FC236}">
-                <a16:creationId xmlns:a16="http://schemas.microsoft.com/office/drawing/2014/main" id="{E82066BC-E831-4B06-BD1F-0CB8E8872121}"/>
+                <a16:creationId xmlns:a16="http://schemas.microsoft.com/office/drawing/2014/main" id="{8BBFAA7D-E626-4D8A-802F-2BB407ED9075}"/>
               </a:ext>
             </a:extLst>
           </p:cNvPr>
@@ -8484,7 +8484,7 @@
           <p:cNvPr id="32" name="">
             <a:extLst xmlns:a="http://schemas.openxmlformats.org/drawingml/2006/main">
               <a:ext uri="{FF2B5EF4-FFF2-40B4-BE49-F238E27FC236}">
-                <a16:creationId xmlns:a16="http://schemas.microsoft.com/office/drawing/2014/main" id="{B4EDF8C6-9BC3-4C15-A492-3BBFAE49AD8B}"/>
+                <a16:creationId xmlns:a16="http://schemas.microsoft.com/office/drawing/2014/main" id="{79E31619-720F-4A76-B465-ED81821B136D}"/>
               </a:ext>
             </a:extLst>
           </p:cNvPr>
@@ -8515,7 +8515,7 @@
           <p:cNvPr id="33" name="">
             <a:extLst xmlns:a="http://schemas.openxmlformats.org/drawingml/2006/main">
               <a:ext uri="{FF2B5EF4-FFF2-40B4-BE49-F238E27FC236}">
-                <a16:creationId xmlns:a16="http://schemas.microsoft.com/office/drawing/2014/main" id="{68B5F98C-0E51-42EF-88D9-D17311EFC306}"/>
+                <a16:creationId xmlns:a16="http://schemas.microsoft.com/office/drawing/2014/main" id="{784769AD-8DD8-4FC7-88EA-9B1B2BCE0738}"/>
               </a:ext>
             </a:extLst>
           </p:cNvPr>
@@ -8546,7 +8546,7 @@
           <p:cNvPr id="34" name="">
             <a:extLst xmlns:a="http://schemas.openxmlformats.org/drawingml/2006/main">
               <a:ext uri="{FF2B5EF4-FFF2-40B4-BE49-F238E27FC236}">
-                <a16:creationId xmlns:a16="http://schemas.microsoft.com/office/drawing/2014/main" id="{D54C0A01-2FEB-4533-9362-90463855A52E}"/>
+                <a16:creationId xmlns:a16="http://schemas.microsoft.com/office/drawing/2014/main" id="{2185C2BD-ECFA-46E2-836E-8073DE0B68C0}"/>
               </a:ext>
             </a:extLst>
           </p:cNvPr>
@@ -8601,7 +8601,7 @@
           <p:cNvPr id="36" name="">
             <a:extLst xmlns:a="http://schemas.openxmlformats.org/drawingml/2006/main">
               <a:ext uri="{FF2B5EF4-FFF2-40B4-BE49-F238E27FC236}">
-                <a16:creationId xmlns:a16="http://schemas.microsoft.com/office/drawing/2014/main" id="{9EBC218C-0098-4AD9-AB63-0179E50065BA}"/>
+                <a16:creationId xmlns:a16="http://schemas.microsoft.com/office/drawing/2014/main" id="{591B059D-2276-4A0E-9402-999E0A76ABE7}"/>
               </a:ext>
             </a:extLst>
           </p:cNvPr>
@@ -8658,7 +8658,7 @@
           <p:cNvPr id="37" name="">
             <a:extLst xmlns:a="http://schemas.openxmlformats.org/drawingml/2006/main">
               <a:ext uri="{FF2B5EF4-FFF2-40B4-BE49-F238E27FC236}">
-                <a16:creationId xmlns:a16="http://schemas.microsoft.com/office/drawing/2014/main" id="{F41C9085-9B17-472A-A792-4165B9AEC3CC}"/>
+                <a16:creationId xmlns:a16="http://schemas.microsoft.com/office/drawing/2014/main" id="{82531DA0-82AE-421C-97AD-B29297E4FA94}"/>
               </a:ext>
             </a:extLst>
           </p:cNvPr>
@@ -8689,7 +8689,7 @@
           <p:cNvPr id="38" name="">
             <a:extLst xmlns:a="http://schemas.openxmlformats.org/drawingml/2006/main">
               <a:ext uri="{FF2B5EF4-FFF2-40B4-BE49-F238E27FC236}">
-                <a16:creationId xmlns:a16="http://schemas.microsoft.com/office/drawing/2014/main" id="{A61372A2-AB8A-46E1-9007-3117FED984CE}"/>
+                <a16:creationId xmlns:a16="http://schemas.microsoft.com/office/drawing/2014/main" id="{733883D4-444F-46A8-86D2-A87FC9FBDF38}"/>
               </a:ext>
             </a:extLst>
           </p:cNvPr>
@@ -8746,7 +8746,7 @@
           <p:cNvPr id="39" name="">
             <a:extLst xmlns:a="http://schemas.openxmlformats.org/drawingml/2006/main">
               <a:ext uri="{FF2B5EF4-FFF2-40B4-BE49-F238E27FC236}">
-                <a16:creationId xmlns:a16="http://schemas.microsoft.com/office/drawing/2014/main" id="{6FF0A0AC-1EC9-429B-80D1-830FAE7381FD}"/>
+                <a16:creationId xmlns:a16="http://schemas.microsoft.com/office/drawing/2014/main" id="{FECA69DF-DB07-4E0F-B9CD-88B93995ECB1}"/>
               </a:ext>
             </a:extLst>
           </p:cNvPr>
@@ -8803,7 +8803,7 @@
           <p:cNvPr id="40" name="">
             <a:extLst xmlns:a="http://schemas.openxmlformats.org/drawingml/2006/main">
               <a:ext uri="{FF2B5EF4-FFF2-40B4-BE49-F238E27FC236}">
-                <a16:creationId xmlns:a16="http://schemas.microsoft.com/office/drawing/2014/main" id="{9630D711-E8B6-4C0B-BA6F-277E165CDE82}"/>
+                <a16:creationId xmlns:a16="http://schemas.microsoft.com/office/drawing/2014/main" id="{76A931C2-EC48-4CD8-863A-FE9672C680D1}"/>
               </a:ext>
             </a:extLst>
           </p:cNvPr>
@@ -8860,7 +8860,7 @@
           <p:cNvPr id="41" name="">
             <a:extLst xmlns:a="http://schemas.openxmlformats.org/drawingml/2006/main">
               <a:ext uri="{FF2B5EF4-FFF2-40B4-BE49-F238E27FC236}">
-                <a16:creationId xmlns:a16="http://schemas.microsoft.com/office/drawing/2014/main" id="{87FDED27-9A96-4627-9785-06C43080E4AD}"/>
+                <a16:creationId xmlns:a16="http://schemas.microsoft.com/office/drawing/2014/main" id="{712E23D7-D9A6-48D7-8C35-63632C5A282D}"/>
               </a:ext>
             </a:extLst>
           </p:cNvPr>
@@ -8917,7 +8917,7 @@
           <p:cNvPr id="42" name="">
             <a:extLst xmlns:a="http://schemas.openxmlformats.org/drawingml/2006/main">
               <a:ext uri="{FF2B5EF4-FFF2-40B4-BE49-F238E27FC236}">
-                <a16:creationId xmlns:a16="http://schemas.microsoft.com/office/drawing/2014/main" id="{E7B8EA7E-FDBE-4593-8D97-D912A0ADDDAB}"/>
+                <a16:creationId xmlns:a16="http://schemas.microsoft.com/office/drawing/2014/main" id="{0147EA97-D521-4CF5-9280-7B71BE5B4FBE}"/>
               </a:ext>
             </a:extLst>
           </p:cNvPr>
@@ -8974,7 +8974,7 @@
           <p:cNvPr id="43" name="">
             <a:extLst xmlns:a="http://schemas.openxmlformats.org/drawingml/2006/main">
               <a:ext uri="{FF2B5EF4-FFF2-40B4-BE49-F238E27FC236}">
-                <a16:creationId xmlns:a16="http://schemas.microsoft.com/office/drawing/2014/main" id="{D200B01F-3960-4D40-882B-15F26090F45E}"/>
+                <a16:creationId xmlns:a16="http://schemas.microsoft.com/office/drawing/2014/main" id="{5F970075-B63B-4105-8795-A297E22A5DE4}"/>
               </a:ext>
             </a:extLst>
           </p:cNvPr>
@@ -9031,7 +9031,7 @@
           <p:cNvPr id="44" name="">
             <a:extLst xmlns:a="http://schemas.openxmlformats.org/drawingml/2006/main">
               <a:ext uri="{FF2B5EF4-FFF2-40B4-BE49-F238E27FC236}">
-                <a16:creationId xmlns:a16="http://schemas.microsoft.com/office/drawing/2014/main" id="{9FB46BE2-3620-4D53-89FD-6B335B772577}"/>
+                <a16:creationId xmlns:a16="http://schemas.microsoft.com/office/drawing/2014/main" id="{4D717334-88CE-44B6-84AA-10B4AFFF8292}"/>
               </a:ext>
             </a:extLst>
           </p:cNvPr>
@@ -9088,7 +9088,7 @@
           <p:cNvPr id="45" name="">
             <a:extLst xmlns:a="http://schemas.openxmlformats.org/drawingml/2006/main">
               <a:ext uri="{FF2B5EF4-FFF2-40B4-BE49-F238E27FC236}">
-                <a16:creationId xmlns:a16="http://schemas.microsoft.com/office/drawing/2014/main" id="{041D06F2-2842-4CD3-82BB-30E3C111CF4C}"/>
+                <a16:creationId xmlns:a16="http://schemas.microsoft.com/office/drawing/2014/main" id="{CAB9A3B5-A9FC-4E68-A5E6-440A8E6B54AA}"/>
               </a:ext>
             </a:extLst>
           </p:cNvPr>
@@ -9168,7 +9168,7 @@
           <p:cNvPr id="46" name="">
             <a:extLst xmlns:a="http://schemas.openxmlformats.org/drawingml/2006/main">
               <a:ext uri="{FF2B5EF4-FFF2-40B4-BE49-F238E27FC236}">
-                <a16:creationId xmlns:a16="http://schemas.microsoft.com/office/drawing/2014/main" id="{6D57BAC9-E146-42E9-925B-EF5372F97D6C}"/>
+                <a16:creationId xmlns:a16="http://schemas.microsoft.com/office/drawing/2014/main" id="{BD1E0792-4010-4537-8DC2-27C60328DF49}"/>
               </a:ext>
             </a:extLst>
           </p:cNvPr>
@@ -9199,7 +9199,7 @@
           <p:cNvPr id="47" name="">
             <a:extLst xmlns:a="http://schemas.openxmlformats.org/drawingml/2006/main">
               <a:ext uri="{FF2B5EF4-FFF2-40B4-BE49-F238E27FC236}">
-                <a16:creationId xmlns:a16="http://schemas.microsoft.com/office/drawing/2014/main" id="{8066ED9B-AAF8-401E-B450-1B64FC4C7667}"/>
+                <a16:creationId xmlns:a16="http://schemas.microsoft.com/office/drawing/2014/main" id="{6FE00E35-AB97-4EC3-A9A7-357485DC38DF}"/>
               </a:ext>
             </a:extLst>
           </p:cNvPr>
@@ -9256,7 +9256,7 @@
           <p:cNvPr id="48" name="">
             <a:extLst xmlns:a="http://schemas.openxmlformats.org/drawingml/2006/main">
               <a:ext uri="{FF2B5EF4-FFF2-40B4-BE49-F238E27FC236}">
-                <a16:creationId xmlns:a16="http://schemas.microsoft.com/office/drawing/2014/main" id="{84519E7D-8677-4BA3-907E-DEEF55A9F6F2}"/>
+                <a16:creationId xmlns:a16="http://schemas.microsoft.com/office/drawing/2014/main" id="{1DB843B7-EE83-4DC9-BEA5-FB5686192BDA}"/>
               </a:ext>
             </a:extLst>
           </p:cNvPr>
@@ -9313,7 +9313,7 @@
           <p:cNvPr id="49" name="">
             <a:extLst xmlns:a="http://schemas.openxmlformats.org/drawingml/2006/main">
               <a:ext uri="{FF2B5EF4-FFF2-40B4-BE49-F238E27FC236}">
-                <a16:creationId xmlns:a16="http://schemas.microsoft.com/office/drawing/2014/main" id="{F7D50B77-5C65-4074-A559-8CC9A33DEF79}"/>
+                <a16:creationId xmlns:a16="http://schemas.microsoft.com/office/drawing/2014/main" id="{FCE04821-4CB7-4A0F-ACEF-3C4E59645C15}"/>
               </a:ext>
             </a:extLst>
           </p:cNvPr>
@@ -9370,7 +9370,7 @@
           <p:cNvPr id="50" name="">
             <a:extLst xmlns:a="http://schemas.openxmlformats.org/drawingml/2006/main">
               <a:ext uri="{FF2B5EF4-FFF2-40B4-BE49-F238E27FC236}">
-                <a16:creationId xmlns:a16="http://schemas.microsoft.com/office/drawing/2014/main" id="{38BC649D-C4CF-4566-927A-181733A44A0B}"/>
+                <a16:creationId xmlns:a16="http://schemas.microsoft.com/office/drawing/2014/main" id="{CCC3FAE3-02C5-4842-AED0-15574D503C8C}"/>
               </a:ext>
             </a:extLst>
           </p:cNvPr>
@@ -9427,7 +9427,7 @@
           <p:cNvPr id="51" name="">
             <a:extLst xmlns:a="http://schemas.openxmlformats.org/drawingml/2006/main">
               <a:ext uri="{FF2B5EF4-FFF2-40B4-BE49-F238E27FC236}">
-                <a16:creationId xmlns:a16="http://schemas.microsoft.com/office/drawing/2014/main" id="{0EEC670E-22AA-4D06-8F91-F74BD1AD531A}"/>
+                <a16:creationId xmlns:a16="http://schemas.microsoft.com/office/drawing/2014/main" id="{FC3FC666-BECD-4248-99EF-0CD0D2D17AF6}"/>
               </a:ext>
             </a:extLst>
           </p:cNvPr>
@@ -9482,7 +9482,7 @@
     </p:spTree>
     <p:extLst>
       <p:ext uri="{BB962C8B-B14F-4D97-AF65-F5344CB8AC3E}">
-        <p14:creationId xmlns:p14="http://schemas.microsoft.com/office/powerpoint/2010/main" val="16236861"/>
+        <p14:creationId xmlns:p14="http://schemas.microsoft.com/office/powerpoint/2010/main" val="1028379437"/>
       </p:ext>
     </p:extLst>
   </p:cSld>
@@ -9513,7 +9513,7 @@
           <p:cNvPr id="11" name="">
             <a:extLst xmlns:a="http://schemas.openxmlformats.org/drawingml/2006/main">
               <a:ext uri="{FF2B5EF4-FFF2-40B4-BE49-F238E27FC236}">
-                <a16:creationId xmlns:a16="http://schemas.microsoft.com/office/drawing/2014/main" id="{87422FF4-485F-40BF-B784-BF398EB7FB58}"/>
+                <a16:creationId xmlns:a16="http://schemas.microsoft.com/office/drawing/2014/main" id="{ECC24AD9-6C5E-453F-BFEE-A4F66C1B63ED}"/>
               </a:ext>
             </a:extLst>
           </p:cNvPr>
@@ -9570,7 +9570,7 @@
           <p:cNvPr id="2" name="">
             <a:extLst xmlns:a="http://schemas.openxmlformats.org/drawingml/2006/main">
               <a:ext uri="{FF2B5EF4-FFF2-40B4-BE49-F238E27FC236}">
-                <a16:creationId xmlns:a16="http://schemas.microsoft.com/office/drawing/2014/main" id="{01614579-A1C3-4F6E-AA64-D2976E97C4DF}"/>
+                <a16:creationId xmlns:a16="http://schemas.microsoft.com/office/drawing/2014/main" id="{422A591A-11F4-4128-9FC3-6579F51B8583}"/>
               </a:ext>
             </a:extLst>
           </p:cNvPr>
@@ -9601,7 +9601,7 @@
           <p:cNvPr id="3" name="">
             <a:extLst xmlns:a="http://schemas.openxmlformats.org/drawingml/2006/main">
               <a:ext uri="{FF2B5EF4-FFF2-40B4-BE49-F238E27FC236}">
-                <a16:creationId xmlns:a16="http://schemas.microsoft.com/office/drawing/2014/main" id="{32410C20-FB42-425B-AA1C-CDDFE42BAACC}"/>
+                <a16:creationId xmlns:a16="http://schemas.microsoft.com/office/drawing/2014/main" id="{DE7CF957-4C05-4FE3-8C8E-FEBE1927EFF7}"/>
               </a:ext>
             </a:extLst>
           </p:cNvPr>
@@ -9658,7 +9658,7 @@
           <p:cNvPr id="4" name="">
             <a:extLst xmlns:a="http://schemas.openxmlformats.org/drawingml/2006/main">
               <a:ext uri="{FF2B5EF4-FFF2-40B4-BE49-F238E27FC236}">
-                <a16:creationId xmlns:a16="http://schemas.microsoft.com/office/drawing/2014/main" id="{08304F37-1932-48CE-AF04-F1D76A92C20E}"/>
+                <a16:creationId xmlns:a16="http://schemas.microsoft.com/office/drawing/2014/main" id="{B951E870-1948-4761-A0F7-775382D4FC3D}"/>
               </a:ext>
             </a:extLst>
           </p:cNvPr>
@@ -9715,7 +9715,7 @@
           <p:cNvPr id="5" name="">
             <a:extLst xmlns:a="http://schemas.openxmlformats.org/drawingml/2006/main">
               <a:ext uri="{FF2B5EF4-FFF2-40B4-BE49-F238E27FC236}">
-                <a16:creationId xmlns:a16="http://schemas.microsoft.com/office/drawing/2014/main" id="{BA6D0828-0F18-49CC-AD99-DD289E1614E6}"/>
+                <a16:creationId xmlns:a16="http://schemas.microsoft.com/office/drawing/2014/main" id="{5AA9DCDB-9B3C-435B-BDB8-A96B89D4799D}"/>
               </a:ext>
             </a:extLst>
           </p:cNvPr>
@@ -9772,7 +9772,7 @@
           <p:cNvPr id="6" name="">
             <a:extLst xmlns:a="http://schemas.openxmlformats.org/drawingml/2006/main">
               <a:ext uri="{FF2B5EF4-FFF2-40B4-BE49-F238E27FC236}">
-                <a16:creationId xmlns:a16="http://schemas.microsoft.com/office/drawing/2014/main" id="{3A91BF09-758B-4F5C-B9FC-B5AA1256027D}"/>
+                <a16:creationId xmlns:a16="http://schemas.microsoft.com/office/drawing/2014/main" id="{1A7E559D-203E-4EE5-8025-B50A8F4CB553}"/>
               </a:ext>
             </a:extLst>
           </p:cNvPr>
@@ -10263,7 +10263,7 @@
           <p:cNvPr id="8" name="">
             <a:extLst xmlns:a="http://schemas.openxmlformats.org/drawingml/2006/main">
               <a:ext uri="{FF2B5EF4-FFF2-40B4-BE49-F238E27FC236}">
-                <a16:creationId xmlns:a16="http://schemas.microsoft.com/office/drawing/2014/main" id="{6DFFFA43-C48D-41F9-A779-3A3CA10B547E}"/>
+                <a16:creationId xmlns:a16="http://schemas.microsoft.com/office/drawing/2014/main" id="{EE502553-986D-46EC-B51C-4BDCFCB8CD00}"/>
               </a:ext>
             </a:extLst>
           </p:cNvPr>
@@ -10320,7 +10320,7 @@
           <p:cNvPr id="9" name="">
             <a:extLst xmlns:a="http://schemas.openxmlformats.org/drawingml/2006/main">
               <a:ext uri="{FF2B5EF4-FFF2-40B4-BE49-F238E27FC236}">
-                <a16:creationId xmlns:a16="http://schemas.microsoft.com/office/drawing/2014/main" id="{CE2029FB-4478-411D-A355-E30DF6E3CC08}"/>
+                <a16:creationId xmlns:a16="http://schemas.microsoft.com/office/drawing/2014/main" id="{65F0B545-0324-4F76-911F-E12FD18E6364}"/>
               </a:ext>
             </a:extLst>
           </p:cNvPr>
@@ -10377,7 +10377,7 @@
           <p:cNvPr id="10" name="">
             <a:extLst xmlns:a="http://schemas.openxmlformats.org/drawingml/2006/main">
               <a:ext uri="{FF2B5EF4-FFF2-40B4-BE49-F238E27FC236}">
-                <a16:creationId xmlns:a16="http://schemas.microsoft.com/office/drawing/2014/main" id="{59225618-FBE7-46CA-8A31-43E311622B77}"/>
+                <a16:creationId xmlns:a16="http://schemas.microsoft.com/office/drawing/2014/main" id="{E60533BA-6806-4E12-B4B5-A397B299937E}"/>
               </a:ext>
             </a:extLst>
           </p:cNvPr>
@@ -10432,7 +10432,7 @@
     </p:spTree>
     <p:extLst>
       <p:ext uri="{BB962C8B-B14F-4D97-AF65-F5344CB8AC3E}">
-        <p14:creationId xmlns:p14="http://schemas.microsoft.com/office/powerpoint/2010/main" val="1634807806"/>
+        <p14:creationId xmlns:p14="http://schemas.microsoft.com/office/powerpoint/2010/main" val="1408176735"/>
       </p:ext>
     </p:extLst>
   </p:cSld>
@@ -10463,7 +10463,7 @@
           <p:cNvPr id="29" name="">
             <a:extLst xmlns:a="http://schemas.openxmlformats.org/drawingml/2006/main">
               <a:ext uri="{FF2B5EF4-FFF2-40B4-BE49-F238E27FC236}">
-                <a16:creationId xmlns:a16="http://schemas.microsoft.com/office/drawing/2014/main" id="{E361D878-A6BA-4BF0-97F4-E1A8EADFB847}"/>
+                <a16:creationId xmlns:a16="http://schemas.microsoft.com/office/drawing/2014/main" id="{BE62EC11-611E-4EE1-9755-64F079CEAB2C}"/>
               </a:ext>
             </a:extLst>
           </p:cNvPr>
@@ -10543,7 +10543,7 @@
           <p:cNvPr id="2" name="">
             <a:extLst xmlns:a="http://schemas.openxmlformats.org/drawingml/2006/main">
               <a:ext uri="{FF2B5EF4-FFF2-40B4-BE49-F238E27FC236}">
-                <a16:creationId xmlns:a16="http://schemas.microsoft.com/office/drawing/2014/main" id="{7E866DD4-14F2-4A93-8791-3AC84C0CDBB2}"/>
+                <a16:creationId xmlns:a16="http://schemas.microsoft.com/office/drawing/2014/main" id="{308D53B4-5CB0-4CB5-9E4A-53B12BD5D769}"/>
               </a:ext>
             </a:extLst>
           </p:cNvPr>
@@ -10574,7 +10574,7 @@
           <p:cNvPr id="3" name="">
             <a:extLst xmlns:a="http://schemas.openxmlformats.org/drawingml/2006/main">
               <a:ext uri="{FF2B5EF4-FFF2-40B4-BE49-F238E27FC236}">
-                <a16:creationId xmlns:a16="http://schemas.microsoft.com/office/drawing/2014/main" id="{5DD72FE2-458A-4D3A-8B51-B94FD65FF93F}"/>
+                <a16:creationId xmlns:a16="http://schemas.microsoft.com/office/drawing/2014/main" id="{DDF08697-C5E3-4C61-99EF-A32FED90EF59}"/>
               </a:ext>
             </a:extLst>
           </p:cNvPr>
@@ -10631,7 +10631,7 @@
           <p:cNvPr id="4" name="">
             <a:extLst xmlns:a="http://schemas.openxmlformats.org/drawingml/2006/main">
               <a:ext uri="{FF2B5EF4-FFF2-40B4-BE49-F238E27FC236}">
-                <a16:creationId xmlns:a16="http://schemas.microsoft.com/office/drawing/2014/main" id="{46D3E3DB-EA75-4FB3-B60A-762A14C43519}"/>
+                <a16:creationId xmlns:a16="http://schemas.microsoft.com/office/drawing/2014/main" id="{6B4E92BA-8049-4DD6-ADB3-1BE75A95A257}"/>
               </a:ext>
             </a:extLst>
           </p:cNvPr>
@@ -10688,7 +10688,7 @@
           <p:cNvPr id="5" name="">
             <a:extLst xmlns:a="http://schemas.openxmlformats.org/drawingml/2006/main">
               <a:ext uri="{FF2B5EF4-FFF2-40B4-BE49-F238E27FC236}">
-                <a16:creationId xmlns:a16="http://schemas.microsoft.com/office/drawing/2014/main" id="{63F68BDE-ACE8-4C6A-84D5-19C77B105BE2}"/>
+                <a16:creationId xmlns:a16="http://schemas.microsoft.com/office/drawing/2014/main" id="{D0AFF972-371A-477E-AC3E-5DD09159DFEB}"/>
               </a:ext>
             </a:extLst>
           </p:cNvPr>
@@ -10745,7 +10745,7 @@
           <p:cNvPr id="6" name="">
             <a:extLst xmlns:a="http://schemas.openxmlformats.org/drawingml/2006/main">
               <a:ext uri="{FF2B5EF4-FFF2-40B4-BE49-F238E27FC236}">
-                <a16:creationId xmlns:a16="http://schemas.microsoft.com/office/drawing/2014/main" id="{4D834DB4-4375-4667-AACF-B980A82156D3}"/>
+                <a16:creationId xmlns:a16="http://schemas.microsoft.com/office/drawing/2014/main" id="{A51F2167-571F-4E86-908E-A060F256C77C}"/>
               </a:ext>
             </a:extLst>
           </p:cNvPr>
@@ -10825,7 +10825,7 @@
           <p:cNvPr id="7" name="">
             <a:extLst xmlns:a="http://schemas.openxmlformats.org/drawingml/2006/main">
               <a:ext uri="{FF2B5EF4-FFF2-40B4-BE49-F238E27FC236}">
-                <a16:creationId xmlns:a16="http://schemas.microsoft.com/office/drawing/2014/main" id="{CAD85327-4734-43A7-ABAD-E3268097F9E9}"/>
+                <a16:creationId xmlns:a16="http://schemas.microsoft.com/office/drawing/2014/main" id="{56D0948B-A640-47E4-BA6E-A750F6FA7EF6}"/>
               </a:ext>
             </a:extLst>
           </p:cNvPr>
@@ -10882,7 +10882,7 @@
           <p:cNvPr id="8" name="">
             <a:extLst xmlns:a="http://schemas.openxmlformats.org/drawingml/2006/main">
               <a:ext uri="{FF2B5EF4-FFF2-40B4-BE49-F238E27FC236}">
-                <a16:creationId xmlns:a16="http://schemas.microsoft.com/office/drawing/2014/main" id="{C7E511BE-48D7-442B-A4DB-031A73CF08C9}"/>
+                <a16:creationId xmlns:a16="http://schemas.microsoft.com/office/drawing/2014/main" id="{9CF9B339-0F29-40BE-9ACC-49A973D9835F}"/>
               </a:ext>
             </a:extLst>
           </p:cNvPr>
@@ -10962,7 +10962,7 @@
           <p:cNvPr id="9" name="">
             <a:extLst xmlns:a="http://schemas.openxmlformats.org/drawingml/2006/main">
               <a:ext uri="{FF2B5EF4-FFF2-40B4-BE49-F238E27FC236}">
-                <a16:creationId xmlns:a16="http://schemas.microsoft.com/office/drawing/2014/main" id="{0A5D724C-B7D8-4852-9A4D-8D2C0A34FFB0}"/>
+                <a16:creationId xmlns:a16="http://schemas.microsoft.com/office/drawing/2014/main" id="{B7A6E2AA-9714-4DE2-9778-EE9C78CE9960}"/>
               </a:ext>
             </a:extLst>
           </p:cNvPr>
@@ -10993,7 +10993,7 @@
           <p:cNvPr id="10" name="">
             <a:extLst xmlns:a="http://schemas.openxmlformats.org/drawingml/2006/main">
               <a:ext uri="{FF2B5EF4-FFF2-40B4-BE49-F238E27FC236}">
-                <a16:creationId xmlns:a16="http://schemas.microsoft.com/office/drawing/2014/main" id="{E0B05AAC-D214-4FD7-A262-8483820A4D80}"/>
+                <a16:creationId xmlns:a16="http://schemas.microsoft.com/office/drawing/2014/main" id="{830C304C-04E3-42A6-9CF9-7756FF09D950}"/>
               </a:ext>
             </a:extLst>
           </p:cNvPr>
@@ -11026,7 +11026,7 @@
           <p:cNvPr id="11" name="">
             <a:extLst xmlns:a="http://schemas.openxmlformats.org/drawingml/2006/main">
               <a:ext uri="{FF2B5EF4-FFF2-40B4-BE49-F238E27FC236}">
-                <a16:creationId xmlns:a16="http://schemas.microsoft.com/office/drawing/2014/main" id="{B4C530B0-21FF-40E6-8054-ECC853C70FA7}"/>
+                <a16:creationId xmlns:a16="http://schemas.microsoft.com/office/drawing/2014/main" id="{927A79FE-DEFA-46D2-A9C4-DAB5E234F8D5}"/>
               </a:ext>
             </a:extLst>
           </p:cNvPr>
@@ -11106,7 +11106,7 @@
           <p:cNvPr id="12" name="">
             <a:extLst xmlns:a="http://schemas.openxmlformats.org/drawingml/2006/main">
               <a:ext uri="{FF2B5EF4-FFF2-40B4-BE49-F238E27FC236}">
-                <a16:creationId xmlns:a16="http://schemas.microsoft.com/office/drawing/2014/main" id="{8C12F330-2426-44C1-B06B-309B001574B6}"/>
+                <a16:creationId xmlns:a16="http://schemas.microsoft.com/office/drawing/2014/main" id="{0375FADF-9DB2-4137-B94C-CE7EAD614531}"/>
               </a:ext>
             </a:extLst>
           </p:cNvPr>
@@ -11139,7 +11139,7 @@
           <p:cNvPr id="13" name="">
             <a:extLst xmlns:a="http://schemas.openxmlformats.org/drawingml/2006/main">
               <a:ext uri="{FF2B5EF4-FFF2-40B4-BE49-F238E27FC236}">
-                <a16:creationId xmlns:a16="http://schemas.microsoft.com/office/drawing/2014/main" id="{69DF921B-F228-4C66-AB14-39959C131970}"/>
+                <a16:creationId xmlns:a16="http://schemas.microsoft.com/office/drawing/2014/main" id="{5DAE7C9D-27FA-4D2E-A16A-C3FCD48D3CCB}"/>
               </a:ext>
             </a:extLst>
           </p:cNvPr>
@@ -11196,7 +11196,7 @@
           <p:cNvPr id="14" name="">
             <a:extLst xmlns:a="http://schemas.openxmlformats.org/drawingml/2006/main">
               <a:ext uri="{FF2B5EF4-FFF2-40B4-BE49-F238E27FC236}">
-                <a16:creationId xmlns:a16="http://schemas.microsoft.com/office/drawing/2014/main" id="{ABEE611C-A255-4729-BCF1-E81A659AE786}"/>
+                <a16:creationId xmlns:a16="http://schemas.microsoft.com/office/drawing/2014/main" id="{EC1F2F72-EA4A-4615-BE37-4180173FF275}"/>
               </a:ext>
             </a:extLst>
           </p:cNvPr>
@@ -11229,7 +11229,7 @@
           <p:cNvPr id="15" name="">
             <a:extLst xmlns:a="http://schemas.openxmlformats.org/drawingml/2006/main">
               <a:ext uri="{FF2B5EF4-FFF2-40B4-BE49-F238E27FC236}">
-                <a16:creationId xmlns:a16="http://schemas.microsoft.com/office/drawing/2014/main" id="{15ED43F4-CD35-4893-B798-02D88CD7BCC9}"/>
+                <a16:creationId xmlns:a16="http://schemas.microsoft.com/office/drawing/2014/main" id="{E81E3650-6267-4F9F-86DE-4154A0931EE8}"/>
               </a:ext>
             </a:extLst>
           </p:cNvPr>
@@ -11286,7 +11286,7 @@
           <p:cNvPr id="16" name="">
             <a:extLst xmlns:a="http://schemas.openxmlformats.org/drawingml/2006/main">
               <a:ext uri="{FF2B5EF4-FFF2-40B4-BE49-F238E27FC236}">
-                <a16:creationId xmlns:a16="http://schemas.microsoft.com/office/drawing/2014/main" id="{F804838F-88F7-41AB-8C68-C90840598364}"/>
+                <a16:creationId xmlns:a16="http://schemas.microsoft.com/office/drawing/2014/main" id="{4F4EBFC4-1FA9-4EA9-9868-B5F4EAC704D6}"/>
               </a:ext>
             </a:extLst>
           </p:cNvPr>
@@ -11319,7 +11319,7 @@
           <p:cNvPr id="17" name="">
             <a:extLst xmlns:a="http://schemas.openxmlformats.org/drawingml/2006/main">
               <a:ext uri="{FF2B5EF4-FFF2-40B4-BE49-F238E27FC236}">
-                <a16:creationId xmlns:a16="http://schemas.microsoft.com/office/drawing/2014/main" id="{392CA472-5553-450F-9004-C4512659FC08}"/>
+                <a16:creationId xmlns:a16="http://schemas.microsoft.com/office/drawing/2014/main" id="{46BA3C68-E642-4C02-8628-3FC2A5D08D55}"/>
               </a:ext>
             </a:extLst>
           </p:cNvPr>
@@ -11480,7 +11480,7 @@
           <p:cNvPr id="22" name="">
             <a:extLst xmlns:a="http://schemas.openxmlformats.org/drawingml/2006/main">
               <a:ext uri="{FF2B5EF4-FFF2-40B4-BE49-F238E27FC236}">
-                <a16:creationId xmlns:a16="http://schemas.microsoft.com/office/drawing/2014/main" id="{18ECDD37-10F2-4FEA-8BBB-6EB450F5FE56}"/>
+                <a16:creationId xmlns:a16="http://schemas.microsoft.com/office/drawing/2014/main" id="{F336C7B0-2E36-4DF8-B547-CB48955357E8}"/>
               </a:ext>
             </a:extLst>
           </p:cNvPr>
@@ -11560,7 +11560,7 @@
           <p:cNvPr id="23" name="">
             <a:extLst xmlns:a="http://schemas.openxmlformats.org/drawingml/2006/main">
               <a:ext uri="{FF2B5EF4-FFF2-40B4-BE49-F238E27FC236}">
-                <a16:creationId xmlns:a16="http://schemas.microsoft.com/office/drawing/2014/main" id="{7FE929C3-C58B-46B5-9B95-D190092C3D1E}"/>
+                <a16:creationId xmlns:a16="http://schemas.microsoft.com/office/drawing/2014/main" id="{183DDEDD-4F83-4549-9A43-5E8F10FCDB23}"/>
               </a:ext>
             </a:extLst>
           </p:cNvPr>
@@ -11591,7 +11591,7 @@
           <p:cNvPr id="24" name="">
             <a:extLst xmlns:a="http://schemas.openxmlformats.org/drawingml/2006/main">
               <a:ext uri="{FF2B5EF4-FFF2-40B4-BE49-F238E27FC236}">
-                <a16:creationId xmlns:a16="http://schemas.microsoft.com/office/drawing/2014/main" id="{C7CC1C1F-FAB9-4C7C-B192-49F26F2F7094}"/>
+                <a16:creationId xmlns:a16="http://schemas.microsoft.com/office/drawing/2014/main" id="{7C9F84D3-9820-462F-9DA6-5FF1D7BB70B3}"/>
               </a:ext>
             </a:extLst>
           </p:cNvPr>
@@ -11648,7 +11648,7 @@
           <p:cNvPr id="25" name="">
             <a:extLst xmlns:a="http://schemas.openxmlformats.org/drawingml/2006/main">
               <a:ext uri="{FF2B5EF4-FFF2-40B4-BE49-F238E27FC236}">
-                <a16:creationId xmlns:a16="http://schemas.microsoft.com/office/drawing/2014/main" id="{58CB6FF0-3AE2-4830-B643-C83D2BACAA05}"/>
+                <a16:creationId xmlns:a16="http://schemas.microsoft.com/office/drawing/2014/main" id="{A2E380D9-9C1E-44B0-9951-23FC0D02D1E7}"/>
               </a:ext>
             </a:extLst>
           </p:cNvPr>
@@ -11705,7 +11705,7 @@
           <p:cNvPr id="26" name="">
             <a:extLst xmlns:a="http://schemas.openxmlformats.org/drawingml/2006/main">
               <a:ext uri="{FF2B5EF4-FFF2-40B4-BE49-F238E27FC236}">
-                <a16:creationId xmlns:a16="http://schemas.microsoft.com/office/drawing/2014/main" id="{62F6ED21-F568-4D3E-B82A-F848695940B2}"/>
+                <a16:creationId xmlns:a16="http://schemas.microsoft.com/office/drawing/2014/main" id="{A74301B7-B76E-4962-8D2C-589ABFAB7A56}"/>
               </a:ext>
             </a:extLst>
           </p:cNvPr>
@@ -11762,7 +11762,7 @@
           <p:cNvPr id="27" name="">
             <a:extLst xmlns:a="http://schemas.openxmlformats.org/drawingml/2006/main">
               <a:ext uri="{FF2B5EF4-FFF2-40B4-BE49-F238E27FC236}">
-                <a16:creationId xmlns:a16="http://schemas.microsoft.com/office/drawing/2014/main" id="{C882ECB0-0071-47CF-A2A2-A514A2B887DE}"/>
+                <a16:creationId xmlns:a16="http://schemas.microsoft.com/office/drawing/2014/main" id="{A6865D0B-0851-4352-A8BA-A9347028492F}"/>
               </a:ext>
             </a:extLst>
           </p:cNvPr>
@@ -11819,7 +11819,7 @@
           <p:cNvPr id="28" name="">
             <a:extLst xmlns:a="http://schemas.openxmlformats.org/drawingml/2006/main">
               <a:ext uri="{FF2B5EF4-FFF2-40B4-BE49-F238E27FC236}">
-                <a16:creationId xmlns:a16="http://schemas.microsoft.com/office/drawing/2014/main" id="{A73E9687-2D0E-49A3-8FEE-BB525FC341F3}"/>
+                <a16:creationId xmlns:a16="http://schemas.microsoft.com/office/drawing/2014/main" id="{656DA926-3D6A-489C-A21F-627560A27F62}"/>
               </a:ext>
             </a:extLst>
           </p:cNvPr>
@@ -11874,7 +11874,7 @@
     </p:spTree>
     <p:extLst>
       <p:ext uri="{BB962C8B-B14F-4D97-AF65-F5344CB8AC3E}">
-        <p14:creationId xmlns:p14="http://schemas.microsoft.com/office/powerpoint/2010/main" val="1550109051"/>
+        <p14:creationId xmlns:p14="http://schemas.microsoft.com/office/powerpoint/2010/main" val="1721697551"/>
       </p:ext>
     </p:extLst>
   </p:cSld>
@@ -11905,7 +11905,7 @@
           <p:cNvPr id="21" name="">
             <a:extLst xmlns:a="http://schemas.openxmlformats.org/drawingml/2006/main">
               <a:ext uri="{FF2B5EF4-FFF2-40B4-BE49-F238E27FC236}">
-                <a16:creationId xmlns:a16="http://schemas.microsoft.com/office/drawing/2014/main" id="{DE033112-3C7A-43E3-9827-4592F7CF6C66}"/>
+                <a16:creationId xmlns:a16="http://schemas.microsoft.com/office/drawing/2014/main" id="{7AF852BF-76C3-40B7-B9F3-BF3EB82BF827}"/>
               </a:ext>
             </a:extLst>
           </p:cNvPr>
@@ -11962,7 +11962,7 @@
           <p:cNvPr id="2" name="">
             <a:extLst xmlns:a="http://schemas.openxmlformats.org/drawingml/2006/main">
               <a:ext uri="{FF2B5EF4-FFF2-40B4-BE49-F238E27FC236}">
-                <a16:creationId xmlns:a16="http://schemas.microsoft.com/office/drawing/2014/main" id="{5F0D7836-47D8-4233-B8A6-9D502DE17A60}"/>
+                <a16:creationId xmlns:a16="http://schemas.microsoft.com/office/drawing/2014/main" id="{AB718000-F77A-4F9A-A364-173246918F6A}"/>
               </a:ext>
             </a:extLst>
           </p:cNvPr>
@@ -11993,7 +11993,7 @@
           <p:cNvPr id="3" name="">
             <a:extLst xmlns:a="http://schemas.openxmlformats.org/drawingml/2006/main">
               <a:ext uri="{FF2B5EF4-FFF2-40B4-BE49-F238E27FC236}">
-                <a16:creationId xmlns:a16="http://schemas.microsoft.com/office/drawing/2014/main" id="{8D9EFBD3-3FEC-4A0C-88E9-DE6FB13508DF}"/>
+                <a16:creationId xmlns:a16="http://schemas.microsoft.com/office/drawing/2014/main" id="{1CA55506-499B-49BC-BDE7-506B7FCF1F31}"/>
               </a:ext>
             </a:extLst>
           </p:cNvPr>
@@ -12050,7 +12050,7 @@
           <p:cNvPr id="4" name="">
             <a:extLst xmlns:a="http://schemas.openxmlformats.org/drawingml/2006/main">
               <a:ext uri="{FF2B5EF4-FFF2-40B4-BE49-F238E27FC236}">
-                <a16:creationId xmlns:a16="http://schemas.microsoft.com/office/drawing/2014/main" id="{7A7C8041-08FE-45A3-B8D0-5C94A7959A66}"/>
+                <a16:creationId xmlns:a16="http://schemas.microsoft.com/office/drawing/2014/main" id="{AD436F22-B7CD-4CA5-86BE-80A01F1AB69B}"/>
               </a:ext>
             </a:extLst>
           </p:cNvPr>
@@ -12083,7 +12083,7 @@
           <p:cNvPr id="5" name="">
             <a:extLst xmlns:a="http://schemas.openxmlformats.org/drawingml/2006/main">
               <a:ext uri="{FF2B5EF4-FFF2-40B4-BE49-F238E27FC236}">
-                <a16:creationId xmlns:a16="http://schemas.microsoft.com/office/drawing/2014/main" id="{0E43EDB9-A656-42C1-A063-AD1935ED168E}"/>
+                <a16:creationId xmlns:a16="http://schemas.microsoft.com/office/drawing/2014/main" id="{93230E2B-138E-4716-A1C0-1AF62E6F995F}"/>
               </a:ext>
             </a:extLst>
           </p:cNvPr>
@@ -12140,7 +12140,7 @@
           <p:cNvPr id="6" name="">
             <a:extLst xmlns:a="http://schemas.openxmlformats.org/drawingml/2006/main">
               <a:ext uri="{FF2B5EF4-FFF2-40B4-BE49-F238E27FC236}">
-                <a16:creationId xmlns:a16="http://schemas.microsoft.com/office/drawing/2014/main" id="{EF1602FA-DB4A-414C-893C-27F35968B838}"/>
+                <a16:creationId xmlns:a16="http://schemas.microsoft.com/office/drawing/2014/main" id="{087A8CA3-A445-434D-996A-E3B5FC4C9A24}"/>
               </a:ext>
             </a:extLst>
           </p:cNvPr>
@@ -12220,7 +12220,7 @@
           <p:cNvPr id="7" name="">
             <a:extLst xmlns:a="http://schemas.openxmlformats.org/drawingml/2006/main">
               <a:ext uri="{FF2B5EF4-FFF2-40B4-BE49-F238E27FC236}">
-                <a16:creationId xmlns:a16="http://schemas.microsoft.com/office/drawing/2014/main" id="{34C5944D-5757-48E0-BA73-8E01C39CA0C1}"/>
+                <a16:creationId xmlns:a16="http://schemas.microsoft.com/office/drawing/2014/main" id="{752775E0-E6DB-46E7-B461-FAC4CBC24899}"/>
               </a:ext>
             </a:extLst>
           </p:cNvPr>
@@ -12300,7 +12300,7 @@
           <p:cNvPr id="8" name="">
             <a:extLst xmlns:a="http://schemas.openxmlformats.org/drawingml/2006/main">
               <a:ext uri="{FF2B5EF4-FFF2-40B4-BE49-F238E27FC236}">
-                <a16:creationId xmlns:a16="http://schemas.microsoft.com/office/drawing/2014/main" id="{B53C4119-F5D2-4AFD-A4B7-43C277A02AA5}"/>
+                <a16:creationId xmlns:a16="http://schemas.microsoft.com/office/drawing/2014/main" id="{EFD652D9-EC25-4F79-8FA7-886A260EE4EC}"/>
               </a:ext>
             </a:extLst>
           </p:cNvPr>
@@ -12333,7 +12333,7 @@
           <p:cNvPr id="9" name="">
             <a:extLst xmlns:a="http://schemas.openxmlformats.org/drawingml/2006/main">
               <a:ext uri="{FF2B5EF4-FFF2-40B4-BE49-F238E27FC236}">
-                <a16:creationId xmlns:a16="http://schemas.microsoft.com/office/drawing/2014/main" id="{A85796E5-7B34-4A1A-85BD-829BF554828C}"/>
+                <a16:creationId xmlns:a16="http://schemas.microsoft.com/office/drawing/2014/main" id="{5A9669CD-1B08-4E9F-938A-86E2BDAF0E4D}"/>
               </a:ext>
             </a:extLst>
           </p:cNvPr>
@@ -12390,7 +12390,7 @@
           <p:cNvPr id="10" name="">
             <a:extLst xmlns:a="http://schemas.openxmlformats.org/drawingml/2006/main">
               <a:ext uri="{FF2B5EF4-FFF2-40B4-BE49-F238E27FC236}">
-                <a16:creationId xmlns:a16="http://schemas.microsoft.com/office/drawing/2014/main" id="{0F190094-0610-4737-873C-3339F3B2738C}"/>
+                <a16:creationId xmlns:a16="http://schemas.microsoft.com/office/drawing/2014/main" id="{3FDF0F87-FB79-40ED-86DD-F2B8D20A8C0C}"/>
               </a:ext>
             </a:extLst>
           </p:cNvPr>
@@ -12470,7 +12470,7 @@
           <p:cNvPr id="11" name="">
             <a:extLst xmlns:a="http://schemas.openxmlformats.org/drawingml/2006/main">
               <a:ext uri="{FF2B5EF4-FFF2-40B4-BE49-F238E27FC236}">
-                <a16:creationId xmlns:a16="http://schemas.microsoft.com/office/drawing/2014/main" id="{75E82139-9678-4223-B1D6-19EFF813DB49}"/>
+                <a16:creationId xmlns:a16="http://schemas.microsoft.com/office/drawing/2014/main" id="{B21DE06D-52AC-4B80-92FC-E5B941D00763}"/>
               </a:ext>
             </a:extLst>
           </p:cNvPr>
@@ -12550,7 +12550,7 @@
           <p:cNvPr id="12" name="">
             <a:extLst xmlns:a="http://schemas.openxmlformats.org/drawingml/2006/main">
               <a:ext uri="{FF2B5EF4-FFF2-40B4-BE49-F238E27FC236}">
-                <a16:creationId xmlns:a16="http://schemas.microsoft.com/office/drawing/2014/main" id="{1B6D9C15-EC28-46DD-8B67-6F6C740A4065}"/>
+                <a16:creationId xmlns:a16="http://schemas.microsoft.com/office/drawing/2014/main" id="{F124211B-5FC6-48F1-B9EA-F6FC8F2FB653}"/>
               </a:ext>
             </a:extLst>
           </p:cNvPr>
@@ -12583,7 +12583,7 @@
           <p:cNvPr id="13" name="">
             <a:extLst xmlns:a="http://schemas.openxmlformats.org/drawingml/2006/main">
               <a:ext uri="{FF2B5EF4-FFF2-40B4-BE49-F238E27FC236}">
-                <a16:creationId xmlns:a16="http://schemas.microsoft.com/office/drawing/2014/main" id="{099B6859-613B-4101-BFB7-8DCBF0A422B5}"/>
+                <a16:creationId xmlns:a16="http://schemas.microsoft.com/office/drawing/2014/main" id="{EA9CC15B-C3C9-410B-9C7C-37F4D93BE55E}"/>
               </a:ext>
             </a:extLst>
           </p:cNvPr>
@@ -12640,7 +12640,7 @@
           <p:cNvPr id="14" name="">
             <a:extLst xmlns:a="http://schemas.openxmlformats.org/drawingml/2006/main">
               <a:ext uri="{FF2B5EF4-FFF2-40B4-BE49-F238E27FC236}">
-                <a16:creationId xmlns:a16="http://schemas.microsoft.com/office/drawing/2014/main" id="{84391AB0-F7F4-4832-9EB2-C71F0EEE77B3}"/>
+                <a16:creationId xmlns:a16="http://schemas.microsoft.com/office/drawing/2014/main" id="{1199F32D-11B2-4375-A3FB-6930F12ED297}"/>
               </a:ext>
             </a:extLst>
           </p:cNvPr>
@@ -12720,7 +12720,7 @@
           <p:cNvPr id="15" name="">
             <a:extLst xmlns:a="http://schemas.openxmlformats.org/drawingml/2006/main">
               <a:ext uri="{FF2B5EF4-FFF2-40B4-BE49-F238E27FC236}">
-                <a16:creationId xmlns:a16="http://schemas.microsoft.com/office/drawing/2014/main" id="{E0D47555-F8D7-4F8B-B6AC-B12BC8D82630}"/>
+                <a16:creationId xmlns:a16="http://schemas.microsoft.com/office/drawing/2014/main" id="{A6C7D07A-5B19-40B2-8589-8A8E718B8C33}"/>
               </a:ext>
             </a:extLst>
           </p:cNvPr>
@@ -12852,7 +12852,7 @@
           <p:cNvPr id="18" name="">
             <a:extLst xmlns:a="http://schemas.openxmlformats.org/drawingml/2006/main">
               <a:ext uri="{FF2B5EF4-FFF2-40B4-BE49-F238E27FC236}">
-                <a16:creationId xmlns:a16="http://schemas.microsoft.com/office/drawing/2014/main" id="{93C6EB63-D89F-4092-BDBE-00D693CFFBEB}"/>
+                <a16:creationId xmlns:a16="http://schemas.microsoft.com/office/drawing/2014/main" id="{AB7E44A8-82E3-4B99-B49D-CF8EE63EA603}"/>
               </a:ext>
             </a:extLst>
           </p:cNvPr>
@@ -12909,7 +12909,7 @@
           <p:cNvPr id="19" name="">
             <a:extLst xmlns:a="http://schemas.openxmlformats.org/drawingml/2006/main">
               <a:ext uri="{FF2B5EF4-FFF2-40B4-BE49-F238E27FC236}">
-                <a16:creationId xmlns:a16="http://schemas.microsoft.com/office/drawing/2014/main" id="{5BA062DC-61E0-471C-B43C-39A11F3D29D2}"/>
+                <a16:creationId xmlns:a16="http://schemas.microsoft.com/office/drawing/2014/main" id="{19915A6F-5B75-4D05-AD64-FC6E75C69843}"/>
               </a:ext>
             </a:extLst>
           </p:cNvPr>
@@ -12940,7 +12940,7 @@
           <p:cNvPr id="20" name="">
             <a:extLst xmlns:a="http://schemas.openxmlformats.org/drawingml/2006/main">
               <a:ext uri="{FF2B5EF4-FFF2-40B4-BE49-F238E27FC236}">
-                <a16:creationId xmlns:a16="http://schemas.microsoft.com/office/drawing/2014/main" id="{A409BB5E-2400-43D3-A42C-1BAD64FF03D4}"/>
+                <a16:creationId xmlns:a16="http://schemas.microsoft.com/office/drawing/2014/main" id="{FDE14539-4867-4DF5-AF48-AE1F0C6201EE}"/>
               </a:ext>
             </a:extLst>
           </p:cNvPr>
@@ -12995,7 +12995,7 @@
     </p:spTree>
     <p:extLst>
       <p:ext uri="{BB962C8B-B14F-4D97-AF65-F5344CB8AC3E}">
-        <p14:creationId xmlns:p14="http://schemas.microsoft.com/office/powerpoint/2010/main" val="1656091984"/>
+        <p14:creationId xmlns:p14="http://schemas.microsoft.com/office/powerpoint/2010/main" val="1945937959"/>
       </p:ext>
     </p:extLst>
   </p:cSld>
@@ -13026,7 +13026,7 @@
           <p:cNvPr id="68" name="">
             <a:extLst xmlns:a="http://schemas.openxmlformats.org/drawingml/2006/main">
               <a:ext uri="{FF2B5EF4-FFF2-40B4-BE49-F238E27FC236}">
-                <a16:creationId xmlns:a16="http://schemas.microsoft.com/office/drawing/2014/main" id="{1913ED2E-0AD9-4C99-8110-FB3BBD179D85}"/>
+                <a16:creationId xmlns:a16="http://schemas.microsoft.com/office/drawing/2014/main" id="{F12EE687-DE19-4012-9D5E-04DCAC87C3AA}"/>
               </a:ext>
             </a:extLst>
           </p:cNvPr>
@@ -13083,7 +13083,7 @@
           <p:cNvPr id="2" name="">
             <a:extLst xmlns:a="http://schemas.openxmlformats.org/drawingml/2006/main">
               <a:ext uri="{FF2B5EF4-FFF2-40B4-BE49-F238E27FC236}">
-                <a16:creationId xmlns:a16="http://schemas.microsoft.com/office/drawing/2014/main" id="{B58B15BB-F573-424C-B856-17411AE9B688}"/>
+                <a16:creationId xmlns:a16="http://schemas.microsoft.com/office/drawing/2014/main" id="{1C27A661-1173-4EAC-9C5F-81813B34CD0F}"/>
               </a:ext>
             </a:extLst>
           </p:cNvPr>
@@ -13114,7 +13114,7 @@
           <p:cNvPr id="3" name="">
             <a:extLst xmlns:a="http://schemas.openxmlformats.org/drawingml/2006/main">
               <a:ext uri="{FF2B5EF4-FFF2-40B4-BE49-F238E27FC236}">
-                <a16:creationId xmlns:a16="http://schemas.microsoft.com/office/drawing/2014/main" id="{3095BF39-B303-46F2-BDDE-13B2DB62BE79}"/>
+                <a16:creationId xmlns:a16="http://schemas.microsoft.com/office/drawing/2014/main" id="{D42A408C-FF57-4803-8945-381FEB551F0D}"/>
               </a:ext>
             </a:extLst>
           </p:cNvPr>
@@ -13171,7 +13171,7 @@
           <p:cNvPr id="4" name="">
             <a:extLst xmlns:a="http://schemas.openxmlformats.org/drawingml/2006/main">
               <a:ext uri="{FF2B5EF4-FFF2-40B4-BE49-F238E27FC236}">
-                <a16:creationId xmlns:a16="http://schemas.microsoft.com/office/drawing/2014/main" id="{725A6844-6B4E-4B0C-B337-EAA812BE8493}"/>
+                <a16:creationId xmlns:a16="http://schemas.microsoft.com/office/drawing/2014/main" id="{2CE622F4-1B6A-4139-8894-A032B08D3692}"/>
               </a:ext>
             </a:extLst>
           </p:cNvPr>
@@ -13228,7 +13228,7 @@
           <p:cNvPr id="5" name="">
             <a:extLst xmlns:a="http://schemas.openxmlformats.org/drawingml/2006/main">
               <a:ext uri="{FF2B5EF4-FFF2-40B4-BE49-F238E27FC236}">
-                <a16:creationId xmlns:a16="http://schemas.microsoft.com/office/drawing/2014/main" id="{14052F29-8471-4E97-B878-2DA1F030ADAF}"/>
+                <a16:creationId xmlns:a16="http://schemas.microsoft.com/office/drawing/2014/main" id="{E4D567F8-B367-4219-9E12-D46D74137B08}"/>
               </a:ext>
             </a:extLst>
           </p:cNvPr>
@@ -13261,7 +13261,7 @@
           <p:cNvPr id="6" name="">
             <a:extLst xmlns:a="http://schemas.openxmlformats.org/drawingml/2006/main">
               <a:ext uri="{FF2B5EF4-FFF2-40B4-BE49-F238E27FC236}">
-                <a16:creationId xmlns:a16="http://schemas.microsoft.com/office/drawing/2014/main" id="{54608C64-A709-4E82-8373-868B62B758FD}"/>
+                <a16:creationId xmlns:a16="http://schemas.microsoft.com/office/drawing/2014/main" id="{707B1235-B684-44E7-ADA0-FA1868C6EA82}"/>
               </a:ext>
             </a:extLst>
           </p:cNvPr>
@@ -13318,7 +13318,7 @@
           <p:cNvPr id="7" name="">
             <a:extLst xmlns:a="http://schemas.openxmlformats.org/drawingml/2006/main">
               <a:ext uri="{FF2B5EF4-FFF2-40B4-BE49-F238E27FC236}">
-                <a16:creationId xmlns:a16="http://schemas.microsoft.com/office/drawing/2014/main" id="{3365E7DE-65ED-4E5D-8CCB-8BC0C5C1C1D5}"/>
+                <a16:creationId xmlns:a16="http://schemas.microsoft.com/office/drawing/2014/main" id="{280BB6E6-FD27-48BD-A8B0-943717A9DD4B}"/>
               </a:ext>
             </a:extLst>
           </p:cNvPr>
@@ -13351,7 +13351,7 @@
           <p:cNvPr id="8" name="">
             <a:extLst xmlns:a="http://schemas.openxmlformats.org/drawingml/2006/main">
               <a:ext uri="{FF2B5EF4-FFF2-40B4-BE49-F238E27FC236}">
-                <a16:creationId xmlns:a16="http://schemas.microsoft.com/office/drawing/2014/main" id="{1EDEB91A-4FF8-4EB4-BB4E-1425A150E0B3}"/>
+                <a16:creationId xmlns:a16="http://schemas.microsoft.com/office/drawing/2014/main" id="{8749EEAE-F6BB-4F4C-AF42-6E5FE4BE511D}"/>
               </a:ext>
             </a:extLst>
           </p:cNvPr>
@@ -13408,7 +13408,7 @@
           <p:cNvPr id="9" name="">
             <a:extLst xmlns:a="http://schemas.openxmlformats.org/drawingml/2006/main">
               <a:ext uri="{FF2B5EF4-FFF2-40B4-BE49-F238E27FC236}">
-                <a16:creationId xmlns:a16="http://schemas.microsoft.com/office/drawing/2014/main" id="{9F02B6DB-4CDD-4FAA-AD8F-2B7D78CFEC47}"/>
+                <a16:creationId xmlns:a16="http://schemas.microsoft.com/office/drawing/2014/main" id="{1AB82AD0-D146-446D-89A6-E992A1AECEFF}"/>
               </a:ext>
             </a:extLst>
           </p:cNvPr>
@@ -13441,7 +13441,7 @@
           <p:cNvPr id="10" name="">
             <a:extLst xmlns:a="http://schemas.openxmlformats.org/drawingml/2006/main">
               <a:ext uri="{FF2B5EF4-FFF2-40B4-BE49-F238E27FC236}">
-                <a16:creationId xmlns:a16="http://schemas.microsoft.com/office/drawing/2014/main" id="{89727570-273D-444E-BA72-1D47D3CB0AA1}"/>
+                <a16:creationId xmlns:a16="http://schemas.microsoft.com/office/drawing/2014/main" id="{DD9AF558-1EE1-4DE6-AE06-4767A2EEBFFA}"/>
               </a:ext>
             </a:extLst>
           </p:cNvPr>
@@ -13498,7 +13498,7 @@
           <p:cNvPr id="11" name="">
             <a:extLst xmlns:a="http://schemas.openxmlformats.org/drawingml/2006/main">
               <a:ext uri="{FF2B5EF4-FFF2-40B4-BE49-F238E27FC236}">
-                <a16:creationId xmlns:a16="http://schemas.microsoft.com/office/drawing/2014/main" id="{833409B2-C186-473D-900E-25A06BB5758B}"/>
+                <a16:creationId xmlns:a16="http://schemas.microsoft.com/office/drawing/2014/main" id="{411749EC-0027-4CB4-AD9D-C33289AAF1A7}"/>
               </a:ext>
             </a:extLst>
           </p:cNvPr>
@@ -13531,7 +13531,7 @@
           <p:cNvPr id="12" name="">
             <a:extLst xmlns:a="http://schemas.openxmlformats.org/drawingml/2006/main">
               <a:ext uri="{FF2B5EF4-FFF2-40B4-BE49-F238E27FC236}">
-                <a16:creationId xmlns:a16="http://schemas.microsoft.com/office/drawing/2014/main" id="{75A14A41-584D-449D-9D89-96EE28DAD569}"/>
+                <a16:creationId xmlns:a16="http://schemas.microsoft.com/office/drawing/2014/main" id="{BDDF17DE-4501-4550-81B4-22DDC47BA336}"/>
               </a:ext>
             </a:extLst>
           </p:cNvPr>
@@ -13588,7 +13588,7 @@
           <p:cNvPr id="13" name="">
             <a:extLst xmlns:a="http://schemas.openxmlformats.org/drawingml/2006/main">
               <a:ext uri="{FF2B5EF4-FFF2-40B4-BE49-F238E27FC236}">
-                <a16:creationId xmlns:a16="http://schemas.microsoft.com/office/drawing/2014/main" id="{AB121FE7-E7ED-4265-9BB8-516AB2E9A5AB}"/>
+                <a16:creationId xmlns:a16="http://schemas.microsoft.com/office/drawing/2014/main" id="{13776791-E772-41F2-A19C-8354C512025C}"/>
               </a:ext>
             </a:extLst>
           </p:cNvPr>
@@ -13621,7 +13621,7 @@
           <p:cNvPr id="14" name="">
             <a:extLst xmlns:a="http://schemas.openxmlformats.org/drawingml/2006/main">
               <a:ext uri="{FF2B5EF4-FFF2-40B4-BE49-F238E27FC236}">
-                <a16:creationId xmlns:a16="http://schemas.microsoft.com/office/drawing/2014/main" id="{AE016385-23CD-4C87-80D7-B094F874438F}"/>
+                <a16:creationId xmlns:a16="http://schemas.microsoft.com/office/drawing/2014/main" id="{978B8E39-6068-4B0F-A5CB-E8E46A5D9314}"/>
               </a:ext>
             </a:extLst>
           </p:cNvPr>
@@ -13678,7 +13678,7 @@
           <p:cNvPr id="15" name="">
             <a:extLst xmlns:a="http://schemas.openxmlformats.org/drawingml/2006/main">
               <a:ext uri="{FF2B5EF4-FFF2-40B4-BE49-F238E27FC236}">
-                <a16:creationId xmlns:a16="http://schemas.microsoft.com/office/drawing/2014/main" id="{445AB976-19EA-4D46-AECB-A54A3B391301}"/>
+                <a16:creationId xmlns:a16="http://schemas.microsoft.com/office/drawing/2014/main" id="{A93BC465-5F8C-469B-9AB0-E370A6D3E079}"/>
               </a:ext>
             </a:extLst>
           </p:cNvPr>
@@ -13711,7 +13711,7 @@
           <p:cNvPr id="16" name="">
             <a:extLst xmlns:a="http://schemas.openxmlformats.org/drawingml/2006/main">
               <a:ext uri="{FF2B5EF4-FFF2-40B4-BE49-F238E27FC236}">
-                <a16:creationId xmlns:a16="http://schemas.microsoft.com/office/drawing/2014/main" id="{133A87CC-D03C-44AF-BA46-8B008A49A3E5}"/>
+                <a16:creationId xmlns:a16="http://schemas.microsoft.com/office/drawing/2014/main" id="{B208297E-0740-46CF-81A0-20AC4BB690C1}"/>
               </a:ext>
             </a:extLst>
           </p:cNvPr>
@@ -13768,7 +13768,7 @@
           <p:cNvPr id="17" name="">
             <a:extLst xmlns:a="http://schemas.openxmlformats.org/drawingml/2006/main">
               <a:ext uri="{FF2B5EF4-FFF2-40B4-BE49-F238E27FC236}">
-                <a16:creationId xmlns:a16="http://schemas.microsoft.com/office/drawing/2014/main" id="{F8E127E7-1D7F-417F-BA10-86A3EE610AE9}"/>
+                <a16:creationId xmlns:a16="http://schemas.microsoft.com/office/drawing/2014/main" id="{F279F7B8-5C48-4298-86C3-00E5AC5FD2A1}"/>
               </a:ext>
             </a:extLst>
           </p:cNvPr>
@@ -13801,7 +13801,7 @@
           <p:cNvPr id="18" name="">
             <a:extLst xmlns:a="http://schemas.openxmlformats.org/drawingml/2006/main">
               <a:ext uri="{FF2B5EF4-FFF2-40B4-BE49-F238E27FC236}">
-                <a16:creationId xmlns:a16="http://schemas.microsoft.com/office/drawing/2014/main" id="{A7042447-7482-4ACD-8E9A-34975832E80B}"/>
+                <a16:creationId xmlns:a16="http://schemas.microsoft.com/office/drawing/2014/main" id="{A6E8FEA1-55AC-46BF-891B-A8754350AE70}"/>
               </a:ext>
             </a:extLst>
           </p:cNvPr>
@@ -13858,7 +13858,7 @@
           <p:cNvPr id="19" name="">
             <a:extLst xmlns:a="http://schemas.openxmlformats.org/drawingml/2006/main">
               <a:ext uri="{FF2B5EF4-FFF2-40B4-BE49-F238E27FC236}">
-                <a16:creationId xmlns:a16="http://schemas.microsoft.com/office/drawing/2014/main" id="{9A47BAD7-6B33-4F00-BF67-4CC58B376ADA}"/>
+                <a16:creationId xmlns:a16="http://schemas.microsoft.com/office/drawing/2014/main" id="{9020EE07-378D-4BC4-AB92-1770F871D427}"/>
               </a:ext>
             </a:extLst>
           </p:cNvPr>
@@ -13891,7 +13891,7 @@
           <p:cNvPr id="20" name="">
             <a:extLst xmlns:a="http://schemas.openxmlformats.org/drawingml/2006/main">
               <a:ext uri="{FF2B5EF4-FFF2-40B4-BE49-F238E27FC236}">
-                <a16:creationId xmlns:a16="http://schemas.microsoft.com/office/drawing/2014/main" id="{EB1D03BE-956E-4BAD-9946-A37BE08CA022}"/>
+                <a16:creationId xmlns:a16="http://schemas.microsoft.com/office/drawing/2014/main" id="{48944531-E9B6-40C1-88EB-37370E71148A}"/>
               </a:ext>
             </a:extLst>
           </p:cNvPr>
@@ -13948,7 +13948,7 @@
           <p:cNvPr id="21" name="">
             <a:extLst xmlns:a="http://schemas.openxmlformats.org/drawingml/2006/main">
               <a:ext uri="{FF2B5EF4-FFF2-40B4-BE49-F238E27FC236}">
-                <a16:creationId xmlns:a16="http://schemas.microsoft.com/office/drawing/2014/main" id="{71771346-36A0-4E31-8B59-F68EBA9F7549}"/>
+                <a16:creationId xmlns:a16="http://schemas.microsoft.com/office/drawing/2014/main" id="{D81F7B4E-3FBA-433A-A622-7CAE60CC6CD9}"/>
               </a:ext>
             </a:extLst>
           </p:cNvPr>
@@ -13979,7 +13979,7 @@
           <p:cNvPr id="22" name="">
             <a:extLst xmlns:a="http://schemas.openxmlformats.org/drawingml/2006/main">
               <a:ext uri="{FF2B5EF4-FFF2-40B4-BE49-F238E27FC236}">
-                <a16:creationId xmlns:a16="http://schemas.microsoft.com/office/drawing/2014/main" id="{BC59BCD3-58CB-4C24-8F13-99B0986A9F72}"/>
+                <a16:creationId xmlns:a16="http://schemas.microsoft.com/office/drawing/2014/main" id="{D4B3EF31-BECA-47E6-AE18-E913905702A0}"/>
               </a:ext>
             </a:extLst>
           </p:cNvPr>
@@ -14010,7 +14010,7 @@
           <p:cNvPr id="23" name="">
             <a:extLst xmlns:a="http://schemas.openxmlformats.org/drawingml/2006/main">
               <a:ext uri="{FF2B5EF4-FFF2-40B4-BE49-F238E27FC236}">
-                <a16:creationId xmlns:a16="http://schemas.microsoft.com/office/drawing/2014/main" id="{7B0C9FFF-A065-4178-9C1A-C695DA9711F3}"/>
+                <a16:creationId xmlns:a16="http://schemas.microsoft.com/office/drawing/2014/main" id="{F63581AF-C4B7-47B6-B5D8-24A33D4A8F3F}"/>
               </a:ext>
             </a:extLst>
           </p:cNvPr>
@@ -14041,7 +14041,7 @@
           <p:cNvPr id="24" name="">
             <a:extLst xmlns:a="http://schemas.openxmlformats.org/drawingml/2006/main">
               <a:ext uri="{FF2B5EF4-FFF2-40B4-BE49-F238E27FC236}">
-                <a16:creationId xmlns:a16="http://schemas.microsoft.com/office/drawing/2014/main" id="{8B0E28B4-D87C-4015-86F3-686CF166D180}"/>
+                <a16:creationId xmlns:a16="http://schemas.microsoft.com/office/drawing/2014/main" id="{CC4B9928-BA8F-46A1-978A-45E4130DEFB4}"/>
               </a:ext>
             </a:extLst>
           </p:cNvPr>
@@ -14072,7 +14072,7 @@
           <p:cNvPr id="25" name="">
             <a:extLst xmlns:a="http://schemas.openxmlformats.org/drawingml/2006/main">
               <a:ext uri="{FF2B5EF4-FFF2-40B4-BE49-F238E27FC236}">
-                <a16:creationId xmlns:a16="http://schemas.microsoft.com/office/drawing/2014/main" id="{433F1502-4332-4430-A8CB-4098D3E29A2F}"/>
+                <a16:creationId xmlns:a16="http://schemas.microsoft.com/office/drawing/2014/main" id="{1AB45130-7E6F-4687-83E2-376CF068D4E3}"/>
               </a:ext>
             </a:extLst>
           </p:cNvPr>
@@ -14103,7 +14103,7 @@
           <p:cNvPr id="26" name="">
             <a:extLst xmlns:a="http://schemas.openxmlformats.org/drawingml/2006/main">
               <a:ext uri="{FF2B5EF4-FFF2-40B4-BE49-F238E27FC236}">
-                <a16:creationId xmlns:a16="http://schemas.microsoft.com/office/drawing/2014/main" id="{01039AC8-AE80-48C1-BC92-FA1F676B4F8C}"/>
+                <a16:creationId xmlns:a16="http://schemas.microsoft.com/office/drawing/2014/main" id="{EAE418B6-B19F-41A1-9971-19B468E78019}"/>
               </a:ext>
             </a:extLst>
           </p:cNvPr>
@@ -14134,7 +14134,7 @@
           <p:cNvPr id="27" name="">
             <a:extLst xmlns:a="http://schemas.openxmlformats.org/drawingml/2006/main">
               <a:ext uri="{FF2B5EF4-FFF2-40B4-BE49-F238E27FC236}">
-                <a16:creationId xmlns:a16="http://schemas.microsoft.com/office/drawing/2014/main" id="{DC106461-F5A1-43D1-912C-29B98F8D390D}"/>
+                <a16:creationId xmlns:a16="http://schemas.microsoft.com/office/drawing/2014/main" id="{2E621272-89CE-4CA9-B3D2-2B98E5FB6C1F}"/>
               </a:ext>
             </a:extLst>
           </p:cNvPr>
@@ -14165,7 +14165,7 @@
           <p:cNvPr id="28" name="">
             <a:extLst xmlns:a="http://schemas.openxmlformats.org/drawingml/2006/main">
               <a:ext uri="{FF2B5EF4-FFF2-40B4-BE49-F238E27FC236}">
-                <a16:creationId xmlns:a16="http://schemas.microsoft.com/office/drawing/2014/main" id="{3D0CE3C6-7BC0-4BFB-B009-AA1B7E296B6F}"/>
+                <a16:creationId xmlns:a16="http://schemas.microsoft.com/office/drawing/2014/main" id="{5696F951-43E6-478C-AAF1-2BCFF9A2160D}"/>
               </a:ext>
             </a:extLst>
           </p:cNvPr>
@@ -14222,7 +14222,7 @@
           <p:cNvPr id="29" name="">
             <a:extLst xmlns:a="http://schemas.openxmlformats.org/drawingml/2006/main">
               <a:ext uri="{FF2B5EF4-FFF2-40B4-BE49-F238E27FC236}">
-                <a16:creationId xmlns:a16="http://schemas.microsoft.com/office/drawing/2014/main" id="{2592F6F5-89B4-48AA-8FE4-35B35D371619}"/>
+                <a16:creationId xmlns:a16="http://schemas.microsoft.com/office/drawing/2014/main" id="{15A17596-4722-4D70-9339-D415CE8E74C3}"/>
               </a:ext>
             </a:extLst>
           </p:cNvPr>
@@ -14279,7 +14279,7 @@
           <p:cNvPr id="30" name="">
             <a:extLst xmlns:a="http://schemas.openxmlformats.org/drawingml/2006/main">
               <a:ext uri="{FF2B5EF4-FFF2-40B4-BE49-F238E27FC236}">
-                <a16:creationId xmlns:a16="http://schemas.microsoft.com/office/drawing/2014/main" id="{D645AED1-057F-4362-8B3B-91CAC0932760}"/>
+                <a16:creationId xmlns:a16="http://schemas.microsoft.com/office/drawing/2014/main" id="{7255337F-1458-4097-BB24-40249BDCE12F}"/>
               </a:ext>
             </a:extLst>
           </p:cNvPr>
@@ -14336,7 +14336,7 @@
           <p:cNvPr id="31" name="">
             <a:extLst xmlns:a="http://schemas.openxmlformats.org/drawingml/2006/main">
               <a:ext uri="{FF2B5EF4-FFF2-40B4-BE49-F238E27FC236}">
-                <a16:creationId xmlns:a16="http://schemas.microsoft.com/office/drawing/2014/main" id="{E4C1F6DA-776A-4E33-8497-3F77125AFC7B}"/>
+                <a16:creationId xmlns:a16="http://schemas.microsoft.com/office/drawing/2014/main" id="{ABE945F4-B0FC-4A4B-A66D-4E8115100B5C}"/>
               </a:ext>
             </a:extLst>
           </p:cNvPr>
@@ -14393,7 +14393,7 @@
           <p:cNvPr id="32" name="">
             <a:extLst xmlns:a="http://schemas.openxmlformats.org/drawingml/2006/main">
               <a:ext uri="{FF2B5EF4-FFF2-40B4-BE49-F238E27FC236}">
-                <a16:creationId xmlns:a16="http://schemas.microsoft.com/office/drawing/2014/main" id="{3EADF500-B28E-4813-B97B-8C9F041B66F6}"/>
+                <a16:creationId xmlns:a16="http://schemas.microsoft.com/office/drawing/2014/main" id="{CB1A4B9D-BA55-45B4-A345-E97E80E11B06}"/>
               </a:ext>
             </a:extLst>
           </p:cNvPr>
@@ -14450,7 +14450,7 @@
           <p:cNvPr id="33" name="">
             <a:extLst xmlns:a="http://schemas.openxmlformats.org/drawingml/2006/main">
               <a:ext uri="{FF2B5EF4-FFF2-40B4-BE49-F238E27FC236}">
-                <a16:creationId xmlns:a16="http://schemas.microsoft.com/office/drawing/2014/main" id="{E7E4BE4B-4A23-43C1-A0AE-8AA14FF625CD}"/>
+                <a16:creationId xmlns:a16="http://schemas.microsoft.com/office/drawing/2014/main" id="{67212BCD-CD5C-4E88-B645-536DF471E98F}"/>
               </a:ext>
             </a:extLst>
           </p:cNvPr>
@@ -14507,7 +14507,7 @@
           <p:cNvPr id="34" name="">
             <a:extLst xmlns:a="http://schemas.openxmlformats.org/drawingml/2006/main">
               <a:ext uri="{FF2B5EF4-FFF2-40B4-BE49-F238E27FC236}">
-                <a16:creationId xmlns:a16="http://schemas.microsoft.com/office/drawing/2014/main" id="{26AEFE10-7E4F-4E8E-85E1-1747DE185B7C}"/>
+                <a16:creationId xmlns:a16="http://schemas.microsoft.com/office/drawing/2014/main" id="{1AD1030E-C209-4B05-AB60-2D76220F4D4E}"/>
               </a:ext>
             </a:extLst>
           </p:cNvPr>
@@ -14564,7 +14564,7 @@
           <p:cNvPr id="35" name="">
             <a:extLst xmlns:a="http://schemas.openxmlformats.org/drawingml/2006/main">
               <a:ext uri="{FF2B5EF4-FFF2-40B4-BE49-F238E27FC236}">
-                <a16:creationId xmlns:a16="http://schemas.microsoft.com/office/drawing/2014/main" id="{937B89AE-F73C-473D-8541-7CD5926F5AEC}"/>
+                <a16:creationId xmlns:a16="http://schemas.microsoft.com/office/drawing/2014/main" id="{A877A53E-38B9-4AAD-A4F9-A359F8E137CE}"/>
               </a:ext>
             </a:extLst>
           </p:cNvPr>
@@ -14621,7 +14621,7 @@
           <p:cNvPr id="36" name="">
             <a:extLst xmlns:a="http://schemas.openxmlformats.org/drawingml/2006/main">
               <a:ext uri="{FF2B5EF4-FFF2-40B4-BE49-F238E27FC236}">
-                <a16:creationId xmlns:a16="http://schemas.microsoft.com/office/drawing/2014/main" id="{0F514D72-6CDB-419D-86B2-2EB1CD7356E6}"/>
+                <a16:creationId xmlns:a16="http://schemas.microsoft.com/office/drawing/2014/main" id="{BD9D61EA-C9EC-4699-95D7-345B6BC8AED4}"/>
               </a:ext>
             </a:extLst>
           </p:cNvPr>
@@ -14678,7 +14678,7 @@
           <p:cNvPr id="37" name="">
             <a:extLst xmlns:a="http://schemas.openxmlformats.org/drawingml/2006/main">
               <a:ext uri="{FF2B5EF4-FFF2-40B4-BE49-F238E27FC236}">
-                <a16:creationId xmlns:a16="http://schemas.microsoft.com/office/drawing/2014/main" id="{53B185F2-D1B9-4B4A-9EE3-88D0096B25F0}"/>
+                <a16:creationId xmlns:a16="http://schemas.microsoft.com/office/drawing/2014/main" id="{E4FE9BF0-1D6A-449F-BD63-8BA8663853A8}"/>
               </a:ext>
             </a:extLst>
           </p:cNvPr>
@@ -14735,7 +14735,7 @@
           <p:cNvPr id="38" name="">
             <a:extLst xmlns:a="http://schemas.openxmlformats.org/drawingml/2006/main">
               <a:ext uri="{FF2B5EF4-FFF2-40B4-BE49-F238E27FC236}">
-                <a16:creationId xmlns:a16="http://schemas.microsoft.com/office/drawing/2014/main" id="{D563CE25-962C-4F5C-AF3D-E143FE755929}"/>
+                <a16:creationId xmlns:a16="http://schemas.microsoft.com/office/drawing/2014/main" id="{3EDF8DD1-C06A-4DC5-8E28-EA5ECC60132E}"/>
               </a:ext>
             </a:extLst>
           </p:cNvPr>
@@ -14792,7 +14792,7 @@
           <p:cNvPr id="39" name="">
             <a:extLst xmlns:a="http://schemas.openxmlformats.org/drawingml/2006/main">
               <a:ext uri="{FF2B5EF4-FFF2-40B4-BE49-F238E27FC236}">
-                <a16:creationId xmlns:a16="http://schemas.microsoft.com/office/drawing/2014/main" id="{91D4E617-A33B-456D-89B4-B883BD1688BE}"/>
+                <a16:creationId xmlns:a16="http://schemas.microsoft.com/office/drawing/2014/main" id="{51F5264B-F4F8-49A6-98C1-09B6CAF8828E}"/>
               </a:ext>
             </a:extLst>
           </p:cNvPr>
@@ -14849,7 +14849,7 @@
           <p:cNvPr id="40" name="">
             <a:extLst xmlns:a="http://schemas.openxmlformats.org/drawingml/2006/main">
               <a:ext uri="{FF2B5EF4-FFF2-40B4-BE49-F238E27FC236}">
-                <a16:creationId xmlns:a16="http://schemas.microsoft.com/office/drawing/2014/main" id="{D0612448-CB67-4A5A-9406-A9690A08AEC2}"/>
+                <a16:creationId xmlns:a16="http://schemas.microsoft.com/office/drawing/2014/main" id="{78F868B6-F1FE-44BB-9C85-314D9D2161C5}"/>
               </a:ext>
             </a:extLst>
           </p:cNvPr>
@@ -14906,7 +14906,7 @@
           <p:cNvPr id="41" name="">
             <a:extLst xmlns:a="http://schemas.openxmlformats.org/drawingml/2006/main">
               <a:ext uri="{FF2B5EF4-FFF2-40B4-BE49-F238E27FC236}">
-                <a16:creationId xmlns:a16="http://schemas.microsoft.com/office/drawing/2014/main" id="{C2695304-4EF1-40CC-A942-8E491918260E}"/>
+                <a16:creationId xmlns:a16="http://schemas.microsoft.com/office/drawing/2014/main" id="{336AB5DB-A365-4B5F-BC98-9A899F12410A}"/>
               </a:ext>
             </a:extLst>
           </p:cNvPr>
@@ -14963,7 +14963,7 @@
           <p:cNvPr id="42" name="">
             <a:extLst xmlns:a="http://schemas.openxmlformats.org/drawingml/2006/main">
               <a:ext uri="{FF2B5EF4-FFF2-40B4-BE49-F238E27FC236}">
-                <a16:creationId xmlns:a16="http://schemas.microsoft.com/office/drawing/2014/main" id="{2BF393F1-8CD5-4F87-82A5-414A6E94AF0A}"/>
+                <a16:creationId xmlns:a16="http://schemas.microsoft.com/office/drawing/2014/main" id="{960C221D-256F-415C-8814-3D64924CEB0E}"/>
               </a:ext>
             </a:extLst>
           </p:cNvPr>
@@ -14996,7 +14996,7 @@
           <p:cNvPr id="43" name="">
             <a:extLst xmlns:a="http://schemas.openxmlformats.org/drawingml/2006/main">
               <a:ext uri="{FF2B5EF4-FFF2-40B4-BE49-F238E27FC236}">
-                <a16:creationId xmlns:a16="http://schemas.microsoft.com/office/drawing/2014/main" id="{E6084419-1730-42AB-A948-5B4237A73ECA}"/>
+                <a16:creationId xmlns:a16="http://schemas.microsoft.com/office/drawing/2014/main" id="{9A06EE50-57AC-4089-BE60-211C04B270CF}"/>
               </a:ext>
             </a:extLst>
           </p:cNvPr>
@@ -15053,7 +15053,7 @@
           <p:cNvPr id="44" name="">
             <a:extLst xmlns:a="http://schemas.openxmlformats.org/drawingml/2006/main">
               <a:ext uri="{FF2B5EF4-FFF2-40B4-BE49-F238E27FC236}">
-                <a16:creationId xmlns:a16="http://schemas.microsoft.com/office/drawing/2014/main" id="{848D707B-A292-4B94-9C6D-2BDC89721D33}"/>
+                <a16:creationId xmlns:a16="http://schemas.microsoft.com/office/drawing/2014/main" id="{1624AF74-8461-4C73-AA5E-F80D2F9E43C2}"/>
               </a:ext>
             </a:extLst>
           </p:cNvPr>
@@ -15086,7 +15086,7 @@
           <p:cNvPr id="45" name="">
             <a:extLst xmlns:a="http://schemas.openxmlformats.org/drawingml/2006/main">
               <a:ext uri="{FF2B5EF4-FFF2-40B4-BE49-F238E27FC236}">
-                <a16:creationId xmlns:a16="http://schemas.microsoft.com/office/drawing/2014/main" id="{5C8AB225-969B-4BA1-AED8-74EFA3A4A67A}"/>
+                <a16:creationId xmlns:a16="http://schemas.microsoft.com/office/drawing/2014/main" id="{FC19735C-86D2-492C-85C3-FF59A91DCE03}"/>
               </a:ext>
             </a:extLst>
           </p:cNvPr>
@@ -15143,7 +15143,7 @@
           <p:cNvPr id="46" name="">
             <a:extLst xmlns:a="http://schemas.openxmlformats.org/drawingml/2006/main">
               <a:ext uri="{FF2B5EF4-FFF2-40B4-BE49-F238E27FC236}">
-                <a16:creationId xmlns:a16="http://schemas.microsoft.com/office/drawing/2014/main" id="{081ED12E-903C-4EB3-8CE0-B4557CE70E02}"/>
+                <a16:creationId xmlns:a16="http://schemas.microsoft.com/office/drawing/2014/main" id="{1D5E7C35-0232-4F40-922E-4B4F92FF7EC4}"/>
               </a:ext>
             </a:extLst>
           </p:cNvPr>
@@ -15176,7 +15176,7 @@
           <p:cNvPr id="47" name="">
             <a:extLst xmlns:a="http://schemas.openxmlformats.org/drawingml/2006/main">
               <a:ext uri="{FF2B5EF4-FFF2-40B4-BE49-F238E27FC236}">
-                <a16:creationId xmlns:a16="http://schemas.microsoft.com/office/drawing/2014/main" id="{09B8E417-494B-4BB8-BE23-9594884E00A5}"/>
+                <a16:creationId xmlns:a16="http://schemas.microsoft.com/office/drawing/2014/main" id="{2C562D33-45CC-44DE-BC04-5E28E8889087}"/>
               </a:ext>
             </a:extLst>
           </p:cNvPr>
@@ -15233,7 +15233,7 @@
           <p:cNvPr id="48" name="">
             <a:extLst xmlns:a="http://schemas.openxmlformats.org/drawingml/2006/main">
               <a:ext uri="{FF2B5EF4-FFF2-40B4-BE49-F238E27FC236}">
-                <a16:creationId xmlns:a16="http://schemas.microsoft.com/office/drawing/2014/main" id="{B334C33F-0EF8-4435-B8C2-0F99785581B7}"/>
+                <a16:creationId xmlns:a16="http://schemas.microsoft.com/office/drawing/2014/main" id="{A94F74AD-C091-4173-ADED-3EBEB208404A}"/>
               </a:ext>
             </a:extLst>
           </p:cNvPr>
@@ -15264,7 +15264,7 @@
           <p:cNvPr id="49" name="">
             <a:extLst xmlns:a="http://schemas.openxmlformats.org/drawingml/2006/main">
               <a:ext uri="{FF2B5EF4-FFF2-40B4-BE49-F238E27FC236}">
-                <a16:creationId xmlns:a16="http://schemas.microsoft.com/office/drawing/2014/main" id="{C5D14825-C2F5-4623-A069-06F16A0D952D}"/>
+                <a16:creationId xmlns:a16="http://schemas.microsoft.com/office/drawing/2014/main" id="{60B4B392-6937-4DC3-B2D3-9C762C42331B}"/>
               </a:ext>
             </a:extLst>
           </p:cNvPr>
@@ -15295,7 +15295,7 @@
           <p:cNvPr id="50" name="">
             <a:extLst xmlns:a="http://schemas.openxmlformats.org/drawingml/2006/main">
               <a:ext uri="{FF2B5EF4-FFF2-40B4-BE49-F238E27FC236}">
-                <a16:creationId xmlns:a16="http://schemas.microsoft.com/office/drawing/2014/main" id="{8BCD1260-111E-4E3D-891B-432265F8624B}"/>
+                <a16:creationId xmlns:a16="http://schemas.microsoft.com/office/drawing/2014/main" id="{BCFEAB45-353A-4F22-A5CE-CF5CF5845B1B}"/>
               </a:ext>
             </a:extLst>
           </p:cNvPr>
@@ -15352,7 +15352,7 @@
           <p:cNvPr id="51" name="">
             <a:extLst xmlns:a="http://schemas.openxmlformats.org/drawingml/2006/main">
               <a:ext uri="{FF2B5EF4-FFF2-40B4-BE49-F238E27FC236}">
-                <a16:creationId xmlns:a16="http://schemas.microsoft.com/office/drawing/2014/main" id="{22C2307A-1644-4802-BC6B-86AAE6111DDD}"/>
+                <a16:creationId xmlns:a16="http://schemas.microsoft.com/office/drawing/2014/main" id="{5E22C18C-90B7-4052-98C4-6F1A62945DEF}"/>
               </a:ext>
             </a:extLst>
           </p:cNvPr>
@@ -15409,7 +15409,7 @@
           <p:cNvPr id="52" name="">
             <a:extLst xmlns:a="http://schemas.openxmlformats.org/drawingml/2006/main">
               <a:ext uri="{FF2B5EF4-FFF2-40B4-BE49-F238E27FC236}">
-                <a16:creationId xmlns:a16="http://schemas.microsoft.com/office/drawing/2014/main" id="{3BFE4E81-F1BD-4252-BB99-895797F6B055}"/>
+                <a16:creationId xmlns:a16="http://schemas.microsoft.com/office/drawing/2014/main" id="{851EBD0A-236C-4461-BFFC-0D5F0E026D8D}"/>
               </a:ext>
             </a:extLst>
           </p:cNvPr>
@@ -15466,7 +15466,7 @@
           <p:cNvPr id="53" name="">
             <a:extLst xmlns:a="http://schemas.openxmlformats.org/drawingml/2006/main">
               <a:ext uri="{FF2B5EF4-FFF2-40B4-BE49-F238E27FC236}">
-                <a16:creationId xmlns:a16="http://schemas.microsoft.com/office/drawing/2014/main" id="{295F3B4D-1153-4AE2-8725-DD18B63EEF09}"/>
+                <a16:creationId xmlns:a16="http://schemas.microsoft.com/office/drawing/2014/main" id="{6E5F1326-5AC2-442E-B450-E3F9043070C9}"/>
               </a:ext>
             </a:extLst>
           </p:cNvPr>
@@ -15546,7 +15546,7 @@
           <p:cNvPr id="54" name="">
             <a:extLst xmlns:a="http://schemas.openxmlformats.org/drawingml/2006/main">
               <a:ext uri="{FF2B5EF4-FFF2-40B4-BE49-F238E27FC236}">
-                <a16:creationId xmlns:a16="http://schemas.microsoft.com/office/drawing/2014/main" id="{1A97A1EC-E7B6-4FAB-8009-FAF086439703}"/>
+                <a16:creationId xmlns:a16="http://schemas.microsoft.com/office/drawing/2014/main" id="{046E8389-FD2D-4456-AEDA-47EB4EF9F9F7}"/>
               </a:ext>
             </a:extLst>
           </p:cNvPr>
@@ -15579,7 +15579,7 @@
           <p:cNvPr id="55" name="">
             <a:extLst xmlns:a="http://schemas.openxmlformats.org/drawingml/2006/main">
               <a:ext uri="{FF2B5EF4-FFF2-40B4-BE49-F238E27FC236}">
-                <a16:creationId xmlns:a16="http://schemas.microsoft.com/office/drawing/2014/main" id="{CC177E48-1825-40BB-9672-3957A2701868}"/>
+                <a16:creationId xmlns:a16="http://schemas.microsoft.com/office/drawing/2014/main" id="{5455C628-698A-4762-80AD-80A96C299D5F}"/>
               </a:ext>
             </a:extLst>
           </p:cNvPr>
@@ -15636,7 +15636,7 @@
           <p:cNvPr id="56" name="">
             <a:extLst xmlns:a="http://schemas.openxmlformats.org/drawingml/2006/main">
               <a:ext uri="{FF2B5EF4-FFF2-40B4-BE49-F238E27FC236}">
-                <a16:creationId xmlns:a16="http://schemas.microsoft.com/office/drawing/2014/main" id="{8085D043-C56E-489F-9224-4A702CDFFA12}"/>
+                <a16:creationId xmlns:a16="http://schemas.microsoft.com/office/drawing/2014/main" id="{1A2D88C3-8CF8-4AB1-A4C6-29609490A146}"/>
               </a:ext>
             </a:extLst>
           </p:cNvPr>
@@ -15669,7 +15669,7 @@
           <p:cNvPr id="57" name="">
             <a:extLst xmlns:a="http://schemas.openxmlformats.org/drawingml/2006/main">
               <a:ext uri="{FF2B5EF4-FFF2-40B4-BE49-F238E27FC236}">
-                <a16:creationId xmlns:a16="http://schemas.microsoft.com/office/drawing/2014/main" id="{77BCDC66-B5D3-4D31-8C0F-A895A3721BE3}"/>
+                <a16:creationId xmlns:a16="http://schemas.microsoft.com/office/drawing/2014/main" id="{DFAE66DC-66BE-410B-8311-C830BC970CDB}"/>
               </a:ext>
             </a:extLst>
           </p:cNvPr>
@@ -15726,7 +15726,7 @@
           <p:cNvPr id="58" name="">
             <a:extLst xmlns:a="http://schemas.openxmlformats.org/drawingml/2006/main">
               <a:ext uri="{FF2B5EF4-FFF2-40B4-BE49-F238E27FC236}">
-                <a16:creationId xmlns:a16="http://schemas.microsoft.com/office/drawing/2014/main" id="{B8322899-CFAF-4D7F-A9E9-352387EE7B9D}"/>
+                <a16:creationId xmlns:a16="http://schemas.microsoft.com/office/drawing/2014/main" id="{315DDE27-2F26-4F53-8EA7-FEE04E4C8AD6}"/>
               </a:ext>
             </a:extLst>
           </p:cNvPr>
@@ -15759,7 +15759,7 @@
           <p:cNvPr id="59" name="">
             <a:extLst xmlns:a="http://schemas.openxmlformats.org/drawingml/2006/main">
               <a:ext uri="{FF2B5EF4-FFF2-40B4-BE49-F238E27FC236}">
-                <a16:creationId xmlns:a16="http://schemas.microsoft.com/office/drawing/2014/main" id="{5DFAEE0D-BD23-493D-8235-A639A07CB40C}"/>
+                <a16:creationId xmlns:a16="http://schemas.microsoft.com/office/drawing/2014/main" id="{7F88F307-FB6E-4D1B-BA5E-F79CA69123D0}"/>
               </a:ext>
             </a:extLst>
           </p:cNvPr>
@@ -15816,7 +15816,7 @@
           <p:cNvPr id="60" name="">
             <a:extLst xmlns:a="http://schemas.openxmlformats.org/drawingml/2006/main">
               <a:ext uri="{FF2B5EF4-FFF2-40B4-BE49-F238E27FC236}">
-                <a16:creationId xmlns:a16="http://schemas.microsoft.com/office/drawing/2014/main" id="{0DE4D842-8352-4E26-84E0-B98BC403117B}"/>
+                <a16:creationId xmlns:a16="http://schemas.microsoft.com/office/drawing/2014/main" id="{1F2E812C-4798-466B-AC3F-8A0CEBCA5223}"/>
               </a:ext>
             </a:extLst>
           </p:cNvPr>
@@ -15847,7 +15847,7 @@
           <p:cNvPr id="61" name="">
             <a:extLst xmlns:a="http://schemas.openxmlformats.org/drawingml/2006/main">
               <a:ext uri="{FF2B5EF4-FFF2-40B4-BE49-F238E27FC236}">
-                <a16:creationId xmlns:a16="http://schemas.microsoft.com/office/drawing/2014/main" id="{B95E51A3-7B6C-44AB-8581-E6B4D9A11E8B}"/>
+                <a16:creationId xmlns:a16="http://schemas.microsoft.com/office/drawing/2014/main" id="{06C97897-CB48-4C3E-9872-F386682170BB}"/>
               </a:ext>
             </a:extLst>
           </p:cNvPr>
@@ -15878,7 +15878,7 @@
           <p:cNvPr id="62" name="">
             <a:extLst xmlns:a="http://schemas.openxmlformats.org/drawingml/2006/main">
               <a:ext uri="{FF2B5EF4-FFF2-40B4-BE49-F238E27FC236}">
-                <a16:creationId xmlns:a16="http://schemas.microsoft.com/office/drawing/2014/main" id="{136E746E-D3D2-4FC0-9855-FBD3B53F533C}"/>
+                <a16:creationId xmlns:a16="http://schemas.microsoft.com/office/drawing/2014/main" id="{1AD718B3-2111-4430-8317-BC5979F5481C}"/>
               </a:ext>
             </a:extLst>
           </p:cNvPr>
@@ -15935,7 +15935,7 @@
           <p:cNvPr id="63" name="">
             <a:extLst xmlns:a="http://schemas.openxmlformats.org/drawingml/2006/main">
               <a:ext uri="{FF2B5EF4-FFF2-40B4-BE49-F238E27FC236}">
-                <a16:creationId xmlns:a16="http://schemas.microsoft.com/office/drawing/2014/main" id="{87ECDD02-9E1E-40CD-BDC1-A944C16239AA}"/>
+                <a16:creationId xmlns:a16="http://schemas.microsoft.com/office/drawing/2014/main" id="{D1FA39AB-1C5B-410F-99FB-656CA4254C6C}"/>
               </a:ext>
             </a:extLst>
           </p:cNvPr>
@@ -15992,7 +15992,7 @@
           <p:cNvPr id="64" name="">
             <a:extLst xmlns:a="http://schemas.openxmlformats.org/drawingml/2006/main">
               <a:ext uri="{FF2B5EF4-FFF2-40B4-BE49-F238E27FC236}">
-                <a16:creationId xmlns:a16="http://schemas.microsoft.com/office/drawing/2014/main" id="{A62EA9BB-78DE-4F79-BC9F-2E4E552677E7}"/>
+                <a16:creationId xmlns:a16="http://schemas.microsoft.com/office/drawing/2014/main" id="{E021C521-79DD-4324-B3C4-3BCD02B6113C}"/>
               </a:ext>
             </a:extLst>
           </p:cNvPr>
@@ -16023,7 +16023,7 @@
           <p:cNvPr id="65" name="">
             <a:extLst xmlns:a="http://schemas.openxmlformats.org/drawingml/2006/main">
               <a:ext uri="{FF2B5EF4-FFF2-40B4-BE49-F238E27FC236}">
-                <a16:creationId xmlns:a16="http://schemas.microsoft.com/office/drawing/2014/main" id="{24157D8E-1E2B-488A-974B-0B3070FDFE5D}"/>
+                <a16:creationId xmlns:a16="http://schemas.microsoft.com/office/drawing/2014/main" id="{DA0A0E55-AFCB-4B93-87FE-CBC073FEF19E}"/>
               </a:ext>
             </a:extLst>
           </p:cNvPr>
@@ -16080,7 +16080,7 @@
           <p:cNvPr id="66" name="">
             <a:extLst xmlns:a="http://schemas.openxmlformats.org/drawingml/2006/main">
               <a:ext uri="{FF2B5EF4-FFF2-40B4-BE49-F238E27FC236}">
-                <a16:creationId xmlns:a16="http://schemas.microsoft.com/office/drawing/2014/main" id="{1933758E-931B-4AC7-A846-10A59FDC14BE}"/>
+                <a16:creationId xmlns:a16="http://schemas.microsoft.com/office/drawing/2014/main" id="{72BEA7AA-A492-4091-A640-CC984569B4EF}"/>
               </a:ext>
             </a:extLst>
           </p:cNvPr>
@@ -16137,7 +16137,7 @@
           <p:cNvPr id="67" name="">
             <a:extLst xmlns:a="http://schemas.openxmlformats.org/drawingml/2006/main">
               <a:ext uri="{FF2B5EF4-FFF2-40B4-BE49-F238E27FC236}">
-                <a16:creationId xmlns:a16="http://schemas.microsoft.com/office/drawing/2014/main" id="{68D85165-80B0-462E-8831-515B606AE6D0}"/>
+                <a16:creationId xmlns:a16="http://schemas.microsoft.com/office/drawing/2014/main" id="{E3CAE46C-E373-4466-8DB7-6744B99030B4}"/>
               </a:ext>
             </a:extLst>
           </p:cNvPr>
@@ -16192,7 +16192,7 @@
     </p:spTree>
     <p:extLst>
       <p:ext uri="{BB962C8B-B14F-4D97-AF65-F5344CB8AC3E}">
-        <p14:creationId xmlns:p14="http://schemas.microsoft.com/office/powerpoint/2010/main" val="30354726"/>
+        <p14:creationId xmlns:p14="http://schemas.microsoft.com/office/powerpoint/2010/main" val="274858441"/>
       </p:ext>
     </p:extLst>
   </p:cSld>
@@ -16223,7 +16223,7 @@
           <p:cNvPr id="45" name="">
             <a:extLst xmlns:a="http://schemas.openxmlformats.org/drawingml/2006/main">
               <a:ext uri="{FF2B5EF4-FFF2-40B4-BE49-F238E27FC236}">
-                <a16:creationId xmlns:a16="http://schemas.microsoft.com/office/drawing/2014/main" id="{49A274A8-9A32-45A5-81B9-B60FE4D90B3C}"/>
+                <a16:creationId xmlns:a16="http://schemas.microsoft.com/office/drawing/2014/main" id="{F9270FA6-E9C9-4992-A7F9-853FFCE1407F}"/>
               </a:ext>
             </a:extLst>
           </p:cNvPr>
@@ -16280,7 +16280,7 @@
           <p:cNvPr id="2" name="">
             <a:extLst xmlns:a="http://schemas.openxmlformats.org/drawingml/2006/main">
               <a:ext uri="{FF2B5EF4-FFF2-40B4-BE49-F238E27FC236}">
-                <a16:creationId xmlns:a16="http://schemas.microsoft.com/office/drawing/2014/main" id="{09812FDB-24D9-459A-8163-CE4FC0D56FC7}"/>
+                <a16:creationId xmlns:a16="http://schemas.microsoft.com/office/drawing/2014/main" id="{9F5B2D25-86E3-4605-84B6-6E480B45ADD1}"/>
               </a:ext>
             </a:extLst>
           </p:cNvPr>
@@ -16311,7 +16311,7 @@
           <p:cNvPr id="3" name="">
             <a:extLst xmlns:a="http://schemas.openxmlformats.org/drawingml/2006/main">
               <a:ext uri="{FF2B5EF4-FFF2-40B4-BE49-F238E27FC236}">
-                <a16:creationId xmlns:a16="http://schemas.microsoft.com/office/drawing/2014/main" id="{ED169C5A-D39D-4328-A12A-259FC03897E3}"/>
+                <a16:creationId xmlns:a16="http://schemas.microsoft.com/office/drawing/2014/main" id="{6434AB66-5884-4120-A4D3-1EFDB6813DD4}"/>
               </a:ext>
             </a:extLst>
           </p:cNvPr>
@@ -16368,7 +16368,7 @@
           <p:cNvPr id="4" name="">
             <a:extLst xmlns:a="http://schemas.openxmlformats.org/drawingml/2006/main">
               <a:ext uri="{FF2B5EF4-FFF2-40B4-BE49-F238E27FC236}">
-                <a16:creationId xmlns:a16="http://schemas.microsoft.com/office/drawing/2014/main" id="{05598CD1-0B81-4CDD-8288-7ADB17EC63C3}"/>
+                <a16:creationId xmlns:a16="http://schemas.microsoft.com/office/drawing/2014/main" id="{29B4FEBC-5D59-44CD-8D8D-CFA9542F25C4}"/>
               </a:ext>
             </a:extLst>
           </p:cNvPr>
@@ -16399,7 +16399,7 @@
           <p:cNvPr id="5" name="">
             <a:extLst xmlns:a="http://schemas.openxmlformats.org/drawingml/2006/main">
               <a:ext uri="{FF2B5EF4-FFF2-40B4-BE49-F238E27FC236}">
-                <a16:creationId xmlns:a16="http://schemas.microsoft.com/office/drawing/2014/main" id="{F8B5D80C-708A-46E2-8DD1-60B4CB545A02}"/>
+                <a16:creationId xmlns:a16="http://schemas.microsoft.com/office/drawing/2014/main" id="{8B47AD10-FC9A-4796-A5F0-2E3A773EE45F}"/>
               </a:ext>
             </a:extLst>
           </p:cNvPr>
@@ -16456,7 +16456,7 @@
           <p:cNvPr id="6" name="">
             <a:extLst xmlns:a="http://schemas.openxmlformats.org/drawingml/2006/main">
               <a:ext uri="{FF2B5EF4-FFF2-40B4-BE49-F238E27FC236}">
-                <a16:creationId xmlns:a16="http://schemas.microsoft.com/office/drawing/2014/main" id="{973071E3-7FD3-428B-8CA4-BBC5DA666151}"/>
+                <a16:creationId xmlns:a16="http://schemas.microsoft.com/office/drawing/2014/main" id="{29EBF055-D1F0-4611-A537-6C2166D7ADC3}"/>
               </a:ext>
             </a:extLst>
           </p:cNvPr>
@@ -16513,7 +16513,7 @@
           <p:cNvPr id="7" name="">
             <a:extLst xmlns:a="http://schemas.openxmlformats.org/drawingml/2006/main">
               <a:ext uri="{FF2B5EF4-FFF2-40B4-BE49-F238E27FC236}">
-                <a16:creationId xmlns:a16="http://schemas.microsoft.com/office/drawing/2014/main" id="{41396745-9922-49B9-8D7E-BB4ACBC02D15}"/>
+                <a16:creationId xmlns:a16="http://schemas.microsoft.com/office/drawing/2014/main" id="{2CC710F3-D2EE-4FB7-AA46-EBF40B3B674C}"/>
               </a:ext>
             </a:extLst>
           </p:cNvPr>
@@ -16570,7 +16570,7 @@
           <p:cNvPr id="8" name="">
             <a:extLst xmlns:a="http://schemas.openxmlformats.org/drawingml/2006/main">
               <a:ext uri="{FF2B5EF4-FFF2-40B4-BE49-F238E27FC236}">
-                <a16:creationId xmlns:a16="http://schemas.microsoft.com/office/drawing/2014/main" id="{EDC3AB85-CF8E-41F8-A6D5-785760E26522}"/>
+                <a16:creationId xmlns:a16="http://schemas.microsoft.com/office/drawing/2014/main" id="{943D576E-C278-46FA-B11A-0FE51A9F927F}"/>
               </a:ext>
             </a:extLst>
           </p:cNvPr>
@@ -16627,7 +16627,7 @@
           <p:cNvPr id="9" name="">
             <a:extLst xmlns:a="http://schemas.openxmlformats.org/drawingml/2006/main">
               <a:ext uri="{FF2B5EF4-FFF2-40B4-BE49-F238E27FC236}">
-                <a16:creationId xmlns:a16="http://schemas.microsoft.com/office/drawing/2014/main" id="{8CAB71AC-9233-4366-AE9A-A1D7828DC6EE}"/>
+                <a16:creationId xmlns:a16="http://schemas.microsoft.com/office/drawing/2014/main" id="{9C44EB95-26E6-48A5-BAF1-9F2F10C9C2F1}"/>
               </a:ext>
             </a:extLst>
           </p:cNvPr>
@@ -16684,7 +16684,7 @@
           <p:cNvPr id="10" name="">
             <a:extLst xmlns:a="http://schemas.openxmlformats.org/drawingml/2006/main">
               <a:ext uri="{FF2B5EF4-FFF2-40B4-BE49-F238E27FC236}">
-                <a16:creationId xmlns:a16="http://schemas.microsoft.com/office/drawing/2014/main" id="{A84E3970-D8E2-48AB-9DDE-DEBF425F6C8D}"/>
+                <a16:creationId xmlns:a16="http://schemas.microsoft.com/office/drawing/2014/main" id="{A3637143-87AC-4924-8866-ADC9FD0EAB26}"/>
               </a:ext>
             </a:extLst>
           </p:cNvPr>
@@ -16741,7 +16741,7 @@
           <p:cNvPr id="11" name="">
             <a:extLst xmlns:a="http://schemas.openxmlformats.org/drawingml/2006/main">
               <a:ext uri="{FF2B5EF4-FFF2-40B4-BE49-F238E27FC236}">
-                <a16:creationId xmlns:a16="http://schemas.microsoft.com/office/drawing/2014/main" id="{784CCA1C-963E-459B-9D58-2230F06EA500}"/>
+                <a16:creationId xmlns:a16="http://schemas.microsoft.com/office/drawing/2014/main" id="{CF795B1E-BA01-4503-B174-51CE6F3D644F}"/>
               </a:ext>
             </a:extLst>
           </p:cNvPr>
@@ -16798,7 +16798,7 @@
           <p:cNvPr id="12" name="">
             <a:extLst xmlns:a="http://schemas.openxmlformats.org/drawingml/2006/main">
               <a:ext uri="{FF2B5EF4-FFF2-40B4-BE49-F238E27FC236}">
-                <a16:creationId xmlns:a16="http://schemas.microsoft.com/office/drawing/2014/main" id="{D6687F21-96B5-44C3-9CD0-B492AA58E8E0}"/>
+                <a16:creationId xmlns:a16="http://schemas.microsoft.com/office/drawing/2014/main" id="{351918EF-5EF2-4659-95F0-D68C1FD59E04}"/>
               </a:ext>
             </a:extLst>
           </p:cNvPr>
@@ -16855,7 +16855,7 @@
           <p:cNvPr id="13" name="">
             <a:extLst xmlns:a="http://schemas.openxmlformats.org/drawingml/2006/main">
               <a:ext uri="{FF2B5EF4-FFF2-40B4-BE49-F238E27FC236}">
-                <a16:creationId xmlns:a16="http://schemas.microsoft.com/office/drawing/2014/main" id="{485938E2-47BE-4010-B96A-40360C2D8A46}"/>
+                <a16:creationId xmlns:a16="http://schemas.microsoft.com/office/drawing/2014/main" id="{8A80F339-B6BE-4133-8990-6613B7052DDB}"/>
               </a:ext>
             </a:extLst>
           </p:cNvPr>
@@ -16935,7 +16935,7 @@
           <p:cNvPr id="14" name="">
             <a:extLst xmlns:a="http://schemas.openxmlformats.org/drawingml/2006/main">
               <a:ext uri="{FF2B5EF4-FFF2-40B4-BE49-F238E27FC236}">
-                <a16:creationId xmlns:a16="http://schemas.microsoft.com/office/drawing/2014/main" id="{E033358B-52C0-4794-BC19-3CE300EACC58}"/>
+                <a16:creationId xmlns:a16="http://schemas.microsoft.com/office/drawing/2014/main" id="{5F4E41EA-0285-46DF-8872-3F2319036066}"/>
               </a:ext>
             </a:extLst>
           </p:cNvPr>
@@ -17015,7 +17015,7 @@
           <p:cNvPr id="15" name="">
             <a:extLst xmlns:a="http://schemas.openxmlformats.org/drawingml/2006/main">
               <a:ext uri="{FF2B5EF4-FFF2-40B4-BE49-F238E27FC236}">
-                <a16:creationId xmlns:a16="http://schemas.microsoft.com/office/drawing/2014/main" id="{A339D2BE-99A8-4EA7-BF27-ED33E1603725}"/>
+                <a16:creationId xmlns:a16="http://schemas.microsoft.com/office/drawing/2014/main" id="{4308B45C-B4D0-4E00-A032-CDCB6DD400C6}"/>
               </a:ext>
             </a:extLst>
           </p:cNvPr>
@@ -17072,7 +17072,7 @@
           <p:cNvPr id="16" name="">
             <a:extLst xmlns:a="http://schemas.openxmlformats.org/drawingml/2006/main">
               <a:ext uri="{FF2B5EF4-FFF2-40B4-BE49-F238E27FC236}">
-                <a16:creationId xmlns:a16="http://schemas.microsoft.com/office/drawing/2014/main" id="{87560BC7-63DA-4450-B9F3-45D9B9109790}"/>
+                <a16:creationId xmlns:a16="http://schemas.microsoft.com/office/drawing/2014/main" id="{BFB6C987-9293-497E-96A3-61F25A3A4CAF}"/>
               </a:ext>
             </a:extLst>
           </p:cNvPr>
@@ -17129,7 +17129,7 @@
           <p:cNvPr id="17" name="">
             <a:extLst xmlns:a="http://schemas.openxmlformats.org/drawingml/2006/main">
               <a:ext uri="{FF2B5EF4-FFF2-40B4-BE49-F238E27FC236}">
-                <a16:creationId xmlns:a16="http://schemas.microsoft.com/office/drawing/2014/main" id="{6BD8FA90-5248-40D3-9B85-FF47881F92B0}"/>
+                <a16:creationId xmlns:a16="http://schemas.microsoft.com/office/drawing/2014/main" id="{3F5E234A-A723-4956-8FAC-78C3AF0E7488}"/>
               </a:ext>
             </a:extLst>
           </p:cNvPr>
@@ -17186,7 +17186,7 @@
           <p:cNvPr id="18" name="">
             <a:extLst xmlns:a="http://schemas.openxmlformats.org/drawingml/2006/main">
               <a:ext uri="{FF2B5EF4-FFF2-40B4-BE49-F238E27FC236}">
-                <a16:creationId xmlns:a16="http://schemas.microsoft.com/office/drawing/2014/main" id="{D9BF814B-4FA4-401F-9E17-293F50461BE4}"/>
+                <a16:creationId xmlns:a16="http://schemas.microsoft.com/office/drawing/2014/main" id="{E60148F5-0069-46BB-94FD-9973DA9FEB72}"/>
               </a:ext>
             </a:extLst>
           </p:cNvPr>
@@ -17243,7 +17243,7 @@
           <p:cNvPr id="19" name="">
             <a:extLst xmlns:a="http://schemas.openxmlformats.org/drawingml/2006/main">
               <a:ext uri="{FF2B5EF4-FFF2-40B4-BE49-F238E27FC236}">
-                <a16:creationId xmlns:a16="http://schemas.microsoft.com/office/drawing/2014/main" id="{972C4138-42B2-4489-A857-F585048126AE}"/>
+                <a16:creationId xmlns:a16="http://schemas.microsoft.com/office/drawing/2014/main" id="{0FCDD8E6-8701-4FE0-9487-F7790789062A}"/>
               </a:ext>
             </a:extLst>
           </p:cNvPr>
@@ -17300,7 +17300,7 @@
           <p:cNvPr id="20" name="">
             <a:extLst xmlns:a="http://schemas.openxmlformats.org/drawingml/2006/main">
               <a:ext uri="{FF2B5EF4-FFF2-40B4-BE49-F238E27FC236}">
-                <a16:creationId xmlns:a16="http://schemas.microsoft.com/office/drawing/2014/main" id="{D95D1252-7D40-4294-AD08-6B5B6033971F}"/>
+                <a16:creationId xmlns:a16="http://schemas.microsoft.com/office/drawing/2014/main" id="{9AC1BA32-B7AA-484C-BF71-A1843AAC0BB6}"/>
               </a:ext>
             </a:extLst>
           </p:cNvPr>
@@ -17357,7 +17357,7 @@
           <p:cNvPr id="21" name="">
             <a:extLst xmlns:a="http://schemas.openxmlformats.org/drawingml/2006/main">
               <a:ext uri="{FF2B5EF4-FFF2-40B4-BE49-F238E27FC236}">
-                <a16:creationId xmlns:a16="http://schemas.microsoft.com/office/drawing/2014/main" id="{27C7E63F-D549-4E81-BCA4-F147BECC5A67}"/>
+                <a16:creationId xmlns:a16="http://schemas.microsoft.com/office/drawing/2014/main" id="{1EE5D298-C571-465B-B632-F1ECD6540092}"/>
               </a:ext>
             </a:extLst>
           </p:cNvPr>
@@ -17414,7 +17414,7 @@
           <p:cNvPr id="22" name="">
             <a:extLst xmlns:a="http://schemas.openxmlformats.org/drawingml/2006/main">
               <a:ext uri="{FF2B5EF4-FFF2-40B4-BE49-F238E27FC236}">
-                <a16:creationId xmlns:a16="http://schemas.microsoft.com/office/drawing/2014/main" id="{013168BF-D769-41F8-99BF-B5751884C70B}"/>
+                <a16:creationId xmlns:a16="http://schemas.microsoft.com/office/drawing/2014/main" id="{EF4B678A-917C-466C-A65C-FEF553678303}"/>
               </a:ext>
             </a:extLst>
           </p:cNvPr>
@@ -17471,7 +17471,7 @@
           <p:cNvPr id="23" name="">
             <a:extLst xmlns:a="http://schemas.openxmlformats.org/drawingml/2006/main">
               <a:ext uri="{FF2B5EF4-FFF2-40B4-BE49-F238E27FC236}">
-                <a16:creationId xmlns:a16="http://schemas.microsoft.com/office/drawing/2014/main" id="{6FD73B51-7CF9-4E76-A083-E5F0A78D1E5D}"/>
+                <a16:creationId xmlns:a16="http://schemas.microsoft.com/office/drawing/2014/main" id="{1E1EBC40-CB5A-4B8C-8C2B-302B2F46B6C8}"/>
               </a:ext>
             </a:extLst>
           </p:cNvPr>
@@ -17528,7 +17528,7 @@
           <p:cNvPr id="24" name="">
             <a:extLst xmlns:a="http://schemas.openxmlformats.org/drawingml/2006/main">
               <a:ext uri="{FF2B5EF4-FFF2-40B4-BE49-F238E27FC236}">
-                <a16:creationId xmlns:a16="http://schemas.microsoft.com/office/drawing/2014/main" id="{4B12EF38-72A7-4EA1-A2F0-0C5369953789}"/>
+                <a16:creationId xmlns:a16="http://schemas.microsoft.com/office/drawing/2014/main" id="{A4071465-E84E-4AF1-9667-FAD95CDD1108}"/>
               </a:ext>
             </a:extLst>
           </p:cNvPr>
@@ -17585,7 +17585,7 @@
           <p:cNvPr id="25" name="">
             <a:extLst xmlns:a="http://schemas.openxmlformats.org/drawingml/2006/main">
               <a:ext uri="{FF2B5EF4-FFF2-40B4-BE49-F238E27FC236}">
-                <a16:creationId xmlns:a16="http://schemas.microsoft.com/office/drawing/2014/main" id="{3B447211-DF65-438C-AF73-B3B50B93B35C}"/>
+                <a16:creationId xmlns:a16="http://schemas.microsoft.com/office/drawing/2014/main" id="{AD03771F-E003-4556-9BFD-2996B335B87D}"/>
               </a:ext>
             </a:extLst>
           </p:cNvPr>
@@ -17665,7 +17665,7 @@
           <p:cNvPr id="26" name="">
             <a:extLst xmlns:a="http://schemas.openxmlformats.org/drawingml/2006/main">
               <a:ext uri="{FF2B5EF4-FFF2-40B4-BE49-F238E27FC236}">
-                <a16:creationId xmlns:a16="http://schemas.microsoft.com/office/drawing/2014/main" id="{A29BD75B-2514-4471-BECF-73CA640B7AF2}"/>
+                <a16:creationId xmlns:a16="http://schemas.microsoft.com/office/drawing/2014/main" id="{037690DD-B14B-4DE4-8C50-45AFD653D0C1}"/>
               </a:ext>
             </a:extLst>
           </p:cNvPr>
@@ -17722,7 +17722,7 @@
           <p:cNvPr id="27" name="">
             <a:extLst xmlns:a="http://schemas.openxmlformats.org/drawingml/2006/main">
               <a:ext uri="{FF2B5EF4-FFF2-40B4-BE49-F238E27FC236}">
-                <a16:creationId xmlns:a16="http://schemas.microsoft.com/office/drawing/2014/main" id="{0312DBAA-47E5-41B9-849D-D70F8F7867D2}"/>
+                <a16:creationId xmlns:a16="http://schemas.microsoft.com/office/drawing/2014/main" id="{86F3777E-A89E-4717-B059-D3B50D03FBF6}"/>
               </a:ext>
             </a:extLst>
           </p:cNvPr>
@@ -17753,7 +17753,7 @@
           <p:cNvPr id="28" name="">
             <a:extLst xmlns:a="http://schemas.openxmlformats.org/drawingml/2006/main">
               <a:ext uri="{FF2B5EF4-FFF2-40B4-BE49-F238E27FC236}">
-                <a16:creationId xmlns:a16="http://schemas.microsoft.com/office/drawing/2014/main" id="{42829429-DC34-423B-8CF8-20B02EFB31BC}"/>
+                <a16:creationId xmlns:a16="http://schemas.microsoft.com/office/drawing/2014/main" id="{FB3DD555-0556-4523-B3FF-BBE5DFED71BA}"/>
               </a:ext>
             </a:extLst>
           </p:cNvPr>
@@ -17810,7 +17810,7 @@
           <p:cNvPr id="29" name="">
             <a:extLst xmlns:a="http://schemas.openxmlformats.org/drawingml/2006/main">
               <a:ext uri="{FF2B5EF4-FFF2-40B4-BE49-F238E27FC236}">
-                <a16:creationId xmlns:a16="http://schemas.microsoft.com/office/drawing/2014/main" id="{785E7AA8-1052-4FBF-926F-4809A1288908}"/>
+                <a16:creationId xmlns:a16="http://schemas.microsoft.com/office/drawing/2014/main" id="{E28E9A84-9ED4-499C-A683-714D4341E2A2}"/>
               </a:ext>
             </a:extLst>
           </p:cNvPr>
@@ -17867,7 +17867,7 @@
           <p:cNvPr id="30" name="">
             <a:extLst xmlns:a="http://schemas.openxmlformats.org/drawingml/2006/main">
               <a:ext uri="{FF2B5EF4-FFF2-40B4-BE49-F238E27FC236}">
-                <a16:creationId xmlns:a16="http://schemas.microsoft.com/office/drawing/2014/main" id="{B1052593-8A41-4B92-8930-3DAF06F93379}"/>
+                <a16:creationId xmlns:a16="http://schemas.microsoft.com/office/drawing/2014/main" id="{E67941C5-22CD-46D2-8957-F1296E0DA676}"/>
               </a:ext>
             </a:extLst>
           </p:cNvPr>
@@ -17924,7 +17924,7 @@
           <p:cNvPr id="31" name="">
             <a:extLst xmlns:a="http://schemas.openxmlformats.org/drawingml/2006/main">
               <a:ext uri="{FF2B5EF4-FFF2-40B4-BE49-F238E27FC236}">
-                <a16:creationId xmlns:a16="http://schemas.microsoft.com/office/drawing/2014/main" id="{B8A96E66-5F14-4430-B817-14120F3B8310}"/>
+                <a16:creationId xmlns:a16="http://schemas.microsoft.com/office/drawing/2014/main" id="{2102F365-66E9-4327-BFCA-7DFCF6701296}"/>
               </a:ext>
             </a:extLst>
           </p:cNvPr>
@@ -17981,7 +17981,7 @@
           <p:cNvPr id="32" name="">
             <a:extLst xmlns:a="http://schemas.openxmlformats.org/drawingml/2006/main">
               <a:ext uri="{FF2B5EF4-FFF2-40B4-BE49-F238E27FC236}">
-                <a16:creationId xmlns:a16="http://schemas.microsoft.com/office/drawing/2014/main" id="{4646C594-08AF-4F81-AE55-EA706BE435CC}"/>
+                <a16:creationId xmlns:a16="http://schemas.microsoft.com/office/drawing/2014/main" id="{759E9F45-E9F3-498E-B34D-4C249E6CBD4C}"/>
               </a:ext>
             </a:extLst>
           </p:cNvPr>
@@ -18038,7 +18038,7 @@
           <p:cNvPr id="33" name="">
             <a:extLst xmlns:a="http://schemas.openxmlformats.org/drawingml/2006/main">
               <a:ext uri="{FF2B5EF4-FFF2-40B4-BE49-F238E27FC236}">
-                <a16:creationId xmlns:a16="http://schemas.microsoft.com/office/drawing/2014/main" id="{D8D8ECB7-2EDC-45F0-A64F-1A2907155292}"/>
+                <a16:creationId xmlns:a16="http://schemas.microsoft.com/office/drawing/2014/main" id="{87C2B7BD-7B0F-4A76-98D3-18DD5975FF2D}"/>
               </a:ext>
             </a:extLst>
           </p:cNvPr>
@@ -18095,7 +18095,7 @@
           <p:cNvPr id="34" name="">
             <a:extLst xmlns:a="http://schemas.openxmlformats.org/drawingml/2006/main">
               <a:ext uri="{FF2B5EF4-FFF2-40B4-BE49-F238E27FC236}">
-                <a16:creationId xmlns:a16="http://schemas.microsoft.com/office/drawing/2014/main" id="{8BEC9853-3F51-428C-8F02-A38FD73DD6D1}"/>
+                <a16:creationId xmlns:a16="http://schemas.microsoft.com/office/drawing/2014/main" id="{8D5471A9-595A-49AB-8C25-A04CF088D1D9}"/>
               </a:ext>
             </a:extLst>
           </p:cNvPr>
@@ -18152,7 +18152,7 @@
           <p:cNvPr id="35" name="">
             <a:extLst xmlns:a="http://schemas.openxmlformats.org/drawingml/2006/main">
               <a:ext uri="{FF2B5EF4-FFF2-40B4-BE49-F238E27FC236}">
-                <a16:creationId xmlns:a16="http://schemas.microsoft.com/office/drawing/2014/main" id="{0FD0309F-0F14-415D-A1AC-24F3AC9A6718}"/>
+                <a16:creationId xmlns:a16="http://schemas.microsoft.com/office/drawing/2014/main" id="{9331C576-E1E7-4A40-BD0C-8C6BBF5ED113}"/>
               </a:ext>
             </a:extLst>
           </p:cNvPr>
@@ -18209,7 +18209,7 @@
           <p:cNvPr id="36" name="">
             <a:extLst xmlns:a="http://schemas.openxmlformats.org/drawingml/2006/main">
               <a:ext uri="{FF2B5EF4-FFF2-40B4-BE49-F238E27FC236}">
-                <a16:creationId xmlns:a16="http://schemas.microsoft.com/office/drawing/2014/main" id="{4C6F045F-4F0A-4BA0-B64E-93586E7B0187}"/>
+                <a16:creationId xmlns:a16="http://schemas.microsoft.com/office/drawing/2014/main" id="{C0888DF0-710F-41D9-82D0-A7851E3CE1F8}"/>
               </a:ext>
             </a:extLst>
           </p:cNvPr>
@@ -18266,7 +18266,7 @@
           <p:cNvPr id="37" name="">
             <a:extLst xmlns:a="http://schemas.openxmlformats.org/drawingml/2006/main">
               <a:ext uri="{FF2B5EF4-FFF2-40B4-BE49-F238E27FC236}">
-                <a16:creationId xmlns:a16="http://schemas.microsoft.com/office/drawing/2014/main" id="{BD70204E-4179-43DD-8521-330F76C1792D}"/>
+                <a16:creationId xmlns:a16="http://schemas.microsoft.com/office/drawing/2014/main" id="{5A95D4BA-7A02-4C4F-ABB8-0FA283338F6B}"/>
               </a:ext>
             </a:extLst>
           </p:cNvPr>
@@ -18297,7 +18297,7 @@
           <p:cNvPr id="38" name="">
             <a:extLst xmlns:a="http://schemas.openxmlformats.org/drawingml/2006/main">
               <a:ext uri="{FF2B5EF4-FFF2-40B4-BE49-F238E27FC236}">
-                <a16:creationId xmlns:a16="http://schemas.microsoft.com/office/drawing/2014/main" id="{FB52197A-ABA9-485F-8292-A52BEF55A7F1}"/>
+                <a16:creationId xmlns:a16="http://schemas.microsoft.com/office/drawing/2014/main" id="{E145A11F-6DFE-43A9-9C34-EA9FC846160F}"/>
               </a:ext>
             </a:extLst>
           </p:cNvPr>
@@ -18354,7 +18354,7 @@
           <p:cNvPr id="39" name="">
             <a:extLst xmlns:a="http://schemas.openxmlformats.org/drawingml/2006/main">
               <a:ext uri="{FF2B5EF4-FFF2-40B4-BE49-F238E27FC236}">
-                <a16:creationId xmlns:a16="http://schemas.microsoft.com/office/drawing/2014/main" id="{82D11D1E-9822-4E83-A44D-06644E4EA542}"/>
+                <a16:creationId xmlns:a16="http://schemas.microsoft.com/office/drawing/2014/main" id="{55C64DC6-4684-4831-86C8-85507A886201}"/>
               </a:ext>
             </a:extLst>
           </p:cNvPr>
@@ -18411,7 +18411,7 @@
           <p:cNvPr id="40" name="">
             <a:extLst xmlns:a="http://schemas.openxmlformats.org/drawingml/2006/main">
               <a:ext uri="{FF2B5EF4-FFF2-40B4-BE49-F238E27FC236}">
-                <a16:creationId xmlns:a16="http://schemas.microsoft.com/office/drawing/2014/main" id="{54C82789-1BD8-4C4A-B2CC-F750C0FFBBD2}"/>
+                <a16:creationId xmlns:a16="http://schemas.microsoft.com/office/drawing/2014/main" id="{D78551D2-95E7-464C-9273-9C4AB08399E1}"/>
               </a:ext>
             </a:extLst>
           </p:cNvPr>
@@ -18468,7 +18468,7 @@
           <p:cNvPr id="41" name="">
             <a:extLst xmlns:a="http://schemas.openxmlformats.org/drawingml/2006/main">
               <a:ext uri="{FF2B5EF4-FFF2-40B4-BE49-F238E27FC236}">
-                <a16:creationId xmlns:a16="http://schemas.microsoft.com/office/drawing/2014/main" id="{E6F9B798-B99B-4F51-9E53-3E0ACADA426C}"/>
+                <a16:creationId xmlns:a16="http://schemas.microsoft.com/office/drawing/2014/main" id="{531E8B49-AEFC-425C-B581-D6BA43B7A391}"/>
               </a:ext>
             </a:extLst>
           </p:cNvPr>
@@ -18525,7 +18525,7 @@
           <p:cNvPr id="42" name="">
             <a:extLst xmlns:a="http://schemas.openxmlformats.org/drawingml/2006/main">
               <a:ext uri="{FF2B5EF4-FFF2-40B4-BE49-F238E27FC236}">
-                <a16:creationId xmlns:a16="http://schemas.microsoft.com/office/drawing/2014/main" id="{AAC17C0B-6AC1-4186-91D2-561D56ECA634}"/>
+                <a16:creationId xmlns:a16="http://schemas.microsoft.com/office/drawing/2014/main" id="{9DCC5B30-05E8-4546-9371-C56133B7AAC7}"/>
               </a:ext>
             </a:extLst>
           </p:cNvPr>
@@ -18582,7 +18582,7 @@
           <p:cNvPr id="43" name="">
             <a:extLst xmlns:a="http://schemas.openxmlformats.org/drawingml/2006/main">
               <a:ext uri="{FF2B5EF4-FFF2-40B4-BE49-F238E27FC236}">
-                <a16:creationId xmlns:a16="http://schemas.microsoft.com/office/drawing/2014/main" id="{9FB4DAA3-2999-40BE-9DA9-0BA690D8C024}"/>
+                <a16:creationId xmlns:a16="http://schemas.microsoft.com/office/drawing/2014/main" id="{99FA1114-F92A-4FD6-8B56-2616EDD9DF69}"/>
               </a:ext>
             </a:extLst>
           </p:cNvPr>
@@ -18639,7 +18639,7 @@
           <p:cNvPr id="44" name="">
             <a:extLst xmlns:a="http://schemas.openxmlformats.org/drawingml/2006/main">
               <a:ext uri="{FF2B5EF4-FFF2-40B4-BE49-F238E27FC236}">
-                <a16:creationId xmlns:a16="http://schemas.microsoft.com/office/drawing/2014/main" id="{F8DB7EB9-B309-4045-9A52-EE2051FEF5AA}"/>
+                <a16:creationId xmlns:a16="http://schemas.microsoft.com/office/drawing/2014/main" id="{95146132-C28F-4404-AD3C-6146BAE6D9C7}"/>
               </a:ext>
             </a:extLst>
           </p:cNvPr>
@@ -18694,7 +18694,7 @@
     </p:spTree>
     <p:extLst>
       <p:ext uri="{BB962C8B-B14F-4D97-AF65-F5344CB8AC3E}">
-        <p14:creationId xmlns:p14="http://schemas.microsoft.com/office/powerpoint/2010/main" val="1759166742"/>
+        <p14:creationId xmlns:p14="http://schemas.microsoft.com/office/powerpoint/2010/main" val="395171047"/>
       </p:ext>
     </p:extLst>
   </p:cSld>
@@ -18725,7 +18725,7 @@
           <p:cNvPr id="21" name="">
             <a:extLst xmlns:a="http://schemas.openxmlformats.org/drawingml/2006/main">
               <a:ext uri="{FF2B5EF4-FFF2-40B4-BE49-F238E27FC236}">
-                <a16:creationId xmlns:a16="http://schemas.microsoft.com/office/drawing/2014/main" id="{77545C36-11F7-41BC-AAEC-594A42422F9D}"/>
+                <a16:creationId xmlns:a16="http://schemas.microsoft.com/office/drawing/2014/main" id="{48719E08-CAA8-4A33-8141-0E3BB60D98E1}"/>
               </a:ext>
             </a:extLst>
           </p:cNvPr>
@@ -18782,7 +18782,7 @@
           <p:cNvPr id="2" name="">
             <a:extLst xmlns:a="http://schemas.openxmlformats.org/drawingml/2006/main">
               <a:ext uri="{FF2B5EF4-FFF2-40B4-BE49-F238E27FC236}">
-                <a16:creationId xmlns:a16="http://schemas.microsoft.com/office/drawing/2014/main" id="{2886E999-EFC1-4E23-8179-A38ACE882C1C}"/>
+                <a16:creationId xmlns:a16="http://schemas.microsoft.com/office/drawing/2014/main" id="{06AE7DD4-5B85-4B04-AE71-2406EDE659E4}"/>
               </a:ext>
             </a:extLst>
           </p:cNvPr>
@@ -18813,7 +18813,7 @@
           <p:cNvPr id="3" name="">
             <a:extLst xmlns:a="http://schemas.openxmlformats.org/drawingml/2006/main">
               <a:ext uri="{FF2B5EF4-FFF2-40B4-BE49-F238E27FC236}">
-                <a16:creationId xmlns:a16="http://schemas.microsoft.com/office/drawing/2014/main" id="{348AAFFD-D2E6-4FAA-878A-A30912049B76}"/>
+                <a16:creationId xmlns:a16="http://schemas.microsoft.com/office/drawing/2014/main" id="{AD6008B7-A3E9-4F79-8BFB-BF1FFA660FB3}"/>
               </a:ext>
             </a:extLst>
           </p:cNvPr>
@@ -18870,7 +18870,7 @@
           <p:cNvPr id="4" name="">
             <a:extLst xmlns:a="http://schemas.openxmlformats.org/drawingml/2006/main">
               <a:ext uri="{FF2B5EF4-FFF2-40B4-BE49-F238E27FC236}">
-                <a16:creationId xmlns:a16="http://schemas.microsoft.com/office/drawing/2014/main" id="{24393EB2-FA10-446D-AAC6-AEB2577FEDA3}"/>
+                <a16:creationId xmlns:a16="http://schemas.microsoft.com/office/drawing/2014/main" id="{FF26D81B-4D8F-4446-8832-F1B55C305E67}"/>
               </a:ext>
             </a:extLst>
           </p:cNvPr>
@@ -18901,7 +18901,7 @@
           <p:cNvPr id="5" name="">
             <a:extLst xmlns:a="http://schemas.openxmlformats.org/drawingml/2006/main">
               <a:ext uri="{FF2B5EF4-FFF2-40B4-BE49-F238E27FC236}">
-                <a16:creationId xmlns:a16="http://schemas.microsoft.com/office/drawing/2014/main" id="{F9CF619B-1A17-469A-8E3E-00D9ABB0E357}"/>
+                <a16:creationId xmlns:a16="http://schemas.microsoft.com/office/drawing/2014/main" id="{87D90D3C-AC8C-42DE-9F34-99BC5376C707}"/>
               </a:ext>
             </a:extLst>
           </p:cNvPr>
@@ -18932,7 +18932,7 @@
           <p:cNvPr id="6" name="">
             <a:extLst xmlns:a="http://schemas.openxmlformats.org/drawingml/2006/main">
               <a:ext uri="{FF2B5EF4-FFF2-40B4-BE49-F238E27FC236}">
-                <a16:creationId xmlns:a16="http://schemas.microsoft.com/office/drawing/2014/main" id="{49F90F02-0AFA-489F-BB6F-828A053BDBA1}"/>
+                <a16:creationId xmlns:a16="http://schemas.microsoft.com/office/drawing/2014/main" id="{4858B2AA-2ABA-4C00-847B-1C4442BEFB15}"/>
               </a:ext>
             </a:extLst>
           </p:cNvPr>
@@ -19329,7 +19329,7 @@
           <p:cNvPr id="7" name="">
             <a:extLst xmlns:a="http://schemas.openxmlformats.org/drawingml/2006/main">
               <a:ext uri="{FF2B5EF4-FFF2-40B4-BE49-F238E27FC236}">
-                <a16:creationId xmlns:a16="http://schemas.microsoft.com/office/drawing/2014/main" id="{4FFD34D8-B3CE-4341-949D-780B157F1467}"/>
+                <a16:creationId xmlns:a16="http://schemas.microsoft.com/office/drawing/2014/main" id="{A54C9949-F89C-4E02-A8AB-205F50CB6512}"/>
               </a:ext>
             </a:extLst>
           </p:cNvPr>
@@ -19360,7 +19360,7 @@
           <p:cNvPr id="8" name="">
             <a:extLst xmlns:a="http://schemas.openxmlformats.org/drawingml/2006/main">
               <a:ext uri="{FF2B5EF4-FFF2-40B4-BE49-F238E27FC236}">
-                <a16:creationId xmlns:a16="http://schemas.microsoft.com/office/drawing/2014/main" id="{100301F0-DF18-48C8-A98B-3A5D2656BF02}"/>
+                <a16:creationId xmlns:a16="http://schemas.microsoft.com/office/drawing/2014/main" id="{76992E8F-B878-4DE6-B426-2F1531933C6B}"/>
               </a:ext>
             </a:extLst>
           </p:cNvPr>
@@ -19417,7 +19417,7 @@
           <p:cNvPr id="9" name="">
             <a:extLst xmlns:a="http://schemas.openxmlformats.org/drawingml/2006/main">
               <a:ext uri="{FF2B5EF4-FFF2-40B4-BE49-F238E27FC236}">
-                <a16:creationId xmlns:a16="http://schemas.microsoft.com/office/drawing/2014/main" id="{F8451225-1C85-4BA4-B13E-AF3F56BD8D0A}"/>
+                <a16:creationId xmlns:a16="http://schemas.microsoft.com/office/drawing/2014/main" id="{8FD907C7-EAD8-43C8-9DAC-A528DAF5D71E}"/>
               </a:ext>
             </a:extLst>
           </p:cNvPr>
@@ -19474,7 +19474,7 @@
           <p:cNvPr id="10" name="">
             <a:extLst xmlns:a="http://schemas.openxmlformats.org/drawingml/2006/main">
               <a:ext uri="{FF2B5EF4-FFF2-40B4-BE49-F238E27FC236}">
-                <a16:creationId xmlns:a16="http://schemas.microsoft.com/office/drawing/2014/main" id="{596BF457-2D48-4187-9655-57186DE6BA10}"/>
+                <a16:creationId xmlns:a16="http://schemas.microsoft.com/office/drawing/2014/main" id="{01010B9B-4F56-4451-B87E-A43609541360}"/>
               </a:ext>
             </a:extLst>
           </p:cNvPr>
@@ -19554,7 +19554,7 @@
           <p:cNvPr id="11" name="">
             <a:extLst xmlns:a="http://schemas.openxmlformats.org/drawingml/2006/main">
               <a:ext uri="{FF2B5EF4-FFF2-40B4-BE49-F238E27FC236}">
-                <a16:creationId xmlns:a16="http://schemas.microsoft.com/office/drawing/2014/main" id="{AAF66544-035A-492A-AC50-69729B3C5D2D}"/>
+                <a16:creationId xmlns:a16="http://schemas.microsoft.com/office/drawing/2014/main" id="{D35CAECB-6BAD-41B9-81DF-B737AC7B4B33}"/>
               </a:ext>
             </a:extLst>
           </p:cNvPr>
@@ -19611,7 +19611,7 @@
           <p:cNvPr id="12" name="">
             <a:extLst xmlns:a="http://schemas.openxmlformats.org/drawingml/2006/main">
               <a:ext uri="{FF2B5EF4-FFF2-40B4-BE49-F238E27FC236}">
-                <a16:creationId xmlns:a16="http://schemas.microsoft.com/office/drawing/2014/main" id="{AF37BBE1-1558-45C2-8FED-2C8F706D7EC1}"/>
+                <a16:creationId xmlns:a16="http://schemas.microsoft.com/office/drawing/2014/main" id="{B823F36C-93E1-41FB-B2E1-2FDBCC930F13}"/>
               </a:ext>
             </a:extLst>
           </p:cNvPr>
@@ -19668,7 +19668,7 @@
           <p:cNvPr id="13" name="">
             <a:extLst xmlns:a="http://schemas.openxmlformats.org/drawingml/2006/main">
               <a:ext uri="{FF2B5EF4-FFF2-40B4-BE49-F238E27FC236}">
-                <a16:creationId xmlns:a16="http://schemas.microsoft.com/office/drawing/2014/main" id="{1301D508-5C60-4520-9FBC-62C3202EF775}"/>
+                <a16:creationId xmlns:a16="http://schemas.microsoft.com/office/drawing/2014/main" id="{DD934087-9E15-4CED-A935-E2C6391E245C}"/>
               </a:ext>
             </a:extLst>
           </p:cNvPr>
@@ -19725,7 +19725,7 @@
           <p:cNvPr id="14" name="">
             <a:extLst xmlns:a="http://schemas.openxmlformats.org/drawingml/2006/main">
               <a:ext uri="{FF2B5EF4-FFF2-40B4-BE49-F238E27FC236}">
-                <a16:creationId xmlns:a16="http://schemas.microsoft.com/office/drawing/2014/main" id="{CDD46459-9240-43C9-BC2C-E9F660C60D23}"/>
+                <a16:creationId xmlns:a16="http://schemas.microsoft.com/office/drawing/2014/main" id="{A091C2E9-E1FC-40A4-9EBE-E75D114554C2}"/>
               </a:ext>
             </a:extLst>
           </p:cNvPr>
@@ -19782,7 +19782,7 @@
           <p:cNvPr id="15" name="">
             <a:extLst xmlns:a="http://schemas.openxmlformats.org/drawingml/2006/main">
               <a:ext uri="{FF2B5EF4-FFF2-40B4-BE49-F238E27FC236}">
-                <a16:creationId xmlns:a16="http://schemas.microsoft.com/office/drawing/2014/main" id="{9930EBBE-8726-4F9F-A267-AEC103331FB9}"/>
+                <a16:creationId xmlns:a16="http://schemas.microsoft.com/office/drawing/2014/main" id="{35EB0765-D50E-432D-B6FD-E7C1C2061769}"/>
               </a:ext>
             </a:extLst>
           </p:cNvPr>
@@ -19839,7 +19839,7 @@
           <p:cNvPr id="16" name="">
             <a:extLst xmlns:a="http://schemas.openxmlformats.org/drawingml/2006/main">
               <a:ext uri="{FF2B5EF4-FFF2-40B4-BE49-F238E27FC236}">
-                <a16:creationId xmlns:a16="http://schemas.microsoft.com/office/drawing/2014/main" id="{775A18BC-841B-4708-B7C4-A7429ADFB4AA}"/>
+                <a16:creationId xmlns:a16="http://schemas.microsoft.com/office/drawing/2014/main" id="{CE68A504-B583-4F07-9A71-B04CA7B1DFBD}"/>
               </a:ext>
             </a:extLst>
           </p:cNvPr>
@@ -19919,7 +19919,7 @@
           <p:cNvPr id="17" name="">
             <a:extLst xmlns:a="http://schemas.openxmlformats.org/drawingml/2006/main">
               <a:ext uri="{FF2B5EF4-FFF2-40B4-BE49-F238E27FC236}">
-                <a16:creationId xmlns:a16="http://schemas.microsoft.com/office/drawing/2014/main" id="{484A86D0-E5FB-4B04-814B-E5ACF299DCF7}"/>
+                <a16:creationId xmlns:a16="http://schemas.microsoft.com/office/drawing/2014/main" id="{D41BF2DE-77B2-4405-8D85-C9E323776774}"/>
               </a:ext>
             </a:extLst>
           </p:cNvPr>
@@ -19976,7 +19976,7 @@
           <p:cNvPr id="18" name="">
             <a:extLst xmlns:a="http://schemas.openxmlformats.org/drawingml/2006/main">
               <a:ext uri="{FF2B5EF4-FFF2-40B4-BE49-F238E27FC236}">
-                <a16:creationId xmlns:a16="http://schemas.microsoft.com/office/drawing/2014/main" id="{C46530F3-8AC2-4AF5-B687-1683ADAEE990}"/>
+                <a16:creationId xmlns:a16="http://schemas.microsoft.com/office/drawing/2014/main" id="{9C9D1C15-1F1A-4B10-A357-AC314D9068DE}"/>
               </a:ext>
             </a:extLst>
           </p:cNvPr>
@@ -20033,7 +20033,7 @@
           <p:cNvPr id="19" name="">
             <a:extLst xmlns:a="http://schemas.openxmlformats.org/drawingml/2006/main">
               <a:ext uri="{FF2B5EF4-FFF2-40B4-BE49-F238E27FC236}">
-                <a16:creationId xmlns:a16="http://schemas.microsoft.com/office/drawing/2014/main" id="{3CD45131-2BF0-404F-AB07-FB732778B042}"/>
+                <a16:creationId xmlns:a16="http://schemas.microsoft.com/office/drawing/2014/main" id="{78220858-A35C-4BFD-A44B-2187CE63DDF8}"/>
               </a:ext>
             </a:extLst>
           </p:cNvPr>
@@ -20064,7 +20064,7 @@
           <p:cNvPr id="20" name="">
             <a:extLst xmlns:a="http://schemas.openxmlformats.org/drawingml/2006/main">
               <a:ext uri="{FF2B5EF4-FFF2-40B4-BE49-F238E27FC236}">
-                <a16:creationId xmlns:a16="http://schemas.microsoft.com/office/drawing/2014/main" id="{351EC217-E83B-46ED-9A98-F92C273252D9}"/>
+                <a16:creationId xmlns:a16="http://schemas.microsoft.com/office/drawing/2014/main" id="{00E82593-C067-4C41-9880-9C576D44C95F}"/>
               </a:ext>
             </a:extLst>
           </p:cNvPr>
@@ -20119,7 +20119,7 @@
     </p:spTree>
     <p:extLst>
       <p:ext uri="{BB962C8B-B14F-4D97-AF65-F5344CB8AC3E}">
-        <p14:creationId xmlns:p14="http://schemas.microsoft.com/office/powerpoint/2010/main" val="1372644464"/>
+        <p14:creationId xmlns:p14="http://schemas.microsoft.com/office/powerpoint/2010/main" val="570653259"/>
       </p:ext>
     </p:extLst>
   </p:cSld>
@@ -20150,7 +20150,7 @@
           <p:cNvPr id="24" name="">
             <a:extLst xmlns:a="http://schemas.openxmlformats.org/drawingml/2006/main">
               <a:ext uri="{FF2B5EF4-FFF2-40B4-BE49-F238E27FC236}">
-                <a16:creationId xmlns:a16="http://schemas.microsoft.com/office/drawing/2014/main" id="{BDF3841C-F7AF-418C-95D9-39C817F7ADCE}"/>
+                <a16:creationId xmlns:a16="http://schemas.microsoft.com/office/drawing/2014/main" id="{4745F1A7-6A2D-4F63-9AD4-329BF86AA520}"/>
               </a:ext>
             </a:extLst>
           </p:cNvPr>
@@ -20207,7 +20207,7 @@
           <p:cNvPr id="2" name="">
             <a:extLst xmlns:a="http://schemas.openxmlformats.org/drawingml/2006/main">
               <a:ext uri="{FF2B5EF4-FFF2-40B4-BE49-F238E27FC236}">
-                <a16:creationId xmlns:a16="http://schemas.microsoft.com/office/drawing/2014/main" id="{ADC82B60-D6DA-4448-B619-578383027BDA}"/>
+                <a16:creationId xmlns:a16="http://schemas.microsoft.com/office/drawing/2014/main" id="{702DFDB1-1238-4C05-B515-D01ACD554985}"/>
               </a:ext>
             </a:extLst>
           </p:cNvPr>
@@ -20238,7 +20238,7 @@
           <p:cNvPr id="3" name="">
             <a:extLst xmlns:a="http://schemas.openxmlformats.org/drawingml/2006/main">
               <a:ext uri="{FF2B5EF4-FFF2-40B4-BE49-F238E27FC236}">
-                <a16:creationId xmlns:a16="http://schemas.microsoft.com/office/drawing/2014/main" id="{31BDD0CA-BA3D-4E39-96D9-FB476D3E9A67}"/>
+                <a16:creationId xmlns:a16="http://schemas.microsoft.com/office/drawing/2014/main" id="{CA35A2F6-7F47-48C3-8E15-BFE6AEABAAFF}"/>
               </a:ext>
             </a:extLst>
           </p:cNvPr>
@@ -20295,7 +20295,7 @@
           <p:cNvPr id="4" name="">
             <a:extLst xmlns:a="http://schemas.openxmlformats.org/drawingml/2006/main">
               <a:ext uri="{FF2B5EF4-FFF2-40B4-BE49-F238E27FC236}">
-                <a16:creationId xmlns:a16="http://schemas.microsoft.com/office/drawing/2014/main" id="{B10EEC75-4D36-4D8C-96BC-DB20C23B628B}"/>
+                <a16:creationId xmlns:a16="http://schemas.microsoft.com/office/drawing/2014/main" id="{2C89C9BA-6AB4-4149-AABB-ADAE75652076}"/>
               </a:ext>
             </a:extLst>
           </p:cNvPr>
@@ -20352,7 +20352,7 @@
           <p:cNvPr id="5" name="">
             <a:extLst xmlns:a="http://schemas.openxmlformats.org/drawingml/2006/main">
               <a:ext uri="{FF2B5EF4-FFF2-40B4-BE49-F238E27FC236}">
-                <a16:creationId xmlns:a16="http://schemas.microsoft.com/office/drawing/2014/main" id="{941670CE-65A4-49D7-9D3E-44A2792FA027}"/>
+                <a16:creationId xmlns:a16="http://schemas.microsoft.com/office/drawing/2014/main" id="{3F5A34C9-F16B-4597-913F-2AE0FF7A4D52}"/>
               </a:ext>
             </a:extLst>
           </p:cNvPr>
@@ -20409,7 +20409,7 @@
           <p:cNvPr id="6" name="">
             <a:extLst xmlns:a="http://schemas.openxmlformats.org/drawingml/2006/main">
               <a:ext uri="{FF2B5EF4-FFF2-40B4-BE49-F238E27FC236}">
-                <a16:creationId xmlns:a16="http://schemas.microsoft.com/office/drawing/2014/main" id="{13D692FD-1C2D-450C-AC06-C705019DF846}"/>
+                <a16:creationId xmlns:a16="http://schemas.microsoft.com/office/drawing/2014/main" id="{19D55E2C-C5FA-41CD-850C-F3CFEE9B4648}"/>
               </a:ext>
             </a:extLst>
           </p:cNvPr>
@@ -20442,7 +20442,7 @@
           <p:cNvPr id="7" name="">
             <a:extLst xmlns:a="http://schemas.openxmlformats.org/drawingml/2006/main">
               <a:ext uri="{FF2B5EF4-FFF2-40B4-BE49-F238E27FC236}">
-                <a16:creationId xmlns:a16="http://schemas.microsoft.com/office/drawing/2014/main" id="{B91BFF92-D40D-481B-9DE0-072934834459}"/>
+                <a16:creationId xmlns:a16="http://schemas.microsoft.com/office/drawing/2014/main" id="{DE86E842-F69D-4C58-A59D-908A1EDCC8B4}"/>
               </a:ext>
             </a:extLst>
           </p:cNvPr>
@@ -20522,7 +20522,7 @@
           <p:cNvPr id="8" name="">
             <a:extLst xmlns:a="http://schemas.openxmlformats.org/drawingml/2006/main">
               <a:ext uri="{FF2B5EF4-FFF2-40B4-BE49-F238E27FC236}">
-                <a16:creationId xmlns:a16="http://schemas.microsoft.com/office/drawing/2014/main" id="{52BEE6FF-FF7D-4148-BD1E-2D7A479AC72C}"/>
+                <a16:creationId xmlns:a16="http://schemas.microsoft.com/office/drawing/2014/main" id="{EC6A4C67-CD6D-4D6C-9FF8-5F669F5AC49C}"/>
               </a:ext>
             </a:extLst>
           </p:cNvPr>
@@ -20625,7 +20625,7 @@
           <p:cNvPr id="9" name="">
             <a:extLst xmlns:a="http://schemas.openxmlformats.org/drawingml/2006/main">
               <a:ext uri="{FF2B5EF4-FFF2-40B4-BE49-F238E27FC236}">
-                <a16:creationId xmlns:a16="http://schemas.microsoft.com/office/drawing/2014/main" id="{FB5E77F3-337F-4DCB-B119-CE3B62A85ABD}"/>
+                <a16:creationId xmlns:a16="http://schemas.microsoft.com/office/drawing/2014/main" id="{4AF6DD97-1287-4629-B141-9FA0FA0CF42A}"/>
               </a:ext>
             </a:extLst>
           </p:cNvPr>
@@ -20658,7 +20658,7 @@
           <p:cNvPr id="10" name="">
             <a:extLst xmlns:a="http://schemas.openxmlformats.org/drawingml/2006/main">
               <a:ext uri="{FF2B5EF4-FFF2-40B4-BE49-F238E27FC236}">
-                <a16:creationId xmlns:a16="http://schemas.microsoft.com/office/drawing/2014/main" id="{A6451BD0-2442-4212-9BEE-9727FE00D3EE}"/>
+                <a16:creationId xmlns:a16="http://schemas.microsoft.com/office/drawing/2014/main" id="{F6923AD1-79AE-4E11-A556-6E11CD8B8EF3}"/>
               </a:ext>
             </a:extLst>
           </p:cNvPr>
@@ -20738,7 +20738,7 @@
           <p:cNvPr id="11" name="">
             <a:extLst xmlns:a="http://schemas.openxmlformats.org/drawingml/2006/main">
               <a:ext uri="{FF2B5EF4-FFF2-40B4-BE49-F238E27FC236}">
-                <a16:creationId xmlns:a16="http://schemas.microsoft.com/office/drawing/2014/main" id="{E711C690-8885-4BF0-BF00-A72DC0541E7C}"/>
+                <a16:creationId xmlns:a16="http://schemas.microsoft.com/office/drawing/2014/main" id="{CE8D02B5-BB9F-49AE-822A-5A69560752DB}"/>
               </a:ext>
             </a:extLst>
           </p:cNvPr>
@@ -20841,7 +20841,7 @@
           <p:cNvPr id="12" name="">
             <a:extLst xmlns:a="http://schemas.openxmlformats.org/drawingml/2006/main">
               <a:ext uri="{FF2B5EF4-FFF2-40B4-BE49-F238E27FC236}">
-                <a16:creationId xmlns:a16="http://schemas.microsoft.com/office/drawing/2014/main" id="{7E44A160-B0D1-4234-A091-A4CC7B08BD53}"/>
+                <a16:creationId xmlns:a16="http://schemas.microsoft.com/office/drawing/2014/main" id="{10FBAC5C-55DB-4943-9B13-5CE73295BE98}"/>
               </a:ext>
             </a:extLst>
           </p:cNvPr>
@@ -20874,7 +20874,7 @@
           <p:cNvPr id="13" name="">
             <a:extLst xmlns:a="http://schemas.openxmlformats.org/drawingml/2006/main">
               <a:ext uri="{FF2B5EF4-FFF2-40B4-BE49-F238E27FC236}">
-                <a16:creationId xmlns:a16="http://schemas.microsoft.com/office/drawing/2014/main" id="{3E761897-087C-47A5-A04E-D63220F6AFC9}"/>
+                <a16:creationId xmlns:a16="http://schemas.microsoft.com/office/drawing/2014/main" id="{D604CDD0-F4FB-4466-A086-0CEB2248D9FF}"/>
               </a:ext>
             </a:extLst>
           </p:cNvPr>
@@ -20954,7 +20954,7 @@
           <p:cNvPr id="14" name="">
             <a:extLst xmlns:a="http://schemas.openxmlformats.org/drawingml/2006/main">
               <a:ext uri="{FF2B5EF4-FFF2-40B4-BE49-F238E27FC236}">
-                <a16:creationId xmlns:a16="http://schemas.microsoft.com/office/drawing/2014/main" id="{8D813124-D9FF-41B5-8448-DFDA85C6FEA2}"/>
+                <a16:creationId xmlns:a16="http://schemas.microsoft.com/office/drawing/2014/main" id="{2EA5774D-928C-435F-85C8-86EBFA8C94E2}"/>
               </a:ext>
             </a:extLst>
           </p:cNvPr>
@@ -21057,7 +21057,7 @@
           <p:cNvPr id="15" name="">
             <a:extLst xmlns:a="http://schemas.openxmlformats.org/drawingml/2006/main">
               <a:ext uri="{FF2B5EF4-FFF2-40B4-BE49-F238E27FC236}">
-                <a16:creationId xmlns:a16="http://schemas.microsoft.com/office/drawing/2014/main" id="{CC1505B2-6804-42F1-A60F-FCFED8B33345}"/>
+                <a16:creationId xmlns:a16="http://schemas.microsoft.com/office/drawing/2014/main" id="{4F765BD9-976B-45C7-B94D-DEB5057D5A74}"/>
               </a:ext>
             </a:extLst>
           </p:cNvPr>
@@ -21090,7 +21090,7 @@
           <p:cNvPr id="16" name="">
             <a:extLst xmlns:a="http://schemas.openxmlformats.org/drawingml/2006/main">
               <a:ext uri="{FF2B5EF4-FFF2-40B4-BE49-F238E27FC236}">
-                <a16:creationId xmlns:a16="http://schemas.microsoft.com/office/drawing/2014/main" id="{C1082BC7-DA93-4806-8CFE-380EC3C22D97}"/>
+                <a16:creationId xmlns:a16="http://schemas.microsoft.com/office/drawing/2014/main" id="{921EA4C5-123B-422A-A62D-0520A86075D5}"/>
               </a:ext>
             </a:extLst>
           </p:cNvPr>
@@ -21170,7 +21170,7 @@
           <p:cNvPr id="17" name="">
             <a:extLst xmlns:a="http://schemas.openxmlformats.org/drawingml/2006/main">
               <a:ext uri="{FF2B5EF4-FFF2-40B4-BE49-F238E27FC236}">
-                <a16:creationId xmlns:a16="http://schemas.microsoft.com/office/drawing/2014/main" id="{AA158DEF-B1A0-4E30-B367-BF0B43A9D532}"/>
+                <a16:creationId xmlns:a16="http://schemas.microsoft.com/office/drawing/2014/main" id="{A46F67C9-DDA7-40D5-B874-7D25E40302AF}"/>
               </a:ext>
             </a:extLst>
           </p:cNvPr>
@@ -21351,7 +21351,7 @@
           <p:cNvPr id="21" name="">
             <a:extLst xmlns:a="http://schemas.openxmlformats.org/drawingml/2006/main">
               <a:ext uri="{FF2B5EF4-FFF2-40B4-BE49-F238E27FC236}">
-                <a16:creationId xmlns:a16="http://schemas.microsoft.com/office/drawing/2014/main" id="{A2107EDC-C791-4910-AAE9-FC62F020875F}"/>
+                <a16:creationId xmlns:a16="http://schemas.microsoft.com/office/drawing/2014/main" id="{9535C544-CC2A-4CDE-8F05-063AD9D223F6}"/>
               </a:ext>
             </a:extLst>
           </p:cNvPr>
@@ -21408,7 +21408,7 @@
           <p:cNvPr id="22" name="">
             <a:extLst xmlns:a="http://schemas.openxmlformats.org/drawingml/2006/main">
               <a:ext uri="{FF2B5EF4-FFF2-40B4-BE49-F238E27FC236}">
-                <a16:creationId xmlns:a16="http://schemas.microsoft.com/office/drawing/2014/main" id="{44AC5897-0AC1-458B-A1EC-A3A97AAB1102}"/>
+                <a16:creationId xmlns:a16="http://schemas.microsoft.com/office/drawing/2014/main" id="{EF1A622C-2DC3-475F-ABE4-A9C0CAE4F039}"/>
               </a:ext>
             </a:extLst>
           </p:cNvPr>
@@ -21439,7 +21439,7 @@
           <p:cNvPr id="23" name="">
             <a:extLst xmlns:a="http://schemas.openxmlformats.org/drawingml/2006/main">
               <a:ext uri="{FF2B5EF4-FFF2-40B4-BE49-F238E27FC236}">
-                <a16:creationId xmlns:a16="http://schemas.microsoft.com/office/drawing/2014/main" id="{B7C0E204-B137-4AF6-8178-E7B4093F2308}"/>
+                <a16:creationId xmlns:a16="http://schemas.microsoft.com/office/drawing/2014/main" id="{14F257EA-C488-49A8-A5A9-632811693E16}"/>
               </a:ext>
             </a:extLst>
           </p:cNvPr>
@@ -21494,7 +21494,7 @@
     </p:spTree>
     <p:extLst>
       <p:ext uri="{BB962C8B-B14F-4D97-AF65-F5344CB8AC3E}">
-        <p14:creationId xmlns:p14="http://schemas.microsoft.com/office/powerpoint/2010/main" val="1998335131"/>
+        <p14:creationId xmlns:p14="http://schemas.microsoft.com/office/powerpoint/2010/main" val="251191414"/>
       </p:ext>
     </p:extLst>
   </p:cSld>
@@ -21525,7 +21525,7 @@
           <p:cNvPr id="32" name="">
             <a:extLst xmlns:a="http://schemas.openxmlformats.org/drawingml/2006/main">
               <a:ext uri="{FF2B5EF4-FFF2-40B4-BE49-F238E27FC236}">
-                <a16:creationId xmlns:a16="http://schemas.microsoft.com/office/drawing/2014/main" id="{278D09C3-207F-4D61-BD89-A35E5CB2FBE6}"/>
+                <a16:creationId xmlns:a16="http://schemas.microsoft.com/office/drawing/2014/main" id="{789733D1-EABD-4D9F-8ECC-F911844F2356}"/>
               </a:ext>
             </a:extLst>
           </p:cNvPr>
@@ -21605,7 +21605,7 @@
           <p:cNvPr id="2" name="">
             <a:extLst xmlns:a="http://schemas.openxmlformats.org/drawingml/2006/main">
               <a:ext uri="{FF2B5EF4-FFF2-40B4-BE49-F238E27FC236}">
-                <a16:creationId xmlns:a16="http://schemas.microsoft.com/office/drawing/2014/main" id="{7D9FDBC3-D2CD-4D89-BCBC-4C2CB79E57CD}"/>
+                <a16:creationId xmlns:a16="http://schemas.microsoft.com/office/drawing/2014/main" id="{56A34B9F-E9E6-4C6D-9231-B438B699266E}"/>
               </a:ext>
             </a:extLst>
           </p:cNvPr>
@@ -21636,7 +21636,7 @@
           <p:cNvPr id="3" name="">
             <a:extLst xmlns:a="http://schemas.openxmlformats.org/drawingml/2006/main">
               <a:ext uri="{FF2B5EF4-FFF2-40B4-BE49-F238E27FC236}">
-                <a16:creationId xmlns:a16="http://schemas.microsoft.com/office/drawing/2014/main" id="{C5DBD966-B4BB-4A68-A186-BFBBABEC3C96}"/>
+                <a16:creationId xmlns:a16="http://schemas.microsoft.com/office/drawing/2014/main" id="{888254F1-4396-4422-869A-C0F0FD0C4C7F}"/>
               </a:ext>
             </a:extLst>
           </p:cNvPr>
@@ -21693,7 +21693,7 @@
           <p:cNvPr id="4" name="">
             <a:extLst xmlns:a="http://schemas.openxmlformats.org/drawingml/2006/main">
               <a:ext uri="{FF2B5EF4-FFF2-40B4-BE49-F238E27FC236}">
-                <a16:creationId xmlns:a16="http://schemas.microsoft.com/office/drawing/2014/main" id="{3DE03A46-5A85-47E6-914A-30418E9DFDB2}"/>
+                <a16:creationId xmlns:a16="http://schemas.microsoft.com/office/drawing/2014/main" id="{CCA32B5F-96EF-48C8-BDE4-6AD1C6E8FE66}"/>
               </a:ext>
             </a:extLst>
           </p:cNvPr>
@@ -21750,7 +21750,7 @@
           <p:cNvPr id="5" name="">
             <a:extLst xmlns:a="http://schemas.openxmlformats.org/drawingml/2006/main">
               <a:ext uri="{FF2B5EF4-FFF2-40B4-BE49-F238E27FC236}">
-                <a16:creationId xmlns:a16="http://schemas.microsoft.com/office/drawing/2014/main" id="{E8F62ADF-7728-47A8-A10C-04360D5DB642}"/>
+                <a16:creationId xmlns:a16="http://schemas.microsoft.com/office/drawing/2014/main" id="{37140226-C4B1-43A8-B12A-52BAA07376D3}"/>
               </a:ext>
             </a:extLst>
           </p:cNvPr>
@@ -21807,7 +21807,7 @@
           <p:cNvPr id="6" name="">
             <a:extLst xmlns:a="http://schemas.openxmlformats.org/drawingml/2006/main">
               <a:ext uri="{FF2B5EF4-FFF2-40B4-BE49-F238E27FC236}">
-                <a16:creationId xmlns:a16="http://schemas.microsoft.com/office/drawing/2014/main" id="{6914F6AE-E933-4A95-9836-98450472D511}"/>
+                <a16:creationId xmlns:a16="http://schemas.microsoft.com/office/drawing/2014/main" id="{DB3D6269-FF95-476A-9D01-2EB1F2E44D92}"/>
               </a:ext>
             </a:extLst>
           </p:cNvPr>
@@ -21864,7 +21864,7 @@
           <p:cNvPr id="7" name="">
             <a:extLst xmlns:a="http://schemas.openxmlformats.org/drawingml/2006/main">
               <a:ext uri="{FF2B5EF4-FFF2-40B4-BE49-F238E27FC236}">
-                <a16:creationId xmlns:a16="http://schemas.microsoft.com/office/drawing/2014/main" id="{3017FCCB-0748-4CCC-BC2F-5DDC28D57E3B}"/>
+                <a16:creationId xmlns:a16="http://schemas.microsoft.com/office/drawing/2014/main" id="{0C9A4D0D-87DB-4FD4-9E55-73155BED716A}"/>
               </a:ext>
             </a:extLst>
           </p:cNvPr>
@@ -21921,7 +21921,7 @@
           <p:cNvPr id="8" name="">
             <a:extLst xmlns:a="http://schemas.openxmlformats.org/drawingml/2006/main">
               <a:ext uri="{FF2B5EF4-FFF2-40B4-BE49-F238E27FC236}">
-                <a16:creationId xmlns:a16="http://schemas.microsoft.com/office/drawing/2014/main" id="{2C707BC9-1B21-4A0C-A8CC-5E0520F5415B}"/>
+                <a16:creationId xmlns:a16="http://schemas.microsoft.com/office/drawing/2014/main" id="{A7E3CFDF-FD9C-4B1F-BBFD-56DBA00F97AD}"/>
               </a:ext>
             </a:extLst>
           </p:cNvPr>
@@ -21978,7 +21978,7 @@
           <p:cNvPr id="9" name="">
             <a:extLst xmlns:a="http://schemas.openxmlformats.org/drawingml/2006/main">
               <a:ext uri="{FF2B5EF4-FFF2-40B4-BE49-F238E27FC236}">
-                <a16:creationId xmlns:a16="http://schemas.microsoft.com/office/drawing/2014/main" id="{AF3F3368-5E0E-4E7A-B60A-76E17AEDC730}"/>
+                <a16:creationId xmlns:a16="http://schemas.microsoft.com/office/drawing/2014/main" id="{085B3AA2-571F-4492-9EE4-227612F25115}"/>
               </a:ext>
             </a:extLst>
           </p:cNvPr>
@@ -22035,7 +22035,7 @@
           <p:cNvPr id="10" name="">
             <a:extLst xmlns:a="http://schemas.openxmlformats.org/drawingml/2006/main">
               <a:ext uri="{FF2B5EF4-FFF2-40B4-BE49-F238E27FC236}">
-                <a16:creationId xmlns:a16="http://schemas.microsoft.com/office/drawing/2014/main" id="{E4526631-DB9E-434B-9354-28768D79F478}"/>
+                <a16:creationId xmlns:a16="http://schemas.microsoft.com/office/drawing/2014/main" id="{B2B52880-F1F2-40BB-8DD2-31F71F2C6E85}"/>
               </a:ext>
             </a:extLst>
           </p:cNvPr>
@@ -22066,7 +22066,7 @@
           <p:cNvPr id="11" name="">
             <a:extLst xmlns:a="http://schemas.openxmlformats.org/drawingml/2006/main">
               <a:ext uri="{FF2B5EF4-FFF2-40B4-BE49-F238E27FC236}">
-                <a16:creationId xmlns:a16="http://schemas.microsoft.com/office/drawing/2014/main" id="{24AD4E69-9C97-4C98-96E5-D1919EA15C45}"/>
+                <a16:creationId xmlns:a16="http://schemas.microsoft.com/office/drawing/2014/main" id="{59121C58-B73A-49E0-9DAD-A9D0A900D1C6}"/>
               </a:ext>
             </a:extLst>
           </p:cNvPr>
@@ -22123,7 +22123,7 @@
           <p:cNvPr id="12" name="">
             <a:extLst xmlns:a="http://schemas.openxmlformats.org/drawingml/2006/main">
               <a:ext uri="{FF2B5EF4-FFF2-40B4-BE49-F238E27FC236}">
-                <a16:creationId xmlns:a16="http://schemas.microsoft.com/office/drawing/2014/main" id="{515B8B87-FF64-4B72-88F7-8F0DDD6F9130}"/>
+                <a16:creationId xmlns:a16="http://schemas.microsoft.com/office/drawing/2014/main" id="{4773D665-8A19-4552-AECF-4F3F88C5D036}"/>
               </a:ext>
             </a:extLst>
           </p:cNvPr>
@@ -22180,7 +22180,7 @@
           <p:cNvPr id="13" name="">
             <a:extLst xmlns:a="http://schemas.openxmlformats.org/drawingml/2006/main">
               <a:ext uri="{FF2B5EF4-FFF2-40B4-BE49-F238E27FC236}">
-                <a16:creationId xmlns:a16="http://schemas.microsoft.com/office/drawing/2014/main" id="{C5AD9A97-7D7F-4471-B9CF-94C5308C3F21}"/>
+                <a16:creationId xmlns:a16="http://schemas.microsoft.com/office/drawing/2014/main" id="{C54379BB-F730-4332-A636-2D176261CE67}"/>
               </a:ext>
             </a:extLst>
           </p:cNvPr>
@@ -22237,7 +22237,7 @@
           <p:cNvPr id="14" name="">
             <a:extLst xmlns:a="http://schemas.openxmlformats.org/drawingml/2006/main">
               <a:ext uri="{FF2B5EF4-FFF2-40B4-BE49-F238E27FC236}">
-                <a16:creationId xmlns:a16="http://schemas.microsoft.com/office/drawing/2014/main" id="{2E28FBFF-B5F5-49A3-8DF8-5AB5D665F080}"/>
+                <a16:creationId xmlns:a16="http://schemas.microsoft.com/office/drawing/2014/main" id="{430F1E43-C40A-4523-BF3B-60437F02AEDA}"/>
               </a:ext>
             </a:extLst>
           </p:cNvPr>
@@ -22294,7 +22294,7 @@
           <p:cNvPr id="15" name="">
             <a:extLst xmlns:a="http://schemas.openxmlformats.org/drawingml/2006/main">
               <a:ext uri="{FF2B5EF4-FFF2-40B4-BE49-F238E27FC236}">
-                <a16:creationId xmlns:a16="http://schemas.microsoft.com/office/drawing/2014/main" id="{CC0A3771-65E5-4DDC-B171-DE59B283010A}"/>
+                <a16:creationId xmlns:a16="http://schemas.microsoft.com/office/drawing/2014/main" id="{32B8D9B0-0607-44CA-9CE7-4DDB7A40B73E}"/>
               </a:ext>
             </a:extLst>
           </p:cNvPr>
@@ -22351,7 +22351,7 @@
           <p:cNvPr id="16" name="">
             <a:extLst xmlns:a="http://schemas.openxmlformats.org/drawingml/2006/main">
               <a:ext uri="{FF2B5EF4-FFF2-40B4-BE49-F238E27FC236}">
-                <a16:creationId xmlns:a16="http://schemas.microsoft.com/office/drawing/2014/main" id="{F9230BF5-B4F2-4040-98DC-AAC35C1F2CED}"/>
+                <a16:creationId xmlns:a16="http://schemas.microsoft.com/office/drawing/2014/main" id="{2938DC92-C4FA-4D6B-8E13-597071B5A0FB}"/>
               </a:ext>
             </a:extLst>
           </p:cNvPr>
@@ -22408,7 +22408,7 @@
           <p:cNvPr id="17" name="">
             <a:extLst xmlns:a="http://schemas.openxmlformats.org/drawingml/2006/main">
               <a:ext uri="{FF2B5EF4-FFF2-40B4-BE49-F238E27FC236}">
-                <a16:creationId xmlns:a16="http://schemas.microsoft.com/office/drawing/2014/main" id="{3C5DE535-36CD-4222-96DB-3E809D82699B}"/>
+                <a16:creationId xmlns:a16="http://schemas.microsoft.com/office/drawing/2014/main" id="{8F5C8FAB-BD08-4C10-9EE5-93E5D28DA52B}"/>
               </a:ext>
             </a:extLst>
           </p:cNvPr>
@@ -22465,7 +22465,7 @@
           <p:cNvPr id="18" name="">
             <a:extLst xmlns:a="http://schemas.openxmlformats.org/drawingml/2006/main">
               <a:ext uri="{FF2B5EF4-FFF2-40B4-BE49-F238E27FC236}">
-                <a16:creationId xmlns:a16="http://schemas.microsoft.com/office/drawing/2014/main" id="{66B3A6C3-76DF-4545-946C-7D1BEBA33942}"/>
+                <a16:creationId xmlns:a16="http://schemas.microsoft.com/office/drawing/2014/main" id="{9B652C58-BB95-4CF7-A19F-7A127F3242E4}"/>
               </a:ext>
             </a:extLst>
           </p:cNvPr>
@@ -22522,7 +22522,7 @@
           <p:cNvPr id="19" name="">
             <a:extLst xmlns:a="http://schemas.openxmlformats.org/drawingml/2006/main">
               <a:ext uri="{FF2B5EF4-FFF2-40B4-BE49-F238E27FC236}">
-                <a16:creationId xmlns:a16="http://schemas.microsoft.com/office/drawing/2014/main" id="{DF4714C3-E0E1-470A-87C2-DA9DF443E17F}"/>
+                <a16:creationId xmlns:a16="http://schemas.microsoft.com/office/drawing/2014/main" id="{1E77ACA4-750B-41F4-8A52-85BFDCB17EDF}"/>
               </a:ext>
             </a:extLst>
           </p:cNvPr>
@@ -22579,7 +22579,7 @@
           <p:cNvPr id="20" name="">
             <a:extLst xmlns:a="http://schemas.openxmlformats.org/drawingml/2006/main">
               <a:ext uri="{FF2B5EF4-FFF2-40B4-BE49-F238E27FC236}">
-                <a16:creationId xmlns:a16="http://schemas.microsoft.com/office/drawing/2014/main" id="{58C19518-CF54-4747-9EAD-BB89D7F75A14}"/>
+                <a16:creationId xmlns:a16="http://schemas.microsoft.com/office/drawing/2014/main" id="{4948B49D-074D-4A00-B8A0-17200B09A80D}"/>
               </a:ext>
             </a:extLst>
           </p:cNvPr>
@@ -22636,7 +22636,7 @@
           <p:cNvPr id="21" name="">
             <a:extLst xmlns:a="http://schemas.openxmlformats.org/drawingml/2006/main">
               <a:ext uri="{FF2B5EF4-FFF2-40B4-BE49-F238E27FC236}">
-                <a16:creationId xmlns:a16="http://schemas.microsoft.com/office/drawing/2014/main" id="{C90907E6-BF48-4445-96CD-0C7B89376F9F}"/>
+                <a16:creationId xmlns:a16="http://schemas.microsoft.com/office/drawing/2014/main" id="{60768A88-0B9E-4489-96BA-8D6D0307579C}"/>
               </a:ext>
             </a:extLst>
           </p:cNvPr>
@@ -22693,7 +22693,7 @@
           <p:cNvPr id="22" name="">
             <a:extLst xmlns:a="http://schemas.openxmlformats.org/drawingml/2006/main">
               <a:ext uri="{FF2B5EF4-FFF2-40B4-BE49-F238E27FC236}">
-                <a16:creationId xmlns:a16="http://schemas.microsoft.com/office/drawing/2014/main" id="{319E0C1A-18C5-4239-AF64-16A978F8B3EF}"/>
+                <a16:creationId xmlns:a16="http://schemas.microsoft.com/office/drawing/2014/main" id="{AC84E710-A7D6-42F9-89EC-6FF52D514E66}"/>
               </a:ext>
             </a:extLst>
           </p:cNvPr>
@@ -22750,7 +22750,7 @@
           <p:cNvPr id="23" name="">
             <a:extLst xmlns:a="http://schemas.openxmlformats.org/drawingml/2006/main">
               <a:ext uri="{FF2B5EF4-FFF2-40B4-BE49-F238E27FC236}">
-                <a16:creationId xmlns:a16="http://schemas.microsoft.com/office/drawing/2014/main" id="{66DB59CA-DAA1-4C50-8B5D-4DB80E100485}"/>
+                <a16:creationId xmlns:a16="http://schemas.microsoft.com/office/drawing/2014/main" id="{BFDD3D24-1C02-4202-8EEB-7362527D327C}"/>
               </a:ext>
             </a:extLst>
           </p:cNvPr>
@@ -22807,7 +22807,7 @@
           <p:cNvPr id="24" name="">
             <a:extLst xmlns:a="http://schemas.openxmlformats.org/drawingml/2006/main">
               <a:ext uri="{FF2B5EF4-FFF2-40B4-BE49-F238E27FC236}">
-                <a16:creationId xmlns:a16="http://schemas.microsoft.com/office/drawing/2014/main" id="{50BA55B2-281C-4B18-884E-1088A3856D75}"/>
+                <a16:creationId xmlns:a16="http://schemas.microsoft.com/office/drawing/2014/main" id="{86CFD67C-F6BA-4DE0-9830-C86901890F83}"/>
               </a:ext>
             </a:extLst>
           </p:cNvPr>
@@ -22864,7 +22864,7 @@
           <p:cNvPr id="25" name="">
             <a:extLst xmlns:a="http://schemas.openxmlformats.org/drawingml/2006/main">
               <a:ext uri="{FF2B5EF4-FFF2-40B4-BE49-F238E27FC236}">
-                <a16:creationId xmlns:a16="http://schemas.microsoft.com/office/drawing/2014/main" id="{C53A2F24-1844-4E35-A6EB-8192BE93D065}"/>
+                <a16:creationId xmlns:a16="http://schemas.microsoft.com/office/drawing/2014/main" id="{28C2E15E-59A5-4C27-B087-E69AAC4A71A1}"/>
               </a:ext>
             </a:extLst>
           </p:cNvPr>
@@ -22921,7 +22921,7 @@
           <p:cNvPr id="26" name="">
             <a:extLst xmlns:a="http://schemas.openxmlformats.org/drawingml/2006/main">
               <a:ext uri="{FF2B5EF4-FFF2-40B4-BE49-F238E27FC236}">
-                <a16:creationId xmlns:a16="http://schemas.microsoft.com/office/drawing/2014/main" id="{E2A6DCFB-CEEE-491B-84D5-1E1FC23B47C2}"/>
+                <a16:creationId xmlns:a16="http://schemas.microsoft.com/office/drawing/2014/main" id="{73F7ED83-51B1-4E21-86F3-DE6B9AF492CB}"/>
               </a:ext>
             </a:extLst>
           </p:cNvPr>
@@ -22978,7 +22978,7 @@
           <p:cNvPr id="27" name="">
             <a:extLst xmlns:a="http://schemas.openxmlformats.org/drawingml/2006/main">
               <a:ext uri="{FF2B5EF4-FFF2-40B4-BE49-F238E27FC236}">
-                <a16:creationId xmlns:a16="http://schemas.microsoft.com/office/drawing/2014/main" id="{C8355D16-C6D0-41D2-A064-14DEEFAE8F20}"/>
+                <a16:creationId xmlns:a16="http://schemas.microsoft.com/office/drawing/2014/main" id="{B6A8D077-1731-4CCA-8C11-747424A5B9DA}"/>
               </a:ext>
             </a:extLst>
           </p:cNvPr>
@@ -23035,7 +23035,7 @@
           <p:cNvPr id="28" name="">
             <a:extLst xmlns:a="http://schemas.openxmlformats.org/drawingml/2006/main">
               <a:ext uri="{FF2B5EF4-FFF2-40B4-BE49-F238E27FC236}">
-                <a16:creationId xmlns:a16="http://schemas.microsoft.com/office/drawing/2014/main" id="{6B7331F6-AD71-4B85-A10C-9439017E6057}"/>
+                <a16:creationId xmlns:a16="http://schemas.microsoft.com/office/drawing/2014/main" id="{581711FD-92C4-4E35-B3F1-96A66C6AC247}"/>
               </a:ext>
             </a:extLst>
           </p:cNvPr>
@@ -23092,7 +23092,7 @@
           <p:cNvPr id="29" name="">
             <a:extLst xmlns:a="http://schemas.openxmlformats.org/drawingml/2006/main">
               <a:ext uri="{FF2B5EF4-FFF2-40B4-BE49-F238E27FC236}">
-                <a16:creationId xmlns:a16="http://schemas.microsoft.com/office/drawing/2014/main" id="{A2DA2D4E-4F8B-4437-9E68-5E355B19781D}"/>
+                <a16:creationId xmlns:a16="http://schemas.microsoft.com/office/drawing/2014/main" id="{3ED05086-343C-4BBF-B34B-C8EE405E77D9}"/>
               </a:ext>
             </a:extLst>
           </p:cNvPr>
@@ -23123,7 +23123,7 @@
           <p:cNvPr id="30" name="">
             <a:extLst xmlns:a="http://schemas.openxmlformats.org/drawingml/2006/main">
               <a:ext uri="{FF2B5EF4-FFF2-40B4-BE49-F238E27FC236}">
-                <a16:creationId xmlns:a16="http://schemas.microsoft.com/office/drawing/2014/main" id="{2522DCD4-E9E8-4B0E-B287-26AB7B36C78F}"/>
+                <a16:creationId xmlns:a16="http://schemas.microsoft.com/office/drawing/2014/main" id="{C1615D1E-2EB3-4F3F-A824-5D7573A6B1F8}"/>
               </a:ext>
             </a:extLst>
           </p:cNvPr>
@@ -23180,7 +23180,7 @@
           <p:cNvPr id="31" name="">
             <a:extLst xmlns:a="http://schemas.openxmlformats.org/drawingml/2006/main">
               <a:ext uri="{FF2B5EF4-FFF2-40B4-BE49-F238E27FC236}">
-                <a16:creationId xmlns:a16="http://schemas.microsoft.com/office/drawing/2014/main" id="{C3831567-2828-4B8C-9C2D-D883889402BC}"/>
+                <a16:creationId xmlns:a16="http://schemas.microsoft.com/office/drawing/2014/main" id="{9B357117-0803-4009-BEAA-60EDF7B6CEDD}"/>
               </a:ext>
             </a:extLst>
           </p:cNvPr>
@@ -23235,7 +23235,7 @@
     </p:spTree>
     <p:extLst>
       <p:ext uri="{BB962C8B-B14F-4D97-AF65-F5344CB8AC3E}">
-        <p14:creationId xmlns:p14="http://schemas.microsoft.com/office/powerpoint/2010/main" val="940167741"/>
+        <p14:creationId xmlns:p14="http://schemas.microsoft.com/office/powerpoint/2010/main" val="585414683"/>
       </p:ext>
     </p:extLst>
   </p:cSld>
@@ -23266,7 +23266,7 @@
           <p:cNvPr id="35" name="">
             <a:extLst xmlns:a="http://schemas.openxmlformats.org/drawingml/2006/main">
               <a:ext uri="{FF2B5EF4-FFF2-40B4-BE49-F238E27FC236}">
-                <a16:creationId xmlns:a16="http://schemas.microsoft.com/office/drawing/2014/main" id="{442459A3-50CA-40A7-872D-A8B5CA671BB8}"/>
+                <a16:creationId xmlns:a16="http://schemas.microsoft.com/office/drawing/2014/main" id="{1AACAD2A-6C41-446A-B5AD-93EF388354DB}"/>
               </a:ext>
             </a:extLst>
           </p:cNvPr>
@@ -23323,7 +23323,7 @@
           <p:cNvPr id="2" name="">
             <a:extLst xmlns:a="http://schemas.openxmlformats.org/drawingml/2006/main">
               <a:ext uri="{FF2B5EF4-FFF2-40B4-BE49-F238E27FC236}">
-                <a16:creationId xmlns:a16="http://schemas.microsoft.com/office/drawing/2014/main" id="{42BBE49A-BBCC-4717-9F27-E8231F03D866}"/>
+                <a16:creationId xmlns:a16="http://schemas.microsoft.com/office/drawing/2014/main" id="{762B377C-4ED0-4166-BE2E-2F88BD22FB44}"/>
               </a:ext>
             </a:extLst>
           </p:cNvPr>
@@ -23354,7 +23354,7 @@
           <p:cNvPr id="3" name="">
             <a:extLst xmlns:a="http://schemas.openxmlformats.org/drawingml/2006/main">
               <a:ext uri="{FF2B5EF4-FFF2-40B4-BE49-F238E27FC236}">
-                <a16:creationId xmlns:a16="http://schemas.microsoft.com/office/drawing/2014/main" id="{83F1853C-3C45-428E-B875-310853A91B5E}"/>
+                <a16:creationId xmlns:a16="http://schemas.microsoft.com/office/drawing/2014/main" id="{F381374E-86F6-4B90-97FD-7C64044D6821}"/>
               </a:ext>
             </a:extLst>
           </p:cNvPr>
@@ -23411,7 +23411,7 @@
           <p:cNvPr id="4" name="">
             <a:extLst xmlns:a="http://schemas.openxmlformats.org/drawingml/2006/main">
               <a:ext uri="{FF2B5EF4-FFF2-40B4-BE49-F238E27FC236}">
-                <a16:creationId xmlns:a16="http://schemas.microsoft.com/office/drawing/2014/main" id="{BAA41698-5C05-41C4-857A-4A5AFBDE77C7}"/>
+                <a16:creationId xmlns:a16="http://schemas.microsoft.com/office/drawing/2014/main" id="{188B6260-70A5-4E97-898B-858D6868F38E}"/>
               </a:ext>
             </a:extLst>
           </p:cNvPr>
@@ -23468,7 +23468,7 @@
           <p:cNvPr id="5" name="">
             <a:extLst xmlns:a="http://schemas.openxmlformats.org/drawingml/2006/main">
               <a:ext uri="{FF2B5EF4-FFF2-40B4-BE49-F238E27FC236}">
-                <a16:creationId xmlns:a16="http://schemas.microsoft.com/office/drawing/2014/main" id="{AB79DF8F-96AD-4681-AC1B-70919A616AEB}"/>
+                <a16:creationId xmlns:a16="http://schemas.microsoft.com/office/drawing/2014/main" id="{FE7000D1-020D-47AC-9035-47922671FBE1}"/>
               </a:ext>
             </a:extLst>
           </p:cNvPr>
@@ -23525,7 +23525,7 @@
           <p:cNvPr id="6" name="">
             <a:extLst xmlns:a="http://schemas.openxmlformats.org/drawingml/2006/main">
               <a:ext uri="{FF2B5EF4-FFF2-40B4-BE49-F238E27FC236}">
-                <a16:creationId xmlns:a16="http://schemas.microsoft.com/office/drawing/2014/main" id="{75B297B4-045B-4EC4-8AB4-261B575D3357}"/>
+                <a16:creationId xmlns:a16="http://schemas.microsoft.com/office/drawing/2014/main" id="{9462C24D-2FF5-4262-90E2-763C978BBFB3}"/>
               </a:ext>
             </a:extLst>
           </p:cNvPr>
@@ -23582,7 +23582,7 @@
           <p:cNvPr id="7" name="">
             <a:extLst xmlns:a="http://schemas.openxmlformats.org/drawingml/2006/main">
               <a:ext uri="{FF2B5EF4-FFF2-40B4-BE49-F238E27FC236}">
-                <a16:creationId xmlns:a16="http://schemas.microsoft.com/office/drawing/2014/main" id="{F7A5DCDA-CCEC-47CE-BEDE-17635943CF41}"/>
+                <a16:creationId xmlns:a16="http://schemas.microsoft.com/office/drawing/2014/main" id="{D9B01F4D-D82E-4F95-836C-54A42D1FB22C}"/>
               </a:ext>
             </a:extLst>
           </p:cNvPr>
@@ -23639,7 +23639,7 @@
           <p:cNvPr id="8" name="">
             <a:extLst xmlns:a="http://schemas.openxmlformats.org/drawingml/2006/main">
               <a:ext uri="{FF2B5EF4-FFF2-40B4-BE49-F238E27FC236}">
-                <a16:creationId xmlns:a16="http://schemas.microsoft.com/office/drawing/2014/main" id="{12ED732C-8711-4D16-94E9-374BB8E849D5}"/>
+                <a16:creationId xmlns:a16="http://schemas.microsoft.com/office/drawing/2014/main" id="{69DC54F3-8FF2-487D-8A32-F37B464AADC5}"/>
               </a:ext>
             </a:extLst>
           </p:cNvPr>
@@ -23696,7 +23696,7 @@
           <p:cNvPr id="9" name="">
             <a:extLst xmlns:a="http://schemas.openxmlformats.org/drawingml/2006/main">
               <a:ext uri="{FF2B5EF4-FFF2-40B4-BE49-F238E27FC236}">
-                <a16:creationId xmlns:a16="http://schemas.microsoft.com/office/drawing/2014/main" id="{9A8A0B61-2599-4D71-BADE-79048FE64284}"/>
+                <a16:creationId xmlns:a16="http://schemas.microsoft.com/office/drawing/2014/main" id="{F441ED90-8D93-43DF-B8BF-7ABB9733E7B9}"/>
               </a:ext>
             </a:extLst>
           </p:cNvPr>
@@ -23753,7 +23753,7 @@
           <p:cNvPr id="10" name="">
             <a:extLst xmlns:a="http://schemas.openxmlformats.org/drawingml/2006/main">
               <a:ext uri="{FF2B5EF4-FFF2-40B4-BE49-F238E27FC236}">
-                <a16:creationId xmlns:a16="http://schemas.microsoft.com/office/drawing/2014/main" id="{A97F5B30-2377-465C-A9FF-176511E918A8}"/>
+                <a16:creationId xmlns:a16="http://schemas.microsoft.com/office/drawing/2014/main" id="{2A2CA0D5-EEE4-4A71-88F1-41721800AE40}"/>
               </a:ext>
             </a:extLst>
           </p:cNvPr>
@@ -23784,7 +23784,7 @@
           <p:cNvPr id="11" name="">
             <a:extLst xmlns:a="http://schemas.openxmlformats.org/drawingml/2006/main">
               <a:ext uri="{FF2B5EF4-FFF2-40B4-BE49-F238E27FC236}">
-                <a16:creationId xmlns:a16="http://schemas.microsoft.com/office/drawing/2014/main" id="{73DA3206-8F9F-41E0-83D2-B72EF613712F}"/>
+                <a16:creationId xmlns:a16="http://schemas.microsoft.com/office/drawing/2014/main" id="{947C2AA5-FAD6-4CA7-9863-831775B072A3}"/>
               </a:ext>
             </a:extLst>
           </p:cNvPr>
@@ -23815,7 +23815,7 @@
           <p:cNvPr id="12" name="">
             <a:extLst xmlns:a="http://schemas.openxmlformats.org/drawingml/2006/main">
               <a:ext uri="{FF2B5EF4-FFF2-40B4-BE49-F238E27FC236}">
-                <a16:creationId xmlns:a16="http://schemas.microsoft.com/office/drawing/2014/main" id="{CF122333-B4C7-44E7-B311-87C2F93C8F2D}"/>
+                <a16:creationId xmlns:a16="http://schemas.microsoft.com/office/drawing/2014/main" id="{60BA0080-6805-46D8-9FF2-56B7B2181E07}"/>
               </a:ext>
             </a:extLst>
           </p:cNvPr>
@@ -23848,7 +23848,7 @@
           <p:cNvPr id="13" name="">
             <a:extLst xmlns:a="http://schemas.openxmlformats.org/drawingml/2006/main">
               <a:ext uri="{FF2B5EF4-FFF2-40B4-BE49-F238E27FC236}">
-                <a16:creationId xmlns:a16="http://schemas.microsoft.com/office/drawing/2014/main" id="{A45839A4-DEF0-407B-B163-80EBA30FAF4C}"/>
+                <a16:creationId xmlns:a16="http://schemas.microsoft.com/office/drawing/2014/main" id="{28B575CD-DDA8-4894-8A9D-E10AA8B16DF0}"/>
               </a:ext>
             </a:extLst>
           </p:cNvPr>
@@ -23905,7 +23905,7 @@
           <p:cNvPr id="14" name="">
             <a:extLst xmlns:a="http://schemas.openxmlformats.org/drawingml/2006/main">
               <a:ext uri="{FF2B5EF4-FFF2-40B4-BE49-F238E27FC236}">
-                <a16:creationId xmlns:a16="http://schemas.microsoft.com/office/drawing/2014/main" id="{5E6C6707-CE03-4054-A0E6-03FBF6409961}"/>
+                <a16:creationId xmlns:a16="http://schemas.microsoft.com/office/drawing/2014/main" id="{13900B2C-DB14-4C96-849F-C4E69DE82FAC}"/>
               </a:ext>
             </a:extLst>
           </p:cNvPr>
@@ -23938,7 +23938,7 @@
           <p:cNvPr id="15" name="">
             <a:extLst xmlns:a="http://schemas.openxmlformats.org/drawingml/2006/main">
               <a:ext uri="{FF2B5EF4-FFF2-40B4-BE49-F238E27FC236}">
-                <a16:creationId xmlns:a16="http://schemas.microsoft.com/office/drawing/2014/main" id="{BF236F5E-094A-41FC-9B34-BC6149531EF4}"/>
+                <a16:creationId xmlns:a16="http://schemas.microsoft.com/office/drawing/2014/main" id="{E5C75E00-223B-4C6C-9808-97E2473B1B4E}"/>
               </a:ext>
             </a:extLst>
           </p:cNvPr>
@@ -23971,7 +23971,7 @@
           <p:cNvPr id="16" name="">
             <a:extLst xmlns:a="http://schemas.openxmlformats.org/drawingml/2006/main">
               <a:ext uri="{FF2B5EF4-FFF2-40B4-BE49-F238E27FC236}">
-                <a16:creationId xmlns:a16="http://schemas.microsoft.com/office/drawing/2014/main" id="{A6F2A8F1-FEE1-4336-8082-8077A0DED0A3}"/>
+                <a16:creationId xmlns:a16="http://schemas.microsoft.com/office/drawing/2014/main" id="{E652C72B-78A6-4917-8C1B-A0F782F46903}"/>
               </a:ext>
             </a:extLst>
           </p:cNvPr>
@@ -24004,7 +24004,7 @@
           <p:cNvPr id="17" name="">
             <a:extLst xmlns:a="http://schemas.openxmlformats.org/drawingml/2006/main">
               <a:ext uri="{FF2B5EF4-FFF2-40B4-BE49-F238E27FC236}">
-                <a16:creationId xmlns:a16="http://schemas.microsoft.com/office/drawing/2014/main" id="{AA1FE6EE-EDE3-437B-B414-8C741359132B}"/>
+                <a16:creationId xmlns:a16="http://schemas.microsoft.com/office/drawing/2014/main" id="{61E3F818-C3F5-46CA-9A8E-61F313B2527A}"/>
               </a:ext>
             </a:extLst>
           </p:cNvPr>
@@ -24037,7 +24037,7 @@
           <p:cNvPr id="18" name="">
             <a:extLst xmlns:a="http://schemas.openxmlformats.org/drawingml/2006/main">
               <a:ext uri="{FF2B5EF4-FFF2-40B4-BE49-F238E27FC236}">
-                <a16:creationId xmlns:a16="http://schemas.microsoft.com/office/drawing/2014/main" id="{3B2EF4D2-47F7-43E8-92DE-1338EA2A0FB8}"/>
+                <a16:creationId xmlns:a16="http://schemas.microsoft.com/office/drawing/2014/main" id="{6FD66EFA-6046-4981-BBCE-71A351CBAB26}"/>
               </a:ext>
             </a:extLst>
           </p:cNvPr>
@@ -24070,7 +24070,7 @@
           <p:cNvPr id="19" name="">
             <a:extLst xmlns:a="http://schemas.openxmlformats.org/drawingml/2006/main">
               <a:ext uri="{FF2B5EF4-FFF2-40B4-BE49-F238E27FC236}">
-                <a16:creationId xmlns:a16="http://schemas.microsoft.com/office/drawing/2014/main" id="{58CFB0DA-E268-40E2-A5AB-7D904596480C}"/>
+                <a16:creationId xmlns:a16="http://schemas.microsoft.com/office/drawing/2014/main" id="{6ECC8ECC-1DA0-42E1-9733-CED5FF5CA3B1}"/>
               </a:ext>
             </a:extLst>
           </p:cNvPr>
@@ -24103,7 +24103,7 @@
           <p:cNvPr id="20" name="">
             <a:extLst xmlns:a="http://schemas.openxmlformats.org/drawingml/2006/main">
               <a:ext uri="{FF2B5EF4-FFF2-40B4-BE49-F238E27FC236}">
-                <a16:creationId xmlns:a16="http://schemas.microsoft.com/office/drawing/2014/main" id="{EB86CE3A-FBFF-4A63-A087-ED14E751B85C}"/>
+                <a16:creationId xmlns:a16="http://schemas.microsoft.com/office/drawing/2014/main" id="{E7C7D6A9-A0D1-43E7-904B-C8E884AF078B}"/>
               </a:ext>
             </a:extLst>
           </p:cNvPr>
@@ -24136,7 +24136,7 @@
           <p:cNvPr id="21" name="">
             <a:extLst xmlns:a="http://schemas.openxmlformats.org/drawingml/2006/main">
               <a:ext uri="{FF2B5EF4-FFF2-40B4-BE49-F238E27FC236}">
-                <a16:creationId xmlns:a16="http://schemas.microsoft.com/office/drawing/2014/main" id="{715934ED-E370-4658-BD40-AF2372BBFC3A}"/>
+                <a16:creationId xmlns:a16="http://schemas.microsoft.com/office/drawing/2014/main" id="{BF493414-50D4-4A06-A30A-63FF4AED761E}"/>
               </a:ext>
             </a:extLst>
           </p:cNvPr>
@@ -24169,7 +24169,7 @@
           <p:cNvPr id="22" name="">
             <a:extLst xmlns:a="http://schemas.openxmlformats.org/drawingml/2006/main">
               <a:ext uri="{FF2B5EF4-FFF2-40B4-BE49-F238E27FC236}">
-                <a16:creationId xmlns:a16="http://schemas.microsoft.com/office/drawing/2014/main" id="{8F543FC0-7AE8-4021-B019-9C7FDB28A8CF}"/>
+                <a16:creationId xmlns:a16="http://schemas.microsoft.com/office/drawing/2014/main" id="{D66DBA0D-F608-4735-B96E-C2DE0D00F921}"/>
               </a:ext>
             </a:extLst>
           </p:cNvPr>
@@ -24202,7 +24202,7 @@
           <p:cNvPr id="23" name="">
             <a:extLst xmlns:a="http://schemas.openxmlformats.org/drawingml/2006/main">
               <a:ext uri="{FF2B5EF4-FFF2-40B4-BE49-F238E27FC236}">
-                <a16:creationId xmlns:a16="http://schemas.microsoft.com/office/drawing/2014/main" id="{521986A7-DE86-4214-8A0F-ED723129095A}"/>
+                <a16:creationId xmlns:a16="http://schemas.microsoft.com/office/drawing/2014/main" id="{84E4712E-9639-4056-81BF-B714E2A119BA}"/>
               </a:ext>
             </a:extLst>
           </p:cNvPr>
@@ -24235,7 +24235,7 @@
           <p:cNvPr id="24" name="">
             <a:extLst xmlns:a="http://schemas.openxmlformats.org/drawingml/2006/main">
               <a:ext uri="{FF2B5EF4-FFF2-40B4-BE49-F238E27FC236}">
-                <a16:creationId xmlns:a16="http://schemas.microsoft.com/office/drawing/2014/main" id="{32AD6E00-BFD2-415D-B544-1B8E37CA0D4C}"/>
+                <a16:creationId xmlns:a16="http://schemas.microsoft.com/office/drawing/2014/main" id="{95D701AA-11CA-494E-959D-FA147272EA92}"/>
               </a:ext>
             </a:extLst>
           </p:cNvPr>
@@ -24268,7 +24268,7 @@
           <p:cNvPr id="25" name="">
             <a:extLst xmlns:a="http://schemas.openxmlformats.org/drawingml/2006/main">
               <a:ext uri="{FF2B5EF4-FFF2-40B4-BE49-F238E27FC236}">
-                <a16:creationId xmlns:a16="http://schemas.microsoft.com/office/drawing/2014/main" id="{D61186F7-4CEF-451C-AE71-416E6CB7850B}"/>
+                <a16:creationId xmlns:a16="http://schemas.microsoft.com/office/drawing/2014/main" id="{258001CD-7981-4D3B-BB8E-F1FCC93FE6FC}"/>
               </a:ext>
             </a:extLst>
           </p:cNvPr>
@@ -24299,7 +24299,7 @@
           <p:cNvPr id="26" name="">
             <a:extLst xmlns:a="http://schemas.openxmlformats.org/drawingml/2006/main">
               <a:ext uri="{FF2B5EF4-FFF2-40B4-BE49-F238E27FC236}">
-                <a16:creationId xmlns:a16="http://schemas.microsoft.com/office/drawing/2014/main" id="{93F26FE2-DA95-44AD-915E-FF2C7FA8EA7E}"/>
+                <a16:creationId xmlns:a16="http://schemas.microsoft.com/office/drawing/2014/main" id="{4EE256D2-EF12-4915-8439-71E5629330BD}"/>
               </a:ext>
             </a:extLst>
           </p:cNvPr>
@@ -24356,7 +24356,7 @@
           <p:cNvPr id="27" name="">
             <a:extLst xmlns:a="http://schemas.openxmlformats.org/drawingml/2006/main">
               <a:ext uri="{FF2B5EF4-FFF2-40B4-BE49-F238E27FC236}">
-                <a16:creationId xmlns:a16="http://schemas.microsoft.com/office/drawing/2014/main" id="{1220E110-871F-4B6B-BDE6-1D26F5B87BB6}"/>
+                <a16:creationId xmlns:a16="http://schemas.microsoft.com/office/drawing/2014/main" id="{25620ACA-A9CE-459C-BEEF-3C92BB5026D7}"/>
               </a:ext>
             </a:extLst>
           </p:cNvPr>
@@ -24413,7 +24413,7 @@
           <p:cNvPr id="28" name="">
             <a:extLst xmlns:a="http://schemas.openxmlformats.org/drawingml/2006/main">
               <a:ext uri="{FF2B5EF4-FFF2-40B4-BE49-F238E27FC236}">
-                <a16:creationId xmlns:a16="http://schemas.microsoft.com/office/drawing/2014/main" id="{AB0BCA57-CB6C-4CD7-A0BE-691489C2454C}"/>
+                <a16:creationId xmlns:a16="http://schemas.microsoft.com/office/drawing/2014/main" id="{DF758034-0D6E-4BB4-84F0-63AF5B03C513}"/>
               </a:ext>
             </a:extLst>
           </p:cNvPr>
@@ -24470,7 +24470,7 @@
           <p:cNvPr id="29" name="">
             <a:extLst xmlns:a="http://schemas.openxmlformats.org/drawingml/2006/main">
               <a:ext uri="{FF2B5EF4-FFF2-40B4-BE49-F238E27FC236}">
-                <a16:creationId xmlns:a16="http://schemas.microsoft.com/office/drawing/2014/main" id="{2D79A8EF-4092-4DED-8D4E-2749C9EAF9D7}"/>
+                <a16:creationId xmlns:a16="http://schemas.microsoft.com/office/drawing/2014/main" id="{DDB28A62-6885-402C-9D15-0E98852E225F}"/>
               </a:ext>
             </a:extLst>
           </p:cNvPr>
@@ -24527,7 +24527,7 @@
           <p:cNvPr id="30" name="">
             <a:extLst xmlns:a="http://schemas.openxmlformats.org/drawingml/2006/main">
               <a:ext uri="{FF2B5EF4-FFF2-40B4-BE49-F238E27FC236}">
-                <a16:creationId xmlns:a16="http://schemas.microsoft.com/office/drawing/2014/main" id="{CF0815B7-3A49-4DC9-BBE9-C7D36C3FBAB3}"/>
+                <a16:creationId xmlns:a16="http://schemas.microsoft.com/office/drawing/2014/main" id="{3ECC5CA2-4438-46D9-B14B-88170412DD2E}"/>
               </a:ext>
             </a:extLst>
           </p:cNvPr>
@@ -24584,7 +24584,7 @@
           <p:cNvPr id="31" name="">
             <a:extLst xmlns:a="http://schemas.openxmlformats.org/drawingml/2006/main">
               <a:ext uri="{FF2B5EF4-FFF2-40B4-BE49-F238E27FC236}">
-                <a16:creationId xmlns:a16="http://schemas.microsoft.com/office/drawing/2014/main" id="{9B95E88F-082D-402F-AB4E-BD9EF03F12A8}"/>
+                <a16:creationId xmlns:a16="http://schemas.microsoft.com/office/drawing/2014/main" id="{05EB30CC-049A-4F39-90C6-629C1E49CD7B}"/>
               </a:ext>
             </a:extLst>
           </p:cNvPr>
@@ -24615,7 +24615,7 @@
           <p:cNvPr id="32" name="">
             <a:extLst xmlns:a="http://schemas.openxmlformats.org/drawingml/2006/main">
               <a:ext uri="{FF2B5EF4-FFF2-40B4-BE49-F238E27FC236}">
-                <a16:creationId xmlns:a16="http://schemas.microsoft.com/office/drawing/2014/main" id="{499FA9F1-7FDD-43BC-8D68-CE18D0D913D9}"/>
+                <a16:creationId xmlns:a16="http://schemas.microsoft.com/office/drawing/2014/main" id="{4F1F5D66-F02F-4D85-8528-A48776C02600}"/>
               </a:ext>
             </a:extLst>
           </p:cNvPr>
@@ -24672,7 +24672,7 @@
           <p:cNvPr id="33" name="">
             <a:extLst xmlns:a="http://schemas.openxmlformats.org/drawingml/2006/main">
               <a:ext uri="{FF2B5EF4-FFF2-40B4-BE49-F238E27FC236}">
-                <a16:creationId xmlns:a16="http://schemas.microsoft.com/office/drawing/2014/main" id="{73430D57-2564-4EA2-93B1-7843737D4362}"/>
+                <a16:creationId xmlns:a16="http://schemas.microsoft.com/office/drawing/2014/main" id="{1CE64F8D-A6C1-4D42-BA02-E446F235CF4B}"/>
               </a:ext>
             </a:extLst>
           </p:cNvPr>
@@ -24729,7 +24729,7 @@
           <p:cNvPr id="34" name="">
             <a:extLst xmlns:a="http://schemas.openxmlformats.org/drawingml/2006/main">
               <a:ext uri="{FF2B5EF4-FFF2-40B4-BE49-F238E27FC236}">
-                <a16:creationId xmlns:a16="http://schemas.microsoft.com/office/drawing/2014/main" id="{4DEFA286-44C8-4A6D-90C7-96BC457CF790}"/>
+                <a16:creationId xmlns:a16="http://schemas.microsoft.com/office/drawing/2014/main" id="{9D82AE88-E87F-4C10-AC75-9A86A8E8E66C}"/>
               </a:ext>
             </a:extLst>
           </p:cNvPr>
@@ -24784,7 +24784,7 @@
     </p:spTree>
     <p:extLst>
       <p:ext uri="{BB962C8B-B14F-4D97-AF65-F5344CB8AC3E}">
-        <p14:creationId xmlns:p14="http://schemas.microsoft.com/office/powerpoint/2010/main" val="930535152"/>
+        <p14:creationId xmlns:p14="http://schemas.microsoft.com/office/powerpoint/2010/main" val="817873464"/>
       </p:ext>
     </p:extLst>
   </p:cSld>
@@ -24815,7 +24815,7 @@
           <p:cNvPr id="48" name="">
             <a:extLst xmlns:a="http://schemas.openxmlformats.org/drawingml/2006/main">
               <a:ext uri="{FF2B5EF4-FFF2-40B4-BE49-F238E27FC236}">
-                <a16:creationId xmlns:a16="http://schemas.microsoft.com/office/drawing/2014/main" id="{D5F694A8-A28D-41F5-B034-521D4D3DD0AF}"/>
+                <a16:creationId xmlns:a16="http://schemas.microsoft.com/office/drawing/2014/main" id="{5939B287-0FB8-4E1A-9FAD-97B7CE3A9569}"/>
               </a:ext>
             </a:extLst>
           </p:cNvPr>
@@ -24872,7 +24872,7 @@
           <p:cNvPr id="2" name="">
             <a:extLst xmlns:a="http://schemas.openxmlformats.org/drawingml/2006/main">
               <a:ext uri="{FF2B5EF4-FFF2-40B4-BE49-F238E27FC236}">
-                <a16:creationId xmlns:a16="http://schemas.microsoft.com/office/drawing/2014/main" id="{257978D0-F993-49E6-98E4-59E7348A39F2}"/>
+                <a16:creationId xmlns:a16="http://schemas.microsoft.com/office/drawing/2014/main" id="{65824768-EF90-4E0D-B067-D1E54866C09D}"/>
               </a:ext>
             </a:extLst>
           </p:cNvPr>
@@ -24903,7 +24903,7 @@
           <p:cNvPr id="3" name="">
             <a:extLst xmlns:a="http://schemas.openxmlformats.org/drawingml/2006/main">
               <a:ext uri="{FF2B5EF4-FFF2-40B4-BE49-F238E27FC236}">
-                <a16:creationId xmlns:a16="http://schemas.microsoft.com/office/drawing/2014/main" id="{487F79C7-CFA8-4A2F-93FF-FE24E608C8CF}"/>
+                <a16:creationId xmlns:a16="http://schemas.microsoft.com/office/drawing/2014/main" id="{C56E9A98-C693-4F91-98D3-05FBE72DCADA}"/>
               </a:ext>
             </a:extLst>
           </p:cNvPr>
@@ -24960,7 +24960,7 @@
           <p:cNvPr id="4" name="">
             <a:extLst xmlns:a="http://schemas.openxmlformats.org/drawingml/2006/main">
               <a:ext uri="{FF2B5EF4-FFF2-40B4-BE49-F238E27FC236}">
-                <a16:creationId xmlns:a16="http://schemas.microsoft.com/office/drawing/2014/main" id="{38BB9403-BA78-4F91-AE86-EFFD7EF13D33}"/>
+                <a16:creationId xmlns:a16="http://schemas.microsoft.com/office/drawing/2014/main" id="{8FD9B005-14A4-487F-ACAE-C14AACB42DE7}"/>
               </a:ext>
             </a:extLst>
           </p:cNvPr>
@@ -25017,7 +25017,7 @@
           <p:cNvPr id="5" name="">
             <a:extLst xmlns:a="http://schemas.openxmlformats.org/drawingml/2006/main">
               <a:ext uri="{FF2B5EF4-FFF2-40B4-BE49-F238E27FC236}">
-                <a16:creationId xmlns:a16="http://schemas.microsoft.com/office/drawing/2014/main" id="{F9D6DF0F-3AE9-4E1D-9D86-8464FC4FA769}"/>
+                <a16:creationId xmlns:a16="http://schemas.microsoft.com/office/drawing/2014/main" id="{465D7A82-A74B-451C-AF7F-584114579843}"/>
               </a:ext>
             </a:extLst>
           </p:cNvPr>
@@ -25048,7 +25048,7 @@
           <p:cNvPr id="6" name="">
             <a:extLst xmlns:a="http://schemas.openxmlformats.org/drawingml/2006/main">
               <a:ext uri="{FF2B5EF4-FFF2-40B4-BE49-F238E27FC236}">
-                <a16:creationId xmlns:a16="http://schemas.microsoft.com/office/drawing/2014/main" id="{7051A8E8-A248-41A5-B7C9-0609E54D3ED6}"/>
+                <a16:creationId xmlns:a16="http://schemas.microsoft.com/office/drawing/2014/main" id="{1DAAA55E-14F2-47E8-83C6-E70EC702A96D}"/>
               </a:ext>
             </a:extLst>
           </p:cNvPr>
@@ -25105,7 +25105,7 @@
           <p:cNvPr id="7" name="">
             <a:extLst xmlns:a="http://schemas.openxmlformats.org/drawingml/2006/main">
               <a:ext uri="{FF2B5EF4-FFF2-40B4-BE49-F238E27FC236}">
-                <a16:creationId xmlns:a16="http://schemas.microsoft.com/office/drawing/2014/main" id="{186C389A-B9BF-4B1E-9FDE-44F13E2E7F98}"/>
+                <a16:creationId xmlns:a16="http://schemas.microsoft.com/office/drawing/2014/main" id="{898B544E-F918-4619-8F64-5673D92B36FB}"/>
               </a:ext>
             </a:extLst>
           </p:cNvPr>
@@ -25138,7 +25138,7 @@
           <p:cNvPr id="8" name="">
             <a:extLst xmlns:a="http://schemas.openxmlformats.org/drawingml/2006/main">
               <a:ext uri="{FF2B5EF4-FFF2-40B4-BE49-F238E27FC236}">
-                <a16:creationId xmlns:a16="http://schemas.microsoft.com/office/drawing/2014/main" id="{6B8E3604-8302-441E-986E-AE0C301EE144}"/>
+                <a16:creationId xmlns:a16="http://schemas.microsoft.com/office/drawing/2014/main" id="{59E1B5C6-7609-4371-A954-288472ECC743}"/>
               </a:ext>
             </a:extLst>
           </p:cNvPr>
@@ -25195,7 +25195,7 @@
           <p:cNvPr id="9" name="">
             <a:extLst xmlns:a="http://schemas.openxmlformats.org/drawingml/2006/main">
               <a:ext uri="{FF2B5EF4-FFF2-40B4-BE49-F238E27FC236}">
-                <a16:creationId xmlns:a16="http://schemas.microsoft.com/office/drawing/2014/main" id="{E8C8485F-EE68-4274-ACA1-548AAABA2B08}"/>
+                <a16:creationId xmlns:a16="http://schemas.microsoft.com/office/drawing/2014/main" id="{BFEB3A64-E4D9-4D1C-A07B-55157CE716FC}"/>
               </a:ext>
             </a:extLst>
           </p:cNvPr>
@@ -25228,7 +25228,7 @@
           <p:cNvPr id="10" name="">
             <a:extLst xmlns:a="http://schemas.openxmlformats.org/drawingml/2006/main">
               <a:ext uri="{FF2B5EF4-FFF2-40B4-BE49-F238E27FC236}">
-                <a16:creationId xmlns:a16="http://schemas.microsoft.com/office/drawing/2014/main" id="{DC408715-27BB-4527-BB1B-47B9AEE4DFEF}"/>
+                <a16:creationId xmlns:a16="http://schemas.microsoft.com/office/drawing/2014/main" id="{5C9FD154-2851-4B03-8DDD-CFE5365B60B1}"/>
               </a:ext>
             </a:extLst>
           </p:cNvPr>
@@ -25311,7 +25311,7 @@
           <p:cNvPr id="12" name="">
             <a:extLst xmlns:a="http://schemas.openxmlformats.org/drawingml/2006/main">
               <a:ext uri="{FF2B5EF4-FFF2-40B4-BE49-F238E27FC236}">
-                <a16:creationId xmlns:a16="http://schemas.microsoft.com/office/drawing/2014/main" id="{A9CBA1C0-C888-4AE4-BF62-281DA60CBEEB}"/>
+                <a16:creationId xmlns:a16="http://schemas.microsoft.com/office/drawing/2014/main" id="{39383CDC-61C7-49D8-B77F-87487F497A7E}"/>
               </a:ext>
             </a:extLst>
           </p:cNvPr>
@@ -25391,7 +25391,7 @@
           <p:cNvPr id="13" name="">
             <a:extLst xmlns:a="http://schemas.openxmlformats.org/drawingml/2006/main">
               <a:ext uri="{FF2B5EF4-FFF2-40B4-BE49-F238E27FC236}">
-                <a16:creationId xmlns:a16="http://schemas.microsoft.com/office/drawing/2014/main" id="{FB00DBB3-E694-4B4C-B38C-0AB165C70954}"/>
+                <a16:creationId xmlns:a16="http://schemas.microsoft.com/office/drawing/2014/main" id="{BD51B563-C937-40FF-96A6-5242F05AC7F8}"/>
               </a:ext>
             </a:extLst>
           </p:cNvPr>
@@ -25471,7 +25471,7 @@
           <p:cNvPr id="14" name="">
             <a:extLst xmlns:a="http://schemas.openxmlformats.org/drawingml/2006/main">
               <a:ext uri="{FF2B5EF4-FFF2-40B4-BE49-F238E27FC236}">
-                <a16:creationId xmlns:a16="http://schemas.microsoft.com/office/drawing/2014/main" id="{83352352-E6B4-41C1-927E-643EFC5D88DB}"/>
+                <a16:creationId xmlns:a16="http://schemas.microsoft.com/office/drawing/2014/main" id="{8751F765-D7FA-4411-B828-11EB6C316B1B}"/>
               </a:ext>
             </a:extLst>
           </p:cNvPr>
@@ -25528,7 +25528,7 @@
           <p:cNvPr id="15" name="">
             <a:extLst xmlns:a="http://schemas.openxmlformats.org/drawingml/2006/main">
               <a:ext uri="{FF2B5EF4-FFF2-40B4-BE49-F238E27FC236}">
-                <a16:creationId xmlns:a16="http://schemas.microsoft.com/office/drawing/2014/main" id="{2FF30CC1-3B22-4AFE-B0E1-B8B8FE2F524D}"/>
+                <a16:creationId xmlns:a16="http://schemas.microsoft.com/office/drawing/2014/main" id="{A2728B11-D4EF-477C-9A28-56B7A8C29CEF}"/>
               </a:ext>
             </a:extLst>
           </p:cNvPr>
@@ -25559,7 +25559,7 @@
           <p:cNvPr id="16" name="">
             <a:extLst xmlns:a="http://schemas.openxmlformats.org/drawingml/2006/main">
               <a:ext uri="{FF2B5EF4-FFF2-40B4-BE49-F238E27FC236}">
-                <a16:creationId xmlns:a16="http://schemas.microsoft.com/office/drawing/2014/main" id="{976ECC8F-88D4-42E3-B053-0B8D15931B77}"/>
+                <a16:creationId xmlns:a16="http://schemas.microsoft.com/office/drawing/2014/main" id="{DBB6236D-581C-419A-BF66-582117652E52}"/>
               </a:ext>
             </a:extLst>
           </p:cNvPr>
@@ -25590,7 +25590,7 @@
           <p:cNvPr id="17" name="">
             <a:extLst xmlns:a="http://schemas.openxmlformats.org/drawingml/2006/main">
               <a:ext uri="{FF2B5EF4-FFF2-40B4-BE49-F238E27FC236}">
-                <a16:creationId xmlns:a16="http://schemas.microsoft.com/office/drawing/2014/main" id="{C8BC3891-831C-4E5A-B7D6-B5555F811AC8}"/>
+                <a16:creationId xmlns:a16="http://schemas.microsoft.com/office/drawing/2014/main" id="{5532A6D3-AACA-448A-AF07-A31A0C4BCA88}"/>
               </a:ext>
             </a:extLst>
           </p:cNvPr>
@@ -25621,7 +25621,7 @@
           <p:cNvPr id="18" name="">
             <a:extLst xmlns:a="http://schemas.openxmlformats.org/drawingml/2006/main">
               <a:ext uri="{FF2B5EF4-FFF2-40B4-BE49-F238E27FC236}">
-                <a16:creationId xmlns:a16="http://schemas.microsoft.com/office/drawing/2014/main" id="{28BDB4F5-3587-480E-A20A-254CE43F4ABA}"/>
+                <a16:creationId xmlns:a16="http://schemas.microsoft.com/office/drawing/2014/main" id="{ECF90EB9-5E10-4081-82A1-90C14541BAE1}"/>
               </a:ext>
             </a:extLst>
           </p:cNvPr>
@@ -25652,7 +25652,7 @@
           <p:cNvPr id="19" name="">
             <a:extLst xmlns:a="http://schemas.openxmlformats.org/drawingml/2006/main">
               <a:ext uri="{FF2B5EF4-FFF2-40B4-BE49-F238E27FC236}">
-                <a16:creationId xmlns:a16="http://schemas.microsoft.com/office/drawing/2014/main" id="{3C69B873-D463-480A-9327-E5CBED007D89}"/>
+                <a16:creationId xmlns:a16="http://schemas.microsoft.com/office/drawing/2014/main" id="{B3293427-09FF-4A07-B457-2D24C588BFAA}"/>
               </a:ext>
             </a:extLst>
           </p:cNvPr>
@@ -25683,7 +25683,7 @@
           <p:cNvPr id="20" name="">
             <a:extLst xmlns:a="http://schemas.openxmlformats.org/drawingml/2006/main">
               <a:ext uri="{FF2B5EF4-FFF2-40B4-BE49-F238E27FC236}">
-                <a16:creationId xmlns:a16="http://schemas.microsoft.com/office/drawing/2014/main" id="{0E6D1022-5557-450C-8D50-749DDA256047}"/>
+                <a16:creationId xmlns:a16="http://schemas.microsoft.com/office/drawing/2014/main" id="{98FB931C-61BF-4B27-8288-AB3521EA84AC}"/>
               </a:ext>
             </a:extLst>
           </p:cNvPr>
@@ -25714,7 +25714,7 @@
           <p:cNvPr id="21" name="">
             <a:extLst xmlns:a="http://schemas.openxmlformats.org/drawingml/2006/main">
               <a:ext uri="{FF2B5EF4-FFF2-40B4-BE49-F238E27FC236}">
-                <a16:creationId xmlns:a16="http://schemas.microsoft.com/office/drawing/2014/main" id="{B83E896D-E76B-4C82-A5F1-1DDAC9C41018}"/>
+                <a16:creationId xmlns:a16="http://schemas.microsoft.com/office/drawing/2014/main" id="{1CFD42FC-447D-4FB5-B773-5A654F2C46A8}"/>
               </a:ext>
             </a:extLst>
           </p:cNvPr>
@@ -25745,7 +25745,7 @@
           <p:cNvPr id="22" name="">
             <a:extLst xmlns:a="http://schemas.openxmlformats.org/drawingml/2006/main">
               <a:ext uri="{FF2B5EF4-FFF2-40B4-BE49-F238E27FC236}">
-                <a16:creationId xmlns:a16="http://schemas.microsoft.com/office/drawing/2014/main" id="{EEFFDB33-82F1-459A-A286-6CC400C4CA21}"/>
+                <a16:creationId xmlns:a16="http://schemas.microsoft.com/office/drawing/2014/main" id="{94E4500A-2524-417D-BEDD-DDA01BCEF3DA}"/>
               </a:ext>
             </a:extLst>
           </p:cNvPr>
@@ -25776,7 +25776,7 @@
           <p:cNvPr id="23" name="">
             <a:extLst xmlns:a="http://schemas.openxmlformats.org/drawingml/2006/main">
               <a:ext uri="{FF2B5EF4-FFF2-40B4-BE49-F238E27FC236}">
-                <a16:creationId xmlns:a16="http://schemas.microsoft.com/office/drawing/2014/main" id="{63849801-77F3-4612-9AE7-A44FEFA09469}"/>
+                <a16:creationId xmlns:a16="http://schemas.microsoft.com/office/drawing/2014/main" id="{190B42A7-6E2D-4159-9477-647C68871EDB}"/>
               </a:ext>
             </a:extLst>
           </p:cNvPr>
@@ -25807,7 +25807,7 @@
           <p:cNvPr id="24" name="">
             <a:extLst xmlns:a="http://schemas.openxmlformats.org/drawingml/2006/main">
               <a:ext uri="{FF2B5EF4-FFF2-40B4-BE49-F238E27FC236}">
-                <a16:creationId xmlns:a16="http://schemas.microsoft.com/office/drawing/2014/main" id="{6AE134A8-27EC-4237-AB21-7586F239207E}"/>
+                <a16:creationId xmlns:a16="http://schemas.microsoft.com/office/drawing/2014/main" id="{8156588D-6E12-4629-AFB1-FA7B60A203B1}"/>
               </a:ext>
             </a:extLst>
           </p:cNvPr>
@@ -25838,7 +25838,7 @@
           <p:cNvPr id="25" name="">
             <a:extLst xmlns:a="http://schemas.openxmlformats.org/drawingml/2006/main">
               <a:ext uri="{FF2B5EF4-FFF2-40B4-BE49-F238E27FC236}">
-                <a16:creationId xmlns:a16="http://schemas.microsoft.com/office/drawing/2014/main" id="{A79A763A-4025-4A4A-978C-85D5FC843736}"/>
+                <a16:creationId xmlns:a16="http://schemas.microsoft.com/office/drawing/2014/main" id="{A43B04F3-B825-4AD1-8D75-410F2BA2A998}"/>
               </a:ext>
             </a:extLst>
           </p:cNvPr>
@@ -25869,7 +25869,7 @@
           <p:cNvPr id="26" name="">
             <a:extLst xmlns:a="http://schemas.openxmlformats.org/drawingml/2006/main">
               <a:ext uri="{FF2B5EF4-FFF2-40B4-BE49-F238E27FC236}">
-                <a16:creationId xmlns:a16="http://schemas.microsoft.com/office/drawing/2014/main" id="{A4D33E00-3C39-4AED-9A0D-A4EFC453123B}"/>
+                <a16:creationId xmlns:a16="http://schemas.microsoft.com/office/drawing/2014/main" id="{EDEE5549-85CC-49FE-A319-C154EF8D8752}"/>
               </a:ext>
             </a:extLst>
           </p:cNvPr>
@@ -25900,7 +25900,7 @@
           <p:cNvPr id="27" name="">
             <a:extLst xmlns:a="http://schemas.openxmlformats.org/drawingml/2006/main">
               <a:ext uri="{FF2B5EF4-FFF2-40B4-BE49-F238E27FC236}">
-                <a16:creationId xmlns:a16="http://schemas.microsoft.com/office/drawing/2014/main" id="{100E93F1-C8DB-4C55-9E29-433A83ED5D1C}"/>
+                <a16:creationId xmlns:a16="http://schemas.microsoft.com/office/drawing/2014/main" id="{D50F0290-1552-4620-B33C-76B4C4F82E53}"/>
               </a:ext>
             </a:extLst>
           </p:cNvPr>
@@ -25931,7 +25931,7 @@
           <p:cNvPr id="28" name="">
             <a:extLst xmlns:a="http://schemas.openxmlformats.org/drawingml/2006/main">
               <a:ext uri="{FF2B5EF4-FFF2-40B4-BE49-F238E27FC236}">
-                <a16:creationId xmlns:a16="http://schemas.microsoft.com/office/drawing/2014/main" id="{B6ED9DB6-B2A3-46AA-8878-67FD4F68B77E}"/>
+                <a16:creationId xmlns:a16="http://schemas.microsoft.com/office/drawing/2014/main" id="{F4865582-AEE7-4758-B81F-4D377215F019}"/>
               </a:ext>
             </a:extLst>
           </p:cNvPr>
@@ -25980,7 +25980,7 @@
           <p:cNvPr id="29" name="">
             <a:extLst xmlns:a="http://schemas.openxmlformats.org/drawingml/2006/main">
               <a:ext uri="{FF2B5EF4-FFF2-40B4-BE49-F238E27FC236}">
-                <a16:creationId xmlns:a16="http://schemas.microsoft.com/office/drawing/2014/main" id="{190E0B33-F6C9-4463-8699-7FEA0905EB4B}"/>
+                <a16:creationId xmlns:a16="http://schemas.microsoft.com/office/drawing/2014/main" id="{62C158CA-C5D0-4543-9D5F-149CA1B63ED8}"/>
               </a:ext>
             </a:extLst>
           </p:cNvPr>
@@ -26029,7 +26029,7 @@
           <p:cNvPr id="30" name="">
             <a:extLst xmlns:a="http://schemas.openxmlformats.org/drawingml/2006/main">
               <a:ext uri="{FF2B5EF4-FFF2-40B4-BE49-F238E27FC236}">
-                <a16:creationId xmlns:a16="http://schemas.microsoft.com/office/drawing/2014/main" id="{1390748E-1BBA-4B9A-9294-3042F0F3EF1E}"/>
+                <a16:creationId xmlns:a16="http://schemas.microsoft.com/office/drawing/2014/main" id="{B80C16CD-CF22-4572-9697-F0DF484E4C9E}"/>
               </a:ext>
             </a:extLst>
           </p:cNvPr>
@@ -26086,7 +26086,7 @@
           <p:cNvPr id="31" name="">
             <a:extLst xmlns:a="http://schemas.openxmlformats.org/drawingml/2006/main">
               <a:ext uri="{FF2B5EF4-FFF2-40B4-BE49-F238E27FC236}">
-                <a16:creationId xmlns:a16="http://schemas.microsoft.com/office/drawing/2014/main" id="{ECF9FF27-E890-459C-B446-8BA7ED8D43C8}"/>
+                <a16:creationId xmlns:a16="http://schemas.microsoft.com/office/drawing/2014/main" id="{8F684C34-D66D-467B-95C9-5F2036151A66}"/>
               </a:ext>
             </a:extLst>
           </p:cNvPr>
@@ -26143,7 +26143,7 @@
           <p:cNvPr id="32" name="">
             <a:extLst xmlns:a="http://schemas.openxmlformats.org/drawingml/2006/main">
               <a:ext uri="{FF2B5EF4-FFF2-40B4-BE49-F238E27FC236}">
-                <a16:creationId xmlns:a16="http://schemas.microsoft.com/office/drawing/2014/main" id="{3AFE36B5-C67C-4063-A4E2-427E2F692643}"/>
+                <a16:creationId xmlns:a16="http://schemas.microsoft.com/office/drawing/2014/main" id="{971B8301-029D-46B5-A1F5-7F693D8DAA50}"/>
               </a:ext>
             </a:extLst>
           </p:cNvPr>
@@ -26200,7 +26200,7 @@
           <p:cNvPr id="33" name="">
             <a:extLst xmlns:a="http://schemas.openxmlformats.org/drawingml/2006/main">
               <a:ext uri="{FF2B5EF4-FFF2-40B4-BE49-F238E27FC236}">
-                <a16:creationId xmlns:a16="http://schemas.microsoft.com/office/drawing/2014/main" id="{391945C4-8261-4A0D-B0AF-52C1B3FCB320}"/>
+                <a16:creationId xmlns:a16="http://schemas.microsoft.com/office/drawing/2014/main" id="{81A27F6B-6675-4907-9925-54F9E0F87ACF}"/>
               </a:ext>
             </a:extLst>
           </p:cNvPr>
@@ -26257,7 +26257,7 @@
           <p:cNvPr id="34" name="">
             <a:extLst xmlns:a="http://schemas.openxmlformats.org/drawingml/2006/main">
               <a:ext uri="{FF2B5EF4-FFF2-40B4-BE49-F238E27FC236}">
-                <a16:creationId xmlns:a16="http://schemas.microsoft.com/office/drawing/2014/main" id="{FA46776F-A605-48B3-BC40-B7CBB2CA5C0A}"/>
+                <a16:creationId xmlns:a16="http://schemas.microsoft.com/office/drawing/2014/main" id="{50FF9436-FBC2-4628-A054-321F8DD450E7}"/>
               </a:ext>
             </a:extLst>
           </p:cNvPr>
@@ -26290,7 +26290,7 @@
           <p:cNvPr id="35" name="">
             <a:extLst xmlns:a="http://schemas.openxmlformats.org/drawingml/2006/main">
               <a:ext uri="{FF2B5EF4-FFF2-40B4-BE49-F238E27FC236}">
-                <a16:creationId xmlns:a16="http://schemas.microsoft.com/office/drawing/2014/main" id="{844844D3-E6D4-4DEE-98EF-D2A111A5DEC5}"/>
+                <a16:creationId xmlns:a16="http://schemas.microsoft.com/office/drawing/2014/main" id="{155626A5-502A-46F8-8692-782DADABFB13}"/>
               </a:ext>
             </a:extLst>
           </p:cNvPr>
@@ -26347,7 +26347,7 @@
           <p:cNvPr id="36" name="">
             <a:extLst xmlns:a="http://schemas.openxmlformats.org/drawingml/2006/main">
               <a:ext uri="{FF2B5EF4-FFF2-40B4-BE49-F238E27FC236}">
-                <a16:creationId xmlns:a16="http://schemas.microsoft.com/office/drawing/2014/main" id="{7D0AFE65-C5AC-43DD-A988-41E0662B42AE}"/>
+                <a16:creationId xmlns:a16="http://schemas.microsoft.com/office/drawing/2014/main" id="{E248E694-EDC9-456B-8E86-A77A30AE0576}"/>
               </a:ext>
             </a:extLst>
           </p:cNvPr>
@@ -26404,7 +26404,7 @@
           <p:cNvPr id="37" name="">
             <a:extLst xmlns:a="http://schemas.openxmlformats.org/drawingml/2006/main">
               <a:ext uri="{FF2B5EF4-FFF2-40B4-BE49-F238E27FC236}">
-                <a16:creationId xmlns:a16="http://schemas.microsoft.com/office/drawing/2014/main" id="{6685AAF3-3EB4-4106-94C4-1F064B5FFC53}"/>
+                <a16:creationId xmlns:a16="http://schemas.microsoft.com/office/drawing/2014/main" id="{A3065723-D48D-4BBC-8AA6-BB6E93F96960}"/>
               </a:ext>
             </a:extLst>
           </p:cNvPr>
@@ -26461,7 +26461,7 @@
           <p:cNvPr id="38" name="">
             <a:extLst xmlns:a="http://schemas.openxmlformats.org/drawingml/2006/main">
               <a:ext uri="{FF2B5EF4-FFF2-40B4-BE49-F238E27FC236}">
-                <a16:creationId xmlns:a16="http://schemas.microsoft.com/office/drawing/2014/main" id="{796FD458-C1B8-45FD-B684-748A88A931AB}"/>
+                <a16:creationId xmlns:a16="http://schemas.microsoft.com/office/drawing/2014/main" id="{8835EB36-7314-42CB-BEE4-6F265E858492}"/>
               </a:ext>
             </a:extLst>
           </p:cNvPr>
@@ -26492,7 +26492,7 @@
           <p:cNvPr id="39" name="">
             <a:extLst xmlns:a="http://schemas.openxmlformats.org/drawingml/2006/main">
               <a:ext uri="{FF2B5EF4-FFF2-40B4-BE49-F238E27FC236}">
-                <a16:creationId xmlns:a16="http://schemas.microsoft.com/office/drawing/2014/main" id="{56CF267C-21F1-47E9-A54D-E9324E6A0F38}"/>
+                <a16:creationId xmlns:a16="http://schemas.microsoft.com/office/drawing/2014/main" id="{338F2E69-5005-452F-961E-D128440CCFA4}"/>
               </a:ext>
             </a:extLst>
           </p:cNvPr>
@@ -26549,7 +26549,7 @@
           <p:cNvPr id="40" name="">
             <a:extLst xmlns:a="http://schemas.openxmlformats.org/drawingml/2006/main">
               <a:ext uri="{FF2B5EF4-FFF2-40B4-BE49-F238E27FC236}">
-                <a16:creationId xmlns:a16="http://schemas.microsoft.com/office/drawing/2014/main" id="{F820BDF2-4405-442C-A821-A2CEF685ECDE}"/>
+                <a16:creationId xmlns:a16="http://schemas.microsoft.com/office/drawing/2014/main" id="{D4A0339D-4A52-4382-8F13-0A7487B7D09D}"/>
               </a:ext>
             </a:extLst>
           </p:cNvPr>
@@ -26606,7 +26606,7 @@
           <p:cNvPr id="41" name="">
             <a:extLst xmlns:a="http://schemas.openxmlformats.org/drawingml/2006/main">
               <a:ext uri="{FF2B5EF4-FFF2-40B4-BE49-F238E27FC236}">
-                <a16:creationId xmlns:a16="http://schemas.microsoft.com/office/drawing/2014/main" id="{2B819BA9-1CD8-4B3D-A433-1D69A49A8DFC}"/>
+                <a16:creationId xmlns:a16="http://schemas.microsoft.com/office/drawing/2014/main" id="{5FD3E569-850B-4269-8B27-A592935B86CD}"/>
               </a:ext>
             </a:extLst>
           </p:cNvPr>
@@ -26663,7 +26663,7 @@
           <p:cNvPr id="42" name="">
             <a:extLst xmlns:a="http://schemas.openxmlformats.org/drawingml/2006/main">
               <a:ext uri="{FF2B5EF4-FFF2-40B4-BE49-F238E27FC236}">
-                <a16:creationId xmlns:a16="http://schemas.microsoft.com/office/drawing/2014/main" id="{0FB64753-0A6D-463F-9F72-4A32B4FBC929}"/>
+                <a16:creationId xmlns:a16="http://schemas.microsoft.com/office/drawing/2014/main" id="{58E4151A-2BE4-40C4-A33D-F17D2F6DC7EC}"/>
               </a:ext>
             </a:extLst>
           </p:cNvPr>
@@ -26720,7 +26720,7 @@
           <p:cNvPr id="43" name="">
             <a:extLst xmlns:a="http://schemas.openxmlformats.org/drawingml/2006/main">
               <a:ext uri="{FF2B5EF4-FFF2-40B4-BE49-F238E27FC236}">
-                <a16:creationId xmlns:a16="http://schemas.microsoft.com/office/drawing/2014/main" id="{3D4B74B6-DC3E-4CB9-8DD4-432D3B008D6B}"/>
+                <a16:creationId xmlns:a16="http://schemas.microsoft.com/office/drawing/2014/main" id="{7C2C9416-B1CA-4484-976C-666EEBC2B006}"/>
               </a:ext>
             </a:extLst>
           </p:cNvPr>
@@ -26777,7 +26777,7 @@
           <p:cNvPr id="44" name="">
             <a:extLst xmlns:a="http://schemas.openxmlformats.org/drawingml/2006/main">
               <a:ext uri="{FF2B5EF4-FFF2-40B4-BE49-F238E27FC236}">
-                <a16:creationId xmlns:a16="http://schemas.microsoft.com/office/drawing/2014/main" id="{14A24E84-9F93-406C-A57F-7F2C67525D87}"/>
+                <a16:creationId xmlns:a16="http://schemas.microsoft.com/office/drawing/2014/main" id="{25602458-D6E1-4EC1-95C3-25C5F548841D}"/>
               </a:ext>
             </a:extLst>
           </p:cNvPr>
@@ -26834,7 +26834,7 @@
           <p:cNvPr id="45" name="">
             <a:extLst xmlns:a="http://schemas.openxmlformats.org/drawingml/2006/main">
               <a:ext uri="{FF2B5EF4-FFF2-40B4-BE49-F238E27FC236}">
-                <a16:creationId xmlns:a16="http://schemas.microsoft.com/office/drawing/2014/main" id="{0A2C3C5C-D40E-4BC2-BC25-B5040C524CD7}"/>
+                <a16:creationId xmlns:a16="http://schemas.microsoft.com/office/drawing/2014/main" id="{042E555E-82DB-4D49-A627-502B13BA4679}"/>
               </a:ext>
             </a:extLst>
           </p:cNvPr>
@@ -26891,7 +26891,7 @@
           <p:cNvPr id="46" name="">
             <a:extLst xmlns:a="http://schemas.openxmlformats.org/drawingml/2006/main">
               <a:ext uri="{FF2B5EF4-FFF2-40B4-BE49-F238E27FC236}">
-                <a16:creationId xmlns:a16="http://schemas.microsoft.com/office/drawing/2014/main" id="{D688B8F6-16B0-42DF-839C-6FBB46356EBB}"/>
+                <a16:creationId xmlns:a16="http://schemas.microsoft.com/office/drawing/2014/main" id="{797EC70B-3AAA-4994-924F-F2CE9E190018}"/>
               </a:ext>
             </a:extLst>
           </p:cNvPr>
@@ -26948,7 +26948,7 @@
           <p:cNvPr id="47" name="">
             <a:extLst xmlns:a="http://schemas.openxmlformats.org/drawingml/2006/main">
               <a:ext uri="{FF2B5EF4-FFF2-40B4-BE49-F238E27FC236}">
-                <a16:creationId xmlns:a16="http://schemas.microsoft.com/office/drawing/2014/main" id="{CCFF2A6E-72C5-4541-A932-FE11B7691E6F}"/>
+                <a16:creationId xmlns:a16="http://schemas.microsoft.com/office/drawing/2014/main" id="{7E493955-1037-464B-B293-BF26CD0E2047}"/>
               </a:ext>
             </a:extLst>
           </p:cNvPr>
@@ -27003,7 +27003,7 @@
     </p:spTree>
     <p:extLst>
       <p:ext uri="{BB962C8B-B14F-4D97-AF65-F5344CB8AC3E}">
-        <p14:creationId xmlns:p14="http://schemas.microsoft.com/office/powerpoint/2010/main" val="50298906"/>
+        <p14:creationId xmlns:p14="http://schemas.microsoft.com/office/powerpoint/2010/main" val="728035954"/>
       </p:ext>
     </p:extLst>
   </p:cSld>

--- a/assets/presentations/pmday-2026/ai-changes-both-sides.pptx
+++ b/assets/presentations/pmday-2026/ai-changes-both-sides.pptx
@@ -2,27 +2,27 @@
 <file path=ppt/presentation.xml><?xml version="1.0" encoding="utf-8"?>
 <p:presentation xmlns:p="http://schemas.openxmlformats.org/presentationml/2006/main">
   <p:sldMasterIdLst>
-    <p:sldMasterId xmlns:r="http://schemas.openxmlformats.org/officeDocument/2006/relationships" id="2147483648" r:id="R840e2bc2e314416f"/>
+    <p:sldMasterId xmlns:r="http://schemas.openxmlformats.org/officeDocument/2006/relationships" id="2147483648" r:id="R7f9dc059c3534c17"/>
   </p:sldMasterIdLst>
   <p:notesMasterIdLst>
-    <p:notesMasterId xmlns:r="http://schemas.openxmlformats.org/officeDocument/2006/relationships" r:id="Reeeb221d78424c22"/>
+    <p:notesMasterId xmlns:r="http://schemas.openxmlformats.org/officeDocument/2006/relationships" r:id="R475a76d8033840cf"/>
   </p:notesMasterIdLst>
   <p:sldIdLst>
-    <p:sldId xmlns:r="http://schemas.openxmlformats.org/officeDocument/2006/relationships" id="256" r:id="Rc05b99a0f6ee46b5"/>
-    <p:sldId xmlns:r="http://schemas.openxmlformats.org/officeDocument/2006/relationships" id="257" r:id="Rd7b6e596a5c84431"/>
-    <p:sldId xmlns:r="http://schemas.openxmlformats.org/officeDocument/2006/relationships" id="258" r:id="R6e11cd40002746e4"/>
-    <p:sldId xmlns:r="http://schemas.openxmlformats.org/officeDocument/2006/relationships" id="259" r:id="R81e85c1d69c74d5a"/>
-    <p:sldId xmlns:r="http://schemas.openxmlformats.org/officeDocument/2006/relationships" id="260" r:id="R15531fbae60c43d5"/>
-    <p:sldId xmlns:r="http://schemas.openxmlformats.org/officeDocument/2006/relationships" id="261" r:id="R1ebdeaef74e34cb5"/>
-    <p:sldId xmlns:r="http://schemas.openxmlformats.org/officeDocument/2006/relationships" id="262" r:id="R500fd47a26fa4732"/>
-    <p:sldId xmlns:r="http://schemas.openxmlformats.org/officeDocument/2006/relationships" id="263" r:id="R48724e6ecbab4b45"/>
-    <p:sldId xmlns:r="http://schemas.openxmlformats.org/officeDocument/2006/relationships" id="264" r:id="Rb5a2a61862b9472b"/>
-    <p:sldId xmlns:r="http://schemas.openxmlformats.org/officeDocument/2006/relationships" id="265" r:id="R9014a67ceea94d0e"/>
-    <p:sldId xmlns:r="http://schemas.openxmlformats.org/officeDocument/2006/relationships" id="266" r:id="Rf609436235624f67"/>
-    <p:sldId xmlns:r="http://schemas.openxmlformats.org/officeDocument/2006/relationships" id="267" r:id="R1e85f419e8544f9f"/>
-    <p:sldId xmlns:r="http://schemas.openxmlformats.org/officeDocument/2006/relationships" id="268" r:id="R72ed637e197a498e"/>
-    <p:sldId xmlns:r="http://schemas.openxmlformats.org/officeDocument/2006/relationships" id="269" r:id="R3e9a3b5d5ecb45b2"/>
-    <p:sldId xmlns:r="http://schemas.openxmlformats.org/officeDocument/2006/relationships" id="270" r:id="R1c07143ea0634d2e"/>
+    <p:sldId xmlns:r="http://schemas.openxmlformats.org/officeDocument/2006/relationships" id="256" r:id="Rdcbf9f7cc370432e"/>
+    <p:sldId xmlns:r="http://schemas.openxmlformats.org/officeDocument/2006/relationships" id="257" r:id="R34be3620b1304a0d"/>
+    <p:sldId xmlns:r="http://schemas.openxmlformats.org/officeDocument/2006/relationships" id="258" r:id="R15a1e1ad3dec45fa"/>
+    <p:sldId xmlns:r="http://schemas.openxmlformats.org/officeDocument/2006/relationships" id="259" r:id="Re60744c52e864c0e"/>
+    <p:sldId xmlns:r="http://schemas.openxmlformats.org/officeDocument/2006/relationships" id="260" r:id="Rac623f5b73d7483e"/>
+    <p:sldId xmlns:r="http://schemas.openxmlformats.org/officeDocument/2006/relationships" id="261" r:id="Reb06a3760c4448f0"/>
+    <p:sldId xmlns:r="http://schemas.openxmlformats.org/officeDocument/2006/relationships" id="262" r:id="R85bf28c6ce1542c4"/>
+    <p:sldId xmlns:r="http://schemas.openxmlformats.org/officeDocument/2006/relationships" id="263" r:id="R95f691b2b9e44076"/>
+    <p:sldId xmlns:r="http://schemas.openxmlformats.org/officeDocument/2006/relationships" id="264" r:id="Rf3a752b048e74033"/>
+    <p:sldId xmlns:r="http://schemas.openxmlformats.org/officeDocument/2006/relationships" id="265" r:id="R6f38a6864ee94ba3"/>
+    <p:sldId xmlns:r="http://schemas.openxmlformats.org/officeDocument/2006/relationships" id="266" r:id="R0f35c44aa80b4256"/>
+    <p:sldId xmlns:r="http://schemas.openxmlformats.org/officeDocument/2006/relationships" id="267" r:id="Rd43e93feb1894cf4"/>
+    <p:sldId xmlns:r="http://schemas.openxmlformats.org/officeDocument/2006/relationships" id="268" r:id="Red7043531968471a"/>
+    <p:sldId xmlns:r="http://schemas.openxmlformats.org/officeDocument/2006/relationships" id="269" r:id="R0634b3f967a6438e"/>
+    <p:sldId xmlns:r="http://schemas.openxmlformats.org/officeDocument/2006/relationships" id="270" r:id="R5f2f1335cfee4384"/>
   </p:sldIdLst>
   <p:sldSz cx="12192000" cy="6858000"/>
   <p:notesSz cx="6858000" cy="9144000"/>
@@ -611,6 +611,26 @@
           </a:p>
           <a:p xmlns:a="http://schemas.openxmlformats.org/drawingml/2006/main">
             <a:r>
+              <a:t>Критичний перегляд зв’язності та ролей, v14, 23 вересня 2026:</a:t>
+            </a:r>
+          </a:p>
+          <a:p xmlns:a="http://schemas.openxmlformats.org/drawingml/2006/main">
+            <a:r>
+              <a:t>Цей слайд афектить не лише QA: Product / PO + BA уточнюють, що є корисним і прийнятним, domain experts допомагають калібрувати оцінювання, Dev робить відтворюване вимірювання версій, а Project Manager забезпечує час, дані, експертів та готовність evidence до рішення. Уповноважений risk / release owner ухвалює рішення в погодженому scope; статистична оцінка не надає права обійти заборону. Service owner приносить production outcomes та incidents.</a:t>
+            </a:r>
+          </a:p>
+          <a:p xmlns:a="http://schemas.openxmlformats.org/drawingml/2006/main">
+            <a:r>
+              <a:t>Окремо проговорити видиму різницю: curated Golden Set перевіряє важливі сценарії й класи відмов; оцінка частоти в цільовому usage потребує обґрунтованої репрезентативної вибірки. Для Wilson interval потрібні зазначені припущення незалежної бінарної вибірки; 95% — властивість методу інтервалу, не гарантія безпечності production. Навчальні 196/3/1 та 4/200 не змінені. Навіть добрий середній score не перекриває критичну заборону. Варіативність прийнятна лише всередині всього контракту; належно перехоплена заборонена пропозиція моделі може свідчити про правильний containment. Наступний крок — зробити ці evidence частиною readiness, completion і окремого release decision.</a:t>
+            </a:r>
+          </a:p>
+          <a:p xmlns:a="http://schemas.openxmlformats.org/drawingml/2006/main">
+            <a:r>
+              <a:t/>
+            </a:r>
+          </a:p>
+          <a:p xmlns:a="http://schemas.openxmlformats.org/drawingml/2006/main">
+            <a:r>
               <a:t>Sources:</a:t>
             </a:r>
           </a:p>
@@ -801,6 +821,31 @@
           </a:p>
           <a:p xmlns:a="http://schemas.openxmlformats.org/drawingml/2006/main">
             <a:r>
+              <a:t>Критичний перегляд зв’язності та ролей, v14, 23 вересня 2026:</a:t>
+            </a:r>
+          </a:p>
+          <a:p xmlns:a="http://schemas.openxmlformats.org/drawingml/2006/main">
+            <a:r>
+              <a:t>DoR / DoD — спільний робочий контракт, тому цей слайд стосується Product Owner, BA, розробників, QA, Project Manager та operations. PO забезпечує ясність мети, цінність і пріоритети backlog; BA — зрозумілі критерії; Dev / QA — здійсненність, реалізацію та evidence; архітектор і service owner — реальні control / HITL paths та capacity; Project Manager — доступність цих результатів і рішень у delivery plan. Це не передача якості одному PO чи QA. У Scrum Definition of Done є commitment для Increment, Developers мають її виконувати, а за відсутності достатнього organizational standard її створює Scrum Team. Definition of Ready — можлива командна практика, не обов’язковий Scrum artifact чи формальний approval gate. Scrum Master, якщо команда працює в Scrum, допомагає емпіризму та ефективності процесу, не підмінює жодного decision owner.</a:t>
+            </a:r>
+          </a:p>
+          <a:p xmlns:a="http://schemas.openxmlformats.org/drawingml/2006/main">
+            <a:r>
+              <a:t>Release owner авторизує scope, exposure та residual risk у межах своїх прав. Service owner / operations забезпечує named responders, часові межі втручання, peak capacity, backup, monitoring та перевірений rollback / fallback; Project Manager координує залежності готовності. Завершене за DoD не означає автоматичного дозволу на будь-який production scope. Інциденти повертаються не лише в тести, а й до Product / PO для зміни пріоритетів і до архітектора для перевірки control assumptions.</a:t>
+            </a:r>
+          </a:p>
+          <a:p xmlns:a="http://schemas.openxmlformats.org/drawingml/2006/main">
+            <a:r>
+              <a:t>Перехід до 12: порядок розповіді не є waterfall. Ми спершу назвали, що треба довести, а тепер розкриваємо архітектуру, яка робить ці докази й обіцянки credible. Контроль і operational ownership проектуються до релізу, а не додаються після DoD.</a:t>
+            </a:r>
+          </a:p>
+          <a:p xmlns:a="http://schemas.openxmlformats.org/drawingml/2006/main">
+            <a:r>
+              <a:t/>
+            </a:r>
+          </a:p>
+          <a:p xmlns:a="http://schemas.openxmlformats.org/drawingml/2006/main">
+            <a:r>
               <a:t>Sources:</a:t>
             </a:r>
           </a:p>
@@ -827,6 +872,11 @@
           <a:p xmlns:a="http://schemas.openxmlformats.org/drawingml/2006/main">
             <a:r>
               <a:t>https://github.com/UncertaintyArchitectureGroup/uncertainty-architecture/blob/main/content/raw/Designing%20Non-Deterministic%20Systems%3A%20Maintaining%20Engineering%20Rigor%20in%20the%20AI%20Era.pdf#page=13</a:t>
+            </a:r>
+          </a:p>
+          <a:p xmlns:a="http://schemas.openxmlformats.org/drawingml/2006/main">
+            <a:r>
+              <a:t>https://scrumguides.org/scrum-guide.html</a:t>
             </a:r>
           </a:p>
         </p:txBody>
@@ -986,6 +1036,26 @@
           </a:p>
           <a:p xmlns:a="http://schemas.openxmlformats.org/drawingml/2006/main">
             <a:r>
+              <a:t>Критичний перегляд зв’язності та ролей, v14, 23 вересня 2026:</a:t>
+            </a:r>
+          </a:p>
+          <a:p xmlns:a="http://schemas.openxmlformats.org/drawingml/2006/main">
+            <a:r>
+              <a:t>Архітектор не є одноосібним власником усієї системи. Architect + Dev проектують та реалізують повний control path; QA перевіряє failure modes, недоступність evaluator / людини та результат втручання; business / risk owner задає дозволені межі й delegation; service owner / operations забезпечує responders, monitoring, capacity, backup та recovery у роботі. Project Manager узгоджує залежності, бюджет і строки цих результатів. Product / PO вирішує, чи залишився достатній value у звуженому scope; security / privacy specialists потрібні там, де відповідні наслідки суттєві. Архітектурний veto — виявлення неприйнятної технічної або операційної здійсненності; організаційні повноваження на stop/release мають бути названі, а не припущені за назвою посади.</a:t>
+            </a:r>
+          </a:p>
+          <a:p xmlns:a="http://schemas.openxmlformats.org/drawingml/2006/main">
+            <a:r>
+              <a:t>Human Authority потребує evidence і контексту для рішення, компетенції та реального права впливати. Черга ескалацій, час реакції, duty coverage та резервний шлях — параметри системи. Номінальне human approval без часу й можливості зрозуміти ситуацію не є credible control. Для support assistant недоступний фахівець веде до погодженого hold / fallback / refusal, а не автоматичного розширення дій моделі. Усі signals та корекції мають перевіряти фактичний ефект. Перехід до 13: якщо люди, їхні знання й capacity є залежностями системи, їхня організація стає частиною роботи Project Manager.</a:t>
+            </a:r>
+          </a:p>
+          <a:p xmlns:a="http://schemas.openxmlformats.org/drawingml/2006/main">
+            <a:r>
+              <a:t/>
+            </a:r>
+          </a:p>
+          <a:p xmlns:a="http://schemas.openxmlformats.org/drawingml/2006/main">
+            <a:r>
               <a:t>Sources:</a:t>
             </a:r>
           </a:p>
@@ -1181,6 +1251,26 @@
           </a:p>
           <a:p xmlns:a="http://schemas.openxmlformats.org/drawingml/2006/main">
             <a:r>
+              <a:t>Критичний перегляд зв’язності та ролей, v14, 23 вересня 2026:</a:t>
+            </a:r>
+          </a:p>
+          <a:p xmlns:a="http://schemas.openxmlformats.org/drawingml/2006/main">
+            <a:r>
+              <a:t>Project Manager з’єднує роботу Product Manager / Product Owner, BA, Dev, QA, архітектора, service owner та уповноважених decision owners. Він не отримує автоматично право визначати product value, переписувати технічні межі або приймати business risk. Його робота — зробити залежності й пропуски видимими, отримати власника, час і evidence, домогтися рішення належної особи. У Scrum це окремо від відповідальності Scrum Master за Scrum та ефективність команди; наявність окремої посади Project Manager не є вимогою Scrum або UA.</a:t>
+            </a:r>
+          </a:p>
+          <a:p xmlns:a="http://schemas.openxmlformats.org/drawingml/2006/main">
+            <a:r>
+              <a:t>Обидва горизонти зводимо до корисного результату. HOW: review queues / rework ростуть — команда з Project Manager переглядає WIP, batch size, reviewer coverage та scope. WHAT: human escalation queue чи response time виходить за погоджені межі — service / release owner вирішує щодо capacity, exposure, fallback чи stop, Product / PO переоцінює value та пріоритети. Project Manager забезпечує своєчасність цих рішень. Більше коду та кращий eval score самі по собі не доводять більшої продуктової цінності. Перехід до 14: одне погодження не закриває невизначеність назавжди; потрібен повторюваний командний цикл evidence → decision → adaptation.</a:t>
+            </a:r>
+          </a:p>
+          <a:p xmlns:a="http://schemas.openxmlformats.org/drawingml/2006/main">
+            <a:r>
+              <a:t/>
+            </a:r>
+          </a:p>
+          <a:p xmlns:a="http://schemas.openxmlformats.org/drawingml/2006/main">
+            <a:r>
               <a:t>Sources:</a:t>
             </a:r>
           </a:p>
@@ -1341,6 +1431,26 @@
           </a:p>
           <a:p xmlns:a="http://schemas.openxmlformats.org/drawingml/2006/main">
             <a:r>
+              <a:t>Критичний перегляд зв’язності та ролей, v14, 23 вересня 2026:</a:t>
+            </a:r>
+          </a:p>
+          <a:p xmlns:a="http://schemas.openxmlformats.org/drawingml/2006/main">
+            <a:r>
+              <a:t>Ролі на фінальному слайді показують провідний внесок на етапі, а не виключне право участі. Planning: Product / PO + BA разом із командою визначають value target, питання, межі, потрібні evidence й owner. Daily work: Dev + QA + Architect будують, versionують trial, перевіряють і закривають gaps; інші потрібні фахівці також залучені. Review: Product / PO оцінює value, команда пояснює evidence й невизначеність, уповноважений release / risk owner ухвалює scope-specific рішення. After release: service owner + responders моніторять, реагують і повертають findings до всієї команди. Project Manager координує залежності та своєчасність рішень у всьому циклі; Scrum Master у Scrum підтримує емпіризм та ефективність командної взаємодії. Це не новий обов’язковий склад команди й не зміна значення Scrum events; зокрема Sprint Review не перетворюється на формальний release gate.</a:t>
+            </a:r>
+          </a:p>
+          <a:p xmlns:a="http://schemas.openxmlformats.org/drawingml/2006/main">
+            <a:r>
+              <a:t>Обидві частини доповіді сходяться тут: HOW перевіряє реальне delivery improvement із збереженим розумінням; WHAT перевіряє корисні outcomes, допустиму поведінку, дієвий контроль та повну вартість. Experiment завершується рішенням, а learning, monitoring та reassessment тривають. Завершити конкретною дією для аудиторії: оберіть один workflow; назвіть, яку корисну зміну очікуєте; погодьте межі; визначте evidence і decision / service owners; відрепетируйте fallback. Це можна почати з наявними людьми. Наступний ресурсний слайд дає матеріали для такого першого кроку.</a:t>
+            </a:r>
+          </a:p>
+          <a:p xmlns:a="http://schemas.openxmlformats.org/drawingml/2006/main">
+            <a:r>
+              <a:t/>
+            </a:r>
+          </a:p>
+          <a:p xmlns:a="http://schemas.openxmlformats.org/drawingml/2006/main">
+            <a:r>
               <a:t>Sources:</a:t>
             </a:r>
           </a:p>
@@ -1357,6 +1467,11 @@
           <a:p xmlns:a="http://schemas.openxmlformats.org/drawingml/2006/main">
             <a:r>
               <a:t>https://github.com/UncertaintyArchitectureGroup/uncertainty-architecture/blob/main/01-patterns/thinking-system-review.md</a:t>
+            </a:r>
+          </a:p>
+          <a:p xmlns:a="http://schemas.openxmlformats.org/drawingml/2006/main">
+            <a:r>
+              <a:t>https://scrumguides.org/scrum-guide.html</a:t>
             </a:r>
           </a:p>
         </p:txBody>
@@ -2141,6 +2256,21 @@
           </a:p>
           <a:p xmlns:a="http://schemas.openxmlformats.org/drawingml/2006/main">
             <a:r>
+              <a:t>Критичний перегляд зв’язності та ролей, v14, 23 вересня 2026:</a:t>
+            </a:r>
+          </a:p>
+          <a:p xmlns:a="http://schemas.openxmlformats.org/drawingml/2006/main">
+            <a:r>
+              <a:t>Це перехід від HOW до WHAT: у першій частині AI допомагав створювати код; тепер продукт делегує моделі частину runtime judgment. Обидві зміни можуть бути присутні разом, але потребують різних evidence. Новий об’єкт афектить Product Manager / Product Owner і BA через цінність та контракт поведінки; розробників, QA й архітектора через реалізацію та перевірку; Project Manager через залежності та план робіт; service owner / operations через дієздатність контролю після запуску. Ролі тут позначають відповідальності, а не обов’язкові нові посади: у невеликій команді їх можуть поєднувати. Наступні слайди — один спільний ланцюг define → evaluate → control → operate, а не передавання ізольованої роботи між відділами. Спочатку погодимо, яка поведінка корисна й дозволена.</a:t>
+            </a:r>
+          </a:p>
+          <a:p xmlns:a="http://schemas.openxmlformats.org/drawingml/2006/main">
+            <a:r>
+              <a:t/>
+            </a:r>
+          </a:p>
+          <a:p xmlns:a="http://schemas.openxmlformats.org/drawingml/2006/main">
+            <a:r>
               <a:t>Sources:</a:t>
             </a:r>
           </a:p>
@@ -2291,6 +2421,26 @@
           </a:p>
           <a:p xmlns:a="http://schemas.openxmlformats.org/drawingml/2006/main">
             <a:r>
+              <a:t>Критичний перегляд зв’язності та ролей, v14, 23 вересня 2026:</a:t>
+            </a:r>
+          </a:p>
+          <a:p xmlns:a="http://schemas.openxmlformats.org/drawingml/2006/main">
+            <a:r>
+              <a:t>Product Owner явно входить до цього слайда: відповідає за цінність, Product Goal і впорядкування backlog, робить потрібні вимоги, evidence та control work видимими й пріоритетними. Product Manager, якщо ця роль є окремо, додає продуктову стратегію, discovery та економіку; конкретний розподіл із PO залежить від організації. BA допомагає зробити domain rules, приклади, контрприклади та acceptance rules однозначними. Project Manager організовує своєчасні stakeholder decisions, доступність експертів, оцінювання залежностей, бюджету й capacity; не вигадує прийнятний ризик за бізнес. Dev, QA та архітектор уже тут перевіряють, чи можна критерії виміряти й межі забезпечити. Уповноважений business / risk owner погоджує допустимі наслідки в межах своїх прав; правові, privacy та security заборони не стають предметом довільного обміну на value. За потреби залучаємо відповідних фахівців. Назва Product Owner сама собою не надає права приймати будь-який risk або authorize release.</a:t>
+            </a:r>
+          </a:p>
+          <a:p xmlns:a="http://schemas.openxmlformats.org/drawingml/2006/main">
+            <a:r>
+              <a:t>Крім відсутності шкоди, задаємо ціль корисності. Для наскрізного support-assistant прикладу: чи вирішено звернення правильно, чи не перенесли ми роботу на користувача або оператора, яка повна вартість корисно завершеного звернення? Це питання для вибору продуктового показника, не нові емпіричні числа. Вимоги до exact states / permissions не зникають; поведінковий контракт їх доповнює. Передаємо на слайд 10 не список побажань, а погоджені приклади, заборони, критерії та власників рішень.</a:t>
+            </a:r>
+          </a:p>
+          <a:p xmlns:a="http://schemas.openxmlformats.org/drawingml/2006/main">
+            <a:r>
+              <a:t/>
+            </a:r>
+          </a:p>
+          <a:p xmlns:a="http://schemas.openxmlformats.org/drawingml/2006/main">
+            <a:r>
               <a:t>Sources:</a:t>
             </a:r>
           </a:p>
@@ -2337,6 +2487,11 @@
           <a:p xmlns:a="http://schemas.openxmlformats.org/drawingml/2006/main">
             <a:r>
               <a:t>https://github.com/UncertaintyArchitectureGroup/uncertainty-architecture/blob/main/content/raw/Designing%20Non-Deterministic%20Systems%3A%20Maintaining%20Engineering%20Rigor%20in%20the%20AI%20Era.pdf#page=5</a:t>
+            </a:r>
+          </a:p>
+          <a:p xmlns:a="http://schemas.openxmlformats.org/drawingml/2006/main">
+            <a:r>
+              <a:t>https://scrumguides.org/scrum-guide.html</a:t>
             </a:r>
           </a:p>
         </p:txBody>
@@ -2404,7 +2559,7 @@
   </p:cSld>
   <p:clrMap bg1="lt1" tx1="dk1" bg2="lt2" tx2="dk2" accent1="accent1" accent2="accent2" accent3="accent3" accent4="accent4" accent5="accent5" accent6="accent6" hlink="hlink" folHlink="folHlink"/>
   <p:sldLayoutIdLst>
-    <p:sldLayoutId id="2147483649" r:id="Re105b461c2764a82"/>
+    <p:sldLayoutId id="2147483649" r:id="R793c412630c14e44"/>
   </p:sldLayoutIdLst>
   <p:txStyles>
     <p:titleStyle>
@@ -3323,7 +3478,7 @@
           <p:cNvPr id="14" name="">
             <a:extLst xmlns:a="http://schemas.openxmlformats.org/drawingml/2006/main">
               <a:ext uri="{FF2B5EF4-FFF2-40B4-BE49-F238E27FC236}">
-                <a16:creationId xmlns:a16="http://schemas.microsoft.com/office/drawing/2014/main" id="{A4BF1791-C42F-4261-B8B4-523EB921CBFD}"/>
+                <a16:creationId xmlns:a16="http://schemas.microsoft.com/office/drawing/2014/main" id="{E8535B5D-25ED-42EC-B263-0AB37BD870EC}"/>
               </a:ext>
             </a:extLst>
           </p:cNvPr>
@@ -3380,7 +3535,7 @@
           <p:cNvPr id="2" name="">
             <a:extLst xmlns:a="http://schemas.openxmlformats.org/drawingml/2006/main">
               <a:ext uri="{FF2B5EF4-FFF2-40B4-BE49-F238E27FC236}">
-                <a16:creationId xmlns:a16="http://schemas.microsoft.com/office/drawing/2014/main" id="{7F114A79-9840-4FD2-B9F1-32F2BA1F6C4F}"/>
+                <a16:creationId xmlns:a16="http://schemas.microsoft.com/office/drawing/2014/main" id="{16C16F01-D5E5-466C-9EC1-7AE17238A7AE}"/>
               </a:ext>
             </a:extLst>
           </p:cNvPr>
@@ -3460,7 +3615,7 @@
           <p:cNvPr id="3" name="">
             <a:extLst xmlns:a="http://schemas.openxmlformats.org/drawingml/2006/main">
               <a:ext uri="{FF2B5EF4-FFF2-40B4-BE49-F238E27FC236}">
-                <a16:creationId xmlns:a16="http://schemas.microsoft.com/office/drawing/2014/main" id="{F5851C66-626D-4A25-AF20-20AD978A8BF4}"/>
+                <a16:creationId xmlns:a16="http://schemas.microsoft.com/office/drawing/2014/main" id="{28C27854-E247-4327-BACC-DAE53B8651DD}"/>
               </a:ext>
             </a:extLst>
           </p:cNvPr>
@@ -3521,7 +3676,7 @@
           <p:nvPr/>
         </p:nvPicPr>
         <p:blipFill>
-          <a:blip xmlns:r="http://schemas.openxmlformats.org/officeDocument/2006/relationships" xmlns:a="http://schemas.openxmlformats.org/drawingml/2006/main" r:embed="R997b6483edc04cb3"/>
+          <a:blip xmlns:r="http://schemas.openxmlformats.org/officeDocument/2006/relationships" xmlns:a="http://schemas.openxmlformats.org/drawingml/2006/main" r:embed="R60aed5db41324a09"/>
           <a:stretch xmlns:a="http://schemas.openxmlformats.org/drawingml/2006/main"/>
         </p:blipFill>
         <p:spPr>
@@ -3539,7 +3694,7 @@
           <p:cNvPr id="5" name="">
             <a:extLst xmlns:a="http://schemas.openxmlformats.org/drawingml/2006/main">
               <a:ext uri="{FF2B5EF4-FFF2-40B4-BE49-F238E27FC236}">
-                <a16:creationId xmlns:a16="http://schemas.microsoft.com/office/drawing/2014/main" id="{5E18CB3F-0FB5-42AB-9FF3-8546563AE19C}"/>
+                <a16:creationId xmlns:a16="http://schemas.microsoft.com/office/drawing/2014/main" id="{F1EF368E-024B-45AF-B145-D9A992F602C3}"/>
               </a:ext>
             </a:extLst>
           </p:cNvPr>
@@ -3596,7 +3751,7 @@
           <p:cNvPr id="6" name="">
             <a:extLst xmlns:a="http://schemas.openxmlformats.org/drawingml/2006/main">
               <a:ext uri="{FF2B5EF4-FFF2-40B4-BE49-F238E27FC236}">
-                <a16:creationId xmlns:a16="http://schemas.microsoft.com/office/drawing/2014/main" id="{A105CE68-07B5-4C2B-873F-CF9E3FE3D836}"/>
+                <a16:creationId xmlns:a16="http://schemas.microsoft.com/office/drawing/2014/main" id="{644E823D-5E9D-4940-A3E9-6C4D9BDF519E}"/>
               </a:ext>
             </a:extLst>
           </p:cNvPr>
@@ -3653,7 +3808,7 @@
           <p:cNvPr id="7" name="">
             <a:extLst xmlns:a="http://schemas.openxmlformats.org/drawingml/2006/main">
               <a:ext uri="{FF2B5EF4-FFF2-40B4-BE49-F238E27FC236}">
-                <a16:creationId xmlns:a16="http://schemas.microsoft.com/office/drawing/2014/main" id="{B4D91E1E-05B5-468D-9CDA-8FFF0499145E}"/>
+                <a16:creationId xmlns:a16="http://schemas.microsoft.com/office/drawing/2014/main" id="{6445FE88-2E36-4C66-BDEA-940ACB1A61DF}"/>
               </a:ext>
             </a:extLst>
           </p:cNvPr>
@@ -3710,7 +3865,7 @@
           <p:cNvPr id="8" name="">
             <a:extLst xmlns:a="http://schemas.openxmlformats.org/drawingml/2006/main">
               <a:ext uri="{FF2B5EF4-FFF2-40B4-BE49-F238E27FC236}">
-                <a16:creationId xmlns:a16="http://schemas.microsoft.com/office/drawing/2014/main" id="{73C159ED-D177-4188-B966-AFDC4B82B7D9}"/>
+                <a16:creationId xmlns:a16="http://schemas.microsoft.com/office/drawing/2014/main" id="{F89782B2-60D9-4FEE-8E1E-2FE9204796E7}"/>
               </a:ext>
             </a:extLst>
           </p:cNvPr>
@@ -3767,7 +3922,7 @@
           <p:cNvPr id="9" name="">
             <a:extLst xmlns:a="http://schemas.openxmlformats.org/drawingml/2006/main">
               <a:ext uri="{FF2B5EF4-FFF2-40B4-BE49-F238E27FC236}">
-                <a16:creationId xmlns:a16="http://schemas.microsoft.com/office/drawing/2014/main" id="{16A2B155-51B1-49CF-B528-95B2EB9007D0}"/>
+                <a16:creationId xmlns:a16="http://schemas.microsoft.com/office/drawing/2014/main" id="{42251012-636F-4BC4-9C36-B393CE64847D}"/>
               </a:ext>
             </a:extLst>
           </p:cNvPr>
@@ -3798,7 +3953,7 @@
           <p:cNvPr id="10" name="">
             <a:extLst xmlns:a="http://schemas.openxmlformats.org/drawingml/2006/main">
               <a:ext uri="{FF2B5EF4-FFF2-40B4-BE49-F238E27FC236}">
-                <a16:creationId xmlns:a16="http://schemas.microsoft.com/office/drawing/2014/main" id="{5E5E4AE0-5002-4262-A415-A9E4E987DFEB}"/>
+                <a16:creationId xmlns:a16="http://schemas.microsoft.com/office/drawing/2014/main" id="{1F3D34E6-57E9-4C30-BD3D-2A95AC2EF4BC}"/>
               </a:ext>
             </a:extLst>
           </p:cNvPr>
@@ -3855,7 +4010,7 @@
           <p:cNvPr id="11" name="">
             <a:extLst xmlns:a="http://schemas.openxmlformats.org/drawingml/2006/main">
               <a:ext uri="{FF2B5EF4-FFF2-40B4-BE49-F238E27FC236}">
-                <a16:creationId xmlns:a16="http://schemas.microsoft.com/office/drawing/2014/main" id="{CFA0B9C6-9D0D-4574-8816-6DA39F3DD393}"/>
+                <a16:creationId xmlns:a16="http://schemas.microsoft.com/office/drawing/2014/main" id="{07C2C301-A2BE-4580-B1DF-73E3C2AC3ABF}"/>
               </a:ext>
             </a:extLst>
           </p:cNvPr>
@@ -3912,7 +4067,7 @@
           <p:cNvPr id="12" name="">
             <a:extLst xmlns:a="http://schemas.openxmlformats.org/drawingml/2006/main">
               <a:ext uri="{FF2B5EF4-FFF2-40B4-BE49-F238E27FC236}">
-                <a16:creationId xmlns:a16="http://schemas.microsoft.com/office/drawing/2014/main" id="{CAFE116E-A88C-4422-8255-F782EB286A42}"/>
+                <a16:creationId xmlns:a16="http://schemas.microsoft.com/office/drawing/2014/main" id="{8013F979-F6E0-4958-BC70-0A40B8ABC36A}"/>
               </a:ext>
             </a:extLst>
           </p:cNvPr>
@@ -3958,7 +4113,7 @@
                 <a:latin typeface="Arial"/>
                 <a:ea typeface="Arial"/>
                 <a:cs typeface="Arial"/>
-                <a:hlinkClick xmlns:r="http://schemas.openxmlformats.org/officeDocument/2006/relationships" r:id="Rf3befadf4d6c46cb"/>
+                <a:hlinkClick xmlns:r="http://schemas.openxmlformats.org/officeDocument/2006/relationships" r:id="R65d02f19bf034118"/>
               </a:rPr>
               <a:t>oborskyivitalii@gmail.com</a:t>
             </a:r>
@@ -3970,7 +4125,7 @@
           <p:cNvPr id="13" name="">
             <a:extLst xmlns:a="http://schemas.openxmlformats.org/drawingml/2006/main">
               <a:ext uri="{FF2B5EF4-FFF2-40B4-BE49-F238E27FC236}">
-                <a16:creationId xmlns:a16="http://schemas.microsoft.com/office/drawing/2014/main" id="{F79B788E-B4F8-4DB6-B412-61A2BDDFE6C0}"/>
+                <a16:creationId xmlns:a16="http://schemas.microsoft.com/office/drawing/2014/main" id="{3E5DC91A-3CDE-4280-BFC8-1EF1DB82CD84}"/>
               </a:ext>
             </a:extLst>
           </p:cNvPr>
@@ -4016,7 +4171,7 @@
                 <a:latin typeface="Arial"/>
                 <a:ea typeface="Arial"/>
                 <a:cs typeface="Arial"/>
-                <a:hlinkClick xmlns:r="http://schemas.openxmlformats.org/officeDocument/2006/relationships" r:id="Rc30644ebd7644d23"/>
+                <a:hlinkClick xmlns:r="http://schemas.openxmlformats.org/officeDocument/2006/relationships" r:id="R67ddf98c64184597"/>
               </a:rPr>
               <a:t>https://www.linkedin.com/in/vitaliioborskyi/</a:t>
             </a:r>
@@ -4026,7 +4181,7 @@
     </p:spTree>
     <p:extLst>
       <p:ext uri="{BB962C8B-B14F-4D97-AF65-F5344CB8AC3E}">
-        <p14:creationId xmlns:p14="http://schemas.microsoft.com/office/powerpoint/2010/main" val="888369320"/>
+        <p14:creationId xmlns:p14="http://schemas.microsoft.com/office/powerpoint/2010/main" val="20194842"/>
       </p:ext>
     </p:extLst>
   </p:cSld>
@@ -4057,7 +4212,7 @@
           <p:cNvPr id="46" name="">
             <a:extLst xmlns:a="http://schemas.openxmlformats.org/drawingml/2006/main">
               <a:ext uri="{FF2B5EF4-FFF2-40B4-BE49-F238E27FC236}">
-                <a16:creationId xmlns:a16="http://schemas.microsoft.com/office/drawing/2014/main" id="{24582B39-8A05-4A72-AF9D-1741014753C6}"/>
+                <a16:creationId xmlns:a16="http://schemas.microsoft.com/office/drawing/2014/main" id="{F627C10E-9A41-4494-B771-2D9A33E4869E}"/>
               </a:ext>
             </a:extLst>
           </p:cNvPr>
@@ -4114,7 +4269,7 @@
           <p:cNvPr id="2" name="">
             <a:extLst xmlns:a="http://schemas.openxmlformats.org/drawingml/2006/main">
               <a:ext uri="{FF2B5EF4-FFF2-40B4-BE49-F238E27FC236}">
-                <a16:creationId xmlns:a16="http://schemas.microsoft.com/office/drawing/2014/main" id="{B4EE6ABA-8729-4996-B315-2CE570E06B1E}"/>
+                <a16:creationId xmlns:a16="http://schemas.microsoft.com/office/drawing/2014/main" id="{BAEDC387-0BE5-4CEA-A10F-19F2B65ADA25}"/>
               </a:ext>
             </a:extLst>
           </p:cNvPr>
@@ -4145,7 +4300,7 @@
           <p:cNvPr id="3" name="">
             <a:extLst xmlns:a="http://schemas.openxmlformats.org/drawingml/2006/main">
               <a:ext uri="{FF2B5EF4-FFF2-40B4-BE49-F238E27FC236}">
-                <a16:creationId xmlns:a16="http://schemas.microsoft.com/office/drawing/2014/main" id="{6EF0A1B1-BFCD-4227-8FEF-57EF4D46BE24}"/>
+                <a16:creationId xmlns:a16="http://schemas.microsoft.com/office/drawing/2014/main" id="{ECED899C-02D4-4EAD-9E37-803831E1D98C}"/>
               </a:ext>
             </a:extLst>
           </p:cNvPr>
@@ -4202,7 +4357,7 @@
           <p:cNvPr id="4" name="">
             <a:extLst xmlns:a="http://schemas.openxmlformats.org/drawingml/2006/main">
               <a:ext uri="{FF2B5EF4-FFF2-40B4-BE49-F238E27FC236}">
-                <a16:creationId xmlns:a16="http://schemas.microsoft.com/office/drawing/2014/main" id="{B20E56D2-4781-4DF4-BA6A-B348C95DEAC3}"/>
+                <a16:creationId xmlns:a16="http://schemas.microsoft.com/office/drawing/2014/main" id="{51FE2D7E-6E8C-4A79-A338-CB8C43A10AAF}"/>
               </a:ext>
             </a:extLst>
           </p:cNvPr>
@@ -4249,7 +4404,7 @@
                 <a:ea typeface="Arial"/>
                 <a:cs typeface="Arial"/>
               </a:rPr>
-              <a:t>QA + DEVELOPERS · estimate behavior, uncertainty and consequences</a:t>
+              <a:t>QA + DEVELOPERS · DOMAIN EXPERTS · PRODUCT / PO · PROJECT MANAGER</a:t>
             </a:r>
           </a:p>
         </p:txBody>
@@ -4259,7 +4414,7 @@
           <p:cNvPr id="5" name="">
             <a:extLst xmlns:a="http://schemas.openxmlformats.org/drawingml/2006/main">
               <a:ext uri="{FF2B5EF4-FFF2-40B4-BE49-F238E27FC236}">
-                <a16:creationId xmlns:a16="http://schemas.microsoft.com/office/drawing/2014/main" id="{611D5F2C-A20F-4B72-9466-0C82A51467D0}"/>
+                <a16:creationId xmlns:a16="http://schemas.microsoft.com/office/drawing/2014/main" id="{830FED93-A0E9-4890-B56C-20C72C5EB48A}"/>
               </a:ext>
             </a:extLst>
           </p:cNvPr>
@@ -4316,7 +4471,7 @@
           <p:cNvPr id="6" name="">
             <a:extLst xmlns:a="http://schemas.openxmlformats.org/drawingml/2006/main">
               <a:ext uri="{FF2B5EF4-FFF2-40B4-BE49-F238E27FC236}">
-                <a16:creationId xmlns:a16="http://schemas.microsoft.com/office/drawing/2014/main" id="{CC393029-90DD-4A63-9690-04EFCD0D3E05}"/>
+                <a16:creationId xmlns:a16="http://schemas.microsoft.com/office/drawing/2014/main" id="{BAD13256-E5F8-4F30-9CBC-A7DAA499299F}"/>
               </a:ext>
             </a:extLst>
           </p:cNvPr>
@@ -4396,7 +4551,7 @@
           <p:cNvPr id="7" name="">
             <a:extLst xmlns:a="http://schemas.openxmlformats.org/drawingml/2006/main">
               <a:ext uri="{FF2B5EF4-FFF2-40B4-BE49-F238E27FC236}">
-                <a16:creationId xmlns:a16="http://schemas.microsoft.com/office/drawing/2014/main" id="{B9A407BB-D7C7-4EB6-8CE1-C96CB51FBCA8}"/>
+                <a16:creationId xmlns:a16="http://schemas.microsoft.com/office/drawing/2014/main" id="{BC428CA1-350C-4450-9651-90B59871D6D7}"/>
               </a:ext>
             </a:extLst>
           </p:cNvPr>
@@ -4476,7 +4631,7 @@
           <p:cNvPr id="8" name="">
             <a:extLst xmlns:a="http://schemas.openxmlformats.org/drawingml/2006/main">
               <a:ext uri="{FF2B5EF4-FFF2-40B4-BE49-F238E27FC236}">
-                <a16:creationId xmlns:a16="http://schemas.microsoft.com/office/drawing/2014/main" id="{6AA43D94-8643-4FFA-A0E1-A1889BC93EEF}"/>
+                <a16:creationId xmlns:a16="http://schemas.microsoft.com/office/drawing/2014/main" id="{7FAB6843-A2FF-4037-8824-2989215D268A}"/>
               </a:ext>
             </a:extLst>
           </p:cNvPr>
@@ -4533,7 +4688,7 @@
           <p:cNvPr id="9" name="">
             <a:extLst xmlns:a="http://schemas.openxmlformats.org/drawingml/2006/main">
               <a:ext uri="{FF2B5EF4-FFF2-40B4-BE49-F238E27FC236}">
-                <a16:creationId xmlns:a16="http://schemas.microsoft.com/office/drawing/2014/main" id="{49C87457-FB5C-4A62-8693-4B5DD60EA05B}"/>
+                <a16:creationId xmlns:a16="http://schemas.microsoft.com/office/drawing/2014/main" id="{84FA727C-00F2-4B64-A07F-041560C82C09}"/>
               </a:ext>
             </a:extLst>
           </p:cNvPr>
@@ -4590,7 +4745,7 @@
           <p:cNvPr id="10" name="">
             <a:extLst xmlns:a="http://schemas.openxmlformats.org/drawingml/2006/main">
               <a:ext uri="{FF2B5EF4-FFF2-40B4-BE49-F238E27FC236}">
-                <a16:creationId xmlns:a16="http://schemas.microsoft.com/office/drawing/2014/main" id="{186EF88D-8D8B-4711-AF3D-6C485537E93D}"/>
+                <a16:creationId xmlns:a16="http://schemas.microsoft.com/office/drawing/2014/main" id="{C5EEAE5B-4C4D-4F35-BB98-49ACA06EA936}"/>
               </a:ext>
             </a:extLst>
           </p:cNvPr>
@@ -4621,7 +4776,7 @@
           <p:cNvPr id="11" name="">
             <a:extLst xmlns:a="http://schemas.openxmlformats.org/drawingml/2006/main">
               <a:ext uri="{FF2B5EF4-FFF2-40B4-BE49-F238E27FC236}">
-                <a16:creationId xmlns:a16="http://schemas.microsoft.com/office/drawing/2014/main" id="{D4C4D442-6A97-4DA3-BF91-5644B9409FD6}"/>
+                <a16:creationId xmlns:a16="http://schemas.microsoft.com/office/drawing/2014/main" id="{AF29A5E7-4AAC-4BC4-B6A5-710BA5ABE0E0}"/>
               </a:ext>
             </a:extLst>
           </p:cNvPr>
@@ -4654,7 +4809,7 @@
           <p:cNvPr id="12" name="">
             <a:extLst xmlns:a="http://schemas.openxmlformats.org/drawingml/2006/main">
               <a:ext uri="{FF2B5EF4-FFF2-40B4-BE49-F238E27FC236}">
-                <a16:creationId xmlns:a16="http://schemas.microsoft.com/office/drawing/2014/main" id="{FE57D2F1-6EF0-4D0E-BA66-A84189E6D180}"/>
+                <a16:creationId xmlns:a16="http://schemas.microsoft.com/office/drawing/2014/main" id="{FAD102FD-1474-45BB-AD11-80F975101B56}"/>
               </a:ext>
             </a:extLst>
           </p:cNvPr>
@@ -4687,7 +4842,7 @@
           <p:cNvPr id="13" name="">
             <a:extLst xmlns:a="http://schemas.openxmlformats.org/drawingml/2006/main">
               <a:ext uri="{FF2B5EF4-FFF2-40B4-BE49-F238E27FC236}">
-                <a16:creationId xmlns:a16="http://schemas.microsoft.com/office/drawing/2014/main" id="{9452DD40-969B-4498-BE21-A12B908E0423}"/>
+                <a16:creationId xmlns:a16="http://schemas.microsoft.com/office/drawing/2014/main" id="{1BFE0B96-6DE3-44F0-8125-AE3D3FE8211E}"/>
               </a:ext>
             </a:extLst>
           </p:cNvPr>
@@ -4720,7 +4875,7 @@
           <p:cNvPr id="14" name="">
             <a:extLst xmlns:a="http://schemas.openxmlformats.org/drawingml/2006/main">
               <a:ext uri="{FF2B5EF4-FFF2-40B4-BE49-F238E27FC236}">
-                <a16:creationId xmlns:a16="http://schemas.microsoft.com/office/drawing/2014/main" id="{26EB98D7-7941-4727-8A4C-C8F05A94175A}"/>
+                <a16:creationId xmlns:a16="http://schemas.microsoft.com/office/drawing/2014/main" id="{A3211510-E245-484B-B3F6-0B5562EBD9E5}"/>
               </a:ext>
             </a:extLst>
           </p:cNvPr>
@@ -4753,7 +4908,7 @@
           <p:cNvPr id="15" name="">
             <a:extLst xmlns:a="http://schemas.openxmlformats.org/drawingml/2006/main">
               <a:ext uri="{FF2B5EF4-FFF2-40B4-BE49-F238E27FC236}">
-                <a16:creationId xmlns:a16="http://schemas.microsoft.com/office/drawing/2014/main" id="{446850B1-5613-4026-8F41-D8D60A08115D}"/>
+                <a16:creationId xmlns:a16="http://schemas.microsoft.com/office/drawing/2014/main" id="{1BECE619-028D-4EBB-A894-2E6500F9841E}"/>
               </a:ext>
             </a:extLst>
           </p:cNvPr>
@@ -4786,7 +4941,7 @@
           <p:cNvPr id="16" name="">
             <a:extLst xmlns:a="http://schemas.openxmlformats.org/drawingml/2006/main">
               <a:ext uri="{FF2B5EF4-FFF2-40B4-BE49-F238E27FC236}">
-                <a16:creationId xmlns:a16="http://schemas.microsoft.com/office/drawing/2014/main" id="{F8A6B3D7-95AD-4B92-8A89-AAEB075FEE09}"/>
+                <a16:creationId xmlns:a16="http://schemas.microsoft.com/office/drawing/2014/main" id="{575523F6-3011-446A-85B0-D57CF8C89D83}"/>
               </a:ext>
             </a:extLst>
           </p:cNvPr>
@@ -4819,7 +4974,7 @@
           <p:cNvPr id="17" name="">
             <a:extLst xmlns:a="http://schemas.openxmlformats.org/drawingml/2006/main">
               <a:ext uri="{FF2B5EF4-FFF2-40B4-BE49-F238E27FC236}">
-                <a16:creationId xmlns:a16="http://schemas.microsoft.com/office/drawing/2014/main" id="{7F3E998B-28C3-4617-83F1-42F12C3EE6E2}"/>
+                <a16:creationId xmlns:a16="http://schemas.microsoft.com/office/drawing/2014/main" id="{EAE9FDD7-734A-4E57-BDA0-33E6E4D95046}"/>
               </a:ext>
             </a:extLst>
           </p:cNvPr>
@@ -4852,7 +5007,7 @@
           <p:cNvPr id="18" name="">
             <a:extLst xmlns:a="http://schemas.openxmlformats.org/drawingml/2006/main">
               <a:ext uri="{FF2B5EF4-FFF2-40B4-BE49-F238E27FC236}">
-                <a16:creationId xmlns:a16="http://schemas.microsoft.com/office/drawing/2014/main" id="{A2730AEE-FA27-4490-9F80-D0C5CF15F006}"/>
+                <a16:creationId xmlns:a16="http://schemas.microsoft.com/office/drawing/2014/main" id="{EA9F7F30-F97F-4B11-8F73-9F20D8CB99CB}"/>
               </a:ext>
             </a:extLst>
           </p:cNvPr>
@@ -4885,7 +5040,7 @@
           <p:cNvPr id="19" name="">
             <a:extLst xmlns:a="http://schemas.openxmlformats.org/drawingml/2006/main">
               <a:ext uri="{FF2B5EF4-FFF2-40B4-BE49-F238E27FC236}">
-                <a16:creationId xmlns:a16="http://schemas.microsoft.com/office/drawing/2014/main" id="{2E654CDE-B57F-4C52-9F59-CEC09608FF9A}"/>
+                <a16:creationId xmlns:a16="http://schemas.microsoft.com/office/drawing/2014/main" id="{B2CB59BE-6F5F-4159-860B-BC3622E85C81}"/>
               </a:ext>
             </a:extLst>
           </p:cNvPr>
@@ -4918,7 +5073,7 @@
           <p:cNvPr id="20" name="">
             <a:extLst xmlns:a="http://schemas.openxmlformats.org/drawingml/2006/main">
               <a:ext uri="{FF2B5EF4-FFF2-40B4-BE49-F238E27FC236}">
-                <a16:creationId xmlns:a16="http://schemas.microsoft.com/office/drawing/2014/main" id="{D9AE763C-7673-4DDF-A973-3C416737AC26}"/>
+                <a16:creationId xmlns:a16="http://schemas.microsoft.com/office/drawing/2014/main" id="{1ECC638B-E9C2-4761-B2DC-BBB49ACB133A}"/>
               </a:ext>
             </a:extLst>
           </p:cNvPr>
@@ -4951,7 +5106,7 @@
           <p:cNvPr id="21" name="">
             <a:extLst xmlns:a="http://schemas.openxmlformats.org/drawingml/2006/main">
               <a:ext uri="{FF2B5EF4-FFF2-40B4-BE49-F238E27FC236}">
-                <a16:creationId xmlns:a16="http://schemas.microsoft.com/office/drawing/2014/main" id="{463DB4DD-4D59-4E1E-9055-AC45BD3AAC54}"/>
+                <a16:creationId xmlns:a16="http://schemas.microsoft.com/office/drawing/2014/main" id="{0F7A0894-98C3-4049-B769-334DB1EE58F8}"/>
               </a:ext>
             </a:extLst>
           </p:cNvPr>
@@ -4984,7 +5139,7 @@
           <p:cNvPr id="22" name="">
             <a:extLst xmlns:a="http://schemas.openxmlformats.org/drawingml/2006/main">
               <a:ext uri="{FF2B5EF4-FFF2-40B4-BE49-F238E27FC236}">
-                <a16:creationId xmlns:a16="http://schemas.microsoft.com/office/drawing/2014/main" id="{99E823AB-979A-4000-8759-C8894C6663DF}"/>
+                <a16:creationId xmlns:a16="http://schemas.microsoft.com/office/drawing/2014/main" id="{A764DDD6-B784-4ED3-957A-A00B23895EF8}"/>
               </a:ext>
             </a:extLst>
           </p:cNvPr>
@@ -5017,7 +5172,7 @@
           <p:cNvPr id="23" name="">
             <a:extLst xmlns:a="http://schemas.openxmlformats.org/drawingml/2006/main">
               <a:ext uri="{FF2B5EF4-FFF2-40B4-BE49-F238E27FC236}">
-                <a16:creationId xmlns:a16="http://schemas.microsoft.com/office/drawing/2014/main" id="{86A1D3D5-1DF2-4214-ABE7-A6D012706B96}"/>
+                <a16:creationId xmlns:a16="http://schemas.microsoft.com/office/drawing/2014/main" id="{3AA620FC-AD39-4EDB-831C-8E3C8F5A0AA7}"/>
               </a:ext>
             </a:extLst>
           </p:cNvPr>
@@ -5050,7 +5205,7 @@
           <p:cNvPr id="24" name="">
             <a:extLst xmlns:a="http://schemas.openxmlformats.org/drawingml/2006/main">
               <a:ext uri="{FF2B5EF4-FFF2-40B4-BE49-F238E27FC236}">
-                <a16:creationId xmlns:a16="http://schemas.microsoft.com/office/drawing/2014/main" id="{0BFEB000-ABFA-48E1-9825-FF85F707400D}"/>
+                <a16:creationId xmlns:a16="http://schemas.microsoft.com/office/drawing/2014/main" id="{0E845741-2D61-45B2-9308-17925BDE918C}"/>
               </a:ext>
             </a:extLst>
           </p:cNvPr>
@@ -5081,7 +5236,7 @@
           <p:cNvPr id="25" name="">
             <a:extLst xmlns:a="http://schemas.openxmlformats.org/drawingml/2006/main">
               <a:ext uri="{FF2B5EF4-FFF2-40B4-BE49-F238E27FC236}">
-                <a16:creationId xmlns:a16="http://schemas.microsoft.com/office/drawing/2014/main" id="{2E760ED1-ED03-4C69-9ADA-ECA4FB1E44E4}"/>
+                <a16:creationId xmlns:a16="http://schemas.microsoft.com/office/drawing/2014/main" id="{3E27CD8C-6F44-492F-8983-6B6235D94836}"/>
               </a:ext>
             </a:extLst>
           </p:cNvPr>
@@ -5112,7 +5267,7 @@
           <p:cNvPr id="26" name="">
             <a:extLst xmlns:a="http://schemas.openxmlformats.org/drawingml/2006/main">
               <a:ext uri="{FF2B5EF4-FFF2-40B4-BE49-F238E27FC236}">
-                <a16:creationId xmlns:a16="http://schemas.microsoft.com/office/drawing/2014/main" id="{98F0AC3E-B315-420E-BAF8-4BB5227FE39C}"/>
+                <a16:creationId xmlns:a16="http://schemas.microsoft.com/office/drawing/2014/main" id="{97167CF9-E1FC-4EE7-87FD-E985D1778536}"/>
               </a:ext>
             </a:extLst>
           </p:cNvPr>
@@ -5143,7 +5298,7 @@
           <p:cNvPr id="27" name="">
             <a:extLst xmlns:a="http://schemas.openxmlformats.org/drawingml/2006/main">
               <a:ext uri="{FF2B5EF4-FFF2-40B4-BE49-F238E27FC236}">
-                <a16:creationId xmlns:a16="http://schemas.microsoft.com/office/drawing/2014/main" id="{942BF9BB-D6AC-4AAE-88D5-4059AF4F0E01}"/>
+                <a16:creationId xmlns:a16="http://schemas.microsoft.com/office/drawing/2014/main" id="{1EA325FA-FFC9-4842-8E7F-860CE65BB3A8}"/>
               </a:ext>
             </a:extLst>
           </p:cNvPr>
@@ -5174,7 +5329,7 @@
           <p:cNvPr id="28" name="">
             <a:extLst xmlns:a="http://schemas.openxmlformats.org/drawingml/2006/main">
               <a:ext uri="{FF2B5EF4-FFF2-40B4-BE49-F238E27FC236}">
-                <a16:creationId xmlns:a16="http://schemas.microsoft.com/office/drawing/2014/main" id="{8724FBE6-6724-49E2-9255-22695A983AAF}"/>
+                <a16:creationId xmlns:a16="http://schemas.microsoft.com/office/drawing/2014/main" id="{4671E096-38FB-4FB5-BDA2-2C2ECBFAEA3A}"/>
               </a:ext>
             </a:extLst>
           </p:cNvPr>
@@ -5277,7 +5432,7 @@
           <p:cNvPr id="29" name="">
             <a:extLst xmlns:a="http://schemas.openxmlformats.org/drawingml/2006/main">
               <a:ext uri="{FF2B5EF4-FFF2-40B4-BE49-F238E27FC236}">
-                <a16:creationId xmlns:a16="http://schemas.microsoft.com/office/drawing/2014/main" id="{36F8664B-1504-4CAE-A934-889133433F2E}"/>
+                <a16:creationId xmlns:a16="http://schemas.microsoft.com/office/drawing/2014/main" id="{EC95C5E2-9E18-443F-ACAE-21B403F20499}"/>
               </a:ext>
             </a:extLst>
           </p:cNvPr>
@@ -5334,7 +5489,7 @@
           <p:cNvPr id="30" name="">
             <a:extLst xmlns:a="http://schemas.openxmlformats.org/drawingml/2006/main">
               <a:ext uri="{FF2B5EF4-FFF2-40B4-BE49-F238E27FC236}">
-                <a16:creationId xmlns:a16="http://schemas.microsoft.com/office/drawing/2014/main" id="{D480F835-7494-4119-90F1-96F2338D04CB}"/>
+                <a16:creationId xmlns:a16="http://schemas.microsoft.com/office/drawing/2014/main" id="{F79AC079-6FE9-4889-83C0-C878943AD8BD}"/>
               </a:ext>
             </a:extLst>
           </p:cNvPr>
@@ -5391,7 +5546,7 @@
           <p:cNvPr id="31" name="">
             <a:extLst xmlns:a="http://schemas.openxmlformats.org/drawingml/2006/main">
               <a:ext uri="{FF2B5EF4-FFF2-40B4-BE49-F238E27FC236}">
-                <a16:creationId xmlns:a16="http://schemas.microsoft.com/office/drawing/2014/main" id="{D9675676-6382-4E00-AC02-26679A831612}"/>
+                <a16:creationId xmlns:a16="http://schemas.microsoft.com/office/drawing/2014/main" id="{2F372D8C-577A-4761-9CDD-167A80E14191}"/>
               </a:ext>
             </a:extLst>
           </p:cNvPr>
@@ -5448,7 +5603,7 @@
           <p:cNvPr id="32" name="">
             <a:extLst xmlns:a="http://schemas.openxmlformats.org/drawingml/2006/main">
               <a:ext uri="{FF2B5EF4-FFF2-40B4-BE49-F238E27FC236}">
-                <a16:creationId xmlns:a16="http://schemas.microsoft.com/office/drawing/2014/main" id="{D8E2236C-9829-4D58-B2B3-DB23F259A8B0}"/>
+                <a16:creationId xmlns:a16="http://schemas.microsoft.com/office/drawing/2014/main" id="{F9059EE7-89A0-4DE8-8B35-21CC09518A00}"/>
               </a:ext>
             </a:extLst>
           </p:cNvPr>
@@ -5505,7 +5660,7 @@
           <p:cNvPr id="33" name="">
             <a:extLst xmlns:a="http://schemas.openxmlformats.org/drawingml/2006/main">
               <a:ext uri="{FF2B5EF4-FFF2-40B4-BE49-F238E27FC236}">
-                <a16:creationId xmlns:a16="http://schemas.microsoft.com/office/drawing/2014/main" id="{A8573021-749B-4EAF-ADC2-67989AE990FB}"/>
+                <a16:creationId xmlns:a16="http://schemas.microsoft.com/office/drawing/2014/main" id="{2CC0F64C-5FFE-4314-BDD5-7C73B47410B3}"/>
               </a:ext>
             </a:extLst>
           </p:cNvPr>
@@ -5536,7 +5691,7 @@
           <p:cNvPr id="34" name="">
             <a:extLst xmlns:a="http://schemas.openxmlformats.org/drawingml/2006/main">
               <a:ext uri="{FF2B5EF4-FFF2-40B4-BE49-F238E27FC236}">
-                <a16:creationId xmlns:a16="http://schemas.microsoft.com/office/drawing/2014/main" id="{7F4E418B-0D77-4FCD-913C-98A98C804C01}"/>
+                <a16:creationId xmlns:a16="http://schemas.microsoft.com/office/drawing/2014/main" id="{D0B024B3-A50E-4DCD-947F-4F152C6B5263}"/>
               </a:ext>
             </a:extLst>
           </p:cNvPr>
@@ -5583,7 +5738,7 @@
                 <a:ea typeface="Arial"/>
                 <a:cs typeface="Arial"/>
               </a:rPr>
-              <a:t>ILLUSTRATIVE SAMPLE · n = 200</a:t>
+              <a:t>ILLUSTRATIVE INDEPENDENT SAMPLE · n = 200</a:t>
             </a:r>
           </a:p>
         </p:txBody>
@@ -5600,7 +5755,7 @@
         </p:xfrm>
         <a:graphic xmlns:a="http://schemas.openxmlformats.org/drawingml/2006/main">
           <a:graphicData uri="http://schemas.openxmlformats.org/drawingml/2006/chart">
-            <c:chart xmlns:r="http://schemas.openxmlformats.org/officeDocument/2006/relationships" xmlns:c="http://schemas.openxmlformats.org/drawingml/2006/chart" r:id="Rce23d6799efa44df"/>
+            <c:chart xmlns:r="http://schemas.openxmlformats.org/officeDocument/2006/relationships" xmlns:c="http://schemas.openxmlformats.org/drawingml/2006/chart" r:id="R24857f5f07c0432b"/>
           </a:graphicData>
         </a:graphic>
       </p:graphicFrame>
@@ -5609,7 +5764,7 @@
           <p:cNvPr id="36" name="">
             <a:extLst xmlns:a="http://schemas.openxmlformats.org/drawingml/2006/main">
               <a:ext uri="{FF2B5EF4-FFF2-40B4-BE49-F238E27FC236}">
-                <a16:creationId xmlns:a16="http://schemas.microsoft.com/office/drawing/2014/main" id="{70BF77D8-3981-44A6-99F3-68DC84127DD3}"/>
+                <a16:creationId xmlns:a16="http://schemas.microsoft.com/office/drawing/2014/main" id="{2C5EB51E-8CE3-40E3-834C-56AE6100B384}"/>
               </a:ext>
             </a:extLst>
           </p:cNvPr>
@@ -5640,7 +5795,7 @@
           <p:cNvPr id="37" name="">
             <a:extLst xmlns:a="http://schemas.openxmlformats.org/drawingml/2006/main">
               <a:ext uri="{FF2B5EF4-FFF2-40B4-BE49-F238E27FC236}">
-                <a16:creationId xmlns:a16="http://schemas.microsoft.com/office/drawing/2014/main" id="{D2430C64-BFF3-4CDC-AF61-9158B869501B}"/>
+                <a16:creationId xmlns:a16="http://schemas.microsoft.com/office/drawing/2014/main" id="{6BCF0936-2BF1-4E87-80B8-4D7B39CE6159}"/>
               </a:ext>
             </a:extLst>
           </p:cNvPr>
@@ -5697,7 +5852,7 @@
           <p:cNvPr id="38" name="">
             <a:extLst xmlns:a="http://schemas.openxmlformats.org/drawingml/2006/main">
               <a:ext uri="{FF2B5EF4-FFF2-40B4-BE49-F238E27FC236}">
-                <a16:creationId xmlns:a16="http://schemas.microsoft.com/office/drawing/2014/main" id="{945CD8CF-9A13-4367-A13B-BAE31647E4AD}"/>
+                <a16:creationId xmlns:a16="http://schemas.microsoft.com/office/drawing/2014/main" id="{0F1FF59D-75C6-4A07-B293-9FF1F924FD91}"/>
               </a:ext>
             </a:extLst>
           </p:cNvPr>
@@ -5754,7 +5909,7 @@
           <p:cNvPr id="39" name="">
             <a:extLst xmlns:a="http://schemas.openxmlformats.org/drawingml/2006/main">
               <a:ext uri="{FF2B5EF4-FFF2-40B4-BE49-F238E27FC236}">
-                <a16:creationId xmlns:a16="http://schemas.microsoft.com/office/drawing/2014/main" id="{2DFB4F79-FE5E-46BE-BDDF-09E8815B101E}"/>
+                <a16:creationId xmlns:a16="http://schemas.microsoft.com/office/drawing/2014/main" id="{60D04BD6-7645-448E-9016-9096D5FE1E71}"/>
               </a:ext>
             </a:extLst>
           </p:cNvPr>
@@ -5811,7 +5966,7 @@
           <p:cNvPr id="40" name="">
             <a:extLst xmlns:a="http://schemas.openxmlformats.org/drawingml/2006/main">
               <a:ext uri="{FF2B5EF4-FFF2-40B4-BE49-F238E27FC236}">
-                <a16:creationId xmlns:a16="http://schemas.microsoft.com/office/drawing/2014/main" id="{48FC214C-3600-494B-9906-1B0898EAD7F0}"/>
+                <a16:creationId xmlns:a16="http://schemas.microsoft.com/office/drawing/2014/main" id="{D459B4DE-E95B-4D09-BCB0-88B5C0556B8C}"/>
               </a:ext>
             </a:extLst>
           </p:cNvPr>
@@ -5868,7 +6023,7 @@
           <p:cNvPr id="41" name="">
             <a:extLst xmlns:a="http://schemas.openxmlformats.org/drawingml/2006/main">
               <a:ext uri="{FF2B5EF4-FFF2-40B4-BE49-F238E27FC236}">
-                <a16:creationId xmlns:a16="http://schemas.microsoft.com/office/drawing/2014/main" id="{04A12626-C915-452C-8A02-CCA43F37D1E4}"/>
+                <a16:creationId xmlns:a16="http://schemas.microsoft.com/office/drawing/2014/main" id="{72EE4776-D37E-432F-83D4-9A66B398C840}"/>
               </a:ext>
             </a:extLst>
           </p:cNvPr>
@@ -5925,7 +6080,7 @@
           <p:cNvPr id="42" name="">
             <a:extLst xmlns:a="http://schemas.openxmlformats.org/drawingml/2006/main">
               <a:ext uri="{FF2B5EF4-FFF2-40B4-BE49-F238E27FC236}">
-                <a16:creationId xmlns:a16="http://schemas.microsoft.com/office/drawing/2014/main" id="{A739B8AD-6A4A-45FE-A7D4-6F7D98412DB5}"/>
+                <a16:creationId xmlns:a16="http://schemas.microsoft.com/office/drawing/2014/main" id="{65277F8A-58C1-40BB-882E-AEA7A114E994}"/>
               </a:ext>
             </a:extLst>
           </p:cNvPr>
@@ -5982,7 +6137,7 @@
           <p:cNvPr id="43" name="">
             <a:extLst xmlns:a="http://schemas.openxmlformats.org/drawingml/2006/main">
               <a:ext uri="{FF2B5EF4-FFF2-40B4-BE49-F238E27FC236}">
-                <a16:creationId xmlns:a16="http://schemas.microsoft.com/office/drawing/2014/main" id="{ABBBABD4-6608-4CAC-9D58-F0529DAA7473}"/>
+                <a16:creationId xmlns:a16="http://schemas.microsoft.com/office/drawing/2014/main" id="{A7D7C992-C6D2-4594-A1C8-615ED51C016E}"/>
               </a:ext>
             </a:extLst>
           </p:cNvPr>
@@ -6029,7 +6184,7 @@
                 <a:ea typeface="Arial"/>
                 <a:cs typeface="Arial"/>
               </a:rPr>
-              <a:t>Golden Set: routine, edge and adversarial cases. Eval Gate: compare versions against agreed limits.</a:t>
+              <a:t>Golden Set probes scenarios; representative samples estimate rates. Eval Gates compare versions.</a:t>
             </a:r>
           </a:p>
         </p:txBody>
@@ -6039,7 +6194,7 @@
           <p:cNvPr id="44" name="">
             <a:extLst xmlns:a="http://schemas.openxmlformats.org/drawingml/2006/main">
               <a:ext uri="{FF2B5EF4-FFF2-40B4-BE49-F238E27FC236}">
-                <a16:creationId xmlns:a16="http://schemas.microsoft.com/office/drawing/2014/main" id="{DC56CED8-A54E-41C2-85F2-DA87709E1160}"/>
+                <a16:creationId xmlns:a16="http://schemas.microsoft.com/office/drawing/2014/main" id="{8715A9EA-0267-4C06-AF75-829A25DF394C}"/>
               </a:ext>
             </a:extLst>
           </p:cNvPr>
@@ -6086,7 +6241,7 @@
                 <a:ea typeface="Arial"/>
                 <a:cs typeface="Arial"/>
               </a:rPr>
-              <a:t>QA calibrates the evaluator with domain experts. Incidents become new regression cases.</a:t>
+              <a:t>QA + domain experts calibrate judgments. Production incidents become regression cases.</a:t>
             </a:r>
           </a:p>
         </p:txBody>
@@ -6096,7 +6251,7 @@
           <p:cNvPr id="45" name="">
             <a:extLst xmlns:a="http://schemas.openxmlformats.org/drawingml/2006/main">
               <a:ext uri="{FF2B5EF4-FFF2-40B4-BE49-F238E27FC236}">
-                <a16:creationId xmlns:a16="http://schemas.microsoft.com/office/drawing/2014/main" id="{2588282D-D40B-41BB-8BE2-B8DB2AB09B7F}"/>
+                <a16:creationId xmlns:a16="http://schemas.microsoft.com/office/drawing/2014/main" id="{30D7B2C4-1A8A-49F7-A81D-891C58363787}"/>
               </a:ext>
             </a:extLst>
           </p:cNvPr>
@@ -6125,25 +6280,25 @@
           <a:lstStyle xmlns:a="http://schemas.openxmlformats.org/drawingml/2006/main"/>
           <a:p xmlns:a="http://schemas.openxmlformats.org/drawingml/2006/main">
             <a:pPr algn="l">
-              <a:defRPr sz="1575" b="1">
-                <a:solidFill>
-                  <a:srgbClr val="F4F7FA"/>
-                </a:solidFill>
-                <a:latin typeface="Arial"/>
-                <a:ea typeface="Arial"/>
-                <a:cs typeface="Arial"/>
-              </a:defRPr>
-            </a:pPr>
-            <a:r>
-              <a:rPr sz="1575" b="1">
-                <a:solidFill>
-                  <a:srgbClr val="F4F7FA"/>
-                </a:solidFill>
-                <a:latin typeface="Arial"/>
-                <a:ea typeface="Arial"/>
-                <a:cs typeface="Arial"/>
-              </a:rPr>
-              <a:t>Product + BA agree limits. QA + Dev measure. Risk / release owner decides.</a:t>
+              <a:defRPr sz="1500" b="1">
+                <a:solidFill>
+                  <a:srgbClr val="F4F7FA"/>
+                </a:solidFill>
+                <a:latin typeface="Arial"/>
+                <a:ea typeface="Arial"/>
+                <a:cs typeface="Arial"/>
+              </a:defRPr>
+            </a:pPr>
+            <a:r>
+              <a:rPr sz="1500" b="1">
+                <a:solidFill>
+                  <a:srgbClr val="F4F7FA"/>
+                </a:solidFill>
+                <a:latin typeface="Arial"/>
+                <a:ea typeface="Arial"/>
+                <a:cs typeface="Arial"/>
+              </a:rPr>
+              <a:t>Product / PO + BA: limits · Project Manager: readiness · Authorized owner: release</a:t>
             </a:r>
           </a:p>
         </p:txBody>
@@ -6151,7 +6306,7 @@
     </p:spTree>
     <p:extLst>
       <p:ext uri="{BB962C8B-B14F-4D97-AF65-F5344CB8AC3E}">
-        <p14:creationId xmlns:p14="http://schemas.microsoft.com/office/powerpoint/2010/main" val="1623181057"/>
+        <p14:creationId xmlns:p14="http://schemas.microsoft.com/office/powerpoint/2010/main" val="2117778541"/>
       </p:ext>
     </p:extLst>
   </p:cSld>
@@ -6182,7 +6337,7 @@
           <p:cNvPr id="12" name="">
             <a:extLst xmlns:a="http://schemas.openxmlformats.org/drawingml/2006/main">
               <a:ext uri="{FF2B5EF4-FFF2-40B4-BE49-F238E27FC236}">
-                <a16:creationId xmlns:a16="http://schemas.microsoft.com/office/drawing/2014/main" id="{10F16F86-7505-4274-959C-24D107263156}"/>
+                <a16:creationId xmlns:a16="http://schemas.microsoft.com/office/drawing/2014/main" id="{BA42F13B-A2CE-41D2-BD85-3E14425573A3}"/>
               </a:ext>
             </a:extLst>
           </p:cNvPr>
@@ -6239,7 +6394,7 @@
           <p:cNvPr id="2" name="">
             <a:extLst xmlns:a="http://schemas.openxmlformats.org/drawingml/2006/main">
               <a:ext uri="{FF2B5EF4-FFF2-40B4-BE49-F238E27FC236}">
-                <a16:creationId xmlns:a16="http://schemas.microsoft.com/office/drawing/2014/main" id="{48883D4D-402F-48A6-8CD0-E3901C31069C}"/>
+                <a16:creationId xmlns:a16="http://schemas.microsoft.com/office/drawing/2014/main" id="{C472F373-80EC-430D-A558-32EA05D6B628}"/>
               </a:ext>
             </a:extLst>
           </p:cNvPr>
@@ -6270,7 +6425,7 @@
           <p:cNvPr id="3" name="">
             <a:extLst xmlns:a="http://schemas.openxmlformats.org/drawingml/2006/main">
               <a:ext uri="{FF2B5EF4-FFF2-40B4-BE49-F238E27FC236}">
-                <a16:creationId xmlns:a16="http://schemas.microsoft.com/office/drawing/2014/main" id="{68C7F26E-3233-4136-A7C9-A6F18C657771}"/>
+                <a16:creationId xmlns:a16="http://schemas.microsoft.com/office/drawing/2014/main" id="{208B1101-9F18-4C41-BE5D-ED913AF61A46}"/>
               </a:ext>
             </a:extLst>
           </p:cNvPr>
@@ -6327,7 +6482,7 @@
           <p:cNvPr id="4" name="">
             <a:extLst xmlns:a="http://schemas.openxmlformats.org/drawingml/2006/main">
               <a:ext uri="{FF2B5EF4-FFF2-40B4-BE49-F238E27FC236}">
-                <a16:creationId xmlns:a16="http://schemas.microsoft.com/office/drawing/2014/main" id="{9F83CFDC-0